--- a/presentation/Huntrix_Final_Presentation.pptx
+++ b/presentation/Huntrix_Final_Presentation.pptx
@@ -2,27 +2,27 @@
 <file path=ppt/presentation.xml><?xml version="1.0" encoding="utf-8"?>
 <p:presentation xmlns:p="http://schemas.openxmlformats.org/presentationml/2006/main">
   <p:sldMasterIdLst>
-    <p:sldMasterId xmlns:r="http://schemas.openxmlformats.org/officeDocument/2006/relationships" id="2147483648" r:id="R6b6ff65730f342bf"/>
+    <p:sldMasterId xmlns:r="http://schemas.openxmlformats.org/officeDocument/2006/relationships" id="2147483648" r:id="R67ceab9eb58646b3"/>
   </p:sldMasterIdLst>
   <p:notesMasterIdLst>
-    <p:notesMasterId xmlns:r="http://schemas.openxmlformats.org/officeDocument/2006/relationships" r:id="R57ad75208c704732"/>
+    <p:notesMasterId xmlns:r="http://schemas.openxmlformats.org/officeDocument/2006/relationships" r:id="Rb0da647f3fc14971"/>
   </p:notesMasterIdLst>
   <p:sldIdLst>
-    <p:sldId xmlns:r="http://schemas.openxmlformats.org/officeDocument/2006/relationships" id="256" r:id="R6a76667459894b27"/>
-    <p:sldId xmlns:r="http://schemas.openxmlformats.org/officeDocument/2006/relationships" id="257" r:id="R6141e9b68e824a10"/>
-    <p:sldId xmlns:r="http://schemas.openxmlformats.org/officeDocument/2006/relationships" id="258" r:id="Ra3319167e7844f34"/>
-    <p:sldId xmlns:r="http://schemas.openxmlformats.org/officeDocument/2006/relationships" id="259" r:id="R2d1211d625a24aed"/>
-    <p:sldId xmlns:r="http://schemas.openxmlformats.org/officeDocument/2006/relationships" id="260" r:id="R2091e6e7363c4b49"/>
-    <p:sldId xmlns:r="http://schemas.openxmlformats.org/officeDocument/2006/relationships" id="261" r:id="R1c2f7737ab314ea5"/>
-    <p:sldId xmlns:r="http://schemas.openxmlformats.org/officeDocument/2006/relationships" id="262" r:id="Rd0de256fbb6f4810"/>
-    <p:sldId xmlns:r="http://schemas.openxmlformats.org/officeDocument/2006/relationships" id="263" r:id="Reb19ec0f0e4b4bec"/>
-    <p:sldId xmlns:r="http://schemas.openxmlformats.org/officeDocument/2006/relationships" id="264" r:id="Re240d1a48f67418f"/>
-    <p:sldId xmlns:r="http://schemas.openxmlformats.org/officeDocument/2006/relationships" id="265" r:id="Raf8bb525e1e241ff"/>
-    <p:sldId xmlns:r="http://schemas.openxmlformats.org/officeDocument/2006/relationships" id="266" r:id="R8c1ab1570bd24b43"/>
-    <p:sldId xmlns:r="http://schemas.openxmlformats.org/officeDocument/2006/relationships" id="267" r:id="R6c364c9c39ed428f"/>
-    <p:sldId xmlns:r="http://schemas.openxmlformats.org/officeDocument/2006/relationships" id="268" r:id="R1ede7cb391104e3d"/>
-    <p:sldId xmlns:r="http://schemas.openxmlformats.org/officeDocument/2006/relationships" id="269" r:id="R1603c598aa964fbc"/>
-    <p:sldId xmlns:r="http://schemas.openxmlformats.org/officeDocument/2006/relationships" id="270" r:id="Rec7e59056b9a4beb"/>
+    <p:sldId xmlns:r="http://schemas.openxmlformats.org/officeDocument/2006/relationships" id="256" r:id="Rffa3e5328bad44b8"/>
+    <p:sldId xmlns:r="http://schemas.openxmlformats.org/officeDocument/2006/relationships" id="257" r:id="R6dd7584839aa418d"/>
+    <p:sldId xmlns:r="http://schemas.openxmlformats.org/officeDocument/2006/relationships" id="258" r:id="R1cc4fcb1b3354d12"/>
+    <p:sldId xmlns:r="http://schemas.openxmlformats.org/officeDocument/2006/relationships" id="259" r:id="Rf1164577e8f74f1e"/>
+    <p:sldId xmlns:r="http://schemas.openxmlformats.org/officeDocument/2006/relationships" id="260" r:id="R582ca49b10d841e8"/>
+    <p:sldId xmlns:r="http://schemas.openxmlformats.org/officeDocument/2006/relationships" id="261" r:id="Rdb40defc15e84f8d"/>
+    <p:sldId xmlns:r="http://schemas.openxmlformats.org/officeDocument/2006/relationships" id="262" r:id="Rf6a49ec0b11f4e70"/>
+    <p:sldId xmlns:r="http://schemas.openxmlformats.org/officeDocument/2006/relationships" id="263" r:id="R559bbac51ed649fb"/>
+    <p:sldId xmlns:r="http://schemas.openxmlformats.org/officeDocument/2006/relationships" id="264" r:id="R767b6402d7c14ce2"/>
+    <p:sldId xmlns:r="http://schemas.openxmlformats.org/officeDocument/2006/relationships" id="265" r:id="Rf9d0d642fd884b88"/>
+    <p:sldId xmlns:r="http://schemas.openxmlformats.org/officeDocument/2006/relationships" id="266" r:id="R92d13745927b40bb"/>
+    <p:sldId xmlns:r="http://schemas.openxmlformats.org/officeDocument/2006/relationships" id="267" r:id="R0b940a0f124f424d"/>
+    <p:sldId xmlns:r="http://schemas.openxmlformats.org/officeDocument/2006/relationships" id="268" r:id="Rac97388d8e2645d9"/>
+    <p:sldId xmlns:r="http://schemas.openxmlformats.org/officeDocument/2006/relationships" id="269" r:id="Rf05583dd8cb14fe0"/>
+    <p:sldId xmlns:r="http://schemas.openxmlformats.org/officeDocument/2006/relationships" id="270" r:id="Raf0bfd38b57e46e7"/>
   </p:sldIdLst>
   <p:sldSz cx="12192000" cy="6858000"/>
   <p:notesSz cx="6858000" cy="9144000"/>
@@ -976,7 +976,7 @@
           </a:p>
           <a:p xmlns:a="http://schemas.openxmlformats.org/drawingml/2006/main">
             <a:r>
-              <a:t>Target time: 55 seconds</a:t>
+              <a:t>Target time: 65 seconds</a:t>
             </a:r>
           </a:p>
           <a:p xmlns:a="http://schemas.openxmlformats.org/drawingml/2006/main">
@@ -991,7 +991,7 @@
           </a:p>
           <a:p xmlns:a="http://schemas.openxmlformats.org/drawingml/2006/main">
             <a:r>
-              <a:t>We ran the frozen notebook three times on Kaggle with two T4 GPUs. The complete 2,516-row runs took 440.87, 527.03, and 593.43 seconds. All three produced the same CSV bytes and the same SHA-256 hash as the scored submission. We reported 0.17 hours, or 612 seconds, as a conservative form value. A 5,000-row same-mix test took 14.60 minutes. We also estimated the pessimistic case where every row needs all three judge views. That stays around 5.2 to 5.5 hours, below the nine-hour limit.</a:t>
+              <a:t>The organizer-run Phase 2 notebook processed exactly 5,000 rows on two Tesla T4 GPUs. The router finished in 73.18 seconds but resolved only 207 rows, or 4.14 percent. The remaining 4,793 rows went to Qwen. The model was ready 171.25 seconds after the notebook started, and the judge stage took 13,747.50 seconds. End-to-end runtime was 13,921.91 seconds, which is 3 hours, 52 minutes, and 1.91 seconds. The output validation cell completed successfully with 5,000 ordered IDs and binary labels. This used 42.97 percent of the nine-hour budget. It is measured runtime evidence, not a Phase 2 accuracy score.</a:t>
             </a:r>
           </a:p>
           <a:p xmlns:a="http://schemas.openxmlformats.org/drawingml/2006/main">
@@ -1006,7 +1006,7 @@
           </a:p>
           <a:p xmlns:a="http://schemas.openxmlformats.org/drawingml/2006/main">
             <a:r>
-              <a:t>[7] Frozen Kaggle notebook runs, output SHA, and runtime manifest.</a:t>
+              <a:t>[8] Organizer-executed Phase 2 notebook huntrix-1.ipynb and its final runtime report.</a:t>
             </a:r>
           </a:p>
         </p:txBody>
@@ -1096,7 +1096,7 @@
           </a:p>
           <a:p xmlns:a="http://schemas.openxmlformats.org/drawingml/2006/main">
             <a:r>
-              <a:t>Phase 2 changes the source distribution. The organizer listed Common Crawl, recent newspapers, Wikipedia, Banglapedia, government service pages, Bangladesh law, NCTB textbooks, and literature. Exact Phase 1 lineage will naturally cover less. The router handles this by failing closed. It first tries context clauses, structured solvers, and exact entity-relation checks. If those checks fail, the row skips lineage and reaches the same fixed judge. Lower deterministic coverage will increase runtime, but it should not make approximate retrieval more powerful. Our all-uncertain timing gives us room for that shift. Accuracy is still the open question, which is why abstention remains important.</a:t>
+              <a:t>Phase 2 changed the source distribution as expected. The organizer listed Common Crawl, recent newspapers, Wikipedia, Banglapedia, government service pages, Bangladesh law, NCTB textbooks, and literature. Deterministic coverage fell from 93.72 percent in Phase 1 to 4.14 percent in the held-out run. The router did not compensate by forcing approximate evidence. It abstained, and 95.86 percent of rows reached the fixed judge. That raised runtime to 3 hours and 52 minutes, but the notebook still finished with more than five hours of headroom. Accuracy remains an open question until the organizer provides a score.</a:t>
             </a:r>
           </a:p>
           <a:p xmlns:a="http://schemas.openxmlformats.org/drawingml/2006/main">
@@ -1111,7 +1111,7 @@
           </a:p>
           <a:p xmlns:a="http://schemas.openxmlformats.org/drawingml/2006/main">
             <a:r>
-              <a:t>[2] Organizer Phase 2 source preview. [7] Held-out routing policy and runtime analysis.</a:t>
+              <a:t>[2] Organizer Phase 2 source preview. [8] Measured held-out routing and runtime report.</a:t>
             </a:r>
           </a:p>
         </p:txBody>
@@ -1201,7 +1201,7 @@
           </a:p>
           <a:p xmlns:a="http://schemas.openxmlformats.org/drawingml/2006/main">
             <a:r>
-              <a:t>We will close with three lessons. First, this benchmark is a mixture of tasks, and those tasks need different evidence standards. Second, a related passage is not enough. The entity and the requested relation must match. Third, selective judging made the system faster and steadier because the LLM handled only the unresolved tail. That combination produced a private score of 0.982, reproduced the scored CSV offline, and stayed within the Phase 2 runtime limit. We are ready for your questions.</a:t>
+              <a:t>We will close with three lessons. First, this benchmark is a mixture of tasks, and those tasks need different evidence standards. Second, a related passage is not enough. The entity and the requested relation must match. Third, the fixed judge preserved runtime compliance when Phase 2 source coverage fell sharply. The system produced a private Phase 1 score of 0.982, reproduced the scored CSV offline, and completed the actual 5,000-row Phase 2 run in 3 hours and 52 minutes. We are ready for your questions.</a:t>
             </a:r>
           </a:p>
           <a:p xmlns:a="http://schemas.openxmlformats.org/drawingml/2006/main">
@@ -1216,7 +1216,7 @@
           </a:p>
           <a:p xmlns:a="http://schemas.openxmlformats.org/drawingml/2006/main">
             <a:r>
-              <a:t>[7] Team Huntrix final system, leaderboard result, and reproducibility package.</a:t>
+              <a:t>[7] Team Huntrix final system and leaderboard result. [8] Measured Phase 2 runtime report.</a:t>
             </a:r>
           </a:p>
         </p:txBody>
@@ -2124,7 +2124,7 @@
   </p:cSld>
   <p:clrMap bg1="lt1" tx1="dk1" bg2="lt2" tx2="dk2" accent1="accent1" accent2="accent2" accent3="accent3" accent4="accent4" accent5="accent5" accent6="accent6" hlink="hlink" folHlink="folHlink"/>
   <p:sldLayoutIdLst>
-    <p:sldLayoutId xmlns:r="http://schemas.openxmlformats.org/officeDocument/2006/relationships" id="2147483649" r:id="Rf585bd0419fa466b"/>
+    <p:sldLayoutId xmlns:r="http://schemas.openxmlformats.org/officeDocument/2006/relationships" id="2147483649" r:id="R9be881fedcdb4c05"/>
   </p:sldLayoutIdLst>
   <p:txStyles>
     <p:titleStyle>
@@ -2886,7 +2886,7 @@
           <p:cNvPr id="16" name="">
             <a:extLst xmlns:a="http://schemas.openxmlformats.org/drawingml/2006/main">
               <a:ext uri="{FF2B5EF4-FFF2-40B4-BE49-F238E27FC236}">
-                <a16:creationId xmlns:a16="http://schemas.microsoft.com/office/drawing/2014/main" id="{C30D1F82-C532-4179-8C6E-8946A379EB62}"/>
+                <a16:creationId xmlns:a16="http://schemas.microsoft.com/office/drawing/2014/main" id="{231B2878-CB7A-47BB-8229-2772A7C7FE7D}"/>
               </a:ext>
             </a:extLst>
           </p:cNvPr>
@@ -2919,7 +2919,7 @@
           <p:cNvPr id="2" name="">
             <a:extLst xmlns:a="http://schemas.openxmlformats.org/drawingml/2006/main">
               <a:ext uri="{FF2B5EF4-FFF2-40B4-BE49-F238E27FC236}">
-                <a16:creationId xmlns:a16="http://schemas.microsoft.com/office/drawing/2014/main" id="{FAA1683F-3908-4323-80C5-D88DF666007A}"/>
+                <a16:creationId xmlns:a16="http://schemas.microsoft.com/office/drawing/2014/main" id="{494F12CA-6AA6-4B11-AA9B-C916E6F36796}"/>
               </a:ext>
             </a:extLst>
           </p:cNvPr>
@@ -2969,7 +2969,7 @@
           <p:cNvPr id="3" name="">
             <a:extLst xmlns:a="http://schemas.openxmlformats.org/drawingml/2006/main">
               <a:ext uri="{FF2B5EF4-FFF2-40B4-BE49-F238E27FC236}">
-                <a16:creationId xmlns:a16="http://schemas.microsoft.com/office/drawing/2014/main" id="{3066FCFF-8E98-43F5-9BA0-33F6CCC9A4CB}"/>
+                <a16:creationId xmlns:a16="http://schemas.microsoft.com/office/drawing/2014/main" id="{33EBB9E3-BC7A-4913-83D6-3B1EFB75FE37}"/>
               </a:ext>
             </a:extLst>
           </p:cNvPr>
@@ -3036,7 +3036,7 @@
           <p:cNvPr id="4" name="">
             <a:extLst xmlns:a="http://schemas.openxmlformats.org/drawingml/2006/main">
               <a:ext uri="{FF2B5EF4-FFF2-40B4-BE49-F238E27FC236}">
-                <a16:creationId xmlns:a16="http://schemas.microsoft.com/office/drawing/2014/main" id="{4AA47C31-23D0-41B1-89CE-B42E6E87BFC7}"/>
+                <a16:creationId xmlns:a16="http://schemas.microsoft.com/office/drawing/2014/main" id="{4AE13203-D4FA-4FC0-95A0-D887429E803D}"/>
               </a:ext>
             </a:extLst>
           </p:cNvPr>
@@ -3086,7 +3086,7 @@
           <p:cNvPr id="5" name="">
             <a:extLst xmlns:a="http://schemas.openxmlformats.org/drawingml/2006/main">
               <a:ext uri="{FF2B5EF4-FFF2-40B4-BE49-F238E27FC236}">
-                <a16:creationId xmlns:a16="http://schemas.microsoft.com/office/drawing/2014/main" id="{534BCF77-C69F-4794-A55F-C3A86CDACF58}"/>
+                <a16:creationId xmlns:a16="http://schemas.microsoft.com/office/drawing/2014/main" id="{99926CF7-A36C-48A3-9EAB-61F4ED8AAF16}"/>
               </a:ext>
             </a:extLst>
           </p:cNvPr>
@@ -3117,7 +3117,7 @@
           <p:cNvPr id="6" name="">
             <a:extLst xmlns:a="http://schemas.openxmlformats.org/drawingml/2006/main">
               <a:ext uri="{FF2B5EF4-FFF2-40B4-BE49-F238E27FC236}">
-                <a16:creationId xmlns:a16="http://schemas.microsoft.com/office/drawing/2014/main" id="{9E84A24D-C124-4CC7-A3BC-1C389E1BFA7B}"/>
+                <a16:creationId xmlns:a16="http://schemas.microsoft.com/office/drawing/2014/main" id="{8EC6EBD1-857E-4F5D-9D54-64E806E12DE3}"/>
               </a:ext>
             </a:extLst>
           </p:cNvPr>
@@ -3167,7 +3167,7 @@
           <p:cNvPr id="7" name="">
             <a:extLst xmlns:a="http://schemas.openxmlformats.org/drawingml/2006/main">
               <a:ext uri="{FF2B5EF4-FFF2-40B4-BE49-F238E27FC236}">
-                <a16:creationId xmlns:a16="http://schemas.microsoft.com/office/drawing/2014/main" id="{7C527BAE-F006-4690-9536-0C471F53B67F}"/>
+                <a16:creationId xmlns:a16="http://schemas.microsoft.com/office/drawing/2014/main" id="{B679E94D-0AB1-4063-8097-5A3E8EC7EDAC}"/>
               </a:ext>
             </a:extLst>
           </p:cNvPr>
@@ -3217,7 +3217,7 @@
           <p:cNvPr id="8" name="">
             <a:extLst xmlns:a="http://schemas.openxmlformats.org/drawingml/2006/main">
               <a:ext uri="{FF2B5EF4-FFF2-40B4-BE49-F238E27FC236}">
-                <a16:creationId xmlns:a16="http://schemas.microsoft.com/office/drawing/2014/main" id="{9B83DF07-3C97-425E-98EF-6C57CCA3A4CC}"/>
+                <a16:creationId xmlns:a16="http://schemas.microsoft.com/office/drawing/2014/main" id="{0B3E0B45-DE1F-46BF-BBC5-FB423A6FFE1D}"/>
               </a:ext>
             </a:extLst>
           </p:cNvPr>
@@ -3267,7 +3267,7 @@
           <p:cNvPr id="9" name="">
             <a:extLst xmlns:a="http://schemas.openxmlformats.org/drawingml/2006/main">
               <a:ext uri="{FF2B5EF4-FFF2-40B4-BE49-F238E27FC236}">
-                <a16:creationId xmlns:a16="http://schemas.microsoft.com/office/drawing/2014/main" id="{360DDAC2-7DAD-47E5-AE7A-ADDA1704E09F}"/>
+                <a16:creationId xmlns:a16="http://schemas.microsoft.com/office/drawing/2014/main" id="{9B3707A5-75BB-4271-B2F2-BACDF0A7D154}"/>
               </a:ext>
             </a:extLst>
           </p:cNvPr>
@@ -3317,7 +3317,7 @@
           <p:cNvPr id="10" name="">
             <a:extLst xmlns:a="http://schemas.openxmlformats.org/drawingml/2006/main">
               <a:ext uri="{FF2B5EF4-FFF2-40B4-BE49-F238E27FC236}">
-                <a16:creationId xmlns:a16="http://schemas.microsoft.com/office/drawing/2014/main" id="{F22D24B4-634B-4AB1-8504-2EA1EAC7AC65}"/>
+                <a16:creationId xmlns:a16="http://schemas.microsoft.com/office/drawing/2014/main" id="{3996A340-66A7-4072-8539-D97421F7194E}"/>
               </a:ext>
             </a:extLst>
           </p:cNvPr>
@@ -3367,7 +3367,7 @@
           <p:cNvPr id="11" name="">
             <a:extLst xmlns:a="http://schemas.openxmlformats.org/drawingml/2006/main">
               <a:ext uri="{FF2B5EF4-FFF2-40B4-BE49-F238E27FC236}">
-                <a16:creationId xmlns:a16="http://schemas.microsoft.com/office/drawing/2014/main" id="{FA74559B-0B82-42AF-975C-1CAF28E16E3D}"/>
+                <a16:creationId xmlns:a16="http://schemas.microsoft.com/office/drawing/2014/main" id="{DAF236B5-F926-4DC9-AE8D-BD82D8F9632F}"/>
               </a:ext>
             </a:extLst>
           </p:cNvPr>
@@ -3417,7 +3417,7 @@
           <p:cNvPr id="12" name="">
             <a:extLst xmlns:a="http://schemas.openxmlformats.org/drawingml/2006/main">
               <a:ext uri="{FF2B5EF4-FFF2-40B4-BE49-F238E27FC236}">
-                <a16:creationId xmlns:a16="http://schemas.microsoft.com/office/drawing/2014/main" id="{31901245-2C0A-40ED-B29F-2B6B4B3BEEB5}"/>
+                <a16:creationId xmlns:a16="http://schemas.microsoft.com/office/drawing/2014/main" id="{E0A0D9EC-EA97-4064-BE2A-C130BA2EAE9A}"/>
               </a:ext>
             </a:extLst>
           </p:cNvPr>
@@ -3467,7 +3467,7 @@
           <p:cNvPr id="13" name="">
             <a:extLst xmlns:a="http://schemas.openxmlformats.org/drawingml/2006/main">
               <a:ext uri="{FF2B5EF4-FFF2-40B4-BE49-F238E27FC236}">
-                <a16:creationId xmlns:a16="http://schemas.microsoft.com/office/drawing/2014/main" id="{17E7DFFF-1274-48A2-84D7-706341F8DBB5}"/>
+                <a16:creationId xmlns:a16="http://schemas.microsoft.com/office/drawing/2014/main" id="{2BF0D3B1-A067-4131-AE03-ADFA8E58FB26}"/>
               </a:ext>
             </a:extLst>
           </p:cNvPr>
@@ -3517,7 +3517,7 @@
           <p:cNvPr id="14" name="">
             <a:extLst xmlns:a="http://schemas.openxmlformats.org/drawingml/2006/main">
               <a:ext uri="{FF2B5EF4-FFF2-40B4-BE49-F238E27FC236}">
-                <a16:creationId xmlns:a16="http://schemas.microsoft.com/office/drawing/2014/main" id="{7D1DF9A9-E4D1-4C8D-99D3-3A484FA96CB7}"/>
+                <a16:creationId xmlns:a16="http://schemas.microsoft.com/office/drawing/2014/main" id="{BCFDE224-189D-41F0-8604-10D11C85BDCE}"/>
               </a:ext>
             </a:extLst>
           </p:cNvPr>
@@ -3567,7 +3567,7 @@
           <p:cNvPr id="15" name="">
             <a:extLst xmlns:a="http://schemas.openxmlformats.org/drawingml/2006/main">
               <a:ext uri="{FF2B5EF4-FFF2-40B4-BE49-F238E27FC236}">
-                <a16:creationId xmlns:a16="http://schemas.microsoft.com/office/drawing/2014/main" id="{A3B77FB2-5027-49A7-B531-5C3AC934171A}"/>
+                <a16:creationId xmlns:a16="http://schemas.microsoft.com/office/drawing/2014/main" id="{52007A54-EB1F-4CF6-A56D-D88910109157}"/>
               </a:ext>
             </a:extLst>
           </p:cNvPr>
@@ -3615,7 +3615,7 @@
     </p:spTree>
     <p:extLst>
       <p:ext uri="{BB962C8B-B14F-4D97-AF65-F5344CB8AC3E}">
-        <p14:creationId xmlns:p14="http://schemas.microsoft.com/office/powerpoint/2010/main" val="1037285134"/>
+        <p14:creationId xmlns:p14="http://schemas.microsoft.com/office/powerpoint/2010/main" val="2078868414"/>
       </p:ext>
     </p:extLst>
   </p:cSld>
@@ -3646,7 +3646,7 @@
           <p:cNvPr id="17" name="kicker-10">
             <a:extLst xmlns:a="http://schemas.openxmlformats.org/drawingml/2006/main">
               <a:ext uri="{FF2B5EF4-FFF2-40B4-BE49-F238E27FC236}">
-                <a16:creationId xmlns:a16="http://schemas.microsoft.com/office/drawing/2014/main" id="{1249406B-5BF0-4A9B-9981-59963381BA21}"/>
+                <a16:creationId xmlns:a16="http://schemas.microsoft.com/office/drawing/2014/main" id="{9A1A2E87-DEF8-4D4F-87C5-596A979BB991}"/>
               </a:ext>
             </a:extLst>
           </p:cNvPr>
@@ -3696,7 +3696,7 @@
           <p:cNvPr id="2" name="title-10">
             <a:extLst xmlns:a="http://schemas.openxmlformats.org/drawingml/2006/main">
               <a:ext uri="{FF2B5EF4-FFF2-40B4-BE49-F238E27FC236}">
-                <a16:creationId xmlns:a16="http://schemas.microsoft.com/office/drawing/2014/main" id="{CFE9EAA8-36F2-4946-BCE8-11E457B63887}"/>
+                <a16:creationId xmlns:a16="http://schemas.microsoft.com/office/drawing/2014/main" id="{4D2B8A9B-51DC-45D7-96F7-2136871429A9}"/>
               </a:ext>
             </a:extLst>
           </p:cNvPr>
@@ -3746,7 +3746,7 @@
           <p:cNvPr id="3" name="">
             <a:extLst xmlns:a="http://schemas.openxmlformats.org/drawingml/2006/main">
               <a:ext uri="{FF2B5EF4-FFF2-40B4-BE49-F238E27FC236}">
-                <a16:creationId xmlns:a16="http://schemas.microsoft.com/office/drawing/2014/main" id="{88C3F5A5-80B7-4601-B9D9-5131FDDF5DE6}"/>
+                <a16:creationId xmlns:a16="http://schemas.microsoft.com/office/drawing/2014/main" id="{04F61AC0-DE91-4267-9D11-56DA2DA0C1FA}"/>
               </a:ext>
             </a:extLst>
           </p:cNvPr>
@@ -3777,7 +3777,7 @@
           <p:cNvPr id="4" name="">
             <a:extLst xmlns:a="http://schemas.openxmlformats.org/drawingml/2006/main">
               <a:ext uri="{FF2B5EF4-FFF2-40B4-BE49-F238E27FC236}">
-                <a16:creationId xmlns:a16="http://schemas.microsoft.com/office/drawing/2014/main" id="{38633797-9318-48D3-887B-6A354D673C40}"/>
+                <a16:creationId xmlns:a16="http://schemas.microsoft.com/office/drawing/2014/main" id="{58E7409B-47AB-4779-8524-2D2A8F3BC414}"/>
               </a:ext>
             </a:extLst>
           </p:cNvPr>
@@ -3834,7 +3834,7 @@
         </p:xfrm>
         <a:graphic xmlns:a="http://schemas.openxmlformats.org/drawingml/2006/main">
           <a:graphicData uri="http://schemas.openxmlformats.org/drawingml/2006/chart">
-            <c:chart xmlns:r="http://schemas.openxmlformats.org/officeDocument/2006/relationships" xmlns:c="http://schemas.openxmlformats.org/drawingml/2006/chart" r:id="R55cc168817414a4a"/>
+            <c:chart xmlns:r="http://schemas.openxmlformats.org/officeDocument/2006/relationships" xmlns:c="http://schemas.openxmlformats.org/drawingml/2006/chart" r:id="R2e747c0e85f74323"/>
           </a:graphicData>
         </a:graphic>
       </p:graphicFrame>
@@ -3843,7 +3843,7 @@
           <p:cNvPr id="6" name="">
             <a:extLst xmlns:a="http://schemas.openxmlformats.org/drawingml/2006/main">
               <a:ext uri="{FF2B5EF4-FFF2-40B4-BE49-F238E27FC236}">
-                <a16:creationId xmlns:a16="http://schemas.microsoft.com/office/drawing/2014/main" id="{AB9B9E3D-1F24-4136-9357-FA5FC64FC3E4}"/>
+                <a16:creationId xmlns:a16="http://schemas.microsoft.com/office/drawing/2014/main" id="{CEDEAA08-8F8B-4917-A7C6-4C71C344A77F}"/>
               </a:ext>
             </a:extLst>
           </p:cNvPr>
@@ -3878,7 +3878,7 @@
           <p:cNvPr id="7" name="">
             <a:extLst xmlns:a="http://schemas.openxmlformats.org/drawingml/2006/main">
               <a:ext uri="{FF2B5EF4-FFF2-40B4-BE49-F238E27FC236}">
-                <a16:creationId xmlns:a16="http://schemas.microsoft.com/office/drawing/2014/main" id="{9DD8E24A-0C66-4556-A1D3-A8D0A4DF2A13}"/>
+                <a16:creationId xmlns:a16="http://schemas.microsoft.com/office/drawing/2014/main" id="{B007CC7F-FF1D-4452-BC59-17FD528B26B3}"/>
               </a:ext>
             </a:extLst>
           </p:cNvPr>
@@ -3928,7 +3928,7 @@
           <p:cNvPr id="8" name="">
             <a:extLst xmlns:a="http://schemas.openxmlformats.org/drawingml/2006/main">
               <a:ext uri="{FF2B5EF4-FFF2-40B4-BE49-F238E27FC236}">
-                <a16:creationId xmlns:a16="http://schemas.microsoft.com/office/drawing/2014/main" id="{3376B028-9763-4771-BD94-71C447192F54}"/>
+                <a16:creationId xmlns:a16="http://schemas.microsoft.com/office/drawing/2014/main" id="{0AD07A45-CCD6-4B02-B18B-9902258EBFBF}"/>
               </a:ext>
             </a:extLst>
           </p:cNvPr>
@@ -3978,7 +3978,7 @@
           <p:cNvPr id="9" name="">
             <a:extLst xmlns:a="http://schemas.openxmlformats.org/drawingml/2006/main">
               <a:ext uri="{FF2B5EF4-FFF2-40B4-BE49-F238E27FC236}">
-                <a16:creationId xmlns:a16="http://schemas.microsoft.com/office/drawing/2014/main" id="{A57AAAAD-19BC-4B86-8F44-648348088C98}"/>
+                <a16:creationId xmlns:a16="http://schemas.microsoft.com/office/drawing/2014/main" id="{CAFB6B28-97D4-4CDD-B10E-9A34C67FE03D}"/>
               </a:ext>
             </a:extLst>
           </p:cNvPr>
@@ -4028,7 +4028,7 @@
           <p:cNvPr id="10" name="">
             <a:extLst xmlns:a="http://schemas.openxmlformats.org/drawingml/2006/main">
               <a:ext uri="{FF2B5EF4-FFF2-40B4-BE49-F238E27FC236}">
-                <a16:creationId xmlns:a16="http://schemas.microsoft.com/office/drawing/2014/main" id="{8CAB4385-CB4E-4F70-8218-3C80B93A97AA}"/>
+                <a16:creationId xmlns:a16="http://schemas.microsoft.com/office/drawing/2014/main" id="{4DC8F7CF-D287-4096-9881-FD1953F38607}"/>
               </a:ext>
             </a:extLst>
           </p:cNvPr>
@@ -4063,7 +4063,7 @@
           <p:cNvPr id="11" name="">
             <a:extLst xmlns:a="http://schemas.openxmlformats.org/drawingml/2006/main">
               <a:ext uri="{FF2B5EF4-FFF2-40B4-BE49-F238E27FC236}">
-                <a16:creationId xmlns:a16="http://schemas.microsoft.com/office/drawing/2014/main" id="{00C686F7-C3F0-45D1-9E95-64BA6DB25808}"/>
+                <a16:creationId xmlns:a16="http://schemas.microsoft.com/office/drawing/2014/main" id="{85CC3A8B-ED55-405B-B6C3-6BE64AAA3816}"/>
               </a:ext>
             </a:extLst>
           </p:cNvPr>
@@ -4113,7 +4113,7 @@
           <p:cNvPr id="12" name="">
             <a:extLst xmlns:a="http://schemas.openxmlformats.org/drawingml/2006/main">
               <a:ext uri="{FF2B5EF4-FFF2-40B4-BE49-F238E27FC236}">
-                <a16:creationId xmlns:a16="http://schemas.microsoft.com/office/drawing/2014/main" id="{1DB7E093-78FA-4C96-887E-2C3368980688}"/>
+                <a16:creationId xmlns:a16="http://schemas.microsoft.com/office/drawing/2014/main" id="{30310BA1-21EF-4231-B404-F970B02445FA}"/>
               </a:ext>
             </a:extLst>
           </p:cNvPr>
@@ -4163,7 +4163,7 @@
           <p:cNvPr id="13" name="">
             <a:extLst xmlns:a="http://schemas.openxmlformats.org/drawingml/2006/main">
               <a:ext uri="{FF2B5EF4-FFF2-40B4-BE49-F238E27FC236}">
-                <a16:creationId xmlns:a16="http://schemas.microsoft.com/office/drawing/2014/main" id="{7E499265-2B8A-4BBF-9733-BA6879B0FED3}"/>
+                <a16:creationId xmlns:a16="http://schemas.microsoft.com/office/drawing/2014/main" id="{6B6B3C70-0294-4582-B8E8-D6CBA951DB36}"/>
               </a:ext>
             </a:extLst>
           </p:cNvPr>
@@ -4213,7 +4213,7 @@
           <p:cNvPr id="14" name="">
             <a:extLst xmlns:a="http://schemas.openxmlformats.org/drawingml/2006/main">
               <a:ext uri="{FF2B5EF4-FFF2-40B4-BE49-F238E27FC236}">
-                <a16:creationId xmlns:a16="http://schemas.microsoft.com/office/drawing/2014/main" id="{A895C53A-3609-4B0A-B2A7-748CF7FB126A}"/>
+                <a16:creationId xmlns:a16="http://schemas.microsoft.com/office/drawing/2014/main" id="{4DCC67D0-4781-4414-AAE7-4C493E914589}"/>
               </a:ext>
             </a:extLst>
           </p:cNvPr>
@@ -4244,7 +4244,7 @@
           <p:cNvPr id="15" name="source-10">
             <a:extLst xmlns:a="http://schemas.openxmlformats.org/drawingml/2006/main">
               <a:ext uri="{FF2B5EF4-FFF2-40B4-BE49-F238E27FC236}">
-                <a16:creationId xmlns:a16="http://schemas.microsoft.com/office/drawing/2014/main" id="{1A3EBA71-39F4-4DE7-A76E-365E48B5504F}"/>
+                <a16:creationId xmlns:a16="http://schemas.microsoft.com/office/drawing/2014/main" id="{006B6989-9352-447E-84ED-6B5CBD65A613}"/>
               </a:ext>
             </a:extLst>
           </p:cNvPr>
@@ -4294,7 +4294,7 @@
           <p:cNvPr id="16" name="page-10">
             <a:extLst xmlns:a="http://schemas.openxmlformats.org/drawingml/2006/main">
               <a:ext uri="{FF2B5EF4-FFF2-40B4-BE49-F238E27FC236}">
-                <a16:creationId xmlns:a16="http://schemas.microsoft.com/office/drawing/2014/main" id="{A2251DCC-A722-49EC-B448-DE1034F64E62}"/>
+                <a16:creationId xmlns:a16="http://schemas.microsoft.com/office/drawing/2014/main" id="{DE038625-4DE7-4830-88F1-600AA4474986}"/>
               </a:ext>
             </a:extLst>
           </p:cNvPr>
@@ -4342,7 +4342,7 @@
     </p:spTree>
     <p:extLst>
       <p:ext uri="{BB962C8B-B14F-4D97-AF65-F5344CB8AC3E}">
-        <p14:creationId xmlns:p14="http://schemas.microsoft.com/office/powerpoint/2010/main" val="729745645"/>
+        <p14:creationId xmlns:p14="http://schemas.microsoft.com/office/powerpoint/2010/main" val="422663195"/>
       </p:ext>
     </p:extLst>
   </p:cSld>
@@ -4373,7 +4373,7 @@
           <p:cNvPr id="29" name="kicker-11">
             <a:extLst xmlns:a="http://schemas.openxmlformats.org/drawingml/2006/main">
               <a:ext uri="{FF2B5EF4-FFF2-40B4-BE49-F238E27FC236}">
-                <a16:creationId xmlns:a16="http://schemas.microsoft.com/office/drawing/2014/main" id="{5546DF2F-1A9A-4005-8707-8B4833E646F2}"/>
+                <a16:creationId xmlns:a16="http://schemas.microsoft.com/office/drawing/2014/main" id="{62CB465F-CDD7-4D6D-B6C0-3DD01760E2CD}"/>
               </a:ext>
             </a:extLst>
           </p:cNvPr>
@@ -4423,7 +4423,7 @@
           <p:cNvPr id="2" name="title-11">
             <a:extLst xmlns:a="http://schemas.openxmlformats.org/drawingml/2006/main">
               <a:ext uri="{FF2B5EF4-FFF2-40B4-BE49-F238E27FC236}">
-                <a16:creationId xmlns:a16="http://schemas.microsoft.com/office/drawing/2014/main" id="{BC14874D-BF6C-4830-A660-0C9C3CB9AE99}"/>
+                <a16:creationId xmlns:a16="http://schemas.microsoft.com/office/drawing/2014/main" id="{016FF1D0-06DB-4C8D-94FE-38B3C07BDCE0}"/>
               </a:ext>
             </a:extLst>
           </p:cNvPr>
@@ -4473,7 +4473,7 @@
           <p:cNvPr id="3" name="">
             <a:extLst xmlns:a="http://schemas.openxmlformats.org/drawingml/2006/main">
               <a:ext uri="{FF2B5EF4-FFF2-40B4-BE49-F238E27FC236}">
-                <a16:creationId xmlns:a16="http://schemas.microsoft.com/office/drawing/2014/main" id="{3269B6E1-3103-47AE-B8B5-AC9D667297C3}"/>
+                <a16:creationId xmlns:a16="http://schemas.microsoft.com/office/drawing/2014/main" id="{326BD5E4-23EE-4A10-97C2-4661332C2DDF}"/>
               </a:ext>
             </a:extLst>
           </p:cNvPr>
@@ -4504,7 +4504,7 @@
           <p:cNvPr id="4" name="">
             <a:extLst xmlns:a="http://schemas.openxmlformats.org/drawingml/2006/main">
               <a:ext uri="{FF2B5EF4-FFF2-40B4-BE49-F238E27FC236}">
-                <a16:creationId xmlns:a16="http://schemas.microsoft.com/office/drawing/2014/main" id="{41CCD470-CF47-4878-B9F0-426C309FF128}"/>
+                <a16:creationId xmlns:a16="http://schemas.microsoft.com/office/drawing/2014/main" id="{E06CC1DD-329C-4A15-9E2F-F852194BF933}"/>
               </a:ext>
             </a:extLst>
           </p:cNvPr>
@@ -4554,7 +4554,7 @@
           <p:cNvPr id="5" name="">
             <a:extLst xmlns:a="http://schemas.openxmlformats.org/drawingml/2006/main">
               <a:ext uri="{FF2B5EF4-FFF2-40B4-BE49-F238E27FC236}">
-                <a16:creationId xmlns:a16="http://schemas.microsoft.com/office/drawing/2014/main" id="{B99CEA05-A0F5-4073-A00E-DC38359B0613}"/>
+                <a16:creationId xmlns:a16="http://schemas.microsoft.com/office/drawing/2014/main" id="{1C64AF65-4825-48EA-BC9B-4A270D35BE97}"/>
               </a:ext>
             </a:extLst>
           </p:cNvPr>
@@ -4604,7 +4604,7 @@
           <p:cNvPr id="6" name="">
             <a:extLst xmlns:a="http://schemas.openxmlformats.org/drawingml/2006/main">
               <a:ext uri="{FF2B5EF4-FFF2-40B4-BE49-F238E27FC236}">
-                <a16:creationId xmlns:a16="http://schemas.microsoft.com/office/drawing/2014/main" id="{1C7E1044-DA8E-4424-84C6-E616891380C6}"/>
+                <a16:creationId xmlns:a16="http://schemas.microsoft.com/office/drawing/2014/main" id="{AA4544AD-B165-4427-95ED-8F6E47F8BB18}"/>
               </a:ext>
             </a:extLst>
           </p:cNvPr>
@@ -4654,7 +4654,7 @@
           <p:cNvPr id="7" name="">
             <a:extLst xmlns:a="http://schemas.openxmlformats.org/drawingml/2006/main">
               <a:ext uri="{FF2B5EF4-FFF2-40B4-BE49-F238E27FC236}">
-                <a16:creationId xmlns:a16="http://schemas.microsoft.com/office/drawing/2014/main" id="{8B46E8D5-DC8A-497D-BCBB-2D6EC630341C}"/>
+                <a16:creationId xmlns:a16="http://schemas.microsoft.com/office/drawing/2014/main" id="{1755CF98-3684-44D5-B443-90846303C61E}"/>
               </a:ext>
             </a:extLst>
           </p:cNvPr>
@@ -4704,7 +4704,7 @@
           <p:cNvPr id="8" name="">
             <a:extLst xmlns:a="http://schemas.openxmlformats.org/drawingml/2006/main">
               <a:ext uri="{FF2B5EF4-FFF2-40B4-BE49-F238E27FC236}">
-                <a16:creationId xmlns:a16="http://schemas.microsoft.com/office/drawing/2014/main" id="{7C6C6BF9-CFA2-4165-B39D-709FF4ADE776}"/>
+                <a16:creationId xmlns:a16="http://schemas.microsoft.com/office/drawing/2014/main" id="{6AF28E53-09D0-464D-AB3D-324EBD2DF611}"/>
               </a:ext>
             </a:extLst>
           </p:cNvPr>
@@ -4735,7 +4735,7 @@
           <p:cNvPr id="9" name="">
             <a:extLst xmlns:a="http://schemas.openxmlformats.org/drawingml/2006/main">
               <a:ext uri="{FF2B5EF4-FFF2-40B4-BE49-F238E27FC236}">
-                <a16:creationId xmlns:a16="http://schemas.microsoft.com/office/drawing/2014/main" id="{F9F8EF04-82AD-47BF-9950-808181378B18}"/>
+                <a16:creationId xmlns:a16="http://schemas.microsoft.com/office/drawing/2014/main" id="{0C57BD4E-D93A-43B0-8852-4D26CCACA43B}"/>
               </a:ext>
             </a:extLst>
           </p:cNvPr>
@@ -4785,7 +4785,7 @@
           <p:cNvPr id="10" name="">
             <a:extLst xmlns:a="http://schemas.openxmlformats.org/drawingml/2006/main">
               <a:ext uri="{FF2B5EF4-FFF2-40B4-BE49-F238E27FC236}">
-                <a16:creationId xmlns:a16="http://schemas.microsoft.com/office/drawing/2014/main" id="{98D0CF2B-1757-4832-9F64-230ABC2E33A7}"/>
+                <a16:creationId xmlns:a16="http://schemas.microsoft.com/office/drawing/2014/main" id="{3F14DEF4-FD16-4912-9B92-27F8B8BC7B4B}"/>
               </a:ext>
             </a:extLst>
           </p:cNvPr>
@@ -4835,7 +4835,7 @@
           <p:cNvPr id="11" name="">
             <a:extLst xmlns:a="http://schemas.openxmlformats.org/drawingml/2006/main">
               <a:ext uri="{FF2B5EF4-FFF2-40B4-BE49-F238E27FC236}">
-                <a16:creationId xmlns:a16="http://schemas.microsoft.com/office/drawing/2014/main" id="{C908B4A0-A985-4DC7-B315-C54A77F4D11A}"/>
+                <a16:creationId xmlns:a16="http://schemas.microsoft.com/office/drawing/2014/main" id="{39A79C2C-0C15-4AD0-AFFD-167C88594332}"/>
               </a:ext>
             </a:extLst>
           </p:cNvPr>
@@ -4885,7 +4885,7 @@
           <p:cNvPr id="12" name="">
             <a:extLst xmlns:a="http://schemas.openxmlformats.org/drawingml/2006/main">
               <a:ext uri="{FF2B5EF4-FFF2-40B4-BE49-F238E27FC236}">
-                <a16:creationId xmlns:a16="http://schemas.microsoft.com/office/drawing/2014/main" id="{DA031B81-C13D-4C47-BCAC-A726E19031E2}"/>
+                <a16:creationId xmlns:a16="http://schemas.microsoft.com/office/drawing/2014/main" id="{400E142F-1AFE-4BDF-B3B3-C7E72B17BDE2}"/>
               </a:ext>
             </a:extLst>
           </p:cNvPr>
@@ -4916,7 +4916,7 @@
           <p:cNvPr id="13" name="">
             <a:extLst xmlns:a="http://schemas.openxmlformats.org/drawingml/2006/main">
               <a:ext uri="{FF2B5EF4-FFF2-40B4-BE49-F238E27FC236}">
-                <a16:creationId xmlns:a16="http://schemas.microsoft.com/office/drawing/2014/main" id="{CF71FE61-B1FD-49A8-B4A6-9A0CF416A9F5}"/>
+                <a16:creationId xmlns:a16="http://schemas.microsoft.com/office/drawing/2014/main" id="{80E08174-ED4B-462A-8C7C-199EE7A9E051}"/>
               </a:ext>
             </a:extLst>
           </p:cNvPr>
@@ -4966,7 +4966,7 @@
           <p:cNvPr id="14" name="">
             <a:extLst xmlns:a="http://schemas.openxmlformats.org/drawingml/2006/main">
               <a:ext uri="{FF2B5EF4-FFF2-40B4-BE49-F238E27FC236}">
-                <a16:creationId xmlns:a16="http://schemas.microsoft.com/office/drawing/2014/main" id="{D499279C-E170-4AC2-ACFF-50F1552C2FB0}"/>
+                <a16:creationId xmlns:a16="http://schemas.microsoft.com/office/drawing/2014/main" id="{DC0E1414-D690-4CD0-A656-DE01CEBEDB69}"/>
               </a:ext>
             </a:extLst>
           </p:cNvPr>
@@ -5016,7 +5016,7 @@
           <p:cNvPr id="15" name="">
             <a:extLst xmlns:a="http://schemas.openxmlformats.org/drawingml/2006/main">
               <a:ext uri="{FF2B5EF4-FFF2-40B4-BE49-F238E27FC236}">
-                <a16:creationId xmlns:a16="http://schemas.microsoft.com/office/drawing/2014/main" id="{A82F2EC3-3EC6-4991-B5C5-5A855243DF5D}"/>
+                <a16:creationId xmlns:a16="http://schemas.microsoft.com/office/drawing/2014/main" id="{B9A6F440-1CF7-4E0A-96BA-E29F8A8F491D}"/>
               </a:ext>
             </a:extLst>
           </p:cNvPr>
@@ -5066,7 +5066,7 @@
           <p:cNvPr id="16" name="">
             <a:extLst xmlns:a="http://schemas.openxmlformats.org/drawingml/2006/main">
               <a:ext uri="{FF2B5EF4-FFF2-40B4-BE49-F238E27FC236}">
-                <a16:creationId xmlns:a16="http://schemas.microsoft.com/office/drawing/2014/main" id="{74A05A74-026D-486D-B940-26D3EE938687}"/>
+                <a16:creationId xmlns:a16="http://schemas.microsoft.com/office/drawing/2014/main" id="{6D3CCC09-1B7A-48B0-8548-1196F832E6C2}"/>
               </a:ext>
             </a:extLst>
           </p:cNvPr>
@@ -5097,7 +5097,7 @@
           <p:cNvPr id="17" name="">
             <a:extLst xmlns:a="http://schemas.openxmlformats.org/drawingml/2006/main">
               <a:ext uri="{FF2B5EF4-FFF2-40B4-BE49-F238E27FC236}">
-                <a16:creationId xmlns:a16="http://schemas.microsoft.com/office/drawing/2014/main" id="{F32EAEFF-8A3C-4B09-9490-02E409FFDEF5}"/>
+                <a16:creationId xmlns:a16="http://schemas.microsoft.com/office/drawing/2014/main" id="{68597E7C-C541-4239-A6B6-86E1998B4858}"/>
               </a:ext>
             </a:extLst>
           </p:cNvPr>
@@ -5147,7 +5147,7 @@
           <p:cNvPr id="18" name="">
             <a:extLst xmlns:a="http://schemas.openxmlformats.org/drawingml/2006/main">
               <a:ext uri="{FF2B5EF4-FFF2-40B4-BE49-F238E27FC236}">
-                <a16:creationId xmlns:a16="http://schemas.microsoft.com/office/drawing/2014/main" id="{A98700AD-837C-4D8D-9B84-957B8CAFB2C3}"/>
+                <a16:creationId xmlns:a16="http://schemas.microsoft.com/office/drawing/2014/main" id="{50DEC262-8D5A-4251-AFDC-25817BE2EE2C}"/>
               </a:ext>
             </a:extLst>
           </p:cNvPr>
@@ -5197,7 +5197,7 @@
           <p:cNvPr id="19" name="">
             <a:extLst xmlns:a="http://schemas.openxmlformats.org/drawingml/2006/main">
               <a:ext uri="{FF2B5EF4-FFF2-40B4-BE49-F238E27FC236}">
-                <a16:creationId xmlns:a16="http://schemas.microsoft.com/office/drawing/2014/main" id="{8414E97E-4F8A-45D5-8C14-37C5E2649355}"/>
+                <a16:creationId xmlns:a16="http://schemas.microsoft.com/office/drawing/2014/main" id="{B91AD958-6BA1-4DE9-9C8D-604758923273}"/>
               </a:ext>
             </a:extLst>
           </p:cNvPr>
@@ -5247,7 +5247,7 @@
           <p:cNvPr id="20" name="">
             <a:extLst xmlns:a="http://schemas.openxmlformats.org/drawingml/2006/main">
               <a:ext uri="{FF2B5EF4-FFF2-40B4-BE49-F238E27FC236}">
-                <a16:creationId xmlns:a16="http://schemas.microsoft.com/office/drawing/2014/main" id="{E9184ABD-E26C-4F39-92EF-96A1A9C5D131}"/>
+                <a16:creationId xmlns:a16="http://schemas.microsoft.com/office/drawing/2014/main" id="{772EEB6F-1C85-4860-9D74-C454710F63F6}"/>
               </a:ext>
             </a:extLst>
           </p:cNvPr>
@@ -5278,7 +5278,7 @@
           <p:cNvPr id="21" name="">
             <a:extLst xmlns:a="http://schemas.openxmlformats.org/drawingml/2006/main">
               <a:ext uri="{FF2B5EF4-FFF2-40B4-BE49-F238E27FC236}">
-                <a16:creationId xmlns:a16="http://schemas.microsoft.com/office/drawing/2014/main" id="{6CDA678B-5EF1-4880-A02F-2B6EF964E238}"/>
+                <a16:creationId xmlns:a16="http://schemas.microsoft.com/office/drawing/2014/main" id="{682BAEB2-CB97-4782-98E1-83E1A2AF0ACB}"/>
               </a:ext>
             </a:extLst>
           </p:cNvPr>
@@ -5328,7 +5328,7 @@
           <p:cNvPr id="22" name="">
             <a:extLst xmlns:a="http://schemas.openxmlformats.org/drawingml/2006/main">
               <a:ext uri="{FF2B5EF4-FFF2-40B4-BE49-F238E27FC236}">
-                <a16:creationId xmlns:a16="http://schemas.microsoft.com/office/drawing/2014/main" id="{F23F478D-4129-4F68-9024-84C13CE24D21}"/>
+                <a16:creationId xmlns:a16="http://schemas.microsoft.com/office/drawing/2014/main" id="{4B237BC6-CC3A-4B0C-A498-BA39DB08522F}"/>
               </a:ext>
             </a:extLst>
           </p:cNvPr>
@@ -5378,7 +5378,7 @@
           <p:cNvPr id="23" name="">
             <a:extLst xmlns:a="http://schemas.openxmlformats.org/drawingml/2006/main">
               <a:ext uri="{FF2B5EF4-FFF2-40B4-BE49-F238E27FC236}">
-                <a16:creationId xmlns:a16="http://schemas.microsoft.com/office/drawing/2014/main" id="{EB7F5D5B-A078-4693-A57E-92AF3F4EA37B}"/>
+                <a16:creationId xmlns:a16="http://schemas.microsoft.com/office/drawing/2014/main" id="{DD2DCF71-FC04-4DF4-BE49-9E0529230582}"/>
               </a:ext>
             </a:extLst>
           </p:cNvPr>
@@ -5428,7 +5428,7 @@
           <p:cNvPr id="24" name="">
             <a:extLst xmlns:a="http://schemas.openxmlformats.org/drawingml/2006/main">
               <a:ext uri="{FF2B5EF4-FFF2-40B4-BE49-F238E27FC236}">
-                <a16:creationId xmlns:a16="http://schemas.microsoft.com/office/drawing/2014/main" id="{FC0872D9-9584-4C05-B16A-AFE7ECB48D0C}"/>
+                <a16:creationId xmlns:a16="http://schemas.microsoft.com/office/drawing/2014/main" id="{819BB4AC-C767-47B8-8CE6-6AE26E6D5F62}"/>
               </a:ext>
             </a:extLst>
           </p:cNvPr>
@@ -5459,7 +5459,7 @@
           <p:cNvPr id="25" name="">
             <a:extLst xmlns:a="http://schemas.openxmlformats.org/drawingml/2006/main">
               <a:ext uri="{FF2B5EF4-FFF2-40B4-BE49-F238E27FC236}">
-                <a16:creationId xmlns:a16="http://schemas.microsoft.com/office/drawing/2014/main" id="{36703C6F-555D-43E9-A901-539FD919B934}"/>
+                <a16:creationId xmlns:a16="http://schemas.microsoft.com/office/drawing/2014/main" id="{E005CCF8-3932-4B93-834A-E0B009C5FC1D}"/>
               </a:ext>
             </a:extLst>
           </p:cNvPr>
@@ -5509,7 +5509,7 @@
           <p:cNvPr id="26" name="">
             <a:extLst xmlns:a="http://schemas.openxmlformats.org/drawingml/2006/main">
               <a:ext uri="{FF2B5EF4-FFF2-40B4-BE49-F238E27FC236}">
-                <a16:creationId xmlns:a16="http://schemas.microsoft.com/office/drawing/2014/main" id="{87F64906-5B41-4F9E-985A-1C317087E836}"/>
+                <a16:creationId xmlns:a16="http://schemas.microsoft.com/office/drawing/2014/main" id="{D3B197FB-8754-4B04-B908-05B1FDD3676E}"/>
               </a:ext>
             </a:extLst>
           </p:cNvPr>
@@ -5540,7 +5540,7 @@
           <p:cNvPr id="27" name="source-11">
             <a:extLst xmlns:a="http://schemas.openxmlformats.org/drawingml/2006/main">
               <a:ext uri="{FF2B5EF4-FFF2-40B4-BE49-F238E27FC236}">
-                <a16:creationId xmlns:a16="http://schemas.microsoft.com/office/drawing/2014/main" id="{EABC0714-0F72-4144-9D31-7E204501AB28}"/>
+                <a16:creationId xmlns:a16="http://schemas.microsoft.com/office/drawing/2014/main" id="{C76C57C6-2DD3-4612-9961-80D1E409C585}"/>
               </a:ext>
             </a:extLst>
           </p:cNvPr>
@@ -5590,7 +5590,7 @@
           <p:cNvPr id="28" name="page-11">
             <a:extLst xmlns:a="http://schemas.openxmlformats.org/drawingml/2006/main">
               <a:ext uri="{FF2B5EF4-FFF2-40B4-BE49-F238E27FC236}">
-                <a16:creationId xmlns:a16="http://schemas.microsoft.com/office/drawing/2014/main" id="{002BA4FA-BBD1-4C52-982E-6C5D570A9A3C}"/>
+                <a16:creationId xmlns:a16="http://schemas.microsoft.com/office/drawing/2014/main" id="{CFCB7057-3A4C-4D78-885B-830B0FADBEBA}"/>
               </a:ext>
             </a:extLst>
           </p:cNvPr>
@@ -5638,7 +5638,7 @@
     </p:spTree>
     <p:extLst>
       <p:ext uri="{BB962C8B-B14F-4D97-AF65-F5344CB8AC3E}">
-        <p14:creationId xmlns:p14="http://schemas.microsoft.com/office/powerpoint/2010/main" val="1489459955"/>
+        <p14:creationId xmlns:p14="http://schemas.microsoft.com/office/powerpoint/2010/main" val="1312393395"/>
       </p:ext>
     </p:extLst>
   </p:cSld>
@@ -5669,7 +5669,7 @@
           <p:cNvPr id="22" name="kicker-12">
             <a:extLst xmlns:a="http://schemas.openxmlformats.org/drawingml/2006/main">
               <a:ext uri="{FF2B5EF4-FFF2-40B4-BE49-F238E27FC236}">
-                <a16:creationId xmlns:a16="http://schemas.microsoft.com/office/drawing/2014/main" id="{9BDD6C35-D331-4EEA-B97F-AD1E2BD06A64}"/>
+                <a16:creationId xmlns:a16="http://schemas.microsoft.com/office/drawing/2014/main" id="{82613771-0FDE-44EB-88B6-277486FA90C4}"/>
               </a:ext>
             </a:extLst>
           </p:cNvPr>
@@ -5719,7 +5719,7 @@
           <p:cNvPr id="2" name="title-12">
             <a:extLst xmlns:a="http://schemas.openxmlformats.org/drawingml/2006/main">
               <a:ext uri="{FF2B5EF4-FFF2-40B4-BE49-F238E27FC236}">
-                <a16:creationId xmlns:a16="http://schemas.microsoft.com/office/drawing/2014/main" id="{75F40FF2-67E0-410A-8E9A-1B04AABC9EB8}"/>
+                <a16:creationId xmlns:a16="http://schemas.microsoft.com/office/drawing/2014/main" id="{D9C95210-73D1-4014-949A-006FF413B0AE}"/>
               </a:ext>
             </a:extLst>
           </p:cNvPr>
@@ -5769,7 +5769,7 @@
           <p:cNvPr id="3" name="">
             <a:extLst xmlns:a="http://schemas.openxmlformats.org/drawingml/2006/main">
               <a:ext uri="{FF2B5EF4-FFF2-40B4-BE49-F238E27FC236}">
-                <a16:creationId xmlns:a16="http://schemas.microsoft.com/office/drawing/2014/main" id="{2CFEE0B7-DC10-4E90-B9C4-DA235876BEDC}"/>
+                <a16:creationId xmlns:a16="http://schemas.microsoft.com/office/drawing/2014/main" id="{1880BD2B-A711-4807-9217-F942AA0F3B7E}"/>
               </a:ext>
             </a:extLst>
           </p:cNvPr>
@@ -5800,7 +5800,7 @@
           <p:cNvPr id="4" name="">
             <a:extLst xmlns:a="http://schemas.openxmlformats.org/drawingml/2006/main">
               <a:ext uri="{FF2B5EF4-FFF2-40B4-BE49-F238E27FC236}">
-                <a16:creationId xmlns:a16="http://schemas.microsoft.com/office/drawing/2014/main" id="{DB748DA7-DEE5-4A29-A4E4-3A0779599D38}"/>
+                <a16:creationId xmlns:a16="http://schemas.microsoft.com/office/drawing/2014/main" id="{4AD0C3C0-77AD-42AB-A9B8-B8C41298C9CC}"/>
               </a:ext>
             </a:extLst>
           </p:cNvPr>
@@ -5850,7 +5850,7 @@
           <p:cNvPr id="5" name="">
             <a:extLst xmlns:a="http://schemas.openxmlformats.org/drawingml/2006/main">
               <a:ext uri="{FF2B5EF4-FFF2-40B4-BE49-F238E27FC236}">
-                <a16:creationId xmlns:a16="http://schemas.microsoft.com/office/drawing/2014/main" id="{2D666B3C-9EF1-4F4E-8EDB-EC458EA50FA1}"/>
+                <a16:creationId xmlns:a16="http://schemas.microsoft.com/office/drawing/2014/main" id="{A49A1FFC-58D7-4A10-8613-B364BD56916B}"/>
               </a:ext>
             </a:extLst>
           </p:cNvPr>
@@ -5900,7 +5900,7 @@
           <p:cNvPr id="6" name="">
             <a:extLst xmlns:a="http://schemas.openxmlformats.org/drawingml/2006/main">
               <a:ext uri="{FF2B5EF4-FFF2-40B4-BE49-F238E27FC236}">
-                <a16:creationId xmlns:a16="http://schemas.microsoft.com/office/drawing/2014/main" id="{0ED34D52-2C71-4F18-9207-80BABAF835C1}"/>
+                <a16:creationId xmlns:a16="http://schemas.microsoft.com/office/drawing/2014/main" id="{708AB82B-C6E9-4EB4-8B03-92E21C756320}"/>
               </a:ext>
             </a:extLst>
           </p:cNvPr>
@@ -5950,7 +5950,7 @@
           <p:cNvPr id="7" name="">
             <a:extLst xmlns:a="http://schemas.openxmlformats.org/drawingml/2006/main">
               <a:ext uri="{FF2B5EF4-FFF2-40B4-BE49-F238E27FC236}">
-                <a16:creationId xmlns:a16="http://schemas.microsoft.com/office/drawing/2014/main" id="{7582C0CC-734D-4F08-B571-2F7D35F2FB3C}"/>
+                <a16:creationId xmlns:a16="http://schemas.microsoft.com/office/drawing/2014/main" id="{6866D2C4-8981-46B4-A307-5073D7D75344}"/>
               </a:ext>
             </a:extLst>
           </p:cNvPr>
@@ -6000,7 +6000,7 @@
           <p:cNvPr id="8" name="">
             <a:extLst xmlns:a="http://schemas.openxmlformats.org/drawingml/2006/main">
               <a:ext uri="{FF2B5EF4-FFF2-40B4-BE49-F238E27FC236}">
-                <a16:creationId xmlns:a16="http://schemas.microsoft.com/office/drawing/2014/main" id="{1E17A185-C797-42DD-B84E-FCA230CFD214}"/>
+                <a16:creationId xmlns:a16="http://schemas.microsoft.com/office/drawing/2014/main" id="{BAA662CD-226A-4CC3-909A-1843C98582C9}"/>
               </a:ext>
             </a:extLst>
           </p:cNvPr>
@@ -6050,7 +6050,7 @@
           <p:cNvPr id="9" name="">
             <a:extLst xmlns:a="http://schemas.openxmlformats.org/drawingml/2006/main">
               <a:ext uri="{FF2B5EF4-FFF2-40B4-BE49-F238E27FC236}">
-                <a16:creationId xmlns:a16="http://schemas.microsoft.com/office/drawing/2014/main" id="{2B194588-495A-4852-A901-DBD8A7751B43}"/>
+                <a16:creationId xmlns:a16="http://schemas.microsoft.com/office/drawing/2014/main" id="{84BF4AD3-FBBE-4995-AFBC-C9E99521250A}"/>
               </a:ext>
             </a:extLst>
           </p:cNvPr>
@@ -6100,7 +6100,7 @@
           <p:cNvPr id="10" name="">
             <a:extLst xmlns:a="http://schemas.openxmlformats.org/drawingml/2006/main">
               <a:ext uri="{FF2B5EF4-FFF2-40B4-BE49-F238E27FC236}">
-                <a16:creationId xmlns:a16="http://schemas.microsoft.com/office/drawing/2014/main" id="{B26AD642-A1EF-45FB-AD3A-F8EE5138A4A5}"/>
+                <a16:creationId xmlns:a16="http://schemas.microsoft.com/office/drawing/2014/main" id="{F5A7E85C-AB55-4D59-A413-9CB40004C9CB}"/>
               </a:ext>
             </a:extLst>
           </p:cNvPr>
@@ -6150,7 +6150,7 @@
           <p:cNvPr id="11" name="">
             <a:extLst xmlns:a="http://schemas.openxmlformats.org/drawingml/2006/main">
               <a:ext uri="{FF2B5EF4-FFF2-40B4-BE49-F238E27FC236}">
-                <a16:creationId xmlns:a16="http://schemas.microsoft.com/office/drawing/2014/main" id="{84EC31E0-65DC-4445-8CB2-19BFB3CF4AF7}"/>
+                <a16:creationId xmlns:a16="http://schemas.microsoft.com/office/drawing/2014/main" id="{06D6CEA2-1B45-4D49-A5FD-463DEF2E7298}"/>
               </a:ext>
             </a:extLst>
           </p:cNvPr>
@@ -6200,7 +6200,7 @@
           <p:cNvPr id="12" name="">
             <a:extLst xmlns:a="http://schemas.openxmlformats.org/drawingml/2006/main">
               <a:ext uri="{FF2B5EF4-FFF2-40B4-BE49-F238E27FC236}">
-                <a16:creationId xmlns:a16="http://schemas.microsoft.com/office/drawing/2014/main" id="{AC8C37FC-596D-4E98-8821-8CD554FAA8EB}"/>
+                <a16:creationId xmlns:a16="http://schemas.microsoft.com/office/drawing/2014/main" id="{0062413A-94E2-4276-A0F7-56541DA65D73}"/>
               </a:ext>
             </a:extLst>
           </p:cNvPr>
@@ -6250,7 +6250,7 @@
           <p:cNvPr id="13" name="">
             <a:extLst xmlns:a="http://schemas.openxmlformats.org/drawingml/2006/main">
               <a:ext uri="{FF2B5EF4-FFF2-40B4-BE49-F238E27FC236}">
-                <a16:creationId xmlns:a16="http://schemas.microsoft.com/office/drawing/2014/main" id="{D46BD6E3-01F2-4900-B2FF-0EB7EE55BE9C}"/>
+                <a16:creationId xmlns:a16="http://schemas.microsoft.com/office/drawing/2014/main" id="{BC06F4D1-4421-478A-9A19-4427B424481E}"/>
               </a:ext>
             </a:extLst>
           </p:cNvPr>
@@ -6281,7 +6281,7 @@
           <p:cNvPr id="14" name="">
             <a:extLst xmlns:a="http://schemas.openxmlformats.org/drawingml/2006/main">
               <a:ext uri="{FF2B5EF4-FFF2-40B4-BE49-F238E27FC236}">
-                <a16:creationId xmlns:a16="http://schemas.microsoft.com/office/drawing/2014/main" id="{DFFA2D03-71FC-46DD-A9B8-54223AFC212A}"/>
+                <a16:creationId xmlns:a16="http://schemas.microsoft.com/office/drawing/2014/main" id="{8D64D6C8-E6FC-43E5-9676-854764CE16BF}"/>
               </a:ext>
             </a:extLst>
           </p:cNvPr>
@@ -6316,7 +6316,7 @@
           <p:cNvPr id="15" name="">
             <a:extLst xmlns:a="http://schemas.openxmlformats.org/drawingml/2006/main">
               <a:ext uri="{FF2B5EF4-FFF2-40B4-BE49-F238E27FC236}">
-                <a16:creationId xmlns:a16="http://schemas.microsoft.com/office/drawing/2014/main" id="{08CA1957-69EE-4B96-8003-99D1332B31F2}"/>
+                <a16:creationId xmlns:a16="http://schemas.microsoft.com/office/drawing/2014/main" id="{CE4310CB-96C7-45FB-9D6F-F5DDE33827DE}"/>
               </a:ext>
             </a:extLst>
           </p:cNvPr>
@@ -6366,7 +6366,7 @@
           <p:cNvPr id="16" name="">
             <a:extLst xmlns:a="http://schemas.openxmlformats.org/drawingml/2006/main">
               <a:ext uri="{FF2B5EF4-FFF2-40B4-BE49-F238E27FC236}">
-                <a16:creationId xmlns:a16="http://schemas.microsoft.com/office/drawing/2014/main" id="{26036E5B-C638-445D-BB97-70E60A5B3899}"/>
+                <a16:creationId xmlns:a16="http://schemas.microsoft.com/office/drawing/2014/main" id="{18434BFE-B609-40C0-A413-71A036E2A160}"/>
               </a:ext>
             </a:extLst>
           </p:cNvPr>
@@ -6416,7 +6416,7 @@
           <p:cNvPr id="17" name="">
             <a:extLst xmlns:a="http://schemas.openxmlformats.org/drawingml/2006/main">
               <a:ext uri="{FF2B5EF4-FFF2-40B4-BE49-F238E27FC236}">
-                <a16:creationId xmlns:a16="http://schemas.microsoft.com/office/drawing/2014/main" id="{63F802C0-13AC-402E-984A-9BCCD4936272}"/>
+                <a16:creationId xmlns:a16="http://schemas.microsoft.com/office/drawing/2014/main" id="{741A9AB2-3BFB-45C7-9CD4-CF08F8F3EB24}"/>
               </a:ext>
             </a:extLst>
           </p:cNvPr>
@@ -6466,7 +6466,7 @@
           <p:cNvPr id="18" name="">
             <a:extLst xmlns:a="http://schemas.openxmlformats.org/drawingml/2006/main">
               <a:ext uri="{FF2B5EF4-FFF2-40B4-BE49-F238E27FC236}">
-                <a16:creationId xmlns:a16="http://schemas.microsoft.com/office/drawing/2014/main" id="{F1E01BEB-2FC1-4BE2-BCE1-754A1EBCD616}"/>
+                <a16:creationId xmlns:a16="http://schemas.microsoft.com/office/drawing/2014/main" id="{C2B31DB5-57EB-465A-A590-99B51A33A847}"/>
               </a:ext>
             </a:extLst>
           </p:cNvPr>
@@ -6516,7 +6516,7 @@
           <p:cNvPr id="19" name="">
             <a:extLst xmlns:a="http://schemas.openxmlformats.org/drawingml/2006/main">
               <a:ext uri="{FF2B5EF4-FFF2-40B4-BE49-F238E27FC236}">
-                <a16:creationId xmlns:a16="http://schemas.microsoft.com/office/drawing/2014/main" id="{49AA8DB7-8A72-4BE0-8F44-432B2C6D69C6}"/>
+                <a16:creationId xmlns:a16="http://schemas.microsoft.com/office/drawing/2014/main" id="{3B59A5D0-FA75-48D0-B6F6-4035CF893B41}"/>
               </a:ext>
             </a:extLst>
           </p:cNvPr>
@@ -6547,7 +6547,7 @@
           <p:cNvPr id="20" name="source-12">
             <a:extLst xmlns:a="http://schemas.openxmlformats.org/drawingml/2006/main">
               <a:ext uri="{FF2B5EF4-FFF2-40B4-BE49-F238E27FC236}">
-                <a16:creationId xmlns:a16="http://schemas.microsoft.com/office/drawing/2014/main" id="{19F48FE5-225D-4BD1-A1AF-C7855515BDEE}"/>
+                <a16:creationId xmlns:a16="http://schemas.microsoft.com/office/drawing/2014/main" id="{3E7652AD-204C-4759-9EAF-BE424487A856}"/>
               </a:ext>
             </a:extLst>
           </p:cNvPr>
@@ -6597,7 +6597,7 @@
           <p:cNvPr id="21" name="page-12">
             <a:extLst xmlns:a="http://schemas.openxmlformats.org/drawingml/2006/main">
               <a:ext uri="{FF2B5EF4-FFF2-40B4-BE49-F238E27FC236}">
-                <a16:creationId xmlns:a16="http://schemas.microsoft.com/office/drawing/2014/main" id="{B254905E-71CB-42D4-9474-8F801E79DAF2}"/>
+                <a16:creationId xmlns:a16="http://schemas.microsoft.com/office/drawing/2014/main" id="{47CE243B-9BFB-4559-85C3-3C92A03100E4}"/>
               </a:ext>
             </a:extLst>
           </p:cNvPr>
@@ -6645,7 +6645,7 @@
     </p:spTree>
     <p:extLst>
       <p:ext uri="{BB962C8B-B14F-4D97-AF65-F5344CB8AC3E}">
-        <p14:creationId xmlns:p14="http://schemas.microsoft.com/office/powerpoint/2010/main" val="731809455"/>
+        <p14:creationId xmlns:p14="http://schemas.microsoft.com/office/powerpoint/2010/main" val="2016078173"/>
       </p:ext>
     </p:extLst>
   </p:cSld>
@@ -6673,10 +6673,10 @@
       </p:grpSpPr>
       <p:sp>
         <p:nvSpPr>
-          <p:cNvPr id="26" name="kicker-13">
-            <a:extLst xmlns:a="http://schemas.openxmlformats.org/drawingml/2006/main">
-              <a:ext uri="{FF2B5EF4-FFF2-40B4-BE49-F238E27FC236}">
-                <a16:creationId xmlns:a16="http://schemas.microsoft.com/office/drawing/2014/main" id="{7B0F3D13-E0E0-4B50-B428-D131E9939393}"/>
+          <p:cNvPr id="36" name="kicker-13">
+            <a:extLst xmlns:a="http://schemas.openxmlformats.org/drawingml/2006/main">
+              <a:ext uri="{FF2B5EF4-FFF2-40B4-BE49-F238E27FC236}">
+                <a16:creationId xmlns:a16="http://schemas.microsoft.com/office/drawing/2014/main" id="{2F2D9248-8407-40D1-A383-9AD496692A39}"/>
               </a:ext>
             </a:extLst>
           </p:cNvPr>
@@ -6726,7 +6726,7 @@
           <p:cNvPr id="2" name="title-13">
             <a:extLst xmlns:a="http://schemas.openxmlformats.org/drawingml/2006/main">
               <a:ext uri="{FF2B5EF4-FFF2-40B4-BE49-F238E27FC236}">
-                <a16:creationId xmlns:a16="http://schemas.microsoft.com/office/drawing/2014/main" id="{33133EE9-9CFB-450A-8369-64712025AC05}"/>
+                <a16:creationId xmlns:a16="http://schemas.microsoft.com/office/drawing/2014/main" id="{20A034FA-BF53-4FBA-89BD-77335A1EC4CF}"/>
               </a:ext>
             </a:extLst>
           </p:cNvPr>
@@ -6766,7 +6766,7 @@
                   <a:srgbClr val="0F172A"/>
                 </a:solidFill>
               </a:rPr>
-              <a:t>Three full runs reproduced the same CSV in under ten minutes</a:t>
+              <a:t>Phase 2 completed in 3 h 52 min with 95.9% judged</a:t>
             </a:r>
           </a:p>
         </p:txBody>
@@ -6776,7 +6776,7 @@
           <p:cNvPr id="3" name="">
             <a:extLst xmlns:a="http://schemas.openxmlformats.org/drawingml/2006/main">
               <a:ext uri="{FF2B5EF4-FFF2-40B4-BE49-F238E27FC236}">
-                <a16:creationId xmlns:a16="http://schemas.microsoft.com/office/drawing/2014/main" id="{984B1E7A-332C-43F4-AC27-A81BF2ADDE87}"/>
+                <a16:creationId xmlns:a16="http://schemas.microsoft.com/office/drawing/2014/main" id="{56DA8172-C5FE-4CA7-943A-E36B3413CB6A}"/>
               </a:ext>
             </a:extLst>
           </p:cNvPr>
@@ -6807,7 +6807,7 @@
           <p:cNvPr id="4" name="">
             <a:extLst xmlns:a="http://schemas.openxmlformats.org/drawingml/2006/main">
               <a:ext uri="{FF2B5EF4-FFF2-40B4-BE49-F238E27FC236}">
-                <a16:creationId xmlns:a16="http://schemas.microsoft.com/office/drawing/2014/main" id="{1CFB3FDF-1A79-4A66-9B84-2ADAFA6AE954}"/>
+                <a16:creationId xmlns:a16="http://schemas.microsoft.com/office/drawing/2014/main" id="{9AC28FB9-4D5B-4263-9602-A457AA04E596}"/>
               </a:ext>
             </a:extLst>
           </p:cNvPr>
@@ -6819,7 +6819,7 @@
         <p:spPr>
           <a:xfrm xmlns:a="http://schemas.openxmlformats.org/drawingml/2006/main">
             <a:off x="685800" y="1390650"/>
-            <a:ext cx="9048750" cy="323850"/>
+            <a:ext cx="9715500" cy="323850"/>
           </a:xfrm>
           <a:prstGeom xmlns:a="http://schemas.openxmlformats.org/drawingml/2006/main" prst="rect">
             <a:avLst/>
@@ -6847,7 +6847,7 @@
                   <a:srgbClr val="526174"/>
                 </a:solidFill>
               </a:rPr>
-              <a:t>All timings cover the complete 2,516-row file on Kaggle T4 x2.</a:t>
+              <a:t>Measured organizer-run inference on 5,000 rows using Kaggle Tesla T4 x2.</a:t>
             </a:r>
           </a:p>
         </p:txBody>
@@ -6857,19 +6857,19 @@
           <p:cNvPr id="5" name="">
             <a:extLst xmlns:a="http://schemas.openxmlformats.org/drawingml/2006/main">
               <a:ext uri="{FF2B5EF4-FFF2-40B4-BE49-F238E27FC236}">
-                <a16:creationId xmlns:a16="http://schemas.microsoft.com/office/drawing/2014/main" id="{417FE6CD-0CE8-4827-9254-A4DBE7AF82CC}"/>
-              </a:ext>
-            </a:extLst>
-          </p:cNvPr>
-          <p:cNvSpPr>
-            <a:spLocks xmlns:a="http://schemas.openxmlformats.org/drawingml/2006/main" noGrp="1"/>
-          </p:cNvSpPr>
-          <p:nvPr/>
-        </p:nvSpPr>
-        <p:spPr>
-          <a:xfrm xmlns:a="http://schemas.openxmlformats.org/drawingml/2006/main">
-            <a:off x="914400" y="2295525"/>
-            <a:ext cx="1143000" cy="285750"/>
+                <a16:creationId xmlns:a16="http://schemas.microsoft.com/office/drawing/2014/main" id="{A9C54B2F-7365-4F3A-B912-2C33A94CDA44}"/>
+              </a:ext>
+            </a:extLst>
+          </p:cNvPr>
+          <p:cNvSpPr>
+            <a:spLocks xmlns:a="http://schemas.openxmlformats.org/drawingml/2006/main" noGrp="1"/>
+          </p:cNvSpPr>
+          <p:nvPr/>
+        </p:nvSpPr>
+        <p:spPr>
+          <a:xfrm xmlns:a="http://schemas.openxmlformats.org/drawingml/2006/main">
+            <a:off x="838200" y="1981200"/>
+            <a:ext cx="2190750" cy="685800"/>
           </a:xfrm>
           <a:prstGeom xmlns:a="http://schemas.openxmlformats.org/drawingml/2006/main" prst="rect">
             <a:avLst/>
@@ -6885,161 +6885,441 @@
           <a:lstStyle xmlns:a="http://schemas.openxmlformats.org/drawingml/2006/main"/>
           <a:p xmlns:a="http://schemas.openxmlformats.org/drawingml/2006/main">
             <a:pPr algn="l">
-              <a:defRPr sz="1425" b="1">
+              <a:defRPr sz="3600" b="1">
+                <a:solidFill>
+                  <a:srgbClr val="1F5A7A"/>
+                </a:solidFill>
+              </a:defRPr>
+            </a:pPr>
+            <a:r>
+              <a:rPr sz="3600" b="1">
+                <a:solidFill>
+                  <a:srgbClr val="1F5A7A"/>
+                </a:solidFill>
+              </a:rPr>
+              <a:t>5,000</a:t>
+            </a:r>
+          </a:p>
+        </p:txBody>
+      </p:sp>
+      <p:sp>
+        <p:nvSpPr>
+          <p:cNvPr id="6" name="">
+            <a:extLst xmlns:a="http://schemas.openxmlformats.org/drawingml/2006/main">
+              <a:ext uri="{FF2B5EF4-FFF2-40B4-BE49-F238E27FC236}">
+                <a16:creationId xmlns:a16="http://schemas.microsoft.com/office/drawing/2014/main" id="{F4D9077E-EABB-4871-978D-1512922BFFAE}"/>
+              </a:ext>
+            </a:extLst>
+          </p:cNvPr>
+          <p:cNvSpPr>
+            <a:spLocks xmlns:a="http://schemas.openxmlformats.org/drawingml/2006/main" noGrp="1"/>
+          </p:cNvSpPr>
+          <p:nvPr/>
+        </p:nvSpPr>
+        <p:spPr>
+          <a:xfrm xmlns:a="http://schemas.openxmlformats.org/drawingml/2006/main">
+            <a:off x="838200" y="2667000"/>
+            <a:ext cx="2190750" cy="514350"/>
+          </a:xfrm>
+          <a:prstGeom xmlns:a="http://schemas.openxmlformats.org/drawingml/2006/main" prst="rect">
+            <a:avLst/>
+          </a:prstGeom>
+          <a:noFill xmlns:a="http://schemas.openxmlformats.org/drawingml/2006/main"/>
+          <a:ln xmlns:a="http://schemas.openxmlformats.org/drawingml/2006/main" w="0">
+            <a:noFill/>
+            <a:prstDash val="solid"/>
+          </a:ln>
+        </p:spPr>
+        <p:txBody>
+          <a:bodyPr xmlns:a="http://schemas.openxmlformats.org/drawingml/2006/main"/>
+          <a:lstStyle xmlns:a="http://schemas.openxmlformats.org/drawingml/2006/main"/>
+          <a:p xmlns:a="http://schemas.openxmlformats.org/drawingml/2006/main">
+            <a:pPr algn="l">
+              <a:defRPr sz="1350" b="0">
+                <a:solidFill>
+                  <a:srgbClr val="526174"/>
+                </a:solidFill>
+              </a:defRPr>
+            </a:pPr>
+            <a:r>
+              <a:rPr sz="1350" b="0">
+                <a:solidFill>
+                  <a:srgbClr val="526174"/>
+                </a:solidFill>
+              </a:rPr>
+              <a:t>held-out rows</a:t>
+            </a:r>
+          </a:p>
+        </p:txBody>
+      </p:sp>
+      <p:sp>
+        <p:nvSpPr>
+          <p:cNvPr id="7" name="">
+            <a:extLst xmlns:a="http://schemas.openxmlformats.org/drawingml/2006/main">
+              <a:ext uri="{FF2B5EF4-FFF2-40B4-BE49-F238E27FC236}">
+                <a16:creationId xmlns:a16="http://schemas.microsoft.com/office/drawing/2014/main" id="{7D52D801-D14A-46A4-8BC2-3882B396A6F5}"/>
+              </a:ext>
+            </a:extLst>
+          </p:cNvPr>
+          <p:cNvSpPr>
+            <a:spLocks xmlns:a="http://schemas.openxmlformats.org/drawingml/2006/main" noGrp="1"/>
+          </p:cNvSpPr>
+          <p:nvPr/>
+        </p:nvSpPr>
+        <p:spPr>
+          <a:xfrm xmlns:a="http://schemas.openxmlformats.org/drawingml/2006/main">
+            <a:off x="3543300" y="1981200"/>
+            <a:ext cx="2190750" cy="685800"/>
+          </a:xfrm>
+          <a:prstGeom xmlns:a="http://schemas.openxmlformats.org/drawingml/2006/main" prst="rect">
+            <a:avLst/>
+          </a:prstGeom>
+          <a:noFill xmlns:a="http://schemas.openxmlformats.org/drawingml/2006/main"/>
+          <a:ln xmlns:a="http://schemas.openxmlformats.org/drawingml/2006/main" w="0">
+            <a:noFill/>
+            <a:prstDash val="solid"/>
+          </a:ln>
+        </p:spPr>
+        <p:txBody>
+          <a:bodyPr xmlns:a="http://schemas.openxmlformats.org/drawingml/2006/main"/>
+          <a:lstStyle xmlns:a="http://schemas.openxmlformats.org/drawingml/2006/main"/>
+          <a:p xmlns:a="http://schemas.openxmlformats.org/drawingml/2006/main">
+            <a:pPr algn="l">
+              <a:defRPr sz="3600" b="1">
+                <a:solidFill>
+                  <a:srgbClr val="2A8C82"/>
+                </a:solidFill>
+              </a:defRPr>
+            </a:pPr>
+            <a:r>
+              <a:rPr sz="3600" b="1">
+                <a:solidFill>
+                  <a:srgbClr val="2A8C82"/>
+                </a:solidFill>
+              </a:rPr>
+              <a:t>207</a:t>
+            </a:r>
+          </a:p>
+        </p:txBody>
+      </p:sp>
+      <p:sp>
+        <p:nvSpPr>
+          <p:cNvPr id="8" name="">
+            <a:extLst xmlns:a="http://schemas.openxmlformats.org/drawingml/2006/main">
+              <a:ext uri="{FF2B5EF4-FFF2-40B4-BE49-F238E27FC236}">
+                <a16:creationId xmlns:a16="http://schemas.microsoft.com/office/drawing/2014/main" id="{DA8972CF-CE19-4921-A979-8ECC7BFFAC76}"/>
+              </a:ext>
+            </a:extLst>
+          </p:cNvPr>
+          <p:cNvSpPr>
+            <a:spLocks xmlns:a="http://schemas.openxmlformats.org/drawingml/2006/main" noGrp="1"/>
+          </p:cNvSpPr>
+          <p:nvPr/>
+        </p:nvSpPr>
+        <p:spPr>
+          <a:xfrm xmlns:a="http://schemas.openxmlformats.org/drawingml/2006/main">
+            <a:off x="3543300" y="2667000"/>
+            <a:ext cx="2190750" cy="514350"/>
+          </a:xfrm>
+          <a:prstGeom xmlns:a="http://schemas.openxmlformats.org/drawingml/2006/main" prst="rect">
+            <a:avLst/>
+          </a:prstGeom>
+          <a:noFill xmlns:a="http://schemas.openxmlformats.org/drawingml/2006/main"/>
+          <a:ln xmlns:a="http://schemas.openxmlformats.org/drawingml/2006/main" w="0">
+            <a:noFill/>
+            <a:prstDash val="solid"/>
+          </a:ln>
+        </p:spPr>
+        <p:txBody>
+          <a:bodyPr xmlns:a="http://schemas.openxmlformats.org/drawingml/2006/main"/>
+          <a:lstStyle xmlns:a="http://schemas.openxmlformats.org/drawingml/2006/main"/>
+          <a:p xmlns:a="http://schemas.openxmlformats.org/drawingml/2006/main">
+            <a:pPr algn="l">
+              <a:defRPr sz="1350" b="0">
+                <a:solidFill>
+                  <a:srgbClr val="526174"/>
+                </a:solidFill>
+              </a:defRPr>
+            </a:pPr>
+            <a:r>
+              <a:rPr sz="1350" b="0">
+                <a:solidFill>
+                  <a:srgbClr val="526174"/>
+                </a:solidFill>
+              </a:rPr>
+              <a:t>deterministic (4.14%)</a:t>
+            </a:r>
+          </a:p>
+        </p:txBody>
+      </p:sp>
+      <p:sp>
+        <p:nvSpPr>
+          <p:cNvPr id="9" name="">
+            <a:extLst xmlns:a="http://schemas.openxmlformats.org/drawingml/2006/main">
+              <a:ext uri="{FF2B5EF4-FFF2-40B4-BE49-F238E27FC236}">
+                <a16:creationId xmlns:a16="http://schemas.microsoft.com/office/drawing/2014/main" id="{17A25516-5A0C-4793-B56B-EC7F246E10C6}"/>
+              </a:ext>
+            </a:extLst>
+          </p:cNvPr>
+          <p:cNvSpPr>
+            <a:spLocks xmlns:a="http://schemas.openxmlformats.org/drawingml/2006/main" noGrp="1"/>
+          </p:cNvSpPr>
+          <p:nvPr/>
+        </p:nvSpPr>
+        <p:spPr>
+          <a:xfrm xmlns:a="http://schemas.openxmlformats.org/drawingml/2006/main">
+            <a:off x="6248400" y="1981200"/>
+            <a:ext cx="2381250" cy="685800"/>
+          </a:xfrm>
+          <a:prstGeom xmlns:a="http://schemas.openxmlformats.org/drawingml/2006/main" prst="rect">
+            <a:avLst/>
+          </a:prstGeom>
+          <a:noFill xmlns:a="http://schemas.openxmlformats.org/drawingml/2006/main"/>
+          <a:ln xmlns:a="http://schemas.openxmlformats.org/drawingml/2006/main" w="0">
+            <a:noFill/>
+            <a:prstDash val="solid"/>
+          </a:ln>
+        </p:spPr>
+        <p:txBody>
+          <a:bodyPr xmlns:a="http://schemas.openxmlformats.org/drawingml/2006/main"/>
+          <a:lstStyle xmlns:a="http://schemas.openxmlformats.org/drawingml/2006/main"/>
+          <a:p xmlns:a="http://schemas.openxmlformats.org/drawingml/2006/main">
+            <a:pPr algn="l">
+              <a:defRPr sz="3600" b="1">
+                <a:solidFill>
+                  <a:srgbClr val="D59B32"/>
+                </a:solidFill>
+              </a:defRPr>
+            </a:pPr>
+            <a:r>
+              <a:rPr sz="3600" b="1">
+                <a:solidFill>
+                  <a:srgbClr val="D59B32"/>
+                </a:solidFill>
+              </a:rPr>
+              <a:t>4,793</a:t>
+            </a:r>
+          </a:p>
+        </p:txBody>
+      </p:sp>
+      <p:sp>
+        <p:nvSpPr>
+          <p:cNvPr id="10" name="">
+            <a:extLst xmlns:a="http://schemas.openxmlformats.org/drawingml/2006/main">
+              <a:ext uri="{FF2B5EF4-FFF2-40B4-BE49-F238E27FC236}">
+                <a16:creationId xmlns:a16="http://schemas.microsoft.com/office/drawing/2014/main" id="{A400E612-26C6-4758-8867-4B854CBC3ED6}"/>
+              </a:ext>
+            </a:extLst>
+          </p:cNvPr>
+          <p:cNvSpPr>
+            <a:spLocks xmlns:a="http://schemas.openxmlformats.org/drawingml/2006/main" noGrp="1"/>
+          </p:cNvSpPr>
+          <p:nvPr/>
+        </p:nvSpPr>
+        <p:spPr>
+          <a:xfrm xmlns:a="http://schemas.openxmlformats.org/drawingml/2006/main">
+            <a:off x="6248400" y="2667000"/>
+            <a:ext cx="2381250" cy="514350"/>
+          </a:xfrm>
+          <a:prstGeom xmlns:a="http://schemas.openxmlformats.org/drawingml/2006/main" prst="rect">
+            <a:avLst/>
+          </a:prstGeom>
+          <a:noFill xmlns:a="http://schemas.openxmlformats.org/drawingml/2006/main"/>
+          <a:ln xmlns:a="http://schemas.openxmlformats.org/drawingml/2006/main" w="0">
+            <a:noFill/>
+            <a:prstDash val="solid"/>
+          </a:ln>
+        </p:spPr>
+        <p:txBody>
+          <a:bodyPr xmlns:a="http://schemas.openxmlformats.org/drawingml/2006/main"/>
+          <a:lstStyle xmlns:a="http://schemas.openxmlformats.org/drawingml/2006/main"/>
+          <a:p xmlns:a="http://schemas.openxmlformats.org/drawingml/2006/main">
+            <a:pPr algn="l">
+              <a:defRPr sz="1350" b="0">
+                <a:solidFill>
+                  <a:srgbClr val="526174"/>
+                </a:solidFill>
+              </a:defRPr>
+            </a:pPr>
+            <a:r>
+              <a:rPr sz="1350" b="0">
+                <a:solidFill>
+                  <a:srgbClr val="526174"/>
+                </a:solidFill>
+              </a:rPr>
+              <a:t>Qwen judge (95.86%)</a:t>
+            </a:r>
+          </a:p>
+        </p:txBody>
+      </p:sp>
+      <p:sp>
+        <p:nvSpPr>
+          <p:cNvPr id="11" name="">
+            <a:extLst xmlns:a="http://schemas.openxmlformats.org/drawingml/2006/main">
+              <a:ext uri="{FF2B5EF4-FFF2-40B4-BE49-F238E27FC236}">
+                <a16:creationId xmlns:a16="http://schemas.microsoft.com/office/drawing/2014/main" id="{C334EC4E-AA85-41CD-854B-D820D7F39DF2}"/>
+              </a:ext>
+            </a:extLst>
+          </p:cNvPr>
+          <p:cNvSpPr>
+            <a:spLocks xmlns:a="http://schemas.openxmlformats.org/drawingml/2006/main" noGrp="1"/>
+          </p:cNvSpPr>
+          <p:nvPr/>
+        </p:nvSpPr>
+        <p:spPr>
+          <a:xfrm xmlns:a="http://schemas.openxmlformats.org/drawingml/2006/main">
+            <a:off x="9201150" y="1981200"/>
+            <a:ext cx="2286000" cy="685800"/>
+          </a:xfrm>
+          <a:prstGeom xmlns:a="http://schemas.openxmlformats.org/drawingml/2006/main" prst="rect">
+            <a:avLst/>
+          </a:prstGeom>
+          <a:noFill xmlns:a="http://schemas.openxmlformats.org/drawingml/2006/main"/>
+          <a:ln xmlns:a="http://schemas.openxmlformats.org/drawingml/2006/main" w="0">
+            <a:noFill/>
+            <a:prstDash val="solid"/>
+          </a:ln>
+        </p:spPr>
+        <p:txBody>
+          <a:bodyPr xmlns:a="http://schemas.openxmlformats.org/drawingml/2006/main"/>
+          <a:lstStyle xmlns:a="http://schemas.openxmlformats.org/drawingml/2006/main"/>
+          <a:p xmlns:a="http://schemas.openxmlformats.org/drawingml/2006/main">
+            <a:pPr algn="l">
+              <a:defRPr sz="3600" b="1">
+                <a:solidFill>
+                  <a:srgbClr val="2A8C82"/>
+                </a:solidFill>
+              </a:defRPr>
+            </a:pPr>
+            <a:r>
+              <a:rPr sz="3600" b="1">
+                <a:solidFill>
+                  <a:srgbClr val="2A8C82"/>
+                </a:solidFill>
+              </a:rPr>
+              <a:t>3:52:02</a:t>
+            </a:r>
+          </a:p>
+        </p:txBody>
+      </p:sp>
+      <p:sp>
+        <p:nvSpPr>
+          <p:cNvPr id="12" name="">
+            <a:extLst xmlns:a="http://schemas.openxmlformats.org/drawingml/2006/main">
+              <a:ext uri="{FF2B5EF4-FFF2-40B4-BE49-F238E27FC236}">
+                <a16:creationId xmlns:a16="http://schemas.microsoft.com/office/drawing/2014/main" id="{0042228C-EFCB-4ED4-AE69-C2B6EDA7B0A7}"/>
+              </a:ext>
+            </a:extLst>
+          </p:cNvPr>
+          <p:cNvSpPr>
+            <a:spLocks xmlns:a="http://schemas.openxmlformats.org/drawingml/2006/main" noGrp="1"/>
+          </p:cNvSpPr>
+          <p:nvPr/>
+        </p:nvSpPr>
+        <p:spPr>
+          <a:xfrm xmlns:a="http://schemas.openxmlformats.org/drawingml/2006/main">
+            <a:off x="9201150" y="2667000"/>
+            <a:ext cx="2286000" cy="514350"/>
+          </a:xfrm>
+          <a:prstGeom xmlns:a="http://schemas.openxmlformats.org/drawingml/2006/main" prst="rect">
+            <a:avLst/>
+          </a:prstGeom>
+          <a:noFill xmlns:a="http://schemas.openxmlformats.org/drawingml/2006/main"/>
+          <a:ln xmlns:a="http://schemas.openxmlformats.org/drawingml/2006/main" w="0">
+            <a:noFill/>
+            <a:prstDash val="solid"/>
+          </a:ln>
+        </p:spPr>
+        <p:txBody>
+          <a:bodyPr xmlns:a="http://schemas.openxmlformats.org/drawingml/2006/main"/>
+          <a:lstStyle xmlns:a="http://schemas.openxmlformats.org/drawingml/2006/main"/>
+          <a:p xmlns:a="http://schemas.openxmlformats.org/drawingml/2006/main">
+            <a:pPr algn="l">
+              <a:defRPr sz="1350" b="0">
+                <a:solidFill>
+                  <a:srgbClr val="526174"/>
+                </a:solidFill>
+              </a:defRPr>
+            </a:pPr>
+            <a:r>
+              <a:rPr sz="1350" b="0">
+                <a:solidFill>
+                  <a:srgbClr val="526174"/>
+                </a:solidFill>
+              </a:rPr>
+              <a:t>validated end to end</a:t>
+            </a:r>
+          </a:p>
+        </p:txBody>
+      </p:sp>
+      <p:sp>
+        <p:nvSpPr>
+          <p:cNvPr id="13" name="">
+            <a:extLst xmlns:a="http://schemas.openxmlformats.org/drawingml/2006/main">
+              <a:ext uri="{FF2B5EF4-FFF2-40B4-BE49-F238E27FC236}">
+                <a16:creationId xmlns:a16="http://schemas.microsoft.com/office/drawing/2014/main" id="{E3163358-5091-4E23-B74A-589B819E7BF9}"/>
+              </a:ext>
+            </a:extLst>
+          </p:cNvPr>
+          <p:cNvSpPr>
+            <a:spLocks xmlns:a="http://schemas.openxmlformats.org/drawingml/2006/main" noGrp="1"/>
+          </p:cNvSpPr>
+          <p:nvPr/>
+        </p:nvSpPr>
+        <p:spPr>
+          <a:xfrm xmlns:a="http://schemas.openxmlformats.org/drawingml/2006/main">
+            <a:off x="914400" y="3581400"/>
+            <a:ext cx="3048000" cy="304800"/>
+          </a:xfrm>
+          <a:prstGeom xmlns:a="http://schemas.openxmlformats.org/drawingml/2006/main" prst="rect">
+            <a:avLst/>
+          </a:prstGeom>
+          <a:noFill xmlns:a="http://schemas.openxmlformats.org/drawingml/2006/main"/>
+          <a:ln xmlns:a="http://schemas.openxmlformats.org/drawingml/2006/main" w="0">
+            <a:noFill/>
+            <a:prstDash val="solid"/>
+          </a:ln>
+        </p:spPr>
+        <p:txBody>
+          <a:bodyPr xmlns:a="http://schemas.openxmlformats.org/drawingml/2006/main"/>
+          <a:lstStyle xmlns:a="http://schemas.openxmlformats.org/drawingml/2006/main"/>
+          <a:p xmlns:a="http://schemas.openxmlformats.org/drawingml/2006/main">
+            <a:pPr algn="l">
+              <a:defRPr sz="1650" b="1">
                 <a:solidFill>
                   <a:srgbClr val="0F172A"/>
                 </a:solidFill>
               </a:defRPr>
             </a:pPr>
             <a:r>
-              <a:rPr sz="1425" b="1">
+              <a:rPr sz="1650" b="1">
                 <a:solidFill>
                   <a:srgbClr val="0F172A"/>
                 </a:solidFill>
               </a:rPr>
-              <a:t>Run 1</a:t>
-            </a:r>
-          </a:p>
-        </p:txBody>
-      </p:sp>
-      <p:sp>
-        <p:nvSpPr>
-          <p:cNvPr id="6" name="">
-            <a:extLst xmlns:a="http://schemas.openxmlformats.org/drawingml/2006/main">
-              <a:ext uri="{FF2B5EF4-FFF2-40B4-BE49-F238E27FC236}">
-                <a16:creationId xmlns:a16="http://schemas.microsoft.com/office/drawing/2014/main" id="{2460BB7D-7B3A-4539-B23A-BDF77DB6709E}"/>
-              </a:ext>
-            </a:extLst>
-          </p:cNvPr>
-          <p:cNvSpPr>
-            <a:spLocks xmlns:a="http://schemas.openxmlformats.org/drawingml/2006/main" noGrp="1"/>
-          </p:cNvSpPr>
-          <p:nvPr/>
-        </p:nvSpPr>
-        <p:spPr>
-          <a:xfrm xmlns:a="http://schemas.openxmlformats.org/drawingml/2006/main">
-            <a:off x="2095500" y="2190750"/>
-            <a:ext cx="6572250" cy="495300"/>
-          </a:xfrm>
-          <a:prstGeom xmlns:a="http://schemas.openxmlformats.org/drawingml/2006/main" prst="roundRect">
-            <a:avLst>
-              <a:gd name="adj" fmla="val 26923"/>
-            </a:avLst>
-          </a:prstGeom>
-          <a:solidFill xmlns:a="http://schemas.openxmlformats.org/drawingml/2006/main">
-            <a:srgbClr val="E7EEF4"/>
-          </a:solidFill>
-          <a:ln xmlns:a="http://schemas.openxmlformats.org/drawingml/2006/main" w="0">
-            <a:solidFill>
-              <a:srgbClr val="E7EEF4"/>
-            </a:solidFill>
-            <a:prstDash val="solid"/>
-          </a:ln>
-        </p:spPr>
-      </p:sp>
-      <p:sp>
-        <p:nvSpPr>
-          <p:cNvPr id="7" name="">
-            <a:extLst xmlns:a="http://schemas.openxmlformats.org/drawingml/2006/main">
-              <a:ext uri="{FF2B5EF4-FFF2-40B4-BE49-F238E27FC236}">
-                <a16:creationId xmlns:a16="http://schemas.microsoft.com/office/drawing/2014/main" id="{70017E23-5E4C-4E47-BE94-AEABA372E4EC}"/>
-              </a:ext>
-            </a:extLst>
-          </p:cNvPr>
-          <p:cNvSpPr>
-            <a:spLocks xmlns:a="http://schemas.openxmlformats.org/drawingml/2006/main" noGrp="1"/>
-          </p:cNvSpPr>
-          <p:nvPr/>
-        </p:nvSpPr>
-        <p:spPr>
-          <a:xfrm xmlns:a="http://schemas.openxmlformats.org/drawingml/2006/main">
-            <a:off x="2095500" y="2190750"/>
-            <a:ext cx="4734490" cy="495300"/>
-          </a:xfrm>
-          <a:prstGeom xmlns:a="http://schemas.openxmlformats.org/drawingml/2006/main" prst="roundRect">
-            <a:avLst>
-              <a:gd name="adj" fmla="val 26923"/>
-            </a:avLst>
-          </a:prstGeom>
-          <a:solidFill xmlns:a="http://schemas.openxmlformats.org/drawingml/2006/main">
-            <a:srgbClr val="2A8C82"/>
-          </a:solidFill>
-          <a:ln xmlns:a="http://schemas.openxmlformats.org/drawingml/2006/main" w="0">
-            <a:solidFill>
-              <a:srgbClr val="2A8C82"/>
-            </a:solidFill>
-            <a:prstDash val="solid"/>
-          </a:ln>
-        </p:spPr>
-      </p:sp>
-      <p:sp>
-        <p:nvSpPr>
-          <p:cNvPr id="8" name="">
-            <a:extLst xmlns:a="http://schemas.openxmlformats.org/drawingml/2006/main">
-              <a:ext uri="{FF2B5EF4-FFF2-40B4-BE49-F238E27FC236}">
-                <a16:creationId xmlns:a16="http://schemas.microsoft.com/office/drawing/2014/main" id="{0E39282B-A738-4B8B-B979-CFB09E9BFFEE}"/>
-              </a:ext>
-            </a:extLst>
-          </p:cNvPr>
-          <p:cNvSpPr>
-            <a:spLocks xmlns:a="http://schemas.openxmlformats.org/drawingml/2006/main" noGrp="1"/>
-          </p:cNvSpPr>
-          <p:nvPr/>
-        </p:nvSpPr>
-        <p:spPr>
-          <a:xfrm xmlns:a="http://schemas.openxmlformats.org/drawingml/2006/main">
-            <a:off x="8839200" y="2286000"/>
-            <a:ext cx="1428750" cy="285750"/>
-          </a:xfrm>
-          <a:prstGeom xmlns:a="http://schemas.openxmlformats.org/drawingml/2006/main" prst="rect">
-            <a:avLst/>
-          </a:prstGeom>
-          <a:noFill xmlns:a="http://schemas.openxmlformats.org/drawingml/2006/main"/>
-          <a:ln xmlns:a="http://schemas.openxmlformats.org/drawingml/2006/main" w="0">
-            <a:noFill/>
-            <a:prstDash val="solid"/>
-          </a:ln>
-        </p:spPr>
-        <p:txBody>
-          <a:bodyPr xmlns:a="http://schemas.openxmlformats.org/drawingml/2006/main"/>
-          <a:lstStyle xmlns:a="http://schemas.openxmlformats.org/drawingml/2006/main"/>
-          <a:p xmlns:a="http://schemas.openxmlformats.org/drawingml/2006/main">
-            <a:pPr algn="r">
-              <a:defRPr sz="1500" b="1">
-                <a:solidFill>
-                  <a:srgbClr val="2A8C82"/>
-                </a:solidFill>
-              </a:defRPr>
-            </a:pPr>
-            <a:r>
-              <a:rPr sz="1500" b="1">
-                <a:solidFill>
-                  <a:srgbClr val="2A8C82"/>
-                </a:solidFill>
-              </a:rPr>
-              <a:t>440.87 s</a:t>
-            </a:r>
-          </a:p>
-        </p:txBody>
-      </p:sp>
-      <p:sp>
-        <p:nvSpPr>
-          <p:cNvPr id="9" name="">
-            <a:extLst xmlns:a="http://schemas.openxmlformats.org/drawingml/2006/main">
-              <a:ext uri="{FF2B5EF4-FFF2-40B4-BE49-F238E27FC236}">
-                <a16:creationId xmlns:a16="http://schemas.microsoft.com/office/drawing/2014/main" id="{34E76F05-F448-483B-A739-106FF1CE7C6A}"/>
-              </a:ext>
-            </a:extLst>
-          </p:cNvPr>
-          <p:cNvSpPr>
-            <a:spLocks xmlns:a="http://schemas.openxmlformats.org/drawingml/2006/main" noGrp="1"/>
-          </p:cNvSpPr>
-          <p:nvPr/>
-        </p:nvSpPr>
-        <p:spPr>
-          <a:xfrm xmlns:a="http://schemas.openxmlformats.org/drawingml/2006/main">
-            <a:off x="914400" y="3171825"/>
-            <a:ext cx="1143000" cy="285750"/>
+              <a:t>Measured milestones</a:t>
+            </a:r>
+          </a:p>
+        </p:txBody>
+      </p:sp>
+      <p:sp>
+        <p:nvSpPr>
+          <p:cNvPr id="14" name="">
+            <a:extLst xmlns:a="http://schemas.openxmlformats.org/drawingml/2006/main">
+              <a:ext uri="{FF2B5EF4-FFF2-40B4-BE49-F238E27FC236}">
+                <a16:creationId xmlns:a16="http://schemas.microsoft.com/office/drawing/2014/main" id="{9C4F2268-EC18-4BB4-850C-C0CD5D45B375}"/>
+              </a:ext>
+            </a:extLst>
+          </p:cNvPr>
+          <p:cNvSpPr>
+            <a:spLocks xmlns:a="http://schemas.openxmlformats.org/drawingml/2006/main" noGrp="1"/>
+          </p:cNvSpPr>
+          <p:nvPr/>
+        </p:nvSpPr>
+        <p:spPr>
+          <a:xfrm xmlns:a="http://schemas.openxmlformats.org/drawingml/2006/main">
+            <a:off x="4210050" y="3581400"/>
+            <a:ext cx="1619250" cy="304800"/>
           </a:xfrm>
           <a:prstGeom xmlns:a="http://schemas.openxmlformats.org/drawingml/2006/main" prst="rect">
             <a:avLst/>
@@ -7055,86 +7335,97 @@
           <a:lstStyle xmlns:a="http://schemas.openxmlformats.org/drawingml/2006/main"/>
           <a:p xmlns:a="http://schemas.openxmlformats.org/drawingml/2006/main">
             <a:pPr algn="l">
-              <a:defRPr sz="1425" b="1">
-                <a:solidFill>
-                  <a:srgbClr val="0F172A"/>
-                </a:solidFill>
-              </a:defRPr>
-            </a:pPr>
-            <a:r>
-              <a:rPr sz="1425" b="1">
-                <a:solidFill>
-                  <a:srgbClr val="0F172A"/>
-                </a:solidFill>
-              </a:rPr>
-              <a:t>Run 2</a:t>
-            </a:r>
-          </a:p>
-        </p:txBody>
-      </p:sp>
-      <p:sp>
-        <p:nvSpPr>
-          <p:cNvPr id="10" name="">
-            <a:extLst xmlns:a="http://schemas.openxmlformats.org/drawingml/2006/main">
-              <a:ext uri="{FF2B5EF4-FFF2-40B4-BE49-F238E27FC236}">
-                <a16:creationId xmlns:a16="http://schemas.microsoft.com/office/drawing/2014/main" id="{3401E0AD-FF4F-4091-9437-EE4166853F40}"/>
-              </a:ext>
-            </a:extLst>
-          </p:cNvPr>
-          <p:cNvSpPr>
-            <a:spLocks xmlns:a="http://schemas.openxmlformats.org/drawingml/2006/main" noGrp="1"/>
-          </p:cNvSpPr>
-          <p:nvPr/>
-        </p:nvSpPr>
-        <p:spPr>
-          <a:xfrm xmlns:a="http://schemas.openxmlformats.org/drawingml/2006/main">
-            <a:off x="2095500" y="3067050"/>
-            <a:ext cx="6572250" cy="495300"/>
-          </a:xfrm>
-          <a:prstGeom xmlns:a="http://schemas.openxmlformats.org/drawingml/2006/main" prst="roundRect">
-            <a:avLst>
-              <a:gd name="adj" fmla="val 26923"/>
-            </a:avLst>
-          </a:prstGeom>
-          <a:solidFill xmlns:a="http://schemas.openxmlformats.org/drawingml/2006/main">
-            <a:srgbClr val="E7EEF4"/>
-          </a:solidFill>
-          <a:ln xmlns:a="http://schemas.openxmlformats.org/drawingml/2006/main" w="0">
-            <a:solidFill>
-              <a:srgbClr val="E7EEF4"/>
-            </a:solidFill>
-            <a:prstDash val="solid"/>
-          </a:ln>
-        </p:spPr>
-      </p:sp>
-      <p:sp>
-        <p:nvSpPr>
-          <p:cNvPr id="11" name="">
-            <a:extLst xmlns:a="http://schemas.openxmlformats.org/drawingml/2006/main">
-              <a:ext uri="{FF2B5EF4-FFF2-40B4-BE49-F238E27FC236}">
-                <a16:creationId xmlns:a16="http://schemas.microsoft.com/office/drawing/2014/main" id="{04DBA1A8-0EEC-4CCC-9689-DE8DD7D63771}"/>
-              </a:ext>
-            </a:extLst>
-          </p:cNvPr>
-          <p:cNvSpPr>
-            <a:spLocks xmlns:a="http://schemas.openxmlformats.org/drawingml/2006/main" noGrp="1"/>
-          </p:cNvSpPr>
-          <p:nvPr/>
-        </p:nvSpPr>
-        <p:spPr>
-          <a:xfrm xmlns:a="http://schemas.openxmlformats.org/drawingml/2006/main">
-            <a:off x="2095500" y="3067050"/>
-            <a:ext cx="5659760" cy="495300"/>
-          </a:xfrm>
-          <a:prstGeom xmlns:a="http://schemas.openxmlformats.org/drawingml/2006/main" prst="roundRect">
-            <a:avLst>
-              <a:gd name="adj" fmla="val 26923"/>
-            </a:avLst>
-          </a:prstGeom>
-          <a:solidFill xmlns:a="http://schemas.openxmlformats.org/drawingml/2006/main">
-            <a:srgbClr val="1F5A7A"/>
-          </a:solidFill>
-          <a:ln xmlns:a="http://schemas.openxmlformats.org/drawingml/2006/main" w="0">
+              <a:defRPr sz="1275" b="1">
+                <a:solidFill>
+                  <a:srgbClr val="1F5A7A"/>
+                </a:solidFill>
+              </a:defRPr>
+            </a:pPr>
+            <a:r>
+              <a:rPr sz="1275" b="1">
+                <a:solidFill>
+                  <a:srgbClr val="1F5A7A"/>
+                </a:solidFill>
+              </a:rPr>
+              <a:t>Elapsed</a:t>
+            </a:r>
+          </a:p>
+        </p:txBody>
+      </p:sp>
+      <p:sp>
+        <p:nvSpPr>
+          <p:cNvPr id="15" name="">
+            <a:extLst xmlns:a="http://schemas.openxmlformats.org/drawingml/2006/main">
+              <a:ext uri="{FF2B5EF4-FFF2-40B4-BE49-F238E27FC236}">
+                <a16:creationId xmlns:a16="http://schemas.microsoft.com/office/drawing/2014/main" id="{EE2D32C6-A607-4D34-867C-68D3B39F0838}"/>
+              </a:ext>
+            </a:extLst>
+          </p:cNvPr>
+          <p:cNvSpPr>
+            <a:spLocks xmlns:a="http://schemas.openxmlformats.org/drawingml/2006/main" noGrp="1"/>
+          </p:cNvSpPr>
+          <p:nvPr/>
+        </p:nvSpPr>
+        <p:spPr>
+          <a:xfrm xmlns:a="http://schemas.openxmlformats.org/drawingml/2006/main">
+            <a:off x="6076950" y="3581400"/>
+            <a:ext cx="4762500" cy="304800"/>
+          </a:xfrm>
+          <a:prstGeom xmlns:a="http://schemas.openxmlformats.org/drawingml/2006/main" prst="rect">
+            <a:avLst/>
+          </a:prstGeom>
+          <a:noFill xmlns:a="http://schemas.openxmlformats.org/drawingml/2006/main"/>
+          <a:ln xmlns:a="http://schemas.openxmlformats.org/drawingml/2006/main" w="0">
+            <a:noFill/>
+            <a:prstDash val="solid"/>
+          </a:ln>
+        </p:spPr>
+        <p:txBody>
+          <a:bodyPr xmlns:a="http://schemas.openxmlformats.org/drawingml/2006/main"/>
+          <a:lstStyle xmlns:a="http://schemas.openxmlformats.org/drawingml/2006/main"/>
+          <a:p xmlns:a="http://schemas.openxmlformats.org/drawingml/2006/main">
+            <a:pPr algn="l">
+              <a:defRPr sz="1275" b="1">
+                <a:solidFill>
+                  <a:srgbClr val="1F5A7A"/>
+                </a:solidFill>
+              </a:defRPr>
+            </a:pPr>
+            <a:r>
+              <a:rPr sz="1275" b="1">
+                <a:solidFill>
+                  <a:srgbClr val="1F5A7A"/>
+                </a:solidFill>
+              </a:rPr>
+              <a:t>Observation</a:t>
+            </a:r>
+          </a:p>
+        </p:txBody>
+      </p:sp>
+      <p:sp>
+        <p:nvSpPr>
+          <p:cNvPr id="16" name="">
+            <a:extLst xmlns:a="http://schemas.openxmlformats.org/drawingml/2006/main">
+              <a:ext uri="{FF2B5EF4-FFF2-40B4-BE49-F238E27FC236}">
+                <a16:creationId xmlns:a16="http://schemas.microsoft.com/office/drawing/2014/main" id="{05523683-50DF-449D-9F53-0AC2974F7FCF}"/>
+              </a:ext>
+            </a:extLst>
+          </p:cNvPr>
+          <p:cNvSpPr>
+            <a:spLocks xmlns:a="http://schemas.openxmlformats.org/drawingml/2006/main" noGrp="1"/>
+          </p:cNvSpPr>
+          <p:nvPr/>
+        </p:nvSpPr>
+        <p:spPr>
+          <a:xfrm xmlns:a="http://schemas.openxmlformats.org/drawingml/2006/main">
+            <a:off x="914400" y="3943350"/>
+            <a:ext cx="9982200" cy="0"/>
+          </a:xfrm>
+          <a:prstGeom xmlns:a="http://schemas.openxmlformats.org/drawingml/2006/main" prst="line">
+            <a:avLst/>
+          </a:prstGeom>
+          <a:noFill xmlns:a="http://schemas.openxmlformats.org/drawingml/2006/main"/>
+          <a:ln xmlns:a="http://schemas.openxmlformats.org/drawingml/2006/main" w="19050">
             <a:solidFill>
               <a:srgbClr val="1F5A7A"/>
             </a:solidFill>
@@ -7144,72 +7435,22 @@
       </p:sp>
       <p:sp>
         <p:nvSpPr>
-          <p:cNvPr id="12" name="">
-            <a:extLst xmlns:a="http://schemas.openxmlformats.org/drawingml/2006/main">
-              <a:ext uri="{FF2B5EF4-FFF2-40B4-BE49-F238E27FC236}">
-                <a16:creationId xmlns:a16="http://schemas.microsoft.com/office/drawing/2014/main" id="{65C372EF-5381-432B-82E1-07AC4C71DCF0}"/>
-              </a:ext>
-            </a:extLst>
-          </p:cNvPr>
-          <p:cNvSpPr>
-            <a:spLocks xmlns:a="http://schemas.openxmlformats.org/drawingml/2006/main" noGrp="1"/>
-          </p:cNvSpPr>
-          <p:nvPr/>
-        </p:nvSpPr>
-        <p:spPr>
-          <a:xfrm xmlns:a="http://schemas.openxmlformats.org/drawingml/2006/main">
-            <a:off x="8839200" y="3162300"/>
-            <a:ext cx="1428750" cy="285750"/>
-          </a:xfrm>
-          <a:prstGeom xmlns:a="http://schemas.openxmlformats.org/drawingml/2006/main" prst="rect">
-            <a:avLst/>
-          </a:prstGeom>
-          <a:noFill xmlns:a="http://schemas.openxmlformats.org/drawingml/2006/main"/>
-          <a:ln xmlns:a="http://schemas.openxmlformats.org/drawingml/2006/main" w="0">
-            <a:noFill/>
-            <a:prstDash val="solid"/>
-          </a:ln>
-        </p:spPr>
-        <p:txBody>
-          <a:bodyPr xmlns:a="http://schemas.openxmlformats.org/drawingml/2006/main"/>
-          <a:lstStyle xmlns:a="http://schemas.openxmlformats.org/drawingml/2006/main"/>
-          <a:p xmlns:a="http://schemas.openxmlformats.org/drawingml/2006/main">
-            <a:pPr algn="r">
-              <a:defRPr sz="1500" b="1">
-                <a:solidFill>
-                  <a:srgbClr val="1F5A7A"/>
-                </a:solidFill>
-              </a:defRPr>
-            </a:pPr>
-            <a:r>
-              <a:rPr sz="1500" b="1">
-                <a:solidFill>
-                  <a:srgbClr val="1F5A7A"/>
-                </a:solidFill>
-              </a:rPr>
-              <a:t>527.03 s</a:t>
-            </a:r>
-          </a:p>
-        </p:txBody>
-      </p:sp>
-      <p:sp>
-        <p:nvSpPr>
-          <p:cNvPr id="13" name="">
-            <a:extLst xmlns:a="http://schemas.openxmlformats.org/drawingml/2006/main">
-              <a:ext uri="{FF2B5EF4-FFF2-40B4-BE49-F238E27FC236}">
-                <a16:creationId xmlns:a16="http://schemas.microsoft.com/office/drawing/2014/main" id="{514FE940-722E-4854-A8BF-AB9857802D23}"/>
-              </a:ext>
-            </a:extLst>
-          </p:cNvPr>
-          <p:cNvSpPr>
-            <a:spLocks xmlns:a="http://schemas.openxmlformats.org/drawingml/2006/main" noGrp="1"/>
-          </p:cNvSpPr>
-          <p:nvPr/>
-        </p:nvSpPr>
-        <p:spPr>
-          <a:xfrm xmlns:a="http://schemas.openxmlformats.org/drawingml/2006/main">
-            <a:off x="914400" y="4048125"/>
-            <a:ext cx="1143000" cy="285750"/>
+          <p:cNvPr id="17" name="">
+            <a:extLst xmlns:a="http://schemas.openxmlformats.org/drawingml/2006/main">
+              <a:ext uri="{FF2B5EF4-FFF2-40B4-BE49-F238E27FC236}">
+                <a16:creationId xmlns:a16="http://schemas.microsoft.com/office/drawing/2014/main" id="{E0FD9199-8A73-4546-AA74-B2A7A47D87B2}"/>
+              </a:ext>
+            </a:extLst>
+          </p:cNvPr>
+          <p:cNvSpPr>
+            <a:spLocks xmlns:a="http://schemas.openxmlformats.org/drawingml/2006/main" noGrp="1"/>
+          </p:cNvSpPr>
+          <p:nvPr/>
+        </p:nvSpPr>
+        <p:spPr>
+          <a:xfrm xmlns:a="http://schemas.openxmlformats.org/drawingml/2006/main">
+            <a:off x="990600" y="4057650"/>
+            <a:ext cx="2857500" cy="266700"/>
           </a:xfrm>
           <a:prstGeom xmlns:a="http://schemas.openxmlformats.org/drawingml/2006/main" prst="rect">
             <a:avLst/>
@@ -7225,161 +7466,141 @@
           <a:lstStyle xmlns:a="http://schemas.openxmlformats.org/drawingml/2006/main"/>
           <a:p xmlns:a="http://schemas.openxmlformats.org/drawingml/2006/main">
             <a:pPr algn="l">
-              <a:defRPr sz="1425" b="1">
+              <a:defRPr sz="1350" b="1">
                 <a:solidFill>
                   <a:srgbClr val="0F172A"/>
                 </a:solidFill>
               </a:defRPr>
             </a:pPr>
             <a:r>
-              <a:rPr sz="1425" b="1">
+              <a:rPr sz="1350" b="1">
                 <a:solidFill>
                   <a:srgbClr val="0F172A"/>
                 </a:solidFill>
               </a:rPr>
-              <a:t>Run 3</a:t>
-            </a:r>
-          </a:p>
-        </p:txBody>
-      </p:sp>
-      <p:sp>
-        <p:nvSpPr>
-          <p:cNvPr id="14" name="">
-            <a:extLst xmlns:a="http://schemas.openxmlformats.org/drawingml/2006/main">
-              <a:ext uri="{FF2B5EF4-FFF2-40B4-BE49-F238E27FC236}">
-                <a16:creationId xmlns:a16="http://schemas.microsoft.com/office/drawing/2014/main" id="{D6083F06-C226-4CDD-B61E-AFE359079309}"/>
-              </a:ext>
-            </a:extLst>
-          </p:cNvPr>
-          <p:cNvSpPr>
-            <a:spLocks xmlns:a="http://schemas.openxmlformats.org/drawingml/2006/main" noGrp="1"/>
-          </p:cNvSpPr>
-          <p:nvPr/>
-        </p:nvSpPr>
-        <p:spPr>
-          <a:xfrm xmlns:a="http://schemas.openxmlformats.org/drawingml/2006/main">
-            <a:off x="2095500" y="3943350"/>
-            <a:ext cx="6572250" cy="495300"/>
-          </a:xfrm>
-          <a:prstGeom xmlns:a="http://schemas.openxmlformats.org/drawingml/2006/main" prst="roundRect">
-            <a:avLst>
-              <a:gd name="adj" fmla="val 26923"/>
-            </a:avLst>
-          </a:prstGeom>
-          <a:solidFill xmlns:a="http://schemas.openxmlformats.org/drawingml/2006/main">
-            <a:srgbClr val="E7EEF4"/>
-          </a:solidFill>
-          <a:ln xmlns:a="http://schemas.openxmlformats.org/drawingml/2006/main" w="0">
-            <a:solidFill>
-              <a:srgbClr val="E7EEF4"/>
-            </a:solidFill>
-            <a:prstDash val="solid"/>
-          </a:ln>
-        </p:spPr>
-      </p:sp>
-      <p:sp>
-        <p:nvSpPr>
-          <p:cNvPr id="15" name="">
-            <a:extLst xmlns:a="http://schemas.openxmlformats.org/drawingml/2006/main">
-              <a:ext uri="{FF2B5EF4-FFF2-40B4-BE49-F238E27FC236}">
-                <a16:creationId xmlns:a16="http://schemas.microsoft.com/office/drawing/2014/main" id="{1D255EA1-8427-40FF-854B-B63184774572}"/>
-              </a:ext>
-            </a:extLst>
-          </p:cNvPr>
-          <p:cNvSpPr>
-            <a:spLocks xmlns:a="http://schemas.openxmlformats.org/drawingml/2006/main" noGrp="1"/>
-          </p:cNvSpPr>
-          <p:nvPr/>
-        </p:nvSpPr>
-        <p:spPr>
-          <a:xfrm xmlns:a="http://schemas.openxmlformats.org/drawingml/2006/main">
-            <a:off x="2095500" y="3943350"/>
-            <a:ext cx="6372827" cy="495300"/>
-          </a:xfrm>
-          <a:prstGeom xmlns:a="http://schemas.openxmlformats.org/drawingml/2006/main" prst="roundRect">
-            <a:avLst>
-              <a:gd name="adj" fmla="val 26923"/>
-            </a:avLst>
-          </a:prstGeom>
-          <a:solidFill xmlns:a="http://schemas.openxmlformats.org/drawingml/2006/main">
-            <a:srgbClr val="D59B32"/>
-          </a:solidFill>
-          <a:ln xmlns:a="http://schemas.openxmlformats.org/drawingml/2006/main" w="0">
-            <a:solidFill>
-              <a:srgbClr val="D59B32"/>
-            </a:solidFill>
-            <a:prstDash val="solid"/>
-          </a:ln>
-        </p:spPr>
-      </p:sp>
-      <p:sp>
-        <p:nvSpPr>
-          <p:cNvPr id="16" name="">
-            <a:extLst xmlns:a="http://schemas.openxmlformats.org/drawingml/2006/main">
-              <a:ext uri="{FF2B5EF4-FFF2-40B4-BE49-F238E27FC236}">
-                <a16:creationId xmlns:a16="http://schemas.microsoft.com/office/drawing/2014/main" id="{F559F7A7-00A5-47BB-B51E-4F435FA69793}"/>
-              </a:ext>
-            </a:extLst>
-          </p:cNvPr>
-          <p:cNvSpPr>
-            <a:spLocks xmlns:a="http://schemas.openxmlformats.org/drawingml/2006/main" noGrp="1"/>
-          </p:cNvSpPr>
-          <p:nvPr/>
-        </p:nvSpPr>
-        <p:spPr>
-          <a:xfrm xmlns:a="http://schemas.openxmlformats.org/drawingml/2006/main">
-            <a:off x="8839200" y="4038600"/>
-            <a:ext cx="1428750" cy="285750"/>
-          </a:xfrm>
-          <a:prstGeom xmlns:a="http://schemas.openxmlformats.org/drawingml/2006/main" prst="rect">
-            <a:avLst/>
-          </a:prstGeom>
-          <a:noFill xmlns:a="http://schemas.openxmlformats.org/drawingml/2006/main"/>
-          <a:ln xmlns:a="http://schemas.openxmlformats.org/drawingml/2006/main" w="0">
-            <a:noFill/>
-            <a:prstDash val="solid"/>
-          </a:ln>
-        </p:spPr>
-        <p:txBody>
-          <a:bodyPr xmlns:a="http://schemas.openxmlformats.org/drawingml/2006/main"/>
-          <a:lstStyle xmlns:a="http://schemas.openxmlformats.org/drawingml/2006/main"/>
-          <a:p xmlns:a="http://schemas.openxmlformats.org/drawingml/2006/main">
-            <a:pPr algn="r">
-              <a:defRPr sz="1500" b="1">
-                <a:solidFill>
-                  <a:srgbClr val="D59B32"/>
-                </a:solidFill>
-              </a:defRPr>
-            </a:pPr>
-            <a:r>
-              <a:rPr sz="1500" b="1">
-                <a:solidFill>
-                  <a:srgbClr val="D59B32"/>
-                </a:solidFill>
-              </a:rPr>
-              <a:t>593.43 s</a:t>
-            </a:r>
-          </a:p>
-        </p:txBody>
-      </p:sp>
-      <p:sp>
-        <p:nvSpPr>
-          <p:cNvPr id="17" name="">
-            <a:extLst xmlns:a="http://schemas.openxmlformats.org/drawingml/2006/main">
-              <a:ext uri="{FF2B5EF4-FFF2-40B4-BE49-F238E27FC236}">
-                <a16:creationId xmlns:a16="http://schemas.microsoft.com/office/drawing/2014/main" id="{6685A69C-F665-4856-B578-96283FBA0A5C}"/>
-              </a:ext>
-            </a:extLst>
-          </p:cNvPr>
-          <p:cNvSpPr>
-            <a:spLocks xmlns:a="http://schemas.openxmlformats.org/drawingml/2006/main" noGrp="1"/>
-          </p:cNvSpPr>
-          <p:nvPr/>
-        </p:nvSpPr>
-        <p:spPr>
-          <a:xfrm xmlns:a="http://schemas.openxmlformats.org/drawingml/2006/main">
-            <a:off x="2095500" y="4943475"/>
-            <a:ext cx="6572250" cy="0"/>
+              <a:t>Router complete</a:t>
+            </a:r>
+          </a:p>
+        </p:txBody>
+      </p:sp>
+      <p:sp>
+        <p:nvSpPr>
+          <p:cNvPr id="18" name="">
+            <a:extLst xmlns:a="http://schemas.openxmlformats.org/drawingml/2006/main">
+              <a:ext uri="{FF2B5EF4-FFF2-40B4-BE49-F238E27FC236}">
+                <a16:creationId xmlns:a16="http://schemas.microsoft.com/office/drawing/2014/main" id="{08CB6CC5-A343-442B-920D-7CBE1ACE8216}"/>
+              </a:ext>
+            </a:extLst>
+          </p:cNvPr>
+          <p:cNvSpPr>
+            <a:spLocks xmlns:a="http://schemas.openxmlformats.org/drawingml/2006/main" noGrp="1"/>
+          </p:cNvSpPr>
+          <p:nvPr/>
+        </p:nvSpPr>
+        <p:spPr>
+          <a:xfrm xmlns:a="http://schemas.openxmlformats.org/drawingml/2006/main">
+            <a:off x="4210050" y="4057650"/>
+            <a:ext cx="1619250" cy="266700"/>
+          </a:xfrm>
+          <a:prstGeom xmlns:a="http://schemas.openxmlformats.org/drawingml/2006/main" prst="rect">
+            <a:avLst/>
+          </a:prstGeom>
+          <a:noFill xmlns:a="http://schemas.openxmlformats.org/drawingml/2006/main"/>
+          <a:ln xmlns:a="http://schemas.openxmlformats.org/drawingml/2006/main" w="0">
+            <a:noFill/>
+            <a:prstDash val="solid"/>
+          </a:ln>
+        </p:spPr>
+        <p:txBody>
+          <a:bodyPr xmlns:a="http://schemas.openxmlformats.org/drawingml/2006/main"/>
+          <a:lstStyle xmlns:a="http://schemas.openxmlformats.org/drawingml/2006/main"/>
+          <a:p xmlns:a="http://schemas.openxmlformats.org/drawingml/2006/main">
+            <a:pPr algn="l">
+              <a:defRPr sz="1350" b="1">
+                <a:solidFill>
+                  <a:srgbClr val="2A8C82"/>
+                </a:solidFill>
+              </a:defRPr>
+            </a:pPr>
+            <a:r>
+              <a:rPr sz="1350" b="1">
+                <a:solidFill>
+                  <a:srgbClr val="2A8C82"/>
+                </a:solidFill>
+              </a:rPr>
+              <a:t>1:13.18</a:t>
+            </a:r>
+          </a:p>
+        </p:txBody>
+      </p:sp>
+      <p:sp>
+        <p:nvSpPr>
+          <p:cNvPr id="19" name="">
+            <a:extLst xmlns:a="http://schemas.openxmlformats.org/drawingml/2006/main">
+              <a:ext uri="{FF2B5EF4-FFF2-40B4-BE49-F238E27FC236}">
+                <a16:creationId xmlns:a16="http://schemas.microsoft.com/office/drawing/2014/main" id="{B99F02D2-E180-4A51-A250-EA58C41E6327}"/>
+              </a:ext>
+            </a:extLst>
+          </p:cNvPr>
+          <p:cNvSpPr>
+            <a:spLocks xmlns:a="http://schemas.openxmlformats.org/drawingml/2006/main" noGrp="1"/>
+          </p:cNvSpPr>
+          <p:nvPr/>
+        </p:nvSpPr>
+        <p:spPr>
+          <a:xfrm xmlns:a="http://schemas.openxmlformats.org/drawingml/2006/main">
+            <a:off x="6076950" y="4057650"/>
+            <a:ext cx="4762500" cy="266700"/>
+          </a:xfrm>
+          <a:prstGeom xmlns:a="http://schemas.openxmlformats.org/drawingml/2006/main" prst="rect">
+            <a:avLst/>
+          </a:prstGeom>
+          <a:noFill xmlns:a="http://schemas.openxmlformats.org/drawingml/2006/main"/>
+          <a:ln xmlns:a="http://schemas.openxmlformats.org/drawingml/2006/main" w="0">
+            <a:noFill/>
+            <a:prstDash val="solid"/>
+          </a:ln>
+        </p:spPr>
+        <p:txBody>
+          <a:bodyPr xmlns:a="http://schemas.openxmlformats.org/drawingml/2006/main"/>
+          <a:lstStyle xmlns:a="http://schemas.openxmlformats.org/drawingml/2006/main"/>
+          <a:p xmlns:a="http://schemas.openxmlformats.org/drawingml/2006/main">
+            <a:pPr algn="l">
+              <a:defRPr sz="1275" b="0">
+                <a:solidFill>
+                  <a:srgbClr val="526174"/>
+                </a:solidFill>
+              </a:defRPr>
+            </a:pPr>
+            <a:r>
+              <a:rPr sz="1275" b="0">
+                <a:solidFill>
+                  <a:srgbClr val="526174"/>
+                </a:solidFill>
+              </a:rPr>
+              <a:t>207 resolved; 4,793 abstained</a:t>
+            </a:r>
+          </a:p>
+        </p:txBody>
+      </p:sp>
+      <p:sp>
+        <p:nvSpPr>
+          <p:cNvPr id="20" name="">
+            <a:extLst xmlns:a="http://schemas.openxmlformats.org/drawingml/2006/main">
+              <a:ext uri="{FF2B5EF4-FFF2-40B4-BE49-F238E27FC236}">
+                <a16:creationId xmlns:a16="http://schemas.microsoft.com/office/drawing/2014/main" id="{C8200ADE-4408-4B0A-B9A3-64025057C727}"/>
+              </a:ext>
+            </a:extLst>
+          </p:cNvPr>
+          <p:cNvSpPr>
+            <a:spLocks xmlns:a="http://schemas.openxmlformats.org/drawingml/2006/main" noGrp="1"/>
+          </p:cNvSpPr>
+          <p:nvPr/>
+        </p:nvSpPr>
+        <p:spPr>
+          <a:xfrm xmlns:a="http://schemas.openxmlformats.org/drawingml/2006/main">
+            <a:off x="914400" y="4400550"/>
+            <a:ext cx="9982200" cy="0"/>
           </a:xfrm>
           <a:prstGeom xmlns:a="http://schemas.openxmlformats.org/drawingml/2006/main" prst="line">
             <a:avLst/>
@@ -7395,220 +7616,100 @@
       </p:sp>
       <p:sp>
         <p:nvSpPr>
-          <p:cNvPr id="18" name="">
-            <a:extLst xmlns:a="http://schemas.openxmlformats.org/drawingml/2006/main">
-              <a:ext uri="{FF2B5EF4-FFF2-40B4-BE49-F238E27FC236}">
-                <a16:creationId xmlns:a16="http://schemas.microsoft.com/office/drawing/2014/main" id="{CB157332-1B9D-46CE-8D29-CD4CAC731755}"/>
-              </a:ext>
-            </a:extLst>
-          </p:cNvPr>
-          <p:cNvSpPr>
-            <a:spLocks xmlns:a="http://schemas.openxmlformats.org/drawingml/2006/main" noGrp="1"/>
-          </p:cNvSpPr>
-          <p:nvPr/>
-        </p:nvSpPr>
-        <p:spPr>
-          <a:xfrm xmlns:a="http://schemas.openxmlformats.org/drawingml/2006/main">
-            <a:off x="6115050" y="5029200"/>
-            <a:ext cx="2552700" cy="228600"/>
-          </a:xfrm>
-          <a:prstGeom xmlns:a="http://schemas.openxmlformats.org/drawingml/2006/main" prst="rect">
-            <a:avLst/>
-          </a:prstGeom>
-          <a:noFill xmlns:a="http://schemas.openxmlformats.org/drawingml/2006/main"/>
-          <a:ln xmlns:a="http://schemas.openxmlformats.org/drawingml/2006/main" w="0">
-            <a:noFill/>
-            <a:prstDash val="solid"/>
-          </a:ln>
-        </p:spPr>
-        <p:txBody>
-          <a:bodyPr xmlns:a="http://schemas.openxmlformats.org/drawingml/2006/main"/>
-          <a:lstStyle xmlns:a="http://schemas.openxmlformats.org/drawingml/2006/main"/>
-          <a:p xmlns:a="http://schemas.openxmlformats.org/drawingml/2006/main">
-            <a:pPr algn="r">
-              <a:defRPr sz="1125" b="0">
-                <a:solidFill>
-                  <a:srgbClr val="526174"/>
-                </a:solidFill>
-              </a:defRPr>
-            </a:pPr>
-            <a:r>
-              <a:rPr sz="1125" b="0">
-                <a:solidFill>
-                  <a:srgbClr val="526174"/>
-                </a:solidFill>
-              </a:rPr>
-              <a:t>612 s conservative form value</a:t>
-            </a:r>
-          </a:p>
-        </p:txBody>
-      </p:sp>
-      <p:sp>
-        <p:nvSpPr>
-          <p:cNvPr id="19" name="">
-            <a:extLst xmlns:a="http://schemas.openxmlformats.org/drawingml/2006/main">
-              <a:ext uri="{FF2B5EF4-FFF2-40B4-BE49-F238E27FC236}">
-                <a16:creationId xmlns:a16="http://schemas.microsoft.com/office/drawing/2014/main" id="{BEB4366F-4289-42A4-A1F1-A2EE35909D0B}"/>
-              </a:ext>
-            </a:extLst>
-          </p:cNvPr>
-          <p:cNvSpPr>
-            <a:spLocks xmlns:a="http://schemas.openxmlformats.org/drawingml/2006/main" noGrp="1"/>
-          </p:cNvSpPr>
-          <p:nvPr/>
-        </p:nvSpPr>
-        <p:spPr>
-          <a:xfrm xmlns:a="http://schemas.openxmlformats.org/drawingml/2006/main">
-            <a:off x="1143000" y="5524500"/>
-            <a:ext cx="4667250" cy="590550"/>
-          </a:xfrm>
-          <a:prstGeom xmlns:a="http://schemas.openxmlformats.org/drawingml/2006/main" prst="roundRect">
-            <a:avLst>
-              <a:gd name="adj" fmla="val 22581"/>
-            </a:avLst>
-          </a:prstGeom>
-          <a:solidFill xmlns:a="http://schemas.openxmlformats.org/drawingml/2006/main">
-            <a:srgbClr val="DDF2EE"/>
-          </a:solidFill>
-          <a:ln xmlns:a="http://schemas.openxmlformats.org/drawingml/2006/main" w="9525">
-            <a:solidFill>
-              <a:srgbClr val="2A8C82"/>
-            </a:solidFill>
-            <a:prstDash val="solid"/>
-          </a:ln>
-        </p:spPr>
-      </p:sp>
-      <p:sp>
-        <p:nvSpPr>
-          <p:cNvPr id="20" name="">
-            <a:extLst xmlns:a="http://schemas.openxmlformats.org/drawingml/2006/main">
-              <a:ext uri="{FF2B5EF4-FFF2-40B4-BE49-F238E27FC236}">
-                <a16:creationId xmlns:a16="http://schemas.microsoft.com/office/drawing/2014/main" id="{FE30E318-DF02-4632-A78A-E9EBB21BE35B}"/>
-              </a:ext>
-            </a:extLst>
-          </p:cNvPr>
-          <p:cNvSpPr>
-            <a:spLocks xmlns:a="http://schemas.openxmlformats.org/drawingml/2006/main" noGrp="1"/>
-          </p:cNvSpPr>
-          <p:nvPr/>
-        </p:nvSpPr>
-        <p:spPr>
-          <a:xfrm xmlns:a="http://schemas.openxmlformats.org/drawingml/2006/main">
-            <a:off x="1371600" y="5676900"/>
-            <a:ext cx="4210050" cy="285750"/>
-          </a:xfrm>
-          <a:prstGeom xmlns:a="http://schemas.openxmlformats.org/drawingml/2006/main" prst="rect">
-            <a:avLst/>
-          </a:prstGeom>
-          <a:noFill xmlns:a="http://schemas.openxmlformats.org/drawingml/2006/main"/>
-          <a:ln xmlns:a="http://schemas.openxmlformats.org/drawingml/2006/main" w="0">
-            <a:noFill/>
-            <a:prstDash val="solid"/>
-          </a:ln>
-        </p:spPr>
-        <p:txBody>
-          <a:bodyPr xmlns:a="http://schemas.openxmlformats.org/drawingml/2006/main"/>
-          <a:lstStyle xmlns:a="http://schemas.openxmlformats.org/drawingml/2006/main"/>
-          <a:p xmlns:a="http://schemas.openxmlformats.org/drawingml/2006/main">
-            <a:pPr algn="ctr">
-              <a:defRPr sz="1425" b="1">
+          <p:cNvPr id="21" name="">
+            <a:extLst xmlns:a="http://schemas.openxmlformats.org/drawingml/2006/main">
+              <a:ext uri="{FF2B5EF4-FFF2-40B4-BE49-F238E27FC236}">
+                <a16:creationId xmlns:a16="http://schemas.microsoft.com/office/drawing/2014/main" id="{AB81DB35-BE33-4BAA-B44D-9A4FFA1E7511}"/>
+              </a:ext>
+            </a:extLst>
+          </p:cNvPr>
+          <p:cNvSpPr>
+            <a:spLocks xmlns:a="http://schemas.openxmlformats.org/drawingml/2006/main" noGrp="1"/>
+          </p:cNvSpPr>
+          <p:nvPr/>
+        </p:nvSpPr>
+        <p:spPr>
+          <a:xfrm xmlns:a="http://schemas.openxmlformats.org/drawingml/2006/main">
+            <a:off x="990600" y="4514850"/>
+            <a:ext cx="2857500" cy="266700"/>
+          </a:xfrm>
+          <a:prstGeom xmlns:a="http://schemas.openxmlformats.org/drawingml/2006/main" prst="rect">
+            <a:avLst/>
+          </a:prstGeom>
+          <a:noFill xmlns:a="http://schemas.openxmlformats.org/drawingml/2006/main"/>
+          <a:ln xmlns:a="http://schemas.openxmlformats.org/drawingml/2006/main" w="0">
+            <a:noFill/>
+            <a:prstDash val="solid"/>
+          </a:ln>
+        </p:spPr>
+        <p:txBody>
+          <a:bodyPr xmlns:a="http://schemas.openxmlformats.org/drawingml/2006/main"/>
+          <a:lstStyle xmlns:a="http://schemas.openxmlformats.org/drawingml/2006/main"/>
+          <a:p xmlns:a="http://schemas.openxmlformats.org/drawingml/2006/main">
+            <a:pPr algn="l">
+              <a:defRPr sz="1350" b="1">
+                <a:solidFill>
+                  <a:srgbClr val="0F172A"/>
+                </a:solidFill>
+              </a:defRPr>
+            </a:pPr>
+            <a:r>
+              <a:rPr sz="1350" b="1">
+                <a:solidFill>
+                  <a:srgbClr val="0F172A"/>
+                </a:solidFill>
+              </a:rPr>
+              <a:t>Model ready</a:t>
+            </a:r>
+          </a:p>
+        </p:txBody>
+      </p:sp>
+      <p:sp>
+        <p:nvSpPr>
+          <p:cNvPr id="22" name="">
+            <a:extLst xmlns:a="http://schemas.openxmlformats.org/drawingml/2006/main">
+              <a:ext uri="{FF2B5EF4-FFF2-40B4-BE49-F238E27FC236}">
+                <a16:creationId xmlns:a16="http://schemas.microsoft.com/office/drawing/2014/main" id="{FB13408D-9C58-4CC5-888B-9D981B3EF778}"/>
+              </a:ext>
+            </a:extLst>
+          </p:cNvPr>
+          <p:cNvSpPr>
+            <a:spLocks xmlns:a="http://schemas.openxmlformats.org/drawingml/2006/main" noGrp="1"/>
+          </p:cNvSpPr>
+          <p:nvPr/>
+        </p:nvSpPr>
+        <p:spPr>
+          <a:xfrm xmlns:a="http://schemas.openxmlformats.org/drawingml/2006/main">
+            <a:off x="4210050" y="4514850"/>
+            <a:ext cx="1619250" cy="266700"/>
+          </a:xfrm>
+          <a:prstGeom xmlns:a="http://schemas.openxmlformats.org/drawingml/2006/main" prst="rect">
+            <a:avLst/>
+          </a:prstGeom>
+          <a:noFill xmlns:a="http://schemas.openxmlformats.org/drawingml/2006/main"/>
+          <a:ln xmlns:a="http://schemas.openxmlformats.org/drawingml/2006/main" w="0">
+            <a:noFill/>
+            <a:prstDash val="solid"/>
+          </a:ln>
+        </p:spPr>
+        <p:txBody>
+          <a:bodyPr xmlns:a="http://schemas.openxmlformats.org/drawingml/2006/main"/>
+          <a:lstStyle xmlns:a="http://schemas.openxmlformats.org/drawingml/2006/main"/>
+          <a:p xmlns:a="http://schemas.openxmlformats.org/drawingml/2006/main">
+            <a:pPr algn="l">
+              <a:defRPr sz="1350" b="1">
                 <a:solidFill>
                   <a:srgbClr val="2A8C82"/>
                 </a:solidFill>
               </a:defRPr>
             </a:pPr>
             <a:r>
-              <a:rPr sz="1425" b="1">
+              <a:rPr sz="1350" b="1">
                 <a:solidFill>
                   <a:srgbClr val="2A8C82"/>
                 </a:solidFill>
               </a:rPr>
-              <a:t>5,000 same-mix rows: 14.60 min</a:t>
-            </a:r>
-          </a:p>
-        </p:txBody>
-      </p:sp>
-      <p:sp>
-        <p:nvSpPr>
-          <p:cNvPr id="21" name="">
-            <a:extLst xmlns:a="http://schemas.openxmlformats.org/drawingml/2006/main">
-              <a:ext uri="{FF2B5EF4-FFF2-40B4-BE49-F238E27FC236}">
-                <a16:creationId xmlns:a16="http://schemas.microsoft.com/office/drawing/2014/main" id="{03AD3186-BE05-4B59-8559-F04339714B27}"/>
-              </a:ext>
-            </a:extLst>
-          </p:cNvPr>
-          <p:cNvSpPr>
-            <a:spLocks xmlns:a="http://schemas.openxmlformats.org/drawingml/2006/main" noGrp="1"/>
-          </p:cNvSpPr>
-          <p:nvPr/>
-        </p:nvSpPr>
-        <p:spPr>
-          <a:xfrm xmlns:a="http://schemas.openxmlformats.org/drawingml/2006/main">
-            <a:off x="6381750" y="5524500"/>
-            <a:ext cx="4667250" cy="590550"/>
-          </a:xfrm>
-          <a:prstGeom xmlns:a="http://schemas.openxmlformats.org/drawingml/2006/main" prst="roundRect">
-            <a:avLst>
-              <a:gd name="adj" fmla="val 22581"/>
-            </a:avLst>
-          </a:prstGeom>
-          <a:solidFill xmlns:a="http://schemas.openxmlformats.org/drawingml/2006/main">
-            <a:srgbClr val="FBF0D8"/>
-          </a:solidFill>
-          <a:ln xmlns:a="http://schemas.openxmlformats.org/drawingml/2006/main" w="9525">
-            <a:solidFill>
-              <a:srgbClr val="D59B32"/>
-            </a:solidFill>
-            <a:prstDash val="solid"/>
-          </a:ln>
-        </p:spPr>
-      </p:sp>
-      <p:sp>
-        <p:nvSpPr>
-          <p:cNvPr id="22" name="">
-            <a:extLst xmlns:a="http://schemas.openxmlformats.org/drawingml/2006/main">
-              <a:ext uri="{FF2B5EF4-FFF2-40B4-BE49-F238E27FC236}">
-                <a16:creationId xmlns:a16="http://schemas.microsoft.com/office/drawing/2014/main" id="{7C4B09CC-5095-417B-AC0D-2B7BD4F6B915}"/>
-              </a:ext>
-            </a:extLst>
-          </p:cNvPr>
-          <p:cNvSpPr>
-            <a:spLocks xmlns:a="http://schemas.openxmlformats.org/drawingml/2006/main" noGrp="1"/>
-          </p:cNvSpPr>
-          <p:nvPr/>
-        </p:nvSpPr>
-        <p:spPr>
-          <a:xfrm xmlns:a="http://schemas.openxmlformats.org/drawingml/2006/main">
-            <a:off x="6610350" y="5676900"/>
-            <a:ext cx="4210050" cy="285750"/>
-          </a:xfrm>
-          <a:prstGeom xmlns:a="http://schemas.openxmlformats.org/drawingml/2006/main" prst="rect">
-            <a:avLst/>
-          </a:prstGeom>
-          <a:noFill xmlns:a="http://schemas.openxmlformats.org/drawingml/2006/main"/>
-          <a:ln xmlns:a="http://schemas.openxmlformats.org/drawingml/2006/main" w="0">
-            <a:noFill/>
-            <a:prstDash val="solid"/>
-          </a:ln>
-        </p:spPr>
-        <p:txBody>
-          <a:bodyPr xmlns:a="http://schemas.openxmlformats.org/drawingml/2006/main"/>
-          <a:lstStyle xmlns:a="http://schemas.openxmlformats.org/drawingml/2006/main"/>
-          <a:p xmlns:a="http://schemas.openxmlformats.org/drawingml/2006/main">
-            <a:pPr algn="ctr">
-              <a:defRPr sz="1425" b="1">
-                <a:solidFill>
-                  <a:srgbClr val="D59B32"/>
-                </a:solidFill>
-              </a:defRPr>
-            </a:pPr>
-            <a:r>
-              <a:rPr sz="1425" b="1">
-                <a:solidFill>
-                  <a:srgbClr val="D59B32"/>
-                </a:solidFill>
-              </a:rPr>
-              <a:t>all-uncertain estimate: 5.2 to 5.5 h</a:t>
+              <a:t>2:51.25</a:t>
             </a:r>
           </a:p>
         </p:txBody>
@@ -7618,19 +7719,69 @@
           <p:cNvPr id="23" name="">
             <a:extLst xmlns:a="http://schemas.openxmlformats.org/drawingml/2006/main">
               <a:ext uri="{FF2B5EF4-FFF2-40B4-BE49-F238E27FC236}">
-                <a16:creationId xmlns:a16="http://schemas.microsoft.com/office/drawing/2014/main" id="{B4DFB0EF-E188-426E-92CF-D4D82C7F531C}"/>
-              </a:ext>
-            </a:extLst>
-          </p:cNvPr>
-          <p:cNvSpPr>
-            <a:spLocks xmlns:a="http://schemas.openxmlformats.org/drawingml/2006/main" noGrp="1"/>
-          </p:cNvSpPr>
-          <p:nvPr/>
-        </p:nvSpPr>
-        <p:spPr>
-          <a:xfrm xmlns:a="http://schemas.openxmlformats.org/drawingml/2006/main">
-            <a:off x="685800" y="6372225"/>
-            <a:ext cx="10820400" cy="0"/>
+                <a16:creationId xmlns:a16="http://schemas.microsoft.com/office/drawing/2014/main" id="{3414BF85-A048-4FB1-869D-D29A7A43B76A}"/>
+              </a:ext>
+            </a:extLst>
+          </p:cNvPr>
+          <p:cNvSpPr>
+            <a:spLocks xmlns:a="http://schemas.openxmlformats.org/drawingml/2006/main" noGrp="1"/>
+          </p:cNvSpPr>
+          <p:nvPr/>
+        </p:nvSpPr>
+        <p:spPr>
+          <a:xfrm xmlns:a="http://schemas.openxmlformats.org/drawingml/2006/main">
+            <a:off x="6076950" y="4514850"/>
+            <a:ext cx="4762500" cy="266700"/>
+          </a:xfrm>
+          <a:prstGeom xmlns:a="http://schemas.openxmlformats.org/drawingml/2006/main" prst="rect">
+            <a:avLst/>
+          </a:prstGeom>
+          <a:noFill xmlns:a="http://schemas.openxmlformats.org/drawingml/2006/main"/>
+          <a:ln xmlns:a="http://schemas.openxmlformats.org/drawingml/2006/main" w="0">
+            <a:noFill/>
+            <a:prstDash val="solid"/>
+          </a:ln>
+        </p:spPr>
+        <p:txBody>
+          <a:bodyPr xmlns:a="http://schemas.openxmlformats.org/drawingml/2006/main"/>
+          <a:lstStyle xmlns:a="http://schemas.openxmlformats.org/drawingml/2006/main"/>
+          <a:p xmlns:a="http://schemas.openxmlformats.org/drawingml/2006/main">
+            <a:pPr algn="l">
+              <a:defRPr sz="1275" b="0">
+                <a:solidFill>
+                  <a:srgbClr val="526174"/>
+                </a:solidFill>
+              </a:defRPr>
+            </a:pPr>
+            <a:r>
+              <a:rPr sz="1275" b="0">
+                <a:solidFill>
+                  <a:srgbClr val="526174"/>
+                </a:solidFill>
+              </a:rPr>
+              <a:t>16.332 GiB Qwen across two T4 GPUs</a:t>
+            </a:r>
+          </a:p>
+        </p:txBody>
+      </p:sp>
+      <p:sp>
+        <p:nvSpPr>
+          <p:cNvPr id="24" name="">
+            <a:extLst xmlns:a="http://schemas.openxmlformats.org/drawingml/2006/main">
+              <a:ext uri="{FF2B5EF4-FFF2-40B4-BE49-F238E27FC236}">
+                <a16:creationId xmlns:a16="http://schemas.microsoft.com/office/drawing/2014/main" id="{87D0596C-B3F8-4B86-B230-A7B4F4C7AE8E}"/>
+              </a:ext>
+            </a:extLst>
+          </p:cNvPr>
+          <p:cNvSpPr>
+            <a:spLocks xmlns:a="http://schemas.openxmlformats.org/drawingml/2006/main" noGrp="1"/>
+          </p:cNvSpPr>
+          <p:nvPr/>
+        </p:nvSpPr>
+        <p:spPr>
+          <a:xfrm xmlns:a="http://schemas.openxmlformats.org/drawingml/2006/main">
+            <a:off x="914400" y="4857750"/>
+            <a:ext cx="9982200" cy="0"/>
           </a:xfrm>
           <a:prstGeom xmlns:a="http://schemas.openxmlformats.org/drawingml/2006/main" prst="line">
             <a:avLst/>
@@ -7646,10 +7797,392 @@
       </p:sp>
       <p:sp>
         <p:nvSpPr>
-          <p:cNvPr id="24" name="source-13">
-            <a:extLst xmlns:a="http://schemas.openxmlformats.org/drawingml/2006/main">
-              <a:ext uri="{FF2B5EF4-FFF2-40B4-BE49-F238E27FC236}">
-                <a16:creationId xmlns:a16="http://schemas.microsoft.com/office/drawing/2014/main" id="{914129A8-3E9B-4BA8-881A-416852027894}"/>
+          <p:cNvPr id="25" name="">
+            <a:extLst xmlns:a="http://schemas.openxmlformats.org/drawingml/2006/main">
+              <a:ext uri="{FF2B5EF4-FFF2-40B4-BE49-F238E27FC236}">
+                <a16:creationId xmlns:a16="http://schemas.microsoft.com/office/drawing/2014/main" id="{C6682827-27E7-43C0-AFA3-BE497243452C}"/>
+              </a:ext>
+            </a:extLst>
+          </p:cNvPr>
+          <p:cNvSpPr>
+            <a:spLocks xmlns:a="http://schemas.openxmlformats.org/drawingml/2006/main" noGrp="1"/>
+          </p:cNvSpPr>
+          <p:nvPr/>
+        </p:nvSpPr>
+        <p:spPr>
+          <a:xfrm xmlns:a="http://schemas.openxmlformats.org/drawingml/2006/main">
+            <a:off x="990600" y="4972050"/>
+            <a:ext cx="2857500" cy="266700"/>
+          </a:xfrm>
+          <a:prstGeom xmlns:a="http://schemas.openxmlformats.org/drawingml/2006/main" prst="rect">
+            <a:avLst/>
+          </a:prstGeom>
+          <a:noFill xmlns:a="http://schemas.openxmlformats.org/drawingml/2006/main"/>
+          <a:ln xmlns:a="http://schemas.openxmlformats.org/drawingml/2006/main" w="0">
+            <a:noFill/>
+            <a:prstDash val="solid"/>
+          </a:ln>
+        </p:spPr>
+        <p:txBody>
+          <a:bodyPr xmlns:a="http://schemas.openxmlformats.org/drawingml/2006/main"/>
+          <a:lstStyle xmlns:a="http://schemas.openxmlformats.org/drawingml/2006/main"/>
+          <a:p xmlns:a="http://schemas.openxmlformats.org/drawingml/2006/main">
+            <a:pPr algn="l">
+              <a:defRPr sz="1350" b="1">
+                <a:solidFill>
+                  <a:srgbClr val="0F172A"/>
+                </a:solidFill>
+              </a:defRPr>
+            </a:pPr>
+            <a:r>
+              <a:rPr sz="1350" b="1">
+                <a:solidFill>
+                  <a:srgbClr val="0F172A"/>
+                </a:solidFill>
+              </a:rPr>
+              <a:t>Judge complete</a:t>
+            </a:r>
+          </a:p>
+        </p:txBody>
+      </p:sp>
+      <p:sp>
+        <p:nvSpPr>
+          <p:cNvPr id="26" name="">
+            <a:extLst xmlns:a="http://schemas.openxmlformats.org/drawingml/2006/main">
+              <a:ext uri="{FF2B5EF4-FFF2-40B4-BE49-F238E27FC236}">
+                <a16:creationId xmlns:a16="http://schemas.microsoft.com/office/drawing/2014/main" id="{A8B7C5F1-F862-4EB0-9707-4743BE81D1F3}"/>
+              </a:ext>
+            </a:extLst>
+          </p:cNvPr>
+          <p:cNvSpPr>
+            <a:spLocks xmlns:a="http://schemas.openxmlformats.org/drawingml/2006/main" noGrp="1"/>
+          </p:cNvSpPr>
+          <p:nvPr/>
+        </p:nvSpPr>
+        <p:spPr>
+          <a:xfrm xmlns:a="http://schemas.openxmlformats.org/drawingml/2006/main">
+            <a:off x="4210050" y="4972050"/>
+            <a:ext cx="1619250" cy="266700"/>
+          </a:xfrm>
+          <a:prstGeom xmlns:a="http://schemas.openxmlformats.org/drawingml/2006/main" prst="rect">
+            <a:avLst/>
+          </a:prstGeom>
+          <a:noFill xmlns:a="http://schemas.openxmlformats.org/drawingml/2006/main"/>
+          <a:ln xmlns:a="http://schemas.openxmlformats.org/drawingml/2006/main" w="0">
+            <a:noFill/>
+            <a:prstDash val="solid"/>
+          </a:ln>
+        </p:spPr>
+        <p:txBody>
+          <a:bodyPr xmlns:a="http://schemas.openxmlformats.org/drawingml/2006/main"/>
+          <a:lstStyle xmlns:a="http://schemas.openxmlformats.org/drawingml/2006/main"/>
+          <a:p xmlns:a="http://schemas.openxmlformats.org/drawingml/2006/main">
+            <a:pPr algn="l">
+              <a:defRPr sz="1350" b="1">
+                <a:solidFill>
+                  <a:srgbClr val="D59B32"/>
+                </a:solidFill>
+              </a:defRPr>
+            </a:pPr>
+            <a:r>
+              <a:rPr sz="1350" b="1">
+                <a:solidFill>
+                  <a:srgbClr val="D59B32"/>
+                </a:solidFill>
+              </a:rPr>
+              <a:t>3:52:01.91</a:t>
+            </a:r>
+          </a:p>
+        </p:txBody>
+      </p:sp>
+      <p:sp>
+        <p:nvSpPr>
+          <p:cNvPr id="27" name="">
+            <a:extLst xmlns:a="http://schemas.openxmlformats.org/drawingml/2006/main">
+              <a:ext uri="{FF2B5EF4-FFF2-40B4-BE49-F238E27FC236}">
+                <a16:creationId xmlns:a16="http://schemas.microsoft.com/office/drawing/2014/main" id="{C0D0586E-7EFF-4049-9244-6DE85C7688CB}"/>
+              </a:ext>
+            </a:extLst>
+          </p:cNvPr>
+          <p:cNvSpPr>
+            <a:spLocks xmlns:a="http://schemas.openxmlformats.org/drawingml/2006/main" noGrp="1"/>
+          </p:cNvSpPr>
+          <p:nvPr/>
+        </p:nvSpPr>
+        <p:spPr>
+          <a:xfrm xmlns:a="http://schemas.openxmlformats.org/drawingml/2006/main">
+            <a:off x="6076950" y="4972050"/>
+            <a:ext cx="4762500" cy="266700"/>
+          </a:xfrm>
+          <a:prstGeom xmlns:a="http://schemas.openxmlformats.org/drawingml/2006/main" prst="rect">
+            <a:avLst/>
+          </a:prstGeom>
+          <a:noFill xmlns:a="http://schemas.openxmlformats.org/drawingml/2006/main"/>
+          <a:ln xmlns:a="http://schemas.openxmlformats.org/drawingml/2006/main" w="0">
+            <a:noFill/>
+            <a:prstDash val="solid"/>
+          </a:ln>
+        </p:spPr>
+        <p:txBody>
+          <a:bodyPr xmlns:a="http://schemas.openxmlformats.org/drawingml/2006/main"/>
+          <a:lstStyle xmlns:a="http://schemas.openxmlformats.org/drawingml/2006/main"/>
+          <a:p xmlns:a="http://schemas.openxmlformats.org/drawingml/2006/main">
+            <a:pPr algn="l">
+              <a:defRPr sz="1275" b="0">
+                <a:solidFill>
+                  <a:srgbClr val="526174"/>
+                </a:solidFill>
+              </a:defRPr>
+            </a:pPr>
+            <a:r>
+              <a:rPr sz="1275" b="0">
+                <a:solidFill>
+                  <a:srgbClr val="526174"/>
+                </a:solidFill>
+              </a:rPr>
+              <a:t>13,747.50 s; 0.349 rows/s</a:t>
+            </a:r>
+          </a:p>
+        </p:txBody>
+      </p:sp>
+      <p:sp>
+        <p:nvSpPr>
+          <p:cNvPr id="28" name="">
+            <a:extLst xmlns:a="http://schemas.openxmlformats.org/drawingml/2006/main">
+              <a:ext uri="{FF2B5EF4-FFF2-40B4-BE49-F238E27FC236}">
+                <a16:creationId xmlns:a16="http://schemas.microsoft.com/office/drawing/2014/main" id="{FA9EB0BA-C22C-4798-BF88-A833DB19445C}"/>
+              </a:ext>
+            </a:extLst>
+          </p:cNvPr>
+          <p:cNvSpPr>
+            <a:spLocks xmlns:a="http://schemas.openxmlformats.org/drawingml/2006/main" noGrp="1"/>
+          </p:cNvSpPr>
+          <p:nvPr/>
+        </p:nvSpPr>
+        <p:spPr>
+          <a:xfrm xmlns:a="http://schemas.openxmlformats.org/drawingml/2006/main">
+            <a:off x="914400" y="5314950"/>
+            <a:ext cx="9982200" cy="0"/>
+          </a:xfrm>
+          <a:prstGeom xmlns:a="http://schemas.openxmlformats.org/drawingml/2006/main" prst="line">
+            <a:avLst/>
+          </a:prstGeom>
+          <a:noFill xmlns:a="http://schemas.openxmlformats.org/drawingml/2006/main"/>
+          <a:ln xmlns:a="http://schemas.openxmlformats.org/drawingml/2006/main" w="9525">
+            <a:solidFill>
+              <a:srgbClr val="D8E0EA"/>
+            </a:solidFill>
+            <a:prstDash val="solid"/>
+          </a:ln>
+        </p:spPr>
+      </p:sp>
+      <p:sp>
+        <p:nvSpPr>
+          <p:cNvPr id="29" name="">
+            <a:extLst xmlns:a="http://schemas.openxmlformats.org/drawingml/2006/main">
+              <a:ext uri="{FF2B5EF4-FFF2-40B4-BE49-F238E27FC236}">
+                <a16:creationId xmlns:a16="http://schemas.microsoft.com/office/drawing/2014/main" id="{60696100-194C-4367-850A-4943C3E0C728}"/>
+              </a:ext>
+            </a:extLst>
+          </p:cNvPr>
+          <p:cNvSpPr>
+            <a:spLocks xmlns:a="http://schemas.openxmlformats.org/drawingml/2006/main" noGrp="1"/>
+          </p:cNvSpPr>
+          <p:nvPr/>
+        </p:nvSpPr>
+        <p:spPr>
+          <a:xfrm xmlns:a="http://schemas.openxmlformats.org/drawingml/2006/main">
+            <a:off x="1143000" y="5638800"/>
+            <a:ext cx="9906000" cy="476250"/>
+          </a:xfrm>
+          <a:prstGeom xmlns:a="http://schemas.openxmlformats.org/drawingml/2006/main" prst="roundRect">
+            <a:avLst>
+              <a:gd name="adj" fmla="val 28000"/>
+            </a:avLst>
+          </a:prstGeom>
+          <a:solidFill xmlns:a="http://schemas.openxmlformats.org/drawingml/2006/main">
+            <a:srgbClr val="E7EEF4"/>
+          </a:solidFill>
+          <a:ln xmlns:a="http://schemas.openxmlformats.org/drawingml/2006/main" w="9525">
+            <a:solidFill>
+              <a:srgbClr val="D8E0EA"/>
+            </a:solidFill>
+            <a:prstDash val="solid"/>
+          </a:ln>
+        </p:spPr>
+      </p:sp>
+      <p:sp>
+        <p:nvSpPr>
+          <p:cNvPr id="30" name="">
+            <a:extLst xmlns:a="http://schemas.openxmlformats.org/drawingml/2006/main">
+              <a:ext uri="{FF2B5EF4-FFF2-40B4-BE49-F238E27FC236}">
+                <a16:creationId xmlns:a16="http://schemas.microsoft.com/office/drawing/2014/main" id="{F12433B6-BD2A-4424-B620-A4761B878E25}"/>
+              </a:ext>
+            </a:extLst>
+          </p:cNvPr>
+          <p:cNvSpPr>
+            <a:spLocks xmlns:a="http://schemas.openxmlformats.org/drawingml/2006/main" noGrp="1"/>
+          </p:cNvSpPr>
+          <p:nvPr/>
+        </p:nvSpPr>
+        <p:spPr>
+          <a:xfrm xmlns:a="http://schemas.openxmlformats.org/drawingml/2006/main">
+            <a:off x="1143000" y="5638800"/>
+            <a:ext cx="4257675" cy="476250"/>
+          </a:xfrm>
+          <a:prstGeom xmlns:a="http://schemas.openxmlformats.org/drawingml/2006/main" prst="roundRect">
+            <a:avLst>
+              <a:gd name="adj" fmla="val 28000"/>
+            </a:avLst>
+          </a:prstGeom>
+          <a:solidFill xmlns:a="http://schemas.openxmlformats.org/drawingml/2006/main">
+            <a:srgbClr val="2A8C82"/>
+          </a:solidFill>
+          <a:ln xmlns:a="http://schemas.openxmlformats.org/drawingml/2006/main" w="0">
+            <a:solidFill>
+              <a:srgbClr val="2A8C82"/>
+            </a:solidFill>
+            <a:prstDash val="solid"/>
+          </a:ln>
+        </p:spPr>
+      </p:sp>
+      <p:sp>
+        <p:nvSpPr>
+          <p:cNvPr id="31" name="">
+            <a:extLst xmlns:a="http://schemas.openxmlformats.org/drawingml/2006/main">
+              <a:ext uri="{FF2B5EF4-FFF2-40B4-BE49-F238E27FC236}">
+                <a16:creationId xmlns:a16="http://schemas.microsoft.com/office/drawing/2014/main" id="{B221EDC2-2996-4CB6-ABA0-7980A27F62B4}"/>
+              </a:ext>
+            </a:extLst>
+          </p:cNvPr>
+          <p:cNvSpPr>
+            <a:spLocks xmlns:a="http://schemas.openxmlformats.org/drawingml/2006/main" noGrp="1"/>
+          </p:cNvSpPr>
+          <p:nvPr/>
+        </p:nvSpPr>
+        <p:spPr>
+          <a:xfrm xmlns:a="http://schemas.openxmlformats.org/drawingml/2006/main">
+            <a:off x="1352550" y="5762625"/>
+            <a:ext cx="3790950" cy="247650"/>
+          </a:xfrm>
+          <a:prstGeom xmlns:a="http://schemas.openxmlformats.org/drawingml/2006/main" prst="rect">
+            <a:avLst/>
+          </a:prstGeom>
+          <a:noFill xmlns:a="http://schemas.openxmlformats.org/drawingml/2006/main"/>
+          <a:ln xmlns:a="http://schemas.openxmlformats.org/drawingml/2006/main" w="0">
+            <a:noFill/>
+            <a:prstDash val="solid"/>
+          </a:ln>
+        </p:spPr>
+        <p:txBody>
+          <a:bodyPr xmlns:a="http://schemas.openxmlformats.org/drawingml/2006/main"/>
+          <a:lstStyle xmlns:a="http://schemas.openxmlformats.org/drawingml/2006/main"/>
+          <a:p xmlns:a="http://schemas.openxmlformats.org/drawingml/2006/main">
+            <a:pPr algn="ctr">
+              <a:defRPr sz="1275" b="1">
+                <a:solidFill>
+                  <a:srgbClr val="FFFFFF"/>
+                </a:solidFill>
+              </a:defRPr>
+            </a:pPr>
+            <a:r>
+              <a:rPr sz="1275" b="1">
+                <a:solidFill>
+                  <a:srgbClr val="FFFFFF"/>
+                </a:solidFill>
+              </a:rPr>
+              <a:t>42.97% of the 9-hour budget used</a:t>
+            </a:r>
+          </a:p>
+        </p:txBody>
+      </p:sp>
+      <p:sp>
+        <p:nvSpPr>
+          <p:cNvPr id="32" name="">
+            <a:extLst xmlns:a="http://schemas.openxmlformats.org/drawingml/2006/main">
+              <a:ext uri="{FF2B5EF4-FFF2-40B4-BE49-F238E27FC236}">
+                <a16:creationId xmlns:a16="http://schemas.microsoft.com/office/drawing/2014/main" id="{7957760A-1EE6-43FD-947F-44988EE4ED73}"/>
+              </a:ext>
+            </a:extLst>
+          </p:cNvPr>
+          <p:cNvSpPr>
+            <a:spLocks xmlns:a="http://schemas.openxmlformats.org/drawingml/2006/main" noGrp="1"/>
+          </p:cNvSpPr>
+          <p:nvPr/>
+        </p:nvSpPr>
+        <p:spPr>
+          <a:xfrm xmlns:a="http://schemas.openxmlformats.org/drawingml/2006/main">
+            <a:off x="7010400" y="5762625"/>
+            <a:ext cx="3619500" cy="247650"/>
+          </a:xfrm>
+          <a:prstGeom xmlns:a="http://schemas.openxmlformats.org/drawingml/2006/main" prst="rect">
+            <a:avLst/>
+          </a:prstGeom>
+          <a:noFill xmlns:a="http://schemas.openxmlformats.org/drawingml/2006/main"/>
+          <a:ln xmlns:a="http://schemas.openxmlformats.org/drawingml/2006/main" w="0">
+            <a:noFill/>
+            <a:prstDash val="solid"/>
+          </a:ln>
+        </p:spPr>
+        <p:txBody>
+          <a:bodyPr xmlns:a="http://schemas.openxmlformats.org/drawingml/2006/main"/>
+          <a:lstStyle xmlns:a="http://schemas.openxmlformats.org/drawingml/2006/main"/>
+          <a:p xmlns:a="http://schemas.openxmlformats.org/drawingml/2006/main">
+            <a:pPr algn="ctr">
+              <a:defRPr sz="1275" b="1">
+                <a:solidFill>
+                  <a:srgbClr val="1F5A7A"/>
+                </a:solidFill>
+              </a:defRPr>
+            </a:pPr>
+            <a:r>
+              <a:rPr sz="1275" b="1">
+                <a:solidFill>
+                  <a:srgbClr val="1F5A7A"/>
+                </a:solidFill>
+              </a:rPr>
+              <a:t>5:07:58 headroom</a:t>
+            </a:r>
+          </a:p>
+        </p:txBody>
+      </p:sp>
+      <p:sp>
+        <p:nvSpPr>
+          <p:cNvPr id="33" name="">
+            <a:extLst xmlns:a="http://schemas.openxmlformats.org/drawingml/2006/main">
+              <a:ext uri="{FF2B5EF4-FFF2-40B4-BE49-F238E27FC236}">
+                <a16:creationId xmlns:a16="http://schemas.microsoft.com/office/drawing/2014/main" id="{4DAB63A6-E77A-4903-ADF7-049857A80406}"/>
+              </a:ext>
+            </a:extLst>
+          </p:cNvPr>
+          <p:cNvSpPr>
+            <a:spLocks xmlns:a="http://schemas.openxmlformats.org/drawingml/2006/main" noGrp="1"/>
+          </p:cNvSpPr>
+          <p:nvPr/>
+        </p:nvSpPr>
+        <p:spPr>
+          <a:xfrm xmlns:a="http://schemas.openxmlformats.org/drawingml/2006/main">
+            <a:off x="685800" y="6372225"/>
+            <a:ext cx="10820400" cy="0"/>
+          </a:xfrm>
+          <a:prstGeom xmlns:a="http://schemas.openxmlformats.org/drawingml/2006/main" prst="line">
+            <a:avLst/>
+          </a:prstGeom>
+          <a:noFill xmlns:a="http://schemas.openxmlformats.org/drawingml/2006/main"/>
+          <a:ln xmlns:a="http://schemas.openxmlformats.org/drawingml/2006/main" w="9525">
+            <a:solidFill>
+              <a:srgbClr val="D8E0EA"/>
+            </a:solidFill>
+            <a:prstDash val="solid"/>
+          </a:ln>
+        </p:spPr>
+      </p:sp>
+      <p:sp>
+        <p:nvSpPr>
+          <p:cNvPr id="34" name="source-13">
+            <a:extLst xmlns:a="http://schemas.openxmlformats.org/drawingml/2006/main">
+              <a:ext uri="{FF2B5EF4-FFF2-40B4-BE49-F238E27FC236}">
+                <a16:creationId xmlns:a16="http://schemas.microsoft.com/office/drawing/2014/main" id="{3CCEB834-A50B-40CA-9433-6BEAC2B1EE59}"/>
               </a:ext>
             </a:extLst>
           </p:cNvPr>
@@ -7689,17 +8222,17 @@
                   <a:srgbClr val="526174"/>
                 </a:solidFill>
               </a:rPr>
-              <a:t>[7] Kaggle notebook versions 1 to 3, frozen output SHA and runtime records</a:t>
-            </a:r>
-          </a:p>
-        </p:txBody>
-      </p:sp>
-      <p:sp>
-        <p:nvSpPr>
-          <p:cNvPr id="25" name="page-13">
-            <a:extLst xmlns:a="http://schemas.openxmlformats.org/drawingml/2006/main">
-              <a:ext uri="{FF2B5EF4-FFF2-40B4-BE49-F238E27FC236}">
-                <a16:creationId xmlns:a16="http://schemas.microsoft.com/office/drawing/2014/main" id="{69B1991C-585C-45E3-93A8-43EA36AAB775}"/>
+              <a:t>[8] Organizer-executed Phase 2 notebook and runtime report</a:t>
+            </a:r>
+          </a:p>
+        </p:txBody>
+      </p:sp>
+      <p:sp>
+        <p:nvSpPr>
+          <p:cNvPr id="35" name="page-13">
+            <a:extLst xmlns:a="http://schemas.openxmlformats.org/drawingml/2006/main">
+              <a:ext uri="{FF2B5EF4-FFF2-40B4-BE49-F238E27FC236}">
+                <a16:creationId xmlns:a16="http://schemas.microsoft.com/office/drawing/2014/main" id="{FC4B6520-2F70-4C5F-9F24-8B8C612639FB}"/>
               </a:ext>
             </a:extLst>
           </p:cNvPr>
@@ -7747,7 +8280,7 @@
     </p:spTree>
     <p:extLst>
       <p:ext uri="{BB962C8B-B14F-4D97-AF65-F5344CB8AC3E}">
-        <p14:creationId xmlns:p14="http://schemas.microsoft.com/office/powerpoint/2010/main" val="1929103618"/>
+        <p14:creationId xmlns:p14="http://schemas.microsoft.com/office/powerpoint/2010/main" val="1732580769"/>
       </p:ext>
     </p:extLst>
   </p:cSld>
@@ -7775,10 +8308,10 @@
       </p:grpSpPr>
       <p:sp>
         <p:nvSpPr>
-          <p:cNvPr id="30" name="kicker-14">
-            <a:extLst xmlns:a="http://schemas.openxmlformats.org/drawingml/2006/main">
-              <a:ext uri="{FF2B5EF4-FFF2-40B4-BE49-F238E27FC236}">
-                <a16:creationId xmlns:a16="http://schemas.microsoft.com/office/drawing/2014/main" id="{08C26A14-BB34-4FAC-B82D-692B52503000}"/>
+          <p:cNvPr id="31" name="kicker-14">
+            <a:extLst xmlns:a="http://schemas.openxmlformats.org/drawingml/2006/main">
+              <a:ext uri="{FF2B5EF4-FFF2-40B4-BE49-F238E27FC236}">
+                <a16:creationId xmlns:a16="http://schemas.microsoft.com/office/drawing/2014/main" id="{291F37A5-A7F3-4F96-8B12-0C61857D0F62}"/>
               </a:ext>
             </a:extLst>
           </p:cNvPr>
@@ -7828,7 +8361,7 @@
           <p:cNvPr id="2" name="title-14">
             <a:extLst xmlns:a="http://schemas.openxmlformats.org/drawingml/2006/main">
               <a:ext uri="{FF2B5EF4-FFF2-40B4-BE49-F238E27FC236}">
-                <a16:creationId xmlns:a16="http://schemas.microsoft.com/office/drawing/2014/main" id="{C6953931-6178-458B-BBB7-576586540728}"/>
+                <a16:creationId xmlns:a16="http://schemas.microsoft.com/office/drawing/2014/main" id="{881D92EC-1E8F-40FF-BD7A-3E2379C50EF0}"/>
               </a:ext>
             </a:extLst>
           </p:cNvPr>
@@ -7868,7 +8401,7 @@
                   <a:srgbClr val="0F172A"/>
                 </a:solidFill>
               </a:rPr>
-              <a:t>Phase 2 widens the source mix, so abstention matters more</a:t>
+              <a:t>Phase 2 coverage fell from 93.72% to 4.14%</a:t>
             </a:r>
           </a:p>
         </p:txBody>
@@ -7878,7 +8411,7 @@
           <p:cNvPr id="3" name="">
             <a:extLst xmlns:a="http://schemas.openxmlformats.org/drawingml/2006/main">
               <a:ext uri="{FF2B5EF4-FFF2-40B4-BE49-F238E27FC236}">
-                <a16:creationId xmlns:a16="http://schemas.microsoft.com/office/drawing/2014/main" id="{ECCA668D-D0AC-4E73-9A9A-6C95A0B687E1}"/>
+                <a16:creationId xmlns:a16="http://schemas.microsoft.com/office/drawing/2014/main" id="{8361F6CD-A0D6-43AD-91B4-C5D5D21BCE27}"/>
               </a:ext>
             </a:extLst>
           </p:cNvPr>
@@ -7909,7 +8442,7 @@
           <p:cNvPr id="4" name="">
             <a:extLst xmlns:a="http://schemas.openxmlformats.org/drawingml/2006/main">
               <a:ext uri="{FF2B5EF4-FFF2-40B4-BE49-F238E27FC236}">
-                <a16:creationId xmlns:a16="http://schemas.microsoft.com/office/drawing/2014/main" id="{B8718CB7-A05D-4067-99B4-826ABC4DC98D}"/>
+                <a16:creationId xmlns:a16="http://schemas.microsoft.com/office/drawing/2014/main" id="{976D247C-4563-4BF4-B71C-5D29073F1A33}"/>
               </a:ext>
             </a:extLst>
           </p:cNvPr>
@@ -7959,7 +8492,7 @@
           <p:cNvPr id="5" name="">
             <a:extLst xmlns:a="http://schemas.openxmlformats.org/drawingml/2006/main">
               <a:ext uri="{FF2B5EF4-FFF2-40B4-BE49-F238E27FC236}">
-                <a16:creationId xmlns:a16="http://schemas.microsoft.com/office/drawing/2014/main" id="{C7011E96-6C23-4CA9-876B-2AED4333964C}"/>
+                <a16:creationId xmlns:a16="http://schemas.microsoft.com/office/drawing/2014/main" id="{860873A5-4D48-4299-A820-E88C8DA78977}"/>
               </a:ext>
             </a:extLst>
           </p:cNvPr>
@@ -8009,7 +8542,7 @@
           <p:cNvPr id="6" name="">
             <a:extLst xmlns:a="http://schemas.openxmlformats.org/drawingml/2006/main">
               <a:ext uri="{FF2B5EF4-FFF2-40B4-BE49-F238E27FC236}">
-                <a16:creationId xmlns:a16="http://schemas.microsoft.com/office/drawing/2014/main" id="{66172D70-A0CD-48D5-B842-98CA670A4CB0}"/>
+                <a16:creationId xmlns:a16="http://schemas.microsoft.com/office/drawing/2014/main" id="{C41BE78D-28BA-4D57-95CD-CB4F07409800}"/>
               </a:ext>
             </a:extLst>
           </p:cNvPr>
@@ -8059,7 +8592,7 @@
           <p:cNvPr id="7" name="">
             <a:extLst xmlns:a="http://schemas.openxmlformats.org/drawingml/2006/main">
               <a:ext uri="{FF2B5EF4-FFF2-40B4-BE49-F238E27FC236}">
-                <a16:creationId xmlns:a16="http://schemas.microsoft.com/office/drawing/2014/main" id="{CE6FD31F-9975-4E92-AABD-77FCC1941799}"/>
+                <a16:creationId xmlns:a16="http://schemas.microsoft.com/office/drawing/2014/main" id="{12B1AD68-8D83-4860-ABE3-A2EAF3399FB5}"/>
               </a:ext>
             </a:extLst>
           </p:cNvPr>
@@ -8090,7 +8623,7 @@
           <p:cNvPr id="8" name="">
             <a:extLst xmlns:a="http://schemas.openxmlformats.org/drawingml/2006/main">
               <a:ext uri="{FF2B5EF4-FFF2-40B4-BE49-F238E27FC236}">
-                <a16:creationId xmlns:a16="http://schemas.microsoft.com/office/drawing/2014/main" id="{67694C10-4191-405F-B732-8C9A6B38E994}"/>
+                <a16:creationId xmlns:a16="http://schemas.microsoft.com/office/drawing/2014/main" id="{300701DE-9274-4211-A0D7-757BF368F84B}"/>
               </a:ext>
             </a:extLst>
           </p:cNvPr>
@@ -8140,7 +8673,7 @@
           <p:cNvPr id="9" name="">
             <a:extLst xmlns:a="http://schemas.openxmlformats.org/drawingml/2006/main">
               <a:ext uri="{FF2B5EF4-FFF2-40B4-BE49-F238E27FC236}">
-                <a16:creationId xmlns:a16="http://schemas.microsoft.com/office/drawing/2014/main" id="{5A309530-9A4E-45AA-84CE-15B4E9928396}"/>
+                <a16:creationId xmlns:a16="http://schemas.microsoft.com/office/drawing/2014/main" id="{60CCBAA9-415C-45D4-AE38-3BD43215BEF3}"/>
               </a:ext>
             </a:extLst>
           </p:cNvPr>
@@ -8190,7 +8723,7 @@
           <p:cNvPr id="10" name="">
             <a:extLst xmlns:a="http://schemas.openxmlformats.org/drawingml/2006/main">
               <a:ext uri="{FF2B5EF4-FFF2-40B4-BE49-F238E27FC236}">
-                <a16:creationId xmlns:a16="http://schemas.microsoft.com/office/drawing/2014/main" id="{FD31221D-86A0-440C-9373-0FCA0D9EEB81}"/>
+                <a16:creationId xmlns:a16="http://schemas.microsoft.com/office/drawing/2014/main" id="{2B0A2FA6-C146-4340-8173-CAA71B8270EE}"/>
               </a:ext>
             </a:extLst>
           </p:cNvPr>
@@ -8221,7 +8754,7 @@
           <p:cNvPr id="11" name="">
             <a:extLst xmlns:a="http://schemas.openxmlformats.org/drawingml/2006/main">
               <a:ext uri="{FF2B5EF4-FFF2-40B4-BE49-F238E27FC236}">
-                <a16:creationId xmlns:a16="http://schemas.microsoft.com/office/drawing/2014/main" id="{B29E71B6-68F5-4430-9088-1CADECECD340}"/>
+                <a16:creationId xmlns:a16="http://schemas.microsoft.com/office/drawing/2014/main" id="{46FD06BF-67BC-408A-A9AB-CBF6F8CCBEEE}"/>
               </a:ext>
             </a:extLst>
           </p:cNvPr>
@@ -8271,7 +8804,7 @@
           <p:cNvPr id="12" name="">
             <a:extLst xmlns:a="http://schemas.openxmlformats.org/drawingml/2006/main">
               <a:ext uri="{FF2B5EF4-FFF2-40B4-BE49-F238E27FC236}">
-                <a16:creationId xmlns:a16="http://schemas.microsoft.com/office/drawing/2014/main" id="{588E853A-DD46-4FD1-91F1-6A4D6CAD357A}"/>
+                <a16:creationId xmlns:a16="http://schemas.microsoft.com/office/drawing/2014/main" id="{C3260796-715F-45F7-8560-F7421A0FA1EE}"/>
               </a:ext>
             </a:extLst>
           </p:cNvPr>
@@ -8321,7 +8854,7 @@
           <p:cNvPr id="13" name="">
             <a:extLst xmlns:a="http://schemas.openxmlformats.org/drawingml/2006/main">
               <a:ext uri="{FF2B5EF4-FFF2-40B4-BE49-F238E27FC236}">
-                <a16:creationId xmlns:a16="http://schemas.microsoft.com/office/drawing/2014/main" id="{BEDC108A-B1DD-446E-98E2-F17614A13513}"/>
+                <a16:creationId xmlns:a16="http://schemas.microsoft.com/office/drawing/2014/main" id="{6F989246-0DAE-4B71-A25B-96F797CAFC27}"/>
               </a:ext>
             </a:extLst>
           </p:cNvPr>
@@ -8352,7 +8885,7 @@
           <p:cNvPr id="14" name="">
             <a:extLst xmlns:a="http://schemas.openxmlformats.org/drawingml/2006/main">
               <a:ext uri="{FF2B5EF4-FFF2-40B4-BE49-F238E27FC236}">
-                <a16:creationId xmlns:a16="http://schemas.microsoft.com/office/drawing/2014/main" id="{6D1BC4E7-31BB-4E2B-A0FF-0849E0E9DE2B}"/>
+                <a16:creationId xmlns:a16="http://schemas.microsoft.com/office/drawing/2014/main" id="{9C8E8EA2-C622-424E-B093-912F24874840}"/>
               </a:ext>
             </a:extLst>
           </p:cNvPr>
@@ -8402,7 +8935,7 @@
           <p:cNvPr id="15" name="">
             <a:extLst xmlns:a="http://schemas.openxmlformats.org/drawingml/2006/main">
               <a:ext uri="{FF2B5EF4-FFF2-40B4-BE49-F238E27FC236}">
-                <a16:creationId xmlns:a16="http://schemas.microsoft.com/office/drawing/2014/main" id="{B3BAA34C-5D15-4DA5-8C17-8F4189E58E5E}"/>
+                <a16:creationId xmlns:a16="http://schemas.microsoft.com/office/drawing/2014/main" id="{4A194022-2026-4455-98CC-40F5597BA399}"/>
               </a:ext>
             </a:extLst>
           </p:cNvPr>
@@ -8452,7 +8985,7 @@
           <p:cNvPr id="16" name="">
             <a:extLst xmlns:a="http://schemas.openxmlformats.org/drawingml/2006/main">
               <a:ext uri="{FF2B5EF4-FFF2-40B4-BE49-F238E27FC236}">
-                <a16:creationId xmlns:a16="http://schemas.microsoft.com/office/drawing/2014/main" id="{F2CA0D3A-520D-4448-B5BE-B80901675613}"/>
+                <a16:creationId xmlns:a16="http://schemas.microsoft.com/office/drawing/2014/main" id="{F34106F7-B5C4-427D-94FA-B5141DD70FA5}"/>
               </a:ext>
             </a:extLst>
           </p:cNvPr>
@@ -8483,7 +9016,7 @@
           <p:cNvPr id="17" name="">
             <a:extLst xmlns:a="http://schemas.openxmlformats.org/drawingml/2006/main">
               <a:ext uri="{FF2B5EF4-FFF2-40B4-BE49-F238E27FC236}">
-                <a16:creationId xmlns:a16="http://schemas.microsoft.com/office/drawing/2014/main" id="{A8789183-8AC6-498A-9C6A-490E6BE2F66B}"/>
+                <a16:creationId xmlns:a16="http://schemas.microsoft.com/office/drawing/2014/main" id="{C32C9E7C-AE78-4E9B-A352-672BB11476A4}"/>
               </a:ext>
             </a:extLst>
           </p:cNvPr>
@@ -8516,7 +9049,7 @@
           <p:cNvPr id="18" name="">
             <a:extLst xmlns:a="http://schemas.openxmlformats.org/drawingml/2006/main">
               <a:ext uri="{FF2B5EF4-FFF2-40B4-BE49-F238E27FC236}">
-                <a16:creationId xmlns:a16="http://schemas.microsoft.com/office/drawing/2014/main" id="{A59C8E5F-0F21-4151-86AD-B4376F52CFCF}"/>
+                <a16:creationId xmlns:a16="http://schemas.microsoft.com/office/drawing/2014/main" id="{F3111735-34F1-46AA-B2F8-B54925D163A4}"/>
               </a:ext>
             </a:extLst>
           </p:cNvPr>
@@ -8549,7 +9082,7 @@
           <p:cNvPr id="19" name="">
             <a:extLst xmlns:a="http://schemas.openxmlformats.org/drawingml/2006/main">
               <a:ext uri="{FF2B5EF4-FFF2-40B4-BE49-F238E27FC236}">
-                <a16:creationId xmlns:a16="http://schemas.microsoft.com/office/drawing/2014/main" id="{0249D217-84C4-43DA-A02F-3792D6D1E62A}"/>
+                <a16:creationId xmlns:a16="http://schemas.microsoft.com/office/drawing/2014/main" id="{6EF31DA6-AEC5-4FC4-A72C-D92AFC79A903}"/>
               </a:ext>
             </a:extLst>
           </p:cNvPr>
@@ -8590,7 +9123,7 @@
           <p:cNvPr id="20" name="">
             <a:extLst xmlns:a="http://schemas.openxmlformats.org/drawingml/2006/main">
               <a:ext uri="{FF2B5EF4-FFF2-40B4-BE49-F238E27FC236}">
-                <a16:creationId xmlns:a16="http://schemas.microsoft.com/office/drawing/2014/main" id="{C4490D81-C25D-46F7-A275-AE83C2C049C9}"/>
+                <a16:creationId xmlns:a16="http://schemas.microsoft.com/office/drawing/2014/main" id="{A70B7AD4-0D79-4646-8549-E10A6528DC36}"/>
               </a:ext>
             </a:extLst>
           </p:cNvPr>
@@ -8640,7 +9173,7 @@
           <p:cNvPr id="21" name="">
             <a:extLst xmlns:a="http://schemas.openxmlformats.org/drawingml/2006/main">
               <a:ext uri="{FF2B5EF4-FFF2-40B4-BE49-F238E27FC236}">
-                <a16:creationId xmlns:a16="http://schemas.microsoft.com/office/drawing/2014/main" id="{14D5EBA9-7DA6-4F80-9A20-FCE688905596}"/>
+                <a16:creationId xmlns:a16="http://schemas.microsoft.com/office/drawing/2014/main" id="{5295740A-0B37-4FA4-808A-EFD5A4992C06}"/>
               </a:ext>
             </a:extLst>
           </p:cNvPr>
@@ -8724,7 +9257,7 @@
           <p:cNvPr id="22" name="">
             <a:extLst xmlns:a="http://schemas.openxmlformats.org/drawingml/2006/main">
               <a:ext uri="{FF2B5EF4-FFF2-40B4-BE49-F238E27FC236}">
-                <a16:creationId xmlns:a16="http://schemas.microsoft.com/office/drawing/2014/main" id="{DEA8CD74-708E-42C9-B51E-6CB11C1304AE}"/>
+                <a16:creationId xmlns:a16="http://schemas.microsoft.com/office/drawing/2014/main" id="{238A1720-0DFE-4F48-ACDC-C5887BBD0D82}"/>
               </a:ext>
             </a:extLst>
           </p:cNvPr>
@@ -8765,7 +9298,7 @@
           <p:cNvPr id="23" name="">
             <a:extLst xmlns:a="http://schemas.openxmlformats.org/drawingml/2006/main">
               <a:ext uri="{FF2B5EF4-FFF2-40B4-BE49-F238E27FC236}">
-                <a16:creationId xmlns:a16="http://schemas.microsoft.com/office/drawing/2014/main" id="{0446F2D3-D792-4059-A79F-E10A591FFBCD}"/>
+                <a16:creationId xmlns:a16="http://schemas.microsoft.com/office/drawing/2014/main" id="{37D67014-029B-4811-9C74-339A1A83D9C7}"/>
               </a:ext>
             </a:extLst>
           </p:cNvPr>
@@ -8815,7 +9348,7 @@
           <p:cNvPr id="24" name="">
             <a:extLst xmlns:a="http://schemas.openxmlformats.org/drawingml/2006/main">
               <a:ext uri="{FF2B5EF4-FFF2-40B4-BE49-F238E27FC236}">
-                <a16:creationId xmlns:a16="http://schemas.microsoft.com/office/drawing/2014/main" id="{6493AE42-22F9-4ADE-A9E0-2DB612442410}"/>
+                <a16:creationId xmlns:a16="http://schemas.microsoft.com/office/drawing/2014/main" id="{E6659E36-3C31-465E-8D4D-D6488D9B58DF}"/>
               </a:ext>
             </a:extLst>
           </p:cNvPr>
@@ -8899,7 +9432,7 @@
           <p:cNvPr id="25" name="">
             <a:extLst xmlns:a="http://schemas.openxmlformats.org/drawingml/2006/main">
               <a:ext uri="{FF2B5EF4-FFF2-40B4-BE49-F238E27FC236}">
-                <a16:creationId xmlns:a16="http://schemas.microsoft.com/office/drawing/2014/main" id="{EB393495-D758-45AD-8918-3680EFB362B9}"/>
+                <a16:creationId xmlns:a16="http://schemas.microsoft.com/office/drawing/2014/main" id="{E68070FC-7DEB-4604-8665-4F881B94EC88}"/>
               </a:ext>
             </a:extLst>
           </p:cNvPr>
@@ -8934,19 +9467,19 @@
           <p:cNvPr id="26" name="">
             <a:extLst xmlns:a="http://schemas.openxmlformats.org/drawingml/2006/main">
               <a:ext uri="{FF2B5EF4-FFF2-40B4-BE49-F238E27FC236}">
-                <a16:creationId xmlns:a16="http://schemas.microsoft.com/office/drawing/2014/main" id="{8EE6D0CD-66E1-4047-9747-F9CAD39F2BCD}"/>
-              </a:ext>
-            </a:extLst>
-          </p:cNvPr>
-          <p:cNvSpPr>
-            <a:spLocks xmlns:a="http://schemas.openxmlformats.org/drawingml/2006/main" noGrp="1"/>
-          </p:cNvSpPr>
-          <p:nvPr/>
-        </p:nvSpPr>
-        <p:spPr>
-          <a:xfrm xmlns:a="http://schemas.openxmlformats.org/drawingml/2006/main">
-            <a:off x="5162550" y="5238750"/>
-            <a:ext cx="5676900" cy="419100"/>
+                <a16:creationId xmlns:a16="http://schemas.microsoft.com/office/drawing/2014/main" id="{C7CFCF02-DC8A-4748-9F17-EB336B6709D6}"/>
+              </a:ext>
+            </a:extLst>
+          </p:cNvPr>
+          <p:cNvSpPr>
+            <a:spLocks xmlns:a="http://schemas.openxmlformats.org/drawingml/2006/main" noGrp="1"/>
+          </p:cNvSpPr>
+          <p:nvPr/>
+        </p:nvSpPr>
+        <p:spPr>
+          <a:xfrm xmlns:a="http://schemas.openxmlformats.org/drawingml/2006/main">
+            <a:off x="5086350" y="5181600"/>
+            <a:ext cx="5829300" cy="266700"/>
           </a:xfrm>
           <a:prstGeom xmlns:a="http://schemas.openxmlformats.org/drawingml/2006/main" prst="rect">
             <a:avLst/>
@@ -8962,19 +9495,19 @@
           <a:lstStyle xmlns:a="http://schemas.openxmlformats.org/drawingml/2006/main"/>
           <a:p xmlns:a="http://schemas.openxmlformats.org/drawingml/2006/main">
             <a:pPr algn="ctr">
-              <a:defRPr sz="1425" b="1">
+              <a:defRPr sz="1350" b="1">
                 <a:solidFill>
                   <a:srgbClr val="1F5A7A"/>
                 </a:solidFill>
               </a:defRPr>
             </a:pPr>
             <a:r>
-              <a:rPr sz="1425" b="1">
+              <a:rPr sz="1350" b="1">
                 <a:solidFill>
                   <a:srgbClr val="1F5A7A"/>
                 </a:solidFill>
               </a:rPr>
-              <a:t>Lower deterministic coverage raises runtime. It should not force weak evidence into a label.</a:t>
+              <a:t>Deterministic coverage: 93.72% in Phase 1 -&gt; 4.14% in Phase 2</a:t>
             </a:r>
           </a:p>
         </p:txBody>
@@ -8984,7 +9517,57 @@
           <p:cNvPr id="27" name="">
             <a:extLst xmlns:a="http://schemas.openxmlformats.org/drawingml/2006/main">
               <a:ext uri="{FF2B5EF4-FFF2-40B4-BE49-F238E27FC236}">
-                <a16:creationId xmlns:a16="http://schemas.microsoft.com/office/drawing/2014/main" id="{52B137CF-EB41-4A69-9838-11BE24013F89}"/>
+                <a16:creationId xmlns:a16="http://schemas.microsoft.com/office/drawing/2014/main" id="{9A530895-0EA7-48A6-8751-E442CEC58C00}"/>
+              </a:ext>
+            </a:extLst>
+          </p:cNvPr>
+          <p:cNvSpPr>
+            <a:spLocks xmlns:a="http://schemas.openxmlformats.org/drawingml/2006/main" noGrp="1"/>
+          </p:cNvSpPr>
+          <p:nvPr/>
+        </p:nvSpPr>
+        <p:spPr>
+          <a:xfrm xmlns:a="http://schemas.openxmlformats.org/drawingml/2006/main">
+            <a:off x="5086350" y="5505450"/>
+            <a:ext cx="5829300" cy="228600"/>
+          </a:xfrm>
+          <a:prstGeom xmlns:a="http://schemas.openxmlformats.org/drawingml/2006/main" prst="rect">
+            <a:avLst/>
+          </a:prstGeom>
+          <a:noFill xmlns:a="http://schemas.openxmlformats.org/drawingml/2006/main"/>
+          <a:ln xmlns:a="http://schemas.openxmlformats.org/drawingml/2006/main" w="0">
+            <a:noFill/>
+            <a:prstDash val="solid"/>
+          </a:ln>
+        </p:spPr>
+        <p:txBody>
+          <a:bodyPr xmlns:a="http://schemas.openxmlformats.org/drawingml/2006/main"/>
+          <a:lstStyle xmlns:a="http://schemas.openxmlformats.org/drawingml/2006/main"/>
+          <a:p xmlns:a="http://schemas.openxmlformats.org/drawingml/2006/main">
+            <a:pPr algn="ctr">
+              <a:defRPr sz="1275" b="0">
+                <a:solidFill>
+                  <a:srgbClr val="526174"/>
+                </a:solidFill>
+              </a:defRPr>
+            </a:pPr>
+            <a:r>
+              <a:rPr sz="1275" b="0">
+                <a:solidFill>
+                  <a:srgbClr val="526174"/>
+                </a:solidFill>
+              </a:rPr>
+              <a:t>The fixed judge absorbed the shift and still finished in 3:52:02.</a:t>
+            </a:r>
+          </a:p>
+        </p:txBody>
+      </p:sp>
+      <p:sp>
+        <p:nvSpPr>
+          <p:cNvPr id="28" name="">
+            <a:extLst xmlns:a="http://schemas.openxmlformats.org/drawingml/2006/main">
+              <a:ext uri="{FF2B5EF4-FFF2-40B4-BE49-F238E27FC236}">
+                <a16:creationId xmlns:a16="http://schemas.microsoft.com/office/drawing/2014/main" id="{4EDC1A55-600E-4C4E-9E72-2AED995C3480}"/>
               </a:ext>
             </a:extLst>
           </p:cNvPr>
@@ -9012,10 +9595,10 @@
       </p:sp>
       <p:sp>
         <p:nvSpPr>
-          <p:cNvPr id="28" name="source-14">
-            <a:extLst xmlns:a="http://schemas.openxmlformats.org/drawingml/2006/main">
-              <a:ext uri="{FF2B5EF4-FFF2-40B4-BE49-F238E27FC236}">
-                <a16:creationId xmlns:a16="http://schemas.microsoft.com/office/drawing/2014/main" id="{27144B3B-FE05-4724-A395-32502533155F}"/>
+          <p:cNvPr id="29" name="source-14">
+            <a:extLst xmlns:a="http://schemas.openxmlformats.org/drawingml/2006/main">
+              <a:ext uri="{FF2B5EF4-FFF2-40B4-BE49-F238E27FC236}">
+                <a16:creationId xmlns:a16="http://schemas.microsoft.com/office/drawing/2014/main" id="{2C7A9566-6CBA-49E2-BDE1-33B9C5CAB117}"/>
               </a:ext>
             </a:extLst>
           </p:cNvPr>
@@ -9055,17 +9638,17 @@
                   <a:srgbClr val="526174"/>
                 </a:solidFill>
               </a:rPr>
-              <a:t>[2] Organizer Phase 2 preview  [7] Held-out routing and runtime stress analysis</a:t>
-            </a:r>
-          </a:p>
-        </p:txBody>
-      </p:sp>
-      <p:sp>
-        <p:nvSpPr>
-          <p:cNvPr id="29" name="page-14">
-            <a:extLst xmlns:a="http://schemas.openxmlformats.org/drawingml/2006/main">
-              <a:ext uri="{FF2B5EF4-FFF2-40B4-BE49-F238E27FC236}">
-                <a16:creationId xmlns:a16="http://schemas.microsoft.com/office/drawing/2014/main" id="{F7D888FF-5EA6-4013-9EFF-4D40FE379062}"/>
+              <a:t>[2] Phase 2 source preview  [8] Measured held-out run</a:t>
+            </a:r>
+          </a:p>
+        </p:txBody>
+      </p:sp>
+      <p:sp>
+        <p:nvSpPr>
+          <p:cNvPr id="30" name="page-14">
+            <a:extLst xmlns:a="http://schemas.openxmlformats.org/drawingml/2006/main">
+              <a:ext uri="{FF2B5EF4-FFF2-40B4-BE49-F238E27FC236}">
+                <a16:creationId xmlns:a16="http://schemas.microsoft.com/office/drawing/2014/main" id="{BD383E7B-AA9A-4F26-A121-E5444FFC6215}"/>
               </a:ext>
             </a:extLst>
           </p:cNvPr>
@@ -9113,7 +9696,7 @@
     </p:spTree>
     <p:extLst>
       <p:ext uri="{BB962C8B-B14F-4D97-AF65-F5344CB8AC3E}">
-        <p14:creationId xmlns:p14="http://schemas.microsoft.com/office/powerpoint/2010/main" val="643366142"/>
+        <p14:creationId xmlns:p14="http://schemas.microsoft.com/office/powerpoint/2010/main" val="682103919"/>
       </p:ext>
     </p:extLst>
   </p:cSld>
@@ -9144,7 +9727,7 @@
           <p:cNvPr id="17" name="">
             <a:extLst xmlns:a="http://schemas.openxmlformats.org/drawingml/2006/main">
               <a:ext uri="{FF2B5EF4-FFF2-40B4-BE49-F238E27FC236}">
-                <a16:creationId xmlns:a16="http://schemas.microsoft.com/office/drawing/2014/main" id="{B7D46D60-BC96-4A8C-B3E8-D56FF56E9509}"/>
+                <a16:creationId xmlns:a16="http://schemas.microsoft.com/office/drawing/2014/main" id="{260B7B61-BFCB-4F79-81F1-EAB427A82326}"/>
               </a:ext>
             </a:extLst>
           </p:cNvPr>
@@ -9194,7 +9777,7 @@
           <p:cNvPr id="2" name="">
             <a:extLst xmlns:a="http://schemas.openxmlformats.org/drawingml/2006/main">
               <a:ext uri="{FF2B5EF4-FFF2-40B4-BE49-F238E27FC236}">
-                <a16:creationId xmlns:a16="http://schemas.microsoft.com/office/drawing/2014/main" id="{C52A164A-51BF-4387-9385-7FD81096892A}"/>
+                <a16:creationId xmlns:a16="http://schemas.microsoft.com/office/drawing/2014/main" id="{034B86AB-471A-4EB7-BCC8-3BB9D27CC1F4}"/>
               </a:ext>
             </a:extLst>
           </p:cNvPr>
@@ -9261,7 +9844,7 @@
           <p:cNvPr id="3" name="">
             <a:extLst xmlns:a="http://schemas.openxmlformats.org/drawingml/2006/main">
               <a:ext uri="{FF2B5EF4-FFF2-40B4-BE49-F238E27FC236}">
-                <a16:creationId xmlns:a16="http://schemas.microsoft.com/office/drawing/2014/main" id="{119CDF1C-1044-497A-ADFC-84D6264721EB}"/>
+                <a16:creationId xmlns:a16="http://schemas.microsoft.com/office/drawing/2014/main" id="{58E672CE-57FB-4529-9B6E-9CCA1B9E42CC}"/>
               </a:ext>
             </a:extLst>
           </p:cNvPr>
@@ -9311,7 +9894,7 @@
           <p:cNvPr id="4" name="">
             <a:extLst xmlns:a="http://schemas.openxmlformats.org/drawingml/2006/main">
               <a:ext uri="{FF2B5EF4-FFF2-40B4-BE49-F238E27FC236}">
-                <a16:creationId xmlns:a16="http://schemas.microsoft.com/office/drawing/2014/main" id="{AFEEB84E-0B61-4554-83B4-34C10F908118}"/>
+                <a16:creationId xmlns:a16="http://schemas.microsoft.com/office/drawing/2014/main" id="{C2E62DC8-C570-4198-B44C-3E78186AF09A}"/>
               </a:ext>
             </a:extLst>
           </p:cNvPr>
@@ -9361,7 +9944,7 @@
           <p:cNvPr id="5" name="">
             <a:extLst xmlns:a="http://schemas.openxmlformats.org/drawingml/2006/main">
               <a:ext uri="{FF2B5EF4-FFF2-40B4-BE49-F238E27FC236}">
-                <a16:creationId xmlns:a16="http://schemas.microsoft.com/office/drawing/2014/main" id="{2288E2C5-064D-45C2-B4B4-43D3AEAF7489}"/>
+                <a16:creationId xmlns:a16="http://schemas.microsoft.com/office/drawing/2014/main" id="{F93ED6E0-E48A-45E7-BF20-889527491733}"/>
               </a:ext>
             </a:extLst>
           </p:cNvPr>
@@ -9392,7 +9975,7 @@
           <p:cNvPr id="6" name="">
             <a:extLst xmlns:a="http://schemas.openxmlformats.org/drawingml/2006/main">
               <a:ext uri="{FF2B5EF4-FFF2-40B4-BE49-F238E27FC236}">
-                <a16:creationId xmlns:a16="http://schemas.microsoft.com/office/drawing/2014/main" id="{E1B24717-D398-4848-B02F-BBACB86D0EEA}"/>
+                <a16:creationId xmlns:a16="http://schemas.microsoft.com/office/drawing/2014/main" id="{9586C430-DF28-418B-8399-12F6538D3B64}"/>
               </a:ext>
             </a:extLst>
           </p:cNvPr>
@@ -9442,7 +10025,7 @@
           <p:cNvPr id="7" name="">
             <a:extLst xmlns:a="http://schemas.openxmlformats.org/drawingml/2006/main">
               <a:ext uri="{FF2B5EF4-FFF2-40B4-BE49-F238E27FC236}">
-                <a16:creationId xmlns:a16="http://schemas.microsoft.com/office/drawing/2014/main" id="{CCAB4505-6E2B-430E-B927-14C24E250E37}"/>
+                <a16:creationId xmlns:a16="http://schemas.microsoft.com/office/drawing/2014/main" id="{BE645C3F-FAC0-4E96-866A-CA78FDFC2697}"/>
               </a:ext>
             </a:extLst>
           </p:cNvPr>
@@ -9492,7 +10075,7 @@
           <p:cNvPr id="8" name="">
             <a:extLst xmlns:a="http://schemas.openxmlformats.org/drawingml/2006/main">
               <a:ext uri="{FF2B5EF4-FFF2-40B4-BE49-F238E27FC236}">
-                <a16:creationId xmlns:a16="http://schemas.microsoft.com/office/drawing/2014/main" id="{4F08A49B-4437-4374-81E4-EE6D39A52D95}"/>
+                <a16:creationId xmlns:a16="http://schemas.microsoft.com/office/drawing/2014/main" id="{30660CA4-890C-40B5-8EEF-EE58C498074B}"/>
               </a:ext>
             </a:extLst>
           </p:cNvPr>
@@ -9523,7 +10106,7 @@
           <p:cNvPr id="9" name="">
             <a:extLst xmlns:a="http://schemas.openxmlformats.org/drawingml/2006/main">
               <a:ext uri="{FF2B5EF4-FFF2-40B4-BE49-F238E27FC236}">
-                <a16:creationId xmlns:a16="http://schemas.microsoft.com/office/drawing/2014/main" id="{3DB8428B-53F1-4A47-B9E0-EF19D58ACC0A}"/>
+                <a16:creationId xmlns:a16="http://schemas.microsoft.com/office/drawing/2014/main" id="{BDEF5D2B-2616-4435-B7C4-E6C98EC005F4}"/>
               </a:ext>
             </a:extLst>
           </p:cNvPr>
@@ -9573,7 +10156,7 @@
           <p:cNvPr id="10" name="">
             <a:extLst xmlns:a="http://schemas.openxmlformats.org/drawingml/2006/main">
               <a:ext uri="{FF2B5EF4-FFF2-40B4-BE49-F238E27FC236}">
-                <a16:creationId xmlns:a16="http://schemas.microsoft.com/office/drawing/2014/main" id="{671D259B-158D-408D-9A6B-00BE74B890E0}"/>
+                <a16:creationId xmlns:a16="http://schemas.microsoft.com/office/drawing/2014/main" id="{D2AC6F45-8EE3-43B1-BB69-54D237BBF4DF}"/>
               </a:ext>
             </a:extLst>
           </p:cNvPr>
@@ -9613,7 +10196,7 @@
                   <a:srgbClr val="0F172A"/>
                 </a:solidFill>
               </a:rPr>
-              <a:t>Selective judging made inference faster and more reproducible.</a:t>
+              <a:t>The fixed judge preserved compliance when source coverage collapsed.</a:t>
             </a:r>
           </a:p>
         </p:txBody>
@@ -9623,7 +10206,7 @@
           <p:cNvPr id="11" name="">
             <a:extLst xmlns:a="http://schemas.openxmlformats.org/drawingml/2006/main">
               <a:ext uri="{FF2B5EF4-FFF2-40B4-BE49-F238E27FC236}">
-                <a16:creationId xmlns:a16="http://schemas.microsoft.com/office/drawing/2014/main" id="{2B099257-0B61-4244-A651-2B9DCDB2F2E4}"/>
+                <a16:creationId xmlns:a16="http://schemas.microsoft.com/office/drawing/2014/main" id="{9741CCC8-12AA-481B-A86F-8F431C7B1131}"/>
               </a:ext>
             </a:extLst>
           </p:cNvPr>
@@ -9654,7 +10237,7 @@
           <p:cNvPr id="12" name="">
             <a:extLst xmlns:a="http://schemas.openxmlformats.org/drawingml/2006/main">
               <a:ext uri="{FF2B5EF4-FFF2-40B4-BE49-F238E27FC236}">
-                <a16:creationId xmlns:a16="http://schemas.microsoft.com/office/drawing/2014/main" id="{FE6691BA-E369-4245-9841-AB68824A9E3F}"/>
+                <a16:creationId xmlns:a16="http://schemas.microsoft.com/office/drawing/2014/main" id="{3C0E214F-0A31-4A5C-A9CE-E8CFB18A7B50}"/>
               </a:ext>
             </a:extLst>
           </p:cNvPr>
@@ -9704,7 +10287,7 @@
           <p:cNvPr id="13" name="">
             <a:extLst xmlns:a="http://schemas.openxmlformats.org/drawingml/2006/main">
               <a:ext uri="{FF2B5EF4-FFF2-40B4-BE49-F238E27FC236}">
-                <a16:creationId xmlns:a16="http://schemas.microsoft.com/office/drawing/2014/main" id="{3396DE8A-655D-4662-9C83-1AA2D76CA0E6}"/>
+                <a16:creationId xmlns:a16="http://schemas.microsoft.com/office/drawing/2014/main" id="{87CE1D61-865E-4DBA-A2D2-EC3A5D6F0CD0}"/>
               </a:ext>
             </a:extLst>
           </p:cNvPr>
@@ -9754,7 +10337,7 @@
           <p:cNvPr id="14" name="">
             <a:extLst xmlns:a="http://schemas.openxmlformats.org/drawingml/2006/main">
               <a:ext uri="{FF2B5EF4-FFF2-40B4-BE49-F238E27FC236}">
-                <a16:creationId xmlns:a16="http://schemas.microsoft.com/office/drawing/2014/main" id="{C5EF9A95-E185-4938-8AA1-25A08E40201C}"/>
+                <a16:creationId xmlns:a16="http://schemas.microsoft.com/office/drawing/2014/main" id="{2BDEFD64-3ED4-4801-B53E-79B86450774F}"/>
               </a:ext>
             </a:extLst>
           </p:cNvPr>
@@ -9785,7 +10368,7 @@
           <p:cNvPr id="15" name="">
             <a:extLst xmlns:a="http://schemas.openxmlformats.org/drawingml/2006/main">
               <a:ext uri="{FF2B5EF4-FFF2-40B4-BE49-F238E27FC236}">
-                <a16:creationId xmlns:a16="http://schemas.microsoft.com/office/drawing/2014/main" id="{82503043-059F-4FAE-8133-001251403DDA}"/>
+                <a16:creationId xmlns:a16="http://schemas.microsoft.com/office/drawing/2014/main" id="{8F55F929-80FE-49A1-A622-27434E11DC5B}"/>
               </a:ext>
             </a:extLst>
           </p:cNvPr>
@@ -9835,7 +10418,7 @@
           <p:cNvPr id="16" name="">
             <a:extLst xmlns:a="http://schemas.openxmlformats.org/drawingml/2006/main">
               <a:ext uri="{FF2B5EF4-FFF2-40B4-BE49-F238E27FC236}">
-                <a16:creationId xmlns:a16="http://schemas.microsoft.com/office/drawing/2014/main" id="{007A285A-FA12-4B7D-8378-3CDE70D124B5}"/>
+                <a16:creationId xmlns:a16="http://schemas.microsoft.com/office/drawing/2014/main" id="{FC0D884C-4C61-4334-9C1B-37358F81795A}"/>
               </a:ext>
             </a:extLst>
           </p:cNvPr>
@@ -9883,7 +10466,7 @@
     </p:spTree>
     <p:extLst>
       <p:ext uri="{BB962C8B-B14F-4D97-AF65-F5344CB8AC3E}">
-        <p14:creationId xmlns:p14="http://schemas.microsoft.com/office/powerpoint/2010/main" val="1876884086"/>
+        <p14:creationId xmlns:p14="http://schemas.microsoft.com/office/powerpoint/2010/main" val="275792063"/>
       </p:ext>
     </p:extLst>
   </p:cSld>
@@ -9914,7 +10497,7 @@
           <p:cNvPr id="30" name="kicker-2">
             <a:extLst xmlns:a="http://schemas.openxmlformats.org/drawingml/2006/main">
               <a:ext uri="{FF2B5EF4-FFF2-40B4-BE49-F238E27FC236}">
-                <a16:creationId xmlns:a16="http://schemas.microsoft.com/office/drawing/2014/main" id="{084FE228-C260-4B07-9947-33FEFD51A6A9}"/>
+                <a16:creationId xmlns:a16="http://schemas.microsoft.com/office/drawing/2014/main" id="{A318FEE3-8EFA-4E68-9F14-24C6989A5924}"/>
               </a:ext>
             </a:extLst>
           </p:cNvPr>
@@ -9964,7 +10547,7 @@
           <p:cNvPr id="2" name="title-2">
             <a:extLst xmlns:a="http://schemas.openxmlformats.org/drawingml/2006/main">
               <a:ext uri="{FF2B5EF4-FFF2-40B4-BE49-F238E27FC236}">
-                <a16:creationId xmlns:a16="http://schemas.microsoft.com/office/drawing/2014/main" id="{03F9D40E-ADD4-4274-983C-3BF25C360C7F}"/>
+                <a16:creationId xmlns:a16="http://schemas.microsoft.com/office/drawing/2014/main" id="{0DA09158-8015-4676-8498-38FAC027D44A}"/>
               </a:ext>
             </a:extLst>
           </p:cNvPr>
@@ -10014,7 +10597,7 @@
           <p:cNvPr id="3" name="">
             <a:extLst xmlns:a="http://schemas.openxmlformats.org/drawingml/2006/main">
               <a:ext uri="{FF2B5EF4-FFF2-40B4-BE49-F238E27FC236}">
-                <a16:creationId xmlns:a16="http://schemas.microsoft.com/office/drawing/2014/main" id="{A0BC24D1-CF5C-4DAE-B763-2AF5FAFA1D49}"/>
+                <a16:creationId xmlns:a16="http://schemas.microsoft.com/office/drawing/2014/main" id="{CA928414-AD03-41A5-B611-4883B0AF38EF}"/>
               </a:ext>
             </a:extLst>
           </p:cNvPr>
@@ -10045,7 +10628,7 @@
           <p:cNvPr id="4" name="">
             <a:extLst xmlns:a="http://schemas.openxmlformats.org/drawingml/2006/main">
               <a:ext uri="{FF2B5EF4-FFF2-40B4-BE49-F238E27FC236}">
-                <a16:creationId xmlns:a16="http://schemas.microsoft.com/office/drawing/2014/main" id="{DC4A647E-6372-4D3A-B6FC-83322C2C03DF}"/>
+                <a16:creationId xmlns:a16="http://schemas.microsoft.com/office/drawing/2014/main" id="{715BC2E0-1A0B-4189-B85E-5110AFDABA63}"/>
               </a:ext>
             </a:extLst>
           </p:cNvPr>
@@ -10095,7 +10678,7 @@
           <p:cNvPr id="5" name="">
             <a:extLst xmlns:a="http://schemas.openxmlformats.org/drawingml/2006/main">
               <a:ext uri="{FF2B5EF4-FFF2-40B4-BE49-F238E27FC236}">
-                <a16:creationId xmlns:a16="http://schemas.microsoft.com/office/drawing/2014/main" id="{BAA93FD3-85F5-49B1-A676-ECF863ABB717}"/>
+                <a16:creationId xmlns:a16="http://schemas.microsoft.com/office/drawing/2014/main" id="{F8FA7799-7E8A-4E16-B6F5-7769BFB03037}"/>
               </a:ext>
             </a:extLst>
           </p:cNvPr>
@@ -10126,7 +10709,7 @@
           <p:cNvPr id="6" name="">
             <a:extLst xmlns:a="http://schemas.openxmlformats.org/drawingml/2006/main">
               <a:ext uri="{FF2B5EF4-FFF2-40B4-BE49-F238E27FC236}">
-                <a16:creationId xmlns:a16="http://schemas.microsoft.com/office/drawing/2014/main" id="{1ADD32C6-524A-4601-BA71-420FC208CB6E}"/>
+                <a16:creationId xmlns:a16="http://schemas.microsoft.com/office/drawing/2014/main" id="{4790944D-ECAA-4642-91F9-DB3C9873D195}"/>
               </a:ext>
             </a:extLst>
           </p:cNvPr>
@@ -10159,7 +10742,7 @@
           <p:cNvPr id="7" name="">
             <a:extLst xmlns:a="http://schemas.openxmlformats.org/drawingml/2006/main">
               <a:ext uri="{FF2B5EF4-FFF2-40B4-BE49-F238E27FC236}">
-                <a16:creationId xmlns:a16="http://schemas.microsoft.com/office/drawing/2014/main" id="{3624F3AF-8C77-474B-B595-3C5CD5A0B6F9}"/>
+                <a16:creationId xmlns:a16="http://schemas.microsoft.com/office/drawing/2014/main" id="{791D905E-1BEA-4DF9-9620-8707DC5C94D7}"/>
               </a:ext>
             </a:extLst>
           </p:cNvPr>
@@ -10209,7 +10792,7 @@
           <p:cNvPr id="8" name="">
             <a:extLst xmlns:a="http://schemas.openxmlformats.org/drawingml/2006/main">
               <a:ext uri="{FF2B5EF4-FFF2-40B4-BE49-F238E27FC236}">
-                <a16:creationId xmlns:a16="http://schemas.microsoft.com/office/drawing/2014/main" id="{3F24C246-E403-455E-8734-684B117CD159}"/>
+                <a16:creationId xmlns:a16="http://schemas.microsoft.com/office/drawing/2014/main" id="{98D091F1-92D1-4E5E-8193-1855AF62EAAB}"/>
               </a:ext>
             </a:extLst>
           </p:cNvPr>
@@ -10259,7 +10842,7 @@
           <p:cNvPr id="9" name="">
             <a:extLst xmlns:a="http://schemas.openxmlformats.org/drawingml/2006/main">
               <a:ext uri="{FF2B5EF4-FFF2-40B4-BE49-F238E27FC236}">
-                <a16:creationId xmlns:a16="http://schemas.microsoft.com/office/drawing/2014/main" id="{39F5DDFA-15AC-4692-85A1-580D3E3DEFF8}"/>
+                <a16:creationId xmlns:a16="http://schemas.microsoft.com/office/drawing/2014/main" id="{D9BD19CA-E909-48B8-A80A-DC80B8DE0A42}"/>
               </a:ext>
             </a:extLst>
           </p:cNvPr>
@@ -10292,7 +10875,7 @@
           <p:cNvPr id="10" name="">
             <a:extLst xmlns:a="http://schemas.openxmlformats.org/drawingml/2006/main">
               <a:ext uri="{FF2B5EF4-FFF2-40B4-BE49-F238E27FC236}">
-                <a16:creationId xmlns:a16="http://schemas.microsoft.com/office/drawing/2014/main" id="{F1767DD8-0AFA-4E73-BE26-EE364CD708BD}"/>
+                <a16:creationId xmlns:a16="http://schemas.microsoft.com/office/drawing/2014/main" id="{86A2E78D-E86A-44BB-A8D9-9CEDDE119216}"/>
               </a:ext>
             </a:extLst>
           </p:cNvPr>
@@ -10342,7 +10925,7 @@
           <p:cNvPr id="11" name="">
             <a:extLst xmlns:a="http://schemas.openxmlformats.org/drawingml/2006/main">
               <a:ext uri="{FF2B5EF4-FFF2-40B4-BE49-F238E27FC236}">
-                <a16:creationId xmlns:a16="http://schemas.microsoft.com/office/drawing/2014/main" id="{C72786E8-3A8B-4AFB-B278-C77AA49E8998}"/>
+                <a16:creationId xmlns:a16="http://schemas.microsoft.com/office/drawing/2014/main" id="{E793766B-7F76-47E8-8DD8-E0C22782833A}"/>
               </a:ext>
             </a:extLst>
           </p:cNvPr>
@@ -10392,7 +10975,7 @@
           <p:cNvPr id="12" name="">
             <a:extLst xmlns:a="http://schemas.openxmlformats.org/drawingml/2006/main">
               <a:ext uri="{FF2B5EF4-FFF2-40B4-BE49-F238E27FC236}">
-                <a16:creationId xmlns:a16="http://schemas.microsoft.com/office/drawing/2014/main" id="{5155D9D9-68AE-42BE-9099-BB0439340989}"/>
+                <a16:creationId xmlns:a16="http://schemas.microsoft.com/office/drawing/2014/main" id="{73F8E846-1332-4864-8880-15F79B7AFA65}"/>
               </a:ext>
             </a:extLst>
           </p:cNvPr>
@@ -10425,7 +11008,7 @@
           <p:cNvPr id="13" name="">
             <a:extLst xmlns:a="http://schemas.openxmlformats.org/drawingml/2006/main">
               <a:ext uri="{FF2B5EF4-FFF2-40B4-BE49-F238E27FC236}">
-                <a16:creationId xmlns:a16="http://schemas.microsoft.com/office/drawing/2014/main" id="{47AC5438-1920-4DFD-95BC-7D7D20FE115A}"/>
+                <a16:creationId xmlns:a16="http://schemas.microsoft.com/office/drawing/2014/main" id="{82C43AC7-CD58-4054-9561-650109950C84}"/>
               </a:ext>
             </a:extLst>
           </p:cNvPr>
@@ -10475,7 +11058,7 @@
           <p:cNvPr id="14" name="">
             <a:extLst xmlns:a="http://schemas.openxmlformats.org/drawingml/2006/main">
               <a:ext uri="{FF2B5EF4-FFF2-40B4-BE49-F238E27FC236}">
-                <a16:creationId xmlns:a16="http://schemas.microsoft.com/office/drawing/2014/main" id="{DA369DA5-82FC-411C-BD6D-27E07730470A}"/>
+                <a16:creationId xmlns:a16="http://schemas.microsoft.com/office/drawing/2014/main" id="{93B64E95-B343-4C78-8003-B476809BDF1B}"/>
               </a:ext>
             </a:extLst>
           </p:cNvPr>
@@ -10525,7 +11108,7 @@
           <p:cNvPr id="15" name="">
             <a:extLst xmlns:a="http://schemas.openxmlformats.org/drawingml/2006/main">
               <a:ext uri="{FF2B5EF4-FFF2-40B4-BE49-F238E27FC236}">
-                <a16:creationId xmlns:a16="http://schemas.microsoft.com/office/drawing/2014/main" id="{E03F991C-A934-45F5-B44B-24C0C13835AE}"/>
+                <a16:creationId xmlns:a16="http://schemas.microsoft.com/office/drawing/2014/main" id="{D10D35FC-BB12-4511-8A10-9AD582047550}"/>
               </a:ext>
             </a:extLst>
           </p:cNvPr>
@@ -10558,7 +11141,7 @@
           <p:cNvPr id="16" name="">
             <a:extLst xmlns:a="http://schemas.openxmlformats.org/drawingml/2006/main">
               <a:ext uri="{FF2B5EF4-FFF2-40B4-BE49-F238E27FC236}">
-                <a16:creationId xmlns:a16="http://schemas.microsoft.com/office/drawing/2014/main" id="{A01CB1BC-49FE-463E-A861-47EFA482AE0D}"/>
+                <a16:creationId xmlns:a16="http://schemas.microsoft.com/office/drawing/2014/main" id="{984B00D8-97F1-47A9-82AD-EC92F9A94721}"/>
               </a:ext>
             </a:extLst>
           </p:cNvPr>
@@ -10608,7 +11191,7 @@
           <p:cNvPr id="17" name="">
             <a:extLst xmlns:a="http://schemas.openxmlformats.org/drawingml/2006/main">
               <a:ext uri="{FF2B5EF4-FFF2-40B4-BE49-F238E27FC236}">
-                <a16:creationId xmlns:a16="http://schemas.microsoft.com/office/drawing/2014/main" id="{FBBD8081-85CC-4049-8630-A9D506E53930}"/>
+                <a16:creationId xmlns:a16="http://schemas.microsoft.com/office/drawing/2014/main" id="{46563B3A-188C-4AD8-B41F-00D93434A2F3}"/>
               </a:ext>
             </a:extLst>
           </p:cNvPr>
@@ -10658,7 +11241,7 @@
           <p:cNvPr id="18" name="">
             <a:extLst xmlns:a="http://schemas.openxmlformats.org/drawingml/2006/main">
               <a:ext uri="{FF2B5EF4-FFF2-40B4-BE49-F238E27FC236}">
-                <a16:creationId xmlns:a16="http://schemas.microsoft.com/office/drawing/2014/main" id="{A30B61CD-D5F3-4961-8E9F-4C8D0170A434}"/>
+                <a16:creationId xmlns:a16="http://schemas.microsoft.com/office/drawing/2014/main" id="{357B521A-CD0D-4867-9130-F93F11649636}"/>
               </a:ext>
             </a:extLst>
           </p:cNvPr>
@@ -10691,7 +11274,7 @@
           <p:cNvPr id="19" name="">
             <a:extLst xmlns:a="http://schemas.openxmlformats.org/drawingml/2006/main">
               <a:ext uri="{FF2B5EF4-FFF2-40B4-BE49-F238E27FC236}">
-                <a16:creationId xmlns:a16="http://schemas.microsoft.com/office/drawing/2014/main" id="{B1B79849-DBFF-4625-937C-C0854C7E127D}"/>
+                <a16:creationId xmlns:a16="http://schemas.microsoft.com/office/drawing/2014/main" id="{2031776C-81E1-4C2F-9FC2-99BBA60AFA69}"/>
               </a:ext>
             </a:extLst>
           </p:cNvPr>
@@ -10741,7 +11324,7 @@
           <p:cNvPr id="20" name="">
             <a:extLst xmlns:a="http://schemas.openxmlformats.org/drawingml/2006/main">
               <a:ext uri="{FF2B5EF4-FFF2-40B4-BE49-F238E27FC236}">
-                <a16:creationId xmlns:a16="http://schemas.microsoft.com/office/drawing/2014/main" id="{27DC2580-9B79-4022-8485-4DD41142E788}"/>
+                <a16:creationId xmlns:a16="http://schemas.microsoft.com/office/drawing/2014/main" id="{AD3A933C-AC8D-4F3B-98F1-D666D6012AA0}"/>
               </a:ext>
             </a:extLst>
           </p:cNvPr>
@@ -10791,7 +11374,7 @@
           <p:cNvPr id="21" name="">
             <a:extLst xmlns:a="http://schemas.openxmlformats.org/drawingml/2006/main">
               <a:ext uri="{FF2B5EF4-FFF2-40B4-BE49-F238E27FC236}">
-                <a16:creationId xmlns:a16="http://schemas.microsoft.com/office/drawing/2014/main" id="{C510DB93-F98E-4AD9-98DB-7C540B05815D}"/>
+                <a16:creationId xmlns:a16="http://schemas.microsoft.com/office/drawing/2014/main" id="{6C5B3D7C-C57A-4AE3-8E05-195422E78A5E}"/>
               </a:ext>
             </a:extLst>
           </p:cNvPr>
@@ -10824,7 +11407,7 @@
           <p:cNvPr id="22" name="">
             <a:extLst xmlns:a="http://schemas.openxmlformats.org/drawingml/2006/main">
               <a:ext uri="{FF2B5EF4-FFF2-40B4-BE49-F238E27FC236}">
-                <a16:creationId xmlns:a16="http://schemas.microsoft.com/office/drawing/2014/main" id="{75DAC7EA-27C1-4E0F-9815-547EDD8E24A0}"/>
+                <a16:creationId xmlns:a16="http://schemas.microsoft.com/office/drawing/2014/main" id="{11776854-0ABE-4BC7-9CCA-BF293FC34A01}"/>
               </a:ext>
             </a:extLst>
           </p:cNvPr>
@@ -10874,7 +11457,7 @@
           <p:cNvPr id="23" name="">
             <a:extLst xmlns:a="http://schemas.openxmlformats.org/drawingml/2006/main">
               <a:ext uri="{FF2B5EF4-FFF2-40B4-BE49-F238E27FC236}">
-                <a16:creationId xmlns:a16="http://schemas.microsoft.com/office/drawing/2014/main" id="{86E3BA77-EE7B-4AEE-A761-9FF10038BAE5}"/>
+                <a16:creationId xmlns:a16="http://schemas.microsoft.com/office/drawing/2014/main" id="{48D4BDDD-CD3A-41A6-8A35-DD115CB01836}"/>
               </a:ext>
             </a:extLst>
           </p:cNvPr>
@@ -10924,7 +11507,7 @@
           <p:cNvPr id="24" name="">
             <a:extLst xmlns:a="http://schemas.openxmlformats.org/drawingml/2006/main">
               <a:ext uri="{FF2B5EF4-FFF2-40B4-BE49-F238E27FC236}">
-                <a16:creationId xmlns:a16="http://schemas.microsoft.com/office/drawing/2014/main" id="{8D48E0FA-8321-44E9-9613-13D10C6A1F0A}"/>
+                <a16:creationId xmlns:a16="http://schemas.microsoft.com/office/drawing/2014/main" id="{C44059E6-390D-49C3-A12E-0615F8A3687D}"/>
               </a:ext>
             </a:extLst>
           </p:cNvPr>
@@ -10965,7 +11548,7 @@
           <p:cNvPr id="25" name="">
             <a:extLst xmlns:a="http://schemas.openxmlformats.org/drawingml/2006/main">
               <a:ext uri="{FF2B5EF4-FFF2-40B4-BE49-F238E27FC236}">
-                <a16:creationId xmlns:a16="http://schemas.microsoft.com/office/drawing/2014/main" id="{D81FBA4B-92D7-4740-A6D4-31A71E1DB32B}"/>
+                <a16:creationId xmlns:a16="http://schemas.microsoft.com/office/drawing/2014/main" id="{A9B04B0C-C470-4ECD-880A-5785831E13A5}"/>
               </a:ext>
             </a:extLst>
           </p:cNvPr>
@@ -11015,7 +11598,7 @@
           <p:cNvPr id="26" name="">
             <a:extLst xmlns:a="http://schemas.openxmlformats.org/drawingml/2006/main">
               <a:ext uri="{FF2B5EF4-FFF2-40B4-BE49-F238E27FC236}">
-                <a16:creationId xmlns:a16="http://schemas.microsoft.com/office/drawing/2014/main" id="{3B1A2159-1878-40F0-9FCD-EAF9404D5865}"/>
+                <a16:creationId xmlns:a16="http://schemas.microsoft.com/office/drawing/2014/main" id="{3DFCD680-3128-4641-A635-BD32300AFC30}"/>
               </a:ext>
             </a:extLst>
           </p:cNvPr>
@@ -11065,7 +11648,7 @@
           <p:cNvPr id="27" name="">
             <a:extLst xmlns:a="http://schemas.openxmlformats.org/drawingml/2006/main">
               <a:ext uri="{FF2B5EF4-FFF2-40B4-BE49-F238E27FC236}">
-                <a16:creationId xmlns:a16="http://schemas.microsoft.com/office/drawing/2014/main" id="{8BE6530D-F918-4423-9251-AA363B8C0746}"/>
+                <a16:creationId xmlns:a16="http://schemas.microsoft.com/office/drawing/2014/main" id="{78A7C643-EAE0-4870-AC72-C321201C41E4}"/>
               </a:ext>
             </a:extLst>
           </p:cNvPr>
@@ -11096,7 +11679,7 @@
           <p:cNvPr id="28" name="source-2">
             <a:extLst xmlns:a="http://schemas.openxmlformats.org/drawingml/2006/main">
               <a:ext uri="{FF2B5EF4-FFF2-40B4-BE49-F238E27FC236}">
-                <a16:creationId xmlns:a16="http://schemas.microsoft.com/office/drawing/2014/main" id="{1CA75A41-6E07-4825-9951-D4BD43F3A898}"/>
+                <a16:creationId xmlns:a16="http://schemas.microsoft.com/office/drawing/2014/main" id="{F7849A09-5FC3-47E5-92A0-BFCE3BFA2BA6}"/>
               </a:ext>
             </a:extLst>
           </p:cNvPr>
@@ -11146,7 +11729,7 @@
           <p:cNvPr id="29" name="page-2">
             <a:extLst xmlns:a="http://schemas.openxmlformats.org/drawingml/2006/main">
               <a:ext uri="{FF2B5EF4-FFF2-40B4-BE49-F238E27FC236}">
-                <a16:creationId xmlns:a16="http://schemas.microsoft.com/office/drawing/2014/main" id="{128456FC-B4DF-4307-9C36-152E248EC0D6}"/>
+                <a16:creationId xmlns:a16="http://schemas.microsoft.com/office/drawing/2014/main" id="{C8D9AF06-9E1C-49F9-A30B-695E3AFF8A64}"/>
               </a:ext>
             </a:extLst>
           </p:cNvPr>
@@ -11194,7 +11777,7 @@
     </p:spTree>
     <p:extLst>
       <p:ext uri="{BB962C8B-B14F-4D97-AF65-F5344CB8AC3E}">
-        <p14:creationId xmlns:p14="http://schemas.microsoft.com/office/powerpoint/2010/main" val="826493477"/>
+        <p14:creationId xmlns:p14="http://schemas.microsoft.com/office/powerpoint/2010/main" val="456448301"/>
       </p:ext>
     </p:extLst>
   </p:cSld>
@@ -11225,7 +11808,7 @@
           <p:cNvPr id="29" name="kicker-3">
             <a:extLst xmlns:a="http://schemas.openxmlformats.org/drawingml/2006/main">
               <a:ext uri="{FF2B5EF4-FFF2-40B4-BE49-F238E27FC236}">
-                <a16:creationId xmlns:a16="http://schemas.microsoft.com/office/drawing/2014/main" id="{8F5351C3-E7F8-4084-8ABC-F758FE3E7C8C}"/>
+                <a16:creationId xmlns:a16="http://schemas.microsoft.com/office/drawing/2014/main" id="{B041D99E-61F4-4342-B23A-3DCD88ACFFE6}"/>
               </a:ext>
             </a:extLst>
           </p:cNvPr>
@@ -11275,7 +11858,7 @@
           <p:cNvPr id="2" name="title-3">
             <a:extLst xmlns:a="http://schemas.openxmlformats.org/drawingml/2006/main">
               <a:ext uri="{FF2B5EF4-FFF2-40B4-BE49-F238E27FC236}">
-                <a16:creationId xmlns:a16="http://schemas.microsoft.com/office/drawing/2014/main" id="{C3D5A6FF-ADC8-445A-9A98-508DD1C0F1BA}"/>
+                <a16:creationId xmlns:a16="http://schemas.microsoft.com/office/drawing/2014/main" id="{32B745FE-D52F-4339-A55E-3F58483F34C7}"/>
               </a:ext>
             </a:extLst>
           </p:cNvPr>
@@ -11325,7 +11908,7 @@
           <p:cNvPr id="3" name="">
             <a:extLst xmlns:a="http://schemas.openxmlformats.org/drawingml/2006/main">
               <a:ext uri="{FF2B5EF4-FFF2-40B4-BE49-F238E27FC236}">
-                <a16:creationId xmlns:a16="http://schemas.microsoft.com/office/drawing/2014/main" id="{E77C327D-80B9-44B8-8662-C3D70D919075}"/>
+                <a16:creationId xmlns:a16="http://schemas.microsoft.com/office/drawing/2014/main" id="{BC70EC07-38CF-4E30-91F9-3098C92452CE}"/>
               </a:ext>
             </a:extLst>
           </p:cNvPr>
@@ -11356,7 +11939,7 @@
           <p:cNvPr id="4" name="">
             <a:extLst xmlns:a="http://schemas.openxmlformats.org/drawingml/2006/main">
               <a:ext uri="{FF2B5EF4-FFF2-40B4-BE49-F238E27FC236}">
-                <a16:creationId xmlns:a16="http://schemas.microsoft.com/office/drawing/2014/main" id="{A35C47DF-9F32-401E-8671-90992FABD9B5}"/>
+                <a16:creationId xmlns:a16="http://schemas.microsoft.com/office/drawing/2014/main" id="{51819A30-21FF-49C4-A836-D41EBA45F21F}"/>
               </a:ext>
             </a:extLst>
           </p:cNvPr>
@@ -11406,7 +11989,7 @@
           <p:cNvPr id="5" name="">
             <a:extLst xmlns:a="http://schemas.openxmlformats.org/drawingml/2006/main">
               <a:ext uri="{FF2B5EF4-FFF2-40B4-BE49-F238E27FC236}">
-                <a16:creationId xmlns:a16="http://schemas.microsoft.com/office/drawing/2014/main" id="{0F120CF6-E7EA-4830-BE21-6E6446F4AA7C}"/>
+                <a16:creationId xmlns:a16="http://schemas.microsoft.com/office/drawing/2014/main" id="{89722031-6BDA-4036-9659-BAED8249FD79}"/>
               </a:ext>
             </a:extLst>
           </p:cNvPr>
@@ -11439,7 +12022,7 @@
           <p:cNvPr id="6" name="">
             <a:extLst xmlns:a="http://schemas.openxmlformats.org/drawingml/2006/main">
               <a:ext uri="{FF2B5EF4-FFF2-40B4-BE49-F238E27FC236}">
-                <a16:creationId xmlns:a16="http://schemas.microsoft.com/office/drawing/2014/main" id="{C39A257F-482D-429C-821B-FFE538CE855F}"/>
+                <a16:creationId xmlns:a16="http://schemas.microsoft.com/office/drawing/2014/main" id="{324B2A36-F439-47AD-A80B-13BF61C30424}"/>
               </a:ext>
             </a:extLst>
           </p:cNvPr>
@@ -11472,7 +12055,7 @@
           <p:cNvPr id="7" name="">
             <a:extLst xmlns:a="http://schemas.openxmlformats.org/drawingml/2006/main">
               <a:ext uri="{FF2B5EF4-FFF2-40B4-BE49-F238E27FC236}">
-                <a16:creationId xmlns:a16="http://schemas.microsoft.com/office/drawing/2014/main" id="{5F5D8B68-22D8-43BC-8A5F-2DA56750E940}"/>
+                <a16:creationId xmlns:a16="http://schemas.microsoft.com/office/drawing/2014/main" id="{386C29BD-24CC-4C0D-8323-4434E84D53A5}"/>
               </a:ext>
             </a:extLst>
           </p:cNvPr>
@@ -11505,7 +12088,7 @@
           <p:cNvPr id="8" name="">
             <a:extLst xmlns:a="http://schemas.openxmlformats.org/drawingml/2006/main">
               <a:ext uri="{FF2B5EF4-FFF2-40B4-BE49-F238E27FC236}">
-                <a16:creationId xmlns:a16="http://schemas.microsoft.com/office/drawing/2014/main" id="{CF3BA89F-6785-4AB3-88E7-BCA9FEFBBAF6}"/>
+                <a16:creationId xmlns:a16="http://schemas.microsoft.com/office/drawing/2014/main" id="{F2227328-5566-435C-AB07-2CFBF0020DF5}"/>
               </a:ext>
             </a:extLst>
           </p:cNvPr>
@@ -11538,7 +12121,7 @@
           <p:cNvPr id="9" name="pipeline-0">
             <a:extLst xmlns:a="http://schemas.openxmlformats.org/drawingml/2006/main">
               <a:ext uri="{FF2B5EF4-FFF2-40B4-BE49-F238E27FC236}">
-                <a16:creationId xmlns:a16="http://schemas.microsoft.com/office/drawing/2014/main" id="{2678A10B-4209-4798-9DEF-6DA69DA2A596}"/>
+                <a16:creationId xmlns:a16="http://schemas.microsoft.com/office/drawing/2014/main" id="{679E46D5-75CD-40E6-B0CB-CA135D750C2B}"/>
               </a:ext>
             </a:extLst>
           </p:cNvPr>
@@ -11579,7 +12162,7 @@
           <p:cNvPr id="10" name="">
             <a:extLst xmlns:a="http://schemas.openxmlformats.org/drawingml/2006/main">
               <a:ext uri="{FF2B5EF4-FFF2-40B4-BE49-F238E27FC236}">
-                <a16:creationId xmlns:a16="http://schemas.microsoft.com/office/drawing/2014/main" id="{17BE2321-9616-4CF6-8E53-6A058EB2E268}"/>
+                <a16:creationId xmlns:a16="http://schemas.microsoft.com/office/drawing/2014/main" id="{FD9CCFD2-4447-4F4B-A6A3-B032310D9156}"/>
               </a:ext>
             </a:extLst>
           </p:cNvPr>
@@ -11629,7 +12212,7 @@
           <p:cNvPr id="11" name="">
             <a:extLst xmlns:a="http://schemas.openxmlformats.org/drawingml/2006/main">
               <a:ext uri="{FF2B5EF4-FFF2-40B4-BE49-F238E27FC236}">
-                <a16:creationId xmlns:a16="http://schemas.microsoft.com/office/drawing/2014/main" id="{B468AE49-550C-411A-8008-183CDFFBDB0E}"/>
+                <a16:creationId xmlns:a16="http://schemas.microsoft.com/office/drawing/2014/main" id="{EBF41478-0D4C-4DAB-99D6-7C9452C1DD0F}"/>
               </a:ext>
             </a:extLst>
           </p:cNvPr>
@@ -11696,7 +12279,7 @@
           <p:cNvPr id="12" name="pipeline-1">
             <a:extLst xmlns:a="http://schemas.openxmlformats.org/drawingml/2006/main">
               <a:ext uri="{FF2B5EF4-FFF2-40B4-BE49-F238E27FC236}">
-                <a16:creationId xmlns:a16="http://schemas.microsoft.com/office/drawing/2014/main" id="{CF7A0A35-6AF9-47D4-9638-7564119ED4B4}"/>
+                <a16:creationId xmlns:a16="http://schemas.microsoft.com/office/drawing/2014/main" id="{2D1FDF15-E0D4-4198-B0FA-C035BE5FA64F}"/>
               </a:ext>
             </a:extLst>
           </p:cNvPr>
@@ -11737,7 +12320,7 @@
           <p:cNvPr id="13" name="">
             <a:extLst xmlns:a="http://schemas.openxmlformats.org/drawingml/2006/main">
               <a:ext uri="{FF2B5EF4-FFF2-40B4-BE49-F238E27FC236}">
-                <a16:creationId xmlns:a16="http://schemas.microsoft.com/office/drawing/2014/main" id="{310D4896-7207-4108-8563-5EC3D4FE94EC}"/>
+                <a16:creationId xmlns:a16="http://schemas.microsoft.com/office/drawing/2014/main" id="{1E41C2B5-41E1-42C0-9D9E-5ABBEDFB29A9}"/>
               </a:ext>
             </a:extLst>
           </p:cNvPr>
@@ -11787,7 +12370,7 @@
           <p:cNvPr id="14" name="">
             <a:extLst xmlns:a="http://schemas.openxmlformats.org/drawingml/2006/main">
               <a:ext uri="{FF2B5EF4-FFF2-40B4-BE49-F238E27FC236}">
-                <a16:creationId xmlns:a16="http://schemas.microsoft.com/office/drawing/2014/main" id="{99E54A13-D942-4719-9BC9-553660B3987C}"/>
+                <a16:creationId xmlns:a16="http://schemas.microsoft.com/office/drawing/2014/main" id="{F4AE742C-7ED8-4645-AD5D-7E6F0B76E14B}"/>
               </a:ext>
             </a:extLst>
           </p:cNvPr>
@@ -11854,7 +12437,7 @@
           <p:cNvPr id="15" name="pipeline-2">
             <a:extLst xmlns:a="http://schemas.openxmlformats.org/drawingml/2006/main">
               <a:ext uri="{FF2B5EF4-FFF2-40B4-BE49-F238E27FC236}">
-                <a16:creationId xmlns:a16="http://schemas.microsoft.com/office/drawing/2014/main" id="{7D2043A6-AC90-40ED-84E8-E6C5F3B021EB}"/>
+                <a16:creationId xmlns:a16="http://schemas.microsoft.com/office/drawing/2014/main" id="{18E8BCF3-01F9-4C5F-A9C8-CEFF5AA70F8A}"/>
               </a:ext>
             </a:extLst>
           </p:cNvPr>
@@ -11895,7 +12478,7 @@
           <p:cNvPr id="16" name="">
             <a:extLst xmlns:a="http://schemas.openxmlformats.org/drawingml/2006/main">
               <a:ext uri="{FF2B5EF4-FFF2-40B4-BE49-F238E27FC236}">
-                <a16:creationId xmlns:a16="http://schemas.microsoft.com/office/drawing/2014/main" id="{2F673F62-2F5E-4E02-BC6B-154CB96BF49C}"/>
+                <a16:creationId xmlns:a16="http://schemas.microsoft.com/office/drawing/2014/main" id="{1545182A-635D-4216-A114-B63BE2892D5E}"/>
               </a:ext>
             </a:extLst>
           </p:cNvPr>
@@ -11945,7 +12528,7 @@
           <p:cNvPr id="17" name="">
             <a:extLst xmlns:a="http://schemas.openxmlformats.org/drawingml/2006/main">
               <a:ext uri="{FF2B5EF4-FFF2-40B4-BE49-F238E27FC236}">
-                <a16:creationId xmlns:a16="http://schemas.microsoft.com/office/drawing/2014/main" id="{F70E3D4C-3FF7-4CD3-9413-52FEE44BE19A}"/>
+                <a16:creationId xmlns:a16="http://schemas.microsoft.com/office/drawing/2014/main" id="{9E8E2FC4-D46C-4C2B-9E3C-61AB393AA6DD}"/>
               </a:ext>
             </a:extLst>
           </p:cNvPr>
@@ -12012,7 +12595,7 @@
           <p:cNvPr id="18" name="pipeline-3">
             <a:extLst xmlns:a="http://schemas.openxmlformats.org/drawingml/2006/main">
               <a:ext uri="{FF2B5EF4-FFF2-40B4-BE49-F238E27FC236}">
-                <a16:creationId xmlns:a16="http://schemas.microsoft.com/office/drawing/2014/main" id="{69471899-02FF-49AC-9283-B8F3060D5DDF}"/>
+                <a16:creationId xmlns:a16="http://schemas.microsoft.com/office/drawing/2014/main" id="{7F3684A8-3B64-4B6D-9746-66B29E474ACA}"/>
               </a:ext>
             </a:extLst>
           </p:cNvPr>
@@ -12053,7 +12636,7 @@
           <p:cNvPr id="19" name="">
             <a:extLst xmlns:a="http://schemas.openxmlformats.org/drawingml/2006/main">
               <a:ext uri="{FF2B5EF4-FFF2-40B4-BE49-F238E27FC236}">
-                <a16:creationId xmlns:a16="http://schemas.microsoft.com/office/drawing/2014/main" id="{4BD166B9-288F-46A9-A5CA-1945F3DA9557}"/>
+                <a16:creationId xmlns:a16="http://schemas.microsoft.com/office/drawing/2014/main" id="{CBDBCA72-46EC-4311-BA34-BF07AA6D0A65}"/>
               </a:ext>
             </a:extLst>
           </p:cNvPr>
@@ -12103,7 +12686,7 @@
           <p:cNvPr id="20" name="">
             <a:extLst xmlns:a="http://schemas.openxmlformats.org/drawingml/2006/main">
               <a:ext uri="{FF2B5EF4-FFF2-40B4-BE49-F238E27FC236}">
-                <a16:creationId xmlns:a16="http://schemas.microsoft.com/office/drawing/2014/main" id="{3C8DD664-3375-407E-B71B-4794AFC7FAF5}"/>
+                <a16:creationId xmlns:a16="http://schemas.microsoft.com/office/drawing/2014/main" id="{3AD84915-6722-46B8-B666-B266CD3F4F28}"/>
               </a:ext>
             </a:extLst>
           </p:cNvPr>
@@ -12170,7 +12753,7 @@
           <p:cNvPr id="21" name="pipeline-4">
             <a:extLst xmlns:a="http://schemas.openxmlformats.org/drawingml/2006/main">
               <a:ext uri="{FF2B5EF4-FFF2-40B4-BE49-F238E27FC236}">
-                <a16:creationId xmlns:a16="http://schemas.microsoft.com/office/drawing/2014/main" id="{99F6A3DC-72DA-4641-AED5-BF18A42679BA}"/>
+                <a16:creationId xmlns:a16="http://schemas.microsoft.com/office/drawing/2014/main" id="{4DEAAAFD-006E-40A2-BCD1-72482BD712D3}"/>
               </a:ext>
             </a:extLst>
           </p:cNvPr>
@@ -12211,7 +12794,7 @@
           <p:cNvPr id="22" name="">
             <a:extLst xmlns:a="http://schemas.openxmlformats.org/drawingml/2006/main">
               <a:ext uri="{FF2B5EF4-FFF2-40B4-BE49-F238E27FC236}">
-                <a16:creationId xmlns:a16="http://schemas.microsoft.com/office/drawing/2014/main" id="{17FA3E37-B170-4F93-A5E2-F05C3AE59D2C}"/>
+                <a16:creationId xmlns:a16="http://schemas.microsoft.com/office/drawing/2014/main" id="{EC2AFD8E-18C4-4CCB-A6AD-BD580D47E8AD}"/>
               </a:ext>
             </a:extLst>
           </p:cNvPr>
@@ -12261,7 +12844,7 @@
           <p:cNvPr id="23" name="">
             <a:extLst xmlns:a="http://schemas.openxmlformats.org/drawingml/2006/main">
               <a:ext uri="{FF2B5EF4-FFF2-40B4-BE49-F238E27FC236}">
-                <a16:creationId xmlns:a16="http://schemas.microsoft.com/office/drawing/2014/main" id="{6DBD06B8-60FA-47CD-8173-1A2F35FE3DF8}"/>
+                <a16:creationId xmlns:a16="http://schemas.microsoft.com/office/drawing/2014/main" id="{D7243FEA-C32F-46DF-9E82-4C42B10A4A23}"/>
               </a:ext>
             </a:extLst>
           </p:cNvPr>
@@ -12328,7 +12911,7 @@
           <p:cNvPr id="24" name="">
             <a:extLst xmlns:a="http://schemas.openxmlformats.org/drawingml/2006/main">
               <a:ext uri="{FF2B5EF4-FFF2-40B4-BE49-F238E27FC236}">
-                <a16:creationId xmlns:a16="http://schemas.microsoft.com/office/drawing/2014/main" id="{8A906623-450B-4337-94FC-DF06E6DAB4AD}"/>
+                <a16:creationId xmlns:a16="http://schemas.microsoft.com/office/drawing/2014/main" id="{3B92CB4E-8563-44EF-8679-4E3D6EAA0B42}"/>
               </a:ext>
             </a:extLst>
           </p:cNvPr>
@@ -12378,7 +12961,7 @@
           <p:cNvPr id="25" name="">
             <a:extLst xmlns:a="http://schemas.openxmlformats.org/drawingml/2006/main">
               <a:ext uri="{FF2B5EF4-FFF2-40B4-BE49-F238E27FC236}">
-                <a16:creationId xmlns:a16="http://schemas.microsoft.com/office/drawing/2014/main" id="{D920218D-C19F-42CA-9E15-24DC86582DEF}"/>
+                <a16:creationId xmlns:a16="http://schemas.microsoft.com/office/drawing/2014/main" id="{EDAB58C0-A30F-437D-A9B5-8F1D78AFA4FA}"/>
               </a:ext>
             </a:extLst>
           </p:cNvPr>
@@ -12428,7 +13011,7 @@
           <p:cNvPr id="26" name="">
             <a:extLst xmlns:a="http://schemas.openxmlformats.org/drawingml/2006/main">
               <a:ext uri="{FF2B5EF4-FFF2-40B4-BE49-F238E27FC236}">
-                <a16:creationId xmlns:a16="http://schemas.microsoft.com/office/drawing/2014/main" id="{9CA824FF-1661-42F8-98F2-A6C120AD3B4A}"/>
+                <a16:creationId xmlns:a16="http://schemas.microsoft.com/office/drawing/2014/main" id="{0F63F25D-E531-4F1F-93F6-49A7DC903158}"/>
               </a:ext>
             </a:extLst>
           </p:cNvPr>
@@ -12459,7 +13042,7 @@
           <p:cNvPr id="27" name="source-3">
             <a:extLst xmlns:a="http://schemas.openxmlformats.org/drawingml/2006/main">
               <a:ext uri="{FF2B5EF4-FFF2-40B4-BE49-F238E27FC236}">
-                <a16:creationId xmlns:a16="http://schemas.microsoft.com/office/drawing/2014/main" id="{05D6D23F-6739-4A8D-919E-52F96D5F54E8}"/>
+                <a16:creationId xmlns:a16="http://schemas.microsoft.com/office/drawing/2014/main" id="{F9DCA80E-AB8B-49F5-882C-1E6C410CD72A}"/>
               </a:ext>
             </a:extLst>
           </p:cNvPr>
@@ -12509,7 +13092,7 @@
           <p:cNvPr id="28" name="page-3">
             <a:extLst xmlns:a="http://schemas.openxmlformats.org/drawingml/2006/main">
               <a:ext uri="{FF2B5EF4-FFF2-40B4-BE49-F238E27FC236}">
-                <a16:creationId xmlns:a16="http://schemas.microsoft.com/office/drawing/2014/main" id="{6BF426CF-53A8-4DD6-8816-B19A02851964}"/>
+                <a16:creationId xmlns:a16="http://schemas.microsoft.com/office/drawing/2014/main" id="{DE9D5C06-3E5C-46A2-A49B-8D018FD3DB81}"/>
               </a:ext>
             </a:extLst>
           </p:cNvPr>
@@ -12557,7 +13140,7 @@
     </p:spTree>
     <p:extLst>
       <p:ext uri="{BB962C8B-B14F-4D97-AF65-F5344CB8AC3E}">
-        <p14:creationId xmlns:p14="http://schemas.microsoft.com/office/powerpoint/2010/main" val="685553480"/>
+        <p14:creationId xmlns:p14="http://schemas.microsoft.com/office/powerpoint/2010/main" val="1927319587"/>
       </p:ext>
     </p:extLst>
   </p:cSld>
@@ -12588,7 +13171,7 @@
           <p:cNvPr id="49" name="kicker-4">
             <a:extLst xmlns:a="http://schemas.openxmlformats.org/drawingml/2006/main">
               <a:ext uri="{FF2B5EF4-FFF2-40B4-BE49-F238E27FC236}">
-                <a16:creationId xmlns:a16="http://schemas.microsoft.com/office/drawing/2014/main" id="{EC8B16F8-3B8E-4D7E-AD16-EE2579EECD08}"/>
+                <a16:creationId xmlns:a16="http://schemas.microsoft.com/office/drawing/2014/main" id="{E1B6D87E-D1E5-4306-BC40-257B8FB8977B}"/>
               </a:ext>
             </a:extLst>
           </p:cNvPr>
@@ -12638,7 +13221,7 @@
           <p:cNvPr id="2" name="title-4">
             <a:extLst xmlns:a="http://schemas.openxmlformats.org/drawingml/2006/main">
               <a:ext uri="{FF2B5EF4-FFF2-40B4-BE49-F238E27FC236}">
-                <a16:creationId xmlns:a16="http://schemas.microsoft.com/office/drawing/2014/main" id="{73282327-C6C9-49BE-A03C-4E235A547AC3}"/>
+                <a16:creationId xmlns:a16="http://schemas.microsoft.com/office/drawing/2014/main" id="{FC47EEF8-A7BC-4CE6-8C2A-A314B63C1033}"/>
               </a:ext>
             </a:extLst>
           </p:cNvPr>
@@ -12688,7 +13271,7 @@
           <p:cNvPr id="3" name="">
             <a:extLst xmlns:a="http://schemas.openxmlformats.org/drawingml/2006/main">
               <a:ext uri="{FF2B5EF4-FFF2-40B4-BE49-F238E27FC236}">
-                <a16:creationId xmlns:a16="http://schemas.microsoft.com/office/drawing/2014/main" id="{6D35900D-3FED-4CE3-AD8D-3D6F91C0D0FC}"/>
+                <a16:creationId xmlns:a16="http://schemas.microsoft.com/office/drawing/2014/main" id="{151E5B95-A80C-4CED-AFBF-C44E08685E42}"/>
               </a:ext>
             </a:extLst>
           </p:cNvPr>
@@ -12719,7 +13302,7 @@
           <p:cNvPr id="4" name="">
             <a:extLst xmlns:a="http://schemas.openxmlformats.org/drawingml/2006/main">
               <a:ext uri="{FF2B5EF4-FFF2-40B4-BE49-F238E27FC236}">
-                <a16:creationId xmlns:a16="http://schemas.microsoft.com/office/drawing/2014/main" id="{A0153338-3A56-49D3-8E47-EB3FA721E35A}"/>
+                <a16:creationId xmlns:a16="http://schemas.microsoft.com/office/drawing/2014/main" id="{C92A0CAD-11BD-4BDC-8380-EFFC73F5F0AC}"/>
               </a:ext>
             </a:extLst>
           </p:cNvPr>
@@ -12769,7 +13352,7 @@
           <p:cNvPr id="5" name="">
             <a:extLst xmlns:a="http://schemas.openxmlformats.org/drawingml/2006/main">
               <a:ext uri="{FF2B5EF4-FFF2-40B4-BE49-F238E27FC236}">
-                <a16:creationId xmlns:a16="http://schemas.microsoft.com/office/drawing/2014/main" id="{30BD9C32-7267-45D9-B0E4-A60A9EA17B09}"/>
+                <a16:creationId xmlns:a16="http://schemas.microsoft.com/office/drawing/2014/main" id="{6E22ACBF-93D7-4D81-9FB6-AD978EBBA349}"/>
               </a:ext>
             </a:extLst>
           </p:cNvPr>
@@ -12802,7 +13385,7 @@
           <p:cNvPr id="6" name="">
             <a:extLst xmlns:a="http://schemas.openxmlformats.org/drawingml/2006/main">
               <a:ext uri="{FF2B5EF4-FFF2-40B4-BE49-F238E27FC236}">
-                <a16:creationId xmlns:a16="http://schemas.microsoft.com/office/drawing/2014/main" id="{149B6826-EAD8-43F4-8D68-095A87CB8008}"/>
+                <a16:creationId xmlns:a16="http://schemas.microsoft.com/office/drawing/2014/main" id="{F4118DF6-30E7-4135-844A-77EECB091D0B}"/>
               </a:ext>
             </a:extLst>
           </p:cNvPr>
@@ -12835,7 +13418,7 @@
           <p:cNvPr id="7" name="">
             <a:extLst xmlns:a="http://schemas.openxmlformats.org/drawingml/2006/main">
               <a:ext uri="{FF2B5EF4-FFF2-40B4-BE49-F238E27FC236}">
-                <a16:creationId xmlns:a16="http://schemas.microsoft.com/office/drawing/2014/main" id="{4E6F2F33-23A5-498A-9A90-55FA6C7001DD}"/>
+                <a16:creationId xmlns:a16="http://schemas.microsoft.com/office/drawing/2014/main" id="{BE9173A9-3833-420C-BD5C-79F886C68D54}"/>
               </a:ext>
             </a:extLst>
           </p:cNvPr>
@@ -12868,7 +13451,7 @@
           <p:cNvPr id="8" name="">
             <a:extLst xmlns:a="http://schemas.openxmlformats.org/drawingml/2006/main">
               <a:ext uri="{FF2B5EF4-FFF2-40B4-BE49-F238E27FC236}">
-                <a16:creationId xmlns:a16="http://schemas.microsoft.com/office/drawing/2014/main" id="{EC979FA8-87B4-4ABA-9696-AA65D17B86C0}"/>
+                <a16:creationId xmlns:a16="http://schemas.microsoft.com/office/drawing/2014/main" id="{88D7D772-9D3C-4B5E-B0A6-34FE6BBEC401}"/>
               </a:ext>
             </a:extLst>
           </p:cNvPr>
@@ -12901,7 +13484,7 @@
           <p:cNvPr id="9" name="">
             <a:extLst xmlns:a="http://schemas.openxmlformats.org/drawingml/2006/main">
               <a:ext uri="{FF2B5EF4-FFF2-40B4-BE49-F238E27FC236}">
-                <a16:creationId xmlns:a16="http://schemas.microsoft.com/office/drawing/2014/main" id="{A12781CB-A198-4842-A8CE-E91899D68E0F}"/>
+                <a16:creationId xmlns:a16="http://schemas.microsoft.com/office/drawing/2014/main" id="{99E43830-DDA6-41A7-8389-6DA72927A042}"/>
               </a:ext>
             </a:extLst>
           </p:cNvPr>
@@ -12934,7 +13517,7 @@
           <p:cNvPr id="10" name="">
             <a:extLst xmlns:a="http://schemas.openxmlformats.org/drawingml/2006/main">
               <a:ext uri="{FF2B5EF4-FFF2-40B4-BE49-F238E27FC236}">
-                <a16:creationId xmlns:a16="http://schemas.microsoft.com/office/drawing/2014/main" id="{5FB9D804-A75F-45FE-8FEC-CDF19A8B6A20}"/>
+                <a16:creationId xmlns:a16="http://schemas.microsoft.com/office/drawing/2014/main" id="{6FDE55FA-B82D-41F9-B606-828A1DA3EBEA}"/>
               </a:ext>
             </a:extLst>
           </p:cNvPr>
@@ -12967,7 +13550,7 @@
           <p:cNvPr id="11" name="">
             <a:extLst xmlns:a="http://schemas.openxmlformats.org/drawingml/2006/main">
               <a:ext uri="{FF2B5EF4-FFF2-40B4-BE49-F238E27FC236}">
-                <a16:creationId xmlns:a16="http://schemas.microsoft.com/office/drawing/2014/main" id="{85C5F667-6CF4-4E26-BCB2-0B2D0A585AE3}"/>
+                <a16:creationId xmlns:a16="http://schemas.microsoft.com/office/drawing/2014/main" id="{F6A6AF91-6353-4553-9E2F-A7FC2FD637B1}"/>
               </a:ext>
             </a:extLst>
           </p:cNvPr>
@@ -13000,7 +13583,7 @@
           <p:cNvPr id="12" name="">
             <a:extLst xmlns:a="http://schemas.openxmlformats.org/drawingml/2006/main">
               <a:ext uri="{FF2B5EF4-FFF2-40B4-BE49-F238E27FC236}">
-                <a16:creationId xmlns:a16="http://schemas.microsoft.com/office/drawing/2014/main" id="{F20B3597-D416-47E2-8472-62B4F0B5A0A4}"/>
+                <a16:creationId xmlns:a16="http://schemas.microsoft.com/office/drawing/2014/main" id="{989454EF-24D4-4A03-A924-12E01859C595}"/>
               </a:ext>
             </a:extLst>
           </p:cNvPr>
@@ -13033,7 +13616,7 @@
           <p:cNvPr id="13" name="">
             <a:extLst xmlns:a="http://schemas.openxmlformats.org/drawingml/2006/main">
               <a:ext uri="{FF2B5EF4-FFF2-40B4-BE49-F238E27FC236}">
-                <a16:creationId xmlns:a16="http://schemas.microsoft.com/office/drawing/2014/main" id="{F4490686-CE06-47C5-BEDA-A5E979FF3066}"/>
+                <a16:creationId xmlns:a16="http://schemas.microsoft.com/office/drawing/2014/main" id="{2C31F274-4F2F-40DB-8DED-757726052BBC}"/>
               </a:ext>
             </a:extLst>
           </p:cNvPr>
@@ -13074,7 +13657,7 @@
           <p:cNvPr id="14" name="">
             <a:extLst xmlns:a="http://schemas.openxmlformats.org/drawingml/2006/main">
               <a:ext uri="{FF2B5EF4-FFF2-40B4-BE49-F238E27FC236}">
-                <a16:creationId xmlns:a16="http://schemas.microsoft.com/office/drawing/2014/main" id="{1E0EAD2A-4ED2-4F3D-928D-865E94805062}"/>
+                <a16:creationId xmlns:a16="http://schemas.microsoft.com/office/drawing/2014/main" id="{8ECFC020-9160-426C-9916-B478D7817D9C}"/>
               </a:ext>
             </a:extLst>
           </p:cNvPr>
@@ -13124,7 +13707,7 @@
           <p:cNvPr id="15" name="">
             <a:extLst xmlns:a="http://schemas.openxmlformats.org/drawingml/2006/main">
               <a:ext uri="{FF2B5EF4-FFF2-40B4-BE49-F238E27FC236}">
-                <a16:creationId xmlns:a16="http://schemas.microsoft.com/office/drawing/2014/main" id="{A27B57A1-8FD6-47AA-B22B-135877E15DE0}"/>
+                <a16:creationId xmlns:a16="http://schemas.microsoft.com/office/drawing/2014/main" id="{8CB10694-1EDC-4AD8-9999-33AE1973D674}"/>
               </a:ext>
             </a:extLst>
           </p:cNvPr>
@@ -13174,7 +13757,7 @@
           <p:cNvPr id="16" name="">
             <a:extLst xmlns:a="http://schemas.openxmlformats.org/drawingml/2006/main">
               <a:ext uri="{FF2B5EF4-FFF2-40B4-BE49-F238E27FC236}">
-                <a16:creationId xmlns:a16="http://schemas.microsoft.com/office/drawing/2014/main" id="{1A05DB24-A1F6-40CF-ABED-12106D260254}"/>
+                <a16:creationId xmlns:a16="http://schemas.microsoft.com/office/drawing/2014/main" id="{8BEF3259-79C1-4D65-BE4F-0214DA7949FC}"/>
               </a:ext>
             </a:extLst>
           </p:cNvPr>
@@ -13207,7 +13790,7 @@
           <p:cNvPr id="17" name="">
             <a:extLst xmlns:a="http://schemas.openxmlformats.org/drawingml/2006/main">
               <a:ext uri="{FF2B5EF4-FFF2-40B4-BE49-F238E27FC236}">
-                <a16:creationId xmlns:a16="http://schemas.microsoft.com/office/drawing/2014/main" id="{32F7B4F0-D243-40CB-994D-1E5171802329}"/>
+                <a16:creationId xmlns:a16="http://schemas.microsoft.com/office/drawing/2014/main" id="{4B979C89-4F4A-4B15-A455-0A77F808CC35}"/>
               </a:ext>
             </a:extLst>
           </p:cNvPr>
@@ -13274,7 +13857,7 @@
           <p:cNvPr id="18" name="">
             <a:extLst xmlns:a="http://schemas.openxmlformats.org/drawingml/2006/main">
               <a:ext uri="{FF2B5EF4-FFF2-40B4-BE49-F238E27FC236}">
-                <a16:creationId xmlns:a16="http://schemas.microsoft.com/office/drawing/2014/main" id="{C3A5666D-5A64-4E11-A510-2CF91F414BB4}"/>
+                <a16:creationId xmlns:a16="http://schemas.microsoft.com/office/drawing/2014/main" id="{9CBE4EFE-C95A-43A3-9442-8959BAE9C842}"/>
               </a:ext>
             </a:extLst>
           </p:cNvPr>
@@ -13307,7 +13890,7 @@
           <p:cNvPr id="19" name="">
             <a:extLst xmlns:a="http://schemas.openxmlformats.org/drawingml/2006/main">
               <a:ext uri="{FF2B5EF4-FFF2-40B4-BE49-F238E27FC236}">
-                <a16:creationId xmlns:a16="http://schemas.microsoft.com/office/drawing/2014/main" id="{27D93B96-325E-4D4E-A65B-88E3D4CDB1C3}"/>
+                <a16:creationId xmlns:a16="http://schemas.microsoft.com/office/drawing/2014/main" id="{8EFB9634-E316-4236-90A6-F05392F39976}"/>
               </a:ext>
             </a:extLst>
           </p:cNvPr>
@@ -13374,7 +13957,7 @@
           <p:cNvPr id="20" name="">
             <a:extLst xmlns:a="http://schemas.openxmlformats.org/drawingml/2006/main">
               <a:ext uri="{FF2B5EF4-FFF2-40B4-BE49-F238E27FC236}">
-                <a16:creationId xmlns:a16="http://schemas.microsoft.com/office/drawing/2014/main" id="{B428C26F-204A-4CE3-BDC6-815F6296ADFB}"/>
+                <a16:creationId xmlns:a16="http://schemas.microsoft.com/office/drawing/2014/main" id="{8B8E630E-7391-446F-AD89-A36455AA9902}"/>
               </a:ext>
             </a:extLst>
           </p:cNvPr>
@@ -13407,7 +13990,7 @@
           <p:cNvPr id="21" name="">
             <a:extLst xmlns:a="http://schemas.openxmlformats.org/drawingml/2006/main">
               <a:ext uri="{FF2B5EF4-FFF2-40B4-BE49-F238E27FC236}">
-                <a16:creationId xmlns:a16="http://schemas.microsoft.com/office/drawing/2014/main" id="{A98853F3-C6DA-41BC-A5AD-5C142C9476DD}"/>
+                <a16:creationId xmlns:a16="http://schemas.microsoft.com/office/drawing/2014/main" id="{3FA48B61-E228-43C6-9AA6-D2D178C30FCD}"/>
               </a:ext>
             </a:extLst>
           </p:cNvPr>
@@ -13474,7 +14057,7 @@
           <p:cNvPr id="22" name="">
             <a:extLst xmlns:a="http://schemas.openxmlformats.org/drawingml/2006/main">
               <a:ext uri="{FF2B5EF4-FFF2-40B4-BE49-F238E27FC236}">
-                <a16:creationId xmlns:a16="http://schemas.microsoft.com/office/drawing/2014/main" id="{673ABEF0-3D08-4B2E-BEDA-52A20EB59CD2}"/>
+                <a16:creationId xmlns:a16="http://schemas.microsoft.com/office/drawing/2014/main" id="{634A0E8F-80EB-4DB4-88CA-11AF7F50B994}"/>
               </a:ext>
             </a:extLst>
           </p:cNvPr>
@@ -13524,7 +14107,7 @@
           <p:cNvPr id="23" name="">
             <a:extLst xmlns:a="http://schemas.openxmlformats.org/drawingml/2006/main">
               <a:ext uri="{FF2B5EF4-FFF2-40B4-BE49-F238E27FC236}">
-                <a16:creationId xmlns:a16="http://schemas.microsoft.com/office/drawing/2014/main" id="{A179A706-58B0-446E-8A50-48E231F340E5}"/>
+                <a16:creationId xmlns:a16="http://schemas.microsoft.com/office/drawing/2014/main" id="{186415FF-0271-4C5E-82AB-34005C852E25}"/>
               </a:ext>
             </a:extLst>
           </p:cNvPr>
@@ -13574,7 +14157,7 @@
           <p:cNvPr id="24" name="">
             <a:extLst xmlns:a="http://schemas.openxmlformats.org/drawingml/2006/main">
               <a:ext uri="{FF2B5EF4-FFF2-40B4-BE49-F238E27FC236}">
-                <a16:creationId xmlns:a16="http://schemas.microsoft.com/office/drawing/2014/main" id="{B573B6B2-EFAA-4C72-858B-912B725B5347}"/>
+                <a16:creationId xmlns:a16="http://schemas.microsoft.com/office/drawing/2014/main" id="{9CD35DFB-7BDC-421A-9811-75FF5AA46679}"/>
               </a:ext>
             </a:extLst>
           </p:cNvPr>
@@ -13624,7 +14207,7 @@
           <p:cNvPr id="25" name="">
             <a:extLst xmlns:a="http://schemas.openxmlformats.org/drawingml/2006/main">
               <a:ext uri="{FF2B5EF4-FFF2-40B4-BE49-F238E27FC236}">
-                <a16:creationId xmlns:a16="http://schemas.microsoft.com/office/drawing/2014/main" id="{230723B0-FF8D-4373-A047-A104AF279F60}"/>
+                <a16:creationId xmlns:a16="http://schemas.microsoft.com/office/drawing/2014/main" id="{0387CADA-4032-42C0-9A7B-10138543813F}"/>
               </a:ext>
             </a:extLst>
           </p:cNvPr>
@@ -13674,7 +14257,7 @@
           <p:cNvPr id="26" name="">
             <a:extLst xmlns:a="http://schemas.openxmlformats.org/drawingml/2006/main">
               <a:ext uri="{FF2B5EF4-FFF2-40B4-BE49-F238E27FC236}">
-                <a16:creationId xmlns:a16="http://schemas.microsoft.com/office/drawing/2014/main" id="{423F1B6D-D93C-4636-96DA-5CEA509B11C7}"/>
+                <a16:creationId xmlns:a16="http://schemas.microsoft.com/office/drawing/2014/main" id="{4081DA6B-47D8-4B41-B656-99FF0D8E6813}"/>
               </a:ext>
             </a:extLst>
           </p:cNvPr>
@@ -13724,7 +14307,7 @@
           <p:cNvPr id="27" name="">
             <a:extLst xmlns:a="http://schemas.openxmlformats.org/drawingml/2006/main">
               <a:ext uri="{FF2B5EF4-FFF2-40B4-BE49-F238E27FC236}">
-                <a16:creationId xmlns:a16="http://schemas.microsoft.com/office/drawing/2014/main" id="{6E57B587-6170-45AD-A9E6-0DD7345B6ECC}"/>
+                <a16:creationId xmlns:a16="http://schemas.microsoft.com/office/drawing/2014/main" id="{1C39497D-5CE6-457B-8E40-B6C73ABB133D}"/>
               </a:ext>
             </a:extLst>
           </p:cNvPr>
@@ -13774,7 +14357,7 @@
           <p:cNvPr id="28" name="">
             <a:extLst xmlns:a="http://schemas.openxmlformats.org/drawingml/2006/main">
               <a:ext uri="{FF2B5EF4-FFF2-40B4-BE49-F238E27FC236}">
-                <a16:creationId xmlns:a16="http://schemas.microsoft.com/office/drawing/2014/main" id="{9AA5626F-7469-4611-BFDF-DDB2FE9C88A4}"/>
+                <a16:creationId xmlns:a16="http://schemas.microsoft.com/office/drawing/2014/main" id="{A128C404-EF30-41A2-9DCD-D88F892BD4EE}"/>
               </a:ext>
             </a:extLst>
           </p:cNvPr>
@@ -13809,7 +14392,7 @@
           <p:cNvPr id="29" name="">
             <a:extLst xmlns:a="http://schemas.openxmlformats.org/drawingml/2006/main">
               <a:ext uri="{FF2B5EF4-FFF2-40B4-BE49-F238E27FC236}">
-                <a16:creationId xmlns:a16="http://schemas.microsoft.com/office/drawing/2014/main" id="{E22357C1-1E2C-4A48-9538-54351E9C5E9A}"/>
+                <a16:creationId xmlns:a16="http://schemas.microsoft.com/office/drawing/2014/main" id="{AB0F1B9E-B5F1-43A2-BEA3-37186A8D8F33}"/>
               </a:ext>
             </a:extLst>
           </p:cNvPr>
@@ -13859,7 +14442,7 @@
           <p:cNvPr id="30" name="">
             <a:extLst xmlns:a="http://schemas.openxmlformats.org/drawingml/2006/main">
               <a:ext uri="{FF2B5EF4-FFF2-40B4-BE49-F238E27FC236}">
-                <a16:creationId xmlns:a16="http://schemas.microsoft.com/office/drawing/2014/main" id="{C0659F76-88F5-4526-9579-848FD2EE3665}"/>
+                <a16:creationId xmlns:a16="http://schemas.microsoft.com/office/drawing/2014/main" id="{1C6DD034-A67C-4B25-9DD9-0E155D30B399}"/>
               </a:ext>
             </a:extLst>
           </p:cNvPr>
@@ -13909,7 +14492,7 @@
           <p:cNvPr id="31" name="">
             <a:extLst xmlns:a="http://schemas.openxmlformats.org/drawingml/2006/main">
               <a:ext uri="{FF2B5EF4-FFF2-40B4-BE49-F238E27FC236}">
-                <a16:creationId xmlns:a16="http://schemas.microsoft.com/office/drawing/2014/main" id="{52C1DE69-4A3C-47BF-81F0-84FAABF8F797}"/>
+                <a16:creationId xmlns:a16="http://schemas.microsoft.com/office/drawing/2014/main" id="{0EB46760-CEF5-45B2-98F3-B0F09A6BAC20}"/>
               </a:ext>
             </a:extLst>
           </p:cNvPr>
@@ -13944,7 +14527,7 @@
           <p:cNvPr id="32" name="">
             <a:extLst xmlns:a="http://schemas.openxmlformats.org/drawingml/2006/main">
               <a:ext uri="{FF2B5EF4-FFF2-40B4-BE49-F238E27FC236}">
-                <a16:creationId xmlns:a16="http://schemas.microsoft.com/office/drawing/2014/main" id="{E5C61243-EE32-4AD1-9B4C-FFBB2F23B0F5}"/>
+                <a16:creationId xmlns:a16="http://schemas.microsoft.com/office/drawing/2014/main" id="{ECF97499-F313-43EC-89BC-22C094E26BAB}"/>
               </a:ext>
             </a:extLst>
           </p:cNvPr>
@@ -13994,7 +14577,7 @@
           <p:cNvPr id="33" name="">
             <a:extLst xmlns:a="http://schemas.openxmlformats.org/drawingml/2006/main">
               <a:ext uri="{FF2B5EF4-FFF2-40B4-BE49-F238E27FC236}">
-                <a16:creationId xmlns:a16="http://schemas.microsoft.com/office/drawing/2014/main" id="{33E6A21B-03FD-4C66-A9C6-F3267A1A2ACB}"/>
+                <a16:creationId xmlns:a16="http://schemas.microsoft.com/office/drawing/2014/main" id="{4B1BE4B4-A486-4C31-BDA9-8EC44F513368}"/>
               </a:ext>
             </a:extLst>
           </p:cNvPr>
@@ -14044,7 +14627,7 @@
           <p:cNvPr id="34" name="">
             <a:extLst xmlns:a="http://schemas.openxmlformats.org/drawingml/2006/main">
               <a:ext uri="{FF2B5EF4-FFF2-40B4-BE49-F238E27FC236}">
-                <a16:creationId xmlns:a16="http://schemas.microsoft.com/office/drawing/2014/main" id="{710F574C-5F9D-42F6-AE83-371455DE5D39}"/>
+                <a16:creationId xmlns:a16="http://schemas.microsoft.com/office/drawing/2014/main" id="{EAC5C8A3-7F01-4140-ADF4-C437D9D3D486}"/>
               </a:ext>
             </a:extLst>
           </p:cNvPr>
@@ -14079,7 +14662,7 @@
           <p:cNvPr id="35" name="">
             <a:extLst xmlns:a="http://schemas.openxmlformats.org/drawingml/2006/main">
               <a:ext uri="{FF2B5EF4-FFF2-40B4-BE49-F238E27FC236}">
-                <a16:creationId xmlns:a16="http://schemas.microsoft.com/office/drawing/2014/main" id="{6BB22939-1F7C-47D3-8EA9-347B2328D736}"/>
+                <a16:creationId xmlns:a16="http://schemas.microsoft.com/office/drawing/2014/main" id="{3BFA0DBE-3C8A-42DF-B996-495EE942A961}"/>
               </a:ext>
             </a:extLst>
           </p:cNvPr>
@@ -14129,7 +14712,7 @@
           <p:cNvPr id="36" name="">
             <a:extLst xmlns:a="http://schemas.openxmlformats.org/drawingml/2006/main">
               <a:ext uri="{FF2B5EF4-FFF2-40B4-BE49-F238E27FC236}">
-                <a16:creationId xmlns:a16="http://schemas.microsoft.com/office/drawing/2014/main" id="{FCDEBD61-9596-4702-8416-15A0D2019FB9}"/>
+                <a16:creationId xmlns:a16="http://schemas.microsoft.com/office/drawing/2014/main" id="{BA74AF3F-4D9B-4BB3-8C0B-1343632A0526}"/>
               </a:ext>
             </a:extLst>
           </p:cNvPr>
@@ -14179,7 +14762,7 @@
           <p:cNvPr id="37" name="">
             <a:extLst xmlns:a="http://schemas.openxmlformats.org/drawingml/2006/main">
               <a:ext uri="{FF2B5EF4-FFF2-40B4-BE49-F238E27FC236}">
-                <a16:creationId xmlns:a16="http://schemas.microsoft.com/office/drawing/2014/main" id="{1E7FB51C-F11F-4CCC-815A-3BCBEB5AA14C}"/>
+                <a16:creationId xmlns:a16="http://schemas.microsoft.com/office/drawing/2014/main" id="{33055567-7ECF-4FE9-8C06-4925A2A2D459}"/>
               </a:ext>
             </a:extLst>
           </p:cNvPr>
@@ -14220,7 +14803,7 @@
           <p:cNvPr id="38" name="">
             <a:extLst xmlns:a="http://schemas.openxmlformats.org/drawingml/2006/main">
               <a:ext uri="{FF2B5EF4-FFF2-40B4-BE49-F238E27FC236}">
-                <a16:creationId xmlns:a16="http://schemas.microsoft.com/office/drawing/2014/main" id="{1BBE0C4C-F1AD-4190-A9DD-5B0E3E5121B4}"/>
+                <a16:creationId xmlns:a16="http://schemas.microsoft.com/office/drawing/2014/main" id="{DCAE27FA-FBCE-44CF-9E81-D8DAD5B71AD6}"/>
               </a:ext>
             </a:extLst>
           </p:cNvPr>
@@ -14270,7 +14853,7 @@
           <p:cNvPr id="39" name="">
             <a:extLst xmlns:a="http://schemas.openxmlformats.org/drawingml/2006/main">
               <a:ext uri="{FF2B5EF4-FFF2-40B4-BE49-F238E27FC236}">
-                <a16:creationId xmlns:a16="http://schemas.microsoft.com/office/drawing/2014/main" id="{9D58D61F-CF24-4474-ACE6-E604D09A9DC1}"/>
+                <a16:creationId xmlns:a16="http://schemas.microsoft.com/office/drawing/2014/main" id="{8CADAB45-7025-49A1-83FD-9903DBB07767}"/>
               </a:ext>
             </a:extLst>
           </p:cNvPr>
@@ -14320,7 +14903,7 @@
           <p:cNvPr id="40" name="">
             <a:extLst xmlns:a="http://schemas.openxmlformats.org/drawingml/2006/main">
               <a:ext uri="{FF2B5EF4-FFF2-40B4-BE49-F238E27FC236}">
-                <a16:creationId xmlns:a16="http://schemas.microsoft.com/office/drawing/2014/main" id="{2484E631-9C1C-4972-A44A-45EBF9AD73D3}"/>
+                <a16:creationId xmlns:a16="http://schemas.microsoft.com/office/drawing/2014/main" id="{8F400DF9-47BB-4AE5-AB17-667EF4AAE959}"/>
               </a:ext>
             </a:extLst>
           </p:cNvPr>
@@ -14361,7 +14944,7 @@
           <p:cNvPr id="41" name="">
             <a:extLst xmlns:a="http://schemas.openxmlformats.org/drawingml/2006/main">
               <a:ext uri="{FF2B5EF4-FFF2-40B4-BE49-F238E27FC236}">
-                <a16:creationId xmlns:a16="http://schemas.microsoft.com/office/drawing/2014/main" id="{5F5AD2C3-A1E4-4E73-9C39-E981DC34FDD4}"/>
+                <a16:creationId xmlns:a16="http://schemas.microsoft.com/office/drawing/2014/main" id="{0D3F1323-CB8D-4087-8C6F-3714270E5E5B}"/>
               </a:ext>
             </a:extLst>
           </p:cNvPr>
@@ -14411,7 +14994,7 @@
           <p:cNvPr id="42" name="">
             <a:extLst xmlns:a="http://schemas.openxmlformats.org/drawingml/2006/main">
               <a:ext uri="{FF2B5EF4-FFF2-40B4-BE49-F238E27FC236}">
-                <a16:creationId xmlns:a16="http://schemas.microsoft.com/office/drawing/2014/main" id="{524C478C-5416-4B2A-8ABF-09C1B688DF8B}"/>
+                <a16:creationId xmlns:a16="http://schemas.microsoft.com/office/drawing/2014/main" id="{D609413C-EBC7-436F-BE33-28085AFA8A67}"/>
               </a:ext>
             </a:extLst>
           </p:cNvPr>
@@ -14478,7 +15061,7 @@
           <p:cNvPr id="43" name="">
             <a:extLst xmlns:a="http://schemas.openxmlformats.org/drawingml/2006/main">
               <a:ext uri="{FF2B5EF4-FFF2-40B4-BE49-F238E27FC236}">
-                <a16:creationId xmlns:a16="http://schemas.microsoft.com/office/drawing/2014/main" id="{0159645B-6657-4B1A-A0F5-40BDC5B93D5E}"/>
+                <a16:creationId xmlns:a16="http://schemas.microsoft.com/office/drawing/2014/main" id="{44681AE8-78B6-4A82-A2A4-6E4343F68700}"/>
               </a:ext>
             </a:extLst>
           </p:cNvPr>
@@ -14513,7 +15096,7 @@
           <p:cNvPr id="44" name="">
             <a:extLst xmlns:a="http://schemas.openxmlformats.org/drawingml/2006/main">
               <a:ext uri="{FF2B5EF4-FFF2-40B4-BE49-F238E27FC236}">
-                <a16:creationId xmlns:a16="http://schemas.microsoft.com/office/drawing/2014/main" id="{94F8732B-B0D4-4E3A-AE4D-ADF7D0623F5A}"/>
+                <a16:creationId xmlns:a16="http://schemas.microsoft.com/office/drawing/2014/main" id="{AA24C3ED-5831-470F-BF52-5AE4E4616468}"/>
               </a:ext>
             </a:extLst>
           </p:cNvPr>
@@ -14563,7 +15146,7 @@
           <p:cNvPr id="45" name="">
             <a:extLst xmlns:a="http://schemas.openxmlformats.org/drawingml/2006/main">
               <a:ext uri="{FF2B5EF4-FFF2-40B4-BE49-F238E27FC236}">
-                <a16:creationId xmlns:a16="http://schemas.microsoft.com/office/drawing/2014/main" id="{58BDFDAA-99A8-46DD-8A6C-DD0D8C13C9FE}"/>
+                <a16:creationId xmlns:a16="http://schemas.microsoft.com/office/drawing/2014/main" id="{E9B23D62-3FF2-4F35-8140-21E50391C31F}"/>
               </a:ext>
             </a:extLst>
           </p:cNvPr>
@@ -14613,7 +15196,7 @@
           <p:cNvPr id="46" name="">
             <a:extLst xmlns:a="http://schemas.openxmlformats.org/drawingml/2006/main">
               <a:ext uri="{FF2B5EF4-FFF2-40B4-BE49-F238E27FC236}">
-                <a16:creationId xmlns:a16="http://schemas.microsoft.com/office/drawing/2014/main" id="{3A7955E8-B3C6-4F3C-9384-F3F224B377C2}"/>
+                <a16:creationId xmlns:a16="http://schemas.microsoft.com/office/drawing/2014/main" id="{A4E3DB6D-A033-4DCB-B0B1-B7E350932CC8}"/>
               </a:ext>
             </a:extLst>
           </p:cNvPr>
@@ -14644,7 +15227,7 @@
           <p:cNvPr id="47" name="source-4">
             <a:extLst xmlns:a="http://schemas.openxmlformats.org/drawingml/2006/main">
               <a:ext uri="{FF2B5EF4-FFF2-40B4-BE49-F238E27FC236}">
-                <a16:creationId xmlns:a16="http://schemas.microsoft.com/office/drawing/2014/main" id="{573513A4-1FC0-4A71-93EA-0E6DB8641372}"/>
+                <a16:creationId xmlns:a16="http://schemas.microsoft.com/office/drawing/2014/main" id="{480A58C7-934D-45BD-ACB4-11AD2CFB4432}"/>
               </a:ext>
             </a:extLst>
           </p:cNvPr>
@@ -14694,7 +15277,7 @@
           <p:cNvPr id="48" name="page-4">
             <a:extLst xmlns:a="http://schemas.openxmlformats.org/drawingml/2006/main">
               <a:ext uri="{FF2B5EF4-FFF2-40B4-BE49-F238E27FC236}">
-                <a16:creationId xmlns:a16="http://schemas.microsoft.com/office/drawing/2014/main" id="{48203718-D37D-41E5-AA56-8807ABC38A27}"/>
+                <a16:creationId xmlns:a16="http://schemas.microsoft.com/office/drawing/2014/main" id="{C8F202A0-A2DD-4408-8465-89A3F56F52A0}"/>
               </a:ext>
             </a:extLst>
           </p:cNvPr>
@@ -14742,7 +15325,7 @@
     </p:spTree>
     <p:extLst>
       <p:ext uri="{BB962C8B-B14F-4D97-AF65-F5344CB8AC3E}">
-        <p14:creationId xmlns:p14="http://schemas.microsoft.com/office/powerpoint/2010/main" val="1135050675"/>
+        <p14:creationId xmlns:p14="http://schemas.microsoft.com/office/powerpoint/2010/main" val="330886388"/>
       </p:ext>
     </p:extLst>
   </p:cSld>
@@ -14773,7 +15356,7 @@
           <p:cNvPr id="20" name="kicker-5">
             <a:extLst xmlns:a="http://schemas.openxmlformats.org/drawingml/2006/main">
               <a:ext uri="{FF2B5EF4-FFF2-40B4-BE49-F238E27FC236}">
-                <a16:creationId xmlns:a16="http://schemas.microsoft.com/office/drawing/2014/main" id="{BE73E8E8-410E-425B-814A-249D7A57F768}"/>
+                <a16:creationId xmlns:a16="http://schemas.microsoft.com/office/drawing/2014/main" id="{710F61BC-11B4-4B3E-9656-A51F51185A96}"/>
               </a:ext>
             </a:extLst>
           </p:cNvPr>
@@ -14823,7 +15406,7 @@
           <p:cNvPr id="2" name="title-5">
             <a:extLst xmlns:a="http://schemas.openxmlformats.org/drawingml/2006/main">
               <a:ext uri="{FF2B5EF4-FFF2-40B4-BE49-F238E27FC236}">
-                <a16:creationId xmlns:a16="http://schemas.microsoft.com/office/drawing/2014/main" id="{5AA26BE6-160C-44CB-9DB0-ACDE5ADD5C78}"/>
+                <a16:creationId xmlns:a16="http://schemas.microsoft.com/office/drawing/2014/main" id="{9AE5E654-5C78-4270-B8C1-EF42CF6D2BEF}"/>
               </a:ext>
             </a:extLst>
           </p:cNvPr>
@@ -14873,7 +15456,7 @@
           <p:cNvPr id="3" name="">
             <a:extLst xmlns:a="http://schemas.openxmlformats.org/drawingml/2006/main">
               <a:ext uri="{FF2B5EF4-FFF2-40B4-BE49-F238E27FC236}">
-                <a16:creationId xmlns:a16="http://schemas.microsoft.com/office/drawing/2014/main" id="{AEFDA789-12B7-439C-AA47-249FD8C3BEDE}"/>
+                <a16:creationId xmlns:a16="http://schemas.microsoft.com/office/drawing/2014/main" id="{9FECE085-F94F-4C33-9BBA-74559E054B95}"/>
               </a:ext>
             </a:extLst>
           </p:cNvPr>
@@ -14904,7 +15487,7 @@
           <p:cNvPr id="4" name="">
             <a:extLst xmlns:a="http://schemas.openxmlformats.org/drawingml/2006/main">
               <a:ext uri="{FF2B5EF4-FFF2-40B4-BE49-F238E27FC236}">
-                <a16:creationId xmlns:a16="http://schemas.microsoft.com/office/drawing/2014/main" id="{4AA80ECB-24B0-4189-A1E7-46AA55CBDB03}"/>
+                <a16:creationId xmlns:a16="http://schemas.microsoft.com/office/drawing/2014/main" id="{C5992E04-E40F-411B-8551-FE9EB7127145}"/>
               </a:ext>
             </a:extLst>
           </p:cNvPr>
@@ -14954,7 +15537,7 @@
           <p:cNvPr id="5" name="">
             <a:extLst xmlns:a="http://schemas.openxmlformats.org/drawingml/2006/main">
               <a:ext uri="{FF2B5EF4-FFF2-40B4-BE49-F238E27FC236}">
-                <a16:creationId xmlns:a16="http://schemas.microsoft.com/office/drawing/2014/main" id="{DBDAAC3D-2399-4509-9A69-67FB6C662451}"/>
+                <a16:creationId xmlns:a16="http://schemas.microsoft.com/office/drawing/2014/main" id="{5780573F-FC94-4C6D-A4B5-BA52F29F74B7}"/>
               </a:ext>
             </a:extLst>
           </p:cNvPr>
@@ -14989,7 +15572,7 @@
           <p:cNvPr id="6" name="">
             <a:extLst xmlns:a="http://schemas.openxmlformats.org/drawingml/2006/main">
               <a:ext uri="{FF2B5EF4-FFF2-40B4-BE49-F238E27FC236}">
-                <a16:creationId xmlns:a16="http://schemas.microsoft.com/office/drawing/2014/main" id="{01F837E7-E24B-4FB1-BBFF-F95C922FC13E}"/>
+                <a16:creationId xmlns:a16="http://schemas.microsoft.com/office/drawing/2014/main" id="{0F3CBADE-7DBE-4803-B2FE-66B32C3177CD}"/>
               </a:ext>
             </a:extLst>
           </p:cNvPr>
@@ -15024,7 +15607,7 @@
           <p:cNvPr id="7" name="">
             <a:extLst xmlns:a="http://schemas.openxmlformats.org/drawingml/2006/main">
               <a:ext uri="{FF2B5EF4-FFF2-40B4-BE49-F238E27FC236}">
-                <a16:creationId xmlns:a16="http://schemas.microsoft.com/office/drawing/2014/main" id="{BACAFA22-96C2-46F9-AA94-13AA537C5157}"/>
+                <a16:creationId xmlns:a16="http://schemas.microsoft.com/office/drawing/2014/main" id="{AD6B501E-22AE-4026-B26B-F53234101F29}"/>
               </a:ext>
             </a:extLst>
           </p:cNvPr>
@@ -15057,7 +15640,7 @@
           <p:cNvPr id="8" name="">
             <a:extLst xmlns:a="http://schemas.openxmlformats.org/drawingml/2006/main">
               <a:ext uri="{FF2B5EF4-FFF2-40B4-BE49-F238E27FC236}">
-                <a16:creationId xmlns:a16="http://schemas.microsoft.com/office/drawing/2014/main" id="{BC03C491-0726-4E23-AE61-2A33D24FAFDC}"/>
+                <a16:creationId xmlns:a16="http://schemas.microsoft.com/office/drawing/2014/main" id="{00A92ECB-A340-43E6-B09B-9D678B21CF77}"/>
               </a:ext>
             </a:extLst>
           </p:cNvPr>
@@ -15107,7 +15690,7 @@
           <p:cNvPr id="9" name="">
             <a:extLst xmlns:a="http://schemas.openxmlformats.org/drawingml/2006/main">
               <a:ext uri="{FF2B5EF4-FFF2-40B4-BE49-F238E27FC236}">
-                <a16:creationId xmlns:a16="http://schemas.microsoft.com/office/drawing/2014/main" id="{8E565574-B5D8-4C52-A3DC-CD66259AC3A2}"/>
+                <a16:creationId xmlns:a16="http://schemas.microsoft.com/office/drawing/2014/main" id="{8FAC5251-5D66-4108-AE9D-3B684CAF08E3}"/>
               </a:ext>
             </a:extLst>
           </p:cNvPr>
@@ -15157,7 +15740,7 @@
           <p:cNvPr id="10" name="">
             <a:extLst xmlns:a="http://schemas.openxmlformats.org/drawingml/2006/main">
               <a:ext uri="{FF2B5EF4-FFF2-40B4-BE49-F238E27FC236}">
-                <a16:creationId xmlns:a16="http://schemas.microsoft.com/office/drawing/2014/main" id="{D7A9C711-B3C1-4CCC-81B4-04DA0A8DB82B}"/>
+                <a16:creationId xmlns:a16="http://schemas.microsoft.com/office/drawing/2014/main" id="{F4E23AB4-C9EA-4762-BE29-C73498830AFB}"/>
               </a:ext>
             </a:extLst>
           </p:cNvPr>
@@ -15207,7 +15790,7 @@
           <p:cNvPr id="11" name="">
             <a:extLst xmlns:a="http://schemas.openxmlformats.org/drawingml/2006/main">
               <a:ext uri="{FF2B5EF4-FFF2-40B4-BE49-F238E27FC236}">
-                <a16:creationId xmlns:a16="http://schemas.microsoft.com/office/drawing/2014/main" id="{A6DE9757-4FE1-4A51-B679-B5332C2F93DA}"/>
+                <a16:creationId xmlns:a16="http://schemas.microsoft.com/office/drawing/2014/main" id="{D4ACA5EC-D664-4843-82FF-26B56DB44FD5}"/>
               </a:ext>
             </a:extLst>
           </p:cNvPr>
@@ -15257,7 +15840,7 @@
           <p:cNvPr id="12" name="">
             <a:extLst xmlns:a="http://schemas.openxmlformats.org/drawingml/2006/main">
               <a:ext uri="{FF2B5EF4-FFF2-40B4-BE49-F238E27FC236}">
-                <a16:creationId xmlns:a16="http://schemas.microsoft.com/office/drawing/2014/main" id="{79D79DD0-901A-489F-8429-C52C91E3A993}"/>
+                <a16:creationId xmlns:a16="http://schemas.microsoft.com/office/drawing/2014/main" id="{37A05D7E-04EA-49AE-A4E2-9A737DEECBF6}"/>
               </a:ext>
             </a:extLst>
           </p:cNvPr>
@@ -15307,7 +15890,7 @@
           <p:cNvPr id="13" name="">
             <a:extLst xmlns:a="http://schemas.openxmlformats.org/drawingml/2006/main">
               <a:ext uri="{FF2B5EF4-FFF2-40B4-BE49-F238E27FC236}">
-                <a16:creationId xmlns:a16="http://schemas.microsoft.com/office/drawing/2014/main" id="{EF521B8E-7DC8-4A1A-B4F2-8CC98408D28C}"/>
+                <a16:creationId xmlns:a16="http://schemas.microsoft.com/office/drawing/2014/main" id="{B5DCFF4E-B222-4E77-8C0A-372E0D4AA461}"/>
               </a:ext>
             </a:extLst>
           </p:cNvPr>
@@ -15357,7 +15940,7 @@
           <p:cNvPr id="14" name="">
             <a:extLst xmlns:a="http://schemas.openxmlformats.org/drawingml/2006/main">
               <a:ext uri="{FF2B5EF4-FFF2-40B4-BE49-F238E27FC236}">
-                <a16:creationId xmlns:a16="http://schemas.microsoft.com/office/drawing/2014/main" id="{7B3051F4-9C47-451A-82DF-399F17EFF869}"/>
+                <a16:creationId xmlns:a16="http://schemas.microsoft.com/office/drawing/2014/main" id="{CBB8A189-167D-4B9A-8CBB-2961C44099FB}"/>
               </a:ext>
             </a:extLst>
           </p:cNvPr>
@@ -15407,7 +15990,7 @@
           <p:cNvPr id="15" name="">
             <a:extLst xmlns:a="http://schemas.openxmlformats.org/drawingml/2006/main">
               <a:ext uri="{FF2B5EF4-FFF2-40B4-BE49-F238E27FC236}">
-                <a16:creationId xmlns:a16="http://schemas.microsoft.com/office/drawing/2014/main" id="{5C26D076-BE52-4C3F-A24E-F6DEFA50104F}"/>
+                <a16:creationId xmlns:a16="http://schemas.microsoft.com/office/drawing/2014/main" id="{813543FA-20C7-451B-8526-36A49C58C31F}"/>
               </a:ext>
             </a:extLst>
           </p:cNvPr>
@@ -15457,7 +16040,7 @@
           <p:cNvPr id="16" name="">
             <a:extLst xmlns:a="http://schemas.openxmlformats.org/drawingml/2006/main">
               <a:ext uri="{FF2B5EF4-FFF2-40B4-BE49-F238E27FC236}">
-                <a16:creationId xmlns:a16="http://schemas.microsoft.com/office/drawing/2014/main" id="{60FC8123-B015-4244-9960-A1A6EF93C532}"/>
+                <a16:creationId xmlns:a16="http://schemas.microsoft.com/office/drawing/2014/main" id="{568BBF2B-E25A-4D5A-866A-F407CA3F9E45}"/>
               </a:ext>
             </a:extLst>
           </p:cNvPr>
@@ -15507,7 +16090,7 @@
           <p:cNvPr id="17" name="">
             <a:extLst xmlns:a="http://schemas.openxmlformats.org/drawingml/2006/main">
               <a:ext uri="{FF2B5EF4-FFF2-40B4-BE49-F238E27FC236}">
-                <a16:creationId xmlns:a16="http://schemas.microsoft.com/office/drawing/2014/main" id="{A0841D17-AAF0-4059-BB80-73FCF2A7F207}"/>
+                <a16:creationId xmlns:a16="http://schemas.microsoft.com/office/drawing/2014/main" id="{0B1DD085-6E28-4541-9AF7-4B125C5CCEF5}"/>
               </a:ext>
             </a:extLst>
           </p:cNvPr>
@@ -15538,7 +16121,7 @@
           <p:cNvPr id="18" name="source-5">
             <a:extLst xmlns:a="http://schemas.openxmlformats.org/drawingml/2006/main">
               <a:ext uri="{FF2B5EF4-FFF2-40B4-BE49-F238E27FC236}">
-                <a16:creationId xmlns:a16="http://schemas.microsoft.com/office/drawing/2014/main" id="{97C0AFB5-3395-47F3-8741-2C631149725E}"/>
+                <a16:creationId xmlns:a16="http://schemas.microsoft.com/office/drawing/2014/main" id="{1C2F0175-8F97-438B-B599-68800046B743}"/>
               </a:ext>
             </a:extLst>
           </p:cNvPr>
@@ -15588,7 +16171,7 @@
           <p:cNvPr id="19" name="page-5">
             <a:extLst xmlns:a="http://schemas.openxmlformats.org/drawingml/2006/main">
               <a:ext uri="{FF2B5EF4-FFF2-40B4-BE49-F238E27FC236}">
-                <a16:creationId xmlns:a16="http://schemas.microsoft.com/office/drawing/2014/main" id="{5A851D8F-3E5D-4E79-85E5-2C78DDEDDEF7}"/>
+                <a16:creationId xmlns:a16="http://schemas.microsoft.com/office/drawing/2014/main" id="{BDBA50AE-C12E-412F-9ADA-D83725D33A07}"/>
               </a:ext>
             </a:extLst>
           </p:cNvPr>
@@ -15636,7 +16219,7 @@
     </p:spTree>
     <p:extLst>
       <p:ext uri="{BB962C8B-B14F-4D97-AF65-F5344CB8AC3E}">
-        <p14:creationId xmlns:p14="http://schemas.microsoft.com/office/powerpoint/2010/main" val="441877730"/>
+        <p14:creationId xmlns:p14="http://schemas.microsoft.com/office/powerpoint/2010/main" val="1976386600"/>
       </p:ext>
     </p:extLst>
   </p:cSld>
@@ -15667,7 +16250,7 @@
           <p:cNvPr id="29" name="kicker-6">
             <a:extLst xmlns:a="http://schemas.openxmlformats.org/drawingml/2006/main">
               <a:ext uri="{FF2B5EF4-FFF2-40B4-BE49-F238E27FC236}">
-                <a16:creationId xmlns:a16="http://schemas.microsoft.com/office/drawing/2014/main" id="{EFD978B0-F994-4C6B-8221-8EB84D820DA8}"/>
+                <a16:creationId xmlns:a16="http://schemas.microsoft.com/office/drawing/2014/main" id="{2A1A9EB7-F73A-4FAB-BCFC-07D81A6A72B8}"/>
               </a:ext>
             </a:extLst>
           </p:cNvPr>
@@ -15717,7 +16300,7 @@
           <p:cNvPr id="2" name="title-6">
             <a:extLst xmlns:a="http://schemas.openxmlformats.org/drawingml/2006/main">
               <a:ext uri="{FF2B5EF4-FFF2-40B4-BE49-F238E27FC236}">
-                <a16:creationId xmlns:a16="http://schemas.microsoft.com/office/drawing/2014/main" id="{BB12480C-1DE2-4F81-AB80-AB1CB344FE8F}"/>
+                <a16:creationId xmlns:a16="http://schemas.microsoft.com/office/drawing/2014/main" id="{3CC92B11-7CB2-47E3-84B8-1DBE570E8EE0}"/>
               </a:ext>
             </a:extLst>
           </p:cNvPr>
@@ -15767,7 +16350,7 @@
           <p:cNvPr id="3" name="">
             <a:extLst xmlns:a="http://schemas.openxmlformats.org/drawingml/2006/main">
               <a:ext uri="{FF2B5EF4-FFF2-40B4-BE49-F238E27FC236}">
-                <a16:creationId xmlns:a16="http://schemas.microsoft.com/office/drawing/2014/main" id="{87636E52-F5C1-46EB-AD96-37D9F20C81D9}"/>
+                <a16:creationId xmlns:a16="http://schemas.microsoft.com/office/drawing/2014/main" id="{396ED035-FC97-46EE-8FC3-12DBC4A4314D}"/>
               </a:ext>
             </a:extLst>
           </p:cNvPr>
@@ -15798,7 +16381,7 @@
           <p:cNvPr id="4" name="">
             <a:extLst xmlns:a="http://schemas.openxmlformats.org/drawingml/2006/main">
               <a:ext uri="{FF2B5EF4-FFF2-40B4-BE49-F238E27FC236}">
-                <a16:creationId xmlns:a16="http://schemas.microsoft.com/office/drawing/2014/main" id="{035DBFC4-10DB-4CE2-9CDC-3481DF5022B3}"/>
+                <a16:creationId xmlns:a16="http://schemas.microsoft.com/office/drawing/2014/main" id="{5CE547B6-31CB-41C2-A442-BA80E62F6EAA}"/>
               </a:ext>
             </a:extLst>
           </p:cNvPr>
@@ -15848,7 +16431,7 @@
           <p:cNvPr id="5" name="">
             <a:extLst xmlns:a="http://schemas.openxmlformats.org/drawingml/2006/main">
               <a:ext uri="{FF2B5EF4-FFF2-40B4-BE49-F238E27FC236}">
-                <a16:creationId xmlns:a16="http://schemas.microsoft.com/office/drawing/2014/main" id="{78E3FC6C-555A-4574-8120-2DD2F5CF3FAA}"/>
+                <a16:creationId xmlns:a16="http://schemas.microsoft.com/office/drawing/2014/main" id="{90D4601B-B2BF-44F9-AE12-9477BCC5BB10}"/>
               </a:ext>
             </a:extLst>
           </p:cNvPr>
@@ -15879,7 +16462,7 @@
           <p:cNvPr id="6" name="">
             <a:extLst xmlns:a="http://schemas.openxmlformats.org/drawingml/2006/main">
               <a:ext uri="{FF2B5EF4-FFF2-40B4-BE49-F238E27FC236}">
-                <a16:creationId xmlns:a16="http://schemas.microsoft.com/office/drawing/2014/main" id="{DC231F37-7117-4FCD-BB6D-EE310C9ABE37}"/>
+                <a16:creationId xmlns:a16="http://schemas.microsoft.com/office/drawing/2014/main" id="{5B7AB3DE-7810-450F-B202-ECD945AEE119}"/>
               </a:ext>
             </a:extLst>
           </p:cNvPr>
@@ -15929,7 +16512,7 @@
           <p:cNvPr id="7" name="">
             <a:extLst xmlns:a="http://schemas.openxmlformats.org/drawingml/2006/main">
               <a:ext uri="{FF2B5EF4-FFF2-40B4-BE49-F238E27FC236}">
-                <a16:creationId xmlns:a16="http://schemas.microsoft.com/office/drawing/2014/main" id="{FA49E521-E21E-485F-B055-83CBA6D9E596}"/>
+                <a16:creationId xmlns:a16="http://schemas.microsoft.com/office/drawing/2014/main" id="{F7E74CAF-D960-4913-9683-FE27A6C93094}"/>
               </a:ext>
             </a:extLst>
           </p:cNvPr>
@@ -15979,7 +16562,7 @@
           <p:cNvPr id="8" name="">
             <a:extLst xmlns:a="http://schemas.openxmlformats.org/drawingml/2006/main">
               <a:ext uri="{FF2B5EF4-FFF2-40B4-BE49-F238E27FC236}">
-                <a16:creationId xmlns:a16="http://schemas.microsoft.com/office/drawing/2014/main" id="{36737BDD-F582-4673-A6E9-5CCC372F5518}"/>
+                <a16:creationId xmlns:a16="http://schemas.microsoft.com/office/drawing/2014/main" id="{AD1094DD-3FD4-42FC-BC85-39E6AAE4DB08}"/>
               </a:ext>
             </a:extLst>
           </p:cNvPr>
@@ -16029,7 +16612,7 @@
           <p:cNvPr id="9" name="">
             <a:extLst xmlns:a="http://schemas.openxmlformats.org/drawingml/2006/main">
               <a:ext uri="{FF2B5EF4-FFF2-40B4-BE49-F238E27FC236}">
-                <a16:creationId xmlns:a16="http://schemas.microsoft.com/office/drawing/2014/main" id="{C4737BBA-52B8-430F-A452-3E231E8E8C88}"/>
+                <a16:creationId xmlns:a16="http://schemas.microsoft.com/office/drawing/2014/main" id="{BD07F9D5-795E-4B6A-92D5-00917A65CCB9}"/>
               </a:ext>
             </a:extLst>
           </p:cNvPr>
@@ -16060,7 +16643,7 @@
           <p:cNvPr id="10" name="">
             <a:extLst xmlns:a="http://schemas.openxmlformats.org/drawingml/2006/main">
               <a:ext uri="{FF2B5EF4-FFF2-40B4-BE49-F238E27FC236}">
-                <a16:creationId xmlns:a16="http://schemas.microsoft.com/office/drawing/2014/main" id="{5B62D7B0-55F9-4D52-AF6F-2C014E0C1CDA}"/>
+                <a16:creationId xmlns:a16="http://schemas.microsoft.com/office/drawing/2014/main" id="{59079EB5-022D-4684-9754-8D2A3CFA6CD9}"/>
               </a:ext>
             </a:extLst>
           </p:cNvPr>
@@ -16110,7 +16693,7 @@
           <p:cNvPr id="11" name="">
             <a:extLst xmlns:a="http://schemas.openxmlformats.org/drawingml/2006/main">
               <a:ext uri="{FF2B5EF4-FFF2-40B4-BE49-F238E27FC236}">
-                <a16:creationId xmlns:a16="http://schemas.microsoft.com/office/drawing/2014/main" id="{B427D36C-06AC-47AB-B3C7-F32D9C80EBB7}"/>
+                <a16:creationId xmlns:a16="http://schemas.microsoft.com/office/drawing/2014/main" id="{63C66A60-C77D-4331-9729-493A115F625D}"/>
               </a:ext>
             </a:extLst>
           </p:cNvPr>
@@ -16160,7 +16743,7 @@
           <p:cNvPr id="12" name="">
             <a:extLst xmlns:a="http://schemas.openxmlformats.org/drawingml/2006/main">
               <a:ext uri="{FF2B5EF4-FFF2-40B4-BE49-F238E27FC236}">
-                <a16:creationId xmlns:a16="http://schemas.microsoft.com/office/drawing/2014/main" id="{843EC429-31D8-42FD-A50A-7F3B1664A67C}"/>
+                <a16:creationId xmlns:a16="http://schemas.microsoft.com/office/drawing/2014/main" id="{2CE44398-80E0-4C8A-8B5B-C0B3AE4F3D1E}"/>
               </a:ext>
             </a:extLst>
           </p:cNvPr>
@@ -16210,7 +16793,7 @@
           <p:cNvPr id="13" name="">
             <a:extLst xmlns:a="http://schemas.openxmlformats.org/drawingml/2006/main">
               <a:ext uri="{FF2B5EF4-FFF2-40B4-BE49-F238E27FC236}">
-                <a16:creationId xmlns:a16="http://schemas.microsoft.com/office/drawing/2014/main" id="{BC2CA0AA-C69B-41E2-A31A-408103E57DB5}"/>
+                <a16:creationId xmlns:a16="http://schemas.microsoft.com/office/drawing/2014/main" id="{1DE94AB6-9D9F-4E00-BCE5-9D7972374826}"/>
               </a:ext>
             </a:extLst>
           </p:cNvPr>
@@ -16241,7 +16824,7 @@
           <p:cNvPr id="14" name="">
             <a:extLst xmlns:a="http://schemas.openxmlformats.org/drawingml/2006/main">
               <a:ext uri="{FF2B5EF4-FFF2-40B4-BE49-F238E27FC236}">
-                <a16:creationId xmlns:a16="http://schemas.microsoft.com/office/drawing/2014/main" id="{EA1AA87F-4591-4FA9-9DBF-B52A75FC06A8}"/>
+                <a16:creationId xmlns:a16="http://schemas.microsoft.com/office/drawing/2014/main" id="{4AE8AFD9-38A9-49FA-9BDC-216515215AD9}"/>
               </a:ext>
             </a:extLst>
           </p:cNvPr>
@@ -16291,7 +16874,7 @@
           <p:cNvPr id="15" name="">
             <a:extLst xmlns:a="http://schemas.openxmlformats.org/drawingml/2006/main">
               <a:ext uri="{FF2B5EF4-FFF2-40B4-BE49-F238E27FC236}">
-                <a16:creationId xmlns:a16="http://schemas.microsoft.com/office/drawing/2014/main" id="{3E386417-B0A4-4CF2-925F-C55E6EEE07BF}"/>
+                <a16:creationId xmlns:a16="http://schemas.microsoft.com/office/drawing/2014/main" id="{E2C5662F-BB7F-45A6-A04C-959A8D661D4C}"/>
               </a:ext>
             </a:extLst>
           </p:cNvPr>
@@ -16341,7 +16924,7 @@
           <p:cNvPr id="16" name="">
             <a:extLst xmlns:a="http://schemas.openxmlformats.org/drawingml/2006/main">
               <a:ext uri="{FF2B5EF4-FFF2-40B4-BE49-F238E27FC236}">
-                <a16:creationId xmlns:a16="http://schemas.microsoft.com/office/drawing/2014/main" id="{79353FBE-8086-45A5-B6EA-61EE81C9AFB3}"/>
+                <a16:creationId xmlns:a16="http://schemas.microsoft.com/office/drawing/2014/main" id="{7119D7C3-3CBC-4612-B29F-47C3BF8745E5}"/>
               </a:ext>
             </a:extLst>
           </p:cNvPr>
@@ -16391,7 +16974,7 @@
           <p:cNvPr id="17" name="">
             <a:extLst xmlns:a="http://schemas.openxmlformats.org/drawingml/2006/main">
               <a:ext uri="{FF2B5EF4-FFF2-40B4-BE49-F238E27FC236}">
-                <a16:creationId xmlns:a16="http://schemas.microsoft.com/office/drawing/2014/main" id="{D82C0551-1CB7-48F7-997A-B206CF032134}"/>
+                <a16:creationId xmlns:a16="http://schemas.microsoft.com/office/drawing/2014/main" id="{ED0E939F-461B-4602-9FCB-C422369D87C9}"/>
               </a:ext>
             </a:extLst>
           </p:cNvPr>
@@ -16422,7 +17005,7 @@
           <p:cNvPr id="18" name="">
             <a:extLst xmlns:a="http://schemas.openxmlformats.org/drawingml/2006/main">
               <a:ext uri="{FF2B5EF4-FFF2-40B4-BE49-F238E27FC236}">
-                <a16:creationId xmlns:a16="http://schemas.microsoft.com/office/drawing/2014/main" id="{4C450D24-EF14-4870-878E-D23C225886D7}"/>
+                <a16:creationId xmlns:a16="http://schemas.microsoft.com/office/drawing/2014/main" id="{CF846852-5859-4116-A4ED-C8FF150681B9}"/>
               </a:ext>
             </a:extLst>
           </p:cNvPr>
@@ -16472,7 +17055,7 @@
           <p:cNvPr id="19" name="">
             <a:extLst xmlns:a="http://schemas.openxmlformats.org/drawingml/2006/main">
               <a:ext uri="{FF2B5EF4-FFF2-40B4-BE49-F238E27FC236}">
-                <a16:creationId xmlns:a16="http://schemas.microsoft.com/office/drawing/2014/main" id="{ED94A80C-13EE-406C-BB59-FA5682775026}"/>
+                <a16:creationId xmlns:a16="http://schemas.microsoft.com/office/drawing/2014/main" id="{CD71C1EA-A3AC-4D26-950D-68C00B068E83}"/>
               </a:ext>
             </a:extLst>
           </p:cNvPr>
@@ -16522,7 +17105,7 @@
           <p:cNvPr id="20" name="">
             <a:extLst xmlns:a="http://schemas.openxmlformats.org/drawingml/2006/main">
               <a:ext uri="{FF2B5EF4-FFF2-40B4-BE49-F238E27FC236}">
-                <a16:creationId xmlns:a16="http://schemas.microsoft.com/office/drawing/2014/main" id="{38C5AC17-A2C5-41B2-8E21-030FDDB568A2}"/>
+                <a16:creationId xmlns:a16="http://schemas.microsoft.com/office/drawing/2014/main" id="{CF04540F-CA59-45AF-BB29-61D7664F0810}"/>
               </a:ext>
             </a:extLst>
           </p:cNvPr>
@@ -16572,7 +17155,7 @@
           <p:cNvPr id="21" name="">
             <a:extLst xmlns:a="http://schemas.openxmlformats.org/drawingml/2006/main">
               <a:ext uri="{FF2B5EF4-FFF2-40B4-BE49-F238E27FC236}">
-                <a16:creationId xmlns:a16="http://schemas.microsoft.com/office/drawing/2014/main" id="{9DA0D3C7-6556-409C-A9D1-32A49BE94075}"/>
+                <a16:creationId xmlns:a16="http://schemas.microsoft.com/office/drawing/2014/main" id="{F171D1B5-7AB6-4766-BAE8-098F756DC108}"/>
               </a:ext>
             </a:extLst>
           </p:cNvPr>
@@ -16603,7 +17186,7 @@
           <p:cNvPr id="22" name="">
             <a:extLst xmlns:a="http://schemas.openxmlformats.org/drawingml/2006/main">
               <a:ext uri="{FF2B5EF4-FFF2-40B4-BE49-F238E27FC236}">
-                <a16:creationId xmlns:a16="http://schemas.microsoft.com/office/drawing/2014/main" id="{16184ACE-B4A2-413F-BDED-4276BE26979B}"/>
+                <a16:creationId xmlns:a16="http://schemas.microsoft.com/office/drawing/2014/main" id="{38EB84D3-F04F-404B-83F4-5DA1C6C6423E}"/>
               </a:ext>
             </a:extLst>
           </p:cNvPr>
@@ -16653,7 +17236,7 @@
           <p:cNvPr id="23" name="">
             <a:extLst xmlns:a="http://schemas.openxmlformats.org/drawingml/2006/main">
               <a:ext uri="{FF2B5EF4-FFF2-40B4-BE49-F238E27FC236}">
-                <a16:creationId xmlns:a16="http://schemas.microsoft.com/office/drawing/2014/main" id="{909F5C02-AC38-4158-97DB-4B5A5B1E8C45}"/>
+                <a16:creationId xmlns:a16="http://schemas.microsoft.com/office/drawing/2014/main" id="{68D9553C-AC96-4907-8AE2-88FE60057C5E}"/>
               </a:ext>
             </a:extLst>
           </p:cNvPr>
@@ -16703,7 +17286,7 @@
           <p:cNvPr id="24" name="">
             <a:extLst xmlns:a="http://schemas.openxmlformats.org/drawingml/2006/main">
               <a:ext uri="{FF2B5EF4-FFF2-40B4-BE49-F238E27FC236}">
-                <a16:creationId xmlns:a16="http://schemas.microsoft.com/office/drawing/2014/main" id="{FFA5764D-AAF2-4770-95BE-8A717717A19E}"/>
+                <a16:creationId xmlns:a16="http://schemas.microsoft.com/office/drawing/2014/main" id="{5781BC7E-5DB6-44EC-8982-26B71A54F842}"/>
               </a:ext>
             </a:extLst>
           </p:cNvPr>
@@ -16753,7 +17336,7 @@
           <p:cNvPr id="25" name="">
             <a:extLst xmlns:a="http://schemas.openxmlformats.org/drawingml/2006/main">
               <a:ext uri="{FF2B5EF4-FFF2-40B4-BE49-F238E27FC236}">
-                <a16:creationId xmlns:a16="http://schemas.microsoft.com/office/drawing/2014/main" id="{CA65F339-FC21-4057-B461-A6988E5A81AA}"/>
+                <a16:creationId xmlns:a16="http://schemas.microsoft.com/office/drawing/2014/main" id="{F6956606-40B7-4D49-9058-3A351FA8F482}"/>
               </a:ext>
             </a:extLst>
           </p:cNvPr>
@@ -16803,7 +17386,7 @@
           <p:cNvPr id="26" name="">
             <a:extLst xmlns:a="http://schemas.openxmlformats.org/drawingml/2006/main">
               <a:ext uri="{FF2B5EF4-FFF2-40B4-BE49-F238E27FC236}">
-                <a16:creationId xmlns:a16="http://schemas.microsoft.com/office/drawing/2014/main" id="{21A1D66F-E451-43B6-80A3-9111FDD6DF29}"/>
+                <a16:creationId xmlns:a16="http://schemas.microsoft.com/office/drawing/2014/main" id="{BE2CA247-11CB-4259-AB2F-E0FEA0CAF874}"/>
               </a:ext>
             </a:extLst>
           </p:cNvPr>
@@ -16834,7 +17417,7 @@
           <p:cNvPr id="27" name="source-6">
             <a:extLst xmlns:a="http://schemas.openxmlformats.org/drawingml/2006/main">
               <a:ext uri="{FF2B5EF4-FFF2-40B4-BE49-F238E27FC236}">
-                <a16:creationId xmlns:a16="http://schemas.microsoft.com/office/drawing/2014/main" id="{150583B4-2F0D-4A7F-9DA5-88C7A9841A17}"/>
+                <a16:creationId xmlns:a16="http://schemas.microsoft.com/office/drawing/2014/main" id="{F851B291-1856-4EC8-968F-CF901819B3DC}"/>
               </a:ext>
             </a:extLst>
           </p:cNvPr>
@@ -16884,7 +17467,7 @@
           <p:cNvPr id="28" name="page-6">
             <a:extLst xmlns:a="http://schemas.openxmlformats.org/drawingml/2006/main">
               <a:ext uri="{FF2B5EF4-FFF2-40B4-BE49-F238E27FC236}">
-                <a16:creationId xmlns:a16="http://schemas.microsoft.com/office/drawing/2014/main" id="{34D353A2-818C-415E-8EAA-D4FBAB8ABF99}"/>
+                <a16:creationId xmlns:a16="http://schemas.microsoft.com/office/drawing/2014/main" id="{B2D40154-48BA-47A9-A610-8941A7D87FE4}"/>
               </a:ext>
             </a:extLst>
           </p:cNvPr>
@@ -16932,7 +17515,7 @@
     </p:spTree>
     <p:extLst>
       <p:ext uri="{BB962C8B-B14F-4D97-AF65-F5344CB8AC3E}">
-        <p14:creationId xmlns:p14="http://schemas.microsoft.com/office/powerpoint/2010/main" val="518953614"/>
+        <p14:creationId xmlns:p14="http://schemas.microsoft.com/office/powerpoint/2010/main" val="1020023988"/>
       </p:ext>
     </p:extLst>
   </p:cSld>
@@ -16963,7 +17546,7 @@
           <p:cNvPr id="40" name="kicker-7">
             <a:extLst xmlns:a="http://schemas.openxmlformats.org/drawingml/2006/main">
               <a:ext uri="{FF2B5EF4-FFF2-40B4-BE49-F238E27FC236}">
-                <a16:creationId xmlns:a16="http://schemas.microsoft.com/office/drawing/2014/main" id="{F83F9E9A-6ECF-4E51-8670-49534C922A14}"/>
+                <a16:creationId xmlns:a16="http://schemas.microsoft.com/office/drawing/2014/main" id="{C9951E35-7F4F-43B3-AEC0-15E2608D9365}"/>
               </a:ext>
             </a:extLst>
           </p:cNvPr>
@@ -17013,7 +17596,7 @@
           <p:cNvPr id="2" name="title-7">
             <a:extLst xmlns:a="http://schemas.openxmlformats.org/drawingml/2006/main">
               <a:ext uri="{FF2B5EF4-FFF2-40B4-BE49-F238E27FC236}">
-                <a16:creationId xmlns:a16="http://schemas.microsoft.com/office/drawing/2014/main" id="{1C3C8D3B-7120-4D0C-84E2-3E680225482B}"/>
+                <a16:creationId xmlns:a16="http://schemas.microsoft.com/office/drawing/2014/main" id="{87521FE4-2DE7-49BB-8185-EA3CCD3BFA3F}"/>
               </a:ext>
             </a:extLst>
           </p:cNvPr>
@@ -17063,7 +17646,7 @@
           <p:cNvPr id="3" name="">
             <a:extLst xmlns:a="http://schemas.openxmlformats.org/drawingml/2006/main">
               <a:ext uri="{FF2B5EF4-FFF2-40B4-BE49-F238E27FC236}">
-                <a16:creationId xmlns:a16="http://schemas.microsoft.com/office/drawing/2014/main" id="{BAF7B867-57F0-4CDE-A53F-86B8A983DD16}"/>
+                <a16:creationId xmlns:a16="http://schemas.microsoft.com/office/drawing/2014/main" id="{507B19CB-8C73-4E0E-9707-83A4BE1A4E39}"/>
               </a:ext>
             </a:extLst>
           </p:cNvPr>
@@ -17094,7 +17677,7 @@
           <p:cNvPr id="4" name="">
             <a:extLst xmlns:a="http://schemas.openxmlformats.org/drawingml/2006/main">
               <a:ext uri="{FF2B5EF4-FFF2-40B4-BE49-F238E27FC236}">
-                <a16:creationId xmlns:a16="http://schemas.microsoft.com/office/drawing/2014/main" id="{412C744C-B9E8-46C9-9955-7E7EF249D899}"/>
+                <a16:creationId xmlns:a16="http://schemas.microsoft.com/office/drawing/2014/main" id="{75531B66-CFD6-4F4A-B3B0-E694F6F4F3D3}"/>
               </a:ext>
             </a:extLst>
           </p:cNvPr>
@@ -17144,7 +17727,7 @@
           <p:cNvPr id="5" name="">
             <a:extLst xmlns:a="http://schemas.openxmlformats.org/drawingml/2006/main">
               <a:ext uri="{FF2B5EF4-FFF2-40B4-BE49-F238E27FC236}">
-                <a16:creationId xmlns:a16="http://schemas.microsoft.com/office/drawing/2014/main" id="{44B27032-2082-4790-98D9-5F790D02D856}"/>
+                <a16:creationId xmlns:a16="http://schemas.microsoft.com/office/drawing/2014/main" id="{06BAB62C-F1D2-46B7-B15B-E3AD415BAFE9}"/>
               </a:ext>
             </a:extLst>
           </p:cNvPr>
@@ -17177,7 +17760,7 @@
           <p:cNvPr id="6" name="">
             <a:extLst xmlns:a="http://schemas.openxmlformats.org/drawingml/2006/main">
               <a:ext uri="{FF2B5EF4-FFF2-40B4-BE49-F238E27FC236}">
-                <a16:creationId xmlns:a16="http://schemas.microsoft.com/office/drawing/2014/main" id="{6F0DE621-4EEA-4DD1-91C2-E4FF0283BFBC}"/>
+                <a16:creationId xmlns:a16="http://schemas.microsoft.com/office/drawing/2014/main" id="{00110603-2B47-4E99-8FB4-8AEA94B03677}"/>
               </a:ext>
             </a:extLst>
           </p:cNvPr>
@@ -17210,7 +17793,7 @@
           <p:cNvPr id="7" name="">
             <a:extLst xmlns:a="http://schemas.openxmlformats.org/drawingml/2006/main">
               <a:ext uri="{FF2B5EF4-FFF2-40B4-BE49-F238E27FC236}">
-                <a16:creationId xmlns:a16="http://schemas.microsoft.com/office/drawing/2014/main" id="{4E28B00C-F6EA-4E8D-99CC-92CAD5A051C5}"/>
+                <a16:creationId xmlns:a16="http://schemas.microsoft.com/office/drawing/2014/main" id="{6F721A19-BA07-4808-B180-0DFF4D560E1B}"/>
               </a:ext>
             </a:extLst>
           </p:cNvPr>
@@ -17243,7 +17826,7 @@
           <p:cNvPr id="8" name="">
             <a:extLst xmlns:a="http://schemas.openxmlformats.org/drawingml/2006/main">
               <a:ext uri="{FF2B5EF4-FFF2-40B4-BE49-F238E27FC236}">
-                <a16:creationId xmlns:a16="http://schemas.microsoft.com/office/drawing/2014/main" id="{A868BE7F-FA28-47A4-93FC-B3082CA79503}"/>
+                <a16:creationId xmlns:a16="http://schemas.microsoft.com/office/drawing/2014/main" id="{726C6BC8-5A61-4E96-967D-A473912383ED}"/>
               </a:ext>
             </a:extLst>
           </p:cNvPr>
@@ -17276,7 +17859,7 @@
           <p:cNvPr id="9" name="">
             <a:extLst xmlns:a="http://schemas.openxmlformats.org/drawingml/2006/main">
               <a:ext uri="{FF2B5EF4-FFF2-40B4-BE49-F238E27FC236}">
-                <a16:creationId xmlns:a16="http://schemas.microsoft.com/office/drawing/2014/main" id="{71763E31-9C15-4433-85DC-0C7C0A459638}"/>
+                <a16:creationId xmlns:a16="http://schemas.microsoft.com/office/drawing/2014/main" id="{5FF0129E-A4EC-4D2C-AA3B-C2882033983D}"/>
               </a:ext>
             </a:extLst>
           </p:cNvPr>
@@ -17311,7 +17894,7 @@
           <p:cNvPr id="10" name="">
             <a:extLst xmlns:a="http://schemas.openxmlformats.org/drawingml/2006/main">
               <a:ext uri="{FF2B5EF4-FFF2-40B4-BE49-F238E27FC236}">
-                <a16:creationId xmlns:a16="http://schemas.microsoft.com/office/drawing/2014/main" id="{34D6CF9B-3D95-4C0F-A1CF-DCEDBC2BAF2D}"/>
+                <a16:creationId xmlns:a16="http://schemas.microsoft.com/office/drawing/2014/main" id="{DD904E11-D4A6-40BB-A46B-F929BF7D93F6}"/>
               </a:ext>
             </a:extLst>
           </p:cNvPr>
@@ -17361,7 +17944,7 @@
           <p:cNvPr id="11" name="">
             <a:extLst xmlns:a="http://schemas.openxmlformats.org/drawingml/2006/main">
               <a:ext uri="{FF2B5EF4-FFF2-40B4-BE49-F238E27FC236}">
-                <a16:creationId xmlns:a16="http://schemas.microsoft.com/office/drawing/2014/main" id="{2871CC5D-0191-48C4-BAED-B2540CE7C0CF}"/>
+                <a16:creationId xmlns:a16="http://schemas.microsoft.com/office/drawing/2014/main" id="{1210BC15-1280-433B-A311-6482F79E2FC7}"/>
               </a:ext>
             </a:extLst>
           </p:cNvPr>
@@ -17428,7 +18011,7 @@
           <p:cNvPr id="12" name="">
             <a:extLst xmlns:a="http://schemas.openxmlformats.org/drawingml/2006/main">
               <a:ext uri="{FF2B5EF4-FFF2-40B4-BE49-F238E27FC236}">
-                <a16:creationId xmlns:a16="http://schemas.microsoft.com/office/drawing/2014/main" id="{CA05E2A2-A771-401B-944E-446FDB172CDB}"/>
+                <a16:creationId xmlns:a16="http://schemas.microsoft.com/office/drawing/2014/main" id="{EFD32556-1AA2-4253-B993-87C2F3F1C0F9}"/>
               </a:ext>
             </a:extLst>
           </p:cNvPr>
@@ -17463,7 +18046,7 @@
           <p:cNvPr id="13" name="">
             <a:extLst xmlns:a="http://schemas.openxmlformats.org/drawingml/2006/main">
               <a:ext uri="{FF2B5EF4-FFF2-40B4-BE49-F238E27FC236}">
-                <a16:creationId xmlns:a16="http://schemas.microsoft.com/office/drawing/2014/main" id="{1682A535-9F15-4F2A-8605-2A855913578A}"/>
+                <a16:creationId xmlns:a16="http://schemas.microsoft.com/office/drawing/2014/main" id="{1C0B486E-A5E9-4B79-B025-5373F6C64D45}"/>
               </a:ext>
             </a:extLst>
           </p:cNvPr>
@@ -17513,7 +18096,7 @@
           <p:cNvPr id="14" name="">
             <a:extLst xmlns:a="http://schemas.openxmlformats.org/drawingml/2006/main">
               <a:ext uri="{FF2B5EF4-FFF2-40B4-BE49-F238E27FC236}">
-                <a16:creationId xmlns:a16="http://schemas.microsoft.com/office/drawing/2014/main" id="{69BCD6EE-E6ED-4051-8772-910BF6749AE5}"/>
+                <a16:creationId xmlns:a16="http://schemas.microsoft.com/office/drawing/2014/main" id="{4CA0667F-AD84-4AC1-9704-D53175DB56EA}"/>
               </a:ext>
             </a:extLst>
           </p:cNvPr>
@@ -17580,7 +18163,7 @@
           <p:cNvPr id="15" name="">
             <a:extLst xmlns:a="http://schemas.openxmlformats.org/drawingml/2006/main">
               <a:ext uri="{FF2B5EF4-FFF2-40B4-BE49-F238E27FC236}">
-                <a16:creationId xmlns:a16="http://schemas.microsoft.com/office/drawing/2014/main" id="{289302C3-ED29-4EE6-82E7-468B4E70934B}"/>
+                <a16:creationId xmlns:a16="http://schemas.microsoft.com/office/drawing/2014/main" id="{4540B321-7241-4617-A028-7B8B0073419A}"/>
               </a:ext>
             </a:extLst>
           </p:cNvPr>
@@ -17615,7 +18198,7 @@
           <p:cNvPr id="16" name="">
             <a:extLst xmlns:a="http://schemas.openxmlformats.org/drawingml/2006/main">
               <a:ext uri="{FF2B5EF4-FFF2-40B4-BE49-F238E27FC236}">
-                <a16:creationId xmlns:a16="http://schemas.microsoft.com/office/drawing/2014/main" id="{E402E305-9EA8-42B3-97A3-60E7A3E80696}"/>
+                <a16:creationId xmlns:a16="http://schemas.microsoft.com/office/drawing/2014/main" id="{A06946DD-119B-4FAC-BB94-A33C244691D6}"/>
               </a:ext>
             </a:extLst>
           </p:cNvPr>
@@ -17665,7 +18248,7 @@
           <p:cNvPr id="17" name="">
             <a:extLst xmlns:a="http://schemas.openxmlformats.org/drawingml/2006/main">
               <a:ext uri="{FF2B5EF4-FFF2-40B4-BE49-F238E27FC236}">
-                <a16:creationId xmlns:a16="http://schemas.microsoft.com/office/drawing/2014/main" id="{70BF8B08-44D1-4A76-8754-AFD790AC123D}"/>
+                <a16:creationId xmlns:a16="http://schemas.microsoft.com/office/drawing/2014/main" id="{D43A8EF4-F290-4B97-9D6B-5A20978C1012}"/>
               </a:ext>
             </a:extLst>
           </p:cNvPr>
@@ -17732,7 +18315,7 @@
           <p:cNvPr id="18" name="">
             <a:extLst xmlns:a="http://schemas.openxmlformats.org/drawingml/2006/main">
               <a:ext uri="{FF2B5EF4-FFF2-40B4-BE49-F238E27FC236}">
-                <a16:creationId xmlns:a16="http://schemas.microsoft.com/office/drawing/2014/main" id="{4471EAE0-4F5F-4297-A647-2C442AE30B5E}"/>
+                <a16:creationId xmlns:a16="http://schemas.microsoft.com/office/drawing/2014/main" id="{41BE269F-0C44-427C-A71C-F41D5A11E106}"/>
               </a:ext>
             </a:extLst>
           </p:cNvPr>
@@ -17767,7 +18350,7 @@
           <p:cNvPr id="19" name="">
             <a:extLst xmlns:a="http://schemas.openxmlformats.org/drawingml/2006/main">
               <a:ext uri="{FF2B5EF4-FFF2-40B4-BE49-F238E27FC236}">
-                <a16:creationId xmlns:a16="http://schemas.microsoft.com/office/drawing/2014/main" id="{8A176ED9-5ADE-45A3-863C-EC6A275A87A4}"/>
+                <a16:creationId xmlns:a16="http://schemas.microsoft.com/office/drawing/2014/main" id="{BE0E5F7F-A4DB-45B2-A2DE-A9819E9FB873}"/>
               </a:ext>
             </a:extLst>
           </p:cNvPr>
@@ -17817,7 +18400,7 @@
           <p:cNvPr id="20" name="">
             <a:extLst xmlns:a="http://schemas.openxmlformats.org/drawingml/2006/main">
               <a:ext uri="{FF2B5EF4-FFF2-40B4-BE49-F238E27FC236}">
-                <a16:creationId xmlns:a16="http://schemas.microsoft.com/office/drawing/2014/main" id="{3E9B3CC0-B8CC-4E8E-AEF0-59CBB482A927}"/>
+                <a16:creationId xmlns:a16="http://schemas.microsoft.com/office/drawing/2014/main" id="{346D9F80-6D5A-4B76-AD68-870F9A2A660E}"/>
               </a:ext>
             </a:extLst>
           </p:cNvPr>
@@ -17884,7 +18467,7 @@
           <p:cNvPr id="21" name="">
             <a:extLst xmlns:a="http://schemas.openxmlformats.org/drawingml/2006/main">
               <a:ext uri="{FF2B5EF4-FFF2-40B4-BE49-F238E27FC236}">
-                <a16:creationId xmlns:a16="http://schemas.microsoft.com/office/drawing/2014/main" id="{4CA8E8BC-3B89-414B-8A1D-9BE56FD77AB8}"/>
+                <a16:creationId xmlns:a16="http://schemas.microsoft.com/office/drawing/2014/main" id="{2E098DEA-7DAC-4069-BB12-B0DC0CCA871B}"/>
               </a:ext>
             </a:extLst>
           </p:cNvPr>
@@ -17925,7 +18508,7 @@
           <p:cNvPr id="22" name="">
             <a:extLst xmlns:a="http://schemas.openxmlformats.org/drawingml/2006/main">
               <a:ext uri="{FF2B5EF4-FFF2-40B4-BE49-F238E27FC236}">
-                <a16:creationId xmlns:a16="http://schemas.microsoft.com/office/drawing/2014/main" id="{B39FB978-DADE-49EF-8829-AE89E9224059}"/>
+                <a16:creationId xmlns:a16="http://schemas.microsoft.com/office/drawing/2014/main" id="{545684EA-1A0F-43E3-8C9E-F3560694E70D}"/>
               </a:ext>
             </a:extLst>
           </p:cNvPr>
@@ -17975,7 +18558,7 @@
           <p:cNvPr id="23" name="">
             <a:extLst xmlns:a="http://schemas.openxmlformats.org/drawingml/2006/main">
               <a:ext uri="{FF2B5EF4-FFF2-40B4-BE49-F238E27FC236}">
-                <a16:creationId xmlns:a16="http://schemas.microsoft.com/office/drawing/2014/main" id="{B5164BA0-802D-496E-A360-8EBB231F5984}"/>
+                <a16:creationId xmlns:a16="http://schemas.microsoft.com/office/drawing/2014/main" id="{3DFE1210-A495-4415-BDBE-1DEA0B540889}"/>
               </a:ext>
             </a:extLst>
           </p:cNvPr>
@@ -18042,7 +18625,7 @@
           <p:cNvPr id="24" name="">
             <a:extLst xmlns:a="http://schemas.openxmlformats.org/drawingml/2006/main">
               <a:ext uri="{FF2B5EF4-FFF2-40B4-BE49-F238E27FC236}">
-                <a16:creationId xmlns:a16="http://schemas.microsoft.com/office/drawing/2014/main" id="{4912C88C-0C74-4554-BE1C-284B57AE3735}"/>
+                <a16:creationId xmlns:a16="http://schemas.microsoft.com/office/drawing/2014/main" id="{2AD76CCB-3C87-433F-A884-88729CA95953}"/>
               </a:ext>
             </a:extLst>
           </p:cNvPr>
@@ -18092,7 +18675,7 @@
           <p:cNvPr id="25" name="">
             <a:extLst xmlns:a="http://schemas.openxmlformats.org/drawingml/2006/main">
               <a:ext uri="{FF2B5EF4-FFF2-40B4-BE49-F238E27FC236}">
-                <a16:creationId xmlns:a16="http://schemas.microsoft.com/office/drawing/2014/main" id="{4AC7980A-B9BF-4D41-B626-D3906E46B4CF}"/>
+                <a16:creationId xmlns:a16="http://schemas.microsoft.com/office/drawing/2014/main" id="{F6F97AD3-107B-4680-AC9A-B95A8D708611}"/>
               </a:ext>
             </a:extLst>
           </p:cNvPr>
@@ -18127,7 +18710,7 @@
           <p:cNvPr id="26" name="">
             <a:extLst xmlns:a="http://schemas.openxmlformats.org/drawingml/2006/main">
               <a:ext uri="{FF2B5EF4-FFF2-40B4-BE49-F238E27FC236}">
-                <a16:creationId xmlns:a16="http://schemas.microsoft.com/office/drawing/2014/main" id="{57A5BACA-73F3-4079-86CB-E40C11D39FCB}"/>
+                <a16:creationId xmlns:a16="http://schemas.microsoft.com/office/drawing/2014/main" id="{0F82C519-FAEE-456A-B825-D3804EFCC608}"/>
               </a:ext>
             </a:extLst>
           </p:cNvPr>
@@ -18177,7 +18760,7 @@
           <p:cNvPr id="27" name="">
             <a:extLst xmlns:a="http://schemas.openxmlformats.org/drawingml/2006/main">
               <a:ext uri="{FF2B5EF4-FFF2-40B4-BE49-F238E27FC236}">
-                <a16:creationId xmlns:a16="http://schemas.microsoft.com/office/drawing/2014/main" id="{33FFFBC4-364E-4C8B-B540-0B4AC2D1E2BD}"/>
+                <a16:creationId xmlns:a16="http://schemas.microsoft.com/office/drawing/2014/main" id="{139BE119-AC7C-441C-9331-A7CAD006E4BE}"/>
               </a:ext>
             </a:extLst>
           </p:cNvPr>
@@ -18227,7 +18810,7 @@
           <p:cNvPr id="28" name="">
             <a:extLst xmlns:a="http://schemas.openxmlformats.org/drawingml/2006/main">
               <a:ext uri="{FF2B5EF4-FFF2-40B4-BE49-F238E27FC236}">
-                <a16:creationId xmlns:a16="http://schemas.microsoft.com/office/drawing/2014/main" id="{5406CFE6-0116-4C53-999F-294883A94172}"/>
+                <a16:creationId xmlns:a16="http://schemas.microsoft.com/office/drawing/2014/main" id="{85711427-2490-445C-96C9-32B715BBE281}"/>
               </a:ext>
             </a:extLst>
           </p:cNvPr>
@@ -18277,7 +18860,7 @@
           <p:cNvPr id="29" name="">
             <a:extLst xmlns:a="http://schemas.openxmlformats.org/drawingml/2006/main">
               <a:ext uri="{FF2B5EF4-FFF2-40B4-BE49-F238E27FC236}">
-                <a16:creationId xmlns:a16="http://schemas.microsoft.com/office/drawing/2014/main" id="{3945EB85-5503-4CA8-BDEA-8B87A837503E}"/>
+                <a16:creationId xmlns:a16="http://schemas.microsoft.com/office/drawing/2014/main" id="{744D0245-CA96-4354-8B11-539379B8513F}"/>
               </a:ext>
             </a:extLst>
           </p:cNvPr>
@@ -18308,7 +18891,7 @@
           <p:cNvPr id="30" name="">
             <a:extLst xmlns:a="http://schemas.openxmlformats.org/drawingml/2006/main">
               <a:ext uri="{FF2B5EF4-FFF2-40B4-BE49-F238E27FC236}">
-                <a16:creationId xmlns:a16="http://schemas.microsoft.com/office/drawing/2014/main" id="{43ED16CD-5045-49D8-A161-59ED37F306F1}"/>
+                <a16:creationId xmlns:a16="http://schemas.microsoft.com/office/drawing/2014/main" id="{7AB280A4-CD91-4CA6-BB40-29E6883BC3D1}"/>
               </a:ext>
             </a:extLst>
           </p:cNvPr>
@@ -18358,7 +18941,7 @@
           <p:cNvPr id="31" name="">
             <a:extLst xmlns:a="http://schemas.openxmlformats.org/drawingml/2006/main">
               <a:ext uri="{FF2B5EF4-FFF2-40B4-BE49-F238E27FC236}">
-                <a16:creationId xmlns:a16="http://schemas.microsoft.com/office/drawing/2014/main" id="{2E87090E-8438-4044-8E5C-7EFAC5D05748}"/>
+                <a16:creationId xmlns:a16="http://schemas.microsoft.com/office/drawing/2014/main" id="{FFB5E238-88B8-44CD-95D7-BC44E9452632}"/>
               </a:ext>
             </a:extLst>
           </p:cNvPr>
@@ -18408,7 +18991,7 @@
           <p:cNvPr id="32" name="">
             <a:extLst xmlns:a="http://schemas.openxmlformats.org/drawingml/2006/main">
               <a:ext uri="{FF2B5EF4-FFF2-40B4-BE49-F238E27FC236}">
-                <a16:creationId xmlns:a16="http://schemas.microsoft.com/office/drawing/2014/main" id="{05F84C65-850F-4245-A06F-EEBA1D8C766D}"/>
+                <a16:creationId xmlns:a16="http://schemas.microsoft.com/office/drawing/2014/main" id="{8EEBFE22-396D-411D-8935-D4DE94028AE7}"/>
               </a:ext>
             </a:extLst>
           </p:cNvPr>
@@ -18458,7 +19041,7 @@
           <p:cNvPr id="33" name="">
             <a:extLst xmlns:a="http://schemas.openxmlformats.org/drawingml/2006/main">
               <a:ext uri="{FF2B5EF4-FFF2-40B4-BE49-F238E27FC236}">
-                <a16:creationId xmlns:a16="http://schemas.microsoft.com/office/drawing/2014/main" id="{D8D624B9-F5CD-4BFC-92BE-0C285BF1F5BD}"/>
+                <a16:creationId xmlns:a16="http://schemas.microsoft.com/office/drawing/2014/main" id="{32F29EA2-DC3C-4132-81FB-75F28D649568}"/>
               </a:ext>
             </a:extLst>
           </p:cNvPr>
@@ -18489,7 +19072,7 @@
           <p:cNvPr id="34" name="">
             <a:extLst xmlns:a="http://schemas.openxmlformats.org/drawingml/2006/main">
               <a:ext uri="{FF2B5EF4-FFF2-40B4-BE49-F238E27FC236}">
-                <a16:creationId xmlns:a16="http://schemas.microsoft.com/office/drawing/2014/main" id="{AB0A64E9-697C-485A-9AEE-26D9011FD637}"/>
+                <a16:creationId xmlns:a16="http://schemas.microsoft.com/office/drawing/2014/main" id="{8FA24B13-F81C-4F37-8B46-1550DBDE74A0}"/>
               </a:ext>
             </a:extLst>
           </p:cNvPr>
@@ -18539,7 +19122,7 @@
           <p:cNvPr id="35" name="">
             <a:extLst xmlns:a="http://schemas.openxmlformats.org/drawingml/2006/main">
               <a:ext uri="{FF2B5EF4-FFF2-40B4-BE49-F238E27FC236}">
-                <a16:creationId xmlns:a16="http://schemas.microsoft.com/office/drawing/2014/main" id="{AEAD6531-9B4B-402A-8D89-0619092D8B23}"/>
+                <a16:creationId xmlns:a16="http://schemas.microsoft.com/office/drawing/2014/main" id="{4DCC890C-0694-4CCC-A730-AD4D5815F495}"/>
               </a:ext>
             </a:extLst>
           </p:cNvPr>
@@ -18589,7 +19172,7 @@
           <p:cNvPr id="36" name="">
             <a:extLst xmlns:a="http://schemas.openxmlformats.org/drawingml/2006/main">
               <a:ext uri="{FF2B5EF4-FFF2-40B4-BE49-F238E27FC236}">
-                <a16:creationId xmlns:a16="http://schemas.microsoft.com/office/drawing/2014/main" id="{1211FE74-D42A-46C3-81DD-22254E8B4418}"/>
+                <a16:creationId xmlns:a16="http://schemas.microsoft.com/office/drawing/2014/main" id="{6E7D3A91-0EC3-48F7-A0CD-D51E548AA1C8}"/>
               </a:ext>
             </a:extLst>
           </p:cNvPr>
@@ -18639,7 +19222,7 @@
           <p:cNvPr id="37" name="">
             <a:extLst xmlns:a="http://schemas.openxmlformats.org/drawingml/2006/main">
               <a:ext uri="{FF2B5EF4-FFF2-40B4-BE49-F238E27FC236}">
-                <a16:creationId xmlns:a16="http://schemas.microsoft.com/office/drawing/2014/main" id="{0ABEBAE3-0415-4DFC-B53D-ADE8883410D6}"/>
+                <a16:creationId xmlns:a16="http://schemas.microsoft.com/office/drawing/2014/main" id="{EE5C5310-C64F-4552-994B-77F067ABCB9E}"/>
               </a:ext>
             </a:extLst>
           </p:cNvPr>
@@ -18670,7 +19253,7 @@
           <p:cNvPr id="38" name="source-7">
             <a:extLst xmlns:a="http://schemas.openxmlformats.org/drawingml/2006/main">
               <a:ext uri="{FF2B5EF4-FFF2-40B4-BE49-F238E27FC236}">
-                <a16:creationId xmlns:a16="http://schemas.microsoft.com/office/drawing/2014/main" id="{F546C00B-9E07-4654-B172-D7C0D544826D}"/>
+                <a16:creationId xmlns:a16="http://schemas.microsoft.com/office/drawing/2014/main" id="{028B6A51-4D18-46C9-9040-F7E329AF9253}"/>
               </a:ext>
             </a:extLst>
           </p:cNvPr>
@@ -18720,7 +19303,7 @@
           <p:cNvPr id="39" name="page-7">
             <a:extLst xmlns:a="http://schemas.openxmlformats.org/drawingml/2006/main">
               <a:ext uri="{FF2B5EF4-FFF2-40B4-BE49-F238E27FC236}">
-                <a16:creationId xmlns:a16="http://schemas.microsoft.com/office/drawing/2014/main" id="{B74EA6A6-5F2F-4FA9-A61B-DEAC2B829C43}"/>
+                <a16:creationId xmlns:a16="http://schemas.microsoft.com/office/drawing/2014/main" id="{0878082C-0359-4D54-847E-922F3FE72129}"/>
               </a:ext>
             </a:extLst>
           </p:cNvPr>
@@ -18768,7 +19351,7 @@
     </p:spTree>
     <p:extLst>
       <p:ext uri="{BB962C8B-B14F-4D97-AF65-F5344CB8AC3E}">
-        <p14:creationId xmlns:p14="http://schemas.microsoft.com/office/powerpoint/2010/main" val="124655111"/>
+        <p14:creationId xmlns:p14="http://schemas.microsoft.com/office/powerpoint/2010/main" val="2055470438"/>
       </p:ext>
     </p:extLst>
   </p:cSld>
@@ -18799,7 +19382,7 @@
           <p:cNvPr id="20" name="kicker-8">
             <a:extLst xmlns:a="http://schemas.openxmlformats.org/drawingml/2006/main">
               <a:ext uri="{FF2B5EF4-FFF2-40B4-BE49-F238E27FC236}">
-                <a16:creationId xmlns:a16="http://schemas.microsoft.com/office/drawing/2014/main" id="{5298A06B-8617-4F6E-8068-8D17FE2C8F6B}"/>
+                <a16:creationId xmlns:a16="http://schemas.microsoft.com/office/drawing/2014/main" id="{63BCFE2C-643A-4B31-A792-E301A2C53C64}"/>
               </a:ext>
             </a:extLst>
           </p:cNvPr>
@@ -18849,7 +19432,7 @@
           <p:cNvPr id="2" name="title-8">
             <a:extLst xmlns:a="http://schemas.openxmlformats.org/drawingml/2006/main">
               <a:ext uri="{FF2B5EF4-FFF2-40B4-BE49-F238E27FC236}">
-                <a16:creationId xmlns:a16="http://schemas.microsoft.com/office/drawing/2014/main" id="{6E27D82A-9F70-4FA2-96F2-93A1844A3730}"/>
+                <a16:creationId xmlns:a16="http://schemas.microsoft.com/office/drawing/2014/main" id="{D5188492-9BA6-45DC-9C91-724128481D4B}"/>
               </a:ext>
             </a:extLst>
           </p:cNvPr>
@@ -18899,7 +19482,7 @@
           <p:cNvPr id="3" name="">
             <a:extLst xmlns:a="http://schemas.openxmlformats.org/drawingml/2006/main">
               <a:ext uri="{FF2B5EF4-FFF2-40B4-BE49-F238E27FC236}">
-                <a16:creationId xmlns:a16="http://schemas.microsoft.com/office/drawing/2014/main" id="{FBF0F63B-024E-495A-8C83-1724C94D2540}"/>
+                <a16:creationId xmlns:a16="http://schemas.microsoft.com/office/drawing/2014/main" id="{F0C545AC-9D27-4B50-BC04-53B2C7F24A10}"/>
               </a:ext>
             </a:extLst>
           </p:cNvPr>
@@ -18930,7 +19513,7 @@
           <p:cNvPr id="4" name="">
             <a:extLst xmlns:a="http://schemas.openxmlformats.org/drawingml/2006/main">
               <a:ext uri="{FF2B5EF4-FFF2-40B4-BE49-F238E27FC236}">
-                <a16:creationId xmlns:a16="http://schemas.microsoft.com/office/drawing/2014/main" id="{F8353FE5-2F96-43EC-9FDA-2CF707F1B769}"/>
+                <a16:creationId xmlns:a16="http://schemas.microsoft.com/office/drawing/2014/main" id="{6DEA354F-2F88-46B0-953B-2263D349CEED}"/>
               </a:ext>
             </a:extLst>
           </p:cNvPr>
@@ -18980,7 +19563,7 @@
           <p:cNvPr id="5" name="">
             <a:extLst xmlns:a="http://schemas.openxmlformats.org/drawingml/2006/main">
               <a:ext uri="{FF2B5EF4-FFF2-40B4-BE49-F238E27FC236}">
-                <a16:creationId xmlns:a16="http://schemas.microsoft.com/office/drawing/2014/main" id="{FBFE7C9F-8D65-42E1-9A4F-7B3FAB6AD529}"/>
+                <a16:creationId xmlns:a16="http://schemas.microsoft.com/office/drawing/2014/main" id="{F3591FEA-68E5-4E3C-99A2-A26A336A7394}"/>
               </a:ext>
             </a:extLst>
           </p:cNvPr>
@@ -19021,7 +19604,7 @@
           <p:cNvPr id="6" name="">
             <a:extLst xmlns:a="http://schemas.openxmlformats.org/drawingml/2006/main">
               <a:ext uri="{FF2B5EF4-FFF2-40B4-BE49-F238E27FC236}">
-                <a16:creationId xmlns:a16="http://schemas.microsoft.com/office/drawing/2014/main" id="{0348CE73-E379-47A5-AE94-247577A66099}"/>
+                <a16:creationId xmlns:a16="http://schemas.microsoft.com/office/drawing/2014/main" id="{7FFC971C-47D4-4A6A-8FD7-C15A21835FF4}"/>
               </a:ext>
             </a:extLst>
           </p:cNvPr>
@@ -19071,7 +19654,7 @@
           <p:cNvPr id="7" name="">
             <a:extLst xmlns:a="http://schemas.openxmlformats.org/drawingml/2006/main">
               <a:ext uri="{FF2B5EF4-FFF2-40B4-BE49-F238E27FC236}">
-                <a16:creationId xmlns:a16="http://schemas.microsoft.com/office/drawing/2014/main" id="{42347320-3CF0-4079-8141-D9B5B75A5080}"/>
+                <a16:creationId xmlns:a16="http://schemas.microsoft.com/office/drawing/2014/main" id="{5546C198-3BD0-4AC5-BFED-764AB7008F90}"/>
               </a:ext>
             </a:extLst>
           </p:cNvPr>
@@ -19121,7 +19704,7 @@
           <p:cNvPr id="8" name="">
             <a:extLst xmlns:a="http://schemas.openxmlformats.org/drawingml/2006/main">
               <a:ext uri="{FF2B5EF4-FFF2-40B4-BE49-F238E27FC236}">
-                <a16:creationId xmlns:a16="http://schemas.microsoft.com/office/drawing/2014/main" id="{6B024660-783D-4A2C-B93B-31595C209AEF}"/>
+                <a16:creationId xmlns:a16="http://schemas.microsoft.com/office/drawing/2014/main" id="{66C5DA77-9EB9-4108-9D23-13835CA4478A}"/>
               </a:ext>
             </a:extLst>
           </p:cNvPr>
@@ -19171,7 +19754,7 @@
           <p:cNvPr id="9" name="">
             <a:extLst xmlns:a="http://schemas.openxmlformats.org/drawingml/2006/main">
               <a:ext uri="{FF2B5EF4-FFF2-40B4-BE49-F238E27FC236}">
-                <a16:creationId xmlns:a16="http://schemas.microsoft.com/office/drawing/2014/main" id="{4A060188-BD71-4212-BCBE-D412B7E5ABEE}"/>
+                <a16:creationId xmlns:a16="http://schemas.microsoft.com/office/drawing/2014/main" id="{767A10F0-7EFF-42B2-AC81-F0B5B3E3CFFC}"/>
               </a:ext>
             </a:extLst>
           </p:cNvPr>
@@ -19221,7 +19804,7 @@
           <p:cNvPr id="10" name="">
             <a:extLst xmlns:a="http://schemas.openxmlformats.org/drawingml/2006/main">
               <a:ext uri="{FF2B5EF4-FFF2-40B4-BE49-F238E27FC236}">
-                <a16:creationId xmlns:a16="http://schemas.microsoft.com/office/drawing/2014/main" id="{B4F4A36F-06AC-4C38-A17E-81DF3D901C08}"/>
+                <a16:creationId xmlns:a16="http://schemas.microsoft.com/office/drawing/2014/main" id="{F353D694-B212-444D-B0F1-E0A4A376D0D7}"/>
               </a:ext>
             </a:extLst>
           </p:cNvPr>
@@ -19262,7 +19845,7 @@
           <p:cNvPr id="11" name="">
             <a:extLst xmlns:a="http://schemas.openxmlformats.org/drawingml/2006/main">
               <a:ext uri="{FF2B5EF4-FFF2-40B4-BE49-F238E27FC236}">
-                <a16:creationId xmlns:a16="http://schemas.microsoft.com/office/drawing/2014/main" id="{40168E13-2F5C-4A59-A34D-99769232ABCC}"/>
+                <a16:creationId xmlns:a16="http://schemas.microsoft.com/office/drawing/2014/main" id="{B51CD67B-6657-4CFB-9450-99A6B92C39DC}"/>
               </a:ext>
             </a:extLst>
           </p:cNvPr>
@@ -19312,7 +19895,7 @@
           <p:cNvPr id="12" name="">
             <a:extLst xmlns:a="http://schemas.openxmlformats.org/drawingml/2006/main">
               <a:ext uri="{FF2B5EF4-FFF2-40B4-BE49-F238E27FC236}">
-                <a16:creationId xmlns:a16="http://schemas.microsoft.com/office/drawing/2014/main" id="{0FB0918B-B07E-40F0-A678-64EF347D7D31}"/>
+                <a16:creationId xmlns:a16="http://schemas.microsoft.com/office/drawing/2014/main" id="{DE76C5F9-ECB7-4548-9E61-3453A0D2F1BC}"/>
               </a:ext>
             </a:extLst>
           </p:cNvPr>
@@ -19362,7 +19945,7 @@
           <p:cNvPr id="13" name="">
             <a:extLst xmlns:a="http://schemas.openxmlformats.org/drawingml/2006/main">
               <a:ext uri="{FF2B5EF4-FFF2-40B4-BE49-F238E27FC236}">
-                <a16:creationId xmlns:a16="http://schemas.microsoft.com/office/drawing/2014/main" id="{7B17F0DE-57EA-4C04-B1CE-278946CDB852}"/>
+                <a16:creationId xmlns:a16="http://schemas.microsoft.com/office/drawing/2014/main" id="{025B2380-6FE7-4C68-A009-55C03350045B}"/>
               </a:ext>
             </a:extLst>
           </p:cNvPr>
@@ -19412,7 +19995,7 @@
           <p:cNvPr id="14" name="">
             <a:extLst xmlns:a="http://schemas.openxmlformats.org/drawingml/2006/main">
               <a:ext uri="{FF2B5EF4-FFF2-40B4-BE49-F238E27FC236}">
-                <a16:creationId xmlns:a16="http://schemas.microsoft.com/office/drawing/2014/main" id="{855A2F45-91C7-4CD8-9906-E5251FB5FCE6}"/>
+                <a16:creationId xmlns:a16="http://schemas.microsoft.com/office/drawing/2014/main" id="{A74314DA-8879-4AA3-989A-D4554CF3D5E9}"/>
               </a:ext>
             </a:extLst>
           </p:cNvPr>
@@ -19462,7 +20045,7 @@
           <p:cNvPr id="15" name="">
             <a:extLst xmlns:a="http://schemas.openxmlformats.org/drawingml/2006/main">
               <a:ext uri="{FF2B5EF4-FFF2-40B4-BE49-F238E27FC236}">
-                <a16:creationId xmlns:a16="http://schemas.microsoft.com/office/drawing/2014/main" id="{2F0C3947-4261-4F3C-810D-473B1D53FE6B}"/>
+                <a16:creationId xmlns:a16="http://schemas.microsoft.com/office/drawing/2014/main" id="{F7DB80CB-B356-4738-BBD8-DF4F97980CA9}"/>
               </a:ext>
             </a:extLst>
           </p:cNvPr>
@@ -19497,7 +20080,7 @@
           <p:cNvPr id="16" name="">
             <a:extLst xmlns:a="http://schemas.openxmlformats.org/drawingml/2006/main">
               <a:ext uri="{FF2B5EF4-FFF2-40B4-BE49-F238E27FC236}">
-                <a16:creationId xmlns:a16="http://schemas.microsoft.com/office/drawing/2014/main" id="{24293D41-8142-45B0-8F5B-73941B12B7FF}"/>
+                <a16:creationId xmlns:a16="http://schemas.microsoft.com/office/drawing/2014/main" id="{9DD0CDBF-5336-4887-9F69-DF4127F49D83}"/>
               </a:ext>
             </a:extLst>
           </p:cNvPr>
@@ -19547,7 +20130,7 @@
           <p:cNvPr id="17" name="">
             <a:extLst xmlns:a="http://schemas.openxmlformats.org/drawingml/2006/main">
               <a:ext uri="{FF2B5EF4-FFF2-40B4-BE49-F238E27FC236}">
-                <a16:creationId xmlns:a16="http://schemas.microsoft.com/office/drawing/2014/main" id="{EFAB9D1D-F80F-4422-9B2D-118EDFC1CC21}"/>
+                <a16:creationId xmlns:a16="http://schemas.microsoft.com/office/drawing/2014/main" id="{533393A1-AF28-4D13-B387-164117302619}"/>
               </a:ext>
             </a:extLst>
           </p:cNvPr>
@@ -19578,7 +20161,7 @@
           <p:cNvPr id="18" name="source-8">
             <a:extLst xmlns:a="http://schemas.openxmlformats.org/drawingml/2006/main">
               <a:ext uri="{FF2B5EF4-FFF2-40B4-BE49-F238E27FC236}">
-                <a16:creationId xmlns:a16="http://schemas.microsoft.com/office/drawing/2014/main" id="{4E007BC4-8DB6-48F5-AA85-1BBC01C6DFAC}"/>
+                <a16:creationId xmlns:a16="http://schemas.microsoft.com/office/drawing/2014/main" id="{A7059B68-E4F0-4866-8746-B3226D67B804}"/>
               </a:ext>
             </a:extLst>
           </p:cNvPr>
@@ -19628,7 +20211,7 @@
           <p:cNvPr id="19" name="page-8">
             <a:extLst xmlns:a="http://schemas.openxmlformats.org/drawingml/2006/main">
               <a:ext uri="{FF2B5EF4-FFF2-40B4-BE49-F238E27FC236}">
-                <a16:creationId xmlns:a16="http://schemas.microsoft.com/office/drawing/2014/main" id="{8756C569-474E-4061-AEE6-BB9ADEA740FB}"/>
+                <a16:creationId xmlns:a16="http://schemas.microsoft.com/office/drawing/2014/main" id="{7AE108C6-2474-4FA1-ADCD-AA37322D5C79}"/>
               </a:ext>
             </a:extLst>
           </p:cNvPr>
@@ -19676,7 +20259,7 @@
     </p:spTree>
     <p:extLst>
       <p:ext uri="{BB962C8B-B14F-4D97-AF65-F5344CB8AC3E}">
-        <p14:creationId xmlns:p14="http://schemas.microsoft.com/office/powerpoint/2010/main" val="1473271707"/>
+        <p14:creationId xmlns:p14="http://schemas.microsoft.com/office/powerpoint/2010/main" val="438520248"/>
       </p:ext>
     </p:extLst>
   </p:cSld>
@@ -19707,7 +20290,7 @@
           <p:cNvPr id="53" name="kicker-9">
             <a:extLst xmlns:a="http://schemas.openxmlformats.org/drawingml/2006/main">
               <a:ext uri="{FF2B5EF4-FFF2-40B4-BE49-F238E27FC236}">
-                <a16:creationId xmlns:a16="http://schemas.microsoft.com/office/drawing/2014/main" id="{8257EE52-E139-45DF-AF20-EE525CE75ADF}"/>
+                <a16:creationId xmlns:a16="http://schemas.microsoft.com/office/drawing/2014/main" id="{74F67DF8-FEC7-4A06-8B42-07DD0ADD6928}"/>
               </a:ext>
             </a:extLst>
           </p:cNvPr>
@@ -19757,7 +20340,7 @@
           <p:cNvPr id="2" name="title-9">
             <a:extLst xmlns:a="http://schemas.openxmlformats.org/drawingml/2006/main">
               <a:ext uri="{FF2B5EF4-FFF2-40B4-BE49-F238E27FC236}">
-                <a16:creationId xmlns:a16="http://schemas.microsoft.com/office/drawing/2014/main" id="{3809EA8B-2870-4960-BC32-70B2982C0250}"/>
+                <a16:creationId xmlns:a16="http://schemas.microsoft.com/office/drawing/2014/main" id="{F30FC485-44D0-49D5-90EC-93EC499C6C02}"/>
               </a:ext>
             </a:extLst>
           </p:cNvPr>
@@ -19807,7 +20390,7 @@
           <p:cNvPr id="3" name="">
             <a:extLst xmlns:a="http://schemas.openxmlformats.org/drawingml/2006/main">
               <a:ext uri="{FF2B5EF4-FFF2-40B4-BE49-F238E27FC236}">
-                <a16:creationId xmlns:a16="http://schemas.microsoft.com/office/drawing/2014/main" id="{29615CF5-5CD8-4342-9774-67070826F3F2}"/>
+                <a16:creationId xmlns:a16="http://schemas.microsoft.com/office/drawing/2014/main" id="{8C6D85BA-B1C6-4E8C-A386-21A3B787F0FB}"/>
               </a:ext>
             </a:extLst>
           </p:cNvPr>
@@ -19838,7 +20421,7 @@
           <p:cNvPr id="4" name="">
             <a:extLst xmlns:a="http://schemas.openxmlformats.org/drawingml/2006/main">
               <a:ext uri="{FF2B5EF4-FFF2-40B4-BE49-F238E27FC236}">
-                <a16:creationId xmlns:a16="http://schemas.microsoft.com/office/drawing/2014/main" id="{AC296A26-8B3B-480E-AE8A-88F76DB2AB45}"/>
+                <a16:creationId xmlns:a16="http://schemas.microsoft.com/office/drawing/2014/main" id="{CEE4B1CF-D43B-4469-A4DD-B47199C6F980}"/>
               </a:ext>
             </a:extLst>
           </p:cNvPr>
@@ -19888,7 +20471,7 @@
           <p:cNvPr id="5" name="">
             <a:extLst xmlns:a="http://schemas.openxmlformats.org/drawingml/2006/main">
               <a:ext uri="{FF2B5EF4-FFF2-40B4-BE49-F238E27FC236}">
-                <a16:creationId xmlns:a16="http://schemas.microsoft.com/office/drawing/2014/main" id="{47365DCD-0320-484F-8CF6-1E9313AB2BC8}"/>
+                <a16:creationId xmlns:a16="http://schemas.microsoft.com/office/drawing/2014/main" id="{953666CC-DB27-4D9E-89A0-EF50934047F4}"/>
               </a:ext>
             </a:extLst>
           </p:cNvPr>
@@ -19921,7 +20504,7 @@
           <p:cNvPr id="6" name="">
             <a:extLst xmlns:a="http://schemas.openxmlformats.org/drawingml/2006/main">
               <a:ext uri="{FF2B5EF4-FFF2-40B4-BE49-F238E27FC236}">
-                <a16:creationId xmlns:a16="http://schemas.microsoft.com/office/drawing/2014/main" id="{A2C97721-D162-43E7-B907-4811A328FDCB}"/>
+                <a16:creationId xmlns:a16="http://schemas.microsoft.com/office/drawing/2014/main" id="{C4F9183F-6F09-480A-9F3C-378079ABCB1F}"/>
               </a:ext>
             </a:extLst>
           </p:cNvPr>
@@ -19954,7 +20537,7 @@
           <p:cNvPr id="7" name="">
             <a:extLst xmlns:a="http://schemas.openxmlformats.org/drawingml/2006/main">
               <a:ext uri="{FF2B5EF4-FFF2-40B4-BE49-F238E27FC236}">
-                <a16:creationId xmlns:a16="http://schemas.microsoft.com/office/drawing/2014/main" id="{5955013A-4362-4D85-BFD8-D401EE1C08C5}"/>
+                <a16:creationId xmlns:a16="http://schemas.microsoft.com/office/drawing/2014/main" id="{73BF605B-10A2-4EDC-BE47-2136EF8B700B}"/>
               </a:ext>
             </a:extLst>
           </p:cNvPr>
@@ -19995,7 +20578,7 @@
           <p:cNvPr id="8" name="">
             <a:extLst xmlns:a="http://schemas.openxmlformats.org/drawingml/2006/main">
               <a:ext uri="{FF2B5EF4-FFF2-40B4-BE49-F238E27FC236}">
-                <a16:creationId xmlns:a16="http://schemas.microsoft.com/office/drawing/2014/main" id="{196568B0-CB9B-4778-BADD-B32152073FD5}"/>
+                <a16:creationId xmlns:a16="http://schemas.microsoft.com/office/drawing/2014/main" id="{F6B7633F-A71C-4E40-8E0A-1070B7969DA6}"/>
               </a:ext>
             </a:extLst>
           </p:cNvPr>
@@ -20062,7 +20645,7 @@
           <p:cNvPr id="9" name="">
             <a:extLst xmlns:a="http://schemas.openxmlformats.org/drawingml/2006/main">
               <a:ext uri="{FF2B5EF4-FFF2-40B4-BE49-F238E27FC236}">
-                <a16:creationId xmlns:a16="http://schemas.microsoft.com/office/drawing/2014/main" id="{19D7DCC5-4D0D-484C-BD9B-563A45E722EA}"/>
+                <a16:creationId xmlns:a16="http://schemas.microsoft.com/office/drawing/2014/main" id="{08332B7F-BBCA-48DD-B410-E037C797C1E0}"/>
               </a:ext>
             </a:extLst>
           </p:cNvPr>
@@ -20112,7 +20695,7 @@
           <p:cNvPr id="10" name="">
             <a:extLst xmlns:a="http://schemas.openxmlformats.org/drawingml/2006/main">
               <a:ext uri="{FF2B5EF4-FFF2-40B4-BE49-F238E27FC236}">
-                <a16:creationId xmlns:a16="http://schemas.microsoft.com/office/drawing/2014/main" id="{7A417265-16CF-4FDC-BBB6-E5C060C0452B}"/>
+                <a16:creationId xmlns:a16="http://schemas.microsoft.com/office/drawing/2014/main" id="{45BCF7DD-76F4-4AC6-A4A6-202F3AC878F9}"/>
               </a:ext>
             </a:extLst>
           </p:cNvPr>
@@ -20162,7 +20745,7 @@
           <p:cNvPr id="11" name="">
             <a:extLst xmlns:a="http://schemas.openxmlformats.org/drawingml/2006/main">
               <a:ext uri="{FF2B5EF4-FFF2-40B4-BE49-F238E27FC236}">
-                <a16:creationId xmlns:a16="http://schemas.microsoft.com/office/drawing/2014/main" id="{F6F58523-AD67-439C-BDB7-B4AAF70E95D4}"/>
+                <a16:creationId xmlns:a16="http://schemas.microsoft.com/office/drawing/2014/main" id="{9ABA0E0F-7790-4E8D-8579-F01792965506}"/>
               </a:ext>
             </a:extLst>
           </p:cNvPr>
@@ -20212,7 +20795,7 @@
           <p:cNvPr id="12" name="">
             <a:extLst xmlns:a="http://schemas.openxmlformats.org/drawingml/2006/main">
               <a:ext uri="{FF2B5EF4-FFF2-40B4-BE49-F238E27FC236}">
-                <a16:creationId xmlns:a16="http://schemas.microsoft.com/office/drawing/2014/main" id="{C6044400-B788-4EAE-B14C-054EB514EF14}"/>
+                <a16:creationId xmlns:a16="http://schemas.microsoft.com/office/drawing/2014/main" id="{6EDF0DB7-C284-4DB0-882A-02447B4D7714}"/>
               </a:ext>
             </a:extLst>
           </p:cNvPr>
@@ -20262,7 +20845,7 @@
           <p:cNvPr id="13" name="">
             <a:extLst xmlns:a="http://schemas.openxmlformats.org/drawingml/2006/main">
               <a:ext uri="{FF2B5EF4-FFF2-40B4-BE49-F238E27FC236}">
-                <a16:creationId xmlns:a16="http://schemas.microsoft.com/office/drawing/2014/main" id="{234D87B6-48B0-4804-B13D-19554B6158E3}"/>
+                <a16:creationId xmlns:a16="http://schemas.microsoft.com/office/drawing/2014/main" id="{4AFF32E3-A200-4CDD-A538-F8F5F2B02AE1}"/>
               </a:ext>
             </a:extLst>
           </p:cNvPr>
@@ -20312,7 +20895,7 @@
           <p:cNvPr id="14" name="">
             <a:extLst xmlns:a="http://schemas.openxmlformats.org/drawingml/2006/main">
               <a:ext uri="{FF2B5EF4-FFF2-40B4-BE49-F238E27FC236}">
-                <a16:creationId xmlns:a16="http://schemas.microsoft.com/office/drawing/2014/main" id="{4F527464-68DA-42CB-A728-06D9332EEF0D}"/>
+                <a16:creationId xmlns:a16="http://schemas.microsoft.com/office/drawing/2014/main" id="{59263E31-8DEC-434F-8F98-E54342332A79}"/>
               </a:ext>
             </a:extLst>
           </p:cNvPr>
@@ -20362,7 +20945,7 @@
           <p:cNvPr id="15" name="">
             <a:extLst xmlns:a="http://schemas.openxmlformats.org/drawingml/2006/main">
               <a:ext uri="{FF2B5EF4-FFF2-40B4-BE49-F238E27FC236}">
-                <a16:creationId xmlns:a16="http://schemas.microsoft.com/office/drawing/2014/main" id="{30F12DE1-FB60-4364-9413-23A6AB0C92D5}"/>
+                <a16:creationId xmlns:a16="http://schemas.microsoft.com/office/drawing/2014/main" id="{DCBDDF68-DD41-4C5D-B3EB-7FD258D9AA8D}"/>
               </a:ext>
             </a:extLst>
           </p:cNvPr>
@@ -20412,7 +20995,7 @@
           <p:cNvPr id="16" name="">
             <a:extLst xmlns:a="http://schemas.openxmlformats.org/drawingml/2006/main">
               <a:ext uri="{FF2B5EF4-FFF2-40B4-BE49-F238E27FC236}">
-                <a16:creationId xmlns:a16="http://schemas.microsoft.com/office/drawing/2014/main" id="{E2D59772-4352-471F-A4DB-36C99A0D853D}"/>
+                <a16:creationId xmlns:a16="http://schemas.microsoft.com/office/drawing/2014/main" id="{EED1515C-A076-45F9-A733-DFE54AE386BE}"/>
               </a:ext>
             </a:extLst>
           </p:cNvPr>
@@ -20462,7 +21045,7 @@
           <p:cNvPr id="17" name="">
             <a:extLst xmlns:a="http://schemas.openxmlformats.org/drawingml/2006/main">
               <a:ext uri="{FF2B5EF4-FFF2-40B4-BE49-F238E27FC236}">
-                <a16:creationId xmlns:a16="http://schemas.microsoft.com/office/drawing/2014/main" id="{16A8C707-79F3-4221-BE63-E0772BBA11FF}"/>
+                <a16:creationId xmlns:a16="http://schemas.microsoft.com/office/drawing/2014/main" id="{74A3DCC1-59F1-44E4-A892-19134CE406A8}"/>
               </a:ext>
             </a:extLst>
           </p:cNvPr>
@@ -20512,7 +21095,7 @@
           <p:cNvPr id="18" name="">
             <a:extLst xmlns:a="http://schemas.openxmlformats.org/drawingml/2006/main">
               <a:ext uri="{FF2B5EF4-FFF2-40B4-BE49-F238E27FC236}">
-                <a16:creationId xmlns:a16="http://schemas.microsoft.com/office/drawing/2014/main" id="{D5F3B685-6644-4315-9004-CB5BF0764312}"/>
+                <a16:creationId xmlns:a16="http://schemas.microsoft.com/office/drawing/2014/main" id="{A4DB1C4A-5F69-400E-B18B-8B74B12A1EBE}"/>
               </a:ext>
             </a:extLst>
           </p:cNvPr>
@@ -20562,7 +21145,7 @@
           <p:cNvPr id="19" name="">
             <a:extLst xmlns:a="http://schemas.openxmlformats.org/drawingml/2006/main">
               <a:ext uri="{FF2B5EF4-FFF2-40B4-BE49-F238E27FC236}">
-                <a16:creationId xmlns:a16="http://schemas.microsoft.com/office/drawing/2014/main" id="{166A0CFF-C3F4-4990-8BFB-441320CD12A6}"/>
+                <a16:creationId xmlns:a16="http://schemas.microsoft.com/office/drawing/2014/main" id="{D72D6387-78AF-4B8B-AED2-175A7FC2715E}"/>
               </a:ext>
             </a:extLst>
           </p:cNvPr>
@@ -20612,7 +21195,7 @@
           <p:cNvPr id="20" name="">
             <a:extLst xmlns:a="http://schemas.openxmlformats.org/drawingml/2006/main">
               <a:ext uri="{FF2B5EF4-FFF2-40B4-BE49-F238E27FC236}">
-                <a16:creationId xmlns:a16="http://schemas.microsoft.com/office/drawing/2014/main" id="{CDAFD663-0D50-402B-BD1A-BD4DD438A1D9}"/>
+                <a16:creationId xmlns:a16="http://schemas.microsoft.com/office/drawing/2014/main" id="{488DD910-EC2D-44E7-B3DC-A193FA4912E7}"/>
               </a:ext>
             </a:extLst>
           </p:cNvPr>
@@ -20662,7 +21245,7 @@
           <p:cNvPr id="21" name="">
             <a:extLst xmlns:a="http://schemas.openxmlformats.org/drawingml/2006/main">
               <a:ext uri="{FF2B5EF4-FFF2-40B4-BE49-F238E27FC236}">
-                <a16:creationId xmlns:a16="http://schemas.microsoft.com/office/drawing/2014/main" id="{6C783D4C-7017-4688-A05A-1E1B6FA9135D}"/>
+                <a16:creationId xmlns:a16="http://schemas.microsoft.com/office/drawing/2014/main" id="{B87C567B-1AB5-41D4-AC5B-E9AB1585DBD1}"/>
               </a:ext>
             </a:extLst>
           </p:cNvPr>
@@ -20712,7 +21295,7 @@
           <p:cNvPr id="22" name="">
             <a:extLst xmlns:a="http://schemas.openxmlformats.org/drawingml/2006/main">
               <a:ext uri="{FF2B5EF4-FFF2-40B4-BE49-F238E27FC236}">
-                <a16:creationId xmlns:a16="http://schemas.microsoft.com/office/drawing/2014/main" id="{9F558356-C776-4D4C-9408-D99AF55165C2}"/>
+                <a16:creationId xmlns:a16="http://schemas.microsoft.com/office/drawing/2014/main" id="{FFDA15EB-2E29-4FF8-8959-032CB131EE54}"/>
               </a:ext>
             </a:extLst>
           </p:cNvPr>
@@ -20747,7 +21330,7 @@
           <p:cNvPr id="23" name="">
             <a:extLst xmlns:a="http://schemas.openxmlformats.org/drawingml/2006/main">
               <a:ext uri="{FF2B5EF4-FFF2-40B4-BE49-F238E27FC236}">
-                <a16:creationId xmlns:a16="http://schemas.microsoft.com/office/drawing/2014/main" id="{BBDCE312-0517-4139-A854-55117EAA6BFD}"/>
+                <a16:creationId xmlns:a16="http://schemas.microsoft.com/office/drawing/2014/main" id="{10CB7DD1-C0B9-498A-BA29-29B64E3E15A5}"/>
               </a:ext>
             </a:extLst>
           </p:cNvPr>
@@ -20797,7 +21380,7 @@
           <p:cNvPr id="24" name="">
             <a:extLst xmlns:a="http://schemas.openxmlformats.org/drawingml/2006/main">
               <a:ext uri="{FF2B5EF4-FFF2-40B4-BE49-F238E27FC236}">
-                <a16:creationId xmlns:a16="http://schemas.microsoft.com/office/drawing/2014/main" id="{EC476514-B29F-4419-9826-EB1DC370F9C5}"/>
+                <a16:creationId xmlns:a16="http://schemas.microsoft.com/office/drawing/2014/main" id="{1B1173DA-14A1-4C9D-A90A-251A719F4EE0}"/>
               </a:ext>
             </a:extLst>
           </p:cNvPr>
@@ -20847,7 +21430,7 @@
           <p:cNvPr id="25" name="">
             <a:extLst xmlns:a="http://schemas.openxmlformats.org/drawingml/2006/main">
               <a:ext uri="{FF2B5EF4-FFF2-40B4-BE49-F238E27FC236}">
-                <a16:creationId xmlns:a16="http://schemas.microsoft.com/office/drawing/2014/main" id="{CBCABBFB-6562-4F2F-B59B-4C351137017B}"/>
+                <a16:creationId xmlns:a16="http://schemas.microsoft.com/office/drawing/2014/main" id="{DF0874AA-CF27-4B08-A23E-D9047651EDE7}"/>
               </a:ext>
             </a:extLst>
           </p:cNvPr>
@@ -20897,7 +21480,7 @@
           <p:cNvPr id="26" name="">
             <a:extLst xmlns:a="http://schemas.openxmlformats.org/drawingml/2006/main">
               <a:ext uri="{FF2B5EF4-FFF2-40B4-BE49-F238E27FC236}">
-                <a16:creationId xmlns:a16="http://schemas.microsoft.com/office/drawing/2014/main" id="{7200383C-8D9D-4A92-B11A-606E64C05B25}"/>
+                <a16:creationId xmlns:a16="http://schemas.microsoft.com/office/drawing/2014/main" id="{0D6B1A88-CCC6-40B5-BC02-ECC94F8F6987}"/>
               </a:ext>
             </a:extLst>
           </p:cNvPr>
@@ -20932,7 +21515,7 @@
           <p:cNvPr id="27" name="">
             <a:extLst xmlns:a="http://schemas.openxmlformats.org/drawingml/2006/main">
               <a:ext uri="{FF2B5EF4-FFF2-40B4-BE49-F238E27FC236}">
-                <a16:creationId xmlns:a16="http://schemas.microsoft.com/office/drawing/2014/main" id="{791751E9-342E-49AB-8CD0-3F970AFE244A}"/>
+                <a16:creationId xmlns:a16="http://schemas.microsoft.com/office/drawing/2014/main" id="{A717778A-945B-46EF-9F0A-433187EF4F5D}"/>
               </a:ext>
             </a:extLst>
           </p:cNvPr>
@@ -20982,7 +21565,7 @@
           <p:cNvPr id="28" name="">
             <a:extLst xmlns:a="http://schemas.openxmlformats.org/drawingml/2006/main">
               <a:ext uri="{FF2B5EF4-FFF2-40B4-BE49-F238E27FC236}">
-                <a16:creationId xmlns:a16="http://schemas.microsoft.com/office/drawing/2014/main" id="{59A55E3E-BED5-4924-9B68-B702BA399E48}"/>
+                <a16:creationId xmlns:a16="http://schemas.microsoft.com/office/drawing/2014/main" id="{A2FFDB49-B1BB-44F6-8EE2-F079CCC8194D}"/>
               </a:ext>
             </a:extLst>
           </p:cNvPr>
@@ -21032,7 +21615,7 @@
           <p:cNvPr id="29" name="">
             <a:extLst xmlns:a="http://schemas.openxmlformats.org/drawingml/2006/main">
               <a:ext uri="{FF2B5EF4-FFF2-40B4-BE49-F238E27FC236}">
-                <a16:creationId xmlns:a16="http://schemas.microsoft.com/office/drawing/2014/main" id="{89C116D2-D7C1-4137-BCF5-6E3751D0BBE3}"/>
+                <a16:creationId xmlns:a16="http://schemas.microsoft.com/office/drawing/2014/main" id="{41102D10-89AD-43F0-AF57-25C4D1E2C4CD}"/>
               </a:ext>
             </a:extLst>
           </p:cNvPr>
@@ -21082,7 +21665,7 @@
           <p:cNvPr id="30" name="">
             <a:extLst xmlns:a="http://schemas.openxmlformats.org/drawingml/2006/main">
               <a:ext uri="{FF2B5EF4-FFF2-40B4-BE49-F238E27FC236}">
-                <a16:creationId xmlns:a16="http://schemas.microsoft.com/office/drawing/2014/main" id="{21EC9F5F-B5C6-43D8-80C2-502A0A004E32}"/>
+                <a16:creationId xmlns:a16="http://schemas.microsoft.com/office/drawing/2014/main" id="{A6906C7F-E754-4919-8E72-6E7207514589}"/>
               </a:ext>
             </a:extLst>
           </p:cNvPr>
@@ -21117,7 +21700,7 @@
           <p:cNvPr id="31" name="">
             <a:extLst xmlns:a="http://schemas.openxmlformats.org/drawingml/2006/main">
               <a:ext uri="{FF2B5EF4-FFF2-40B4-BE49-F238E27FC236}">
-                <a16:creationId xmlns:a16="http://schemas.microsoft.com/office/drawing/2014/main" id="{3039D1E9-E6DF-41AB-9688-0F0EC8EA02DF}"/>
+                <a16:creationId xmlns:a16="http://schemas.microsoft.com/office/drawing/2014/main" id="{DC6C33BE-7C41-45C6-9276-73CAD4F4E59B}"/>
               </a:ext>
             </a:extLst>
           </p:cNvPr>
@@ -21167,7 +21750,7 @@
           <p:cNvPr id="32" name="">
             <a:extLst xmlns:a="http://schemas.openxmlformats.org/drawingml/2006/main">
               <a:ext uri="{FF2B5EF4-FFF2-40B4-BE49-F238E27FC236}">
-                <a16:creationId xmlns:a16="http://schemas.microsoft.com/office/drawing/2014/main" id="{BCBFF590-D033-442B-BF70-1B98F71B639E}"/>
+                <a16:creationId xmlns:a16="http://schemas.microsoft.com/office/drawing/2014/main" id="{6B494A08-74B2-4631-99FE-A11322FA0367}"/>
               </a:ext>
             </a:extLst>
           </p:cNvPr>
@@ -21217,7 +21800,7 @@
           <p:cNvPr id="33" name="">
             <a:extLst xmlns:a="http://schemas.openxmlformats.org/drawingml/2006/main">
               <a:ext uri="{FF2B5EF4-FFF2-40B4-BE49-F238E27FC236}">
-                <a16:creationId xmlns:a16="http://schemas.microsoft.com/office/drawing/2014/main" id="{0E6249C8-9098-48A0-AA75-74632A3BAE4F}"/>
+                <a16:creationId xmlns:a16="http://schemas.microsoft.com/office/drawing/2014/main" id="{A4623F91-8A1C-40F5-922A-EE5166A538F7}"/>
               </a:ext>
             </a:extLst>
           </p:cNvPr>
@@ -21267,7 +21850,7 @@
           <p:cNvPr id="34" name="">
             <a:extLst xmlns:a="http://schemas.openxmlformats.org/drawingml/2006/main">
               <a:ext uri="{FF2B5EF4-FFF2-40B4-BE49-F238E27FC236}">
-                <a16:creationId xmlns:a16="http://schemas.microsoft.com/office/drawing/2014/main" id="{E881566F-5810-4FE5-9A26-8D91BED118DE}"/>
+                <a16:creationId xmlns:a16="http://schemas.microsoft.com/office/drawing/2014/main" id="{F9A86016-FA01-4F7D-B417-AD34F15BB2D4}"/>
               </a:ext>
             </a:extLst>
           </p:cNvPr>
@@ -21302,7 +21885,7 @@
           <p:cNvPr id="35" name="">
             <a:extLst xmlns:a="http://schemas.openxmlformats.org/drawingml/2006/main">
               <a:ext uri="{FF2B5EF4-FFF2-40B4-BE49-F238E27FC236}">
-                <a16:creationId xmlns:a16="http://schemas.microsoft.com/office/drawing/2014/main" id="{3B019C25-5874-44E3-80B0-B06A447B35AA}"/>
+                <a16:creationId xmlns:a16="http://schemas.microsoft.com/office/drawing/2014/main" id="{DEE73CA8-3C53-4EE5-A3F1-972A16F079C9}"/>
               </a:ext>
             </a:extLst>
           </p:cNvPr>
@@ -21352,7 +21935,7 @@
           <p:cNvPr id="36" name="">
             <a:extLst xmlns:a="http://schemas.openxmlformats.org/drawingml/2006/main">
               <a:ext uri="{FF2B5EF4-FFF2-40B4-BE49-F238E27FC236}">
-                <a16:creationId xmlns:a16="http://schemas.microsoft.com/office/drawing/2014/main" id="{1916C0FD-2752-4763-8FD4-86C6D8CE0F7C}"/>
+                <a16:creationId xmlns:a16="http://schemas.microsoft.com/office/drawing/2014/main" id="{78468022-C7C6-49FD-8994-F306020335E0}"/>
               </a:ext>
             </a:extLst>
           </p:cNvPr>
@@ -21402,7 +21985,7 @@
           <p:cNvPr id="37" name="">
             <a:extLst xmlns:a="http://schemas.openxmlformats.org/drawingml/2006/main">
               <a:ext uri="{FF2B5EF4-FFF2-40B4-BE49-F238E27FC236}">
-                <a16:creationId xmlns:a16="http://schemas.microsoft.com/office/drawing/2014/main" id="{B939EA2D-8431-4184-81C2-3C6979856D21}"/>
+                <a16:creationId xmlns:a16="http://schemas.microsoft.com/office/drawing/2014/main" id="{DED58CFD-9AB5-4631-9A35-831ABDC6FBE3}"/>
               </a:ext>
             </a:extLst>
           </p:cNvPr>
@@ -21452,7 +22035,7 @@
           <p:cNvPr id="38" name="">
             <a:extLst xmlns:a="http://schemas.openxmlformats.org/drawingml/2006/main">
               <a:ext uri="{FF2B5EF4-FFF2-40B4-BE49-F238E27FC236}">
-                <a16:creationId xmlns:a16="http://schemas.microsoft.com/office/drawing/2014/main" id="{697F3ABF-C4B1-47E1-9E60-7C2BA4F6E781}"/>
+                <a16:creationId xmlns:a16="http://schemas.microsoft.com/office/drawing/2014/main" id="{CD189CCB-B00C-4E89-B704-38B63CD92DBB}"/>
               </a:ext>
             </a:extLst>
           </p:cNvPr>
@@ -21502,7 +22085,7 @@
           <p:cNvPr id="39" name="">
             <a:extLst xmlns:a="http://schemas.openxmlformats.org/drawingml/2006/main">
               <a:ext uri="{FF2B5EF4-FFF2-40B4-BE49-F238E27FC236}">
-                <a16:creationId xmlns:a16="http://schemas.microsoft.com/office/drawing/2014/main" id="{87EA424A-104A-4102-BEEB-0BDD5E773214}"/>
+                <a16:creationId xmlns:a16="http://schemas.microsoft.com/office/drawing/2014/main" id="{27A7C2E4-45AD-46B0-A697-46EE5F2AF723}"/>
               </a:ext>
             </a:extLst>
           </p:cNvPr>
@@ -21543,7 +22126,7 @@
           <p:cNvPr id="40" name="">
             <a:extLst xmlns:a="http://schemas.openxmlformats.org/drawingml/2006/main">
               <a:ext uri="{FF2B5EF4-FFF2-40B4-BE49-F238E27FC236}">
-                <a16:creationId xmlns:a16="http://schemas.microsoft.com/office/drawing/2014/main" id="{F33D8DBA-BB04-4185-AFDE-459E8EBEFA1C}"/>
+                <a16:creationId xmlns:a16="http://schemas.microsoft.com/office/drawing/2014/main" id="{9CCC854F-ED1C-4143-8108-5BA6AB034672}"/>
               </a:ext>
             </a:extLst>
           </p:cNvPr>
@@ -21593,7 +22176,7 @@
           <p:cNvPr id="41" name="">
             <a:extLst xmlns:a="http://schemas.openxmlformats.org/drawingml/2006/main">
               <a:ext uri="{FF2B5EF4-FFF2-40B4-BE49-F238E27FC236}">
-                <a16:creationId xmlns:a16="http://schemas.microsoft.com/office/drawing/2014/main" id="{E527A2D6-11AB-4AED-BC63-B2595A57A99D}"/>
+                <a16:creationId xmlns:a16="http://schemas.microsoft.com/office/drawing/2014/main" id="{6E3F1533-3654-47F4-84B9-ACDFBC9C40CB}"/>
               </a:ext>
             </a:extLst>
           </p:cNvPr>
@@ -21643,7 +22226,7 @@
           <p:cNvPr id="42" name="">
             <a:extLst xmlns:a="http://schemas.openxmlformats.org/drawingml/2006/main">
               <a:ext uri="{FF2B5EF4-FFF2-40B4-BE49-F238E27FC236}">
-                <a16:creationId xmlns:a16="http://schemas.microsoft.com/office/drawing/2014/main" id="{8DE9E624-4810-4EDC-974E-27A5DB0B3861}"/>
+                <a16:creationId xmlns:a16="http://schemas.microsoft.com/office/drawing/2014/main" id="{07255359-827A-4066-897C-A09E74A5D81A}"/>
               </a:ext>
             </a:extLst>
           </p:cNvPr>
@@ -21693,7 +22276,7 @@
           <p:cNvPr id="43" name="">
             <a:extLst xmlns:a="http://schemas.openxmlformats.org/drawingml/2006/main">
               <a:ext uri="{FF2B5EF4-FFF2-40B4-BE49-F238E27FC236}">
-                <a16:creationId xmlns:a16="http://schemas.microsoft.com/office/drawing/2014/main" id="{01098412-EDF0-41D2-8872-C06C0CAFF3FC}"/>
+                <a16:creationId xmlns:a16="http://schemas.microsoft.com/office/drawing/2014/main" id="{FE88AE22-DA42-4CF2-AEFA-59F4209F9B26}"/>
               </a:ext>
             </a:extLst>
           </p:cNvPr>
@@ -21743,7 +22326,7 @@
           <p:cNvPr id="44" name="">
             <a:extLst xmlns:a="http://schemas.openxmlformats.org/drawingml/2006/main">
               <a:ext uri="{FF2B5EF4-FFF2-40B4-BE49-F238E27FC236}">
-                <a16:creationId xmlns:a16="http://schemas.microsoft.com/office/drawing/2014/main" id="{7B33014F-C6C9-4783-9598-00C6F9A67AE0}"/>
+                <a16:creationId xmlns:a16="http://schemas.microsoft.com/office/drawing/2014/main" id="{C7C12DEF-85CA-437F-8D59-58E76F9513EA}"/>
               </a:ext>
             </a:extLst>
           </p:cNvPr>
@@ -21793,7 +22376,7 @@
           <p:cNvPr id="45" name="">
             <a:extLst xmlns:a="http://schemas.openxmlformats.org/drawingml/2006/main">
               <a:ext uri="{FF2B5EF4-FFF2-40B4-BE49-F238E27FC236}">
-                <a16:creationId xmlns:a16="http://schemas.microsoft.com/office/drawing/2014/main" id="{CE8383F3-CD14-4466-A0EC-229ACE685AE2}"/>
+                <a16:creationId xmlns:a16="http://schemas.microsoft.com/office/drawing/2014/main" id="{65F970B6-4E34-4836-938D-CB8EDCCF2156}"/>
               </a:ext>
             </a:extLst>
           </p:cNvPr>
@@ -21843,7 +22426,7 @@
           <p:cNvPr id="46" name="">
             <a:extLst xmlns:a="http://schemas.openxmlformats.org/drawingml/2006/main">
               <a:ext uri="{FF2B5EF4-FFF2-40B4-BE49-F238E27FC236}">
-                <a16:creationId xmlns:a16="http://schemas.microsoft.com/office/drawing/2014/main" id="{3F542DA5-BC82-4E01-9360-A26B00B5ED78}"/>
+                <a16:creationId xmlns:a16="http://schemas.microsoft.com/office/drawing/2014/main" id="{83AF1D88-40C1-4C9D-A539-A277BD84C3FE}"/>
               </a:ext>
             </a:extLst>
           </p:cNvPr>
@@ -21893,7 +22476,7 @@
           <p:cNvPr id="47" name="">
             <a:extLst xmlns:a="http://schemas.openxmlformats.org/drawingml/2006/main">
               <a:ext uri="{FF2B5EF4-FFF2-40B4-BE49-F238E27FC236}">
-                <a16:creationId xmlns:a16="http://schemas.microsoft.com/office/drawing/2014/main" id="{8D88E28A-F534-4208-9B2C-14DB5C12FAB7}"/>
+                <a16:creationId xmlns:a16="http://schemas.microsoft.com/office/drawing/2014/main" id="{1F53F3FD-2F94-486F-B45E-C706118865A5}"/>
               </a:ext>
             </a:extLst>
           </p:cNvPr>
@@ -21943,7 +22526,7 @@
           <p:cNvPr id="48" name="">
             <a:extLst xmlns:a="http://schemas.openxmlformats.org/drawingml/2006/main">
               <a:ext uri="{FF2B5EF4-FFF2-40B4-BE49-F238E27FC236}">
-                <a16:creationId xmlns:a16="http://schemas.microsoft.com/office/drawing/2014/main" id="{1FFBA2B8-0DEE-46FB-B068-E22725F177A4}"/>
+                <a16:creationId xmlns:a16="http://schemas.microsoft.com/office/drawing/2014/main" id="{A584EEDF-2F91-4588-A461-5AC6E6737D7F}"/>
               </a:ext>
             </a:extLst>
           </p:cNvPr>
@@ -21993,7 +22576,7 @@
           <p:cNvPr id="49" name="">
             <a:extLst xmlns:a="http://schemas.openxmlformats.org/drawingml/2006/main">
               <a:ext uri="{FF2B5EF4-FFF2-40B4-BE49-F238E27FC236}">
-                <a16:creationId xmlns:a16="http://schemas.microsoft.com/office/drawing/2014/main" id="{E063D09C-6A1E-4E83-B571-B3EE15DE4453}"/>
+                <a16:creationId xmlns:a16="http://schemas.microsoft.com/office/drawing/2014/main" id="{0EB377D2-AA58-4C37-992D-AFE07B76836B}"/>
               </a:ext>
             </a:extLst>
           </p:cNvPr>
@@ -22043,7 +22626,7 @@
           <p:cNvPr id="50" name="">
             <a:extLst xmlns:a="http://schemas.openxmlformats.org/drawingml/2006/main">
               <a:ext uri="{FF2B5EF4-FFF2-40B4-BE49-F238E27FC236}">
-                <a16:creationId xmlns:a16="http://schemas.microsoft.com/office/drawing/2014/main" id="{F8DDE8CD-8EB2-47BB-9225-0951C1F80774}"/>
+                <a16:creationId xmlns:a16="http://schemas.microsoft.com/office/drawing/2014/main" id="{8906E458-F3F9-4F9E-8539-AE30A6713BF8}"/>
               </a:ext>
             </a:extLst>
           </p:cNvPr>
@@ -22074,7 +22657,7 @@
           <p:cNvPr id="51" name="source-9">
             <a:extLst xmlns:a="http://schemas.openxmlformats.org/drawingml/2006/main">
               <a:ext uri="{FF2B5EF4-FFF2-40B4-BE49-F238E27FC236}">
-                <a16:creationId xmlns:a16="http://schemas.microsoft.com/office/drawing/2014/main" id="{2B6F7E18-E6E5-4836-9D06-48435B76D5CC}"/>
+                <a16:creationId xmlns:a16="http://schemas.microsoft.com/office/drawing/2014/main" id="{F4C66309-DFC7-4EF1-8B18-29CDBCD0162F}"/>
               </a:ext>
             </a:extLst>
           </p:cNvPr>
@@ -22124,7 +22707,7 @@
           <p:cNvPr id="52" name="page-9">
             <a:extLst xmlns:a="http://schemas.openxmlformats.org/drawingml/2006/main">
               <a:ext uri="{FF2B5EF4-FFF2-40B4-BE49-F238E27FC236}">
-                <a16:creationId xmlns:a16="http://schemas.microsoft.com/office/drawing/2014/main" id="{B00D0E60-D057-42D8-B1F9-07FEF0BF33BA}"/>
+                <a16:creationId xmlns:a16="http://schemas.microsoft.com/office/drawing/2014/main" id="{F227F65A-D267-4D51-B15C-AF362E651555}"/>
               </a:ext>
             </a:extLst>
           </p:cNvPr>
@@ -22172,7 +22755,7 @@
     </p:spTree>
     <p:extLst>
       <p:ext uri="{BB962C8B-B14F-4D97-AF65-F5344CB8AC3E}">
-        <p14:creationId xmlns:p14="http://schemas.microsoft.com/office/powerpoint/2010/main" val="173058741"/>
+        <p14:creationId xmlns:p14="http://schemas.microsoft.com/office/powerpoint/2010/main" val="250185180"/>
       </p:ext>
     </p:extLst>
   </p:cSld>

--- a/presentation/Huntrix_Final_Presentation.pptx
+++ b/presentation/Huntrix_Final_Presentation.pptx
@@ -2,27 +2,27 @@
 <file path=ppt/presentation.xml><?xml version="1.0" encoding="utf-8"?>
 <p:presentation xmlns:p="http://schemas.openxmlformats.org/presentationml/2006/main">
   <p:sldMasterIdLst>
-    <p:sldMasterId xmlns:r="http://schemas.openxmlformats.org/officeDocument/2006/relationships" id="2147483648" r:id="R67ceab9eb58646b3"/>
+    <p:sldMasterId xmlns:r="http://schemas.openxmlformats.org/officeDocument/2006/relationships" id="2147483648" r:id="Ra2074f835e6e49d3"/>
   </p:sldMasterIdLst>
   <p:notesMasterIdLst>
-    <p:notesMasterId xmlns:r="http://schemas.openxmlformats.org/officeDocument/2006/relationships" r:id="Rb0da647f3fc14971"/>
+    <p:notesMasterId xmlns:r="http://schemas.openxmlformats.org/officeDocument/2006/relationships" r:id="Re9dee522748445ca"/>
   </p:notesMasterIdLst>
   <p:sldIdLst>
-    <p:sldId xmlns:r="http://schemas.openxmlformats.org/officeDocument/2006/relationships" id="256" r:id="Rffa3e5328bad44b8"/>
-    <p:sldId xmlns:r="http://schemas.openxmlformats.org/officeDocument/2006/relationships" id="257" r:id="R6dd7584839aa418d"/>
-    <p:sldId xmlns:r="http://schemas.openxmlformats.org/officeDocument/2006/relationships" id="258" r:id="R1cc4fcb1b3354d12"/>
-    <p:sldId xmlns:r="http://schemas.openxmlformats.org/officeDocument/2006/relationships" id="259" r:id="Rf1164577e8f74f1e"/>
-    <p:sldId xmlns:r="http://schemas.openxmlformats.org/officeDocument/2006/relationships" id="260" r:id="R582ca49b10d841e8"/>
-    <p:sldId xmlns:r="http://schemas.openxmlformats.org/officeDocument/2006/relationships" id="261" r:id="Rdb40defc15e84f8d"/>
-    <p:sldId xmlns:r="http://schemas.openxmlformats.org/officeDocument/2006/relationships" id="262" r:id="Rf6a49ec0b11f4e70"/>
-    <p:sldId xmlns:r="http://schemas.openxmlformats.org/officeDocument/2006/relationships" id="263" r:id="R559bbac51ed649fb"/>
-    <p:sldId xmlns:r="http://schemas.openxmlformats.org/officeDocument/2006/relationships" id="264" r:id="R767b6402d7c14ce2"/>
-    <p:sldId xmlns:r="http://schemas.openxmlformats.org/officeDocument/2006/relationships" id="265" r:id="Rf9d0d642fd884b88"/>
-    <p:sldId xmlns:r="http://schemas.openxmlformats.org/officeDocument/2006/relationships" id="266" r:id="R92d13745927b40bb"/>
-    <p:sldId xmlns:r="http://schemas.openxmlformats.org/officeDocument/2006/relationships" id="267" r:id="R0b940a0f124f424d"/>
-    <p:sldId xmlns:r="http://schemas.openxmlformats.org/officeDocument/2006/relationships" id="268" r:id="Rac97388d8e2645d9"/>
-    <p:sldId xmlns:r="http://schemas.openxmlformats.org/officeDocument/2006/relationships" id="269" r:id="Rf05583dd8cb14fe0"/>
-    <p:sldId xmlns:r="http://schemas.openxmlformats.org/officeDocument/2006/relationships" id="270" r:id="Raf0bfd38b57e46e7"/>
+    <p:sldId xmlns:r="http://schemas.openxmlformats.org/officeDocument/2006/relationships" id="256" r:id="R48fdf22a5e53407c"/>
+    <p:sldId xmlns:r="http://schemas.openxmlformats.org/officeDocument/2006/relationships" id="257" r:id="R2298c36092834288"/>
+    <p:sldId xmlns:r="http://schemas.openxmlformats.org/officeDocument/2006/relationships" id="258" r:id="R35e45843a6724e9e"/>
+    <p:sldId xmlns:r="http://schemas.openxmlformats.org/officeDocument/2006/relationships" id="259" r:id="R066230ac937e4520"/>
+    <p:sldId xmlns:r="http://schemas.openxmlformats.org/officeDocument/2006/relationships" id="260" r:id="R9face599c8704143"/>
+    <p:sldId xmlns:r="http://schemas.openxmlformats.org/officeDocument/2006/relationships" id="261" r:id="R41067e09c75b4e9d"/>
+    <p:sldId xmlns:r="http://schemas.openxmlformats.org/officeDocument/2006/relationships" id="262" r:id="Rad721ac56b934c19"/>
+    <p:sldId xmlns:r="http://schemas.openxmlformats.org/officeDocument/2006/relationships" id="263" r:id="R6d025e94c4dd4ef8"/>
+    <p:sldId xmlns:r="http://schemas.openxmlformats.org/officeDocument/2006/relationships" id="264" r:id="R95c6d96a27094305"/>
+    <p:sldId xmlns:r="http://schemas.openxmlformats.org/officeDocument/2006/relationships" id="265" r:id="R351374c76ca944f0"/>
+    <p:sldId xmlns:r="http://schemas.openxmlformats.org/officeDocument/2006/relationships" id="266" r:id="R8f1c48d80d7146f0"/>
+    <p:sldId xmlns:r="http://schemas.openxmlformats.org/officeDocument/2006/relationships" id="267" r:id="R9bbdf36b608b4a82"/>
+    <p:sldId xmlns:r="http://schemas.openxmlformats.org/officeDocument/2006/relationships" id="268" r:id="Re31b7c7f64c74b32"/>
+    <p:sldId xmlns:r="http://schemas.openxmlformats.org/officeDocument/2006/relationships" id="269" r:id="Rcac2cf87b3524dd6"/>
+    <p:sldId xmlns:r="http://schemas.openxmlformats.org/officeDocument/2006/relationships" id="270" r:id="Rfb0317e0a97744db"/>
   </p:sldIdLst>
   <p:sldSz cx="12192000" cy="6858000"/>
   <p:notesSz cx="6858000" cy="9144000"/>
@@ -571,7 +571,7 @@
           </a:p>
           <a:p xmlns:a="http://schemas.openxmlformats.org/drawingml/2006/main">
             <a:r>
-              <a:t>Good morning. We are Team Huntrix. Our final Phase 1 system scored 0.982 on the private leaderboard and finished first. The public score was 0.967. The main reason was not a larger model or a large fine-tune. We changed which method was allowed to answer each kind of question. Exact cases went through deterministic evidence. Only the uncertain remainder went to the language model. This talk explains that decision, what failed before it, and how we packaged the result for Phase 2.</a:t>
+              <a:t>Good morning. We are Team Huntrix. This talk is about a research question rather than a leaderboard position: when is a Bengali hallucination decision exact enough for a deterministic method, and when should the system abstain to a language-model judge? We will show how that question changed our architecture, which experiments failed, how the decision log shaped later versions, and what the organizer-run Phase 2 notebook revealed about source shift. The final score appears later as one evaluation view, alongside local tests, reproducibility checks, and runtime evidence.</a:t>
             </a:r>
           </a:p>
           <a:p xmlns:a="http://schemas.openxmlformats.org/drawingml/2006/main">
@@ -586,7 +586,7 @@
           </a:p>
           <a:p xmlns:a="http://schemas.openxmlformats.org/drawingml/2006/main">
             <a:r>
-              <a:t>[1] Competition leaderboard and rules. [7] Team Huntrix final leaderboard and freeze records.</a:t>
+              <a:t>[1] Competition task definition. [3,4] Bengali hallucination and idiom studies. [7] Team Huntrix experiment ledger.</a:t>
             </a:r>
           </a:p>
         </p:txBody>
@@ -676,7 +676,7 @@
           </a:p>
           <a:p xmlns:a="http://schemas.openxmlformats.org/drawingml/2006/main">
             <a:r>
-              <a:t>This score history changed how we thought about the problem. The early character and embedding baseline scored 0.657. Gemma reached 0.742, and a Qwen judge reached 0.797. The largest single jump came at v6, when source and structured routing raised the score to 0.903. After that, progress was smaller and more forensic. We tightened provenance, repaired relation checks, and added legal and idiom evidence. v85 reached 0.966. v87 is the small dip on the right. We reverted it. v91 finished at 0.967 publicly.</a:t>
+              <a:t>This history is useful because it shows changes in method, including a regression. The early character and embedding baseline scored 0.657. Gemma reached 0.742, and a uniform Qwen judge reached 0.797. At v6, source and structured routing raised the score to 0.903, which changed our main hypothesis from model selection to decision routing. v37 introduced a stricter provenance gate. Later versions repaired relation checks and added legal and idiom evidence. v87 is the dip near the right: two plausible fact edits reduced the public score, so we reverted them. v91 then required typed relations and reached 0.967 publicly. We use the curve to identify pivots, not to imply that every version was progress.</a:t>
             </a:r>
           </a:p>
           <a:p xmlns:a="http://schemas.openxmlformats.org/drawingml/2006/main">
@@ -781,7 +781,7 @@
           </a:p>
           <a:p xmlns:a="http://schemas.openxmlformats.org/drawingml/2006/main">
             <a:r>
-              <a:t>Some of the most useful experiments were failures. Prompt voting looked decent on the released set and scored only 0.783 publicly. The compact TF-IDF verifier improved out of fold but struggled with cultural facts that had no context. Raw QA retrieval often found a passage about the right entity but the wrong relation. v87 was the clearest warning. We changed two labels using facts that looked plausible, and the public score fell from 0.966 to 0.965. We reverted those edits. From that point, a source was not enough. Every accepted record also needed the exact predicate the question asked for.</a:t>
+              <a:t>The decision log mattered because a failed experiment had to change the next experiment. Prompt voting looked reasonable on the released set and scored 0.783 publicly, so we stopped treating prompt variation as independent evidence. The TF-IDF verifier reached 0.826 out of fold but missed cultural facts, so we retained it only as a portable fallback. Raw retrieval often found the right entity and the wrong relation, so retrieval was restricted to proposing candidates. v87 changed two labels using plausible facts and reduced the public score from 0.966 to 0.965. We reverted it and added the source-plus-predicate admission rule. Later changes also had to preserve the regression suite and emit an evidence trace.</a:t>
             </a:r>
           </a:p>
           <a:p xmlns:a="http://schemas.openxmlformats.org/drawingml/2006/main">
@@ -886,7 +886,7 @@
           </a:p>
           <a:p xmlns:a="http://schemas.openxmlformats.org/drawingml/2006/main">
             <a:r>
-              <a:t>We kept the evaluation views separate. On the 299 released labels, the full cascade reached 0.9933 macro F1. The deterministic subset covered 225 of those rows without an error. The public leaderboard score was 0.967 at rank five. The final private score was 0.982 at rank one. That private result tells us the conservative policy generalized better than the public slice suggested. It does not tell us that every individual v91 rule will survive Phase 2. The source mix is broader, so we treat the private score as evidence, not a guarantee. Orny will cover that deployment side now.</a:t>
+              <a:t>A score alone could not tell us whether a change was safe, so we used four gates. The codebase had 249 automated tests, including 225 deterministic controls. Three inference runs produced byte-identical CSVs, and validation found no schema or ID-order failure. We then reported the aggregate evaluation separately: 0.9933 macro F1 on 299 released labels, 0.967 on the public Phase 1 split, and 0.982 on the private split. The frozen output hash matched the scored CSV. Finally, the organizer-run notebook validated all 5,000 Phase 2 rows in 3 hours and 52 minutes. These checks answer different questions; none substitutes for row-level Phase 2 accuracy, which has not been released. Orny will cover that deployment evidence now.</a:t>
             </a:r>
           </a:p>
           <a:p xmlns:a="http://schemas.openxmlformats.org/drawingml/2006/main">
@@ -901,7 +901,7 @@
           </a:p>
           <a:p xmlns:a="http://schemas.openxmlformats.org/drawingml/2006/main">
             <a:r>
-              <a:t>[7] Released-label evaluation and final Kaggle leaderboard records.</a:t>
+              <a:t>[7] Regression suite, freeze manifest, released-label evaluation and aggregate competition records. [8] Phase 2 runtime evidence.</a:t>
             </a:r>
           </a:p>
         </p:txBody>
@@ -1201,7 +1201,7 @@
           </a:p>
           <a:p xmlns:a="http://schemas.openxmlformats.org/drawingml/2006/main">
             <a:r>
-              <a:t>We will close with three lessons. First, this benchmark is a mixture of tasks, and those tasks need different evidence standards. Second, a related passage is not enough. The entity and the requested relation must match. Third, the fixed judge preserved runtime compliance when Phase 2 source coverage fell sharply. The system produced a private Phase 1 score of 0.982, reproduced the scored CSV offline, and completed the actual 5,000-row Phase 2 run in 3 hours and 52 minutes. We are ready for your questions.</a:t>
+              <a:t>We will close by separating supported findings from open questions. The experiments support three design choices: task families benefit from separate policies, predicate alignment reduces relation swaps, and explicit abstention keeps the pipeline safe when deterministic coverage falls. The main limitations are equally important. We had only 299 released labels, aggregate competition scores provide no row-level errors, and the Phase 2 accuracy result is still unknown. When those labels or analyses become available, the next work is to inspect the judged tail, recalibrate uncertain cases, and expand licensed evidence for civic and news domains. What we can already verify is reproducibility and runtime compliance. We are ready for your questions.</a:t>
             </a:r>
           </a:p>
           <a:p xmlns:a="http://schemas.openxmlformats.org/drawingml/2006/main">
@@ -1216,7 +1216,7 @@
           </a:p>
           <a:p xmlns:a="http://schemas.openxmlformats.org/drawingml/2006/main">
             <a:r>
-              <a:t>[7] Team Huntrix final system and leaderboard result. [8] Measured Phase 2 runtime report.</a:t>
+              <a:t>[7] Team Huntrix experiment and regression records. [8] Measured Phase 2 runtime report.</a:t>
             </a:r>
           </a:p>
         </p:txBody>
@@ -1606,7 +1606,7 @@
           </a:p>
           <a:p xmlns:a="http://schemas.openxmlformats.org/drawingml/2006/main">
             <a:r>
-              <a:t>Target time: 50 seconds</a:t>
+              <a:t>Target time: 60 seconds</a:t>
             </a:r>
           </a:p>
           <a:p xmlns:a="http://schemas.openxmlformats.org/drawingml/2006/main">
@@ -1621,7 +1621,7 @@
           </a:p>
           <a:p xmlns:a="http://schemas.openxmlformats.org/drawingml/2006/main">
             <a:r>
-              <a:t>The final router resolved 2,358 of the 2,516 Phase 1 rows before LLM inference. That is 93.72 percent. The judge saw 158 unique rows, or 6.28 percent. Earlier in development the uncertain queue was 620, so the deterministic layers removed almost three quarters of the expensive tail. This did more than save time. It also reduced the number of rows exposed to prompt variation. One detail: 158 is a row count. Some no-context rows received two or three views, so the number of model requests was higher than 158.</a:t>
+              <a:t>The deterministic branch was not one large collection of keywords. It contained separate parsers with the same output contract. The numeric solver normalized Bengali digits, units, dates, and ranges before checking the exact comparison requested. The multiple-choice solver extracted the option set, mapped aliases, and verified that the response selected a valid option. The morphology solver identified the requested form and compared the root, suffix, or grammatical class. Idiom and lexical rows first distinguished literal from figurative meaning. All four produced an entity, predicate, parsed value, source, and verdict. If any required field was missing or contradictory, the solver returned null. This shared contract made the router testable even though the parsers were task-specific.</a:t>
             </a:r>
           </a:p>
           <a:p xmlns:a="http://schemas.openxmlformats.org/drawingml/2006/main">
@@ -1636,7 +1636,7 @@
           </a:p>
           <a:p xmlns:a="http://schemas.openxmlformats.org/drawingml/2006/main">
             <a:r>
-              <a:t>[7] Frozen v91 Phase 1 trace and experiment log.</a:t>
+              <a:t>[7] Frozen v91 structured solvers, typed relation schema, and regression cases.</a:t>
             </a:r>
           </a:p>
         </p:txBody>
@@ -2124,7 +2124,7 @@
   </p:cSld>
   <p:clrMap bg1="lt1" tx1="dk1" bg2="lt2" tx2="dk2" accent1="accent1" accent2="accent2" accent3="accent3" accent4="accent4" accent5="accent5" accent6="accent6" hlink="hlink" folHlink="folHlink"/>
   <p:sldLayoutIdLst>
-    <p:sldLayoutId xmlns:r="http://schemas.openxmlformats.org/officeDocument/2006/relationships" id="2147483649" r:id="R9be881fedcdb4c05"/>
+    <p:sldLayoutId xmlns:r="http://schemas.openxmlformats.org/officeDocument/2006/relationships" id="2147483649" r:id="R9b51d89fc7784281"/>
   </p:sldLayoutIdLst>
   <p:txStyles>
     <p:titleStyle>
@@ -2883,10 +2883,10 @@
       </p:grpSpPr>
       <p:sp>
         <p:nvSpPr>
-          <p:cNvPr id="16" name="">
-            <a:extLst xmlns:a="http://schemas.openxmlformats.org/drawingml/2006/main">
-              <a:ext uri="{FF2B5EF4-FFF2-40B4-BE49-F238E27FC236}">
-                <a16:creationId xmlns:a16="http://schemas.microsoft.com/office/drawing/2014/main" id="{231B2878-CB7A-47BB-8229-2772A7C7FE7D}"/>
+          <p:cNvPr id="14" name="">
+            <a:extLst xmlns:a="http://schemas.openxmlformats.org/drawingml/2006/main">
+              <a:ext uri="{FF2B5EF4-FFF2-40B4-BE49-F238E27FC236}">
+                <a16:creationId xmlns:a16="http://schemas.microsoft.com/office/drawing/2014/main" id="{8C40AA49-77BD-4C09-A56D-0D1DB5CEF4D0}"/>
               </a:ext>
             </a:extLst>
           </p:cNvPr>
@@ -2919,7 +2919,7 @@
           <p:cNvPr id="2" name="">
             <a:extLst xmlns:a="http://schemas.openxmlformats.org/drawingml/2006/main">
               <a:ext uri="{FF2B5EF4-FFF2-40B4-BE49-F238E27FC236}">
-                <a16:creationId xmlns:a16="http://schemas.microsoft.com/office/drawing/2014/main" id="{494F12CA-6AA6-4B11-AA9B-C916E6F36796}"/>
+                <a16:creationId xmlns:a16="http://schemas.microsoft.com/office/drawing/2014/main" id="{70EB99D8-4F09-40D7-B09C-10C91384532C}"/>
               </a:ext>
             </a:extLst>
           </p:cNvPr>
@@ -2969,7 +2969,7 @@
           <p:cNvPr id="3" name="">
             <a:extLst xmlns:a="http://schemas.openxmlformats.org/drawingml/2006/main">
               <a:ext uri="{FF2B5EF4-FFF2-40B4-BE49-F238E27FC236}">
-                <a16:creationId xmlns:a16="http://schemas.microsoft.com/office/drawing/2014/main" id="{33EBB9E3-BC7A-4913-83D6-3B1EFB75FE37}"/>
+                <a16:creationId xmlns:a16="http://schemas.microsoft.com/office/drawing/2014/main" id="{30E9DDE2-17E1-408A-887A-412E6A6B3DF9}"/>
               </a:ext>
             </a:extLst>
           </p:cNvPr>
@@ -2981,7 +2981,7 @@
         <p:spPr>
           <a:xfrm xmlns:a="http://schemas.openxmlformats.org/drawingml/2006/main">
             <a:off x="876300" y="1162050"/>
-            <a:ext cx="7429500" cy="1352550"/>
+            <a:ext cx="8953500" cy="1352550"/>
           </a:xfrm>
           <a:prstGeom xmlns:a="http://schemas.openxmlformats.org/drawingml/2006/main" prst="rect">
             <a:avLst/>
@@ -2997,36 +2997,36 @@
           <a:lstStyle xmlns:a="http://schemas.openxmlformats.org/drawingml/2006/main"/>
           <a:p xmlns:a="http://schemas.openxmlformats.org/drawingml/2006/main">
             <a:pPr algn="l">
-              <a:defRPr sz="3900" b="1">
+              <a:defRPr sz="3525" b="1">
                 <a:solidFill>
                   <a:srgbClr val="0F172A"/>
                 </a:solidFill>
               </a:defRPr>
             </a:pPr>
             <a:r>
-              <a:rPr sz="3900" b="1">
+              <a:rPr sz="3525" b="1">
                 <a:solidFill>
                   <a:srgbClr val="0F172A"/>
                 </a:solidFill>
               </a:rPr>
-              <a:t>Private rank 1 came from</a:t>
+              <a:t>Evidence-first selective inference</a:t>
             </a:r>
           </a:p>
           <a:p xmlns:a="http://schemas.openxmlformats.org/drawingml/2006/main">
             <a:pPr algn="l">
-              <a:defRPr sz="3900" b="1">
+              <a:defRPr sz="3525" b="1">
                 <a:solidFill>
                   <a:srgbClr val="0F172A"/>
                 </a:solidFill>
               </a:defRPr>
             </a:pPr>
             <a:r>
-              <a:rPr sz="3900" b="1">
+              <a:rPr sz="3525" b="1">
                 <a:solidFill>
                   <a:srgbClr val="0F172A"/>
                 </a:solidFill>
               </a:rPr>
-              <a:t>changing the decision path</a:t>
+              <a:t>for Bengali hallucination detection</a:t>
             </a:r>
           </a:p>
         </p:txBody>
@@ -3036,7 +3036,7 @@
           <p:cNvPr id="4" name="">
             <a:extLst xmlns:a="http://schemas.openxmlformats.org/drawingml/2006/main">
               <a:ext uri="{FF2B5EF4-FFF2-40B4-BE49-F238E27FC236}">
-                <a16:creationId xmlns:a16="http://schemas.microsoft.com/office/drawing/2014/main" id="{4AE13203-D4FA-4FC0-95A0-D887429E803D}"/>
+                <a16:creationId xmlns:a16="http://schemas.microsoft.com/office/drawing/2014/main" id="{6BE3BE6E-7DAA-458A-809B-A7333AA7D6B1}"/>
               </a:ext>
             </a:extLst>
           </p:cNvPr>
@@ -3048,7 +3048,7 @@
         <p:spPr>
           <a:xfrm xmlns:a="http://schemas.openxmlformats.org/drawingml/2006/main">
             <a:off x="914400" y="2762250"/>
-            <a:ext cx="6381750" cy="400050"/>
+            <a:ext cx="8286750" cy="400050"/>
           </a:xfrm>
           <a:prstGeom xmlns:a="http://schemas.openxmlformats.org/drawingml/2006/main" prst="rect">
             <a:avLst/>
@@ -3076,7 +3076,7 @@
                   <a:srgbClr val="526174"/>
                 </a:solidFill>
               </a:rPr>
-              <a:t>Evidence-first selective inference for Olikbochon</a:t>
+              <a:t>A study of routing, abstention, provenance, and domain shift</a:t>
             </a:r>
           </a:p>
         </p:txBody>
@@ -3086,7 +3086,7 @@
           <p:cNvPr id="5" name="">
             <a:extLst xmlns:a="http://schemas.openxmlformats.org/drawingml/2006/main">
               <a:ext uri="{FF2B5EF4-FFF2-40B4-BE49-F238E27FC236}">
-                <a16:creationId xmlns:a16="http://schemas.microsoft.com/office/drawing/2014/main" id="{99926CF7-A36C-48A3-9EAB-61F4ED8AAF16}"/>
+                <a16:creationId xmlns:a16="http://schemas.microsoft.com/office/drawing/2014/main" id="{41F7ACD0-EA70-4572-A6BC-B7269C529EE2}"/>
               </a:ext>
             </a:extLst>
           </p:cNvPr>
@@ -3117,7 +3117,7 @@
           <p:cNvPr id="6" name="">
             <a:extLst xmlns:a="http://schemas.openxmlformats.org/drawingml/2006/main">
               <a:ext uri="{FF2B5EF4-FFF2-40B4-BE49-F238E27FC236}">
-                <a16:creationId xmlns:a16="http://schemas.microsoft.com/office/drawing/2014/main" id="{8EC6EBD1-857E-4F5D-9D54-64E806E12DE3}"/>
+                <a16:creationId xmlns:a16="http://schemas.microsoft.com/office/drawing/2014/main" id="{E972804D-2DA2-4B6D-868B-63517B158F3C}"/>
               </a:ext>
             </a:extLst>
           </p:cNvPr>
@@ -3129,7 +3129,48 @@
         <p:spPr>
           <a:xfrm xmlns:a="http://schemas.openxmlformats.org/drawingml/2006/main">
             <a:off x="914400" y="3714750"/>
-            <a:ext cx="2238375" cy="685800"/>
+            <a:ext cx="8858250" cy="1123950"/>
+          </a:xfrm>
+          <a:prstGeom xmlns:a="http://schemas.openxmlformats.org/drawingml/2006/main" prst="roundRect">
+            <a:avLst>
+              <a:gd name="adj" fmla="val 13559"/>
+            </a:avLst>
+          </a:prstGeom>
+          <a:solidFill xmlns:a="http://schemas.openxmlformats.org/drawingml/2006/main">
+            <a:srgbClr val="FFFFFF"/>
+          </a:solidFill>
+          <a:ln xmlns:a="http://schemas.openxmlformats.org/drawingml/2006/main" w="9525">
+            <a:solidFill>
+              <a:srgbClr val="D8E0EA"/>
+            </a:solidFill>
+            <a:prstDash val="solid"/>
+          </a:ln>
+        </p:spPr>
+        <p:style>
+          <a:lnRef xmlns:a="http://schemas.openxmlformats.org/drawingml/2006/main" idx="0"/>
+          <a:fillRef xmlns:a="http://schemas.openxmlformats.org/drawingml/2006/main" idx="0"/>
+          <a:effectRef xmlns:a="http://schemas.openxmlformats.org/drawingml/2006/main" idx="4"/>
+          <a:fontRef xmlns:a="http://schemas.openxmlformats.org/drawingml/2006/main" idx="major"/>
+        </p:style>
+      </p:sp>
+      <p:sp>
+        <p:nvSpPr>
+          <p:cNvPr id="7" name="">
+            <a:extLst xmlns:a="http://schemas.openxmlformats.org/drawingml/2006/main">
+              <a:ext uri="{FF2B5EF4-FFF2-40B4-BE49-F238E27FC236}">
+                <a16:creationId xmlns:a16="http://schemas.microsoft.com/office/drawing/2014/main" id="{BF58DDF3-6467-4E66-BE91-4460BBD3742E}"/>
+              </a:ext>
+            </a:extLst>
+          </p:cNvPr>
+          <p:cNvSpPr>
+            <a:spLocks xmlns:a="http://schemas.openxmlformats.org/drawingml/2006/main" noGrp="1"/>
+          </p:cNvSpPr>
+          <p:nvPr/>
+        </p:nvSpPr>
+        <p:spPr>
+          <a:xfrm xmlns:a="http://schemas.openxmlformats.org/drawingml/2006/main">
+            <a:off x="1200150" y="3943350"/>
+            <a:ext cx="2095500" cy="266700"/>
           </a:xfrm>
           <a:prstGeom xmlns:a="http://schemas.openxmlformats.org/drawingml/2006/main" prst="rect">
             <a:avLst/>
@@ -3145,41 +3186,41 @@
           <a:lstStyle xmlns:a="http://schemas.openxmlformats.org/drawingml/2006/main"/>
           <a:p xmlns:a="http://schemas.openxmlformats.org/drawingml/2006/main">
             <a:pPr algn="l">
-              <a:defRPr sz="3600" b="1">
-                <a:solidFill>
-                  <a:srgbClr val="2A8C82"/>
-                </a:solidFill>
-              </a:defRPr>
-            </a:pPr>
-            <a:r>
-              <a:rPr sz="3600" b="1">
-                <a:solidFill>
-                  <a:srgbClr val="2A8C82"/>
-                </a:solidFill>
-              </a:rPr>
-              <a:t>0.982</a:t>
-            </a:r>
-          </a:p>
-        </p:txBody>
-      </p:sp>
-      <p:sp>
-        <p:nvSpPr>
-          <p:cNvPr id="7" name="">
-            <a:extLst xmlns:a="http://schemas.openxmlformats.org/drawingml/2006/main">
-              <a:ext uri="{FF2B5EF4-FFF2-40B4-BE49-F238E27FC236}">
-                <a16:creationId xmlns:a16="http://schemas.microsoft.com/office/drawing/2014/main" id="{B679E94D-0AB1-4063-8097-5A3E8EC7EDAC}"/>
-              </a:ext>
-            </a:extLst>
-          </p:cNvPr>
-          <p:cNvSpPr>
-            <a:spLocks xmlns:a="http://schemas.openxmlformats.org/drawingml/2006/main" noGrp="1"/>
-          </p:cNvSpPr>
-          <p:nvPr/>
-        </p:nvSpPr>
-        <p:spPr>
-          <a:xfrm xmlns:a="http://schemas.openxmlformats.org/drawingml/2006/main">
-            <a:off x="914400" y="4400550"/>
-            <a:ext cx="2238375" cy="514350"/>
+              <a:defRPr sz="1350" b="1">
+                <a:solidFill>
+                  <a:srgbClr val="1F5A7A"/>
+                </a:solidFill>
+              </a:defRPr>
+            </a:pPr>
+            <a:r>
+              <a:rPr sz="1350" b="1">
+                <a:solidFill>
+                  <a:srgbClr val="1F5A7A"/>
+                </a:solidFill>
+              </a:rPr>
+              <a:t>Research question</a:t>
+            </a:r>
+          </a:p>
+        </p:txBody>
+      </p:sp>
+      <p:sp>
+        <p:nvSpPr>
+          <p:cNvPr id="8" name="">
+            <a:extLst xmlns:a="http://schemas.openxmlformats.org/drawingml/2006/main">
+              <a:ext uri="{FF2B5EF4-FFF2-40B4-BE49-F238E27FC236}">
+                <a16:creationId xmlns:a16="http://schemas.microsoft.com/office/drawing/2014/main" id="{22C0C530-0169-4A7D-8CF2-57BB5B936770}"/>
+              </a:ext>
+            </a:extLst>
+          </p:cNvPr>
+          <p:cNvSpPr>
+            <a:spLocks xmlns:a="http://schemas.openxmlformats.org/drawingml/2006/main" noGrp="1"/>
+          </p:cNvSpPr>
+          <p:nvPr/>
+        </p:nvSpPr>
+        <p:spPr>
+          <a:xfrm xmlns:a="http://schemas.openxmlformats.org/drawingml/2006/main">
+            <a:off x="3333750" y="3886200"/>
+            <a:ext cx="6057900" cy="590550"/>
           </a:xfrm>
           <a:prstGeom xmlns:a="http://schemas.openxmlformats.org/drawingml/2006/main" prst="rect">
             <a:avLst/>
@@ -3195,119 +3236,69 @@
           <a:lstStyle xmlns:a="http://schemas.openxmlformats.org/drawingml/2006/main"/>
           <a:p xmlns:a="http://schemas.openxmlformats.org/drawingml/2006/main">
             <a:pPr algn="l">
-              <a:defRPr sz="1350" b="0">
+              <a:defRPr sz="1725" b="1">
+                <a:solidFill>
+                  <a:srgbClr val="0F172A"/>
+                </a:solidFill>
+              </a:defRPr>
+            </a:pPr>
+            <a:r>
+              <a:rPr sz="1725" b="1">
+                <a:solidFill>
+                  <a:srgbClr val="0F172A"/>
+                </a:solidFill>
+              </a:rPr>
+              <a:t>When should exact evidence decide, and when should the system abstain to a language-model judge?</a:t>
+            </a:r>
+          </a:p>
+        </p:txBody>
+      </p:sp>
+      <p:sp>
+        <p:nvSpPr>
+          <p:cNvPr id="9" name="">
+            <a:extLst xmlns:a="http://schemas.openxmlformats.org/drawingml/2006/main">
+              <a:ext uri="{FF2B5EF4-FFF2-40B4-BE49-F238E27FC236}">
+                <a16:creationId xmlns:a16="http://schemas.microsoft.com/office/drawing/2014/main" id="{F5459A7A-2A50-4F3F-9C3D-646AC5268515}"/>
+              </a:ext>
+            </a:extLst>
+          </p:cNvPr>
+          <p:cNvSpPr>
+            <a:spLocks xmlns:a="http://schemas.openxmlformats.org/drawingml/2006/main" noGrp="1"/>
+          </p:cNvSpPr>
+          <p:nvPr/>
+        </p:nvSpPr>
+        <p:spPr>
+          <a:xfrm xmlns:a="http://schemas.openxmlformats.org/drawingml/2006/main">
+            <a:off x="1200150" y="4495800"/>
+            <a:ext cx="8191500" cy="228600"/>
+          </a:xfrm>
+          <a:prstGeom xmlns:a="http://schemas.openxmlformats.org/drawingml/2006/main" prst="rect">
+            <a:avLst/>
+          </a:prstGeom>
+          <a:noFill xmlns:a="http://schemas.openxmlformats.org/drawingml/2006/main"/>
+          <a:ln xmlns:a="http://schemas.openxmlformats.org/drawingml/2006/main" w="0">
+            <a:noFill/>
+            <a:prstDash val="solid"/>
+          </a:ln>
+        </p:spPr>
+        <p:txBody>
+          <a:bodyPr xmlns:a="http://schemas.openxmlformats.org/drawingml/2006/main"/>
+          <a:lstStyle xmlns:a="http://schemas.openxmlformats.org/drawingml/2006/main"/>
+          <a:p xmlns:a="http://schemas.openxmlformats.org/drawingml/2006/main">
+            <a:pPr algn="l">
+              <a:defRPr sz="1275" b="0">
                 <a:solidFill>
                   <a:srgbClr val="526174"/>
                 </a:solidFill>
               </a:defRPr>
             </a:pPr>
             <a:r>
-              <a:rPr sz="1350" b="0">
+              <a:rPr sz="1275" b="0">
                 <a:solidFill>
                   <a:srgbClr val="526174"/>
                 </a:solidFill>
               </a:rPr>
-              <a:t>private macro F1</a:t>
-            </a:r>
-          </a:p>
-        </p:txBody>
-      </p:sp>
-      <p:sp>
-        <p:nvSpPr>
-          <p:cNvPr id="8" name="">
-            <a:extLst xmlns:a="http://schemas.openxmlformats.org/drawingml/2006/main">
-              <a:ext uri="{FF2B5EF4-FFF2-40B4-BE49-F238E27FC236}">
-                <a16:creationId xmlns:a16="http://schemas.microsoft.com/office/drawing/2014/main" id="{0B3E0B45-DE1F-46BF-BBC5-FB423A6FFE1D}"/>
-              </a:ext>
-            </a:extLst>
-          </p:cNvPr>
-          <p:cNvSpPr>
-            <a:spLocks xmlns:a="http://schemas.openxmlformats.org/drawingml/2006/main" noGrp="1"/>
-          </p:cNvSpPr>
-          <p:nvPr/>
-        </p:nvSpPr>
-        <p:spPr>
-          <a:xfrm xmlns:a="http://schemas.openxmlformats.org/drawingml/2006/main">
-            <a:off x="3619500" y="3714750"/>
-            <a:ext cx="2238375" cy="685800"/>
-          </a:xfrm>
-          <a:prstGeom xmlns:a="http://schemas.openxmlformats.org/drawingml/2006/main" prst="rect">
-            <a:avLst/>
-          </a:prstGeom>
-          <a:noFill xmlns:a="http://schemas.openxmlformats.org/drawingml/2006/main"/>
-          <a:ln xmlns:a="http://schemas.openxmlformats.org/drawingml/2006/main" w="0">
-            <a:noFill/>
-            <a:prstDash val="solid"/>
-          </a:ln>
-        </p:spPr>
-        <p:txBody>
-          <a:bodyPr xmlns:a="http://schemas.openxmlformats.org/drawingml/2006/main"/>
-          <a:lstStyle xmlns:a="http://schemas.openxmlformats.org/drawingml/2006/main"/>
-          <a:p xmlns:a="http://schemas.openxmlformats.org/drawingml/2006/main">
-            <a:pPr algn="l">
-              <a:defRPr sz="3600" b="1">
-                <a:solidFill>
-                  <a:srgbClr val="1F5A7A"/>
-                </a:solidFill>
-              </a:defRPr>
-            </a:pPr>
-            <a:r>
-              <a:rPr sz="3600" b="1">
-                <a:solidFill>
-                  <a:srgbClr val="1F5A7A"/>
-                </a:solidFill>
-              </a:rPr>
-              <a:t>#1</a:t>
-            </a:r>
-          </a:p>
-        </p:txBody>
-      </p:sp>
-      <p:sp>
-        <p:nvSpPr>
-          <p:cNvPr id="9" name="">
-            <a:extLst xmlns:a="http://schemas.openxmlformats.org/drawingml/2006/main">
-              <a:ext uri="{FF2B5EF4-FFF2-40B4-BE49-F238E27FC236}">
-                <a16:creationId xmlns:a16="http://schemas.microsoft.com/office/drawing/2014/main" id="{9B3707A5-75BB-4271-B2F2-BACDF0A7D154}"/>
-              </a:ext>
-            </a:extLst>
-          </p:cNvPr>
-          <p:cNvSpPr>
-            <a:spLocks xmlns:a="http://schemas.openxmlformats.org/drawingml/2006/main" noGrp="1"/>
-          </p:cNvSpPr>
-          <p:nvPr/>
-        </p:nvSpPr>
-        <p:spPr>
-          <a:xfrm xmlns:a="http://schemas.openxmlformats.org/drawingml/2006/main">
-            <a:off x="3619500" y="4400550"/>
-            <a:ext cx="2238375" cy="514350"/>
-          </a:xfrm>
-          <a:prstGeom xmlns:a="http://schemas.openxmlformats.org/drawingml/2006/main" prst="rect">
-            <a:avLst/>
-          </a:prstGeom>
-          <a:noFill xmlns:a="http://schemas.openxmlformats.org/drawingml/2006/main"/>
-          <a:ln xmlns:a="http://schemas.openxmlformats.org/drawingml/2006/main" w="0">
-            <a:noFill/>
-            <a:prstDash val="solid"/>
-          </a:ln>
-        </p:spPr>
-        <p:txBody>
-          <a:bodyPr xmlns:a="http://schemas.openxmlformats.org/drawingml/2006/main"/>
-          <a:lstStyle xmlns:a="http://schemas.openxmlformats.org/drawingml/2006/main"/>
-          <a:p xmlns:a="http://schemas.openxmlformats.org/drawingml/2006/main">
-            <a:pPr algn="l">
-              <a:defRPr sz="1350" b="0">
-                <a:solidFill>
-                  <a:srgbClr val="526174"/>
-                </a:solidFill>
-              </a:defRPr>
-            </a:pPr>
-            <a:r>
-              <a:rPr sz="1350" b="0">
-                <a:solidFill>
-                  <a:srgbClr val="526174"/>
-                </a:solidFill>
-              </a:rPr>
-              <a:t>private leaderboard</a:t>
+              <a:t>We trace the hypotheses, failed experiments, routing policies, regression gates, and Phase 2 shift.</a:t>
             </a:r>
           </a:p>
         </p:txBody>
@@ -3317,107 +3308,7 @@
           <p:cNvPr id="10" name="">
             <a:extLst xmlns:a="http://schemas.openxmlformats.org/drawingml/2006/main">
               <a:ext uri="{FF2B5EF4-FFF2-40B4-BE49-F238E27FC236}">
-                <a16:creationId xmlns:a16="http://schemas.microsoft.com/office/drawing/2014/main" id="{3996A340-66A7-4072-8539-D97421F7194E}"/>
-              </a:ext>
-            </a:extLst>
-          </p:cNvPr>
-          <p:cNvSpPr>
-            <a:spLocks xmlns:a="http://schemas.openxmlformats.org/drawingml/2006/main" noGrp="1"/>
-          </p:cNvSpPr>
-          <p:nvPr/>
-        </p:nvSpPr>
-        <p:spPr>
-          <a:xfrm xmlns:a="http://schemas.openxmlformats.org/drawingml/2006/main">
-            <a:off x="6324600" y="3714750"/>
-            <a:ext cx="2238375" cy="685800"/>
-          </a:xfrm>
-          <a:prstGeom xmlns:a="http://schemas.openxmlformats.org/drawingml/2006/main" prst="rect">
-            <a:avLst/>
-          </a:prstGeom>
-          <a:noFill xmlns:a="http://schemas.openxmlformats.org/drawingml/2006/main"/>
-          <a:ln xmlns:a="http://schemas.openxmlformats.org/drawingml/2006/main" w="0">
-            <a:noFill/>
-            <a:prstDash val="solid"/>
-          </a:ln>
-        </p:spPr>
-        <p:txBody>
-          <a:bodyPr xmlns:a="http://schemas.openxmlformats.org/drawingml/2006/main"/>
-          <a:lstStyle xmlns:a="http://schemas.openxmlformats.org/drawingml/2006/main"/>
-          <a:p xmlns:a="http://schemas.openxmlformats.org/drawingml/2006/main">
-            <a:pPr algn="l">
-              <a:defRPr sz="3600" b="1">
-                <a:solidFill>
-                  <a:srgbClr val="D59B32"/>
-                </a:solidFill>
-              </a:defRPr>
-            </a:pPr>
-            <a:r>
-              <a:rPr sz="3600" b="1">
-                <a:solidFill>
-                  <a:srgbClr val="D59B32"/>
-                </a:solidFill>
-              </a:rPr>
-              <a:t>0.967</a:t>
-            </a:r>
-          </a:p>
-        </p:txBody>
-      </p:sp>
-      <p:sp>
-        <p:nvSpPr>
-          <p:cNvPr id="11" name="">
-            <a:extLst xmlns:a="http://schemas.openxmlformats.org/drawingml/2006/main">
-              <a:ext uri="{FF2B5EF4-FFF2-40B4-BE49-F238E27FC236}">
-                <a16:creationId xmlns:a16="http://schemas.microsoft.com/office/drawing/2014/main" id="{DAF236B5-F926-4DC9-AE8D-BD82D8F9632F}"/>
-              </a:ext>
-            </a:extLst>
-          </p:cNvPr>
-          <p:cNvSpPr>
-            <a:spLocks xmlns:a="http://schemas.openxmlformats.org/drawingml/2006/main" noGrp="1"/>
-          </p:cNvSpPr>
-          <p:nvPr/>
-        </p:nvSpPr>
-        <p:spPr>
-          <a:xfrm xmlns:a="http://schemas.openxmlformats.org/drawingml/2006/main">
-            <a:off x="6324600" y="4400550"/>
-            <a:ext cx="2238375" cy="514350"/>
-          </a:xfrm>
-          <a:prstGeom xmlns:a="http://schemas.openxmlformats.org/drawingml/2006/main" prst="rect">
-            <a:avLst/>
-          </a:prstGeom>
-          <a:noFill xmlns:a="http://schemas.openxmlformats.org/drawingml/2006/main"/>
-          <a:ln xmlns:a="http://schemas.openxmlformats.org/drawingml/2006/main" w="0">
-            <a:noFill/>
-            <a:prstDash val="solid"/>
-          </a:ln>
-        </p:spPr>
-        <p:txBody>
-          <a:bodyPr xmlns:a="http://schemas.openxmlformats.org/drawingml/2006/main"/>
-          <a:lstStyle xmlns:a="http://schemas.openxmlformats.org/drawingml/2006/main"/>
-          <a:p xmlns:a="http://schemas.openxmlformats.org/drawingml/2006/main">
-            <a:pPr algn="l">
-              <a:defRPr sz="1350" b="0">
-                <a:solidFill>
-                  <a:srgbClr val="526174"/>
-                </a:solidFill>
-              </a:defRPr>
-            </a:pPr>
-            <a:r>
-              <a:rPr sz="1350" b="0">
-                <a:solidFill>
-                  <a:srgbClr val="526174"/>
-                </a:solidFill>
-              </a:rPr>
-              <a:t>public macro F1</a:t>
-            </a:r>
-          </a:p>
-        </p:txBody>
-      </p:sp>
-      <p:sp>
-        <p:nvSpPr>
-          <p:cNvPr id="12" name="">
-            <a:extLst xmlns:a="http://schemas.openxmlformats.org/drawingml/2006/main">
-              <a:ext uri="{FF2B5EF4-FFF2-40B4-BE49-F238E27FC236}">
-                <a16:creationId xmlns:a16="http://schemas.microsoft.com/office/drawing/2014/main" id="{E0A0D9EC-EA97-4064-BE2A-C130BA2EAE9A}"/>
+                <a16:creationId xmlns:a16="http://schemas.microsoft.com/office/drawing/2014/main" id="{0CB6B8E7-C3AC-4C02-928F-68282823926D}"/>
               </a:ext>
             </a:extLst>
           </p:cNvPr>
@@ -3464,10 +3355,10 @@
       </p:sp>
       <p:sp>
         <p:nvSpPr>
-          <p:cNvPr id="13" name="">
-            <a:extLst xmlns:a="http://schemas.openxmlformats.org/drawingml/2006/main">
-              <a:ext uri="{FF2B5EF4-FFF2-40B4-BE49-F238E27FC236}">
-                <a16:creationId xmlns:a16="http://schemas.microsoft.com/office/drawing/2014/main" id="{2BF0D3B1-A067-4131-AE03-ADFA8E58FB26}"/>
+          <p:cNvPr id="11" name="">
+            <a:extLst xmlns:a="http://schemas.openxmlformats.org/drawingml/2006/main">
+              <a:ext uri="{FF2B5EF4-FFF2-40B4-BE49-F238E27FC236}">
+                <a16:creationId xmlns:a16="http://schemas.microsoft.com/office/drawing/2014/main" id="{942D8F79-E257-403F-9DCE-733075C13E45}"/>
               </a:ext>
             </a:extLst>
           </p:cNvPr>
@@ -3514,10 +3405,10 @@
       </p:sp>
       <p:sp>
         <p:nvSpPr>
-          <p:cNvPr id="14" name="">
-            <a:extLst xmlns:a="http://schemas.openxmlformats.org/drawingml/2006/main">
-              <a:ext uri="{FF2B5EF4-FFF2-40B4-BE49-F238E27FC236}">
-                <a16:creationId xmlns:a16="http://schemas.microsoft.com/office/drawing/2014/main" id="{BCFDE224-189D-41F0-8604-10D11C85BDCE}"/>
+          <p:cNvPr id="12" name="">
+            <a:extLst xmlns:a="http://schemas.openxmlformats.org/drawingml/2006/main">
+              <a:ext uri="{FF2B5EF4-FFF2-40B4-BE49-F238E27FC236}">
+                <a16:creationId xmlns:a16="http://schemas.microsoft.com/office/drawing/2014/main" id="{C75C0311-4A34-47D7-92E0-BDFFCB8C3EFE}"/>
               </a:ext>
             </a:extLst>
           </p:cNvPr>
@@ -3557,17 +3448,17 @@
                   <a:srgbClr val="526174"/>
                 </a:solidFill>
               </a:rPr>
-              <a:t>[1] Competition leaderboard and rules  [7] Frozen v91 records</a:t>
-            </a:r>
-          </a:p>
-        </p:txBody>
-      </p:sp>
-      <p:sp>
-        <p:nvSpPr>
-          <p:cNvPr id="15" name="">
-            <a:extLst xmlns:a="http://schemas.openxmlformats.org/drawingml/2006/main">
-              <a:ext uri="{FF2B5EF4-FFF2-40B4-BE49-F238E27FC236}">
-                <a16:creationId xmlns:a16="http://schemas.microsoft.com/office/drawing/2014/main" id="{52007A54-EB1F-4CF6-A56D-D88910109157}"/>
+              <a:t>[1] Competition task  [3,4] Bengali hallucination and idiom studies  [7] Experiment ledger</a:t>
+            </a:r>
+          </a:p>
+        </p:txBody>
+      </p:sp>
+      <p:sp>
+        <p:nvSpPr>
+          <p:cNvPr id="13" name="">
+            <a:extLst xmlns:a="http://schemas.openxmlformats.org/drawingml/2006/main">
+              <a:ext uri="{FF2B5EF4-FFF2-40B4-BE49-F238E27FC236}">
+                <a16:creationId xmlns:a16="http://schemas.microsoft.com/office/drawing/2014/main" id="{B1A477DB-CBA1-4896-87E1-5A69DCE9DE0F}"/>
               </a:ext>
             </a:extLst>
           </p:cNvPr>
@@ -3615,7 +3506,7 @@
     </p:spTree>
     <p:extLst>
       <p:ext uri="{BB962C8B-B14F-4D97-AF65-F5344CB8AC3E}">
-        <p14:creationId xmlns:p14="http://schemas.microsoft.com/office/powerpoint/2010/main" val="2078868414"/>
+        <p14:creationId xmlns:p14="http://schemas.microsoft.com/office/powerpoint/2010/main" val="1050747199"/>
       </p:ext>
     </p:extLst>
   </p:cSld>
@@ -3643,10 +3534,10 @@
       </p:grpSpPr>
       <p:sp>
         <p:nvSpPr>
-          <p:cNvPr id="17" name="kicker-10">
-            <a:extLst xmlns:a="http://schemas.openxmlformats.org/drawingml/2006/main">
-              <a:ext uri="{FF2B5EF4-FFF2-40B4-BE49-F238E27FC236}">
-                <a16:creationId xmlns:a16="http://schemas.microsoft.com/office/drawing/2014/main" id="{9A1A2E87-DEF8-4D4F-87C5-596A979BB991}"/>
+          <p:cNvPr id="20" name="kicker-10">
+            <a:extLst xmlns:a="http://schemas.openxmlformats.org/drawingml/2006/main">
+              <a:ext uri="{FF2B5EF4-FFF2-40B4-BE49-F238E27FC236}">
+                <a16:creationId xmlns:a16="http://schemas.microsoft.com/office/drawing/2014/main" id="{2266C73C-66AE-4275-A834-A3C460772811}"/>
               </a:ext>
             </a:extLst>
           </p:cNvPr>
@@ -3696,7 +3587,7 @@
           <p:cNvPr id="2" name="title-10">
             <a:extLst xmlns:a="http://schemas.openxmlformats.org/drawingml/2006/main">
               <a:ext uri="{FF2B5EF4-FFF2-40B4-BE49-F238E27FC236}">
-                <a16:creationId xmlns:a16="http://schemas.microsoft.com/office/drawing/2014/main" id="{4D2B8A9B-51DC-45D7-96F7-2136871429A9}"/>
+                <a16:creationId xmlns:a16="http://schemas.microsoft.com/office/drawing/2014/main" id="{EFAFC5E8-E1F3-4BB7-8A09-33D99C92CC75}"/>
               </a:ext>
             </a:extLst>
           </p:cNvPr>
@@ -3736,7 +3627,7 @@
                   <a:srgbClr val="0F172A"/>
                 </a:solidFill>
               </a:rPr>
-              <a:t>Routing produced the largest score jump</a:t>
+              <a:t>Score progression tracked changes in method</a:t>
             </a:r>
           </a:p>
         </p:txBody>
@@ -3746,7 +3637,7 @@
           <p:cNvPr id="3" name="">
             <a:extLst xmlns:a="http://schemas.openxmlformats.org/drawingml/2006/main">
               <a:ext uri="{FF2B5EF4-FFF2-40B4-BE49-F238E27FC236}">
-                <a16:creationId xmlns:a16="http://schemas.microsoft.com/office/drawing/2014/main" id="{04F61AC0-DE91-4267-9D11-56DA2DA0C1FA}"/>
+                <a16:creationId xmlns:a16="http://schemas.microsoft.com/office/drawing/2014/main" id="{21AF8242-5A24-4A71-9176-D56FB42FDC19}"/>
               </a:ext>
             </a:extLst>
           </p:cNvPr>
@@ -3777,7 +3668,7 @@
           <p:cNvPr id="4" name="">
             <a:extLst xmlns:a="http://schemas.openxmlformats.org/drawingml/2006/main">
               <a:ext uri="{FF2B5EF4-FFF2-40B4-BE49-F238E27FC236}">
-                <a16:creationId xmlns:a16="http://schemas.microsoft.com/office/drawing/2014/main" id="{58E7409B-47AB-4779-8524-2D2A8F3BC414}"/>
+                <a16:creationId xmlns:a16="http://schemas.microsoft.com/office/drawing/2014/main" id="{EABE6FD2-6752-47C6-97D0-6B2B8101D427}"/>
               </a:ext>
             </a:extLst>
           </p:cNvPr>
@@ -3789,7 +3680,7 @@
         <p:spPr>
           <a:xfrm xmlns:a="http://schemas.openxmlformats.org/drawingml/2006/main">
             <a:off x="685800" y="1381125"/>
-            <a:ext cx="8096250" cy="323850"/>
+            <a:ext cx="9715500" cy="419100"/>
           </a:xfrm>
           <a:prstGeom xmlns:a="http://schemas.openxmlformats.org/drawingml/2006/main" prst="rect">
             <a:avLst/>
@@ -3805,26 +3696,26 @@
           <a:lstStyle xmlns:a="http://schemas.openxmlformats.org/drawingml/2006/main"/>
           <a:p xmlns:a="http://schemas.openxmlformats.org/drawingml/2006/main">
             <a:pPr algn="l">
-              <a:defRPr sz="1650" b="0">
+              <a:defRPr sz="1575" b="0">
                 <a:solidFill>
                   <a:srgbClr val="526174"/>
                 </a:solidFill>
               </a:defRPr>
             </a:pPr>
             <a:r>
-              <a:rPr sz="1650" b="0">
+              <a:rPr sz="1575" b="0">
                 <a:solidFill>
                   <a:srgbClr val="526174"/>
                 </a:solidFill>
               </a:rPr>
-              <a:t>The model helped. The architecture change helped more.</a:t>
+              <a:t>The important points were architectural pivots, regressions, and reversions—not a monotonic climb.</a:t>
             </a:r>
           </a:p>
         </p:txBody>
       </p:sp>
       <p:graphicFrame>
         <p:nvGraphicFramePr>
-          <p:cNvPr id="21" name="Chart"/>
+          <p:cNvPr id="24" name="Chart"/>
           <p:cNvGraphicFramePr/>
           <p:nvPr/>
         </p:nvGraphicFramePr>
@@ -3834,7 +3725,7 @@
         </p:xfrm>
         <a:graphic xmlns:a="http://schemas.openxmlformats.org/drawingml/2006/main">
           <a:graphicData uri="http://schemas.openxmlformats.org/drawingml/2006/chart">
-            <c:chart xmlns:r="http://schemas.openxmlformats.org/officeDocument/2006/relationships" xmlns:c="http://schemas.openxmlformats.org/drawingml/2006/chart" r:id="R2e747c0e85f74323"/>
+            <c:chart xmlns:r="http://schemas.openxmlformats.org/officeDocument/2006/relationships" xmlns:c="http://schemas.openxmlformats.org/drawingml/2006/chart" r:id="R4c2db883d9414cda"/>
           </a:graphicData>
         </a:graphic>
       </p:graphicFrame>
@@ -3843,7 +3734,7 @@
           <p:cNvPr id="6" name="">
             <a:extLst xmlns:a="http://schemas.openxmlformats.org/drawingml/2006/main">
               <a:ext uri="{FF2B5EF4-FFF2-40B4-BE49-F238E27FC236}">
-                <a16:creationId xmlns:a16="http://schemas.microsoft.com/office/drawing/2014/main" id="{CEDEAA08-8F8B-4917-A7C6-4C71C344A77F}"/>
+                <a16:creationId xmlns:a16="http://schemas.microsoft.com/office/drawing/2014/main" id="{B480E4B5-4E45-4644-B95F-CACD73AB9073}"/>
               </a:ext>
             </a:extLst>
           </p:cNvPr>
@@ -3878,7 +3769,7 @@
           <p:cNvPr id="7" name="">
             <a:extLst xmlns:a="http://schemas.openxmlformats.org/drawingml/2006/main">
               <a:ext uri="{FF2B5EF4-FFF2-40B4-BE49-F238E27FC236}">
-                <a16:creationId xmlns:a16="http://schemas.microsoft.com/office/drawing/2014/main" id="{B007CC7F-FF1D-4452-BC59-17FD528B26B3}"/>
+                <a16:creationId xmlns:a16="http://schemas.microsoft.com/office/drawing/2014/main" id="{BAE9C764-7789-48C3-976B-D8BA3C290E16}"/>
               </a:ext>
             </a:extLst>
           </p:cNvPr>
@@ -3928,7 +3819,7 @@
           <p:cNvPr id="8" name="">
             <a:extLst xmlns:a="http://schemas.openxmlformats.org/drawingml/2006/main">
               <a:ext uri="{FF2B5EF4-FFF2-40B4-BE49-F238E27FC236}">
-                <a16:creationId xmlns:a16="http://schemas.microsoft.com/office/drawing/2014/main" id="{0AD07A45-CCD6-4B02-B18B-9902258EBFBF}"/>
+                <a16:creationId xmlns:a16="http://schemas.microsoft.com/office/drawing/2014/main" id="{2DC4E9D8-42D7-43F1-BCED-2EEA810BAB9B}"/>
               </a:ext>
             </a:extLst>
           </p:cNvPr>
@@ -3978,7 +3869,7 @@
           <p:cNvPr id="9" name="">
             <a:extLst xmlns:a="http://schemas.openxmlformats.org/drawingml/2006/main">
               <a:ext uri="{FF2B5EF4-FFF2-40B4-BE49-F238E27FC236}">
-                <a16:creationId xmlns:a16="http://schemas.microsoft.com/office/drawing/2014/main" id="{CAFB6B28-97D4-4CDD-B10E-9A34C67FE03D}"/>
+                <a16:creationId xmlns:a16="http://schemas.microsoft.com/office/drawing/2014/main" id="{1028609C-7FC1-475D-B0B6-BE2286EB8868}"/>
               </a:ext>
             </a:extLst>
           </p:cNvPr>
@@ -4018,7 +3909,7 @@
                   <a:srgbClr val="526174"/>
                 </a:solidFill>
               </a:rPr>
-              <a:t>routing added</a:t>
+              <a:t>routing pivot</a:t>
             </a:r>
           </a:p>
         </p:txBody>
@@ -4028,7 +3919,7 @@
           <p:cNvPr id="10" name="">
             <a:extLst xmlns:a="http://schemas.openxmlformats.org/drawingml/2006/main">
               <a:ext uri="{FF2B5EF4-FFF2-40B4-BE49-F238E27FC236}">
-                <a16:creationId xmlns:a16="http://schemas.microsoft.com/office/drawing/2014/main" id="{4DC8F7CF-D287-4096-9881-FD1953F38607}"/>
+                <a16:creationId xmlns:a16="http://schemas.microsoft.com/office/drawing/2014/main" id="{89ACD5D9-3B84-48A0-B7F6-E6FC2EBC57B0}"/>
               </a:ext>
             </a:extLst>
           </p:cNvPr>
@@ -4063,7 +3954,7 @@
           <p:cNvPr id="11" name="">
             <a:extLst xmlns:a="http://schemas.openxmlformats.org/drawingml/2006/main">
               <a:ext uri="{FF2B5EF4-FFF2-40B4-BE49-F238E27FC236}">
-                <a16:creationId xmlns:a16="http://schemas.microsoft.com/office/drawing/2014/main" id="{85CC3A8B-ED55-405B-B6C3-6BE64AAA3816}"/>
+                <a16:creationId xmlns:a16="http://schemas.microsoft.com/office/drawing/2014/main" id="{768C13E5-3B5F-43D0-9DA7-927FE279EC37}"/>
               </a:ext>
             </a:extLst>
           </p:cNvPr>
@@ -4113,7 +4004,7 @@
           <p:cNvPr id="12" name="">
             <a:extLst xmlns:a="http://schemas.openxmlformats.org/drawingml/2006/main">
               <a:ext uri="{FF2B5EF4-FFF2-40B4-BE49-F238E27FC236}">
-                <a16:creationId xmlns:a16="http://schemas.microsoft.com/office/drawing/2014/main" id="{30310BA1-21EF-4231-B404-F970B02445FA}"/>
+                <a16:creationId xmlns:a16="http://schemas.microsoft.com/office/drawing/2014/main" id="{83CBA987-C71B-493E-AB61-156DDB59B7E0}"/>
               </a:ext>
             </a:extLst>
           </p:cNvPr>
@@ -4163,7 +4054,7 @@
           <p:cNvPr id="13" name="">
             <a:extLst xmlns:a="http://schemas.openxmlformats.org/drawingml/2006/main">
               <a:ext uri="{FF2B5EF4-FFF2-40B4-BE49-F238E27FC236}">
-                <a16:creationId xmlns:a16="http://schemas.microsoft.com/office/drawing/2014/main" id="{6B6B3C70-0294-4582-B8E8-D6CBA951DB36}"/>
+                <a16:creationId xmlns:a16="http://schemas.microsoft.com/office/drawing/2014/main" id="{31865EB5-65DD-4B39-867A-58C60B32706A}"/>
               </a:ext>
             </a:extLst>
           </p:cNvPr>
@@ -4203,7 +4094,7 @@
                   <a:srgbClr val="526174"/>
                 </a:solidFill>
               </a:rPr>
-              <a:t>public F1</a:t>
+              <a:t>typed relations</a:t>
             </a:r>
           </a:p>
         </p:txBody>
@@ -4213,7 +4104,157 @@
           <p:cNvPr id="14" name="">
             <a:extLst xmlns:a="http://schemas.openxmlformats.org/drawingml/2006/main">
               <a:ext uri="{FF2B5EF4-FFF2-40B4-BE49-F238E27FC236}">
-                <a16:creationId xmlns:a16="http://schemas.microsoft.com/office/drawing/2014/main" id="{4DCC67D0-4781-4414-AAE7-4C493E914589}"/>
+                <a16:creationId xmlns:a16="http://schemas.microsoft.com/office/drawing/2014/main" id="{CD0975C6-F862-4169-B694-A745738FE944}"/>
+              </a:ext>
+            </a:extLst>
+          </p:cNvPr>
+          <p:cNvSpPr>
+            <a:spLocks xmlns:a="http://schemas.openxmlformats.org/drawingml/2006/main" noGrp="1"/>
+          </p:cNvSpPr>
+          <p:nvPr/>
+        </p:nvSpPr>
+        <p:spPr>
+          <a:xfrm xmlns:a="http://schemas.openxmlformats.org/drawingml/2006/main">
+            <a:off x="2019300" y="5657850"/>
+            <a:ext cx="2095500" cy="209550"/>
+          </a:xfrm>
+          <a:prstGeom xmlns:a="http://schemas.openxmlformats.org/drawingml/2006/main" prst="rect">
+            <a:avLst/>
+          </a:prstGeom>
+          <a:noFill xmlns:a="http://schemas.openxmlformats.org/drawingml/2006/main"/>
+          <a:ln xmlns:a="http://schemas.openxmlformats.org/drawingml/2006/main" w="0">
+            <a:noFill/>
+            <a:prstDash val="solid"/>
+          </a:ln>
+        </p:spPr>
+        <p:txBody>
+          <a:bodyPr xmlns:a="http://schemas.openxmlformats.org/drawingml/2006/main"/>
+          <a:lstStyle xmlns:a="http://schemas.openxmlformats.org/drawingml/2006/main"/>
+          <a:p xmlns:a="http://schemas.openxmlformats.org/drawingml/2006/main">
+            <a:pPr algn="ctr">
+              <a:defRPr sz="1050" b="1">
+                <a:solidFill>
+                  <a:srgbClr val="1F5A7A"/>
+                </a:solidFill>
+              </a:defRPr>
+            </a:pPr>
+            <a:r>
+              <a:rPr sz="1050" b="1">
+                <a:solidFill>
+                  <a:srgbClr val="1F5A7A"/>
+                </a:solidFill>
+              </a:rPr>
+              <a:t>v37: provenance gate</a:t>
+            </a:r>
+          </a:p>
+        </p:txBody>
+      </p:sp>
+      <p:sp>
+        <p:nvSpPr>
+          <p:cNvPr id="15" name="">
+            <a:extLst xmlns:a="http://schemas.openxmlformats.org/drawingml/2006/main">
+              <a:ext uri="{FF2B5EF4-FFF2-40B4-BE49-F238E27FC236}">
+                <a16:creationId xmlns:a16="http://schemas.microsoft.com/office/drawing/2014/main" id="{81B3D0B8-8793-4755-BA00-EE233E11218C}"/>
+              </a:ext>
+            </a:extLst>
+          </p:cNvPr>
+          <p:cNvSpPr>
+            <a:spLocks xmlns:a="http://schemas.openxmlformats.org/drawingml/2006/main" noGrp="1"/>
+          </p:cNvSpPr>
+          <p:nvPr/>
+        </p:nvSpPr>
+        <p:spPr>
+          <a:xfrm xmlns:a="http://schemas.openxmlformats.org/drawingml/2006/main">
+            <a:off x="4953000" y="5657850"/>
+            <a:ext cx="2381250" cy="209550"/>
+          </a:xfrm>
+          <a:prstGeom xmlns:a="http://schemas.openxmlformats.org/drawingml/2006/main" prst="rect">
+            <a:avLst/>
+          </a:prstGeom>
+          <a:noFill xmlns:a="http://schemas.openxmlformats.org/drawingml/2006/main"/>
+          <a:ln xmlns:a="http://schemas.openxmlformats.org/drawingml/2006/main" w="0">
+            <a:noFill/>
+            <a:prstDash val="solid"/>
+          </a:ln>
+        </p:spPr>
+        <p:txBody>
+          <a:bodyPr xmlns:a="http://schemas.openxmlformats.org/drawingml/2006/main"/>
+          <a:lstStyle xmlns:a="http://schemas.openxmlformats.org/drawingml/2006/main"/>
+          <a:p xmlns:a="http://schemas.openxmlformats.org/drawingml/2006/main">
+            <a:pPr algn="ctr">
+              <a:defRPr sz="1050" b="1">
+                <a:solidFill>
+                  <a:srgbClr val="B5483A"/>
+                </a:solidFill>
+              </a:defRPr>
+            </a:pPr>
+            <a:r>
+              <a:rPr sz="1050" b="1">
+                <a:solidFill>
+                  <a:srgbClr val="B5483A"/>
+                </a:solidFill>
+              </a:rPr>
+              <a:t>v87: regression -&gt; revert</a:t>
+            </a:r>
+          </a:p>
+        </p:txBody>
+      </p:sp>
+      <p:sp>
+        <p:nvSpPr>
+          <p:cNvPr id="16" name="">
+            <a:extLst xmlns:a="http://schemas.openxmlformats.org/drawingml/2006/main">
+              <a:ext uri="{FF2B5EF4-FFF2-40B4-BE49-F238E27FC236}">
+                <a16:creationId xmlns:a16="http://schemas.microsoft.com/office/drawing/2014/main" id="{7231A80C-BBCD-4005-A812-AF47E067C770}"/>
+              </a:ext>
+            </a:extLst>
+          </p:cNvPr>
+          <p:cNvSpPr>
+            <a:spLocks xmlns:a="http://schemas.openxmlformats.org/drawingml/2006/main" noGrp="1"/>
+          </p:cNvSpPr>
+          <p:nvPr/>
+        </p:nvSpPr>
+        <p:spPr>
+          <a:xfrm xmlns:a="http://schemas.openxmlformats.org/drawingml/2006/main">
+            <a:off x="7829550" y="5657850"/>
+            <a:ext cx="2381250" cy="209550"/>
+          </a:xfrm>
+          <a:prstGeom xmlns:a="http://schemas.openxmlformats.org/drawingml/2006/main" prst="rect">
+            <a:avLst/>
+          </a:prstGeom>
+          <a:noFill xmlns:a="http://schemas.openxmlformats.org/drawingml/2006/main"/>
+          <a:ln xmlns:a="http://schemas.openxmlformats.org/drawingml/2006/main" w="0">
+            <a:noFill/>
+            <a:prstDash val="solid"/>
+          </a:ln>
+        </p:spPr>
+        <p:txBody>
+          <a:bodyPr xmlns:a="http://schemas.openxmlformats.org/drawingml/2006/main"/>
+          <a:lstStyle xmlns:a="http://schemas.openxmlformats.org/drawingml/2006/main"/>
+          <a:p xmlns:a="http://schemas.openxmlformats.org/drawingml/2006/main">
+            <a:pPr algn="ctr">
+              <a:defRPr sz="1050" b="1">
+                <a:solidFill>
+                  <a:srgbClr val="D59B32"/>
+                </a:solidFill>
+              </a:defRPr>
+            </a:pPr>
+            <a:r>
+              <a:rPr sz="1050" b="1">
+                <a:solidFill>
+                  <a:srgbClr val="D59B32"/>
+                </a:solidFill>
+              </a:rPr>
+              <a:t>v91: relation-typed evidence</a:t>
+            </a:r>
+          </a:p>
+        </p:txBody>
+      </p:sp>
+      <p:sp>
+        <p:nvSpPr>
+          <p:cNvPr id="17" name="">
+            <a:extLst xmlns:a="http://schemas.openxmlformats.org/drawingml/2006/main">
+              <a:ext uri="{FF2B5EF4-FFF2-40B4-BE49-F238E27FC236}">
+                <a16:creationId xmlns:a16="http://schemas.microsoft.com/office/drawing/2014/main" id="{D50B81CD-D598-4603-A9E4-9E5753262F8B}"/>
               </a:ext>
             </a:extLst>
           </p:cNvPr>
@@ -4241,10 +4282,10 @@
       </p:sp>
       <p:sp>
         <p:nvSpPr>
-          <p:cNvPr id="15" name="source-10">
-            <a:extLst xmlns:a="http://schemas.openxmlformats.org/drawingml/2006/main">
-              <a:ext uri="{FF2B5EF4-FFF2-40B4-BE49-F238E27FC236}">
-                <a16:creationId xmlns:a16="http://schemas.microsoft.com/office/drawing/2014/main" id="{006B6989-9352-447E-84ED-6B5CBD65A613}"/>
+          <p:cNvPr id="18" name="source-10">
+            <a:extLst xmlns:a="http://schemas.openxmlformats.org/drawingml/2006/main">
+              <a:ext uri="{FF2B5EF4-FFF2-40B4-BE49-F238E27FC236}">
+                <a16:creationId xmlns:a16="http://schemas.microsoft.com/office/drawing/2014/main" id="{981BBBC3-DF61-41D3-BAEF-A10E31F25434}"/>
               </a:ext>
             </a:extLst>
           </p:cNvPr>
@@ -4291,10 +4332,10 @@
       </p:sp>
       <p:sp>
         <p:nvSpPr>
-          <p:cNvPr id="16" name="page-10">
-            <a:extLst xmlns:a="http://schemas.openxmlformats.org/drawingml/2006/main">
-              <a:ext uri="{FF2B5EF4-FFF2-40B4-BE49-F238E27FC236}">
-                <a16:creationId xmlns:a16="http://schemas.microsoft.com/office/drawing/2014/main" id="{DE038625-4DE7-4830-88F1-600AA4474986}"/>
+          <p:cNvPr id="19" name="page-10">
+            <a:extLst xmlns:a="http://schemas.openxmlformats.org/drawingml/2006/main">
+              <a:ext uri="{FF2B5EF4-FFF2-40B4-BE49-F238E27FC236}">
+                <a16:creationId xmlns:a16="http://schemas.microsoft.com/office/drawing/2014/main" id="{883E75EB-4B30-406A-A431-00CF0866C6B9}"/>
               </a:ext>
             </a:extLst>
           </p:cNvPr>
@@ -4342,7 +4383,7 @@
     </p:spTree>
     <p:extLst>
       <p:ext uri="{BB962C8B-B14F-4D97-AF65-F5344CB8AC3E}">
-        <p14:creationId xmlns:p14="http://schemas.microsoft.com/office/powerpoint/2010/main" val="422663195"/>
+        <p14:creationId xmlns:p14="http://schemas.microsoft.com/office/powerpoint/2010/main" val="1268578479"/>
       </p:ext>
     </p:extLst>
   </p:cSld>
@@ -4373,7 +4414,7 @@
           <p:cNvPr id="29" name="kicker-11">
             <a:extLst xmlns:a="http://schemas.openxmlformats.org/drawingml/2006/main">
               <a:ext uri="{FF2B5EF4-FFF2-40B4-BE49-F238E27FC236}">
-                <a16:creationId xmlns:a16="http://schemas.microsoft.com/office/drawing/2014/main" id="{62CB465F-CDD7-4D6D-B6C0-3DD01760E2CD}"/>
+                <a16:creationId xmlns:a16="http://schemas.microsoft.com/office/drawing/2014/main" id="{625AE8CB-0C94-4609-8390-4C97A41C01AC}"/>
               </a:ext>
             </a:extLst>
           </p:cNvPr>
@@ -4423,7 +4464,7 @@
           <p:cNvPr id="2" name="title-11">
             <a:extLst xmlns:a="http://schemas.openxmlformats.org/drawingml/2006/main">
               <a:ext uri="{FF2B5EF4-FFF2-40B4-BE49-F238E27FC236}">
-                <a16:creationId xmlns:a16="http://schemas.microsoft.com/office/drawing/2014/main" id="{016FF1D0-06DB-4C8D-94FE-38B3C07BDCE0}"/>
+                <a16:creationId xmlns:a16="http://schemas.microsoft.com/office/drawing/2014/main" id="{594B65A9-6760-4C3B-931D-5F496FAA8EDE}"/>
               </a:ext>
             </a:extLst>
           </p:cNvPr>
@@ -4463,7 +4504,7 @@
                   <a:srgbClr val="0F172A"/>
                 </a:solidFill>
               </a:rPr>
-              <a:t>Several reasonable ideas made the score worse</a:t>
+              <a:t>Decision logs turned failed runs into routing rules</a:t>
             </a:r>
           </a:p>
         </p:txBody>
@@ -4473,7 +4514,7 @@
           <p:cNvPr id="3" name="">
             <a:extLst xmlns:a="http://schemas.openxmlformats.org/drawingml/2006/main">
               <a:ext uri="{FF2B5EF4-FFF2-40B4-BE49-F238E27FC236}">
-                <a16:creationId xmlns:a16="http://schemas.microsoft.com/office/drawing/2014/main" id="{326BD5E4-23EE-4A10-97C2-4661332C2DDF}"/>
+                <a16:creationId xmlns:a16="http://schemas.microsoft.com/office/drawing/2014/main" id="{AD0C3652-9D01-40EA-BECA-B2BECD8D36F7}"/>
               </a:ext>
             </a:extLst>
           </p:cNvPr>
@@ -4504,7 +4545,7 @@
           <p:cNvPr id="4" name="">
             <a:extLst xmlns:a="http://schemas.openxmlformats.org/drawingml/2006/main">
               <a:ext uri="{FF2B5EF4-FFF2-40B4-BE49-F238E27FC236}">
-                <a16:creationId xmlns:a16="http://schemas.microsoft.com/office/drawing/2014/main" id="{E06CC1DD-329C-4A15-9E2F-F852194BF933}"/>
+                <a16:creationId xmlns:a16="http://schemas.microsoft.com/office/drawing/2014/main" id="{8FFE28C2-5AD6-432C-9A77-4A47E48F60D6}"/>
               </a:ext>
             </a:extLst>
           </p:cNvPr>
@@ -4544,7 +4585,7 @@
                   <a:srgbClr val="526174"/>
                 </a:solidFill>
               </a:rPr>
-              <a:t>The failed runs were useful because each exposed a different error source.</a:t>
+              <a:t>Each negative result changed what later versions were allowed to decide.</a:t>
             </a:r>
           </a:p>
         </p:txBody>
@@ -4554,7 +4595,7 @@
           <p:cNvPr id="5" name="">
             <a:extLst xmlns:a="http://schemas.openxmlformats.org/drawingml/2006/main">
               <a:ext uri="{FF2B5EF4-FFF2-40B4-BE49-F238E27FC236}">
-                <a16:creationId xmlns:a16="http://schemas.microsoft.com/office/drawing/2014/main" id="{1C64AF65-4825-48EA-BC9B-4A270D35BE97}"/>
+                <a16:creationId xmlns:a16="http://schemas.microsoft.com/office/drawing/2014/main" id="{95103302-A6A5-47D3-83D7-651C64E9DE6A}"/>
               </a:ext>
             </a:extLst>
           </p:cNvPr>
@@ -4604,7 +4645,7 @@
           <p:cNvPr id="6" name="">
             <a:extLst xmlns:a="http://schemas.openxmlformats.org/drawingml/2006/main">
               <a:ext uri="{FF2B5EF4-FFF2-40B4-BE49-F238E27FC236}">
-                <a16:creationId xmlns:a16="http://schemas.microsoft.com/office/drawing/2014/main" id="{AA4544AD-B165-4427-95ED-8F6E47F8BB18}"/>
+                <a16:creationId xmlns:a16="http://schemas.microsoft.com/office/drawing/2014/main" id="{57CF3F3E-D372-47FB-BC71-6926E9EAB000}"/>
               </a:ext>
             </a:extLst>
           </p:cNvPr>
@@ -4654,7 +4695,7 @@
           <p:cNvPr id="7" name="">
             <a:extLst xmlns:a="http://schemas.openxmlformats.org/drawingml/2006/main">
               <a:ext uri="{FF2B5EF4-FFF2-40B4-BE49-F238E27FC236}">
-                <a16:creationId xmlns:a16="http://schemas.microsoft.com/office/drawing/2014/main" id="{1755CF98-3684-44D5-B443-90846303C61E}"/>
+                <a16:creationId xmlns:a16="http://schemas.microsoft.com/office/drawing/2014/main" id="{C9DB1B5B-C2B6-4DF6-95F8-54A08ACA949E}"/>
               </a:ext>
             </a:extLst>
           </p:cNvPr>
@@ -4694,7 +4735,7 @@
                   <a:srgbClr val="1F5A7A"/>
                 </a:solidFill>
               </a:rPr>
-              <a:t>What it taught us</a:t>
+              <a:t>Decision recorded</a:t>
             </a:r>
           </a:p>
         </p:txBody>
@@ -4704,7 +4745,7 @@
           <p:cNvPr id="8" name="">
             <a:extLst xmlns:a="http://schemas.openxmlformats.org/drawingml/2006/main">
               <a:ext uri="{FF2B5EF4-FFF2-40B4-BE49-F238E27FC236}">
-                <a16:creationId xmlns:a16="http://schemas.microsoft.com/office/drawing/2014/main" id="{6AF28E53-09D0-464D-AB3D-324EBD2DF611}"/>
+                <a16:creationId xmlns:a16="http://schemas.microsoft.com/office/drawing/2014/main" id="{9CD186C0-E526-4169-8499-16A0D34ED8BC}"/>
               </a:ext>
             </a:extLst>
           </p:cNvPr>
@@ -4735,7 +4776,7 @@
           <p:cNvPr id="9" name="">
             <a:extLst xmlns:a="http://schemas.openxmlformats.org/drawingml/2006/main">
               <a:ext uri="{FF2B5EF4-FFF2-40B4-BE49-F238E27FC236}">
-                <a16:creationId xmlns:a16="http://schemas.microsoft.com/office/drawing/2014/main" id="{0C57BD4E-D93A-43B0-8852-4D26CCACA43B}"/>
+                <a16:creationId xmlns:a16="http://schemas.microsoft.com/office/drawing/2014/main" id="{B9AC08FD-2628-442A-88EE-BE33E83F5D60}"/>
               </a:ext>
             </a:extLst>
           </p:cNvPr>
@@ -4785,7 +4826,7 @@
           <p:cNvPr id="10" name="">
             <a:extLst xmlns:a="http://schemas.openxmlformats.org/drawingml/2006/main">
               <a:ext uri="{FF2B5EF4-FFF2-40B4-BE49-F238E27FC236}">
-                <a16:creationId xmlns:a16="http://schemas.microsoft.com/office/drawing/2014/main" id="{3F14DEF4-FD16-4912-9B92-27F8B8BC7B4B}"/>
+                <a16:creationId xmlns:a16="http://schemas.microsoft.com/office/drawing/2014/main" id="{C3FDFC95-5F7B-4606-8DE8-326F99805378}"/>
               </a:ext>
             </a:extLst>
           </p:cNvPr>
@@ -4835,7 +4876,7 @@
           <p:cNvPr id="11" name="">
             <a:extLst xmlns:a="http://schemas.openxmlformats.org/drawingml/2006/main">
               <a:ext uri="{FF2B5EF4-FFF2-40B4-BE49-F238E27FC236}">
-                <a16:creationId xmlns:a16="http://schemas.microsoft.com/office/drawing/2014/main" id="{39A79C2C-0C15-4AD0-AFFD-167C88594332}"/>
+                <a16:creationId xmlns:a16="http://schemas.microsoft.com/office/drawing/2014/main" id="{C4C360FF-E04E-491E-B0C2-81312F6D1E4F}"/>
               </a:ext>
             </a:extLst>
           </p:cNvPr>
@@ -4875,7 +4916,7 @@
                   <a:srgbClr val="526174"/>
                 </a:solidFill>
               </a:rPr>
-              <a:t>Overfit prompt behavior on 299 labels</a:t>
+              <a:t>Stop prompt churn; require new evidence</a:t>
             </a:r>
           </a:p>
         </p:txBody>
@@ -4885,7 +4926,7 @@
           <p:cNvPr id="12" name="">
             <a:extLst xmlns:a="http://schemas.openxmlformats.org/drawingml/2006/main">
               <a:ext uri="{FF2B5EF4-FFF2-40B4-BE49-F238E27FC236}">
-                <a16:creationId xmlns:a16="http://schemas.microsoft.com/office/drawing/2014/main" id="{400E142F-1AFE-4BDF-B3B3-C7E72B17BDE2}"/>
+                <a16:creationId xmlns:a16="http://schemas.microsoft.com/office/drawing/2014/main" id="{D01F79FD-61F1-4A31-95F8-7F2CC8778206}"/>
               </a:ext>
             </a:extLst>
           </p:cNvPr>
@@ -4916,7 +4957,7 @@
           <p:cNvPr id="13" name="">
             <a:extLst xmlns:a="http://schemas.openxmlformats.org/drawingml/2006/main">
               <a:ext uri="{FF2B5EF4-FFF2-40B4-BE49-F238E27FC236}">
-                <a16:creationId xmlns:a16="http://schemas.microsoft.com/office/drawing/2014/main" id="{80E08174-ED4B-462A-8C7C-199EE7A9E051}"/>
+                <a16:creationId xmlns:a16="http://schemas.microsoft.com/office/drawing/2014/main" id="{BB038077-AE17-4549-8449-43624651231D}"/>
               </a:ext>
             </a:extLst>
           </p:cNvPr>
@@ -4966,7 +5007,7 @@
           <p:cNvPr id="14" name="">
             <a:extLst xmlns:a="http://schemas.openxmlformats.org/drawingml/2006/main">
               <a:ext uri="{FF2B5EF4-FFF2-40B4-BE49-F238E27FC236}">
-                <a16:creationId xmlns:a16="http://schemas.microsoft.com/office/drawing/2014/main" id="{DC0E1414-D690-4CD0-A656-DE01CEBEDB69}"/>
+                <a16:creationId xmlns:a16="http://schemas.microsoft.com/office/drawing/2014/main" id="{91A13FE0-DF7D-4AE5-99F8-DCE53725FA0F}"/>
               </a:ext>
             </a:extLst>
           </p:cNvPr>
@@ -5016,7 +5057,7 @@
           <p:cNvPr id="15" name="">
             <a:extLst xmlns:a="http://schemas.openxmlformats.org/drawingml/2006/main">
               <a:ext uri="{FF2B5EF4-FFF2-40B4-BE49-F238E27FC236}">
-                <a16:creationId xmlns:a16="http://schemas.microsoft.com/office/drawing/2014/main" id="{B9A6F440-1CF7-4E0A-96BA-E29F8A8F491D}"/>
+                <a16:creationId xmlns:a16="http://schemas.microsoft.com/office/drawing/2014/main" id="{DDDC46DC-5BE5-4A52-A0AE-3E16D789EFF1}"/>
               </a:ext>
             </a:extLst>
           </p:cNvPr>
@@ -5056,7 +5097,7 @@
                   <a:srgbClr val="526174"/>
                 </a:solidFill>
               </a:rPr>
-              <a:t>Missed no-context cultural facts</a:t>
+              <a:t>Keep as a portable fallback, not a scorer</a:t>
             </a:r>
           </a:p>
         </p:txBody>
@@ -5066,7 +5107,7 @@
           <p:cNvPr id="16" name="">
             <a:extLst xmlns:a="http://schemas.openxmlformats.org/drawingml/2006/main">
               <a:ext uri="{FF2B5EF4-FFF2-40B4-BE49-F238E27FC236}">
-                <a16:creationId xmlns:a16="http://schemas.microsoft.com/office/drawing/2014/main" id="{6D3CCC09-1B7A-48B0-8548-1196F832E6C2}"/>
+                <a16:creationId xmlns:a16="http://schemas.microsoft.com/office/drawing/2014/main" id="{A268A6E8-4E27-4A18-B412-E0F7A01349B3}"/>
               </a:ext>
             </a:extLst>
           </p:cNvPr>
@@ -5097,7 +5138,7 @@
           <p:cNvPr id="17" name="">
             <a:extLst xmlns:a="http://schemas.openxmlformats.org/drawingml/2006/main">
               <a:ext uri="{FF2B5EF4-FFF2-40B4-BE49-F238E27FC236}">
-                <a16:creationId xmlns:a16="http://schemas.microsoft.com/office/drawing/2014/main" id="{68597E7C-C541-4239-A6B6-86E1998B4858}"/>
+                <a16:creationId xmlns:a16="http://schemas.microsoft.com/office/drawing/2014/main" id="{B94478DD-E93E-4572-9359-7E27F1D51497}"/>
               </a:ext>
             </a:extLst>
           </p:cNvPr>
@@ -5147,7 +5188,7 @@
           <p:cNvPr id="18" name="">
             <a:extLst xmlns:a="http://schemas.openxmlformats.org/drawingml/2006/main">
               <a:ext uri="{FF2B5EF4-FFF2-40B4-BE49-F238E27FC236}">
-                <a16:creationId xmlns:a16="http://schemas.microsoft.com/office/drawing/2014/main" id="{50DEC262-8D5A-4251-AFDC-25817BE2EE2C}"/>
+                <a16:creationId xmlns:a16="http://schemas.microsoft.com/office/drawing/2014/main" id="{5F8453F5-CA98-446A-AC75-63B3D91D1F7B}"/>
               </a:ext>
             </a:extLst>
           </p:cNvPr>
@@ -5187,7 +5228,7 @@
                   <a:srgbClr val="526174"/>
                 </a:solidFill>
               </a:rPr>
-              <a:t>Relevant passage, wrong answer</a:t>
+              <a:t>Relevant passage, wrong relation</a:t>
             </a:r>
           </a:p>
         </p:txBody>
@@ -5197,7 +5238,7 @@
           <p:cNvPr id="19" name="">
             <a:extLst xmlns:a="http://schemas.openxmlformats.org/drawingml/2006/main">
               <a:ext uri="{FF2B5EF4-FFF2-40B4-BE49-F238E27FC236}">
-                <a16:creationId xmlns:a16="http://schemas.microsoft.com/office/drawing/2014/main" id="{B91AD958-6BA1-4DE9-9C8D-604758923273}"/>
+                <a16:creationId xmlns:a16="http://schemas.microsoft.com/office/drawing/2014/main" id="{405614A3-3842-4A46-B240-4A677279101D}"/>
               </a:ext>
             </a:extLst>
           </p:cNvPr>
@@ -5237,7 +5278,7 @@
                   <a:srgbClr val="526174"/>
                 </a:solidFill>
               </a:rPr>
-              <a:t>Similarity confused neighboring relations</a:t>
+              <a:t>Retrieval proposes; it never decides</a:t>
             </a:r>
           </a:p>
         </p:txBody>
@@ -5247,7 +5288,7 @@
           <p:cNvPr id="20" name="">
             <a:extLst xmlns:a="http://schemas.openxmlformats.org/drawingml/2006/main">
               <a:ext uri="{FF2B5EF4-FFF2-40B4-BE49-F238E27FC236}">
-                <a16:creationId xmlns:a16="http://schemas.microsoft.com/office/drawing/2014/main" id="{772EEB6F-1C85-4860-9D74-C454710F63F6}"/>
+                <a16:creationId xmlns:a16="http://schemas.microsoft.com/office/drawing/2014/main" id="{D30D0CCC-DA79-4DD9-93A6-A46E84A5D5CC}"/>
               </a:ext>
             </a:extLst>
           </p:cNvPr>
@@ -5278,7 +5319,7 @@
           <p:cNvPr id="21" name="">
             <a:extLst xmlns:a="http://schemas.openxmlformats.org/drawingml/2006/main">
               <a:ext uri="{FF2B5EF4-FFF2-40B4-BE49-F238E27FC236}">
-                <a16:creationId xmlns:a16="http://schemas.microsoft.com/office/drawing/2014/main" id="{682BAEB2-CB97-4782-98E1-83E1A2AF0ACB}"/>
+                <a16:creationId xmlns:a16="http://schemas.microsoft.com/office/drawing/2014/main" id="{530E50BF-E199-4BE6-809C-E8CA59971879}"/>
               </a:ext>
             </a:extLst>
           </p:cNvPr>
@@ -5328,7 +5369,7 @@
           <p:cNvPr id="22" name="">
             <a:extLst xmlns:a="http://schemas.openxmlformats.org/drawingml/2006/main">
               <a:ext uri="{FF2B5EF4-FFF2-40B4-BE49-F238E27FC236}">
-                <a16:creationId xmlns:a16="http://schemas.microsoft.com/office/drawing/2014/main" id="{4B237BC6-CC3A-4B0C-A498-BA39DB08522F}"/>
+                <a16:creationId xmlns:a16="http://schemas.microsoft.com/office/drawing/2014/main" id="{8A5AD899-E95A-4A99-9248-DBDD7FA38740}"/>
               </a:ext>
             </a:extLst>
           </p:cNvPr>
@@ -5378,7 +5419,7 @@
           <p:cNvPr id="23" name="">
             <a:extLst xmlns:a="http://schemas.openxmlformats.org/drawingml/2006/main">
               <a:ext uri="{FF2B5EF4-FFF2-40B4-BE49-F238E27FC236}">
-                <a16:creationId xmlns:a16="http://schemas.microsoft.com/office/drawing/2014/main" id="{DD2DCF71-FC04-4DF4-BE49-9E0529230582}"/>
+                <a16:creationId xmlns:a16="http://schemas.microsoft.com/office/drawing/2014/main" id="{FA04B6E4-C897-4256-92AA-4E485C0547D5}"/>
               </a:ext>
             </a:extLst>
           </p:cNvPr>
@@ -5418,7 +5459,7 @@
                   <a:srgbClr val="526174"/>
                 </a:solidFill>
               </a:rPr>
-              <a:t>Plausible facts were not enough</a:t>
+              <a:t>Require source + predicate; revert</a:t>
             </a:r>
           </a:p>
         </p:txBody>
@@ -5428,7 +5469,7 @@
           <p:cNvPr id="24" name="">
             <a:extLst xmlns:a="http://schemas.openxmlformats.org/drawingml/2006/main">
               <a:ext uri="{FF2B5EF4-FFF2-40B4-BE49-F238E27FC236}">
-                <a16:creationId xmlns:a16="http://schemas.microsoft.com/office/drawing/2014/main" id="{819BB4AC-C767-47B8-8CE6-6AE26E6D5F62}"/>
+                <a16:creationId xmlns:a16="http://schemas.microsoft.com/office/drawing/2014/main" id="{C0CE661D-1A5E-4F22-A281-FACBE7ECEB8B}"/>
               </a:ext>
             </a:extLst>
           </p:cNvPr>
@@ -5459,7 +5500,7 @@
           <p:cNvPr id="25" name="">
             <a:extLst xmlns:a="http://schemas.openxmlformats.org/drawingml/2006/main">
               <a:ext uri="{FF2B5EF4-FFF2-40B4-BE49-F238E27FC236}">
-                <a16:creationId xmlns:a16="http://schemas.microsoft.com/office/drawing/2014/main" id="{E005CCF8-3932-4B93-834A-E0B009C5FC1D}"/>
+                <a16:creationId xmlns:a16="http://schemas.microsoft.com/office/drawing/2014/main" id="{B51FAC8C-954C-401F-91A1-E2B70172E4A5}"/>
               </a:ext>
             </a:extLst>
           </p:cNvPr>
@@ -5499,7 +5540,7 @@
                   <a:srgbClr val="B5483A"/>
                 </a:solidFill>
               </a:rPr>
-              <a:t>After v87, no evidence record entered the router without an explicit source and relation.</a:t>
+              <a:t>Admission rule: a change must add an evidence trace and preserve the regression suite.</a:t>
             </a:r>
           </a:p>
         </p:txBody>
@@ -5509,7 +5550,7 @@
           <p:cNvPr id="26" name="">
             <a:extLst xmlns:a="http://schemas.openxmlformats.org/drawingml/2006/main">
               <a:ext uri="{FF2B5EF4-FFF2-40B4-BE49-F238E27FC236}">
-                <a16:creationId xmlns:a16="http://schemas.microsoft.com/office/drawing/2014/main" id="{D3B197FB-8754-4B04-B908-05B1FDD3676E}"/>
+                <a16:creationId xmlns:a16="http://schemas.microsoft.com/office/drawing/2014/main" id="{B8921EB6-F693-4CD5-B111-C21C8048AAE0}"/>
               </a:ext>
             </a:extLst>
           </p:cNvPr>
@@ -5540,7 +5581,7 @@
           <p:cNvPr id="27" name="source-11">
             <a:extLst xmlns:a="http://schemas.openxmlformats.org/drawingml/2006/main">
               <a:ext uri="{FF2B5EF4-FFF2-40B4-BE49-F238E27FC236}">
-                <a16:creationId xmlns:a16="http://schemas.microsoft.com/office/drawing/2014/main" id="{C76C57C6-2DD3-4612-9961-80D1E409C585}"/>
+                <a16:creationId xmlns:a16="http://schemas.microsoft.com/office/drawing/2014/main" id="{07BC1876-CB43-4267-B07C-07A08A532B9F}"/>
               </a:ext>
             </a:extLst>
           </p:cNvPr>
@@ -5590,7 +5631,7 @@
           <p:cNvPr id="28" name="page-11">
             <a:extLst xmlns:a="http://schemas.openxmlformats.org/drawingml/2006/main">
               <a:ext uri="{FF2B5EF4-FFF2-40B4-BE49-F238E27FC236}">
-                <a16:creationId xmlns:a16="http://schemas.microsoft.com/office/drawing/2014/main" id="{CFCB7057-3A4C-4D78-885B-830B0FADBEBA}"/>
+                <a16:creationId xmlns:a16="http://schemas.microsoft.com/office/drawing/2014/main" id="{59AEB281-26AB-4D1C-8E6C-96EE9FA96B4A}"/>
               </a:ext>
             </a:extLst>
           </p:cNvPr>
@@ -5638,7 +5679,7 @@
     </p:spTree>
     <p:extLst>
       <p:ext uri="{BB962C8B-B14F-4D97-AF65-F5344CB8AC3E}">
-        <p14:creationId xmlns:p14="http://schemas.microsoft.com/office/powerpoint/2010/main" val="1312393395"/>
+        <p14:creationId xmlns:p14="http://schemas.microsoft.com/office/powerpoint/2010/main" val="547779737"/>
       </p:ext>
     </p:extLst>
   </p:cSld>
@@ -5666,10 +5707,10 @@
       </p:grpSpPr>
       <p:sp>
         <p:nvSpPr>
-          <p:cNvPr id="22" name="kicker-12">
-            <a:extLst xmlns:a="http://schemas.openxmlformats.org/drawingml/2006/main">
-              <a:ext uri="{FF2B5EF4-FFF2-40B4-BE49-F238E27FC236}">
-                <a16:creationId xmlns:a16="http://schemas.microsoft.com/office/drawing/2014/main" id="{82613771-0FDE-44EB-88B6-277486FA90C4}"/>
+          <p:cNvPr id="26" name="kicker-12">
+            <a:extLst xmlns:a="http://schemas.openxmlformats.org/drawingml/2006/main">
+              <a:ext uri="{FF2B5EF4-FFF2-40B4-BE49-F238E27FC236}">
+                <a16:creationId xmlns:a16="http://schemas.microsoft.com/office/drawing/2014/main" id="{21124CDE-42E3-443F-84F1-A87B87685162}"/>
               </a:ext>
             </a:extLst>
           </p:cNvPr>
@@ -5719,7 +5760,7 @@
           <p:cNvPr id="2" name="title-12">
             <a:extLst xmlns:a="http://schemas.openxmlformats.org/drawingml/2006/main">
               <a:ext uri="{FF2B5EF4-FFF2-40B4-BE49-F238E27FC236}">
-                <a16:creationId xmlns:a16="http://schemas.microsoft.com/office/drawing/2014/main" id="{D9C95210-73D1-4014-949A-006FF413B0AE}"/>
+                <a16:creationId xmlns:a16="http://schemas.microsoft.com/office/drawing/2014/main" id="{9F7DC580-1AEC-4C20-9956-EDA6C02C46D0}"/>
               </a:ext>
             </a:extLst>
           </p:cNvPr>
@@ -5759,7 +5800,7 @@
                   <a:srgbClr val="0F172A"/>
                 </a:solidFill>
               </a:rPr>
-              <a:t>The final result held across local, public, and private views</a:t>
+              <a:t>Regression gates separated progress from score noise</a:t>
             </a:r>
           </a:p>
         </p:txBody>
@@ -5769,7 +5810,7 @@
           <p:cNvPr id="3" name="">
             <a:extLst xmlns:a="http://schemas.openxmlformats.org/drawingml/2006/main">
               <a:ext uri="{FF2B5EF4-FFF2-40B4-BE49-F238E27FC236}">
-                <a16:creationId xmlns:a16="http://schemas.microsoft.com/office/drawing/2014/main" id="{1880BD2B-A711-4807-9217-F942AA0F3B7E}"/>
+                <a16:creationId xmlns:a16="http://schemas.microsoft.com/office/drawing/2014/main" id="{19FF1DFC-BFB1-48F3-9771-5BC9813543A2}"/>
               </a:ext>
             </a:extLst>
           </p:cNvPr>
@@ -5800,7 +5841,7 @@
           <p:cNvPr id="4" name="">
             <a:extLst xmlns:a="http://schemas.openxmlformats.org/drawingml/2006/main">
               <a:ext uri="{FF2B5EF4-FFF2-40B4-BE49-F238E27FC236}">
-                <a16:creationId xmlns:a16="http://schemas.microsoft.com/office/drawing/2014/main" id="{4AD0C3C0-77AD-42AB-A9B8-B8C41298C9CC}"/>
+                <a16:creationId xmlns:a16="http://schemas.microsoft.com/office/drawing/2014/main" id="{8E11D8A1-A35F-48BD-8EAB-B0E8AA7512C2}"/>
               </a:ext>
             </a:extLst>
           </p:cNvPr>
@@ -5812,7 +5853,7 @@
         <p:spPr>
           <a:xfrm xmlns:a="http://schemas.openxmlformats.org/drawingml/2006/main">
             <a:off x="685800" y="1390650"/>
-            <a:ext cx="9048750" cy="323850"/>
+            <a:ext cx="9906000" cy="381000"/>
           </a:xfrm>
           <a:prstGeom xmlns:a="http://schemas.openxmlformats.org/drawingml/2006/main" prst="rect">
             <a:avLst/>
@@ -5828,19 +5869,19 @@
           <a:lstStyle xmlns:a="http://schemas.openxmlformats.org/drawingml/2006/main"/>
           <a:p xmlns:a="http://schemas.openxmlformats.org/drawingml/2006/main">
             <a:pPr algn="l">
-              <a:defRPr sz="1650" b="0">
+              <a:defRPr sz="1575" b="0">
                 <a:solidFill>
                   <a:srgbClr val="526174"/>
                 </a:solidFill>
               </a:defRPr>
             </a:pPr>
             <a:r>
-              <a:rPr sz="1650" b="0">
+              <a:rPr sz="1575" b="0">
                 <a:solidFill>
                   <a:srgbClr val="526174"/>
                 </a:solidFill>
               </a:rPr>
-              <a:t>Each view answers a different question, so we report them separately.</a:t>
+              <a:t>We kept local correctness, reproducibility, aggregate evaluation, and runtime as separate checks.</a:t>
             </a:r>
           </a:p>
         </p:txBody>
@@ -5850,18 +5891,18 @@
           <p:cNvPr id="5" name="">
             <a:extLst xmlns:a="http://schemas.openxmlformats.org/drawingml/2006/main">
               <a:ext uri="{FF2B5EF4-FFF2-40B4-BE49-F238E27FC236}">
-                <a16:creationId xmlns:a16="http://schemas.microsoft.com/office/drawing/2014/main" id="{A49A1FFC-58D7-4A10-8613-B364BD56916B}"/>
-              </a:ext>
-            </a:extLst>
-          </p:cNvPr>
-          <p:cNvSpPr>
-            <a:spLocks xmlns:a="http://schemas.openxmlformats.org/drawingml/2006/main" noGrp="1"/>
-          </p:cNvSpPr>
-          <p:nvPr/>
-        </p:nvSpPr>
-        <p:spPr>
-          <a:xfrm xmlns:a="http://schemas.openxmlformats.org/drawingml/2006/main">
-            <a:off x="914400" y="2247900"/>
+                <a16:creationId xmlns:a16="http://schemas.microsoft.com/office/drawing/2014/main" id="{A76A13DE-C348-4306-A67D-8209990DDB72}"/>
+              </a:ext>
+            </a:extLst>
+          </p:cNvPr>
+          <p:cNvSpPr>
+            <a:spLocks xmlns:a="http://schemas.openxmlformats.org/drawingml/2006/main" noGrp="1"/>
+          </p:cNvSpPr>
+          <p:nvPr/>
+        </p:nvSpPr>
+        <p:spPr>
+          <a:xfrm xmlns:a="http://schemas.openxmlformats.org/drawingml/2006/main">
+            <a:off x="914400" y="2152650"/>
             <a:ext cx="2381250" cy="685800"/>
           </a:xfrm>
           <a:prstGeom xmlns:a="http://schemas.openxmlformats.org/drawingml/2006/main" prst="rect">
@@ -5890,7 +5931,7 @@
                   <a:srgbClr val="1F5A7A"/>
                 </a:solidFill>
               </a:rPr>
-              <a:t>0.9933</a:t>
+              <a:t>249</a:t>
             </a:r>
           </a:p>
         </p:txBody>
@@ -5900,18 +5941,18 @@
           <p:cNvPr id="6" name="">
             <a:extLst xmlns:a="http://schemas.openxmlformats.org/drawingml/2006/main">
               <a:ext uri="{FF2B5EF4-FFF2-40B4-BE49-F238E27FC236}">
-                <a16:creationId xmlns:a16="http://schemas.microsoft.com/office/drawing/2014/main" id="{708AB82B-C6E9-4EB4-8B03-92E21C756320}"/>
-              </a:ext>
-            </a:extLst>
-          </p:cNvPr>
-          <p:cNvSpPr>
-            <a:spLocks xmlns:a="http://schemas.openxmlformats.org/drawingml/2006/main" noGrp="1"/>
-          </p:cNvSpPr>
-          <p:nvPr/>
-        </p:nvSpPr>
-        <p:spPr>
-          <a:xfrm xmlns:a="http://schemas.openxmlformats.org/drawingml/2006/main">
-            <a:off x="914400" y="2933700"/>
+                <a16:creationId xmlns:a16="http://schemas.microsoft.com/office/drawing/2014/main" id="{F7D8E3EF-B0E6-4EAD-8137-621766326B15}"/>
+              </a:ext>
+            </a:extLst>
+          </p:cNvPr>
+          <p:cNvSpPr>
+            <a:spLocks xmlns:a="http://schemas.openxmlformats.org/drawingml/2006/main" noGrp="1"/>
+          </p:cNvSpPr>
+          <p:nvPr/>
+        </p:nvSpPr>
+        <p:spPr>
+          <a:xfrm xmlns:a="http://schemas.openxmlformats.org/drawingml/2006/main">
+            <a:off x="914400" y="2838450"/>
             <a:ext cx="2381250" cy="514350"/>
           </a:xfrm>
           <a:prstGeom xmlns:a="http://schemas.openxmlformats.org/drawingml/2006/main" prst="rect">
@@ -5940,7 +5981,7 @@
                   <a:srgbClr val="526174"/>
                 </a:solidFill>
               </a:rPr>
-              <a:t>macro F1 on 299 released labels</a:t>
+              <a:t>automated regression tests</a:t>
             </a:r>
           </a:p>
         </p:txBody>
@@ -5950,18 +5991,18 @@
           <p:cNvPr id="7" name="">
             <a:extLst xmlns:a="http://schemas.openxmlformats.org/drawingml/2006/main">
               <a:ext uri="{FF2B5EF4-FFF2-40B4-BE49-F238E27FC236}">
-                <a16:creationId xmlns:a16="http://schemas.microsoft.com/office/drawing/2014/main" id="{6866D2C4-8981-46B4-A307-5073D7D75344}"/>
-              </a:ext>
-            </a:extLst>
-          </p:cNvPr>
-          <p:cNvSpPr>
-            <a:spLocks xmlns:a="http://schemas.openxmlformats.org/drawingml/2006/main" noGrp="1"/>
-          </p:cNvSpPr>
-          <p:nvPr/>
-        </p:nvSpPr>
-        <p:spPr>
-          <a:xfrm xmlns:a="http://schemas.openxmlformats.org/drawingml/2006/main">
-            <a:off x="3714750" y="2247900"/>
+                <a16:creationId xmlns:a16="http://schemas.microsoft.com/office/drawing/2014/main" id="{A96A4259-23C5-421A-B438-206AB3AAE0B4}"/>
+              </a:ext>
+            </a:extLst>
+          </p:cNvPr>
+          <p:cNvSpPr>
+            <a:spLocks xmlns:a="http://schemas.openxmlformats.org/drawingml/2006/main" noGrp="1"/>
+          </p:cNvSpPr>
+          <p:nvPr/>
+        </p:nvSpPr>
+        <p:spPr>
+          <a:xfrm xmlns:a="http://schemas.openxmlformats.org/drawingml/2006/main">
+            <a:off x="3714750" y="2152650"/>
             <a:ext cx="2476500" cy="685800"/>
           </a:xfrm>
           <a:prstGeom xmlns:a="http://schemas.openxmlformats.org/drawingml/2006/main" prst="rect">
@@ -5990,7 +6031,7 @@
                   <a:srgbClr val="2A8C82"/>
                 </a:solidFill>
               </a:rPr>
-              <a:t>1.0000</a:t>
+              <a:t>3</a:t>
             </a:r>
           </a:p>
         </p:txBody>
@@ -6000,18 +6041,18 @@
           <p:cNvPr id="8" name="">
             <a:extLst xmlns:a="http://schemas.openxmlformats.org/drawingml/2006/main">
               <a:ext uri="{FF2B5EF4-FFF2-40B4-BE49-F238E27FC236}">
-                <a16:creationId xmlns:a16="http://schemas.microsoft.com/office/drawing/2014/main" id="{BAA662CD-226A-4CC3-909A-1843C98582C9}"/>
-              </a:ext>
-            </a:extLst>
-          </p:cNvPr>
-          <p:cNvSpPr>
-            <a:spLocks xmlns:a="http://schemas.openxmlformats.org/drawingml/2006/main" noGrp="1"/>
-          </p:cNvSpPr>
-          <p:nvPr/>
-        </p:nvSpPr>
-        <p:spPr>
-          <a:xfrm xmlns:a="http://schemas.openxmlformats.org/drawingml/2006/main">
-            <a:off x="3714750" y="2933700"/>
+                <a16:creationId xmlns:a16="http://schemas.microsoft.com/office/drawing/2014/main" id="{42E32E9D-23BF-49B3-A331-596E80B2293F}"/>
+              </a:ext>
+            </a:extLst>
+          </p:cNvPr>
+          <p:cNvSpPr>
+            <a:spLocks xmlns:a="http://schemas.openxmlformats.org/drawingml/2006/main" noGrp="1"/>
+          </p:cNvSpPr>
+          <p:nvPr/>
+        </p:nvSpPr>
+        <p:spPr>
+          <a:xfrm xmlns:a="http://schemas.openxmlformats.org/drawingml/2006/main">
+            <a:off x="3714750" y="2838450"/>
             <a:ext cx="2476500" cy="514350"/>
           </a:xfrm>
           <a:prstGeom xmlns:a="http://schemas.openxmlformats.org/drawingml/2006/main" prst="rect">
@@ -6040,7 +6081,7 @@
                   <a:srgbClr val="526174"/>
                 </a:solidFill>
               </a:rPr>
-              <a:t>macro F1 on 225 deterministic controls</a:t>
+              <a:t>byte-identical inference runs</a:t>
             </a:r>
           </a:p>
         </p:txBody>
@@ -6050,18 +6091,18 @@
           <p:cNvPr id="9" name="">
             <a:extLst xmlns:a="http://schemas.openxmlformats.org/drawingml/2006/main">
               <a:ext uri="{FF2B5EF4-FFF2-40B4-BE49-F238E27FC236}">
-                <a16:creationId xmlns:a16="http://schemas.microsoft.com/office/drawing/2014/main" id="{84BF4AD3-FBBE-4995-AFBC-C9E99521250A}"/>
-              </a:ext>
-            </a:extLst>
-          </p:cNvPr>
-          <p:cNvSpPr>
-            <a:spLocks xmlns:a="http://schemas.openxmlformats.org/drawingml/2006/main" noGrp="1"/>
-          </p:cNvSpPr>
-          <p:nvPr/>
-        </p:nvSpPr>
-        <p:spPr>
-          <a:xfrm xmlns:a="http://schemas.openxmlformats.org/drawingml/2006/main">
-            <a:off x="6667500" y="2247900"/>
+                <a16:creationId xmlns:a16="http://schemas.microsoft.com/office/drawing/2014/main" id="{C0680FB1-FFC9-4A81-9975-5AE1C994F61A}"/>
+              </a:ext>
+            </a:extLst>
+          </p:cNvPr>
+          <p:cNvSpPr>
+            <a:spLocks xmlns:a="http://schemas.openxmlformats.org/drawingml/2006/main" noGrp="1"/>
+          </p:cNvSpPr>
+          <p:nvPr/>
+        </p:nvSpPr>
+        <p:spPr>
+          <a:xfrm xmlns:a="http://schemas.openxmlformats.org/drawingml/2006/main">
+            <a:off x="6667500" y="2152650"/>
             <a:ext cx="2190750" cy="685800"/>
           </a:xfrm>
           <a:prstGeom xmlns:a="http://schemas.openxmlformats.org/drawingml/2006/main" prst="rect">
@@ -6090,7 +6131,7 @@
                   <a:srgbClr val="D59B32"/>
                 </a:solidFill>
               </a:rPr>
-              <a:t>0.967</a:t>
+              <a:t>225</a:t>
             </a:r>
           </a:p>
         </p:txBody>
@@ -6100,18 +6141,18 @@
           <p:cNvPr id="10" name="">
             <a:extLst xmlns:a="http://schemas.openxmlformats.org/drawingml/2006/main">
               <a:ext uri="{FF2B5EF4-FFF2-40B4-BE49-F238E27FC236}">
-                <a16:creationId xmlns:a16="http://schemas.microsoft.com/office/drawing/2014/main" id="{F5A7E85C-AB55-4D59-A413-9CB40004C9CB}"/>
-              </a:ext>
-            </a:extLst>
-          </p:cNvPr>
-          <p:cNvSpPr>
-            <a:spLocks xmlns:a="http://schemas.openxmlformats.org/drawingml/2006/main" noGrp="1"/>
-          </p:cNvSpPr>
-          <p:nvPr/>
-        </p:nvSpPr>
-        <p:spPr>
-          <a:xfrm xmlns:a="http://schemas.openxmlformats.org/drawingml/2006/main">
-            <a:off x="6667500" y="2933700"/>
+                <a16:creationId xmlns:a16="http://schemas.microsoft.com/office/drawing/2014/main" id="{16B98617-6DE7-42B4-AB6B-A5BEE8AB84E2}"/>
+              </a:ext>
+            </a:extLst>
+          </p:cNvPr>
+          <p:cNvSpPr>
+            <a:spLocks xmlns:a="http://schemas.openxmlformats.org/drawingml/2006/main" noGrp="1"/>
+          </p:cNvSpPr>
+          <p:nvPr/>
+        </p:nvSpPr>
+        <p:spPr>
+          <a:xfrm xmlns:a="http://schemas.openxmlformats.org/drawingml/2006/main">
+            <a:off x="6667500" y="2838450"/>
             <a:ext cx="2190750" cy="514350"/>
           </a:xfrm>
           <a:prstGeom xmlns:a="http://schemas.openxmlformats.org/drawingml/2006/main" prst="rect">
@@ -6140,7 +6181,7 @@
                   <a:srgbClr val="526174"/>
                 </a:solidFill>
               </a:rPr>
-              <a:t>public macro F1, rank 5</a:t>
+              <a:t>deterministic controls</a:t>
             </a:r>
           </a:p>
         </p:txBody>
@@ -6150,18 +6191,18 @@
           <p:cNvPr id="11" name="">
             <a:extLst xmlns:a="http://schemas.openxmlformats.org/drawingml/2006/main">
               <a:ext uri="{FF2B5EF4-FFF2-40B4-BE49-F238E27FC236}">
-                <a16:creationId xmlns:a16="http://schemas.microsoft.com/office/drawing/2014/main" id="{06D6CEA2-1B45-4D49-A5FD-463DEF2E7298}"/>
-              </a:ext>
-            </a:extLst>
-          </p:cNvPr>
-          <p:cNvSpPr>
-            <a:spLocks xmlns:a="http://schemas.openxmlformats.org/drawingml/2006/main" noGrp="1"/>
-          </p:cNvSpPr>
-          <p:nvPr/>
-        </p:nvSpPr>
-        <p:spPr>
-          <a:xfrm xmlns:a="http://schemas.openxmlformats.org/drawingml/2006/main">
-            <a:off x="9277350" y="2247900"/>
+                <a16:creationId xmlns:a16="http://schemas.microsoft.com/office/drawing/2014/main" id="{776D1D8D-F9D4-4B8F-A3F8-ABD11D990D47}"/>
+              </a:ext>
+            </a:extLst>
+          </p:cNvPr>
+          <p:cNvSpPr>
+            <a:spLocks xmlns:a="http://schemas.openxmlformats.org/drawingml/2006/main" noGrp="1"/>
+          </p:cNvSpPr>
+          <p:nvPr/>
+        </p:nvSpPr>
+        <p:spPr>
+          <a:xfrm xmlns:a="http://schemas.openxmlformats.org/drawingml/2006/main">
+            <a:off x="9277350" y="2152650"/>
             <a:ext cx="2190750" cy="685800"/>
           </a:xfrm>
           <a:prstGeom xmlns:a="http://schemas.openxmlformats.org/drawingml/2006/main" prst="rect">
@@ -6190,7 +6231,7 @@
                   <a:srgbClr val="2A8C82"/>
                 </a:solidFill>
               </a:rPr>
-              <a:t>0.982</a:t>
+              <a:t>0</a:t>
             </a:r>
           </a:p>
         </p:txBody>
@@ -6200,18 +6241,18 @@
           <p:cNvPr id="12" name="">
             <a:extLst xmlns:a="http://schemas.openxmlformats.org/drawingml/2006/main">
               <a:ext uri="{FF2B5EF4-FFF2-40B4-BE49-F238E27FC236}">
-                <a16:creationId xmlns:a16="http://schemas.microsoft.com/office/drawing/2014/main" id="{0062413A-94E2-4276-A0F7-56541DA65D73}"/>
-              </a:ext>
-            </a:extLst>
-          </p:cNvPr>
-          <p:cNvSpPr>
-            <a:spLocks xmlns:a="http://schemas.openxmlformats.org/drawingml/2006/main" noGrp="1"/>
-          </p:cNvSpPr>
-          <p:nvPr/>
-        </p:nvSpPr>
-        <p:spPr>
-          <a:xfrm xmlns:a="http://schemas.openxmlformats.org/drawingml/2006/main">
-            <a:off x="9277350" y="2933700"/>
+                <a16:creationId xmlns:a16="http://schemas.microsoft.com/office/drawing/2014/main" id="{36F44AD7-7121-45F0-AA7E-6D3612C22C2D}"/>
+              </a:ext>
+            </a:extLst>
+          </p:cNvPr>
+          <p:cNvSpPr>
+            <a:spLocks xmlns:a="http://schemas.openxmlformats.org/drawingml/2006/main" noGrp="1"/>
+          </p:cNvSpPr>
+          <p:nvPr/>
+        </p:nvSpPr>
+        <p:spPr>
+          <a:xfrm xmlns:a="http://schemas.openxmlformats.org/drawingml/2006/main">
+            <a:off x="9277350" y="2838450"/>
             <a:ext cx="2190750" cy="514350"/>
           </a:xfrm>
           <a:prstGeom xmlns:a="http://schemas.openxmlformats.org/drawingml/2006/main" prst="rect">
@@ -6240,7 +6281,7 @@
                   <a:srgbClr val="526174"/>
                 </a:solidFill>
               </a:rPr>
-              <a:t>private macro F1, rank 1</a:t>
+              <a:t>schema or ID-order failures</a:t>
             </a:r>
           </a:p>
         </p:txBody>
@@ -6250,7 +6291,7 @@
           <p:cNvPr id="13" name="">
             <a:extLst xmlns:a="http://schemas.openxmlformats.org/drawingml/2006/main">
               <a:ext uri="{FF2B5EF4-FFF2-40B4-BE49-F238E27FC236}">
-                <a16:creationId xmlns:a16="http://schemas.microsoft.com/office/drawing/2014/main" id="{BC06F4D1-4421-478A-9A19-4427B424481E}"/>
+                <a16:creationId xmlns:a16="http://schemas.microsoft.com/office/drawing/2014/main" id="{C49AEAA0-C27B-4B5A-89C3-39911C7DA513}"/>
               </a:ext>
             </a:extLst>
           </p:cNvPr>
@@ -6281,7 +6322,7 @@
           <p:cNvPr id="14" name="">
             <a:extLst xmlns:a="http://schemas.openxmlformats.org/drawingml/2006/main">
               <a:ext uri="{FF2B5EF4-FFF2-40B4-BE49-F238E27FC236}">
-                <a16:creationId xmlns:a16="http://schemas.microsoft.com/office/drawing/2014/main" id="{8D64D6C8-E6FC-43E5-9676-854764CE16BF}"/>
+                <a16:creationId xmlns:a16="http://schemas.microsoft.com/office/drawing/2014/main" id="{87E7BEB6-B3FD-434D-A962-72ABA36D8505}"/>
               </a:ext>
             </a:extLst>
           </p:cNvPr>
@@ -6316,119 +6357,19 @@
           <p:cNvPr id="15" name="">
             <a:extLst xmlns:a="http://schemas.openxmlformats.org/drawingml/2006/main">
               <a:ext uri="{FF2B5EF4-FFF2-40B4-BE49-F238E27FC236}">
-                <a16:creationId xmlns:a16="http://schemas.microsoft.com/office/drawing/2014/main" id="{CE4310CB-96C7-45FB-9D6F-F5DDE33827DE}"/>
-              </a:ext>
-            </a:extLst>
-          </p:cNvPr>
-          <p:cNvSpPr>
-            <a:spLocks xmlns:a="http://schemas.openxmlformats.org/drawingml/2006/main" noGrp="1"/>
-          </p:cNvSpPr>
-          <p:nvPr/>
-        </p:nvSpPr>
-        <p:spPr>
-          <a:xfrm xmlns:a="http://schemas.openxmlformats.org/drawingml/2006/main">
-            <a:off x="1524000" y="4343400"/>
-            <a:ext cx="2857500" cy="304800"/>
-          </a:xfrm>
-          <a:prstGeom xmlns:a="http://schemas.openxmlformats.org/drawingml/2006/main" prst="rect">
-            <a:avLst/>
-          </a:prstGeom>
-          <a:noFill xmlns:a="http://schemas.openxmlformats.org/drawingml/2006/main"/>
-          <a:ln xmlns:a="http://schemas.openxmlformats.org/drawingml/2006/main" w="0">
-            <a:noFill/>
-            <a:prstDash val="solid"/>
-          </a:ln>
-        </p:spPr>
-        <p:txBody>
-          <a:bodyPr xmlns:a="http://schemas.openxmlformats.org/drawingml/2006/main"/>
-          <a:lstStyle xmlns:a="http://schemas.openxmlformats.org/drawingml/2006/main"/>
-          <a:p xmlns:a="http://schemas.openxmlformats.org/drawingml/2006/main">
-            <a:pPr algn="l">
-              <a:defRPr sz="1650" b="1">
-                <a:solidFill>
-                  <a:srgbClr val="1F5A7A"/>
-                </a:solidFill>
-              </a:defRPr>
-            </a:pPr>
-            <a:r>
-              <a:rPr sz="1650" b="1">
-                <a:solidFill>
-                  <a:srgbClr val="1F5A7A"/>
-                </a:solidFill>
-              </a:rPr>
-              <a:t>What we can claim</a:t>
-            </a:r>
-          </a:p>
-        </p:txBody>
-      </p:sp>
-      <p:sp>
-        <p:nvSpPr>
-          <p:cNvPr id="16" name="">
-            <a:extLst xmlns:a="http://schemas.openxmlformats.org/drawingml/2006/main">
-              <a:ext uri="{FF2B5EF4-FFF2-40B4-BE49-F238E27FC236}">
-                <a16:creationId xmlns:a16="http://schemas.microsoft.com/office/drawing/2014/main" id="{18434BFE-B609-40C0-A413-71A036E2A160}"/>
-              </a:ext>
-            </a:extLst>
-          </p:cNvPr>
-          <p:cNvSpPr>
-            <a:spLocks xmlns:a="http://schemas.openxmlformats.org/drawingml/2006/main" noGrp="1"/>
-          </p:cNvSpPr>
-          <p:nvPr/>
-        </p:nvSpPr>
-        <p:spPr>
-          <a:xfrm xmlns:a="http://schemas.openxmlformats.org/drawingml/2006/main">
-            <a:off x="1524000" y="4781550"/>
-            <a:ext cx="8572500" cy="285750"/>
-          </a:xfrm>
-          <a:prstGeom xmlns:a="http://schemas.openxmlformats.org/drawingml/2006/main" prst="rect">
-            <a:avLst/>
-          </a:prstGeom>
-          <a:noFill xmlns:a="http://schemas.openxmlformats.org/drawingml/2006/main"/>
-          <a:ln xmlns:a="http://schemas.openxmlformats.org/drawingml/2006/main" w="0">
-            <a:noFill/>
-            <a:prstDash val="solid"/>
-          </a:ln>
-        </p:spPr>
-        <p:txBody>
-          <a:bodyPr xmlns:a="http://schemas.openxmlformats.org/drawingml/2006/main"/>
-          <a:lstStyle xmlns:a="http://schemas.openxmlformats.org/drawingml/2006/main"/>
-          <a:p xmlns:a="http://schemas.openxmlformats.org/drawingml/2006/main">
-            <a:pPr algn="l">
-              <a:defRPr sz="1500" b="0">
-                <a:solidFill>
-                  <a:srgbClr val="0F172A"/>
-                </a:solidFill>
-              </a:defRPr>
-            </a:pPr>
-            <a:r>
-              <a:rPr sz="1500" b="0">
-                <a:solidFill>
-                  <a:srgbClr val="0F172A"/>
-                </a:solidFill>
-              </a:rPr>
-              <a:t>The final system generalized better than our public-only experiments suggested.</a:t>
-            </a:r>
-          </a:p>
-        </p:txBody>
-      </p:sp>
-      <p:sp>
-        <p:nvSpPr>
-          <p:cNvPr id="17" name="">
-            <a:extLst xmlns:a="http://schemas.openxmlformats.org/drawingml/2006/main">
-              <a:ext uri="{FF2B5EF4-FFF2-40B4-BE49-F238E27FC236}">
-                <a16:creationId xmlns:a16="http://schemas.microsoft.com/office/drawing/2014/main" id="{741A9AB2-3BFB-45C7-9CD4-CF08F8F3EB24}"/>
-              </a:ext>
-            </a:extLst>
-          </p:cNvPr>
-          <p:cNvSpPr>
-            <a:spLocks xmlns:a="http://schemas.openxmlformats.org/drawingml/2006/main" noGrp="1"/>
-          </p:cNvSpPr>
-          <p:nvPr/>
-        </p:nvSpPr>
-        <p:spPr>
-          <a:xfrm xmlns:a="http://schemas.openxmlformats.org/drawingml/2006/main">
-            <a:off x="1524000" y="5029200"/>
-            <a:ext cx="2857500" cy="285750"/>
+                <a16:creationId xmlns:a16="http://schemas.microsoft.com/office/drawing/2014/main" id="{2B21598F-0596-4C30-804B-B915BD547051}"/>
+              </a:ext>
+            </a:extLst>
+          </p:cNvPr>
+          <p:cNvSpPr>
+            <a:spLocks xmlns:a="http://schemas.openxmlformats.org/drawingml/2006/main" noGrp="1"/>
+          </p:cNvSpPr>
+          <p:nvPr/>
+        </p:nvSpPr>
+        <p:spPr>
+          <a:xfrm xmlns:a="http://schemas.openxmlformats.org/drawingml/2006/main">
+            <a:off x="1524000" y="4286250"/>
+            <a:ext cx="2095500" cy="247650"/>
           </a:xfrm>
           <a:prstGeom xmlns:a="http://schemas.openxmlformats.org/drawingml/2006/main" prst="rect">
             <a:avLst/>
@@ -6446,17 +6387,117 @@
             <a:pPr algn="l">
               <a:defRPr sz="1350" b="1">
                 <a:solidFill>
-                  <a:srgbClr val="B5483A"/>
+                  <a:srgbClr val="1F5A7A"/>
                 </a:solidFill>
               </a:defRPr>
             </a:pPr>
             <a:r>
               <a:rPr sz="1350" b="1">
                 <a:solidFill>
-                  <a:srgbClr val="B5483A"/>
-                </a:solidFill>
-              </a:rPr>
-              <a:t>What we cannot claim</a:t>
+                  <a:srgbClr val="1F5A7A"/>
+                </a:solidFill>
+              </a:rPr>
+              <a:t>Released labels</a:t>
+            </a:r>
+          </a:p>
+        </p:txBody>
+      </p:sp>
+      <p:sp>
+        <p:nvSpPr>
+          <p:cNvPr id="16" name="">
+            <a:extLst xmlns:a="http://schemas.openxmlformats.org/drawingml/2006/main">
+              <a:ext uri="{FF2B5EF4-FFF2-40B4-BE49-F238E27FC236}">
+                <a16:creationId xmlns:a16="http://schemas.microsoft.com/office/drawing/2014/main" id="{7B902A5B-E913-4200-ADD2-FE65343269F7}"/>
+              </a:ext>
+            </a:extLst>
+          </p:cNvPr>
+          <p:cNvSpPr>
+            <a:spLocks xmlns:a="http://schemas.openxmlformats.org/drawingml/2006/main" noGrp="1"/>
+          </p:cNvSpPr>
+          <p:nvPr/>
+        </p:nvSpPr>
+        <p:spPr>
+          <a:xfrm xmlns:a="http://schemas.openxmlformats.org/drawingml/2006/main">
+            <a:off x="3905250" y="4286250"/>
+            <a:ext cx="2857500" cy="247650"/>
+          </a:xfrm>
+          <a:prstGeom xmlns:a="http://schemas.openxmlformats.org/drawingml/2006/main" prst="rect">
+            <a:avLst/>
+          </a:prstGeom>
+          <a:noFill xmlns:a="http://schemas.openxmlformats.org/drawingml/2006/main"/>
+          <a:ln xmlns:a="http://schemas.openxmlformats.org/drawingml/2006/main" w="0">
+            <a:noFill/>
+            <a:prstDash val="solid"/>
+          </a:ln>
+        </p:spPr>
+        <p:txBody>
+          <a:bodyPr xmlns:a="http://schemas.openxmlformats.org/drawingml/2006/main"/>
+          <a:lstStyle xmlns:a="http://schemas.openxmlformats.org/drawingml/2006/main"/>
+          <a:p xmlns:a="http://schemas.openxmlformats.org/drawingml/2006/main">
+            <a:pPr algn="l">
+              <a:defRPr sz="1350" b="1">
+                <a:solidFill>
+                  <a:srgbClr val="0F172A"/>
+                </a:solidFill>
+              </a:defRPr>
+            </a:pPr>
+            <a:r>
+              <a:rPr sz="1350" b="1">
+                <a:solidFill>
+                  <a:srgbClr val="0F172A"/>
+                </a:solidFill>
+              </a:rPr>
+              <a:t>0.9933 macro F1 on 299 rows</a:t>
+            </a:r>
+          </a:p>
+        </p:txBody>
+      </p:sp>
+      <p:sp>
+        <p:nvSpPr>
+          <p:cNvPr id="17" name="">
+            <a:extLst xmlns:a="http://schemas.openxmlformats.org/drawingml/2006/main">
+              <a:ext uri="{FF2B5EF4-FFF2-40B4-BE49-F238E27FC236}">
+                <a16:creationId xmlns:a16="http://schemas.microsoft.com/office/drawing/2014/main" id="{E1D33924-7B47-42E9-AD29-750269AA19A1}"/>
+              </a:ext>
+            </a:extLst>
+          </p:cNvPr>
+          <p:cNvSpPr>
+            <a:spLocks xmlns:a="http://schemas.openxmlformats.org/drawingml/2006/main" noGrp="1"/>
+          </p:cNvSpPr>
+          <p:nvPr/>
+        </p:nvSpPr>
+        <p:spPr>
+          <a:xfrm xmlns:a="http://schemas.openxmlformats.org/drawingml/2006/main">
+            <a:off x="1524000" y="4667250"/>
+            <a:ext cx="2095500" cy="247650"/>
+          </a:xfrm>
+          <a:prstGeom xmlns:a="http://schemas.openxmlformats.org/drawingml/2006/main" prst="rect">
+            <a:avLst/>
+          </a:prstGeom>
+          <a:noFill xmlns:a="http://schemas.openxmlformats.org/drawingml/2006/main"/>
+          <a:ln xmlns:a="http://schemas.openxmlformats.org/drawingml/2006/main" w="0">
+            <a:noFill/>
+            <a:prstDash val="solid"/>
+          </a:ln>
+        </p:spPr>
+        <p:txBody>
+          <a:bodyPr xmlns:a="http://schemas.openxmlformats.org/drawingml/2006/main"/>
+          <a:lstStyle xmlns:a="http://schemas.openxmlformats.org/drawingml/2006/main"/>
+          <a:p xmlns:a="http://schemas.openxmlformats.org/drawingml/2006/main">
+            <a:pPr algn="l">
+              <a:defRPr sz="1350" b="1">
+                <a:solidFill>
+                  <a:srgbClr val="1F5A7A"/>
+                </a:solidFill>
+              </a:defRPr>
+            </a:pPr>
+            <a:r>
+              <a:rPr sz="1350" b="1">
+                <a:solidFill>
+                  <a:srgbClr val="1F5A7A"/>
+                </a:solidFill>
+              </a:rPr>
+              <a:t>Phase 1 aggregate</a:t>
             </a:r>
           </a:p>
         </p:txBody>
@@ -6466,19 +6507,19 @@
           <p:cNvPr id="18" name="">
             <a:extLst xmlns:a="http://schemas.openxmlformats.org/drawingml/2006/main">
               <a:ext uri="{FF2B5EF4-FFF2-40B4-BE49-F238E27FC236}">
-                <a16:creationId xmlns:a16="http://schemas.microsoft.com/office/drawing/2014/main" id="{C2B31DB5-57EB-465A-A590-99B51A33A847}"/>
-              </a:ext>
-            </a:extLst>
-          </p:cNvPr>
-          <p:cNvSpPr>
-            <a:spLocks xmlns:a="http://schemas.openxmlformats.org/drawingml/2006/main" noGrp="1"/>
-          </p:cNvSpPr>
-          <p:nvPr/>
-        </p:nvSpPr>
-        <p:spPr>
-          <a:xfrm xmlns:a="http://schemas.openxmlformats.org/drawingml/2006/main">
-            <a:off x="1524000" y="5353050"/>
-            <a:ext cx="8763000" cy="323850"/>
+                <a16:creationId xmlns:a16="http://schemas.microsoft.com/office/drawing/2014/main" id="{36E16BE8-43A7-464C-8ADE-582E420B2FE9}"/>
+              </a:ext>
+            </a:extLst>
+          </p:cNvPr>
+          <p:cNvSpPr>
+            <a:spLocks xmlns:a="http://schemas.openxmlformats.org/drawingml/2006/main" noGrp="1"/>
+          </p:cNvSpPr>
+          <p:nvPr/>
+        </p:nvSpPr>
+        <p:spPr>
+          <a:xfrm xmlns:a="http://schemas.openxmlformats.org/drawingml/2006/main">
+            <a:off x="3905250" y="4667250"/>
+            <a:ext cx="2857500" cy="247650"/>
           </a:xfrm>
           <a:prstGeom xmlns:a="http://schemas.openxmlformats.org/drawingml/2006/main" prst="rect">
             <a:avLst/>
@@ -6494,19 +6535,19 @@
           <a:lstStyle xmlns:a="http://schemas.openxmlformats.org/drawingml/2006/main"/>
           <a:p xmlns:a="http://schemas.openxmlformats.org/drawingml/2006/main">
             <a:pPr algn="l">
-              <a:defRPr sz="1350" b="0">
-                <a:solidFill>
-                  <a:srgbClr val="526174"/>
-                </a:solidFill>
-              </a:defRPr>
-            </a:pPr>
-            <a:r>
-              <a:rPr sz="1350" b="0">
-                <a:solidFill>
-                  <a:srgbClr val="526174"/>
-                </a:solidFill>
-              </a:rPr>
-              <a:t>A private score does not prove every v91 rule will transfer to the broader Phase 2 sources.</a:t>
+              <a:defRPr sz="1350" b="1">
+                <a:solidFill>
+                  <a:srgbClr val="0F172A"/>
+                </a:solidFill>
+              </a:defRPr>
+            </a:pPr>
+            <a:r>
+              <a:rPr sz="1350" b="1">
+                <a:solidFill>
+                  <a:srgbClr val="0F172A"/>
+                </a:solidFill>
+              </a:rPr>
+              <a:t>0.967 public; 0.982 private</a:t>
             </a:r>
           </a:p>
         </p:txBody>
@@ -6516,7 +6557,207 @@
           <p:cNvPr id="19" name="">
             <a:extLst xmlns:a="http://schemas.openxmlformats.org/drawingml/2006/main">
               <a:ext uri="{FF2B5EF4-FFF2-40B4-BE49-F238E27FC236}">
-                <a16:creationId xmlns:a16="http://schemas.microsoft.com/office/drawing/2014/main" id="{3B59A5D0-FA75-48D0-B6F6-4035CF893B41}"/>
+                <a16:creationId xmlns:a16="http://schemas.microsoft.com/office/drawing/2014/main" id="{5295B11D-0C97-47AE-B41E-1B5810496A80}"/>
+              </a:ext>
+            </a:extLst>
+          </p:cNvPr>
+          <p:cNvSpPr>
+            <a:spLocks xmlns:a="http://schemas.openxmlformats.org/drawingml/2006/main" noGrp="1"/>
+          </p:cNvSpPr>
+          <p:nvPr/>
+        </p:nvSpPr>
+        <p:spPr>
+          <a:xfrm xmlns:a="http://schemas.openxmlformats.org/drawingml/2006/main">
+            <a:off x="1524000" y="5048250"/>
+            <a:ext cx="2095500" cy="247650"/>
+          </a:xfrm>
+          <a:prstGeom xmlns:a="http://schemas.openxmlformats.org/drawingml/2006/main" prst="rect">
+            <a:avLst/>
+          </a:prstGeom>
+          <a:noFill xmlns:a="http://schemas.openxmlformats.org/drawingml/2006/main"/>
+          <a:ln xmlns:a="http://schemas.openxmlformats.org/drawingml/2006/main" w="0">
+            <a:noFill/>
+            <a:prstDash val="solid"/>
+          </a:ln>
+        </p:spPr>
+        <p:txBody>
+          <a:bodyPr xmlns:a="http://schemas.openxmlformats.org/drawingml/2006/main"/>
+          <a:lstStyle xmlns:a="http://schemas.openxmlformats.org/drawingml/2006/main"/>
+          <a:p xmlns:a="http://schemas.openxmlformats.org/drawingml/2006/main">
+            <a:pPr algn="l">
+              <a:defRPr sz="1350" b="1">
+                <a:solidFill>
+                  <a:srgbClr val="1F5A7A"/>
+                </a:solidFill>
+              </a:defRPr>
+            </a:pPr>
+            <a:r>
+              <a:rPr sz="1350" b="1">
+                <a:solidFill>
+                  <a:srgbClr val="1F5A7A"/>
+                </a:solidFill>
+              </a:rPr>
+              <a:t>Frozen output</a:t>
+            </a:r>
+          </a:p>
+        </p:txBody>
+      </p:sp>
+      <p:sp>
+        <p:nvSpPr>
+          <p:cNvPr id="20" name="">
+            <a:extLst xmlns:a="http://schemas.openxmlformats.org/drawingml/2006/main">
+              <a:ext uri="{FF2B5EF4-FFF2-40B4-BE49-F238E27FC236}">
+                <a16:creationId xmlns:a16="http://schemas.microsoft.com/office/drawing/2014/main" id="{A15D2101-8EE8-4624-B982-1A083E4EEE11}"/>
+              </a:ext>
+            </a:extLst>
+          </p:cNvPr>
+          <p:cNvSpPr>
+            <a:spLocks xmlns:a="http://schemas.openxmlformats.org/drawingml/2006/main" noGrp="1"/>
+          </p:cNvSpPr>
+          <p:nvPr/>
+        </p:nvSpPr>
+        <p:spPr>
+          <a:xfrm xmlns:a="http://schemas.openxmlformats.org/drawingml/2006/main">
+            <a:off x="3905250" y="5048250"/>
+            <a:ext cx="3429000" cy="247650"/>
+          </a:xfrm>
+          <a:prstGeom xmlns:a="http://schemas.openxmlformats.org/drawingml/2006/main" prst="rect">
+            <a:avLst/>
+          </a:prstGeom>
+          <a:noFill xmlns:a="http://schemas.openxmlformats.org/drawingml/2006/main"/>
+          <a:ln xmlns:a="http://schemas.openxmlformats.org/drawingml/2006/main" w="0">
+            <a:noFill/>
+            <a:prstDash val="solid"/>
+          </a:ln>
+        </p:spPr>
+        <p:txBody>
+          <a:bodyPr xmlns:a="http://schemas.openxmlformats.org/drawingml/2006/main"/>
+          <a:lstStyle xmlns:a="http://schemas.openxmlformats.org/drawingml/2006/main"/>
+          <a:p xmlns:a="http://schemas.openxmlformats.org/drawingml/2006/main">
+            <a:pPr algn="l">
+              <a:defRPr sz="1350" b="1">
+                <a:solidFill>
+                  <a:srgbClr val="0F172A"/>
+                </a:solidFill>
+              </a:defRPr>
+            </a:pPr>
+            <a:r>
+              <a:rPr sz="1350" b="1">
+                <a:solidFill>
+                  <a:srgbClr val="0F172A"/>
+                </a:solidFill>
+              </a:rPr>
+              <a:t>SHA-256 matched the scored CSV</a:t>
+            </a:r>
+          </a:p>
+        </p:txBody>
+      </p:sp>
+      <p:sp>
+        <p:nvSpPr>
+          <p:cNvPr id="21" name="">
+            <a:extLst xmlns:a="http://schemas.openxmlformats.org/drawingml/2006/main">
+              <a:ext uri="{FF2B5EF4-FFF2-40B4-BE49-F238E27FC236}">
+                <a16:creationId xmlns:a16="http://schemas.microsoft.com/office/drawing/2014/main" id="{9883E36E-309F-4EC1-84ED-8639C5D6AFAE}"/>
+              </a:ext>
+            </a:extLst>
+          </p:cNvPr>
+          <p:cNvSpPr>
+            <a:spLocks xmlns:a="http://schemas.openxmlformats.org/drawingml/2006/main" noGrp="1"/>
+          </p:cNvSpPr>
+          <p:nvPr/>
+        </p:nvSpPr>
+        <p:spPr>
+          <a:xfrm xmlns:a="http://schemas.openxmlformats.org/drawingml/2006/main">
+            <a:off x="1524000" y="5429250"/>
+            <a:ext cx="2095500" cy="247650"/>
+          </a:xfrm>
+          <a:prstGeom xmlns:a="http://schemas.openxmlformats.org/drawingml/2006/main" prst="rect">
+            <a:avLst/>
+          </a:prstGeom>
+          <a:noFill xmlns:a="http://schemas.openxmlformats.org/drawingml/2006/main"/>
+          <a:ln xmlns:a="http://schemas.openxmlformats.org/drawingml/2006/main" w="0">
+            <a:noFill/>
+            <a:prstDash val="solid"/>
+          </a:ln>
+        </p:spPr>
+        <p:txBody>
+          <a:bodyPr xmlns:a="http://schemas.openxmlformats.org/drawingml/2006/main"/>
+          <a:lstStyle xmlns:a="http://schemas.openxmlformats.org/drawingml/2006/main"/>
+          <a:p xmlns:a="http://schemas.openxmlformats.org/drawingml/2006/main">
+            <a:pPr algn="l">
+              <a:defRPr sz="1350" b="1">
+                <a:solidFill>
+                  <a:srgbClr val="1F5A7A"/>
+                </a:solidFill>
+              </a:defRPr>
+            </a:pPr>
+            <a:r>
+              <a:rPr sz="1350" b="1">
+                <a:solidFill>
+                  <a:srgbClr val="1F5A7A"/>
+                </a:solidFill>
+              </a:rPr>
+              <a:t>Phase 2 contract</a:t>
+            </a:r>
+          </a:p>
+        </p:txBody>
+      </p:sp>
+      <p:sp>
+        <p:nvSpPr>
+          <p:cNvPr id="22" name="">
+            <a:extLst xmlns:a="http://schemas.openxmlformats.org/drawingml/2006/main">
+              <a:ext uri="{FF2B5EF4-FFF2-40B4-BE49-F238E27FC236}">
+                <a16:creationId xmlns:a16="http://schemas.microsoft.com/office/drawing/2014/main" id="{3A7AE3DD-2A88-45DF-A6A9-9B8AE1956887}"/>
+              </a:ext>
+            </a:extLst>
+          </p:cNvPr>
+          <p:cNvSpPr>
+            <a:spLocks xmlns:a="http://schemas.openxmlformats.org/drawingml/2006/main" noGrp="1"/>
+          </p:cNvSpPr>
+          <p:nvPr/>
+        </p:nvSpPr>
+        <p:spPr>
+          <a:xfrm xmlns:a="http://schemas.openxmlformats.org/drawingml/2006/main">
+            <a:off x="3905250" y="5429250"/>
+            <a:ext cx="4191000" cy="247650"/>
+          </a:xfrm>
+          <a:prstGeom xmlns:a="http://schemas.openxmlformats.org/drawingml/2006/main" prst="rect">
+            <a:avLst/>
+          </a:prstGeom>
+          <a:noFill xmlns:a="http://schemas.openxmlformats.org/drawingml/2006/main"/>
+          <a:ln xmlns:a="http://schemas.openxmlformats.org/drawingml/2006/main" w="0">
+            <a:noFill/>
+            <a:prstDash val="solid"/>
+          </a:ln>
+        </p:spPr>
+        <p:txBody>
+          <a:bodyPr xmlns:a="http://schemas.openxmlformats.org/drawingml/2006/main"/>
+          <a:lstStyle xmlns:a="http://schemas.openxmlformats.org/drawingml/2006/main"/>
+          <a:p xmlns:a="http://schemas.openxmlformats.org/drawingml/2006/main">
+            <a:pPr algn="l">
+              <a:defRPr sz="1350" b="1">
+                <a:solidFill>
+                  <a:srgbClr val="0F172A"/>
+                </a:solidFill>
+              </a:defRPr>
+            </a:pPr>
+            <a:r>
+              <a:rPr sz="1350" b="1">
+                <a:solidFill>
+                  <a:srgbClr val="0F172A"/>
+                </a:solidFill>
+              </a:rPr>
+              <a:t>5,000 ordered rows validated in 3:52:02</a:t>
+            </a:r>
+          </a:p>
+        </p:txBody>
+      </p:sp>
+      <p:sp>
+        <p:nvSpPr>
+          <p:cNvPr id="23" name="">
+            <a:extLst xmlns:a="http://schemas.openxmlformats.org/drawingml/2006/main">
+              <a:ext uri="{FF2B5EF4-FFF2-40B4-BE49-F238E27FC236}">
+                <a16:creationId xmlns:a16="http://schemas.microsoft.com/office/drawing/2014/main" id="{C580FB3E-B77C-41EC-9F01-15883C1363AE}"/>
               </a:ext>
             </a:extLst>
           </p:cNvPr>
@@ -6544,10 +6785,10 @@
       </p:sp>
       <p:sp>
         <p:nvSpPr>
-          <p:cNvPr id="20" name="source-12">
-            <a:extLst xmlns:a="http://schemas.openxmlformats.org/drawingml/2006/main">
-              <a:ext uri="{FF2B5EF4-FFF2-40B4-BE49-F238E27FC236}">
-                <a16:creationId xmlns:a16="http://schemas.microsoft.com/office/drawing/2014/main" id="{3E7652AD-204C-4759-9EAF-BE424487A856}"/>
+          <p:cNvPr id="24" name="source-12">
+            <a:extLst xmlns:a="http://schemas.openxmlformats.org/drawingml/2006/main">
+              <a:ext uri="{FF2B5EF4-FFF2-40B4-BE49-F238E27FC236}">
+                <a16:creationId xmlns:a16="http://schemas.microsoft.com/office/drawing/2014/main" id="{F4B1FD70-F49D-4DEA-B3FD-DAEB9AAD10F6}"/>
               </a:ext>
             </a:extLst>
           </p:cNvPr>
@@ -6587,17 +6828,17 @@
                   <a:srgbClr val="526174"/>
                 </a:solidFill>
               </a:rPr>
-              <a:t>[7] Released-set evaluation and final Kaggle public/private leaderboards</a:t>
-            </a:r>
-          </a:p>
-        </p:txBody>
-      </p:sp>
-      <p:sp>
-        <p:nvSpPr>
-          <p:cNvPr id="21" name="page-12">
-            <a:extLst xmlns:a="http://schemas.openxmlformats.org/drawingml/2006/main">
-              <a:ext uri="{FF2B5EF4-FFF2-40B4-BE49-F238E27FC236}">
-                <a16:creationId xmlns:a16="http://schemas.microsoft.com/office/drawing/2014/main" id="{47CE243B-9BFB-4559-85C3-3C92A03100E4}"/>
+              <a:t>[7] Regression suite, freeze manifest, evaluation ledger  [8] Phase 2 runtime evidence</a:t>
+            </a:r>
+          </a:p>
+        </p:txBody>
+      </p:sp>
+      <p:sp>
+        <p:nvSpPr>
+          <p:cNvPr id="25" name="page-12">
+            <a:extLst xmlns:a="http://schemas.openxmlformats.org/drawingml/2006/main">
+              <a:ext uri="{FF2B5EF4-FFF2-40B4-BE49-F238E27FC236}">
+                <a16:creationId xmlns:a16="http://schemas.microsoft.com/office/drawing/2014/main" id="{C3694267-DDCD-4F13-A65E-5CD99DC3C541}"/>
               </a:ext>
             </a:extLst>
           </p:cNvPr>
@@ -6645,7 +6886,7 @@
     </p:spTree>
     <p:extLst>
       <p:ext uri="{BB962C8B-B14F-4D97-AF65-F5344CB8AC3E}">
-        <p14:creationId xmlns:p14="http://schemas.microsoft.com/office/powerpoint/2010/main" val="2016078173"/>
+        <p14:creationId xmlns:p14="http://schemas.microsoft.com/office/powerpoint/2010/main" val="354991230"/>
       </p:ext>
     </p:extLst>
   </p:cSld>
@@ -6676,7 +6917,7 @@
           <p:cNvPr id="36" name="kicker-13">
             <a:extLst xmlns:a="http://schemas.openxmlformats.org/drawingml/2006/main">
               <a:ext uri="{FF2B5EF4-FFF2-40B4-BE49-F238E27FC236}">
-                <a16:creationId xmlns:a16="http://schemas.microsoft.com/office/drawing/2014/main" id="{2F2D9248-8407-40D1-A383-9AD496692A39}"/>
+                <a16:creationId xmlns:a16="http://schemas.microsoft.com/office/drawing/2014/main" id="{08EA9D9F-EC07-4ED1-9C3C-B99F41F08C64}"/>
               </a:ext>
             </a:extLst>
           </p:cNvPr>
@@ -6726,7 +6967,7 @@
           <p:cNvPr id="2" name="title-13">
             <a:extLst xmlns:a="http://schemas.openxmlformats.org/drawingml/2006/main">
               <a:ext uri="{FF2B5EF4-FFF2-40B4-BE49-F238E27FC236}">
-                <a16:creationId xmlns:a16="http://schemas.microsoft.com/office/drawing/2014/main" id="{20A034FA-BF53-4FBA-89BD-77335A1EC4CF}"/>
+                <a16:creationId xmlns:a16="http://schemas.microsoft.com/office/drawing/2014/main" id="{5018F185-51D9-478E-99F1-B7A1656FB11C}"/>
               </a:ext>
             </a:extLst>
           </p:cNvPr>
@@ -6776,7 +7017,7 @@
           <p:cNvPr id="3" name="">
             <a:extLst xmlns:a="http://schemas.openxmlformats.org/drawingml/2006/main">
               <a:ext uri="{FF2B5EF4-FFF2-40B4-BE49-F238E27FC236}">
-                <a16:creationId xmlns:a16="http://schemas.microsoft.com/office/drawing/2014/main" id="{56DA8172-C5FE-4CA7-943A-E36B3413CB6A}"/>
+                <a16:creationId xmlns:a16="http://schemas.microsoft.com/office/drawing/2014/main" id="{5E40B5B9-01B4-4F7B-B62E-F8B1B1C50DE9}"/>
               </a:ext>
             </a:extLst>
           </p:cNvPr>
@@ -6807,7 +7048,7 @@
           <p:cNvPr id="4" name="">
             <a:extLst xmlns:a="http://schemas.openxmlformats.org/drawingml/2006/main">
               <a:ext uri="{FF2B5EF4-FFF2-40B4-BE49-F238E27FC236}">
-                <a16:creationId xmlns:a16="http://schemas.microsoft.com/office/drawing/2014/main" id="{9AC28FB9-4D5B-4263-9602-A457AA04E596}"/>
+                <a16:creationId xmlns:a16="http://schemas.microsoft.com/office/drawing/2014/main" id="{CFBC0D92-26ED-4BB3-8912-C31590318752}"/>
               </a:ext>
             </a:extLst>
           </p:cNvPr>
@@ -6857,7 +7098,7 @@
           <p:cNvPr id="5" name="">
             <a:extLst xmlns:a="http://schemas.openxmlformats.org/drawingml/2006/main">
               <a:ext uri="{FF2B5EF4-FFF2-40B4-BE49-F238E27FC236}">
-                <a16:creationId xmlns:a16="http://schemas.microsoft.com/office/drawing/2014/main" id="{A9C54B2F-7365-4F3A-B912-2C33A94CDA44}"/>
+                <a16:creationId xmlns:a16="http://schemas.microsoft.com/office/drawing/2014/main" id="{2F397C4F-2226-4BEB-990C-AF900685E929}"/>
               </a:ext>
             </a:extLst>
           </p:cNvPr>
@@ -6907,7 +7148,7 @@
           <p:cNvPr id="6" name="">
             <a:extLst xmlns:a="http://schemas.openxmlformats.org/drawingml/2006/main">
               <a:ext uri="{FF2B5EF4-FFF2-40B4-BE49-F238E27FC236}">
-                <a16:creationId xmlns:a16="http://schemas.microsoft.com/office/drawing/2014/main" id="{F4D9077E-EABB-4871-978D-1512922BFFAE}"/>
+                <a16:creationId xmlns:a16="http://schemas.microsoft.com/office/drawing/2014/main" id="{3D75A14C-365C-4EF5-9CC8-933281E20F74}"/>
               </a:ext>
             </a:extLst>
           </p:cNvPr>
@@ -6957,7 +7198,7 @@
           <p:cNvPr id="7" name="">
             <a:extLst xmlns:a="http://schemas.openxmlformats.org/drawingml/2006/main">
               <a:ext uri="{FF2B5EF4-FFF2-40B4-BE49-F238E27FC236}">
-                <a16:creationId xmlns:a16="http://schemas.microsoft.com/office/drawing/2014/main" id="{7D52D801-D14A-46A4-8BC2-3882B396A6F5}"/>
+                <a16:creationId xmlns:a16="http://schemas.microsoft.com/office/drawing/2014/main" id="{A198033B-F402-4D5A-832F-849F276455AA}"/>
               </a:ext>
             </a:extLst>
           </p:cNvPr>
@@ -7007,7 +7248,7 @@
           <p:cNvPr id="8" name="">
             <a:extLst xmlns:a="http://schemas.openxmlformats.org/drawingml/2006/main">
               <a:ext uri="{FF2B5EF4-FFF2-40B4-BE49-F238E27FC236}">
-                <a16:creationId xmlns:a16="http://schemas.microsoft.com/office/drawing/2014/main" id="{DA8972CF-CE19-4921-A979-8ECC7BFFAC76}"/>
+                <a16:creationId xmlns:a16="http://schemas.microsoft.com/office/drawing/2014/main" id="{6E1AD017-5386-494E-BDFC-CAE0ABC1D16B}"/>
               </a:ext>
             </a:extLst>
           </p:cNvPr>
@@ -7057,7 +7298,7 @@
           <p:cNvPr id="9" name="">
             <a:extLst xmlns:a="http://schemas.openxmlformats.org/drawingml/2006/main">
               <a:ext uri="{FF2B5EF4-FFF2-40B4-BE49-F238E27FC236}">
-                <a16:creationId xmlns:a16="http://schemas.microsoft.com/office/drawing/2014/main" id="{17A25516-5A0C-4793-B56B-EC7F246E10C6}"/>
+                <a16:creationId xmlns:a16="http://schemas.microsoft.com/office/drawing/2014/main" id="{4D298023-F6BE-46C7-BEFA-D69CCD62743D}"/>
               </a:ext>
             </a:extLst>
           </p:cNvPr>
@@ -7107,7 +7348,7 @@
           <p:cNvPr id="10" name="">
             <a:extLst xmlns:a="http://schemas.openxmlformats.org/drawingml/2006/main">
               <a:ext uri="{FF2B5EF4-FFF2-40B4-BE49-F238E27FC236}">
-                <a16:creationId xmlns:a16="http://schemas.microsoft.com/office/drawing/2014/main" id="{A400E612-26C6-4758-8867-4B854CBC3ED6}"/>
+                <a16:creationId xmlns:a16="http://schemas.microsoft.com/office/drawing/2014/main" id="{55D1B936-B455-4001-973F-C0E7C23C58C5}"/>
               </a:ext>
             </a:extLst>
           </p:cNvPr>
@@ -7157,7 +7398,7 @@
           <p:cNvPr id="11" name="">
             <a:extLst xmlns:a="http://schemas.openxmlformats.org/drawingml/2006/main">
               <a:ext uri="{FF2B5EF4-FFF2-40B4-BE49-F238E27FC236}">
-                <a16:creationId xmlns:a16="http://schemas.microsoft.com/office/drawing/2014/main" id="{C334EC4E-AA85-41CD-854B-D820D7F39DF2}"/>
+                <a16:creationId xmlns:a16="http://schemas.microsoft.com/office/drawing/2014/main" id="{6B9F3450-B968-48EC-9B6B-4B7DFAF29ACF}"/>
               </a:ext>
             </a:extLst>
           </p:cNvPr>
@@ -7207,7 +7448,7 @@
           <p:cNvPr id="12" name="">
             <a:extLst xmlns:a="http://schemas.openxmlformats.org/drawingml/2006/main">
               <a:ext uri="{FF2B5EF4-FFF2-40B4-BE49-F238E27FC236}">
-                <a16:creationId xmlns:a16="http://schemas.microsoft.com/office/drawing/2014/main" id="{0042228C-EFCB-4ED4-AE69-C2B6EDA7B0A7}"/>
+                <a16:creationId xmlns:a16="http://schemas.microsoft.com/office/drawing/2014/main" id="{7AFD2CB4-F2F5-4398-A2D8-9B81D9785296}"/>
               </a:ext>
             </a:extLst>
           </p:cNvPr>
@@ -7257,7 +7498,7 @@
           <p:cNvPr id="13" name="">
             <a:extLst xmlns:a="http://schemas.openxmlformats.org/drawingml/2006/main">
               <a:ext uri="{FF2B5EF4-FFF2-40B4-BE49-F238E27FC236}">
-                <a16:creationId xmlns:a16="http://schemas.microsoft.com/office/drawing/2014/main" id="{E3163358-5091-4E23-B74A-589B819E7BF9}"/>
+                <a16:creationId xmlns:a16="http://schemas.microsoft.com/office/drawing/2014/main" id="{98428F48-0294-4BA2-8DBD-09AA5047E48E}"/>
               </a:ext>
             </a:extLst>
           </p:cNvPr>
@@ -7307,7 +7548,7 @@
           <p:cNvPr id="14" name="">
             <a:extLst xmlns:a="http://schemas.openxmlformats.org/drawingml/2006/main">
               <a:ext uri="{FF2B5EF4-FFF2-40B4-BE49-F238E27FC236}">
-                <a16:creationId xmlns:a16="http://schemas.microsoft.com/office/drawing/2014/main" id="{9C4F2268-EC18-4BB4-850C-C0CD5D45B375}"/>
+                <a16:creationId xmlns:a16="http://schemas.microsoft.com/office/drawing/2014/main" id="{91FA80DF-536D-4349-BC1B-E3FC90B75D7D}"/>
               </a:ext>
             </a:extLst>
           </p:cNvPr>
@@ -7357,7 +7598,7 @@
           <p:cNvPr id="15" name="">
             <a:extLst xmlns:a="http://schemas.openxmlformats.org/drawingml/2006/main">
               <a:ext uri="{FF2B5EF4-FFF2-40B4-BE49-F238E27FC236}">
-                <a16:creationId xmlns:a16="http://schemas.microsoft.com/office/drawing/2014/main" id="{EE2D32C6-A607-4D34-867C-68D3B39F0838}"/>
+                <a16:creationId xmlns:a16="http://schemas.microsoft.com/office/drawing/2014/main" id="{8E1117E8-3B0B-4839-BFC9-983FE7E5A829}"/>
               </a:ext>
             </a:extLst>
           </p:cNvPr>
@@ -7407,7 +7648,7 @@
           <p:cNvPr id="16" name="">
             <a:extLst xmlns:a="http://schemas.openxmlformats.org/drawingml/2006/main">
               <a:ext uri="{FF2B5EF4-FFF2-40B4-BE49-F238E27FC236}">
-                <a16:creationId xmlns:a16="http://schemas.microsoft.com/office/drawing/2014/main" id="{05523683-50DF-449D-9F53-0AC2974F7FCF}"/>
+                <a16:creationId xmlns:a16="http://schemas.microsoft.com/office/drawing/2014/main" id="{D8629289-A485-4D97-B6EE-19207F99550C}"/>
               </a:ext>
             </a:extLst>
           </p:cNvPr>
@@ -7438,7 +7679,7 @@
           <p:cNvPr id="17" name="">
             <a:extLst xmlns:a="http://schemas.openxmlformats.org/drawingml/2006/main">
               <a:ext uri="{FF2B5EF4-FFF2-40B4-BE49-F238E27FC236}">
-                <a16:creationId xmlns:a16="http://schemas.microsoft.com/office/drawing/2014/main" id="{E0FD9199-8A73-4546-AA74-B2A7A47D87B2}"/>
+                <a16:creationId xmlns:a16="http://schemas.microsoft.com/office/drawing/2014/main" id="{6EFDAE9A-E5D4-4354-805F-E861FA7B7223}"/>
               </a:ext>
             </a:extLst>
           </p:cNvPr>
@@ -7488,7 +7729,7 @@
           <p:cNvPr id="18" name="">
             <a:extLst xmlns:a="http://schemas.openxmlformats.org/drawingml/2006/main">
               <a:ext uri="{FF2B5EF4-FFF2-40B4-BE49-F238E27FC236}">
-                <a16:creationId xmlns:a16="http://schemas.microsoft.com/office/drawing/2014/main" id="{08CB6CC5-A343-442B-920D-7CBE1ACE8216}"/>
+                <a16:creationId xmlns:a16="http://schemas.microsoft.com/office/drawing/2014/main" id="{B2152F5D-FE26-4A78-93A1-A2C7D60289E9}"/>
               </a:ext>
             </a:extLst>
           </p:cNvPr>
@@ -7538,7 +7779,7 @@
           <p:cNvPr id="19" name="">
             <a:extLst xmlns:a="http://schemas.openxmlformats.org/drawingml/2006/main">
               <a:ext uri="{FF2B5EF4-FFF2-40B4-BE49-F238E27FC236}">
-                <a16:creationId xmlns:a16="http://schemas.microsoft.com/office/drawing/2014/main" id="{B99F02D2-E180-4A51-A250-EA58C41E6327}"/>
+                <a16:creationId xmlns:a16="http://schemas.microsoft.com/office/drawing/2014/main" id="{8CE0A63C-0E06-486A-AB8D-B692AF11BFE5}"/>
               </a:ext>
             </a:extLst>
           </p:cNvPr>
@@ -7588,7 +7829,7 @@
           <p:cNvPr id="20" name="">
             <a:extLst xmlns:a="http://schemas.openxmlformats.org/drawingml/2006/main">
               <a:ext uri="{FF2B5EF4-FFF2-40B4-BE49-F238E27FC236}">
-                <a16:creationId xmlns:a16="http://schemas.microsoft.com/office/drawing/2014/main" id="{C8200ADE-4408-4B0A-B9A3-64025057C727}"/>
+                <a16:creationId xmlns:a16="http://schemas.microsoft.com/office/drawing/2014/main" id="{7984AB67-C415-4E24-BD35-78112A32D027}"/>
               </a:ext>
             </a:extLst>
           </p:cNvPr>
@@ -7619,7 +7860,7 @@
           <p:cNvPr id="21" name="">
             <a:extLst xmlns:a="http://schemas.openxmlformats.org/drawingml/2006/main">
               <a:ext uri="{FF2B5EF4-FFF2-40B4-BE49-F238E27FC236}">
-                <a16:creationId xmlns:a16="http://schemas.microsoft.com/office/drawing/2014/main" id="{AB81DB35-BE33-4BAA-B44D-9A4FFA1E7511}"/>
+                <a16:creationId xmlns:a16="http://schemas.microsoft.com/office/drawing/2014/main" id="{CCF30C90-B9CF-4884-9766-3663C9D992BE}"/>
               </a:ext>
             </a:extLst>
           </p:cNvPr>
@@ -7669,7 +7910,7 @@
           <p:cNvPr id="22" name="">
             <a:extLst xmlns:a="http://schemas.openxmlformats.org/drawingml/2006/main">
               <a:ext uri="{FF2B5EF4-FFF2-40B4-BE49-F238E27FC236}">
-                <a16:creationId xmlns:a16="http://schemas.microsoft.com/office/drawing/2014/main" id="{FB13408D-9C58-4CC5-888B-9D981B3EF778}"/>
+                <a16:creationId xmlns:a16="http://schemas.microsoft.com/office/drawing/2014/main" id="{81DEB01B-E6FF-414F-8487-411C8D4B7135}"/>
               </a:ext>
             </a:extLst>
           </p:cNvPr>
@@ -7719,7 +7960,7 @@
           <p:cNvPr id="23" name="">
             <a:extLst xmlns:a="http://schemas.openxmlformats.org/drawingml/2006/main">
               <a:ext uri="{FF2B5EF4-FFF2-40B4-BE49-F238E27FC236}">
-                <a16:creationId xmlns:a16="http://schemas.microsoft.com/office/drawing/2014/main" id="{3414BF85-A048-4FB1-869D-D29A7A43B76A}"/>
+                <a16:creationId xmlns:a16="http://schemas.microsoft.com/office/drawing/2014/main" id="{47F86FB5-EAD1-4BB6-869C-BE34FBF1972E}"/>
               </a:ext>
             </a:extLst>
           </p:cNvPr>
@@ -7769,7 +8010,7 @@
           <p:cNvPr id="24" name="">
             <a:extLst xmlns:a="http://schemas.openxmlformats.org/drawingml/2006/main">
               <a:ext uri="{FF2B5EF4-FFF2-40B4-BE49-F238E27FC236}">
-                <a16:creationId xmlns:a16="http://schemas.microsoft.com/office/drawing/2014/main" id="{87D0596C-B3F8-4B86-B230-A7B4F4C7AE8E}"/>
+                <a16:creationId xmlns:a16="http://schemas.microsoft.com/office/drawing/2014/main" id="{496A3353-8AB7-4B88-9135-2E7B3E35D662}"/>
               </a:ext>
             </a:extLst>
           </p:cNvPr>
@@ -7800,7 +8041,7 @@
           <p:cNvPr id="25" name="">
             <a:extLst xmlns:a="http://schemas.openxmlformats.org/drawingml/2006/main">
               <a:ext uri="{FF2B5EF4-FFF2-40B4-BE49-F238E27FC236}">
-                <a16:creationId xmlns:a16="http://schemas.microsoft.com/office/drawing/2014/main" id="{C6682827-27E7-43C0-AFA3-BE497243452C}"/>
+                <a16:creationId xmlns:a16="http://schemas.microsoft.com/office/drawing/2014/main" id="{B006009F-078C-4E88-BCC3-C1514C940648}"/>
               </a:ext>
             </a:extLst>
           </p:cNvPr>
@@ -7850,7 +8091,7 @@
           <p:cNvPr id="26" name="">
             <a:extLst xmlns:a="http://schemas.openxmlformats.org/drawingml/2006/main">
               <a:ext uri="{FF2B5EF4-FFF2-40B4-BE49-F238E27FC236}">
-                <a16:creationId xmlns:a16="http://schemas.microsoft.com/office/drawing/2014/main" id="{A8B7C5F1-F862-4EB0-9707-4743BE81D1F3}"/>
+                <a16:creationId xmlns:a16="http://schemas.microsoft.com/office/drawing/2014/main" id="{1EF7B33F-A39F-4E0C-92FD-125D8A57CED1}"/>
               </a:ext>
             </a:extLst>
           </p:cNvPr>
@@ -7900,7 +8141,7 @@
           <p:cNvPr id="27" name="">
             <a:extLst xmlns:a="http://schemas.openxmlformats.org/drawingml/2006/main">
               <a:ext uri="{FF2B5EF4-FFF2-40B4-BE49-F238E27FC236}">
-                <a16:creationId xmlns:a16="http://schemas.microsoft.com/office/drawing/2014/main" id="{C0D0586E-7EFF-4049-9244-6DE85C7688CB}"/>
+                <a16:creationId xmlns:a16="http://schemas.microsoft.com/office/drawing/2014/main" id="{24BC2A87-C8B9-4975-9CD4-836DEF2D99AE}"/>
               </a:ext>
             </a:extLst>
           </p:cNvPr>
@@ -7950,7 +8191,7 @@
           <p:cNvPr id="28" name="">
             <a:extLst xmlns:a="http://schemas.openxmlformats.org/drawingml/2006/main">
               <a:ext uri="{FF2B5EF4-FFF2-40B4-BE49-F238E27FC236}">
-                <a16:creationId xmlns:a16="http://schemas.microsoft.com/office/drawing/2014/main" id="{FA9EB0BA-C22C-4798-BF88-A833DB19445C}"/>
+                <a16:creationId xmlns:a16="http://schemas.microsoft.com/office/drawing/2014/main" id="{19CB0DC9-9C82-4718-922E-1B3EFF4F1B43}"/>
               </a:ext>
             </a:extLst>
           </p:cNvPr>
@@ -7981,7 +8222,7 @@
           <p:cNvPr id="29" name="">
             <a:extLst xmlns:a="http://schemas.openxmlformats.org/drawingml/2006/main">
               <a:ext uri="{FF2B5EF4-FFF2-40B4-BE49-F238E27FC236}">
-                <a16:creationId xmlns:a16="http://schemas.microsoft.com/office/drawing/2014/main" id="{60696100-194C-4367-850A-4943C3E0C728}"/>
+                <a16:creationId xmlns:a16="http://schemas.microsoft.com/office/drawing/2014/main" id="{1177DB08-2315-425E-8DE6-BEC9DA898FE7}"/>
               </a:ext>
             </a:extLst>
           </p:cNvPr>
@@ -8016,7 +8257,7 @@
           <p:cNvPr id="30" name="">
             <a:extLst xmlns:a="http://schemas.openxmlformats.org/drawingml/2006/main">
               <a:ext uri="{FF2B5EF4-FFF2-40B4-BE49-F238E27FC236}">
-                <a16:creationId xmlns:a16="http://schemas.microsoft.com/office/drawing/2014/main" id="{F12433B6-BD2A-4424-B620-A4761B878E25}"/>
+                <a16:creationId xmlns:a16="http://schemas.microsoft.com/office/drawing/2014/main" id="{0A265FEC-707E-4569-AE68-8EC680629154}"/>
               </a:ext>
             </a:extLst>
           </p:cNvPr>
@@ -8051,7 +8292,7 @@
           <p:cNvPr id="31" name="">
             <a:extLst xmlns:a="http://schemas.openxmlformats.org/drawingml/2006/main">
               <a:ext uri="{FF2B5EF4-FFF2-40B4-BE49-F238E27FC236}">
-                <a16:creationId xmlns:a16="http://schemas.microsoft.com/office/drawing/2014/main" id="{B221EDC2-2996-4CB6-ABA0-7980A27F62B4}"/>
+                <a16:creationId xmlns:a16="http://schemas.microsoft.com/office/drawing/2014/main" id="{B753128A-E0A6-4D5D-AE3F-CE7533C33E65}"/>
               </a:ext>
             </a:extLst>
           </p:cNvPr>
@@ -8101,7 +8342,7 @@
           <p:cNvPr id="32" name="">
             <a:extLst xmlns:a="http://schemas.openxmlformats.org/drawingml/2006/main">
               <a:ext uri="{FF2B5EF4-FFF2-40B4-BE49-F238E27FC236}">
-                <a16:creationId xmlns:a16="http://schemas.microsoft.com/office/drawing/2014/main" id="{7957760A-1EE6-43FD-947F-44988EE4ED73}"/>
+                <a16:creationId xmlns:a16="http://schemas.microsoft.com/office/drawing/2014/main" id="{356B1403-E9A7-4FA9-BFCE-14296DC971D6}"/>
               </a:ext>
             </a:extLst>
           </p:cNvPr>
@@ -8151,7 +8392,7 @@
           <p:cNvPr id="33" name="">
             <a:extLst xmlns:a="http://schemas.openxmlformats.org/drawingml/2006/main">
               <a:ext uri="{FF2B5EF4-FFF2-40B4-BE49-F238E27FC236}">
-                <a16:creationId xmlns:a16="http://schemas.microsoft.com/office/drawing/2014/main" id="{4DAB63A6-E77A-4903-ADF7-049857A80406}"/>
+                <a16:creationId xmlns:a16="http://schemas.microsoft.com/office/drawing/2014/main" id="{F0A5D704-9272-46AF-8EB7-C27A53F3BAB0}"/>
               </a:ext>
             </a:extLst>
           </p:cNvPr>
@@ -8182,7 +8423,7 @@
           <p:cNvPr id="34" name="source-13">
             <a:extLst xmlns:a="http://schemas.openxmlformats.org/drawingml/2006/main">
               <a:ext uri="{FF2B5EF4-FFF2-40B4-BE49-F238E27FC236}">
-                <a16:creationId xmlns:a16="http://schemas.microsoft.com/office/drawing/2014/main" id="{3CCEB834-A50B-40CA-9433-6BEAC2B1EE59}"/>
+                <a16:creationId xmlns:a16="http://schemas.microsoft.com/office/drawing/2014/main" id="{725E7AB9-4889-4872-8C53-79C55DCEF491}"/>
               </a:ext>
             </a:extLst>
           </p:cNvPr>
@@ -8232,7 +8473,7 @@
           <p:cNvPr id="35" name="page-13">
             <a:extLst xmlns:a="http://schemas.openxmlformats.org/drawingml/2006/main">
               <a:ext uri="{FF2B5EF4-FFF2-40B4-BE49-F238E27FC236}">
-                <a16:creationId xmlns:a16="http://schemas.microsoft.com/office/drawing/2014/main" id="{FC4B6520-2F70-4C5F-9F24-8B8C612639FB}"/>
+                <a16:creationId xmlns:a16="http://schemas.microsoft.com/office/drawing/2014/main" id="{A98E0FB1-2128-434C-A9ED-EDD83261C846}"/>
               </a:ext>
             </a:extLst>
           </p:cNvPr>
@@ -8280,7 +8521,7 @@
     </p:spTree>
     <p:extLst>
       <p:ext uri="{BB962C8B-B14F-4D97-AF65-F5344CB8AC3E}">
-        <p14:creationId xmlns:p14="http://schemas.microsoft.com/office/powerpoint/2010/main" val="1732580769"/>
+        <p14:creationId xmlns:p14="http://schemas.microsoft.com/office/powerpoint/2010/main" val="1740923909"/>
       </p:ext>
     </p:extLst>
   </p:cSld>
@@ -8311,7 +8552,7 @@
           <p:cNvPr id="31" name="kicker-14">
             <a:extLst xmlns:a="http://schemas.openxmlformats.org/drawingml/2006/main">
               <a:ext uri="{FF2B5EF4-FFF2-40B4-BE49-F238E27FC236}">
-                <a16:creationId xmlns:a16="http://schemas.microsoft.com/office/drawing/2014/main" id="{291F37A5-A7F3-4F96-8B12-0C61857D0F62}"/>
+                <a16:creationId xmlns:a16="http://schemas.microsoft.com/office/drawing/2014/main" id="{90D67FD6-7C22-4496-820C-9D101441F6C9}"/>
               </a:ext>
             </a:extLst>
           </p:cNvPr>
@@ -8361,7 +8602,7 @@
           <p:cNvPr id="2" name="title-14">
             <a:extLst xmlns:a="http://schemas.openxmlformats.org/drawingml/2006/main">
               <a:ext uri="{FF2B5EF4-FFF2-40B4-BE49-F238E27FC236}">
-                <a16:creationId xmlns:a16="http://schemas.microsoft.com/office/drawing/2014/main" id="{881D92EC-1E8F-40FF-BD7A-3E2379C50EF0}"/>
+                <a16:creationId xmlns:a16="http://schemas.microsoft.com/office/drawing/2014/main" id="{3F7CABC6-783A-4D4D-8E86-9EDEF2FEA466}"/>
               </a:ext>
             </a:extLst>
           </p:cNvPr>
@@ -8411,7 +8652,7 @@
           <p:cNvPr id="3" name="">
             <a:extLst xmlns:a="http://schemas.openxmlformats.org/drawingml/2006/main">
               <a:ext uri="{FF2B5EF4-FFF2-40B4-BE49-F238E27FC236}">
-                <a16:creationId xmlns:a16="http://schemas.microsoft.com/office/drawing/2014/main" id="{8361F6CD-A0D6-43AD-91B4-C5D5D21BCE27}"/>
+                <a16:creationId xmlns:a16="http://schemas.microsoft.com/office/drawing/2014/main" id="{432ABE0A-ABC8-4F99-B344-5275C60E3EAC}"/>
               </a:ext>
             </a:extLst>
           </p:cNvPr>
@@ -8442,7 +8683,7 @@
           <p:cNvPr id="4" name="">
             <a:extLst xmlns:a="http://schemas.openxmlformats.org/drawingml/2006/main">
               <a:ext uri="{FF2B5EF4-FFF2-40B4-BE49-F238E27FC236}">
-                <a16:creationId xmlns:a16="http://schemas.microsoft.com/office/drawing/2014/main" id="{976D247C-4563-4BF4-B71C-5D29073F1A33}"/>
+                <a16:creationId xmlns:a16="http://schemas.microsoft.com/office/drawing/2014/main" id="{E597357D-9B7F-405B-BA66-CB3CFB4D2FB1}"/>
               </a:ext>
             </a:extLst>
           </p:cNvPr>
@@ -8492,7 +8733,7 @@
           <p:cNvPr id="5" name="">
             <a:extLst xmlns:a="http://schemas.openxmlformats.org/drawingml/2006/main">
               <a:ext uri="{FF2B5EF4-FFF2-40B4-BE49-F238E27FC236}">
-                <a16:creationId xmlns:a16="http://schemas.microsoft.com/office/drawing/2014/main" id="{860873A5-4D48-4299-A820-E88C8DA78977}"/>
+                <a16:creationId xmlns:a16="http://schemas.microsoft.com/office/drawing/2014/main" id="{96E4D679-9253-445F-9A20-9CF23953E536}"/>
               </a:ext>
             </a:extLst>
           </p:cNvPr>
@@ -8542,7 +8783,7 @@
           <p:cNvPr id="6" name="">
             <a:extLst xmlns:a="http://schemas.openxmlformats.org/drawingml/2006/main">
               <a:ext uri="{FF2B5EF4-FFF2-40B4-BE49-F238E27FC236}">
-                <a16:creationId xmlns:a16="http://schemas.microsoft.com/office/drawing/2014/main" id="{C41BE78D-28BA-4D57-95CD-CB4F07409800}"/>
+                <a16:creationId xmlns:a16="http://schemas.microsoft.com/office/drawing/2014/main" id="{B5079DA5-24B1-43F8-9ED8-77E5439DADD9}"/>
               </a:ext>
             </a:extLst>
           </p:cNvPr>
@@ -8592,7 +8833,7 @@
           <p:cNvPr id="7" name="">
             <a:extLst xmlns:a="http://schemas.openxmlformats.org/drawingml/2006/main">
               <a:ext uri="{FF2B5EF4-FFF2-40B4-BE49-F238E27FC236}">
-                <a16:creationId xmlns:a16="http://schemas.microsoft.com/office/drawing/2014/main" id="{12B1AD68-8D83-4860-ABE3-A2EAF3399FB5}"/>
+                <a16:creationId xmlns:a16="http://schemas.microsoft.com/office/drawing/2014/main" id="{ED6D5DCD-3578-4FB8-AAF5-4AD843FC0300}"/>
               </a:ext>
             </a:extLst>
           </p:cNvPr>
@@ -8623,7 +8864,7 @@
           <p:cNvPr id="8" name="">
             <a:extLst xmlns:a="http://schemas.openxmlformats.org/drawingml/2006/main">
               <a:ext uri="{FF2B5EF4-FFF2-40B4-BE49-F238E27FC236}">
-                <a16:creationId xmlns:a16="http://schemas.microsoft.com/office/drawing/2014/main" id="{300701DE-9274-4211-A0D7-757BF368F84B}"/>
+                <a16:creationId xmlns:a16="http://schemas.microsoft.com/office/drawing/2014/main" id="{B9612770-CDB8-42F1-811D-FF6AA77A9CD0}"/>
               </a:ext>
             </a:extLst>
           </p:cNvPr>
@@ -8673,7 +8914,7 @@
           <p:cNvPr id="9" name="">
             <a:extLst xmlns:a="http://schemas.openxmlformats.org/drawingml/2006/main">
               <a:ext uri="{FF2B5EF4-FFF2-40B4-BE49-F238E27FC236}">
-                <a16:creationId xmlns:a16="http://schemas.microsoft.com/office/drawing/2014/main" id="{60CCBAA9-415C-45D4-AE38-3BD43215BEF3}"/>
+                <a16:creationId xmlns:a16="http://schemas.microsoft.com/office/drawing/2014/main" id="{EBE5E054-2586-4668-B38B-8C1363EA30F5}"/>
               </a:ext>
             </a:extLst>
           </p:cNvPr>
@@ -8723,7 +8964,7 @@
           <p:cNvPr id="10" name="">
             <a:extLst xmlns:a="http://schemas.openxmlformats.org/drawingml/2006/main">
               <a:ext uri="{FF2B5EF4-FFF2-40B4-BE49-F238E27FC236}">
-                <a16:creationId xmlns:a16="http://schemas.microsoft.com/office/drawing/2014/main" id="{2B0A2FA6-C146-4340-8173-CAA71B8270EE}"/>
+                <a16:creationId xmlns:a16="http://schemas.microsoft.com/office/drawing/2014/main" id="{04E856E9-F47F-4F8D-B860-4D0A4AF45C1B}"/>
               </a:ext>
             </a:extLst>
           </p:cNvPr>
@@ -8754,7 +8995,7 @@
           <p:cNvPr id="11" name="">
             <a:extLst xmlns:a="http://schemas.openxmlformats.org/drawingml/2006/main">
               <a:ext uri="{FF2B5EF4-FFF2-40B4-BE49-F238E27FC236}">
-                <a16:creationId xmlns:a16="http://schemas.microsoft.com/office/drawing/2014/main" id="{46FD06BF-67BC-408A-A9AB-CBF6F8CCBEEE}"/>
+                <a16:creationId xmlns:a16="http://schemas.microsoft.com/office/drawing/2014/main" id="{3A43B170-DB6D-4238-AB2D-F103E8555C36}"/>
               </a:ext>
             </a:extLst>
           </p:cNvPr>
@@ -8804,7 +9045,7 @@
           <p:cNvPr id="12" name="">
             <a:extLst xmlns:a="http://schemas.openxmlformats.org/drawingml/2006/main">
               <a:ext uri="{FF2B5EF4-FFF2-40B4-BE49-F238E27FC236}">
-                <a16:creationId xmlns:a16="http://schemas.microsoft.com/office/drawing/2014/main" id="{C3260796-715F-45F7-8560-F7421A0FA1EE}"/>
+                <a16:creationId xmlns:a16="http://schemas.microsoft.com/office/drawing/2014/main" id="{F23404EE-AD2B-4ACF-811F-89F5C2E206F9}"/>
               </a:ext>
             </a:extLst>
           </p:cNvPr>
@@ -8854,7 +9095,7 @@
           <p:cNvPr id="13" name="">
             <a:extLst xmlns:a="http://schemas.openxmlformats.org/drawingml/2006/main">
               <a:ext uri="{FF2B5EF4-FFF2-40B4-BE49-F238E27FC236}">
-                <a16:creationId xmlns:a16="http://schemas.microsoft.com/office/drawing/2014/main" id="{6F989246-0DAE-4B71-A25B-96F797CAFC27}"/>
+                <a16:creationId xmlns:a16="http://schemas.microsoft.com/office/drawing/2014/main" id="{005A0F57-D679-4AD9-92EF-F4256278169C}"/>
               </a:ext>
             </a:extLst>
           </p:cNvPr>
@@ -8885,7 +9126,7 @@
           <p:cNvPr id="14" name="">
             <a:extLst xmlns:a="http://schemas.openxmlformats.org/drawingml/2006/main">
               <a:ext uri="{FF2B5EF4-FFF2-40B4-BE49-F238E27FC236}">
-                <a16:creationId xmlns:a16="http://schemas.microsoft.com/office/drawing/2014/main" id="{9C8E8EA2-C622-424E-B093-912F24874840}"/>
+                <a16:creationId xmlns:a16="http://schemas.microsoft.com/office/drawing/2014/main" id="{8D4F667B-438C-4F6D-AF65-29326ED76263}"/>
               </a:ext>
             </a:extLst>
           </p:cNvPr>
@@ -8935,7 +9176,7 @@
           <p:cNvPr id="15" name="">
             <a:extLst xmlns:a="http://schemas.openxmlformats.org/drawingml/2006/main">
               <a:ext uri="{FF2B5EF4-FFF2-40B4-BE49-F238E27FC236}">
-                <a16:creationId xmlns:a16="http://schemas.microsoft.com/office/drawing/2014/main" id="{4A194022-2026-4455-98CC-40F5597BA399}"/>
+                <a16:creationId xmlns:a16="http://schemas.microsoft.com/office/drawing/2014/main" id="{C0209546-552E-4845-8565-EDA4103256F7}"/>
               </a:ext>
             </a:extLst>
           </p:cNvPr>
@@ -8985,7 +9226,7 @@
           <p:cNvPr id="16" name="">
             <a:extLst xmlns:a="http://schemas.openxmlformats.org/drawingml/2006/main">
               <a:ext uri="{FF2B5EF4-FFF2-40B4-BE49-F238E27FC236}">
-                <a16:creationId xmlns:a16="http://schemas.microsoft.com/office/drawing/2014/main" id="{F34106F7-B5C4-427D-94FA-B5141DD70FA5}"/>
+                <a16:creationId xmlns:a16="http://schemas.microsoft.com/office/drawing/2014/main" id="{AAF5F9AD-8B8F-4B53-B8E6-FB097C3AA433}"/>
               </a:ext>
             </a:extLst>
           </p:cNvPr>
@@ -9016,7 +9257,7 @@
           <p:cNvPr id="17" name="">
             <a:extLst xmlns:a="http://schemas.openxmlformats.org/drawingml/2006/main">
               <a:ext uri="{FF2B5EF4-FFF2-40B4-BE49-F238E27FC236}">
-                <a16:creationId xmlns:a16="http://schemas.microsoft.com/office/drawing/2014/main" id="{C32C9E7C-AE78-4E9B-A352-672BB11476A4}"/>
+                <a16:creationId xmlns:a16="http://schemas.microsoft.com/office/drawing/2014/main" id="{0E4359D6-330E-4A32-AEA8-B5A2CAB1C605}"/>
               </a:ext>
             </a:extLst>
           </p:cNvPr>
@@ -9049,7 +9290,7 @@
           <p:cNvPr id="18" name="">
             <a:extLst xmlns:a="http://schemas.openxmlformats.org/drawingml/2006/main">
               <a:ext uri="{FF2B5EF4-FFF2-40B4-BE49-F238E27FC236}">
-                <a16:creationId xmlns:a16="http://schemas.microsoft.com/office/drawing/2014/main" id="{F3111735-34F1-46AA-B2F8-B54925D163A4}"/>
+                <a16:creationId xmlns:a16="http://schemas.microsoft.com/office/drawing/2014/main" id="{AD8A8FEC-6CCA-49D6-956B-FB9BCFDB7411}"/>
               </a:ext>
             </a:extLst>
           </p:cNvPr>
@@ -9082,7 +9323,7 @@
           <p:cNvPr id="19" name="">
             <a:extLst xmlns:a="http://schemas.openxmlformats.org/drawingml/2006/main">
               <a:ext uri="{FF2B5EF4-FFF2-40B4-BE49-F238E27FC236}">
-                <a16:creationId xmlns:a16="http://schemas.microsoft.com/office/drawing/2014/main" id="{6EF31DA6-AEC5-4FC4-A72C-D92AFC79A903}"/>
+                <a16:creationId xmlns:a16="http://schemas.microsoft.com/office/drawing/2014/main" id="{AFD15C9F-E211-437F-A0C0-1E921F09EF0E}"/>
               </a:ext>
             </a:extLst>
           </p:cNvPr>
@@ -9123,7 +9364,7 @@
           <p:cNvPr id="20" name="">
             <a:extLst xmlns:a="http://schemas.openxmlformats.org/drawingml/2006/main">
               <a:ext uri="{FF2B5EF4-FFF2-40B4-BE49-F238E27FC236}">
-                <a16:creationId xmlns:a16="http://schemas.microsoft.com/office/drawing/2014/main" id="{A70B7AD4-0D79-4646-8549-E10A6528DC36}"/>
+                <a16:creationId xmlns:a16="http://schemas.microsoft.com/office/drawing/2014/main" id="{E6E4DE71-FF7C-4739-B015-DA736528DD65}"/>
               </a:ext>
             </a:extLst>
           </p:cNvPr>
@@ -9173,7 +9414,7 @@
           <p:cNvPr id="21" name="">
             <a:extLst xmlns:a="http://schemas.openxmlformats.org/drawingml/2006/main">
               <a:ext uri="{FF2B5EF4-FFF2-40B4-BE49-F238E27FC236}">
-                <a16:creationId xmlns:a16="http://schemas.microsoft.com/office/drawing/2014/main" id="{5295740A-0B37-4FA4-808A-EFD5A4992C06}"/>
+                <a16:creationId xmlns:a16="http://schemas.microsoft.com/office/drawing/2014/main" id="{718D6CCF-2A9A-4513-9513-1B1E1E7202CB}"/>
               </a:ext>
             </a:extLst>
           </p:cNvPr>
@@ -9257,7 +9498,7 @@
           <p:cNvPr id="22" name="">
             <a:extLst xmlns:a="http://schemas.openxmlformats.org/drawingml/2006/main">
               <a:ext uri="{FF2B5EF4-FFF2-40B4-BE49-F238E27FC236}">
-                <a16:creationId xmlns:a16="http://schemas.microsoft.com/office/drawing/2014/main" id="{238A1720-0DFE-4F48-ACDC-C5887BBD0D82}"/>
+                <a16:creationId xmlns:a16="http://schemas.microsoft.com/office/drawing/2014/main" id="{B8997795-4E3C-4A0C-9C26-478DF0D2BCF6}"/>
               </a:ext>
             </a:extLst>
           </p:cNvPr>
@@ -9298,7 +9539,7 @@
           <p:cNvPr id="23" name="">
             <a:extLst xmlns:a="http://schemas.openxmlformats.org/drawingml/2006/main">
               <a:ext uri="{FF2B5EF4-FFF2-40B4-BE49-F238E27FC236}">
-                <a16:creationId xmlns:a16="http://schemas.microsoft.com/office/drawing/2014/main" id="{37D67014-029B-4811-9C74-339A1A83D9C7}"/>
+                <a16:creationId xmlns:a16="http://schemas.microsoft.com/office/drawing/2014/main" id="{BE2A5FD6-E187-4422-8D4E-F51C344F3347}"/>
               </a:ext>
             </a:extLst>
           </p:cNvPr>
@@ -9348,7 +9589,7 @@
           <p:cNvPr id="24" name="">
             <a:extLst xmlns:a="http://schemas.openxmlformats.org/drawingml/2006/main">
               <a:ext uri="{FF2B5EF4-FFF2-40B4-BE49-F238E27FC236}">
-                <a16:creationId xmlns:a16="http://schemas.microsoft.com/office/drawing/2014/main" id="{E6659E36-3C31-465E-8D4D-D6488D9B58DF}"/>
+                <a16:creationId xmlns:a16="http://schemas.microsoft.com/office/drawing/2014/main" id="{E8282D56-791D-4176-8B23-062C8FB8E2B6}"/>
               </a:ext>
             </a:extLst>
           </p:cNvPr>
@@ -9432,7 +9673,7 @@
           <p:cNvPr id="25" name="">
             <a:extLst xmlns:a="http://schemas.openxmlformats.org/drawingml/2006/main">
               <a:ext uri="{FF2B5EF4-FFF2-40B4-BE49-F238E27FC236}">
-                <a16:creationId xmlns:a16="http://schemas.microsoft.com/office/drawing/2014/main" id="{E68070FC-7DEB-4604-8665-4F881B94EC88}"/>
+                <a16:creationId xmlns:a16="http://schemas.microsoft.com/office/drawing/2014/main" id="{2C4AFD94-B50B-43F2-B81C-FE9CD5CA5692}"/>
               </a:ext>
             </a:extLst>
           </p:cNvPr>
@@ -9467,7 +9708,7 @@
           <p:cNvPr id="26" name="">
             <a:extLst xmlns:a="http://schemas.openxmlformats.org/drawingml/2006/main">
               <a:ext uri="{FF2B5EF4-FFF2-40B4-BE49-F238E27FC236}">
-                <a16:creationId xmlns:a16="http://schemas.microsoft.com/office/drawing/2014/main" id="{C7CFCF02-DC8A-4748-9F17-EB336B6709D6}"/>
+                <a16:creationId xmlns:a16="http://schemas.microsoft.com/office/drawing/2014/main" id="{37823AFC-E6FF-4F38-9421-F867252AD7BE}"/>
               </a:ext>
             </a:extLst>
           </p:cNvPr>
@@ -9517,7 +9758,7 @@
           <p:cNvPr id="27" name="">
             <a:extLst xmlns:a="http://schemas.openxmlformats.org/drawingml/2006/main">
               <a:ext uri="{FF2B5EF4-FFF2-40B4-BE49-F238E27FC236}">
-                <a16:creationId xmlns:a16="http://schemas.microsoft.com/office/drawing/2014/main" id="{9A530895-0EA7-48A6-8751-E442CEC58C00}"/>
+                <a16:creationId xmlns:a16="http://schemas.microsoft.com/office/drawing/2014/main" id="{DC09F3D9-CD25-4B3F-82D6-063D2462680B}"/>
               </a:ext>
             </a:extLst>
           </p:cNvPr>
@@ -9567,7 +9808,7 @@
           <p:cNvPr id="28" name="">
             <a:extLst xmlns:a="http://schemas.openxmlformats.org/drawingml/2006/main">
               <a:ext uri="{FF2B5EF4-FFF2-40B4-BE49-F238E27FC236}">
-                <a16:creationId xmlns:a16="http://schemas.microsoft.com/office/drawing/2014/main" id="{4EDC1A55-600E-4C4E-9E72-2AED995C3480}"/>
+                <a16:creationId xmlns:a16="http://schemas.microsoft.com/office/drawing/2014/main" id="{406A6216-4B65-4017-A55A-76AF363FD0FB}"/>
               </a:ext>
             </a:extLst>
           </p:cNvPr>
@@ -9598,7 +9839,7 @@
           <p:cNvPr id="29" name="source-14">
             <a:extLst xmlns:a="http://schemas.openxmlformats.org/drawingml/2006/main">
               <a:ext uri="{FF2B5EF4-FFF2-40B4-BE49-F238E27FC236}">
-                <a16:creationId xmlns:a16="http://schemas.microsoft.com/office/drawing/2014/main" id="{2C7A9566-6CBA-49E2-BDE1-33B9C5CAB117}"/>
+                <a16:creationId xmlns:a16="http://schemas.microsoft.com/office/drawing/2014/main" id="{84FD9FD3-DB92-4712-800C-138C4A191EC6}"/>
               </a:ext>
             </a:extLst>
           </p:cNvPr>
@@ -9648,7 +9889,7 @@
           <p:cNvPr id="30" name="page-14">
             <a:extLst xmlns:a="http://schemas.openxmlformats.org/drawingml/2006/main">
               <a:ext uri="{FF2B5EF4-FFF2-40B4-BE49-F238E27FC236}">
-                <a16:creationId xmlns:a16="http://schemas.microsoft.com/office/drawing/2014/main" id="{BD383E7B-AA9A-4F26-A121-E5444FFC6215}"/>
+                <a16:creationId xmlns:a16="http://schemas.microsoft.com/office/drawing/2014/main" id="{72F04BA8-7A6A-4771-9748-FB94CFC71CCF}"/>
               </a:ext>
             </a:extLst>
           </p:cNvPr>
@@ -9696,7 +9937,7 @@
     </p:spTree>
     <p:extLst>
       <p:ext uri="{BB962C8B-B14F-4D97-AF65-F5344CB8AC3E}">
-        <p14:creationId xmlns:p14="http://schemas.microsoft.com/office/powerpoint/2010/main" val="682103919"/>
+        <p14:creationId xmlns:p14="http://schemas.microsoft.com/office/powerpoint/2010/main" val="778424743"/>
       </p:ext>
     </p:extLst>
   </p:cSld>
@@ -9727,7 +9968,7 @@
           <p:cNvPr id="17" name="">
             <a:extLst xmlns:a="http://schemas.openxmlformats.org/drawingml/2006/main">
               <a:ext uri="{FF2B5EF4-FFF2-40B4-BE49-F238E27FC236}">
-                <a16:creationId xmlns:a16="http://schemas.microsoft.com/office/drawing/2014/main" id="{260B7B61-BFCB-4F79-81F1-EAB427A82326}"/>
+                <a16:creationId xmlns:a16="http://schemas.microsoft.com/office/drawing/2014/main" id="{3D2B50AA-DFFC-4F87-8BA8-3350B07A4ACD}"/>
               </a:ext>
             </a:extLst>
           </p:cNvPr>
@@ -9777,7 +10018,7 @@
           <p:cNvPr id="2" name="">
             <a:extLst xmlns:a="http://schemas.openxmlformats.org/drawingml/2006/main">
               <a:ext uri="{FF2B5EF4-FFF2-40B4-BE49-F238E27FC236}">
-                <a16:creationId xmlns:a16="http://schemas.microsoft.com/office/drawing/2014/main" id="{034B86AB-471A-4EB7-BCC8-3BB9D27CC1F4}"/>
+                <a16:creationId xmlns:a16="http://schemas.microsoft.com/office/drawing/2014/main" id="{51C7C5F4-7E5B-4620-94EB-DE657B9A376A}"/>
               </a:ext>
             </a:extLst>
           </p:cNvPr>
@@ -9789,7 +10030,7 @@
         <p:spPr>
           <a:xfrm xmlns:a="http://schemas.openxmlformats.org/drawingml/2006/main">
             <a:off x="685800" y="838200"/>
-            <a:ext cx="7810500" cy="1104900"/>
+            <a:ext cx="9048750" cy="1104900"/>
           </a:xfrm>
           <a:prstGeom xmlns:a="http://schemas.openxmlformats.org/drawingml/2006/main" prst="rect">
             <a:avLst/>
@@ -9805,36 +10046,36 @@
           <a:lstStyle xmlns:a="http://schemas.openxmlformats.org/drawingml/2006/main"/>
           <a:p xmlns:a="http://schemas.openxmlformats.org/drawingml/2006/main">
             <a:pPr algn="l">
-              <a:defRPr sz="3600" b="1">
+              <a:defRPr sz="3300" b="1">
                 <a:solidFill>
                   <a:srgbClr val="0F172A"/>
                 </a:solidFill>
               </a:defRPr>
             </a:pPr>
             <a:r>
-              <a:rPr sz="3600" b="1">
+              <a:rPr sz="3300" b="1">
                 <a:solidFill>
                   <a:srgbClr val="0F172A"/>
                 </a:solidFill>
               </a:rPr>
-              <a:t>Be exact when possible.</a:t>
+              <a:t>What the experiments support—</a:t>
             </a:r>
           </a:p>
           <a:p xmlns:a="http://schemas.openxmlformats.org/drawingml/2006/main">
             <a:pPr algn="l">
-              <a:defRPr sz="3600" b="1">
+              <a:defRPr sz="3300" b="1">
                 <a:solidFill>
                   <a:srgbClr val="0F172A"/>
                 </a:solidFill>
               </a:defRPr>
             </a:pPr>
             <a:r>
-              <a:rPr sz="3600" b="1">
+              <a:rPr sz="3300" b="1">
                 <a:solidFill>
                   <a:srgbClr val="0F172A"/>
                 </a:solidFill>
               </a:rPr>
-              <a:t>Abstain when necessary.</a:t>
+              <a:t>and what remains open</a:t>
             </a:r>
           </a:p>
         </p:txBody>
@@ -9844,19 +10085,60 @@
           <p:cNvPr id="3" name="">
             <a:extLst xmlns:a="http://schemas.openxmlformats.org/drawingml/2006/main">
               <a:ext uri="{FF2B5EF4-FFF2-40B4-BE49-F238E27FC236}">
-                <a16:creationId xmlns:a16="http://schemas.microsoft.com/office/drawing/2014/main" id="{58E672CE-57FB-4529-9B6E-9CCA1B9E42CC}"/>
-              </a:ext>
-            </a:extLst>
-          </p:cNvPr>
-          <p:cNvSpPr>
-            <a:spLocks xmlns:a="http://schemas.openxmlformats.org/drawingml/2006/main" noGrp="1"/>
-          </p:cNvSpPr>
-          <p:nvPr/>
-        </p:nvSpPr>
-        <p:spPr>
-          <a:xfrm xmlns:a="http://schemas.openxmlformats.org/drawingml/2006/main">
-            <a:off x="685800" y="2667000"/>
-            <a:ext cx="571500" cy="304800"/>
+                <a16:creationId xmlns:a16="http://schemas.microsoft.com/office/drawing/2014/main" id="{43EBAC11-86C0-45BC-958D-B5DAD62456DF}"/>
+              </a:ext>
+            </a:extLst>
+          </p:cNvPr>
+          <p:cNvSpPr>
+            <a:spLocks xmlns:a="http://schemas.openxmlformats.org/drawingml/2006/main" noGrp="1"/>
+          </p:cNvSpPr>
+          <p:nvPr/>
+        </p:nvSpPr>
+        <p:spPr>
+          <a:xfrm xmlns:a="http://schemas.openxmlformats.org/drawingml/2006/main">
+            <a:off x="685800" y="2647950"/>
+            <a:ext cx="3219450" cy="2114550"/>
+          </a:xfrm>
+          <a:prstGeom xmlns:a="http://schemas.openxmlformats.org/drawingml/2006/main" prst="roundRect">
+            <a:avLst>
+              <a:gd name="adj" fmla="val 7207"/>
+            </a:avLst>
+          </a:prstGeom>
+          <a:solidFill xmlns:a="http://schemas.openxmlformats.org/drawingml/2006/main">
+            <a:srgbClr val="FFFFFF"/>
+          </a:solidFill>
+          <a:ln xmlns:a="http://schemas.openxmlformats.org/drawingml/2006/main" w="9525">
+            <a:solidFill>
+              <a:srgbClr val="2A8C82"/>
+            </a:solidFill>
+            <a:prstDash val="solid"/>
+          </a:ln>
+        </p:spPr>
+        <p:style>
+          <a:lnRef xmlns:a="http://schemas.openxmlformats.org/drawingml/2006/main" idx="0"/>
+          <a:fillRef xmlns:a="http://schemas.openxmlformats.org/drawingml/2006/main" idx="0"/>
+          <a:effectRef xmlns:a="http://schemas.openxmlformats.org/drawingml/2006/main" idx="4"/>
+          <a:fontRef xmlns:a="http://schemas.openxmlformats.org/drawingml/2006/main" idx="major"/>
+        </p:style>
+      </p:sp>
+      <p:sp>
+        <p:nvSpPr>
+          <p:cNvPr id="4" name="">
+            <a:extLst xmlns:a="http://schemas.openxmlformats.org/drawingml/2006/main">
+              <a:ext uri="{FF2B5EF4-FFF2-40B4-BE49-F238E27FC236}">
+                <a16:creationId xmlns:a16="http://schemas.microsoft.com/office/drawing/2014/main" id="{CEE4A96C-DBBE-4B8F-902B-59972D8097CC}"/>
+              </a:ext>
+            </a:extLst>
+          </p:cNvPr>
+          <p:cNvSpPr>
+            <a:spLocks xmlns:a="http://schemas.openxmlformats.org/drawingml/2006/main" noGrp="1"/>
+          </p:cNvSpPr>
+          <p:nvPr/>
+        </p:nvSpPr>
+        <p:spPr>
+          <a:xfrm xmlns:a="http://schemas.openxmlformats.org/drawingml/2006/main">
+            <a:off x="914400" y="2876550"/>
+            <a:ext cx="2762250" cy="285750"/>
           </a:xfrm>
           <a:prstGeom xmlns:a="http://schemas.openxmlformats.org/drawingml/2006/main" prst="rect">
             <a:avLst/>
@@ -9872,91 +10154,575 @@
           <a:lstStyle xmlns:a="http://schemas.openxmlformats.org/drawingml/2006/main"/>
           <a:p xmlns:a="http://schemas.openxmlformats.org/drawingml/2006/main">
             <a:pPr algn="l">
+              <a:defRPr sz="1650" b="1">
+                <a:solidFill>
+                  <a:srgbClr val="2A8C82"/>
+                </a:solidFill>
+              </a:defRPr>
+            </a:pPr>
+            <a:r>
+              <a:rPr sz="1650" b="1">
+                <a:solidFill>
+                  <a:srgbClr val="2A8C82"/>
+                </a:solidFill>
+              </a:rPr>
+              <a:t>Supported</a:t>
+            </a:r>
+          </a:p>
+        </p:txBody>
+      </p:sp>
+      <p:sp>
+        <p:nvSpPr>
+          <p:cNvPr id="5" name="">
+            <a:extLst xmlns:a="http://schemas.openxmlformats.org/drawingml/2006/main">
+              <a:ext uri="{FF2B5EF4-FFF2-40B4-BE49-F238E27FC236}">
+                <a16:creationId xmlns:a16="http://schemas.microsoft.com/office/drawing/2014/main" id="{1C74FDB9-754D-4D83-B38D-038B8DBBCDD8}"/>
+              </a:ext>
+            </a:extLst>
+          </p:cNvPr>
+          <p:cNvSpPr>
+            <a:spLocks xmlns:a="http://schemas.openxmlformats.org/drawingml/2006/main" noGrp="1"/>
+          </p:cNvSpPr>
+          <p:nvPr/>
+        </p:nvSpPr>
+        <p:spPr>
+          <a:xfrm xmlns:a="http://schemas.openxmlformats.org/drawingml/2006/main">
+            <a:off x="914400" y="3371850"/>
+            <a:ext cx="2762250" cy="1200150"/>
+          </a:xfrm>
+          <a:prstGeom xmlns:a="http://schemas.openxmlformats.org/drawingml/2006/main" prst="rect">
+            <a:avLst/>
+          </a:prstGeom>
+          <a:noFill xmlns:a="http://schemas.openxmlformats.org/drawingml/2006/main"/>
+          <a:ln xmlns:a="http://schemas.openxmlformats.org/drawingml/2006/main" w="0">
+            <a:noFill/>
+            <a:prstDash val="solid"/>
+          </a:ln>
+        </p:spPr>
+        <p:txBody>
+          <a:bodyPr xmlns:a="http://schemas.openxmlformats.org/drawingml/2006/main"/>
+          <a:lstStyle xmlns:a="http://schemas.openxmlformats.org/drawingml/2006/main"/>
+          <a:p xmlns:a="http://schemas.openxmlformats.org/drawingml/2006/main">
+            <a:pPr algn="l">
+              <a:defRPr sz="1275" b="0">
+                <a:solidFill>
+                  <a:srgbClr val="0F172A"/>
+                </a:solidFill>
+              </a:defRPr>
+            </a:pPr>
+            <a:r>
+              <a:rPr sz="1275" b="0">
+                <a:solidFill>
+                  <a:srgbClr val="0F172A"/>
+                </a:solidFill>
+              </a:rPr>
+              <a:t>Task families need separate policies.</a:t>
+            </a:r>
+          </a:p>
+          <a:p xmlns:a="http://schemas.openxmlformats.org/drawingml/2006/main">
+            <a:pPr algn="l">
+              <a:defRPr sz="1275" b="0">
+                <a:solidFill>
+                  <a:srgbClr val="0F172A"/>
+                </a:solidFill>
+              </a:defRPr>
+            </a:pPr>
+            <a:r>
+              <a:rPr sz="1275" b="0">
+                <a:solidFill>
+                  <a:srgbClr val="0F172A"/>
+                </a:solidFill>
+              </a:rPr>
+              <a:t>Predicate alignment prevents relation swaps.</a:t>
+            </a:r>
+          </a:p>
+          <a:p xmlns:a="http://schemas.openxmlformats.org/drawingml/2006/main">
+            <a:pPr algn="l">
+              <a:defRPr sz="1275" b="0">
+                <a:solidFill>
+                  <a:srgbClr val="0F172A"/>
+                </a:solidFill>
+              </a:defRPr>
+            </a:pPr>
+            <a:r>
+              <a:rPr sz="1275" b="0">
+                <a:solidFill>
+                  <a:srgbClr val="0F172A"/>
+                </a:solidFill>
+              </a:rPr>
+              <a:t>Abstention protected runtime under shift.</a:t>
+            </a:r>
+          </a:p>
+        </p:txBody>
+      </p:sp>
+      <p:sp>
+        <p:nvSpPr>
+          <p:cNvPr id="6" name="">
+            <a:extLst xmlns:a="http://schemas.openxmlformats.org/drawingml/2006/main">
+              <a:ext uri="{FF2B5EF4-FFF2-40B4-BE49-F238E27FC236}">
+                <a16:creationId xmlns:a16="http://schemas.microsoft.com/office/drawing/2014/main" id="{E5723BA6-41F3-49CE-AC27-3992D8B30D10}"/>
+              </a:ext>
+            </a:extLst>
+          </p:cNvPr>
+          <p:cNvSpPr>
+            <a:spLocks xmlns:a="http://schemas.openxmlformats.org/drawingml/2006/main" noGrp="1"/>
+          </p:cNvSpPr>
+          <p:nvPr/>
+        </p:nvSpPr>
+        <p:spPr>
+          <a:xfrm xmlns:a="http://schemas.openxmlformats.org/drawingml/2006/main">
+            <a:off x="4438650" y="2647950"/>
+            <a:ext cx="3219450" cy="2114550"/>
+          </a:xfrm>
+          <a:prstGeom xmlns:a="http://schemas.openxmlformats.org/drawingml/2006/main" prst="roundRect">
+            <a:avLst>
+              <a:gd name="adj" fmla="val 7207"/>
+            </a:avLst>
+          </a:prstGeom>
+          <a:solidFill xmlns:a="http://schemas.openxmlformats.org/drawingml/2006/main">
+            <a:srgbClr val="FFFFFF"/>
+          </a:solidFill>
+          <a:ln xmlns:a="http://schemas.openxmlformats.org/drawingml/2006/main" w="9525">
+            <a:solidFill>
+              <a:srgbClr val="B5483A"/>
+            </a:solidFill>
+            <a:prstDash val="solid"/>
+          </a:ln>
+        </p:spPr>
+        <p:style>
+          <a:lnRef xmlns:a="http://schemas.openxmlformats.org/drawingml/2006/main" idx="0"/>
+          <a:fillRef xmlns:a="http://schemas.openxmlformats.org/drawingml/2006/main" idx="0"/>
+          <a:effectRef xmlns:a="http://schemas.openxmlformats.org/drawingml/2006/main" idx="4"/>
+          <a:fontRef xmlns:a="http://schemas.openxmlformats.org/drawingml/2006/main" idx="major"/>
+        </p:style>
+      </p:sp>
+      <p:sp>
+        <p:nvSpPr>
+          <p:cNvPr id="7" name="">
+            <a:extLst xmlns:a="http://schemas.openxmlformats.org/drawingml/2006/main">
+              <a:ext uri="{FF2B5EF4-FFF2-40B4-BE49-F238E27FC236}">
+                <a16:creationId xmlns:a16="http://schemas.microsoft.com/office/drawing/2014/main" id="{50C4BFE5-CDA4-4229-99BF-93F715CA3A57}"/>
+              </a:ext>
+            </a:extLst>
+          </p:cNvPr>
+          <p:cNvSpPr>
+            <a:spLocks xmlns:a="http://schemas.openxmlformats.org/drawingml/2006/main" noGrp="1"/>
+          </p:cNvSpPr>
+          <p:nvPr/>
+        </p:nvSpPr>
+        <p:spPr>
+          <a:xfrm xmlns:a="http://schemas.openxmlformats.org/drawingml/2006/main">
+            <a:off x="4667250" y="2876550"/>
+            <a:ext cx="2762250" cy="285750"/>
+          </a:xfrm>
+          <a:prstGeom xmlns:a="http://schemas.openxmlformats.org/drawingml/2006/main" prst="rect">
+            <a:avLst/>
+          </a:prstGeom>
+          <a:noFill xmlns:a="http://schemas.openxmlformats.org/drawingml/2006/main"/>
+          <a:ln xmlns:a="http://schemas.openxmlformats.org/drawingml/2006/main" w="0">
+            <a:noFill/>
+            <a:prstDash val="solid"/>
+          </a:ln>
+        </p:spPr>
+        <p:txBody>
+          <a:bodyPr xmlns:a="http://schemas.openxmlformats.org/drawingml/2006/main"/>
+          <a:lstStyle xmlns:a="http://schemas.openxmlformats.org/drawingml/2006/main"/>
+          <a:p xmlns:a="http://schemas.openxmlformats.org/drawingml/2006/main">
+            <a:pPr algn="l">
+              <a:defRPr sz="1650" b="1">
+                <a:solidFill>
+                  <a:srgbClr val="B5483A"/>
+                </a:solidFill>
+              </a:defRPr>
+            </a:pPr>
+            <a:r>
+              <a:rPr sz="1650" b="1">
+                <a:solidFill>
+                  <a:srgbClr val="B5483A"/>
+                </a:solidFill>
+              </a:rPr>
+              <a:t>Limitations</a:t>
+            </a:r>
+          </a:p>
+        </p:txBody>
+      </p:sp>
+      <p:sp>
+        <p:nvSpPr>
+          <p:cNvPr id="8" name="">
+            <a:extLst xmlns:a="http://schemas.openxmlformats.org/drawingml/2006/main">
+              <a:ext uri="{FF2B5EF4-FFF2-40B4-BE49-F238E27FC236}">
+                <a16:creationId xmlns:a16="http://schemas.microsoft.com/office/drawing/2014/main" id="{C0C036EE-AB2D-4902-BC6D-62CE99F8A340}"/>
+              </a:ext>
+            </a:extLst>
+          </p:cNvPr>
+          <p:cNvSpPr>
+            <a:spLocks xmlns:a="http://schemas.openxmlformats.org/drawingml/2006/main" noGrp="1"/>
+          </p:cNvSpPr>
+          <p:nvPr/>
+        </p:nvSpPr>
+        <p:spPr>
+          <a:xfrm xmlns:a="http://schemas.openxmlformats.org/drawingml/2006/main">
+            <a:off x="4667250" y="3371850"/>
+            <a:ext cx="2762250" cy="1200150"/>
+          </a:xfrm>
+          <a:prstGeom xmlns:a="http://schemas.openxmlformats.org/drawingml/2006/main" prst="rect">
+            <a:avLst/>
+          </a:prstGeom>
+          <a:noFill xmlns:a="http://schemas.openxmlformats.org/drawingml/2006/main"/>
+          <a:ln xmlns:a="http://schemas.openxmlformats.org/drawingml/2006/main" w="0">
+            <a:noFill/>
+            <a:prstDash val="solid"/>
+          </a:ln>
+        </p:spPr>
+        <p:txBody>
+          <a:bodyPr xmlns:a="http://schemas.openxmlformats.org/drawingml/2006/main"/>
+          <a:lstStyle xmlns:a="http://schemas.openxmlformats.org/drawingml/2006/main"/>
+          <a:p xmlns:a="http://schemas.openxmlformats.org/drawingml/2006/main">
+            <a:pPr algn="l">
+              <a:defRPr sz="1275" b="0">
+                <a:solidFill>
+                  <a:srgbClr val="0F172A"/>
+                </a:solidFill>
+              </a:defRPr>
+            </a:pPr>
+            <a:r>
+              <a:rPr sz="1275" b="0">
+                <a:solidFill>
+                  <a:srgbClr val="0F172A"/>
+                </a:solidFill>
+              </a:rPr>
+              <a:t>Only 299 released labels.</a:t>
+            </a:r>
+          </a:p>
+          <a:p xmlns:a="http://schemas.openxmlformats.org/drawingml/2006/main">
+            <a:pPr algn="l">
+              <a:defRPr sz="1275" b="0">
+                <a:solidFill>
+                  <a:srgbClr val="0F172A"/>
+                </a:solidFill>
+              </a:defRPr>
+            </a:pPr>
+            <a:r>
+              <a:rPr sz="1275" b="0">
+                <a:solidFill>
+                  <a:srgbClr val="0F172A"/>
+                </a:solidFill>
+              </a:rPr>
+              <a:t>Aggregate splits provide no row-level errors.</a:t>
+            </a:r>
+          </a:p>
+          <a:p xmlns:a="http://schemas.openxmlformats.org/drawingml/2006/main">
+            <a:pPr algn="l">
+              <a:defRPr sz="1275" b="0">
+                <a:solidFill>
+                  <a:srgbClr val="0F172A"/>
+                </a:solidFill>
+              </a:defRPr>
+            </a:pPr>
+            <a:r>
+              <a:rPr sz="1275" b="0">
+                <a:solidFill>
+                  <a:srgbClr val="0F172A"/>
+                </a:solidFill>
+              </a:rPr>
+              <a:t>Phase 2 accuracy is still unknown.</a:t>
+            </a:r>
+          </a:p>
+        </p:txBody>
+      </p:sp>
+      <p:sp>
+        <p:nvSpPr>
+          <p:cNvPr id="9" name="">
+            <a:extLst xmlns:a="http://schemas.openxmlformats.org/drawingml/2006/main">
+              <a:ext uri="{FF2B5EF4-FFF2-40B4-BE49-F238E27FC236}">
+                <a16:creationId xmlns:a16="http://schemas.microsoft.com/office/drawing/2014/main" id="{CFA44C56-0B3A-4043-A612-04BB67073B76}"/>
+              </a:ext>
+            </a:extLst>
+          </p:cNvPr>
+          <p:cNvSpPr>
+            <a:spLocks xmlns:a="http://schemas.openxmlformats.org/drawingml/2006/main" noGrp="1"/>
+          </p:cNvSpPr>
+          <p:nvPr/>
+        </p:nvSpPr>
+        <p:spPr>
+          <a:xfrm xmlns:a="http://schemas.openxmlformats.org/drawingml/2006/main">
+            <a:off x="8153400" y="2647950"/>
+            <a:ext cx="3219450" cy="2114550"/>
+          </a:xfrm>
+          <a:prstGeom xmlns:a="http://schemas.openxmlformats.org/drawingml/2006/main" prst="roundRect">
+            <a:avLst>
+              <a:gd name="adj" fmla="val 7207"/>
+            </a:avLst>
+          </a:prstGeom>
+          <a:solidFill xmlns:a="http://schemas.openxmlformats.org/drawingml/2006/main">
+            <a:srgbClr val="FFFFFF"/>
+          </a:solidFill>
+          <a:ln xmlns:a="http://schemas.openxmlformats.org/drawingml/2006/main" w="9525">
+            <a:solidFill>
+              <a:srgbClr val="D59B32"/>
+            </a:solidFill>
+            <a:prstDash val="solid"/>
+          </a:ln>
+        </p:spPr>
+        <p:style>
+          <a:lnRef xmlns:a="http://schemas.openxmlformats.org/drawingml/2006/main" idx="0"/>
+          <a:fillRef xmlns:a="http://schemas.openxmlformats.org/drawingml/2006/main" idx="0"/>
+          <a:effectRef xmlns:a="http://schemas.openxmlformats.org/drawingml/2006/main" idx="4"/>
+          <a:fontRef xmlns:a="http://schemas.openxmlformats.org/drawingml/2006/main" idx="major"/>
+        </p:style>
+      </p:sp>
+      <p:sp>
+        <p:nvSpPr>
+          <p:cNvPr id="10" name="">
+            <a:extLst xmlns:a="http://schemas.openxmlformats.org/drawingml/2006/main">
+              <a:ext uri="{FF2B5EF4-FFF2-40B4-BE49-F238E27FC236}">
+                <a16:creationId xmlns:a16="http://schemas.microsoft.com/office/drawing/2014/main" id="{0B862DEC-19FB-420D-99D2-D67BE2978B42}"/>
+              </a:ext>
+            </a:extLst>
+          </p:cNvPr>
+          <p:cNvSpPr>
+            <a:spLocks xmlns:a="http://schemas.openxmlformats.org/drawingml/2006/main" noGrp="1"/>
+          </p:cNvSpPr>
+          <p:nvPr/>
+        </p:nvSpPr>
+        <p:spPr>
+          <a:xfrm xmlns:a="http://schemas.openxmlformats.org/drawingml/2006/main">
+            <a:off x="8382000" y="2876550"/>
+            <a:ext cx="2762250" cy="285750"/>
+          </a:xfrm>
+          <a:prstGeom xmlns:a="http://schemas.openxmlformats.org/drawingml/2006/main" prst="rect">
+            <a:avLst/>
+          </a:prstGeom>
+          <a:noFill xmlns:a="http://schemas.openxmlformats.org/drawingml/2006/main"/>
+          <a:ln xmlns:a="http://schemas.openxmlformats.org/drawingml/2006/main" w="0">
+            <a:noFill/>
+            <a:prstDash val="solid"/>
+          </a:ln>
+        </p:spPr>
+        <p:txBody>
+          <a:bodyPr xmlns:a="http://schemas.openxmlformats.org/drawingml/2006/main"/>
+          <a:lstStyle xmlns:a="http://schemas.openxmlformats.org/drawingml/2006/main"/>
+          <a:p xmlns:a="http://schemas.openxmlformats.org/drawingml/2006/main">
+            <a:pPr algn="l">
+              <a:defRPr sz="1650" b="1">
+                <a:solidFill>
+                  <a:srgbClr val="D59B32"/>
+                </a:solidFill>
+              </a:defRPr>
+            </a:pPr>
+            <a:r>
+              <a:rPr sz="1650" b="1">
+                <a:solidFill>
+                  <a:srgbClr val="D59B32"/>
+                </a:solidFill>
+              </a:rPr>
+              <a:t>Next analyses</a:t>
+            </a:r>
+          </a:p>
+        </p:txBody>
+      </p:sp>
+      <p:sp>
+        <p:nvSpPr>
+          <p:cNvPr id="11" name="">
+            <a:extLst xmlns:a="http://schemas.openxmlformats.org/drawingml/2006/main">
+              <a:ext uri="{FF2B5EF4-FFF2-40B4-BE49-F238E27FC236}">
+                <a16:creationId xmlns:a16="http://schemas.microsoft.com/office/drawing/2014/main" id="{605406C1-8011-4F17-93A8-B74555025ACA}"/>
+              </a:ext>
+            </a:extLst>
+          </p:cNvPr>
+          <p:cNvSpPr>
+            <a:spLocks xmlns:a="http://schemas.openxmlformats.org/drawingml/2006/main" noGrp="1"/>
+          </p:cNvSpPr>
+          <p:nvPr/>
+        </p:nvSpPr>
+        <p:spPr>
+          <a:xfrm xmlns:a="http://schemas.openxmlformats.org/drawingml/2006/main">
+            <a:off x="8382000" y="3371850"/>
+            <a:ext cx="2762250" cy="1200150"/>
+          </a:xfrm>
+          <a:prstGeom xmlns:a="http://schemas.openxmlformats.org/drawingml/2006/main" prst="rect">
+            <a:avLst/>
+          </a:prstGeom>
+          <a:noFill xmlns:a="http://schemas.openxmlformats.org/drawingml/2006/main"/>
+          <a:ln xmlns:a="http://schemas.openxmlformats.org/drawingml/2006/main" w="0">
+            <a:noFill/>
+            <a:prstDash val="solid"/>
+          </a:ln>
+        </p:spPr>
+        <p:txBody>
+          <a:bodyPr xmlns:a="http://schemas.openxmlformats.org/drawingml/2006/main"/>
+          <a:lstStyle xmlns:a="http://schemas.openxmlformats.org/drawingml/2006/main"/>
+          <a:p xmlns:a="http://schemas.openxmlformats.org/drawingml/2006/main">
+            <a:pPr algn="l">
+              <a:defRPr sz="1275" b="0">
+                <a:solidFill>
+                  <a:srgbClr val="0F172A"/>
+                </a:solidFill>
+              </a:defRPr>
+            </a:pPr>
+            <a:r>
+              <a:rPr sz="1275" b="0">
+                <a:solidFill>
+                  <a:srgbClr val="0F172A"/>
+                </a:solidFill>
+              </a:rPr>
+              <a:t>Inspect Phase 2 errors when released.</a:t>
+            </a:r>
+          </a:p>
+          <a:p xmlns:a="http://schemas.openxmlformats.org/drawingml/2006/main">
+            <a:pPr algn="l">
+              <a:defRPr sz="1275" b="0">
+                <a:solidFill>
+                  <a:srgbClr val="0F172A"/>
+                </a:solidFill>
+              </a:defRPr>
+            </a:pPr>
+            <a:r>
+              <a:rPr sz="1275" b="0">
+                <a:solidFill>
+                  <a:srgbClr val="0F172A"/>
+                </a:solidFill>
+              </a:rPr>
+              <a:t>Calibrate the judged tail.</a:t>
+            </a:r>
+          </a:p>
+          <a:p xmlns:a="http://schemas.openxmlformats.org/drawingml/2006/main">
+            <a:pPr algn="l">
+              <a:defRPr sz="1275" b="0">
+                <a:solidFill>
+                  <a:srgbClr val="0F172A"/>
+                </a:solidFill>
+              </a:defRPr>
+            </a:pPr>
+            <a:r>
+              <a:rPr sz="1275" b="0">
+                <a:solidFill>
+                  <a:srgbClr val="0F172A"/>
+                </a:solidFill>
+              </a:rPr>
+              <a:t>Expand licensed civic and news evidence.</a:t>
+            </a:r>
+          </a:p>
+        </p:txBody>
+      </p:sp>
+      <p:sp>
+        <p:nvSpPr>
+          <p:cNvPr id="12" name="">
+            <a:extLst xmlns:a="http://schemas.openxmlformats.org/drawingml/2006/main">
+              <a:ext uri="{FF2B5EF4-FFF2-40B4-BE49-F238E27FC236}">
+                <a16:creationId xmlns:a16="http://schemas.microsoft.com/office/drawing/2014/main" id="{2E9D950B-3BBC-4A1D-9865-32242E8A2373}"/>
+              </a:ext>
+            </a:extLst>
+          </p:cNvPr>
+          <p:cNvSpPr>
+            <a:spLocks xmlns:a="http://schemas.openxmlformats.org/drawingml/2006/main" noGrp="1"/>
+          </p:cNvSpPr>
+          <p:nvPr/>
+        </p:nvSpPr>
+        <p:spPr>
+          <a:xfrm xmlns:a="http://schemas.openxmlformats.org/drawingml/2006/main">
+            <a:off x="685800" y="5429250"/>
+            <a:ext cx="3048000" cy="457200"/>
+          </a:xfrm>
+          <a:prstGeom xmlns:a="http://schemas.openxmlformats.org/drawingml/2006/main" prst="rect">
+            <a:avLst/>
+          </a:prstGeom>
+          <a:noFill xmlns:a="http://schemas.openxmlformats.org/drawingml/2006/main"/>
+          <a:ln xmlns:a="http://schemas.openxmlformats.org/drawingml/2006/main" w="0">
+            <a:noFill/>
+            <a:prstDash val="solid"/>
+          </a:ln>
+        </p:spPr>
+        <p:txBody>
+          <a:bodyPr xmlns:a="http://schemas.openxmlformats.org/drawingml/2006/main"/>
+          <a:lstStyle xmlns:a="http://schemas.openxmlformats.org/drawingml/2006/main"/>
+          <a:p xmlns:a="http://schemas.openxmlformats.org/drawingml/2006/main">
+            <a:pPr algn="l">
+              <a:defRPr sz="2700" b="1">
+                <a:solidFill>
+                  <a:srgbClr val="1F5A7A"/>
+                </a:solidFill>
+              </a:defRPr>
+            </a:pPr>
+            <a:r>
+              <a:rPr sz="2700" b="1">
+                <a:solidFill>
+                  <a:srgbClr val="1F5A7A"/>
+                </a:solidFill>
+              </a:rPr>
+              <a:t>Questions</a:t>
+            </a:r>
+          </a:p>
+        </p:txBody>
+      </p:sp>
+      <p:sp>
+        <p:nvSpPr>
+          <p:cNvPr id="13" name="">
+            <a:extLst xmlns:a="http://schemas.openxmlformats.org/drawingml/2006/main">
+              <a:ext uri="{FF2B5EF4-FFF2-40B4-BE49-F238E27FC236}">
+                <a16:creationId xmlns:a16="http://schemas.microsoft.com/office/drawing/2014/main" id="{7E2E0417-E987-4F8B-B5EA-D15E9ACA17F4}"/>
+              </a:ext>
+            </a:extLst>
+          </p:cNvPr>
+          <p:cNvSpPr>
+            <a:spLocks xmlns:a="http://schemas.openxmlformats.org/drawingml/2006/main" noGrp="1"/>
+          </p:cNvSpPr>
+          <p:nvPr/>
+        </p:nvSpPr>
+        <p:spPr>
+          <a:xfrm xmlns:a="http://schemas.openxmlformats.org/drawingml/2006/main">
+            <a:off x="3714750" y="5467350"/>
+            <a:ext cx="7696200" cy="476250"/>
+          </a:xfrm>
+          <a:prstGeom xmlns:a="http://schemas.openxmlformats.org/drawingml/2006/main" prst="rect">
+            <a:avLst/>
+          </a:prstGeom>
+          <a:noFill xmlns:a="http://schemas.openxmlformats.org/drawingml/2006/main"/>
+          <a:ln xmlns:a="http://schemas.openxmlformats.org/drawingml/2006/main" w="0">
+            <a:noFill/>
+            <a:prstDash val="solid"/>
+          </a:ln>
+        </p:spPr>
+        <p:txBody>
+          <a:bodyPr xmlns:a="http://schemas.openxmlformats.org/drawingml/2006/main"/>
+          <a:lstStyle xmlns:a="http://schemas.openxmlformats.org/drawingml/2006/main"/>
+          <a:p xmlns:a="http://schemas.openxmlformats.org/drawingml/2006/main">
+            <a:pPr algn="r">
               <a:defRPr sz="1350" b="1">
                 <a:solidFill>
-                  <a:srgbClr val="2A8C82"/>
+                  <a:srgbClr val="526174"/>
                 </a:solidFill>
               </a:defRPr>
             </a:pPr>
             <a:r>
               <a:rPr sz="1350" b="1">
                 <a:solidFill>
-                  <a:srgbClr val="2A8C82"/>
-                </a:solidFill>
-              </a:rPr>
-              <a:t>01</a:t>
-            </a:r>
-          </a:p>
-        </p:txBody>
-      </p:sp>
-      <p:sp>
-        <p:nvSpPr>
-          <p:cNvPr id="4" name="">
-            <a:extLst xmlns:a="http://schemas.openxmlformats.org/drawingml/2006/main">
-              <a:ext uri="{FF2B5EF4-FFF2-40B4-BE49-F238E27FC236}">
-                <a16:creationId xmlns:a16="http://schemas.microsoft.com/office/drawing/2014/main" id="{C2E62DC8-C570-4198-B44C-3E78186AF09A}"/>
-              </a:ext>
-            </a:extLst>
-          </p:cNvPr>
-          <p:cNvSpPr>
-            <a:spLocks xmlns:a="http://schemas.openxmlformats.org/drawingml/2006/main" noGrp="1"/>
-          </p:cNvSpPr>
-          <p:nvPr/>
-        </p:nvSpPr>
-        <p:spPr>
-          <a:xfrm xmlns:a="http://schemas.openxmlformats.org/drawingml/2006/main">
-            <a:off x="1447800" y="2628900"/>
-            <a:ext cx="8763000" cy="419100"/>
-          </a:xfrm>
-          <a:prstGeom xmlns:a="http://schemas.openxmlformats.org/drawingml/2006/main" prst="rect">
-            <a:avLst/>
-          </a:prstGeom>
-          <a:noFill xmlns:a="http://schemas.openxmlformats.org/drawingml/2006/main"/>
-          <a:ln xmlns:a="http://schemas.openxmlformats.org/drawingml/2006/main" w="0">
-            <a:noFill/>
-            <a:prstDash val="solid"/>
-          </a:ln>
-        </p:spPr>
-        <p:txBody>
-          <a:bodyPr xmlns:a="http://schemas.openxmlformats.org/drawingml/2006/main"/>
-          <a:lstStyle xmlns:a="http://schemas.openxmlformats.org/drawingml/2006/main"/>
-          <a:p xmlns:a="http://schemas.openxmlformats.org/drawingml/2006/main">
-            <a:pPr algn="l">
-              <a:defRPr sz="1800" b="0">
-                <a:solidFill>
-                  <a:srgbClr val="0F172A"/>
-                </a:solidFill>
-              </a:defRPr>
-            </a:pPr>
-            <a:r>
-              <a:rPr sz="1800" b="0">
-                <a:solidFill>
-                  <a:srgbClr val="0F172A"/>
-                </a:solidFill>
-              </a:rPr>
-              <a:t>Task families need different evidence standards.</a:t>
-            </a:r>
-          </a:p>
-        </p:txBody>
-      </p:sp>
-      <p:sp>
-        <p:nvSpPr>
-          <p:cNvPr id="5" name="">
-            <a:extLst xmlns:a="http://schemas.openxmlformats.org/drawingml/2006/main">
-              <a:ext uri="{FF2B5EF4-FFF2-40B4-BE49-F238E27FC236}">
-                <a16:creationId xmlns:a16="http://schemas.microsoft.com/office/drawing/2014/main" id="{F93ED6E0-E48A-45E7-BF20-889527491733}"/>
-              </a:ext>
-            </a:extLst>
-          </p:cNvPr>
-          <p:cNvSpPr>
-            <a:spLocks xmlns:a="http://schemas.openxmlformats.org/drawingml/2006/main" noGrp="1"/>
-          </p:cNvSpPr>
-          <p:nvPr/>
-        </p:nvSpPr>
-        <p:spPr>
-          <a:xfrm xmlns:a="http://schemas.openxmlformats.org/drawingml/2006/main">
-            <a:off x="1447800" y="3124200"/>
-            <a:ext cx="8763000" cy="0"/>
+                  <a:srgbClr val="526174"/>
+                </a:solidFill>
+              </a:rPr>
+              <a:t>Selective inference remained reproducible and completed the held-out run within the runtime limit.</a:t>
+            </a:r>
+          </a:p>
+        </p:txBody>
+      </p:sp>
+      <p:sp>
+        <p:nvSpPr>
+          <p:cNvPr id="14" name="">
+            <a:extLst xmlns:a="http://schemas.openxmlformats.org/drawingml/2006/main">
+              <a:ext uri="{FF2B5EF4-FFF2-40B4-BE49-F238E27FC236}">
+                <a16:creationId xmlns:a16="http://schemas.microsoft.com/office/drawing/2014/main" id="{8406EE11-AB56-47B3-B74E-EB39B9ACC2F3}"/>
+              </a:ext>
+            </a:extLst>
+          </p:cNvPr>
+          <p:cNvSpPr>
+            <a:spLocks xmlns:a="http://schemas.openxmlformats.org/drawingml/2006/main" noGrp="1"/>
+          </p:cNvSpPr>
+          <p:nvPr/>
+        </p:nvSpPr>
+        <p:spPr>
+          <a:xfrm xmlns:a="http://schemas.openxmlformats.org/drawingml/2006/main">
+            <a:off x="685800" y="6372225"/>
+            <a:ext cx="10820400" cy="0"/>
           </a:xfrm>
           <a:prstGeom xmlns:a="http://schemas.openxmlformats.org/drawingml/2006/main" prst="line">
             <a:avLst/>
@@ -9972,403 +10738,10 @@
       </p:sp>
       <p:sp>
         <p:nvSpPr>
-          <p:cNvPr id="6" name="">
-            <a:extLst xmlns:a="http://schemas.openxmlformats.org/drawingml/2006/main">
-              <a:ext uri="{FF2B5EF4-FFF2-40B4-BE49-F238E27FC236}">
-                <a16:creationId xmlns:a16="http://schemas.microsoft.com/office/drawing/2014/main" id="{9586C430-DF28-418B-8399-12F6538D3B64}"/>
-              </a:ext>
-            </a:extLst>
-          </p:cNvPr>
-          <p:cNvSpPr>
-            <a:spLocks xmlns:a="http://schemas.openxmlformats.org/drawingml/2006/main" noGrp="1"/>
-          </p:cNvSpPr>
-          <p:nvPr/>
-        </p:nvSpPr>
-        <p:spPr>
-          <a:xfrm xmlns:a="http://schemas.openxmlformats.org/drawingml/2006/main">
-            <a:off x="685800" y="3486150"/>
-            <a:ext cx="571500" cy="304800"/>
-          </a:xfrm>
-          <a:prstGeom xmlns:a="http://schemas.openxmlformats.org/drawingml/2006/main" prst="rect">
-            <a:avLst/>
-          </a:prstGeom>
-          <a:noFill xmlns:a="http://schemas.openxmlformats.org/drawingml/2006/main"/>
-          <a:ln xmlns:a="http://schemas.openxmlformats.org/drawingml/2006/main" w="0">
-            <a:noFill/>
-            <a:prstDash val="solid"/>
-          </a:ln>
-        </p:spPr>
-        <p:txBody>
-          <a:bodyPr xmlns:a="http://schemas.openxmlformats.org/drawingml/2006/main"/>
-          <a:lstStyle xmlns:a="http://schemas.openxmlformats.org/drawingml/2006/main"/>
-          <a:p xmlns:a="http://schemas.openxmlformats.org/drawingml/2006/main">
-            <a:pPr algn="l">
-              <a:defRPr sz="1350" b="1">
-                <a:solidFill>
-                  <a:srgbClr val="2A8C82"/>
-                </a:solidFill>
-              </a:defRPr>
-            </a:pPr>
-            <a:r>
-              <a:rPr sz="1350" b="1">
-                <a:solidFill>
-                  <a:srgbClr val="2A8C82"/>
-                </a:solidFill>
-              </a:rPr>
-              <a:t>02</a:t>
-            </a:r>
-          </a:p>
-        </p:txBody>
-      </p:sp>
-      <p:sp>
-        <p:nvSpPr>
-          <p:cNvPr id="7" name="">
-            <a:extLst xmlns:a="http://schemas.openxmlformats.org/drawingml/2006/main">
-              <a:ext uri="{FF2B5EF4-FFF2-40B4-BE49-F238E27FC236}">
-                <a16:creationId xmlns:a16="http://schemas.microsoft.com/office/drawing/2014/main" id="{BE645C3F-FAC0-4E96-866A-CA78FDFC2697}"/>
-              </a:ext>
-            </a:extLst>
-          </p:cNvPr>
-          <p:cNvSpPr>
-            <a:spLocks xmlns:a="http://schemas.openxmlformats.org/drawingml/2006/main" noGrp="1"/>
-          </p:cNvSpPr>
-          <p:nvPr/>
-        </p:nvSpPr>
-        <p:spPr>
-          <a:xfrm xmlns:a="http://schemas.openxmlformats.org/drawingml/2006/main">
-            <a:off x="1447800" y="3448050"/>
-            <a:ext cx="8763000" cy="419100"/>
-          </a:xfrm>
-          <a:prstGeom xmlns:a="http://schemas.openxmlformats.org/drawingml/2006/main" prst="rect">
-            <a:avLst/>
-          </a:prstGeom>
-          <a:noFill xmlns:a="http://schemas.openxmlformats.org/drawingml/2006/main"/>
-          <a:ln xmlns:a="http://schemas.openxmlformats.org/drawingml/2006/main" w="0">
-            <a:noFill/>
-            <a:prstDash val="solid"/>
-          </a:ln>
-        </p:spPr>
-        <p:txBody>
-          <a:bodyPr xmlns:a="http://schemas.openxmlformats.org/drawingml/2006/main"/>
-          <a:lstStyle xmlns:a="http://schemas.openxmlformats.org/drawingml/2006/main"/>
-          <a:p xmlns:a="http://schemas.openxmlformats.org/drawingml/2006/main">
-            <a:pPr algn="l">
-              <a:defRPr sz="1800" b="0">
-                <a:solidFill>
-                  <a:srgbClr val="0F172A"/>
-                </a:solidFill>
-              </a:defRPr>
-            </a:pPr>
-            <a:r>
-              <a:rPr sz="1800" b="0">
-                <a:solidFill>
-                  <a:srgbClr val="0F172A"/>
-                </a:solidFill>
-              </a:rPr>
-              <a:t>The requested relation matters more than semantic similarity.</a:t>
-            </a:r>
-          </a:p>
-        </p:txBody>
-      </p:sp>
-      <p:sp>
-        <p:nvSpPr>
-          <p:cNvPr id="8" name="">
-            <a:extLst xmlns:a="http://schemas.openxmlformats.org/drawingml/2006/main">
-              <a:ext uri="{FF2B5EF4-FFF2-40B4-BE49-F238E27FC236}">
-                <a16:creationId xmlns:a16="http://schemas.microsoft.com/office/drawing/2014/main" id="{30660CA4-890C-40B5-8EEF-EE58C498074B}"/>
-              </a:ext>
-            </a:extLst>
-          </p:cNvPr>
-          <p:cNvSpPr>
-            <a:spLocks xmlns:a="http://schemas.openxmlformats.org/drawingml/2006/main" noGrp="1"/>
-          </p:cNvSpPr>
-          <p:nvPr/>
-        </p:nvSpPr>
-        <p:spPr>
-          <a:xfrm xmlns:a="http://schemas.openxmlformats.org/drawingml/2006/main">
-            <a:off x="1447800" y="3943350"/>
-            <a:ext cx="8763000" cy="0"/>
-          </a:xfrm>
-          <a:prstGeom xmlns:a="http://schemas.openxmlformats.org/drawingml/2006/main" prst="line">
-            <a:avLst/>
-          </a:prstGeom>
-          <a:noFill xmlns:a="http://schemas.openxmlformats.org/drawingml/2006/main"/>
-          <a:ln xmlns:a="http://schemas.openxmlformats.org/drawingml/2006/main" w="9525">
-            <a:solidFill>
-              <a:srgbClr val="D8E0EA"/>
-            </a:solidFill>
-            <a:prstDash val="solid"/>
-          </a:ln>
-        </p:spPr>
-      </p:sp>
-      <p:sp>
-        <p:nvSpPr>
-          <p:cNvPr id="9" name="">
-            <a:extLst xmlns:a="http://schemas.openxmlformats.org/drawingml/2006/main">
-              <a:ext uri="{FF2B5EF4-FFF2-40B4-BE49-F238E27FC236}">
-                <a16:creationId xmlns:a16="http://schemas.microsoft.com/office/drawing/2014/main" id="{BDEF5D2B-2616-4435-B7C4-E6C98EC005F4}"/>
-              </a:ext>
-            </a:extLst>
-          </p:cNvPr>
-          <p:cNvSpPr>
-            <a:spLocks xmlns:a="http://schemas.openxmlformats.org/drawingml/2006/main" noGrp="1"/>
-          </p:cNvSpPr>
-          <p:nvPr/>
-        </p:nvSpPr>
-        <p:spPr>
-          <a:xfrm xmlns:a="http://schemas.openxmlformats.org/drawingml/2006/main">
-            <a:off x="685800" y="4305300"/>
-            <a:ext cx="571500" cy="304800"/>
-          </a:xfrm>
-          <a:prstGeom xmlns:a="http://schemas.openxmlformats.org/drawingml/2006/main" prst="rect">
-            <a:avLst/>
-          </a:prstGeom>
-          <a:noFill xmlns:a="http://schemas.openxmlformats.org/drawingml/2006/main"/>
-          <a:ln xmlns:a="http://schemas.openxmlformats.org/drawingml/2006/main" w="0">
-            <a:noFill/>
-            <a:prstDash val="solid"/>
-          </a:ln>
-        </p:spPr>
-        <p:txBody>
-          <a:bodyPr xmlns:a="http://schemas.openxmlformats.org/drawingml/2006/main"/>
-          <a:lstStyle xmlns:a="http://schemas.openxmlformats.org/drawingml/2006/main"/>
-          <a:p xmlns:a="http://schemas.openxmlformats.org/drawingml/2006/main">
-            <a:pPr algn="l">
-              <a:defRPr sz="1350" b="1">
-                <a:solidFill>
-                  <a:srgbClr val="D59B32"/>
-                </a:solidFill>
-              </a:defRPr>
-            </a:pPr>
-            <a:r>
-              <a:rPr sz="1350" b="1">
-                <a:solidFill>
-                  <a:srgbClr val="D59B32"/>
-                </a:solidFill>
-              </a:rPr>
-              <a:t>03</a:t>
-            </a:r>
-          </a:p>
-        </p:txBody>
-      </p:sp>
-      <p:sp>
-        <p:nvSpPr>
-          <p:cNvPr id="10" name="">
-            <a:extLst xmlns:a="http://schemas.openxmlformats.org/drawingml/2006/main">
-              <a:ext uri="{FF2B5EF4-FFF2-40B4-BE49-F238E27FC236}">
-                <a16:creationId xmlns:a16="http://schemas.microsoft.com/office/drawing/2014/main" id="{D2AC6F45-8EE3-43B1-BB69-54D237BBF4DF}"/>
-              </a:ext>
-            </a:extLst>
-          </p:cNvPr>
-          <p:cNvSpPr>
-            <a:spLocks xmlns:a="http://schemas.openxmlformats.org/drawingml/2006/main" noGrp="1"/>
-          </p:cNvSpPr>
-          <p:nvPr/>
-        </p:nvSpPr>
-        <p:spPr>
-          <a:xfrm xmlns:a="http://schemas.openxmlformats.org/drawingml/2006/main">
-            <a:off x="1447800" y="4267200"/>
-            <a:ext cx="8763000" cy="419100"/>
-          </a:xfrm>
-          <a:prstGeom xmlns:a="http://schemas.openxmlformats.org/drawingml/2006/main" prst="rect">
-            <a:avLst/>
-          </a:prstGeom>
-          <a:noFill xmlns:a="http://schemas.openxmlformats.org/drawingml/2006/main"/>
-          <a:ln xmlns:a="http://schemas.openxmlformats.org/drawingml/2006/main" w="0">
-            <a:noFill/>
-            <a:prstDash val="solid"/>
-          </a:ln>
-        </p:spPr>
-        <p:txBody>
-          <a:bodyPr xmlns:a="http://schemas.openxmlformats.org/drawingml/2006/main"/>
-          <a:lstStyle xmlns:a="http://schemas.openxmlformats.org/drawingml/2006/main"/>
-          <a:p xmlns:a="http://schemas.openxmlformats.org/drawingml/2006/main">
-            <a:pPr algn="l">
-              <a:defRPr sz="1800" b="1">
-                <a:solidFill>
-                  <a:srgbClr val="0F172A"/>
-                </a:solidFill>
-              </a:defRPr>
-            </a:pPr>
-            <a:r>
-              <a:rPr sz="1800" b="1">
-                <a:solidFill>
-                  <a:srgbClr val="0F172A"/>
-                </a:solidFill>
-              </a:rPr>
-              <a:t>The fixed judge preserved compliance when source coverage collapsed.</a:t>
-            </a:r>
-          </a:p>
-        </p:txBody>
-      </p:sp>
-      <p:sp>
-        <p:nvSpPr>
-          <p:cNvPr id="11" name="">
-            <a:extLst xmlns:a="http://schemas.openxmlformats.org/drawingml/2006/main">
-              <a:ext uri="{FF2B5EF4-FFF2-40B4-BE49-F238E27FC236}">
-                <a16:creationId xmlns:a16="http://schemas.microsoft.com/office/drawing/2014/main" id="{9741CCC8-12AA-481B-A86F-8F431C7B1131}"/>
-              </a:ext>
-            </a:extLst>
-          </p:cNvPr>
-          <p:cNvSpPr>
-            <a:spLocks xmlns:a="http://schemas.openxmlformats.org/drawingml/2006/main" noGrp="1"/>
-          </p:cNvSpPr>
-          <p:nvPr/>
-        </p:nvSpPr>
-        <p:spPr>
-          <a:xfrm xmlns:a="http://schemas.openxmlformats.org/drawingml/2006/main">
-            <a:off x="1447800" y="4762500"/>
-            <a:ext cx="8763000" cy="0"/>
-          </a:xfrm>
-          <a:prstGeom xmlns:a="http://schemas.openxmlformats.org/drawingml/2006/main" prst="line">
-            <a:avLst/>
-          </a:prstGeom>
-          <a:noFill xmlns:a="http://schemas.openxmlformats.org/drawingml/2006/main"/>
-          <a:ln xmlns:a="http://schemas.openxmlformats.org/drawingml/2006/main" w="9525">
-            <a:solidFill>
-              <a:srgbClr val="D8E0EA"/>
-            </a:solidFill>
-            <a:prstDash val="solid"/>
-          </a:ln>
-        </p:spPr>
-      </p:sp>
-      <p:sp>
-        <p:nvSpPr>
-          <p:cNvPr id="12" name="">
-            <a:extLst xmlns:a="http://schemas.openxmlformats.org/drawingml/2006/main">
-              <a:ext uri="{FF2B5EF4-FFF2-40B4-BE49-F238E27FC236}">
-                <a16:creationId xmlns:a16="http://schemas.microsoft.com/office/drawing/2014/main" id="{3C0E214F-0A31-4A5C-A9CE-E8CFB18A7B50}"/>
-              </a:ext>
-            </a:extLst>
-          </p:cNvPr>
-          <p:cNvSpPr>
-            <a:spLocks xmlns:a="http://schemas.openxmlformats.org/drawingml/2006/main" noGrp="1"/>
-          </p:cNvSpPr>
-          <p:nvPr/>
-        </p:nvSpPr>
-        <p:spPr>
-          <a:xfrm xmlns:a="http://schemas.openxmlformats.org/drawingml/2006/main">
-            <a:off x="685800" y="5524500"/>
-            <a:ext cx="3048000" cy="457200"/>
-          </a:xfrm>
-          <a:prstGeom xmlns:a="http://schemas.openxmlformats.org/drawingml/2006/main" prst="rect">
-            <a:avLst/>
-          </a:prstGeom>
-          <a:noFill xmlns:a="http://schemas.openxmlformats.org/drawingml/2006/main"/>
-          <a:ln xmlns:a="http://schemas.openxmlformats.org/drawingml/2006/main" w="0">
-            <a:noFill/>
-            <a:prstDash val="solid"/>
-          </a:ln>
-        </p:spPr>
-        <p:txBody>
-          <a:bodyPr xmlns:a="http://schemas.openxmlformats.org/drawingml/2006/main"/>
-          <a:lstStyle xmlns:a="http://schemas.openxmlformats.org/drawingml/2006/main"/>
-          <a:p xmlns:a="http://schemas.openxmlformats.org/drawingml/2006/main">
-            <a:pPr algn="l">
-              <a:defRPr sz="2700" b="1">
-                <a:solidFill>
-                  <a:srgbClr val="1F5A7A"/>
-                </a:solidFill>
-              </a:defRPr>
-            </a:pPr>
-            <a:r>
-              <a:rPr sz="2700" b="1">
-                <a:solidFill>
-                  <a:srgbClr val="1F5A7A"/>
-                </a:solidFill>
-              </a:rPr>
-              <a:t>Questions</a:t>
-            </a:r>
-          </a:p>
-        </p:txBody>
-      </p:sp>
-      <p:sp>
-        <p:nvSpPr>
-          <p:cNvPr id="13" name="">
-            <a:extLst xmlns:a="http://schemas.openxmlformats.org/drawingml/2006/main">
-              <a:ext uri="{FF2B5EF4-FFF2-40B4-BE49-F238E27FC236}">
-                <a16:creationId xmlns:a16="http://schemas.microsoft.com/office/drawing/2014/main" id="{87CE1D61-865E-4DBA-A2D2-EC3A5D6F0CD0}"/>
-              </a:ext>
-            </a:extLst>
-          </p:cNvPr>
-          <p:cNvSpPr>
-            <a:spLocks xmlns:a="http://schemas.openxmlformats.org/drawingml/2006/main" noGrp="1"/>
-          </p:cNvSpPr>
-          <p:nvPr/>
-        </p:nvSpPr>
-        <p:spPr>
-          <a:xfrm xmlns:a="http://schemas.openxmlformats.org/drawingml/2006/main">
-            <a:off x="4552950" y="5581650"/>
-            <a:ext cx="6858000" cy="304800"/>
-          </a:xfrm>
-          <a:prstGeom xmlns:a="http://schemas.openxmlformats.org/drawingml/2006/main" prst="rect">
-            <a:avLst/>
-          </a:prstGeom>
-          <a:noFill xmlns:a="http://schemas.openxmlformats.org/drawingml/2006/main"/>
-          <a:ln xmlns:a="http://schemas.openxmlformats.org/drawingml/2006/main" w="0">
-            <a:noFill/>
-            <a:prstDash val="solid"/>
-          </a:ln>
-        </p:spPr>
-        <p:txBody>
-          <a:bodyPr xmlns:a="http://schemas.openxmlformats.org/drawingml/2006/main"/>
-          <a:lstStyle xmlns:a="http://schemas.openxmlformats.org/drawingml/2006/main"/>
-          <a:p xmlns:a="http://schemas.openxmlformats.org/drawingml/2006/main">
-            <a:pPr algn="r">
-              <a:defRPr sz="1500" b="1">
-                <a:solidFill>
-                  <a:srgbClr val="526174"/>
-                </a:solidFill>
-              </a:defRPr>
-            </a:pPr>
-            <a:r>
-              <a:rPr sz="1500" b="1">
-                <a:solidFill>
-                  <a:srgbClr val="526174"/>
-                </a:solidFill>
-              </a:rPr>
-              <a:t>Private rank 1  |  0.982 macro F1  |  9-hour compliant</a:t>
-            </a:r>
-          </a:p>
-        </p:txBody>
-      </p:sp>
-      <p:sp>
-        <p:nvSpPr>
-          <p:cNvPr id="14" name="">
-            <a:extLst xmlns:a="http://schemas.openxmlformats.org/drawingml/2006/main">
-              <a:ext uri="{FF2B5EF4-FFF2-40B4-BE49-F238E27FC236}">
-                <a16:creationId xmlns:a16="http://schemas.microsoft.com/office/drawing/2014/main" id="{2BDEFD64-3ED4-4801-B53E-79B86450774F}"/>
-              </a:ext>
-            </a:extLst>
-          </p:cNvPr>
-          <p:cNvSpPr>
-            <a:spLocks xmlns:a="http://schemas.openxmlformats.org/drawingml/2006/main" noGrp="1"/>
-          </p:cNvSpPr>
-          <p:nvPr/>
-        </p:nvSpPr>
-        <p:spPr>
-          <a:xfrm xmlns:a="http://schemas.openxmlformats.org/drawingml/2006/main">
-            <a:off x="685800" y="6372225"/>
-            <a:ext cx="10820400" cy="0"/>
-          </a:xfrm>
-          <a:prstGeom xmlns:a="http://schemas.openxmlformats.org/drawingml/2006/main" prst="line">
-            <a:avLst/>
-          </a:prstGeom>
-          <a:noFill xmlns:a="http://schemas.openxmlformats.org/drawingml/2006/main"/>
-          <a:ln xmlns:a="http://schemas.openxmlformats.org/drawingml/2006/main" w="9525">
-            <a:solidFill>
-              <a:srgbClr val="D8E0EA"/>
-            </a:solidFill>
-            <a:prstDash val="solid"/>
-          </a:ln>
-        </p:spPr>
-      </p:sp>
-      <p:sp>
-        <p:nvSpPr>
           <p:cNvPr id="15" name="">
             <a:extLst xmlns:a="http://schemas.openxmlformats.org/drawingml/2006/main">
               <a:ext uri="{FF2B5EF4-FFF2-40B4-BE49-F238E27FC236}">
-                <a16:creationId xmlns:a16="http://schemas.microsoft.com/office/drawing/2014/main" id="{8F55F929-80FE-49A1-A622-27434E11DC5B}"/>
+                <a16:creationId xmlns:a16="http://schemas.microsoft.com/office/drawing/2014/main" id="{640024BD-FD05-47A7-B818-F7394D7207E4}"/>
               </a:ext>
             </a:extLst>
           </p:cNvPr>
@@ -10418,7 +10791,7 @@
           <p:cNvPr id="16" name="">
             <a:extLst xmlns:a="http://schemas.openxmlformats.org/drawingml/2006/main">
               <a:ext uri="{FF2B5EF4-FFF2-40B4-BE49-F238E27FC236}">
-                <a16:creationId xmlns:a16="http://schemas.microsoft.com/office/drawing/2014/main" id="{FC0D884C-4C61-4334-9C1B-37358F81795A}"/>
+                <a16:creationId xmlns:a16="http://schemas.microsoft.com/office/drawing/2014/main" id="{4317606A-48A7-4F30-B9F7-931B672D4E0D}"/>
               </a:ext>
             </a:extLst>
           </p:cNvPr>
@@ -10466,7 +10839,7 @@
     </p:spTree>
     <p:extLst>
       <p:ext uri="{BB962C8B-B14F-4D97-AF65-F5344CB8AC3E}">
-        <p14:creationId xmlns:p14="http://schemas.microsoft.com/office/powerpoint/2010/main" val="275792063"/>
+        <p14:creationId xmlns:p14="http://schemas.microsoft.com/office/powerpoint/2010/main" val="136153475"/>
       </p:ext>
     </p:extLst>
   </p:cSld>
@@ -10497,7 +10870,7 @@
           <p:cNvPr id="30" name="kicker-2">
             <a:extLst xmlns:a="http://schemas.openxmlformats.org/drawingml/2006/main">
               <a:ext uri="{FF2B5EF4-FFF2-40B4-BE49-F238E27FC236}">
-                <a16:creationId xmlns:a16="http://schemas.microsoft.com/office/drawing/2014/main" id="{A318FEE3-8EFA-4E68-9F14-24C6989A5924}"/>
+                <a16:creationId xmlns:a16="http://schemas.microsoft.com/office/drawing/2014/main" id="{386DF953-A53E-4301-A436-82AD6D3369CA}"/>
               </a:ext>
             </a:extLst>
           </p:cNvPr>
@@ -10547,7 +10920,7 @@
           <p:cNvPr id="2" name="title-2">
             <a:extLst xmlns:a="http://schemas.openxmlformats.org/drawingml/2006/main">
               <a:ext uri="{FF2B5EF4-FFF2-40B4-BE49-F238E27FC236}">
-                <a16:creationId xmlns:a16="http://schemas.microsoft.com/office/drawing/2014/main" id="{0DA09158-8015-4676-8498-38FAC027D44A}"/>
+                <a16:creationId xmlns:a16="http://schemas.microsoft.com/office/drawing/2014/main" id="{604E9483-2A49-48FC-9C61-4A11521AB285}"/>
               </a:ext>
             </a:extLst>
           </p:cNvPr>
@@ -10597,7 +10970,7 @@
           <p:cNvPr id="3" name="">
             <a:extLst xmlns:a="http://schemas.openxmlformats.org/drawingml/2006/main">
               <a:ext uri="{FF2B5EF4-FFF2-40B4-BE49-F238E27FC236}">
-                <a16:creationId xmlns:a16="http://schemas.microsoft.com/office/drawing/2014/main" id="{CA928414-AD03-41A5-B611-4883B0AF38EF}"/>
+                <a16:creationId xmlns:a16="http://schemas.microsoft.com/office/drawing/2014/main" id="{DA40D6AB-E12A-4CCF-908A-524087A75268}"/>
               </a:ext>
             </a:extLst>
           </p:cNvPr>
@@ -10628,7 +11001,7 @@
           <p:cNvPr id="4" name="">
             <a:extLst xmlns:a="http://schemas.openxmlformats.org/drawingml/2006/main">
               <a:ext uri="{FF2B5EF4-FFF2-40B4-BE49-F238E27FC236}">
-                <a16:creationId xmlns:a16="http://schemas.microsoft.com/office/drawing/2014/main" id="{715BC2E0-1A0B-4189-B85E-5110AFDABA63}"/>
+                <a16:creationId xmlns:a16="http://schemas.microsoft.com/office/drawing/2014/main" id="{D271C44A-576F-4F5F-BC09-0E89C80B39AE}"/>
               </a:ext>
             </a:extLst>
           </p:cNvPr>
@@ -10678,7 +11051,7 @@
           <p:cNvPr id="5" name="">
             <a:extLst xmlns:a="http://schemas.openxmlformats.org/drawingml/2006/main">
               <a:ext uri="{FF2B5EF4-FFF2-40B4-BE49-F238E27FC236}">
-                <a16:creationId xmlns:a16="http://schemas.microsoft.com/office/drawing/2014/main" id="{F8FA7799-7E8A-4E16-B6F5-7769BFB03037}"/>
+                <a16:creationId xmlns:a16="http://schemas.microsoft.com/office/drawing/2014/main" id="{B6A35D4A-4BAF-4FC0-8CD8-F6195773D644}"/>
               </a:ext>
             </a:extLst>
           </p:cNvPr>
@@ -10709,7 +11082,7 @@
           <p:cNvPr id="6" name="">
             <a:extLst xmlns:a="http://schemas.openxmlformats.org/drawingml/2006/main">
               <a:ext uri="{FF2B5EF4-FFF2-40B4-BE49-F238E27FC236}">
-                <a16:creationId xmlns:a16="http://schemas.microsoft.com/office/drawing/2014/main" id="{4790944D-ECAA-4642-91F9-DB3C9873D195}"/>
+                <a16:creationId xmlns:a16="http://schemas.microsoft.com/office/drawing/2014/main" id="{9E85BCC6-CDDD-492D-ABC9-FBF6CDC55049}"/>
               </a:ext>
             </a:extLst>
           </p:cNvPr>
@@ -10742,7 +11115,7 @@
           <p:cNvPr id="7" name="">
             <a:extLst xmlns:a="http://schemas.openxmlformats.org/drawingml/2006/main">
               <a:ext uri="{FF2B5EF4-FFF2-40B4-BE49-F238E27FC236}">
-                <a16:creationId xmlns:a16="http://schemas.microsoft.com/office/drawing/2014/main" id="{791D905E-1BEA-4DF9-9620-8707DC5C94D7}"/>
+                <a16:creationId xmlns:a16="http://schemas.microsoft.com/office/drawing/2014/main" id="{D4C9206A-EF91-4F56-90D6-ECBF89987F55}"/>
               </a:ext>
             </a:extLst>
           </p:cNvPr>
@@ -10792,7 +11165,7 @@
           <p:cNvPr id="8" name="">
             <a:extLst xmlns:a="http://schemas.openxmlformats.org/drawingml/2006/main">
               <a:ext uri="{FF2B5EF4-FFF2-40B4-BE49-F238E27FC236}">
-                <a16:creationId xmlns:a16="http://schemas.microsoft.com/office/drawing/2014/main" id="{98D091F1-92D1-4E5E-8193-1855AF62EAAB}"/>
+                <a16:creationId xmlns:a16="http://schemas.microsoft.com/office/drawing/2014/main" id="{EED382D2-73DB-47A5-ABAC-2206AEEBD9A6}"/>
               </a:ext>
             </a:extLst>
           </p:cNvPr>
@@ -10842,7 +11215,7 @@
           <p:cNvPr id="9" name="">
             <a:extLst xmlns:a="http://schemas.openxmlformats.org/drawingml/2006/main">
               <a:ext uri="{FF2B5EF4-FFF2-40B4-BE49-F238E27FC236}">
-                <a16:creationId xmlns:a16="http://schemas.microsoft.com/office/drawing/2014/main" id="{D9BD19CA-E909-48B8-A80A-DC80B8DE0A42}"/>
+                <a16:creationId xmlns:a16="http://schemas.microsoft.com/office/drawing/2014/main" id="{09DA4E00-CE92-45F3-84BC-21541DAE5D15}"/>
               </a:ext>
             </a:extLst>
           </p:cNvPr>
@@ -10875,7 +11248,7 @@
           <p:cNvPr id="10" name="">
             <a:extLst xmlns:a="http://schemas.openxmlformats.org/drawingml/2006/main">
               <a:ext uri="{FF2B5EF4-FFF2-40B4-BE49-F238E27FC236}">
-                <a16:creationId xmlns:a16="http://schemas.microsoft.com/office/drawing/2014/main" id="{86A2E78D-E86A-44BB-A8D9-9CEDDE119216}"/>
+                <a16:creationId xmlns:a16="http://schemas.microsoft.com/office/drawing/2014/main" id="{4C9008A4-D7CC-4A55-B7C8-9BA9E280BE80}"/>
               </a:ext>
             </a:extLst>
           </p:cNvPr>
@@ -10925,7 +11298,7 @@
           <p:cNvPr id="11" name="">
             <a:extLst xmlns:a="http://schemas.openxmlformats.org/drawingml/2006/main">
               <a:ext uri="{FF2B5EF4-FFF2-40B4-BE49-F238E27FC236}">
-                <a16:creationId xmlns:a16="http://schemas.microsoft.com/office/drawing/2014/main" id="{E793766B-7F76-47E8-8DD8-E0C22782833A}"/>
+                <a16:creationId xmlns:a16="http://schemas.microsoft.com/office/drawing/2014/main" id="{1D7A6880-855B-418A-8EFC-93B49880DF60}"/>
               </a:ext>
             </a:extLst>
           </p:cNvPr>
@@ -10975,7 +11348,7 @@
           <p:cNvPr id="12" name="">
             <a:extLst xmlns:a="http://schemas.openxmlformats.org/drawingml/2006/main">
               <a:ext uri="{FF2B5EF4-FFF2-40B4-BE49-F238E27FC236}">
-                <a16:creationId xmlns:a16="http://schemas.microsoft.com/office/drawing/2014/main" id="{73F8E846-1332-4864-8880-15F79B7AFA65}"/>
+                <a16:creationId xmlns:a16="http://schemas.microsoft.com/office/drawing/2014/main" id="{856F76E4-CAE4-491B-BBD9-C181C90AE18E}"/>
               </a:ext>
             </a:extLst>
           </p:cNvPr>
@@ -11008,7 +11381,7 @@
           <p:cNvPr id="13" name="">
             <a:extLst xmlns:a="http://schemas.openxmlformats.org/drawingml/2006/main">
               <a:ext uri="{FF2B5EF4-FFF2-40B4-BE49-F238E27FC236}">
-                <a16:creationId xmlns:a16="http://schemas.microsoft.com/office/drawing/2014/main" id="{82C43AC7-CD58-4054-9561-650109950C84}"/>
+                <a16:creationId xmlns:a16="http://schemas.microsoft.com/office/drawing/2014/main" id="{0761E939-8329-493E-A005-3B54802DED4C}"/>
               </a:ext>
             </a:extLst>
           </p:cNvPr>
@@ -11058,7 +11431,7 @@
           <p:cNvPr id="14" name="">
             <a:extLst xmlns:a="http://schemas.openxmlformats.org/drawingml/2006/main">
               <a:ext uri="{FF2B5EF4-FFF2-40B4-BE49-F238E27FC236}">
-                <a16:creationId xmlns:a16="http://schemas.microsoft.com/office/drawing/2014/main" id="{93B64E95-B343-4C78-8003-B476809BDF1B}"/>
+                <a16:creationId xmlns:a16="http://schemas.microsoft.com/office/drawing/2014/main" id="{152F1C8A-8C57-48A9-BF1E-870092B328B8}"/>
               </a:ext>
             </a:extLst>
           </p:cNvPr>
@@ -11108,7 +11481,7 @@
           <p:cNvPr id="15" name="">
             <a:extLst xmlns:a="http://schemas.openxmlformats.org/drawingml/2006/main">
               <a:ext uri="{FF2B5EF4-FFF2-40B4-BE49-F238E27FC236}">
-                <a16:creationId xmlns:a16="http://schemas.microsoft.com/office/drawing/2014/main" id="{D10D35FC-BB12-4511-8A10-9AD582047550}"/>
+                <a16:creationId xmlns:a16="http://schemas.microsoft.com/office/drawing/2014/main" id="{1AF4E21B-407B-423D-84CD-C458D6EF35A5}"/>
               </a:ext>
             </a:extLst>
           </p:cNvPr>
@@ -11141,7 +11514,7 @@
           <p:cNvPr id="16" name="">
             <a:extLst xmlns:a="http://schemas.openxmlformats.org/drawingml/2006/main">
               <a:ext uri="{FF2B5EF4-FFF2-40B4-BE49-F238E27FC236}">
-                <a16:creationId xmlns:a16="http://schemas.microsoft.com/office/drawing/2014/main" id="{984B00D8-97F1-47A9-82AD-EC92F9A94721}"/>
+                <a16:creationId xmlns:a16="http://schemas.microsoft.com/office/drawing/2014/main" id="{472B2A09-60A0-4D76-9F4C-A0BB55368389}"/>
               </a:ext>
             </a:extLst>
           </p:cNvPr>
@@ -11191,7 +11564,7 @@
           <p:cNvPr id="17" name="">
             <a:extLst xmlns:a="http://schemas.openxmlformats.org/drawingml/2006/main">
               <a:ext uri="{FF2B5EF4-FFF2-40B4-BE49-F238E27FC236}">
-                <a16:creationId xmlns:a16="http://schemas.microsoft.com/office/drawing/2014/main" id="{46563B3A-188C-4AD8-B41F-00D93434A2F3}"/>
+                <a16:creationId xmlns:a16="http://schemas.microsoft.com/office/drawing/2014/main" id="{D657DBFD-D5E3-449A-B1C9-6FAD5A9658B0}"/>
               </a:ext>
             </a:extLst>
           </p:cNvPr>
@@ -11241,7 +11614,7 @@
           <p:cNvPr id="18" name="">
             <a:extLst xmlns:a="http://schemas.openxmlformats.org/drawingml/2006/main">
               <a:ext uri="{FF2B5EF4-FFF2-40B4-BE49-F238E27FC236}">
-                <a16:creationId xmlns:a16="http://schemas.microsoft.com/office/drawing/2014/main" id="{357B521A-CD0D-4867-9130-F93F11649636}"/>
+                <a16:creationId xmlns:a16="http://schemas.microsoft.com/office/drawing/2014/main" id="{62859696-40FA-4F29-9FFC-86F88C77655F}"/>
               </a:ext>
             </a:extLst>
           </p:cNvPr>
@@ -11274,7 +11647,7 @@
           <p:cNvPr id="19" name="">
             <a:extLst xmlns:a="http://schemas.openxmlformats.org/drawingml/2006/main">
               <a:ext uri="{FF2B5EF4-FFF2-40B4-BE49-F238E27FC236}">
-                <a16:creationId xmlns:a16="http://schemas.microsoft.com/office/drawing/2014/main" id="{2031776C-81E1-4C2F-9FC2-99BBA60AFA69}"/>
+                <a16:creationId xmlns:a16="http://schemas.microsoft.com/office/drawing/2014/main" id="{95BF3BD5-5A04-4170-A596-F8BFEC311D92}"/>
               </a:ext>
             </a:extLst>
           </p:cNvPr>
@@ -11324,7 +11697,7 @@
           <p:cNvPr id="20" name="">
             <a:extLst xmlns:a="http://schemas.openxmlformats.org/drawingml/2006/main">
               <a:ext uri="{FF2B5EF4-FFF2-40B4-BE49-F238E27FC236}">
-                <a16:creationId xmlns:a16="http://schemas.microsoft.com/office/drawing/2014/main" id="{AD3A933C-AC8D-4F3B-98F1-D666D6012AA0}"/>
+                <a16:creationId xmlns:a16="http://schemas.microsoft.com/office/drawing/2014/main" id="{56F5141C-C7A9-40AD-97BB-40E730C9BE32}"/>
               </a:ext>
             </a:extLst>
           </p:cNvPr>
@@ -11374,7 +11747,7 @@
           <p:cNvPr id="21" name="">
             <a:extLst xmlns:a="http://schemas.openxmlformats.org/drawingml/2006/main">
               <a:ext uri="{FF2B5EF4-FFF2-40B4-BE49-F238E27FC236}">
-                <a16:creationId xmlns:a16="http://schemas.microsoft.com/office/drawing/2014/main" id="{6C5B3D7C-C57A-4AE3-8E05-195422E78A5E}"/>
+                <a16:creationId xmlns:a16="http://schemas.microsoft.com/office/drawing/2014/main" id="{5D6CE8F2-C92D-4CD3-B44B-9E4E8BDEA2F5}"/>
               </a:ext>
             </a:extLst>
           </p:cNvPr>
@@ -11407,7 +11780,7 @@
           <p:cNvPr id="22" name="">
             <a:extLst xmlns:a="http://schemas.openxmlformats.org/drawingml/2006/main">
               <a:ext uri="{FF2B5EF4-FFF2-40B4-BE49-F238E27FC236}">
-                <a16:creationId xmlns:a16="http://schemas.microsoft.com/office/drawing/2014/main" id="{11776854-0ABE-4BC7-9CCA-BF293FC34A01}"/>
+                <a16:creationId xmlns:a16="http://schemas.microsoft.com/office/drawing/2014/main" id="{D52B9E50-6734-40D8-8216-B5AA1CD006FC}"/>
               </a:ext>
             </a:extLst>
           </p:cNvPr>
@@ -11457,7 +11830,7 @@
           <p:cNvPr id="23" name="">
             <a:extLst xmlns:a="http://schemas.openxmlformats.org/drawingml/2006/main">
               <a:ext uri="{FF2B5EF4-FFF2-40B4-BE49-F238E27FC236}">
-                <a16:creationId xmlns:a16="http://schemas.microsoft.com/office/drawing/2014/main" id="{48D4BDDD-CD3A-41A6-8A35-DD115CB01836}"/>
+                <a16:creationId xmlns:a16="http://schemas.microsoft.com/office/drawing/2014/main" id="{4CE9406E-24BD-411F-BBEA-B2AD4001F237}"/>
               </a:ext>
             </a:extLst>
           </p:cNvPr>
@@ -11507,7 +11880,7 @@
           <p:cNvPr id="24" name="">
             <a:extLst xmlns:a="http://schemas.openxmlformats.org/drawingml/2006/main">
               <a:ext uri="{FF2B5EF4-FFF2-40B4-BE49-F238E27FC236}">
-                <a16:creationId xmlns:a16="http://schemas.microsoft.com/office/drawing/2014/main" id="{C44059E6-390D-49C3-A12E-0615F8A3687D}"/>
+                <a16:creationId xmlns:a16="http://schemas.microsoft.com/office/drawing/2014/main" id="{5C0476B7-C9F4-4266-AE1B-2AEAA2A659FC}"/>
               </a:ext>
             </a:extLst>
           </p:cNvPr>
@@ -11548,7 +11921,7 @@
           <p:cNvPr id="25" name="">
             <a:extLst xmlns:a="http://schemas.openxmlformats.org/drawingml/2006/main">
               <a:ext uri="{FF2B5EF4-FFF2-40B4-BE49-F238E27FC236}">
-                <a16:creationId xmlns:a16="http://schemas.microsoft.com/office/drawing/2014/main" id="{A9B04B0C-C470-4ECD-880A-5785831E13A5}"/>
+                <a16:creationId xmlns:a16="http://schemas.microsoft.com/office/drawing/2014/main" id="{084EE425-C9FF-4EAC-AF0F-8B8FEDC78237}"/>
               </a:ext>
             </a:extLst>
           </p:cNvPr>
@@ -11598,7 +11971,7 @@
           <p:cNvPr id="26" name="">
             <a:extLst xmlns:a="http://schemas.openxmlformats.org/drawingml/2006/main">
               <a:ext uri="{FF2B5EF4-FFF2-40B4-BE49-F238E27FC236}">
-                <a16:creationId xmlns:a16="http://schemas.microsoft.com/office/drawing/2014/main" id="{3DFCD680-3128-4641-A635-BD32300AFC30}"/>
+                <a16:creationId xmlns:a16="http://schemas.microsoft.com/office/drawing/2014/main" id="{04E4CC6F-4B55-402E-B1F6-DDE53251F429}"/>
               </a:ext>
             </a:extLst>
           </p:cNvPr>
@@ -11648,7 +12021,7 @@
           <p:cNvPr id="27" name="">
             <a:extLst xmlns:a="http://schemas.openxmlformats.org/drawingml/2006/main">
               <a:ext uri="{FF2B5EF4-FFF2-40B4-BE49-F238E27FC236}">
-                <a16:creationId xmlns:a16="http://schemas.microsoft.com/office/drawing/2014/main" id="{78A7C643-EAE0-4870-AC72-C321201C41E4}"/>
+                <a16:creationId xmlns:a16="http://schemas.microsoft.com/office/drawing/2014/main" id="{CE9BB1B4-0038-4668-A365-10AA54FE3D35}"/>
               </a:ext>
             </a:extLst>
           </p:cNvPr>
@@ -11679,7 +12052,7 @@
           <p:cNvPr id="28" name="source-2">
             <a:extLst xmlns:a="http://schemas.openxmlformats.org/drawingml/2006/main">
               <a:ext uri="{FF2B5EF4-FFF2-40B4-BE49-F238E27FC236}">
-                <a16:creationId xmlns:a16="http://schemas.microsoft.com/office/drawing/2014/main" id="{F7849A09-5FC3-47E5-92A0-BFCE3BFA2BA6}"/>
+                <a16:creationId xmlns:a16="http://schemas.microsoft.com/office/drawing/2014/main" id="{1D3608C8-B6A8-498B-9E6A-B160178CE5FD}"/>
               </a:ext>
             </a:extLst>
           </p:cNvPr>
@@ -11729,7 +12102,7 @@
           <p:cNvPr id="29" name="page-2">
             <a:extLst xmlns:a="http://schemas.openxmlformats.org/drawingml/2006/main">
               <a:ext uri="{FF2B5EF4-FFF2-40B4-BE49-F238E27FC236}">
-                <a16:creationId xmlns:a16="http://schemas.microsoft.com/office/drawing/2014/main" id="{C8D9AF06-9E1C-49F9-A30B-695E3AFF8A64}"/>
+                <a16:creationId xmlns:a16="http://schemas.microsoft.com/office/drawing/2014/main" id="{B0EB3BD7-7223-475C-A8FC-936B684807A7}"/>
               </a:ext>
             </a:extLst>
           </p:cNvPr>
@@ -11777,7 +12150,7 @@
     </p:spTree>
     <p:extLst>
       <p:ext uri="{BB962C8B-B14F-4D97-AF65-F5344CB8AC3E}">
-        <p14:creationId xmlns:p14="http://schemas.microsoft.com/office/powerpoint/2010/main" val="456448301"/>
+        <p14:creationId xmlns:p14="http://schemas.microsoft.com/office/powerpoint/2010/main" val="1478103298"/>
       </p:ext>
     </p:extLst>
   </p:cSld>
@@ -11808,7 +12181,7 @@
           <p:cNvPr id="29" name="kicker-3">
             <a:extLst xmlns:a="http://schemas.openxmlformats.org/drawingml/2006/main">
               <a:ext uri="{FF2B5EF4-FFF2-40B4-BE49-F238E27FC236}">
-                <a16:creationId xmlns:a16="http://schemas.microsoft.com/office/drawing/2014/main" id="{B041D99E-61F4-4342-B23A-3DCD88ACFFE6}"/>
+                <a16:creationId xmlns:a16="http://schemas.microsoft.com/office/drawing/2014/main" id="{1EDD93B9-D336-43FF-9D39-5F3A70042F07}"/>
               </a:ext>
             </a:extLst>
           </p:cNvPr>
@@ -11858,7 +12231,7 @@
           <p:cNvPr id="2" name="title-3">
             <a:extLst xmlns:a="http://schemas.openxmlformats.org/drawingml/2006/main">
               <a:ext uri="{FF2B5EF4-FFF2-40B4-BE49-F238E27FC236}">
-                <a16:creationId xmlns:a16="http://schemas.microsoft.com/office/drawing/2014/main" id="{32B745FE-D52F-4339-A55E-3F58483F34C7}"/>
+                <a16:creationId xmlns:a16="http://schemas.microsoft.com/office/drawing/2014/main" id="{F15915F0-4E4B-4CFD-84C8-5179FB100BB9}"/>
               </a:ext>
             </a:extLst>
           </p:cNvPr>
@@ -11898,7 +12271,7 @@
                   <a:srgbClr val="0F172A"/>
                 </a:solidFill>
               </a:rPr>
-              <a:t>The breakthrough was a selective cascade</a:t>
+              <a:t>The working hypothesis became a selective cascade</a:t>
             </a:r>
           </a:p>
         </p:txBody>
@@ -11908,7 +12281,7 @@
           <p:cNvPr id="3" name="">
             <a:extLst xmlns:a="http://schemas.openxmlformats.org/drawingml/2006/main">
               <a:ext uri="{FF2B5EF4-FFF2-40B4-BE49-F238E27FC236}">
-                <a16:creationId xmlns:a16="http://schemas.microsoft.com/office/drawing/2014/main" id="{BC70EC07-38CF-4E30-91F9-3098C92452CE}"/>
+                <a16:creationId xmlns:a16="http://schemas.microsoft.com/office/drawing/2014/main" id="{C21D17DE-EF03-47AB-BBFA-3F7DACE19618}"/>
               </a:ext>
             </a:extLst>
           </p:cNvPr>
@@ -11939,7 +12312,7 @@
           <p:cNvPr id="4" name="">
             <a:extLst xmlns:a="http://schemas.openxmlformats.org/drawingml/2006/main">
               <a:ext uri="{FF2B5EF4-FFF2-40B4-BE49-F238E27FC236}">
-                <a16:creationId xmlns:a16="http://schemas.microsoft.com/office/drawing/2014/main" id="{51819A30-21FF-49C4-A836-D41EBA45F21F}"/>
+                <a16:creationId xmlns:a16="http://schemas.microsoft.com/office/drawing/2014/main" id="{ED1EB538-C74F-443F-AC7C-A656ABF74A39}"/>
               </a:ext>
             </a:extLst>
           </p:cNvPr>
@@ -11989,7 +12362,7 @@
           <p:cNvPr id="5" name="">
             <a:extLst xmlns:a="http://schemas.openxmlformats.org/drawingml/2006/main">
               <a:ext uri="{FF2B5EF4-FFF2-40B4-BE49-F238E27FC236}">
-                <a16:creationId xmlns:a16="http://schemas.microsoft.com/office/drawing/2014/main" id="{89722031-6BDA-4036-9659-BAED8249FD79}"/>
+                <a16:creationId xmlns:a16="http://schemas.microsoft.com/office/drawing/2014/main" id="{CE56F57B-ADCD-4E84-BA7A-040813D81DEF}"/>
               </a:ext>
             </a:extLst>
           </p:cNvPr>
@@ -12022,7 +12395,7 @@
           <p:cNvPr id="6" name="">
             <a:extLst xmlns:a="http://schemas.openxmlformats.org/drawingml/2006/main">
               <a:ext uri="{FF2B5EF4-FFF2-40B4-BE49-F238E27FC236}">
-                <a16:creationId xmlns:a16="http://schemas.microsoft.com/office/drawing/2014/main" id="{324B2A36-F439-47AD-A80B-13BF61C30424}"/>
+                <a16:creationId xmlns:a16="http://schemas.microsoft.com/office/drawing/2014/main" id="{8A5778D6-7B38-4A97-BBF8-925C24A0FB34}"/>
               </a:ext>
             </a:extLst>
           </p:cNvPr>
@@ -12055,7 +12428,7 @@
           <p:cNvPr id="7" name="">
             <a:extLst xmlns:a="http://schemas.openxmlformats.org/drawingml/2006/main">
               <a:ext uri="{FF2B5EF4-FFF2-40B4-BE49-F238E27FC236}">
-                <a16:creationId xmlns:a16="http://schemas.microsoft.com/office/drawing/2014/main" id="{386C29BD-24CC-4C0D-8323-4434E84D53A5}"/>
+                <a16:creationId xmlns:a16="http://schemas.microsoft.com/office/drawing/2014/main" id="{AEB9CF4F-5452-4E42-B94C-707D65AEDF30}"/>
               </a:ext>
             </a:extLst>
           </p:cNvPr>
@@ -12088,7 +12461,7 @@
           <p:cNvPr id="8" name="">
             <a:extLst xmlns:a="http://schemas.openxmlformats.org/drawingml/2006/main">
               <a:ext uri="{FF2B5EF4-FFF2-40B4-BE49-F238E27FC236}">
-                <a16:creationId xmlns:a16="http://schemas.microsoft.com/office/drawing/2014/main" id="{F2227328-5566-435C-AB07-2CFBF0020DF5}"/>
+                <a16:creationId xmlns:a16="http://schemas.microsoft.com/office/drawing/2014/main" id="{359BD188-0754-4F90-ACDA-ED2E873C70A0}"/>
               </a:ext>
             </a:extLst>
           </p:cNvPr>
@@ -12121,7 +12494,7 @@
           <p:cNvPr id="9" name="pipeline-0">
             <a:extLst xmlns:a="http://schemas.openxmlformats.org/drawingml/2006/main">
               <a:ext uri="{FF2B5EF4-FFF2-40B4-BE49-F238E27FC236}">
-                <a16:creationId xmlns:a16="http://schemas.microsoft.com/office/drawing/2014/main" id="{679E46D5-75CD-40E6-B0CB-CA135D750C2B}"/>
+                <a16:creationId xmlns:a16="http://schemas.microsoft.com/office/drawing/2014/main" id="{C755496F-EC8C-4637-9C05-FD52D8B62F0B}"/>
               </a:ext>
             </a:extLst>
           </p:cNvPr>
@@ -12162,7 +12535,7 @@
           <p:cNvPr id="10" name="">
             <a:extLst xmlns:a="http://schemas.openxmlformats.org/drawingml/2006/main">
               <a:ext uri="{FF2B5EF4-FFF2-40B4-BE49-F238E27FC236}">
-                <a16:creationId xmlns:a16="http://schemas.microsoft.com/office/drawing/2014/main" id="{FD9CCFD2-4447-4F4B-A6A3-B032310D9156}"/>
+                <a16:creationId xmlns:a16="http://schemas.microsoft.com/office/drawing/2014/main" id="{53D8CB73-A5A6-4739-8014-890F66879153}"/>
               </a:ext>
             </a:extLst>
           </p:cNvPr>
@@ -12212,7 +12585,7 @@
           <p:cNvPr id="11" name="">
             <a:extLst xmlns:a="http://schemas.openxmlformats.org/drawingml/2006/main">
               <a:ext uri="{FF2B5EF4-FFF2-40B4-BE49-F238E27FC236}">
-                <a16:creationId xmlns:a16="http://schemas.microsoft.com/office/drawing/2014/main" id="{EBF41478-0D4C-4DAB-99D6-7C9452C1DD0F}"/>
+                <a16:creationId xmlns:a16="http://schemas.microsoft.com/office/drawing/2014/main" id="{07BEDDB1-6D20-44B8-91EA-457700F6F049}"/>
               </a:ext>
             </a:extLst>
           </p:cNvPr>
@@ -12279,7 +12652,7 @@
           <p:cNvPr id="12" name="pipeline-1">
             <a:extLst xmlns:a="http://schemas.openxmlformats.org/drawingml/2006/main">
               <a:ext uri="{FF2B5EF4-FFF2-40B4-BE49-F238E27FC236}">
-                <a16:creationId xmlns:a16="http://schemas.microsoft.com/office/drawing/2014/main" id="{2D1FDF15-E0D4-4198-B0FA-C035BE5FA64F}"/>
+                <a16:creationId xmlns:a16="http://schemas.microsoft.com/office/drawing/2014/main" id="{EB86841F-CE7D-4FC4-8965-5D111BA1D107}"/>
               </a:ext>
             </a:extLst>
           </p:cNvPr>
@@ -12320,7 +12693,7 @@
           <p:cNvPr id="13" name="">
             <a:extLst xmlns:a="http://schemas.openxmlformats.org/drawingml/2006/main">
               <a:ext uri="{FF2B5EF4-FFF2-40B4-BE49-F238E27FC236}">
-                <a16:creationId xmlns:a16="http://schemas.microsoft.com/office/drawing/2014/main" id="{1E41C2B5-41E1-42C0-9D9E-5ABBEDFB29A9}"/>
+                <a16:creationId xmlns:a16="http://schemas.microsoft.com/office/drawing/2014/main" id="{848BFAFF-3CAA-4E4B-ADE2-8D8AF548C496}"/>
               </a:ext>
             </a:extLst>
           </p:cNvPr>
@@ -12370,7 +12743,7 @@
           <p:cNvPr id="14" name="">
             <a:extLst xmlns:a="http://schemas.openxmlformats.org/drawingml/2006/main">
               <a:ext uri="{FF2B5EF4-FFF2-40B4-BE49-F238E27FC236}">
-                <a16:creationId xmlns:a16="http://schemas.microsoft.com/office/drawing/2014/main" id="{F4AE742C-7ED8-4645-AD5D-7E6F0B76E14B}"/>
+                <a16:creationId xmlns:a16="http://schemas.microsoft.com/office/drawing/2014/main" id="{691AA2E5-4E5B-47EA-A9D6-C4A51F3D136C}"/>
               </a:ext>
             </a:extLst>
           </p:cNvPr>
@@ -12437,7 +12810,7 @@
           <p:cNvPr id="15" name="pipeline-2">
             <a:extLst xmlns:a="http://schemas.openxmlformats.org/drawingml/2006/main">
               <a:ext uri="{FF2B5EF4-FFF2-40B4-BE49-F238E27FC236}">
-                <a16:creationId xmlns:a16="http://schemas.microsoft.com/office/drawing/2014/main" id="{18E8BCF3-01F9-4C5F-A9C8-CEFF5AA70F8A}"/>
+                <a16:creationId xmlns:a16="http://schemas.microsoft.com/office/drawing/2014/main" id="{CD4E5498-95BF-4A0A-B015-AEBEBE25504C}"/>
               </a:ext>
             </a:extLst>
           </p:cNvPr>
@@ -12478,7 +12851,7 @@
           <p:cNvPr id="16" name="">
             <a:extLst xmlns:a="http://schemas.openxmlformats.org/drawingml/2006/main">
               <a:ext uri="{FF2B5EF4-FFF2-40B4-BE49-F238E27FC236}">
-                <a16:creationId xmlns:a16="http://schemas.microsoft.com/office/drawing/2014/main" id="{1545182A-635D-4216-A114-B63BE2892D5E}"/>
+                <a16:creationId xmlns:a16="http://schemas.microsoft.com/office/drawing/2014/main" id="{3A631005-123B-4AB5-A315-29D05CE282E5}"/>
               </a:ext>
             </a:extLst>
           </p:cNvPr>
@@ -12528,7 +12901,7 @@
           <p:cNvPr id="17" name="">
             <a:extLst xmlns:a="http://schemas.openxmlformats.org/drawingml/2006/main">
               <a:ext uri="{FF2B5EF4-FFF2-40B4-BE49-F238E27FC236}">
-                <a16:creationId xmlns:a16="http://schemas.microsoft.com/office/drawing/2014/main" id="{9E8E2FC4-D46C-4C2B-9E3C-61AB393AA6DD}"/>
+                <a16:creationId xmlns:a16="http://schemas.microsoft.com/office/drawing/2014/main" id="{130CCF3E-42CB-48F9-B821-93083803D321}"/>
               </a:ext>
             </a:extLst>
           </p:cNvPr>
@@ -12595,7 +12968,7 @@
           <p:cNvPr id="18" name="pipeline-3">
             <a:extLst xmlns:a="http://schemas.openxmlformats.org/drawingml/2006/main">
               <a:ext uri="{FF2B5EF4-FFF2-40B4-BE49-F238E27FC236}">
-                <a16:creationId xmlns:a16="http://schemas.microsoft.com/office/drawing/2014/main" id="{7F3684A8-3B64-4B6D-9746-66B29E474ACA}"/>
+                <a16:creationId xmlns:a16="http://schemas.microsoft.com/office/drawing/2014/main" id="{1763E046-E424-477C-B224-D54C30E8D596}"/>
               </a:ext>
             </a:extLst>
           </p:cNvPr>
@@ -12636,7 +13009,7 @@
           <p:cNvPr id="19" name="">
             <a:extLst xmlns:a="http://schemas.openxmlformats.org/drawingml/2006/main">
               <a:ext uri="{FF2B5EF4-FFF2-40B4-BE49-F238E27FC236}">
-                <a16:creationId xmlns:a16="http://schemas.microsoft.com/office/drawing/2014/main" id="{CBDBCA72-46EC-4311-BA34-BF07AA6D0A65}"/>
+                <a16:creationId xmlns:a16="http://schemas.microsoft.com/office/drawing/2014/main" id="{8D9F6A5A-AC62-4DF4-AE01-D92799E9627B}"/>
               </a:ext>
             </a:extLst>
           </p:cNvPr>
@@ -12686,7 +13059,7 @@
           <p:cNvPr id="20" name="">
             <a:extLst xmlns:a="http://schemas.openxmlformats.org/drawingml/2006/main">
               <a:ext uri="{FF2B5EF4-FFF2-40B4-BE49-F238E27FC236}">
-                <a16:creationId xmlns:a16="http://schemas.microsoft.com/office/drawing/2014/main" id="{3AD84915-6722-46B8-B666-B266CD3F4F28}"/>
+                <a16:creationId xmlns:a16="http://schemas.microsoft.com/office/drawing/2014/main" id="{E2C68B8E-7F8F-4C8E-B8D5-C5DC2C773471}"/>
               </a:ext>
             </a:extLst>
           </p:cNvPr>
@@ -12753,7 +13126,7 @@
           <p:cNvPr id="21" name="pipeline-4">
             <a:extLst xmlns:a="http://schemas.openxmlformats.org/drawingml/2006/main">
               <a:ext uri="{FF2B5EF4-FFF2-40B4-BE49-F238E27FC236}">
-                <a16:creationId xmlns:a16="http://schemas.microsoft.com/office/drawing/2014/main" id="{4DEAAAFD-006E-40A2-BCD1-72482BD712D3}"/>
+                <a16:creationId xmlns:a16="http://schemas.microsoft.com/office/drawing/2014/main" id="{106F8333-CAD4-4A8E-A56C-DA44D90AE5A5}"/>
               </a:ext>
             </a:extLst>
           </p:cNvPr>
@@ -12794,7 +13167,7 @@
           <p:cNvPr id="22" name="">
             <a:extLst xmlns:a="http://schemas.openxmlformats.org/drawingml/2006/main">
               <a:ext uri="{FF2B5EF4-FFF2-40B4-BE49-F238E27FC236}">
-                <a16:creationId xmlns:a16="http://schemas.microsoft.com/office/drawing/2014/main" id="{EC2AFD8E-18C4-4CCB-A6AD-BD580D47E8AD}"/>
+                <a16:creationId xmlns:a16="http://schemas.microsoft.com/office/drawing/2014/main" id="{87303980-DB20-4BC0-8153-5FCDB28A839F}"/>
               </a:ext>
             </a:extLst>
           </p:cNvPr>
@@ -12844,7 +13217,7 @@
           <p:cNvPr id="23" name="">
             <a:extLst xmlns:a="http://schemas.openxmlformats.org/drawingml/2006/main">
               <a:ext uri="{FF2B5EF4-FFF2-40B4-BE49-F238E27FC236}">
-                <a16:creationId xmlns:a16="http://schemas.microsoft.com/office/drawing/2014/main" id="{D7243FEA-C32F-46DF-9E82-4C42B10A4A23}"/>
+                <a16:creationId xmlns:a16="http://schemas.microsoft.com/office/drawing/2014/main" id="{2434B39E-3014-47C6-82DC-84CA7482F2A1}"/>
               </a:ext>
             </a:extLst>
           </p:cNvPr>
@@ -12911,7 +13284,7 @@
           <p:cNvPr id="24" name="">
             <a:extLst xmlns:a="http://schemas.openxmlformats.org/drawingml/2006/main">
               <a:ext uri="{FF2B5EF4-FFF2-40B4-BE49-F238E27FC236}">
-                <a16:creationId xmlns:a16="http://schemas.microsoft.com/office/drawing/2014/main" id="{3B92CB4E-8563-44EF-8679-4E3D6EAA0B42}"/>
+                <a16:creationId xmlns:a16="http://schemas.microsoft.com/office/drawing/2014/main" id="{AE0A5C6F-A1C5-4E41-9E19-4B9F738E158F}"/>
               </a:ext>
             </a:extLst>
           </p:cNvPr>
@@ -12961,7 +13334,7 @@
           <p:cNvPr id="25" name="">
             <a:extLst xmlns:a="http://schemas.openxmlformats.org/drawingml/2006/main">
               <a:ext uri="{FF2B5EF4-FFF2-40B4-BE49-F238E27FC236}">
-                <a16:creationId xmlns:a16="http://schemas.microsoft.com/office/drawing/2014/main" id="{EDAB58C0-A30F-437D-A9B5-8F1D78AFA4FA}"/>
+                <a16:creationId xmlns:a16="http://schemas.microsoft.com/office/drawing/2014/main" id="{23A64C4D-1326-4B91-88C4-D13500F2C44C}"/>
               </a:ext>
             </a:extLst>
           </p:cNvPr>
@@ -13011,7 +13384,7 @@
           <p:cNvPr id="26" name="">
             <a:extLst xmlns:a="http://schemas.openxmlformats.org/drawingml/2006/main">
               <a:ext uri="{FF2B5EF4-FFF2-40B4-BE49-F238E27FC236}">
-                <a16:creationId xmlns:a16="http://schemas.microsoft.com/office/drawing/2014/main" id="{0F63F25D-E531-4F1F-93F6-49A7DC903158}"/>
+                <a16:creationId xmlns:a16="http://schemas.microsoft.com/office/drawing/2014/main" id="{EB4D11CD-7952-457A-B193-AEF991F0EB41}"/>
               </a:ext>
             </a:extLst>
           </p:cNvPr>
@@ -13042,7 +13415,7 @@
           <p:cNvPr id="27" name="source-3">
             <a:extLst xmlns:a="http://schemas.openxmlformats.org/drawingml/2006/main">
               <a:ext uri="{FF2B5EF4-FFF2-40B4-BE49-F238E27FC236}">
-                <a16:creationId xmlns:a16="http://schemas.microsoft.com/office/drawing/2014/main" id="{F9DCA80E-AB8B-49F5-882C-1E6C410CD72A}"/>
+                <a16:creationId xmlns:a16="http://schemas.microsoft.com/office/drawing/2014/main" id="{5465011E-8753-4CA1-8A52-C189DE9B142C}"/>
               </a:ext>
             </a:extLst>
           </p:cNvPr>
@@ -13092,7 +13465,7 @@
           <p:cNvPr id="28" name="page-3">
             <a:extLst xmlns:a="http://schemas.openxmlformats.org/drawingml/2006/main">
               <a:ext uri="{FF2B5EF4-FFF2-40B4-BE49-F238E27FC236}">
-                <a16:creationId xmlns:a16="http://schemas.microsoft.com/office/drawing/2014/main" id="{DE9D5C06-3E5C-46A2-A49B-8D018FD3DB81}"/>
+                <a16:creationId xmlns:a16="http://schemas.microsoft.com/office/drawing/2014/main" id="{AF3E1CDA-4CA2-4CF8-A84C-2859C190E8E7}"/>
               </a:ext>
             </a:extLst>
           </p:cNvPr>
@@ -13140,7 +13513,7 @@
     </p:spTree>
     <p:extLst>
       <p:ext uri="{BB962C8B-B14F-4D97-AF65-F5344CB8AC3E}">
-        <p14:creationId xmlns:p14="http://schemas.microsoft.com/office/powerpoint/2010/main" val="1927319587"/>
+        <p14:creationId xmlns:p14="http://schemas.microsoft.com/office/powerpoint/2010/main" val="851341806"/>
       </p:ext>
     </p:extLst>
   </p:cSld>
@@ -13171,7 +13544,7 @@
           <p:cNvPr id="49" name="kicker-4">
             <a:extLst xmlns:a="http://schemas.openxmlformats.org/drawingml/2006/main">
               <a:ext uri="{FF2B5EF4-FFF2-40B4-BE49-F238E27FC236}">
-                <a16:creationId xmlns:a16="http://schemas.microsoft.com/office/drawing/2014/main" id="{E1B6D87E-D1E5-4306-BC40-257B8FB8977B}"/>
+                <a16:creationId xmlns:a16="http://schemas.microsoft.com/office/drawing/2014/main" id="{7A92DA30-FDBB-4708-A4BC-8F28C060FBEE}"/>
               </a:ext>
             </a:extLst>
           </p:cNvPr>
@@ -13221,7 +13594,7 @@
           <p:cNvPr id="2" name="title-4">
             <a:extLst xmlns:a="http://schemas.openxmlformats.org/drawingml/2006/main">
               <a:ext uri="{FF2B5EF4-FFF2-40B4-BE49-F238E27FC236}">
-                <a16:creationId xmlns:a16="http://schemas.microsoft.com/office/drawing/2014/main" id="{FC47EEF8-A7BC-4CE6-8C2A-A314B63C1033}"/>
+                <a16:creationId xmlns:a16="http://schemas.microsoft.com/office/drawing/2014/main" id="{074E97EA-2800-453A-A9BE-3C38ADF0616F}"/>
               </a:ext>
             </a:extLst>
           </p:cNvPr>
@@ -13261,7 +13634,7 @@
                   <a:srgbClr val="0F172A"/>
                 </a:solidFill>
               </a:rPr>
-              <a:t>The router selected an evidence policy before predicting</a:t>
+              <a:t>Routing made abstention an explicit state</a:t>
             </a:r>
           </a:p>
         </p:txBody>
@@ -13271,7 +13644,7 @@
           <p:cNvPr id="3" name="">
             <a:extLst xmlns:a="http://schemas.openxmlformats.org/drawingml/2006/main">
               <a:ext uri="{FF2B5EF4-FFF2-40B4-BE49-F238E27FC236}">
-                <a16:creationId xmlns:a16="http://schemas.microsoft.com/office/drawing/2014/main" id="{151E5B95-A80C-4CED-AFBF-C44E08685E42}"/>
+                <a16:creationId xmlns:a16="http://schemas.microsoft.com/office/drawing/2014/main" id="{2D3B87DC-D4A6-487D-A118-157A08A1BE5D}"/>
               </a:ext>
             </a:extLst>
           </p:cNvPr>
@@ -13302,7 +13675,7 @@
           <p:cNvPr id="4" name="">
             <a:extLst xmlns:a="http://schemas.openxmlformats.org/drawingml/2006/main">
               <a:ext uri="{FF2B5EF4-FFF2-40B4-BE49-F238E27FC236}">
-                <a16:creationId xmlns:a16="http://schemas.microsoft.com/office/drawing/2014/main" id="{C92A0CAD-11BD-4BDC-8380-EFFC73F5F0AC}"/>
+                <a16:creationId xmlns:a16="http://schemas.microsoft.com/office/drawing/2014/main" id="{F2547AFC-8C96-4718-A2D9-7AA81ED7E9BA}"/>
               </a:ext>
             </a:extLst>
           </p:cNvPr>
@@ -13352,7 +13725,7 @@
           <p:cNvPr id="5" name="">
             <a:extLst xmlns:a="http://schemas.openxmlformats.org/drawingml/2006/main">
               <a:ext uri="{FF2B5EF4-FFF2-40B4-BE49-F238E27FC236}">
-                <a16:creationId xmlns:a16="http://schemas.microsoft.com/office/drawing/2014/main" id="{6E22ACBF-93D7-4D81-9FB6-AD978EBBA349}"/>
+                <a16:creationId xmlns:a16="http://schemas.microsoft.com/office/drawing/2014/main" id="{80A2BF3A-6846-4709-9C7D-3EFC25C3D251}"/>
               </a:ext>
             </a:extLst>
           </p:cNvPr>
@@ -13385,7 +13758,7 @@
           <p:cNvPr id="6" name="">
             <a:extLst xmlns:a="http://schemas.openxmlformats.org/drawingml/2006/main">
               <a:ext uri="{FF2B5EF4-FFF2-40B4-BE49-F238E27FC236}">
-                <a16:creationId xmlns:a16="http://schemas.microsoft.com/office/drawing/2014/main" id="{F4118DF6-30E7-4135-844A-77EECB091D0B}"/>
+                <a16:creationId xmlns:a16="http://schemas.microsoft.com/office/drawing/2014/main" id="{1D33BB3F-CF36-4A64-9539-5B63FB862CCF}"/>
               </a:ext>
             </a:extLst>
           </p:cNvPr>
@@ -13418,7 +13791,7 @@
           <p:cNvPr id="7" name="">
             <a:extLst xmlns:a="http://schemas.openxmlformats.org/drawingml/2006/main">
               <a:ext uri="{FF2B5EF4-FFF2-40B4-BE49-F238E27FC236}">
-                <a16:creationId xmlns:a16="http://schemas.microsoft.com/office/drawing/2014/main" id="{BE9173A9-3833-420C-BD5C-79F886C68D54}"/>
+                <a16:creationId xmlns:a16="http://schemas.microsoft.com/office/drawing/2014/main" id="{64CA2443-B169-4AF7-B783-3404F0FBB29B}"/>
               </a:ext>
             </a:extLst>
           </p:cNvPr>
@@ -13451,7 +13824,7 @@
           <p:cNvPr id="8" name="">
             <a:extLst xmlns:a="http://schemas.openxmlformats.org/drawingml/2006/main">
               <a:ext uri="{FF2B5EF4-FFF2-40B4-BE49-F238E27FC236}">
-                <a16:creationId xmlns:a16="http://schemas.microsoft.com/office/drawing/2014/main" id="{88D7D772-9D3C-4B5E-B0A6-34FE6BBEC401}"/>
+                <a16:creationId xmlns:a16="http://schemas.microsoft.com/office/drawing/2014/main" id="{F58AC71C-9B78-4ABB-A232-22CB6ACC73FB}"/>
               </a:ext>
             </a:extLst>
           </p:cNvPr>
@@ -13484,7 +13857,7 @@
           <p:cNvPr id="9" name="">
             <a:extLst xmlns:a="http://schemas.openxmlformats.org/drawingml/2006/main">
               <a:ext uri="{FF2B5EF4-FFF2-40B4-BE49-F238E27FC236}">
-                <a16:creationId xmlns:a16="http://schemas.microsoft.com/office/drawing/2014/main" id="{99E43830-DDA6-41A7-8389-6DA72927A042}"/>
+                <a16:creationId xmlns:a16="http://schemas.microsoft.com/office/drawing/2014/main" id="{BBAD1DAA-2FF6-47F7-B303-6C0344382029}"/>
               </a:ext>
             </a:extLst>
           </p:cNvPr>
@@ -13517,7 +13890,7 @@
           <p:cNvPr id="10" name="">
             <a:extLst xmlns:a="http://schemas.openxmlformats.org/drawingml/2006/main">
               <a:ext uri="{FF2B5EF4-FFF2-40B4-BE49-F238E27FC236}">
-                <a16:creationId xmlns:a16="http://schemas.microsoft.com/office/drawing/2014/main" id="{6FDE55FA-B82D-41F9-B606-828A1DA3EBEA}"/>
+                <a16:creationId xmlns:a16="http://schemas.microsoft.com/office/drawing/2014/main" id="{78873D9A-079D-4D9F-ACC8-114A2D37131E}"/>
               </a:ext>
             </a:extLst>
           </p:cNvPr>
@@ -13550,7 +13923,7 @@
           <p:cNvPr id="11" name="">
             <a:extLst xmlns:a="http://schemas.openxmlformats.org/drawingml/2006/main">
               <a:ext uri="{FF2B5EF4-FFF2-40B4-BE49-F238E27FC236}">
-                <a16:creationId xmlns:a16="http://schemas.microsoft.com/office/drawing/2014/main" id="{F6A6AF91-6353-4553-9E2F-A7FC2FD637B1}"/>
+                <a16:creationId xmlns:a16="http://schemas.microsoft.com/office/drawing/2014/main" id="{1AAB3976-A3D0-4DA7-98B4-BBCC3CFAA4D5}"/>
               </a:ext>
             </a:extLst>
           </p:cNvPr>
@@ -13583,7 +13956,7 @@
           <p:cNvPr id="12" name="">
             <a:extLst xmlns:a="http://schemas.openxmlformats.org/drawingml/2006/main">
               <a:ext uri="{FF2B5EF4-FFF2-40B4-BE49-F238E27FC236}">
-                <a16:creationId xmlns:a16="http://schemas.microsoft.com/office/drawing/2014/main" id="{989454EF-24D4-4A03-A924-12E01859C595}"/>
+                <a16:creationId xmlns:a16="http://schemas.microsoft.com/office/drawing/2014/main" id="{0B5C22D2-18D5-45ED-B538-D81D1B143D8D}"/>
               </a:ext>
             </a:extLst>
           </p:cNvPr>
@@ -13616,7 +13989,7 @@
           <p:cNvPr id="13" name="">
             <a:extLst xmlns:a="http://schemas.openxmlformats.org/drawingml/2006/main">
               <a:ext uri="{FF2B5EF4-FFF2-40B4-BE49-F238E27FC236}">
-                <a16:creationId xmlns:a16="http://schemas.microsoft.com/office/drawing/2014/main" id="{2C31F274-4F2F-40DB-8DED-757726052BBC}"/>
+                <a16:creationId xmlns:a16="http://schemas.microsoft.com/office/drawing/2014/main" id="{F4B92989-1A71-4759-8C40-22795D643C3D}"/>
               </a:ext>
             </a:extLst>
           </p:cNvPr>
@@ -13657,7 +14030,7 @@
           <p:cNvPr id="14" name="">
             <a:extLst xmlns:a="http://schemas.openxmlformats.org/drawingml/2006/main">
               <a:ext uri="{FF2B5EF4-FFF2-40B4-BE49-F238E27FC236}">
-                <a16:creationId xmlns:a16="http://schemas.microsoft.com/office/drawing/2014/main" id="{8ECFC020-9160-426C-9916-B478D7817D9C}"/>
+                <a16:creationId xmlns:a16="http://schemas.microsoft.com/office/drawing/2014/main" id="{C425A085-103D-4838-9DBC-A8A197B5A282}"/>
               </a:ext>
             </a:extLst>
           </p:cNvPr>
@@ -13707,7 +14080,7 @@
           <p:cNvPr id="15" name="">
             <a:extLst xmlns:a="http://schemas.openxmlformats.org/drawingml/2006/main">
               <a:ext uri="{FF2B5EF4-FFF2-40B4-BE49-F238E27FC236}">
-                <a16:creationId xmlns:a16="http://schemas.microsoft.com/office/drawing/2014/main" id="{8CB10694-1EDC-4AD8-9999-33AE1973D674}"/>
+                <a16:creationId xmlns:a16="http://schemas.microsoft.com/office/drawing/2014/main" id="{9EF38E10-A386-430A-8D7B-BEB5F170045E}"/>
               </a:ext>
             </a:extLst>
           </p:cNvPr>
@@ -13757,7 +14130,7 @@
           <p:cNvPr id="16" name="">
             <a:extLst xmlns:a="http://schemas.openxmlformats.org/drawingml/2006/main">
               <a:ext uri="{FF2B5EF4-FFF2-40B4-BE49-F238E27FC236}">
-                <a16:creationId xmlns:a16="http://schemas.microsoft.com/office/drawing/2014/main" id="{8BEF3259-79C1-4D65-BE4F-0214DA7949FC}"/>
+                <a16:creationId xmlns:a16="http://schemas.microsoft.com/office/drawing/2014/main" id="{D9EFC611-389B-4DD5-8F1F-79C3B1ECD443}"/>
               </a:ext>
             </a:extLst>
           </p:cNvPr>
@@ -13790,7 +14163,7 @@
           <p:cNvPr id="17" name="">
             <a:extLst xmlns:a="http://schemas.openxmlformats.org/drawingml/2006/main">
               <a:ext uri="{FF2B5EF4-FFF2-40B4-BE49-F238E27FC236}">
-                <a16:creationId xmlns:a16="http://schemas.microsoft.com/office/drawing/2014/main" id="{4B979C89-4F4A-4B15-A455-0A77F808CC35}"/>
+                <a16:creationId xmlns:a16="http://schemas.microsoft.com/office/drawing/2014/main" id="{E99BFED5-C8C7-4766-AB91-87566523A44E}"/>
               </a:ext>
             </a:extLst>
           </p:cNvPr>
@@ -13857,7 +14230,7 @@
           <p:cNvPr id="18" name="">
             <a:extLst xmlns:a="http://schemas.openxmlformats.org/drawingml/2006/main">
               <a:ext uri="{FF2B5EF4-FFF2-40B4-BE49-F238E27FC236}">
-                <a16:creationId xmlns:a16="http://schemas.microsoft.com/office/drawing/2014/main" id="{9CBE4EFE-C95A-43A3-9442-8959BAE9C842}"/>
+                <a16:creationId xmlns:a16="http://schemas.microsoft.com/office/drawing/2014/main" id="{484FADEB-96E4-4AEF-B82F-4E6AF82004F5}"/>
               </a:ext>
             </a:extLst>
           </p:cNvPr>
@@ -13890,7 +14263,7 @@
           <p:cNvPr id="19" name="">
             <a:extLst xmlns:a="http://schemas.openxmlformats.org/drawingml/2006/main">
               <a:ext uri="{FF2B5EF4-FFF2-40B4-BE49-F238E27FC236}">
-                <a16:creationId xmlns:a16="http://schemas.microsoft.com/office/drawing/2014/main" id="{8EFB9634-E316-4236-90A6-F05392F39976}"/>
+                <a16:creationId xmlns:a16="http://schemas.microsoft.com/office/drawing/2014/main" id="{A9142BF5-0034-4EA2-801B-CAF3952E7BE6}"/>
               </a:ext>
             </a:extLst>
           </p:cNvPr>
@@ -13957,7 +14330,7 @@
           <p:cNvPr id="20" name="">
             <a:extLst xmlns:a="http://schemas.openxmlformats.org/drawingml/2006/main">
               <a:ext uri="{FF2B5EF4-FFF2-40B4-BE49-F238E27FC236}">
-                <a16:creationId xmlns:a16="http://schemas.microsoft.com/office/drawing/2014/main" id="{8B8E630E-7391-446F-AD89-A36455AA9902}"/>
+                <a16:creationId xmlns:a16="http://schemas.microsoft.com/office/drawing/2014/main" id="{A3FDDE26-0A1A-49FF-A1D6-848CD89880B3}"/>
               </a:ext>
             </a:extLst>
           </p:cNvPr>
@@ -13990,7 +14363,7 @@
           <p:cNvPr id="21" name="">
             <a:extLst xmlns:a="http://schemas.openxmlformats.org/drawingml/2006/main">
               <a:ext uri="{FF2B5EF4-FFF2-40B4-BE49-F238E27FC236}">
-                <a16:creationId xmlns:a16="http://schemas.microsoft.com/office/drawing/2014/main" id="{3FA48B61-E228-43C6-9AA6-D2D178C30FCD}"/>
+                <a16:creationId xmlns:a16="http://schemas.microsoft.com/office/drawing/2014/main" id="{E89D0D8B-143E-4036-9518-3753B2A97311}"/>
               </a:ext>
             </a:extLst>
           </p:cNvPr>
@@ -14057,7 +14430,7 @@
           <p:cNvPr id="22" name="">
             <a:extLst xmlns:a="http://schemas.openxmlformats.org/drawingml/2006/main">
               <a:ext uri="{FF2B5EF4-FFF2-40B4-BE49-F238E27FC236}">
-                <a16:creationId xmlns:a16="http://schemas.microsoft.com/office/drawing/2014/main" id="{634A0E8F-80EB-4DB4-88CA-11AF7F50B994}"/>
+                <a16:creationId xmlns:a16="http://schemas.microsoft.com/office/drawing/2014/main" id="{E33FC659-DEB8-4456-A209-389AFF1CAF16}"/>
               </a:ext>
             </a:extLst>
           </p:cNvPr>
@@ -14107,7 +14480,7 @@
           <p:cNvPr id="23" name="">
             <a:extLst xmlns:a="http://schemas.openxmlformats.org/drawingml/2006/main">
               <a:ext uri="{FF2B5EF4-FFF2-40B4-BE49-F238E27FC236}">
-                <a16:creationId xmlns:a16="http://schemas.microsoft.com/office/drawing/2014/main" id="{186415FF-0271-4C5E-82AB-34005C852E25}"/>
+                <a16:creationId xmlns:a16="http://schemas.microsoft.com/office/drawing/2014/main" id="{049FFDE3-C19F-4AC1-B6CF-B8D41A483B0A}"/>
               </a:ext>
             </a:extLst>
           </p:cNvPr>
@@ -14157,7 +14530,7 @@
           <p:cNvPr id="24" name="">
             <a:extLst xmlns:a="http://schemas.openxmlformats.org/drawingml/2006/main">
               <a:ext uri="{FF2B5EF4-FFF2-40B4-BE49-F238E27FC236}">
-                <a16:creationId xmlns:a16="http://schemas.microsoft.com/office/drawing/2014/main" id="{9CD35DFB-7BDC-421A-9811-75FF5AA46679}"/>
+                <a16:creationId xmlns:a16="http://schemas.microsoft.com/office/drawing/2014/main" id="{594A78BA-E7B8-46AE-B242-E0D9B98E72CD}"/>
               </a:ext>
             </a:extLst>
           </p:cNvPr>
@@ -14207,7 +14580,7 @@
           <p:cNvPr id="25" name="">
             <a:extLst xmlns:a="http://schemas.openxmlformats.org/drawingml/2006/main">
               <a:ext uri="{FF2B5EF4-FFF2-40B4-BE49-F238E27FC236}">
-                <a16:creationId xmlns:a16="http://schemas.microsoft.com/office/drawing/2014/main" id="{0387CADA-4032-42C0-9A7B-10138543813F}"/>
+                <a16:creationId xmlns:a16="http://schemas.microsoft.com/office/drawing/2014/main" id="{885CCC30-9336-4803-B73B-7CF450A9368C}"/>
               </a:ext>
             </a:extLst>
           </p:cNvPr>
@@ -14257,7 +14630,7 @@
           <p:cNvPr id="26" name="">
             <a:extLst xmlns:a="http://schemas.openxmlformats.org/drawingml/2006/main">
               <a:ext uri="{FF2B5EF4-FFF2-40B4-BE49-F238E27FC236}">
-                <a16:creationId xmlns:a16="http://schemas.microsoft.com/office/drawing/2014/main" id="{4081DA6B-47D8-4B41-B656-99FF0D8E6813}"/>
+                <a16:creationId xmlns:a16="http://schemas.microsoft.com/office/drawing/2014/main" id="{0BD7D5DD-1FBC-49CF-B6A4-D54C444B0FBE}"/>
               </a:ext>
             </a:extLst>
           </p:cNvPr>
@@ -14307,7 +14680,7 @@
           <p:cNvPr id="27" name="">
             <a:extLst xmlns:a="http://schemas.openxmlformats.org/drawingml/2006/main">
               <a:ext uri="{FF2B5EF4-FFF2-40B4-BE49-F238E27FC236}">
-                <a16:creationId xmlns:a16="http://schemas.microsoft.com/office/drawing/2014/main" id="{1C39497D-5CE6-457B-8E40-B6C73ABB133D}"/>
+                <a16:creationId xmlns:a16="http://schemas.microsoft.com/office/drawing/2014/main" id="{AF10906D-D499-48B8-A41A-226BDEF26000}"/>
               </a:ext>
             </a:extLst>
           </p:cNvPr>
@@ -14357,7 +14730,7 @@
           <p:cNvPr id="28" name="">
             <a:extLst xmlns:a="http://schemas.openxmlformats.org/drawingml/2006/main">
               <a:ext uri="{FF2B5EF4-FFF2-40B4-BE49-F238E27FC236}">
-                <a16:creationId xmlns:a16="http://schemas.microsoft.com/office/drawing/2014/main" id="{A128C404-EF30-41A2-9DCD-D88F892BD4EE}"/>
+                <a16:creationId xmlns:a16="http://schemas.microsoft.com/office/drawing/2014/main" id="{93F8E1E4-F5D1-402C-83C2-86AF6A25CD38}"/>
               </a:ext>
             </a:extLst>
           </p:cNvPr>
@@ -14392,7 +14765,7 @@
           <p:cNvPr id="29" name="">
             <a:extLst xmlns:a="http://schemas.openxmlformats.org/drawingml/2006/main">
               <a:ext uri="{FF2B5EF4-FFF2-40B4-BE49-F238E27FC236}">
-                <a16:creationId xmlns:a16="http://schemas.microsoft.com/office/drawing/2014/main" id="{AB0F1B9E-B5F1-43A2-BEA3-37186A8D8F33}"/>
+                <a16:creationId xmlns:a16="http://schemas.microsoft.com/office/drawing/2014/main" id="{5D78A324-1506-4C02-AEDD-251DC7502272}"/>
               </a:ext>
             </a:extLst>
           </p:cNvPr>
@@ -14442,7 +14815,7 @@
           <p:cNvPr id="30" name="">
             <a:extLst xmlns:a="http://schemas.openxmlformats.org/drawingml/2006/main">
               <a:ext uri="{FF2B5EF4-FFF2-40B4-BE49-F238E27FC236}">
-                <a16:creationId xmlns:a16="http://schemas.microsoft.com/office/drawing/2014/main" id="{1C6DD034-A67C-4B25-9DD9-0E155D30B399}"/>
+                <a16:creationId xmlns:a16="http://schemas.microsoft.com/office/drawing/2014/main" id="{27066154-D9F7-490D-82A6-273F96E605F2}"/>
               </a:ext>
             </a:extLst>
           </p:cNvPr>
@@ -14492,7 +14865,7 @@
           <p:cNvPr id="31" name="">
             <a:extLst xmlns:a="http://schemas.openxmlformats.org/drawingml/2006/main">
               <a:ext uri="{FF2B5EF4-FFF2-40B4-BE49-F238E27FC236}">
-                <a16:creationId xmlns:a16="http://schemas.microsoft.com/office/drawing/2014/main" id="{0EB46760-CEF5-45B2-98F3-B0F09A6BAC20}"/>
+                <a16:creationId xmlns:a16="http://schemas.microsoft.com/office/drawing/2014/main" id="{594AAB0F-6A0F-48F7-96D6-0090EC2CB85E}"/>
               </a:ext>
             </a:extLst>
           </p:cNvPr>
@@ -14527,7 +14900,7 @@
           <p:cNvPr id="32" name="">
             <a:extLst xmlns:a="http://schemas.openxmlformats.org/drawingml/2006/main">
               <a:ext uri="{FF2B5EF4-FFF2-40B4-BE49-F238E27FC236}">
-                <a16:creationId xmlns:a16="http://schemas.microsoft.com/office/drawing/2014/main" id="{ECF97499-F313-43EC-89BC-22C094E26BAB}"/>
+                <a16:creationId xmlns:a16="http://schemas.microsoft.com/office/drawing/2014/main" id="{F6B150F2-3E97-46EF-83A6-67DCA019BB29}"/>
               </a:ext>
             </a:extLst>
           </p:cNvPr>
@@ -14577,7 +14950,7 @@
           <p:cNvPr id="33" name="">
             <a:extLst xmlns:a="http://schemas.openxmlformats.org/drawingml/2006/main">
               <a:ext uri="{FF2B5EF4-FFF2-40B4-BE49-F238E27FC236}">
-                <a16:creationId xmlns:a16="http://schemas.microsoft.com/office/drawing/2014/main" id="{4B1BE4B4-A486-4C31-BDA9-8EC44F513368}"/>
+                <a16:creationId xmlns:a16="http://schemas.microsoft.com/office/drawing/2014/main" id="{91140818-E0A3-49A9-97CE-A6CFAD46109A}"/>
               </a:ext>
             </a:extLst>
           </p:cNvPr>
@@ -14627,7 +15000,7 @@
           <p:cNvPr id="34" name="">
             <a:extLst xmlns:a="http://schemas.openxmlformats.org/drawingml/2006/main">
               <a:ext uri="{FF2B5EF4-FFF2-40B4-BE49-F238E27FC236}">
-                <a16:creationId xmlns:a16="http://schemas.microsoft.com/office/drawing/2014/main" id="{EAC5C8A3-7F01-4140-ADF4-C437D9D3D486}"/>
+                <a16:creationId xmlns:a16="http://schemas.microsoft.com/office/drawing/2014/main" id="{85A5A3FC-0EDC-4235-8CFF-F3F05E984B69}"/>
               </a:ext>
             </a:extLst>
           </p:cNvPr>
@@ -14662,7 +15035,7 @@
           <p:cNvPr id="35" name="">
             <a:extLst xmlns:a="http://schemas.openxmlformats.org/drawingml/2006/main">
               <a:ext uri="{FF2B5EF4-FFF2-40B4-BE49-F238E27FC236}">
-                <a16:creationId xmlns:a16="http://schemas.microsoft.com/office/drawing/2014/main" id="{3BFA0DBE-3C8A-42DF-B996-495EE942A961}"/>
+                <a16:creationId xmlns:a16="http://schemas.microsoft.com/office/drawing/2014/main" id="{C46BA838-2D52-45E9-932D-6729DD6D9AF9}"/>
               </a:ext>
             </a:extLst>
           </p:cNvPr>
@@ -14712,7 +15085,7 @@
           <p:cNvPr id="36" name="">
             <a:extLst xmlns:a="http://schemas.openxmlformats.org/drawingml/2006/main">
               <a:ext uri="{FF2B5EF4-FFF2-40B4-BE49-F238E27FC236}">
-                <a16:creationId xmlns:a16="http://schemas.microsoft.com/office/drawing/2014/main" id="{BA74AF3F-4D9B-4BB3-8C0B-1343632A0526}"/>
+                <a16:creationId xmlns:a16="http://schemas.microsoft.com/office/drawing/2014/main" id="{0D5A5E75-4D99-4824-9A2D-2FB061CBDB50}"/>
               </a:ext>
             </a:extLst>
           </p:cNvPr>
@@ -14762,7 +15135,7 @@
           <p:cNvPr id="37" name="">
             <a:extLst xmlns:a="http://schemas.openxmlformats.org/drawingml/2006/main">
               <a:ext uri="{FF2B5EF4-FFF2-40B4-BE49-F238E27FC236}">
-                <a16:creationId xmlns:a16="http://schemas.microsoft.com/office/drawing/2014/main" id="{33055567-7ECF-4FE9-8C06-4925A2A2D459}"/>
+                <a16:creationId xmlns:a16="http://schemas.microsoft.com/office/drawing/2014/main" id="{4BD14FB5-1A2E-4FF3-ADD5-938BA48A9B6B}"/>
               </a:ext>
             </a:extLst>
           </p:cNvPr>
@@ -14803,7 +15176,7 @@
           <p:cNvPr id="38" name="">
             <a:extLst xmlns:a="http://schemas.openxmlformats.org/drawingml/2006/main">
               <a:ext uri="{FF2B5EF4-FFF2-40B4-BE49-F238E27FC236}">
-                <a16:creationId xmlns:a16="http://schemas.microsoft.com/office/drawing/2014/main" id="{DCAE27FA-FBCE-44CF-9E81-D8DAD5B71AD6}"/>
+                <a16:creationId xmlns:a16="http://schemas.microsoft.com/office/drawing/2014/main" id="{CE4A1F86-CCD6-49E4-B10C-0700B5917382}"/>
               </a:ext>
             </a:extLst>
           </p:cNvPr>
@@ -14853,7 +15226,7 @@
           <p:cNvPr id="39" name="">
             <a:extLst xmlns:a="http://schemas.openxmlformats.org/drawingml/2006/main">
               <a:ext uri="{FF2B5EF4-FFF2-40B4-BE49-F238E27FC236}">
-                <a16:creationId xmlns:a16="http://schemas.microsoft.com/office/drawing/2014/main" id="{8CADAB45-7025-49A1-83FD-9903DBB07767}"/>
+                <a16:creationId xmlns:a16="http://schemas.microsoft.com/office/drawing/2014/main" id="{B6DC2361-8F65-41E9-B2F9-9AFEE64ECBA2}"/>
               </a:ext>
             </a:extLst>
           </p:cNvPr>
@@ -14903,7 +15276,7 @@
           <p:cNvPr id="40" name="">
             <a:extLst xmlns:a="http://schemas.openxmlformats.org/drawingml/2006/main">
               <a:ext uri="{FF2B5EF4-FFF2-40B4-BE49-F238E27FC236}">
-                <a16:creationId xmlns:a16="http://schemas.microsoft.com/office/drawing/2014/main" id="{8F400DF9-47BB-4AE5-AB17-667EF4AAE959}"/>
+                <a16:creationId xmlns:a16="http://schemas.microsoft.com/office/drawing/2014/main" id="{3608E198-7916-4092-A002-C3A606D67D3E}"/>
               </a:ext>
             </a:extLst>
           </p:cNvPr>
@@ -14944,7 +15317,7 @@
           <p:cNvPr id="41" name="">
             <a:extLst xmlns:a="http://schemas.openxmlformats.org/drawingml/2006/main">
               <a:ext uri="{FF2B5EF4-FFF2-40B4-BE49-F238E27FC236}">
-                <a16:creationId xmlns:a16="http://schemas.microsoft.com/office/drawing/2014/main" id="{0D3F1323-CB8D-4087-8C6F-3714270E5E5B}"/>
+                <a16:creationId xmlns:a16="http://schemas.microsoft.com/office/drawing/2014/main" id="{B2F7E994-E4AB-4411-BA3F-253FEAB0DE4B}"/>
               </a:ext>
             </a:extLst>
           </p:cNvPr>
@@ -14994,7 +15367,7 @@
           <p:cNvPr id="42" name="">
             <a:extLst xmlns:a="http://schemas.openxmlformats.org/drawingml/2006/main">
               <a:ext uri="{FF2B5EF4-FFF2-40B4-BE49-F238E27FC236}">
-                <a16:creationId xmlns:a16="http://schemas.microsoft.com/office/drawing/2014/main" id="{D609413C-EBC7-436F-BE33-28085AFA8A67}"/>
+                <a16:creationId xmlns:a16="http://schemas.microsoft.com/office/drawing/2014/main" id="{ADAFF6EE-7585-49D1-B9C8-7A32B4242570}"/>
               </a:ext>
             </a:extLst>
           </p:cNvPr>
@@ -15061,7 +15434,7 @@
           <p:cNvPr id="43" name="">
             <a:extLst xmlns:a="http://schemas.openxmlformats.org/drawingml/2006/main">
               <a:ext uri="{FF2B5EF4-FFF2-40B4-BE49-F238E27FC236}">
-                <a16:creationId xmlns:a16="http://schemas.microsoft.com/office/drawing/2014/main" id="{44681AE8-78B6-4A82-A2A4-6E4343F68700}"/>
+                <a16:creationId xmlns:a16="http://schemas.microsoft.com/office/drawing/2014/main" id="{1736F131-E38C-429A-868A-A8A6076ABA9B}"/>
               </a:ext>
             </a:extLst>
           </p:cNvPr>
@@ -15096,7 +15469,7 @@
           <p:cNvPr id="44" name="">
             <a:extLst xmlns:a="http://schemas.openxmlformats.org/drawingml/2006/main">
               <a:ext uri="{FF2B5EF4-FFF2-40B4-BE49-F238E27FC236}">
-                <a16:creationId xmlns:a16="http://schemas.microsoft.com/office/drawing/2014/main" id="{AA24C3ED-5831-470F-BF52-5AE4E4616468}"/>
+                <a16:creationId xmlns:a16="http://schemas.microsoft.com/office/drawing/2014/main" id="{8A44D103-104E-45CC-B0C8-5176D1591B0F}"/>
               </a:ext>
             </a:extLst>
           </p:cNvPr>
@@ -15146,7 +15519,7 @@
           <p:cNvPr id="45" name="">
             <a:extLst xmlns:a="http://schemas.openxmlformats.org/drawingml/2006/main">
               <a:ext uri="{FF2B5EF4-FFF2-40B4-BE49-F238E27FC236}">
-                <a16:creationId xmlns:a16="http://schemas.microsoft.com/office/drawing/2014/main" id="{E9B23D62-3FF2-4F35-8140-21E50391C31F}"/>
+                <a16:creationId xmlns:a16="http://schemas.microsoft.com/office/drawing/2014/main" id="{841E3189-0C97-47C4-83E4-8D8EAE9CE331}"/>
               </a:ext>
             </a:extLst>
           </p:cNvPr>
@@ -15196,7 +15569,7 @@
           <p:cNvPr id="46" name="">
             <a:extLst xmlns:a="http://schemas.openxmlformats.org/drawingml/2006/main">
               <a:ext uri="{FF2B5EF4-FFF2-40B4-BE49-F238E27FC236}">
-                <a16:creationId xmlns:a16="http://schemas.microsoft.com/office/drawing/2014/main" id="{A4E3DB6D-A033-4DCB-B0B1-B7E350932CC8}"/>
+                <a16:creationId xmlns:a16="http://schemas.microsoft.com/office/drawing/2014/main" id="{C540BCC5-0A63-4501-980F-34DDCC0E93E6}"/>
               </a:ext>
             </a:extLst>
           </p:cNvPr>
@@ -15227,7 +15600,7 @@
           <p:cNvPr id="47" name="source-4">
             <a:extLst xmlns:a="http://schemas.openxmlformats.org/drawingml/2006/main">
               <a:ext uri="{FF2B5EF4-FFF2-40B4-BE49-F238E27FC236}">
-                <a16:creationId xmlns:a16="http://schemas.microsoft.com/office/drawing/2014/main" id="{480A58C7-934D-45BD-ACB4-11AD2CFB4432}"/>
+                <a16:creationId xmlns:a16="http://schemas.microsoft.com/office/drawing/2014/main" id="{D000708C-C103-4FA5-AE30-21E43F822D41}"/>
               </a:ext>
             </a:extLst>
           </p:cNvPr>
@@ -15277,7 +15650,7 @@
           <p:cNvPr id="48" name="page-4">
             <a:extLst xmlns:a="http://schemas.openxmlformats.org/drawingml/2006/main">
               <a:ext uri="{FF2B5EF4-FFF2-40B4-BE49-F238E27FC236}">
-                <a16:creationId xmlns:a16="http://schemas.microsoft.com/office/drawing/2014/main" id="{C8F202A0-A2DD-4408-8465-89A3F56F52A0}"/>
+                <a16:creationId xmlns:a16="http://schemas.microsoft.com/office/drawing/2014/main" id="{5B6066D5-D911-4314-B54D-E47407EC30D5}"/>
               </a:ext>
             </a:extLst>
           </p:cNvPr>
@@ -15325,7 +15698,7 @@
     </p:spTree>
     <p:extLst>
       <p:ext uri="{BB962C8B-B14F-4D97-AF65-F5344CB8AC3E}">
-        <p14:creationId xmlns:p14="http://schemas.microsoft.com/office/powerpoint/2010/main" val="330886388"/>
+        <p14:creationId xmlns:p14="http://schemas.microsoft.com/office/powerpoint/2010/main" val="1665815857"/>
       </p:ext>
     </p:extLst>
   </p:cSld>
@@ -15353,10 +15726,10 @@
       </p:grpSpPr>
       <p:sp>
         <p:nvSpPr>
-          <p:cNvPr id="20" name="kicker-5">
-            <a:extLst xmlns:a="http://schemas.openxmlformats.org/drawingml/2006/main">
-              <a:ext uri="{FF2B5EF4-FFF2-40B4-BE49-F238E27FC236}">
-                <a16:creationId xmlns:a16="http://schemas.microsoft.com/office/drawing/2014/main" id="{710F61BC-11B4-4B3E-9656-A51F51185A96}"/>
+          <p:cNvPr id="43" name="kicker-5">
+            <a:extLst xmlns:a="http://schemas.openxmlformats.org/drawingml/2006/main">
+              <a:ext uri="{FF2B5EF4-FFF2-40B4-BE49-F238E27FC236}">
+                <a16:creationId xmlns:a16="http://schemas.microsoft.com/office/drawing/2014/main" id="{C6F25FA5-BD10-4050-9C5C-6C2559FC4556}"/>
               </a:ext>
             </a:extLst>
           </p:cNvPr>
@@ -15406,7 +15779,7 @@
           <p:cNvPr id="2" name="title-5">
             <a:extLst xmlns:a="http://schemas.openxmlformats.org/drawingml/2006/main">
               <a:ext uri="{FF2B5EF4-FFF2-40B4-BE49-F238E27FC236}">
-                <a16:creationId xmlns:a16="http://schemas.microsoft.com/office/drawing/2014/main" id="{9AE5E654-5C78-4270-B8C1-EF42CF6D2BEF}"/>
+                <a16:creationId xmlns:a16="http://schemas.microsoft.com/office/drawing/2014/main" id="{C7E74211-6776-46CB-B95C-576AACA41B91}"/>
               </a:ext>
             </a:extLst>
           </p:cNvPr>
@@ -15446,7 +15819,7 @@
                   <a:srgbClr val="0F172A"/>
                 </a:solidFill>
               </a:rPr>
-              <a:t>Deterministic routing handled 93.7% of Phase 1</a:t>
+              <a:t>Structured solvers shared one decision contract</a:t>
             </a:r>
           </a:p>
         </p:txBody>
@@ -15456,7 +15829,7 @@
           <p:cNvPr id="3" name="">
             <a:extLst xmlns:a="http://schemas.openxmlformats.org/drawingml/2006/main">
               <a:ext uri="{FF2B5EF4-FFF2-40B4-BE49-F238E27FC236}">
-                <a16:creationId xmlns:a16="http://schemas.microsoft.com/office/drawing/2014/main" id="{9FECE085-F94F-4C33-9BBA-74559E054B95}"/>
+                <a16:creationId xmlns:a16="http://schemas.microsoft.com/office/drawing/2014/main" id="{7E615A14-6C87-4583-BC1E-51B1C88FDEBD}"/>
               </a:ext>
             </a:extLst>
           </p:cNvPr>
@@ -15487,19 +15860,19 @@
           <p:cNvPr id="4" name="">
             <a:extLst xmlns:a="http://schemas.openxmlformats.org/drawingml/2006/main">
               <a:ext uri="{FF2B5EF4-FFF2-40B4-BE49-F238E27FC236}">
-                <a16:creationId xmlns:a16="http://schemas.microsoft.com/office/drawing/2014/main" id="{C5992E04-E40F-411B-8551-FE9EB7127145}"/>
-              </a:ext>
-            </a:extLst>
-          </p:cNvPr>
-          <p:cNvSpPr>
-            <a:spLocks xmlns:a="http://schemas.openxmlformats.org/drawingml/2006/main" noGrp="1"/>
-          </p:cNvSpPr>
-          <p:nvPr/>
-        </p:nvSpPr>
-        <p:spPr>
-          <a:xfrm xmlns:a="http://schemas.openxmlformats.org/drawingml/2006/main">
-            <a:off x="685800" y="1390650"/>
-            <a:ext cx="8096250" cy="342900"/>
+                <a16:creationId xmlns:a16="http://schemas.microsoft.com/office/drawing/2014/main" id="{F450B9BB-37CE-4940-BCBA-00B6EB6BEF77}"/>
+              </a:ext>
+            </a:extLst>
+          </p:cNvPr>
+          <p:cNvSpPr>
+            <a:spLocks xmlns:a="http://schemas.openxmlformats.org/drawingml/2006/main" noGrp="1"/>
+          </p:cNvSpPr>
+          <p:nvPr/>
+        </p:nvSpPr>
+        <p:spPr>
+          <a:xfrm xmlns:a="http://schemas.openxmlformats.org/drawingml/2006/main">
+            <a:off x="685800" y="1381125"/>
+            <a:ext cx="10287000" cy="438150"/>
           </a:xfrm>
           <a:prstGeom xmlns:a="http://schemas.openxmlformats.org/drawingml/2006/main" prst="rect">
             <a:avLst/>
@@ -15515,19 +15888,19 @@
           <a:lstStyle xmlns:a="http://schemas.openxmlformats.org/drawingml/2006/main"/>
           <a:p xmlns:a="http://schemas.openxmlformats.org/drawingml/2006/main">
             <a:pPr algn="l">
-              <a:defRPr sz="1725" b="0">
+              <a:defRPr sz="1575" b="0">
                 <a:solidFill>
                   <a:srgbClr val="526174"/>
                 </a:solidFill>
               </a:defRPr>
             </a:pPr>
             <a:r>
-              <a:rPr sz="1725" b="0">
+              <a:rPr sz="1575" b="0">
                 <a:solidFill>
                   <a:srgbClr val="526174"/>
                 </a:solidFill>
               </a:rPr>
-              <a:t>Only 158 of 2,516 rows reached the Qwen judge.</a:t>
+              <a:t>Each solver parsed a task-specific representation, verified the requested relation, then answered or abstained.</a:t>
             </a:r>
           </a:p>
         </p:txBody>
@@ -15537,577 +15910,119 @@
           <p:cNvPr id="5" name="">
             <a:extLst xmlns:a="http://schemas.openxmlformats.org/drawingml/2006/main">
               <a:ext uri="{FF2B5EF4-FFF2-40B4-BE49-F238E27FC236}">
-                <a16:creationId xmlns:a16="http://schemas.microsoft.com/office/drawing/2014/main" id="{5780573F-FC94-4C6D-A4B5-BA52F29F74B7}"/>
-              </a:ext>
-            </a:extLst>
-          </p:cNvPr>
-          <p:cNvSpPr>
-            <a:spLocks xmlns:a="http://schemas.openxmlformats.org/drawingml/2006/main" noGrp="1"/>
-          </p:cNvSpPr>
-          <p:nvPr/>
-        </p:nvSpPr>
-        <p:spPr>
-          <a:xfrm xmlns:a="http://schemas.openxmlformats.org/drawingml/2006/main">
-            <a:off x="990600" y="2524125"/>
-            <a:ext cx="10210800" cy="838200"/>
+                <a16:creationId xmlns:a16="http://schemas.microsoft.com/office/drawing/2014/main" id="{DF6F4BC9-E15A-4CC0-A25F-028C685EBB41}"/>
+              </a:ext>
+            </a:extLst>
+          </p:cNvPr>
+          <p:cNvSpPr>
+            <a:spLocks xmlns:a="http://schemas.openxmlformats.org/drawingml/2006/main" noGrp="1"/>
+          </p:cNvSpPr>
+          <p:nvPr/>
+        </p:nvSpPr>
+        <p:spPr>
+          <a:xfrm xmlns:a="http://schemas.openxmlformats.org/drawingml/2006/main">
+            <a:off x="838200" y="2133600"/>
+            <a:ext cx="2324100" cy="2724150"/>
           </a:xfrm>
           <a:prstGeom xmlns:a="http://schemas.openxmlformats.org/drawingml/2006/main" prst="roundRect">
             <a:avLst>
-              <a:gd name="adj" fmla="val 25000"/>
+              <a:gd name="adj" fmla="val 6557"/>
             </a:avLst>
           </a:prstGeom>
           <a:solidFill xmlns:a="http://schemas.openxmlformats.org/drawingml/2006/main">
-            <a:srgbClr val="E7EEF4"/>
+            <a:srgbClr val="FFFFFF"/>
           </a:solidFill>
-          <a:ln xmlns:a="http://schemas.openxmlformats.org/drawingml/2006/main" w="0">
+          <a:ln xmlns:a="http://schemas.openxmlformats.org/drawingml/2006/main" w="9525">
             <a:solidFill>
-              <a:srgbClr val="D8E0EA"/>
+              <a:srgbClr val="1F5A7A"/>
             </a:solidFill>
             <a:prstDash val="solid"/>
           </a:ln>
         </p:spPr>
+        <p:style>
+          <a:lnRef xmlns:a="http://schemas.openxmlformats.org/drawingml/2006/main" idx="0"/>
+          <a:fillRef xmlns:a="http://schemas.openxmlformats.org/drawingml/2006/main" idx="0"/>
+          <a:effectRef xmlns:a="http://schemas.openxmlformats.org/drawingml/2006/main" idx="4"/>
+          <a:fontRef xmlns:a="http://schemas.openxmlformats.org/drawingml/2006/main" idx="major"/>
+        </p:style>
       </p:sp>
       <p:sp>
         <p:nvSpPr>
           <p:cNvPr id="6" name="">
             <a:extLst xmlns:a="http://schemas.openxmlformats.org/drawingml/2006/main">
               <a:ext uri="{FF2B5EF4-FFF2-40B4-BE49-F238E27FC236}">
-                <a16:creationId xmlns:a16="http://schemas.microsoft.com/office/drawing/2014/main" id="{0F3CBADE-7DBE-4803-B2FE-66B32C3177CD}"/>
-              </a:ext>
-            </a:extLst>
-          </p:cNvPr>
-          <p:cNvSpPr>
-            <a:spLocks xmlns:a="http://schemas.openxmlformats.org/drawingml/2006/main" noGrp="1"/>
-          </p:cNvSpPr>
-          <p:nvPr/>
-        </p:nvSpPr>
-        <p:spPr>
-          <a:xfrm xmlns:a="http://schemas.openxmlformats.org/drawingml/2006/main">
-            <a:off x="990600" y="2524125"/>
-            <a:ext cx="9572625" cy="838200"/>
+                <a16:creationId xmlns:a16="http://schemas.microsoft.com/office/drawing/2014/main" id="{F6502818-7E0A-439F-832A-C84C77C05302}"/>
+              </a:ext>
+            </a:extLst>
+          </p:cNvPr>
+          <p:cNvSpPr>
+            <a:spLocks xmlns:a="http://schemas.openxmlformats.org/drawingml/2006/main" noGrp="1"/>
+          </p:cNvSpPr>
+          <p:nvPr/>
+        </p:nvSpPr>
+        <p:spPr>
+          <a:xfrm xmlns:a="http://schemas.openxmlformats.org/drawingml/2006/main">
+            <a:off x="1028700" y="2343150"/>
+            <a:ext cx="1943100" cy="304800"/>
+          </a:xfrm>
+          <a:prstGeom xmlns:a="http://schemas.openxmlformats.org/drawingml/2006/main" prst="rect">
+            <a:avLst/>
+          </a:prstGeom>
+          <a:noFill xmlns:a="http://schemas.openxmlformats.org/drawingml/2006/main"/>
+          <a:ln xmlns:a="http://schemas.openxmlformats.org/drawingml/2006/main" w="0">
+            <a:noFill/>
+            <a:prstDash val="solid"/>
+          </a:ln>
+        </p:spPr>
+        <p:txBody>
+          <a:bodyPr xmlns:a="http://schemas.openxmlformats.org/drawingml/2006/main"/>
+          <a:lstStyle xmlns:a="http://schemas.openxmlformats.org/drawingml/2006/main"/>
+          <a:p xmlns:a="http://schemas.openxmlformats.org/drawingml/2006/main">
+            <a:pPr algn="ctr">
+              <a:defRPr sz="1650" b="1">
+                <a:solidFill>
+                  <a:srgbClr val="1F5A7A"/>
+                </a:solidFill>
+              </a:defRPr>
+            </a:pPr>
+            <a:r>
+              <a:rPr sz="1650" b="1">
+                <a:solidFill>
+                  <a:srgbClr val="1F5A7A"/>
+                </a:solidFill>
+              </a:rPr>
+              <a:t>Numbers</a:t>
+            </a:r>
+          </a:p>
+        </p:txBody>
+      </p:sp>
+      <p:sp>
+        <p:nvSpPr>
+          <p:cNvPr id="7" name="">
+            <a:extLst xmlns:a="http://schemas.openxmlformats.org/drawingml/2006/main">
+              <a:ext uri="{FF2B5EF4-FFF2-40B4-BE49-F238E27FC236}">
+                <a16:creationId xmlns:a16="http://schemas.microsoft.com/office/drawing/2014/main" id="{B6E06ACC-4A0B-4CF6-8884-3D32E71402E1}"/>
+              </a:ext>
+            </a:extLst>
+          </p:cNvPr>
+          <p:cNvSpPr>
+            <a:spLocks xmlns:a="http://schemas.openxmlformats.org/drawingml/2006/main" noGrp="1"/>
+          </p:cNvSpPr>
+          <p:nvPr/>
+        </p:nvSpPr>
+        <p:spPr>
+          <a:xfrm xmlns:a="http://schemas.openxmlformats.org/drawingml/2006/main">
+            <a:off x="1028700" y="2857500"/>
+            <a:ext cx="1943100" cy="419100"/>
           </a:xfrm>
           <a:prstGeom xmlns:a="http://schemas.openxmlformats.org/drawingml/2006/main" prst="roundRect">
             <a:avLst>
-              <a:gd name="adj" fmla="val 25000"/>
+              <a:gd name="adj" fmla="val 22727"/>
             </a:avLst>
           </a:prstGeom>
           <a:solidFill xmlns:a="http://schemas.openxmlformats.org/drawingml/2006/main">
-            <a:srgbClr val="2A8C82"/>
+            <a:srgbClr val="F7F9FC"/>
           </a:solidFill>
-          <a:ln xmlns:a="http://schemas.openxmlformats.org/drawingml/2006/main" w="0">
-            <a:solidFill>
-              <a:srgbClr val="2A8C82"/>
-            </a:solidFill>
-            <a:prstDash val="solid"/>
-          </a:ln>
-        </p:spPr>
-      </p:sp>
-      <p:sp>
-        <p:nvSpPr>
-          <p:cNvPr id="7" name="">
-            <a:extLst xmlns:a="http://schemas.openxmlformats.org/drawingml/2006/main">
-              <a:ext uri="{FF2B5EF4-FFF2-40B4-BE49-F238E27FC236}">
-                <a16:creationId xmlns:a16="http://schemas.microsoft.com/office/drawing/2014/main" id="{AD6B501E-22AE-4026-B26B-F53234101F29}"/>
-              </a:ext>
-            </a:extLst>
-          </p:cNvPr>
-          <p:cNvSpPr>
-            <a:spLocks xmlns:a="http://schemas.openxmlformats.org/drawingml/2006/main" noGrp="1"/>
-          </p:cNvSpPr>
-          <p:nvPr/>
-        </p:nvSpPr>
-        <p:spPr>
-          <a:xfrm xmlns:a="http://schemas.openxmlformats.org/drawingml/2006/main">
-            <a:off x="10372725" y="2524125"/>
-            <a:ext cx="190500" cy="838200"/>
-          </a:xfrm>
-          <a:prstGeom xmlns:a="http://schemas.openxmlformats.org/drawingml/2006/main" prst="rect">
-            <a:avLst/>
-          </a:prstGeom>
-          <a:solidFill xmlns:a="http://schemas.openxmlformats.org/drawingml/2006/main">
-            <a:srgbClr val="2A8C82"/>
-          </a:solidFill>
-          <a:ln xmlns:a="http://schemas.openxmlformats.org/drawingml/2006/main" w="0">
-            <a:solidFill>
-              <a:srgbClr val="2A8C82"/>
-            </a:solidFill>
-            <a:prstDash val="solid"/>
-          </a:ln>
-        </p:spPr>
-      </p:sp>
-      <p:sp>
-        <p:nvSpPr>
-          <p:cNvPr id="8" name="">
-            <a:extLst xmlns:a="http://schemas.openxmlformats.org/drawingml/2006/main">
-              <a:ext uri="{FF2B5EF4-FFF2-40B4-BE49-F238E27FC236}">
-                <a16:creationId xmlns:a16="http://schemas.microsoft.com/office/drawing/2014/main" id="{00A92ECB-A340-43E6-B09B-9D678B21CF77}"/>
-              </a:ext>
-            </a:extLst>
-          </p:cNvPr>
-          <p:cNvSpPr>
-            <a:spLocks xmlns:a="http://schemas.openxmlformats.org/drawingml/2006/main" noGrp="1"/>
-          </p:cNvSpPr>
-          <p:nvPr/>
-        </p:nvSpPr>
-        <p:spPr>
-          <a:xfrm xmlns:a="http://schemas.openxmlformats.org/drawingml/2006/main">
-            <a:off x="1314450" y="2714625"/>
-            <a:ext cx="4095750" cy="361950"/>
-          </a:xfrm>
-          <a:prstGeom xmlns:a="http://schemas.openxmlformats.org/drawingml/2006/main" prst="rect">
-            <a:avLst/>
-          </a:prstGeom>
-          <a:noFill xmlns:a="http://schemas.openxmlformats.org/drawingml/2006/main"/>
-          <a:ln xmlns:a="http://schemas.openxmlformats.org/drawingml/2006/main" w="0">
-            <a:noFill/>
-            <a:prstDash val="solid"/>
-          </a:ln>
-        </p:spPr>
-        <p:txBody>
-          <a:bodyPr xmlns:a="http://schemas.openxmlformats.org/drawingml/2006/main"/>
-          <a:lstStyle xmlns:a="http://schemas.openxmlformats.org/drawingml/2006/main"/>
-          <a:p xmlns:a="http://schemas.openxmlformats.org/drawingml/2006/main">
-            <a:pPr algn="l">
-              <a:defRPr sz="2100" b="1">
-                <a:solidFill>
-                  <a:srgbClr val="FFFFFF"/>
-                </a:solidFill>
-              </a:defRPr>
-            </a:pPr>
-            <a:r>
-              <a:rPr sz="2100" b="1">
-                <a:solidFill>
-                  <a:srgbClr val="FFFFFF"/>
-                </a:solidFill>
-              </a:rPr>
-              <a:t>2,358 deterministic</a:t>
-            </a:r>
-          </a:p>
-        </p:txBody>
-      </p:sp>
-      <p:sp>
-        <p:nvSpPr>
-          <p:cNvPr id="9" name="">
-            <a:extLst xmlns:a="http://schemas.openxmlformats.org/drawingml/2006/main">
-              <a:ext uri="{FF2B5EF4-FFF2-40B4-BE49-F238E27FC236}">
-                <a16:creationId xmlns:a16="http://schemas.microsoft.com/office/drawing/2014/main" id="{8FAC5251-5D66-4108-AE9D-3B684CAF08E3}"/>
-              </a:ext>
-            </a:extLst>
-          </p:cNvPr>
-          <p:cNvSpPr>
-            <a:spLocks xmlns:a="http://schemas.openxmlformats.org/drawingml/2006/main" noGrp="1"/>
-          </p:cNvSpPr>
-          <p:nvPr/>
-        </p:nvSpPr>
-        <p:spPr>
-          <a:xfrm xmlns:a="http://schemas.openxmlformats.org/drawingml/2006/main">
-            <a:off x="10572750" y="2724150"/>
-            <a:ext cx="552450" cy="304800"/>
-          </a:xfrm>
-          <a:prstGeom xmlns:a="http://schemas.openxmlformats.org/drawingml/2006/main" prst="rect">
-            <a:avLst/>
-          </a:prstGeom>
-          <a:noFill xmlns:a="http://schemas.openxmlformats.org/drawingml/2006/main"/>
-          <a:ln xmlns:a="http://schemas.openxmlformats.org/drawingml/2006/main" w="0">
-            <a:noFill/>
-            <a:prstDash val="solid"/>
-          </a:ln>
-        </p:spPr>
-        <p:txBody>
-          <a:bodyPr xmlns:a="http://schemas.openxmlformats.org/drawingml/2006/main"/>
-          <a:lstStyle xmlns:a="http://schemas.openxmlformats.org/drawingml/2006/main"/>
-          <a:p xmlns:a="http://schemas.openxmlformats.org/drawingml/2006/main">
-            <a:pPr algn="ctr">
-              <a:defRPr sz="1650" b="1">
-                <a:solidFill>
-                  <a:srgbClr val="0F172A"/>
-                </a:solidFill>
-              </a:defRPr>
-            </a:pPr>
-            <a:r>
-              <a:rPr sz="1650" b="1">
-                <a:solidFill>
-                  <a:srgbClr val="0F172A"/>
-                </a:solidFill>
-              </a:rPr>
-              <a:t>158</a:t>
-            </a:r>
-          </a:p>
-        </p:txBody>
-      </p:sp>
-      <p:sp>
-        <p:nvSpPr>
-          <p:cNvPr id="10" name="">
-            <a:extLst xmlns:a="http://schemas.openxmlformats.org/drawingml/2006/main">
-              <a:ext uri="{FF2B5EF4-FFF2-40B4-BE49-F238E27FC236}">
-                <a16:creationId xmlns:a16="http://schemas.microsoft.com/office/drawing/2014/main" id="{F4E23AB4-C9EA-4762-BE29-C73498830AFB}"/>
-              </a:ext>
-            </a:extLst>
-          </p:cNvPr>
-          <p:cNvSpPr>
-            <a:spLocks xmlns:a="http://schemas.openxmlformats.org/drawingml/2006/main" noGrp="1"/>
-          </p:cNvSpPr>
-          <p:nvPr/>
-        </p:nvSpPr>
-        <p:spPr>
-          <a:xfrm xmlns:a="http://schemas.openxmlformats.org/drawingml/2006/main">
-            <a:off x="1428750" y="3905250"/>
-            <a:ext cx="2857500" cy="685800"/>
-          </a:xfrm>
-          <a:prstGeom xmlns:a="http://schemas.openxmlformats.org/drawingml/2006/main" prst="rect">
-            <a:avLst/>
-          </a:prstGeom>
-          <a:noFill xmlns:a="http://schemas.openxmlformats.org/drawingml/2006/main"/>
-          <a:ln xmlns:a="http://schemas.openxmlformats.org/drawingml/2006/main" w="0">
-            <a:noFill/>
-            <a:prstDash val="solid"/>
-          </a:ln>
-        </p:spPr>
-        <p:txBody>
-          <a:bodyPr xmlns:a="http://schemas.openxmlformats.org/drawingml/2006/main"/>
-          <a:lstStyle xmlns:a="http://schemas.openxmlformats.org/drawingml/2006/main"/>
-          <a:p xmlns:a="http://schemas.openxmlformats.org/drawingml/2006/main">
-            <a:pPr algn="l">
-              <a:defRPr sz="3600" b="1">
-                <a:solidFill>
-                  <a:srgbClr val="2A8C82"/>
-                </a:solidFill>
-              </a:defRPr>
-            </a:pPr>
-            <a:r>
-              <a:rPr sz="3600" b="1">
-                <a:solidFill>
-                  <a:srgbClr val="2A8C82"/>
-                </a:solidFill>
-              </a:rPr>
-              <a:t>93.72%</a:t>
-            </a:r>
-          </a:p>
-        </p:txBody>
-      </p:sp>
-      <p:sp>
-        <p:nvSpPr>
-          <p:cNvPr id="11" name="">
-            <a:extLst xmlns:a="http://schemas.openxmlformats.org/drawingml/2006/main">
-              <a:ext uri="{FF2B5EF4-FFF2-40B4-BE49-F238E27FC236}">
-                <a16:creationId xmlns:a16="http://schemas.microsoft.com/office/drawing/2014/main" id="{D4ACA5EC-D664-4843-82FF-26B56DB44FD5}"/>
-              </a:ext>
-            </a:extLst>
-          </p:cNvPr>
-          <p:cNvSpPr>
-            <a:spLocks xmlns:a="http://schemas.openxmlformats.org/drawingml/2006/main" noGrp="1"/>
-          </p:cNvSpPr>
-          <p:nvPr/>
-        </p:nvSpPr>
-        <p:spPr>
-          <a:xfrm xmlns:a="http://schemas.openxmlformats.org/drawingml/2006/main">
-            <a:off x="1428750" y="4591050"/>
-            <a:ext cx="2857500" cy="514350"/>
-          </a:xfrm>
-          <a:prstGeom xmlns:a="http://schemas.openxmlformats.org/drawingml/2006/main" prst="rect">
-            <a:avLst/>
-          </a:prstGeom>
-          <a:noFill xmlns:a="http://schemas.openxmlformats.org/drawingml/2006/main"/>
-          <a:ln xmlns:a="http://schemas.openxmlformats.org/drawingml/2006/main" w="0">
-            <a:noFill/>
-            <a:prstDash val="solid"/>
-          </a:ln>
-        </p:spPr>
-        <p:txBody>
-          <a:bodyPr xmlns:a="http://schemas.openxmlformats.org/drawingml/2006/main"/>
-          <a:lstStyle xmlns:a="http://schemas.openxmlformats.org/drawingml/2006/main"/>
-          <a:p xmlns:a="http://schemas.openxmlformats.org/drawingml/2006/main">
-            <a:pPr algn="l">
-              <a:defRPr sz="1350" b="0">
-                <a:solidFill>
-                  <a:srgbClr val="526174"/>
-                </a:solidFill>
-              </a:defRPr>
-            </a:pPr>
-            <a:r>
-              <a:rPr sz="1350" b="0">
-                <a:solidFill>
-                  <a:srgbClr val="526174"/>
-                </a:solidFill>
-              </a:rPr>
-              <a:t>resolved before LLM inference</a:t>
-            </a:r>
-          </a:p>
-        </p:txBody>
-      </p:sp>
-      <p:sp>
-        <p:nvSpPr>
-          <p:cNvPr id="12" name="">
-            <a:extLst xmlns:a="http://schemas.openxmlformats.org/drawingml/2006/main">
-              <a:ext uri="{FF2B5EF4-FFF2-40B4-BE49-F238E27FC236}">
-                <a16:creationId xmlns:a16="http://schemas.microsoft.com/office/drawing/2014/main" id="{37A05D7E-04EA-49AE-A4E2-9A737DEECBF6}"/>
-              </a:ext>
-            </a:extLst>
-          </p:cNvPr>
-          <p:cNvSpPr>
-            <a:spLocks xmlns:a="http://schemas.openxmlformats.org/drawingml/2006/main" noGrp="1"/>
-          </p:cNvSpPr>
-          <p:nvPr/>
-        </p:nvSpPr>
-        <p:spPr>
-          <a:xfrm xmlns:a="http://schemas.openxmlformats.org/drawingml/2006/main">
-            <a:off x="4810125" y="3905250"/>
-            <a:ext cx="2857500" cy="685800"/>
-          </a:xfrm>
-          <a:prstGeom xmlns:a="http://schemas.openxmlformats.org/drawingml/2006/main" prst="rect">
-            <a:avLst/>
-          </a:prstGeom>
-          <a:noFill xmlns:a="http://schemas.openxmlformats.org/drawingml/2006/main"/>
-          <a:ln xmlns:a="http://schemas.openxmlformats.org/drawingml/2006/main" w="0">
-            <a:noFill/>
-            <a:prstDash val="solid"/>
-          </a:ln>
-        </p:spPr>
-        <p:txBody>
-          <a:bodyPr xmlns:a="http://schemas.openxmlformats.org/drawingml/2006/main"/>
-          <a:lstStyle xmlns:a="http://schemas.openxmlformats.org/drawingml/2006/main"/>
-          <a:p xmlns:a="http://schemas.openxmlformats.org/drawingml/2006/main">
-            <a:pPr algn="l">
-              <a:defRPr sz="3600" b="1">
-                <a:solidFill>
-                  <a:srgbClr val="D59B32"/>
-                </a:solidFill>
-              </a:defRPr>
-            </a:pPr>
-            <a:r>
-              <a:rPr sz="3600" b="1">
-                <a:solidFill>
-                  <a:srgbClr val="D59B32"/>
-                </a:solidFill>
-              </a:rPr>
-              <a:t>6.28%</a:t>
-            </a:r>
-          </a:p>
-        </p:txBody>
-      </p:sp>
-      <p:sp>
-        <p:nvSpPr>
-          <p:cNvPr id="13" name="">
-            <a:extLst xmlns:a="http://schemas.openxmlformats.org/drawingml/2006/main">
-              <a:ext uri="{FF2B5EF4-FFF2-40B4-BE49-F238E27FC236}">
-                <a16:creationId xmlns:a16="http://schemas.microsoft.com/office/drawing/2014/main" id="{B5DCFF4E-B222-4E77-8C0A-372E0D4AA461}"/>
-              </a:ext>
-            </a:extLst>
-          </p:cNvPr>
-          <p:cNvSpPr>
-            <a:spLocks xmlns:a="http://schemas.openxmlformats.org/drawingml/2006/main" noGrp="1"/>
-          </p:cNvSpPr>
-          <p:nvPr/>
-        </p:nvSpPr>
-        <p:spPr>
-          <a:xfrm xmlns:a="http://schemas.openxmlformats.org/drawingml/2006/main">
-            <a:off x="4810125" y="4591050"/>
-            <a:ext cx="2857500" cy="514350"/>
-          </a:xfrm>
-          <a:prstGeom xmlns:a="http://schemas.openxmlformats.org/drawingml/2006/main" prst="rect">
-            <a:avLst/>
-          </a:prstGeom>
-          <a:noFill xmlns:a="http://schemas.openxmlformats.org/drawingml/2006/main"/>
-          <a:ln xmlns:a="http://schemas.openxmlformats.org/drawingml/2006/main" w="0">
-            <a:noFill/>
-            <a:prstDash val="solid"/>
-          </a:ln>
-        </p:spPr>
-        <p:txBody>
-          <a:bodyPr xmlns:a="http://schemas.openxmlformats.org/drawingml/2006/main"/>
-          <a:lstStyle xmlns:a="http://schemas.openxmlformats.org/drawingml/2006/main"/>
-          <a:p xmlns:a="http://schemas.openxmlformats.org/drawingml/2006/main">
-            <a:pPr algn="l">
-              <a:defRPr sz="1350" b="0">
-                <a:solidFill>
-                  <a:srgbClr val="526174"/>
-                </a:solidFill>
-              </a:defRPr>
-            </a:pPr>
-            <a:r>
-              <a:rPr sz="1350" b="0">
-                <a:solidFill>
-                  <a:srgbClr val="526174"/>
-                </a:solidFill>
-              </a:rPr>
-              <a:t>unique rows sent to the judge</a:t>
-            </a:r>
-          </a:p>
-        </p:txBody>
-      </p:sp>
-      <p:sp>
-        <p:nvSpPr>
-          <p:cNvPr id="14" name="">
-            <a:extLst xmlns:a="http://schemas.openxmlformats.org/drawingml/2006/main">
-              <a:ext uri="{FF2B5EF4-FFF2-40B4-BE49-F238E27FC236}">
-                <a16:creationId xmlns:a16="http://schemas.microsoft.com/office/drawing/2014/main" id="{CBB8A189-167D-4B9A-8CBB-2961C44099FB}"/>
-              </a:ext>
-            </a:extLst>
-          </p:cNvPr>
-          <p:cNvSpPr>
-            <a:spLocks xmlns:a="http://schemas.openxmlformats.org/drawingml/2006/main" noGrp="1"/>
-          </p:cNvSpPr>
-          <p:nvPr/>
-        </p:nvSpPr>
-        <p:spPr>
-          <a:xfrm xmlns:a="http://schemas.openxmlformats.org/drawingml/2006/main">
-            <a:off x="8191500" y="3905250"/>
-            <a:ext cx="2857500" cy="685800"/>
-          </a:xfrm>
-          <a:prstGeom xmlns:a="http://schemas.openxmlformats.org/drawingml/2006/main" prst="rect">
-            <a:avLst/>
-          </a:prstGeom>
-          <a:noFill xmlns:a="http://schemas.openxmlformats.org/drawingml/2006/main"/>
-          <a:ln xmlns:a="http://schemas.openxmlformats.org/drawingml/2006/main" w="0">
-            <a:noFill/>
-            <a:prstDash val="solid"/>
-          </a:ln>
-        </p:spPr>
-        <p:txBody>
-          <a:bodyPr xmlns:a="http://schemas.openxmlformats.org/drawingml/2006/main"/>
-          <a:lstStyle xmlns:a="http://schemas.openxmlformats.org/drawingml/2006/main"/>
-          <a:p xmlns:a="http://schemas.openxmlformats.org/drawingml/2006/main">
-            <a:pPr algn="l">
-              <a:defRPr sz="3600" b="1">
-                <a:solidFill>
-                  <a:srgbClr val="1F5A7A"/>
-                </a:solidFill>
-              </a:defRPr>
-            </a:pPr>
-            <a:r>
-              <a:rPr sz="3600" b="1">
-                <a:solidFill>
-                  <a:srgbClr val="1F5A7A"/>
-                </a:solidFill>
-              </a:rPr>
-              <a:t>74.5%</a:t>
-            </a:r>
-          </a:p>
-        </p:txBody>
-      </p:sp>
-      <p:sp>
-        <p:nvSpPr>
-          <p:cNvPr id="15" name="">
-            <a:extLst xmlns:a="http://schemas.openxmlformats.org/drawingml/2006/main">
-              <a:ext uri="{FF2B5EF4-FFF2-40B4-BE49-F238E27FC236}">
-                <a16:creationId xmlns:a16="http://schemas.microsoft.com/office/drawing/2014/main" id="{813543FA-20C7-451B-8526-36A49C58C31F}"/>
-              </a:ext>
-            </a:extLst>
-          </p:cNvPr>
-          <p:cNvSpPr>
-            <a:spLocks xmlns:a="http://schemas.openxmlformats.org/drawingml/2006/main" noGrp="1"/>
-          </p:cNvSpPr>
-          <p:nvPr/>
-        </p:nvSpPr>
-        <p:spPr>
-          <a:xfrm xmlns:a="http://schemas.openxmlformats.org/drawingml/2006/main">
-            <a:off x="8191500" y="4591050"/>
-            <a:ext cx="2857500" cy="514350"/>
-          </a:xfrm>
-          <a:prstGeom xmlns:a="http://schemas.openxmlformats.org/drawingml/2006/main" prst="rect">
-            <a:avLst/>
-          </a:prstGeom>
-          <a:noFill xmlns:a="http://schemas.openxmlformats.org/drawingml/2006/main"/>
-          <a:ln xmlns:a="http://schemas.openxmlformats.org/drawingml/2006/main" w="0">
-            <a:noFill/>
-            <a:prstDash val="solid"/>
-          </a:ln>
-        </p:spPr>
-        <p:txBody>
-          <a:bodyPr xmlns:a="http://schemas.openxmlformats.org/drawingml/2006/main"/>
-          <a:lstStyle xmlns:a="http://schemas.openxmlformats.org/drawingml/2006/main"/>
-          <a:p xmlns:a="http://schemas.openxmlformats.org/drawingml/2006/main">
-            <a:pPr algn="l">
-              <a:defRPr sz="1350" b="0">
-                <a:solidFill>
-                  <a:srgbClr val="526174"/>
-                </a:solidFill>
-              </a:defRPr>
-            </a:pPr>
-            <a:r>
-              <a:rPr sz="1350" b="0">
-                <a:solidFill>
-                  <a:srgbClr val="526174"/>
-                </a:solidFill>
-              </a:rPr>
-              <a:t>judge-queue reduction from 620</a:t>
-            </a:r>
-          </a:p>
-        </p:txBody>
-      </p:sp>
-      <p:sp>
-        <p:nvSpPr>
-          <p:cNvPr id="16" name="">
-            <a:extLst xmlns:a="http://schemas.openxmlformats.org/drawingml/2006/main">
-              <a:ext uri="{FF2B5EF4-FFF2-40B4-BE49-F238E27FC236}">
-                <a16:creationId xmlns:a16="http://schemas.microsoft.com/office/drawing/2014/main" id="{568BBF2B-E25A-4D5A-866A-F407CA3F9E45}"/>
-              </a:ext>
-            </a:extLst>
-          </p:cNvPr>
-          <p:cNvSpPr>
-            <a:spLocks xmlns:a="http://schemas.openxmlformats.org/drawingml/2006/main" noGrp="1"/>
-          </p:cNvSpPr>
-          <p:nvPr/>
-        </p:nvSpPr>
-        <p:spPr>
-          <a:xfrm xmlns:a="http://schemas.openxmlformats.org/drawingml/2006/main">
-            <a:off x="2000250" y="5429250"/>
-            <a:ext cx="8191500" cy="304800"/>
-          </a:xfrm>
-          <a:prstGeom xmlns:a="http://schemas.openxmlformats.org/drawingml/2006/main" prst="rect">
-            <a:avLst/>
-          </a:prstGeom>
-          <a:noFill xmlns:a="http://schemas.openxmlformats.org/drawingml/2006/main"/>
-          <a:ln xmlns:a="http://schemas.openxmlformats.org/drawingml/2006/main" w="0">
-            <a:noFill/>
-            <a:prstDash val="solid"/>
-          </a:ln>
-        </p:spPr>
-        <p:txBody>
-          <a:bodyPr xmlns:a="http://schemas.openxmlformats.org/drawingml/2006/main"/>
-          <a:lstStyle xmlns:a="http://schemas.openxmlformats.org/drawingml/2006/main"/>
-          <a:p xmlns:a="http://schemas.openxmlformats.org/drawingml/2006/main">
-            <a:pPr algn="ctr">
-              <a:defRPr sz="1350" b="0">
-                <a:solidFill>
-                  <a:srgbClr val="526174"/>
-                </a:solidFill>
-              </a:defRPr>
-            </a:pPr>
-            <a:r>
-              <a:rPr sz="1350" b="0">
-                <a:solidFill>
-                  <a:srgbClr val="526174"/>
-                </a:solidFill>
-              </a:rPr>
-              <a:t>These are unique rows. Some no-context rows used more than one judge view.</a:t>
-            </a:r>
-          </a:p>
-        </p:txBody>
-      </p:sp>
-      <p:sp>
-        <p:nvSpPr>
-          <p:cNvPr id="17" name="">
-            <a:extLst xmlns:a="http://schemas.openxmlformats.org/drawingml/2006/main">
-              <a:ext uri="{FF2B5EF4-FFF2-40B4-BE49-F238E27FC236}">
-                <a16:creationId xmlns:a16="http://schemas.microsoft.com/office/drawing/2014/main" id="{0B1DD085-6E28-4541-9AF7-4B125C5CCEF5}"/>
-              </a:ext>
-            </a:extLst>
-          </p:cNvPr>
-          <p:cNvSpPr>
-            <a:spLocks xmlns:a="http://schemas.openxmlformats.org/drawingml/2006/main" noGrp="1"/>
-          </p:cNvSpPr>
-          <p:nvPr/>
-        </p:nvSpPr>
-        <p:spPr>
-          <a:xfrm xmlns:a="http://schemas.openxmlformats.org/drawingml/2006/main">
-            <a:off x="685800" y="6372225"/>
-            <a:ext cx="10820400" cy="0"/>
-          </a:xfrm>
-          <a:prstGeom xmlns:a="http://schemas.openxmlformats.org/drawingml/2006/main" prst="line">
-            <a:avLst/>
-          </a:prstGeom>
-          <a:noFill xmlns:a="http://schemas.openxmlformats.org/drawingml/2006/main"/>
           <a:ln xmlns:a="http://schemas.openxmlformats.org/drawingml/2006/main" w="9525">
             <a:solidFill>
               <a:srgbClr val="D8E0EA"/>
@@ -16118,10 +16033,1434 @@
       </p:sp>
       <p:sp>
         <p:nvSpPr>
-          <p:cNvPr id="18" name="source-5">
-            <a:extLst xmlns:a="http://schemas.openxmlformats.org/drawingml/2006/main">
-              <a:ext uri="{FF2B5EF4-FFF2-40B4-BE49-F238E27FC236}">
-                <a16:creationId xmlns:a16="http://schemas.microsoft.com/office/drawing/2014/main" id="{1C2F0175-8F97-438B-B599-68800046B743}"/>
+          <p:cNvPr id="8" name="">
+            <a:extLst xmlns:a="http://schemas.openxmlformats.org/drawingml/2006/main">
+              <a:ext uri="{FF2B5EF4-FFF2-40B4-BE49-F238E27FC236}">
+                <a16:creationId xmlns:a16="http://schemas.microsoft.com/office/drawing/2014/main" id="{B2BA65BD-7749-408E-A691-BE2070FB85CB}"/>
+              </a:ext>
+            </a:extLst>
+          </p:cNvPr>
+          <p:cNvSpPr>
+            <a:spLocks xmlns:a="http://schemas.openxmlformats.org/drawingml/2006/main" noGrp="1"/>
+          </p:cNvSpPr>
+          <p:nvPr/>
+        </p:nvSpPr>
+        <p:spPr>
+          <a:xfrm xmlns:a="http://schemas.openxmlformats.org/drawingml/2006/main">
+            <a:off x="1123950" y="2952750"/>
+            <a:ext cx="1752600" cy="228600"/>
+          </a:xfrm>
+          <a:prstGeom xmlns:a="http://schemas.openxmlformats.org/drawingml/2006/main" prst="rect">
+            <a:avLst/>
+          </a:prstGeom>
+          <a:noFill xmlns:a="http://schemas.openxmlformats.org/drawingml/2006/main"/>
+          <a:ln xmlns:a="http://schemas.openxmlformats.org/drawingml/2006/main" w="0">
+            <a:noFill/>
+            <a:prstDash val="solid"/>
+          </a:ln>
+        </p:spPr>
+        <p:txBody>
+          <a:bodyPr xmlns:a="http://schemas.openxmlformats.org/drawingml/2006/main"/>
+          <a:lstStyle xmlns:a="http://schemas.openxmlformats.org/drawingml/2006/main"/>
+          <a:p xmlns:a="http://schemas.openxmlformats.org/drawingml/2006/main">
+            <a:pPr algn="ctr">
+              <a:defRPr sz="1125" b="0">
+                <a:solidFill>
+                  <a:srgbClr val="526174"/>
+                </a:solidFill>
+              </a:defRPr>
+            </a:pPr>
+            <a:r>
+              <a:rPr sz="1125" b="0">
+                <a:solidFill>
+                  <a:srgbClr val="526174"/>
+                </a:solidFill>
+              </a:rPr>
+              <a:t>normalize Bengali digits</a:t>
+            </a:r>
+          </a:p>
+        </p:txBody>
+      </p:sp>
+      <p:sp>
+        <p:nvSpPr>
+          <p:cNvPr id="9" name="">
+            <a:extLst xmlns:a="http://schemas.openxmlformats.org/drawingml/2006/main">
+              <a:ext uri="{FF2B5EF4-FFF2-40B4-BE49-F238E27FC236}">
+                <a16:creationId xmlns:a16="http://schemas.microsoft.com/office/drawing/2014/main" id="{D3FC1128-C8E5-46A8-9360-5F427F935C71}"/>
+              </a:ext>
+            </a:extLst>
+          </p:cNvPr>
+          <p:cNvSpPr>
+            <a:spLocks xmlns:a="http://schemas.openxmlformats.org/drawingml/2006/main" noGrp="1"/>
+          </p:cNvSpPr>
+          <p:nvPr/>
+        </p:nvSpPr>
+        <p:spPr>
+          <a:xfrm xmlns:a="http://schemas.openxmlformats.org/drawingml/2006/main">
+            <a:off x="1028700" y="3448050"/>
+            <a:ext cx="1943100" cy="419100"/>
+          </a:xfrm>
+          <a:prstGeom xmlns:a="http://schemas.openxmlformats.org/drawingml/2006/main" prst="roundRect">
+            <a:avLst>
+              <a:gd name="adj" fmla="val 22727"/>
+            </a:avLst>
+          </a:prstGeom>
+          <a:solidFill xmlns:a="http://schemas.openxmlformats.org/drawingml/2006/main">
+            <a:srgbClr val="F7F9FC"/>
+          </a:solidFill>
+          <a:ln xmlns:a="http://schemas.openxmlformats.org/drawingml/2006/main" w="9525">
+            <a:solidFill>
+              <a:srgbClr val="D8E0EA"/>
+            </a:solidFill>
+            <a:prstDash val="solid"/>
+          </a:ln>
+        </p:spPr>
+      </p:sp>
+      <p:sp>
+        <p:nvSpPr>
+          <p:cNvPr id="10" name="">
+            <a:extLst xmlns:a="http://schemas.openxmlformats.org/drawingml/2006/main">
+              <a:ext uri="{FF2B5EF4-FFF2-40B4-BE49-F238E27FC236}">
+                <a16:creationId xmlns:a16="http://schemas.microsoft.com/office/drawing/2014/main" id="{0E51BB58-C7BE-44F7-BD7B-4FCA3D49C0B8}"/>
+              </a:ext>
+            </a:extLst>
+          </p:cNvPr>
+          <p:cNvSpPr>
+            <a:spLocks xmlns:a="http://schemas.openxmlformats.org/drawingml/2006/main" noGrp="1"/>
+          </p:cNvSpPr>
+          <p:nvPr/>
+        </p:nvSpPr>
+        <p:spPr>
+          <a:xfrm xmlns:a="http://schemas.openxmlformats.org/drawingml/2006/main">
+            <a:off x="1123950" y="3543300"/>
+            <a:ext cx="1752600" cy="228600"/>
+          </a:xfrm>
+          <a:prstGeom xmlns:a="http://schemas.openxmlformats.org/drawingml/2006/main" prst="rect">
+            <a:avLst/>
+          </a:prstGeom>
+          <a:noFill xmlns:a="http://schemas.openxmlformats.org/drawingml/2006/main"/>
+          <a:ln xmlns:a="http://schemas.openxmlformats.org/drawingml/2006/main" w="0">
+            <a:noFill/>
+            <a:prstDash val="solid"/>
+          </a:ln>
+        </p:spPr>
+        <p:txBody>
+          <a:bodyPr xmlns:a="http://schemas.openxmlformats.org/drawingml/2006/main"/>
+          <a:lstStyle xmlns:a="http://schemas.openxmlformats.org/drawingml/2006/main"/>
+          <a:p xmlns:a="http://schemas.openxmlformats.org/drawingml/2006/main">
+            <a:pPr algn="ctr">
+              <a:defRPr sz="1125" b="0">
+                <a:solidFill>
+                  <a:srgbClr val="526174"/>
+                </a:solidFill>
+              </a:defRPr>
+            </a:pPr>
+            <a:r>
+              <a:rPr sz="1125" b="0">
+                <a:solidFill>
+                  <a:srgbClr val="526174"/>
+                </a:solidFill>
+              </a:rPr>
+              <a:t>units / dates / ranges</a:t>
+            </a:r>
+          </a:p>
+        </p:txBody>
+      </p:sp>
+      <p:sp>
+        <p:nvSpPr>
+          <p:cNvPr id="11" name="">
+            <a:extLst xmlns:a="http://schemas.openxmlformats.org/drawingml/2006/main">
+              <a:ext uri="{FF2B5EF4-FFF2-40B4-BE49-F238E27FC236}">
+                <a16:creationId xmlns:a16="http://schemas.microsoft.com/office/drawing/2014/main" id="{A4055746-8A37-4607-A8F9-AD4EDD780E15}"/>
+              </a:ext>
+            </a:extLst>
+          </p:cNvPr>
+          <p:cNvSpPr>
+            <a:spLocks xmlns:a="http://schemas.openxmlformats.org/drawingml/2006/main" noGrp="1"/>
+          </p:cNvSpPr>
+          <p:nvPr/>
+        </p:nvSpPr>
+        <p:spPr>
+          <a:xfrm xmlns:a="http://schemas.openxmlformats.org/drawingml/2006/main">
+            <a:off x="1028700" y="4038600"/>
+            <a:ext cx="1943100" cy="419100"/>
+          </a:xfrm>
+          <a:prstGeom xmlns:a="http://schemas.openxmlformats.org/drawingml/2006/main" prst="roundRect">
+            <a:avLst>
+              <a:gd name="adj" fmla="val 22727"/>
+            </a:avLst>
+          </a:prstGeom>
+          <a:solidFill xmlns:a="http://schemas.openxmlformats.org/drawingml/2006/main">
+            <a:srgbClr val="E7EEF4"/>
+          </a:solidFill>
+          <a:ln xmlns:a="http://schemas.openxmlformats.org/drawingml/2006/main" w="9525">
+            <a:solidFill>
+              <a:srgbClr val="D8E0EA"/>
+            </a:solidFill>
+            <a:prstDash val="solid"/>
+          </a:ln>
+        </p:spPr>
+      </p:sp>
+      <p:sp>
+        <p:nvSpPr>
+          <p:cNvPr id="12" name="">
+            <a:extLst xmlns:a="http://schemas.openxmlformats.org/drawingml/2006/main">
+              <a:ext uri="{FF2B5EF4-FFF2-40B4-BE49-F238E27FC236}">
+                <a16:creationId xmlns:a16="http://schemas.microsoft.com/office/drawing/2014/main" id="{D8F03750-34EC-496F-8D02-F0D106B5E463}"/>
+              </a:ext>
+            </a:extLst>
+          </p:cNvPr>
+          <p:cNvSpPr>
+            <a:spLocks xmlns:a="http://schemas.openxmlformats.org/drawingml/2006/main" noGrp="1"/>
+          </p:cNvSpPr>
+          <p:nvPr/>
+        </p:nvSpPr>
+        <p:spPr>
+          <a:xfrm xmlns:a="http://schemas.openxmlformats.org/drawingml/2006/main">
+            <a:off x="1123950" y="4133850"/>
+            <a:ext cx="1752600" cy="228600"/>
+          </a:xfrm>
+          <a:prstGeom xmlns:a="http://schemas.openxmlformats.org/drawingml/2006/main" prst="rect">
+            <a:avLst/>
+          </a:prstGeom>
+          <a:noFill xmlns:a="http://schemas.openxmlformats.org/drawingml/2006/main"/>
+          <a:ln xmlns:a="http://schemas.openxmlformats.org/drawingml/2006/main" w="0">
+            <a:noFill/>
+            <a:prstDash val="solid"/>
+          </a:ln>
+        </p:spPr>
+        <p:txBody>
+          <a:bodyPr xmlns:a="http://schemas.openxmlformats.org/drawingml/2006/main"/>
+          <a:lstStyle xmlns:a="http://schemas.openxmlformats.org/drawingml/2006/main"/>
+          <a:p xmlns:a="http://schemas.openxmlformats.org/drawingml/2006/main">
+            <a:pPr algn="ctr">
+              <a:defRPr sz="1125" b="1">
+                <a:solidFill>
+                  <a:srgbClr val="0F172A"/>
+                </a:solidFill>
+              </a:defRPr>
+            </a:pPr>
+            <a:r>
+              <a:rPr sz="1125" b="1">
+                <a:solidFill>
+                  <a:srgbClr val="0F172A"/>
+                </a:solidFill>
+              </a:rPr>
+              <a:t>compare requested relation</a:t>
+            </a:r>
+          </a:p>
+        </p:txBody>
+      </p:sp>
+      <p:sp>
+        <p:nvSpPr>
+          <p:cNvPr id="13" name="">
+            <a:extLst xmlns:a="http://schemas.openxmlformats.org/drawingml/2006/main">
+              <a:ext uri="{FF2B5EF4-FFF2-40B4-BE49-F238E27FC236}">
+                <a16:creationId xmlns:a16="http://schemas.microsoft.com/office/drawing/2014/main" id="{2FD72DE5-4E76-4C5A-92B1-5F81525FA2F2}"/>
+              </a:ext>
+            </a:extLst>
+          </p:cNvPr>
+          <p:cNvSpPr>
+            <a:spLocks xmlns:a="http://schemas.openxmlformats.org/drawingml/2006/main" noGrp="1"/>
+          </p:cNvSpPr>
+          <p:nvPr/>
+        </p:nvSpPr>
+        <p:spPr>
+          <a:xfrm xmlns:a="http://schemas.openxmlformats.org/drawingml/2006/main">
+            <a:off x="3676650" y="2133600"/>
+            <a:ext cx="2324100" cy="2724150"/>
+          </a:xfrm>
+          <a:prstGeom xmlns:a="http://schemas.openxmlformats.org/drawingml/2006/main" prst="roundRect">
+            <a:avLst>
+              <a:gd name="adj" fmla="val 6557"/>
+            </a:avLst>
+          </a:prstGeom>
+          <a:solidFill xmlns:a="http://schemas.openxmlformats.org/drawingml/2006/main">
+            <a:srgbClr val="FFFFFF"/>
+          </a:solidFill>
+          <a:ln xmlns:a="http://schemas.openxmlformats.org/drawingml/2006/main" w="9525">
+            <a:solidFill>
+              <a:srgbClr val="2A8C82"/>
+            </a:solidFill>
+            <a:prstDash val="solid"/>
+          </a:ln>
+        </p:spPr>
+        <p:style>
+          <a:lnRef xmlns:a="http://schemas.openxmlformats.org/drawingml/2006/main" idx="0"/>
+          <a:fillRef xmlns:a="http://schemas.openxmlformats.org/drawingml/2006/main" idx="0"/>
+          <a:effectRef xmlns:a="http://schemas.openxmlformats.org/drawingml/2006/main" idx="4"/>
+          <a:fontRef xmlns:a="http://schemas.openxmlformats.org/drawingml/2006/main" idx="major"/>
+        </p:style>
+      </p:sp>
+      <p:sp>
+        <p:nvSpPr>
+          <p:cNvPr id="14" name="">
+            <a:extLst xmlns:a="http://schemas.openxmlformats.org/drawingml/2006/main">
+              <a:ext uri="{FF2B5EF4-FFF2-40B4-BE49-F238E27FC236}">
+                <a16:creationId xmlns:a16="http://schemas.microsoft.com/office/drawing/2014/main" id="{4E1E1C43-00A3-4911-A420-C583CB7CF67B}"/>
+              </a:ext>
+            </a:extLst>
+          </p:cNvPr>
+          <p:cNvSpPr>
+            <a:spLocks xmlns:a="http://schemas.openxmlformats.org/drawingml/2006/main" noGrp="1"/>
+          </p:cNvSpPr>
+          <p:nvPr/>
+        </p:nvSpPr>
+        <p:spPr>
+          <a:xfrm xmlns:a="http://schemas.openxmlformats.org/drawingml/2006/main">
+            <a:off x="3867150" y="2343150"/>
+            <a:ext cx="1943100" cy="304800"/>
+          </a:xfrm>
+          <a:prstGeom xmlns:a="http://schemas.openxmlformats.org/drawingml/2006/main" prst="rect">
+            <a:avLst/>
+          </a:prstGeom>
+          <a:noFill xmlns:a="http://schemas.openxmlformats.org/drawingml/2006/main"/>
+          <a:ln xmlns:a="http://schemas.openxmlformats.org/drawingml/2006/main" w="0">
+            <a:noFill/>
+            <a:prstDash val="solid"/>
+          </a:ln>
+        </p:spPr>
+        <p:txBody>
+          <a:bodyPr xmlns:a="http://schemas.openxmlformats.org/drawingml/2006/main"/>
+          <a:lstStyle xmlns:a="http://schemas.openxmlformats.org/drawingml/2006/main"/>
+          <a:p xmlns:a="http://schemas.openxmlformats.org/drawingml/2006/main">
+            <a:pPr algn="ctr">
+              <a:defRPr sz="1650" b="1">
+                <a:solidFill>
+                  <a:srgbClr val="2A8C82"/>
+                </a:solidFill>
+              </a:defRPr>
+            </a:pPr>
+            <a:r>
+              <a:rPr sz="1650" b="1">
+                <a:solidFill>
+                  <a:srgbClr val="2A8C82"/>
+                </a:solidFill>
+              </a:rPr>
+              <a:t>MCQ</a:t>
+            </a:r>
+          </a:p>
+        </p:txBody>
+      </p:sp>
+      <p:sp>
+        <p:nvSpPr>
+          <p:cNvPr id="15" name="">
+            <a:extLst xmlns:a="http://schemas.openxmlformats.org/drawingml/2006/main">
+              <a:ext uri="{FF2B5EF4-FFF2-40B4-BE49-F238E27FC236}">
+                <a16:creationId xmlns:a16="http://schemas.microsoft.com/office/drawing/2014/main" id="{1961C03D-647E-4EB0-B912-FF5D6951B7E7}"/>
+              </a:ext>
+            </a:extLst>
+          </p:cNvPr>
+          <p:cNvSpPr>
+            <a:spLocks xmlns:a="http://schemas.openxmlformats.org/drawingml/2006/main" noGrp="1"/>
+          </p:cNvSpPr>
+          <p:nvPr/>
+        </p:nvSpPr>
+        <p:spPr>
+          <a:xfrm xmlns:a="http://schemas.openxmlformats.org/drawingml/2006/main">
+            <a:off x="3867150" y="2857500"/>
+            <a:ext cx="1943100" cy="419100"/>
+          </a:xfrm>
+          <a:prstGeom xmlns:a="http://schemas.openxmlformats.org/drawingml/2006/main" prst="roundRect">
+            <a:avLst>
+              <a:gd name="adj" fmla="val 22727"/>
+            </a:avLst>
+          </a:prstGeom>
+          <a:solidFill xmlns:a="http://schemas.openxmlformats.org/drawingml/2006/main">
+            <a:srgbClr val="F7F9FC"/>
+          </a:solidFill>
+          <a:ln xmlns:a="http://schemas.openxmlformats.org/drawingml/2006/main" w="9525">
+            <a:solidFill>
+              <a:srgbClr val="D8E0EA"/>
+            </a:solidFill>
+            <a:prstDash val="solid"/>
+          </a:ln>
+        </p:spPr>
+      </p:sp>
+      <p:sp>
+        <p:nvSpPr>
+          <p:cNvPr id="16" name="">
+            <a:extLst xmlns:a="http://schemas.openxmlformats.org/drawingml/2006/main">
+              <a:ext uri="{FF2B5EF4-FFF2-40B4-BE49-F238E27FC236}">
+                <a16:creationId xmlns:a16="http://schemas.microsoft.com/office/drawing/2014/main" id="{58F26D5B-FF01-49C2-B578-F6BF0C9188A0}"/>
+              </a:ext>
+            </a:extLst>
+          </p:cNvPr>
+          <p:cNvSpPr>
+            <a:spLocks xmlns:a="http://schemas.openxmlformats.org/drawingml/2006/main" noGrp="1"/>
+          </p:cNvSpPr>
+          <p:nvPr/>
+        </p:nvSpPr>
+        <p:spPr>
+          <a:xfrm xmlns:a="http://schemas.openxmlformats.org/drawingml/2006/main">
+            <a:off x="3962400" y="2952750"/>
+            <a:ext cx="1752600" cy="228600"/>
+          </a:xfrm>
+          <a:prstGeom xmlns:a="http://schemas.openxmlformats.org/drawingml/2006/main" prst="rect">
+            <a:avLst/>
+          </a:prstGeom>
+          <a:noFill xmlns:a="http://schemas.openxmlformats.org/drawingml/2006/main"/>
+          <a:ln xmlns:a="http://schemas.openxmlformats.org/drawingml/2006/main" w="0">
+            <a:noFill/>
+            <a:prstDash val="solid"/>
+          </a:ln>
+        </p:spPr>
+        <p:txBody>
+          <a:bodyPr xmlns:a="http://schemas.openxmlformats.org/drawingml/2006/main"/>
+          <a:lstStyle xmlns:a="http://schemas.openxmlformats.org/drawingml/2006/main"/>
+          <a:p xmlns:a="http://schemas.openxmlformats.org/drawingml/2006/main">
+            <a:pPr algn="ctr">
+              <a:defRPr sz="1125" b="0">
+                <a:solidFill>
+                  <a:srgbClr val="526174"/>
+                </a:solidFill>
+              </a:defRPr>
+            </a:pPr>
+            <a:r>
+              <a:rPr sz="1125" b="0">
+                <a:solidFill>
+                  <a:srgbClr val="526174"/>
+                </a:solidFill>
+              </a:rPr>
+              <a:t>extract option set</a:t>
+            </a:r>
+          </a:p>
+        </p:txBody>
+      </p:sp>
+      <p:sp>
+        <p:nvSpPr>
+          <p:cNvPr id="17" name="">
+            <a:extLst xmlns:a="http://schemas.openxmlformats.org/drawingml/2006/main">
+              <a:ext uri="{FF2B5EF4-FFF2-40B4-BE49-F238E27FC236}">
+                <a16:creationId xmlns:a16="http://schemas.microsoft.com/office/drawing/2014/main" id="{73BD301F-DBEC-4DA0-A11E-BD791A6A61CC}"/>
+              </a:ext>
+            </a:extLst>
+          </p:cNvPr>
+          <p:cNvSpPr>
+            <a:spLocks xmlns:a="http://schemas.openxmlformats.org/drawingml/2006/main" noGrp="1"/>
+          </p:cNvSpPr>
+          <p:nvPr/>
+        </p:nvSpPr>
+        <p:spPr>
+          <a:xfrm xmlns:a="http://schemas.openxmlformats.org/drawingml/2006/main">
+            <a:off x="3867150" y="3448050"/>
+            <a:ext cx="1943100" cy="419100"/>
+          </a:xfrm>
+          <a:prstGeom xmlns:a="http://schemas.openxmlformats.org/drawingml/2006/main" prst="roundRect">
+            <a:avLst>
+              <a:gd name="adj" fmla="val 22727"/>
+            </a:avLst>
+          </a:prstGeom>
+          <a:solidFill xmlns:a="http://schemas.openxmlformats.org/drawingml/2006/main">
+            <a:srgbClr val="F7F9FC"/>
+          </a:solidFill>
+          <a:ln xmlns:a="http://schemas.openxmlformats.org/drawingml/2006/main" w="9525">
+            <a:solidFill>
+              <a:srgbClr val="D8E0EA"/>
+            </a:solidFill>
+            <a:prstDash val="solid"/>
+          </a:ln>
+        </p:spPr>
+      </p:sp>
+      <p:sp>
+        <p:nvSpPr>
+          <p:cNvPr id="18" name="">
+            <a:extLst xmlns:a="http://schemas.openxmlformats.org/drawingml/2006/main">
+              <a:ext uri="{FF2B5EF4-FFF2-40B4-BE49-F238E27FC236}">
+                <a16:creationId xmlns:a16="http://schemas.microsoft.com/office/drawing/2014/main" id="{4A05E970-D6CA-4C8D-BF1F-1C18DFA7502B}"/>
+              </a:ext>
+            </a:extLst>
+          </p:cNvPr>
+          <p:cNvSpPr>
+            <a:spLocks xmlns:a="http://schemas.openxmlformats.org/drawingml/2006/main" noGrp="1"/>
+          </p:cNvSpPr>
+          <p:nvPr/>
+        </p:nvSpPr>
+        <p:spPr>
+          <a:xfrm xmlns:a="http://schemas.openxmlformats.org/drawingml/2006/main">
+            <a:off x="3962400" y="3543300"/>
+            <a:ext cx="1752600" cy="228600"/>
+          </a:xfrm>
+          <a:prstGeom xmlns:a="http://schemas.openxmlformats.org/drawingml/2006/main" prst="rect">
+            <a:avLst/>
+          </a:prstGeom>
+          <a:noFill xmlns:a="http://schemas.openxmlformats.org/drawingml/2006/main"/>
+          <a:ln xmlns:a="http://schemas.openxmlformats.org/drawingml/2006/main" w="0">
+            <a:noFill/>
+            <a:prstDash val="solid"/>
+          </a:ln>
+        </p:spPr>
+        <p:txBody>
+          <a:bodyPr xmlns:a="http://schemas.openxmlformats.org/drawingml/2006/main"/>
+          <a:lstStyle xmlns:a="http://schemas.openxmlformats.org/drawingml/2006/main"/>
+          <a:p xmlns:a="http://schemas.openxmlformats.org/drawingml/2006/main">
+            <a:pPr algn="ctr">
+              <a:defRPr sz="1125" b="0">
+                <a:solidFill>
+                  <a:srgbClr val="526174"/>
+                </a:solidFill>
+              </a:defRPr>
+            </a:pPr>
+            <a:r>
+              <a:rPr sz="1125" b="0">
+                <a:solidFill>
+                  <a:srgbClr val="526174"/>
+                </a:solidFill>
+              </a:rPr>
+              <a:t>map aliases to options</a:t>
+            </a:r>
+          </a:p>
+        </p:txBody>
+      </p:sp>
+      <p:sp>
+        <p:nvSpPr>
+          <p:cNvPr id="19" name="">
+            <a:extLst xmlns:a="http://schemas.openxmlformats.org/drawingml/2006/main">
+              <a:ext uri="{FF2B5EF4-FFF2-40B4-BE49-F238E27FC236}">
+                <a16:creationId xmlns:a16="http://schemas.microsoft.com/office/drawing/2014/main" id="{3C41C5BA-73C7-4EF4-B07B-00DFBE642A54}"/>
+              </a:ext>
+            </a:extLst>
+          </p:cNvPr>
+          <p:cNvSpPr>
+            <a:spLocks xmlns:a="http://schemas.openxmlformats.org/drawingml/2006/main" noGrp="1"/>
+          </p:cNvSpPr>
+          <p:nvPr/>
+        </p:nvSpPr>
+        <p:spPr>
+          <a:xfrm xmlns:a="http://schemas.openxmlformats.org/drawingml/2006/main">
+            <a:off x="3867150" y="4038600"/>
+            <a:ext cx="1943100" cy="419100"/>
+          </a:xfrm>
+          <a:prstGeom xmlns:a="http://schemas.openxmlformats.org/drawingml/2006/main" prst="roundRect">
+            <a:avLst>
+              <a:gd name="adj" fmla="val 22727"/>
+            </a:avLst>
+          </a:prstGeom>
+          <a:solidFill xmlns:a="http://schemas.openxmlformats.org/drawingml/2006/main">
+            <a:srgbClr val="E7EEF4"/>
+          </a:solidFill>
+          <a:ln xmlns:a="http://schemas.openxmlformats.org/drawingml/2006/main" w="9525">
+            <a:solidFill>
+              <a:srgbClr val="D8E0EA"/>
+            </a:solidFill>
+            <a:prstDash val="solid"/>
+          </a:ln>
+        </p:spPr>
+      </p:sp>
+      <p:sp>
+        <p:nvSpPr>
+          <p:cNvPr id="20" name="">
+            <a:extLst xmlns:a="http://schemas.openxmlformats.org/drawingml/2006/main">
+              <a:ext uri="{FF2B5EF4-FFF2-40B4-BE49-F238E27FC236}">
+                <a16:creationId xmlns:a16="http://schemas.microsoft.com/office/drawing/2014/main" id="{3294EB34-EC29-48F6-BFB5-025C08C0CA74}"/>
+              </a:ext>
+            </a:extLst>
+          </p:cNvPr>
+          <p:cNvSpPr>
+            <a:spLocks xmlns:a="http://schemas.openxmlformats.org/drawingml/2006/main" noGrp="1"/>
+          </p:cNvSpPr>
+          <p:nvPr/>
+        </p:nvSpPr>
+        <p:spPr>
+          <a:xfrm xmlns:a="http://schemas.openxmlformats.org/drawingml/2006/main">
+            <a:off x="3962400" y="4133850"/>
+            <a:ext cx="1752600" cy="228600"/>
+          </a:xfrm>
+          <a:prstGeom xmlns:a="http://schemas.openxmlformats.org/drawingml/2006/main" prst="rect">
+            <a:avLst/>
+          </a:prstGeom>
+          <a:noFill xmlns:a="http://schemas.openxmlformats.org/drawingml/2006/main"/>
+          <a:ln xmlns:a="http://schemas.openxmlformats.org/drawingml/2006/main" w="0">
+            <a:noFill/>
+            <a:prstDash val="solid"/>
+          </a:ln>
+        </p:spPr>
+        <p:txBody>
+          <a:bodyPr xmlns:a="http://schemas.openxmlformats.org/drawingml/2006/main"/>
+          <a:lstStyle xmlns:a="http://schemas.openxmlformats.org/drawingml/2006/main"/>
+          <a:p xmlns:a="http://schemas.openxmlformats.org/drawingml/2006/main">
+            <a:pPr algn="ctr">
+              <a:defRPr sz="1125" b="1">
+                <a:solidFill>
+                  <a:srgbClr val="0F172A"/>
+                </a:solidFill>
+              </a:defRPr>
+            </a:pPr>
+            <a:r>
+              <a:rPr sz="1125" b="1">
+                <a:solidFill>
+                  <a:srgbClr val="0F172A"/>
+                </a:solidFill>
+              </a:rPr>
+              <a:t>validate selected option</a:t>
+            </a:r>
+          </a:p>
+        </p:txBody>
+      </p:sp>
+      <p:sp>
+        <p:nvSpPr>
+          <p:cNvPr id="21" name="">
+            <a:extLst xmlns:a="http://schemas.openxmlformats.org/drawingml/2006/main">
+              <a:ext uri="{FF2B5EF4-FFF2-40B4-BE49-F238E27FC236}">
+                <a16:creationId xmlns:a16="http://schemas.microsoft.com/office/drawing/2014/main" id="{D5817ACE-BB6B-4F80-B2F9-D8FED57063E8}"/>
+              </a:ext>
+            </a:extLst>
+          </p:cNvPr>
+          <p:cNvSpPr>
+            <a:spLocks xmlns:a="http://schemas.openxmlformats.org/drawingml/2006/main" noGrp="1"/>
+          </p:cNvSpPr>
+          <p:nvPr/>
+        </p:nvSpPr>
+        <p:spPr>
+          <a:xfrm xmlns:a="http://schemas.openxmlformats.org/drawingml/2006/main">
+            <a:off x="6515100" y="2133600"/>
+            <a:ext cx="2324100" cy="2724150"/>
+          </a:xfrm>
+          <a:prstGeom xmlns:a="http://schemas.openxmlformats.org/drawingml/2006/main" prst="roundRect">
+            <a:avLst>
+              <a:gd name="adj" fmla="val 6557"/>
+            </a:avLst>
+          </a:prstGeom>
+          <a:solidFill xmlns:a="http://schemas.openxmlformats.org/drawingml/2006/main">
+            <a:srgbClr val="FFFFFF"/>
+          </a:solidFill>
+          <a:ln xmlns:a="http://schemas.openxmlformats.org/drawingml/2006/main" w="9525">
+            <a:solidFill>
+              <a:srgbClr val="D59B32"/>
+            </a:solidFill>
+            <a:prstDash val="solid"/>
+          </a:ln>
+        </p:spPr>
+        <p:style>
+          <a:lnRef xmlns:a="http://schemas.openxmlformats.org/drawingml/2006/main" idx="0"/>
+          <a:fillRef xmlns:a="http://schemas.openxmlformats.org/drawingml/2006/main" idx="0"/>
+          <a:effectRef xmlns:a="http://schemas.openxmlformats.org/drawingml/2006/main" idx="4"/>
+          <a:fontRef xmlns:a="http://schemas.openxmlformats.org/drawingml/2006/main" idx="major"/>
+        </p:style>
+      </p:sp>
+      <p:sp>
+        <p:nvSpPr>
+          <p:cNvPr id="22" name="">
+            <a:extLst xmlns:a="http://schemas.openxmlformats.org/drawingml/2006/main">
+              <a:ext uri="{FF2B5EF4-FFF2-40B4-BE49-F238E27FC236}">
+                <a16:creationId xmlns:a16="http://schemas.microsoft.com/office/drawing/2014/main" id="{EE59EBE2-01FF-4414-A3F0-6C4680E8435A}"/>
+              </a:ext>
+            </a:extLst>
+          </p:cNvPr>
+          <p:cNvSpPr>
+            <a:spLocks xmlns:a="http://schemas.openxmlformats.org/drawingml/2006/main" noGrp="1"/>
+          </p:cNvSpPr>
+          <p:nvPr/>
+        </p:nvSpPr>
+        <p:spPr>
+          <a:xfrm xmlns:a="http://schemas.openxmlformats.org/drawingml/2006/main">
+            <a:off x="6705600" y="2343150"/>
+            <a:ext cx="1943100" cy="304800"/>
+          </a:xfrm>
+          <a:prstGeom xmlns:a="http://schemas.openxmlformats.org/drawingml/2006/main" prst="rect">
+            <a:avLst/>
+          </a:prstGeom>
+          <a:noFill xmlns:a="http://schemas.openxmlformats.org/drawingml/2006/main"/>
+          <a:ln xmlns:a="http://schemas.openxmlformats.org/drawingml/2006/main" w="0">
+            <a:noFill/>
+            <a:prstDash val="solid"/>
+          </a:ln>
+        </p:spPr>
+        <p:txBody>
+          <a:bodyPr xmlns:a="http://schemas.openxmlformats.org/drawingml/2006/main"/>
+          <a:lstStyle xmlns:a="http://schemas.openxmlformats.org/drawingml/2006/main"/>
+          <a:p xmlns:a="http://schemas.openxmlformats.org/drawingml/2006/main">
+            <a:pPr algn="ctr">
+              <a:defRPr sz="1650" b="1">
+                <a:solidFill>
+                  <a:srgbClr val="D59B32"/>
+                </a:solidFill>
+              </a:defRPr>
+            </a:pPr>
+            <a:r>
+              <a:rPr sz="1650" b="1">
+                <a:solidFill>
+                  <a:srgbClr val="D59B32"/>
+                </a:solidFill>
+              </a:rPr>
+              <a:t>Morphology</a:t>
+            </a:r>
+          </a:p>
+        </p:txBody>
+      </p:sp>
+      <p:sp>
+        <p:nvSpPr>
+          <p:cNvPr id="23" name="">
+            <a:extLst xmlns:a="http://schemas.openxmlformats.org/drawingml/2006/main">
+              <a:ext uri="{FF2B5EF4-FFF2-40B4-BE49-F238E27FC236}">
+                <a16:creationId xmlns:a16="http://schemas.microsoft.com/office/drawing/2014/main" id="{61DCE1CF-ED90-48CA-A397-0AF2EB5402A6}"/>
+              </a:ext>
+            </a:extLst>
+          </p:cNvPr>
+          <p:cNvSpPr>
+            <a:spLocks xmlns:a="http://schemas.openxmlformats.org/drawingml/2006/main" noGrp="1"/>
+          </p:cNvSpPr>
+          <p:nvPr/>
+        </p:nvSpPr>
+        <p:spPr>
+          <a:xfrm xmlns:a="http://schemas.openxmlformats.org/drawingml/2006/main">
+            <a:off x="6705600" y="2857500"/>
+            <a:ext cx="1943100" cy="419100"/>
+          </a:xfrm>
+          <a:prstGeom xmlns:a="http://schemas.openxmlformats.org/drawingml/2006/main" prst="roundRect">
+            <a:avLst>
+              <a:gd name="adj" fmla="val 22727"/>
+            </a:avLst>
+          </a:prstGeom>
+          <a:solidFill xmlns:a="http://schemas.openxmlformats.org/drawingml/2006/main">
+            <a:srgbClr val="F7F9FC"/>
+          </a:solidFill>
+          <a:ln xmlns:a="http://schemas.openxmlformats.org/drawingml/2006/main" w="9525">
+            <a:solidFill>
+              <a:srgbClr val="D8E0EA"/>
+            </a:solidFill>
+            <a:prstDash val="solid"/>
+          </a:ln>
+        </p:spPr>
+      </p:sp>
+      <p:sp>
+        <p:nvSpPr>
+          <p:cNvPr id="24" name="">
+            <a:extLst xmlns:a="http://schemas.openxmlformats.org/drawingml/2006/main">
+              <a:ext uri="{FF2B5EF4-FFF2-40B4-BE49-F238E27FC236}">
+                <a16:creationId xmlns:a16="http://schemas.microsoft.com/office/drawing/2014/main" id="{D64B5CC5-ACC9-4E59-9F4D-CD077E665E54}"/>
+              </a:ext>
+            </a:extLst>
+          </p:cNvPr>
+          <p:cNvSpPr>
+            <a:spLocks xmlns:a="http://schemas.openxmlformats.org/drawingml/2006/main" noGrp="1"/>
+          </p:cNvSpPr>
+          <p:nvPr/>
+        </p:nvSpPr>
+        <p:spPr>
+          <a:xfrm xmlns:a="http://schemas.openxmlformats.org/drawingml/2006/main">
+            <a:off x="6800850" y="2952750"/>
+            <a:ext cx="1752600" cy="228600"/>
+          </a:xfrm>
+          <a:prstGeom xmlns:a="http://schemas.openxmlformats.org/drawingml/2006/main" prst="rect">
+            <a:avLst/>
+          </a:prstGeom>
+          <a:noFill xmlns:a="http://schemas.openxmlformats.org/drawingml/2006/main"/>
+          <a:ln xmlns:a="http://schemas.openxmlformats.org/drawingml/2006/main" w="0">
+            <a:noFill/>
+            <a:prstDash val="solid"/>
+          </a:ln>
+        </p:spPr>
+        <p:txBody>
+          <a:bodyPr xmlns:a="http://schemas.openxmlformats.org/drawingml/2006/main"/>
+          <a:lstStyle xmlns:a="http://schemas.openxmlformats.org/drawingml/2006/main"/>
+          <a:p xmlns:a="http://schemas.openxmlformats.org/drawingml/2006/main">
+            <a:pPr algn="ctr">
+              <a:defRPr sz="1125" b="0">
+                <a:solidFill>
+                  <a:srgbClr val="526174"/>
+                </a:solidFill>
+              </a:defRPr>
+            </a:pPr>
+            <a:r>
+              <a:rPr sz="1125" b="0">
+                <a:solidFill>
+                  <a:srgbClr val="526174"/>
+                </a:solidFill>
+              </a:rPr>
+              <a:t>identify requested form</a:t>
+            </a:r>
+          </a:p>
+        </p:txBody>
+      </p:sp>
+      <p:sp>
+        <p:nvSpPr>
+          <p:cNvPr id="25" name="">
+            <a:extLst xmlns:a="http://schemas.openxmlformats.org/drawingml/2006/main">
+              <a:ext uri="{FF2B5EF4-FFF2-40B4-BE49-F238E27FC236}">
+                <a16:creationId xmlns:a16="http://schemas.microsoft.com/office/drawing/2014/main" id="{0C71AFF1-D362-4852-9E8C-3E7387549583}"/>
+              </a:ext>
+            </a:extLst>
+          </p:cNvPr>
+          <p:cNvSpPr>
+            <a:spLocks xmlns:a="http://schemas.openxmlformats.org/drawingml/2006/main" noGrp="1"/>
+          </p:cNvSpPr>
+          <p:nvPr/>
+        </p:nvSpPr>
+        <p:spPr>
+          <a:xfrm xmlns:a="http://schemas.openxmlformats.org/drawingml/2006/main">
+            <a:off x="6705600" y="3448050"/>
+            <a:ext cx="1943100" cy="419100"/>
+          </a:xfrm>
+          <a:prstGeom xmlns:a="http://schemas.openxmlformats.org/drawingml/2006/main" prst="roundRect">
+            <a:avLst>
+              <a:gd name="adj" fmla="val 22727"/>
+            </a:avLst>
+          </a:prstGeom>
+          <a:solidFill xmlns:a="http://schemas.openxmlformats.org/drawingml/2006/main">
+            <a:srgbClr val="F7F9FC"/>
+          </a:solidFill>
+          <a:ln xmlns:a="http://schemas.openxmlformats.org/drawingml/2006/main" w="9525">
+            <a:solidFill>
+              <a:srgbClr val="D8E0EA"/>
+            </a:solidFill>
+            <a:prstDash val="solid"/>
+          </a:ln>
+        </p:spPr>
+      </p:sp>
+      <p:sp>
+        <p:nvSpPr>
+          <p:cNvPr id="26" name="">
+            <a:extLst xmlns:a="http://schemas.openxmlformats.org/drawingml/2006/main">
+              <a:ext uri="{FF2B5EF4-FFF2-40B4-BE49-F238E27FC236}">
+                <a16:creationId xmlns:a16="http://schemas.microsoft.com/office/drawing/2014/main" id="{A1660401-9BBD-4A40-B31C-A3C5A35F9197}"/>
+              </a:ext>
+            </a:extLst>
+          </p:cNvPr>
+          <p:cNvSpPr>
+            <a:spLocks xmlns:a="http://schemas.openxmlformats.org/drawingml/2006/main" noGrp="1"/>
+          </p:cNvSpPr>
+          <p:nvPr/>
+        </p:nvSpPr>
+        <p:spPr>
+          <a:xfrm xmlns:a="http://schemas.openxmlformats.org/drawingml/2006/main">
+            <a:off x="6800850" y="3543300"/>
+            <a:ext cx="1752600" cy="228600"/>
+          </a:xfrm>
+          <a:prstGeom xmlns:a="http://schemas.openxmlformats.org/drawingml/2006/main" prst="rect">
+            <a:avLst/>
+          </a:prstGeom>
+          <a:noFill xmlns:a="http://schemas.openxmlformats.org/drawingml/2006/main"/>
+          <a:ln xmlns:a="http://schemas.openxmlformats.org/drawingml/2006/main" w="0">
+            <a:noFill/>
+            <a:prstDash val="solid"/>
+          </a:ln>
+        </p:spPr>
+        <p:txBody>
+          <a:bodyPr xmlns:a="http://schemas.openxmlformats.org/drawingml/2006/main"/>
+          <a:lstStyle xmlns:a="http://schemas.openxmlformats.org/drawingml/2006/main"/>
+          <a:p xmlns:a="http://schemas.openxmlformats.org/drawingml/2006/main">
+            <a:pPr algn="ctr">
+              <a:defRPr sz="1125" b="0">
+                <a:solidFill>
+                  <a:srgbClr val="526174"/>
+                </a:solidFill>
+              </a:defRPr>
+            </a:pPr>
+            <a:r>
+              <a:rPr sz="1125" b="0">
+                <a:solidFill>
+                  <a:srgbClr val="526174"/>
+                </a:solidFill>
+              </a:rPr>
+              <a:t>parse root / suffix / class</a:t>
+            </a:r>
+          </a:p>
+        </p:txBody>
+      </p:sp>
+      <p:sp>
+        <p:nvSpPr>
+          <p:cNvPr id="27" name="">
+            <a:extLst xmlns:a="http://schemas.openxmlformats.org/drawingml/2006/main">
+              <a:ext uri="{FF2B5EF4-FFF2-40B4-BE49-F238E27FC236}">
+                <a16:creationId xmlns:a16="http://schemas.microsoft.com/office/drawing/2014/main" id="{A40680A6-FA28-400A-9A3A-7DA24B9D09C7}"/>
+              </a:ext>
+            </a:extLst>
+          </p:cNvPr>
+          <p:cNvSpPr>
+            <a:spLocks xmlns:a="http://schemas.openxmlformats.org/drawingml/2006/main" noGrp="1"/>
+          </p:cNvSpPr>
+          <p:nvPr/>
+        </p:nvSpPr>
+        <p:spPr>
+          <a:xfrm xmlns:a="http://schemas.openxmlformats.org/drawingml/2006/main">
+            <a:off x="6705600" y="4038600"/>
+            <a:ext cx="1943100" cy="419100"/>
+          </a:xfrm>
+          <a:prstGeom xmlns:a="http://schemas.openxmlformats.org/drawingml/2006/main" prst="roundRect">
+            <a:avLst>
+              <a:gd name="adj" fmla="val 22727"/>
+            </a:avLst>
+          </a:prstGeom>
+          <a:solidFill xmlns:a="http://schemas.openxmlformats.org/drawingml/2006/main">
+            <a:srgbClr val="E7EEF4"/>
+          </a:solidFill>
+          <a:ln xmlns:a="http://schemas.openxmlformats.org/drawingml/2006/main" w="9525">
+            <a:solidFill>
+              <a:srgbClr val="D8E0EA"/>
+            </a:solidFill>
+            <a:prstDash val="solid"/>
+          </a:ln>
+        </p:spPr>
+      </p:sp>
+      <p:sp>
+        <p:nvSpPr>
+          <p:cNvPr id="28" name="">
+            <a:extLst xmlns:a="http://schemas.openxmlformats.org/drawingml/2006/main">
+              <a:ext uri="{FF2B5EF4-FFF2-40B4-BE49-F238E27FC236}">
+                <a16:creationId xmlns:a16="http://schemas.microsoft.com/office/drawing/2014/main" id="{214EAFF9-066F-471C-81D1-2C21105EA3E1}"/>
+              </a:ext>
+            </a:extLst>
+          </p:cNvPr>
+          <p:cNvSpPr>
+            <a:spLocks xmlns:a="http://schemas.openxmlformats.org/drawingml/2006/main" noGrp="1"/>
+          </p:cNvSpPr>
+          <p:nvPr/>
+        </p:nvSpPr>
+        <p:spPr>
+          <a:xfrm xmlns:a="http://schemas.openxmlformats.org/drawingml/2006/main">
+            <a:off x="6800850" y="4133850"/>
+            <a:ext cx="1752600" cy="228600"/>
+          </a:xfrm>
+          <a:prstGeom xmlns:a="http://schemas.openxmlformats.org/drawingml/2006/main" prst="rect">
+            <a:avLst/>
+          </a:prstGeom>
+          <a:noFill xmlns:a="http://schemas.openxmlformats.org/drawingml/2006/main"/>
+          <a:ln xmlns:a="http://schemas.openxmlformats.org/drawingml/2006/main" w="0">
+            <a:noFill/>
+            <a:prstDash val="solid"/>
+          </a:ln>
+        </p:spPr>
+        <p:txBody>
+          <a:bodyPr xmlns:a="http://schemas.openxmlformats.org/drawingml/2006/main"/>
+          <a:lstStyle xmlns:a="http://schemas.openxmlformats.org/drawingml/2006/main"/>
+          <a:p xmlns:a="http://schemas.openxmlformats.org/drawingml/2006/main">
+            <a:pPr algn="ctr">
+              <a:defRPr sz="1125" b="1">
+                <a:solidFill>
+                  <a:srgbClr val="0F172A"/>
+                </a:solidFill>
+              </a:defRPr>
+            </a:pPr>
+            <a:r>
+              <a:rPr sz="1125" b="1">
+                <a:solidFill>
+                  <a:srgbClr val="0F172A"/>
+                </a:solidFill>
+              </a:rPr>
+              <a:t>compare analysis</a:t>
+            </a:r>
+          </a:p>
+        </p:txBody>
+      </p:sp>
+      <p:sp>
+        <p:nvSpPr>
+          <p:cNvPr id="29" name="">
+            <a:extLst xmlns:a="http://schemas.openxmlformats.org/drawingml/2006/main">
+              <a:ext uri="{FF2B5EF4-FFF2-40B4-BE49-F238E27FC236}">
+                <a16:creationId xmlns:a16="http://schemas.microsoft.com/office/drawing/2014/main" id="{7ADBA59F-DE06-4901-BFBD-1B2781775DD6}"/>
+              </a:ext>
+            </a:extLst>
+          </p:cNvPr>
+          <p:cNvSpPr>
+            <a:spLocks xmlns:a="http://schemas.openxmlformats.org/drawingml/2006/main" noGrp="1"/>
+          </p:cNvSpPr>
+          <p:nvPr/>
+        </p:nvSpPr>
+        <p:spPr>
+          <a:xfrm xmlns:a="http://schemas.openxmlformats.org/drawingml/2006/main">
+            <a:off x="9353550" y="2133600"/>
+            <a:ext cx="2324100" cy="2724150"/>
+          </a:xfrm>
+          <a:prstGeom xmlns:a="http://schemas.openxmlformats.org/drawingml/2006/main" prst="roundRect">
+            <a:avLst>
+              <a:gd name="adj" fmla="val 6557"/>
+            </a:avLst>
+          </a:prstGeom>
+          <a:solidFill xmlns:a="http://schemas.openxmlformats.org/drawingml/2006/main">
+            <a:srgbClr val="FFFFFF"/>
+          </a:solidFill>
+          <a:ln xmlns:a="http://schemas.openxmlformats.org/drawingml/2006/main" w="9525">
+            <a:solidFill>
+              <a:srgbClr val="B5483A"/>
+            </a:solidFill>
+            <a:prstDash val="solid"/>
+          </a:ln>
+        </p:spPr>
+        <p:style>
+          <a:lnRef xmlns:a="http://schemas.openxmlformats.org/drawingml/2006/main" idx="0"/>
+          <a:fillRef xmlns:a="http://schemas.openxmlformats.org/drawingml/2006/main" idx="0"/>
+          <a:effectRef xmlns:a="http://schemas.openxmlformats.org/drawingml/2006/main" idx="4"/>
+          <a:fontRef xmlns:a="http://schemas.openxmlformats.org/drawingml/2006/main" idx="major"/>
+        </p:style>
+      </p:sp>
+      <p:sp>
+        <p:nvSpPr>
+          <p:cNvPr id="30" name="">
+            <a:extLst xmlns:a="http://schemas.openxmlformats.org/drawingml/2006/main">
+              <a:ext uri="{FF2B5EF4-FFF2-40B4-BE49-F238E27FC236}">
+                <a16:creationId xmlns:a16="http://schemas.microsoft.com/office/drawing/2014/main" id="{4F0D8EC6-EB81-4768-8A2C-39CDCCE1D467}"/>
+              </a:ext>
+            </a:extLst>
+          </p:cNvPr>
+          <p:cNvSpPr>
+            <a:spLocks xmlns:a="http://schemas.openxmlformats.org/drawingml/2006/main" noGrp="1"/>
+          </p:cNvSpPr>
+          <p:nvPr/>
+        </p:nvSpPr>
+        <p:spPr>
+          <a:xfrm xmlns:a="http://schemas.openxmlformats.org/drawingml/2006/main">
+            <a:off x="9544050" y="2343150"/>
+            <a:ext cx="1943100" cy="304800"/>
+          </a:xfrm>
+          <a:prstGeom xmlns:a="http://schemas.openxmlformats.org/drawingml/2006/main" prst="rect">
+            <a:avLst/>
+          </a:prstGeom>
+          <a:noFill xmlns:a="http://schemas.openxmlformats.org/drawingml/2006/main"/>
+          <a:ln xmlns:a="http://schemas.openxmlformats.org/drawingml/2006/main" w="0">
+            <a:noFill/>
+            <a:prstDash val="solid"/>
+          </a:ln>
+        </p:spPr>
+        <p:txBody>
+          <a:bodyPr xmlns:a="http://schemas.openxmlformats.org/drawingml/2006/main"/>
+          <a:lstStyle xmlns:a="http://schemas.openxmlformats.org/drawingml/2006/main"/>
+          <a:p xmlns:a="http://schemas.openxmlformats.org/drawingml/2006/main">
+            <a:pPr algn="ctr">
+              <a:defRPr sz="1650" b="1">
+                <a:solidFill>
+                  <a:srgbClr val="B5483A"/>
+                </a:solidFill>
+              </a:defRPr>
+            </a:pPr>
+            <a:r>
+              <a:rPr sz="1650" b="1">
+                <a:solidFill>
+                  <a:srgbClr val="B5483A"/>
+                </a:solidFill>
+              </a:rPr>
+              <a:t>Idiom &amp; lexical</a:t>
+            </a:r>
+          </a:p>
+        </p:txBody>
+      </p:sp>
+      <p:sp>
+        <p:nvSpPr>
+          <p:cNvPr id="31" name="">
+            <a:extLst xmlns:a="http://schemas.openxmlformats.org/drawingml/2006/main">
+              <a:ext uri="{FF2B5EF4-FFF2-40B4-BE49-F238E27FC236}">
+                <a16:creationId xmlns:a16="http://schemas.microsoft.com/office/drawing/2014/main" id="{5CEA030E-84D5-4566-8B04-FD90164E174F}"/>
+              </a:ext>
+            </a:extLst>
+          </p:cNvPr>
+          <p:cNvSpPr>
+            <a:spLocks xmlns:a="http://schemas.openxmlformats.org/drawingml/2006/main" noGrp="1"/>
+          </p:cNvSpPr>
+          <p:nvPr/>
+        </p:nvSpPr>
+        <p:spPr>
+          <a:xfrm xmlns:a="http://schemas.openxmlformats.org/drawingml/2006/main">
+            <a:off x="9544050" y="2857500"/>
+            <a:ext cx="1943100" cy="419100"/>
+          </a:xfrm>
+          <a:prstGeom xmlns:a="http://schemas.openxmlformats.org/drawingml/2006/main" prst="roundRect">
+            <a:avLst>
+              <a:gd name="adj" fmla="val 22727"/>
+            </a:avLst>
+          </a:prstGeom>
+          <a:solidFill xmlns:a="http://schemas.openxmlformats.org/drawingml/2006/main">
+            <a:srgbClr val="F7F9FC"/>
+          </a:solidFill>
+          <a:ln xmlns:a="http://schemas.openxmlformats.org/drawingml/2006/main" w="9525">
+            <a:solidFill>
+              <a:srgbClr val="D8E0EA"/>
+            </a:solidFill>
+            <a:prstDash val="solid"/>
+          </a:ln>
+        </p:spPr>
+      </p:sp>
+      <p:sp>
+        <p:nvSpPr>
+          <p:cNvPr id="32" name="">
+            <a:extLst xmlns:a="http://schemas.openxmlformats.org/drawingml/2006/main">
+              <a:ext uri="{FF2B5EF4-FFF2-40B4-BE49-F238E27FC236}">
+                <a16:creationId xmlns:a16="http://schemas.microsoft.com/office/drawing/2014/main" id="{A15A6251-A808-47D7-99C4-40ABF6C9DD7F}"/>
+              </a:ext>
+            </a:extLst>
+          </p:cNvPr>
+          <p:cNvSpPr>
+            <a:spLocks xmlns:a="http://schemas.openxmlformats.org/drawingml/2006/main" noGrp="1"/>
+          </p:cNvSpPr>
+          <p:nvPr/>
+        </p:nvSpPr>
+        <p:spPr>
+          <a:xfrm xmlns:a="http://schemas.openxmlformats.org/drawingml/2006/main">
+            <a:off x="9639300" y="2952750"/>
+            <a:ext cx="1752600" cy="228600"/>
+          </a:xfrm>
+          <a:prstGeom xmlns:a="http://schemas.openxmlformats.org/drawingml/2006/main" prst="rect">
+            <a:avLst/>
+          </a:prstGeom>
+          <a:noFill xmlns:a="http://schemas.openxmlformats.org/drawingml/2006/main"/>
+          <a:ln xmlns:a="http://schemas.openxmlformats.org/drawingml/2006/main" w="0">
+            <a:noFill/>
+            <a:prstDash val="solid"/>
+          </a:ln>
+        </p:spPr>
+        <p:txBody>
+          <a:bodyPr xmlns:a="http://schemas.openxmlformats.org/drawingml/2006/main"/>
+          <a:lstStyle xmlns:a="http://schemas.openxmlformats.org/drawingml/2006/main"/>
+          <a:p xmlns:a="http://schemas.openxmlformats.org/drawingml/2006/main">
+            <a:pPr algn="ctr">
+              <a:defRPr sz="1125" b="0">
+                <a:solidFill>
+                  <a:srgbClr val="526174"/>
+                </a:solidFill>
+              </a:defRPr>
+            </a:pPr>
+            <a:r>
+              <a:rPr sz="1125" b="0">
+                <a:solidFill>
+                  <a:srgbClr val="526174"/>
+                </a:solidFill>
+              </a:rPr>
+              <a:t>select literal or figurative</a:t>
+            </a:r>
+          </a:p>
+        </p:txBody>
+      </p:sp>
+      <p:sp>
+        <p:nvSpPr>
+          <p:cNvPr id="33" name="">
+            <a:extLst xmlns:a="http://schemas.openxmlformats.org/drawingml/2006/main">
+              <a:ext uri="{FF2B5EF4-FFF2-40B4-BE49-F238E27FC236}">
+                <a16:creationId xmlns:a16="http://schemas.microsoft.com/office/drawing/2014/main" id="{DFF8DD7C-39E0-41D5-91D9-8F3EEA13947C}"/>
+              </a:ext>
+            </a:extLst>
+          </p:cNvPr>
+          <p:cNvSpPr>
+            <a:spLocks xmlns:a="http://schemas.openxmlformats.org/drawingml/2006/main" noGrp="1"/>
+          </p:cNvSpPr>
+          <p:nvPr/>
+        </p:nvSpPr>
+        <p:spPr>
+          <a:xfrm xmlns:a="http://schemas.openxmlformats.org/drawingml/2006/main">
+            <a:off x="9544050" y="3448050"/>
+            <a:ext cx="1943100" cy="419100"/>
+          </a:xfrm>
+          <a:prstGeom xmlns:a="http://schemas.openxmlformats.org/drawingml/2006/main" prst="roundRect">
+            <a:avLst>
+              <a:gd name="adj" fmla="val 22727"/>
+            </a:avLst>
+          </a:prstGeom>
+          <a:solidFill xmlns:a="http://schemas.openxmlformats.org/drawingml/2006/main">
+            <a:srgbClr val="F7F9FC"/>
+          </a:solidFill>
+          <a:ln xmlns:a="http://schemas.openxmlformats.org/drawingml/2006/main" w="9525">
+            <a:solidFill>
+              <a:srgbClr val="D8E0EA"/>
+            </a:solidFill>
+            <a:prstDash val="solid"/>
+          </a:ln>
+        </p:spPr>
+      </p:sp>
+      <p:sp>
+        <p:nvSpPr>
+          <p:cNvPr id="34" name="">
+            <a:extLst xmlns:a="http://schemas.openxmlformats.org/drawingml/2006/main">
+              <a:ext uri="{FF2B5EF4-FFF2-40B4-BE49-F238E27FC236}">
+                <a16:creationId xmlns:a16="http://schemas.microsoft.com/office/drawing/2014/main" id="{F7982384-7168-4C87-966B-8A3436DE02F5}"/>
+              </a:ext>
+            </a:extLst>
+          </p:cNvPr>
+          <p:cNvSpPr>
+            <a:spLocks xmlns:a="http://schemas.openxmlformats.org/drawingml/2006/main" noGrp="1"/>
+          </p:cNvSpPr>
+          <p:nvPr/>
+        </p:nvSpPr>
+        <p:spPr>
+          <a:xfrm xmlns:a="http://schemas.openxmlformats.org/drawingml/2006/main">
+            <a:off x="9639300" y="3543300"/>
+            <a:ext cx="1752600" cy="228600"/>
+          </a:xfrm>
+          <a:prstGeom xmlns:a="http://schemas.openxmlformats.org/drawingml/2006/main" prst="rect">
+            <a:avLst/>
+          </a:prstGeom>
+          <a:noFill xmlns:a="http://schemas.openxmlformats.org/drawingml/2006/main"/>
+          <a:ln xmlns:a="http://schemas.openxmlformats.org/drawingml/2006/main" w="0">
+            <a:noFill/>
+            <a:prstDash val="solid"/>
+          </a:ln>
+        </p:spPr>
+        <p:txBody>
+          <a:bodyPr xmlns:a="http://schemas.openxmlformats.org/drawingml/2006/main"/>
+          <a:lstStyle xmlns:a="http://schemas.openxmlformats.org/drawingml/2006/main"/>
+          <a:p xmlns:a="http://schemas.openxmlformats.org/drawingml/2006/main">
+            <a:pPr algn="ctr">
+              <a:defRPr sz="1125" b="0">
+                <a:solidFill>
+                  <a:srgbClr val="526174"/>
+                </a:solidFill>
+              </a:defRPr>
+            </a:pPr>
+            <a:r>
+              <a:rPr sz="1125" b="0">
+                <a:solidFill>
+                  <a:srgbClr val="526174"/>
+                </a:solidFill>
+              </a:rPr>
+              <a:t>retrieve exact sense</a:t>
+            </a:r>
+          </a:p>
+        </p:txBody>
+      </p:sp>
+      <p:sp>
+        <p:nvSpPr>
+          <p:cNvPr id="35" name="">
+            <a:extLst xmlns:a="http://schemas.openxmlformats.org/drawingml/2006/main">
+              <a:ext uri="{FF2B5EF4-FFF2-40B4-BE49-F238E27FC236}">
+                <a16:creationId xmlns:a16="http://schemas.microsoft.com/office/drawing/2014/main" id="{1CBB7645-5ED5-459F-B48D-700FE7F5351A}"/>
+              </a:ext>
+            </a:extLst>
+          </p:cNvPr>
+          <p:cNvSpPr>
+            <a:spLocks xmlns:a="http://schemas.openxmlformats.org/drawingml/2006/main" noGrp="1"/>
+          </p:cNvSpPr>
+          <p:nvPr/>
+        </p:nvSpPr>
+        <p:spPr>
+          <a:xfrm xmlns:a="http://schemas.openxmlformats.org/drawingml/2006/main">
+            <a:off x="9544050" y="4038600"/>
+            <a:ext cx="1943100" cy="419100"/>
+          </a:xfrm>
+          <a:prstGeom xmlns:a="http://schemas.openxmlformats.org/drawingml/2006/main" prst="roundRect">
+            <a:avLst>
+              <a:gd name="adj" fmla="val 22727"/>
+            </a:avLst>
+          </a:prstGeom>
+          <a:solidFill xmlns:a="http://schemas.openxmlformats.org/drawingml/2006/main">
+            <a:srgbClr val="E7EEF4"/>
+          </a:solidFill>
+          <a:ln xmlns:a="http://schemas.openxmlformats.org/drawingml/2006/main" w="9525">
+            <a:solidFill>
+              <a:srgbClr val="D8E0EA"/>
+            </a:solidFill>
+            <a:prstDash val="solid"/>
+          </a:ln>
+        </p:spPr>
+      </p:sp>
+      <p:sp>
+        <p:nvSpPr>
+          <p:cNvPr id="36" name="">
+            <a:extLst xmlns:a="http://schemas.openxmlformats.org/drawingml/2006/main">
+              <a:ext uri="{FF2B5EF4-FFF2-40B4-BE49-F238E27FC236}">
+                <a16:creationId xmlns:a16="http://schemas.microsoft.com/office/drawing/2014/main" id="{C0BE3AC8-74B5-4D51-9103-AF7D42433CAC}"/>
+              </a:ext>
+            </a:extLst>
+          </p:cNvPr>
+          <p:cNvSpPr>
+            <a:spLocks xmlns:a="http://schemas.openxmlformats.org/drawingml/2006/main" noGrp="1"/>
+          </p:cNvSpPr>
+          <p:nvPr/>
+        </p:nvSpPr>
+        <p:spPr>
+          <a:xfrm xmlns:a="http://schemas.openxmlformats.org/drawingml/2006/main">
+            <a:off x="9639300" y="4133850"/>
+            <a:ext cx="1752600" cy="228600"/>
+          </a:xfrm>
+          <a:prstGeom xmlns:a="http://schemas.openxmlformats.org/drawingml/2006/main" prst="rect">
+            <a:avLst/>
+          </a:prstGeom>
+          <a:noFill xmlns:a="http://schemas.openxmlformats.org/drawingml/2006/main"/>
+          <a:ln xmlns:a="http://schemas.openxmlformats.org/drawingml/2006/main" w="0">
+            <a:noFill/>
+            <a:prstDash val="solid"/>
+          </a:ln>
+        </p:spPr>
+        <p:txBody>
+          <a:bodyPr xmlns:a="http://schemas.openxmlformats.org/drawingml/2006/main"/>
+          <a:lstStyle xmlns:a="http://schemas.openxmlformats.org/drawingml/2006/main"/>
+          <a:p xmlns:a="http://schemas.openxmlformats.org/drawingml/2006/main">
+            <a:pPr algn="ctr">
+              <a:defRPr sz="1125" b="1">
+                <a:solidFill>
+                  <a:srgbClr val="0F172A"/>
+                </a:solidFill>
+              </a:defRPr>
+            </a:pPr>
+            <a:r>
+              <a:rPr sz="1125" b="1">
+                <a:solidFill>
+                  <a:srgbClr val="0F172A"/>
+                </a:solidFill>
+              </a:rPr>
+              <a:t>compare requested meaning</a:t>
+            </a:r>
+          </a:p>
+        </p:txBody>
+      </p:sp>
+      <p:sp>
+        <p:nvSpPr>
+          <p:cNvPr id="37" name="">
+            <a:extLst xmlns:a="http://schemas.openxmlformats.org/drawingml/2006/main">
+              <a:ext uri="{FF2B5EF4-FFF2-40B4-BE49-F238E27FC236}">
+                <a16:creationId xmlns:a16="http://schemas.microsoft.com/office/drawing/2014/main" id="{7D682935-6A05-4E40-B52D-D92D68EBF4D1}"/>
+              </a:ext>
+            </a:extLst>
+          </p:cNvPr>
+          <p:cNvSpPr>
+            <a:spLocks xmlns:a="http://schemas.openxmlformats.org/drawingml/2006/main" noGrp="1"/>
+          </p:cNvSpPr>
+          <p:nvPr/>
+        </p:nvSpPr>
+        <p:spPr>
+          <a:xfrm xmlns:a="http://schemas.openxmlformats.org/drawingml/2006/main">
+            <a:off x="1714500" y="5295900"/>
+            <a:ext cx="8763000" cy="685800"/>
+          </a:xfrm>
+          <a:prstGeom xmlns:a="http://schemas.openxmlformats.org/drawingml/2006/main" prst="roundRect">
+            <a:avLst>
+              <a:gd name="adj" fmla="val 19444"/>
+            </a:avLst>
+          </a:prstGeom>
+          <a:solidFill xmlns:a="http://schemas.openxmlformats.org/drawingml/2006/main">
+            <a:srgbClr val="E7EEF4"/>
+          </a:solidFill>
+          <a:ln xmlns:a="http://schemas.openxmlformats.org/drawingml/2006/main" w="9525">
+            <a:solidFill>
+              <a:srgbClr val="1F5A7A"/>
+            </a:solidFill>
+            <a:prstDash val="solid"/>
+          </a:ln>
+        </p:spPr>
+      </p:sp>
+      <p:sp>
+        <p:nvSpPr>
+          <p:cNvPr id="38" name="">
+            <a:extLst xmlns:a="http://schemas.openxmlformats.org/drawingml/2006/main">
+              <a:ext uri="{FF2B5EF4-FFF2-40B4-BE49-F238E27FC236}">
+                <a16:creationId xmlns:a16="http://schemas.microsoft.com/office/drawing/2014/main" id="{4DBD602C-C064-45D8-AA52-F670DAA04A06}"/>
+              </a:ext>
+            </a:extLst>
+          </p:cNvPr>
+          <p:cNvSpPr>
+            <a:spLocks xmlns:a="http://schemas.openxmlformats.org/drawingml/2006/main" noGrp="1"/>
+          </p:cNvSpPr>
+          <p:nvPr/>
+        </p:nvSpPr>
+        <p:spPr>
+          <a:xfrm xmlns:a="http://schemas.openxmlformats.org/drawingml/2006/main">
+            <a:off x="1981200" y="5486400"/>
+            <a:ext cx="1619250" cy="247650"/>
+          </a:xfrm>
+          <a:prstGeom xmlns:a="http://schemas.openxmlformats.org/drawingml/2006/main" prst="rect">
+            <a:avLst/>
+          </a:prstGeom>
+          <a:noFill xmlns:a="http://schemas.openxmlformats.org/drawingml/2006/main"/>
+          <a:ln xmlns:a="http://schemas.openxmlformats.org/drawingml/2006/main" w="0">
+            <a:noFill/>
+            <a:prstDash val="solid"/>
+          </a:ln>
+        </p:spPr>
+        <p:txBody>
+          <a:bodyPr xmlns:a="http://schemas.openxmlformats.org/drawingml/2006/main"/>
+          <a:lstStyle xmlns:a="http://schemas.openxmlformats.org/drawingml/2006/main"/>
+          <a:p xmlns:a="http://schemas.openxmlformats.org/drawingml/2006/main">
+            <a:pPr algn="l">
+              <a:defRPr sz="1275" b="1">
+                <a:solidFill>
+                  <a:srgbClr val="1F5A7A"/>
+                </a:solidFill>
+              </a:defRPr>
+            </a:pPr>
+            <a:r>
+              <a:rPr sz="1275" b="1">
+                <a:solidFill>
+                  <a:srgbClr val="1F5A7A"/>
+                </a:solidFill>
+              </a:rPr>
+              <a:t>Common output</a:t>
+            </a:r>
+          </a:p>
+        </p:txBody>
+      </p:sp>
+      <p:sp>
+        <p:nvSpPr>
+          <p:cNvPr id="39" name="">
+            <a:extLst xmlns:a="http://schemas.openxmlformats.org/drawingml/2006/main">
+              <a:ext uri="{FF2B5EF4-FFF2-40B4-BE49-F238E27FC236}">
+                <a16:creationId xmlns:a16="http://schemas.microsoft.com/office/drawing/2014/main" id="{8BA8AB26-4FED-4CE9-8580-B20263C0CD69}"/>
+              </a:ext>
+            </a:extLst>
+          </p:cNvPr>
+          <p:cNvSpPr>
+            <a:spLocks xmlns:a="http://schemas.openxmlformats.org/drawingml/2006/main" noGrp="1"/>
+          </p:cNvSpPr>
+          <p:nvPr/>
+        </p:nvSpPr>
+        <p:spPr>
+          <a:xfrm xmlns:a="http://schemas.openxmlformats.org/drawingml/2006/main">
+            <a:off x="3600450" y="5467350"/>
+            <a:ext cx="6572250" cy="285750"/>
+          </a:xfrm>
+          <a:prstGeom xmlns:a="http://schemas.openxmlformats.org/drawingml/2006/main" prst="rect">
+            <a:avLst/>
+          </a:prstGeom>
+          <a:noFill xmlns:a="http://schemas.openxmlformats.org/drawingml/2006/main"/>
+          <a:ln xmlns:a="http://schemas.openxmlformats.org/drawingml/2006/main" w="0">
+            <a:noFill/>
+            <a:prstDash val="solid"/>
+          </a:ln>
+        </p:spPr>
+        <p:txBody>
+          <a:bodyPr xmlns:a="http://schemas.openxmlformats.org/drawingml/2006/main"/>
+          <a:lstStyle xmlns:a="http://schemas.openxmlformats.org/drawingml/2006/main"/>
+          <a:p xmlns:a="http://schemas.openxmlformats.org/drawingml/2006/main">
+            <a:pPr algn="ctr">
+              <a:defRPr sz="1275" b="0">
+                <a:solidFill>
+                  <a:srgbClr val="0F172A"/>
+                </a:solidFill>
+              </a:defRPr>
+            </a:pPr>
+            <a:r>
+              <a:rPr sz="1275" b="0">
+                <a:solidFill>
+                  <a:srgbClr val="0F172A"/>
+                </a:solidFill>
+              </a:rPr>
+              <a:t>{entity, predicate, parsed value, source, verdict}  —  incomplete or conflicting fields return null</a:t>
+            </a:r>
+          </a:p>
+        </p:txBody>
+      </p:sp>
+      <p:sp>
+        <p:nvSpPr>
+          <p:cNvPr id="40" name="">
+            <a:extLst xmlns:a="http://schemas.openxmlformats.org/drawingml/2006/main">
+              <a:ext uri="{FF2B5EF4-FFF2-40B4-BE49-F238E27FC236}">
+                <a16:creationId xmlns:a16="http://schemas.microsoft.com/office/drawing/2014/main" id="{D1128C4A-F5B7-4B56-8FA7-32B68573A858}"/>
+              </a:ext>
+            </a:extLst>
+          </p:cNvPr>
+          <p:cNvSpPr>
+            <a:spLocks xmlns:a="http://schemas.openxmlformats.org/drawingml/2006/main" noGrp="1"/>
+          </p:cNvSpPr>
+          <p:nvPr/>
+        </p:nvSpPr>
+        <p:spPr>
+          <a:xfrm xmlns:a="http://schemas.openxmlformats.org/drawingml/2006/main">
+            <a:off x="685800" y="6372225"/>
+            <a:ext cx="10820400" cy="0"/>
+          </a:xfrm>
+          <a:prstGeom xmlns:a="http://schemas.openxmlformats.org/drawingml/2006/main" prst="line">
+            <a:avLst/>
+          </a:prstGeom>
+          <a:noFill xmlns:a="http://schemas.openxmlformats.org/drawingml/2006/main"/>
+          <a:ln xmlns:a="http://schemas.openxmlformats.org/drawingml/2006/main" w="9525">
+            <a:solidFill>
+              <a:srgbClr val="D8E0EA"/>
+            </a:solidFill>
+            <a:prstDash val="solid"/>
+          </a:ln>
+        </p:spPr>
+      </p:sp>
+      <p:sp>
+        <p:nvSpPr>
+          <p:cNvPr id="41" name="source-5">
+            <a:extLst xmlns:a="http://schemas.openxmlformats.org/drawingml/2006/main">
+              <a:ext uri="{FF2B5EF4-FFF2-40B4-BE49-F238E27FC236}">
+                <a16:creationId xmlns:a16="http://schemas.microsoft.com/office/drawing/2014/main" id="{98C2067E-FD16-47F6-A6C7-9EC43B485BC6}"/>
               </a:ext>
             </a:extLst>
           </p:cNvPr>
@@ -16161,17 +17500,17 @@
                   <a:srgbClr val="526174"/>
                 </a:solidFill>
               </a:rPr>
-              <a:t>[7] v91 Phase 1 trace: 2,358 resolved and 158 unresolved rows</a:t>
-            </a:r>
-          </a:p>
-        </p:txBody>
-      </p:sp>
-      <p:sp>
-        <p:nvSpPr>
-          <p:cNvPr id="19" name="page-5">
-            <a:extLst xmlns:a="http://schemas.openxmlformats.org/drawingml/2006/main">
-              <a:ext uri="{FF2B5EF4-FFF2-40B4-BE49-F238E27FC236}">
-                <a16:creationId xmlns:a16="http://schemas.microsoft.com/office/drawing/2014/main" id="{BDBA50AE-C12E-412F-9ADA-D83725D33A07}"/>
+              <a:t>[7] v91 structured solvers, relation schema, and regression cases</a:t>
+            </a:r>
+          </a:p>
+        </p:txBody>
+      </p:sp>
+      <p:sp>
+        <p:nvSpPr>
+          <p:cNvPr id="42" name="page-5">
+            <a:extLst xmlns:a="http://schemas.openxmlformats.org/drawingml/2006/main">
+              <a:ext uri="{FF2B5EF4-FFF2-40B4-BE49-F238E27FC236}">
+                <a16:creationId xmlns:a16="http://schemas.microsoft.com/office/drawing/2014/main" id="{207AA954-0048-41AB-9274-22A6A1ADC1D0}"/>
               </a:ext>
             </a:extLst>
           </p:cNvPr>
@@ -16219,7 +17558,7 @@
     </p:spTree>
     <p:extLst>
       <p:ext uri="{BB962C8B-B14F-4D97-AF65-F5344CB8AC3E}">
-        <p14:creationId xmlns:p14="http://schemas.microsoft.com/office/powerpoint/2010/main" val="1976386600"/>
+        <p14:creationId xmlns:p14="http://schemas.microsoft.com/office/powerpoint/2010/main" val="1938352261"/>
       </p:ext>
     </p:extLst>
   </p:cSld>
@@ -16250,7 +17589,7 @@
           <p:cNvPr id="29" name="kicker-6">
             <a:extLst xmlns:a="http://schemas.openxmlformats.org/drawingml/2006/main">
               <a:ext uri="{FF2B5EF4-FFF2-40B4-BE49-F238E27FC236}">
-                <a16:creationId xmlns:a16="http://schemas.microsoft.com/office/drawing/2014/main" id="{2A1A9EB7-F73A-4FAB-BCFC-07D81A6A72B8}"/>
+                <a16:creationId xmlns:a16="http://schemas.microsoft.com/office/drawing/2014/main" id="{998B9B09-474A-477B-ACAD-1AF9DCAF4A00}"/>
               </a:ext>
             </a:extLst>
           </p:cNvPr>
@@ -16300,7 +17639,7 @@
           <p:cNvPr id="2" name="title-6">
             <a:extLst xmlns:a="http://schemas.openxmlformats.org/drawingml/2006/main">
               <a:ext uri="{FF2B5EF4-FFF2-40B4-BE49-F238E27FC236}">
-                <a16:creationId xmlns:a16="http://schemas.microsoft.com/office/drawing/2014/main" id="{3CC92B11-7CB2-47E3-84B8-1DBE570E8EE0}"/>
+                <a16:creationId xmlns:a16="http://schemas.microsoft.com/office/drawing/2014/main" id="{FC5E57D5-62EC-46D8-B1F9-19C02CA493C5}"/>
               </a:ext>
             </a:extLst>
           </p:cNvPr>
@@ -16350,7 +17689,7 @@
           <p:cNvPr id="3" name="">
             <a:extLst xmlns:a="http://schemas.openxmlformats.org/drawingml/2006/main">
               <a:ext uri="{FF2B5EF4-FFF2-40B4-BE49-F238E27FC236}">
-                <a16:creationId xmlns:a16="http://schemas.microsoft.com/office/drawing/2014/main" id="{396ED035-FC97-46EE-8FC3-12DBC4A4314D}"/>
+                <a16:creationId xmlns:a16="http://schemas.microsoft.com/office/drawing/2014/main" id="{A44EF8E9-B779-4964-BD29-D29501A7724A}"/>
               </a:ext>
             </a:extLst>
           </p:cNvPr>
@@ -16381,7 +17720,7 @@
           <p:cNvPr id="4" name="">
             <a:extLst xmlns:a="http://schemas.openxmlformats.org/drawingml/2006/main">
               <a:ext uri="{FF2B5EF4-FFF2-40B4-BE49-F238E27FC236}">
-                <a16:creationId xmlns:a16="http://schemas.microsoft.com/office/drawing/2014/main" id="{5CE547B6-31CB-41C2-A442-BA80E62F6EAA}"/>
+                <a16:creationId xmlns:a16="http://schemas.microsoft.com/office/drawing/2014/main" id="{95FB90B0-7FFA-4B16-BA92-55B454E7CC0C}"/>
               </a:ext>
             </a:extLst>
           </p:cNvPr>
@@ -16431,7 +17770,7 @@
           <p:cNvPr id="5" name="">
             <a:extLst xmlns:a="http://schemas.openxmlformats.org/drawingml/2006/main">
               <a:ext uri="{FF2B5EF4-FFF2-40B4-BE49-F238E27FC236}">
-                <a16:creationId xmlns:a16="http://schemas.microsoft.com/office/drawing/2014/main" id="{90D4601B-B2BF-44F9-AE12-9477BCC5BB10}"/>
+                <a16:creationId xmlns:a16="http://schemas.microsoft.com/office/drawing/2014/main" id="{5A33C448-8664-407B-A524-36FCA7F99E6B}"/>
               </a:ext>
             </a:extLst>
           </p:cNvPr>
@@ -16462,7 +17801,7 @@
           <p:cNvPr id="6" name="">
             <a:extLst xmlns:a="http://schemas.openxmlformats.org/drawingml/2006/main">
               <a:ext uri="{FF2B5EF4-FFF2-40B4-BE49-F238E27FC236}">
-                <a16:creationId xmlns:a16="http://schemas.microsoft.com/office/drawing/2014/main" id="{5B7AB3DE-7810-450F-B202-ECD945AEE119}"/>
+                <a16:creationId xmlns:a16="http://schemas.microsoft.com/office/drawing/2014/main" id="{CFCDB668-10C0-4ADC-AF91-CF0A44EDEB7E}"/>
               </a:ext>
             </a:extLst>
           </p:cNvPr>
@@ -16512,7 +17851,7 @@
           <p:cNvPr id="7" name="">
             <a:extLst xmlns:a="http://schemas.openxmlformats.org/drawingml/2006/main">
               <a:ext uri="{FF2B5EF4-FFF2-40B4-BE49-F238E27FC236}">
-                <a16:creationId xmlns:a16="http://schemas.microsoft.com/office/drawing/2014/main" id="{F7E74CAF-D960-4913-9683-FE27A6C93094}"/>
+                <a16:creationId xmlns:a16="http://schemas.microsoft.com/office/drawing/2014/main" id="{6A5CB29C-7D5A-408B-8D9A-3C1E636C8960}"/>
               </a:ext>
             </a:extLst>
           </p:cNvPr>
@@ -16562,7 +17901,7 @@
           <p:cNvPr id="8" name="">
             <a:extLst xmlns:a="http://schemas.openxmlformats.org/drawingml/2006/main">
               <a:ext uri="{FF2B5EF4-FFF2-40B4-BE49-F238E27FC236}">
-                <a16:creationId xmlns:a16="http://schemas.microsoft.com/office/drawing/2014/main" id="{AD1094DD-3FD4-42FC-BC85-39E6AAE4DB08}"/>
+                <a16:creationId xmlns:a16="http://schemas.microsoft.com/office/drawing/2014/main" id="{5B94B40C-2D59-4CB0-A36C-66474CDD816E}"/>
               </a:ext>
             </a:extLst>
           </p:cNvPr>
@@ -16612,7 +17951,7 @@
           <p:cNvPr id="9" name="">
             <a:extLst xmlns:a="http://schemas.openxmlformats.org/drawingml/2006/main">
               <a:ext uri="{FF2B5EF4-FFF2-40B4-BE49-F238E27FC236}">
-                <a16:creationId xmlns:a16="http://schemas.microsoft.com/office/drawing/2014/main" id="{BD07F9D5-795E-4B6A-92D5-00917A65CCB9}"/>
+                <a16:creationId xmlns:a16="http://schemas.microsoft.com/office/drawing/2014/main" id="{20F9245C-3204-4FAC-9110-80EB463C5E95}"/>
               </a:ext>
             </a:extLst>
           </p:cNvPr>
@@ -16643,7 +17982,7 @@
           <p:cNvPr id="10" name="">
             <a:extLst xmlns:a="http://schemas.openxmlformats.org/drawingml/2006/main">
               <a:ext uri="{FF2B5EF4-FFF2-40B4-BE49-F238E27FC236}">
-                <a16:creationId xmlns:a16="http://schemas.microsoft.com/office/drawing/2014/main" id="{59079EB5-022D-4684-9754-8D2A3CFA6CD9}"/>
+                <a16:creationId xmlns:a16="http://schemas.microsoft.com/office/drawing/2014/main" id="{27B21F7F-3E3A-41B7-8FFC-7E8E020F0ECC}"/>
               </a:ext>
             </a:extLst>
           </p:cNvPr>
@@ -16693,7 +18032,7 @@
           <p:cNvPr id="11" name="">
             <a:extLst xmlns:a="http://schemas.openxmlformats.org/drawingml/2006/main">
               <a:ext uri="{FF2B5EF4-FFF2-40B4-BE49-F238E27FC236}">
-                <a16:creationId xmlns:a16="http://schemas.microsoft.com/office/drawing/2014/main" id="{63C66A60-C77D-4331-9729-493A115F625D}"/>
+                <a16:creationId xmlns:a16="http://schemas.microsoft.com/office/drawing/2014/main" id="{C1F8B548-B9FF-4829-BDAE-4893DE880D46}"/>
               </a:ext>
             </a:extLst>
           </p:cNvPr>
@@ -16743,7 +18082,7 @@
           <p:cNvPr id="12" name="">
             <a:extLst xmlns:a="http://schemas.openxmlformats.org/drawingml/2006/main">
               <a:ext uri="{FF2B5EF4-FFF2-40B4-BE49-F238E27FC236}">
-                <a16:creationId xmlns:a16="http://schemas.microsoft.com/office/drawing/2014/main" id="{2CE44398-80E0-4C8A-8B5B-C0B3AE4F3D1E}"/>
+                <a16:creationId xmlns:a16="http://schemas.microsoft.com/office/drawing/2014/main" id="{665456B5-E1B1-4372-93AA-630A6D6BCEE4}"/>
               </a:ext>
             </a:extLst>
           </p:cNvPr>
@@ -16793,7 +18132,7 @@
           <p:cNvPr id="13" name="">
             <a:extLst xmlns:a="http://schemas.openxmlformats.org/drawingml/2006/main">
               <a:ext uri="{FF2B5EF4-FFF2-40B4-BE49-F238E27FC236}">
-                <a16:creationId xmlns:a16="http://schemas.microsoft.com/office/drawing/2014/main" id="{1DE94AB6-9D9F-4E00-BCE5-9D7972374826}"/>
+                <a16:creationId xmlns:a16="http://schemas.microsoft.com/office/drawing/2014/main" id="{DB3E29F7-4161-4B3D-86C4-198FF6FEE76F}"/>
               </a:ext>
             </a:extLst>
           </p:cNvPr>
@@ -16824,7 +18163,7 @@
           <p:cNvPr id="14" name="">
             <a:extLst xmlns:a="http://schemas.openxmlformats.org/drawingml/2006/main">
               <a:ext uri="{FF2B5EF4-FFF2-40B4-BE49-F238E27FC236}">
-                <a16:creationId xmlns:a16="http://schemas.microsoft.com/office/drawing/2014/main" id="{4AE8AFD9-38A9-49FA-9BDC-216515215AD9}"/>
+                <a16:creationId xmlns:a16="http://schemas.microsoft.com/office/drawing/2014/main" id="{2E43A9D6-8B3C-4151-9C83-111AA1DDA6AE}"/>
               </a:ext>
             </a:extLst>
           </p:cNvPr>
@@ -16874,7 +18213,7 @@
           <p:cNvPr id="15" name="">
             <a:extLst xmlns:a="http://schemas.openxmlformats.org/drawingml/2006/main">
               <a:ext uri="{FF2B5EF4-FFF2-40B4-BE49-F238E27FC236}">
-                <a16:creationId xmlns:a16="http://schemas.microsoft.com/office/drawing/2014/main" id="{E2C5662F-BB7F-45A6-A04C-959A8D661D4C}"/>
+                <a16:creationId xmlns:a16="http://schemas.microsoft.com/office/drawing/2014/main" id="{C2D2D38C-05DD-4A9A-8D4B-4D492BE96E56}"/>
               </a:ext>
             </a:extLst>
           </p:cNvPr>
@@ -16924,7 +18263,7 @@
           <p:cNvPr id="16" name="">
             <a:extLst xmlns:a="http://schemas.openxmlformats.org/drawingml/2006/main">
               <a:ext uri="{FF2B5EF4-FFF2-40B4-BE49-F238E27FC236}">
-                <a16:creationId xmlns:a16="http://schemas.microsoft.com/office/drawing/2014/main" id="{7119D7C3-3CBC-4612-B29F-47C3BF8745E5}"/>
+                <a16:creationId xmlns:a16="http://schemas.microsoft.com/office/drawing/2014/main" id="{7675DB32-6BFA-4396-B11F-E6D713D2C183}"/>
               </a:ext>
             </a:extLst>
           </p:cNvPr>
@@ -16974,7 +18313,7 @@
           <p:cNvPr id="17" name="">
             <a:extLst xmlns:a="http://schemas.openxmlformats.org/drawingml/2006/main">
               <a:ext uri="{FF2B5EF4-FFF2-40B4-BE49-F238E27FC236}">
-                <a16:creationId xmlns:a16="http://schemas.microsoft.com/office/drawing/2014/main" id="{ED0E939F-461B-4602-9FCB-C422369D87C9}"/>
+                <a16:creationId xmlns:a16="http://schemas.microsoft.com/office/drawing/2014/main" id="{AE9D8E3E-E98F-4093-A923-1EA1D763E200}"/>
               </a:ext>
             </a:extLst>
           </p:cNvPr>
@@ -17005,7 +18344,7 @@
           <p:cNvPr id="18" name="">
             <a:extLst xmlns:a="http://schemas.openxmlformats.org/drawingml/2006/main">
               <a:ext uri="{FF2B5EF4-FFF2-40B4-BE49-F238E27FC236}">
-                <a16:creationId xmlns:a16="http://schemas.microsoft.com/office/drawing/2014/main" id="{CF846852-5859-4116-A4ED-C8FF150681B9}"/>
+                <a16:creationId xmlns:a16="http://schemas.microsoft.com/office/drawing/2014/main" id="{3F1F136D-6A7E-4BF2-AB26-CBE63ED9436E}"/>
               </a:ext>
             </a:extLst>
           </p:cNvPr>
@@ -17055,7 +18394,7 @@
           <p:cNvPr id="19" name="">
             <a:extLst xmlns:a="http://schemas.openxmlformats.org/drawingml/2006/main">
               <a:ext uri="{FF2B5EF4-FFF2-40B4-BE49-F238E27FC236}">
-                <a16:creationId xmlns:a16="http://schemas.microsoft.com/office/drawing/2014/main" id="{CD71C1EA-A3AC-4D26-950D-68C00B068E83}"/>
+                <a16:creationId xmlns:a16="http://schemas.microsoft.com/office/drawing/2014/main" id="{330A8D3C-011D-4428-A409-2BF7EFCDD9B8}"/>
               </a:ext>
             </a:extLst>
           </p:cNvPr>
@@ -17105,7 +18444,7 @@
           <p:cNvPr id="20" name="">
             <a:extLst xmlns:a="http://schemas.openxmlformats.org/drawingml/2006/main">
               <a:ext uri="{FF2B5EF4-FFF2-40B4-BE49-F238E27FC236}">
-                <a16:creationId xmlns:a16="http://schemas.microsoft.com/office/drawing/2014/main" id="{CF04540F-CA59-45AF-BB29-61D7664F0810}"/>
+                <a16:creationId xmlns:a16="http://schemas.microsoft.com/office/drawing/2014/main" id="{A1CA48E0-ED8E-4C67-A15C-21CE86AC29C2}"/>
               </a:ext>
             </a:extLst>
           </p:cNvPr>
@@ -17155,7 +18494,7 @@
           <p:cNvPr id="21" name="">
             <a:extLst xmlns:a="http://schemas.openxmlformats.org/drawingml/2006/main">
               <a:ext uri="{FF2B5EF4-FFF2-40B4-BE49-F238E27FC236}">
-                <a16:creationId xmlns:a16="http://schemas.microsoft.com/office/drawing/2014/main" id="{F171D1B5-7AB6-4766-BAE8-098F756DC108}"/>
+                <a16:creationId xmlns:a16="http://schemas.microsoft.com/office/drawing/2014/main" id="{A4D7BA8C-5172-4F13-B52E-EE25E7780099}"/>
               </a:ext>
             </a:extLst>
           </p:cNvPr>
@@ -17186,7 +18525,7 @@
           <p:cNvPr id="22" name="">
             <a:extLst xmlns:a="http://schemas.openxmlformats.org/drawingml/2006/main">
               <a:ext uri="{FF2B5EF4-FFF2-40B4-BE49-F238E27FC236}">
-                <a16:creationId xmlns:a16="http://schemas.microsoft.com/office/drawing/2014/main" id="{38EB84D3-F04F-404B-83F4-5DA1C6C6423E}"/>
+                <a16:creationId xmlns:a16="http://schemas.microsoft.com/office/drawing/2014/main" id="{0A41A0F8-65C4-493B-BF06-7D42283A6FF8}"/>
               </a:ext>
             </a:extLst>
           </p:cNvPr>
@@ -17236,7 +18575,7 @@
           <p:cNvPr id="23" name="">
             <a:extLst xmlns:a="http://schemas.openxmlformats.org/drawingml/2006/main">
               <a:ext uri="{FF2B5EF4-FFF2-40B4-BE49-F238E27FC236}">
-                <a16:creationId xmlns:a16="http://schemas.microsoft.com/office/drawing/2014/main" id="{68D9553C-AC96-4907-8AE2-88FE60057C5E}"/>
+                <a16:creationId xmlns:a16="http://schemas.microsoft.com/office/drawing/2014/main" id="{3EE5DD6A-5210-4D3F-865F-954E04584445}"/>
               </a:ext>
             </a:extLst>
           </p:cNvPr>
@@ -17286,7 +18625,7 @@
           <p:cNvPr id="24" name="">
             <a:extLst xmlns:a="http://schemas.openxmlformats.org/drawingml/2006/main">
               <a:ext uri="{FF2B5EF4-FFF2-40B4-BE49-F238E27FC236}">
-                <a16:creationId xmlns:a16="http://schemas.microsoft.com/office/drawing/2014/main" id="{5781BC7E-5DB6-44EC-8982-26B71A54F842}"/>
+                <a16:creationId xmlns:a16="http://schemas.microsoft.com/office/drawing/2014/main" id="{07E0164A-21EB-4E58-89DD-A789940441C6}"/>
               </a:ext>
             </a:extLst>
           </p:cNvPr>
@@ -17336,7 +18675,7 @@
           <p:cNvPr id="25" name="">
             <a:extLst xmlns:a="http://schemas.openxmlformats.org/drawingml/2006/main">
               <a:ext uri="{FF2B5EF4-FFF2-40B4-BE49-F238E27FC236}">
-                <a16:creationId xmlns:a16="http://schemas.microsoft.com/office/drawing/2014/main" id="{F6956606-40B7-4D49-9058-3A351FA8F482}"/>
+                <a16:creationId xmlns:a16="http://schemas.microsoft.com/office/drawing/2014/main" id="{0634C5EF-2516-4271-9740-FDEC7A8CA877}"/>
               </a:ext>
             </a:extLst>
           </p:cNvPr>
@@ -17386,7 +18725,7 @@
           <p:cNvPr id="26" name="">
             <a:extLst xmlns:a="http://schemas.openxmlformats.org/drawingml/2006/main">
               <a:ext uri="{FF2B5EF4-FFF2-40B4-BE49-F238E27FC236}">
-                <a16:creationId xmlns:a16="http://schemas.microsoft.com/office/drawing/2014/main" id="{BE2CA247-11CB-4259-AB2F-E0FEA0CAF874}"/>
+                <a16:creationId xmlns:a16="http://schemas.microsoft.com/office/drawing/2014/main" id="{D38C2242-26D4-4D2A-9DBF-15378EF2FBE1}"/>
               </a:ext>
             </a:extLst>
           </p:cNvPr>
@@ -17417,7 +18756,7 @@
           <p:cNvPr id="27" name="source-6">
             <a:extLst xmlns:a="http://schemas.openxmlformats.org/drawingml/2006/main">
               <a:ext uri="{FF2B5EF4-FFF2-40B4-BE49-F238E27FC236}">
-                <a16:creationId xmlns:a16="http://schemas.microsoft.com/office/drawing/2014/main" id="{F851B291-1856-4EC8-968F-CF901819B3DC}"/>
+                <a16:creationId xmlns:a16="http://schemas.microsoft.com/office/drawing/2014/main" id="{782F1095-357A-4C24-8164-B1486FA20F83}"/>
               </a:ext>
             </a:extLst>
           </p:cNvPr>
@@ -17467,7 +18806,7 @@
           <p:cNvPr id="28" name="page-6">
             <a:extLst xmlns:a="http://schemas.openxmlformats.org/drawingml/2006/main">
               <a:ext uri="{FF2B5EF4-FFF2-40B4-BE49-F238E27FC236}">
-                <a16:creationId xmlns:a16="http://schemas.microsoft.com/office/drawing/2014/main" id="{B2D40154-48BA-47A9-A610-8941A7D87FE4}"/>
+                <a16:creationId xmlns:a16="http://schemas.microsoft.com/office/drawing/2014/main" id="{47DEEAFD-084B-416E-B88B-1D36DC530B72}"/>
               </a:ext>
             </a:extLst>
           </p:cNvPr>
@@ -17515,7 +18854,7 @@
     </p:spTree>
     <p:extLst>
       <p:ext uri="{BB962C8B-B14F-4D97-AF65-F5344CB8AC3E}">
-        <p14:creationId xmlns:p14="http://schemas.microsoft.com/office/powerpoint/2010/main" val="1020023988"/>
+        <p14:creationId xmlns:p14="http://schemas.microsoft.com/office/powerpoint/2010/main" val="2064369203"/>
       </p:ext>
     </p:extLst>
   </p:cSld>
@@ -17546,7 +18885,7 @@
           <p:cNvPr id="40" name="kicker-7">
             <a:extLst xmlns:a="http://schemas.openxmlformats.org/drawingml/2006/main">
               <a:ext uri="{FF2B5EF4-FFF2-40B4-BE49-F238E27FC236}">
-                <a16:creationId xmlns:a16="http://schemas.microsoft.com/office/drawing/2014/main" id="{C9951E35-7F4F-43B3-AEC0-15E2608D9365}"/>
+                <a16:creationId xmlns:a16="http://schemas.microsoft.com/office/drawing/2014/main" id="{C740484A-8072-4A81-AAD3-9AABF3CAB1B7}"/>
               </a:ext>
             </a:extLst>
           </p:cNvPr>
@@ -17596,7 +18935,7 @@
           <p:cNvPr id="2" name="title-7">
             <a:extLst xmlns:a="http://schemas.openxmlformats.org/drawingml/2006/main">
               <a:ext uri="{FF2B5EF4-FFF2-40B4-BE49-F238E27FC236}">
-                <a16:creationId xmlns:a16="http://schemas.microsoft.com/office/drawing/2014/main" id="{87521FE4-2DE7-49BB-8185-EA3CCD3BFA3F}"/>
+                <a16:creationId xmlns:a16="http://schemas.microsoft.com/office/drawing/2014/main" id="{E6AC2839-FE22-4A91-ADCE-7F930E33964D}"/>
               </a:ext>
             </a:extLst>
           </p:cNvPr>
@@ -17646,7 +18985,7 @@
           <p:cNvPr id="3" name="">
             <a:extLst xmlns:a="http://schemas.openxmlformats.org/drawingml/2006/main">
               <a:ext uri="{FF2B5EF4-FFF2-40B4-BE49-F238E27FC236}">
-                <a16:creationId xmlns:a16="http://schemas.microsoft.com/office/drawing/2014/main" id="{507B19CB-8C73-4E0E-9707-83A4BE1A4E39}"/>
+                <a16:creationId xmlns:a16="http://schemas.microsoft.com/office/drawing/2014/main" id="{709B4B3F-B75D-4875-A7A8-73B41DD893B3}"/>
               </a:ext>
             </a:extLst>
           </p:cNvPr>
@@ -17677,7 +19016,7 @@
           <p:cNvPr id="4" name="">
             <a:extLst xmlns:a="http://schemas.openxmlformats.org/drawingml/2006/main">
               <a:ext uri="{FF2B5EF4-FFF2-40B4-BE49-F238E27FC236}">
-                <a16:creationId xmlns:a16="http://schemas.microsoft.com/office/drawing/2014/main" id="{75531B66-CFD6-4F4A-B3B0-E694F6F4F3D3}"/>
+                <a16:creationId xmlns:a16="http://schemas.microsoft.com/office/drawing/2014/main" id="{98B3F5C8-8ACB-4EF0-9620-8FF2B1BE65E2}"/>
               </a:ext>
             </a:extLst>
           </p:cNvPr>
@@ -17727,7 +19066,7 @@
           <p:cNvPr id="5" name="">
             <a:extLst xmlns:a="http://schemas.openxmlformats.org/drawingml/2006/main">
               <a:ext uri="{FF2B5EF4-FFF2-40B4-BE49-F238E27FC236}">
-                <a16:creationId xmlns:a16="http://schemas.microsoft.com/office/drawing/2014/main" id="{06BAB62C-F1D2-46B7-B15B-E3AD415BAFE9}"/>
+                <a16:creationId xmlns:a16="http://schemas.microsoft.com/office/drawing/2014/main" id="{63F1D27D-41D2-40DF-8800-C0C8768132BC}"/>
               </a:ext>
             </a:extLst>
           </p:cNvPr>
@@ -17760,7 +19099,7 @@
           <p:cNvPr id="6" name="">
             <a:extLst xmlns:a="http://schemas.openxmlformats.org/drawingml/2006/main">
               <a:ext uri="{FF2B5EF4-FFF2-40B4-BE49-F238E27FC236}">
-                <a16:creationId xmlns:a16="http://schemas.microsoft.com/office/drawing/2014/main" id="{00110603-2B47-4E99-8FB4-8AEA94B03677}"/>
+                <a16:creationId xmlns:a16="http://schemas.microsoft.com/office/drawing/2014/main" id="{E2494BB0-B355-4EEB-B581-D2D431EF3869}"/>
               </a:ext>
             </a:extLst>
           </p:cNvPr>
@@ -17793,7 +19132,7 @@
           <p:cNvPr id="7" name="">
             <a:extLst xmlns:a="http://schemas.openxmlformats.org/drawingml/2006/main">
               <a:ext uri="{FF2B5EF4-FFF2-40B4-BE49-F238E27FC236}">
-                <a16:creationId xmlns:a16="http://schemas.microsoft.com/office/drawing/2014/main" id="{6F721A19-BA07-4808-B180-0DFF4D560E1B}"/>
+                <a16:creationId xmlns:a16="http://schemas.microsoft.com/office/drawing/2014/main" id="{D89EA9FA-DF42-48DB-A4E8-2D771BE478F8}"/>
               </a:ext>
             </a:extLst>
           </p:cNvPr>
@@ -17826,7 +19165,7 @@
           <p:cNvPr id="8" name="">
             <a:extLst xmlns:a="http://schemas.openxmlformats.org/drawingml/2006/main">
               <a:ext uri="{FF2B5EF4-FFF2-40B4-BE49-F238E27FC236}">
-                <a16:creationId xmlns:a16="http://schemas.microsoft.com/office/drawing/2014/main" id="{726C6BC8-5A61-4E96-967D-A473912383ED}"/>
+                <a16:creationId xmlns:a16="http://schemas.microsoft.com/office/drawing/2014/main" id="{B47BF12D-82D8-415A-B1F9-24F6427D452A}"/>
               </a:ext>
             </a:extLst>
           </p:cNvPr>
@@ -17859,7 +19198,7 @@
           <p:cNvPr id="9" name="">
             <a:extLst xmlns:a="http://schemas.openxmlformats.org/drawingml/2006/main">
               <a:ext uri="{FF2B5EF4-FFF2-40B4-BE49-F238E27FC236}">
-                <a16:creationId xmlns:a16="http://schemas.microsoft.com/office/drawing/2014/main" id="{5FF0129E-A4EC-4D2C-AA3B-C2882033983D}"/>
+                <a16:creationId xmlns:a16="http://schemas.microsoft.com/office/drawing/2014/main" id="{FC6C5D57-8766-43EA-82B8-0A962AAB39CF}"/>
               </a:ext>
             </a:extLst>
           </p:cNvPr>
@@ -17894,7 +19233,7 @@
           <p:cNvPr id="10" name="">
             <a:extLst xmlns:a="http://schemas.openxmlformats.org/drawingml/2006/main">
               <a:ext uri="{FF2B5EF4-FFF2-40B4-BE49-F238E27FC236}">
-                <a16:creationId xmlns:a16="http://schemas.microsoft.com/office/drawing/2014/main" id="{DD904E11-D4A6-40BB-A46B-F929BF7D93F6}"/>
+                <a16:creationId xmlns:a16="http://schemas.microsoft.com/office/drawing/2014/main" id="{924D1394-DA32-435B-89AB-3D4FE107ABFE}"/>
               </a:ext>
             </a:extLst>
           </p:cNvPr>
@@ -17944,7 +19283,7 @@
           <p:cNvPr id="11" name="">
             <a:extLst xmlns:a="http://schemas.openxmlformats.org/drawingml/2006/main">
               <a:ext uri="{FF2B5EF4-FFF2-40B4-BE49-F238E27FC236}">
-                <a16:creationId xmlns:a16="http://schemas.microsoft.com/office/drawing/2014/main" id="{1210BC15-1280-433B-A311-6482F79E2FC7}"/>
+                <a16:creationId xmlns:a16="http://schemas.microsoft.com/office/drawing/2014/main" id="{D2AC484C-D0D6-45B7-8C29-0E125BE12425}"/>
               </a:ext>
             </a:extLst>
           </p:cNvPr>
@@ -18011,7 +19350,7 @@
           <p:cNvPr id="12" name="">
             <a:extLst xmlns:a="http://schemas.openxmlformats.org/drawingml/2006/main">
               <a:ext uri="{FF2B5EF4-FFF2-40B4-BE49-F238E27FC236}">
-                <a16:creationId xmlns:a16="http://schemas.microsoft.com/office/drawing/2014/main" id="{EFD32556-1AA2-4253-B993-87C2F3F1C0F9}"/>
+                <a16:creationId xmlns:a16="http://schemas.microsoft.com/office/drawing/2014/main" id="{3CFFCF7A-E65B-4873-9DB4-C2766F9195ED}"/>
               </a:ext>
             </a:extLst>
           </p:cNvPr>
@@ -18046,7 +19385,7 @@
           <p:cNvPr id="13" name="">
             <a:extLst xmlns:a="http://schemas.openxmlformats.org/drawingml/2006/main">
               <a:ext uri="{FF2B5EF4-FFF2-40B4-BE49-F238E27FC236}">
-                <a16:creationId xmlns:a16="http://schemas.microsoft.com/office/drawing/2014/main" id="{1C0B486E-A5E9-4B79-B025-5373F6C64D45}"/>
+                <a16:creationId xmlns:a16="http://schemas.microsoft.com/office/drawing/2014/main" id="{E9C3F44A-9452-493B-88B6-B229F6633FF4}"/>
               </a:ext>
             </a:extLst>
           </p:cNvPr>
@@ -18096,7 +19435,7 @@
           <p:cNvPr id="14" name="">
             <a:extLst xmlns:a="http://schemas.openxmlformats.org/drawingml/2006/main">
               <a:ext uri="{FF2B5EF4-FFF2-40B4-BE49-F238E27FC236}">
-                <a16:creationId xmlns:a16="http://schemas.microsoft.com/office/drawing/2014/main" id="{4CA0667F-AD84-4AC1-9704-D53175DB56EA}"/>
+                <a16:creationId xmlns:a16="http://schemas.microsoft.com/office/drawing/2014/main" id="{9E5F6CD0-18E4-4567-B132-C8ECA975BFED}"/>
               </a:ext>
             </a:extLst>
           </p:cNvPr>
@@ -18163,7 +19502,7 @@
           <p:cNvPr id="15" name="">
             <a:extLst xmlns:a="http://schemas.openxmlformats.org/drawingml/2006/main">
               <a:ext uri="{FF2B5EF4-FFF2-40B4-BE49-F238E27FC236}">
-                <a16:creationId xmlns:a16="http://schemas.microsoft.com/office/drawing/2014/main" id="{4540B321-7241-4617-A028-7B8B0073419A}"/>
+                <a16:creationId xmlns:a16="http://schemas.microsoft.com/office/drawing/2014/main" id="{3D5EFACE-A813-4EDB-AA12-6DE44C9FE017}"/>
               </a:ext>
             </a:extLst>
           </p:cNvPr>
@@ -18198,7 +19537,7 @@
           <p:cNvPr id="16" name="">
             <a:extLst xmlns:a="http://schemas.openxmlformats.org/drawingml/2006/main">
               <a:ext uri="{FF2B5EF4-FFF2-40B4-BE49-F238E27FC236}">
-                <a16:creationId xmlns:a16="http://schemas.microsoft.com/office/drawing/2014/main" id="{A06946DD-119B-4FAC-BB94-A33C244691D6}"/>
+                <a16:creationId xmlns:a16="http://schemas.microsoft.com/office/drawing/2014/main" id="{526E8575-11F7-4857-8273-2CEC83C8DE9B}"/>
               </a:ext>
             </a:extLst>
           </p:cNvPr>
@@ -18248,7 +19587,7 @@
           <p:cNvPr id="17" name="">
             <a:extLst xmlns:a="http://schemas.openxmlformats.org/drawingml/2006/main">
               <a:ext uri="{FF2B5EF4-FFF2-40B4-BE49-F238E27FC236}">
-                <a16:creationId xmlns:a16="http://schemas.microsoft.com/office/drawing/2014/main" id="{D43A8EF4-F290-4B97-9D6B-5A20978C1012}"/>
+                <a16:creationId xmlns:a16="http://schemas.microsoft.com/office/drawing/2014/main" id="{C98D969D-1ED1-4397-BE2D-8C5DDA601E30}"/>
               </a:ext>
             </a:extLst>
           </p:cNvPr>
@@ -18315,7 +19654,7 @@
           <p:cNvPr id="18" name="">
             <a:extLst xmlns:a="http://schemas.openxmlformats.org/drawingml/2006/main">
               <a:ext uri="{FF2B5EF4-FFF2-40B4-BE49-F238E27FC236}">
-                <a16:creationId xmlns:a16="http://schemas.microsoft.com/office/drawing/2014/main" id="{41BE269F-0C44-427C-A71C-F41D5A11E106}"/>
+                <a16:creationId xmlns:a16="http://schemas.microsoft.com/office/drawing/2014/main" id="{1BBFC45B-8643-44DC-AF6D-57EC21B72C07}"/>
               </a:ext>
             </a:extLst>
           </p:cNvPr>
@@ -18350,7 +19689,7 @@
           <p:cNvPr id="19" name="">
             <a:extLst xmlns:a="http://schemas.openxmlformats.org/drawingml/2006/main">
               <a:ext uri="{FF2B5EF4-FFF2-40B4-BE49-F238E27FC236}">
-                <a16:creationId xmlns:a16="http://schemas.microsoft.com/office/drawing/2014/main" id="{BE0E5F7F-A4DB-45B2-A2DE-A9819E9FB873}"/>
+                <a16:creationId xmlns:a16="http://schemas.microsoft.com/office/drawing/2014/main" id="{94C30E75-E690-408A-8403-7AA412C4EA68}"/>
               </a:ext>
             </a:extLst>
           </p:cNvPr>
@@ -18400,7 +19739,7 @@
           <p:cNvPr id="20" name="">
             <a:extLst xmlns:a="http://schemas.openxmlformats.org/drawingml/2006/main">
               <a:ext uri="{FF2B5EF4-FFF2-40B4-BE49-F238E27FC236}">
-                <a16:creationId xmlns:a16="http://schemas.microsoft.com/office/drawing/2014/main" id="{346D9F80-6D5A-4B76-AD68-870F9A2A660E}"/>
+                <a16:creationId xmlns:a16="http://schemas.microsoft.com/office/drawing/2014/main" id="{A1637672-2234-4BB2-9209-5D90BE82D06A}"/>
               </a:ext>
             </a:extLst>
           </p:cNvPr>
@@ -18467,7 +19806,7 @@
           <p:cNvPr id="21" name="">
             <a:extLst xmlns:a="http://schemas.openxmlformats.org/drawingml/2006/main">
               <a:ext uri="{FF2B5EF4-FFF2-40B4-BE49-F238E27FC236}">
-                <a16:creationId xmlns:a16="http://schemas.microsoft.com/office/drawing/2014/main" id="{2E098DEA-7DAC-4069-BB12-B0DC0CCA871B}"/>
+                <a16:creationId xmlns:a16="http://schemas.microsoft.com/office/drawing/2014/main" id="{54A7F979-BB55-4FCC-954B-BFBC98BA7D94}"/>
               </a:ext>
             </a:extLst>
           </p:cNvPr>
@@ -18508,7 +19847,7 @@
           <p:cNvPr id="22" name="">
             <a:extLst xmlns:a="http://schemas.openxmlformats.org/drawingml/2006/main">
               <a:ext uri="{FF2B5EF4-FFF2-40B4-BE49-F238E27FC236}">
-                <a16:creationId xmlns:a16="http://schemas.microsoft.com/office/drawing/2014/main" id="{545684EA-1A0F-43E3-8C9E-F3560694E70D}"/>
+                <a16:creationId xmlns:a16="http://schemas.microsoft.com/office/drawing/2014/main" id="{158FE1EF-7B7A-4527-9791-C62061A88534}"/>
               </a:ext>
             </a:extLst>
           </p:cNvPr>
@@ -18558,7 +19897,7 @@
           <p:cNvPr id="23" name="">
             <a:extLst xmlns:a="http://schemas.openxmlformats.org/drawingml/2006/main">
               <a:ext uri="{FF2B5EF4-FFF2-40B4-BE49-F238E27FC236}">
-                <a16:creationId xmlns:a16="http://schemas.microsoft.com/office/drawing/2014/main" id="{3DFE1210-A495-4415-BDBE-1DEA0B540889}"/>
+                <a16:creationId xmlns:a16="http://schemas.microsoft.com/office/drawing/2014/main" id="{B8754653-10EF-4072-8783-59F1897CD505}"/>
               </a:ext>
             </a:extLst>
           </p:cNvPr>
@@ -18625,7 +19964,7 @@
           <p:cNvPr id="24" name="">
             <a:extLst xmlns:a="http://schemas.openxmlformats.org/drawingml/2006/main">
               <a:ext uri="{FF2B5EF4-FFF2-40B4-BE49-F238E27FC236}">
-                <a16:creationId xmlns:a16="http://schemas.microsoft.com/office/drawing/2014/main" id="{2AD76CCB-3C87-433F-A884-88729CA95953}"/>
+                <a16:creationId xmlns:a16="http://schemas.microsoft.com/office/drawing/2014/main" id="{719A3B89-DFDB-479F-9850-1CB05F9C673D}"/>
               </a:ext>
             </a:extLst>
           </p:cNvPr>
@@ -18675,7 +20014,7 @@
           <p:cNvPr id="25" name="">
             <a:extLst xmlns:a="http://schemas.openxmlformats.org/drawingml/2006/main">
               <a:ext uri="{FF2B5EF4-FFF2-40B4-BE49-F238E27FC236}">
-                <a16:creationId xmlns:a16="http://schemas.microsoft.com/office/drawing/2014/main" id="{F6F97AD3-107B-4680-AC9A-B95A8D708611}"/>
+                <a16:creationId xmlns:a16="http://schemas.microsoft.com/office/drawing/2014/main" id="{C6E4035B-00C6-4021-8E6C-BB7766B5BC9E}"/>
               </a:ext>
             </a:extLst>
           </p:cNvPr>
@@ -18710,7 +20049,7 @@
           <p:cNvPr id="26" name="">
             <a:extLst xmlns:a="http://schemas.openxmlformats.org/drawingml/2006/main">
               <a:ext uri="{FF2B5EF4-FFF2-40B4-BE49-F238E27FC236}">
-                <a16:creationId xmlns:a16="http://schemas.microsoft.com/office/drawing/2014/main" id="{0F82C519-FAEE-456A-B825-D3804EFCC608}"/>
+                <a16:creationId xmlns:a16="http://schemas.microsoft.com/office/drawing/2014/main" id="{1E53F26A-A65D-4A9D-B78F-4EBB38F9F452}"/>
               </a:ext>
             </a:extLst>
           </p:cNvPr>
@@ -18760,7 +20099,7 @@
           <p:cNvPr id="27" name="">
             <a:extLst xmlns:a="http://schemas.openxmlformats.org/drawingml/2006/main">
               <a:ext uri="{FF2B5EF4-FFF2-40B4-BE49-F238E27FC236}">
-                <a16:creationId xmlns:a16="http://schemas.microsoft.com/office/drawing/2014/main" id="{139BE119-AC7C-441C-9331-A7CAD006E4BE}"/>
+                <a16:creationId xmlns:a16="http://schemas.microsoft.com/office/drawing/2014/main" id="{2B05D140-1625-487E-9AF9-FF8873906772}"/>
               </a:ext>
             </a:extLst>
           </p:cNvPr>
@@ -18810,7 +20149,7 @@
           <p:cNvPr id="28" name="">
             <a:extLst xmlns:a="http://schemas.openxmlformats.org/drawingml/2006/main">
               <a:ext uri="{FF2B5EF4-FFF2-40B4-BE49-F238E27FC236}">
-                <a16:creationId xmlns:a16="http://schemas.microsoft.com/office/drawing/2014/main" id="{85711427-2490-445C-96C9-32B715BBE281}"/>
+                <a16:creationId xmlns:a16="http://schemas.microsoft.com/office/drawing/2014/main" id="{3BDBABC5-7DA9-4F21-8D30-333679DB0242}"/>
               </a:ext>
             </a:extLst>
           </p:cNvPr>
@@ -18860,7 +20199,7 @@
           <p:cNvPr id="29" name="">
             <a:extLst xmlns:a="http://schemas.openxmlformats.org/drawingml/2006/main">
               <a:ext uri="{FF2B5EF4-FFF2-40B4-BE49-F238E27FC236}">
-                <a16:creationId xmlns:a16="http://schemas.microsoft.com/office/drawing/2014/main" id="{744D0245-CA96-4354-8B11-539379B8513F}"/>
+                <a16:creationId xmlns:a16="http://schemas.microsoft.com/office/drawing/2014/main" id="{EB681483-BFAD-41E0-B1D5-944F48C6B5FE}"/>
               </a:ext>
             </a:extLst>
           </p:cNvPr>
@@ -18891,7 +20230,7 @@
           <p:cNvPr id="30" name="">
             <a:extLst xmlns:a="http://schemas.openxmlformats.org/drawingml/2006/main">
               <a:ext uri="{FF2B5EF4-FFF2-40B4-BE49-F238E27FC236}">
-                <a16:creationId xmlns:a16="http://schemas.microsoft.com/office/drawing/2014/main" id="{7AB280A4-CD91-4CA6-BB40-29E6883BC3D1}"/>
+                <a16:creationId xmlns:a16="http://schemas.microsoft.com/office/drawing/2014/main" id="{71BF6129-6076-483F-B130-B9BF22FCC3E7}"/>
               </a:ext>
             </a:extLst>
           </p:cNvPr>
@@ -18941,7 +20280,7 @@
           <p:cNvPr id="31" name="">
             <a:extLst xmlns:a="http://schemas.openxmlformats.org/drawingml/2006/main">
               <a:ext uri="{FF2B5EF4-FFF2-40B4-BE49-F238E27FC236}">
-                <a16:creationId xmlns:a16="http://schemas.microsoft.com/office/drawing/2014/main" id="{FFB5E238-88B8-44CD-95D7-BC44E9452632}"/>
+                <a16:creationId xmlns:a16="http://schemas.microsoft.com/office/drawing/2014/main" id="{4E608F2F-69CD-46A9-9D20-32923F1D19B4}"/>
               </a:ext>
             </a:extLst>
           </p:cNvPr>
@@ -18991,7 +20330,7 @@
           <p:cNvPr id="32" name="">
             <a:extLst xmlns:a="http://schemas.openxmlformats.org/drawingml/2006/main">
               <a:ext uri="{FF2B5EF4-FFF2-40B4-BE49-F238E27FC236}">
-                <a16:creationId xmlns:a16="http://schemas.microsoft.com/office/drawing/2014/main" id="{8EEBFE22-396D-411D-8935-D4DE94028AE7}"/>
+                <a16:creationId xmlns:a16="http://schemas.microsoft.com/office/drawing/2014/main" id="{A6349AEA-7364-4477-848D-CAE363A3FE66}"/>
               </a:ext>
             </a:extLst>
           </p:cNvPr>
@@ -19041,7 +20380,7 @@
           <p:cNvPr id="33" name="">
             <a:extLst xmlns:a="http://schemas.openxmlformats.org/drawingml/2006/main">
               <a:ext uri="{FF2B5EF4-FFF2-40B4-BE49-F238E27FC236}">
-                <a16:creationId xmlns:a16="http://schemas.microsoft.com/office/drawing/2014/main" id="{32F29EA2-DC3C-4132-81FB-75F28D649568}"/>
+                <a16:creationId xmlns:a16="http://schemas.microsoft.com/office/drawing/2014/main" id="{E3865589-F548-4E3D-8529-B5223EF11AF2}"/>
               </a:ext>
             </a:extLst>
           </p:cNvPr>
@@ -19072,7 +20411,7 @@
           <p:cNvPr id="34" name="">
             <a:extLst xmlns:a="http://schemas.openxmlformats.org/drawingml/2006/main">
               <a:ext uri="{FF2B5EF4-FFF2-40B4-BE49-F238E27FC236}">
-                <a16:creationId xmlns:a16="http://schemas.microsoft.com/office/drawing/2014/main" id="{8FA24B13-F81C-4F37-8B46-1550DBDE74A0}"/>
+                <a16:creationId xmlns:a16="http://schemas.microsoft.com/office/drawing/2014/main" id="{7B7C2377-839C-4A57-884D-836C335A443E}"/>
               </a:ext>
             </a:extLst>
           </p:cNvPr>
@@ -19122,7 +20461,7 @@
           <p:cNvPr id="35" name="">
             <a:extLst xmlns:a="http://schemas.openxmlformats.org/drawingml/2006/main">
               <a:ext uri="{FF2B5EF4-FFF2-40B4-BE49-F238E27FC236}">
-                <a16:creationId xmlns:a16="http://schemas.microsoft.com/office/drawing/2014/main" id="{4DCC890C-0694-4CCC-A730-AD4D5815F495}"/>
+                <a16:creationId xmlns:a16="http://schemas.microsoft.com/office/drawing/2014/main" id="{892C139C-6A4D-4AFD-953A-39B76F685B8F}"/>
               </a:ext>
             </a:extLst>
           </p:cNvPr>
@@ -19172,7 +20511,7 @@
           <p:cNvPr id="36" name="">
             <a:extLst xmlns:a="http://schemas.openxmlformats.org/drawingml/2006/main">
               <a:ext uri="{FF2B5EF4-FFF2-40B4-BE49-F238E27FC236}">
-                <a16:creationId xmlns:a16="http://schemas.microsoft.com/office/drawing/2014/main" id="{6E7D3A91-0EC3-48F7-A0CD-D51E548AA1C8}"/>
+                <a16:creationId xmlns:a16="http://schemas.microsoft.com/office/drawing/2014/main" id="{04548B0E-AEA9-44E3-BF35-228A70EBBB41}"/>
               </a:ext>
             </a:extLst>
           </p:cNvPr>
@@ -19222,7 +20561,7 @@
           <p:cNvPr id="37" name="">
             <a:extLst xmlns:a="http://schemas.openxmlformats.org/drawingml/2006/main">
               <a:ext uri="{FF2B5EF4-FFF2-40B4-BE49-F238E27FC236}">
-                <a16:creationId xmlns:a16="http://schemas.microsoft.com/office/drawing/2014/main" id="{EE5C5310-C64F-4552-994B-77F067ABCB9E}"/>
+                <a16:creationId xmlns:a16="http://schemas.microsoft.com/office/drawing/2014/main" id="{B106F90C-EA62-4947-9CF2-B1F793BFAB04}"/>
               </a:ext>
             </a:extLst>
           </p:cNvPr>
@@ -19253,7 +20592,7 @@
           <p:cNvPr id="38" name="source-7">
             <a:extLst xmlns:a="http://schemas.openxmlformats.org/drawingml/2006/main">
               <a:ext uri="{FF2B5EF4-FFF2-40B4-BE49-F238E27FC236}">
-                <a16:creationId xmlns:a16="http://schemas.microsoft.com/office/drawing/2014/main" id="{028B6A51-4D18-46C9-9040-F7E329AF9253}"/>
+                <a16:creationId xmlns:a16="http://schemas.microsoft.com/office/drawing/2014/main" id="{99548027-F782-418B-BA9D-0D27B0B276CC}"/>
               </a:ext>
             </a:extLst>
           </p:cNvPr>
@@ -19303,7 +20642,7 @@
           <p:cNvPr id="39" name="page-7">
             <a:extLst xmlns:a="http://schemas.openxmlformats.org/drawingml/2006/main">
               <a:ext uri="{FF2B5EF4-FFF2-40B4-BE49-F238E27FC236}">
-                <a16:creationId xmlns:a16="http://schemas.microsoft.com/office/drawing/2014/main" id="{0878082C-0359-4D54-847E-922F3FE72129}"/>
+                <a16:creationId xmlns:a16="http://schemas.microsoft.com/office/drawing/2014/main" id="{A1BA36DA-F5B7-4C03-9A81-35D065DA57E7}"/>
               </a:ext>
             </a:extLst>
           </p:cNvPr>
@@ -19351,7 +20690,7 @@
     </p:spTree>
     <p:extLst>
       <p:ext uri="{BB962C8B-B14F-4D97-AF65-F5344CB8AC3E}">
-        <p14:creationId xmlns:p14="http://schemas.microsoft.com/office/powerpoint/2010/main" val="2055470438"/>
+        <p14:creationId xmlns:p14="http://schemas.microsoft.com/office/powerpoint/2010/main" val="604397222"/>
       </p:ext>
     </p:extLst>
   </p:cSld>
@@ -19382,7 +20721,7 @@
           <p:cNvPr id="20" name="kicker-8">
             <a:extLst xmlns:a="http://schemas.openxmlformats.org/drawingml/2006/main">
               <a:ext uri="{FF2B5EF4-FFF2-40B4-BE49-F238E27FC236}">
-                <a16:creationId xmlns:a16="http://schemas.microsoft.com/office/drawing/2014/main" id="{63BCFE2C-643A-4B31-A792-E301A2C53C64}"/>
+                <a16:creationId xmlns:a16="http://schemas.microsoft.com/office/drawing/2014/main" id="{18A7C5C0-4E42-416F-AA5F-61CAD978E86D}"/>
               </a:ext>
             </a:extLst>
           </p:cNvPr>
@@ -19432,7 +20771,7 @@
           <p:cNvPr id="2" name="title-8">
             <a:extLst xmlns:a="http://schemas.openxmlformats.org/drawingml/2006/main">
               <a:ext uri="{FF2B5EF4-FFF2-40B4-BE49-F238E27FC236}">
-                <a16:creationId xmlns:a16="http://schemas.microsoft.com/office/drawing/2014/main" id="{D5188492-9BA6-45DC-9C91-724128481D4B}"/>
+                <a16:creationId xmlns:a16="http://schemas.microsoft.com/office/drawing/2014/main" id="{B47EEB21-14BE-4E7F-9F09-1EE80CCF5F93}"/>
               </a:ext>
             </a:extLst>
           </p:cNvPr>
@@ -19482,7 +20821,7 @@
           <p:cNvPr id="3" name="">
             <a:extLst xmlns:a="http://schemas.openxmlformats.org/drawingml/2006/main">
               <a:ext uri="{FF2B5EF4-FFF2-40B4-BE49-F238E27FC236}">
-                <a16:creationId xmlns:a16="http://schemas.microsoft.com/office/drawing/2014/main" id="{F0C545AC-9D27-4B50-BC04-53B2C7F24A10}"/>
+                <a16:creationId xmlns:a16="http://schemas.microsoft.com/office/drawing/2014/main" id="{57CBC113-3131-43BE-956D-F54976E933E1}"/>
               </a:ext>
             </a:extLst>
           </p:cNvPr>
@@ -19513,7 +20852,7 @@
           <p:cNvPr id="4" name="">
             <a:extLst xmlns:a="http://schemas.openxmlformats.org/drawingml/2006/main">
               <a:ext uri="{FF2B5EF4-FFF2-40B4-BE49-F238E27FC236}">
-                <a16:creationId xmlns:a16="http://schemas.microsoft.com/office/drawing/2014/main" id="{6DEA354F-2F88-46B0-953B-2263D349CEED}"/>
+                <a16:creationId xmlns:a16="http://schemas.microsoft.com/office/drawing/2014/main" id="{EB6BF604-117B-4F46-B90C-3A96D18A3382}"/>
               </a:ext>
             </a:extLst>
           </p:cNvPr>
@@ -19563,7 +20902,7 @@
           <p:cNvPr id="5" name="">
             <a:extLst xmlns:a="http://schemas.openxmlformats.org/drawingml/2006/main">
               <a:ext uri="{FF2B5EF4-FFF2-40B4-BE49-F238E27FC236}">
-                <a16:creationId xmlns:a16="http://schemas.microsoft.com/office/drawing/2014/main" id="{F3591FEA-68E5-4E3C-99A2-A26A336A7394}"/>
+                <a16:creationId xmlns:a16="http://schemas.microsoft.com/office/drawing/2014/main" id="{2DED919A-3658-4EEB-9E12-8E956502783E}"/>
               </a:ext>
             </a:extLst>
           </p:cNvPr>
@@ -19604,7 +20943,7 @@
           <p:cNvPr id="6" name="">
             <a:extLst xmlns:a="http://schemas.openxmlformats.org/drawingml/2006/main">
               <a:ext uri="{FF2B5EF4-FFF2-40B4-BE49-F238E27FC236}">
-                <a16:creationId xmlns:a16="http://schemas.microsoft.com/office/drawing/2014/main" id="{7FFC971C-47D4-4A6A-8FD7-C15A21835FF4}"/>
+                <a16:creationId xmlns:a16="http://schemas.microsoft.com/office/drawing/2014/main" id="{5B0820F0-5A5C-4FDD-AC56-1128F64CA1EF}"/>
               </a:ext>
             </a:extLst>
           </p:cNvPr>
@@ -19654,7 +20993,7 @@
           <p:cNvPr id="7" name="">
             <a:extLst xmlns:a="http://schemas.openxmlformats.org/drawingml/2006/main">
               <a:ext uri="{FF2B5EF4-FFF2-40B4-BE49-F238E27FC236}">
-                <a16:creationId xmlns:a16="http://schemas.microsoft.com/office/drawing/2014/main" id="{5546C198-3BD0-4AC5-BFED-764AB7008F90}"/>
+                <a16:creationId xmlns:a16="http://schemas.microsoft.com/office/drawing/2014/main" id="{5ACD71EA-BC70-4D59-8B7F-518D8A0BD9C9}"/>
               </a:ext>
             </a:extLst>
           </p:cNvPr>
@@ -19704,7 +21043,7 @@
           <p:cNvPr id="8" name="">
             <a:extLst xmlns:a="http://schemas.openxmlformats.org/drawingml/2006/main">
               <a:ext uri="{FF2B5EF4-FFF2-40B4-BE49-F238E27FC236}">
-                <a16:creationId xmlns:a16="http://schemas.microsoft.com/office/drawing/2014/main" id="{66C5DA77-9EB9-4108-9D23-13835CA4478A}"/>
+                <a16:creationId xmlns:a16="http://schemas.microsoft.com/office/drawing/2014/main" id="{D32665CF-E724-4A51-8E33-4DD84CD20343}"/>
               </a:ext>
             </a:extLst>
           </p:cNvPr>
@@ -19754,7 +21093,7 @@
           <p:cNvPr id="9" name="">
             <a:extLst xmlns:a="http://schemas.openxmlformats.org/drawingml/2006/main">
               <a:ext uri="{FF2B5EF4-FFF2-40B4-BE49-F238E27FC236}">
-                <a16:creationId xmlns:a16="http://schemas.microsoft.com/office/drawing/2014/main" id="{767A10F0-7EFF-42B2-AC81-F0B5B3E3CFFC}"/>
+                <a16:creationId xmlns:a16="http://schemas.microsoft.com/office/drawing/2014/main" id="{F7E3F22A-A477-4F3A-BFCC-7591307B1B8B}"/>
               </a:ext>
             </a:extLst>
           </p:cNvPr>
@@ -19804,7 +21143,7 @@
           <p:cNvPr id="10" name="">
             <a:extLst xmlns:a="http://schemas.openxmlformats.org/drawingml/2006/main">
               <a:ext uri="{FF2B5EF4-FFF2-40B4-BE49-F238E27FC236}">
-                <a16:creationId xmlns:a16="http://schemas.microsoft.com/office/drawing/2014/main" id="{F353D694-B212-444D-B0F1-E0A4A376D0D7}"/>
+                <a16:creationId xmlns:a16="http://schemas.microsoft.com/office/drawing/2014/main" id="{501AB780-43D3-4196-AC14-859EB8F2A1B8}"/>
               </a:ext>
             </a:extLst>
           </p:cNvPr>
@@ -19845,7 +21184,7 @@
           <p:cNvPr id="11" name="">
             <a:extLst xmlns:a="http://schemas.openxmlformats.org/drawingml/2006/main">
               <a:ext uri="{FF2B5EF4-FFF2-40B4-BE49-F238E27FC236}">
-                <a16:creationId xmlns:a16="http://schemas.microsoft.com/office/drawing/2014/main" id="{B51CD67B-6657-4CFB-9450-99A6B92C39DC}"/>
+                <a16:creationId xmlns:a16="http://schemas.microsoft.com/office/drawing/2014/main" id="{0DCCF604-1E46-401D-AB91-C7F53B595F31}"/>
               </a:ext>
             </a:extLst>
           </p:cNvPr>
@@ -19895,7 +21234,7 @@
           <p:cNvPr id="12" name="">
             <a:extLst xmlns:a="http://schemas.openxmlformats.org/drawingml/2006/main">
               <a:ext uri="{FF2B5EF4-FFF2-40B4-BE49-F238E27FC236}">
-                <a16:creationId xmlns:a16="http://schemas.microsoft.com/office/drawing/2014/main" id="{DE76C5F9-ECB7-4548-9E61-3453A0D2F1BC}"/>
+                <a16:creationId xmlns:a16="http://schemas.microsoft.com/office/drawing/2014/main" id="{D85254BD-20EF-4BF6-AAFC-0F3B9C2CDF9F}"/>
               </a:ext>
             </a:extLst>
           </p:cNvPr>
@@ -19945,7 +21284,7 @@
           <p:cNvPr id="13" name="">
             <a:extLst xmlns:a="http://schemas.openxmlformats.org/drawingml/2006/main">
               <a:ext uri="{FF2B5EF4-FFF2-40B4-BE49-F238E27FC236}">
-                <a16:creationId xmlns:a16="http://schemas.microsoft.com/office/drawing/2014/main" id="{025B2380-6FE7-4C68-A009-55C03350045B}"/>
+                <a16:creationId xmlns:a16="http://schemas.microsoft.com/office/drawing/2014/main" id="{92DCBB82-6E1D-4736-9D22-3E5F8D48AEF8}"/>
               </a:ext>
             </a:extLst>
           </p:cNvPr>
@@ -19995,7 +21334,7 @@
           <p:cNvPr id="14" name="">
             <a:extLst xmlns:a="http://schemas.openxmlformats.org/drawingml/2006/main">
               <a:ext uri="{FF2B5EF4-FFF2-40B4-BE49-F238E27FC236}">
-                <a16:creationId xmlns:a16="http://schemas.microsoft.com/office/drawing/2014/main" id="{A74314DA-8879-4AA3-989A-D4554CF3D5E9}"/>
+                <a16:creationId xmlns:a16="http://schemas.microsoft.com/office/drawing/2014/main" id="{F4A62FAB-75E3-4410-A4D6-08F468E5541E}"/>
               </a:ext>
             </a:extLst>
           </p:cNvPr>
@@ -20045,7 +21384,7 @@
           <p:cNvPr id="15" name="">
             <a:extLst xmlns:a="http://schemas.openxmlformats.org/drawingml/2006/main">
               <a:ext uri="{FF2B5EF4-FFF2-40B4-BE49-F238E27FC236}">
-                <a16:creationId xmlns:a16="http://schemas.microsoft.com/office/drawing/2014/main" id="{F7DB80CB-B356-4738-BBD8-DF4F97980CA9}"/>
+                <a16:creationId xmlns:a16="http://schemas.microsoft.com/office/drawing/2014/main" id="{CA659970-0DEE-4219-80F3-886A27B502C9}"/>
               </a:ext>
             </a:extLst>
           </p:cNvPr>
@@ -20080,7 +21419,7 @@
           <p:cNvPr id="16" name="">
             <a:extLst xmlns:a="http://schemas.openxmlformats.org/drawingml/2006/main">
               <a:ext uri="{FF2B5EF4-FFF2-40B4-BE49-F238E27FC236}">
-                <a16:creationId xmlns:a16="http://schemas.microsoft.com/office/drawing/2014/main" id="{9DD0CDBF-5336-4887-9F69-DF4127F49D83}"/>
+                <a16:creationId xmlns:a16="http://schemas.microsoft.com/office/drawing/2014/main" id="{60CC11CC-C33C-4D80-80A7-8B66FC1653A1}"/>
               </a:ext>
             </a:extLst>
           </p:cNvPr>
@@ -20130,7 +21469,7 @@
           <p:cNvPr id="17" name="">
             <a:extLst xmlns:a="http://schemas.openxmlformats.org/drawingml/2006/main">
               <a:ext uri="{FF2B5EF4-FFF2-40B4-BE49-F238E27FC236}">
-                <a16:creationId xmlns:a16="http://schemas.microsoft.com/office/drawing/2014/main" id="{533393A1-AF28-4D13-B387-164117302619}"/>
+                <a16:creationId xmlns:a16="http://schemas.microsoft.com/office/drawing/2014/main" id="{BC0D63BE-234D-47C5-8ED5-89FFF4DC697D}"/>
               </a:ext>
             </a:extLst>
           </p:cNvPr>
@@ -20161,7 +21500,7 @@
           <p:cNvPr id="18" name="source-8">
             <a:extLst xmlns:a="http://schemas.openxmlformats.org/drawingml/2006/main">
               <a:ext uri="{FF2B5EF4-FFF2-40B4-BE49-F238E27FC236}">
-                <a16:creationId xmlns:a16="http://schemas.microsoft.com/office/drawing/2014/main" id="{A7059B68-E4F0-4866-8746-B3226D67B804}"/>
+                <a16:creationId xmlns:a16="http://schemas.microsoft.com/office/drawing/2014/main" id="{63983B02-AE9D-4E05-8138-3378AFEE237F}"/>
               </a:ext>
             </a:extLst>
           </p:cNvPr>
@@ -20211,7 +21550,7 @@
           <p:cNvPr id="19" name="page-8">
             <a:extLst xmlns:a="http://schemas.openxmlformats.org/drawingml/2006/main">
               <a:ext uri="{FF2B5EF4-FFF2-40B4-BE49-F238E27FC236}">
-                <a16:creationId xmlns:a16="http://schemas.microsoft.com/office/drawing/2014/main" id="{7AE108C6-2474-4FA1-ADCD-AA37322D5C79}"/>
+                <a16:creationId xmlns:a16="http://schemas.microsoft.com/office/drawing/2014/main" id="{B180A76D-7059-4B18-82CE-FAA46C66E843}"/>
               </a:ext>
             </a:extLst>
           </p:cNvPr>
@@ -20259,7 +21598,7 @@
     </p:spTree>
     <p:extLst>
       <p:ext uri="{BB962C8B-B14F-4D97-AF65-F5344CB8AC3E}">
-        <p14:creationId xmlns:p14="http://schemas.microsoft.com/office/powerpoint/2010/main" val="438520248"/>
+        <p14:creationId xmlns:p14="http://schemas.microsoft.com/office/powerpoint/2010/main" val="1376066605"/>
       </p:ext>
     </p:extLst>
   </p:cSld>
@@ -20290,7 +21629,7 @@
           <p:cNvPr id="53" name="kicker-9">
             <a:extLst xmlns:a="http://schemas.openxmlformats.org/drawingml/2006/main">
               <a:ext uri="{FF2B5EF4-FFF2-40B4-BE49-F238E27FC236}">
-                <a16:creationId xmlns:a16="http://schemas.microsoft.com/office/drawing/2014/main" id="{74F67DF8-FEC7-4A06-8B42-07DD0ADD6928}"/>
+                <a16:creationId xmlns:a16="http://schemas.microsoft.com/office/drawing/2014/main" id="{6CC98ABD-4CEE-4922-A70E-86870D6EBFC0}"/>
               </a:ext>
             </a:extLst>
           </p:cNvPr>
@@ -20340,7 +21679,7 @@
           <p:cNvPr id="2" name="title-9">
             <a:extLst xmlns:a="http://schemas.openxmlformats.org/drawingml/2006/main">
               <a:ext uri="{FF2B5EF4-FFF2-40B4-BE49-F238E27FC236}">
-                <a16:creationId xmlns:a16="http://schemas.microsoft.com/office/drawing/2014/main" id="{F30FC485-44D0-49D5-90EC-93EC499C6C02}"/>
+                <a16:creationId xmlns:a16="http://schemas.microsoft.com/office/drawing/2014/main" id="{AF0A7F00-CBF4-4C8B-BE46-ABC9D655BBAE}"/>
               </a:ext>
             </a:extLst>
           </p:cNvPr>
@@ -20390,7 +21729,7 @@
           <p:cNvPr id="3" name="">
             <a:extLst xmlns:a="http://schemas.openxmlformats.org/drawingml/2006/main">
               <a:ext uri="{FF2B5EF4-FFF2-40B4-BE49-F238E27FC236}">
-                <a16:creationId xmlns:a16="http://schemas.microsoft.com/office/drawing/2014/main" id="{8C6D85BA-B1C6-4E8C-A386-21A3B787F0FB}"/>
+                <a16:creationId xmlns:a16="http://schemas.microsoft.com/office/drawing/2014/main" id="{B0804F74-5FF9-43EF-B8A7-0804325E1DA2}"/>
               </a:ext>
             </a:extLst>
           </p:cNvPr>
@@ -20421,7 +21760,7 @@
           <p:cNvPr id="4" name="">
             <a:extLst xmlns:a="http://schemas.openxmlformats.org/drawingml/2006/main">
               <a:ext uri="{FF2B5EF4-FFF2-40B4-BE49-F238E27FC236}">
-                <a16:creationId xmlns:a16="http://schemas.microsoft.com/office/drawing/2014/main" id="{CEE4B1CF-D43B-4469-A4DD-B47199C6F980}"/>
+                <a16:creationId xmlns:a16="http://schemas.microsoft.com/office/drawing/2014/main" id="{80B121D6-77A3-4DD8-8DDE-2D2A76CABFEF}"/>
               </a:ext>
             </a:extLst>
           </p:cNvPr>
@@ -20471,7 +21810,7 @@
           <p:cNvPr id="5" name="">
             <a:extLst xmlns:a="http://schemas.openxmlformats.org/drawingml/2006/main">
               <a:ext uri="{FF2B5EF4-FFF2-40B4-BE49-F238E27FC236}">
-                <a16:creationId xmlns:a16="http://schemas.microsoft.com/office/drawing/2014/main" id="{953666CC-DB27-4D9E-89A0-EF50934047F4}"/>
+                <a16:creationId xmlns:a16="http://schemas.microsoft.com/office/drawing/2014/main" id="{848C9508-E432-4136-8BE9-C20F595B56C2}"/>
               </a:ext>
             </a:extLst>
           </p:cNvPr>
@@ -20504,7 +21843,7 @@
           <p:cNvPr id="6" name="">
             <a:extLst xmlns:a="http://schemas.openxmlformats.org/drawingml/2006/main">
               <a:ext uri="{FF2B5EF4-FFF2-40B4-BE49-F238E27FC236}">
-                <a16:creationId xmlns:a16="http://schemas.microsoft.com/office/drawing/2014/main" id="{C4F9183F-6F09-480A-9F3C-378079ABCB1F}"/>
+                <a16:creationId xmlns:a16="http://schemas.microsoft.com/office/drawing/2014/main" id="{BBF72ED0-916C-4065-BCB9-D97BEF4993BB}"/>
               </a:ext>
             </a:extLst>
           </p:cNvPr>
@@ -20537,7 +21876,7 @@
           <p:cNvPr id="7" name="">
             <a:extLst xmlns:a="http://schemas.openxmlformats.org/drawingml/2006/main">
               <a:ext uri="{FF2B5EF4-FFF2-40B4-BE49-F238E27FC236}">
-                <a16:creationId xmlns:a16="http://schemas.microsoft.com/office/drawing/2014/main" id="{73BF605B-10A2-4EDC-BE47-2136EF8B700B}"/>
+                <a16:creationId xmlns:a16="http://schemas.microsoft.com/office/drawing/2014/main" id="{E3443B2C-C6B6-4074-A4B6-03EA78BD11BE}"/>
               </a:ext>
             </a:extLst>
           </p:cNvPr>
@@ -20578,7 +21917,7 @@
           <p:cNvPr id="8" name="">
             <a:extLst xmlns:a="http://schemas.openxmlformats.org/drawingml/2006/main">
               <a:ext uri="{FF2B5EF4-FFF2-40B4-BE49-F238E27FC236}">
-                <a16:creationId xmlns:a16="http://schemas.microsoft.com/office/drawing/2014/main" id="{F6B7633F-A71C-4E40-8E0A-1070B7969DA6}"/>
+                <a16:creationId xmlns:a16="http://schemas.microsoft.com/office/drawing/2014/main" id="{CA91D556-0511-4B98-8B46-9BF0E5744817}"/>
               </a:ext>
             </a:extLst>
           </p:cNvPr>
@@ -20645,7 +21984,7 @@
           <p:cNvPr id="9" name="">
             <a:extLst xmlns:a="http://schemas.openxmlformats.org/drawingml/2006/main">
               <a:ext uri="{FF2B5EF4-FFF2-40B4-BE49-F238E27FC236}">
-                <a16:creationId xmlns:a16="http://schemas.microsoft.com/office/drawing/2014/main" id="{08332B7F-BBCA-48DD-B410-E037C797C1E0}"/>
+                <a16:creationId xmlns:a16="http://schemas.microsoft.com/office/drawing/2014/main" id="{E1EC0BEF-873B-4556-966B-4F2AE976E804}"/>
               </a:ext>
             </a:extLst>
           </p:cNvPr>
@@ -20695,7 +22034,7 @@
           <p:cNvPr id="10" name="">
             <a:extLst xmlns:a="http://schemas.openxmlformats.org/drawingml/2006/main">
               <a:ext uri="{FF2B5EF4-FFF2-40B4-BE49-F238E27FC236}">
-                <a16:creationId xmlns:a16="http://schemas.microsoft.com/office/drawing/2014/main" id="{45BCF7DD-76F4-4AC6-A4A6-202F3AC878F9}"/>
+                <a16:creationId xmlns:a16="http://schemas.microsoft.com/office/drawing/2014/main" id="{A66945AA-13D2-4C19-AB70-BEA21021D770}"/>
               </a:ext>
             </a:extLst>
           </p:cNvPr>
@@ -20745,7 +22084,7 @@
           <p:cNvPr id="11" name="">
             <a:extLst xmlns:a="http://schemas.openxmlformats.org/drawingml/2006/main">
               <a:ext uri="{FF2B5EF4-FFF2-40B4-BE49-F238E27FC236}">
-                <a16:creationId xmlns:a16="http://schemas.microsoft.com/office/drawing/2014/main" id="{9ABA0E0F-7790-4E8D-8579-F01792965506}"/>
+                <a16:creationId xmlns:a16="http://schemas.microsoft.com/office/drawing/2014/main" id="{4E7AC492-0042-4652-8B54-1F4371101C7B}"/>
               </a:ext>
             </a:extLst>
           </p:cNvPr>
@@ -20795,7 +22134,7 @@
           <p:cNvPr id="12" name="">
             <a:extLst xmlns:a="http://schemas.openxmlformats.org/drawingml/2006/main">
               <a:ext uri="{FF2B5EF4-FFF2-40B4-BE49-F238E27FC236}">
-                <a16:creationId xmlns:a16="http://schemas.microsoft.com/office/drawing/2014/main" id="{6EDF0DB7-C284-4DB0-882A-02447B4D7714}"/>
+                <a16:creationId xmlns:a16="http://schemas.microsoft.com/office/drawing/2014/main" id="{664E6C89-6D34-4A73-BD14-DBDF695EE3D7}"/>
               </a:ext>
             </a:extLst>
           </p:cNvPr>
@@ -20845,7 +22184,7 @@
           <p:cNvPr id="13" name="">
             <a:extLst xmlns:a="http://schemas.openxmlformats.org/drawingml/2006/main">
               <a:ext uri="{FF2B5EF4-FFF2-40B4-BE49-F238E27FC236}">
-                <a16:creationId xmlns:a16="http://schemas.microsoft.com/office/drawing/2014/main" id="{4AFF32E3-A200-4CDD-A538-F8F5F2B02AE1}"/>
+                <a16:creationId xmlns:a16="http://schemas.microsoft.com/office/drawing/2014/main" id="{2FFDFE5E-7755-4906-89C3-2496C81E28B4}"/>
               </a:ext>
             </a:extLst>
           </p:cNvPr>
@@ -20895,7 +22234,7 @@
           <p:cNvPr id="14" name="">
             <a:extLst xmlns:a="http://schemas.openxmlformats.org/drawingml/2006/main">
               <a:ext uri="{FF2B5EF4-FFF2-40B4-BE49-F238E27FC236}">
-                <a16:creationId xmlns:a16="http://schemas.microsoft.com/office/drawing/2014/main" id="{59263E31-8DEC-434F-8F98-E54342332A79}"/>
+                <a16:creationId xmlns:a16="http://schemas.microsoft.com/office/drawing/2014/main" id="{399C816D-6FC9-4DFD-89B6-94DC5D0E4AC2}"/>
               </a:ext>
             </a:extLst>
           </p:cNvPr>
@@ -20945,7 +22284,7 @@
           <p:cNvPr id="15" name="">
             <a:extLst xmlns:a="http://schemas.openxmlformats.org/drawingml/2006/main">
               <a:ext uri="{FF2B5EF4-FFF2-40B4-BE49-F238E27FC236}">
-                <a16:creationId xmlns:a16="http://schemas.microsoft.com/office/drawing/2014/main" id="{DCBDDF68-DD41-4C5D-B3EB-7FD258D9AA8D}"/>
+                <a16:creationId xmlns:a16="http://schemas.microsoft.com/office/drawing/2014/main" id="{9A4D6D1D-8AA2-47F4-90A7-8C93133822DC}"/>
               </a:ext>
             </a:extLst>
           </p:cNvPr>
@@ -20995,7 +22334,7 @@
           <p:cNvPr id="16" name="">
             <a:extLst xmlns:a="http://schemas.openxmlformats.org/drawingml/2006/main">
               <a:ext uri="{FF2B5EF4-FFF2-40B4-BE49-F238E27FC236}">
-                <a16:creationId xmlns:a16="http://schemas.microsoft.com/office/drawing/2014/main" id="{EED1515C-A076-45F9-A733-DFE54AE386BE}"/>
+                <a16:creationId xmlns:a16="http://schemas.microsoft.com/office/drawing/2014/main" id="{64C593A6-EA0F-4D94-9423-ECFD559C8BFC}"/>
               </a:ext>
             </a:extLst>
           </p:cNvPr>
@@ -21045,7 +22384,7 @@
           <p:cNvPr id="17" name="">
             <a:extLst xmlns:a="http://schemas.openxmlformats.org/drawingml/2006/main">
               <a:ext uri="{FF2B5EF4-FFF2-40B4-BE49-F238E27FC236}">
-                <a16:creationId xmlns:a16="http://schemas.microsoft.com/office/drawing/2014/main" id="{74A3DCC1-59F1-44E4-A892-19134CE406A8}"/>
+                <a16:creationId xmlns:a16="http://schemas.microsoft.com/office/drawing/2014/main" id="{73644616-E2AA-4611-BB58-BC0D1CBACADF}"/>
               </a:ext>
             </a:extLst>
           </p:cNvPr>
@@ -21095,7 +22434,7 @@
           <p:cNvPr id="18" name="">
             <a:extLst xmlns:a="http://schemas.openxmlformats.org/drawingml/2006/main">
               <a:ext uri="{FF2B5EF4-FFF2-40B4-BE49-F238E27FC236}">
-                <a16:creationId xmlns:a16="http://schemas.microsoft.com/office/drawing/2014/main" id="{A4DB1C4A-5F69-400E-B18B-8B74B12A1EBE}"/>
+                <a16:creationId xmlns:a16="http://schemas.microsoft.com/office/drawing/2014/main" id="{271BFDDE-31CC-4055-BDF7-31F1BD271C4D}"/>
               </a:ext>
             </a:extLst>
           </p:cNvPr>
@@ -21145,7 +22484,7 @@
           <p:cNvPr id="19" name="">
             <a:extLst xmlns:a="http://schemas.openxmlformats.org/drawingml/2006/main">
               <a:ext uri="{FF2B5EF4-FFF2-40B4-BE49-F238E27FC236}">
-                <a16:creationId xmlns:a16="http://schemas.microsoft.com/office/drawing/2014/main" id="{D72D6387-78AF-4B8B-AED2-175A7FC2715E}"/>
+                <a16:creationId xmlns:a16="http://schemas.microsoft.com/office/drawing/2014/main" id="{70C0E713-4A07-4CF3-9066-729C70E7025E}"/>
               </a:ext>
             </a:extLst>
           </p:cNvPr>
@@ -21195,7 +22534,7 @@
           <p:cNvPr id="20" name="">
             <a:extLst xmlns:a="http://schemas.openxmlformats.org/drawingml/2006/main">
               <a:ext uri="{FF2B5EF4-FFF2-40B4-BE49-F238E27FC236}">
-                <a16:creationId xmlns:a16="http://schemas.microsoft.com/office/drawing/2014/main" id="{488DD910-EC2D-44E7-B3DC-A193FA4912E7}"/>
+                <a16:creationId xmlns:a16="http://schemas.microsoft.com/office/drawing/2014/main" id="{FE8C2D67-129F-47F8-818A-0C5B38A08D44}"/>
               </a:ext>
             </a:extLst>
           </p:cNvPr>
@@ -21245,7 +22584,7 @@
           <p:cNvPr id="21" name="">
             <a:extLst xmlns:a="http://schemas.openxmlformats.org/drawingml/2006/main">
               <a:ext uri="{FF2B5EF4-FFF2-40B4-BE49-F238E27FC236}">
-                <a16:creationId xmlns:a16="http://schemas.microsoft.com/office/drawing/2014/main" id="{B87C567B-1AB5-41D4-AC5B-E9AB1585DBD1}"/>
+                <a16:creationId xmlns:a16="http://schemas.microsoft.com/office/drawing/2014/main" id="{21C7AB76-DA03-47B5-8629-2BC0ECB20883}"/>
               </a:ext>
             </a:extLst>
           </p:cNvPr>
@@ -21295,7 +22634,7 @@
           <p:cNvPr id="22" name="">
             <a:extLst xmlns:a="http://schemas.openxmlformats.org/drawingml/2006/main">
               <a:ext uri="{FF2B5EF4-FFF2-40B4-BE49-F238E27FC236}">
-                <a16:creationId xmlns:a16="http://schemas.microsoft.com/office/drawing/2014/main" id="{FFDA15EB-2E29-4FF8-8959-032CB131EE54}"/>
+                <a16:creationId xmlns:a16="http://schemas.microsoft.com/office/drawing/2014/main" id="{FD96F9CA-9421-4570-89A3-6D1976CB6F2C}"/>
               </a:ext>
             </a:extLst>
           </p:cNvPr>
@@ -21330,7 +22669,7 @@
           <p:cNvPr id="23" name="">
             <a:extLst xmlns:a="http://schemas.openxmlformats.org/drawingml/2006/main">
               <a:ext uri="{FF2B5EF4-FFF2-40B4-BE49-F238E27FC236}">
-                <a16:creationId xmlns:a16="http://schemas.microsoft.com/office/drawing/2014/main" id="{10CB7DD1-C0B9-498A-BA29-29B64E3E15A5}"/>
+                <a16:creationId xmlns:a16="http://schemas.microsoft.com/office/drawing/2014/main" id="{DD1BE053-3407-4134-9DB8-D273B6959AA0}"/>
               </a:ext>
             </a:extLst>
           </p:cNvPr>
@@ -21380,7 +22719,7 @@
           <p:cNvPr id="24" name="">
             <a:extLst xmlns:a="http://schemas.openxmlformats.org/drawingml/2006/main">
               <a:ext uri="{FF2B5EF4-FFF2-40B4-BE49-F238E27FC236}">
-                <a16:creationId xmlns:a16="http://schemas.microsoft.com/office/drawing/2014/main" id="{1B1173DA-14A1-4C9D-A90A-251A719F4EE0}"/>
+                <a16:creationId xmlns:a16="http://schemas.microsoft.com/office/drawing/2014/main" id="{1EC24C8A-A2DB-4992-BDB5-0A0FA24916CF}"/>
               </a:ext>
             </a:extLst>
           </p:cNvPr>
@@ -21430,7 +22769,7 @@
           <p:cNvPr id="25" name="">
             <a:extLst xmlns:a="http://schemas.openxmlformats.org/drawingml/2006/main">
               <a:ext uri="{FF2B5EF4-FFF2-40B4-BE49-F238E27FC236}">
-                <a16:creationId xmlns:a16="http://schemas.microsoft.com/office/drawing/2014/main" id="{DF0874AA-CF27-4B08-A23E-D9047651EDE7}"/>
+                <a16:creationId xmlns:a16="http://schemas.microsoft.com/office/drawing/2014/main" id="{05349849-5318-4408-91FE-2816165A77A4}"/>
               </a:ext>
             </a:extLst>
           </p:cNvPr>
@@ -21480,7 +22819,7 @@
           <p:cNvPr id="26" name="">
             <a:extLst xmlns:a="http://schemas.openxmlformats.org/drawingml/2006/main">
               <a:ext uri="{FF2B5EF4-FFF2-40B4-BE49-F238E27FC236}">
-                <a16:creationId xmlns:a16="http://schemas.microsoft.com/office/drawing/2014/main" id="{0D6B1A88-CCC6-40B5-BC02-ECC94F8F6987}"/>
+                <a16:creationId xmlns:a16="http://schemas.microsoft.com/office/drawing/2014/main" id="{BA2F588F-1B2E-4182-B45B-BD339F1C1524}"/>
               </a:ext>
             </a:extLst>
           </p:cNvPr>
@@ -21515,7 +22854,7 @@
           <p:cNvPr id="27" name="">
             <a:extLst xmlns:a="http://schemas.openxmlformats.org/drawingml/2006/main">
               <a:ext uri="{FF2B5EF4-FFF2-40B4-BE49-F238E27FC236}">
-                <a16:creationId xmlns:a16="http://schemas.microsoft.com/office/drawing/2014/main" id="{A717778A-945B-46EF-9F0A-433187EF4F5D}"/>
+                <a16:creationId xmlns:a16="http://schemas.microsoft.com/office/drawing/2014/main" id="{4B6FC9AB-14E2-435E-B814-15BDF65FFE17}"/>
               </a:ext>
             </a:extLst>
           </p:cNvPr>
@@ -21565,7 +22904,7 @@
           <p:cNvPr id="28" name="">
             <a:extLst xmlns:a="http://schemas.openxmlformats.org/drawingml/2006/main">
               <a:ext uri="{FF2B5EF4-FFF2-40B4-BE49-F238E27FC236}">
-                <a16:creationId xmlns:a16="http://schemas.microsoft.com/office/drawing/2014/main" id="{A2FFDB49-B1BB-44F6-8EE2-F079CCC8194D}"/>
+                <a16:creationId xmlns:a16="http://schemas.microsoft.com/office/drawing/2014/main" id="{26ADC0D6-C5F2-4A1B-8EF6-86C908A53FFD}"/>
               </a:ext>
             </a:extLst>
           </p:cNvPr>
@@ -21615,7 +22954,7 @@
           <p:cNvPr id="29" name="">
             <a:extLst xmlns:a="http://schemas.openxmlformats.org/drawingml/2006/main">
               <a:ext uri="{FF2B5EF4-FFF2-40B4-BE49-F238E27FC236}">
-                <a16:creationId xmlns:a16="http://schemas.microsoft.com/office/drawing/2014/main" id="{41102D10-89AD-43F0-AF57-25C4D1E2C4CD}"/>
+                <a16:creationId xmlns:a16="http://schemas.microsoft.com/office/drawing/2014/main" id="{9DECAF76-D273-40EB-803F-676C8A86BED9}"/>
               </a:ext>
             </a:extLst>
           </p:cNvPr>
@@ -21665,7 +23004,7 @@
           <p:cNvPr id="30" name="">
             <a:extLst xmlns:a="http://schemas.openxmlformats.org/drawingml/2006/main">
               <a:ext uri="{FF2B5EF4-FFF2-40B4-BE49-F238E27FC236}">
-                <a16:creationId xmlns:a16="http://schemas.microsoft.com/office/drawing/2014/main" id="{A6906C7F-E754-4919-8E72-6E7207514589}"/>
+                <a16:creationId xmlns:a16="http://schemas.microsoft.com/office/drawing/2014/main" id="{C63993A1-3253-4C8E-AEAD-948BE1EC3FDB}"/>
               </a:ext>
             </a:extLst>
           </p:cNvPr>
@@ -21700,7 +23039,7 @@
           <p:cNvPr id="31" name="">
             <a:extLst xmlns:a="http://schemas.openxmlformats.org/drawingml/2006/main">
               <a:ext uri="{FF2B5EF4-FFF2-40B4-BE49-F238E27FC236}">
-                <a16:creationId xmlns:a16="http://schemas.microsoft.com/office/drawing/2014/main" id="{DC6C33BE-7C41-45C6-9276-73CAD4F4E59B}"/>
+                <a16:creationId xmlns:a16="http://schemas.microsoft.com/office/drawing/2014/main" id="{181FB6B7-0739-4BD3-9A84-D493BF6747FF}"/>
               </a:ext>
             </a:extLst>
           </p:cNvPr>
@@ -21750,7 +23089,7 @@
           <p:cNvPr id="32" name="">
             <a:extLst xmlns:a="http://schemas.openxmlformats.org/drawingml/2006/main">
               <a:ext uri="{FF2B5EF4-FFF2-40B4-BE49-F238E27FC236}">
-                <a16:creationId xmlns:a16="http://schemas.microsoft.com/office/drawing/2014/main" id="{6B494A08-74B2-4631-99FE-A11322FA0367}"/>
+                <a16:creationId xmlns:a16="http://schemas.microsoft.com/office/drawing/2014/main" id="{477BCC53-8355-41F5-8DAE-1A852854A743}"/>
               </a:ext>
             </a:extLst>
           </p:cNvPr>
@@ -21800,7 +23139,7 @@
           <p:cNvPr id="33" name="">
             <a:extLst xmlns:a="http://schemas.openxmlformats.org/drawingml/2006/main">
               <a:ext uri="{FF2B5EF4-FFF2-40B4-BE49-F238E27FC236}">
-                <a16:creationId xmlns:a16="http://schemas.microsoft.com/office/drawing/2014/main" id="{A4623F91-8A1C-40F5-922A-EE5166A538F7}"/>
+                <a16:creationId xmlns:a16="http://schemas.microsoft.com/office/drawing/2014/main" id="{BE5FA0AF-D003-4376-B706-43D74A828416}"/>
               </a:ext>
             </a:extLst>
           </p:cNvPr>
@@ -21850,7 +23189,7 @@
           <p:cNvPr id="34" name="">
             <a:extLst xmlns:a="http://schemas.openxmlformats.org/drawingml/2006/main">
               <a:ext uri="{FF2B5EF4-FFF2-40B4-BE49-F238E27FC236}">
-                <a16:creationId xmlns:a16="http://schemas.microsoft.com/office/drawing/2014/main" id="{F9A86016-FA01-4F7D-B417-AD34F15BB2D4}"/>
+                <a16:creationId xmlns:a16="http://schemas.microsoft.com/office/drawing/2014/main" id="{5B8F3F91-5F0D-412D-ABFA-83EE3198DD78}"/>
               </a:ext>
             </a:extLst>
           </p:cNvPr>
@@ -21885,7 +23224,7 @@
           <p:cNvPr id="35" name="">
             <a:extLst xmlns:a="http://schemas.openxmlformats.org/drawingml/2006/main">
               <a:ext uri="{FF2B5EF4-FFF2-40B4-BE49-F238E27FC236}">
-                <a16:creationId xmlns:a16="http://schemas.microsoft.com/office/drawing/2014/main" id="{DEE73CA8-3C53-4EE5-A3F1-972A16F079C9}"/>
+                <a16:creationId xmlns:a16="http://schemas.microsoft.com/office/drawing/2014/main" id="{D87EF4A3-1036-4914-8FAC-324F02E13A1D}"/>
               </a:ext>
             </a:extLst>
           </p:cNvPr>
@@ -21935,7 +23274,7 @@
           <p:cNvPr id="36" name="">
             <a:extLst xmlns:a="http://schemas.openxmlformats.org/drawingml/2006/main">
               <a:ext uri="{FF2B5EF4-FFF2-40B4-BE49-F238E27FC236}">
-                <a16:creationId xmlns:a16="http://schemas.microsoft.com/office/drawing/2014/main" id="{78468022-C7C6-49FD-8994-F306020335E0}"/>
+                <a16:creationId xmlns:a16="http://schemas.microsoft.com/office/drawing/2014/main" id="{2C76D3A6-16EF-4A86-A1E2-19A66675F129}"/>
               </a:ext>
             </a:extLst>
           </p:cNvPr>
@@ -21985,7 +23324,7 @@
           <p:cNvPr id="37" name="">
             <a:extLst xmlns:a="http://schemas.openxmlformats.org/drawingml/2006/main">
               <a:ext uri="{FF2B5EF4-FFF2-40B4-BE49-F238E27FC236}">
-                <a16:creationId xmlns:a16="http://schemas.microsoft.com/office/drawing/2014/main" id="{DED58CFD-9AB5-4631-9A35-831ABDC6FBE3}"/>
+                <a16:creationId xmlns:a16="http://schemas.microsoft.com/office/drawing/2014/main" id="{457C46DC-00B3-479C-908E-F1B62AEDDFA9}"/>
               </a:ext>
             </a:extLst>
           </p:cNvPr>
@@ -22035,7 +23374,7 @@
           <p:cNvPr id="38" name="">
             <a:extLst xmlns:a="http://schemas.openxmlformats.org/drawingml/2006/main">
               <a:ext uri="{FF2B5EF4-FFF2-40B4-BE49-F238E27FC236}">
-                <a16:creationId xmlns:a16="http://schemas.microsoft.com/office/drawing/2014/main" id="{CD189CCB-B00C-4E89-B704-38B63CD92DBB}"/>
+                <a16:creationId xmlns:a16="http://schemas.microsoft.com/office/drawing/2014/main" id="{E529170A-D23E-40E2-9E07-B09A863E1582}"/>
               </a:ext>
             </a:extLst>
           </p:cNvPr>
@@ -22085,7 +23424,7 @@
           <p:cNvPr id="39" name="">
             <a:extLst xmlns:a="http://schemas.openxmlformats.org/drawingml/2006/main">
               <a:ext uri="{FF2B5EF4-FFF2-40B4-BE49-F238E27FC236}">
-                <a16:creationId xmlns:a16="http://schemas.microsoft.com/office/drawing/2014/main" id="{27A7C2E4-45AD-46B0-A697-46EE5F2AF723}"/>
+                <a16:creationId xmlns:a16="http://schemas.microsoft.com/office/drawing/2014/main" id="{C3DBDF5C-0EE0-43D9-8B31-7E211559AA14}"/>
               </a:ext>
             </a:extLst>
           </p:cNvPr>
@@ -22126,7 +23465,7 @@
           <p:cNvPr id="40" name="">
             <a:extLst xmlns:a="http://schemas.openxmlformats.org/drawingml/2006/main">
               <a:ext uri="{FF2B5EF4-FFF2-40B4-BE49-F238E27FC236}">
-                <a16:creationId xmlns:a16="http://schemas.microsoft.com/office/drawing/2014/main" id="{9CCC854F-ED1C-4143-8108-5BA6AB034672}"/>
+                <a16:creationId xmlns:a16="http://schemas.microsoft.com/office/drawing/2014/main" id="{6A7EDBA0-DF7C-44E7-95B6-42DFBF248C43}"/>
               </a:ext>
             </a:extLst>
           </p:cNvPr>
@@ -22176,7 +23515,7 @@
           <p:cNvPr id="41" name="">
             <a:extLst xmlns:a="http://schemas.openxmlformats.org/drawingml/2006/main">
               <a:ext uri="{FF2B5EF4-FFF2-40B4-BE49-F238E27FC236}">
-                <a16:creationId xmlns:a16="http://schemas.microsoft.com/office/drawing/2014/main" id="{6E3F1533-3654-47F4-84B9-ACDFBC9C40CB}"/>
+                <a16:creationId xmlns:a16="http://schemas.microsoft.com/office/drawing/2014/main" id="{83E69D4B-E83C-48BE-B462-5E59DDFA1A0A}"/>
               </a:ext>
             </a:extLst>
           </p:cNvPr>
@@ -22226,7 +23565,7 @@
           <p:cNvPr id="42" name="">
             <a:extLst xmlns:a="http://schemas.openxmlformats.org/drawingml/2006/main">
               <a:ext uri="{FF2B5EF4-FFF2-40B4-BE49-F238E27FC236}">
-                <a16:creationId xmlns:a16="http://schemas.microsoft.com/office/drawing/2014/main" id="{07255359-827A-4066-897C-A09E74A5D81A}"/>
+                <a16:creationId xmlns:a16="http://schemas.microsoft.com/office/drawing/2014/main" id="{DB0B1E46-918D-4CFD-AB9B-E4A9989193CA}"/>
               </a:ext>
             </a:extLst>
           </p:cNvPr>
@@ -22276,7 +23615,7 @@
           <p:cNvPr id="43" name="">
             <a:extLst xmlns:a="http://schemas.openxmlformats.org/drawingml/2006/main">
               <a:ext uri="{FF2B5EF4-FFF2-40B4-BE49-F238E27FC236}">
-                <a16:creationId xmlns:a16="http://schemas.microsoft.com/office/drawing/2014/main" id="{FE88AE22-DA42-4CF2-AEFA-59F4209F9B26}"/>
+                <a16:creationId xmlns:a16="http://schemas.microsoft.com/office/drawing/2014/main" id="{F97E5C44-FBEA-49EF-B7C0-953518B8336C}"/>
               </a:ext>
             </a:extLst>
           </p:cNvPr>
@@ -22326,7 +23665,7 @@
           <p:cNvPr id="44" name="">
             <a:extLst xmlns:a="http://schemas.openxmlformats.org/drawingml/2006/main">
               <a:ext uri="{FF2B5EF4-FFF2-40B4-BE49-F238E27FC236}">
-                <a16:creationId xmlns:a16="http://schemas.microsoft.com/office/drawing/2014/main" id="{C7C12DEF-85CA-437F-8D59-58E76F9513EA}"/>
+                <a16:creationId xmlns:a16="http://schemas.microsoft.com/office/drawing/2014/main" id="{0D2EE264-3CC0-4EE9-B920-26D122220839}"/>
               </a:ext>
             </a:extLst>
           </p:cNvPr>
@@ -22376,7 +23715,7 @@
           <p:cNvPr id="45" name="">
             <a:extLst xmlns:a="http://schemas.openxmlformats.org/drawingml/2006/main">
               <a:ext uri="{FF2B5EF4-FFF2-40B4-BE49-F238E27FC236}">
-                <a16:creationId xmlns:a16="http://schemas.microsoft.com/office/drawing/2014/main" id="{65F970B6-4E34-4836-938D-CB8EDCCF2156}"/>
+                <a16:creationId xmlns:a16="http://schemas.microsoft.com/office/drawing/2014/main" id="{88D0C46F-3FA5-439C-BBD6-D24333772EB4}"/>
               </a:ext>
             </a:extLst>
           </p:cNvPr>
@@ -22426,7 +23765,7 @@
           <p:cNvPr id="46" name="">
             <a:extLst xmlns:a="http://schemas.openxmlformats.org/drawingml/2006/main">
               <a:ext uri="{FF2B5EF4-FFF2-40B4-BE49-F238E27FC236}">
-                <a16:creationId xmlns:a16="http://schemas.microsoft.com/office/drawing/2014/main" id="{83AF1D88-40C1-4C9D-A539-A277BD84C3FE}"/>
+                <a16:creationId xmlns:a16="http://schemas.microsoft.com/office/drawing/2014/main" id="{2B9A1AE2-7E33-4D3A-989E-45008E10541A}"/>
               </a:ext>
             </a:extLst>
           </p:cNvPr>
@@ -22476,7 +23815,7 @@
           <p:cNvPr id="47" name="">
             <a:extLst xmlns:a="http://schemas.openxmlformats.org/drawingml/2006/main">
               <a:ext uri="{FF2B5EF4-FFF2-40B4-BE49-F238E27FC236}">
-                <a16:creationId xmlns:a16="http://schemas.microsoft.com/office/drawing/2014/main" id="{1F53F3FD-2F94-486F-B45E-C706118865A5}"/>
+                <a16:creationId xmlns:a16="http://schemas.microsoft.com/office/drawing/2014/main" id="{80AF8EA7-875B-48E9-BC94-385BF44FE17C}"/>
               </a:ext>
             </a:extLst>
           </p:cNvPr>
@@ -22526,7 +23865,7 @@
           <p:cNvPr id="48" name="">
             <a:extLst xmlns:a="http://schemas.openxmlformats.org/drawingml/2006/main">
               <a:ext uri="{FF2B5EF4-FFF2-40B4-BE49-F238E27FC236}">
-                <a16:creationId xmlns:a16="http://schemas.microsoft.com/office/drawing/2014/main" id="{A584EEDF-2F91-4588-A461-5AC6E6737D7F}"/>
+                <a16:creationId xmlns:a16="http://schemas.microsoft.com/office/drawing/2014/main" id="{551FEFB1-D167-44F5-A791-1278BF3672D1}"/>
               </a:ext>
             </a:extLst>
           </p:cNvPr>
@@ -22576,7 +23915,7 @@
           <p:cNvPr id="49" name="">
             <a:extLst xmlns:a="http://schemas.openxmlformats.org/drawingml/2006/main">
               <a:ext uri="{FF2B5EF4-FFF2-40B4-BE49-F238E27FC236}">
-                <a16:creationId xmlns:a16="http://schemas.microsoft.com/office/drawing/2014/main" id="{0EB377D2-AA58-4C37-992D-AFE07B76836B}"/>
+                <a16:creationId xmlns:a16="http://schemas.microsoft.com/office/drawing/2014/main" id="{74C797E1-9A42-49B6-9ACD-8B56E640562B}"/>
               </a:ext>
             </a:extLst>
           </p:cNvPr>
@@ -22626,7 +23965,7 @@
           <p:cNvPr id="50" name="">
             <a:extLst xmlns:a="http://schemas.openxmlformats.org/drawingml/2006/main">
               <a:ext uri="{FF2B5EF4-FFF2-40B4-BE49-F238E27FC236}">
-                <a16:creationId xmlns:a16="http://schemas.microsoft.com/office/drawing/2014/main" id="{8906E458-F3F9-4F9E-8539-AE30A6713BF8}"/>
+                <a16:creationId xmlns:a16="http://schemas.microsoft.com/office/drawing/2014/main" id="{F29E018C-735D-4305-95EB-880EAAFFB00E}"/>
               </a:ext>
             </a:extLst>
           </p:cNvPr>
@@ -22657,7 +23996,7 @@
           <p:cNvPr id="51" name="source-9">
             <a:extLst xmlns:a="http://schemas.openxmlformats.org/drawingml/2006/main">
               <a:ext uri="{FF2B5EF4-FFF2-40B4-BE49-F238E27FC236}">
-                <a16:creationId xmlns:a16="http://schemas.microsoft.com/office/drawing/2014/main" id="{F4C66309-DFC7-4EF1-8B18-29CDBCD0162F}"/>
+                <a16:creationId xmlns:a16="http://schemas.microsoft.com/office/drawing/2014/main" id="{4B14FF23-1659-4DD1-89C7-E4A44CB3F878}"/>
               </a:ext>
             </a:extLst>
           </p:cNvPr>
@@ -22707,7 +24046,7 @@
           <p:cNvPr id="52" name="page-9">
             <a:extLst xmlns:a="http://schemas.openxmlformats.org/drawingml/2006/main">
               <a:ext uri="{FF2B5EF4-FFF2-40B4-BE49-F238E27FC236}">
-                <a16:creationId xmlns:a16="http://schemas.microsoft.com/office/drawing/2014/main" id="{F227F65A-D267-4D51-B15C-AF362E651555}"/>
+                <a16:creationId xmlns:a16="http://schemas.microsoft.com/office/drawing/2014/main" id="{04E68293-96CF-413D-9471-B6F06AD5A850}"/>
               </a:ext>
             </a:extLst>
           </p:cNvPr>
@@ -22755,7 +24094,7 @@
     </p:spTree>
     <p:extLst>
       <p:ext uri="{BB962C8B-B14F-4D97-AF65-F5344CB8AC3E}">
-        <p14:creationId xmlns:p14="http://schemas.microsoft.com/office/powerpoint/2010/main" val="250185180"/>
+        <p14:creationId xmlns:p14="http://schemas.microsoft.com/office/powerpoint/2010/main" val="99722256"/>
       </p:ext>
     </p:extLst>
   </p:cSld>

--- a/presentation/Huntrix_Final_Presentation.pptx
+++ b/presentation/Huntrix_Final_Presentation.pptx
@@ -2,27 +2,27 @@
 <file path=ppt/presentation.xml><?xml version="1.0" encoding="utf-8"?>
 <p:presentation xmlns:p="http://schemas.openxmlformats.org/presentationml/2006/main">
   <p:sldMasterIdLst>
-    <p:sldMasterId xmlns:r="http://schemas.openxmlformats.org/officeDocument/2006/relationships" id="2147483648" r:id="Ra2074f835e6e49d3"/>
+    <p:sldMasterId xmlns:r="http://schemas.openxmlformats.org/officeDocument/2006/relationships" id="2147483648" r:id="Rd2a48ed8a2c6463a"/>
   </p:sldMasterIdLst>
   <p:notesMasterIdLst>
-    <p:notesMasterId xmlns:r="http://schemas.openxmlformats.org/officeDocument/2006/relationships" r:id="Re9dee522748445ca"/>
+    <p:notesMasterId xmlns:r="http://schemas.openxmlformats.org/officeDocument/2006/relationships" r:id="R2fc945781a2c4092"/>
   </p:notesMasterIdLst>
   <p:sldIdLst>
-    <p:sldId xmlns:r="http://schemas.openxmlformats.org/officeDocument/2006/relationships" id="256" r:id="R48fdf22a5e53407c"/>
-    <p:sldId xmlns:r="http://schemas.openxmlformats.org/officeDocument/2006/relationships" id="257" r:id="R2298c36092834288"/>
-    <p:sldId xmlns:r="http://schemas.openxmlformats.org/officeDocument/2006/relationships" id="258" r:id="R35e45843a6724e9e"/>
-    <p:sldId xmlns:r="http://schemas.openxmlformats.org/officeDocument/2006/relationships" id="259" r:id="R066230ac937e4520"/>
-    <p:sldId xmlns:r="http://schemas.openxmlformats.org/officeDocument/2006/relationships" id="260" r:id="R9face599c8704143"/>
-    <p:sldId xmlns:r="http://schemas.openxmlformats.org/officeDocument/2006/relationships" id="261" r:id="R41067e09c75b4e9d"/>
-    <p:sldId xmlns:r="http://schemas.openxmlformats.org/officeDocument/2006/relationships" id="262" r:id="Rad721ac56b934c19"/>
-    <p:sldId xmlns:r="http://schemas.openxmlformats.org/officeDocument/2006/relationships" id="263" r:id="R6d025e94c4dd4ef8"/>
-    <p:sldId xmlns:r="http://schemas.openxmlformats.org/officeDocument/2006/relationships" id="264" r:id="R95c6d96a27094305"/>
-    <p:sldId xmlns:r="http://schemas.openxmlformats.org/officeDocument/2006/relationships" id="265" r:id="R351374c76ca944f0"/>
-    <p:sldId xmlns:r="http://schemas.openxmlformats.org/officeDocument/2006/relationships" id="266" r:id="R8f1c48d80d7146f0"/>
-    <p:sldId xmlns:r="http://schemas.openxmlformats.org/officeDocument/2006/relationships" id="267" r:id="R9bbdf36b608b4a82"/>
-    <p:sldId xmlns:r="http://schemas.openxmlformats.org/officeDocument/2006/relationships" id="268" r:id="Re31b7c7f64c74b32"/>
-    <p:sldId xmlns:r="http://schemas.openxmlformats.org/officeDocument/2006/relationships" id="269" r:id="Rcac2cf87b3524dd6"/>
-    <p:sldId xmlns:r="http://schemas.openxmlformats.org/officeDocument/2006/relationships" id="270" r:id="Rfb0317e0a97744db"/>
+    <p:sldId xmlns:r="http://schemas.openxmlformats.org/officeDocument/2006/relationships" id="256" r:id="Ra58b8b1998f543b3"/>
+    <p:sldId xmlns:r="http://schemas.openxmlformats.org/officeDocument/2006/relationships" id="257" r:id="R4f4a40980abe4715"/>
+    <p:sldId xmlns:r="http://schemas.openxmlformats.org/officeDocument/2006/relationships" id="258" r:id="Rffdb4b44933348ad"/>
+    <p:sldId xmlns:r="http://schemas.openxmlformats.org/officeDocument/2006/relationships" id="259" r:id="Rd3bc25cebc5b46aa"/>
+    <p:sldId xmlns:r="http://schemas.openxmlformats.org/officeDocument/2006/relationships" id="260" r:id="R6c30e85f4e3f491c"/>
+    <p:sldId xmlns:r="http://schemas.openxmlformats.org/officeDocument/2006/relationships" id="261" r:id="R6549cda9def54ac8"/>
+    <p:sldId xmlns:r="http://schemas.openxmlformats.org/officeDocument/2006/relationships" id="262" r:id="R5e8c8ebf92a748c7"/>
+    <p:sldId xmlns:r="http://schemas.openxmlformats.org/officeDocument/2006/relationships" id="263" r:id="R6fb01cb66d794111"/>
+    <p:sldId xmlns:r="http://schemas.openxmlformats.org/officeDocument/2006/relationships" id="264" r:id="Ree494e75d1504f32"/>
+    <p:sldId xmlns:r="http://schemas.openxmlformats.org/officeDocument/2006/relationships" id="265" r:id="Re5f67254b2cb448e"/>
+    <p:sldId xmlns:r="http://schemas.openxmlformats.org/officeDocument/2006/relationships" id="266" r:id="R400d569af7a04c78"/>
+    <p:sldId xmlns:r="http://schemas.openxmlformats.org/officeDocument/2006/relationships" id="267" r:id="R183856c41c1e4aff"/>
+    <p:sldId xmlns:r="http://schemas.openxmlformats.org/officeDocument/2006/relationships" id="268" r:id="Re05c45240bcb4f05"/>
+    <p:sldId xmlns:r="http://schemas.openxmlformats.org/officeDocument/2006/relationships" id="269" r:id="R972365ca22144ffc"/>
+    <p:sldId xmlns:r="http://schemas.openxmlformats.org/officeDocument/2006/relationships" id="270" r:id="Rb8125201ab7e4f83"/>
   </p:sldIdLst>
   <p:sldSz cx="12192000" cy="6858000"/>
   <p:notesSz cx="6858000" cy="9144000"/>
@@ -1846,7 +1846,7 @@
           </a:p>
           <a:p xmlns:a="http://schemas.openxmlformats.org/drawingml/2006/main">
             <a:r>
-              <a:t>[3] BenHalluEval context-faithfulness tasks. [7] Frozen v91 clause segmentation, anchor alignment, and claim decision policy.</a:t>
+              <a:t>This is the expanded presentation view of Figure 2a in the report. [3] BenHalluEval context-faithfulness tasks. [7] Frozen v91 clause segmentation, anchor alignment, and claim decision policy.</a:t>
             </a:r>
           </a:p>
         </p:txBody>
@@ -2056,7 +2056,7 @@
           </a:p>
           <a:p xmlns:a="http://schemas.openxmlformats.org/drawingml/2006/main">
             <a:r>
-              <a:t>[7] Frozen v91 evidence schema, provenance ledger, conflict audit, and row-level trace format.</a:t>
+              <a:t>This is the expanded presentation view of Figure 2b in the report. [7] Frozen v91 evidence schema, provenance ledger, conflict audit, and row-level trace format.</a:t>
             </a:r>
           </a:p>
         </p:txBody>
@@ -2124,7 +2124,7 @@
   </p:cSld>
   <p:clrMap bg1="lt1" tx1="dk1" bg2="lt2" tx2="dk2" accent1="accent1" accent2="accent2" accent3="accent3" accent4="accent4" accent5="accent5" accent6="accent6" hlink="hlink" folHlink="folHlink"/>
   <p:sldLayoutIdLst>
-    <p:sldLayoutId xmlns:r="http://schemas.openxmlformats.org/officeDocument/2006/relationships" id="2147483649" r:id="R9b51d89fc7784281"/>
+    <p:sldLayoutId xmlns:r="http://schemas.openxmlformats.org/officeDocument/2006/relationships" id="2147483649" r:id="R2a5defec6cf04828"/>
   </p:sldLayoutIdLst>
   <p:txStyles>
     <p:titleStyle>
@@ -2886,7 +2886,7 @@
           <p:cNvPr id="14" name="">
             <a:extLst xmlns:a="http://schemas.openxmlformats.org/drawingml/2006/main">
               <a:ext uri="{FF2B5EF4-FFF2-40B4-BE49-F238E27FC236}">
-                <a16:creationId xmlns:a16="http://schemas.microsoft.com/office/drawing/2014/main" id="{8C40AA49-77BD-4C09-A56D-0D1DB5CEF4D0}"/>
+                <a16:creationId xmlns:a16="http://schemas.microsoft.com/office/drawing/2014/main" id="{B12FAAA4-A02E-4321-9D51-90952CAA3C16}"/>
               </a:ext>
             </a:extLst>
           </p:cNvPr>
@@ -2919,7 +2919,7 @@
           <p:cNvPr id="2" name="">
             <a:extLst xmlns:a="http://schemas.openxmlformats.org/drawingml/2006/main">
               <a:ext uri="{FF2B5EF4-FFF2-40B4-BE49-F238E27FC236}">
-                <a16:creationId xmlns:a16="http://schemas.microsoft.com/office/drawing/2014/main" id="{70EB99D8-4F09-40D7-B09C-10C91384532C}"/>
+                <a16:creationId xmlns:a16="http://schemas.microsoft.com/office/drawing/2014/main" id="{DEC90AC5-DDBA-4E54-B215-014291277444}"/>
               </a:ext>
             </a:extLst>
           </p:cNvPr>
@@ -2969,7 +2969,7 @@
           <p:cNvPr id="3" name="">
             <a:extLst xmlns:a="http://schemas.openxmlformats.org/drawingml/2006/main">
               <a:ext uri="{FF2B5EF4-FFF2-40B4-BE49-F238E27FC236}">
-                <a16:creationId xmlns:a16="http://schemas.microsoft.com/office/drawing/2014/main" id="{30E9DDE2-17E1-408A-887A-412E6A6B3DF9}"/>
+                <a16:creationId xmlns:a16="http://schemas.microsoft.com/office/drawing/2014/main" id="{BD016CCC-F61C-4AA1-B1A9-82CC60B34466}"/>
               </a:ext>
             </a:extLst>
           </p:cNvPr>
@@ -3036,7 +3036,7 @@
           <p:cNvPr id="4" name="">
             <a:extLst xmlns:a="http://schemas.openxmlformats.org/drawingml/2006/main">
               <a:ext uri="{FF2B5EF4-FFF2-40B4-BE49-F238E27FC236}">
-                <a16:creationId xmlns:a16="http://schemas.microsoft.com/office/drawing/2014/main" id="{6BE3BE6E-7DAA-458A-809B-A7333AA7D6B1}"/>
+                <a16:creationId xmlns:a16="http://schemas.microsoft.com/office/drawing/2014/main" id="{65D4D3A0-C517-4396-AD5F-74E7B22AE9AA}"/>
               </a:ext>
             </a:extLst>
           </p:cNvPr>
@@ -3086,7 +3086,7 @@
           <p:cNvPr id="5" name="">
             <a:extLst xmlns:a="http://schemas.openxmlformats.org/drawingml/2006/main">
               <a:ext uri="{FF2B5EF4-FFF2-40B4-BE49-F238E27FC236}">
-                <a16:creationId xmlns:a16="http://schemas.microsoft.com/office/drawing/2014/main" id="{41F7ACD0-EA70-4572-A6BC-B7269C529EE2}"/>
+                <a16:creationId xmlns:a16="http://schemas.microsoft.com/office/drawing/2014/main" id="{C8696CB4-6B88-4E4A-8ACD-D0A9F5A2514A}"/>
               </a:ext>
             </a:extLst>
           </p:cNvPr>
@@ -3117,7 +3117,7 @@
           <p:cNvPr id="6" name="">
             <a:extLst xmlns:a="http://schemas.openxmlformats.org/drawingml/2006/main">
               <a:ext uri="{FF2B5EF4-FFF2-40B4-BE49-F238E27FC236}">
-                <a16:creationId xmlns:a16="http://schemas.microsoft.com/office/drawing/2014/main" id="{E972804D-2DA2-4B6D-868B-63517B158F3C}"/>
+                <a16:creationId xmlns:a16="http://schemas.microsoft.com/office/drawing/2014/main" id="{91E866E3-EAF2-4705-972B-276838D2A8A5}"/>
               </a:ext>
             </a:extLst>
           </p:cNvPr>
@@ -3158,7 +3158,7 @@
           <p:cNvPr id="7" name="">
             <a:extLst xmlns:a="http://schemas.openxmlformats.org/drawingml/2006/main">
               <a:ext uri="{FF2B5EF4-FFF2-40B4-BE49-F238E27FC236}">
-                <a16:creationId xmlns:a16="http://schemas.microsoft.com/office/drawing/2014/main" id="{BF58DDF3-6467-4E66-BE91-4460BBD3742E}"/>
+                <a16:creationId xmlns:a16="http://schemas.microsoft.com/office/drawing/2014/main" id="{3A8A1C89-C245-4F4C-BAC7-B77D81354A5B}"/>
               </a:ext>
             </a:extLst>
           </p:cNvPr>
@@ -3208,7 +3208,7 @@
           <p:cNvPr id="8" name="">
             <a:extLst xmlns:a="http://schemas.openxmlformats.org/drawingml/2006/main">
               <a:ext uri="{FF2B5EF4-FFF2-40B4-BE49-F238E27FC236}">
-                <a16:creationId xmlns:a16="http://schemas.microsoft.com/office/drawing/2014/main" id="{22C0C530-0169-4A7D-8CF2-57BB5B936770}"/>
+                <a16:creationId xmlns:a16="http://schemas.microsoft.com/office/drawing/2014/main" id="{DCC29B0B-4D74-41B2-9B65-C96DC3C5877E}"/>
               </a:ext>
             </a:extLst>
           </p:cNvPr>
@@ -3258,7 +3258,7 @@
           <p:cNvPr id="9" name="">
             <a:extLst xmlns:a="http://schemas.openxmlformats.org/drawingml/2006/main">
               <a:ext uri="{FF2B5EF4-FFF2-40B4-BE49-F238E27FC236}">
-                <a16:creationId xmlns:a16="http://schemas.microsoft.com/office/drawing/2014/main" id="{F5459A7A-2A50-4F3F-9C3D-646AC5268515}"/>
+                <a16:creationId xmlns:a16="http://schemas.microsoft.com/office/drawing/2014/main" id="{F974FA57-C35C-47FF-8A74-DF700E7DE6C3}"/>
               </a:ext>
             </a:extLst>
           </p:cNvPr>
@@ -3308,7 +3308,7 @@
           <p:cNvPr id="10" name="">
             <a:extLst xmlns:a="http://schemas.openxmlformats.org/drawingml/2006/main">
               <a:ext uri="{FF2B5EF4-FFF2-40B4-BE49-F238E27FC236}">
-                <a16:creationId xmlns:a16="http://schemas.microsoft.com/office/drawing/2014/main" id="{0CB6B8E7-C3AC-4C02-928F-68282823926D}"/>
+                <a16:creationId xmlns:a16="http://schemas.microsoft.com/office/drawing/2014/main" id="{661F7B0A-A084-40CC-A965-2E9A315C4457}"/>
               </a:ext>
             </a:extLst>
           </p:cNvPr>
@@ -3358,7 +3358,7 @@
           <p:cNvPr id="11" name="">
             <a:extLst xmlns:a="http://schemas.openxmlformats.org/drawingml/2006/main">
               <a:ext uri="{FF2B5EF4-FFF2-40B4-BE49-F238E27FC236}">
-                <a16:creationId xmlns:a16="http://schemas.microsoft.com/office/drawing/2014/main" id="{942D8F79-E257-403F-9DCE-733075C13E45}"/>
+                <a16:creationId xmlns:a16="http://schemas.microsoft.com/office/drawing/2014/main" id="{D0E83386-EC1D-46C3-8B77-41D0E4D4759D}"/>
               </a:ext>
             </a:extLst>
           </p:cNvPr>
@@ -3408,7 +3408,7 @@
           <p:cNvPr id="12" name="">
             <a:extLst xmlns:a="http://schemas.openxmlformats.org/drawingml/2006/main">
               <a:ext uri="{FF2B5EF4-FFF2-40B4-BE49-F238E27FC236}">
-                <a16:creationId xmlns:a16="http://schemas.microsoft.com/office/drawing/2014/main" id="{C75C0311-4A34-47D7-92E0-BDFFCB8C3EFE}"/>
+                <a16:creationId xmlns:a16="http://schemas.microsoft.com/office/drawing/2014/main" id="{A38E483B-7E5C-446E-AD7C-D20F521E340A}"/>
               </a:ext>
             </a:extLst>
           </p:cNvPr>
@@ -3458,7 +3458,7 @@
           <p:cNvPr id="13" name="">
             <a:extLst xmlns:a="http://schemas.openxmlformats.org/drawingml/2006/main">
               <a:ext uri="{FF2B5EF4-FFF2-40B4-BE49-F238E27FC236}">
-                <a16:creationId xmlns:a16="http://schemas.microsoft.com/office/drawing/2014/main" id="{B1A477DB-CBA1-4896-87E1-5A69DCE9DE0F}"/>
+                <a16:creationId xmlns:a16="http://schemas.microsoft.com/office/drawing/2014/main" id="{90538314-7C8F-4219-A965-3111BB36A6C4}"/>
               </a:ext>
             </a:extLst>
           </p:cNvPr>
@@ -3506,7 +3506,7 @@
     </p:spTree>
     <p:extLst>
       <p:ext uri="{BB962C8B-B14F-4D97-AF65-F5344CB8AC3E}">
-        <p14:creationId xmlns:p14="http://schemas.microsoft.com/office/powerpoint/2010/main" val="1050747199"/>
+        <p14:creationId xmlns:p14="http://schemas.microsoft.com/office/powerpoint/2010/main" val="1115966672"/>
       </p:ext>
     </p:extLst>
   </p:cSld>
@@ -3537,7 +3537,7 @@
           <p:cNvPr id="20" name="kicker-10">
             <a:extLst xmlns:a="http://schemas.openxmlformats.org/drawingml/2006/main">
               <a:ext uri="{FF2B5EF4-FFF2-40B4-BE49-F238E27FC236}">
-                <a16:creationId xmlns:a16="http://schemas.microsoft.com/office/drawing/2014/main" id="{2266C73C-66AE-4275-A834-A3C460772811}"/>
+                <a16:creationId xmlns:a16="http://schemas.microsoft.com/office/drawing/2014/main" id="{2CA3F696-72FD-4BAC-8FAD-F637F5947AFD}"/>
               </a:ext>
             </a:extLst>
           </p:cNvPr>
@@ -3587,7 +3587,7 @@
           <p:cNvPr id="2" name="title-10">
             <a:extLst xmlns:a="http://schemas.openxmlformats.org/drawingml/2006/main">
               <a:ext uri="{FF2B5EF4-FFF2-40B4-BE49-F238E27FC236}">
-                <a16:creationId xmlns:a16="http://schemas.microsoft.com/office/drawing/2014/main" id="{EFAFC5E8-E1F3-4BB7-8A09-33D99C92CC75}"/>
+                <a16:creationId xmlns:a16="http://schemas.microsoft.com/office/drawing/2014/main" id="{DEAB9FF2-4F4A-4C8D-8D36-0DE2F837A86F}"/>
               </a:ext>
             </a:extLst>
           </p:cNvPr>
@@ -3637,7 +3637,7 @@
           <p:cNvPr id="3" name="">
             <a:extLst xmlns:a="http://schemas.openxmlformats.org/drawingml/2006/main">
               <a:ext uri="{FF2B5EF4-FFF2-40B4-BE49-F238E27FC236}">
-                <a16:creationId xmlns:a16="http://schemas.microsoft.com/office/drawing/2014/main" id="{21AF8242-5A24-4A71-9176-D56FB42FDC19}"/>
+                <a16:creationId xmlns:a16="http://schemas.microsoft.com/office/drawing/2014/main" id="{3ECEEDC4-19C1-4DD4-A20C-FD6128565382}"/>
               </a:ext>
             </a:extLst>
           </p:cNvPr>
@@ -3668,7 +3668,7 @@
           <p:cNvPr id="4" name="">
             <a:extLst xmlns:a="http://schemas.openxmlformats.org/drawingml/2006/main">
               <a:ext uri="{FF2B5EF4-FFF2-40B4-BE49-F238E27FC236}">
-                <a16:creationId xmlns:a16="http://schemas.microsoft.com/office/drawing/2014/main" id="{EABE6FD2-6752-47C6-97D0-6B2B8101D427}"/>
+                <a16:creationId xmlns:a16="http://schemas.microsoft.com/office/drawing/2014/main" id="{B86DC8D7-8B74-4C4A-B19E-06970DE2D148}"/>
               </a:ext>
             </a:extLst>
           </p:cNvPr>
@@ -3680,7 +3680,7 @@
         <p:spPr>
           <a:xfrm xmlns:a="http://schemas.openxmlformats.org/drawingml/2006/main">
             <a:off x="685800" y="1381125"/>
-            <a:ext cx="9715500" cy="419100"/>
+            <a:ext cx="8858250" cy="381000"/>
           </a:xfrm>
           <a:prstGeom xmlns:a="http://schemas.openxmlformats.org/drawingml/2006/main" prst="rect">
             <a:avLst/>
@@ -3708,7 +3708,7 @@
                   <a:srgbClr val="526174"/>
                 </a:solidFill>
               </a:rPr>
-              <a:t>The important points were architectural pivots, regressions, and reversions—not a monotonic climb.</a:t>
+              <a:t>Pivots, regressions, and reversions mattered more than a monotonic climb.</a:t>
             </a:r>
           </a:p>
         </p:txBody>
@@ -3725,7 +3725,7 @@
         </p:xfrm>
         <a:graphic xmlns:a="http://schemas.openxmlformats.org/drawingml/2006/main">
           <a:graphicData uri="http://schemas.openxmlformats.org/drawingml/2006/chart">
-            <c:chart xmlns:r="http://schemas.openxmlformats.org/officeDocument/2006/relationships" xmlns:c="http://schemas.openxmlformats.org/drawingml/2006/chart" r:id="R4c2db883d9414cda"/>
+            <c:chart xmlns:r="http://schemas.openxmlformats.org/officeDocument/2006/relationships" xmlns:c="http://schemas.openxmlformats.org/drawingml/2006/chart" r:id="R9987da4d35dc4173"/>
           </a:graphicData>
         </a:graphic>
       </p:graphicFrame>
@@ -3734,7 +3734,7 @@
           <p:cNvPr id="6" name="">
             <a:extLst xmlns:a="http://schemas.openxmlformats.org/drawingml/2006/main">
               <a:ext uri="{FF2B5EF4-FFF2-40B4-BE49-F238E27FC236}">
-                <a16:creationId xmlns:a16="http://schemas.microsoft.com/office/drawing/2014/main" id="{B480E4B5-4E45-4644-B95F-CACD73AB9073}"/>
+                <a16:creationId xmlns:a16="http://schemas.microsoft.com/office/drawing/2014/main" id="{046BD20E-4042-435F-AA3A-3376DCB3B104}"/>
               </a:ext>
             </a:extLst>
           </p:cNvPr>
@@ -3769,7 +3769,7 @@
           <p:cNvPr id="7" name="">
             <a:extLst xmlns:a="http://schemas.openxmlformats.org/drawingml/2006/main">
               <a:ext uri="{FF2B5EF4-FFF2-40B4-BE49-F238E27FC236}">
-                <a16:creationId xmlns:a16="http://schemas.microsoft.com/office/drawing/2014/main" id="{BAE9C764-7789-48C3-976B-D8BA3C290E16}"/>
+                <a16:creationId xmlns:a16="http://schemas.microsoft.com/office/drawing/2014/main" id="{464B5EA6-FC81-4A3F-B6F1-910AB37902F7}"/>
               </a:ext>
             </a:extLst>
           </p:cNvPr>
@@ -3819,7 +3819,7 @@
           <p:cNvPr id="8" name="">
             <a:extLst xmlns:a="http://schemas.openxmlformats.org/drawingml/2006/main">
               <a:ext uri="{FF2B5EF4-FFF2-40B4-BE49-F238E27FC236}">
-                <a16:creationId xmlns:a16="http://schemas.microsoft.com/office/drawing/2014/main" id="{2DC4E9D8-42D7-43F1-BCED-2EEA810BAB9B}"/>
+                <a16:creationId xmlns:a16="http://schemas.microsoft.com/office/drawing/2014/main" id="{073A1651-547A-4606-A969-2ADD3FABDCB9}"/>
               </a:ext>
             </a:extLst>
           </p:cNvPr>
@@ -3869,7 +3869,7 @@
           <p:cNvPr id="9" name="">
             <a:extLst xmlns:a="http://schemas.openxmlformats.org/drawingml/2006/main">
               <a:ext uri="{FF2B5EF4-FFF2-40B4-BE49-F238E27FC236}">
-                <a16:creationId xmlns:a16="http://schemas.microsoft.com/office/drawing/2014/main" id="{1028609C-7FC1-475D-B0B6-BE2286EB8868}"/>
+                <a16:creationId xmlns:a16="http://schemas.microsoft.com/office/drawing/2014/main" id="{019648AB-2810-4B34-9685-F40738AE050A}"/>
               </a:ext>
             </a:extLst>
           </p:cNvPr>
@@ -3919,7 +3919,7 @@
           <p:cNvPr id="10" name="">
             <a:extLst xmlns:a="http://schemas.openxmlformats.org/drawingml/2006/main">
               <a:ext uri="{FF2B5EF4-FFF2-40B4-BE49-F238E27FC236}">
-                <a16:creationId xmlns:a16="http://schemas.microsoft.com/office/drawing/2014/main" id="{89ACD5D9-3B84-48A0-B7F6-E6FC2EBC57B0}"/>
+                <a16:creationId xmlns:a16="http://schemas.microsoft.com/office/drawing/2014/main" id="{561896D2-28AA-4175-A655-D1F28E81DE7D}"/>
               </a:ext>
             </a:extLst>
           </p:cNvPr>
@@ -3954,7 +3954,7 @@
           <p:cNvPr id="11" name="">
             <a:extLst xmlns:a="http://schemas.openxmlformats.org/drawingml/2006/main">
               <a:ext uri="{FF2B5EF4-FFF2-40B4-BE49-F238E27FC236}">
-                <a16:creationId xmlns:a16="http://schemas.microsoft.com/office/drawing/2014/main" id="{768C13E5-3B5F-43D0-9DA7-927FE279EC37}"/>
+                <a16:creationId xmlns:a16="http://schemas.microsoft.com/office/drawing/2014/main" id="{2C2FC7B6-1840-4DC0-8532-149FA4ECB2BD}"/>
               </a:ext>
             </a:extLst>
           </p:cNvPr>
@@ -4004,7 +4004,7 @@
           <p:cNvPr id="12" name="">
             <a:extLst xmlns:a="http://schemas.openxmlformats.org/drawingml/2006/main">
               <a:ext uri="{FF2B5EF4-FFF2-40B4-BE49-F238E27FC236}">
-                <a16:creationId xmlns:a16="http://schemas.microsoft.com/office/drawing/2014/main" id="{83CBA987-C71B-493E-AB61-156DDB59B7E0}"/>
+                <a16:creationId xmlns:a16="http://schemas.microsoft.com/office/drawing/2014/main" id="{966CB9F8-9EF7-44E6-B882-0972C646BED3}"/>
               </a:ext>
             </a:extLst>
           </p:cNvPr>
@@ -4054,7 +4054,7 @@
           <p:cNvPr id="13" name="">
             <a:extLst xmlns:a="http://schemas.openxmlformats.org/drawingml/2006/main">
               <a:ext uri="{FF2B5EF4-FFF2-40B4-BE49-F238E27FC236}">
-                <a16:creationId xmlns:a16="http://schemas.microsoft.com/office/drawing/2014/main" id="{31865EB5-65DD-4B39-867A-58C60B32706A}"/>
+                <a16:creationId xmlns:a16="http://schemas.microsoft.com/office/drawing/2014/main" id="{B3653432-B39A-4840-AA4C-D8C435B79444}"/>
               </a:ext>
             </a:extLst>
           </p:cNvPr>
@@ -4104,7 +4104,7 @@
           <p:cNvPr id="14" name="">
             <a:extLst xmlns:a="http://schemas.openxmlformats.org/drawingml/2006/main">
               <a:ext uri="{FF2B5EF4-FFF2-40B4-BE49-F238E27FC236}">
-                <a16:creationId xmlns:a16="http://schemas.microsoft.com/office/drawing/2014/main" id="{CD0975C6-F862-4169-B694-A745738FE944}"/>
+                <a16:creationId xmlns:a16="http://schemas.microsoft.com/office/drawing/2014/main" id="{6DDFA4E3-A441-40AC-A17D-F7AE628CA502}"/>
               </a:ext>
             </a:extLst>
           </p:cNvPr>
@@ -4154,7 +4154,7 @@
           <p:cNvPr id="15" name="">
             <a:extLst xmlns:a="http://schemas.openxmlformats.org/drawingml/2006/main">
               <a:ext uri="{FF2B5EF4-FFF2-40B4-BE49-F238E27FC236}">
-                <a16:creationId xmlns:a16="http://schemas.microsoft.com/office/drawing/2014/main" id="{81B3D0B8-8793-4755-BA00-EE233E11218C}"/>
+                <a16:creationId xmlns:a16="http://schemas.microsoft.com/office/drawing/2014/main" id="{0C10E8CE-9794-4E12-A9D6-F1E2F98E7D0B}"/>
               </a:ext>
             </a:extLst>
           </p:cNvPr>
@@ -4204,7 +4204,7 @@
           <p:cNvPr id="16" name="">
             <a:extLst xmlns:a="http://schemas.openxmlformats.org/drawingml/2006/main">
               <a:ext uri="{FF2B5EF4-FFF2-40B4-BE49-F238E27FC236}">
-                <a16:creationId xmlns:a16="http://schemas.microsoft.com/office/drawing/2014/main" id="{7231A80C-BBCD-4005-A812-AF47E067C770}"/>
+                <a16:creationId xmlns:a16="http://schemas.microsoft.com/office/drawing/2014/main" id="{861FF3B3-49B8-4C7B-A309-B6F697451AEC}"/>
               </a:ext>
             </a:extLst>
           </p:cNvPr>
@@ -4254,7 +4254,7 @@
           <p:cNvPr id="17" name="">
             <a:extLst xmlns:a="http://schemas.openxmlformats.org/drawingml/2006/main">
               <a:ext uri="{FF2B5EF4-FFF2-40B4-BE49-F238E27FC236}">
-                <a16:creationId xmlns:a16="http://schemas.microsoft.com/office/drawing/2014/main" id="{D50B81CD-D598-4603-A9E4-9E5753262F8B}"/>
+                <a16:creationId xmlns:a16="http://schemas.microsoft.com/office/drawing/2014/main" id="{15B43BA7-C2FB-4687-9147-2CF8F0C62A3C}"/>
               </a:ext>
             </a:extLst>
           </p:cNvPr>
@@ -4285,7 +4285,7 @@
           <p:cNvPr id="18" name="source-10">
             <a:extLst xmlns:a="http://schemas.openxmlformats.org/drawingml/2006/main">
               <a:ext uri="{FF2B5EF4-FFF2-40B4-BE49-F238E27FC236}">
-                <a16:creationId xmlns:a16="http://schemas.microsoft.com/office/drawing/2014/main" id="{981BBBC3-DF61-41D3-BAEF-A10E31F25434}"/>
+                <a16:creationId xmlns:a16="http://schemas.microsoft.com/office/drawing/2014/main" id="{9B5BF208-DAEC-4961-9D96-77F9D19B1868}"/>
               </a:ext>
             </a:extLst>
           </p:cNvPr>
@@ -4335,7 +4335,7 @@
           <p:cNvPr id="19" name="page-10">
             <a:extLst xmlns:a="http://schemas.openxmlformats.org/drawingml/2006/main">
               <a:ext uri="{FF2B5EF4-FFF2-40B4-BE49-F238E27FC236}">
-                <a16:creationId xmlns:a16="http://schemas.microsoft.com/office/drawing/2014/main" id="{883E75EB-4B30-406A-A431-00CF0866C6B9}"/>
+                <a16:creationId xmlns:a16="http://schemas.microsoft.com/office/drawing/2014/main" id="{FD62EF52-4423-4601-BE94-003728F65874}"/>
               </a:ext>
             </a:extLst>
           </p:cNvPr>
@@ -4383,7 +4383,7 @@
     </p:spTree>
     <p:extLst>
       <p:ext uri="{BB962C8B-B14F-4D97-AF65-F5344CB8AC3E}">
-        <p14:creationId xmlns:p14="http://schemas.microsoft.com/office/powerpoint/2010/main" val="1268578479"/>
+        <p14:creationId xmlns:p14="http://schemas.microsoft.com/office/powerpoint/2010/main" val="1213699094"/>
       </p:ext>
     </p:extLst>
   </p:cSld>
@@ -4414,7 +4414,7 @@
           <p:cNvPr id="29" name="kicker-11">
             <a:extLst xmlns:a="http://schemas.openxmlformats.org/drawingml/2006/main">
               <a:ext uri="{FF2B5EF4-FFF2-40B4-BE49-F238E27FC236}">
-                <a16:creationId xmlns:a16="http://schemas.microsoft.com/office/drawing/2014/main" id="{625AE8CB-0C94-4609-8390-4C97A41C01AC}"/>
+                <a16:creationId xmlns:a16="http://schemas.microsoft.com/office/drawing/2014/main" id="{F3DBFDA9-BA7F-4D04-898E-3826BBB705E5}"/>
               </a:ext>
             </a:extLst>
           </p:cNvPr>
@@ -4464,7 +4464,7 @@
           <p:cNvPr id="2" name="title-11">
             <a:extLst xmlns:a="http://schemas.openxmlformats.org/drawingml/2006/main">
               <a:ext uri="{FF2B5EF4-FFF2-40B4-BE49-F238E27FC236}">
-                <a16:creationId xmlns:a16="http://schemas.microsoft.com/office/drawing/2014/main" id="{594B65A9-6760-4C3B-931D-5F496FAA8EDE}"/>
+                <a16:creationId xmlns:a16="http://schemas.microsoft.com/office/drawing/2014/main" id="{F470E77B-A5D5-484D-A575-9AACD1181DB8}"/>
               </a:ext>
             </a:extLst>
           </p:cNvPr>
@@ -4514,7 +4514,7 @@
           <p:cNvPr id="3" name="">
             <a:extLst xmlns:a="http://schemas.openxmlformats.org/drawingml/2006/main">
               <a:ext uri="{FF2B5EF4-FFF2-40B4-BE49-F238E27FC236}">
-                <a16:creationId xmlns:a16="http://schemas.microsoft.com/office/drawing/2014/main" id="{AD0C3652-9D01-40EA-BECA-B2BECD8D36F7}"/>
+                <a16:creationId xmlns:a16="http://schemas.microsoft.com/office/drawing/2014/main" id="{97FFCB1D-63A8-4CD5-8B59-453EA5CE3A84}"/>
               </a:ext>
             </a:extLst>
           </p:cNvPr>
@@ -4545,7 +4545,7 @@
           <p:cNvPr id="4" name="">
             <a:extLst xmlns:a="http://schemas.openxmlformats.org/drawingml/2006/main">
               <a:ext uri="{FF2B5EF4-FFF2-40B4-BE49-F238E27FC236}">
-                <a16:creationId xmlns:a16="http://schemas.microsoft.com/office/drawing/2014/main" id="{8FFE28C2-5AD6-432C-9A77-4A47E48F60D6}"/>
+                <a16:creationId xmlns:a16="http://schemas.microsoft.com/office/drawing/2014/main" id="{35F503D0-3137-41EF-B3CC-3BBE7ACB20D0}"/>
               </a:ext>
             </a:extLst>
           </p:cNvPr>
@@ -4595,7 +4595,7 @@
           <p:cNvPr id="5" name="">
             <a:extLst xmlns:a="http://schemas.openxmlformats.org/drawingml/2006/main">
               <a:ext uri="{FF2B5EF4-FFF2-40B4-BE49-F238E27FC236}">
-                <a16:creationId xmlns:a16="http://schemas.microsoft.com/office/drawing/2014/main" id="{95103302-A6A5-47D3-83D7-651C64E9DE6A}"/>
+                <a16:creationId xmlns:a16="http://schemas.microsoft.com/office/drawing/2014/main" id="{77E824C1-0A20-4229-9A1F-6B9464A87CE4}"/>
               </a:ext>
             </a:extLst>
           </p:cNvPr>
@@ -4645,7 +4645,7 @@
           <p:cNvPr id="6" name="">
             <a:extLst xmlns:a="http://schemas.openxmlformats.org/drawingml/2006/main">
               <a:ext uri="{FF2B5EF4-FFF2-40B4-BE49-F238E27FC236}">
-                <a16:creationId xmlns:a16="http://schemas.microsoft.com/office/drawing/2014/main" id="{57CF3F3E-D372-47FB-BC71-6926E9EAB000}"/>
+                <a16:creationId xmlns:a16="http://schemas.microsoft.com/office/drawing/2014/main" id="{B46F8802-D2A8-4A62-8909-A5DFC38F8160}"/>
               </a:ext>
             </a:extLst>
           </p:cNvPr>
@@ -4695,7 +4695,7 @@
           <p:cNvPr id="7" name="">
             <a:extLst xmlns:a="http://schemas.openxmlformats.org/drawingml/2006/main">
               <a:ext uri="{FF2B5EF4-FFF2-40B4-BE49-F238E27FC236}">
-                <a16:creationId xmlns:a16="http://schemas.microsoft.com/office/drawing/2014/main" id="{C9DB1B5B-C2B6-4DF6-95F8-54A08ACA949E}"/>
+                <a16:creationId xmlns:a16="http://schemas.microsoft.com/office/drawing/2014/main" id="{DA0E359B-EE1C-4181-8ACD-EEE5C9CD35CA}"/>
               </a:ext>
             </a:extLst>
           </p:cNvPr>
@@ -4745,7 +4745,7 @@
           <p:cNvPr id="8" name="">
             <a:extLst xmlns:a="http://schemas.openxmlformats.org/drawingml/2006/main">
               <a:ext uri="{FF2B5EF4-FFF2-40B4-BE49-F238E27FC236}">
-                <a16:creationId xmlns:a16="http://schemas.microsoft.com/office/drawing/2014/main" id="{9CD186C0-E526-4169-8499-16A0D34ED8BC}"/>
+                <a16:creationId xmlns:a16="http://schemas.microsoft.com/office/drawing/2014/main" id="{23473C24-2D3B-42B7-9AE5-6117D6B692FE}"/>
               </a:ext>
             </a:extLst>
           </p:cNvPr>
@@ -4776,7 +4776,7 @@
           <p:cNvPr id="9" name="">
             <a:extLst xmlns:a="http://schemas.openxmlformats.org/drawingml/2006/main">
               <a:ext uri="{FF2B5EF4-FFF2-40B4-BE49-F238E27FC236}">
-                <a16:creationId xmlns:a16="http://schemas.microsoft.com/office/drawing/2014/main" id="{B9AC08FD-2628-442A-88EE-BE33E83F5D60}"/>
+                <a16:creationId xmlns:a16="http://schemas.microsoft.com/office/drawing/2014/main" id="{E9812DC9-7936-4F8C-ABC5-29D35116D285}"/>
               </a:ext>
             </a:extLst>
           </p:cNvPr>
@@ -4826,7 +4826,7 @@
           <p:cNvPr id="10" name="">
             <a:extLst xmlns:a="http://schemas.openxmlformats.org/drawingml/2006/main">
               <a:ext uri="{FF2B5EF4-FFF2-40B4-BE49-F238E27FC236}">
-                <a16:creationId xmlns:a16="http://schemas.microsoft.com/office/drawing/2014/main" id="{C3FDFC95-5F7B-4606-8DE8-326F99805378}"/>
+                <a16:creationId xmlns:a16="http://schemas.microsoft.com/office/drawing/2014/main" id="{E73E9CDD-11AD-4AD7-8C81-0CC7B6BF3ACB}"/>
               </a:ext>
             </a:extLst>
           </p:cNvPr>
@@ -4876,7 +4876,7 @@
           <p:cNvPr id="11" name="">
             <a:extLst xmlns:a="http://schemas.openxmlformats.org/drawingml/2006/main">
               <a:ext uri="{FF2B5EF4-FFF2-40B4-BE49-F238E27FC236}">
-                <a16:creationId xmlns:a16="http://schemas.microsoft.com/office/drawing/2014/main" id="{C4C360FF-E04E-491E-B0C2-81312F6D1E4F}"/>
+                <a16:creationId xmlns:a16="http://schemas.microsoft.com/office/drawing/2014/main" id="{9FEFC2B3-20FB-4D3D-A707-8D05DA3835A7}"/>
               </a:ext>
             </a:extLst>
           </p:cNvPr>
@@ -4926,7 +4926,7 @@
           <p:cNvPr id="12" name="">
             <a:extLst xmlns:a="http://schemas.openxmlformats.org/drawingml/2006/main">
               <a:ext uri="{FF2B5EF4-FFF2-40B4-BE49-F238E27FC236}">
-                <a16:creationId xmlns:a16="http://schemas.microsoft.com/office/drawing/2014/main" id="{D01F79FD-61F1-4A31-95F8-7F2CC8778206}"/>
+                <a16:creationId xmlns:a16="http://schemas.microsoft.com/office/drawing/2014/main" id="{D54DFCDC-B420-4B3D-955E-7361D5E9D7D1}"/>
               </a:ext>
             </a:extLst>
           </p:cNvPr>
@@ -4957,7 +4957,7 @@
           <p:cNvPr id="13" name="">
             <a:extLst xmlns:a="http://schemas.openxmlformats.org/drawingml/2006/main">
               <a:ext uri="{FF2B5EF4-FFF2-40B4-BE49-F238E27FC236}">
-                <a16:creationId xmlns:a16="http://schemas.microsoft.com/office/drawing/2014/main" id="{BB038077-AE17-4549-8449-43624651231D}"/>
+                <a16:creationId xmlns:a16="http://schemas.microsoft.com/office/drawing/2014/main" id="{AE6E5141-BAC6-4D0D-A707-F9A59AB24B34}"/>
               </a:ext>
             </a:extLst>
           </p:cNvPr>
@@ -5007,7 +5007,7 @@
           <p:cNvPr id="14" name="">
             <a:extLst xmlns:a="http://schemas.openxmlformats.org/drawingml/2006/main">
               <a:ext uri="{FF2B5EF4-FFF2-40B4-BE49-F238E27FC236}">
-                <a16:creationId xmlns:a16="http://schemas.microsoft.com/office/drawing/2014/main" id="{91A13FE0-DF7D-4AE5-99F8-DCE53725FA0F}"/>
+                <a16:creationId xmlns:a16="http://schemas.microsoft.com/office/drawing/2014/main" id="{F413A6E9-A286-4226-A017-21F74968F7A2}"/>
               </a:ext>
             </a:extLst>
           </p:cNvPr>
@@ -5057,7 +5057,7 @@
           <p:cNvPr id="15" name="">
             <a:extLst xmlns:a="http://schemas.openxmlformats.org/drawingml/2006/main">
               <a:ext uri="{FF2B5EF4-FFF2-40B4-BE49-F238E27FC236}">
-                <a16:creationId xmlns:a16="http://schemas.microsoft.com/office/drawing/2014/main" id="{DDDC46DC-5BE5-4A52-A0AE-3E16D789EFF1}"/>
+                <a16:creationId xmlns:a16="http://schemas.microsoft.com/office/drawing/2014/main" id="{EEC688B5-A246-4357-A4CA-A06597FEC0D6}"/>
               </a:ext>
             </a:extLst>
           </p:cNvPr>
@@ -5107,7 +5107,7 @@
           <p:cNvPr id="16" name="">
             <a:extLst xmlns:a="http://schemas.openxmlformats.org/drawingml/2006/main">
               <a:ext uri="{FF2B5EF4-FFF2-40B4-BE49-F238E27FC236}">
-                <a16:creationId xmlns:a16="http://schemas.microsoft.com/office/drawing/2014/main" id="{A268A6E8-4E27-4A18-B412-E0F7A01349B3}"/>
+                <a16:creationId xmlns:a16="http://schemas.microsoft.com/office/drawing/2014/main" id="{94AF8249-7180-4559-8050-84F9B3E3BAAB}"/>
               </a:ext>
             </a:extLst>
           </p:cNvPr>
@@ -5138,7 +5138,7 @@
           <p:cNvPr id="17" name="">
             <a:extLst xmlns:a="http://schemas.openxmlformats.org/drawingml/2006/main">
               <a:ext uri="{FF2B5EF4-FFF2-40B4-BE49-F238E27FC236}">
-                <a16:creationId xmlns:a16="http://schemas.microsoft.com/office/drawing/2014/main" id="{B94478DD-E93E-4572-9359-7E27F1D51497}"/>
+                <a16:creationId xmlns:a16="http://schemas.microsoft.com/office/drawing/2014/main" id="{290E46DA-E04F-4675-B504-44C10289BC05}"/>
               </a:ext>
             </a:extLst>
           </p:cNvPr>
@@ -5188,7 +5188,7 @@
           <p:cNvPr id="18" name="">
             <a:extLst xmlns:a="http://schemas.openxmlformats.org/drawingml/2006/main">
               <a:ext uri="{FF2B5EF4-FFF2-40B4-BE49-F238E27FC236}">
-                <a16:creationId xmlns:a16="http://schemas.microsoft.com/office/drawing/2014/main" id="{5F8453F5-CA98-446A-AC75-63B3D91D1F7B}"/>
+                <a16:creationId xmlns:a16="http://schemas.microsoft.com/office/drawing/2014/main" id="{1479F48A-89E0-44F0-88EA-BD77B7513DD6}"/>
               </a:ext>
             </a:extLst>
           </p:cNvPr>
@@ -5238,7 +5238,7 @@
           <p:cNvPr id="19" name="">
             <a:extLst xmlns:a="http://schemas.openxmlformats.org/drawingml/2006/main">
               <a:ext uri="{FF2B5EF4-FFF2-40B4-BE49-F238E27FC236}">
-                <a16:creationId xmlns:a16="http://schemas.microsoft.com/office/drawing/2014/main" id="{405614A3-3842-4A46-B240-4A677279101D}"/>
+                <a16:creationId xmlns:a16="http://schemas.microsoft.com/office/drawing/2014/main" id="{400EA1C2-539F-400C-AD8F-4A8EDA80F814}"/>
               </a:ext>
             </a:extLst>
           </p:cNvPr>
@@ -5288,7 +5288,7 @@
           <p:cNvPr id="20" name="">
             <a:extLst xmlns:a="http://schemas.openxmlformats.org/drawingml/2006/main">
               <a:ext uri="{FF2B5EF4-FFF2-40B4-BE49-F238E27FC236}">
-                <a16:creationId xmlns:a16="http://schemas.microsoft.com/office/drawing/2014/main" id="{D30D0CCC-DA79-4DD9-93A6-A46E84A5D5CC}"/>
+                <a16:creationId xmlns:a16="http://schemas.microsoft.com/office/drawing/2014/main" id="{65FD9291-C64C-4A98-9723-52DAC70FF1B6}"/>
               </a:ext>
             </a:extLst>
           </p:cNvPr>
@@ -5319,7 +5319,7 @@
           <p:cNvPr id="21" name="">
             <a:extLst xmlns:a="http://schemas.openxmlformats.org/drawingml/2006/main">
               <a:ext uri="{FF2B5EF4-FFF2-40B4-BE49-F238E27FC236}">
-                <a16:creationId xmlns:a16="http://schemas.microsoft.com/office/drawing/2014/main" id="{530E50BF-E199-4BE6-809C-E8CA59971879}"/>
+                <a16:creationId xmlns:a16="http://schemas.microsoft.com/office/drawing/2014/main" id="{CC682344-7258-4D8C-90E5-0A6ADE46521A}"/>
               </a:ext>
             </a:extLst>
           </p:cNvPr>
@@ -5369,7 +5369,7 @@
           <p:cNvPr id="22" name="">
             <a:extLst xmlns:a="http://schemas.openxmlformats.org/drawingml/2006/main">
               <a:ext uri="{FF2B5EF4-FFF2-40B4-BE49-F238E27FC236}">
-                <a16:creationId xmlns:a16="http://schemas.microsoft.com/office/drawing/2014/main" id="{8A5AD899-E95A-4A99-9248-DBDD7FA38740}"/>
+                <a16:creationId xmlns:a16="http://schemas.microsoft.com/office/drawing/2014/main" id="{19FCE310-D45E-426D-8108-0C7690CA2F97}"/>
               </a:ext>
             </a:extLst>
           </p:cNvPr>
@@ -5419,7 +5419,7 @@
           <p:cNvPr id="23" name="">
             <a:extLst xmlns:a="http://schemas.openxmlformats.org/drawingml/2006/main">
               <a:ext uri="{FF2B5EF4-FFF2-40B4-BE49-F238E27FC236}">
-                <a16:creationId xmlns:a16="http://schemas.microsoft.com/office/drawing/2014/main" id="{FA04B6E4-C897-4256-92AA-4E485C0547D5}"/>
+                <a16:creationId xmlns:a16="http://schemas.microsoft.com/office/drawing/2014/main" id="{2F7ECC2E-92FF-45D4-9DC5-069604F32255}"/>
               </a:ext>
             </a:extLst>
           </p:cNvPr>
@@ -5469,7 +5469,7 @@
           <p:cNvPr id="24" name="">
             <a:extLst xmlns:a="http://schemas.openxmlformats.org/drawingml/2006/main">
               <a:ext uri="{FF2B5EF4-FFF2-40B4-BE49-F238E27FC236}">
-                <a16:creationId xmlns:a16="http://schemas.microsoft.com/office/drawing/2014/main" id="{C0CE661D-1A5E-4F22-A281-FACBE7ECEB8B}"/>
+                <a16:creationId xmlns:a16="http://schemas.microsoft.com/office/drawing/2014/main" id="{DC828BC4-8155-4821-8B0A-80DD2FABA1EC}"/>
               </a:ext>
             </a:extLst>
           </p:cNvPr>
@@ -5500,7 +5500,7 @@
           <p:cNvPr id="25" name="">
             <a:extLst xmlns:a="http://schemas.openxmlformats.org/drawingml/2006/main">
               <a:ext uri="{FF2B5EF4-FFF2-40B4-BE49-F238E27FC236}">
-                <a16:creationId xmlns:a16="http://schemas.microsoft.com/office/drawing/2014/main" id="{B51FAC8C-954C-401F-91A1-E2B70172E4A5}"/>
+                <a16:creationId xmlns:a16="http://schemas.microsoft.com/office/drawing/2014/main" id="{6EC760CA-B5F7-4DC8-9A5A-FCB5AAC473F7}"/>
               </a:ext>
             </a:extLst>
           </p:cNvPr>
@@ -5550,7 +5550,7 @@
           <p:cNvPr id="26" name="">
             <a:extLst xmlns:a="http://schemas.openxmlformats.org/drawingml/2006/main">
               <a:ext uri="{FF2B5EF4-FFF2-40B4-BE49-F238E27FC236}">
-                <a16:creationId xmlns:a16="http://schemas.microsoft.com/office/drawing/2014/main" id="{B8921EB6-F693-4CD5-B111-C21C8048AAE0}"/>
+                <a16:creationId xmlns:a16="http://schemas.microsoft.com/office/drawing/2014/main" id="{7238477F-2F66-4E4B-958D-C39DAF464ADB}"/>
               </a:ext>
             </a:extLst>
           </p:cNvPr>
@@ -5581,7 +5581,7 @@
           <p:cNvPr id="27" name="source-11">
             <a:extLst xmlns:a="http://schemas.openxmlformats.org/drawingml/2006/main">
               <a:ext uri="{FF2B5EF4-FFF2-40B4-BE49-F238E27FC236}">
-                <a16:creationId xmlns:a16="http://schemas.microsoft.com/office/drawing/2014/main" id="{07BC1876-CB43-4267-B07C-07A08A532B9F}"/>
+                <a16:creationId xmlns:a16="http://schemas.microsoft.com/office/drawing/2014/main" id="{39066BF5-584F-4948-9803-17F52E2E10BC}"/>
               </a:ext>
             </a:extLst>
           </p:cNvPr>
@@ -5631,7 +5631,7 @@
           <p:cNvPr id="28" name="page-11">
             <a:extLst xmlns:a="http://schemas.openxmlformats.org/drawingml/2006/main">
               <a:ext uri="{FF2B5EF4-FFF2-40B4-BE49-F238E27FC236}">
-                <a16:creationId xmlns:a16="http://schemas.microsoft.com/office/drawing/2014/main" id="{59AEB281-26AB-4D1C-8E6C-96EE9FA96B4A}"/>
+                <a16:creationId xmlns:a16="http://schemas.microsoft.com/office/drawing/2014/main" id="{8609A73E-D053-40E8-A88F-F9BC8DF2A171}"/>
               </a:ext>
             </a:extLst>
           </p:cNvPr>
@@ -5679,7 +5679,7 @@
     </p:spTree>
     <p:extLst>
       <p:ext uri="{BB962C8B-B14F-4D97-AF65-F5344CB8AC3E}">
-        <p14:creationId xmlns:p14="http://schemas.microsoft.com/office/powerpoint/2010/main" val="547779737"/>
+        <p14:creationId xmlns:p14="http://schemas.microsoft.com/office/powerpoint/2010/main" val="572719868"/>
       </p:ext>
     </p:extLst>
   </p:cSld>
@@ -5710,7 +5710,7 @@
           <p:cNvPr id="26" name="kicker-12">
             <a:extLst xmlns:a="http://schemas.openxmlformats.org/drawingml/2006/main">
               <a:ext uri="{FF2B5EF4-FFF2-40B4-BE49-F238E27FC236}">
-                <a16:creationId xmlns:a16="http://schemas.microsoft.com/office/drawing/2014/main" id="{21124CDE-42E3-443F-84F1-A87B87685162}"/>
+                <a16:creationId xmlns:a16="http://schemas.microsoft.com/office/drawing/2014/main" id="{F4CED5DC-4B22-4C6A-B766-616C6992A8F8}"/>
               </a:ext>
             </a:extLst>
           </p:cNvPr>
@@ -5760,7 +5760,7 @@
           <p:cNvPr id="2" name="title-12">
             <a:extLst xmlns:a="http://schemas.openxmlformats.org/drawingml/2006/main">
               <a:ext uri="{FF2B5EF4-FFF2-40B4-BE49-F238E27FC236}">
-                <a16:creationId xmlns:a16="http://schemas.microsoft.com/office/drawing/2014/main" id="{9F7DC580-1AEC-4C20-9956-EDA6C02C46D0}"/>
+                <a16:creationId xmlns:a16="http://schemas.microsoft.com/office/drawing/2014/main" id="{4BD22BE0-D388-4520-A8C1-2C8C4C5BE8E1}"/>
               </a:ext>
             </a:extLst>
           </p:cNvPr>
@@ -5810,7 +5810,7 @@
           <p:cNvPr id="3" name="">
             <a:extLst xmlns:a="http://schemas.openxmlformats.org/drawingml/2006/main">
               <a:ext uri="{FF2B5EF4-FFF2-40B4-BE49-F238E27FC236}">
-                <a16:creationId xmlns:a16="http://schemas.microsoft.com/office/drawing/2014/main" id="{19FF1DFC-BFB1-48F3-9771-5BC9813543A2}"/>
+                <a16:creationId xmlns:a16="http://schemas.microsoft.com/office/drawing/2014/main" id="{D22F6FE7-EB63-45E0-B91D-153063084008}"/>
               </a:ext>
             </a:extLst>
           </p:cNvPr>
@@ -5841,7 +5841,7 @@
           <p:cNvPr id="4" name="">
             <a:extLst xmlns:a="http://schemas.openxmlformats.org/drawingml/2006/main">
               <a:ext uri="{FF2B5EF4-FFF2-40B4-BE49-F238E27FC236}">
-                <a16:creationId xmlns:a16="http://schemas.microsoft.com/office/drawing/2014/main" id="{8E11D8A1-A35F-48BD-8EAB-B0E8AA7512C2}"/>
+                <a16:creationId xmlns:a16="http://schemas.microsoft.com/office/drawing/2014/main" id="{464A1689-EE76-41C6-A480-F0E579FAD5A9}"/>
               </a:ext>
             </a:extLst>
           </p:cNvPr>
@@ -5891,7 +5891,7 @@
           <p:cNvPr id="5" name="">
             <a:extLst xmlns:a="http://schemas.openxmlformats.org/drawingml/2006/main">
               <a:ext uri="{FF2B5EF4-FFF2-40B4-BE49-F238E27FC236}">
-                <a16:creationId xmlns:a16="http://schemas.microsoft.com/office/drawing/2014/main" id="{A76A13DE-C348-4306-A67D-8209990DDB72}"/>
+                <a16:creationId xmlns:a16="http://schemas.microsoft.com/office/drawing/2014/main" id="{01D45AC8-5193-4ADC-AD1D-56FDBEA1F66C}"/>
               </a:ext>
             </a:extLst>
           </p:cNvPr>
@@ -5941,7 +5941,7 @@
           <p:cNvPr id="6" name="">
             <a:extLst xmlns:a="http://schemas.openxmlformats.org/drawingml/2006/main">
               <a:ext uri="{FF2B5EF4-FFF2-40B4-BE49-F238E27FC236}">
-                <a16:creationId xmlns:a16="http://schemas.microsoft.com/office/drawing/2014/main" id="{F7D8E3EF-B0E6-4EAD-8137-621766326B15}"/>
+                <a16:creationId xmlns:a16="http://schemas.microsoft.com/office/drawing/2014/main" id="{CF4DB6E1-1239-43B1-869E-A3C37C845A8C}"/>
               </a:ext>
             </a:extLst>
           </p:cNvPr>
@@ -5991,7 +5991,7 @@
           <p:cNvPr id="7" name="">
             <a:extLst xmlns:a="http://schemas.openxmlformats.org/drawingml/2006/main">
               <a:ext uri="{FF2B5EF4-FFF2-40B4-BE49-F238E27FC236}">
-                <a16:creationId xmlns:a16="http://schemas.microsoft.com/office/drawing/2014/main" id="{A96A4259-23C5-421A-B438-206AB3AAE0B4}"/>
+                <a16:creationId xmlns:a16="http://schemas.microsoft.com/office/drawing/2014/main" id="{28B09C0E-3A4E-4840-B23D-E9F21663DFCA}"/>
               </a:ext>
             </a:extLst>
           </p:cNvPr>
@@ -6041,7 +6041,7 @@
           <p:cNvPr id="8" name="">
             <a:extLst xmlns:a="http://schemas.openxmlformats.org/drawingml/2006/main">
               <a:ext uri="{FF2B5EF4-FFF2-40B4-BE49-F238E27FC236}">
-                <a16:creationId xmlns:a16="http://schemas.microsoft.com/office/drawing/2014/main" id="{42E32E9D-23BF-49B3-A331-596E80B2293F}"/>
+                <a16:creationId xmlns:a16="http://schemas.microsoft.com/office/drawing/2014/main" id="{CD46205B-79C5-469C-89CA-A534FE90451E}"/>
               </a:ext>
             </a:extLst>
           </p:cNvPr>
@@ -6091,7 +6091,7 @@
           <p:cNvPr id="9" name="">
             <a:extLst xmlns:a="http://schemas.openxmlformats.org/drawingml/2006/main">
               <a:ext uri="{FF2B5EF4-FFF2-40B4-BE49-F238E27FC236}">
-                <a16:creationId xmlns:a16="http://schemas.microsoft.com/office/drawing/2014/main" id="{C0680FB1-FFC9-4A81-9975-5AE1C994F61A}"/>
+                <a16:creationId xmlns:a16="http://schemas.microsoft.com/office/drawing/2014/main" id="{B75712BD-4DDB-4462-939B-39C70FBC37EA}"/>
               </a:ext>
             </a:extLst>
           </p:cNvPr>
@@ -6141,7 +6141,7 @@
           <p:cNvPr id="10" name="">
             <a:extLst xmlns:a="http://schemas.openxmlformats.org/drawingml/2006/main">
               <a:ext uri="{FF2B5EF4-FFF2-40B4-BE49-F238E27FC236}">
-                <a16:creationId xmlns:a16="http://schemas.microsoft.com/office/drawing/2014/main" id="{16B98617-6DE7-42B4-AB6B-A5BEE8AB84E2}"/>
+                <a16:creationId xmlns:a16="http://schemas.microsoft.com/office/drawing/2014/main" id="{133D087E-2352-4223-AE39-056E1E4E4A10}"/>
               </a:ext>
             </a:extLst>
           </p:cNvPr>
@@ -6191,7 +6191,7 @@
           <p:cNvPr id="11" name="">
             <a:extLst xmlns:a="http://schemas.openxmlformats.org/drawingml/2006/main">
               <a:ext uri="{FF2B5EF4-FFF2-40B4-BE49-F238E27FC236}">
-                <a16:creationId xmlns:a16="http://schemas.microsoft.com/office/drawing/2014/main" id="{776D1D8D-F9D4-4B8F-A3F8-ABD11D990D47}"/>
+                <a16:creationId xmlns:a16="http://schemas.microsoft.com/office/drawing/2014/main" id="{4E512426-D044-419D-A83B-E121F19A12B1}"/>
               </a:ext>
             </a:extLst>
           </p:cNvPr>
@@ -6241,7 +6241,7 @@
           <p:cNvPr id="12" name="">
             <a:extLst xmlns:a="http://schemas.openxmlformats.org/drawingml/2006/main">
               <a:ext uri="{FF2B5EF4-FFF2-40B4-BE49-F238E27FC236}">
-                <a16:creationId xmlns:a16="http://schemas.microsoft.com/office/drawing/2014/main" id="{36F44AD7-7121-45F0-AA7E-6D3612C22C2D}"/>
+                <a16:creationId xmlns:a16="http://schemas.microsoft.com/office/drawing/2014/main" id="{BCC6EEFD-195B-42C5-8DF4-F13F3007FB17}"/>
               </a:ext>
             </a:extLst>
           </p:cNvPr>
@@ -6291,7 +6291,7 @@
           <p:cNvPr id="13" name="">
             <a:extLst xmlns:a="http://schemas.openxmlformats.org/drawingml/2006/main">
               <a:ext uri="{FF2B5EF4-FFF2-40B4-BE49-F238E27FC236}">
-                <a16:creationId xmlns:a16="http://schemas.microsoft.com/office/drawing/2014/main" id="{C49AEAA0-C27B-4B5A-89C3-39911C7DA513}"/>
+                <a16:creationId xmlns:a16="http://schemas.microsoft.com/office/drawing/2014/main" id="{FA9FD03C-A20A-42AF-A326-F32664AAA65C}"/>
               </a:ext>
             </a:extLst>
           </p:cNvPr>
@@ -6322,7 +6322,7 @@
           <p:cNvPr id="14" name="">
             <a:extLst xmlns:a="http://schemas.openxmlformats.org/drawingml/2006/main">
               <a:ext uri="{FF2B5EF4-FFF2-40B4-BE49-F238E27FC236}">
-                <a16:creationId xmlns:a16="http://schemas.microsoft.com/office/drawing/2014/main" id="{87E7BEB6-B3FD-434D-A962-72ABA36D8505}"/>
+                <a16:creationId xmlns:a16="http://schemas.microsoft.com/office/drawing/2014/main" id="{CE754483-FD9B-4466-A378-85AD382B8839}"/>
               </a:ext>
             </a:extLst>
           </p:cNvPr>
@@ -6357,7 +6357,7 @@
           <p:cNvPr id="15" name="">
             <a:extLst xmlns:a="http://schemas.openxmlformats.org/drawingml/2006/main">
               <a:ext uri="{FF2B5EF4-FFF2-40B4-BE49-F238E27FC236}">
-                <a16:creationId xmlns:a16="http://schemas.microsoft.com/office/drawing/2014/main" id="{2B21598F-0596-4C30-804B-B915BD547051}"/>
+                <a16:creationId xmlns:a16="http://schemas.microsoft.com/office/drawing/2014/main" id="{70FC5675-DB41-4688-A657-C72512400053}"/>
               </a:ext>
             </a:extLst>
           </p:cNvPr>
@@ -6407,7 +6407,7 @@
           <p:cNvPr id="16" name="">
             <a:extLst xmlns:a="http://schemas.openxmlformats.org/drawingml/2006/main">
               <a:ext uri="{FF2B5EF4-FFF2-40B4-BE49-F238E27FC236}">
-                <a16:creationId xmlns:a16="http://schemas.microsoft.com/office/drawing/2014/main" id="{7B902A5B-E913-4200-ADD2-FE65343269F7}"/>
+                <a16:creationId xmlns:a16="http://schemas.microsoft.com/office/drawing/2014/main" id="{F08C9A20-2120-446F-B164-BDAA782A3FC5}"/>
               </a:ext>
             </a:extLst>
           </p:cNvPr>
@@ -6457,7 +6457,7 @@
           <p:cNvPr id="17" name="">
             <a:extLst xmlns:a="http://schemas.openxmlformats.org/drawingml/2006/main">
               <a:ext uri="{FF2B5EF4-FFF2-40B4-BE49-F238E27FC236}">
-                <a16:creationId xmlns:a16="http://schemas.microsoft.com/office/drawing/2014/main" id="{E1D33924-7B47-42E9-AD29-750269AA19A1}"/>
+                <a16:creationId xmlns:a16="http://schemas.microsoft.com/office/drawing/2014/main" id="{899CDE58-6DAF-49E7-AC83-9615542740F0}"/>
               </a:ext>
             </a:extLst>
           </p:cNvPr>
@@ -6507,7 +6507,7 @@
           <p:cNvPr id="18" name="">
             <a:extLst xmlns:a="http://schemas.openxmlformats.org/drawingml/2006/main">
               <a:ext uri="{FF2B5EF4-FFF2-40B4-BE49-F238E27FC236}">
-                <a16:creationId xmlns:a16="http://schemas.microsoft.com/office/drawing/2014/main" id="{36E16BE8-43A7-464C-8ADE-582E420B2FE9}"/>
+                <a16:creationId xmlns:a16="http://schemas.microsoft.com/office/drawing/2014/main" id="{A57BB2FC-AAA4-428E-B6E8-19756D1C52AE}"/>
               </a:ext>
             </a:extLst>
           </p:cNvPr>
@@ -6557,7 +6557,7 @@
           <p:cNvPr id="19" name="">
             <a:extLst xmlns:a="http://schemas.openxmlformats.org/drawingml/2006/main">
               <a:ext uri="{FF2B5EF4-FFF2-40B4-BE49-F238E27FC236}">
-                <a16:creationId xmlns:a16="http://schemas.microsoft.com/office/drawing/2014/main" id="{5295B11D-0C97-47AE-B41E-1B5810496A80}"/>
+                <a16:creationId xmlns:a16="http://schemas.microsoft.com/office/drawing/2014/main" id="{4E94D751-AD98-4B85-BA2D-DFDDB2E402CB}"/>
               </a:ext>
             </a:extLst>
           </p:cNvPr>
@@ -6607,7 +6607,7 @@
           <p:cNvPr id="20" name="">
             <a:extLst xmlns:a="http://schemas.openxmlformats.org/drawingml/2006/main">
               <a:ext uri="{FF2B5EF4-FFF2-40B4-BE49-F238E27FC236}">
-                <a16:creationId xmlns:a16="http://schemas.microsoft.com/office/drawing/2014/main" id="{A15D2101-8EE8-4624-B982-1A083E4EEE11}"/>
+                <a16:creationId xmlns:a16="http://schemas.microsoft.com/office/drawing/2014/main" id="{0BA9284A-165F-4851-B8B2-D96032CEBA36}"/>
               </a:ext>
             </a:extLst>
           </p:cNvPr>
@@ -6657,7 +6657,7 @@
           <p:cNvPr id="21" name="">
             <a:extLst xmlns:a="http://schemas.openxmlformats.org/drawingml/2006/main">
               <a:ext uri="{FF2B5EF4-FFF2-40B4-BE49-F238E27FC236}">
-                <a16:creationId xmlns:a16="http://schemas.microsoft.com/office/drawing/2014/main" id="{9883E36E-309F-4EC1-84ED-8639C5D6AFAE}"/>
+                <a16:creationId xmlns:a16="http://schemas.microsoft.com/office/drawing/2014/main" id="{519B8BB8-2E0A-4FD0-AF5D-75924AA4814C}"/>
               </a:ext>
             </a:extLst>
           </p:cNvPr>
@@ -6707,7 +6707,7 @@
           <p:cNvPr id="22" name="">
             <a:extLst xmlns:a="http://schemas.openxmlformats.org/drawingml/2006/main">
               <a:ext uri="{FF2B5EF4-FFF2-40B4-BE49-F238E27FC236}">
-                <a16:creationId xmlns:a16="http://schemas.microsoft.com/office/drawing/2014/main" id="{3A7AE3DD-2A88-45DF-A6A9-9B8AE1956887}"/>
+                <a16:creationId xmlns:a16="http://schemas.microsoft.com/office/drawing/2014/main" id="{4CA3DED2-77FA-4ACA-B08D-FC1B853F62F7}"/>
               </a:ext>
             </a:extLst>
           </p:cNvPr>
@@ -6757,7 +6757,7 @@
           <p:cNvPr id="23" name="">
             <a:extLst xmlns:a="http://schemas.openxmlformats.org/drawingml/2006/main">
               <a:ext uri="{FF2B5EF4-FFF2-40B4-BE49-F238E27FC236}">
-                <a16:creationId xmlns:a16="http://schemas.microsoft.com/office/drawing/2014/main" id="{C580FB3E-B77C-41EC-9F01-15883C1363AE}"/>
+                <a16:creationId xmlns:a16="http://schemas.microsoft.com/office/drawing/2014/main" id="{7AFE4188-3D3D-44BB-99A6-1397C57CCCDD}"/>
               </a:ext>
             </a:extLst>
           </p:cNvPr>
@@ -6788,7 +6788,7 @@
           <p:cNvPr id="24" name="source-12">
             <a:extLst xmlns:a="http://schemas.openxmlformats.org/drawingml/2006/main">
               <a:ext uri="{FF2B5EF4-FFF2-40B4-BE49-F238E27FC236}">
-                <a16:creationId xmlns:a16="http://schemas.microsoft.com/office/drawing/2014/main" id="{F4B1FD70-F49D-4DEA-B3FD-DAEB9AAD10F6}"/>
+                <a16:creationId xmlns:a16="http://schemas.microsoft.com/office/drawing/2014/main" id="{B8F62910-58CF-40A6-A4B7-FA65D0278A00}"/>
               </a:ext>
             </a:extLst>
           </p:cNvPr>
@@ -6838,7 +6838,7 @@
           <p:cNvPr id="25" name="page-12">
             <a:extLst xmlns:a="http://schemas.openxmlformats.org/drawingml/2006/main">
               <a:ext uri="{FF2B5EF4-FFF2-40B4-BE49-F238E27FC236}">
-                <a16:creationId xmlns:a16="http://schemas.microsoft.com/office/drawing/2014/main" id="{C3694267-DDCD-4F13-A65E-5CD99DC3C541}"/>
+                <a16:creationId xmlns:a16="http://schemas.microsoft.com/office/drawing/2014/main" id="{7EC30200-19A2-4891-BD17-137CBA043126}"/>
               </a:ext>
             </a:extLst>
           </p:cNvPr>
@@ -6886,7 +6886,7 @@
     </p:spTree>
     <p:extLst>
       <p:ext uri="{BB962C8B-B14F-4D97-AF65-F5344CB8AC3E}">
-        <p14:creationId xmlns:p14="http://schemas.microsoft.com/office/powerpoint/2010/main" val="354991230"/>
+        <p14:creationId xmlns:p14="http://schemas.microsoft.com/office/powerpoint/2010/main" val="1017265844"/>
       </p:ext>
     </p:extLst>
   </p:cSld>
@@ -6917,7 +6917,7 @@
           <p:cNvPr id="36" name="kicker-13">
             <a:extLst xmlns:a="http://schemas.openxmlformats.org/drawingml/2006/main">
               <a:ext uri="{FF2B5EF4-FFF2-40B4-BE49-F238E27FC236}">
-                <a16:creationId xmlns:a16="http://schemas.microsoft.com/office/drawing/2014/main" id="{08EA9D9F-EC07-4ED1-9C3C-B99F41F08C64}"/>
+                <a16:creationId xmlns:a16="http://schemas.microsoft.com/office/drawing/2014/main" id="{0C466CC3-4EF5-4797-95C8-39C14D76010D}"/>
               </a:ext>
             </a:extLst>
           </p:cNvPr>
@@ -6967,7 +6967,7 @@
           <p:cNvPr id="2" name="title-13">
             <a:extLst xmlns:a="http://schemas.openxmlformats.org/drawingml/2006/main">
               <a:ext uri="{FF2B5EF4-FFF2-40B4-BE49-F238E27FC236}">
-                <a16:creationId xmlns:a16="http://schemas.microsoft.com/office/drawing/2014/main" id="{5018F185-51D9-478E-99F1-B7A1656FB11C}"/>
+                <a16:creationId xmlns:a16="http://schemas.microsoft.com/office/drawing/2014/main" id="{887924BA-A17F-46D0-AFAC-0D932B4D4C16}"/>
               </a:ext>
             </a:extLst>
           </p:cNvPr>
@@ -7017,7 +7017,7 @@
           <p:cNvPr id="3" name="">
             <a:extLst xmlns:a="http://schemas.openxmlformats.org/drawingml/2006/main">
               <a:ext uri="{FF2B5EF4-FFF2-40B4-BE49-F238E27FC236}">
-                <a16:creationId xmlns:a16="http://schemas.microsoft.com/office/drawing/2014/main" id="{5E40B5B9-01B4-4F7B-B62E-F8B1B1C50DE9}"/>
+                <a16:creationId xmlns:a16="http://schemas.microsoft.com/office/drawing/2014/main" id="{748D8DEB-B59A-4F79-8F88-8042702C0EAF}"/>
               </a:ext>
             </a:extLst>
           </p:cNvPr>
@@ -7048,7 +7048,7 @@
           <p:cNvPr id="4" name="">
             <a:extLst xmlns:a="http://schemas.openxmlformats.org/drawingml/2006/main">
               <a:ext uri="{FF2B5EF4-FFF2-40B4-BE49-F238E27FC236}">
-                <a16:creationId xmlns:a16="http://schemas.microsoft.com/office/drawing/2014/main" id="{CFBC0D92-26ED-4BB3-8912-C31590318752}"/>
+                <a16:creationId xmlns:a16="http://schemas.microsoft.com/office/drawing/2014/main" id="{90A9084A-7CD1-4E6B-B143-4360A8C1604F}"/>
               </a:ext>
             </a:extLst>
           </p:cNvPr>
@@ -7098,7 +7098,7 @@
           <p:cNvPr id="5" name="">
             <a:extLst xmlns:a="http://schemas.openxmlformats.org/drawingml/2006/main">
               <a:ext uri="{FF2B5EF4-FFF2-40B4-BE49-F238E27FC236}">
-                <a16:creationId xmlns:a16="http://schemas.microsoft.com/office/drawing/2014/main" id="{2F397C4F-2226-4BEB-990C-AF900685E929}"/>
+                <a16:creationId xmlns:a16="http://schemas.microsoft.com/office/drawing/2014/main" id="{2D98BD9A-0FB0-431A-9D96-3DF0FF0D8FD2}"/>
               </a:ext>
             </a:extLst>
           </p:cNvPr>
@@ -7148,7 +7148,7 @@
           <p:cNvPr id="6" name="">
             <a:extLst xmlns:a="http://schemas.openxmlformats.org/drawingml/2006/main">
               <a:ext uri="{FF2B5EF4-FFF2-40B4-BE49-F238E27FC236}">
-                <a16:creationId xmlns:a16="http://schemas.microsoft.com/office/drawing/2014/main" id="{3D75A14C-365C-4EF5-9CC8-933281E20F74}"/>
+                <a16:creationId xmlns:a16="http://schemas.microsoft.com/office/drawing/2014/main" id="{E7E2AA45-4B95-4CBE-9C41-72490B633C48}"/>
               </a:ext>
             </a:extLst>
           </p:cNvPr>
@@ -7198,7 +7198,7 @@
           <p:cNvPr id="7" name="">
             <a:extLst xmlns:a="http://schemas.openxmlformats.org/drawingml/2006/main">
               <a:ext uri="{FF2B5EF4-FFF2-40B4-BE49-F238E27FC236}">
-                <a16:creationId xmlns:a16="http://schemas.microsoft.com/office/drawing/2014/main" id="{A198033B-F402-4D5A-832F-849F276455AA}"/>
+                <a16:creationId xmlns:a16="http://schemas.microsoft.com/office/drawing/2014/main" id="{727A0EB1-9204-4BF6-837C-7E08C076199E}"/>
               </a:ext>
             </a:extLst>
           </p:cNvPr>
@@ -7248,7 +7248,7 @@
           <p:cNvPr id="8" name="">
             <a:extLst xmlns:a="http://schemas.openxmlformats.org/drawingml/2006/main">
               <a:ext uri="{FF2B5EF4-FFF2-40B4-BE49-F238E27FC236}">
-                <a16:creationId xmlns:a16="http://schemas.microsoft.com/office/drawing/2014/main" id="{6E1AD017-5386-494E-BDFC-CAE0ABC1D16B}"/>
+                <a16:creationId xmlns:a16="http://schemas.microsoft.com/office/drawing/2014/main" id="{F801C81A-2B13-4FFA-B4DE-4419AD689DA0}"/>
               </a:ext>
             </a:extLst>
           </p:cNvPr>
@@ -7298,7 +7298,7 @@
           <p:cNvPr id="9" name="">
             <a:extLst xmlns:a="http://schemas.openxmlformats.org/drawingml/2006/main">
               <a:ext uri="{FF2B5EF4-FFF2-40B4-BE49-F238E27FC236}">
-                <a16:creationId xmlns:a16="http://schemas.microsoft.com/office/drawing/2014/main" id="{4D298023-F6BE-46C7-BEFA-D69CCD62743D}"/>
+                <a16:creationId xmlns:a16="http://schemas.microsoft.com/office/drawing/2014/main" id="{DE32986C-7DC8-4305-890C-EA98BC2A9BF0}"/>
               </a:ext>
             </a:extLst>
           </p:cNvPr>
@@ -7348,7 +7348,7 @@
           <p:cNvPr id="10" name="">
             <a:extLst xmlns:a="http://schemas.openxmlformats.org/drawingml/2006/main">
               <a:ext uri="{FF2B5EF4-FFF2-40B4-BE49-F238E27FC236}">
-                <a16:creationId xmlns:a16="http://schemas.microsoft.com/office/drawing/2014/main" id="{55D1B936-B455-4001-973F-C0E7C23C58C5}"/>
+                <a16:creationId xmlns:a16="http://schemas.microsoft.com/office/drawing/2014/main" id="{1E8D35E1-04A5-4C69-AEA3-E6FDA17159DE}"/>
               </a:ext>
             </a:extLst>
           </p:cNvPr>
@@ -7398,7 +7398,7 @@
           <p:cNvPr id="11" name="">
             <a:extLst xmlns:a="http://schemas.openxmlformats.org/drawingml/2006/main">
               <a:ext uri="{FF2B5EF4-FFF2-40B4-BE49-F238E27FC236}">
-                <a16:creationId xmlns:a16="http://schemas.microsoft.com/office/drawing/2014/main" id="{6B9F3450-B968-48EC-9B6B-4B7DFAF29ACF}"/>
+                <a16:creationId xmlns:a16="http://schemas.microsoft.com/office/drawing/2014/main" id="{C1FAA002-A40F-48B7-9EC0-0327C5154123}"/>
               </a:ext>
             </a:extLst>
           </p:cNvPr>
@@ -7448,7 +7448,7 @@
           <p:cNvPr id="12" name="">
             <a:extLst xmlns:a="http://schemas.openxmlformats.org/drawingml/2006/main">
               <a:ext uri="{FF2B5EF4-FFF2-40B4-BE49-F238E27FC236}">
-                <a16:creationId xmlns:a16="http://schemas.microsoft.com/office/drawing/2014/main" id="{7AFD2CB4-F2F5-4398-A2D8-9B81D9785296}"/>
+                <a16:creationId xmlns:a16="http://schemas.microsoft.com/office/drawing/2014/main" id="{10090DC0-D12E-4F94-8FA9-4A4CD92052B9}"/>
               </a:ext>
             </a:extLst>
           </p:cNvPr>
@@ -7498,7 +7498,7 @@
           <p:cNvPr id="13" name="">
             <a:extLst xmlns:a="http://schemas.openxmlformats.org/drawingml/2006/main">
               <a:ext uri="{FF2B5EF4-FFF2-40B4-BE49-F238E27FC236}">
-                <a16:creationId xmlns:a16="http://schemas.microsoft.com/office/drawing/2014/main" id="{98428F48-0294-4BA2-8DBD-09AA5047E48E}"/>
+                <a16:creationId xmlns:a16="http://schemas.microsoft.com/office/drawing/2014/main" id="{F07FA879-CA65-47A1-BB34-64F930A7AA59}"/>
               </a:ext>
             </a:extLst>
           </p:cNvPr>
@@ -7548,7 +7548,7 @@
           <p:cNvPr id="14" name="">
             <a:extLst xmlns:a="http://schemas.openxmlformats.org/drawingml/2006/main">
               <a:ext uri="{FF2B5EF4-FFF2-40B4-BE49-F238E27FC236}">
-                <a16:creationId xmlns:a16="http://schemas.microsoft.com/office/drawing/2014/main" id="{91FA80DF-536D-4349-BC1B-E3FC90B75D7D}"/>
+                <a16:creationId xmlns:a16="http://schemas.microsoft.com/office/drawing/2014/main" id="{9D736179-98E2-48D8-B00B-396CB0C7FB3E}"/>
               </a:ext>
             </a:extLst>
           </p:cNvPr>
@@ -7598,7 +7598,7 @@
           <p:cNvPr id="15" name="">
             <a:extLst xmlns:a="http://schemas.openxmlformats.org/drawingml/2006/main">
               <a:ext uri="{FF2B5EF4-FFF2-40B4-BE49-F238E27FC236}">
-                <a16:creationId xmlns:a16="http://schemas.microsoft.com/office/drawing/2014/main" id="{8E1117E8-3B0B-4839-BFC9-983FE7E5A829}"/>
+                <a16:creationId xmlns:a16="http://schemas.microsoft.com/office/drawing/2014/main" id="{10B8A889-846B-423C-BF1E-5E853023B0E2}"/>
               </a:ext>
             </a:extLst>
           </p:cNvPr>
@@ -7648,7 +7648,7 @@
           <p:cNvPr id="16" name="">
             <a:extLst xmlns:a="http://schemas.openxmlformats.org/drawingml/2006/main">
               <a:ext uri="{FF2B5EF4-FFF2-40B4-BE49-F238E27FC236}">
-                <a16:creationId xmlns:a16="http://schemas.microsoft.com/office/drawing/2014/main" id="{D8629289-A485-4D97-B6EE-19207F99550C}"/>
+                <a16:creationId xmlns:a16="http://schemas.microsoft.com/office/drawing/2014/main" id="{2B024ECE-0C41-4E5A-BBCD-6C5E3B887C9B}"/>
               </a:ext>
             </a:extLst>
           </p:cNvPr>
@@ -7679,7 +7679,7 @@
           <p:cNvPr id="17" name="">
             <a:extLst xmlns:a="http://schemas.openxmlformats.org/drawingml/2006/main">
               <a:ext uri="{FF2B5EF4-FFF2-40B4-BE49-F238E27FC236}">
-                <a16:creationId xmlns:a16="http://schemas.microsoft.com/office/drawing/2014/main" id="{6EFDAE9A-E5D4-4354-805F-E861FA7B7223}"/>
+                <a16:creationId xmlns:a16="http://schemas.microsoft.com/office/drawing/2014/main" id="{3A1F61E5-FC10-4FCC-8811-1016F97E74B0}"/>
               </a:ext>
             </a:extLst>
           </p:cNvPr>
@@ -7729,7 +7729,7 @@
           <p:cNvPr id="18" name="">
             <a:extLst xmlns:a="http://schemas.openxmlformats.org/drawingml/2006/main">
               <a:ext uri="{FF2B5EF4-FFF2-40B4-BE49-F238E27FC236}">
-                <a16:creationId xmlns:a16="http://schemas.microsoft.com/office/drawing/2014/main" id="{B2152F5D-FE26-4A78-93A1-A2C7D60289E9}"/>
+                <a16:creationId xmlns:a16="http://schemas.microsoft.com/office/drawing/2014/main" id="{97740A33-1BD9-4599-82FF-2E3AFC9AFD7C}"/>
               </a:ext>
             </a:extLst>
           </p:cNvPr>
@@ -7779,7 +7779,7 @@
           <p:cNvPr id="19" name="">
             <a:extLst xmlns:a="http://schemas.openxmlformats.org/drawingml/2006/main">
               <a:ext uri="{FF2B5EF4-FFF2-40B4-BE49-F238E27FC236}">
-                <a16:creationId xmlns:a16="http://schemas.microsoft.com/office/drawing/2014/main" id="{8CE0A63C-0E06-486A-AB8D-B692AF11BFE5}"/>
+                <a16:creationId xmlns:a16="http://schemas.microsoft.com/office/drawing/2014/main" id="{23D99702-D470-48CF-B482-2D63138D2594}"/>
               </a:ext>
             </a:extLst>
           </p:cNvPr>
@@ -7829,7 +7829,7 @@
           <p:cNvPr id="20" name="">
             <a:extLst xmlns:a="http://schemas.openxmlformats.org/drawingml/2006/main">
               <a:ext uri="{FF2B5EF4-FFF2-40B4-BE49-F238E27FC236}">
-                <a16:creationId xmlns:a16="http://schemas.microsoft.com/office/drawing/2014/main" id="{7984AB67-C415-4E24-BD35-78112A32D027}"/>
+                <a16:creationId xmlns:a16="http://schemas.microsoft.com/office/drawing/2014/main" id="{C506263C-6F55-407D-BD19-45D6F495E5D3}"/>
               </a:ext>
             </a:extLst>
           </p:cNvPr>
@@ -7860,7 +7860,7 @@
           <p:cNvPr id="21" name="">
             <a:extLst xmlns:a="http://schemas.openxmlformats.org/drawingml/2006/main">
               <a:ext uri="{FF2B5EF4-FFF2-40B4-BE49-F238E27FC236}">
-                <a16:creationId xmlns:a16="http://schemas.microsoft.com/office/drawing/2014/main" id="{CCF30C90-B9CF-4884-9766-3663C9D992BE}"/>
+                <a16:creationId xmlns:a16="http://schemas.microsoft.com/office/drawing/2014/main" id="{E8876211-06A3-4E95-9C3D-BD517953AA88}"/>
               </a:ext>
             </a:extLst>
           </p:cNvPr>
@@ -7910,7 +7910,7 @@
           <p:cNvPr id="22" name="">
             <a:extLst xmlns:a="http://schemas.openxmlformats.org/drawingml/2006/main">
               <a:ext uri="{FF2B5EF4-FFF2-40B4-BE49-F238E27FC236}">
-                <a16:creationId xmlns:a16="http://schemas.microsoft.com/office/drawing/2014/main" id="{81DEB01B-E6FF-414F-8487-411C8D4B7135}"/>
+                <a16:creationId xmlns:a16="http://schemas.microsoft.com/office/drawing/2014/main" id="{4C785A94-8BD8-4B48-B91D-F637AAC73A80}"/>
               </a:ext>
             </a:extLst>
           </p:cNvPr>
@@ -7960,7 +7960,7 @@
           <p:cNvPr id="23" name="">
             <a:extLst xmlns:a="http://schemas.openxmlformats.org/drawingml/2006/main">
               <a:ext uri="{FF2B5EF4-FFF2-40B4-BE49-F238E27FC236}">
-                <a16:creationId xmlns:a16="http://schemas.microsoft.com/office/drawing/2014/main" id="{47F86FB5-EAD1-4BB6-869C-BE34FBF1972E}"/>
+                <a16:creationId xmlns:a16="http://schemas.microsoft.com/office/drawing/2014/main" id="{2B08E3F7-798F-4D63-934C-4DCF18631BF1}"/>
               </a:ext>
             </a:extLst>
           </p:cNvPr>
@@ -8010,7 +8010,7 @@
           <p:cNvPr id="24" name="">
             <a:extLst xmlns:a="http://schemas.openxmlformats.org/drawingml/2006/main">
               <a:ext uri="{FF2B5EF4-FFF2-40B4-BE49-F238E27FC236}">
-                <a16:creationId xmlns:a16="http://schemas.microsoft.com/office/drawing/2014/main" id="{496A3353-8AB7-4B88-9135-2E7B3E35D662}"/>
+                <a16:creationId xmlns:a16="http://schemas.microsoft.com/office/drawing/2014/main" id="{274F37A5-CE07-4030-AE48-462B2EDA6FEC}"/>
               </a:ext>
             </a:extLst>
           </p:cNvPr>
@@ -8041,7 +8041,7 @@
           <p:cNvPr id="25" name="">
             <a:extLst xmlns:a="http://schemas.openxmlformats.org/drawingml/2006/main">
               <a:ext uri="{FF2B5EF4-FFF2-40B4-BE49-F238E27FC236}">
-                <a16:creationId xmlns:a16="http://schemas.microsoft.com/office/drawing/2014/main" id="{B006009F-078C-4E88-BCC3-C1514C940648}"/>
+                <a16:creationId xmlns:a16="http://schemas.microsoft.com/office/drawing/2014/main" id="{CA7AA93C-B60A-4EF5-9180-F4A51EDA23D6}"/>
               </a:ext>
             </a:extLst>
           </p:cNvPr>
@@ -8091,7 +8091,7 @@
           <p:cNvPr id="26" name="">
             <a:extLst xmlns:a="http://schemas.openxmlformats.org/drawingml/2006/main">
               <a:ext uri="{FF2B5EF4-FFF2-40B4-BE49-F238E27FC236}">
-                <a16:creationId xmlns:a16="http://schemas.microsoft.com/office/drawing/2014/main" id="{1EF7B33F-A39F-4E0C-92FD-125D8A57CED1}"/>
+                <a16:creationId xmlns:a16="http://schemas.microsoft.com/office/drawing/2014/main" id="{83B89B7D-314D-4F19-934C-5230FDD36CEE}"/>
               </a:ext>
             </a:extLst>
           </p:cNvPr>
@@ -8141,7 +8141,7 @@
           <p:cNvPr id="27" name="">
             <a:extLst xmlns:a="http://schemas.openxmlformats.org/drawingml/2006/main">
               <a:ext uri="{FF2B5EF4-FFF2-40B4-BE49-F238E27FC236}">
-                <a16:creationId xmlns:a16="http://schemas.microsoft.com/office/drawing/2014/main" id="{24BC2A87-C8B9-4975-9CD4-836DEF2D99AE}"/>
+                <a16:creationId xmlns:a16="http://schemas.microsoft.com/office/drawing/2014/main" id="{3BC26C90-C3C5-4322-8034-213B2F6F1FA0}"/>
               </a:ext>
             </a:extLst>
           </p:cNvPr>
@@ -8191,7 +8191,7 @@
           <p:cNvPr id="28" name="">
             <a:extLst xmlns:a="http://schemas.openxmlformats.org/drawingml/2006/main">
               <a:ext uri="{FF2B5EF4-FFF2-40B4-BE49-F238E27FC236}">
-                <a16:creationId xmlns:a16="http://schemas.microsoft.com/office/drawing/2014/main" id="{19CB0DC9-9C82-4718-922E-1B3EFF4F1B43}"/>
+                <a16:creationId xmlns:a16="http://schemas.microsoft.com/office/drawing/2014/main" id="{7EDF4748-962A-4A86-AF1D-6D1B26FB066F}"/>
               </a:ext>
             </a:extLst>
           </p:cNvPr>
@@ -8222,7 +8222,7 @@
           <p:cNvPr id="29" name="">
             <a:extLst xmlns:a="http://schemas.openxmlformats.org/drawingml/2006/main">
               <a:ext uri="{FF2B5EF4-FFF2-40B4-BE49-F238E27FC236}">
-                <a16:creationId xmlns:a16="http://schemas.microsoft.com/office/drawing/2014/main" id="{1177DB08-2315-425E-8DE6-BEC9DA898FE7}"/>
+                <a16:creationId xmlns:a16="http://schemas.microsoft.com/office/drawing/2014/main" id="{D5412DAA-23BC-4E0A-A094-368FE215360A}"/>
               </a:ext>
             </a:extLst>
           </p:cNvPr>
@@ -8257,7 +8257,7 @@
           <p:cNvPr id="30" name="">
             <a:extLst xmlns:a="http://schemas.openxmlformats.org/drawingml/2006/main">
               <a:ext uri="{FF2B5EF4-FFF2-40B4-BE49-F238E27FC236}">
-                <a16:creationId xmlns:a16="http://schemas.microsoft.com/office/drawing/2014/main" id="{0A265FEC-707E-4569-AE68-8EC680629154}"/>
+                <a16:creationId xmlns:a16="http://schemas.microsoft.com/office/drawing/2014/main" id="{4E84315F-27F1-4B01-8D39-828271D8EAA7}"/>
               </a:ext>
             </a:extLst>
           </p:cNvPr>
@@ -8292,7 +8292,7 @@
           <p:cNvPr id="31" name="">
             <a:extLst xmlns:a="http://schemas.openxmlformats.org/drawingml/2006/main">
               <a:ext uri="{FF2B5EF4-FFF2-40B4-BE49-F238E27FC236}">
-                <a16:creationId xmlns:a16="http://schemas.microsoft.com/office/drawing/2014/main" id="{B753128A-E0A6-4D5D-AE3F-CE7533C33E65}"/>
+                <a16:creationId xmlns:a16="http://schemas.microsoft.com/office/drawing/2014/main" id="{B94F726D-F0A2-4C1B-905A-84E6E4BDED18}"/>
               </a:ext>
             </a:extLst>
           </p:cNvPr>
@@ -8342,7 +8342,7 @@
           <p:cNvPr id="32" name="">
             <a:extLst xmlns:a="http://schemas.openxmlformats.org/drawingml/2006/main">
               <a:ext uri="{FF2B5EF4-FFF2-40B4-BE49-F238E27FC236}">
-                <a16:creationId xmlns:a16="http://schemas.microsoft.com/office/drawing/2014/main" id="{356B1403-E9A7-4FA9-BFCE-14296DC971D6}"/>
+                <a16:creationId xmlns:a16="http://schemas.microsoft.com/office/drawing/2014/main" id="{CDF2B8BA-98AB-47EC-893D-94226D5D9301}"/>
               </a:ext>
             </a:extLst>
           </p:cNvPr>
@@ -8392,7 +8392,7 @@
           <p:cNvPr id="33" name="">
             <a:extLst xmlns:a="http://schemas.openxmlformats.org/drawingml/2006/main">
               <a:ext uri="{FF2B5EF4-FFF2-40B4-BE49-F238E27FC236}">
-                <a16:creationId xmlns:a16="http://schemas.microsoft.com/office/drawing/2014/main" id="{F0A5D704-9272-46AF-8EB7-C27A53F3BAB0}"/>
+                <a16:creationId xmlns:a16="http://schemas.microsoft.com/office/drawing/2014/main" id="{6E4FA2EB-35C1-4CA9-8F5E-D65AB7E882CA}"/>
               </a:ext>
             </a:extLst>
           </p:cNvPr>
@@ -8423,7 +8423,7 @@
           <p:cNvPr id="34" name="source-13">
             <a:extLst xmlns:a="http://schemas.openxmlformats.org/drawingml/2006/main">
               <a:ext uri="{FF2B5EF4-FFF2-40B4-BE49-F238E27FC236}">
-                <a16:creationId xmlns:a16="http://schemas.microsoft.com/office/drawing/2014/main" id="{725E7AB9-4889-4872-8C53-79C55DCEF491}"/>
+                <a16:creationId xmlns:a16="http://schemas.microsoft.com/office/drawing/2014/main" id="{6D0444CC-4F2A-4BF0-9FDF-D0C73F62D3CD}"/>
               </a:ext>
             </a:extLst>
           </p:cNvPr>
@@ -8473,7 +8473,7 @@
           <p:cNvPr id="35" name="page-13">
             <a:extLst xmlns:a="http://schemas.openxmlformats.org/drawingml/2006/main">
               <a:ext uri="{FF2B5EF4-FFF2-40B4-BE49-F238E27FC236}">
-                <a16:creationId xmlns:a16="http://schemas.microsoft.com/office/drawing/2014/main" id="{A98E0FB1-2128-434C-A9ED-EDD83261C846}"/>
+                <a16:creationId xmlns:a16="http://schemas.microsoft.com/office/drawing/2014/main" id="{ACA95DE3-E39C-4AE2-91C6-F15BB5E3294E}"/>
               </a:ext>
             </a:extLst>
           </p:cNvPr>
@@ -8521,7 +8521,7 @@
     </p:spTree>
     <p:extLst>
       <p:ext uri="{BB962C8B-B14F-4D97-AF65-F5344CB8AC3E}">
-        <p14:creationId xmlns:p14="http://schemas.microsoft.com/office/powerpoint/2010/main" val="1740923909"/>
+        <p14:creationId xmlns:p14="http://schemas.microsoft.com/office/powerpoint/2010/main" val="742856922"/>
       </p:ext>
     </p:extLst>
   </p:cSld>
@@ -8552,7 +8552,7 @@
           <p:cNvPr id="31" name="kicker-14">
             <a:extLst xmlns:a="http://schemas.openxmlformats.org/drawingml/2006/main">
               <a:ext uri="{FF2B5EF4-FFF2-40B4-BE49-F238E27FC236}">
-                <a16:creationId xmlns:a16="http://schemas.microsoft.com/office/drawing/2014/main" id="{90D67FD6-7C22-4496-820C-9D101441F6C9}"/>
+                <a16:creationId xmlns:a16="http://schemas.microsoft.com/office/drawing/2014/main" id="{778E196D-2725-4F92-858B-AF0A4D4004F3}"/>
               </a:ext>
             </a:extLst>
           </p:cNvPr>
@@ -8602,7 +8602,7 @@
           <p:cNvPr id="2" name="title-14">
             <a:extLst xmlns:a="http://schemas.openxmlformats.org/drawingml/2006/main">
               <a:ext uri="{FF2B5EF4-FFF2-40B4-BE49-F238E27FC236}">
-                <a16:creationId xmlns:a16="http://schemas.microsoft.com/office/drawing/2014/main" id="{3F7CABC6-783A-4D4D-8E86-9EDEF2FEA466}"/>
+                <a16:creationId xmlns:a16="http://schemas.microsoft.com/office/drawing/2014/main" id="{36D90E81-5867-4FC9-AACC-DC19CACFE779}"/>
               </a:ext>
             </a:extLst>
           </p:cNvPr>
@@ -8642,7 +8642,7 @@
                   <a:srgbClr val="0F172A"/>
                 </a:solidFill>
               </a:rPr>
-              <a:t>Phase 2 coverage fell from 93.72% to 4.14%</a:t>
+              <a:t>Phase 2 source shift collapsed deterministic coverage</a:t>
             </a:r>
           </a:p>
         </p:txBody>
@@ -8652,7 +8652,7 @@
           <p:cNvPr id="3" name="">
             <a:extLst xmlns:a="http://schemas.openxmlformats.org/drawingml/2006/main">
               <a:ext uri="{FF2B5EF4-FFF2-40B4-BE49-F238E27FC236}">
-                <a16:creationId xmlns:a16="http://schemas.microsoft.com/office/drawing/2014/main" id="{432ABE0A-ABC8-4F99-B344-5275C60E3EAC}"/>
+                <a16:creationId xmlns:a16="http://schemas.microsoft.com/office/drawing/2014/main" id="{AB556682-DB6F-4C52-ACBD-A0336EA8CADC}"/>
               </a:ext>
             </a:extLst>
           </p:cNvPr>
@@ -8683,7 +8683,7 @@
           <p:cNvPr id="4" name="">
             <a:extLst xmlns:a="http://schemas.openxmlformats.org/drawingml/2006/main">
               <a:ext uri="{FF2B5EF4-FFF2-40B4-BE49-F238E27FC236}">
-                <a16:creationId xmlns:a16="http://schemas.microsoft.com/office/drawing/2014/main" id="{E597357D-9B7F-405B-BA66-CB3CFB4D2FB1}"/>
+                <a16:creationId xmlns:a16="http://schemas.microsoft.com/office/drawing/2014/main" id="{BE2A6903-5116-46AD-899C-284AF1F24CBD}"/>
               </a:ext>
             </a:extLst>
           </p:cNvPr>
@@ -8733,7 +8733,7 @@
           <p:cNvPr id="5" name="">
             <a:extLst xmlns:a="http://schemas.openxmlformats.org/drawingml/2006/main">
               <a:ext uri="{FF2B5EF4-FFF2-40B4-BE49-F238E27FC236}">
-                <a16:creationId xmlns:a16="http://schemas.microsoft.com/office/drawing/2014/main" id="{96E4D679-9253-445F-9A20-9CF23953E536}"/>
+                <a16:creationId xmlns:a16="http://schemas.microsoft.com/office/drawing/2014/main" id="{9518A7EE-BD2F-4D45-94A3-8109359D3644}"/>
               </a:ext>
             </a:extLst>
           </p:cNvPr>
@@ -8783,7 +8783,7 @@
           <p:cNvPr id="6" name="">
             <a:extLst xmlns:a="http://schemas.openxmlformats.org/drawingml/2006/main">
               <a:ext uri="{FF2B5EF4-FFF2-40B4-BE49-F238E27FC236}">
-                <a16:creationId xmlns:a16="http://schemas.microsoft.com/office/drawing/2014/main" id="{B5079DA5-24B1-43F8-9ED8-77E5439DADD9}"/>
+                <a16:creationId xmlns:a16="http://schemas.microsoft.com/office/drawing/2014/main" id="{33CB4680-C0BB-4030-8AB7-C64B9AF732C1}"/>
               </a:ext>
             </a:extLst>
           </p:cNvPr>
@@ -8833,7 +8833,7 @@
           <p:cNvPr id="7" name="">
             <a:extLst xmlns:a="http://schemas.openxmlformats.org/drawingml/2006/main">
               <a:ext uri="{FF2B5EF4-FFF2-40B4-BE49-F238E27FC236}">
-                <a16:creationId xmlns:a16="http://schemas.microsoft.com/office/drawing/2014/main" id="{ED6D5DCD-3578-4FB8-AAF5-4AD843FC0300}"/>
+                <a16:creationId xmlns:a16="http://schemas.microsoft.com/office/drawing/2014/main" id="{EB6B9885-07B8-4293-A7DA-9BFD4F82A9E6}"/>
               </a:ext>
             </a:extLst>
           </p:cNvPr>
@@ -8864,7 +8864,7 @@
           <p:cNvPr id="8" name="">
             <a:extLst xmlns:a="http://schemas.openxmlformats.org/drawingml/2006/main">
               <a:ext uri="{FF2B5EF4-FFF2-40B4-BE49-F238E27FC236}">
-                <a16:creationId xmlns:a16="http://schemas.microsoft.com/office/drawing/2014/main" id="{B9612770-CDB8-42F1-811D-FF6AA77A9CD0}"/>
+                <a16:creationId xmlns:a16="http://schemas.microsoft.com/office/drawing/2014/main" id="{C60DF267-96DE-429F-8F17-9440E1976E2A}"/>
               </a:ext>
             </a:extLst>
           </p:cNvPr>
@@ -8914,7 +8914,7 @@
           <p:cNvPr id="9" name="">
             <a:extLst xmlns:a="http://schemas.openxmlformats.org/drawingml/2006/main">
               <a:ext uri="{FF2B5EF4-FFF2-40B4-BE49-F238E27FC236}">
-                <a16:creationId xmlns:a16="http://schemas.microsoft.com/office/drawing/2014/main" id="{EBE5E054-2586-4668-B38B-8C1363EA30F5}"/>
+                <a16:creationId xmlns:a16="http://schemas.microsoft.com/office/drawing/2014/main" id="{42E105E1-B083-40FB-A908-C9CF151A5FB6}"/>
               </a:ext>
             </a:extLst>
           </p:cNvPr>
@@ -8964,7 +8964,7 @@
           <p:cNvPr id="10" name="">
             <a:extLst xmlns:a="http://schemas.openxmlformats.org/drawingml/2006/main">
               <a:ext uri="{FF2B5EF4-FFF2-40B4-BE49-F238E27FC236}">
-                <a16:creationId xmlns:a16="http://schemas.microsoft.com/office/drawing/2014/main" id="{04E856E9-F47F-4F8D-B860-4D0A4AF45C1B}"/>
+                <a16:creationId xmlns:a16="http://schemas.microsoft.com/office/drawing/2014/main" id="{0103BA9F-BE3F-4875-B4A5-24DCB8A22BCD}"/>
               </a:ext>
             </a:extLst>
           </p:cNvPr>
@@ -8995,7 +8995,7 @@
           <p:cNvPr id="11" name="">
             <a:extLst xmlns:a="http://schemas.openxmlformats.org/drawingml/2006/main">
               <a:ext uri="{FF2B5EF4-FFF2-40B4-BE49-F238E27FC236}">
-                <a16:creationId xmlns:a16="http://schemas.microsoft.com/office/drawing/2014/main" id="{3A43B170-DB6D-4238-AB2D-F103E8555C36}"/>
+                <a16:creationId xmlns:a16="http://schemas.microsoft.com/office/drawing/2014/main" id="{6F9EA1E7-31B0-4C34-B60A-BD2BC5E4D092}"/>
               </a:ext>
             </a:extLst>
           </p:cNvPr>
@@ -9045,7 +9045,7 @@
           <p:cNvPr id="12" name="">
             <a:extLst xmlns:a="http://schemas.openxmlformats.org/drawingml/2006/main">
               <a:ext uri="{FF2B5EF4-FFF2-40B4-BE49-F238E27FC236}">
-                <a16:creationId xmlns:a16="http://schemas.microsoft.com/office/drawing/2014/main" id="{F23404EE-AD2B-4ACF-811F-89F5C2E206F9}"/>
+                <a16:creationId xmlns:a16="http://schemas.microsoft.com/office/drawing/2014/main" id="{E0A853A8-6013-4F40-B318-5EE9F3236D96}"/>
               </a:ext>
             </a:extLst>
           </p:cNvPr>
@@ -9095,7 +9095,7 @@
           <p:cNvPr id="13" name="">
             <a:extLst xmlns:a="http://schemas.openxmlformats.org/drawingml/2006/main">
               <a:ext uri="{FF2B5EF4-FFF2-40B4-BE49-F238E27FC236}">
-                <a16:creationId xmlns:a16="http://schemas.microsoft.com/office/drawing/2014/main" id="{005A0F57-D679-4AD9-92EF-F4256278169C}"/>
+                <a16:creationId xmlns:a16="http://schemas.microsoft.com/office/drawing/2014/main" id="{BE604AC9-539C-4A3D-965A-3679558E0D57}"/>
               </a:ext>
             </a:extLst>
           </p:cNvPr>
@@ -9126,7 +9126,7 @@
           <p:cNvPr id="14" name="">
             <a:extLst xmlns:a="http://schemas.openxmlformats.org/drawingml/2006/main">
               <a:ext uri="{FF2B5EF4-FFF2-40B4-BE49-F238E27FC236}">
-                <a16:creationId xmlns:a16="http://schemas.microsoft.com/office/drawing/2014/main" id="{8D4F667B-438C-4F6D-AF65-29326ED76263}"/>
+                <a16:creationId xmlns:a16="http://schemas.microsoft.com/office/drawing/2014/main" id="{B616F080-F6A1-4EAB-865C-E979113DAE07}"/>
               </a:ext>
             </a:extLst>
           </p:cNvPr>
@@ -9176,7 +9176,7 @@
           <p:cNvPr id="15" name="">
             <a:extLst xmlns:a="http://schemas.openxmlformats.org/drawingml/2006/main">
               <a:ext uri="{FF2B5EF4-FFF2-40B4-BE49-F238E27FC236}">
-                <a16:creationId xmlns:a16="http://schemas.microsoft.com/office/drawing/2014/main" id="{C0209546-552E-4845-8565-EDA4103256F7}"/>
+                <a16:creationId xmlns:a16="http://schemas.microsoft.com/office/drawing/2014/main" id="{47395962-9662-47C8-B8B7-3F283C4C8851}"/>
               </a:ext>
             </a:extLst>
           </p:cNvPr>
@@ -9226,7 +9226,7 @@
           <p:cNvPr id="16" name="">
             <a:extLst xmlns:a="http://schemas.openxmlformats.org/drawingml/2006/main">
               <a:ext uri="{FF2B5EF4-FFF2-40B4-BE49-F238E27FC236}">
-                <a16:creationId xmlns:a16="http://schemas.microsoft.com/office/drawing/2014/main" id="{AAF5F9AD-8B8F-4B53-B8E6-FB097C3AA433}"/>
+                <a16:creationId xmlns:a16="http://schemas.microsoft.com/office/drawing/2014/main" id="{FA982134-CBFC-4EC0-93E4-11289BCFC1CA}"/>
               </a:ext>
             </a:extLst>
           </p:cNvPr>
@@ -9257,7 +9257,7 @@
           <p:cNvPr id="17" name="">
             <a:extLst xmlns:a="http://schemas.openxmlformats.org/drawingml/2006/main">
               <a:ext uri="{FF2B5EF4-FFF2-40B4-BE49-F238E27FC236}">
-                <a16:creationId xmlns:a16="http://schemas.microsoft.com/office/drawing/2014/main" id="{0E4359D6-330E-4A32-AEA8-B5A2CAB1C605}"/>
+                <a16:creationId xmlns:a16="http://schemas.microsoft.com/office/drawing/2014/main" id="{0B2535B6-7B89-4D18-99BF-8D2C534ED0B8}"/>
               </a:ext>
             </a:extLst>
           </p:cNvPr>
@@ -9290,7 +9290,7 @@
           <p:cNvPr id="18" name="">
             <a:extLst xmlns:a="http://schemas.openxmlformats.org/drawingml/2006/main">
               <a:ext uri="{FF2B5EF4-FFF2-40B4-BE49-F238E27FC236}">
-                <a16:creationId xmlns:a16="http://schemas.microsoft.com/office/drawing/2014/main" id="{AD8A8FEC-6CCA-49D6-956B-FB9BCFDB7411}"/>
+                <a16:creationId xmlns:a16="http://schemas.microsoft.com/office/drawing/2014/main" id="{0F5617B3-FF5D-489F-A98F-5FE049A100FA}"/>
               </a:ext>
             </a:extLst>
           </p:cNvPr>
@@ -9323,7 +9323,7 @@
           <p:cNvPr id="19" name="">
             <a:extLst xmlns:a="http://schemas.openxmlformats.org/drawingml/2006/main">
               <a:ext uri="{FF2B5EF4-FFF2-40B4-BE49-F238E27FC236}">
-                <a16:creationId xmlns:a16="http://schemas.microsoft.com/office/drawing/2014/main" id="{AFD15C9F-E211-437F-A0C0-1E921F09EF0E}"/>
+                <a16:creationId xmlns:a16="http://schemas.microsoft.com/office/drawing/2014/main" id="{06213A73-FB80-4A96-B9FF-DE90960B58A3}"/>
               </a:ext>
             </a:extLst>
           </p:cNvPr>
@@ -9364,7 +9364,7 @@
           <p:cNvPr id="20" name="">
             <a:extLst xmlns:a="http://schemas.openxmlformats.org/drawingml/2006/main">
               <a:ext uri="{FF2B5EF4-FFF2-40B4-BE49-F238E27FC236}">
-                <a16:creationId xmlns:a16="http://schemas.microsoft.com/office/drawing/2014/main" id="{E6E4DE71-FF7C-4739-B015-DA736528DD65}"/>
+                <a16:creationId xmlns:a16="http://schemas.microsoft.com/office/drawing/2014/main" id="{47317BA4-7930-4AF5-8A52-90FE1C0D6CE8}"/>
               </a:ext>
             </a:extLst>
           </p:cNvPr>
@@ -9414,7 +9414,7 @@
           <p:cNvPr id="21" name="">
             <a:extLst xmlns:a="http://schemas.openxmlformats.org/drawingml/2006/main">
               <a:ext uri="{FF2B5EF4-FFF2-40B4-BE49-F238E27FC236}">
-                <a16:creationId xmlns:a16="http://schemas.microsoft.com/office/drawing/2014/main" id="{718D6CCF-2A9A-4513-9513-1B1E1E7202CB}"/>
+                <a16:creationId xmlns:a16="http://schemas.microsoft.com/office/drawing/2014/main" id="{807AB4F3-92DF-4358-B926-941593041E10}"/>
               </a:ext>
             </a:extLst>
           </p:cNvPr>
@@ -9498,7 +9498,7 @@
           <p:cNvPr id="22" name="">
             <a:extLst xmlns:a="http://schemas.openxmlformats.org/drawingml/2006/main">
               <a:ext uri="{FF2B5EF4-FFF2-40B4-BE49-F238E27FC236}">
-                <a16:creationId xmlns:a16="http://schemas.microsoft.com/office/drawing/2014/main" id="{B8997795-4E3C-4A0C-9C26-478DF0D2BCF6}"/>
+                <a16:creationId xmlns:a16="http://schemas.microsoft.com/office/drawing/2014/main" id="{98A41139-E6A1-4B40-9E6D-10F774A9947A}"/>
               </a:ext>
             </a:extLst>
           </p:cNvPr>
@@ -9539,7 +9539,7 @@
           <p:cNvPr id="23" name="">
             <a:extLst xmlns:a="http://schemas.openxmlformats.org/drawingml/2006/main">
               <a:ext uri="{FF2B5EF4-FFF2-40B4-BE49-F238E27FC236}">
-                <a16:creationId xmlns:a16="http://schemas.microsoft.com/office/drawing/2014/main" id="{BE2A5FD6-E187-4422-8D4E-F51C344F3347}"/>
+                <a16:creationId xmlns:a16="http://schemas.microsoft.com/office/drawing/2014/main" id="{9824B898-0D03-4185-9475-A3503B29BE4B}"/>
               </a:ext>
             </a:extLst>
           </p:cNvPr>
@@ -9589,7 +9589,7 @@
           <p:cNvPr id="24" name="">
             <a:extLst xmlns:a="http://schemas.openxmlformats.org/drawingml/2006/main">
               <a:ext uri="{FF2B5EF4-FFF2-40B4-BE49-F238E27FC236}">
-                <a16:creationId xmlns:a16="http://schemas.microsoft.com/office/drawing/2014/main" id="{E8282D56-791D-4176-8B23-062C8FB8E2B6}"/>
+                <a16:creationId xmlns:a16="http://schemas.microsoft.com/office/drawing/2014/main" id="{7221EA17-6231-4DB3-834C-236C38E68A8A}"/>
               </a:ext>
             </a:extLst>
           </p:cNvPr>
@@ -9673,7 +9673,7 @@
           <p:cNvPr id="25" name="">
             <a:extLst xmlns:a="http://schemas.openxmlformats.org/drawingml/2006/main">
               <a:ext uri="{FF2B5EF4-FFF2-40B4-BE49-F238E27FC236}">
-                <a16:creationId xmlns:a16="http://schemas.microsoft.com/office/drawing/2014/main" id="{2C4AFD94-B50B-43F2-B81C-FE9CD5CA5692}"/>
+                <a16:creationId xmlns:a16="http://schemas.microsoft.com/office/drawing/2014/main" id="{68952354-BF2A-4868-9D17-8A9DD060E671}"/>
               </a:ext>
             </a:extLst>
           </p:cNvPr>
@@ -9708,7 +9708,7 @@
           <p:cNvPr id="26" name="">
             <a:extLst xmlns:a="http://schemas.openxmlformats.org/drawingml/2006/main">
               <a:ext uri="{FF2B5EF4-FFF2-40B4-BE49-F238E27FC236}">
-                <a16:creationId xmlns:a16="http://schemas.microsoft.com/office/drawing/2014/main" id="{37823AFC-E6FF-4F38-9421-F867252AD7BE}"/>
+                <a16:creationId xmlns:a16="http://schemas.microsoft.com/office/drawing/2014/main" id="{6C0405BB-CB3F-4C96-8187-1392984E63D4}"/>
               </a:ext>
             </a:extLst>
           </p:cNvPr>
@@ -9758,7 +9758,7 @@
           <p:cNvPr id="27" name="">
             <a:extLst xmlns:a="http://schemas.openxmlformats.org/drawingml/2006/main">
               <a:ext uri="{FF2B5EF4-FFF2-40B4-BE49-F238E27FC236}">
-                <a16:creationId xmlns:a16="http://schemas.microsoft.com/office/drawing/2014/main" id="{DC09F3D9-CD25-4B3F-82D6-063D2462680B}"/>
+                <a16:creationId xmlns:a16="http://schemas.microsoft.com/office/drawing/2014/main" id="{D83826BB-977B-4FC1-9A4C-0F746D41FF6D}"/>
               </a:ext>
             </a:extLst>
           </p:cNvPr>
@@ -9808,7 +9808,7 @@
           <p:cNvPr id="28" name="">
             <a:extLst xmlns:a="http://schemas.openxmlformats.org/drawingml/2006/main">
               <a:ext uri="{FF2B5EF4-FFF2-40B4-BE49-F238E27FC236}">
-                <a16:creationId xmlns:a16="http://schemas.microsoft.com/office/drawing/2014/main" id="{406A6216-4B65-4017-A55A-76AF363FD0FB}"/>
+                <a16:creationId xmlns:a16="http://schemas.microsoft.com/office/drawing/2014/main" id="{AE0E8DA4-204A-412A-A005-0BF03F3F29D7}"/>
               </a:ext>
             </a:extLst>
           </p:cNvPr>
@@ -9839,7 +9839,7 @@
           <p:cNvPr id="29" name="source-14">
             <a:extLst xmlns:a="http://schemas.openxmlformats.org/drawingml/2006/main">
               <a:ext uri="{FF2B5EF4-FFF2-40B4-BE49-F238E27FC236}">
-                <a16:creationId xmlns:a16="http://schemas.microsoft.com/office/drawing/2014/main" id="{84FD9FD3-DB92-4712-800C-138C4A191EC6}"/>
+                <a16:creationId xmlns:a16="http://schemas.microsoft.com/office/drawing/2014/main" id="{4FA3102D-F1D3-41D0-B45F-9EDF6DC06D61}"/>
               </a:ext>
             </a:extLst>
           </p:cNvPr>
@@ -9889,7 +9889,7 @@
           <p:cNvPr id="30" name="page-14">
             <a:extLst xmlns:a="http://schemas.openxmlformats.org/drawingml/2006/main">
               <a:ext uri="{FF2B5EF4-FFF2-40B4-BE49-F238E27FC236}">
-                <a16:creationId xmlns:a16="http://schemas.microsoft.com/office/drawing/2014/main" id="{72F04BA8-7A6A-4771-9748-FB94CFC71CCF}"/>
+                <a16:creationId xmlns:a16="http://schemas.microsoft.com/office/drawing/2014/main" id="{76D6A106-1A20-40B0-8EC3-9F41BE3D5C2E}"/>
               </a:ext>
             </a:extLst>
           </p:cNvPr>
@@ -9937,7 +9937,7 @@
     </p:spTree>
     <p:extLst>
       <p:ext uri="{BB962C8B-B14F-4D97-AF65-F5344CB8AC3E}">
-        <p14:creationId xmlns:p14="http://schemas.microsoft.com/office/powerpoint/2010/main" val="778424743"/>
+        <p14:creationId xmlns:p14="http://schemas.microsoft.com/office/powerpoint/2010/main" val="1618010076"/>
       </p:ext>
     </p:extLst>
   </p:cSld>
@@ -9968,7 +9968,7 @@
           <p:cNvPr id="17" name="">
             <a:extLst xmlns:a="http://schemas.openxmlformats.org/drawingml/2006/main">
               <a:ext uri="{FF2B5EF4-FFF2-40B4-BE49-F238E27FC236}">
-                <a16:creationId xmlns:a16="http://schemas.microsoft.com/office/drawing/2014/main" id="{3D2B50AA-DFFC-4F87-8BA8-3350B07A4ACD}"/>
+                <a16:creationId xmlns:a16="http://schemas.microsoft.com/office/drawing/2014/main" id="{6616C739-D264-4A19-B9FE-AABE1A83236C}"/>
               </a:ext>
             </a:extLst>
           </p:cNvPr>
@@ -10018,7 +10018,7 @@
           <p:cNvPr id="2" name="">
             <a:extLst xmlns:a="http://schemas.openxmlformats.org/drawingml/2006/main">
               <a:ext uri="{FF2B5EF4-FFF2-40B4-BE49-F238E27FC236}">
-                <a16:creationId xmlns:a16="http://schemas.microsoft.com/office/drawing/2014/main" id="{51C7C5F4-7E5B-4620-94EB-DE657B9A376A}"/>
+                <a16:creationId xmlns:a16="http://schemas.microsoft.com/office/drawing/2014/main" id="{B8B3FF84-160E-4361-B02F-D9C63E865594}"/>
               </a:ext>
             </a:extLst>
           </p:cNvPr>
@@ -10085,7 +10085,7 @@
           <p:cNvPr id="3" name="">
             <a:extLst xmlns:a="http://schemas.openxmlformats.org/drawingml/2006/main">
               <a:ext uri="{FF2B5EF4-FFF2-40B4-BE49-F238E27FC236}">
-                <a16:creationId xmlns:a16="http://schemas.microsoft.com/office/drawing/2014/main" id="{43EBAC11-86C0-45BC-958D-B5DAD62456DF}"/>
+                <a16:creationId xmlns:a16="http://schemas.microsoft.com/office/drawing/2014/main" id="{75BBE7C6-3143-4E17-A780-48C7BB2FC726}"/>
               </a:ext>
             </a:extLst>
           </p:cNvPr>
@@ -10126,7 +10126,7 @@
           <p:cNvPr id="4" name="">
             <a:extLst xmlns:a="http://schemas.openxmlformats.org/drawingml/2006/main">
               <a:ext uri="{FF2B5EF4-FFF2-40B4-BE49-F238E27FC236}">
-                <a16:creationId xmlns:a16="http://schemas.microsoft.com/office/drawing/2014/main" id="{CEE4A96C-DBBE-4B8F-902B-59972D8097CC}"/>
+                <a16:creationId xmlns:a16="http://schemas.microsoft.com/office/drawing/2014/main" id="{DE44C291-17C9-4B82-8B65-CF3931D5CB4F}"/>
               </a:ext>
             </a:extLst>
           </p:cNvPr>
@@ -10176,7 +10176,7 @@
           <p:cNvPr id="5" name="">
             <a:extLst xmlns:a="http://schemas.openxmlformats.org/drawingml/2006/main">
               <a:ext uri="{FF2B5EF4-FFF2-40B4-BE49-F238E27FC236}">
-                <a16:creationId xmlns:a16="http://schemas.microsoft.com/office/drawing/2014/main" id="{1C74FDB9-754D-4D83-B38D-038B8DBBCDD8}"/>
+                <a16:creationId xmlns:a16="http://schemas.microsoft.com/office/drawing/2014/main" id="{86F83137-965E-44BC-8E52-6D374FBECF34}"/>
               </a:ext>
             </a:extLst>
           </p:cNvPr>
@@ -10260,7 +10260,7 @@
           <p:cNvPr id="6" name="">
             <a:extLst xmlns:a="http://schemas.openxmlformats.org/drawingml/2006/main">
               <a:ext uri="{FF2B5EF4-FFF2-40B4-BE49-F238E27FC236}">
-                <a16:creationId xmlns:a16="http://schemas.microsoft.com/office/drawing/2014/main" id="{E5723BA6-41F3-49CE-AC27-3992D8B30D10}"/>
+                <a16:creationId xmlns:a16="http://schemas.microsoft.com/office/drawing/2014/main" id="{2321D992-D4C0-4072-BCF7-7E04EBD6ABC3}"/>
               </a:ext>
             </a:extLst>
           </p:cNvPr>
@@ -10301,7 +10301,7 @@
           <p:cNvPr id="7" name="">
             <a:extLst xmlns:a="http://schemas.openxmlformats.org/drawingml/2006/main">
               <a:ext uri="{FF2B5EF4-FFF2-40B4-BE49-F238E27FC236}">
-                <a16:creationId xmlns:a16="http://schemas.microsoft.com/office/drawing/2014/main" id="{50C4BFE5-CDA4-4229-99BF-93F715CA3A57}"/>
+                <a16:creationId xmlns:a16="http://schemas.microsoft.com/office/drawing/2014/main" id="{18A2228D-6EFD-452E-9D0F-09B28D96F66B}"/>
               </a:ext>
             </a:extLst>
           </p:cNvPr>
@@ -10351,7 +10351,7 @@
           <p:cNvPr id="8" name="">
             <a:extLst xmlns:a="http://schemas.openxmlformats.org/drawingml/2006/main">
               <a:ext uri="{FF2B5EF4-FFF2-40B4-BE49-F238E27FC236}">
-                <a16:creationId xmlns:a16="http://schemas.microsoft.com/office/drawing/2014/main" id="{C0C036EE-AB2D-4902-BC6D-62CE99F8A340}"/>
+                <a16:creationId xmlns:a16="http://schemas.microsoft.com/office/drawing/2014/main" id="{FD280358-D10B-45F0-AC4E-6BA423BEDC44}"/>
               </a:ext>
             </a:extLst>
           </p:cNvPr>
@@ -10435,7 +10435,7 @@
           <p:cNvPr id="9" name="">
             <a:extLst xmlns:a="http://schemas.openxmlformats.org/drawingml/2006/main">
               <a:ext uri="{FF2B5EF4-FFF2-40B4-BE49-F238E27FC236}">
-                <a16:creationId xmlns:a16="http://schemas.microsoft.com/office/drawing/2014/main" id="{CFA44C56-0B3A-4043-A612-04BB67073B76}"/>
+                <a16:creationId xmlns:a16="http://schemas.microsoft.com/office/drawing/2014/main" id="{B77445E4-1673-44E7-AF1B-CD620468C0DB}"/>
               </a:ext>
             </a:extLst>
           </p:cNvPr>
@@ -10476,7 +10476,7 @@
           <p:cNvPr id="10" name="">
             <a:extLst xmlns:a="http://schemas.openxmlformats.org/drawingml/2006/main">
               <a:ext uri="{FF2B5EF4-FFF2-40B4-BE49-F238E27FC236}">
-                <a16:creationId xmlns:a16="http://schemas.microsoft.com/office/drawing/2014/main" id="{0B862DEC-19FB-420D-99D2-D67BE2978B42}"/>
+                <a16:creationId xmlns:a16="http://schemas.microsoft.com/office/drawing/2014/main" id="{4EFB1193-451E-42D3-8F57-2CB8BC379135}"/>
               </a:ext>
             </a:extLst>
           </p:cNvPr>
@@ -10526,7 +10526,7 @@
           <p:cNvPr id="11" name="">
             <a:extLst xmlns:a="http://schemas.openxmlformats.org/drawingml/2006/main">
               <a:ext uri="{FF2B5EF4-FFF2-40B4-BE49-F238E27FC236}">
-                <a16:creationId xmlns:a16="http://schemas.microsoft.com/office/drawing/2014/main" id="{605406C1-8011-4F17-93A8-B74555025ACA}"/>
+                <a16:creationId xmlns:a16="http://schemas.microsoft.com/office/drawing/2014/main" id="{E13FC635-A8D5-468B-A020-31711A46F769}"/>
               </a:ext>
             </a:extLst>
           </p:cNvPr>
@@ -10610,7 +10610,7 @@
           <p:cNvPr id="12" name="">
             <a:extLst xmlns:a="http://schemas.openxmlformats.org/drawingml/2006/main">
               <a:ext uri="{FF2B5EF4-FFF2-40B4-BE49-F238E27FC236}">
-                <a16:creationId xmlns:a16="http://schemas.microsoft.com/office/drawing/2014/main" id="{2E9D950B-3BBC-4A1D-9865-32242E8A2373}"/>
+                <a16:creationId xmlns:a16="http://schemas.microsoft.com/office/drawing/2014/main" id="{0FD96A9F-29D5-4DBE-BF72-66648174D902}"/>
               </a:ext>
             </a:extLst>
           </p:cNvPr>
@@ -10660,7 +10660,7 @@
           <p:cNvPr id="13" name="">
             <a:extLst xmlns:a="http://schemas.openxmlformats.org/drawingml/2006/main">
               <a:ext uri="{FF2B5EF4-FFF2-40B4-BE49-F238E27FC236}">
-                <a16:creationId xmlns:a16="http://schemas.microsoft.com/office/drawing/2014/main" id="{7E2E0417-E987-4F8B-B5EA-D15E9ACA17F4}"/>
+                <a16:creationId xmlns:a16="http://schemas.microsoft.com/office/drawing/2014/main" id="{2B8BAC1D-1097-4F60-A5D4-B655ADD582E0}"/>
               </a:ext>
             </a:extLst>
           </p:cNvPr>
@@ -10710,7 +10710,7 @@
           <p:cNvPr id="14" name="">
             <a:extLst xmlns:a="http://schemas.openxmlformats.org/drawingml/2006/main">
               <a:ext uri="{FF2B5EF4-FFF2-40B4-BE49-F238E27FC236}">
-                <a16:creationId xmlns:a16="http://schemas.microsoft.com/office/drawing/2014/main" id="{8406EE11-AB56-47B3-B74E-EB39B9ACC2F3}"/>
+                <a16:creationId xmlns:a16="http://schemas.microsoft.com/office/drawing/2014/main" id="{F26472C0-E999-40D2-B18D-0EC85CC45D92}"/>
               </a:ext>
             </a:extLst>
           </p:cNvPr>
@@ -10741,7 +10741,7 @@
           <p:cNvPr id="15" name="">
             <a:extLst xmlns:a="http://schemas.openxmlformats.org/drawingml/2006/main">
               <a:ext uri="{FF2B5EF4-FFF2-40B4-BE49-F238E27FC236}">
-                <a16:creationId xmlns:a16="http://schemas.microsoft.com/office/drawing/2014/main" id="{640024BD-FD05-47A7-B818-F7394D7207E4}"/>
+                <a16:creationId xmlns:a16="http://schemas.microsoft.com/office/drawing/2014/main" id="{C214942F-05C0-4849-B65C-92859DD8C60C}"/>
               </a:ext>
             </a:extLst>
           </p:cNvPr>
@@ -10791,7 +10791,7 @@
           <p:cNvPr id="16" name="">
             <a:extLst xmlns:a="http://schemas.openxmlformats.org/drawingml/2006/main">
               <a:ext uri="{FF2B5EF4-FFF2-40B4-BE49-F238E27FC236}">
-                <a16:creationId xmlns:a16="http://schemas.microsoft.com/office/drawing/2014/main" id="{4317606A-48A7-4F30-B9F7-931B672D4E0D}"/>
+                <a16:creationId xmlns:a16="http://schemas.microsoft.com/office/drawing/2014/main" id="{2B1743CC-F08F-4114-8116-762006E60081}"/>
               </a:ext>
             </a:extLst>
           </p:cNvPr>
@@ -10839,7 +10839,7 @@
     </p:spTree>
     <p:extLst>
       <p:ext uri="{BB962C8B-B14F-4D97-AF65-F5344CB8AC3E}">
-        <p14:creationId xmlns:p14="http://schemas.microsoft.com/office/powerpoint/2010/main" val="136153475"/>
+        <p14:creationId xmlns:p14="http://schemas.microsoft.com/office/powerpoint/2010/main" val="721392785"/>
       </p:ext>
     </p:extLst>
   </p:cSld>
@@ -10870,7 +10870,7 @@
           <p:cNvPr id="30" name="kicker-2">
             <a:extLst xmlns:a="http://schemas.openxmlformats.org/drawingml/2006/main">
               <a:ext uri="{FF2B5EF4-FFF2-40B4-BE49-F238E27FC236}">
-                <a16:creationId xmlns:a16="http://schemas.microsoft.com/office/drawing/2014/main" id="{386DF953-A53E-4301-A436-82AD6D3369CA}"/>
+                <a16:creationId xmlns:a16="http://schemas.microsoft.com/office/drawing/2014/main" id="{CBCC5706-7307-4D31-AC8E-A2DBF72FA3C0}"/>
               </a:ext>
             </a:extLst>
           </p:cNvPr>
@@ -10920,7 +10920,7 @@
           <p:cNvPr id="2" name="title-2">
             <a:extLst xmlns:a="http://schemas.openxmlformats.org/drawingml/2006/main">
               <a:ext uri="{FF2B5EF4-FFF2-40B4-BE49-F238E27FC236}">
-                <a16:creationId xmlns:a16="http://schemas.microsoft.com/office/drawing/2014/main" id="{604E9483-2A49-48FC-9C61-4A11521AB285}"/>
+                <a16:creationId xmlns:a16="http://schemas.microsoft.com/office/drawing/2014/main" id="{40F38B53-F8D4-4969-8C43-48482A5EA540}"/>
               </a:ext>
             </a:extLst>
           </p:cNvPr>
@@ -10970,7 +10970,7 @@
           <p:cNvPr id="3" name="">
             <a:extLst xmlns:a="http://schemas.openxmlformats.org/drawingml/2006/main">
               <a:ext uri="{FF2B5EF4-FFF2-40B4-BE49-F238E27FC236}">
-                <a16:creationId xmlns:a16="http://schemas.microsoft.com/office/drawing/2014/main" id="{DA40D6AB-E12A-4CCF-908A-524087A75268}"/>
+                <a16:creationId xmlns:a16="http://schemas.microsoft.com/office/drawing/2014/main" id="{608FB724-CFA0-45BD-BFBF-85118BD67E61}"/>
               </a:ext>
             </a:extLst>
           </p:cNvPr>
@@ -11001,7 +11001,7 @@
           <p:cNvPr id="4" name="">
             <a:extLst xmlns:a="http://schemas.openxmlformats.org/drawingml/2006/main">
               <a:ext uri="{FF2B5EF4-FFF2-40B4-BE49-F238E27FC236}">
-                <a16:creationId xmlns:a16="http://schemas.microsoft.com/office/drawing/2014/main" id="{D271C44A-576F-4F5F-BC09-0E89C80B39AE}"/>
+                <a16:creationId xmlns:a16="http://schemas.microsoft.com/office/drawing/2014/main" id="{1C847C3C-4238-4E6B-B2C9-24AAF7EB60FF}"/>
               </a:ext>
             </a:extLst>
           </p:cNvPr>
@@ -11051,7 +11051,7 @@
           <p:cNvPr id="5" name="">
             <a:extLst xmlns:a="http://schemas.openxmlformats.org/drawingml/2006/main">
               <a:ext uri="{FF2B5EF4-FFF2-40B4-BE49-F238E27FC236}">
-                <a16:creationId xmlns:a16="http://schemas.microsoft.com/office/drawing/2014/main" id="{B6A35D4A-4BAF-4FC0-8CD8-F6195773D644}"/>
+                <a16:creationId xmlns:a16="http://schemas.microsoft.com/office/drawing/2014/main" id="{B64BA4ED-529A-4424-8F29-67C7D5269010}"/>
               </a:ext>
             </a:extLst>
           </p:cNvPr>
@@ -11082,7 +11082,7 @@
           <p:cNvPr id="6" name="">
             <a:extLst xmlns:a="http://schemas.openxmlformats.org/drawingml/2006/main">
               <a:ext uri="{FF2B5EF4-FFF2-40B4-BE49-F238E27FC236}">
-                <a16:creationId xmlns:a16="http://schemas.microsoft.com/office/drawing/2014/main" id="{9E85BCC6-CDDD-492D-ABC9-FBF6CDC55049}"/>
+                <a16:creationId xmlns:a16="http://schemas.microsoft.com/office/drawing/2014/main" id="{5FEC47F6-8E71-409A-8864-7DFD0A06E7D3}"/>
               </a:ext>
             </a:extLst>
           </p:cNvPr>
@@ -11115,7 +11115,7 @@
           <p:cNvPr id="7" name="">
             <a:extLst xmlns:a="http://schemas.openxmlformats.org/drawingml/2006/main">
               <a:ext uri="{FF2B5EF4-FFF2-40B4-BE49-F238E27FC236}">
-                <a16:creationId xmlns:a16="http://schemas.microsoft.com/office/drawing/2014/main" id="{D4C9206A-EF91-4F56-90D6-ECBF89987F55}"/>
+                <a16:creationId xmlns:a16="http://schemas.microsoft.com/office/drawing/2014/main" id="{B8681C01-671D-46E7-BB16-2A9BCAED8388}"/>
               </a:ext>
             </a:extLst>
           </p:cNvPr>
@@ -11165,7 +11165,7 @@
           <p:cNvPr id="8" name="">
             <a:extLst xmlns:a="http://schemas.openxmlformats.org/drawingml/2006/main">
               <a:ext uri="{FF2B5EF4-FFF2-40B4-BE49-F238E27FC236}">
-                <a16:creationId xmlns:a16="http://schemas.microsoft.com/office/drawing/2014/main" id="{EED382D2-73DB-47A5-ABAC-2206AEEBD9A6}"/>
+                <a16:creationId xmlns:a16="http://schemas.microsoft.com/office/drawing/2014/main" id="{1FFCB2E8-4CD3-4AF9-91D3-D95900BF73D1}"/>
               </a:ext>
             </a:extLst>
           </p:cNvPr>
@@ -11215,7 +11215,7 @@
           <p:cNvPr id="9" name="">
             <a:extLst xmlns:a="http://schemas.openxmlformats.org/drawingml/2006/main">
               <a:ext uri="{FF2B5EF4-FFF2-40B4-BE49-F238E27FC236}">
-                <a16:creationId xmlns:a16="http://schemas.microsoft.com/office/drawing/2014/main" id="{09DA4E00-CE92-45F3-84BC-21541DAE5D15}"/>
+                <a16:creationId xmlns:a16="http://schemas.microsoft.com/office/drawing/2014/main" id="{1C7B7C25-FB48-407D-B242-BCFF66B41206}"/>
               </a:ext>
             </a:extLst>
           </p:cNvPr>
@@ -11248,7 +11248,7 @@
           <p:cNvPr id="10" name="">
             <a:extLst xmlns:a="http://schemas.openxmlformats.org/drawingml/2006/main">
               <a:ext uri="{FF2B5EF4-FFF2-40B4-BE49-F238E27FC236}">
-                <a16:creationId xmlns:a16="http://schemas.microsoft.com/office/drawing/2014/main" id="{4C9008A4-D7CC-4A55-B7C8-9BA9E280BE80}"/>
+                <a16:creationId xmlns:a16="http://schemas.microsoft.com/office/drawing/2014/main" id="{614A0CBD-CEE7-4ECF-A7CD-86AFA2254876}"/>
               </a:ext>
             </a:extLst>
           </p:cNvPr>
@@ -11298,7 +11298,7 @@
           <p:cNvPr id="11" name="">
             <a:extLst xmlns:a="http://schemas.openxmlformats.org/drawingml/2006/main">
               <a:ext uri="{FF2B5EF4-FFF2-40B4-BE49-F238E27FC236}">
-                <a16:creationId xmlns:a16="http://schemas.microsoft.com/office/drawing/2014/main" id="{1D7A6880-855B-418A-8EFC-93B49880DF60}"/>
+                <a16:creationId xmlns:a16="http://schemas.microsoft.com/office/drawing/2014/main" id="{ADDC5568-77D3-4CA8-8903-641D742BDAFC}"/>
               </a:ext>
             </a:extLst>
           </p:cNvPr>
@@ -11348,7 +11348,7 @@
           <p:cNvPr id="12" name="">
             <a:extLst xmlns:a="http://schemas.openxmlformats.org/drawingml/2006/main">
               <a:ext uri="{FF2B5EF4-FFF2-40B4-BE49-F238E27FC236}">
-                <a16:creationId xmlns:a16="http://schemas.microsoft.com/office/drawing/2014/main" id="{856F76E4-CAE4-491B-BBD9-C181C90AE18E}"/>
+                <a16:creationId xmlns:a16="http://schemas.microsoft.com/office/drawing/2014/main" id="{243F4B3B-DA52-4ABC-B885-62F94642AB67}"/>
               </a:ext>
             </a:extLst>
           </p:cNvPr>
@@ -11381,7 +11381,7 @@
           <p:cNvPr id="13" name="">
             <a:extLst xmlns:a="http://schemas.openxmlformats.org/drawingml/2006/main">
               <a:ext uri="{FF2B5EF4-FFF2-40B4-BE49-F238E27FC236}">
-                <a16:creationId xmlns:a16="http://schemas.microsoft.com/office/drawing/2014/main" id="{0761E939-8329-493E-A005-3B54802DED4C}"/>
+                <a16:creationId xmlns:a16="http://schemas.microsoft.com/office/drawing/2014/main" id="{BCE7CFB9-C7AB-4767-86F0-2A383A6DE6AA}"/>
               </a:ext>
             </a:extLst>
           </p:cNvPr>
@@ -11431,7 +11431,7 @@
           <p:cNvPr id="14" name="">
             <a:extLst xmlns:a="http://schemas.openxmlformats.org/drawingml/2006/main">
               <a:ext uri="{FF2B5EF4-FFF2-40B4-BE49-F238E27FC236}">
-                <a16:creationId xmlns:a16="http://schemas.microsoft.com/office/drawing/2014/main" id="{152F1C8A-8C57-48A9-BF1E-870092B328B8}"/>
+                <a16:creationId xmlns:a16="http://schemas.microsoft.com/office/drawing/2014/main" id="{FE9E0800-FC63-42A9-8C3E-1B71A836A535}"/>
               </a:ext>
             </a:extLst>
           </p:cNvPr>
@@ -11481,7 +11481,7 @@
           <p:cNvPr id="15" name="">
             <a:extLst xmlns:a="http://schemas.openxmlformats.org/drawingml/2006/main">
               <a:ext uri="{FF2B5EF4-FFF2-40B4-BE49-F238E27FC236}">
-                <a16:creationId xmlns:a16="http://schemas.microsoft.com/office/drawing/2014/main" id="{1AF4E21B-407B-423D-84CD-C458D6EF35A5}"/>
+                <a16:creationId xmlns:a16="http://schemas.microsoft.com/office/drawing/2014/main" id="{3BD4FF62-2868-4DFC-8783-152B35B5FF16}"/>
               </a:ext>
             </a:extLst>
           </p:cNvPr>
@@ -11514,7 +11514,7 @@
           <p:cNvPr id="16" name="">
             <a:extLst xmlns:a="http://schemas.openxmlformats.org/drawingml/2006/main">
               <a:ext uri="{FF2B5EF4-FFF2-40B4-BE49-F238E27FC236}">
-                <a16:creationId xmlns:a16="http://schemas.microsoft.com/office/drawing/2014/main" id="{472B2A09-60A0-4D76-9F4C-A0BB55368389}"/>
+                <a16:creationId xmlns:a16="http://schemas.microsoft.com/office/drawing/2014/main" id="{69053D0F-2C69-4262-9250-C835C106EACE}"/>
               </a:ext>
             </a:extLst>
           </p:cNvPr>
@@ -11564,7 +11564,7 @@
           <p:cNvPr id="17" name="">
             <a:extLst xmlns:a="http://schemas.openxmlformats.org/drawingml/2006/main">
               <a:ext uri="{FF2B5EF4-FFF2-40B4-BE49-F238E27FC236}">
-                <a16:creationId xmlns:a16="http://schemas.microsoft.com/office/drawing/2014/main" id="{D657DBFD-D5E3-449A-B1C9-6FAD5A9658B0}"/>
+                <a16:creationId xmlns:a16="http://schemas.microsoft.com/office/drawing/2014/main" id="{84C0D09A-B132-4BD0-981E-7515EB660DA4}"/>
               </a:ext>
             </a:extLst>
           </p:cNvPr>
@@ -11614,7 +11614,7 @@
           <p:cNvPr id="18" name="">
             <a:extLst xmlns:a="http://schemas.openxmlformats.org/drawingml/2006/main">
               <a:ext uri="{FF2B5EF4-FFF2-40B4-BE49-F238E27FC236}">
-                <a16:creationId xmlns:a16="http://schemas.microsoft.com/office/drawing/2014/main" id="{62859696-40FA-4F29-9FFC-86F88C77655F}"/>
+                <a16:creationId xmlns:a16="http://schemas.microsoft.com/office/drawing/2014/main" id="{C8C76EE4-EDA7-4F0B-AEDC-0DE8991A6E64}"/>
               </a:ext>
             </a:extLst>
           </p:cNvPr>
@@ -11647,7 +11647,7 @@
           <p:cNvPr id="19" name="">
             <a:extLst xmlns:a="http://schemas.openxmlformats.org/drawingml/2006/main">
               <a:ext uri="{FF2B5EF4-FFF2-40B4-BE49-F238E27FC236}">
-                <a16:creationId xmlns:a16="http://schemas.microsoft.com/office/drawing/2014/main" id="{95BF3BD5-5A04-4170-A596-F8BFEC311D92}"/>
+                <a16:creationId xmlns:a16="http://schemas.microsoft.com/office/drawing/2014/main" id="{867C7D5F-D85D-4BD3-B819-6852F6B41A3E}"/>
               </a:ext>
             </a:extLst>
           </p:cNvPr>
@@ -11697,7 +11697,7 @@
           <p:cNvPr id="20" name="">
             <a:extLst xmlns:a="http://schemas.openxmlformats.org/drawingml/2006/main">
               <a:ext uri="{FF2B5EF4-FFF2-40B4-BE49-F238E27FC236}">
-                <a16:creationId xmlns:a16="http://schemas.microsoft.com/office/drawing/2014/main" id="{56F5141C-C7A9-40AD-97BB-40E730C9BE32}"/>
+                <a16:creationId xmlns:a16="http://schemas.microsoft.com/office/drawing/2014/main" id="{8C6FE24A-5BAE-4679-A30C-FF180FD6EBAF}"/>
               </a:ext>
             </a:extLst>
           </p:cNvPr>
@@ -11747,7 +11747,7 @@
           <p:cNvPr id="21" name="">
             <a:extLst xmlns:a="http://schemas.openxmlformats.org/drawingml/2006/main">
               <a:ext uri="{FF2B5EF4-FFF2-40B4-BE49-F238E27FC236}">
-                <a16:creationId xmlns:a16="http://schemas.microsoft.com/office/drawing/2014/main" id="{5D6CE8F2-C92D-4CD3-B44B-9E4E8BDEA2F5}"/>
+                <a16:creationId xmlns:a16="http://schemas.microsoft.com/office/drawing/2014/main" id="{97032F44-4B3B-44D2-B869-35E2BE6C52E3}"/>
               </a:ext>
             </a:extLst>
           </p:cNvPr>
@@ -11780,7 +11780,7 @@
           <p:cNvPr id="22" name="">
             <a:extLst xmlns:a="http://schemas.openxmlformats.org/drawingml/2006/main">
               <a:ext uri="{FF2B5EF4-FFF2-40B4-BE49-F238E27FC236}">
-                <a16:creationId xmlns:a16="http://schemas.microsoft.com/office/drawing/2014/main" id="{D52B9E50-6734-40D8-8216-B5AA1CD006FC}"/>
+                <a16:creationId xmlns:a16="http://schemas.microsoft.com/office/drawing/2014/main" id="{A671DEDB-B292-40CA-B18C-62512EA4B6E1}"/>
               </a:ext>
             </a:extLst>
           </p:cNvPr>
@@ -11830,7 +11830,7 @@
           <p:cNvPr id="23" name="">
             <a:extLst xmlns:a="http://schemas.openxmlformats.org/drawingml/2006/main">
               <a:ext uri="{FF2B5EF4-FFF2-40B4-BE49-F238E27FC236}">
-                <a16:creationId xmlns:a16="http://schemas.microsoft.com/office/drawing/2014/main" id="{4CE9406E-24BD-411F-BBEA-B2AD4001F237}"/>
+                <a16:creationId xmlns:a16="http://schemas.microsoft.com/office/drawing/2014/main" id="{3C9F6947-5D59-4B9E-9A1E-B945934BC1F6}"/>
               </a:ext>
             </a:extLst>
           </p:cNvPr>
@@ -11880,7 +11880,7 @@
           <p:cNvPr id="24" name="">
             <a:extLst xmlns:a="http://schemas.openxmlformats.org/drawingml/2006/main">
               <a:ext uri="{FF2B5EF4-FFF2-40B4-BE49-F238E27FC236}">
-                <a16:creationId xmlns:a16="http://schemas.microsoft.com/office/drawing/2014/main" id="{5C0476B7-C9F4-4266-AE1B-2AEAA2A659FC}"/>
+                <a16:creationId xmlns:a16="http://schemas.microsoft.com/office/drawing/2014/main" id="{EB6CE7AC-BF51-4010-AC77-A1F8D83E7D60}"/>
               </a:ext>
             </a:extLst>
           </p:cNvPr>
@@ -11921,7 +11921,7 @@
           <p:cNvPr id="25" name="">
             <a:extLst xmlns:a="http://schemas.openxmlformats.org/drawingml/2006/main">
               <a:ext uri="{FF2B5EF4-FFF2-40B4-BE49-F238E27FC236}">
-                <a16:creationId xmlns:a16="http://schemas.microsoft.com/office/drawing/2014/main" id="{084EE425-C9FF-4EAC-AF0F-8B8FEDC78237}"/>
+                <a16:creationId xmlns:a16="http://schemas.microsoft.com/office/drawing/2014/main" id="{CFB9CFC2-4E93-4C06-8A98-FBD313D5C52D}"/>
               </a:ext>
             </a:extLst>
           </p:cNvPr>
@@ -11971,7 +11971,7 @@
           <p:cNvPr id="26" name="">
             <a:extLst xmlns:a="http://schemas.openxmlformats.org/drawingml/2006/main">
               <a:ext uri="{FF2B5EF4-FFF2-40B4-BE49-F238E27FC236}">
-                <a16:creationId xmlns:a16="http://schemas.microsoft.com/office/drawing/2014/main" id="{04E4CC6F-4B55-402E-B1F6-DDE53251F429}"/>
+                <a16:creationId xmlns:a16="http://schemas.microsoft.com/office/drawing/2014/main" id="{9DF3D9CE-E66B-44F0-8150-CE930655CB27}"/>
               </a:ext>
             </a:extLst>
           </p:cNvPr>
@@ -12021,7 +12021,7 @@
           <p:cNvPr id="27" name="">
             <a:extLst xmlns:a="http://schemas.openxmlformats.org/drawingml/2006/main">
               <a:ext uri="{FF2B5EF4-FFF2-40B4-BE49-F238E27FC236}">
-                <a16:creationId xmlns:a16="http://schemas.microsoft.com/office/drawing/2014/main" id="{CE9BB1B4-0038-4668-A365-10AA54FE3D35}"/>
+                <a16:creationId xmlns:a16="http://schemas.microsoft.com/office/drawing/2014/main" id="{546542FB-D776-4403-9FA7-BED4E537CA50}"/>
               </a:ext>
             </a:extLst>
           </p:cNvPr>
@@ -12052,7 +12052,7 @@
           <p:cNvPr id="28" name="source-2">
             <a:extLst xmlns:a="http://schemas.openxmlformats.org/drawingml/2006/main">
               <a:ext uri="{FF2B5EF4-FFF2-40B4-BE49-F238E27FC236}">
-                <a16:creationId xmlns:a16="http://schemas.microsoft.com/office/drawing/2014/main" id="{1D3608C8-B6A8-498B-9E6A-B160178CE5FD}"/>
+                <a16:creationId xmlns:a16="http://schemas.microsoft.com/office/drawing/2014/main" id="{7602F65B-37EA-4909-B394-CA31E75BBD08}"/>
               </a:ext>
             </a:extLst>
           </p:cNvPr>
@@ -12102,7 +12102,7 @@
           <p:cNvPr id="29" name="page-2">
             <a:extLst xmlns:a="http://schemas.openxmlformats.org/drawingml/2006/main">
               <a:ext uri="{FF2B5EF4-FFF2-40B4-BE49-F238E27FC236}">
-                <a16:creationId xmlns:a16="http://schemas.microsoft.com/office/drawing/2014/main" id="{B0EB3BD7-7223-475C-A8FC-936B684807A7}"/>
+                <a16:creationId xmlns:a16="http://schemas.microsoft.com/office/drawing/2014/main" id="{E7975AE5-5ABE-4A55-8462-4A812A7A47E8}"/>
               </a:ext>
             </a:extLst>
           </p:cNvPr>
@@ -12150,7 +12150,7 @@
     </p:spTree>
     <p:extLst>
       <p:ext uri="{BB962C8B-B14F-4D97-AF65-F5344CB8AC3E}">
-        <p14:creationId xmlns:p14="http://schemas.microsoft.com/office/powerpoint/2010/main" val="1478103298"/>
+        <p14:creationId xmlns:p14="http://schemas.microsoft.com/office/powerpoint/2010/main" val="293704456"/>
       </p:ext>
     </p:extLst>
   </p:cSld>
@@ -12181,7 +12181,7 @@
           <p:cNvPr id="29" name="kicker-3">
             <a:extLst xmlns:a="http://schemas.openxmlformats.org/drawingml/2006/main">
               <a:ext uri="{FF2B5EF4-FFF2-40B4-BE49-F238E27FC236}">
-                <a16:creationId xmlns:a16="http://schemas.microsoft.com/office/drawing/2014/main" id="{1EDD93B9-D336-43FF-9D39-5F3A70042F07}"/>
+                <a16:creationId xmlns:a16="http://schemas.microsoft.com/office/drawing/2014/main" id="{149CB62E-7129-4078-87D4-16F707F7975D}"/>
               </a:ext>
             </a:extLst>
           </p:cNvPr>
@@ -12231,7 +12231,7 @@
           <p:cNvPr id="2" name="title-3">
             <a:extLst xmlns:a="http://schemas.openxmlformats.org/drawingml/2006/main">
               <a:ext uri="{FF2B5EF4-FFF2-40B4-BE49-F238E27FC236}">
-                <a16:creationId xmlns:a16="http://schemas.microsoft.com/office/drawing/2014/main" id="{F15915F0-4E4B-4CFD-84C8-5179FB100BB9}"/>
+                <a16:creationId xmlns:a16="http://schemas.microsoft.com/office/drawing/2014/main" id="{423747C6-1A48-49CE-9461-A250CD6D0CFD}"/>
               </a:ext>
             </a:extLst>
           </p:cNvPr>
@@ -12281,7 +12281,7 @@
           <p:cNvPr id="3" name="">
             <a:extLst xmlns:a="http://schemas.openxmlformats.org/drawingml/2006/main">
               <a:ext uri="{FF2B5EF4-FFF2-40B4-BE49-F238E27FC236}">
-                <a16:creationId xmlns:a16="http://schemas.microsoft.com/office/drawing/2014/main" id="{C21D17DE-EF03-47AB-BBFA-3F7DACE19618}"/>
+                <a16:creationId xmlns:a16="http://schemas.microsoft.com/office/drawing/2014/main" id="{CE53ADB0-34C3-4197-879D-420B27C8DEDD}"/>
               </a:ext>
             </a:extLst>
           </p:cNvPr>
@@ -12312,7 +12312,7 @@
           <p:cNvPr id="4" name="">
             <a:extLst xmlns:a="http://schemas.openxmlformats.org/drawingml/2006/main">
               <a:ext uri="{FF2B5EF4-FFF2-40B4-BE49-F238E27FC236}">
-                <a16:creationId xmlns:a16="http://schemas.microsoft.com/office/drawing/2014/main" id="{ED1EB538-C74F-443F-AC7C-A656ABF74A39}"/>
+                <a16:creationId xmlns:a16="http://schemas.microsoft.com/office/drawing/2014/main" id="{6659C292-9634-4C3B-A87A-1288FD63E2BA}"/>
               </a:ext>
             </a:extLst>
           </p:cNvPr>
@@ -12362,7 +12362,7 @@
           <p:cNvPr id="5" name="">
             <a:extLst xmlns:a="http://schemas.openxmlformats.org/drawingml/2006/main">
               <a:ext uri="{FF2B5EF4-FFF2-40B4-BE49-F238E27FC236}">
-                <a16:creationId xmlns:a16="http://schemas.microsoft.com/office/drawing/2014/main" id="{CE56F57B-ADCD-4E84-BA7A-040813D81DEF}"/>
+                <a16:creationId xmlns:a16="http://schemas.microsoft.com/office/drawing/2014/main" id="{222A0CE9-52FC-49BA-A2F8-15CC99B83EA6}"/>
               </a:ext>
             </a:extLst>
           </p:cNvPr>
@@ -12395,7 +12395,7 @@
           <p:cNvPr id="6" name="">
             <a:extLst xmlns:a="http://schemas.openxmlformats.org/drawingml/2006/main">
               <a:ext uri="{FF2B5EF4-FFF2-40B4-BE49-F238E27FC236}">
-                <a16:creationId xmlns:a16="http://schemas.microsoft.com/office/drawing/2014/main" id="{8A5778D6-7B38-4A97-BBF8-925C24A0FB34}"/>
+                <a16:creationId xmlns:a16="http://schemas.microsoft.com/office/drawing/2014/main" id="{89359F7D-30A9-46D9-B1CE-D7821178DA43}"/>
               </a:ext>
             </a:extLst>
           </p:cNvPr>
@@ -12428,7 +12428,7 @@
           <p:cNvPr id="7" name="">
             <a:extLst xmlns:a="http://schemas.openxmlformats.org/drawingml/2006/main">
               <a:ext uri="{FF2B5EF4-FFF2-40B4-BE49-F238E27FC236}">
-                <a16:creationId xmlns:a16="http://schemas.microsoft.com/office/drawing/2014/main" id="{AEB9CF4F-5452-4E42-B94C-707D65AEDF30}"/>
+                <a16:creationId xmlns:a16="http://schemas.microsoft.com/office/drawing/2014/main" id="{31529528-BB06-456E-AF17-FC7D033DCCF1}"/>
               </a:ext>
             </a:extLst>
           </p:cNvPr>
@@ -12461,7 +12461,7 @@
           <p:cNvPr id="8" name="">
             <a:extLst xmlns:a="http://schemas.openxmlformats.org/drawingml/2006/main">
               <a:ext uri="{FF2B5EF4-FFF2-40B4-BE49-F238E27FC236}">
-                <a16:creationId xmlns:a16="http://schemas.microsoft.com/office/drawing/2014/main" id="{359BD188-0754-4F90-ACDA-ED2E873C70A0}"/>
+                <a16:creationId xmlns:a16="http://schemas.microsoft.com/office/drawing/2014/main" id="{E87D87CC-B41D-42B0-9DAF-C14F1703D6E7}"/>
               </a:ext>
             </a:extLst>
           </p:cNvPr>
@@ -12494,7 +12494,7 @@
           <p:cNvPr id="9" name="pipeline-0">
             <a:extLst xmlns:a="http://schemas.openxmlformats.org/drawingml/2006/main">
               <a:ext uri="{FF2B5EF4-FFF2-40B4-BE49-F238E27FC236}">
-                <a16:creationId xmlns:a16="http://schemas.microsoft.com/office/drawing/2014/main" id="{C755496F-EC8C-4637-9C05-FD52D8B62F0B}"/>
+                <a16:creationId xmlns:a16="http://schemas.microsoft.com/office/drawing/2014/main" id="{90E6850B-5EA6-4CC3-973F-2010319A4F9E}"/>
               </a:ext>
             </a:extLst>
           </p:cNvPr>
@@ -12535,7 +12535,7 @@
           <p:cNvPr id="10" name="">
             <a:extLst xmlns:a="http://schemas.openxmlformats.org/drawingml/2006/main">
               <a:ext uri="{FF2B5EF4-FFF2-40B4-BE49-F238E27FC236}">
-                <a16:creationId xmlns:a16="http://schemas.microsoft.com/office/drawing/2014/main" id="{53D8CB73-A5A6-4739-8014-890F66879153}"/>
+                <a16:creationId xmlns:a16="http://schemas.microsoft.com/office/drawing/2014/main" id="{0F8E8EAB-18D8-4230-9C51-4A658FB2DD96}"/>
               </a:ext>
             </a:extLst>
           </p:cNvPr>
@@ -12585,7 +12585,7 @@
           <p:cNvPr id="11" name="">
             <a:extLst xmlns:a="http://schemas.openxmlformats.org/drawingml/2006/main">
               <a:ext uri="{FF2B5EF4-FFF2-40B4-BE49-F238E27FC236}">
-                <a16:creationId xmlns:a16="http://schemas.microsoft.com/office/drawing/2014/main" id="{07BEDDB1-6D20-44B8-91EA-457700F6F049}"/>
+                <a16:creationId xmlns:a16="http://schemas.microsoft.com/office/drawing/2014/main" id="{25AE086E-A405-4D92-98D3-35A8CEFB7D7E}"/>
               </a:ext>
             </a:extLst>
           </p:cNvPr>
@@ -12652,7 +12652,7 @@
           <p:cNvPr id="12" name="pipeline-1">
             <a:extLst xmlns:a="http://schemas.openxmlformats.org/drawingml/2006/main">
               <a:ext uri="{FF2B5EF4-FFF2-40B4-BE49-F238E27FC236}">
-                <a16:creationId xmlns:a16="http://schemas.microsoft.com/office/drawing/2014/main" id="{EB86841F-CE7D-4FC4-8965-5D111BA1D107}"/>
+                <a16:creationId xmlns:a16="http://schemas.microsoft.com/office/drawing/2014/main" id="{8F7B2866-C7E6-45EB-8976-F117E622DCAC}"/>
               </a:ext>
             </a:extLst>
           </p:cNvPr>
@@ -12693,7 +12693,7 @@
           <p:cNvPr id="13" name="">
             <a:extLst xmlns:a="http://schemas.openxmlformats.org/drawingml/2006/main">
               <a:ext uri="{FF2B5EF4-FFF2-40B4-BE49-F238E27FC236}">
-                <a16:creationId xmlns:a16="http://schemas.microsoft.com/office/drawing/2014/main" id="{848BFAFF-3CAA-4E4B-ADE2-8D8AF548C496}"/>
+                <a16:creationId xmlns:a16="http://schemas.microsoft.com/office/drawing/2014/main" id="{51972382-FFE3-4BC9-AADE-7F3A7FE89F3F}"/>
               </a:ext>
             </a:extLst>
           </p:cNvPr>
@@ -12743,7 +12743,7 @@
           <p:cNvPr id="14" name="">
             <a:extLst xmlns:a="http://schemas.openxmlformats.org/drawingml/2006/main">
               <a:ext uri="{FF2B5EF4-FFF2-40B4-BE49-F238E27FC236}">
-                <a16:creationId xmlns:a16="http://schemas.microsoft.com/office/drawing/2014/main" id="{691AA2E5-4E5B-47EA-A9D6-C4A51F3D136C}"/>
+                <a16:creationId xmlns:a16="http://schemas.microsoft.com/office/drawing/2014/main" id="{65406B78-BB43-4955-9EC6-C9707787FDE2}"/>
               </a:ext>
             </a:extLst>
           </p:cNvPr>
@@ -12810,7 +12810,7 @@
           <p:cNvPr id="15" name="pipeline-2">
             <a:extLst xmlns:a="http://schemas.openxmlformats.org/drawingml/2006/main">
               <a:ext uri="{FF2B5EF4-FFF2-40B4-BE49-F238E27FC236}">
-                <a16:creationId xmlns:a16="http://schemas.microsoft.com/office/drawing/2014/main" id="{CD4E5498-95BF-4A0A-B015-AEBEBE25504C}"/>
+                <a16:creationId xmlns:a16="http://schemas.microsoft.com/office/drawing/2014/main" id="{B97413BA-1B5B-41DE-9131-657A88D27359}"/>
               </a:ext>
             </a:extLst>
           </p:cNvPr>
@@ -12851,7 +12851,7 @@
           <p:cNvPr id="16" name="">
             <a:extLst xmlns:a="http://schemas.openxmlformats.org/drawingml/2006/main">
               <a:ext uri="{FF2B5EF4-FFF2-40B4-BE49-F238E27FC236}">
-                <a16:creationId xmlns:a16="http://schemas.microsoft.com/office/drawing/2014/main" id="{3A631005-123B-4AB5-A315-29D05CE282E5}"/>
+                <a16:creationId xmlns:a16="http://schemas.microsoft.com/office/drawing/2014/main" id="{93698CA0-F355-4915-B739-ACA61190A707}"/>
               </a:ext>
             </a:extLst>
           </p:cNvPr>
@@ -12901,7 +12901,7 @@
           <p:cNvPr id="17" name="">
             <a:extLst xmlns:a="http://schemas.openxmlformats.org/drawingml/2006/main">
               <a:ext uri="{FF2B5EF4-FFF2-40B4-BE49-F238E27FC236}">
-                <a16:creationId xmlns:a16="http://schemas.microsoft.com/office/drawing/2014/main" id="{130CCF3E-42CB-48F9-B821-93083803D321}"/>
+                <a16:creationId xmlns:a16="http://schemas.microsoft.com/office/drawing/2014/main" id="{9E587DE4-F8DA-4A14-A04B-18EFB127F2F9}"/>
               </a:ext>
             </a:extLst>
           </p:cNvPr>
@@ -12968,7 +12968,7 @@
           <p:cNvPr id="18" name="pipeline-3">
             <a:extLst xmlns:a="http://schemas.openxmlformats.org/drawingml/2006/main">
               <a:ext uri="{FF2B5EF4-FFF2-40B4-BE49-F238E27FC236}">
-                <a16:creationId xmlns:a16="http://schemas.microsoft.com/office/drawing/2014/main" id="{1763E046-E424-477C-B224-D54C30E8D596}"/>
+                <a16:creationId xmlns:a16="http://schemas.microsoft.com/office/drawing/2014/main" id="{1DE5A328-F74D-4949-AFB4-3DCD10E73F6B}"/>
               </a:ext>
             </a:extLst>
           </p:cNvPr>
@@ -13009,7 +13009,7 @@
           <p:cNvPr id="19" name="">
             <a:extLst xmlns:a="http://schemas.openxmlformats.org/drawingml/2006/main">
               <a:ext uri="{FF2B5EF4-FFF2-40B4-BE49-F238E27FC236}">
-                <a16:creationId xmlns:a16="http://schemas.microsoft.com/office/drawing/2014/main" id="{8D9F6A5A-AC62-4DF4-AE01-D92799E9627B}"/>
+                <a16:creationId xmlns:a16="http://schemas.microsoft.com/office/drawing/2014/main" id="{B9BA53BA-760C-40F2-87F2-C94B4CF2BD4E}"/>
               </a:ext>
             </a:extLst>
           </p:cNvPr>
@@ -13059,7 +13059,7 @@
           <p:cNvPr id="20" name="">
             <a:extLst xmlns:a="http://schemas.openxmlformats.org/drawingml/2006/main">
               <a:ext uri="{FF2B5EF4-FFF2-40B4-BE49-F238E27FC236}">
-                <a16:creationId xmlns:a16="http://schemas.microsoft.com/office/drawing/2014/main" id="{E2C68B8E-7F8F-4C8E-B8D5-C5DC2C773471}"/>
+                <a16:creationId xmlns:a16="http://schemas.microsoft.com/office/drawing/2014/main" id="{B81B0678-8E71-4C9B-9F8E-561ADE5ABB24}"/>
               </a:ext>
             </a:extLst>
           </p:cNvPr>
@@ -13126,7 +13126,7 @@
           <p:cNvPr id="21" name="pipeline-4">
             <a:extLst xmlns:a="http://schemas.openxmlformats.org/drawingml/2006/main">
               <a:ext uri="{FF2B5EF4-FFF2-40B4-BE49-F238E27FC236}">
-                <a16:creationId xmlns:a16="http://schemas.microsoft.com/office/drawing/2014/main" id="{106F8333-CAD4-4A8E-A56C-DA44D90AE5A5}"/>
+                <a16:creationId xmlns:a16="http://schemas.microsoft.com/office/drawing/2014/main" id="{6927552C-6F19-404A-8463-AB18009E2EB1}"/>
               </a:ext>
             </a:extLst>
           </p:cNvPr>
@@ -13167,7 +13167,7 @@
           <p:cNvPr id="22" name="">
             <a:extLst xmlns:a="http://schemas.openxmlformats.org/drawingml/2006/main">
               <a:ext uri="{FF2B5EF4-FFF2-40B4-BE49-F238E27FC236}">
-                <a16:creationId xmlns:a16="http://schemas.microsoft.com/office/drawing/2014/main" id="{87303980-DB20-4BC0-8153-5FCDB28A839F}"/>
+                <a16:creationId xmlns:a16="http://schemas.microsoft.com/office/drawing/2014/main" id="{3DFF7400-55FE-4291-AA97-949AF7F3F830}"/>
               </a:ext>
             </a:extLst>
           </p:cNvPr>
@@ -13217,7 +13217,7 @@
           <p:cNvPr id="23" name="">
             <a:extLst xmlns:a="http://schemas.openxmlformats.org/drawingml/2006/main">
               <a:ext uri="{FF2B5EF4-FFF2-40B4-BE49-F238E27FC236}">
-                <a16:creationId xmlns:a16="http://schemas.microsoft.com/office/drawing/2014/main" id="{2434B39E-3014-47C6-82DC-84CA7482F2A1}"/>
+                <a16:creationId xmlns:a16="http://schemas.microsoft.com/office/drawing/2014/main" id="{01DBCC52-5B2F-48F2-82EB-634240A5D920}"/>
               </a:ext>
             </a:extLst>
           </p:cNvPr>
@@ -13284,7 +13284,7 @@
           <p:cNvPr id="24" name="">
             <a:extLst xmlns:a="http://schemas.openxmlformats.org/drawingml/2006/main">
               <a:ext uri="{FF2B5EF4-FFF2-40B4-BE49-F238E27FC236}">
-                <a16:creationId xmlns:a16="http://schemas.microsoft.com/office/drawing/2014/main" id="{AE0A5C6F-A1C5-4E41-9E19-4B9F738E158F}"/>
+                <a16:creationId xmlns:a16="http://schemas.microsoft.com/office/drawing/2014/main" id="{68629915-052F-4C6F-9E8B-5B1130DFC36B}"/>
               </a:ext>
             </a:extLst>
           </p:cNvPr>
@@ -13334,7 +13334,7 @@
           <p:cNvPr id="25" name="">
             <a:extLst xmlns:a="http://schemas.openxmlformats.org/drawingml/2006/main">
               <a:ext uri="{FF2B5EF4-FFF2-40B4-BE49-F238E27FC236}">
-                <a16:creationId xmlns:a16="http://schemas.microsoft.com/office/drawing/2014/main" id="{23A64C4D-1326-4B91-88C4-D13500F2C44C}"/>
+                <a16:creationId xmlns:a16="http://schemas.microsoft.com/office/drawing/2014/main" id="{CEB4BBAD-DE4D-4D58-AE20-BD2F146745AB}"/>
               </a:ext>
             </a:extLst>
           </p:cNvPr>
@@ -13384,7 +13384,7 @@
           <p:cNvPr id="26" name="">
             <a:extLst xmlns:a="http://schemas.openxmlformats.org/drawingml/2006/main">
               <a:ext uri="{FF2B5EF4-FFF2-40B4-BE49-F238E27FC236}">
-                <a16:creationId xmlns:a16="http://schemas.microsoft.com/office/drawing/2014/main" id="{EB4D11CD-7952-457A-B193-AEF991F0EB41}"/>
+                <a16:creationId xmlns:a16="http://schemas.microsoft.com/office/drawing/2014/main" id="{F7C5AF71-66ED-4523-A2E0-BDB29EBCBA5D}"/>
               </a:ext>
             </a:extLst>
           </p:cNvPr>
@@ -13415,7 +13415,7 @@
           <p:cNvPr id="27" name="source-3">
             <a:extLst xmlns:a="http://schemas.openxmlformats.org/drawingml/2006/main">
               <a:ext uri="{FF2B5EF4-FFF2-40B4-BE49-F238E27FC236}">
-                <a16:creationId xmlns:a16="http://schemas.microsoft.com/office/drawing/2014/main" id="{5465011E-8753-4CA1-8A52-C189DE9B142C}"/>
+                <a16:creationId xmlns:a16="http://schemas.microsoft.com/office/drawing/2014/main" id="{CAB7B782-A1A7-4940-BAEE-91B79E8F489D}"/>
               </a:ext>
             </a:extLst>
           </p:cNvPr>
@@ -13465,7 +13465,7 @@
           <p:cNvPr id="28" name="page-3">
             <a:extLst xmlns:a="http://schemas.openxmlformats.org/drawingml/2006/main">
               <a:ext uri="{FF2B5EF4-FFF2-40B4-BE49-F238E27FC236}">
-                <a16:creationId xmlns:a16="http://schemas.microsoft.com/office/drawing/2014/main" id="{AF3E1CDA-4CA2-4CF8-A84C-2859C190E8E7}"/>
+                <a16:creationId xmlns:a16="http://schemas.microsoft.com/office/drawing/2014/main" id="{184BFB37-E004-4769-91BD-4FF5C7635E38}"/>
               </a:ext>
             </a:extLst>
           </p:cNvPr>
@@ -13513,7 +13513,7 @@
     </p:spTree>
     <p:extLst>
       <p:ext uri="{BB962C8B-B14F-4D97-AF65-F5344CB8AC3E}">
-        <p14:creationId xmlns:p14="http://schemas.microsoft.com/office/powerpoint/2010/main" val="851341806"/>
+        <p14:creationId xmlns:p14="http://schemas.microsoft.com/office/powerpoint/2010/main" val="1534549032"/>
       </p:ext>
     </p:extLst>
   </p:cSld>
@@ -13544,7 +13544,7 @@
           <p:cNvPr id="49" name="kicker-4">
             <a:extLst xmlns:a="http://schemas.openxmlformats.org/drawingml/2006/main">
               <a:ext uri="{FF2B5EF4-FFF2-40B4-BE49-F238E27FC236}">
-                <a16:creationId xmlns:a16="http://schemas.microsoft.com/office/drawing/2014/main" id="{7A92DA30-FDBB-4708-A4BC-8F28C060FBEE}"/>
+                <a16:creationId xmlns:a16="http://schemas.microsoft.com/office/drawing/2014/main" id="{EEA26ABC-4DDE-4D32-9B8A-8138A9AFD781}"/>
               </a:ext>
             </a:extLst>
           </p:cNvPr>
@@ -13594,7 +13594,7 @@
           <p:cNvPr id="2" name="title-4">
             <a:extLst xmlns:a="http://schemas.openxmlformats.org/drawingml/2006/main">
               <a:ext uri="{FF2B5EF4-FFF2-40B4-BE49-F238E27FC236}">
-                <a16:creationId xmlns:a16="http://schemas.microsoft.com/office/drawing/2014/main" id="{074E97EA-2800-453A-A9BE-3C38ADF0616F}"/>
+                <a16:creationId xmlns:a16="http://schemas.microsoft.com/office/drawing/2014/main" id="{840044BE-EF8C-472B-B624-34B3C5C900C9}"/>
               </a:ext>
             </a:extLst>
           </p:cNvPr>
@@ -13644,7 +13644,7 @@
           <p:cNvPr id="3" name="">
             <a:extLst xmlns:a="http://schemas.openxmlformats.org/drawingml/2006/main">
               <a:ext uri="{FF2B5EF4-FFF2-40B4-BE49-F238E27FC236}">
-                <a16:creationId xmlns:a16="http://schemas.microsoft.com/office/drawing/2014/main" id="{2D3B87DC-D4A6-487D-A118-157A08A1BE5D}"/>
+                <a16:creationId xmlns:a16="http://schemas.microsoft.com/office/drawing/2014/main" id="{0104DCA3-371D-431F-95BE-8A1CCF2087C4}"/>
               </a:ext>
             </a:extLst>
           </p:cNvPr>
@@ -13675,7 +13675,7 @@
           <p:cNvPr id="4" name="">
             <a:extLst xmlns:a="http://schemas.openxmlformats.org/drawingml/2006/main">
               <a:ext uri="{FF2B5EF4-FFF2-40B4-BE49-F238E27FC236}">
-                <a16:creationId xmlns:a16="http://schemas.microsoft.com/office/drawing/2014/main" id="{F2547AFC-8C96-4718-A2D9-7AA81ED7E9BA}"/>
+                <a16:creationId xmlns:a16="http://schemas.microsoft.com/office/drawing/2014/main" id="{ADB9D797-5F59-43F2-8D2D-0509E2B18F70}"/>
               </a:ext>
             </a:extLst>
           </p:cNvPr>
@@ -13725,7 +13725,7 @@
           <p:cNvPr id="5" name="">
             <a:extLst xmlns:a="http://schemas.openxmlformats.org/drawingml/2006/main">
               <a:ext uri="{FF2B5EF4-FFF2-40B4-BE49-F238E27FC236}">
-                <a16:creationId xmlns:a16="http://schemas.microsoft.com/office/drawing/2014/main" id="{80A2BF3A-6846-4709-9C7D-3EFC25C3D251}"/>
+                <a16:creationId xmlns:a16="http://schemas.microsoft.com/office/drawing/2014/main" id="{A372A325-8460-4E4C-99E8-0ABF6B850988}"/>
               </a:ext>
             </a:extLst>
           </p:cNvPr>
@@ -13758,7 +13758,7 @@
           <p:cNvPr id="6" name="">
             <a:extLst xmlns:a="http://schemas.openxmlformats.org/drawingml/2006/main">
               <a:ext uri="{FF2B5EF4-FFF2-40B4-BE49-F238E27FC236}">
-                <a16:creationId xmlns:a16="http://schemas.microsoft.com/office/drawing/2014/main" id="{1D33BB3F-CF36-4A64-9539-5B63FB862CCF}"/>
+                <a16:creationId xmlns:a16="http://schemas.microsoft.com/office/drawing/2014/main" id="{CC9AB3D8-7B9C-41DB-B5E2-0806249E4766}"/>
               </a:ext>
             </a:extLst>
           </p:cNvPr>
@@ -13791,7 +13791,7 @@
           <p:cNvPr id="7" name="">
             <a:extLst xmlns:a="http://schemas.openxmlformats.org/drawingml/2006/main">
               <a:ext uri="{FF2B5EF4-FFF2-40B4-BE49-F238E27FC236}">
-                <a16:creationId xmlns:a16="http://schemas.microsoft.com/office/drawing/2014/main" id="{64CA2443-B169-4AF7-B783-3404F0FBB29B}"/>
+                <a16:creationId xmlns:a16="http://schemas.microsoft.com/office/drawing/2014/main" id="{D514B679-995A-4E6F-A992-5E7301F725EB}"/>
               </a:ext>
             </a:extLst>
           </p:cNvPr>
@@ -13824,7 +13824,7 @@
           <p:cNvPr id="8" name="">
             <a:extLst xmlns:a="http://schemas.openxmlformats.org/drawingml/2006/main">
               <a:ext uri="{FF2B5EF4-FFF2-40B4-BE49-F238E27FC236}">
-                <a16:creationId xmlns:a16="http://schemas.microsoft.com/office/drawing/2014/main" id="{F58AC71C-9B78-4ABB-A232-22CB6ACC73FB}"/>
+                <a16:creationId xmlns:a16="http://schemas.microsoft.com/office/drawing/2014/main" id="{CE500FA2-1212-4FAB-B7B6-03E60842ED41}"/>
               </a:ext>
             </a:extLst>
           </p:cNvPr>
@@ -13857,7 +13857,7 @@
           <p:cNvPr id="9" name="">
             <a:extLst xmlns:a="http://schemas.openxmlformats.org/drawingml/2006/main">
               <a:ext uri="{FF2B5EF4-FFF2-40B4-BE49-F238E27FC236}">
-                <a16:creationId xmlns:a16="http://schemas.microsoft.com/office/drawing/2014/main" id="{BBAD1DAA-2FF6-47F7-B303-6C0344382029}"/>
+                <a16:creationId xmlns:a16="http://schemas.microsoft.com/office/drawing/2014/main" id="{19FEC51A-E234-404E-B036-5307AC37A108}"/>
               </a:ext>
             </a:extLst>
           </p:cNvPr>
@@ -13890,7 +13890,7 @@
           <p:cNvPr id="10" name="">
             <a:extLst xmlns:a="http://schemas.openxmlformats.org/drawingml/2006/main">
               <a:ext uri="{FF2B5EF4-FFF2-40B4-BE49-F238E27FC236}">
-                <a16:creationId xmlns:a16="http://schemas.microsoft.com/office/drawing/2014/main" id="{78873D9A-079D-4D9F-ACC8-114A2D37131E}"/>
+                <a16:creationId xmlns:a16="http://schemas.microsoft.com/office/drawing/2014/main" id="{D720A769-8C07-43B1-85C4-B0EFAE2EB318}"/>
               </a:ext>
             </a:extLst>
           </p:cNvPr>
@@ -13923,7 +13923,7 @@
           <p:cNvPr id="11" name="">
             <a:extLst xmlns:a="http://schemas.openxmlformats.org/drawingml/2006/main">
               <a:ext uri="{FF2B5EF4-FFF2-40B4-BE49-F238E27FC236}">
-                <a16:creationId xmlns:a16="http://schemas.microsoft.com/office/drawing/2014/main" id="{1AAB3976-A3D0-4DA7-98B4-BBCC3CFAA4D5}"/>
+                <a16:creationId xmlns:a16="http://schemas.microsoft.com/office/drawing/2014/main" id="{3BC1CBE0-5CCE-4325-A89E-F76977E06148}"/>
               </a:ext>
             </a:extLst>
           </p:cNvPr>
@@ -13956,7 +13956,7 @@
           <p:cNvPr id="12" name="">
             <a:extLst xmlns:a="http://schemas.openxmlformats.org/drawingml/2006/main">
               <a:ext uri="{FF2B5EF4-FFF2-40B4-BE49-F238E27FC236}">
-                <a16:creationId xmlns:a16="http://schemas.microsoft.com/office/drawing/2014/main" id="{0B5C22D2-18D5-45ED-B538-D81D1B143D8D}"/>
+                <a16:creationId xmlns:a16="http://schemas.microsoft.com/office/drawing/2014/main" id="{5A7E1B95-1BF8-477A-ACF8-F5F7E592F6AF}"/>
               </a:ext>
             </a:extLst>
           </p:cNvPr>
@@ -13989,7 +13989,7 @@
           <p:cNvPr id="13" name="">
             <a:extLst xmlns:a="http://schemas.openxmlformats.org/drawingml/2006/main">
               <a:ext uri="{FF2B5EF4-FFF2-40B4-BE49-F238E27FC236}">
-                <a16:creationId xmlns:a16="http://schemas.microsoft.com/office/drawing/2014/main" id="{F4B92989-1A71-4759-8C40-22795D643C3D}"/>
+                <a16:creationId xmlns:a16="http://schemas.microsoft.com/office/drawing/2014/main" id="{17B6013C-A235-43B1-9932-9E0B67F96F14}"/>
               </a:ext>
             </a:extLst>
           </p:cNvPr>
@@ -14030,7 +14030,7 @@
           <p:cNvPr id="14" name="">
             <a:extLst xmlns:a="http://schemas.openxmlformats.org/drawingml/2006/main">
               <a:ext uri="{FF2B5EF4-FFF2-40B4-BE49-F238E27FC236}">
-                <a16:creationId xmlns:a16="http://schemas.microsoft.com/office/drawing/2014/main" id="{C425A085-103D-4838-9DBC-A8A197B5A282}"/>
+                <a16:creationId xmlns:a16="http://schemas.microsoft.com/office/drawing/2014/main" id="{B172E289-3EB1-4CD0-9717-958A64B80928}"/>
               </a:ext>
             </a:extLst>
           </p:cNvPr>
@@ -14080,7 +14080,7 @@
           <p:cNvPr id="15" name="">
             <a:extLst xmlns:a="http://schemas.openxmlformats.org/drawingml/2006/main">
               <a:ext uri="{FF2B5EF4-FFF2-40B4-BE49-F238E27FC236}">
-                <a16:creationId xmlns:a16="http://schemas.microsoft.com/office/drawing/2014/main" id="{9EF38E10-A386-430A-8D7B-BEB5F170045E}"/>
+                <a16:creationId xmlns:a16="http://schemas.microsoft.com/office/drawing/2014/main" id="{5FA8BEC0-92C7-41FB-9553-9B22781C78A0}"/>
               </a:ext>
             </a:extLst>
           </p:cNvPr>
@@ -14120,7 +14120,7 @@
                   <a:srgbClr val="526174"/>
                 </a:solidFill>
               </a:rPr>
-              <a:t>normalize</a:t>
+              <a:t>input</a:t>
             </a:r>
           </a:p>
         </p:txBody>
@@ -14130,7 +14130,7 @@
           <p:cNvPr id="16" name="">
             <a:extLst xmlns:a="http://schemas.openxmlformats.org/drawingml/2006/main">
               <a:ext uri="{FF2B5EF4-FFF2-40B4-BE49-F238E27FC236}">
-                <a16:creationId xmlns:a16="http://schemas.microsoft.com/office/drawing/2014/main" id="{D9EFC611-389B-4DD5-8F1F-79C3B1ECD443}"/>
+                <a16:creationId xmlns:a16="http://schemas.microsoft.com/office/drawing/2014/main" id="{62F3FF52-73A0-4AFD-A1BD-FED654AC28A5}"/>
               </a:ext>
             </a:extLst>
           </p:cNvPr>
@@ -14163,7 +14163,7 @@
           <p:cNvPr id="17" name="">
             <a:extLst xmlns:a="http://schemas.openxmlformats.org/drawingml/2006/main">
               <a:ext uri="{FF2B5EF4-FFF2-40B4-BE49-F238E27FC236}">
-                <a16:creationId xmlns:a16="http://schemas.microsoft.com/office/drawing/2014/main" id="{E99BFED5-C8C7-4766-AB91-87566523A44E}"/>
+                <a16:creationId xmlns:a16="http://schemas.microsoft.com/office/drawing/2014/main" id="{6B92B6C2-85A8-4C1E-B6F7-76357FAFA148}"/>
               </a:ext>
             </a:extLst>
           </p:cNvPr>
@@ -14230,7 +14230,7 @@
           <p:cNvPr id="18" name="">
             <a:extLst xmlns:a="http://schemas.openxmlformats.org/drawingml/2006/main">
               <a:ext uri="{FF2B5EF4-FFF2-40B4-BE49-F238E27FC236}">
-                <a16:creationId xmlns:a16="http://schemas.microsoft.com/office/drawing/2014/main" id="{484FADEB-96E4-4AEF-B82F-4E6AF82004F5}"/>
+                <a16:creationId xmlns:a16="http://schemas.microsoft.com/office/drawing/2014/main" id="{56C44641-4D74-4DE8-AC64-9E1A7F2B2BFA}"/>
               </a:ext>
             </a:extLst>
           </p:cNvPr>
@@ -14263,7 +14263,7 @@
           <p:cNvPr id="19" name="">
             <a:extLst xmlns:a="http://schemas.openxmlformats.org/drawingml/2006/main">
               <a:ext uri="{FF2B5EF4-FFF2-40B4-BE49-F238E27FC236}">
-                <a16:creationId xmlns:a16="http://schemas.microsoft.com/office/drawing/2014/main" id="{A9142BF5-0034-4EA2-801B-CAF3952E7BE6}"/>
+                <a16:creationId xmlns:a16="http://schemas.microsoft.com/office/drawing/2014/main" id="{DE66F663-7660-429B-B2D6-902C236EBD91}"/>
               </a:ext>
             </a:extLst>
           </p:cNvPr>
@@ -14330,7 +14330,7 @@
           <p:cNvPr id="20" name="">
             <a:extLst xmlns:a="http://schemas.openxmlformats.org/drawingml/2006/main">
               <a:ext uri="{FF2B5EF4-FFF2-40B4-BE49-F238E27FC236}">
-                <a16:creationId xmlns:a16="http://schemas.microsoft.com/office/drawing/2014/main" id="{A3FDDE26-0A1A-49FF-A1D6-848CD89880B3}"/>
+                <a16:creationId xmlns:a16="http://schemas.microsoft.com/office/drawing/2014/main" id="{90D15550-92FB-48EB-9B11-18D2F867E8FD}"/>
               </a:ext>
             </a:extLst>
           </p:cNvPr>
@@ -14363,7 +14363,7 @@
           <p:cNvPr id="21" name="">
             <a:extLst xmlns:a="http://schemas.openxmlformats.org/drawingml/2006/main">
               <a:ext uri="{FF2B5EF4-FFF2-40B4-BE49-F238E27FC236}">
-                <a16:creationId xmlns:a16="http://schemas.microsoft.com/office/drawing/2014/main" id="{E89D0D8B-143E-4036-9518-3753B2A97311}"/>
+                <a16:creationId xmlns:a16="http://schemas.microsoft.com/office/drawing/2014/main" id="{105B0032-8B6C-4BA9-81D6-78A4C14685BA}"/>
               </a:ext>
             </a:extLst>
           </p:cNvPr>
@@ -14430,7 +14430,7 @@
           <p:cNvPr id="22" name="">
             <a:extLst xmlns:a="http://schemas.openxmlformats.org/drawingml/2006/main">
               <a:ext uri="{FF2B5EF4-FFF2-40B4-BE49-F238E27FC236}">
-                <a16:creationId xmlns:a16="http://schemas.microsoft.com/office/drawing/2014/main" id="{E33FC659-DEB8-4456-A209-389AFF1CAF16}"/>
+                <a16:creationId xmlns:a16="http://schemas.microsoft.com/office/drawing/2014/main" id="{13C0FF05-5AD9-40ED-8533-E63CD5841F6A}"/>
               </a:ext>
             </a:extLst>
           </p:cNvPr>
@@ -14480,7 +14480,7 @@
           <p:cNvPr id="23" name="">
             <a:extLst xmlns:a="http://schemas.openxmlformats.org/drawingml/2006/main">
               <a:ext uri="{FF2B5EF4-FFF2-40B4-BE49-F238E27FC236}">
-                <a16:creationId xmlns:a16="http://schemas.microsoft.com/office/drawing/2014/main" id="{049FFDE3-C19F-4AC1-B6CF-B8D41A483B0A}"/>
+                <a16:creationId xmlns:a16="http://schemas.microsoft.com/office/drawing/2014/main" id="{3FDD1E85-FBDE-457C-B6F1-6B776865EC0E}"/>
               </a:ext>
             </a:extLst>
           </p:cNvPr>
@@ -14530,7 +14530,7 @@
           <p:cNvPr id="24" name="">
             <a:extLst xmlns:a="http://schemas.openxmlformats.org/drawingml/2006/main">
               <a:ext uri="{FF2B5EF4-FFF2-40B4-BE49-F238E27FC236}">
-                <a16:creationId xmlns:a16="http://schemas.microsoft.com/office/drawing/2014/main" id="{594A78BA-E7B8-46AE-B242-E0D9B98E72CD}"/>
+                <a16:creationId xmlns:a16="http://schemas.microsoft.com/office/drawing/2014/main" id="{1382C31C-BFA8-4F0F-92CF-C73E9C13D72E}"/>
               </a:ext>
             </a:extLst>
           </p:cNvPr>
@@ -14580,7 +14580,7 @@
           <p:cNvPr id="25" name="">
             <a:extLst xmlns:a="http://schemas.openxmlformats.org/drawingml/2006/main">
               <a:ext uri="{FF2B5EF4-FFF2-40B4-BE49-F238E27FC236}">
-                <a16:creationId xmlns:a16="http://schemas.microsoft.com/office/drawing/2014/main" id="{885CCC30-9336-4803-B73B-7CF450A9368C}"/>
+                <a16:creationId xmlns:a16="http://schemas.microsoft.com/office/drawing/2014/main" id="{1F6BB66D-0D3C-46B1-BDB8-F951B3B8048E}"/>
               </a:ext>
             </a:extLst>
           </p:cNvPr>
@@ -14630,7 +14630,7 @@
           <p:cNvPr id="26" name="">
             <a:extLst xmlns:a="http://schemas.openxmlformats.org/drawingml/2006/main">
               <a:ext uri="{FF2B5EF4-FFF2-40B4-BE49-F238E27FC236}">
-                <a16:creationId xmlns:a16="http://schemas.microsoft.com/office/drawing/2014/main" id="{0BD7D5DD-1FBC-49CF-B6A4-D54C444B0FBE}"/>
+                <a16:creationId xmlns:a16="http://schemas.microsoft.com/office/drawing/2014/main" id="{621DD55A-DDD3-4BFB-BE9F-1CB7F445E838}"/>
               </a:ext>
             </a:extLst>
           </p:cNvPr>
@@ -14680,7 +14680,7 @@
           <p:cNvPr id="27" name="">
             <a:extLst xmlns:a="http://schemas.openxmlformats.org/drawingml/2006/main">
               <a:ext uri="{FF2B5EF4-FFF2-40B4-BE49-F238E27FC236}">
-                <a16:creationId xmlns:a16="http://schemas.microsoft.com/office/drawing/2014/main" id="{AF10906D-D499-48B8-A41A-226BDEF26000}"/>
+                <a16:creationId xmlns:a16="http://schemas.microsoft.com/office/drawing/2014/main" id="{4EF5576D-8393-4672-AD30-951C6E1B6612}"/>
               </a:ext>
             </a:extLst>
           </p:cNvPr>
@@ -14730,7 +14730,7 @@
           <p:cNvPr id="28" name="">
             <a:extLst xmlns:a="http://schemas.openxmlformats.org/drawingml/2006/main">
               <a:ext uri="{FF2B5EF4-FFF2-40B4-BE49-F238E27FC236}">
-                <a16:creationId xmlns:a16="http://schemas.microsoft.com/office/drawing/2014/main" id="{93F8E1E4-F5D1-402C-83C2-86AF6A25CD38}"/>
+                <a16:creationId xmlns:a16="http://schemas.microsoft.com/office/drawing/2014/main" id="{6809E94B-D065-40E7-8856-437D2F4EDFD0}"/>
               </a:ext>
             </a:extLst>
           </p:cNvPr>
@@ -14742,11 +14742,11 @@
         <p:spPr>
           <a:xfrm xmlns:a="http://schemas.openxmlformats.org/drawingml/2006/main">
             <a:off x="2038350" y="3733800"/>
-            <a:ext cx="1676400" cy="1104900"/>
+            <a:ext cx="1676400" cy="1428750"/>
           </a:xfrm>
           <a:prstGeom xmlns:a="http://schemas.openxmlformats.org/drawingml/2006/main" prst="roundRect">
             <a:avLst>
-              <a:gd name="adj" fmla="val 12069"/>
+              <a:gd name="adj" fmla="val 9333"/>
             </a:avLst>
           </a:prstGeom>
           <a:solidFill xmlns:a="http://schemas.openxmlformats.org/drawingml/2006/main">
@@ -14765,19 +14765,19 @@
           <p:cNvPr id="29" name="">
             <a:extLst xmlns:a="http://schemas.openxmlformats.org/drawingml/2006/main">
               <a:ext uri="{FF2B5EF4-FFF2-40B4-BE49-F238E27FC236}">
-                <a16:creationId xmlns:a16="http://schemas.microsoft.com/office/drawing/2014/main" id="{5D78A324-1506-4C02-AEDD-251DC7502272}"/>
-              </a:ext>
-            </a:extLst>
-          </p:cNvPr>
-          <p:cNvSpPr>
-            <a:spLocks xmlns:a="http://schemas.openxmlformats.org/drawingml/2006/main" noGrp="1"/>
-          </p:cNvSpPr>
-          <p:nvPr/>
-        </p:nvSpPr>
-        <p:spPr>
-          <a:xfrm xmlns:a="http://schemas.openxmlformats.org/drawingml/2006/main">
-            <a:off x="2171700" y="3914775"/>
-            <a:ext cx="1409700" cy="266700"/>
+                <a16:creationId xmlns:a16="http://schemas.microsoft.com/office/drawing/2014/main" id="{375CD964-FD1A-4C44-8F0E-69328803C962}"/>
+              </a:ext>
+            </a:extLst>
+          </p:cNvPr>
+          <p:cNvSpPr>
+            <a:spLocks xmlns:a="http://schemas.openxmlformats.org/drawingml/2006/main" noGrp="1"/>
+          </p:cNvSpPr>
+          <p:nvPr/>
+        </p:nvSpPr>
+        <p:spPr>
+          <a:xfrm xmlns:a="http://schemas.openxmlformats.org/drawingml/2006/main">
+            <a:off x="2171700" y="3848100"/>
+            <a:ext cx="1409700" cy="457200"/>
           </a:xfrm>
           <a:prstGeom xmlns:a="http://schemas.openxmlformats.org/drawingml/2006/main" prst="rect">
             <a:avLst/>
@@ -14793,19 +14793,36 @@
           <a:lstStyle xmlns:a="http://schemas.openxmlformats.org/drawingml/2006/main"/>
           <a:p xmlns:a="http://schemas.openxmlformats.org/drawingml/2006/main">
             <a:pPr algn="ctr">
-              <a:defRPr sz="1425" b="1">
+              <a:defRPr sz="1350" b="1">
                 <a:solidFill>
                   <a:srgbClr val="0F172A"/>
                 </a:solidFill>
               </a:defRPr>
             </a:pPr>
             <a:r>
-              <a:rPr sz="1425" b="1">
+              <a:rPr sz="1350" b="1">
                 <a:solidFill>
                   <a:srgbClr val="0F172A"/>
                 </a:solidFill>
               </a:rPr>
-              <a:t>Context verifier</a:t>
+              <a:t>Context</a:t>
+            </a:r>
+          </a:p>
+          <a:p xmlns:a="http://schemas.openxmlformats.org/drawingml/2006/main">
+            <a:pPr algn="ctr">
+              <a:defRPr sz="1350" b="1">
+                <a:solidFill>
+                  <a:srgbClr val="0F172A"/>
+                </a:solidFill>
+              </a:defRPr>
+            </a:pPr>
+            <a:r>
+              <a:rPr sz="1350" b="1">
+                <a:solidFill>
+                  <a:srgbClr val="0F172A"/>
+                </a:solidFill>
+              </a:rPr>
+              <a:t>verifier</a:t>
             </a:r>
           </a:p>
         </p:txBody>
@@ -14815,19 +14832,19 @@
           <p:cNvPr id="30" name="">
             <a:extLst xmlns:a="http://schemas.openxmlformats.org/drawingml/2006/main">
               <a:ext uri="{FF2B5EF4-FFF2-40B4-BE49-F238E27FC236}">
-                <a16:creationId xmlns:a16="http://schemas.microsoft.com/office/drawing/2014/main" id="{27066154-D9F7-490D-82A6-273F96E605F2}"/>
-              </a:ext>
-            </a:extLst>
-          </p:cNvPr>
-          <p:cNvSpPr>
-            <a:spLocks xmlns:a="http://schemas.openxmlformats.org/drawingml/2006/main" noGrp="1"/>
-          </p:cNvSpPr>
-          <p:nvPr/>
-        </p:nvSpPr>
-        <p:spPr>
-          <a:xfrm xmlns:a="http://schemas.openxmlformats.org/drawingml/2006/main">
-            <a:off x="2171700" y="4267200"/>
-            <a:ext cx="1409700" cy="438150"/>
+                <a16:creationId xmlns:a16="http://schemas.microsoft.com/office/drawing/2014/main" id="{B462505D-5F55-4299-8B44-D6E4C9CF89AD}"/>
+              </a:ext>
+            </a:extLst>
+          </p:cNvPr>
+          <p:cNvSpPr>
+            <a:spLocks xmlns:a="http://schemas.openxmlformats.org/drawingml/2006/main" noGrp="1"/>
+          </p:cNvSpPr>
+          <p:nvPr/>
+        </p:nvSpPr>
+        <p:spPr>
+          <a:xfrm xmlns:a="http://schemas.openxmlformats.org/drawingml/2006/main">
+            <a:off x="2171700" y="4438650"/>
+            <a:ext cx="1409700" cy="590550"/>
           </a:xfrm>
           <a:prstGeom xmlns:a="http://schemas.openxmlformats.org/drawingml/2006/main" prst="rect">
             <a:avLst/>
@@ -14843,19 +14860,36 @@
           <a:lstStyle xmlns:a="http://schemas.openxmlformats.org/drawingml/2006/main"/>
           <a:p xmlns:a="http://schemas.openxmlformats.org/drawingml/2006/main">
             <a:pPr algn="ctr">
-              <a:defRPr sz="1125" b="0">
-                <a:solidFill>
-                  <a:srgbClr val="526174"/>
-                </a:solidFill>
-              </a:defRPr>
-            </a:pPr>
-            <a:r>
-              <a:rPr sz="1125" b="0">
-                <a:solidFill>
-                  <a:srgbClr val="526174"/>
-                </a:solidFill>
-              </a:rPr>
-              <a:t>claim support, contradiction, extra claims</a:t>
+              <a:defRPr sz="1200" b="0">
+                <a:solidFill>
+                  <a:srgbClr val="526174"/>
+                </a:solidFill>
+              </a:defRPr>
+            </a:pPr>
+            <a:r>
+              <a:rPr sz="1200" b="0">
+                <a:solidFill>
+                  <a:srgbClr val="526174"/>
+                </a:solidFill>
+              </a:rPr>
+              <a:t>support or contradict</a:t>
+            </a:r>
+          </a:p>
+          <a:p xmlns:a="http://schemas.openxmlformats.org/drawingml/2006/main">
+            <a:pPr algn="ctr">
+              <a:defRPr sz="1200" b="0">
+                <a:solidFill>
+                  <a:srgbClr val="526174"/>
+                </a:solidFill>
+              </a:defRPr>
+            </a:pPr>
+            <a:r>
+              <a:rPr sz="1200" b="0">
+                <a:solidFill>
+                  <a:srgbClr val="526174"/>
+                </a:solidFill>
+              </a:rPr>
+              <a:t>extra-claim check</a:t>
             </a:r>
           </a:p>
         </p:txBody>
@@ -14865,7 +14899,7 @@
           <p:cNvPr id="31" name="">
             <a:extLst xmlns:a="http://schemas.openxmlformats.org/drawingml/2006/main">
               <a:ext uri="{FF2B5EF4-FFF2-40B4-BE49-F238E27FC236}">
-                <a16:creationId xmlns:a16="http://schemas.microsoft.com/office/drawing/2014/main" id="{594AAB0F-6A0F-48F7-96D6-0090EC2CB85E}"/>
+                <a16:creationId xmlns:a16="http://schemas.microsoft.com/office/drawing/2014/main" id="{0627C7A7-7E6B-49AD-AB18-CC8046052ADA}"/>
               </a:ext>
             </a:extLst>
           </p:cNvPr>
@@ -14877,11 +14911,11 @@
         <p:spPr>
           <a:xfrm xmlns:a="http://schemas.openxmlformats.org/drawingml/2006/main">
             <a:off x="3962400" y="3733800"/>
-            <a:ext cx="1676400" cy="1104900"/>
+            <a:ext cx="1676400" cy="1428750"/>
           </a:xfrm>
           <a:prstGeom xmlns:a="http://schemas.openxmlformats.org/drawingml/2006/main" prst="roundRect">
             <a:avLst>
-              <a:gd name="adj" fmla="val 12069"/>
+              <a:gd name="adj" fmla="val 9333"/>
             </a:avLst>
           </a:prstGeom>
           <a:solidFill xmlns:a="http://schemas.openxmlformats.org/drawingml/2006/main">
@@ -14900,19 +14934,19 @@
           <p:cNvPr id="32" name="">
             <a:extLst xmlns:a="http://schemas.openxmlformats.org/drawingml/2006/main">
               <a:ext uri="{FF2B5EF4-FFF2-40B4-BE49-F238E27FC236}">
-                <a16:creationId xmlns:a16="http://schemas.microsoft.com/office/drawing/2014/main" id="{F6B150F2-3E97-46EF-83A6-67DCA019BB29}"/>
-              </a:ext>
-            </a:extLst>
-          </p:cNvPr>
-          <p:cNvSpPr>
-            <a:spLocks xmlns:a="http://schemas.openxmlformats.org/drawingml/2006/main" noGrp="1"/>
-          </p:cNvSpPr>
-          <p:nvPr/>
-        </p:nvSpPr>
-        <p:spPr>
-          <a:xfrm xmlns:a="http://schemas.openxmlformats.org/drawingml/2006/main">
-            <a:off x="4095750" y="3914775"/>
-            <a:ext cx="1409700" cy="266700"/>
+                <a16:creationId xmlns:a16="http://schemas.microsoft.com/office/drawing/2014/main" id="{9B3690C3-94D3-4B7A-B0EF-7AD59563C39C}"/>
+              </a:ext>
+            </a:extLst>
+          </p:cNvPr>
+          <p:cNvSpPr>
+            <a:spLocks xmlns:a="http://schemas.openxmlformats.org/drawingml/2006/main" noGrp="1"/>
+          </p:cNvSpPr>
+          <p:nvPr/>
+        </p:nvSpPr>
+        <p:spPr>
+          <a:xfrm xmlns:a="http://schemas.openxmlformats.org/drawingml/2006/main">
+            <a:off x="4095750" y="3848100"/>
+            <a:ext cx="1409700" cy="457200"/>
           </a:xfrm>
           <a:prstGeom xmlns:a="http://schemas.openxmlformats.org/drawingml/2006/main" prst="rect">
             <a:avLst/>
@@ -14928,19 +14962,36 @@
           <a:lstStyle xmlns:a="http://schemas.openxmlformats.org/drawingml/2006/main"/>
           <a:p xmlns:a="http://schemas.openxmlformats.org/drawingml/2006/main">
             <a:pPr algn="ctr">
-              <a:defRPr sz="1425" b="1">
+              <a:defRPr sz="1350" b="1">
                 <a:solidFill>
                   <a:srgbClr val="0F172A"/>
                 </a:solidFill>
               </a:defRPr>
             </a:pPr>
             <a:r>
-              <a:rPr sz="1425" b="1">
+              <a:rPr sz="1350" b="1">
                 <a:solidFill>
                   <a:srgbClr val="0F172A"/>
                 </a:solidFill>
               </a:rPr>
-              <a:t>Structured solver</a:t>
+              <a:t>Structured</a:t>
+            </a:r>
+          </a:p>
+          <a:p xmlns:a="http://schemas.openxmlformats.org/drawingml/2006/main">
+            <a:pPr algn="ctr">
+              <a:defRPr sz="1350" b="1">
+                <a:solidFill>
+                  <a:srgbClr val="0F172A"/>
+                </a:solidFill>
+              </a:defRPr>
+            </a:pPr>
+            <a:r>
+              <a:rPr sz="1350" b="1">
+                <a:solidFill>
+                  <a:srgbClr val="0F172A"/>
+                </a:solidFill>
+              </a:rPr>
+              <a:t>solver</a:t>
             </a:r>
           </a:p>
         </p:txBody>
@@ -14950,19 +15001,19 @@
           <p:cNvPr id="33" name="">
             <a:extLst xmlns:a="http://schemas.openxmlformats.org/drawingml/2006/main">
               <a:ext uri="{FF2B5EF4-FFF2-40B4-BE49-F238E27FC236}">
-                <a16:creationId xmlns:a16="http://schemas.microsoft.com/office/drawing/2014/main" id="{91140818-E0A3-49A9-97CE-A6CFAD46109A}"/>
-              </a:ext>
-            </a:extLst>
-          </p:cNvPr>
-          <p:cNvSpPr>
-            <a:spLocks xmlns:a="http://schemas.openxmlformats.org/drawingml/2006/main" noGrp="1"/>
-          </p:cNvSpPr>
-          <p:nvPr/>
-        </p:nvSpPr>
-        <p:spPr>
-          <a:xfrm xmlns:a="http://schemas.openxmlformats.org/drawingml/2006/main">
-            <a:off x="4095750" y="4267200"/>
-            <a:ext cx="1409700" cy="438150"/>
+                <a16:creationId xmlns:a16="http://schemas.microsoft.com/office/drawing/2014/main" id="{11D396E4-6948-4AA5-9522-1488A8C2B5F1}"/>
+              </a:ext>
+            </a:extLst>
+          </p:cNvPr>
+          <p:cNvSpPr>
+            <a:spLocks xmlns:a="http://schemas.openxmlformats.org/drawingml/2006/main" noGrp="1"/>
+          </p:cNvSpPr>
+          <p:nvPr/>
+        </p:nvSpPr>
+        <p:spPr>
+          <a:xfrm xmlns:a="http://schemas.openxmlformats.org/drawingml/2006/main">
+            <a:off x="4095750" y="4438650"/>
+            <a:ext cx="1409700" cy="590550"/>
           </a:xfrm>
           <a:prstGeom xmlns:a="http://schemas.openxmlformats.org/drawingml/2006/main" prst="rect">
             <a:avLst/>
@@ -14978,19 +15029,36 @@
           <a:lstStyle xmlns:a="http://schemas.openxmlformats.org/drawingml/2006/main"/>
           <a:p xmlns:a="http://schemas.openxmlformats.org/drawingml/2006/main">
             <a:pPr algn="ctr">
-              <a:defRPr sz="1125" b="0">
-                <a:solidFill>
-                  <a:srgbClr val="526174"/>
-                </a:solidFill>
-              </a:defRPr>
-            </a:pPr>
-            <a:r>
-              <a:rPr sz="1125" b="0">
-                <a:solidFill>
-                  <a:srgbClr val="526174"/>
-                </a:solidFill>
-              </a:rPr>
-              <a:t>numbers, ranges, MCQ, morphology</a:t>
+              <a:defRPr sz="1200" b="0">
+                <a:solidFill>
+                  <a:srgbClr val="526174"/>
+                </a:solidFill>
+              </a:defRPr>
+            </a:pPr>
+            <a:r>
+              <a:rPr sz="1200" b="0">
+                <a:solidFill>
+                  <a:srgbClr val="526174"/>
+                </a:solidFill>
+              </a:rPr>
+              <a:t>numeric / MCQ</a:t>
+            </a:r>
+          </a:p>
+          <a:p xmlns:a="http://schemas.openxmlformats.org/drawingml/2006/main">
+            <a:pPr algn="ctr">
+              <a:defRPr sz="1200" b="0">
+                <a:solidFill>
+                  <a:srgbClr val="526174"/>
+                </a:solidFill>
+              </a:defRPr>
+            </a:pPr>
+            <a:r>
+              <a:rPr sz="1200" b="0">
+                <a:solidFill>
+                  <a:srgbClr val="526174"/>
+                </a:solidFill>
+              </a:rPr>
+              <a:t>morphology</a:t>
             </a:r>
           </a:p>
         </p:txBody>
@@ -15000,7 +15068,7 @@
           <p:cNvPr id="34" name="">
             <a:extLst xmlns:a="http://schemas.openxmlformats.org/drawingml/2006/main">
               <a:ext uri="{FF2B5EF4-FFF2-40B4-BE49-F238E27FC236}">
-                <a16:creationId xmlns:a16="http://schemas.microsoft.com/office/drawing/2014/main" id="{85A5A3FC-0EDC-4235-8CFF-F3F05E984B69}"/>
+                <a16:creationId xmlns:a16="http://schemas.microsoft.com/office/drawing/2014/main" id="{56717FF6-02BB-4322-97A1-C73AB1993A6E}"/>
               </a:ext>
             </a:extLst>
           </p:cNvPr>
@@ -15012,11 +15080,11 @@
         <p:spPr>
           <a:xfrm xmlns:a="http://schemas.openxmlformats.org/drawingml/2006/main">
             <a:off x="5886450" y="3733800"/>
-            <a:ext cx="1676400" cy="1104900"/>
+            <a:ext cx="1676400" cy="1428750"/>
           </a:xfrm>
           <a:prstGeom xmlns:a="http://schemas.openxmlformats.org/drawingml/2006/main" prst="roundRect">
             <a:avLst>
-              <a:gd name="adj" fmla="val 12069"/>
+              <a:gd name="adj" fmla="val 9333"/>
             </a:avLst>
           </a:prstGeom>
           <a:solidFill xmlns:a="http://schemas.openxmlformats.org/drawingml/2006/main">
@@ -15035,19 +15103,19 @@
           <p:cNvPr id="35" name="">
             <a:extLst xmlns:a="http://schemas.openxmlformats.org/drawingml/2006/main">
               <a:ext uri="{FF2B5EF4-FFF2-40B4-BE49-F238E27FC236}">
-                <a16:creationId xmlns:a16="http://schemas.microsoft.com/office/drawing/2014/main" id="{C46BA838-2D52-45E9-932D-6729DD6D9AF9}"/>
-              </a:ext>
-            </a:extLst>
-          </p:cNvPr>
-          <p:cNvSpPr>
-            <a:spLocks xmlns:a="http://schemas.openxmlformats.org/drawingml/2006/main" noGrp="1"/>
-          </p:cNvSpPr>
-          <p:nvPr/>
-        </p:nvSpPr>
-        <p:spPr>
-          <a:xfrm xmlns:a="http://schemas.openxmlformats.org/drawingml/2006/main">
-            <a:off x="6019800" y="3914775"/>
-            <a:ext cx="1409700" cy="266700"/>
+                <a16:creationId xmlns:a16="http://schemas.microsoft.com/office/drawing/2014/main" id="{40386537-AF7A-4FD6-8920-A5485A52937E}"/>
+              </a:ext>
+            </a:extLst>
+          </p:cNvPr>
+          <p:cNvSpPr>
+            <a:spLocks xmlns:a="http://schemas.openxmlformats.org/drawingml/2006/main" noGrp="1"/>
+          </p:cNvSpPr>
+          <p:nvPr/>
+        </p:nvSpPr>
+        <p:spPr>
+          <a:xfrm xmlns:a="http://schemas.openxmlformats.org/drawingml/2006/main">
+            <a:off x="6019800" y="3848100"/>
+            <a:ext cx="1409700" cy="457200"/>
           </a:xfrm>
           <a:prstGeom xmlns:a="http://schemas.openxmlformats.org/drawingml/2006/main" prst="rect">
             <a:avLst/>
@@ -15063,19 +15131,36 @@
           <a:lstStyle xmlns:a="http://schemas.openxmlformats.org/drawingml/2006/main"/>
           <a:p xmlns:a="http://schemas.openxmlformats.org/drawingml/2006/main">
             <a:pPr algn="ctr">
-              <a:defRPr sz="1425" b="1">
+              <a:defRPr sz="1350" b="1">
                 <a:solidFill>
                   <a:srgbClr val="0F172A"/>
                 </a:solidFill>
               </a:defRPr>
             </a:pPr>
             <a:r>
-              <a:rPr sz="1425" b="1">
+              <a:rPr sz="1350" b="1">
                 <a:solidFill>
                   <a:srgbClr val="0F172A"/>
                 </a:solidFill>
               </a:rPr>
-              <a:t>Typed evidence</a:t>
+              <a:t>Typed</a:t>
+            </a:r>
+          </a:p>
+          <a:p xmlns:a="http://schemas.openxmlformats.org/drawingml/2006/main">
+            <a:pPr algn="ctr">
+              <a:defRPr sz="1350" b="1">
+                <a:solidFill>
+                  <a:srgbClr val="0F172A"/>
+                </a:solidFill>
+              </a:defRPr>
+            </a:pPr>
+            <a:r>
+              <a:rPr sz="1350" b="1">
+                <a:solidFill>
+                  <a:srgbClr val="0F172A"/>
+                </a:solidFill>
+              </a:rPr>
+              <a:t>evidence</a:t>
             </a:r>
           </a:p>
         </p:txBody>
@@ -15085,19 +15170,19 @@
           <p:cNvPr id="36" name="">
             <a:extLst xmlns:a="http://schemas.openxmlformats.org/drawingml/2006/main">
               <a:ext uri="{FF2B5EF4-FFF2-40B4-BE49-F238E27FC236}">
-                <a16:creationId xmlns:a16="http://schemas.microsoft.com/office/drawing/2014/main" id="{0D5A5E75-4D99-4824-9A2D-2FB061CBDB50}"/>
-              </a:ext>
-            </a:extLst>
-          </p:cNvPr>
-          <p:cNvSpPr>
-            <a:spLocks xmlns:a="http://schemas.openxmlformats.org/drawingml/2006/main" noGrp="1"/>
-          </p:cNvSpPr>
-          <p:nvPr/>
-        </p:nvSpPr>
-        <p:spPr>
-          <a:xfrm xmlns:a="http://schemas.openxmlformats.org/drawingml/2006/main">
-            <a:off x="6019800" y="4267200"/>
-            <a:ext cx="1409700" cy="438150"/>
+                <a16:creationId xmlns:a16="http://schemas.microsoft.com/office/drawing/2014/main" id="{ADE2588D-42A5-4EB8-A816-0A91A203C763}"/>
+              </a:ext>
+            </a:extLst>
+          </p:cNvPr>
+          <p:cNvSpPr>
+            <a:spLocks xmlns:a="http://schemas.openxmlformats.org/drawingml/2006/main" noGrp="1"/>
+          </p:cNvSpPr>
+          <p:nvPr/>
+        </p:nvSpPr>
+        <p:spPr>
+          <a:xfrm xmlns:a="http://schemas.openxmlformats.org/drawingml/2006/main">
+            <a:off x="6019800" y="4438650"/>
+            <a:ext cx="1409700" cy="590550"/>
           </a:xfrm>
           <a:prstGeom xmlns:a="http://schemas.openxmlformats.org/drawingml/2006/main" prst="rect">
             <a:avLst/>
@@ -15113,19 +15198,36 @@
           <a:lstStyle xmlns:a="http://schemas.openxmlformats.org/drawingml/2006/main"/>
           <a:p xmlns:a="http://schemas.openxmlformats.org/drawingml/2006/main">
             <a:pPr algn="ctr">
-              <a:defRPr sz="1125" b="0">
-                <a:solidFill>
-                  <a:srgbClr val="526174"/>
-                </a:solidFill>
-              </a:defRPr>
-            </a:pPr>
-            <a:r>
-              <a:rPr sz="1125" b="0">
-                <a:solidFill>
-                  <a:srgbClr val="526174"/>
-                </a:solidFill>
-              </a:rPr>
-              <a:t>entity + predicate + value + provenance</a:t>
+              <a:defRPr sz="1200" b="0">
+                <a:solidFill>
+                  <a:srgbClr val="526174"/>
+                </a:solidFill>
+              </a:defRPr>
+            </a:pPr>
+            <a:r>
+              <a:rPr sz="1200" b="0">
+                <a:solidFill>
+                  <a:srgbClr val="526174"/>
+                </a:solidFill>
+              </a:rPr>
+              <a:t>entity + predicate</a:t>
+            </a:r>
+          </a:p>
+          <a:p xmlns:a="http://schemas.openxmlformats.org/drawingml/2006/main">
+            <a:pPr algn="ctr">
+              <a:defRPr sz="1200" b="0">
+                <a:solidFill>
+                  <a:srgbClr val="526174"/>
+                </a:solidFill>
+              </a:defRPr>
+            </a:pPr>
+            <a:r>
+              <a:rPr sz="1200" b="0">
+                <a:solidFill>
+                  <a:srgbClr val="526174"/>
+                </a:solidFill>
+              </a:rPr>
+              <a:t>value + provenance</a:t>
             </a:r>
           </a:p>
         </p:txBody>
@@ -15135,7 +15237,7 @@
           <p:cNvPr id="37" name="">
             <a:extLst xmlns:a="http://schemas.openxmlformats.org/drawingml/2006/main">
               <a:ext uri="{FF2B5EF4-FFF2-40B4-BE49-F238E27FC236}">
-                <a16:creationId xmlns:a16="http://schemas.microsoft.com/office/drawing/2014/main" id="{4BD14FB5-1A2E-4FF3-ADD5-938BA48A9B6B}"/>
+                <a16:creationId xmlns:a16="http://schemas.microsoft.com/office/drawing/2014/main" id="{CB4396FA-69BE-4165-BFF1-D76DECA1773B}"/>
               </a:ext>
             </a:extLst>
           </p:cNvPr>
@@ -15176,7 +15278,7 @@
           <p:cNvPr id="38" name="">
             <a:extLst xmlns:a="http://schemas.openxmlformats.org/drawingml/2006/main">
               <a:ext uri="{FF2B5EF4-FFF2-40B4-BE49-F238E27FC236}">
-                <a16:creationId xmlns:a16="http://schemas.microsoft.com/office/drawing/2014/main" id="{CE4A1F86-CCD6-49E4-B10C-0700B5917382}"/>
+                <a16:creationId xmlns:a16="http://schemas.microsoft.com/office/drawing/2014/main" id="{2C0549F3-A8EB-4D8E-95B6-584195AC5057}"/>
               </a:ext>
             </a:extLst>
           </p:cNvPr>
@@ -15226,7 +15328,7 @@
           <p:cNvPr id="39" name="">
             <a:extLst xmlns:a="http://schemas.openxmlformats.org/drawingml/2006/main">
               <a:ext uri="{FF2B5EF4-FFF2-40B4-BE49-F238E27FC236}">
-                <a16:creationId xmlns:a16="http://schemas.microsoft.com/office/drawing/2014/main" id="{B6DC2361-8F65-41E9-B2F9-9AFEE64ECBA2}"/>
+                <a16:creationId xmlns:a16="http://schemas.microsoft.com/office/drawing/2014/main" id="{1220B36B-3CF6-49CA-BC0A-7021512378AC}"/>
               </a:ext>
             </a:extLst>
           </p:cNvPr>
@@ -15276,7 +15378,7 @@
           <p:cNvPr id="40" name="">
             <a:extLst xmlns:a="http://schemas.openxmlformats.org/drawingml/2006/main">
               <a:ext uri="{FF2B5EF4-FFF2-40B4-BE49-F238E27FC236}">
-                <a16:creationId xmlns:a16="http://schemas.microsoft.com/office/drawing/2014/main" id="{3608E198-7916-4092-A002-C3A606D67D3E}"/>
+                <a16:creationId xmlns:a16="http://schemas.microsoft.com/office/drawing/2014/main" id="{D8DA7EBF-7B8E-490A-9701-A127CD26C3DA}"/>
               </a:ext>
             </a:extLst>
           </p:cNvPr>
@@ -15317,7 +15419,7 @@
           <p:cNvPr id="41" name="">
             <a:extLst xmlns:a="http://schemas.openxmlformats.org/drawingml/2006/main">
               <a:ext uri="{FF2B5EF4-FFF2-40B4-BE49-F238E27FC236}">
-                <a16:creationId xmlns:a16="http://schemas.microsoft.com/office/drawing/2014/main" id="{B2F7E994-E4AB-4411-BA3F-253FEAB0DE4B}"/>
+                <a16:creationId xmlns:a16="http://schemas.microsoft.com/office/drawing/2014/main" id="{BF333D8F-266D-447D-B1C8-21B9D919365E}"/>
               </a:ext>
             </a:extLst>
           </p:cNvPr>
@@ -15367,7 +15469,7 @@
           <p:cNvPr id="42" name="">
             <a:extLst xmlns:a="http://schemas.openxmlformats.org/drawingml/2006/main">
               <a:ext uri="{FF2B5EF4-FFF2-40B4-BE49-F238E27FC236}">
-                <a16:creationId xmlns:a16="http://schemas.microsoft.com/office/drawing/2014/main" id="{ADAFF6EE-7585-49D1-B9C8-7A32B4242570}"/>
+                <a16:creationId xmlns:a16="http://schemas.microsoft.com/office/drawing/2014/main" id="{D9A99948-8EF4-4ACC-97EE-D8F859D1C616}"/>
               </a:ext>
             </a:extLst>
           </p:cNvPr>
@@ -15434,18 +15536,18 @@
           <p:cNvPr id="43" name="">
             <a:extLst xmlns:a="http://schemas.openxmlformats.org/drawingml/2006/main">
               <a:ext uri="{FF2B5EF4-FFF2-40B4-BE49-F238E27FC236}">
-                <a16:creationId xmlns:a16="http://schemas.microsoft.com/office/drawing/2014/main" id="{1736F131-E38C-429A-868A-A8A6076ABA9B}"/>
-              </a:ext>
-            </a:extLst>
-          </p:cNvPr>
-          <p:cNvSpPr>
-            <a:spLocks xmlns:a="http://schemas.openxmlformats.org/drawingml/2006/main" noGrp="1"/>
-          </p:cNvSpPr>
-          <p:nvPr/>
-        </p:nvSpPr>
-        <p:spPr>
-          <a:xfrm xmlns:a="http://schemas.openxmlformats.org/drawingml/2006/main">
-            <a:off x="1562100" y="5219700"/>
+                <a16:creationId xmlns:a16="http://schemas.microsoft.com/office/drawing/2014/main" id="{3E4654EB-7366-4F69-A1FB-03B4ED98405A}"/>
+              </a:ext>
+            </a:extLst>
+          </p:cNvPr>
+          <p:cNvSpPr>
+            <a:spLocks xmlns:a="http://schemas.openxmlformats.org/drawingml/2006/main" noGrp="1"/>
+          </p:cNvSpPr>
+          <p:nvPr/>
+        </p:nvSpPr>
+        <p:spPr>
+          <a:xfrm xmlns:a="http://schemas.openxmlformats.org/drawingml/2006/main">
+            <a:off x="1562100" y="5391150"/>
             <a:ext cx="9067800" cy="590550"/>
           </a:xfrm>
           <a:prstGeom xmlns:a="http://schemas.openxmlformats.org/drawingml/2006/main" prst="roundRect">
@@ -15469,18 +15571,18 @@
           <p:cNvPr id="44" name="">
             <a:extLst xmlns:a="http://schemas.openxmlformats.org/drawingml/2006/main">
               <a:ext uri="{FF2B5EF4-FFF2-40B4-BE49-F238E27FC236}">
-                <a16:creationId xmlns:a16="http://schemas.microsoft.com/office/drawing/2014/main" id="{8A44D103-104E-45CC-B0C8-5176D1591B0F}"/>
-              </a:ext>
-            </a:extLst>
-          </p:cNvPr>
-          <p:cNvSpPr>
-            <a:spLocks xmlns:a="http://schemas.openxmlformats.org/drawingml/2006/main" noGrp="1"/>
-          </p:cNvSpPr>
-          <p:nvPr/>
-        </p:nvSpPr>
-        <p:spPr>
-          <a:xfrm xmlns:a="http://schemas.openxmlformats.org/drawingml/2006/main">
-            <a:off x="1790700" y="5381625"/>
+                <a16:creationId xmlns:a16="http://schemas.microsoft.com/office/drawing/2014/main" id="{4C1C49DB-8719-4702-A2AF-935E3C2F8D63}"/>
+              </a:ext>
+            </a:extLst>
+          </p:cNvPr>
+          <p:cNvSpPr>
+            <a:spLocks xmlns:a="http://schemas.openxmlformats.org/drawingml/2006/main" noGrp="1"/>
+          </p:cNvSpPr>
+          <p:nvPr/>
+        </p:nvSpPr>
+        <p:spPr>
+          <a:xfrm xmlns:a="http://schemas.openxmlformats.org/drawingml/2006/main">
+            <a:off x="1790700" y="5553075"/>
             <a:ext cx="1809750" cy="266700"/>
           </a:xfrm>
           <a:prstGeom xmlns:a="http://schemas.openxmlformats.org/drawingml/2006/main" prst="rect">
@@ -15519,18 +15621,18 @@
           <p:cNvPr id="45" name="">
             <a:extLst xmlns:a="http://schemas.openxmlformats.org/drawingml/2006/main">
               <a:ext uri="{FF2B5EF4-FFF2-40B4-BE49-F238E27FC236}">
-                <a16:creationId xmlns:a16="http://schemas.microsoft.com/office/drawing/2014/main" id="{841E3189-0C97-47C4-83E4-8D8EAE9CE331}"/>
-              </a:ext>
-            </a:extLst>
-          </p:cNvPr>
-          <p:cNvSpPr>
-            <a:spLocks xmlns:a="http://schemas.openxmlformats.org/drawingml/2006/main" noGrp="1"/>
-          </p:cNvSpPr>
-          <p:nvPr/>
-        </p:nvSpPr>
-        <p:spPr>
-          <a:xfrm xmlns:a="http://schemas.openxmlformats.org/drawingml/2006/main">
-            <a:off x="3562350" y="5381625"/>
+                <a16:creationId xmlns:a16="http://schemas.microsoft.com/office/drawing/2014/main" id="{BAF3BE9E-C18F-4A57-B278-21341D9312DB}"/>
+              </a:ext>
+            </a:extLst>
+          </p:cNvPr>
+          <p:cNvSpPr>
+            <a:spLocks xmlns:a="http://schemas.openxmlformats.org/drawingml/2006/main" noGrp="1"/>
+          </p:cNvSpPr>
+          <p:nvPr/>
+        </p:nvSpPr>
+        <p:spPr>
+          <a:xfrm xmlns:a="http://schemas.openxmlformats.org/drawingml/2006/main">
+            <a:off x="3562350" y="5553075"/>
             <a:ext cx="6743700" cy="266700"/>
           </a:xfrm>
           <a:prstGeom xmlns:a="http://schemas.openxmlformats.org/drawingml/2006/main" prst="rect">
@@ -15569,7 +15671,7 @@
           <p:cNvPr id="46" name="">
             <a:extLst xmlns:a="http://schemas.openxmlformats.org/drawingml/2006/main">
               <a:ext uri="{FF2B5EF4-FFF2-40B4-BE49-F238E27FC236}">
-                <a16:creationId xmlns:a16="http://schemas.microsoft.com/office/drawing/2014/main" id="{C540BCC5-0A63-4501-980F-34DDCC0E93E6}"/>
+                <a16:creationId xmlns:a16="http://schemas.microsoft.com/office/drawing/2014/main" id="{6C3A787B-FEA5-424E-B8A9-02CB892DE0B4}"/>
               </a:ext>
             </a:extLst>
           </p:cNvPr>
@@ -15600,7 +15702,7 @@
           <p:cNvPr id="47" name="source-4">
             <a:extLst xmlns:a="http://schemas.openxmlformats.org/drawingml/2006/main">
               <a:ext uri="{FF2B5EF4-FFF2-40B4-BE49-F238E27FC236}">
-                <a16:creationId xmlns:a16="http://schemas.microsoft.com/office/drawing/2014/main" id="{D000708C-C103-4FA5-AE30-21E43F822D41}"/>
+                <a16:creationId xmlns:a16="http://schemas.microsoft.com/office/drawing/2014/main" id="{28F74B62-7337-4C27-91BB-F900FB2E9AC8}"/>
               </a:ext>
             </a:extLst>
           </p:cNvPr>
@@ -15650,7 +15752,7 @@
           <p:cNvPr id="48" name="page-4">
             <a:extLst xmlns:a="http://schemas.openxmlformats.org/drawingml/2006/main">
               <a:ext uri="{FF2B5EF4-FFF2-40B4-BE49-F238E27FC236}">
-                <a16:creationId xmlns:a16="http://schemas.microsoft.com/office/drawing/2014/main" id="{5B6066D5-D911-4314-B54D-E47407EC30D5}"/>
+                <a16:creationId xmlns:a16="http://schemas.microsoft.com/office/drawing/2014/main" id="{872F1666-BF55-441B-B385-41DAD6FCF7EE}"/>
               </a:ext>
             </a:extLst>
           </p:cNvPr>
@@ -15698,7 +15800,7 @@
     </p:spTree>
     <p:extLst>
       <p:ext uri="{BB962C8B-B14F-4D97-AF65-F5344CB8AC3E}">
-        <p14:creationId xmlns:p14="http://schemas.microsoft.com/office/powerpoint/2010/main" val="1665815857"/>
+        <p14:creationId xmlns:p14="http://schemas.microsoft.com/office/powerpoint/2010/main" val="1574614631"/>
       </p:ext>
     </p:extLst>
   </p:cSld>
@@ -15729,7 +15831,7 @@
           <p:cNvPr id="43" name="kicker-5">
             <a:extLst xmlns:a="http://schemas.openxmlformats.org/drawingml/2006/main">
               <a:ext uri="{FF2B5EF4-FFF2-40B4-BE49-F238E27FC236}">
-                <a16:creationId xmlns:a16="http://schemas.microsoft.com/office/drawing/2014/main" id="{C6F25FA5-BD10-4050-9C5C-6C2559FC4556}"/>
+                <a16:creationId xmlns:a16="http://schemas.microsoft.com/office/drawing/2014/main" id="{F8FF1E25-2178-448A-9202-EF035DB75841}"/>
               </a:ext>
             </a:extLst>
           </p:cNvPr>
@@ -15779,7 +15881,7 @@
           <p:cNvPr id="2" name="title-5">
             <a:extLst xmlns:a="http://schemas.openxmlformats.org/drawingml/2006/main">
               <a:ext uri="{FF2B5EF4-FFF2-40B4-BE49-F238E27FC236}">
-                <a16:creationId xmlns:a16="http://schemas.microsoft.com/office/drawing/2014/main" id="{C7E74211-6776-46CB-B95C-576AACA41B91}"/>
+                <a16:creationId xmlns:a16="http://schemas.microsoft.com/office/drawing/2014/main" id="{8F0E0246-C29C-4EC7-8F5A-9B6381487441}"/>
               </a:ext>
             </a:extLst>
           </p:cNvPr>
@@ -15829,7 +15931,7 @@
           <p:cNvPr id="3" name="">
             <a:extLst xmlns:a="http://schemas.openxmlformats.org/drawingml/2006/main">
               <a:ext uri="{FF2B5EF4-FFF2-40B4-BE49-F238E27FC236}">
-                <a16:creationId xmlns:a16="http://schemas.microsoft.com/office/drawing/2014/main" id="{7E615A14-6C87-4583-BC1E-51B1C88FDEBD}"/>
+                <a16:creationId xmlns:a16="http://schemas.microsoft.com/office/drawing/2014/main" id="{FD134B1C-6D1B-4EF4-B8B2-23F1E9F85B4D}"/>
               </a:ext>
             </a:extLst>
           </p:cNvPr>
@@ -15860,7 +15962,7 @@
           <p:cNvPr id="4" name="">
             <a:extLst xmlns:a="http://schemas.openxmlformats.org/drawingml/2006/main">
               <a:ext uri="{FF2B5EF4-FFF2-40B4-BE49-F238E27FC236}">
-                <a16:creationId xmlns:a16="http://schemas.microsoft.com/office/drawing/2014/main" id="{F450B9BB-37CE-4940-BCBA-00B6EB6BEF77}"/>
+                <a16:creationId xmlns:a16="http://schemas.microsoft.com/office/drawing/2014/main" id="{0C840DEE-9D9E-48DF-9637-2C66D13C8620}"/>
               </a:ext>
             </a:extLst>
           </p:cNvPr>
@@ -15910,7 +16012,7 @@
           <p:cNvPr id="5" name="">
             <a:extLst xmlns:a="http://schemas.openxmlformats.org/drawingml/2006/main">
               <a:ext uri="{FF2B5EF4-FFF2-40B4-BE49-F238E27FC236}">
-                <a16:creationId xmlns:a16="http://schemas.microsoft.com/office/drawing/2014/main" id="{DF6F4BC9-E15A-4CC0-A25F-028C685EBB41}"/>
+                <a16:creationId xmlns:a16="http://schemas.microsoft.com/office/drawing/2014/main" id="{C1C12F6D-1B25-4797-A35F-8B078037B5DB}"/>
               </a:ext>
             </a:extLst>
           </p:cNvPr>
@@ -15951,7 +16053,7 @@
           <p:cNvPr id="6" name="">
             <a:extLst xmlns:a="http://schemas.openxmlformats.org/drawingml/2006/main">
               <a:ext uri="{FF2B5EF4-FFF2-40B4-BE49-F238E27FC236}">
-                <a16:creationId xmlns:a16="http://schemas.microsoft.com/office/drawing/2014/main" id="{F6502818-7E0A-439F-832A-C84C77C05302}"/>
+                <a16:creationId xmlns:a16="http://schemas.microsoft.com/office/drawing/2014/main" id="{AAF9E7BC-DFD1-4A6C-89EF-57AA68D5B603}"/>
               </a:ext>
             </a:extLst>
           </p:cNvPr>
@@ -16001,7 +16103,7 @@
           <p:cNvPr id="7" name="">
             <a:extLst xmlns:a="http://schemas.openxmlformats.org/drawingml/2006/main">
               <a:ext uri="{FF2B5EF4-FFF2-40B4-BE49-F238E27FC236}">
-                <a16:creationId xmlns:a16="http://schemas.microsoft.com/office/drawing/2014/main" id="{B6E06ACC-4A0B-4CF6-8884-3D32E71402E1}"/>
+                <a16:creationId xmlns:a16="http://schemas.microsoft.com/office/drawing/2014/main" id="{CF9515E7-2C83-4915-8E4D-BAC342F7C744}"/>
               </a:ext>
             </a:extLst>
           </p:cNvPr>
@@ -16036,7 +16138,7 @@
           <p:cNvPr id="8" name="">
             <a:extLst xmlns:a="http://schemas.openxmlformats.org/drawingml/2006/main">
               <a:ext uri="{FF2B5EF4-FFF2-40B4-BE49-F238E27FC236}">
-                <a16:creationId xmlns:a16="http://schemas.microsoft.com/office/drawing/2014/main" id="{B2BA65BD-7749-408E-A691-BE2070FB85CB}"/>
+                <a16:creationId xmlns:a16="http://schemas.microsoft.com/office/drawing/2014/main" id="{BB3E52E4-B256-412C-A66F-56A3AECA50FF}"/>
               </a:ext>
             </a:extLst>
           </p:cNvPr>
@@ -16086,7 +16188,7 @@
           <p:cNvPr id="9" name="">
             <a:extLst xmlns:a="http://schemas.openxmlformats.org/drawingml/2006/main">
               <a:ext uri="{FF2B5EF4-FFF2-40B4-BE49-F238E27FC236}">
-                <a16:creationId xmlns:a16="http://schemas.microsoft.com/office/drawing/2014/main" id="{D3FC1128-C8E5-46A8-9360-5F427F935C71}"/>
+                <a16:creationId xmlns:a16="http://schemas.microsoft.com/office/drawing/2014/main" id="{2E4C8E73-304E-4CC9-8F62-2DE845D979B3}"/>
               </a:ext>
             </a:extLst>
           </p:cNvPr>
@@ -16121,7 +16223,7 @@
           <p:cNvPr id="10" name="">
             <a:extLst xmlns:a="http://schemas.openxmlformats.org/drawingml/2006/main">
               <a:ext uri="{FF2B5EF4-FFF2-40B4-BE49-F238E27FC236}">
-                <a16:creationId xmlns:a16="http://schemas.microsoft.com/office/drawing/2014/main" id="{0E51BB58-C7BE-44F7-BD7B-4FCA3D49C0B8}"/>
+                <a16:creationId xmlns:a16="http://schemas.microsoft.com/office/drawing/2014/main" id="{B279AF08-5415-4A63-8F2B-45BD514CF7BE}"/>
               </a:ext>
             </a:extLst>
           </p:cNvPr>
@@ -16171,7 +16273,7 @@
           <p:cNvPr id="11" name="">
             <a:extLst xmlns:a="http://schemas.openxmlformats.org/drawingml/2006/main">
               <a:ext uri="{FF2B5EF4-FFF2-40B4-BE49-F238E27FC236}">
-                <a16:creationId xmlns:a16="http://schemas.microsoft.com/office/drawing/2014/main" id="{A4055746-8A37-4607-A8F9-AD4EDD780E15}"/>
+                <a16:creationId xmlns:a16="http://schemas.microsoft.com/office/drawing/2014/main" id="{E8098D6D-8229-45ED-9041-3C22808A3FDD}"/>
               </a:ext>
             </a:extLst>
           </p:cNvPr>
@@ -16206,7 +16308,7 @@
           <p:cNvPr id="12" name="">
             <a:extLst xmlns:a="http://schemas.openxmlformats.org/drawingml/2006/main">
               <a:ext uri="{FF2B5EF4-FFF2-40B4-BE49-F238E27FC236}">
-                <a16:creationId xmlns:a16="http://schemas.microsoft.com/office/drawing/2014/main" id="{D8F03750-34EC-496F-8D02-F0D106B5E463}"/>
+                <a16:creationId xmlns:a16="http://schemas.microsoft.com/office/drawing/2014/main" id="{6CA37010-9935-46D5-B675-5DA202C0CBB9}"/>
               </a:ext>
             </a:extLst>
           </p:cNvPr>
@@ -16256,7 +16358,7 @@
           <p:cNvPr id="13" name="">
             <a:extLst xmlns:a="http://schemas.openxmlformats.org/drawingml/2006/main">
               <a:ext uri="{FF2B5EF4-FFF2-40B4-BE49-F238E27FC236}">
-                <a16:creationId xmlns:a16="http://schemas.microsoft.com/office/drawing/2014/main" id="{2FD72DE5-4E76-4C5A-92B1-5F81525FA2F2}"/>
+                <a16:creationId xmlns:a16="http://schemas.microsoft.com/office/drawing/2014/main" id="{EE6D23A3-50CF-454F-B4FF-A72AD9DA3929}"/>
               </a:ext>
             </a:extLst>
           </p:cNvPr>
@@ -16297,7 +16399,7 @@
           <p:cNvPr id="14" name="">
             <a:extLst xmlns:a="http://schemas.openxmlformats.org/drawingml/2006/main">
               <a:ext uri="{FF2B5EF4-FFF2-40B4-BE49-F238E27FC236}">
-                <a16:creationId xmlns:a16="http://schemas.microsoft.com/office/drawing/2014/main" id="{4E1E1C43-00A3-4911-A420-C583CB7CF67B}"/>
+                <a16:creationId xmlns:a16="http://schemas.microsoft.com/office/drawing/2014/main" id="{551FDE58-F189-4B4B-B0AC-36289692F05F}"/>
               </a:ext>
             </a:extLst>
           </p:cNvPr>
@@ -16347,7 +16449,7 @@
           <p:cNvPr id="15" name="">
             <a:extLst xmlns:a="http://schemas.openxmlformats.org/drawingml/2006/main">
               <a:ext uri="{FF2B5EF4-FFF2-40B4-BE49-F238E27FC236}">
-                <a16:creationId xmlns:a16="http://schemas.microsoft.com/office/drawing/2014/main" id="{1961C03D-647E-4EB0-B912-FF5D6951B7E7}"/>
+                <a16:creationId xmlns:a16="http://schemas.microsoft.com/office/drawing/2014/main" id="{7D3B70B7-A087-43DF-A863-6794DDDB3BBE}"/>
               </a:ext>
             </a:extLst>
           </p:cNvPr>
@@ -16382,7 +16484,7 @@
           <p:cNvPr id="16" name="">
             <a:extLst xmlns:a="http://schemas.openxmlformats.org/drawingml/2006/main">
               <a:ext uri="{FF2B5EF4-FFF2-40B4-BE49-F238E27FC236}">
-                <a16:creationId xmlns:a16="http://schemas.microsoft.com/office/drawing/2014/main" id="{58F26D5B-FF01-49C2-B578-F6BF0C9188A0}"/>
+                <a16:creationId xmlns:a16="http://schemas.microsoft.com/office/drawing/2014/main" id="{B61ECC7D-BE91-4457-840A-A6486F66465F}"/>
               </a:ext>
             </a:extLst>
           </p:cNvPr>
@@ -16432,7 +16534,7 @@
           <p:cNvPr id="17" name="">
             <a:extLst xmlns:a="http://schemas.openxmlformats.org/drawingml/2006/main">
               <a:ext uri="{FF2B5EF4-FFF2-40B4-BE49-F238E27FC236}">
-                <a16:creationId xmlns:a16="http://schemas.microsoft.com/office/drawing/2014/main" id="{73BD301F-DBEC-4DA0-A11E-BD791A6A61CC}"/>
+                <a16:creationId xmlns:a16="http://schemas.microsoft.com/office/drawing/2014/main" id="{06AFBB58-1579-4AC5-AB4D-C87FDFBEBA2C}"/>
               </a:ext>
             </a:extLst>
           </p:cNvPr>
@@ -16467,7 +16569,7 @@
           <p:cNvPr id="18" name="">
             <a:extLst xmlns:a="http://schemas.openxmlformats.org/drawingml/2006/main">
               <a:ext uri="{FF2B5EF4-FFF2-40B4-BE49-F238E27FC236}">
-                <a16:creationId xmlns:a16="http://schemas.microsoft.com/office/drawing/2014/main" id="{4A05E970-D6CA-4C8D-BF1F-1C18DFA7502B}"/>
+                <a16:creationId xmlns:a16="http://schemas.microsoft.com/office/drawing/2014/main" id="{77C09E94-B428-4B1F-94F1-6EB712B084FE}"/>
               </a:ext>
             </a:extLst>
           </p:cNvPr>
@@ -16517,7 +16619,7 @@
           <p:cNvPr id="19" name="">
             <a:extLst xmlns:a="http://schemas.openxmlformats.org/drawingml/2006/main">
               <a:ext uri="{FF2B5EF4-FFF2-40B4-BE49-F238E27FC236}">
-                <a16:creationId xmlns:a16="http://schemas.microsoft.com/office/drawing/2014/main" id="{3C41C5BA-73C7-4EF4-B07B-00DFBE642A54}"/>
+                <a16:creationId xmlns:a16="http://schemas.microsoft.com/office/drawing/2014/main" id="{1C3C4B84-23EE-4CE6-8782-88BBCA2DF122}"/>
               </a:ext>
             </a:extLst>
           </p:cNvPr>
@@ -16552,7 +16654,7 @@
           <p:cNvPr id="20" name="">
             <a:extLst xmlns:a="http://schemas.openxmlformats.org/drawingml/2006/main">
               <a:ext uri="{FF2B5EF4-FFF2-40B4-BE49-F238E27FC236}">
-                <a16:creationId xmlns:a16="http://schemas.microsoft.com/office/drawing/2014/main" id="{3294EB34-EC29-48F6-BFB5-025C08C0CA74}"/>
+                <a16:creationId xmlns:a16="http://schemas.microsoft.com/office/drawing/2014/main" id="{BB1E9E56-762B-44AB-9E91-37D045D29CCB}"/>
               </a:ext>
             </a:extLst>
           </p:cNvPr>
@@ -16602,7 +16704,7 @@
           <p:cNvPr id="21" name="">
             <a:extLst xmlns:a="http://schemas.openxmlformats.org/drawingml/2006/main">
               <a:ext uri="{FF2B5EF4-FFF2-40B4-BE49-F238E27FC236}">
-                <a16:creationId xmlns:a16="http://schemas.microsoft.com/office/drawing/2014/main" id="{D5817ACE-BB6B-4F80-B2F9-D8FED57063E8}"/>
+                <a16:creationId xmlns:a16="http://schemas.microsoft.com/office/drawing/2014/main" id="{FCDA961D-4D4D-4B37-B66D-43BB82973601}"/>
               </a:ext>
             </a:extLst>
           </p:cNvPr>
@@ -16643,7 +16745,7 @@
           <p:cNvPr id="22" name="">
             <a:extLst xmlns:a="http://schemas.openxmlformats.org/drawingml/2006/main">
               <a:ext uri="{FF2B5EF4-FFF2-40B4-BE49-F238E27FC236}">
-                <a16:creationId xmlns:a16="http://schemas.microsoft.com/office/drawing/2014/main" id="{EE59EBE2-01FF-4414-A3F0-6C4680E8435A}"/>
+                <a16:creationId xmlns:a16="http://schemas.microsoft.com/office/drawing/2014/main" id="{C8571F26-3A12-43BE-9329-695CB505A6AF}"/>
               </a:ext>
             </a:extLst>
           </p:cNvPr>
@@ -16693,7 +16795,7 @@
           <p:cNvPr id="23" name="">
             <a:extLst xmlns:a="http://schemas.openxmlformats.org/drawingml/2006/main">
               <a:ext uri="{FF2B5EF4-FFF2-40B4-BE49-F238E27FC236}">
-                <a16:creationId xmlns:a16="http://schemas.microsoft.com/office/drawing/2014/main" id="{61DCE1CF-ED90-48CA-A397-0AF2EB5402A6}"/>
+                <a16:creationId xmlns:a16="http://schemas.microsoft.com/office/drawing/2014/main" id="{027186A3-7665-4B9A-9B54-13549B40D534}"/>
               </a:ext>
             </a:extLst>
           </p:cNvPr>
@@ -16728,7 +16830,7 @@
           <p:cNvPr id="24" name="">
             <a:extLst xmlns:a="http://schemas.openxmlformats.org/drawingml/2006/main">
               <a:ext uri="{FF2B5EF4-FFF2-40B4-BE49-F238E27FC236}">
-                <a16:creationId xmlns:a16="http://schemas.microsoft.com/office/drawing/2014/main" id="{D64B5CC5-ACC9-4E59-9F4D-CD077E665E54}"/>
+                <a16:creationId xmlns:a16="http://schemas.microsoft.com/office/drawing/2014/main" id="{5AD20CDB-6C73-46E0-AB81-EE1459BDA508}"/>
               </a:ext>
             </a:extLst>
           </p:cNvPr>
@@ -16778,7 +16880,7 @@
           <p:cNvPr id="25" name="">
             <a:extLst xmlns:a="http://schemas.openxmlformats.org/drawingml/2006/main">
               <a:ext uri="{FF2B5EF4-FFF2-40B4-BE49-F238E27FC236}">
-                <a16:creationId xmlns:a16="http://schemas.microsoft.com/office/drawing/2014/main" id="{0C71AFF1-D362-4852-9E8C-3E7387549583}"/>
+                <a16:creationId xmlns:a16="http://schemas.microsoft.com/office/drawing/2014/main" id="{9755C83D-A961-4FD0-8443-285125EB5744}"/>
               </a:ext>
             </a:extLst>
           </p:cNvPr>
@@ -16813,7 +16915,7 @@
           <p:cNvPr id="26" name="">
             <a:extLst xmlns:a="http://schemas.openxmlformats.org/drawingml/2006/main">
               <a:ext uri="{FF2B5EF4-FFF2-40B4-BE49-F238E27FC236}">
-                <a16:creationId xmlns:a16="http://schemas.microsoft.com/office/drawing/2014/main" id="{A1660401-9BBD-4A40-B31C-A3C5A35F9197}"/>
+                <a16:creationId xmlns:a16="http://schemas.microsoft.com/office/drawing/2014/main" id="{ED58E9C2-77B0-43C4-B1DD-B94ED92E7679}"/>
               </a:ext>
             </a:extLst>
           </p:cNvPr>
@@ -16863,7 +16965,7 @@
           <p:cNvPr id="27" name="">
             <a:extLst xmlns:a="http://schemas.openxmlformats.org/drawingml/2006/main">
               <a:ext uri="{FF2B5EF4-FFF2-40B4-BE49-F238E27FC236}">
-                <a16:creationId xmlns:a16="http://schemas.microsoft.com/office/drawing/2014/main" id="{A40680A6-FA28-400A-9A3A-7DA24B9D09C7}"/>
+                <a16:creationId xmlns:a16="http://schemas.microsoft.com/office/drawing/2014/main" id="{5F3A56D1-0943-42C7-8695-B7C1DC1442AD}"/>
               </a:ext>
             </a:extLst>
           </p:cNvPr>
@@ -16898,7 +17000,7 @@
           <p:cNvPr id="28" name="">
             <a:extLst xmlns:a="http://schemas.openxmlformats.org/drawingml/2006/main">
               <a:ext uri="{FF2B5EF4-FFF2-40B4-BE49-F238E27FC236}">
-                <a16:creationId xmlns:a16="http://schemas.microsoft.com/office/drawing/2014/main" id="{214EAFF9-066F-471C-81D1-2C21105EA3E1}"/>
+                <a16:creationId xmlns:a16="http://schemas.microsoft.com/office/drawing/2014/main" id="{CD71874C-BA57-43BB-A0C4-81FDAF425377}"/>
               </a:ext>
             </a:extLst>
           </p:cNvPr>
@@ -16948,7 +17050,7 @@
           <p:cNvPr id="29" name="">
             <a:extLst xmlns:a="http://schemas.openxmlformats.org/drawingml/2006/main">
               <a:ext uri="{FF2B5EF4-FFF2-40B4-BE49-F238E27FC236}">
-                <a16:creationId xmlns:a16="http://schemas.microsoft.com/office/drawing/2014/main" id="{7ADBA59F-DE06-4901-BFBD-1B2781775DD6}"/>
+                <a16:creationId xmlns:a16="http://schemas.microsoft.com/office/drawing/2014/main" id="{9DA4F7F5-5033-4FB7-83AA-E1EE246B9FFA}"/>
               </a:ext>
             </a:extLst>
           </p:cNvPr>
@@ -16989,7 +17091,7 @@
           <p:cNvPr id="30" name="">
             <a:extLst xmlns:a="http://schemas.openxmlformats.org/drawingml/2006/main">
               <a:ext uri="{FF2B5EF4-FFF2-40B4-BE49-F238E27FC236}">
-                <a16:creationId xmlns:a16="http://schemas.microsoft.com/office/drawing/2014/main" id="{4F0D8EC6-EB81-4768-8A2C-39CDCCE1D467}"/>
+                <a16:creationId xmlns:a16="http://schemas.microsoft.com/office/drawing/2014/main" id="{33C4FA95-95E8-488F-8781-C2F197A0F254}"/>
               </a:ext>
             </a:extLst>
           </p:cNvPr>
@@ -17039,7 +17141,7 @@
           <p:cNvPr id="31" name="">
             <a:extLst xmlns:a="http://schemas.openxmlformats.org/drawingml/2006/main">
               <a:ext uri="{FF2B5EF4-FFF2-40B4-BE49-F238E27FC236}">
-                <a16:creationId xmlns:a16="http://schemas.microsoft.com/office/drawing/2014/main" id="{5CEA030E-84D5-4566-8B04-FD90164E174F}"/>
+                <a16:creationId xmlns:a16="http://schemas.microsoft.com/office/drawing/2014/main" id="{BD60530C-1345-4D87-A3BD-A186EDD40C34}"/>
               </a:ext>
             </a:extLst>
           </p:cNvPr>
@@ -17074,7 +17176,7 @@
           <p:cNvPr id="32" name="">
             <a:extLst xmlns:a="http://schemas.openxmlformats.org/drawingml/2006/main">
               <a:ext uri="{FF2B5EF4-FFF2-40B4-BE49-F238E27FC236}">
-                <a16:creationId xmlns:a16="http://schemas.microsoft.com/office/drawing/2014/main" id="{A15A6251-A808-47D7-99C4-40ABF6C9DD7F}"/>
+                <a16:creationId xmlns:a16="http://schemas.microsoft.com/office/drawing/2014/main" id="{F50266F0-F734-4293-837A-E562839ED5D8}"/>
               </a:ext>
             </a:extLst>
           </p:cNvPr>
@@ -17124,7 +17226,7 @@
           <p:cNvPr id="33" name="">
             <a:extLst xmlns:a="http://schemas.openxmlformats.org/drawingml/2006/main">
               <a:ext uri="{FF2B5EF4-FFF2-40B4-BE49-F238E27FC236}">
-                <a16:creationId xmlns:a16="http://schemas.microsoft.com/office/drawing/2014/main" id="{DFF8DD7C-39E0-41D5-91D9-8F3EEA13947C}"/>
+                <a16:creationId xmlns:a16="http://schemas.microsoft.com/office/drawing/2014/main" id="{7BB8BAF5-CA46-4E82-B9C4-8813605C938F}"/>
               </a:ext>
             </a:extLst>
           </p:cNvPr>
@@ -17159,7 +17261,7 @@
           <p:cNvPr id="34" name="">
             <a:extLst xmlns:a="http://schemas.openxmlformats.org/drawingml/2006/main">
               <a:ext uri="{FF2B5EF4-FFF2-40B4-BE49-F238E27FC236}">
-                <a16:creationId xmlns:a16="http://schemas.microsoft.com/office/drawing/2014/main" id="{F7982384-7168-4C87-966B-8A3436DE02F5}"/>
+                <a16:creationId xmlns:a16="http://schemas.microsoft.com/office/drawing/2014/main" id="{C2ED947D-56AD-4E78-9D5B-1A3249BA2F6B}"/>
               </a:ext>
             </a:extLst>
           </p:cNvPr>
@@ -17209,7 +17311,7 @@
           <p:cNvPr id="35" name="">
             <a:extLst xmlns:a="http://schemas.openxmlformats.org/drawingml/2006/main">
               <a:ext uri="{FF2B5EF4-FFF2-40B4-BE49-F238E27FC236}">
-                <a16:creationId xmlns:a16="http://schemas.microsoft.com/office/drawing/2014/main" id="{1CBB7645-5ED5-459F-B48D-700FE7F5351A}"/>
+                <a16:creationId xmlns:a16="http://schemas.microsoft.com/office/drawing/2014/main" id="{DE206D6B-24BA-4A59-B782-798D9DA34810}"/>
               </a:ext>
             </a:extLst>
           </p:cNvPr>
@@ -17244,7 +17346,7 @@
           <p:cNvPr id="36" name="">
             <a:extLst xmlns:a="http://schemas.openxmlformats.org/drawingml/2006/main">
               <a:ext uri="{FF2B5EF4-FFF2-40B4-BE49-F238E27FC236}">
-                <a16:creationId xmlns:a16="http://schemas.microsoft.com/office/drawing/2014/main" id="{C0BE3AC8-74B5-4D51-9103-AF7D42433CAC}"/>
+                <a16:creationId xmlns:a16="http://schemas.microsoft.com/office/drawing/2014/main" id="{96D3620D-21BA-4D95-BF9A-7118E03183F2}"/>
               </a:ext>
             </a:extLst>
           </p:cNvPr>
@@ -17294,7 +17396,7 @@
           <p:cNvPr id="37" name="">
             <a:extLst xmlns:a="http://schemas.openxmlformats.org/drawingml/2006/main">
               <a:ext uri="{FF2B5EF4-FFF2-40B4-BE49-F238E27FC236}">
-                <a16:creationId xmlns:a16="http://schemas.microsoft.com/office/drawing/2014/main" id="{7D682935-6A05-4E40-B52D-D92D68EBF4D1}"/>
+                <a16:creationId xmlns:a16="http://schemas.microsoft.com/office/drawing/2014/main" id="{8547267E-BAA3-4912-96FF-49BBC1FE5095}"/>
               </a:ext>
             </a:extLst>
           </p:cNvPr>
@@ -17329,7 +17431,7 @@
           <p:cNvPr id="38" name="">
             <a:extLst xmlns:a="http://schemas.openxmlformats.org/drawingml/2006/main">
               <a:ext uri="{FF2B5EF4-FFF2-40B4-BE49-F238E27FC236}">
-                <a16:creationId xmlns:a16="http://schemas.microsoft.com/office/drawing/2014/main" id="{4DBD602C-C064-45D8-AA52-F670DAA04A06}"/>
+                <a16:creationId xmlns:a16="http://schemas.microsoft.com/office/drawing/2014/main" id="{FD80591C-C629-47FF-9861-706DA81EB3DA}"/>
               </a:ext>
             </a:extLst>
           </p:cNvPr>
@@ -17379,7 +17481,7 @@
           <p:cNvPr id="39" name="">
             <a:extLst xmlns:a="http://schemas.openxmlformats.org/drawingml/2006/main">
               <a:ext uri="{FF2B5EF4-FFF2-40B4-BE49-F238E27FC236}">
-                <a16:creationId xmlns:a16="http://schemas.microsoft.com/office/drawing/2014/main" id="{8BA8AB26-4FED-4CE9-8580-B20263C0CD69}"/>
+                <a16:creationId xmlns:a16="http://schemas.microsoft.com/office/drawing/2014/main" id="{FAF24D1A-C5E0-46AD-BEF0-DF82691B445C}"/>
               </a:ext>
             </a:extLst>
           </p:cNvPr>
@@ -17429,7 +17531,7 @@
           <p:cNvPr id="40" name="">
             <a:extLst xmlns:a="http://schemas.openxmlformats.org/drawingml/2006/main">
               <a:ext uri="{FF2B5EF4-FFF2-40B4-BE49-F238E27FC236}">
-                <a16:creationId xmlns:a16="http://schemas.microsoft.com/office/drawing/2014/main" id="{D1128C4A-F5B7-4B56-8FA7-32B68573A858}"/>
+                <a16:creationId xmlns:a16="http://schemas.microsoft.com/office/drawing/2014/main" id="{40B65139-B7DC-467B-A68F-E48CAB1FE5BB}"/>
               </a:ext>
             </a:extLst>
           </p:cNvPr>
@@ -17460,7 +17562,7 @@
           <p:cNvPr id="41" name="source-5">
             <a:extLst xmlns:a="http://schemas.openxmlformats.org/drawingml/2006/main">
               <a:ext uri="{FF2B5EF4-FFF2-40B4-BE49-F238E27FC236}">
-                <a16:creationId xmlns:a16="http://schemas.microsoft.com/office/drawing/2014/main" id="{98C2067E-FD16-47F6-A6C7-9EC43B485BC6}"/>
+                <a16:creationId xmlns:a16="http://schemas.microsoft.com/office/drawing/2014/main" id="{0FC3120E-1AD4-4381-9D23-8E1AD2C487A0}"/>
               </a:ext>
             </a:extLst>
           </p:cNvPr>
@@ -17510,7 +17612,7 @@
           <p:cNvPr id="42" name="page-5">
             <a:extLst xmlns:a="http://schemas.openxmlformats.org/drawingml/2006/main">
               <a:ext uri="{FF2B5EF4-FFF2-40B4-BE49-F238E27FC236}">
-                <a16:creationId xmlns:a16="http://schemas.microsoft.com/office/drawing/2014/main" id="{207AA954-0048-41AB-9274-22A6A1ADC1D0}"/>
+                <a16:creationId xmlns:a16="http://schemas.microsoft.com/office/drawing/2014/main" id="{1C6F8E49-4462-47B6-AC5B-8F9E6602FB02}"/>
               </a:ext>
             </a:extLst>
           </p:cNvPr>
@@ -17558,7 +17660,7 @@
     </p:spTree>
     <p:extLst>
       <p:ext uri="{BB962C8B-B14F-4D97-AF65-F5344CB8AC3E}">
-        <p14:creationId xmlns:p14="http://schemas.microsoft.com/office/powerpoint/2010/main" val="1938352261"/>
+        <p14:creationId xmlns:p14="http://schemas.microsoft.com/office/powerpoint/2010/main" val="856713630"/>
       </p:ext>
     </p:extLst>
   </p:cSld>
@@ -17589,7 +17691,7 @@
           <p:cNvPr id="29" name="kicker-6">
             <a:extLst xmlns:a="http://schemas.openxmlformats.org/drawingml/2006/main">
               <a:ext uri="{FF2B5EF4-FFF2-40B4-BE49-F238E27FC236}">
-                <a16:creationId xmlns:a16="http://schemas.microsoft.com/office/drawing/2014/main" id="{998B9B09-474A-477B-ACAD-1AF9DCAF4A00}"/>
+                <a16:creationId xmlns:a16="http://schemas.microsoft.com/office/drawing/2014/main" id="{9E9D6F30-2CB1-4684-8FB7-164B9EB1E746}"/>
               </a:ext>
             </a:extLst>
           </p:cNvPr>
@@ -17639,7 +17741,7 @@
           <p:cNvPr id="2" name="title-6">
             <a:extLst xmlns:a="http://schemas.openxmlformats.org/drawingml/2006/main">
               <a:ext uri="{FF2B5EF4-FFF2-40B4-BE49-F238E27FC236}">
-                <a16:creationId xmlns:a16="http://schemas.microsoft.com/office/drawing/2014/main" id="{FC5E57D5-62EC-46D8-B1F9-19C02CA493C5}"/>
+                <a16:creationId xmlns:a16="http://schemas.microsoft.com/office/drawing/2014/main" id="{861C7854-4B04-4F01-A158-F4DBB335B2CF}"/>
               </a:ext>
             </a:extLst>
           </p:cNvPr>
@@ -17689,7 +17791,7 @@
           <p:cNvPr id="3" name="">
             <a:extLst xmlns:a="http://schemas.openxmlformats.org/drawingml/2006/main">
               <a:ext uri="{FF2B5EF4-FFF2-40B4-BE49-F238E27FC236}">
-                <a16:creationId xmlns:a16="http://schemas.microsoft.com/office/drawing/2014/main" id="{A44EF8E9-B779-4964-BD29-D29501A7724A}"/>
+                <a16:creationId xmlns:a16="http://schemas.microsoft.com/office/drawing/2014/main" id="{08CFBDE4-3CB7-457C-BC0F-DA30EEBC1BC4}"/>
               </a:ext>
             </a:extLst>
           </p:cNvPr>
@@ -17720,7 +17822,7 @@
           <p:cNvPr id="4" name="">
             <a:extLst xmlns:a="http://schemas.openxmlformats.org/drawingml/2006/main">
               <a:ext uri="{FF2B5EF4-FFF2-40B4-BE49-F238E27FC236}">
-                <a16:creationId xmlns:a16="http://schemas.microsoft.com/office/drawing/2014/main" id="{95FB90B0-7FFA-4B16-BA92-55B454E7CC0C}"/>
+                <a16:creationId xmlns:a16="http://schemas.microsoft.com/office/drawing/2014/main" id="{1BE8D659-0F65-4C59-A91F-4A2CE3F22847}"/>
               </a:ext>
             </a:extLst>
           </p:cNvPr>
@@ -17770,7 +17872,7 @@
           <p:cNvPr id="5" name="">
             <a:extLst xmlns:a="http://schemas.openxmlformats.org/drawingml/2006/main">
               <a:ext uri="{FF2B5EF4-FFF2-40B4-BE49-F238E27FC236}">
-                <a16:creationId xmlns:a16="http://schemas.microsoft.com/office/drawing/2014/main" id="{5A33C448-8664-407B-A524-36FCA7F99E6B}"/>
+                <a16:creationId xmlns:a16="http://schemas.microsoft.com/office/drawing/2014/main" id="{149DD6F4-BCD2-4151-B12D-BB2669E28DC7}"/>
               </a:ext>
             </a:extLst>
           </p:cNvPr>
@@ -17801,7 +17903,7 @@
           <p:cNvPr id="6" name="">
             <a:extLst xmlns:a="http://schemas.openxmlformats.org/drawingml/2006/main">
               <a:ext uri="{FF2B5EF4-FFF2-40B4-BE49-F238E27FC236}">
-                <a16:creationId xmlns:a16="http://schemas.microsoft.com/office/drawing/2014/main" id="{CFCDB668-10C0-4ADC-AF91-CF0A44EDEB7E}"/>
+                <a16:creationId xmlns:a16="http://schemas.microsoft.com/office/drawing/2014/main" id="{6D2EC7D0-62B9-4E31-A7DA-C7C852C772EE}"/>
               </a:ext>
             </a:extLst>
           </p:cNvPr>
@@ -17851,7 +17953,7 @@
           <p:cNvPr id="7" name="">
             <a:extLst xmlns:a="http://schemas.openxmlformats.org/drawingml/2006/main">
               <a:ext uri="{FF2B5EF4-FFF2-40B4-BE49-F238E27FC236}">
-                <a16:creationId xmlns:a16="http://schemas.microsoft.com/office/drawing/2014/main" id="{6A5CB29C-7D5A-408B-8D9A-3C1E636C8960}"/>
+                <a16:creationId xmlns:a16="http://schemas.microsoft.com/office/drawing/2014/main" id="{8A55E3D8-3DEA-43D5-B1F9-3A94A00E98DC}"/>
               </a:ext>
             </a:extLst>
           </p:cNvPr>
@@ -17901,7 +18003,7 @@
           <p:cNvPr id="8" name="">
             <a:extLst xmlns:a="http://schemas.openxmlformats.org/drawingml/2006/main">
               <a:ext uri="{FF2B5EF4-FFF2-40B4-BE49-F238E27FC236}">
-                <a16:creationId xmlns:a16="http://schemas.microsoft.com/office/drawing/2014/main" id="{5B94B40C-2D59-4CB0-A36C-66474CDD816E}"/>
+                <a16:creationId xmlns:a16="http://schemas.microsoft.com/office/drawing/2014/main" id="{C8238018-5EF5-448E-BC82-68D950CDFE72}"/>
               </a:ext>
             </a:extLst>
           </p:cNvPr>
@@ -17951,7 +18053,7 @@
           <p:cNvPr id="9" name="">
             <a:extLst xmlns:a="http://schemas.openxmlformats.org/drawingml/2006/main">
               <a:ext uri="{FF2B5EF4-FFF2-40B4-BE49-F238E27FC236}">
-                <a16:creationId xmlns:a16="http://schemas.microsoft.com/office/drawing/2014/main" id="{20F9245C-3204-4FAC-9110-80EB463C5E95}"/>
+                <a16:creationId xmlns:a16="http://schemas.microsoft.com/office/drawing/2014/main" id="{AA548B5B-F280-4ACF-AC23-CFC27C67C4A3}"/>
               </a:ext>
             </a:extLst>
           </p:cNvPr>
@@ -17982,7 +18084,7 @@
           <p:cNvPr id="10" name="">
             <a:extLst xmlns:a="http://schemas.openxmlformats.org/drawingml/2006/main">
               <a:ext uri="{FF2B5EF4-FFF2-40B4-BE49-F238E27FC236}">
-                <a16:creationId xmlns:a16="http://schemas.microsoft.com/office/drawing/2014/main" id="{27B21F7F-3E3A-41B7-8FFC-7E8E020F0ECC}"/>
+                <a16:creationId xmlns:a16="http://schemas.microsoft.com/office/drawing/2014/main" id="{81441D11-12FA-4B9D-9B61-1B8D1D626F95}"/>
               </a:ext>
             </a:extLst>
           </p:cNvPr>
@@ -18032,7 +18134,7 @@
           <p:cNvPr id="11" name="">
             <a:extLst xmlns:a="http://schemas.openxmlformats.org/drawingml/2006/main">
               <a:ext uri="{FF2B5EF4-FFF2-40B4-BE49-F238E27FC236}">
-                <a16:creationId xmlns:a16="http://schemas.microsoft.com/office/drawing/2014/main" id="{C1F8B548-B9FF-4829-BDAE-4893DE880D46}"/>
+                <a16:creationId xmlns:a16="http://schemas.microsoft.com/office/drawing/2014/main" id="{CEB3D333-514F-42F1-A35D-BB085AB02E55}"/>
               </a:ext>
             </a:extLst>
           </p:cNvPr>
@@ -18082,7 +18184,7 @@
           <p:cNvPr id="12" name="">
             <a:extLst xmlns:a="http://schemas.openxmlformats.org/drawingml/2006/main">
               <a:ext uri="{FF2B5EF4-FFF2-40B4-BE49-F238E27FC236}">
-                <a16:creationId xmlns:a16="http://schemas.microsoft.com/office/drawing/2014/main" id="{665456B5-E1B1-4372-93AA-630A6D6BCEE4}"/>
+                <a16:creationId xmlns:a16="http://schemas.microsoft.com/office/drawing/2014/main" id="{8D07FAF2-1251-439A-80FD-16A9B0D64D1E}"/>
               </a:ext>
             </a:extLst>
           </p:cNvPr>
@@ -18132,7 +18234,7 @@
           <p:cNvPr id="13" name="">
             <a:extLst xmlns:a="http://schemas.openxmlformats.org/drawingml/2006/main">
               <a:ext uri="{FF2B5EF4-FFF2-40B4-BE49-F238E27FC236}">
-                <a16:creationId xmlns:a16="http://schemas.microsoft.com/office/drawing/2014/main" id="{DB3E29F7-4161-4B3D-86C4-198FF6FEE76F}"/>
+                <a16:creationId xmlns:a16="http://schemas.microsoft.com/office/drawing/2014/main" id="{F5C05688-C7D8-496B-9A68-FCB8DA86D4A2}"/>
               </a:ext>
             </a:extLst>
           </p:cNvPr>
@@ -18163,7 +18265,7 @@
           <p:cNvPr id="14" name="">
             <a:extLst xmlns:a="http://schemas.openxmlformats.org/drawingml/2006/main">
               <a:ext uri="{FF2B5EF4-FFF2-40B4-BE49-F238E27FC236}">
-                <a16:creationId xmlns:a16="http://schemas.microsoft.com/office/drawing/2014/main" id="{2E43A9D6-8B3C-4151-9C83-111AA1DDA6AE}"/>
+                <a16:creationId xmlns:a16="http://schemas.microsoft.com/office/drawing/2014/main" id="{2A01818C-9356-4621-8BE5-69E3919A080E}"/>
               </a:ext>
             </a:extLst>
           </p:cNvPr>
@@ -18213,7 +18315,7 @@
           <p:cNvPr id="15" name="">
             <a:extLst xmlns:a="http://schemas.openxmlformats.org/drawingml/2006/main">
               <a:ext uri="{FF2B5EF4-FFF2-40B4-BE49-F238E27FC236}">
-                <a16:creationId xmlns:a16="http://schemas.microsoft.com/office/drawing/2014/main" id="{C2D2D38C-05DD-4A9A-8D4B-4D492BE96E56}"/>
+                <a16:creationId xmlns:a16="http://schemas.microsoft.com/office/drawing/2014/main" id="{795FF76D-0893-42EE-9BA2-B7A2EA102CF0}"/>
               </a:ext>
             </a:extLst>
           </p:cNvPr>
@@ -18263,7 +18365,7 @@
           <p:cNvPr id="16" name="">
             <a:extLst xmlns:a="http://schemas.openxmlformats.org/drawingml/2006/main">
               <a:ext uri="{FF2B5EF4-FFF2-40B4-BE49-F238E27FC236}">
-                <a16:creationId xmlns:a16="http://schemas.microsoft.com/office/drawing/2014/main" id="{7675DB32-6BFA-4396-B11F-E6D713D2C183}"/>
+                <a16:creationId xmlns:a16="http://schemas.microsoft.com/office/drawing/2014/main" id="{B94BE237-F543-4A93-B676-8863F49DE4D5}"/>
               </a:ext>
             </a:extLst>
           </p:cNvPr>
@@ -18313,7 +18415,7 @@
           <p:cNvPr id="17" name="">
             <a:extLst xmlns:a="http://schemas.openxmlformats.org/drawingml/2006/main">
               <a:ext uri="{FF2B5EF4-FFF2-40B4-BE49-F238E27FC236}">
-                <a16:creationId xmlns:a16="http://schemas.microsoft.com/office/drawing/2014/main" id="{AE9D8E3E-E98F-4093-A923-1EA1D763E200}"/>
+                <a16:creationId xmlns:a16="http://schemas.microsoft.com/office/drawing/2014/main" id="{545F08B1-DDF4-4445-98B6-B1233E53A2CA}"/>
               </a:ext>
             </a:extLst>
           </p:cNvPr>
@@ -18344,7 +18446,7 @@
           <p:cNvPr id="18" name="">
             <a:extLst xmlns:a="http://schemas.openxmlformats.org/drawingml/2006/main">
               <a:ext uri="{FF2B5EF4-FFF2-40B4-BE49-F238E27FC236}">
-                <a16:creationId xmlns:a16="http://schemas.microsoft.com/office/drawing/2014/main" id="{3F1F136D-6A7E-4BF2-AB26-CBE63ED9436E}"/>
+                <a16:creationId xmlns:a16="http://schemas.microsoft.com/office/drawing/2014/main" id="{B214D0DD-98C0-4E0A-B45E-E6D1B0160ED7}"/>
               </a:ext>
             </a:extLst>
           </p:cNvPr>
@@ -18394,7 +18496,7 @@
           <p:cNvPr id="19" name="">
             <a:extLst xmlns:a="http://schemas.openxmlformats.org/drawingml/2006/main">
               <a:ext uri="{FF2B5EF4-FFF2-40B4-BE49-F238E27FC236}">
-                <a16:creationId xmlns:a16="http://schemas.microsoft.com/office/drawing/2014/main" id="{330A8D3C-011D-4428-A409-2BF7EFCDD9B8}"/>
+                <a16:creationId xmlns:a16="http://schemas.microsoft.com/office/drawing/2014/main" id="{CD09B0FB-1C81-485E-95A4-03C79574218E}"/>
               </a:ext>
             </a:extLst>
           </p:cNvPr>
@@ -18444,7 +18546,7 @@
           <p:cNvPr id="20" name="">
             <a:extLst xmlns:a="http://schemas.openxmlformats.org/drawingml/2006/main">
               <a:ext uri="{FF2B5EF4-FFF2-40B4-BE49-F238E27FC236}">
-                <a16:creationId xmlns:a16="http://schemas.microsoft.com/office/drawing/2014/main" id="{A1CA48E0-ED8E-4C67-A15C-21CE86AC29C2}"/>
+                <a16:creationId xmlns:a16="http://schemas.microsoft.com/office/drawing/2014/main" id="{CDF48D01-9FCE-44F2-9686-392795754D30}"/>
               </a:ext>
             </a:extLst>
           </p:cNvPr>
@@ -18494,7 +18596,7 @@
           <p:cNvPr id="21" name="">
             <a:extLst xmlns:a="http://schemas.openxmlformats.org/drawingml/2006/main">
               <a:ext uri="{FF2B5EF4-FFF2-40B4-BE49-F238E27FC236}">
-                <a16:creationId xmlns:a16="http://schemas.microsoft.com/office/drawing/2014/main" id="{A4D7BA8C-5172-4F13-B52E-EE25E7780099}"/>
+                <a16:creationId xmlns:a16="http://schemas.microsoft.com/office/drawing/2014/main" id="{CC625386-8013-412F-9782-4B2FD9BF61D1}"/>
               </a:ext>
             </a:extLst>
           </p:cNvPr>
@@ -18525,7 +18627,7 @@
           <p:cNvPr id="22" name="">
             <a:extLst xmlns:a="http://schemas.openxmlformats.org/drawingml/2006/main">
               <a:ext uri="{FF2B5EF4-FFF2-40B4-BE49-F238E27FC236}">
-                <a16:creationId xmlns:a16="http://schemas.microsoft.com/office/drawing/2014/main" id="{0A41A0F8-65C4-493B-BF06-7D42283A6FF8}"/>
+                <a16:creationId xmlns:a16="http://schemas.microsoft.com/office/drawing/2014/main" id="{28FCC4BE-4A84-43EA-9AE6-C6DA91BDC850}"/>
               </a:ext>
             </a:extLst>
           </p:cNvPr>
@@ -18575,7 +18677,7 @@
           <p:cNvPr id="23" name="">
             <a:extLst xmlns:a="http://schemas.openxmlformats.org/drawingml/2006/main">
               <a:ext uri="{FF2B5EF4-FFF2-40B4-BE49-F238E27FC236}">
-                <a16:creationId xmlns:a16="http://schemas.microsoft.com/office/drawing/2014/main" id="{3EE5DD6A-5210-4D3F-865F-954E04584445}"/>
+                <a16:creationId xmlns:a16="http://schemas.microsoft.com/office/drawing/2014/main" id="{B17018DD-6A95-40B8-89EF-676F4A5C1822}"/>
               </a:ext>
             </a:extLst>
           </p:cNvPr>
@@ -18625,7 +18727,7 @@
           <p:cNvPr id="24" name="">
             <a:extLst xmlns:a="http://schemas.openxmlformats.org/drawingml/2006/main">
               <a:ext uri="{FF2B5EF4-FFF2-40B4-BE49-F238E27FC236}">
-                <a16:creationId xmlns:a16="http://schemas.microsoft.com/office/drawing/2014/main" id="{07E0164A-21EB-4E58-89DD-A789940441C6}"/>
+                <a16:creationId xmlns:a16="http://schemas.microsoft.com/office/drawing/2014/main" id="{ECAD9EEE-FC2C-48E4-8813-080064D39591}"/>
               </a:ext>
             </a:extLst>
           </p:cNvPr>
@@ -18675,7 +18777,7 @@
           <p:cNvPr id="25" name="">
             <a:extLst xmlns:a="http://schemas.openxmlformats.org/drawingml/2006/main">
               <a:ext uri="{FF2B5EF4-FFF2-40B4-BE49-F238E27FC236}">
-                <a16:creationId xmlns:a16="http://schemas.microsoft.com/office/drawing/2014/main" id="{0634C5EF-2516-4271-9740-FDEC7A8CA877}"/>
+                <a16:creationId xmlns:a16="http://schemas.microsoft.com/office/drawing/2014/main" id="{4E19AB2C-0307-493C-8292-D22B7ADF9310}"/>
               </a:ext>
             </a:extLst>
           </p:cNvPr>
@@ -18725,7 +18827,7 @@
           <p:cNvPr id="26" name="">
             <a:extLst xmlns:a="http://schemas.openxmlformats.org/drawingml/2006/main">
               <a:ext uri="{FF2B5EF4-FFF2-40B4-BE49-F238E27FC236}">
-                <a16:creationId xmlns:a16="http://schemas.microsoft.com/office/drawing/2014/main" id="{D38C2242-26D4-4D2A-9DBF-15378EF2FBE1}"/>
+                <a16:creationId xmlns:a16="http://schemas.microsoft.com/office/drawing/2014/main" id="{A8616531-92E3-4F0B-8B54-571FFFA26CA7}"/>
               </a:ext>
             </a:extLst>
           </p:cNvPr>
@@ -18756,7 +18858,7 @@
           <p:cNvPr id="27" name="source-6">
             <a:extLst xmlns:a="http://schemas.openxmlformats.org/drawingml/2006/main">
               <a:ext uri="{FF2B5EF4-FFF2-40B4-BE49-F238E27FC236}">
-                <a16:creationId xmlns:a16="http://schemas.microsoft.com/office/drawing/2014/main" id="{782F1095-357A-4C24-8164-B1486FA20F83}"/>
+                <a16:creationId xmlns:a16="http://schemas.microsoft.com/office/drawing/2014/main" id="{CA24D0B8-A520-4BCD-A3DA-15240F1670DD}"/>
               </a:ext>
             </a:extLst>
           </p:cNvPr>
@@ -18806,7 +18908,7 @@
           <p:cNvPr id="28" name="page-6">
             <a:extLst xmlns:a="http://schemas.openxmlformats.org/drawingml/2006/main">
               <a:ext uri="{FF2B5EF4-FFF2-40B4-BE49-F238E27FC236}">
-                <a16:creationId xmlns:a16="http://schemas.microsoft.com/office/drawing/2014/main" id="{47DEEAFD-084B-416E-B88B-1D36DC530B72}"/>
+                <a16:creationId xmlns:a16="http://schemas.microsoft.com/office/drawing/2014/main" id="{A8BBB73F-12B5-465B-A87C-CCD5CD2BCE36}"/>
               </a:ext>
             </a:extLst>
           </p:cNvPr>
@@ -18854,7 +18956,7 @@
     </p:spTree>
     <p:extLst>
       <p:ext uri="{BB962C8B-B14F-4D97-AF65-F5344CB8AC3E}">
-        <p14:creationId xmlns:p14="http://schemas.microsoft.com/office/powerpoint/2010/main" val="2064369203"/>
+        <p14:creationId xmlns:p14="http://schemas.microsoft.com/office/powerpoint/2010/main" val="515648656"/>
       </p:ext>
     </p:extLst>
   </p:cSld>
@@ -18885,7 +18987,7 @@
           <p:cNvPr id="40" name="kicker-7">
             <a:extLst xmlns:a="http://schemas.openxmlformats.org/drawingml/2006/main">
               <a:ext uri="{FF2B5EF4-FFF2-40B4-BE49-F238E27FC236}">
-                <a16:creationId xmlns:a16="http://schemas.microsoft.com/office/drawing/2014/main" id="{C740484A-8072-4A81-AAD3-9AABF3CAB1B7}"/>
+                <a16:creationId xmlns:a16="http://schemas.microsoft.com/office/drawing/2014/main" id="{01772880-4530-4E1C-BB5C-654E585FE9ED}"/>
               </a:ext>
             </a:extLst>
           </p:cNvPr>
@@ -18935,7 +19037,7 @@
           <p:cNvPr id="2" name="title-7">
             <a:extLst xmlns:a="http://schemas.openxmlformats.org/drawingml/2006/main">
               <a:ext uri="{FF2B5EF4-FFF2-40B4-BE49-F238E27FC236}">
-                <a16:creationId xmlns:a16="http://schemas.microsoft.com/office/drawing/2014/main" id="{E6AC2839-FE22-4A91-ADCE-7F930E33964D}"/>
+                <a16:creationId xmlns:a16="http://schemas.microsoft.com/office/drawing/2014/main" id="{8B5787E1-85FE-4E5B-91AE-DAF0F9A7AAE9}"/>
               </a:ext>
             </a:extLst>
           </p:cNvPr>
@@ -18985,7 +19087,7 @@
           <p:cNvPr id="3" name="">
             <a:extLst xmlns:a="http://schemas.openxmlformats.org/drawingml/2006/main">
               <a:ext uri="{FF2B5EF4-FFF2-40B4-BE49-F238E27FC236}">
-                <a16:creationId xmlns:a16="http://schemas.microsoft.com/office/drawing/2014/main" id="{709B4B3F-B75D-4875-A7A8-73B41DD893B3}"/>
+                <a16:creationId xmlns:a16="http://schemas.microsoft.com/office/drawing/2014/main" id="{03FCFD45-1447-485E-8E00-3902E417B1A8}"/>
               </a:ext>
             </a:extLst>
           </p:cNvPr>
@@ -19016,7 +19118,7 @@
           <p:cNvPr id="4" name="">
             <a:extLst xmlns:a="http://schemas.openxmlformats.org/drawingml/2006/main">
               <a:ext uri="{FF2B5EF4-FFF2-40B4-BE49-F238E27FC236}">
-                <a16:creationId xmlns:a16="http://schemas.microsoft.com/office/drawing/2014/main" id="{98B3F5C8-8ACB-4EF0-9620-8FF2B1BE65E2}"/>
+                <a16:creationId xmlns:a16="http://schemas.microsoft.com/office/drawing/2014/main" id="{44D45DB6-00A5-4F8C-862D-B751E112C287}"/>
               </a:ext>
             </a:extLst>
           </p:cNvPr>
@@ -19066,7 +19168,7 @@
           <p:cNvPr id="5" name="">
             <a:extLst xmlns:a="http://schemas.openxmlformats.org/drawingml/2006/main">
               <a:ext uri="{FF2B5EF4-FFF2-40B4-BE49-F238E27FC236}">
-                <a16:creationId xmlns:a16="http://schemas.microsoft.com/office/drawing/2014/main" id="{63F1D27D-41D2-40DF-8800-C0C8768132BC}"/>
+                <a16:creationId xmlns:a16="http://schemas.microsoft.com/office/drawing/2014/main" id="{A40383BA-4CB9-4797-B8CF-EFDCD2DAFC17}"/>
               </a:ext>
             </a:extLst>
           </p:cNvPr>
@@ -19099,7 +19201,7 @@
           <p:cNvPr id="6" name="">
             <a:extLst xmlns:a="http://schemas.openxmlformats.org/drawingml/2006/main">
               <a:ext uri="{FF2B5EF4-FFF2-40B4-BE49-F238E27FC236}">
-                <a16:creationId xmlns:a16="http://schemas.microsoft.com/office/drawing/2014/main" id="{E2494BB0-B355-4EEB-B581-D2D431EF3869}"/>
+                <a16:creationId xmlns:a16="http://schemas.microsoft.com/office/drawing/2014/main" id="{1DBF4821-46A1-4CDA-89F2-7335E267EF72}"/>
               </a:ext>
             </a:extLst>
           </p:cNvPr>
@@ -19132,7 +19234,7 @@
           <p:cNvPr id="7" name="">
             <a:extLst xmlns:a="http://schemas.openxmlformats.org/drawingml/2006/main">
               <a:ext uri="{FF2B5EF4-FFF2-40B4-BE49-F238E27FC236}">
-                <a16:creationId xmlns:a16="http://schemas.microsoft.com/office/drawing/2014/main" id="{D89EA9FA-DF42-48DB-A4E8-2D771BE478F8}"/>
+                <a16:creationId xmlns:a16="http://schemas.microsoft.com/office/drawing/2014/main" id="{6265AFE7-D69D-42D8-9168-38BE3F2E60E7}"/>
               </a:ext>
             </a:extLst>
           </p:cNvPr>
@@ -19165,7 +19267,7 @@
           <p:cNvPr id="8" name="">
             <a:extLst xmlns:a="http://schemas.openxmlformats.org/drawingml/2006/main">
               <a:ext uri="{FF2B5EF4-FFF2-40B4-BE49-F238E27FC236}">
-                <a16:creationId xmlns:a16="http://schemas.microsoft.com/office/drawing/2014/main" id="{B47BF12D-82D8-415A-B1F9-24F6427D452A}"/>
+                <a16:creationId xmlns:a16="http://schemas.microsoft.com/office/drawing/2014/main" id="{D27B047C-DF42-46D3-8390-5EFFE412C5B4}"/>
               </a:ext>
             </a:extLst>
           </p:cNvPr>
@@ -19198,7 +19300,7 @@
           <p:cNvPr id="9" name="">
             <a:extLst xmlns:a="http://schemas.openxmlformats.org/drawingml/2006/main">
               <a:ext uri="{FF2B5EF4-FFF2-40B4-BE49-F238E27FC236}">
-                <a16:creationId xmlns:a16="http://schemas.microsoft.com/office/drawing/2014/main" id="{FC6C5D57-8766-43EA-82B8-0A962AAB39CF}"/>
+                <a16:creationId xmlns:a16="http://schemas.microsoft.com/office/drawing/2014/main" id="{44E1D405-FE4E-49F4-BBB8-F7816ED85D8B}"/>
               </a:ext>
             </a:extLst>
           </p:cNvPr>
@@ -19233,7 +19335,7 @@
           <p:cNvPr id="10" name="">
             <a:extLst xmlns:a="http://schemas.openxmlformats.org/drawingml/2006/main">
               <a:ext uri="{FF2B5EF4-FFF2-40B4-BE49-F238E27FC236}">
-                <a16:creationId xmlns:a16="http://schemas.microsoft.com/office/drawing/2014/main" id="{924D1394-DA32-435B-89AB-3D4FE107ABFE}"/>
+                <a16:creationId xmlns:a16="http://schemas.microsoft.com/office/drawing/2014/main" id="{9F708037-9619-495A-8AB5-403DE9E87080}"/>
               </a:ext>
             </a:extLst>
           </p:cNvPr>
@@ -19283,7 +19385,7 @@
           <p:cNvPr id="11" name="">
             <a:extLst xmlns:a="http://schemas.openxmlformats.org/drawingml/2006/main">
               <a:ext uri="{FF2B5EF4-FFF2-40B4-BE49-F238E27FC236}">
-                <a16:creationId xmlns:a16="http://schemas.microsoft.com/office/drawing/2014/main" id="{D2AC484C-D0D6-45B7-8C29-0E125BE12425}"/>
+                <a16:creationId xmlns:a16="http://schemas.microsoft.com/office/drawing/2014/main" id="{C42DCBCA-C916-4A89-B4C4-EF6293E23EC8}"/>
               </a:ext>
             </a:extLst>
           </p:cNvPr>
@@ -19350,7 +19452,7 @@
           <p:cNvPr id="12" name="">
             <a:extLst xmlns:a="http://schemas.openxmlformats.org/drawingml/2006/main">
               <a:ext uri="{FF2B5EF4-FFF2-40B4-BE49-F238E27FC236}">
-                <a16:creationId xmlns:a16="http://schemas.microsoft.com/office/drawing/2014/main" id="{3CFFCF7A-E65B-4873-9DB4-C2766F9195ED}"/>
+                <a16:creationId xmlns:a16="http://schemas.microsoft.com/office/drawing/2014/main" id="{14D88BB0-FCB0-4C33-A49B-85E3AA5576F3}"/>
               </a:ext>
             </a:extLst>
           </p:cNvPr>
@@ -19385,7 +19487,7 @@
           <p:cNvPr id="13" name="">
             <a:extLst xmlns:a="http://schemas.openxmlformats.org/drawingml/2006/main">
               <a:ext uri="{FF2B5EF4-FFF2-40B4-BE49-F238E27FC236}">
-                <a16:creationId xmlns:a16="http://schemas.microsoft.com/office/drawing/2014/main" id="{E9C3F44A-9452-493B-88B6-B229F6633FF4}"/>
+                <a16:creationId xmlns:a16="http://schemas.microsoft.com/office/drawing/2014/main" id="{1AE7AF38-629F-4A6E-A3D3-3101A23027EC}"/>
               </a:ext>
             </a:extLst>
           </p:cNvPr>
@@ -19435,7 +19537,7 @@
           <p:cNvPr id="14" name="">
             <a:extLst xmlns:a="http://schemas.openxmlformats.org/drawingml/2006/main">
               <a:ext uri="{FF2B5EF4-FFF2-40B4-BE49-F238E27FC236}">
-                <a16:creationId xmlns:a16="http://schemas.microsoft.com/office/drawing/2014/main" id="{9E5F6CD0-18E4-4567-B132-C8ECA975BFED}"/>
+                <a16:creationId xmlns:a16="http://schemas.microsoft.com/office/drawing/2014/main" id="{5A057EC6-A9FB-494C-9421-52C4F685773C}"/>
               </a:ext>
             </a:extLst>
           </p:cNvPr>
@@ -19502,7 +19604,7 @@
           <p:cNvPr id="15" name="">
             <a:extLst xmlns:a="http://schemas.openxmlformats.org/drawingml/2006/main">
               <a:ext uri="{FF2B5EF4-FFF2-40B4-BE49-F238E27FC236}">
-                <a16:creationId xmlns:a16="http://schemas.microsoft.com/office/drawing/2014/main" id="{3D5EFACE-A813-4EDB-AA12-6DE44C9FE017}"/>
+                <a16:creationId xmlns:a16="http://schemas.microsoft.com/office/drawing/2014/main" id="{6D141B21-ABF5-4DC7-BC63-24AB820C210D}"/>
               </a:ext>
             </a:extLst>
           </p:cNvPr>
@@ -19537,7 +19639,7 @@
           <p:cNvPr id="16" name="">
             <a:extLst xmlns:a="http://schemas.openxmlformats.org/drawingml/2006/main">
               <a:ext uri="{FF2B5EF4-FFF2-40B4-BE49-F238E27FC236}">
-                <a16:creationId xmlns:a16="http://schemas.microsoft.com/office/drawing/2014/main" id="{526E8575-11F7-4857-8273-2CEC83C8DE9B}"/>
+                <a16:creationId xmlns:a16="http://schemas.microsoft.com/office/drawing/2014/main" id="{3CDC6B84-6F53-41E3-9768-3244B171D886}"/>
               </a:ext>
             </a:extLst>
           </p:cNvPr>
@@ -19587,7 +19689,7 @@
           <p:cNvPr id="17" name="">
             <a:extLst xmlns:a="http://schemas.openxmlformats.org/drawingml/2006/main">
               <a:ext uri="{FF2B5EF4-FFF2-40B4-BE49-F238E27FC236}">
-                <a16:creationId xmlns:a16="http://schemas.microsoft.com/office/drawing/2014/main" id="{C98D969D-1ED1-4397-BE2D-8C5DDA601E30}"/>
+                <a16:creationId xmlns:a16="http://schemas.microsoft.com/office/drawing/2014/main" id="{B53D4538-6D2B-498E-B605-3DC98EFB7297}"/>
               </a:ext>
             </a:extLst>
           </p:cNvPr>
@@ -19654,7 +19756,7 @@
           <p:cNvPr id="18" name="">
             <a:extLst xmlns:a="http://schemas.openxmlformats.org/drawingml/2006/main">
               <a:ext uri="{FF2B5EF4-FFF2-40B4-BE49-F238E27FC236}">
-                <a16:creationId xmlns:a16="http://schemas.microsoft.com/office/drawing/2014/main" id="{1BBFC45B-8643-44DC-AF6D-57EC21B72C07}"/>
+                <a16:creationId xmlns:a16="http://schemas.microsoft.com/office/drawing/2014/main" id="{AE68AF65-5C1E-4CEE-A6BD-F70D4FCB0F2F}"/>
               </a:ext>
             </a:extLst>
           </p:cNvPr>
@@ -19689,7 +19791,7 @@
           <p:cNvPr id="19" name="">
             <a:extLst xmlns:a="http://schemas.openxmlformats.org/drawingml/2006/main">
               <a:ext uri="{FF2B5EF4-FFF2-40B4-BE49-F238E27FC236}">
-                <a16:creationId xmlns:a16="http://schemas.microsoft.com/office/drawing/2014/main" id="{94C30E75-E690-408A-8403-7AA412C4EA68}"/>
+                <a16:creationId xmlns:a16="http://schemas.microsoft.com/office/drawing/2014/main" id="{311A136F-2F12-405E-A2FE-069CA9C4A4AC}"/>
               </a:ext>
             </a:extLst>
           </p:cNvPr>
@@ -19739,7 +19841,7 @@
           <p:cNvPr id="20" name="">
             <a:extLst xmlns:a="http://schemas.openxmlformats.org/drawingml/2006/main">
               <a:ext uri="{FF2B5EF4-FFF2-40B4-BE49-F238E27FC236}">
-                <a16:creationId xmlns:a16="http://schemas.microsoft.com/office/drawing/2014/main" id="{A1637672-2234-4BB2-9209-5D90BE82D06A}"/>
+                <a16:creationId xmlns:a16="http://schemas.microsoft.com/office/drawing/2014/main" id="{6240F159-DB0B-4C36-A44F-0BDBFBDCD32B}"/>
               </a:ext>
             </a:extLst>
           </p:cNvPr>
@@ -19806,7 +19908,7 @@
           <p:cNvPr id="21" name="">
             <a:extLst xmlns:a="http://schemas.openxmlformats.org/drawingml/2006/main">
               <a:ext uri="{FF2B5EF4-FFF2-40B4-BE49-F238E27FC236}">
-                <a16:creationId xmlns:a16="http://schemas.microsoft.com/office/drawing/2014/main" id="{54A7F979-BB55-4FCC-954B-BFBC98BA7D94}"/>
+                <a16:creationId xmlns:a16="http://schemas.microsoft.com/office/drawing/2014/main" id="{63252277-635E-4704-9BE4-BCC887E1BD1C}"/>
               </a:ext>
             </a:extLst>
           </p:cNvPr>
@@ -19847,7 +19949,7 @@
           <p:cNvPr id="22" name="">
             <a:extLst xmlns:a="http://schemas.openxmlformats.org/drawingml/2006/main">
               <a:ext uri="{FF2B5EF4-FFF2-40B4-BE49-F238E27FC236}">
-                <a16:creationId xmlns:a16="http://schemas.microsoft.com/office/drawing/2014/main" id="{158FE1EF-7B7A-4527-9791-C62061A88534}"/>
+                <a16:creationId xmlns:a16="http://schemas.microsoft.com/office/drawing/2014/main" id="{656F169C-5D3B-43AE-91FC-E829E90D21F8}"/>
               </a:ext>
             </a:extLst>
           </p:cNvPr>
@@ -19897,7 +19999,7 @@
           <p:cNvPr id="23" name="">
             <a:extLst xmlns:a="http://schemas.openxmlformats.org/drawingml/2006/main">
               <a:ext uri="{FF2B5EF4-FFF2-40B4-BE49-F238E27FC236}">
-                <a16:creationId xmlns:a16="http://schemas.microsoft.com/office/drawing/2014/main" id="{B8754653-10EF-4072-8783-59F1897CD505}"/>
+                <a16:creationId xmlns:a16="http://schemas.microsoft.com/office/drawing/2014/main" id="{19257DA8-C2D2-48FC-B40A-28431DDF5035}"/>
               </a:ext>
             </a:extLst>
           </p:cNvPr>
@@ -19937,7 +20039,7 @@
                   <a:srgbClr val="526174"/>
                 </a:solidFill>
               </a:rPr>
-              <a:t>support / contradict</a:t>
+              <a:t>S support / C contradict</a:t>
             </a:r>
           </a:p>
           <a:p xmlns:a="http://schemas.openxmlformats.org/drawingml/2006/main">
@@ -19954,7 +20056,7 @@
                   <a:srgbClr val="526174"/>
                 </a:solidFill>
               </a:rPr>
-              <a:t>/ unknown</a:t>
+              <a:t>/ U unknown</a:t>
             </a:r>
           </a:p>
         </p:txBody>
@@ -19964,7 +20066,7 @@
           <p:cNvPr id="24" name="">
             <a:extLst xmlns:a="http://schemas.openxmlformats.org/drawingml/2006/main">
               <a:ext uri="{FF2B5EF4-FFF2-40B4-BE49-F238E27FC236}">
-                <a16:creationId xmlns:a16="http://schemas.microsoft.com/office/drawing/2014/main" id="{719A3B89-DFDB-479F-9850-1CB05F9C673D}"/>
+                <a16:creationId xmlns:a16="http://schemas.microsoft.com/office/drawing/2014/main" id="{74A9B410-9C9E-494D-BCEB-4E2E6E548336}"/>
               </a:ext>
             </a:extLst>
           </p:cNvPr>
@@ -20014,7 +20116,7 @@
           <p:cNvPr id="25" name="">
             <a:extLst xmlns:a="http://schemas.openxmlformats.org/drawingml/2006/main">
               <a:ext uri="{FF2B5EF4-FFF2-40B4-BE49-F238E27FC236}">
-                <a16:creationId xmlns:a16="http://schemas.microsoft.com/office/drawing/2014/main" id="{C6E4035B-00C6-4021-8E6C-BB7766B5BC9E}"/>
+                <a16:creationId xmlns:a16="http://schemas.microsoft.com/office/drawing/2014/main" id="{48DEFCBF-E71C-4ED9-A1AA-F878E46F0A2A}"/>
               </a:ext>
             </a:extLst>
           </p:cNvPr>
@@ -20049,7 +20151,7 @@
           <p:cNvPr id="26" name="">
             <a:extLst xmlns:a="http://schemas.openxmlformats.org/drawingml/2006/main">
               <a:ext uri="{FF2B5EF4-FFF2-40B4-BE49-F238E27FC236}">
-                <a16:creationId xmlns:a16="http://schemas.microsoft.com/office/drawing/2014/main" id="{1E53F26A-A65D-4A9D-B78F-4EBB38F9F452}"/>
+                <a16:creationId xmlns:a16="http://schemas.microsoft.com/office/drawing/2014/main" id="{1BCBAFB4-037E-45B8-8F9F-95CE29709B71}"/>
               </a:ext>
             </a:extLst>
           </p:cNvPr>
@@ -20099,7 +20201,7 @@
           <p:cNvPr id="27" name="">
             <a:extLst xmlns:a="http://schemas.openxmlformats.org/drawingml/2006/main">
               <a:ext uri="{FF2B5EF4-FFF2-40B4-BE49-F238E27FC236}">
-                <a16:creationId xmlns:a16="http://schemas.microsoft.com/office/drawing/2014/main" id="{2B05D140-1625-487E-9AF9-FF8873906772}"/>
+                <a16:creationId xmlns:a16="http://schemas.microsoft.com/office/drawing/2014/main" id="{EB5C4F10-E23C-495D-B506-12B6B5FFC01D}"/>
               </a:ext>
             </a:extLst>
           </p:cNvPr>
@@ -20139,7 +20241,7 @@
                   <a:srgbClr val="0F172A"/>
                 </a:solidFill>
               </a:rPr>
-              <a:t>exists i: state(ci) = contradict</a:t>
+              <a:t>exists i: state(ci) = C</a:t>
             </a:r>
           </a:p>
         </p:txBody>
@@ -20149,7 +20251,7 @@
           <p:cNvPr id="28" name="">
             <a:extLst xmlns:a="http://schemas.openxmlformats.org/drawingml/2006/main">
               <a:ext uri="{FF2B5EF4-FFF2-40B4-BE49-F238E27FC236}">
-                <a16:creationId xmlns:a16="http://schemas.microsoft.com/office/drawing/2014/main" id="{3BDBABC5-7DA9-4F21-8D30-333679DB0242}"/>
+                <a16:creationId xmlns:a16="http://schemas.microsoft.com/office/drawing/2014/main" id="{7572C33C-646C-4C17-887D-1D093DFD0A41}"/>
               </a:ext>
             </a:extLst>
           </p:cNvPr>
@@ -20199,7 +20301,7 @@
           <p:cNvPr id="29" name="">
             <a:extLst xmlns:a="http://schemas.openxmlformats.org/drawingml/2006/main">
               <a:ext uri="{FF2B5EF4-FFF2-40B4-BE49-F238E27FC236}">
-                <a16:creationId xmlns:a16="http://schemas.microsoft.com/office/drawing/2014/main" id="{EB681483-BFAD-41E0-B1D5-944F48C6B5FE}"/>
+                <a16:creationId xmlns:a16="http://schemas.microsoft.com/office/drawing/2014/main" id="{CE4CB502-DECD-44D1-A56E-12383CD558B1}"/>
               </a:ext>
             </a:extLst>
           </p:cNvPr>
@@ -20230,7 +20332,7 @@
           <p:cNvPr id="30" name="">
             <a:extLst xmlns:a="http://schemas.openxmlformats.org/drawingml/2006/main">
               <a:ext uri="{FF2B5EF4-FFF2-40B4-BE49-F238E27FC236}">
-                <a16:creationId xmlns:a16="http://schemas.microsoft.com/office/drawing/2014/main" id="{71BF6129-6076-483F-B130-B9BF22FCC3E7}"/>
+                <a16:creationId xmlns:a16="http://schemas.microsoft.com/office/drawing/2014/main" id="{39507756-A50D-418C-A718-CB69FBCE8EFC}"/>
               </a:ext>
             </a:extLst>
           </p:cNvPr>
@@ -20280,7 +20382,7 @@
           <p:cNvPr id="31" name="">
             <a:extLst xmlns:a="http://schemas.openxmlformats.org/drawingml/2006/main">
               <a:ext uri="{FF2B5EF4-FFF2-40B4-BE49-F238E27FC236}">
-                <a16:creationId xmlns:a16="http://schemas.microsoft.com/office/drawing/2014/main" id="{4E608F2F-69CD-46A9-9D20-32923F1D19B4}"/>
+                <a16:creationId xmlns:a16="http://schemas.microsoft.com/office/drawing/2014/main" id="{41CAE3AB-1CD0-4204-B968-9B58CE1D0971}"/>
               </a:ext>
             </a:extLst>
           </p:cNvPr>
@@ -20320,7 +20422,7 @@
                   <a:srgbClr val="0F172A"/>
                 </a:solidFill>
               </a:rPr>
-              <a:t>for all i: state(ci) = support; no extra factual claim</a:t>
+              <a:t>for all i: state(ci) = S; no extra factual claim</a:t>
             </a:r>
           </a:p>
         </p:txBody>
@@ -20330,7 +20432,7 @@
           <p:cNvPr id="32" name="">
             <a:extLst xmlns:a="http://schemas.openxmlformats.org/drawingml/2006/main">
               <a:ext uri="{FF2B5EF4-FFF2-40B4-BE49-F238E27FC236}">
-                <a16:creationId xmlns:a16="http://schemas.microsoft.com/office/drawing/2014/main" id="{A6349AEA-7364-4477-848D-CAE363A3FE66}"/>
+                <a16:creationId xmlns:a16="http://schemas.microsoft.com/office/drawing/2014/main" id="{972D00FB-F6E1-4CB1-BBEC-045C2441EC45}"/>
               </a:ext>
             </a:extLst>
           </p:cNvPr>
@@ -20380,7 +20482,7 @@
           <p:cNvPr id="33" name="">
             <a:extLst xmlns:a="http://schemas.openxmlformats.org/drawingml/2006/main">
               <a:ext uri="{FF2B5EF4-FFF2-40B4-BE49-F238E27FC236}">
-                <a16:creationId xmlns:a16="http://schemas.microsoft.com/office/drawing/2014/main" id="{E3865589-F548-4E3D-8529-B5223EF11AF2}"/>
+                <a16:creationId xmlns:a16="http://schemas.microsoft.com/office/drawing/2014/main" id="{5E13C481-AAA3-4C68-9C71-BDA29B586042}"/>
               </a:ext>
             </a:extLst>
           </p:cNvPr>
@@ -20411,7 +20513,7 @@
           <p:cNvPr id="34" name="">
             <a:extLst xmlns:a="http://schemas.openxmlformats.org/drawingml/2006/main">
               <a:ext uri="{FF2B5EF4-FFF2-40B4-BE49-F238E27FC236}">
-                <a16:creationId xmlns:a16="http://schemas.microsoft.com/office/drawing/2014/main" id="{7B7C2377-839C-4A57-884D-836C335A443E}"/>
+                <a16:creationId xmlns:a16="http://schemas.microsoft.com/office/drawing/2014/main" id="{F73AF534-2F5B-485F-A7D7-14F3046F9B66}"/>
               </a:ext>
             </a:extLst>
           </p:cNvPr>
@@ -20461,7 +20563,7 @@
           <p:cNvPr id="35" name="">
             <a:extLst xmlns:a="http://schemas.openxmlformats.org/drawingml/2006/main">
               <a:ext uri="{FF2B5EF4-FFF2-40B4-BE49-F238E27FC236}">
-                <a16:creationId xmlns:a16="http://schemas.microsoft.com/office/drawing/2014/main" id="{892C139C-6A4D-4AFD-953A-39B76F685B8F}"/>
+                <a16:creationId xmlns:a16="http://schemas.microsoft.com/office/drawing/2014/main" id="{BB40F332-2B7E-49E9-A5D8-881F31DFF9BD}"/>
               </a:ext>
             </a:extLst>
           </p:cNvPr>
@@ -20511,7 +20613,7 @@
           <p:cNvPr id="36" name="">
             <a:extLst xmlns:a="http://schemas.openxmlformats.org/drawingml/2006/main">
               <a:ext uri="{FF2B5EF4-FFF2-40B4-BE49-F238E27FC236}">
-                <a16:creationId xmlns:a16="http://schemas.microsoft.com/office/drawing/2014/main" id="{04548B0E-AEA9-44E3-BF35-228A70EBBB41}"/>
+                <a16:creationId xmlns:a16="http://schemas.microsoft.com/office/drawing/2014/main" id="{79333D69-BCCB-4FEB-88C5-C9441A99BC7E}"/>
               </a:ext>
             </a:extLst>
           </p:cNvPr>
@@ -20561,7 +20663,7 @@
           <p:cNvPr id="37" name="">
             <a:extLst xmlns:a="http://schemas.openxmlformats.org/drawingml/2006/main">
               <a:ext uri="{FF2B5EF4-FFF2-40B4-BE49-F238E27FC236}">
-                <a16:creationId xmlns:a16="http://schemas.microsoft.com/office/drawing/2014/main" id="{B106F90C-EA62-4947-9CF2-B1F793BFAB04}"/>
+                <a16:creationId xmlns:a16="http://schemas.microsoft.com/office/drawing/2014/main" id="{78A43A7B-457A-44A1-9841-7F3AD6332F6C}"/>
               </a:ext>
             </a:extLst>
           </p:cNvPr>
@@ -20592,7 +20694,7 @@
           <p:cNvPr id="38" name="source-7">
             <a:extLst xmlns:a="http://schemas.openxmlformats.org/drawingml/2006/main">
               <a:ext uri="{FF2B5EF4-FFF2-40B4-BE49-F238E27FC236}">
-                <a16:creationId xmlns:a16="http://schemas.microsoft.com/office/drawing/2014/main" id="{99548027-F782-418B-BA9D-0D27B0B276CC}"/>
+                <a16:creationId xmlns:a16="http://schemas.microsoft.com/office/drawing/2014/main" id="{00AF63F6-0F40-4059-B77A-AB38DA2DF405}"/>
               </a:ext>
             </a:extLst>
           </p:cNvPr>
@@ -20632,7 +20734,7 @@
                   <a:srgbClr val="526174"/>
                 </a:solidFill>
               </a:rPr>
-              <a:t>[3] Context-faithfulness task design  [7] v91 clause and claim verifier</a:t>
+              <a:t>Report Fig. 2a  |  [3] Context-faithfulness design  [7] v91 clause and claim verifier</a:t>
             </a:r>
           </a:p>
         </p:txBody>
@@ -20642,7 +20744,7 @@
           <p:cNvPr id="39" name="page-7">
             <a:extLst xmlns:a="http://schemas.openxmlformats.org/drawingml/2006/main">
               <a:ext uri="{FF2B5EF4-FFF2-40B4-BE49-F238E27FC236}">
-                <a16:creationId xmlns:a16="http://schemas.microsoft.com/office/drawing/2014/main" id="{A1BA36DA-F5B7-4C03-9A81-35D065DA57E7}"/>
+                <a16:creationId xmlns:a16="http://schemas.microsoft.com/office/drawing/2014/main" id="{4E8D4855-39AF-4891-B48F-29CC2DECAEB0}"/>
               </a:ext>
             </a:extLst>
           </p:cNvPr>
@@ -20690,7 +20792,7 @@
     </p:spTree>
     <p:extLst>
       <p:ext uri="{BB962C8B-B14F-4D97-AF65-F5344CB8AC3E}">
-        <p14:creationId xmlns:p14="http://schemas.microsoft.com/office/powerpoint/2010/main" val="604397222"/>
+        <p14:creationId xmlns:p14="http://schemas.microsoft.com/office/powerpoint/2010/main" val="1161098434"/>
       </p:ext>
     </p:extLst>
   </p:cSld>
@@ -20721,7 +20823,7 @@
           <p:cNvPr id="20" name="kicker-8">
             <a:extLst xmlns:a="http://schemas.openxmlformats.org/drawingml/2006/main">
               <a:ext uri="{FF2B5EF4-FFF2-40B4-BE49-F238E27FC236}">
-                <a16:creationId xmlns:a16="http://schemas.microsoft.com/office/drawing/2014/main" id="{18A7C5C0-4E42-416F-AA5F-61CAD978E86D}"/>
+                <a16:creationId xmlns:a16="http://schemas.microsoft.com/office/drawing/2014/main" id="{357EE582-102B-4726-BD93-690AC1F26329}"/>
               </a:ext>
             </a:extLst>
           </p:cNvPr>
@@ -20771,7 +20873,7 @@
           <p:cNvPr id="2" name="title-8">
             <a:extLst xmlns:a="http://schemas.openxmlformats.org/drawingml/2006/main">
               <a:ext uri="{FF2B5EF4-FFF2-40B4-BE49-F238E27FC236}">
-                <a16:creationId xmlns:a16="http://schemas.microsoft.com/office/drawing/2014/main" id="{B47EEB21-14BE-4E7F-9F09-1EE80CCF5F93}"/>
+                <a16:creationId xmlns:a16="http://schemas.microsoft.com/office/drawing/2014/main" id="{5BA37C50-A1C7-4451-AEF1-67EC987348A9}"/>
               </a:ext>
             </a:extLst>
           </p:cNvPr>
@@ -20821,7 +20923,7 @@
           <p:cNvPr id="3" name="">
             <a:extLst xmlns:a="http://schemas.openxmlformats.org/drawingml/2006/main">
               <a:ext uri="{FF2B5EF4-FFF2-40B4-BE49-F238E27FC236}">
-                <a16:creationId xmlns:a16="http://schemas.microsoft.com/office/drawing/2014/main" id="{57CBC113-3131-43BE-956D-F54976E933E1}"/>
+                <a16:creationId xmlns:a16="http://schemas.microsoft.com/office/drawing/2014/main" id="{3E4A880F-7D1B-461A-BC03-17C66ADB1146}"/>
               </a:ext>
             </a:extLst>
           </p:cNvPr>
@@ -20852,7 +20954,7 @@
           <p:cNvPr id="4" name="">
             <a:extLst xmlns:a="http://schemas.openxmlformats.org/drawingml/2006/main">
               <a:ext uri="{FF2B5EF4-FFF2-40B4-BE49-F238E27FC236}">
-                <a16:creationId xmlns:a16="http://schemas.microsoft.com/office/drawing/2014/main" id="{EB6BF604-117B-4F46-B90C-3A96D18A3382}"/>
+                <a16:creationId xmlns:a16="http://schemas.microsoft.com/office/drawing/2014/main" id="{1F98FB0D-0149-46F6-93F0-3B3D5140BF88}"/>
               </a:ext>
             </a:extLst>
           </p:cNvPr>
@@ -20902,7 +21004,7 @@
           <p:cNvPr id="5" name="">
             <a:extLst xmlns:a="http://schemas.openxmlformats.org/drawingml/2006/main">
               <a:ext uri="{FF2B5EF4-FFF2-40B4-BE49-F238E27FC236}">
-                <a16:creationId xmlns:a16="http://schemas.microsoft.com/office/drawing/2014/main" id="{2DED919A-3658-4EEB-9E12-8E956502783E}"/>
+                <a16:creationId xmlns:a16="http://schemas.microsoft.com/office/drawing/2014/main" id="{D99D3352-48F9-4CDB-BB6F-5C375F259A0F}"/>
               </a:ext>
             </a:extLst>
           </p:cNvPr>
@@ -20943,7 +21045,7 @@
           <p:cNvPr id="6" name="">
             <a:extLst xmlns:a="http://schemas.openxmlformats.org/drawingml/2006/main">
               <a:ext uri="{FF2B5EF4-FFF2-40B4-BE49-F238E27FC236}">
-                <a16:creationId xmlns:a16="http://schemas.microsoft.com/office/drawing/2014/main" id="{5B0820F0-5A5C-4FDD-AC56-1128F64CA1EF}"/>
+                <a16:creationId xmlns:a16="http://schemas.microsoft.com/office/drawing/2014/main" id="{8E86E3D1-C2E2-455B-B7FE-8B308FE717C4}"/>
               </a:ext>
             </a:extLst>
           </p:cNvPr>
@@ -20993,7 +21095,7 @@
           <p:cNvPr id="7" name="">
             <a:extLst xmlns:a="http://schemas.openxmlformats.org/drawingml/2006/main">
               <a:ext uri="{FF2B5EF4-FFF2-40B4-BE49-F238E27FC236}">
-                <a16:creationId xmlns:a16="http://schemas.microsoft.com/office/drawing/2014/main" id="{5ACD71EA-BC70-4D59-8B7F-518D8A0BD9C9}"/>
+                <a16:creationId xmlns:a16="http://schemas.microsoft.com/office/drawing/2014/main" id="{0E35DBE4-97B1-4FB2-A64D-C26970C04056}"/>
               </a:ext>
             </a:extLst>
           </p:cNvPr>
@@ -21043,7 +21145,7 @@
           <p:cNvPr id="8" name="">
             <a:extLst xmlns:a="http://schemas.openxmlformats.org/drawingml/2006/main">
               <a:ext uri="{FF2B5EF4-FFF2-40B4-BE49-F238E27FC236}">
-                <a16:creationId xmlns:a16="http://schemas.microsoft.com/office/drawing/2014/main" id="{D32665CF-E724-4A51-8E33-4DD84CD20343}"/>
+                <a16:creationId xmlns:a16="http://schemas.microsoft.com/office/drawing/2014/main" id="{68311AFD-E037-4BA9-A092-FD2882275D0E}"/>
               </a:ext>
             </a:extLst>
           </p:cNvPr>
@@ -21093,7 +21195,7 @@
           <p:cNvPr id="9" name="">
             <a:extLst xmlns:a="http://schemas.openxmlformats.org/drawingml/2006/main">
               <a:ext uri="{FF2B5EF4-FFF2-40B4-BE49-F238E27FC236}">
-                <a16:creationId xmlns:a16="http://schemas.microsoft.com/office/drawing/2014/main" id="{F7E3F22A-A477-4F3A-BFCC-7591307B1B8B}"/>
+                <a16:creationId xmlns:a16="http://schemas.microsoft.com/office/drawing/2014/main" id="{BFCEBA5F-04C3-40A9-B4B1-D5A260CD7BD2}"/>
               </a:ext>
             </a:extLst>
           </p:cNvPr>
@@ -21143,7 +21245,7 @@
           <p:cNvPr id="10" name="">
             <a:extLst xmlns:a="http://schemas.openxmlformats.org/drawingml/2006/main">
               <a:ext uri="{FF2B5EF4-FFF2-40B4-BE49-F238E27FC236}">
-                <a16:creationId xmlns:a16="http://schemas.microsoft.com/office/drawing/2014/main" id="{501AB780-43D3-4196-AC14-859EB8F2A1B8}"/>
+                <a16:creationId xmlns:a16="http://schemas.microsoft.com/office/drawing/2014/main" id="{34E933C2-B039-4E89-BB19-5E29F1CCC2A8}"/>
               </a:ext>
             </a:extLst>
           </p:cNvPr>
@@ -21184,7 +21286,7 @@
           <p:cNvPr id="11" name="">
             <a:extLst xmlns:a="http://schemas.openxmlformats.org/drawingml/2006/main">
               <a:ext uri="{FF2B5EF4-FFF2-40B4-BE49-F238E27FC236}">
-                <a16:creationId xmlns:a16="http://schemas.microsoft.com/office/drawing/2014/main" id="{0DCCF604-1E46-401D-AB91-C7F53B595F31}"/>
+                <a16:creationId xmlns:a16="http://schemas.microsoft.com/office/drawing/2014/main" id="{F88F2B7A-3FB5-42D3-86C2-62BF1B77D869}"/>
               </a:ext>
             </a:extLst>
           </p:cNvPr>
@@ -21234,7 +21336,7 @@
           <p:cNvPr id="12" name="">
             <a:extLst xmlns:a="http://schemas.openxmlformats.org/drawingml/2006/main">
               <a:ext uri="{FF2B5EF4-FFF2-40B4-BE49-F238E27FC236}">
-                <a16:creationId xmlns:a16="http://schemas.microsoft.com/office/drawing/2014/main" id="{D85254BD-20EF-4BF6-AAFC-0F3B9C2CDF9F}"/>
+                <a16:creationId xmlns:a16="http://schemas.microsoft.com/office/drawing/2014/main" id="{C23B3953-73E6-49C3-BCFD-56BFE044A61C}"/>
               </a:ext>
             </a:extLst>
           </p:cNvPr>
@@ -21284,7 +21386,7 @@
           <p:cNvPr id="13" name="">
             <a:extLst xmlns:a="http://schemas.openxmlformats.org/drawingml/2006/main">
               <a:ext uri="{FF2B5EF4-FFF2-40B4-BE49-F238E27FC236}">
-                <a16:creationId xmlns:a16="http://schemas.microsoft.com/office/drawing/2014/main" id="{92DCBB82-6E1D-4736-9D22-3E5F8D48AEF8}"/>
+                <a16:creationId xmlns:a16="http://schemas.microsoft.com/office/drawing/2014/main" id="{43C2CA70-5715-4A93-A8FE-B25EE5A0604B}"/>
               </a:ext>
             </a:extLst>
           </p:cNvPr>
@@ -21334,7 +21436,7 @@
           <p:cNvPr id="14" name="">
             <a:extLst xmlns:a="http://schemas.openxmlformats.org/drawingml/2006/main">
               <a:ext uri="{FF2B5EF4-FFF2-40B4-BE49-F238E27FC236}">
-                <a16:creationId xmlns:a16="http://schemas.microsoft.com/office/drawing/2014/main" id="{F4A62FAB-75E3-4410-A4D6-08F468E5541E}"/>
+                <a16:creationId xmlns:a16="http://schemas.microsoft.com/office/drawing/2014/main" id="{310D4246-0ABA-45DA-8F98-B86E5C6C1B75}"/>
               </a:ext>
             </a:extLst>
           </p:cNvPr>
@@ -21384,7 +21486,7 @@
           <p:cNvPr id="15" name="">
             <a:extLst xmlns:a="http://schemas.openxmlformats.org/drawingml/2006/main">
               <a:ext uri="{FF2B5EF4-FFF2-40B4-BE49-F238E27FC236}">
-                <a16:creationId xmlns:a16="http://schemas.microsoft.com/office/drawing/2014/main" id="{CA659970-0DEE-4219-80F3-886A27B502C9}"/>
+                <a16:creationId xmlns:a16="http://schemas.microsoft.com/office/drawing/2014/main" id="{0449E9E3-9E69-4581-B678-ED43A682DCE5}"/>
               </a:ext>
             </a:extLst>
           </p:cNvPr>
@@ -21419,7 +21521,7 @@
           <p:cNvPr id="16" name="">
             <a:extLst xmlns:a="http://schemas.openxmlformats.org/drawingml/2006/main">
               <a:ext uri="{FF2B5EF4-FFF2-40B4-BE49-F238E27FC236}">
-                <a16:creationId xmlns:a16="http://schemas.microsoft.com/office/drawing/2014/main" id="{60CC11CC-C33C-4D80-80A7-8B66FC1653A1}"/>
+                <a16:creationId xmlns:a16="http://schemas.microsoft.com/office/drawing/2014/main" id="{20D2E5B5-2B0D-4D28-A6EA-D31BEFBF349F}"/>
               </a:ext>
             </a:extLst>
           </p:cNvPr>
@@ -21469,7 +21571,7 @@
           <p:cNvPr id="17" name="">
             <a:extLst xmlns:a="http://schemas.openxmlformats.org/drawingml/2006/main">
               <a:ext uri="{FF2B5EF4-FFF2-40B4-BE49-F238E27FC236}">
-                <a16:creationId xmlns:a16="http://schemas.microsoft.com/office/drawing/2014/main" id="{BC0D63BE-234D-47C5-8ED5-89FFF4DC697D}"/>
+                <a16:creationId xmlns:a16="http://schemas.microsoft.com/office/drawing/2014/main" id="{F6D94704-B023-46FF-AFAD-F481DF5BC673}"/>
               </a:ext>
             </a:extLst>
           </p:cNvPr>
@@ -21500,7 +21602,7 @@
           <p:cNvPr id="18" name="source-8">
             <a:extLst xmlns:a="http://schemas.openxmlformats.org/drawingml/2006/main">
               <a:ext uri="{FF2B5EF4-FFF2-40B4-BE49-F238E27FC236}">
-                <a16:creationId xmlns:a16="http://schemas.microsoft.com/office/drawing/2014/main" id="{63983B02-AE9D-4E05-8138-3378AFEE237F}"/>
+                <a16:creationId xmlns:a16="http://schemas.microsoft.com/office/drawing/2014/main" id="{A9FBDFA7-E522-4E73-B9DE-8F1A34F6C02D}"/>
               </a:ext>
             </a:extLst>
           </p:cNvPr>
@@ -21550,7 +21652,7 @@
           <p:cNvPr id="19" name="page-8">
             <a:extLst xmlns:a="http://schemas.openxmlformats.org/drawingml/2006/main">
               <a:ext uri="{FF2B5EF4-FFF2-40B4-BE49-F238E27FC236}">
-                <a16:creationId xmlns:a16="http://schemas.microsoft.com/office/drawing/2014/main" id="{B180A76D-7059-4B18-82CE-FAA46C66E843}"/>
+                <a16:creationId xmlns:a16="http://schemas.microsoft.com/office/drawing/2014/main" id="{6C6E730D-6A18-48B8-97F8-5F6343F37E19}"/>
               </a:ext>
             </a:extLst>
           </p:cNvPr>
@@ -21598,7 +21700,7 @@
     </p:spTree>
     <p:extLst>
       <p:ext uri="{BB962C8B-B14F-4D97-AF65-F5344CB8AC3E}">
-        <p14:creationId xmlns:p14="http://schemas.microsoft.com/office/powerpoint/2010/main" val="1376066605"/>
+        <p14:creationId xmlns:p14="http://schemas.microsoft.com/office/powerpoint/2010/main" val="331821385"/>
       </p:ext>
     </p:extLst>
   </p:cSld>
@@ -21629,7 +21731,7 @@
           <p:cNvPr id="53" name="kicker-9">
             <a:extLst xmlns:a="http://schemas.openxmlformats.org/drawingml/2006/main">
               <a:ext uri="{FF2B5EF4-FFF2-40B4-BE49-F238E27FC236}">
-                <a16:creationId xmlns:a16="http://schemas.microsoft.com/office/drawing/2014/main" id="{6CC98ABD-4CEE-4922-A70E-86870D6EBFC0}"/>
+                <a16:creationId xmlns:a16="http://schemas.microsoft.com/office/drawing/2014/main" id="{8AD3F104-83CB-43B2-9AFD-F0132AE43D3C}"/>
               </a:ext>
             </a:extLst>
           </p:cNvPr>
@@ -21679,7 +21781,7 @@
           <p:cNvPr id="2" name="title-9">
             <a:extLst xmlns:a="http://schemas.openxmlformats.org/drawingml/2006/main">
               <a:ext uri="{FF2B5EF4-FFF2-40B4-BE49-F238E27FC236}">
-                <a16:creationId xmlns:a16="http://schemas.microsoft.com/office/drawing/2014/main" id="{AF0A7F00-CBF4-4C8B-BE46-ABC9D655BBAE}"/>
+                <a16:creationId xmlns:a16="http://schemas.microsoft.com/office/drawing/2014/main" id="{7D8A7457-1AD7-4CD7-BAB1-C670117E1EFA}"/>
               </a:ext>
             </a:extLst>
           </p:cNvPr>
@@ -21729,7 +21831,7 @@
           <p:cNvPr id="3" name="">
             <a:extLst xmlns:a="http://schemas.openxmlformats.org/drawingml/2006/main">
               <a:ext uri="{FF2B5EF4-FFF2-40B4-BE49-F238E27FC236}">
-                <a16:creationId xmlns:a16="http://schemas.microsoft.com/office/drawing/2014/main" id="{B0804F74-5FF9-43EF-B8A7-0804325E1DA2}"/>
+                <a16:creationId xmlns:a16="http://schemas.microsoft.com/office/drawing/2014/main" id="{A58220DC-BA2B-44A7-A925-D78C9BAC5EAA}"/>
               </a:ext>
             </a:extLst>
           </p:cNvPr>
@@ -21760,7 +21862,7 @@
           <p:cNvPr id="4" name="">
             <a:extLst xmlns:a="http://schemas.openxmlformats.org/drawingml/2006/main">
               <a:ext uri="{FF2B5EF4-FFF2-40B4-BE49-F238E27FC236}">
-                <a16:creationId xmlns:a16="http://schemas.microsoft.com/office/drawing/2014/main" id="{80B121D6-77A3-4DD8-8DDE-2D2A76CABFEF}"/>
+                <a16:creationId xmlns:a16="http://schemas.microsoft.com/office/drawing/2014/main" id="{8FC137F4-B5C0-4568-A02A-F48A9AC2CD40}"/>
               </a:ext>
             </a:extLst>
           </p:cNvPr>
@@ -21800,7 +21902,7 @@
                   <a:srgbClr val="526174"/>
                 </a:solidFill>
               </a:rPr>
-              <a:t>The trace preserved why a row was resolved, which source supported it, and which relation was tested.</a:t>
+              <a:t>The trace records why a row was resolved, its source, and the relation that was tested.</a:t>
             </a:r>
           </a:p>
         </p:txBody>
@@ -21810,7 +21912,7 @@
           <p:cNvPr id="5" name="">
             <a:extLst xmlns:a="http://schemas.openxmlformats.org/drawingml/2006/main">
               <a:ext uri="{FF2B5EF4-FFF2-40B4-BE49-F238E27FC236}">
-                <a16:creationId xmlns:a16="http://schemas.microsoft.com/office/drawing/2014/main" id="{848C9508-E432-4136-8BE9-C20F595B56C2}"/>
+                <a16:creationId xmlns:a16="http://schemas.microsoft.com/office/drawing/2014/main" id="{AA52126B-F14C-449A-AD59-DC9B9544CC4F}"/>
               </a:ext>
             </a:extLst>
           </p:cNvPr>
@@ -21843,7 +21945,7 @@
           <p:cNvPr id="6" name="">
             <a:extLst xmlns:a="http://schemas.openxmlformats.org/drawingml/2006/main">
               <a:ext uri="{FF2B5EF4-FFF2-40B4-BE49-F238E27FC236}">
-                <a16:creationId xmlns:a16="http://schemas.microsoft.com/office/drawing/2014/main" id="{BBF72ED0-916C-4065-BCB9-D97BEF4993BB}"/>
+                <a16:creationId xmlns:a16="http://schemas.microsoft.com/office/drawing/2014/main" id="{86C11473-003D-48DF-84F7-1B76454E5AD5}"/>
               </a:ext>
             </a:extLst>
           </p:cNvPr>
@@ -21876,7 +21978,7 @@
           <p:cNvPr id="7" name="">
             <a:extLst xmlns:a="http://schemas.openxmlformats.org/drawingml/2006/main">
               <a:ext uri="{FF2B5EF4-FFF2-40B4-BE49-F238E27FC236}">
-                <a16:creationId xmlns:a16="http://schemas.microsoft.com/office/drawing/2014/main" id="{E3443B2C-C6B6-4074-A4B6-03EA78BD11BE}"/>
+                <a16:creationId xmlns:a16="http://schemas.microsoft.com/office/drawing/2014/main" id="{B225E947-BDAD-4AA2-A47D-4D3AF19A5C5C}"/>
               </a:ext>
             </a:extLst>
           </p:cNvPr>
@@ -21917,7 +22019,7 @@
           <p:cNvPr id="8" name="">
             <a:extLst xmlns:a="http://schemas.openxmlformats.org/drawingml/2006/main">
               <a:ext uri="{FF2B5EF4-FFF2-40B4-BE49-F238E27FC236}">
-                <a16:creationId xmlns:a16="http://schemas.microsoft.com/office/drawing/2014/main" id="{CA91D556-0511-4B98-8B46-9BF0E5744817}"/>
+                <a16:creationId xmlns:a16="http://schemas.microsoft.com/office/drawing/2014/main" id="{DEB94FBE-3B17-4D12-BAFB-6A0889D984AE}"/>
               </a:ext>
             </a:extLst>
           </p:cNvPr>
@@ -21984,7 +22086,7 @@
           <p:cNvPr id="9" name="">
             <a:extLst xmlns:a="http://schemas.openxmlformats.org/drawingml/2006/main">
               <a:ext uri="{FF2B5EF4-FFF2-40B4-BE49-F238E27FC236}">
-                <a16:creationId xmlns:a16="http://schemas.microsoft.com/office/drawing/2014/main" id="{E1EC0BEF-873B-4556-966B-4F2AE976E804}"/>
+                <a16:creationId xmlns:a16="http://schemas.microsoft.com/office/drawing/2014/main" id="{141EEAA1-3510-4556-89E6-940E894E108F}"/>
               </a:ext>
             </a:extLst>
           </p:cNvPr>
@@ -22034,7 +22136,7 @@
           <p:cNvPr id="10" name="">
             <a:extLst xmlns:a="http://schemas.openxmlformats.org/drawingml/2006/main">
               <a:ext uri="{FF2B5EF4-FFF2-40B4-BE49-F238E27FC236}">
-                <a16:creationId xmlns:a16="http://schemas.microsoft.com/office/drawing/2014/main" id="{A66945AA-13D2-4C19-AB70-BEA21021D770}"/>
+                <a16:creationId xmlns:a16="http://schemas.microsoft.com/office/drawing/2014/main" id="{B8E3E0A1-9C36-4340-8F97-6E459C01232A}"/>
               </a:ext>
             </a:extLst>
           </p:cNvPr>
@@ -22084,7 +22186,7 @@
           <p:cNvPr id="11" name="">
             <a:extLst xmlns:a="http://schemas.openxmlformats.org/drawingml/2006/main">
               <a:ext uri="{FF2B5EF4-FFF2-40B4-BE49-F238E27FC236}">
-                <a16:creationId xmlns:a16="http://schemas.microsoft.com/office/drawing/2014/main" id="{4E7AC492-0042-4652-8B54-1F4371101C7B}"/>
+                <a16:creationId xmlns:a16="http://schemas.microsoft.com/office/drawing/2014/main" id="{0883E38E-C23B-4A35-815E-B8F5B267EEDD}"/>
               </a:ext>
             </a:extLst>
           </p:cNvPr>
@@ -22134,7 +22236,7 @@
           <p:cNvPr id="12" name="">
             <a:extLst xmlns:a="http://schemas.openxmlformats.org/drawingml/2006/main">
               <a:ext uri="{FF2B5EF4-FFF2-40B4-BE49-F238E27FC236}">
-                <a16:creationId xmlns:a16="http://schemas.microsoft.com/office/drawing/2014/main" id="{664E6C89-6D34-4A73-BD14-DBDF695EE3D7}"/>
+                <a16:creationId xmlns:a16="http://schemas.microsoft.com/office/drawing/2014/main" id="{907EC476-C80A-49B0-B639-4CD9F4E52141}"/>
               </a:ext>
             </a:extLst>
           </p:cNvPr>
@@ -22184,7 +22286,7 @@
           <p:cNvPr id="13" name="">
             <a:extLst xmlns:a="http://schemas.openxmlformats.org/drawingml/2006/main">
               <a:ext uri="{FF2B5EF4-FFF2-40B4-BE49-F238E27FC236}">
-                <a16:creationId xmlns:a16="http://schemas.microsoft.com/office/drawing/2014/main" id="{2FFDFE5E-7755-4906-89C3-2496C81E28B4}"/>
+                <a16:creationId xmlns:a16="http://schemas.microsoft.com/office/drawing/2014/main" id="{FDB27A90-A4AD-4694-9E79-E9A9CEFEE5BF}"/>
               </a:ext>
             </a:extLst>
           </p:cNvPr>
@@ -22234,7 +22336,7 @@
           <p:cNvPr id="14" name="">
             <a:extLst xmlns:a="http://schemas.openxmlformats.org/drawingml/2006/main">
               <a:ext uri="{FF2B5EF4-FFF2-40B4-BE49-F238E27FC236}">
-                <a16:creationId xmlns:a16="http://schemas.microsoft.com/office/drawing/2014/main" id="{399C816D-6FC9-4DFD-89B6-94DC5D0E4AC2}"/>
+                <a16:creationId xmlns:a16="http://schemas.microsoft.com/office/drawing/2014/main" id="{18A77B24-16BC-45AA-824D-1BE0BDC9580A}"/>
               </a:ext>
             </a:extLst>
           </p:cNvPr>
@@ -22284,7 +22386,7 @@
           <p:cNvPr id="15" name="">
             <a:extLst xmlns:a="http://schemas.openxmlformats.org/drawingml/2006/main">
               <a:ext uri="{FF2B5EF4-FFF2-40B4-BE49-F238E27FC236}">
-                <a16:creationId xmlns:a16="http://schemas.microsoft.com/office/drawing/2014/main" id="{9A4D6D1D-8AA2-47F4-90A7-8C93133822DC}"/>
+                <a16:creationId xmlns:a16="http://schemas.microsoft.com/office/drawing/2014/main" id="{C13CDDDB-FDC0-47B5-BFCB-9885DDCDBC05}"/>
               </a:ext>
             </a:extLst>
           </p:cNvPr>
@@ -22334,7 +22436,7 @@
           <p:cNvPr id="16" name="">
             <a:extLst xmlns:a="http://schemas.openxmlformats.org/drawingml/2006/main">
               <a:ext uri="{FF2B5EF4-FFF2-40B4-BE49-F238E27FC236}">
-                <a16:creationId xmlns:a16="http://schemas.microsoft.com/office/drawing/2014/main" id="{64C593A6-EA0F-4D94-9423-ECFD559C8BFC}"/>
+                <a16:creationId xmlns:a16="http://schemas.microsoft.com/office/drawing/2014/main" id="{27B82AC4-4C95-43A0-87C3-A76DFAA867B6}"/>
               </a:ext>
             </a:extLst>
           </p:cNvPr>
@@ -22384,7 +22486,7 @@
           <p:cNvPr id="17" name="">
             <a:extLst xmlns:a="http://schemas.openxmlformats.org/drawingml/2006/main">
               <a:ext uri="{FF2B5EF4-FFF2-40B4-BE49-F238E27FC236}">
-                <a16:creationId xmlns:a16="http://schemas.microsoft.com/office/drawing/2014/main" id="{73644616-E2AA-4611-BB58-BC0D1CBACADF}"/>
+                <a16:creationId xmlns:a16="http://schemas.microsoft.com/office/drawing/2014/main" id="{D94CB622-31D1-42E4-BA5D-ADE7FA358C83}"/>
               </a:ext>
             </a:extLst>
           </p:cNvPr>
@@ -22434,7 +22536,7 @@
           <p:cNvPr id="18" name="">
             <a:extLst xmlns:a="http://schemas.openxmlformats.org/drawingml/2006/main">
               <a:ext uri="{FF2B5EF4-FFF2-40B4-BE49-F238E27FC236}">
-                <a16:creationId xmlns:a16="http://schemas.microsoft.com/office/drawing/2014/main" id="{271BFDDE-31CC-4055-BDF7-31F1BD271C4D}"/>
+                <a16:creationId xmlns:a16="http://schemas.microsoft.com/office/drawing/2014/main" id="{55636F9F-C231-4562-93A8-8ECFB647EF3C}"/>
               </a:ext>
             </a:extLst>
           </p:cNvPr>
@@ -22484,7 +22586,7 @@
           <p:cNvPr id="19" name="">
             <a:extLst xmlns:a="http://schemas.openxmlformats.org/drawingml/2006/main">
               <a:ext uri="{FF2B5EF4-FFF2-40B4-BE49-F238E27FC236}">
-                <a16:creationId xmlns:a16="http://schemas.microsoft.com/office/drawing/2014/main" id="{70C0E713-4A07-4CF3-9066-729C70E7025E}"/>
+                <a16:creationId xmlns:a16="http://schemas.microsoft.com/office/drawing/2014/main" id="{F6324A3A-EE7D-4A0F-82A1-A85A7E2501B1}"/>
               </a:ext>
             </a:extLst>
           </p:cNvPr>
@@ -22534,7 +22636,7 @@
           <p:cNvPr id="20" name="">
             <a:extLst xmlns:a="http://schemas.openxmlformats.org/drawingml/2006/main">
               <a:ext uri="{FF2B5EF4-FFF2-40B4-BE49-F238E27FC236}">
-                <a16:creationId xmlns:a16="http://schemas.microsoft.com/office/drawing/2014/main" id="{FE8C2D67-129F-47F8-818A-0C5B38A08D44}"/>
+                <a16:creationId xmlns:a16="http://schemas.microsoft.com/office/drawing/2014/main" id="{AC7A6007-DCFD-4EDE-8D96-A371B287F29C}"/>
               </a:ext>
             </a:extLst>
           </p:cNvPr>
@@ -22584,7 +22686,7 @@
           <p:cNvPr id="21" name="">
             <a:extLst xmlns:a="http://schemas.openxmlformats.org/drawingml/2006/main">
               <a:ext uri="{FF2B5EF4-FFF2-40B4-BE49-F238E27FC236}">
-                <a16:creationId xmlns:a16="http://schemas.microsoft.com/office/drawing/2014/main" id="{21C7AB76-DA03-47B5-8629-2BC0ECB20883}"/>
+                <a16:creationId xmlns:a16="http://schemas.microsoft.com/office/drawing/2014/main" id="{EC8BDB3C-ECF3-4E84-BCFD-2E8950881E37}"/>
               </a:ext>
             </a:extLst>
           </p:cNvPr>
@@ -22634,7 +22736,7 @@
           <p:cNvPr id="22" name="">
             <a:extLst xmlns:a="http://schemas.openxmlformats.org/drawingml/2006/main">
               <a:ext uri="{FF2B5EF4-FFF2-40B4-BE49-F238E27FC236}">
-                <a16:creationId xmlns:a16="http://schemas.microsoft.com/office/drawing/2014/main" id="{FD96F9CA-9421-4570-89A3-6D1976CB6F2C}"/>
+                <a16:creationId xmlns:a16="http://schemas.microsoft.com/office/drawing/2014/main" id="{94F05C96-BFF5-4260-8E60-EE821D792970}"/>
               </a:ext>
             </a:extLst>
           </p:cNvPr>
@@ -22669,7 +22771,7 @@
           <p:cNvPr id="23" name="">
             <a:extLst xmlns:a="http://schemas.openxmlformats.org/drawingml/2006/main">
               <a:ext uri="{FF2B5EF4-FFF2-40B4-BE49-F238E27FC236}">
-                <a16:creationId xmlns:a16="http://schemas.microsoft.com/office/drawing/2014/main" id="{DD1BE053-3407-4134-9DB8-D273B6959AA0}"/>
+                <a16:creationId xmlns:a16="http://schemas.microsoft.com/office/drawing/2014/main" id="{BFEAC778-43D0-49F1-B21B-96FAFEA7F4C8}"/>
               </a:ext>
             </a:extLst>
           </p:cNvPr>
@@ -22719,7 +22821,7 @@
           <p:cNvPr id="24" name="">
             <a:extLst xmlns:a="http://schemas.openxmlformats.org/drawingml/2006/main">
               <a:ext uri="{FF2B5EF4-FFF2-40B4-BE49-F238E27FC236}">
-                <a16:creationId xmlns:a16="http://schemas.microsoft.com/office/drawing/2014/main" id="{1EC24C8A-A2DB-4992-BDB5-0A0FA24916CF}"/>
+                <a16:creationId xmlns:a16="http://schemas.microsoft.com/office/drawing/2014/main" id="{C700943D-C615-47AE-973F-B7AB89976A02}"/>
               </a:ext>
             </a:extLst>
           </p:cNvPr>
@@ -22769,7 +22871,7 @@
           <p:cNvPr id="25" name="">
             <a:extLst xmlns:a="http://schemas.openxmlformats.org/drawingml/2006/main">
               <a:ext uri="{FF2B5EF4-FFF2-40B4-BE49-F238E27FC236}">
-                <a16:creationId xmlns:a16="http://schemas.microsoft.com/office/drawing/2014/main" id="{05349849-5318-4408-91FE-2816165A77A4}"/>
+                <a16:creationId xmlns:a16="http://schemas.microsoft.com/office/drawing/2014/main" id="{22EDB344-1B04-458C-866B-631A787AE18D}"/>
               </a:ext>
             </a:extLst>
           </p:cNvPr>
@@ -22819,7 +22921,7 @@
           <p:cNvPr id="26" name="">
             <a:extLst xmlns:a="http://schemas.openxmlformats.org/drawingml/2006/main">
               <a:ext uri="{FF2B5EF4-FFF2-40B4-BE49-F238E27FC236}">
-                <a16:creationId xmlns:a16="http://schemas.microsoft.com/office/drawing/2014/main" id="{BA2F588F-1B2E-4182-B45B-BD339F1C1524}"/>
+                <a16:creationId xmlns:a16="http://schemas.microsoft.com/office/drawing/2014/main" id="{668016B2-8509-44AF-90D1-674C09D34CC6}"/>
               </a:ext>
             </a:extLst>
           </p:cNvPr>
@@ -22854,7 +22956,7 @@
           <p:cNvPr id="27" name="">
             <a:extLst xmlns:a="http://schemas.openxmlformats.org/drawingml/2006/main">
               <a:ext uri="{FF2B5EF4-FFF2-40B4-BE49-F238E27FC236}">
-                <a16:creationId xmlns:a16="http://schemas.microsoft.com/office/drawing/2014/main" id="{4B6FC9AB-14E2-435E-B814-15BDF65FFE17}"/>
+                <a16:creationId xmlns:a16="http://schemas.microsoft.com/office/drawing/2014/main" id="{A2E8142F-9C3D-4BD0-8847-4B1BF930272D}"/>
               </a:ext>
             </a:extLst>
           </p:cNvPr>
@@ -22904,7 +23006,7 @@
           <p:cNvPr id="28" name="">
             <a:extLst xmlns:a="http://schemas.openxmlformats.org/drawingml/2006/main">
               <a:ext uri="{FF2B5EF4-FFF2-40B4-BE49-F238E27FC236}">
-                <a16:creationId xmlns:a16="http://schemas.microsoft.com/office/drawing/2014/main" id="{26ADC0D6-C5F2-4A1B-8EF6-86C908A53FFD}"/>
+                <a16:creationId xmlns:a16="http://schemas.microsoft.com/office/drawing/2014/main" id="{0F7989DE-9F34-4BF3-A301-8F28D4C68012}"/>
               </a:ext>
             </a:extLst>
           </p:cNvPr>
@@ -22954,7 +23056,7 @@
           <p:cNvPr id="29" name="">
             <a:extLst xmlns:a="http://schemas.openxmlformats.org/drawingml/2006/main">
               <a:ext uri="{FF2B5EF4-FFF2-40B4-BE49-F238E27FC236}">
-                <a16:creationId xmlns:a16="http://schemas.microsoft.com/office/drawing/2014/main" id="{9DECAF76-D273-40EB-803F-676C8A86BED9}"/>
+                <a16:creationId xmlns:a16="http://schemas.microsoft.com/office/drawing/2014/main" id="{724662D6-C208-4163-8458-70ABCDF0BD88}"/>
               </a:ext>
             </a:extLst>
           </p:cNvPr>
@@ -23004,7 +23106,7 @@
           <p:cNvPr id="30" name="">
             <a:extLst xmlns:a="http://schemas.openxmlformats.org/drawingml/2006/main">
               <a:ext uri="{FF2B5EF4-FFF2-40B4-BE49-F238E27FC236}">
-                <a16:creationId xmlns:a16="http://schemas.microsoft.com/office/drawing/2014/main" id="{C63993A1-3253-4C8E-AEAD-948BE1EC3FDB}"/>
+                <a16:creationId xmlns:a16="http://schemas.microsoft.com/office/drawing/2014/main" id="{23176FBD-DDC2-41BD-8341-F5EDA1BC4499}"/>
               </a:ext>
             </a:extLst>
           </p:cNvPr>
@@ -23039,7 +23141,7 @@
           <p:cNvPr id="31" name="">
             <a:extLst xmlns:a="http://schemas.openxmlformats.org/drawingml/2006/main">
               <a:ext uri="{FF2B5EF4-FFF2-40B4-BE49-F238E27FC236}">
-                <a16:creationId xmlns:a16="http://schemas.microsoft.com/office/drawing/2014/main" id="{181FB6B7-0739-4BD3-9A84-D493BF6747FF}"/>
+                <a16:creationId xmlns:a16="http://schemas.microsoft.com/office/drawing/2014/main" id="{8FD1A307-8213-4F96-91AB-F063223FADAD}"/>
               </a:ext>
             </a:extLst>
           </p:cNvPr>
@@ -23089,7 +23191,7 @@
           <p:cNvPr id="32" name="">
             <a:extLst xmlns:a="http://schemas.openxmlformats.org/drawingml/2006/main">
               <a:ext uri="{FF2B5EF4-FFF2-40B4-BE49-F238E27FC236}">
-                <a16:creationId xmlns:a16="http://schemas.microsoft.com/office/drawing/2014/main" id="{477BCC53-8355-41F5-8DAE-1A852854A743}"/>
+                <a16:creationId xmlns:a16="http://schemas.microsoft.com/office/drawing/2014/main" id="{A1C8188A-8D03-4BB9-ABCD-F6F8BB1D7AE0}"/>
               </a:ext>
             </a:extLst>
           </p:cNvPr>
@@ -23139,7 +23241,7 @@
           <p:cNvPr id="33" name="">
             <a:extLst xmlns:a="http://schemas.openxmlformats.org/drawingml/2006/main">
               <a:ext uri="{FF2B5EF4-FFF2-40B4-BE49-F238E27FC236}">
-                <a16:creationId xmlns:a16="http://schemas.microsoft.com/office/drawing/2014/main" id="{BE5FA0AF-D003-4376-B706-43D74A828416}"/>
+                <a16:creationId xmlns:a16="http://schemas.microsoft.com/office/drawing/2014/main" id="{14867A1F-D2CF-441B-BDD1-9B4920E40BA6}"/>
               </a:ext>
             </a:extLst>
           </p:cNvPr>
@@ -23189,7 +23291,7 @@
           <p:cNvPr id="34" name="">
             <a:extLst xmlns:a="http://schemas.openxmlformats.org/drawingml/2006/main">
               <a:ext uri="{FF2B5EF4-FFF2-40B4-BE49-F238E27FC236}">
-                <a16:creationId xmlns:a16="http://schemas.microsoft.com/office/drawing/2014/main" id="{5B8F3F91-5F0D-412D-ABFA-83EE3198DD78}"/>
+                <a16:creationId xmlns:a16="http://schemas.microsoft.com/office/drawing/2014/main" id="{257BFE8A-A035-4760-AE1B-CB5A9CBCCDD1}"/>
               </a:ext>
             </a:extLst>
           </p:cNvPr>
@@ -23224,7 +23326,7 @@
           <p:cNvPr id="35" name="">
             <a:extLst xmlns:a="http://schemas.openxmlformats.org/drawingml/2006/main">
               <a:ext uri="{FF2B5EF4-FFF2-40B4-BE49-F238E27FC236}">
-                <a16:creationId xmlns:a16="http://schemas.microsoft.com/office/drawing/2014/main" id="{D87EF4A3-1036-4914-8FAC-324F02E13A1D}"/>
+                <a16:creationId xmlns:a16="http://schemas.microsoft.com/office/drawing/2014/main" id="{30DFF3C6-7AB3-47FF-9B78-A8BDAB5D6B30}"/>
               </a:ext>
             </a:extLst>
           </p:cNvPr>
@@ -23274,7 +23376,7 @@
           <p:cNvPr id="36" name="">
             <a:extLst xmlns:a="http://schemas.openxmlformats.org/drawingml/2006/main">
               <a:ext uri="{FF2B5EF4-FFF2-40B4-BE49-F238E27FC236}">
-                <a16:creationId xmlns:a16="http://schemas.microsoft.com/office/drawing/2014/main" id="{2C76D3A6-16EF-4A86-A1E2-19A66675F129}"/>
+                <a16:creationId xmlns:a16="http://schemas.microsoft.com/office/drawing/2014/main" id="{6C76F90B-3C6B-4F19-A6D6-694F4826AD42}"/>
               </a:ext>
             </a:extLst>
           </p:cNvPr>
@@ -23324,7 +23426,7 @@
           <p:cNvPr id="37" name="">
             <a:extLst xmlns:a="http://schemas.openxmlformats.org/drawingml/2006/main">
               <a:ext uri="{FF2B5EF4-FFF2-40B4-BE49-F238E27FC236}">
-                <a16:creationId xmlns:a16="http://schemas.microsoft.com/office/drawing/2014/main" id="{457C46DC-00B3-479C-908E-F1B62AEDDFA9}"/>
+                <a16:creationId xmlns:a16="http://schemas.microsoft.com/office/drawing/2014/main" id="{4695F2C1-9B05-4866-A659-382D0D3CAC5F}"/>
               </a:ext>
             </a:extLst>
           </p:cNvPr>
@@ -23374,7 +23476,7 @@
           <p:cNvPr id="38" name="">
             <a:extLst xmlns:a="http://schemas.openxmlformats.org/drawingml/2006/main">
               <a:ext uri="{FF2B5EF4-FFF2-40B4-BE49-F238E27FC236}">
-                <a16:creationId xmlns:a16="http://schemas.microsoft.com/office/drawing/2014/main" id="{E529170A-D23E-40E2-9E07-B09A863E1582}"/>
+                <a16:creationId xmlns:a16="http://schemas.microsoft.com/office/drawing/2014/main" id="{D437C131-8400-4BF6-875E-49C23321052B}"/>
               </a:ext>
             </a:extLst>
           </p:cNvPr>
@@ -23424,7 +23526,7 @@
           <p:cNvPr id="39" name="">
             <a:extLst xmlns:a="http://schemas.openxmlformats.org/drawingml/2006/main">
               <a:ext uri="{FF2B5EF4-FFF2-40B4-BE49-F238E27FC236}">
-                <a16:creationId xmlns:a16="http://schemas.microsoft.com/office/drawing/2014/main" id="{C3DBDF5C-0EE0-43D9-8B31-7E211559AA14}"/>
+                <a16:creationId xmlns:a16="http://schemas.microsoft.com/office/drawing/2014/main" id="{62D268B5-2C0A-4E59-A30E-6C4A6742BD37}"/>
               </a:ext>
             </a:extLst>
           </p:cNvPr>
@@ -23465,7 +23567,7 @@
           <p:cNvPr id="40" name="">
             <a:extLst xmlns:a="http://schemas.openxmlformats.org/drawingml/2006/main">
               <a:ext uri="{FF2B5EF4-FFF2-40B4-BE49-F238E27FC236}">
-                <a16:creationId xmlns:a16="http://schemas.microsoft.com/office/drawing/2014/main" id="{6A7EDBA0-DF7C-44E7-95B6-42DFBF248C43}"/>
+                <a16:creationId xmlns:a16="http://schemas.microsoft.com/office/drawing/2014/main" id="{715CE841-5858-4FF1-8CEF-23FBC6AD9506}"/>
               </a:ext>
             </a:extLst>
           </p:cNvPr>
@@ -23515,7 +23617,7 @@
           <p:cNvPr id="41" name="">
             <a:extLst xmlns:a="http://schemas.openxmlformats.org/drawingml/2006/main">
               <a:ext uri="{FF2B5EF4-FFF2-40B4-BE49-F238E27FC236}">
-                <a16:creationId xmlns:a16="http://schemas.microsoft.com/office/drawing/2014/main" id="{83E69D4B-E83C-48BE-B462-5E59DDFA1A0A}"/>
+                <a16:creationId xmlns:a16="http://schemas.microsoft.com/office/drawing/2014/main" id="{EA3C2D63-06E4-44C5-875B-0CDFF9785B63}"/>
               </a:ext>
             </a:extLst>
           </p:cNvPr>
@@ -23565,7 +23667,7 @@
           <p:cNvPr id="42" name="">
             <a:extLst xmlns:a="http://schemas.openxmlformats.org/drawingml/2006/main">
               <a:ext uri="{FF2B5EF4-FFF2-40B4-BE49-F238E27FC236}">
-                <a16:creationId xmlns:a16="http://schemas.microsoft.com/office/drawing/2014/main" id="{DB0B1E46-918D-4CFD-AB9B-E4A9989193CA}"/>
+                <a16:creationId xmlns:a16="http://schemas.microsoft.com/office/drawing/2014/main" id="{B1468A85-E125-42A7-A31A-E7BA620CAA30}"/>
               </a:ext>
             </a:extLst>
           </p:cNvPr>
@@ -23615,7 +23717,7 @@
           <p:cNvPr id="43" name="">
             <a:extLst xmlns:a="http://schemas.openxmlformats.org/drawingml/2006/main">
               <a:ext uri="{FF2B5EF4-FFF2-40B4-BE49-F238E27FC236}">
-                <a16:creationId xmlns:a16="http://schemas.microsoft.com/office/drawing/2014/main" id="{F97E5C44-FBEA-49EF-B7C0-953518B8336C}"/>
+                <a16:creationId xmlns:a16="http://schemas.microsoft.com/office/drawing/2014/main" id="{A12C57EF-A6A1-4957-ABD6-D6A64A692120}"/>
               </a:ext>
             </a:extLst>
           </p:cNvPr>
@@ -23665,7 +23767,7 @@
           <p:cNvPr id="44" name="">
             <a:extLst xmlns:a="http://schemas.openxmlformats.org/drawingml/2006/main">
               <a:ext uri="{FF2B5EF4-FFF2-40B4-BE49-F238E27FC236}">
-                <a16:creationId xmlns:a16="http://schemas.microsoft.com/office/drawing/2014/main" id="{0D2EE264-3CC0-4EE9-B920-26D122220839}"/>
+                <a16:creationId xmlns:a16="http://schemas.microsoft.com/office/drawing/2014/main" id="{7BFAB026-DFAF-44F1-85F0-85D47F13057F}"/>
               </a:ext>
             </a:extLst>
           </p:cNvPr>
@@ -23715,7 +23817,7 @@
           <p:cNvPr id="45" name="">
             <a:extLst xmlns:a="http://schemas.openxmlformats.org/drawingml/2006/main">
               <a:ext uri="{FF2B5EF4-FFF2-40B4-BE49-F238E27FC236}">
-                <a16:creationId xmlns:a16="http://schemas.microsoft.com/office/drawing/2014/main" id="{88D0C46F-3FA5-439C-BBD6-D24333772EB4}"/>
+                <a16:creationId xmlns:a16="http://schemas.microsoft.com/office/drawing/2014/main" id="{6BEE5CED-0F1D-4509-84C3-124D2334119E}"/>
               </a:ext>
             </a:extLst>
           </p:cNvPr>
@@ -23765,7 +23867,7 @@
           <p:cNvPr id="46" name="">
             <a:extLst xmlns:a="http://schemas.openxmlformats.org/drawingml/2006/main">
               <a:ext uri="{FF2B5EF4-FFF2-40B4-BE49-F238E27FC236}">
-                <a16:creationId xmlns:a16="http://schemas.microsoft.com/office/drawing/2014/main" id="{2B9A1AE2-7E33-4D3A-989E-45008E10541A}"/>
+                <a16:creationId xmlns:a16="http://schemas.microsoft.com/office/drawing/2014/main" id="{C8802C1B-A25D-4FF4-B9F7-7425C77FCD4D}"/>
               </a:ext>
             </a:extLst>
           </p:cNvPr>
@@ -23815,7 +23917,7 @@
           <p:cNvPr id="47" name="">
             <a:extLst xmlns:a="http://schemas.openxmlformats.org/drawingml/2006/main">
               <a:ext uri="{FF2B5EF4-FFF2-40B4-BE49-F238E27FC236}">
-                <a16:creationId xmlns:a16="http://schemas.microsoft.com/office/drawing/2014/main" id="{80AF8EA7-875B-48E9-BC94-385BF44FE17C}"/>
+                <a16:creationId xmlns:a16="http://schemas.microsoft.com/office/drawing/2014/main" id="{EB2455B2-1295-4EDE-86C1-FD41FC0279B2}"/>
               </a:ext>
             </a:extLst>
           </p:cNvPr>
@@ -23865,7 +23967,7 @@
           <p:cNvPr id="48" name="">
             <a:extLst xmlns:a="http://schemas.openxmlformats.org/drawingml/2006/main">
               <a:ext uri="{FF2B5EF4-FFF2-40B4-BE49-F238E27FC236}">
-                <a16:creationId xmlns:a16="http://schemas.microsoft.com/office/drawing/2014/main" id="{551FEFB1-D167-44F5-A791-1278BF3672D1}"/>
+                <a16:creationId xmlns:a16="http://schemas.microsoft.com/office/drawing/2014/main" id="{AB7C7665-0E3D-4F2D-89E3-3A551488E0B7}"/>
               </a:ext>
             </a:extLst>
           </p:cNvPr>
@@ -23915,19 +24017,19 @@
           <p:cNvPr id="49" name="">
             <a:extLst xmlns:a="http://schemas.openxmlformats.org/drawingml/2006/main">
               <a:ext uri="{FF2B5EF4-FFF2-40B4-BE49-F238E27FC236}">
-                <a16:creationId xmlns:a16="http://schemas.microsoft.com/office/drawing/2014/main" id="{74C797E1-9A42-49B6-9ACD-8B56E640562B}"/>
-              </a:ext>
-            </a:extLst>
-          </p:cNvPr>
-          <p:cNvSpPr>
-            <a:spLocks xmlns:a="http://schemas.openxmlformats.org/drawingml/2006/main" noGrp="1"/>
-          </p:cNvSpPr>
-          <p:nvPr/>
-        </p:nvSpPr>
-        <p:spPr>
-          <a:xfrm xmlns:a="http://schemas.openxmlformats.org/drawingml/2006/main">
-            <a:off x="8610600" y="4552950"/>
-            <a:ext cx="2571750" cy="228600"/>
+                <a16:creationId xmlns:a16="http://schemas.microsoft.com/office/drawing/2014/main" id="{344CE914-A061-4D4D-8461-E20DD1BE4481}"/>
+              </a:ext>
+            </a:extLst>
+          </p:cNvPr>
+          <p:cNvSpPr>
+            <a:spLocks xmlns:a="http://schemas.openxmlformats.org/drawingml/2006/main" noGrp="1"/>
+          </p:cNvSpPr>
+          <p:nvPr/>
+        </p:nvSpPr>
+        <p:spPr>
+          <a:xfrm xmlns:a="http://schemas.openxmlformats.org/drawingml/2006/main">
+            <a:off x="8515350" y="4552950"/>
+            <a:ext cx="2762250" cy="228600"/>
           </a:xfrm>
           <a:prstGeom xmlns:a="http://schemas.openxmlformats.org/drawingml/2006/main" prst="rect">
             <a:avLst/>
@@ -23955,7 +24057,7 @@
                   <a:srgbClr val="B5483A"/>
                 </a:solidFill>
               </a:rPr>
-              <a:t>If any gate fails: verdict = null</a:t>
+              <a:t>If any gate fails: abstain (verdict = null)</a:t>
             </a:r>
           </a:p>
         </p:txBody>
@@ -23965,7 +24067,7 @@
           <p:cNvPr id="50" name="">
             <a:extLst xmlns:a="http://schemas.openxmlformats.org/drawingml/2006/main">
               <a:ext uri="{FF2B5EF4-FFF2-40B4-BE49-F238E27FC236}">
-                <a16:creationId xmlns:a16="http://schemas.microsoft.com/office/drawing/2014/main" id="{F29E018C-735D-4305-95EB-880EAAFFB00E}"/>
+                <a16:creationId xmlns:a16="http://schemas.microsoft.com/office/drawing/2014/main" id="{21DD76FA-6D99-4340-9F1C-54E02A2719E2}"/>
               </a:ext>
             </a:extLst>
           </p:cNvPr>
@@ -23996,7 +24098,7 @@
           <p:cNvPr id="51" name="source-9">
             <a:extLst xmlns:a="http://schemas.openxmlformats.org/drawingml/2006/main">
               <a:ext uri="{FF2B5EF4-FFF2-40B4-BE49-F238E27FC236}">
-                <a16:creationId xmlns:a16="http://schemas.microsoft.com/office/drawing/2014/main" id="{4B14FF23-1659-4DD1-89C7-E4A44CB3F878}"/>
+                <a16:creationId xmlns:a16="http://schemas.microsoft.com/office/drawing/2014/main" id="{007FA0AB-A5D1-4C98-9D9F-1B993EEDAA2A}"/>
               </a:ext>
             </a:extLst>
           </p:cNvPr>
@@ -24036,7 +24138,7 @@
                   <a:srgbClr val="526174"/>
                 </a:solidFill>
               </a:rPr>
-              <a:t>[7] v91 evidence schema, provenance ledger and row-level decision trace</a:t>
+              <a:t>Report Fig. 2b  |  [7] v91 evidence schema, provenance ledger and decision trace</a:t>
             </a:r>
           </a:p>
         </p:txBody>
@@ -24046,7 +24148,7 @@
           <p:cNvPr id="52" name="page-9">
             <a:extLst xmlns:a="http://schemas.openxmlformats.org/drawingml/2006/main">
               <a:ext uri="{FF2B5EF4-FFF2-40B4-BE49-F238E27FC236}">
-                <a16:creationId xmlns:a16="http://schemas.microsoft.com/office/drawing/2014/main" id="{04E68293-96CF-413D-9471-B6F06AD5A850}"/>
+                <a16:creationId xmlns:a16="http://schemas.microsoft.com/office/drawing/2014/main" id="{7EECDA61-7623-44C7-9EF9-8EA40F248751}"/>
               </a:ext>
             </a:extLst>
           </p:cNvPr>
@@ -24094,7 +24196,7 @@
     </p:spTree>
     <p:extLst>
       <p:ext uri="{BB962C8B-B14F-4D97-AF65-F5344CB8AC3E}">
-        <p14:creationId xmlns:p14="http://schemas.microsoft.com/office/powerpoint/2010/main" val="99722256"/>
+        <p14:creationId xmlns:p14="http://schemas.microsoft.com/office/powerpoint/2010/main" val="679945275"/>
       </p:ext>
     </p:extLst>
   </p:cSld>

--- a/presentation/Huntrix_Final_Presentation.pptx
+++ b/presentation/Huntrix_Final_Presentation.pptx
@@ -2,27 +2,27 @@
 <file path=ppt/presentation.xml><?xml version="1.0" encoding="utf-8"?>
 <p:presentation xmlns:p="http://schemas.openxmlformats.org/presentationml/2006/main">
   <p:sldMasterIdLst>
-    <p:sldMasterId xmlns:r="http://schemas.openxmlformats.org/officeDocument/2006/relationships" id="2147483648" r:id="R11bf963690cd4735"/>
+    <p:sldMasterId xmlns:r="http://schemas.openxmlformats.org/officeDocument/2006/relationships" id="2147483648" r:id="Rce9f940102c44ed7"/>
   </p:sldMasterIdLst>
   <p:notesMasterIdLst>
-    <p:notesMasterId xmlns:r="http://schemas.openxmlformats.org/officeDocument/2006/relationships" r:id="R0217c067ef3c4449"/>
+    <p:notesMasterId xmlns:r="http://schemas.openxmlformats.org/officeDocument/2006/relationships" r:id="R1273ba06c7da4852"/>
   </p:notesMasterIdLst>
   <p:sldIdLst>
-    <p:sldId xmlns:r="http://schemas.openxmlformats.org/officeDocument/2006/relationships" id="256" r:id="R8ad2650efd26416e"/>
-    <p:sldId xmlns:r="http://schemas.openxmlformats.org/officeDocument/2006/relationships" id="257" r:id="R38a1feb13f9b4b80"/>
-    <p:sldId xmlns:r="http://schemas.openxmlformats.org/officeDocument/2006/relationships" id="258" r:id="Re6d85dd85c0c4fe4"/>
-    <p:sldId xmlns:r="http://schemas.openxmlformats.org/officeDocument/2006/relationships" id="259" r:id="R27c0da09a0e44901"/>
-    <p:sldId xmlns:r="http://schemas.openxmlformats.org/officeDocument/2006/relationships" id="260" r:id="Rb2298d725b944ba4"/>
-    <p:sldId xmlns:r="http://schemas.openxmlformats.org/officeDocument/2006/relationships" id="261" r:id="R5350ec769c654582"/>
-    <p:sldId xmlns:r="http://schemas.openxmlformats.org/officeDocument/2006/relationships" id="262" r:id="Rd35e48e6d0a64744"/>
-    <p:sldId xmlns:r="http://schemas.openxmlformats.org/officeDocument/2006/relationships" id="263" r:id="R34ed931335164514"/>
-    <p:sldId xmlns:r="http://schemas.openxmlformats.org/officeDocument/2006/relationships" id="264" r:id="R97a3999478124ddf"/>
-    <p:sldId xmlns:r="http://schemas.openxmlformats.org/officeDocument/2006/relationships" id="265" r:id="R545902f9a46148d8"/>
-    <p:sldId xmlns:r="http://schemas.openxmlformats.org/officeDocument/2006/relationships" id="266" r:id="Rfec95f3464f14100"/>
-    <p:sldId xmlns:r="http://schemas.openxmlformats.org/officeDocument/2006/relationships" id="267" r:id="R2661459780d74f92"/>
-    <p:sldId xmlns:r="http://schemas.openxmlformats.org/officeDocument/2006/relationships" id="268" r:id="R8d56247bfeb84fb7"/>
-    <p:sldId xmlns:r="http://schemas.openxmlformats.org/officeDocument/2006/relationships" id="269" r:id="Reabcd67a04fd415a"/>
-    <p:sldId xmlns:r="http://schemas.openxmlformats.org/officeDocument/2006/relationships" id="270" r:id="Rfb842422b8c64077"/>
+    <p:sldId xmlns:r="http://schemas.openxmlformats.org/officeDocument/2006/relationships" id="256" r:id="R29363b378e324677"/>
+    <p:sldId xmlns:r="http://schemas.openxmlformats.org/officeDocument/2006/relationships" id="257" r:id="R0f1a184b86b249bf"/>
+    <p:sldId xmlns:r="http://schemas.openxmlformats.org/officeDocument/2006/relationships" id="258" r:id="Rf0a9f2ed086445bf"/>
+    <p:sldId xmlns:r="http://schemas.openxmlformats.org/officeDocument/2006/relationships" id="259" r:id="R90fa7263adb949a3"/>
+    <p:sldId xmlns:r="http://schemas.openxmlformats.org/officeDocument/2006/relationships" id="260" r:id="Re9189a3256a54018"/>
+    <p:sldId xmlns:r="http://schemas.openxmlformats.org/officeDocument/2006/relationships" id="261" r:id="Rd08406c8fac545c8"/>
+    <p:sldId xmlns:r="http://schemas.openxmlformats.org/officeDocument/2006/relationships" id="262" r:id="R8ac512196e2543a9"/>
+    <p:sldId xmlns:r="http://schemas.openxmlformats.org/officeDocument/2006/relationships" id="263" r:id="R64042761e1174aab"/>
+    <p:sldId xmlns:r="http://schemas.openxmlformats.org/officeDocument/2006/relationships" id="264" r:id="Ra33af1f652b94f3c"/>
+    <p:sldId xmlns:r="http://schemas.openxmlformats.org/officeDocument/2006/relationships" id="265" r:id="Rd1ec57c334184421"/>
+    <p:sldId xmlns:r="http://schemas.openxmlformats.org/officeDocument/2006/relationships" id="266" r:id="R91c29b80b3834bad"/>
+    <p:sldId xmlns:r="http://schemas.openxmlformats.org/officeDocument/2006/relationships" id="267" r:id="R55a1bf1609eb49e0"/>
+    <p:sldId xmlns:r="http://schemas.openxmlformats.org/officeDocument/2006/relationships" id="268" r:id="R7b9be203b8cd4abd"/>
+    <p:sldId xmlns:r="http://schemas.openxmlformats.org/officeDocument/2006/relationships" id="269" r:id="R5f42ecc1757c4f3e"/>
+    <p:sldId xmlns:r="http://schemas.openxmlformats.org/officeDocument/2006/relationships" id="270" r:id="Ra5efd66682b94b78"/>
   </p:sldIdLst>
   <p:sldSz cx="12192000" cy="6858000"/>
   <p:notesSz cx="6858000" cy="9144000"/>
@@ -886,7 +886,7 @@
           </a:p>
           <a:p xmlns:a="http://schemas.openxmlformats.org/drawingml/2006/main">
             <a:r>
-              <a:t>We treated reproducibility as a result, not an administrative detail. The codebase had 249 automated tests, including 225 deterministic controls. The notebook reads the organizer's literal test path, loads pinned model, runtime, and evidence assets, and uses a fixed row, prompt, and batch schedule. Two llama.cpp servers run on the two T4 GPUs. The final validator preserves incoming IDs and writes exactly id and label. Three full runs produced byte-identical files, the frozen hash matched the scored CSV, and the organizer-run notebook validated 5,000 Phase 2 rows in 3 hours and 52 minutes. These checks establish execution integrity; they do not substitute for an unreleased Phase 2 accuracy score. Orny will cover the measured deployment run next.</a:t>
+              <a:t>We treated reproducibility as a result, not an administrative detail. The codebase had 249 automated tests, including 225 deterministic controls. The notebook reads the organizer's literal test path, loads pinned model, runtime, and evidence assets, and uses a fixed row, prompt, and batch schedule. One local llama.cpp server tensor-splits the model equally across the two T4 GPUs. The final validator preserves incoming IDs and writes exactly id and label. Three full runs produced byte-identical files, the frozen hash matched the scored CSV, and the organizer-run notebook validated 5,000 Phase 2 rows in 3 hours and 52 minutes. These checks establish execution integrity; they do not substitute for an unreleased Phase 2 accuracy score. Orny will cover the measured deployment run next.</a:t>
             </a:r>
           </a:p>
           <a:p xmlns:a="http://schemas.openxmlformats.org/drawingml/2006/main">
@@ -2124,7 +2124,7 @@
   </p:cSld>
   <p:clrMap bg1="lt1" tx1="dk1" bg2="lt2" tx2="dk2" accent1="accent1" accent2="accent2" accent3="accent3" accent4="accent4" accent5="accent5" accent6="accent6" hlink="hlink" folHlink="folHlink"/>
   <p:sldLayoutIdLst>
-    <p:sldLayoutId xmlns:r="http://schemas.openxmlformats.org/officeDocument/2006/relationships" id="2147483649" r:id="R6ec450965d7b4837"/>
+    <p:sldLayoutId xmlns:r="http://schemas.openxmlformats.org/officeDocument/2006/relationships" id="2147483649" r:id="R4eb144b1fe084aee"/>
   </p:sldLayoutIdLst>
   <p:txStyles>
     <p:titleStyle>
@@ -2675,7 +2675,7 @@
           <p:cNvPr id="14" name="">
             <a:extLst xmlns:a="http://schemas.openxmlformats.org/drawingml/2006/main">
               <a:ext uri="{FF2B5EF4-FFF2-40B4-BE49-F238E27FC236}">
-                <a16:creationId xmlns:a16="http://schemas.microsoft.com/office/drawing/2014/main" id="{43D76688-30DB-4ECC-B3E0-87C84F8A2681}"/>
+                <a16:creationId xmlns:a16="http://schemas.microsoft.com/office/drawing/2014/main" id="{A6A8DF26-6BE0-42CF-B3E8-E67F43CFB698}"/>
               </a:ext>
             </a:extLst>
           </p:cNvPr>
@@ -2708,7 +2708,7 @@
           <p:cNvPr id="2" name="">
             <a:extLst xmlns:a="http://schemas.openxmlformats.org/drawingml/2006/main">
               <a:ext uri="{FF2B5EF4-FFF2-40B4-BE49-F238E27FC236}">
-                <a16:creationId xmlns:a16="http://schemas.microsoft.com/office/drawing/2014/main" id="{59F289B5-58AD-4DAC-9BF8-3CAA3054C22A}"/>
+                <a16:creationId xmlns:a16="http://schemas.microsoft.com/office/drawing/2014/main" id="{35EB80A1-2A0C-4F10-B1B1-0CC577C3AEB4}"/>
               </a:ext>
             </a:extLst>
           </p:cNvPr>
@@ -2758,7 +2758,7 @@
           <p:cNvPr id="3" name="">
             <a:extLst xmlns:a="http://schemas.openxmlformats.org/drawingml/2006/main">
               <a:ext uri="{FF2B5EF4-FFF2-40B4-BE49-F238E27FC236}">
-                <a16:creationId xmlns:a16="http://schemas.microsoft.com/office/drawing/2014/main" id="{08486AE8-E86A-4169-8639-D142A2AA6170}"/>
+                <a16:creationId xmlns:a16="http://schemas.microsoft.com/office/drawing/2014/main" id="{CE18E8FE-B679-4334-8E19-DDFA025F5A45}"/>
               </a:ext>
             </a:extLst>
           </p:cNvPr>
@@ -2825,7 +2825,7 @@
           <p:cNvPr id="4" name="">
             <a:extLst xmlns:a="http://schemas.openxmlformats.org/drawingml/2006/main">
               <a:ext uri="{FF2B5EF4-FFF2-40B4-BE49-F238E27FC236}">
-                <a16:creationId xmlns:a16="http://schemas.microsoft.com/office/drawing/2014/main" id="{F8914E24-62FC-4F21-8F5D-080E5C0D9A45}"/>
+                <a16:creationId xmlns:a16="http://schemas.microsoft.com/office/drawing/2014/main" id="{7B6A14FA-74DF-4F2F-B211-DD00B34642B8}"/>
               </a:ext>
             </a:extLst>
           </p:cNvPr>
@@ -2875,7 +2875,7 @@
           <p:cNvPr id="5" name="">
             <a:extLst xmlns:a="http://schemas.openxmlformats.org/drawingml/2006/main">
               <a:ext uri="{FF2B5EF4-FFF2-40B4-BE49-F238E27FC236}">
-                <a16:creationId xmlns:a16="http://schemas.microsoft.com/office/drawing/2014/main" id="{BE1B868D-029B-4441-94C2-E21AA301B747}"/>
+                <a16:creationId xmlns:a16="http://schemas.microsoft.com/office/drawing/2014/main" id="{A7E234C8-EE93-4461-8539-AE508AD455F3}"/>
               </a:ext>
             </a:extLst>
           </p:cNvPr>
@@ -2906,7 +2906,7 @@
           <p:cNvPr id="6" name="">
             <a:extLst xmlns:a="http://schemas.openxmlformats.org/drawingml/2006/main">
               <a:ext uri="{FF2B5EF4-FFF2-40B4-BE49-F238E27FC236}">
-                <a16:creationId xmlns:a16="http://schemas.microsoft.com/office/drawing/2014/main" id="{A8E58D90-0384-45E2-A34F-68D90091058A}"/>
+                <a16:creationId xmlns:a16="http://schemas.microsoft.com/office/drawing/2014/main" id="{6A5A1960-7CFE-4B14-8CDF-1DAA66E5EF42}"/>
               </a:ext>
             </a:extLst>
           </p:cNvPr>
@@ -2947,7 +2947,7 @@
           <p:cNvPr id="7" name="">
             <a:extLst xmlns:a="http://schemas.openxmlformats.org/drawingml/2006/main">
               <a:ext uri="{FF2B5EF4-FFF2-40B4-BE49-F238E27FC236}">
-                <a16:creationId xmlns:a16="http://schemas.microsoft.com/office/drawing/2014/main" id="{A7178157-106C-4C75-B186-67B6D6F2956F}"/>
+                <a16:creationId xmlns:a16="http://schemas.microsoft.com/office/drawing/2014/main" id="{44042306-E46F-4B58-9D04-D6B0D654154C}"/>
               </a:ext>
             </a:extLst>
           </p:cNvPr>
@@ -2997,7 +2997,7 @@
           <p:cNvPr id="8" name="">
             <a:extLst xmlns:a="http://schemas.openxmlformats.org/drawingml/2006/main">
               <a:ext uri="{FF2B5EF4-FFF2-40B4-BE49-F238E27FC236}">
-                <a16:creationId xmlns:a16="http://schemas.microsoft.com/office/drawing/2014/main" id="{E3F768C2-913D-4D7B-8F53-58D8BB8122E2}"/>
+                <a16:creationId xmlns:a16="http://schemas.microsoft.com/office/drawing/2014/main" id="{A3918071-8E5A-497A-A13F-45323B3D2334}"/>
               </a:ext>
             </a:extLst>
           </p:cNvPr>
@@ -3047,7 +3047,7 @@
           <p:cNvPr id="9" name="">
             <a:extLst xmlns:a="http://schemas.openxmlformats.org/drawingml/2006/main">
               <a:ext uri="{FF2B5EF4-FFF2-40B4-BE49-F238E27FC236}">
-                <a16:creationId xmlns:a16="http://schemas.microsoft.com/office/drawing/2014/main" id="{92D9F731-8832-42BD-85B9-DB4C57F52F6E}"/>
+                <a16:creationId xmlns:a16="http://schemas.microsoft.com/office/drawing/2014/main" id="{82F4C6A0-B57B-4034-ADA6-2561B683440A}"/>
               </a:ext>
             </a:extLst>
           </p:cNvPr>
@@ -3097,7 +3097,7 @@
           <p:cNvPr id="10" name="">
             <a:extLst xmlns:a="http://schemas.openxmlformats.org/drawingml/2006/main">
               <a:ext uri="{FF2B5EF4-FFF2-40B4-BE49-F238E27FC236}">
-                <a16:creationId xmlns:a16="http://schemas.microsoft.com/office/drawing/2014/main" id="{E23C90AD-9E0E-4ED0-95EC-23A57F912436}"/>
+                <a16:creationId xmlns:a16="http://schemas.microsoft.com/office/drawing/2014/main" id="{4DC3A532-DF95-45D8-85FA-958E99802C7C}"/>
               </a:ext>
             </a:extLst>
           </p:cNvPr>
@@ -3147,7 +3147,7 @@
           <p:cNvPr id="11" name="">
             <a:extLst xmlns:a="http://schemas.openxmlformats.org/drawingml/2006/main">
               <a:ext uri="{FF2B5EF4-FFF2-40B4-BE49-F238E27FC236}">
-                <a16:creationId xmlns:a16="http://schemas.microsoft.com/office/drawing/2014/main" id="{B77F63F0-4A77-477B-93EE-760DD4E5FCCA}"/>
+                <a16:creationId xmlns:a16="http://schemas.microsoft.com/office/drawing/2014/main" id="{C67A41FD-3413-45FC-AA7D-E7B5F25C0407}"/>
               </a:ext>
             </a:extLst>
           </p:cNvPr>
@@ -3197,7 +3197,7 @@
           <p:cNvPr id="12" name="">
             <a:extLst xmlns:a="http://schemas.openxmlformats.org/drawingml/2006/main">
               <a:ext uri="{FF2B5EF4-FFF2-40B4-BE49-F238E27FC236}">
-                <a16:creationId xmlns:a16="http://schemas.microsoft.com/office/drawing/2014/main" id="{11543071-AF00-4274-B3A6-66D8C8856581}"/>
+                <a16:creationId xmlns:a16="http://schemas.microsoft.com/office/drawing/2014/main" id="{31357488-84AD-44C2-80C8-4D93FAB28305}"/>
               </a:ext>
             </a:extLst>
           </p:cNvPr>
@@ -3247,7 +3247,7 @@
           <p:cNvPr id="13" name="">
             <a:extLst xmlns:a="http://schemas.openxmlformats.org/drawingml/2006/main">
               <a:ext uri="{FF2B5EF4-FFF2-40B4-BE49-F238E27FC236}">
-                <a16:creationId xmlns:a16="http://schemas.microsoft.com/office/drawing/2014/main" id="{D13F67FC-9CBA-4C40-B87A-851729F38FF2}"/>
+                <a16:creationId xmlns:a16="http://schemas.microsoft.com/office/drawing/2014/main" id="{C7BEE67A-BC27-41F8-8F6A-82E50970D98B}"/>
               </a:ext>
             </a:extLst>
           </p:cNvPr>
@@ -3295,7 +3295,7 @@
     </p:spTree>
     <p:extLst>
       <p:ext uri="{BB962C8B-B14F-4D97-AF65-F5344CB8AC3E}">
-        <p14:creationId xmlns:p14="http://schemas.microsoft.com/office/powerpoint/2010/main" val="748174429"/>
+        <p14:creationId xmlns:p14="http://schemas.microsoft.com/office/powerpoint/2010/main" val="716758062"/>
       </p:ext>
     </p:extLst>
   </p:cSld>
@@ -3326,7 +3326,7 @@
           <p:cNvPr id="46" name="kicker-10">
             <a:extLst xmlns:a="http://schemas.openxmlformats.org/drawingml/2006/main">
               <a:ext uri="{FF2B5EF4-FFF2-40B4-BE49-F238E27FC236}">
-                <a16:creationId xmlns:a16="http://schemas.microsoft.com/office/drawing/2014/main" id="{3AC843AD-A3CE-4DA0-B233-481F65AE9321}"/>
+                <a16:creationId xmlns:a16="http://schemas.microsoft.com/office/drawing/2014/main" id="{70DE1D79-8DC7-43D6-9761-6E4E60C79C5C}"/>
               </a:ext>
             </a:extLst>
           </p:cNvPr>
@@ -3376,7 +3376,7 @@
           <p:cNvPr id="2" name="title-10">
             <a:extLst xmlns:a="http://schemas.openxmlformats.org/drawingml/2006/main">
               <a:ext uri="{FF2B5EF4-FFF2-40B4-BE49-F238E27FC236}">
-                <a16:creationId xmlns:a16="http://schemas.microsoft.com/office/drawing/2014/main" id="{8B28E146-9D9D-446F-A72B-E16785E4E4AA}"/>
+                <a16:creationId xmlns:a16="http://schemas.microsoft.com/office/drawing/2014/main" id="{1365A60E-E84E-4C00-AE43-7E62CB205D7C}"/>
               </a:ext>
             </a:extLst>
           </p:cNvPr>
@@ -3426,7 +3426,7 @@
           <p:cNvPr id="3" name="">
             <a:extLst xmlns:a="http://schemas.openxmlformats.org/drawingml/2006/main">
               <a:ext uri="{FF2B5EF4-FFF2-40B4-BE49-F238E27FC236}">
-                <a16:creationId xmlns:a16="http://schemas.microsoft.com/office/drawing/2014/main" id="{77EC139D-9799-4111-A3F9-9ED245152D74}"/>
+                <a16:creationId xmlns:a16="http://schemas.microsoft.com/office/drawing/2014/main" id="{3C47268A-662D-4394-849C-AAF822479811}"/>
               </a:ext>
             </a:extLst>
           </p:cNvPr>
@@ -3457,7 +3457,7 @@
           <p:cNvPr id="4" name="">
             <a:extLst xmlns:a="http://schemas.openxmlformats.org/drawingml/2006/main">
               <a:ext uri="{FF2B5EF4-FFF2-40B4-BE49-F238E27FC236}">
-                <a16:creationId xmlns:a16="http://schemas.microsoft.com/office/drawing/2014/main" id="{F452D128-7B08-4A4E-B617-EB8C9E46C170}"/>
+                <a16:creationId xmlns:a16="http://schemas.microsoft.com/office/drawing/2014/main" id="{045D304B-EA3C-4248-9DF7-8D4EFAC312A5}"/>
               </a:ext>
             </a:extLst>
           </p:cNvPr>
@@ -3507,7 +3507,7 @@
           <p:cNvPr id="5" name="">
             <a:extLst xmlns:a="http://schemas.openxmlformats.org/drawingml/2006/main">
               <a:ext uri="{FF2B5EF4-FFF2-40B4-BE49-F238E27FC236}">
-                <a16:creationId xmlns:a16="http://schemas.microsoft.com/office/drawing/2014/main" id="{412F9771-D60B-48FF-90E6-1C52D547EB4F}"/>
+                <a16:creationId xmlns:a16="http://schemas.microsoft.com/office/drawing/2014/main" id="{C6228EE5-54FA-45E2-B593-1FE151A053BA}"/>
               </a:ext>
             </a:extLst>
           </p:cNvPr>
@@ -3557,7 +3557,7 @@
           <p:cNvPr id="6" name="">
             <a:extLst xmlns:a="http://schemas.openxmlformats.org/drawingml/2006/main">
               <a:ext uri="{FF2B5EF4-FFF2-40B4-BE49-F238E27FC236}">
-                <a16:creationId xmlns:a16="http://schemas.microsoft.com/office/drawing/2014/main" id="{676B7B64-2A44-4713-AB37-0C57F4BFC309}"/>
+                <a16:creationId xmlns:a16="http://schemas.microsoft.com/office/drawing/2014/main" id="{F08ABB47-7095-4A05-AC0E-6E719ECD2BEA}"/>
               </a:ext>
             </a:extLst>
           </p:cNvPr>
@@ -3607,7 +3607,7 @@
           <p:cNvPr id="7" name="">
             <a:extLst xmlns:a="http://schemas.openxmlformats.org/drawingml/2006/main">
               <a:ext uri="{FF2B5EF4-FFF2-40B4-BE49-F238E27FC236}">
-                <a16:creationId xmlns:a16="http://schemas.microsoft.com/office/drawing/2014/main" id="{5E4DAF76-D452-4F24-9BAA-AC272D4CAE1C}"/>
+                <a16:creationId xmlns:a16="http://schemas.microsoft.com/office/drawing/2014/main" id="{D0E29E5F-02F0-47B4-A94D-4085E3FB43E2}"/>
               </a:ext>
             </a:extLst>
           </p:cNvPr>
@@ -3657,7 +3657,7 @@
           <p:cNvPr id="8" name="">
             <a:extLst xmlns:a="http://schemas.openxmlformats.org/drawingml/2006/main">
               <a:ext uri="{FF2B5EF4-FFF2-40B4-BE49-F238E27FC236}">
-                <a16:creationId xmlns:a16="http://schemas.microsoft.com/office/drawing/2014/main" id="{AA26756E-CF5B-436F-9963-5FF4FF33F14A}"/>
+                <a16:creationId xmlns:a16="http://schemas.microsoft.com/office/drawing/2014/main" id="{ECD69B70-C1AC-4014-9A36-50D942417569}"/>
               </a:ext>
             </a:extLst>
           </p:cNvPr>
@@ -3707,7 +3707,7 @@
           <p:cNvPr id="9" name="">
             <a:extLst xmlns:a="http://schemas.openxmlformats.org/drawingml/2006/main">
               <a:ext uri="{FF2B5EF4-FFF2-40B4-BE49-F238E27FC236}">
-                <a16:creationId xmlns:a16="http://schemas.microsoft.com/office/drawing/2014/main" id="{35D5895F-23A3-4C28-A141-7A3B3FC955E4}"/>
+                <a16:creationId xmlns:a16="http://schemas.microsoft.com/office/drawing/2014/main" id="{73B804FA-64A6-4B82-B1A8-4F1FB355F668}"/>
               </a:ext>
             </a:extLst>
           </p:cNvPr>
@@ -3738,7 +3738,7 @@
           <p:cNvPr id="10" name="">
             <a:extLst xmlns:a="http://schemas.openxmlformats.org/drawingml/2006/main">
               <a:ext uri="{FF2B5EF4-FFF2-40B4-BE49-F238E27FC236}">
-                <a16:creationId xmlns:a16="http://schemas.microsoft.com/office/drawing/2014/main" id="{C9A0BEE7-D113-4744-B1B8-CB56BDFAE9DA}"/>
+                <a16:creationId xmlns:a16="http://schemas.microsoft.com/office/drawing/2014/main" id="{40BC6826-8277-467A-B9CF-A767D2B30ABF}"/>
               </a:ext>
             </a:extLst>
           </p:cNvPr>
@@ -3788,7 +3788,7 @@
           <p:cNvPr id="11" name="">
             <a:extLst xmlns:a="http://schemas.openxmlformats.org/drawingml/2006/main">
               <a:ext uri="{FF2B5EF4-FFF2-40B4-BE49-F238E27FC236}">
-                <a16:creationId xmlns:a16="http://schemas.microsoft.com/office/drawing/2014/main" id="{B797EA7D-67C9-4CCB-8628-F31044D18387}"/>
+                <a16:creationId xmlns:a16="http://schemas.microsoft.com/office/drawing/2014/main" id="{82471643-58C3-4CF7-8C46-3ADB607B6EB2}"/>
               </a:ext>
             </a:extLst>
           </p:cNvPr>
@@ -3838,7 +3838,7 @@
           <p:cNvPr id="12" name="">
             <a:extLst xmlns:a="http://schemas.openxmlformats.org/drawingml/2006/main">
               <a:ext uri="{FF2B5EF4-FFF2-40B4-BE49-F238E27FC236}">
-                <a16:creationId xmlns:a16="http://schemas.microsoft.com/office/drawing/2014/main" id="{45FF2E4F-C7E9-44DE-B13E-19E403EBCF73}"/>
+                <a16:creationId xmlns:a16="http://schemas.microsoft.com/office/drawing/2014/main" id="{E51D2073-5BA9-40FD-87E0-6428604E7466}"/>
               </a:ext>
             </a:extLst>
           </p:cNvPr>
@@ -3888,7 +3888,7 @@
           <p:cNvPr id="13" name="">
             <a:extLst xmlns:a="http://schemas.openxmlformats.org/drawingml/2006/main">
               <a:ext uri="{FF2B5EF4-FFF2-40B4-BE49-F238E27FC236}">
-                <a16:creationId xmlns:a16="http://schemas.microsoft.com/office/drawing/2014/main" id="{E375585D-212B-4D98-8E6A-DF9F65EDD68C}"/>
+                <a16:creationId xmlns:a16="http://schemas.microsoft.com/office/drawing/2014/main" id="{32BF2E88-70E7-43C4-A35A-6F2143D5A47A}"/>
               </a:ext>
             </a:extLst>
           </p:cNvPr>
@@ -3938,7 +3938,7 @@
           <p:cNvPr id="14" name="">
             <a:extLst xmlns:a="http://schemas.openxmlformats.org/drawingml/2006/main">
               <a:ext uri="{FF2B5EF4-FFF2-40B4-BE49-F238E27FC236}">
-                <a16:creationId xmlns:a16="http://schemas.microsoft.com/office/drawing/2014/main" id="{EAE052E0-5646-4DA1-85D0-5DA53686C9EE}"/>
+                <a16:creationId xmlns:a16="http://schemas.microsoft.com/office/drawing/2014/main" id="{4051CF53-48E8-4E69-B5EA-A73FE2A7D748}"/>
               </a:ext>
             </a:extLst>
           </p:cNvPr>
@@ -3969,7 +3969,7 @@
           <p:cNvPr id="15" name="">
             <a:extLst xmlns:a="http://schemas.openxmlformats.org/drawingml/2006/main">
               <a:ext uri="{FF2B5EF4-FFF2-40B4-BE49-F238E27FC236}">
-                <a16:creationId xmlns:a16="http://schemas.microsoft.com/office/drawing/2014/main" id="{BED1FB13-60FD-4420-A6B8-69C7082A408D}"/>
+                <a16:creationId xmlns:a16="http://schemas.microsoft.com/office/drawing/2014/main" id="{CC148678-77FC-47A3-B554-06C8358E5111}"/>
               </a:ext>
             </a:extLst>
           </p:cNvPr>
@@ -4019,7 +4019,7 @@
           <p:cNvPr id="16" name="">
             <a:extLst xmlns:a="http://schemas.openxmlformats.org/drawingml/2006/main">
               <a:ext uri="{FF2B5EF4-FFF2-40B4-BE49-F238E27FC236}">
-                <a16:creationId xmlns:a16="http://schemas.microsoft.com/office/drawing/2014/main" id="{F784AB21-423D-4E3F-B13E-AE3544648FD1}"/>
+                <a16:creationId xmlns:a16="http://schemas.microsoft.com/office/drawing/2014/main" id="{DF54593B-AC23-47E8-9FFC-50FBB5F6575D}"/>
               </a:ext>
             </a:extLst>
           </p:cNvPr>
@@ -4069,7 +4069,7 @@
           <p:cNvPr id="17" name="">
             <a:extLst xmlns:a="http://schemas.openxmlformats.org/drawingml/2006/main">
               <a:ext uri="{FF2B5EF4-FFF2-40B4-BE49-F238E27FC236}">
-                <a16:creationId xmlns:a16="http://schemas.microsoft.com/office/drawing/2014/main" id="{64A07AFD-6180-4F98-9172-04DD1C6890AB}"/>
+                <a16:creationId xmlns:a16="http://schemas.microsoft.com/office/drawing/2014/main" id="{756C660D-8537-4B83-8AC7-038C7B37B023}"/>
               </a:ext>
             </a:extLst>
           </p:cNvPr>
@@ -4119,7 +4119,7 @@
           <p:cNvPr id="18" name="">
             <a:extLst xmlns:a="http://schemas.openxmlformats.org/drawingml/2006/main">
               <a:ext uri="{FF2B5EF4-FFF2-40B4-BE49-F238E27FC236}">
-                <a16:creationId xmlns:a16="http://schemas.microsoft.com/office/drawing/2014/main" id="{768CBE50-EEC7-4312-832A-87425541B01B}"/>
+                <a16:creationId xmlns:a16="http://schemas.microsoft.com/office/drawing/2014/main" id="{5CB67B70-7A6F-48C1-B90D-F935A9F2BC21}"/>
               </a:ext>
             </a:extLst>
           </p:cNvPr>
@@ -4169,7 +4169,7 @@
           <p:cNvPr id="19" name="">
             <a:extLst xmlns:a="http://schemas.openxmlformats.org/drawingml/2006/main">
               <a:ext uri="{FF2B5EF4-FFF2-40B4-BE49-F238E27FC236}">
-                <a16:creationId xmlns:a16="http://schemas.microsoft.com/office/drawing/2014/main" id="{A02BB92A-D7B2-433F-956C-8A57103F408B}"/>
+                <a16:creationId xmlns:a16="http://schemas.microsoft.com/office/drawing/2014/main" id="{74E5D18F-E1C2-4EC5-8946-3EAE8CBC7531}"/>
               </a:ext>
             </a:extLst>
           </p:cNvPr>
@@ -4200,7 +4200,7 @@
           <p:cNvPr id="20" name="">
             <a:extLst xmlns:a="http://schemas.openxmlformats.org/drawingml/2006/main">
               <a:ext uri="{FF2B5EF4-FFF2-40B4-BE49-F238E27FC236}">
-                <a16:creationId xmlns:a16="http://schemas.microsoft.com/office/drawing/2014/main" id="{86A31BF7-0FCC-49BD-9A81-EEA531A83581}"/>
+                <a16:creationId xmlns:a16="http://schemas.microsoft.com/office/drawing/2014/main" id="{EDB9081F-6888-4BC1-B41A-295A47474768}"/>
               </a:ext>
             </a:extLst>
           </p:cNvPr>
@@ -4233,7 +4233,7 @@
           <p:cNvPr id="21" name="">
             <a:extLst xmlns:a="http://schemas.openxmlformats.org/drawingml/2006/main">
               <a:ext uri="{FF2B5EF4-FFF2-40B4-BE49-F238E27FC236}">
-                <a16:creationId xmlns:a16="http://schemas.microsoft.com/office/drawing/2014/main" id="{572046AD-A3FB-4DAC-B848-01F373AB4030}"/>
+                <a16:creationId xmlns:a16="http://schemas.microsoft.com/office/drawing/2014/main" id="{319312EF-363E-4DAD-9545-7906F12331C8}"/>
               </a:ext>
             </a:extLst>
           </p:cNvPr>
@@ -4283,7 +4283,7 @@
           <p:cNvPr id="22" name="">
             <a:extLst xmlns:a="http://schemas.openxmlformats.org/drawingml/2006/main">
               <a:ext uri="{FF2B5EF4-FFF2-40B4-BE49-F238E27FC236}">
-                <a16:creationId xmlns:a16="http://schemas.microsoft.com/office/drawing/2014/main" id="{FF30C5AA-3A26-4929-9636-904305A561D0}"/>
+                <a16:creationId xmlns:a16="http://schemas.microsoft.com/office/drawing/2014/main" id="{67F113F1-1B36-45F2-97A8-600DDAD0C6C8}"/>
               </a:ext>
             </a:extLst>
           </p:cNvPr>
@@ -4333,7 +4333,7 @@
           <p:cNvPr id="23" name="">
             <a:extLst xmlns:a="http://schemas.openxmlformats.org/drawingml/2006/main">
               <a:ext uri="{FF2B5EF4-FFF2-40B4-BE49-F238E27FC236}">
-                <a16:creationId xmlns:a16="http://schemas.microsoft.com/office/drawing/2014/main" id="{81508BDA-9B8D-4F38-A113-04FBD4D89D8A}"/>
+                <a16:creationId xmlns:a16="http://schemas.microsoft.com/office/drawing/2014/main" id="{932C4F4C-5B6C-4D5C-9214-209BD07098ED}"/>
               </a:ext>
             </a:extLst>
           </p:cNvPr>
@@ -4383,7 +4383,7 @@
           <p:cNvPr id="24" name="">
             <a:extLst xmlns:a="http://schemas.openxmlformats.org/drawingml/2006/main">
               <a:ext uri="{FF2B5EF4-FFF2-40B4-BE49-F238E27FC236}">
-                <a16:creationId xmlns:a16="http://schemas.microsoft.com/office/drawing/2014/main" id="{E42B7F01-7795-45FD-A9B5-DC81ACFA1C4B}"/>
+                <a16:creationId xmlns:a16="http://schemas.microsoft.com/office/drawing/2014/main" id="{3C236A13-B93B-46FD-939A-36EEF4B776B9}"/>
               </a:ext>
             </a:extLst>
           </p:cNvPr>
@@ -4433,7 +4433,7 @@
           <p:cNvPr id="25" name="">
             <a:extLst xmlns:a="http://schemas.openxmlformats.org/drawingml/2006/main">
               <a:ext uri="{FF2B5EF4-FFF2-40B4-BE49-F238E27FC236}">
-                <a16:creationId xmlns:a16="http://schemas.microsoft.com/office/drawing/2014/main" id="{CC4F298E-110C-4E7C-AE7F-2EDCA492A1CF}"/>
+                <a16:creationId xmlns:a16="http://schemas.microsoft.com/office/drawing/2014/main" id="{B12F059F-383F-49FA-9F3E-F0B5EFA473C5}"/>
               </a:ext>
             </a:extLst>
           </p:cNvPr>
@@ -4464,7 +4464,7 @@
           <p:cNvPr id="26" name="">
             <a:extLst xmlns:a="http://schemas.openxmlformats.org/drawingml/2006/main">
               <a:ext uri="{FF2B5EF4-FFF2-40B4-BE49-F238E27FC236}">
-                <a16:creationId xmlns:a16="http://schemas.microsoft.com/office/drawing/2014/main" id="{F9DF75E8-073A-4F6E-9BD3-2FBA528E2165}"/>
+                <a16:creationId xmlns:a16="http://schemas.microsoft.com/office/drawing/2014/main" id="{3DA98BE0-6DE4-4B31-8C9D-F58611F2C8E0}"/>
               </a:ext>
             </a:extLst>
           </p:cNvPr>
@@ -4514,7 +4514,7 @@
           <p:cNvPr id="27" name="">
             <a:extLst xmlns:a="http://schemas.openxmlformats.org/drawingml/2006/main">
               <a:ext uri="{FF2B5EF4-FFF2-40B4-BE49-F238E27FC236}">
-                <a16:creationId xmlns:a16="http://schemas.microsoft.com/office/drawing/2014/main" id="{2B0C58CE-F2C9-4DB2-A6D5-A3AF13F4BBA4}"/>
+                <a16:creationId xmlns:a16="http://schemas.microsoft.com/office/drawing/2014/main" id="{EF79539B-E7EB-42D6-866A-3A21377BA7CE}"/>
               </a:ext>
             </a:extLst>
           </p:cNvPr>
@@ -4564,7 +4564,7 @@
           <p:cNvPr id="28" name="">
             <a:extLst xmlns:a="http://schemas.openxmlformats.org/drawingml/2006/main">
               <a:ext uri="{FF2B5EF4-FFF2-40B4-BE49-F238E27FC236}">
-                <a16:creationId xmlns:a16="http://schemas.microsoft.com/office/drawing/2014/main" id="{6D692095-6588-4E00-AFD1-BF5B36B2336E}"/>
+                <a16:creationId xmlns:a16="http://schemas.microsoft.com/office/drawing/2014/main" id="{F28035BB-0D79-43B6-A2E5-26B313048C16}"/>
               </a:ext>
             </a:extLst>
           </p:cNvPr>
@@ -4614,7 +4614,7 @@
           <p:cNvPr id="29" name="">
             <a:extLst xmlns:a="http://schemas.openxmlformats.org/drawingml/2006/main">
               <a:ext uri="{FF2B5EF4-FFF2-40B4-BE49-F238E27FC236}">
-                <a16:creationId xmlns:a16="http://schemas.microsoft.com/office/drawing/2014/main" id="{A2F62089-5C9D-4C6D-817E-10472506CCF1}"/>
+                <a16:creationId xmlns:a16="http://schemas.microsoft.com/office/drawing/2014/main" id="{7F693F92-3733-4DB2-90B0-B6085BE41E75}"/>
               </a:ext>
             </a:extLst>
           </p:cNvPr>
@@ -4664,7 +4664,7 @@
           <p:cNvPr id="30" name="">
             <a:extLst xmlns:a="http://schemas.openxmlformats.org/drawingml/2006/main">
               <a:ext uri="{FF2B5EF4-FFF2-40B4-BE49-F238E27FC236}">
-                <a16:creationId xmlns:a16="http://schemas.microsoft.com/office/drawing/2014/main" id="{8DFAA2CB-D389-4DBA-851F-011CAADF6333}"/>
+                <a16:creationId xmlns:a16="http://schemas.microsoft.com/office/drawing/2014/main" id="{8D850C4A-65C5-4EC4-90DD-8702C4D00FC0}"/>
               </a:ext>
             </a:extLst>
           </p:cNvPr>
@@ -4695,7 +4695,7 @@
           <p:cNvPr id="31" name="">
             <a:extLst xmlns:a="http://schemas.openxmlformats.org/drawingml/2006/main">
               <a:ext uri="{FF2B5EF4-FFF2-40B4-BE49-F238E27FC236}">
-                <a16:creationId xmlns:a16="http://schemas.microsoft.com/office/drawing/2014/main" id="{337139E0-9E34-464B-8CD5-9470D60A4043}"/>
+                <a16:creationId xmlns:a16="http://schemas.microsoft.com/office/drawing/2014/main" id="{4933FA2A-2C4C-44C1-BD05-CAF058C3CC51}"/>
               </a:ext>
             </a:extLst>
           </p:cNvPr>
@@ -4745,7 +4745,7 @@
           <p:cNvPr id="32" name="">
             <a:extLst xmlns:a="http://schemas.openxmlformats.org/drawingml/2006/main">
               <a:ext uri="{FF2B5EF4-FFF2-40B4-BE49-F238E27FC236}">
-                <a16:creationId xmlns:a16="http://schemas.microsoft.com/office/drawing/2014/main" id="{4DE41B78-C91F-4E8C-9102-FB2D9D1A997F}"/>
+                <a16:creationId xmlns:a16="http://schemas.microsoft.com/office/drawing/2014/main" id="{6DC67C3E-91B1-4714-A545-3DB3C04FA1DA}"/>
               </a:ext>
             </a:extLst>
           </p:cNvPr>
@@ -4795,7 +4795,7 @@
           <p:cNvPr id="33" name="">
             <a:extLst xmlns:a="http://schemas.openxmlformats.org/drawingml/2006/main">
               <a:ext uri="{FF2B5EF4-FFF2-40B4-BE49-F238E27FC236}">
-                <a16:creationId xmlns:a16="http://schemas.microsoft.com/office/drawing/2014/main" id="{81248FE7-BB71-4AD1-8195-AFAFA37B35FF}"/>
+                <a16:creationId xmlns:a16="http://schemas.microsoft.com/office/drawing/2014/main" id="{11166A62-E6A0-4C5B-B17D-EFB7990A9FB9}"/>
               </a:ext>
             </a:extLst>
           </p:cNvPr>
@@ -4845,7 +4845,7 @@
           <p:cNvPr id="34" name="">
             <a:extLst xmlns:a="http://schemas.openxmlformats.org/drawingml/2006/main">
               <a:ext uri="{FF2B5EF4-FFF2-40B4-BE49-F238E27FC236}">
-                <a16:creationId xmlns:a16="http://schemas.microsoft.com/office/drawing/2014/main" id="{AD12388A-5FB8-40E4-8E89-2E8D1A1C4774}"/>
+                <a16:creationId xmlns:a16="http://schemas.microsoft.com/office/drawing/2014/main" id="{BE0991A4-AE6C-4C95-B379-A6166A5E715E}"/>
               </a:ext>
             </a:extLst>
           </p:cNvPr>
@@ -4895,7 +4895,7 @@
           <p:cNvPr id="35" name="">
             <a:extLst xmlns:a="http://schemas.openxmlformats.org/drawingml/2006/main">
               <a:ext uri="{FF2B5EF4-FFF2-40B4-BE49-F238E27FC236}">
-                <a16:creationId xmlns:a16="http://schemas.microsoft.com/office/drawing/2014/main" id="{2F8DFBC7-3926-431F-B606-7F6DDD33589F}"/>
+                <a16:creationId xmlns:a16="http://schemas.microsoft.com/office/drawing/2014/main" id="{6D0D048E-1EFB-4CFA-B52E-5C5D70E2C7BE}"/>
               </a:ext>
             </a:extLst>
           </p:cNvPr>
@@ -4926,7 +4926,7 @@
           <p:cNvPr id="36" name="">
             <a:extLst xmlns:a="http://schemas.openxmlformats.org/drawingml/2006/main">
               <a:ext uri="{FF2B5EF4-FFF2-40B4-BE49-F238E27FC236}">
-                <a16:creationId xmlns:a16="http://schemas.microsoft.com/office/drawing/2014/main" id="{57BB7DD9-A6A2-4FE8-8FEC-14F12D5B4F92}"/>
+                <a16:creationId xmlns:a16="http://schemas.microsoft.com/office/drawing/2014/main" id="{BC334C9B-56F2-48D5-AA12-285571825044}"/>
               </a:ext>
             </a:extLst>
           </p:cNvPr>
@@ -4959,7 +4959,7 @@
           <p:cNvPr id="37" name="">
             <a:extLst xmlns:a="http://schemas.openxmlformats.org/drawingml/2006/main">
               <a:ext uri="{FF2B5EF4-FFF2-40B4-BE49-F238E27FC236}">
-                <a16:creationId xmlns:a16="http://schemas.microsoft.com/office/drawing/2014/main" id="{2BE7B9F3-7D60-4998-9C7C-02CF2FA1BE1E}"/>
+                <a16:creationId xmlns:a16="http://schemas.microsoft.com/office/drawing/2014/main" id="{4DA894E2-5D6A-4D38-A0D5-E0FAA5BCFEE6}"/>
               </a:ext>
             </a:extLst>
           </p:cNvPr>
@@ -5009,7 +5009,7 @@
           <p:cNvPr id="38" name="">
             <a:extLst xmlns:a="http://schemas.openxmlformats.org/drawingml/2006/main">
               <a:ext uri="{FF2B5EF4-FFF2-40B4-BE49-F238E27FC236}">
-                <a16:creationId xmlns:a16="http://schemas.microsoft.com/office/drawing/2014/main" id="{71F82189-E913-429C-9128-ADB0DF1B754F}"/>
+                <a16:creationId xmlns:a16="http://schemas.microsoft.com/office/drawing/2014/main" id="{F8D14C7C-DC43-44C3-8F96-889B471D8A99}"/>
               </a:ext>
             </a:extLst>
           </p:cNvPr>
@@ -5059,7 +5059,7 @@
           <p:cNvPr id="39" name="">
             <a:extLst xmlns:a="http://schemas.openxmlformats.org/drawingml/2006/main">
               <a:ext uri="{FF2B5EF4-FFF2-40B4-BE49-F238E27FC236}">
-                <a16:creationId xmlns:a16="http://schemas.microsoft.com/office/drawing/2014/main" id="{B95AE6CD-AC93-4ADD-9950-B4C750AB2A1D}"/>
+                <a16:creationId xmlns:a16="http://schemas.microsoft.com/office/drawing/2014/main" id="{1EBD9334-F942-4086-BCB5-61A440EE63F9}"/>
               </a:ext>
             </a:extLst>
           </p:cNvPr>
@@ -5109,7 +5109,7 @@
           <p:cNvPr id="40" name="">
             <a:extLst xmlns:a="http://schemas.openxmlformats.org/drawingml/2006/main">
               <a:ext uri="{FF2B5EF4-FFF2-40B4-BE49-F238E27FC236}">
-                <a16:creationId xmlns:a16="http://schemas.microsoft.com/office/drawing/2014/main" id="{A34CDFF8-5DF8-4FA0-9119-D9B26BEB2BC8}"/>
+                <a16:creationId xmlns:a16="http://schemas.microsoft.com/office/drawing/2014/main" id="{1E35ADB7-6EBD-4DA8-9D12-1C5AF8F68226}"/>
               </a:ext>
             </a:extLst>
           </p:cNvPr>
@@ -5159,7 +5159,7 @@
           <p:cNvPr id="41" name="">
             <a:extLst xmlns:a="http://schemas.openxmlformats.org/drawingml/2006/main">
               <a:ext uri="{FF2B5EF4-FFF2-40B4-BE49-F238E27FC236}">
-                <a16:creationId xmlns:a16="http://schemas.microsoft.com/office/drawing/2014/main" id="{027A7892-6D8C-4CB6-8C84-37D5E90CEDC9}"/>
+                <a16:creationId xmlns:a16="http://schemas.microsoft.com/office/drawing/2014/main" id="{51F1E0C3-67AE-48EE-9DF0-1DB94A9A1594}"/>
               </a:ext>
             </a:extLst>
           </p:cNvPr>
@@ -5190,7 +5190,7 @@
           <p:cNvPr id="42" name="">
             <a:extLst xmlns:a="http://schemas.openxmlformats.org/drawingml/2006/main">
               <a:ext uri="{FF2B5EF4-FFF2-40B4-BE49-F238E27FC236}">
-                <a16:creationId xmlns:a16="http://schemas.microsoft.com/office/drawing/2014/main" id="{AE17730E-1F8C-478E-8E05-2D2EBFA0C761}"/>
+                <a16:creationId xmlns:a16="http://schemas.microsoft.com/office/drawing/2014/main" id="{9A0EB313-E1E1-4998-A094-F58FE7597B66}"/>
               </a:ext>
             </a:extLst>
           </p:cNvPr>
@@ -5240,7 +5240,7 @@
           <p:cNvPr id="43" name="">
             <a:extLst xmlns:a="http://schemas.openxmlformats.org/drawingml/2006/main">
               <a:ext uri="{FF2B5EF4-FFF2-40B4-BE49-F238E27FC236}">
-                <a16:creationId xmlns:a16="http://schemas.microsoft.com/office/drawing/2014/main" id="{AA797152-7205-4D21-B62C-A388ED477A65}"/>
+                <a16:creationId xmlns:a16="http://schemas.microsoft.com/office/drawing/2014/main" id="{35BCF703-F8C1-4209-B95A-10EC8329E39E}"/>
               </a:ext>
             </a:extLst>
           </p:cNvPr>
@@ -5271,7 +5271,7 @@
           <p:cNvPr id="44" name="source-10">
             <a:extLst xmlns:a="http://schemas.openxmlformats.org/drawingml/2006/main">
               <a:ext uri="{FF2B5EF4-FFF2-40B4-BE49-F238E27FC236}">
-                <a16:creationId xmlns:a16="http://schemas.microsoft.com/office/drawing/2014/main" id="{53BBD1E0-D9B6-4119-923E-BFE0CC0CDA30}"/>
+                <a16:creationId xmlns:a16="http://schemas.microsoft.com/office/drawing/2014/main" id="{C325922F-B7FF-4972-85F3-E668293137C7}"/>
               </a:ext>
             </a:extLst>
           </p:cNvPr>
@@ -5321,7 +5321,7 @@
           <p:cNvPr id="45" name="page-10">
             <a:extLst xmlns:a="http://schemas.openxmlformats.org/drawingml/2006/main">
               <a:ext uri="{FF2B5EF4-FFF2-40B4-BE49-F238E27FC236}">
-                <a16:creationId xmlns:a16="http://schemas.microsoft.com/office/drawing/2014/main" id="{594BBB29-4F41-4B9A-A753-5D32C1FC4EBD}"/>
+                <a16:creationId xmlns:a16="http://schemas.microsoft.com/office/drawing/2014/main" id="{48E3BAE2-DC47-4C85-BFB1-CF4EB19F643C}"/>
               </a:ext>
             </a:extLst>
           </p:cNvPr>
@@ -5369,7 +5369,7 @@
     </p:spTree>
     <p:extLst>
       <p:ext uri="{BB962C8B-B14F-4D97-AF65-F5344CB8AC3E}">
-        <p14:creationId xmlns:p14="http://schemas.microsoft.com/office/powerpoint/2010/main" val="479778527"/>
+        <p14:creationId xmlns:p14="http://schemas.microsoft.com/office/powerpoint/2010/main" val="2139972927"/>
       </p:ext>
     </p:extLst>
   </p:cSld>
@@ -5400,7 +5400,7 @@
           <p:cNvPr id="29" name="kicker-11">
             <a:extLst xmlns:a="http://schemas.openxmlformats.org/drawingml/2006/main">
               <a:ext uri="{FF2B5EF4-FFF2-40B4-BE49-F238E27FC236}">
-                <a16:creationId xmlns:a16="http://schemas.microsoft.com/office/drawing/2014/main" id="{B1FB8196-35BD-4375-97AA-98E15B0B94C5}"/>
+                <a16:creationId xmlns:a16="http://schemas.microsoft.com/office/drawing/2014/main" id="{FBA6E5D5-3FD8-48FC-84C9-880965CBC98A}"/>
               </a:ext>
             </a:extLst>
           </p:cNvPr>
@@ -5450,7 +5450,7 @@
           <p:cNvPr id="2" name="title-11">
             <a:extLst xmlns:a="http://schemas.openxmlformats.org/drawingml/2006/main">
               <a:ext uri="{FF2B5EF4-FFF2-40B4-BE49-F238E27FC236}">
-                <a16:creationId xmlns:a16="http://schemas.microsoft.com/office/drawing/2014/main" id="{6E9CAA59-CA9E-4579-A267-B29951B3FE27}"/>
+                <a16:creationId xmlns:a16="http://schemas.microsoft.com/office/drawing/2014/main" id="{5A9C8C4D-3902-4BE8-AF24-CB099C51556C}"/>
               </a:ext>
             </a:extLst>
           </p:cNvPr>
@@ -5500,7 +5500,7 @@
           <p:cNvPr id="3" name="">
             <a:extLst xmlns:a="http://schemas.openxmlformats.org/drawingml/2006/main">
               <a:ext uri="{FF2B5EF4-FFF2-40B4-BE49-F238E27FC236}">
-                <a16:creationId xmlns:a16="http://schemas.microsoft.com/office/drawing/2014/main" id="{081C9B27-2041-46C3-9FA5-9D8082D04326}"/>
+                <a16:creationId xmlns:a16="http://schemas.microsoft.com/office/drawing/2014/main" id="{FBE5D8CB-5EAE-49FF-8076-0F178199F79A}"/>
               </a:ext>
             </a:extLst>
           </p:cNvPr>
@@ -5531,7 +5531,7 @@
           <p:cNvPr id="4" name="">
             <a:extLst xmlns:a="http://schemas.openxmlformats.org/drawingml/2006/main">
               <a:ext uri="{FF2B5EF4-FFF2-40B4-BE49-F238E27FC236}">
-                <a16:creationId xmlns:a16="http://schemas.microsoft.com/office/drawing/2014/main" id="{518B2198-B367-4824-8605-138FF95725AC}"/>
+                <a16:creationId xmlns:a16="http://schemas.microsoft.com/office/drawing/2014/main" id="{AB23159F-2413-4BF4-BDFE-FB86E247005D}"/>
               </a:ext>
             </a:extLst>
           </p:cNvPr>
@@ -5581,7 +5581,7 @@
           <p:cNvPr id="5" name="">
             <a:extLst xmlns:a="http://schemas.openxmlformats.org/drawingml/2006/main">
               <a:ext uri="{FF2B5EF4-FFF2-40B4-BE49-F238E27FC236}">
-                <a16:creationId xmlns:a16="http://schemas.microsoft.com/office/drawing/2014/main" id="{959BBE0D-D927-4AAA-B655-C026F6D563C1}"/>
+                <a16:creationId xmlns:a16="http://schemas.microsoft.com/office/drawing/2014/main" id="{B1010340-9A9A-4496-93C2-BF0D34567949}"/>
               </a:ext>
             </a:extLst>
           </p:cNvPr>
@@ -5631,7 +5631,7 @@
           <p:cNvPr id="6" name="">
             <a:extLst xmlns:a="http://schemas.openxmlformats.org/drawingml/2006/main">
               <a:ext uri="{FF2B5EF4-FFF2-40B4-BE49-F238E27FC236}">
-                <a16:creationId xmlns:a16="http://schemas.microsoft.com/office/drawing/2014/main" id="{7DF709EB-2B21-4997-97A0-E88A193E98EF}"/>
+                <a16:creationId xmlns:a16="http://schemas.microsoft.com/office/drawing/2014/main" id="{0E84A8EA-2E4B-4EB7-A89F-91D797C3AA03}"/>
               </a:ext>
             </a:extLst>
           </p:cNvPr>
@@ -5681,7 +5681,7 @@
           <p:cNvPr id="7" name="">
             <a:extLst xmlns:a="http://schemas.openxmlformats.org/drawingml/2006/main">
               <a:ext uri="{FF2B5EF4-FFF2-40B4-BE49-F238E27FC236}">
-                <a16:creationId xmlns:a16="http://schemas.microsoft.com/office/drawing/2014/main" id="{94933982-2649-46E6-AF73-29B8E16C3E4A}"/>
+                <a16:creationId xmlns:a16="http://schemas.microsoft.com/office/drawing/2014/main" id="{2A21159E-1664-448E-A0AA-04FCB2DAFFB9}"/>
               </a:ext>
             </a:extLst>
           </p:cNvPr>
@@ -5731,7 +5731,7 @@
           <p:cNvPr id="8" name="">
             <a:extLst xmlns:a="http://schemas.openxmlformats.org/drawingml/2006/main">
               <a:ext uri="{FF2B5EF4-FFF2-40B4-BE49-F238E27FC236}">
-                <a16:creationId xmlns:a16="http://schemas.microsoft.com/office/drawing/2014/main" id="{D60437A7-BCDC-43F6-B5D8-5B9A2A0379EA}"/>
+                <a16:creationId xmlns:a16="http://schemas.microsoft.com/office/drawing/2014/main" id="{0565CAA6-8237-4885-80BA-A476B44D36CD}"/>
               </a:ext>
             </a:extLst>
           </p:cNvPr>
@@ -5762,7 +5762,7 @@
           <p:cNvPr id="9" name="">
             <a:extLst xmlns:a="http://schemas.openxmlformats.org/drawingml/2006/main">
               <a:ext uri="{FF2B5EF4-FFF2-40B4-BE49-F238E27FC236}">
-                <a16:creationId xmlns:a16="http://schemas.microsoft.com/office/drawing/2014/main" id="{00A88FEB-DE8B-4C6D-A8E3-B527510BD269}"/>
+                <a16:creationId xmlns:a16="http://schemas.microsoft.com/office/drawing/2014/main" id="{FFB3AE57-E655-4D9F-847B-EDE301283FB5}"/>
               </a:ext>
             </a:extLst>
           </p:cNvPr>
@@ -5812,7 +5812,7 @@
           <p:cNvPr id="10" name="">
             <a:extLst xmlns:a="http://schemas.openxmlformats.org/drawingml/2006/main">
               <a:ext uri="{FF2B5EF4-FFF2-40B4-BE49-F238E27FC236}">
-                <a16:creationId xmlns:a16="http://schemas.microsoft.com/office/drawing/2014/main" id="{491A13E5-29B5-48DC-8C31-591CF590344A}"/>
+                <a16:creationId xmlns:a16="http://schemas.microsoft.com/office/drawing/2014/main" id="{D530B28B-4CFF-493B-8D5C-35E6FD7671CF}"/>
               </a:ext>
             </a:extLst>
           </p:cNvPr>
@@ -5862,7 +5862,7 @@
           <p:cNvPr id="11" name="">
             <a:extLst xmlns:a="http://schemas.openxmlformats.org/drawingml/2006/main">
               <a:ext uri="{FF2B5EF4-FFF2-40B4-BE49-F238E27FC236}">
-                <a16:creationId xmlns:a16="http://schemas.microsoft.com/office/drawing/2014/main" id="{1B4E8E40-7D97-4ABA-81A8-4CB2FE3123F3}"/>
+                <a16:creationId xmlns:a16="http://schemas.microsoft.com/office/drawing/2014/main" id="{98972ACF-F41F-4443-BA6D-CCB32007930A}"/>
               </a:ext>
             </a:extLst>
           </p:cNvPr>
@@ -5912,7 +5912,7 @@
           <p:cNvPr id="12" name="">
             <a:extLst xmlns:a="http://schemas.openxmlformats.org/drawingml/2006/main">
               <a:ext uri="{FF2B5EF4-FFF2-40B4-BE49-F238E27FC236}">
-                <a16:creationId xmlns:a16="http://schemas.microsoft.com/office/drawing/2014/main" id="{869CB84D-7386-4032-8438-F6E5BE9834A9}"/>
+                <a16:creationId xmlns:a16="http://schemas.microsoft.com/office/drawing/2014/main" id="{9E0EB938-7E6F-4D27-BBAF-D44E5347D685}"/>
               </a:ext>
             </a:extLst>
           </p:cNvPr>
@@ -5943,7 +5943,7 @@
           <p:cNvPr id="13" name="">
             <a:extLst xmlns:a="http://schemas.openxmlformats.org/drawingml/2006/main">
               <a:ext uri="{FF2B5EF4-FFF2-40B4-BE49-F238E27FC236}">
-                <a16:creationId xmlns:a16="http://schemas.microsoft.com/office/drawing/2014/main" id="{38FD1C48-BBFA-4CC2-A81E-FBD6FAA143ED}"/>
+                <a16:creationId xmlns:a16="http://schemas.microsoft.com/office/drawing/2014/main" id="{DD35140A-910A-48A9-BD35-7E4E08C89826}"/>
               </a:ext>
             </a:extLst>
           </p:cNvPr>
@@ -5993,7 +5993,7 @@
           <p:cNvPr id="14" name="">
             <a:extLst xmlns:a="http://schemas.openxmlformats.org/drawingml/2006/main">
               <a:ext uri="{FF2B5EF4-FFF2-40B4-BE49-F238E27FC236}">
-                <a16:creationId xmlns:a16="http://schemas.microsoft.com/office/drawing/2014/main" id="{C91A6282-5FB2-40CE-A7E1-F5CD89C6262E}"/>
+                <a16:creationId xmlns:a16="http://schemas.microsoft.com/office/drawing/2014/main" id="{A28039F2-D0EA-4383-9E35-B19709EEFED3}"/>
               </a:ext>
             </a:extLst>
           </p:cNvPr>
@@ -6043,7 +6043,7 @@
           <p:cNvPr id="15" name="">
             <a:extLst xmlns:a="http://schemas.openxmlformats.org/drawingml/2006/main">
               <a:ext uri="{FF2B5EF4-FFF2-40B4-BE49-F238E27FC236}">
-                <a16:creationId xmlns:a16="http://schemas.microsoft.com/office/drawing/2014/main" id="{BCCD39D5-5C15-4776-ADDD-4F97C8802CB1}"/>
+                <a16:creationId xmlns:a16="http://schemas.microsoft.com/office/drawing/2014/main" id="{727DD5F1-E643-4D99-8A8A-AF94F7BC26AA}"/>
               </a:ext>
             </a:extLst>
           </p:cNvPr>
@@ -6093,7 +6093,7 @@
           <p:cNvPr id="16" name="">
             <a:extLst xmlns:a="http://schemas.openxmlformats.org/drawingml/2006/main">
               <a:ext uri="{FF2B5EF4-FFF2-40B4-BE49-F238E27FC236}">
-                <a16:creationId xmlns:a16="http://schemas.microsoft.com/office/drawing/2014/main" id="{FFDE1175-AE03-43CF-8D7D-3339A4A46F87}"/>
+                <a16:creationId xmlns:a16="http://schemas.microsoft.com/office/drawing/2014/main" id="{C2AECBDC-1D0D-49F0-8B40-D633C812FE49}"/>
               </a:ext>
             </a:extLst>
           </p:cNvPr>
@@ -6124,7 +6124,7 @@
           <p:cNvPr id="17" name="">
             <a:extLst xmlns:a="http://schemas.openxmlformats.org/drawingml/2006/main">
               <a:ext uri="{FF2B5EF4-FFF2-40B4-BE49-F238E27FC236}">
-                <a16:creationId xmlns:a16="http://schemas.microsoft.com/office/drawing/2014/main" id="{3CD8566A-6BB0-4E19-A5A5-929AA54286E0}"/>
+                <a16:creationId xmlns:a16="http://schemas.microsoft.com/office/drawing/2014/main" id="{167CDB02-8DF0-4CD6-8BE0-AAB639163919}"/>
               </a:ext>
             </a:extLst>
           </p:cNvPr>
@@ -6174,7 +6174,7 @@
           <p:cNvPr id="18" name="">
             <a:extLst xmlns:a="http://schemas.openxmlformats.org/drawingml/2006/main">
               <a:ext uri="{FF2B5EF4-FFF2-40B4-BE49-F238E27FC236}">
-                <a16:creationId xmlns:a16="http://schemas.microsoft.com/office/drawing/2014/main" id="{8D58B294-71E7-4E0B-B46E-84E2C66EF55E}"/>
+                <a16:creationId xmlns:a16="http://schemas.microsoft.com/office/drawing/2014/main" id="{363C1570-8C19-4F0F-9E37-4839B6A7C60F}"/>
               </a:ext>
             </a:extLst>
           </p:cNvPr>
@@ -6224,7 +6224,7 @@
           <p:cNvPr id="19" name="">
             <a:extLst xmlns:a="http://schemas.openxmlformats.org/drawingml/2006/main">
               <a:ext uri="{FF2B5EF4-FFF2-40B4-BE49-F238E27FC236}">
-                <a16:creationId xmlns:a16="http://schemas.microsoft.com/office/drawing/2014/main" id="{B7C5CB8E-CC89-49B0-A212-18118C0B6F02}"/>
+                <a16:creationId xmlns:a16="http://schemas.microsoft.com/office/drawing/2014/main" id="{1E3B809B-72FC-43C9-8B62-085B63D9DE29}"/>
               </a:ext>
             </a:extLst>
           </p:cNvPr>
@@ -6274,7 +6274,7 @@
           <p:cNvPr id="20" name="">
             <a:extLst xmlns:a="http://schemas.openxmlformats.org/drawingml/2006/main">
               <a:ext uri="{FF2B5EF4-FFF2-40B4-BE49-F238E27FC236}">
-                <a16:creationId xmlns:a16="http://schemas.microsoft.com/office/drawing/2014/main" id="{2060C77C-1ADE-4176-A6DC-75C34E578FD9}"/>
+                <a16:creationId xmlns:a16="http://schemas.microsoft.com/office/drawing/2014/main" id="{9A1AA02E-B891-4133-A939-2FD48E9ED555}"/>
               </a:ext>
             </a:extLst>
           </p:cNvPr>
@@ -6305,7 +6305,7 @@
           <p:cNvPr id="21" name="">
             <a:extLst xmlns:a="http://schemas.openxmlformats.org/drawingml/2006/main">
               <a:ext uri="{FF2B5EF4-FFF2-40B4-BE49-F238E27FC236}">
-                <a16:creationId xmlns:a16="http://schemas.microsoft.com/office/drawing/2014/main" id="{510EB884-EFD2-4C2F-A51D-568800D3D01F}"/>
+                <a16:creationId xmlns:a16="http://schemas.microsoft.com/office/drawing/2014/main" id="{5F831E87-D104-47BC-A892-BCD479F7B849}"/>
               </a:ext>
             </a:extLst>
           </p:cNvPr>
@@ -6355,7 +6355,7 @@
           <p:cNvPr id="22" name="">
             <a:extLst xmlns:a="http://schemas.openxmlformats.org/drawingml/2006/main">
               <a:ext uri="{FF2B5EF4-FFF2-40B4-BE49-F238E27FC236}">
-                <a16:creationId xmlns:a16="http://schemas.microsoft.com/office/drawing/2014/main" id="{30C67547-33DD-4428-BDCE-CFB4211F242B}"/>
+                <a16:creationId xmlns:a16="http://schemas.microsoft.com/office/drawing/2014/main" id="{9D0D269E-1B19-4849-BE54-1C086F6E7148}"/>
               </a:ext>
             </a:extLst>
           </p:cNvPr>
@@ -6405,7 +6405,7 @@
           <p:cNvPr id="23" name="">
             <a:extLst xmlns:a="http://schemas.openxmlformats.org/drawingml/2006/main">
               <a:ext uri="{FF2B5EF4-FFF2-40B4-BE49-F238E27FC236}">
-                <a16:creationId xmlns:a16="http://schemas.microsoft.com/office/drawing/2014/main" id="{64D0C37B-5085-4A73-9905-54B006244ADF}"/>
+                <a16:creationId xmlns:a16="http://schemas.microsoft.com/office/drawing/2014/main" id="{F6C55C9B-1E86-477F-8151-26BC09102323}"/>
               </a:ext>
             </a:extLst>
           </p:cNvPr>
@@ -6455,7 +6455,7 @@
           <p:cNvPr id="24" name="">
             <a:extLst xmlns:a="http://schemas.openxmlformats.org/drawingml/2006/main">
               <a:ext uri="{FF2B5EF4-FFF2-40B4-BE49-F238E27FC236}">
-                <a16:creationId xmlns:a16="http://schemas.microsoft.com/office/drawing/2014/main" id="{E91B4482-2992-4585-9DB0-40F4EF4A6751}"/>
+                <a16:creationId xmlns:a16="http://schemas.microsoft.com/office/drawing/2014/main" id="{744243E3-375E-4DA4-93AA-4294E593C452}"/>
               </a:ext>
             </a:extLst>
           </p:cNvPr>
@@ -6486,7 +6486,7 @@
           <p:cNvPr id="25" name="">
             <a:extLst xmlns:a="http://schemas.openxmlformats.org/drawingml/2006/main">
               <a:ext uri="{FF2B5EF4-FFF2-40B4-BE49-F238E27FC236}">
-                <a16:creationId xmlns:a16="http://schemas.microsoft.com/office/drawing/2014/main" id="{9FB644CC-0279-4678-A5C8-3500B207616F}"/>
+                <a16:creationId xmlns:a16="http://schemas.microsoft.com/office/drawing/2014/main" id="{29EFD0DC-B388-4476-A62A-338BC2C07F9D}"/>
               </a:ext>
             </a:extLst>
           </p:cNvPr>
@@ -6536,7 +6536,7 @@
           <p:cNvPr id="26" name="">
             <a:extLst xmlns:a="http://schemas.openxmlformats.org/drawingml/2006/main">
               <a:ext uri="{FF2B5EF4-FFF2-40B4-BE49-F238E27FC236}">
-                <a16:creationId xmlns:a16="http://schemas.microsoft.com/office/drawing/2014/main" id="{FD35979E-4FD6-4569-A8AE-997C318BAAB5}"/>
+                <a16:creationId xmlns:a16="http://schemas.microsoft.com/office/drawing/2014/main" id="{606B725C-818B-44BD-9619-91C2C55B01B6}"/>
               </a:ext>
             </a:extLst>
           </p:cNvPr>
@@ -6567,7 +6567,7 @@
           <p:cNvPr id="27" name="source-11">
             <a:extLst xmlns:a="http://schemas.openxmlformats.org/drawingml/2006/main">
               <a:ext uri="{FF2B5EF4-FFF2-40B4-BE49-F238E27FC236}">
-                <a16:creationId xmlns:a16="http://schemas.microsoft.com/office/drawing/2014/main" id="{7F857251-9D7D-4079-B284-3A3AAF80ADFF}"/>
+                <a16:creationId xmlns:a16="http://schemas.microsoft.com/office/drawing/2014/main" id="{F6268502-DD88-4C8E-AFC2-F3735EDC5F3A}"/>
               </a:ext>
             </a:extLst>
           </p:cNvPr>
@@ -6617,7 +6617,7 @@
           <p:cNvPr id="28" name="page-11">
             <a:extLst xmlns:a="http://schemas.openxmlformats.org/drawingml/2006/main">
               <a:ext uri="{FF2B5EF4-FFF2-40B4-BE49-F238E27FC236}">
-                <a16:creationId xmlns:a16="http://schemas.microsoft.com/office/drawing/2014/main" id="{9320CC10-F809-497E-A309-F4F22D3E62E6}"/>
+                <a16:creationId xmlns:a16="http://schemas.microsoft.com/office/drawing/2014/main" id="{BA6637E6-7E5D-4167-8869-67A5BAC6055C}"/>
               </a:ext>
             </a:extLst>
           </p:cNvPr>
@@ -6665,7 +6665,7 @@
     </p:spTree>
     <p:extLst>
       <p:ext uri="{BB962C8B-B14F-4D97-AF65-F5344CB8AC3E}">
-        <p14:creationId xmlns:p14="http://schemas.microsoft.com/office/powerpoint/2010/main" val="1696174444"/>
+        <p14:creationId xmlns:p14="http://schemas.microsoft.com/office/powerpoint/2010/main" val="837753142"/>
       </p:ext>
     </p:extLst>
   </p:cSld>
@@ -6696,7 +6696,7 @@
           <p:cNvPr id="38" name="kicker-12">
             <a:extLst xmlns:a="http://schemas.openxmlformats.org/drawingml/2006/main">
               <a:ext uri="{FF2B5EF4-FFF2-40B4-BE49-F238E27FC236}">
-                <a16:creationId xmlns:a16="http://schemas.microsoft.com/office/drawing/2014/main" id="{6EE241FD-B3F5-4966-A090-A2392538B923}"/>
+                <a16:creationId xmlns:a16="http://schemas.microsoft.com/office/drawing/2014/main" id="{F660AC61-5E47-4BC2-83AF-4DD649132A83}"/>
               </a:ext>
             </a:extLst>
           </p:cNvPr>
@@ -6746,7 +6746,7 @@
           <p:cNvPr id="2" name="title-12">
             <a:extLst xmlns:a="http://schemas.openxmlformats.org/drawingml/2006/main">
               <a:ext uri="{FF2B5EF4-FFF2-40B4-BE49-F238E27FC236}">
-                <a16:creationId xmlns:a16="http://schemas.microsoft.com/office/drawing/2014/main" id="{D5B598CF-4483-4512-BF91-3E0D0F903C1B}"/>
+                <a16:creationId xmlns:a16="http://schemas.microsoft.com/office/drawing/2014/main" id="{99DAA247-2AA8-45DE-B216-3587BDB93210}"/>
               </a:ext>
             </a:extLst>
           </p:cNvPr>
@@ -6796,7 +6796,7 @@
           <p:cNvPr id="3" name="">
             <a:extLst xmlns:a="http://schemas.openxmlformats.org/drawingml/2006/main">
               <a:ext uri="{FF2B5EF4-FFF2-40B4-BE49-F238E27FC236}">
-                <a16:creationId xmlns:a16="http://schemas.microsoft.com/office/drawing/2014/main" id="{37FF2751-381A-46CC-A46A-936DB35581EC}"/>
+                <a16:creationId xmlns:a16="http://schemas.microsoft.com/office/drawing/2014/main" id="{25EFA620-8FF6-47B9-BD17-7C606C939C86}"/>
               </a:ext>
             </a:extLst>
           </p:cNvPr>
@@ -6827,7 +6827,7 @@
           <p:cNvPr id="4" name="">
             <a:extLst xmlns:a="http://schemas.openxmlformats.org/drawingml/2006/main">
               <a:ext uri="{FF2B5EF4-FFF2-40B4-BE49-F238E27FC236}">
-                <a16:creationId xmlns:a16="http://schemas.microsoft.com/office/drawing/2014/main" id="{779314D1-6504-452B-8C91-04AEB1C4DEB6}"/>
+                <a16:creationId xmlns:a16="http://schemas.microsoft.com/office/drawing/2014/main" id="{E3792FF5-2CF9-407D-971C-4C2B98D6FC63}"/>
               </a:ext>
             </a:extLst>
           </p:cNvPr>
@@ -6877,7 +6877,7 @@
           <p:cNvPr id="5" name="">
             <a:extLst xmlns:a="http://schemas.openxmlformats.org/drawingml/2006/main">
               <a:ext uri="{FF2B5EF4-FFF2-40B4-BE49-F238E27FC236}">
-                <a16:creationId xmlns:a16="http://schemas.microsoft.com/office/drawing/2014/main" id="{0D86809F-E898-4036-BB62-DF322CC2FF3D}"/>
+                <a16:creationId xmlns:a16="http://schemas.microsoft.com/office/drawing/2014/main" id="{E91B8C04-A6A5-40F0-A67D-06296EFC8C79}"/>
               </a:ext>
             </a:extLst>
           </p:cNvPr>
@@ -6927,7 +6927,7 @@
           <p:cNvPr id="6" name="">
             <a:extLst xmlns:a="http://schemas.openxmlformats.org/drawingml/2006/main">
               <a:ext uri="{FF2B5EF4-FFF2-40B4-BE49-F238E27FC236}">
-                <a16:creationId xmlns:a16="http://schemas.microsoft.com/office/drawing/2014/main" id="{BCA6545E-E9C6-4D15-8353-57CBB1E0B376}"/>
+                <a16:creationId xmlns:a16="http://schemas.microsoft.com/office/drawing/2014/main" id="{05049A46-07B5-450A-9D97-9AB90827F5CD}"/>
               </a:ext>
             </a:extLst>
           </p:cNvPr>
@@ -6977,7 +6977,7 @@
           <p:cNvPr id="7" name="">
             <a:extLst xmlns:a="http://schemas.openxmlformats.org/drawingml/2006/main">
               <a:ext uri="{FF2B5EF4-FFF2-40B4-BE49-F238E27FC236}">
-                <a16:creationId xmlns:a16="http://schemas.microsoft.com/office/drawing/2014/main" id="{D1F1AC82-3E96-4080-B4FB-23741F9A8CEE}"/>
+                <a16:creationId xmlns:a16="http://schemas.microsoft.com/office/drawing/2014/main" id="{9A1AA8E5-D4AB-4C10-9269-0391D0919160}"/>
               </a:ext>
             </a:extLst>
           </p:cNvPr>
@@ -7027,7 +7027,7 @@
           <p:cNvPr id="8" name="">
             <a:extLst xmlns:a="http://schemas.openxmlformats.org/drawingml/2006/main">
               <a:ext uri="{FF2B5EF4-FFF2-40B4-BE49-F238E27FC236}">
-                <a16:creationId xmlns:a16="http://schemas.microsoft.com/office/drawing/2014/main" id="{7C1EACEC-283C-4249-8426-5784585FF157}"/>
+                <a16:creationId xmlns:a16="http://schemas.microsoft.com/office/drawing/2014/main" id="{264B21FE-76D4-48C7-917B-E1AF42BFBDBA}"/>
               </a:ext>
             </a:extLst>
           </p:cNvPr>
@@ -7077,7 +7077,7 @@
           <p:cNvPr id="9" name="">
             <a:extLst xmlns:a="http://schemas.openxmlformats.org/drawingml/2006/main">
               <a:ext uri="{FF2B5EF4-FFF2-40B4-BE49-F238E27FC236}">
-                <a16:creationId xmlns:a16="http://schemas.microsoft.com/office/drawing/2014/main" id="{33F3E5D6-4ECE-47B6-BF11-97EC664B3F6C}"/>
+                <a16:creationId xmlns:a16="http://schemas.microsoft.com/office/drawing/2014/main" id="{3D0AC9AA-B7BF-4895-AB08-541EB4024DEB}"/>
               </a:ext>
             </a:extLst>
           </p:cNvPr>
@@ -7127,7 +7127,7 @@
           <p:cNvPr id="10" name="">
             <a:extLst xmlns:a="http://schemas.openxmlformats.org/drawingml/2006/main">
               <a:ext uri="{FF2B5EF4-FFF2-40B4-BE49-F238E27FC236}">
-                <a16:creationId xmlns:a16="http://schemas.microsoft.com/office/drawing/2014/main" id="{D7579689-4904-40B0-96B5-9F11CDE70142}"/>
+                <a16:creationId xmlns:a16="http://schemas.microsoft.com/office/drawing/2014/main" id="{4B703288-FB36-4BB7-A351-19BC27DB1DB6}"/>
               </a:ext>
             </a:extLst>
           </p:cNvPr>
@@ -7177,7 +7177,7 @@
           <p:cNvPr id="11" name="">
             <a:extLst xmlns:a="http://schemas.openxmlformats.org/drawingml/2006/main">
               <a:ext uri="{FF2B5EF4-FFF2-40B4-BE49-F238E27FC236}">
-                <a16:creationId xmlns:a16="http://schemas.microsoft.com/office/drawing/2014/main" id="{C7E0DB84-2512-4DE4-A1F8-5087CC17C456}"/>
+                <a16:creationId xmlns:a16="http://schemas.microsoft.com/office/drawing/2014/main" id="{588BDC76-8B0B-403A-B801-28D1B7ED4A40}"/>
               </a:ext>
             </a:extLst>
           </p:cNvPr>
@@ -7227,7 +7227,7 @@
           <p:cNvPr id="12" name="">
             <a:extLst xmlns:a="http://schemas.openxmlformats.org/drawingml/2006/main">
               <a:ext uri="{FF2B5EF4-FFF2-40B4-BE49-F238E27FC236}">
-                <a16:creationId xmlns:a16="http://schemas.microsoft.com/office/drawing/2014/main" id="{4A38923B-D927-4BF2-A5A4-DB65BFF1DDAC}"/>
+                <a16:creationId xmlns:a16="http://schemas.microsoft.com/office/drawing/2014/main" id="{7829D50C-D8A2-45A8-897C-10082E6554D1}"/>
               </a:ext>
             </a:extLst>
           </p:cNvPr>
@@ -7277,7 +7277,7 @@
           <p:cNvPr id="13" name="">
             <a:extLst xmlns:a="http://schemas.openxmlformats.org/drawingml/2006/main">
               <a:ext uri="{FF2B5EF4-FFF2-40B4-BE49-F238E27FC236}">
-                <a16:creationId xmlns:a16="http://schemas.microsoft.com/office/drawing/2014/main" id="{06CC9697-D9A3-4A9F-9398-13D63EAD6CBD}"/>
+                <a16:creationId xmlns:a16="http://schemas.microsoft.com/office/drawing/2014/main" id="{0AC59BB1-EA8F-42E7-8421-3851A1715F5C}"/>
               </a:ext>
             </a:extLst>
           </p:cNvPr>
@@ -7308,7 +7308,7 @@
           <p:cNvPr id="14" name="">
             <a:extLst xmlns:a="http://schemas.openxmlformats.org/drawingml/2006/main">
               <a:ext uri="{FF2B5EF4-FFF2-40B4-BE49-F238E27FC236}">
-                <a16:creationId xmlns:a16="http://schemas.microsoft.com/office/drawing/2014/main" id="{3C46421E-15FF-4812-90E6-0074C264DB58}"/>
+                <a16:creationId xmlns:a16="http://schemas.microsoft.com/office/drawing/2014/main" id="{2397DAD1-EA95-4861-BAF1-4B8568438CA7}"/>
               </a:ext>
             </a:extLst>
           </p:cNvPr>
@@ -7341,7 +7341,7 @@
           <p:cNvPr id="15" name="">
             <a:extLst xmlns:a="http://schemas.openxmlformats.org/drawingml/2006/main">
               <a:ext uri="{FF2B5EF4-FFF2-40B4-BE49-F238E27FC236}">
-                <a16:creationId xmlns:a16="http://schemas.microsoft.com/office/drawing/2014/main" id="{45D0BE5B-D41E-4667-8365-E3C0C807CA18}"/>
+                <a16:creationId xmlns:a16="http://schemas.microsoft.com/office/drawing/2014/main" id="{C031D5D7-F883-4015-9C07-297919EE7431}"/>
               </a:ext>
             </a:extLst>
           </p:cNvPr>
@@ -7374,7 +7374,7 @@
           <p:cNvPr id="16" name="">
             <a:extLst xmlns:a="http://schemas.openxmlformats.org/drawingml/2006/main">
               <a:ext uri="{FF2B5EF4-FFF2-40B4-BE49-F238E27FC236}">
-                <a16:creationId xmlns:a16="http://schemas.microsoft.com/office/drawing/2014/main" id="{7F60DAAF-2158-46CE-8C7F-5D335AA3BBA8}"/>
+                <a16:creationId xmlns:a16="http://schemas.microsoft.com/office/drawing/2014/main" id="{BD2B6089-6177-4D2F-AFD3-6D89327060A5}"/>
               </a:ext>
             </a:extLst>
           </p:cNvPr>
@@ -7407,7 +7407,7 @@
           <p:cNvPr id="17" name="">
             <a:extLst xmlns:a="http://schemas.openxmlformats.org/drawingml/2006/main">
               <a:ext uri="{FF2B5EF4-FFF2-40B4-BE49-F238E27FC236}">
-                <a16:creationId xmlns:a16="http://schemas.microsoft.com/office/drawing/2014/main" id="{363D88D1-73FF-4D67-A5EC-7038964080FF}"/>
+                <a16:creationId xmlns:a16="http://schemas.microsoft.com/office/drawing/2014/main" id="{AE27FDFA-5D0D-4D74-BA0F-FA7FDFE3F36A}"/>
               </a:ext>
             </a:extLst>
           </p:cNvPr>
@@ -7440,7 +7440,7 @@
           <p:cNvPr id="18" name="">
             <a:extLst xmlns:a="http://schemas.openxmlformats.org/drawingml/2006/main">
               <a:ext uri="{FF2B5EF4-FFF2-40B4-BE49-F238E27FC236}">
-                <a16:creationId xmlns:a16="http://schemas.microsoft.com/office/drawing/2014/main" id="{005D6101-60EA-4AA2-8DA4-41E35EBFF2C3}"/>
+                <a16:creationId xmlns:a16="http://schemas.microsoft.com/office/drawing/2014/main" id="{6FA8D2E3-F33F-442A-A477-EF3CECFE4059}"/>
               </a:ext>
             </a:extLst>
           </p:cNvPr>
@@ -7475,7 +7475,7 @@
           <p:cNvPr id="19" name="">
             <a:extLst xmlns:a="http://schemas.openxmlformats.org/drawingml/2006/main">
               <a:ext uri="{FF2B5EF4-FFF2-40B4-BE49-F238E27FC236}">
-                <a16:creationId xmlns:a16="http://schemas.microsoft.com/office/drawing/2014/main" id="{94DC7EFB-088F-4BE3-859C-87FC0825A901}"/>
+                <a16:creationId xmlns:a16="http://schemas.microsoft.com/office/drawing/2014/main" id="{85FAC507-243B-45F5-9FB6-3E7403B0CD4B}"/>
               </a:ext>
             </a:extLst>
           </p:cNvPr>
@@ -7525,7 +7525,7 @@
           <p:cNvPr id="20" name="">
             <a:extLst xmlns:a="http://schemas.openxmlformats.org/drawingml/2006/main">
               <a:ext uri="{FF2B5EF4-FFF2-40B4-BE49-F238E27FC236}">
-                <a16:creationId xmlns:a16="http://schemas.microsoft.com/office/drawing/2014/main" id="{4C2AEA5F-55AB-426C-A670-9FD9D95F9E87}"/>
+                <a16:creationId xmlns:a16="http://schemas.microsoft.com/office/drawing/2014/main" id="{06653A2D-471B-445D-8C38-8679B0EB94C7}"/>
               </a:ext>
             </a:extLst>
           </p:cNvPr>
@@ -7575,7 +7575,7 @@
           <p:cNvPr id="21" name="">
             <a:extLst xmlns:a="http://schemas.openxmlformats.org/drawingml/2006/main">
               <a:ext uri="{FF2B5EF4-FFF2-40B4-BE49-F238E27FC236}">
-                <a16:creationId xmlns:a16="http://schemas.microsoft.com/office/drawing/2014/main" id="{8563C266-FD0C-4FF9-9ED3-524C6C66A801}"/>
+                <a16:creationId xmlns:a16="http://schemas.microsoft.com/office/drawing/2014/main" id="{CC0C5B61-1E1D-457F-B2E1-FFEEA5675179}"/>
               </a:ext>
             </a:extLst>
           </p:cNvPr>
@@ -7610,7 +7610,7 @@
           <p:cNvPr id="22" name="">
             <a:extLst xmlns:a="http://schemas.openxmlformats.org/drawingml/2006/main">
               <a:ext uri="{FF2B5EF4-FFF2-40B4-BE49-F238E27FC236}">
-                <a16:creationId xmlns:a16="http://schemas.microsoft.com/office/drawing/2014/main" id="{9FE2ED66-CC8D-4CBE-8EC1-765285538339}"/>
+                <a16:creationId xmlns:a16="http://schemas.microsoft.com/office/drawing/2014/main" id="{13AF7728-E64D-4A47-B229-2AD4932B324D}"/>
               </a:ext>
             </a:extLst>
           </p:cNvPr>
@@ -7660,7 +7660,7 @@
           <p:cNvPr id="23" name="">
             <a:extLst xmlns:a="http://schemas.openxmlformats.org/drawingml/2006/main">
               <a:ext uri="{FF2B5EF4-FFF2-40B4-BE49-F238E27FC236}">
-                <a16:creationId xmlns:a16="http://schemas.microsoft.com/office/drawing/2014/main" id="{2B88C854-467A-4823-BA75-B19132050E91}"/>
+                <a16:creationId xmlns:a16="http://schemas.microsoft.com/office/drawing/2014/main" id="{375A5280-EC9F-4D70-B7E6-CDB50D4ED65B}"/>
               </a:ext>
             </a:extLst>
           </p:cNvPr>
@@ -7710,7 +7710,7 @@
           <p:cNvPr id="24" name="">
             <a:extLst xmlns:a="http://schemas.openxmlformats.org/drawingml/2006/main">
               <a:ext uri="{FF2B5EF4-FFF2-40B4-BE49-F238E27FC236}">
-                <a16:creationId xmlns:a16="http://schemas.microsoft.com/office/drawing/2014/main" id="{D3B97C54-5A67-4081-B5DD-8612F0FD843C}"/>
+                <a16:creationId xmlns:a16="http://schemas.microsoft.com/office/drawing/2014/main" id="{E564E088-86FB-4B00-ACA6-707780E24F97}"/>
               </a:ext>
             </a:extLst>
           </p:cNvPr>
@@ -7745,7 +7745,7 @@
           <p:cNvPr id="25" name="">
             <a:extLst xmlns:a="http://schemas.openxmlformats.org/drawingml/2006/main">
               <a:ext uri="{FF2B5EF4-FFF2-40B4-BE49-F238E27FC236}">
-                <a16:creationId xmlns:a16="http://schemas.microsoft.com/office/drawing/2014/main" id="{8836464D-35DD-4BE6-8972-B9995EE68777}"/>
+                <a16:creationId xmlns:a16="http://schemas.microsoft.com/office/drawing/2014/main" id="{8C7611AC-ADF7-44AE-9DB6-17FD7144F0B9}"/>
               </a:ext>
             </a:extLst>
           </p:cNvPr>
@@ -7795,7 +7795,7 @@
           <p:cNvPr id="26" name="">
             <a:extLst xmlns:a="http://schemas.openxmlformats.org/drawingml/2006/main">
               <a:ext uri="{FF2B5EF4-FFF2-40B4-BE49-F238E27FC236}">
-                <a16:creationId xmlns:a16="http://schemas.microsoft.com/office/drawing/2014/main" id="{301CFEE0-6E4B-474E-9574-C2CA006867B3}"/>
+                <a16:creationId xmlns:a16="http://schemas.microsoft.com/office/drawing/2014/main" id="{FC78B84C-7EC7-4962-8407-09CA6DACC0BF}"/>
               </a:ext>
             </a:extLst>
           </p:cNvPr>
@@ -7845,7 +7845,7 @@
           <p:cNvPr id="27" name="">
             <a:extLst xmlns:a="http://schemas.openxmlformats.org/drawingml/2006/main">
               <a:ext uri="{FF2B5EF4-FFF2-40B4-BE49-F238E27FC236}">
-                <a16:creationId xmlns:a16="http://schemas.microsoft.com/office/drawing/2014/main" id="{2CC3FBCA-90DB-4C23-848B-B5345A916D89}"/>
+                <a16:creationId xmlns:a16="http://schemas.microsoft.com/office/drawing/2014/main" id="{533904A5-743B-41F1-A58B-43C5E77DA6BF}"/>
               </a:ext>
             </a:extLst>
           </p:cNvPr>
@@ -7880,7 +7880,7 @@
           <p:cNvPr id="28" name="">
             <a:extLst xmlns:a="http://schemas.openxmlformats.org/drawingml/2006/main">
               <a:ext uri="{FF2B5EF4-FFF2-40B4-BE49-F238E27FC236}">
-                <a16:creationId xmlns:a16="http://schemas.microsoft.com/office/drawing/2014/main" id="{9653B0D4-18A4-440C-839E-2BE7D711A93A}"/>
+                <a16:creationId xmlns:a16="http://schemas.microsoft.com/office/drawing/2014/main" id="{09C81864-2CB0-43B7-8A47-A68C1C005237}"/>
               </a:ext>
             </a:extLst>
           </p:cNvPr>
@@ -7930,7 +7930,7 @@
           <p:cNvPr id="29" name="">
             <a:extLst xmlns:a="http://schemas.openxmlformats.org/drawingml/2006/main">
               <a:ext uri="{FF2B5EF4-FFF2-40B4-BE49-F238E27FC236}">
-                <a16:creationId xmlns:a16="http://schemas.microsoft.com/office/drawing/2014/main" id="{F6C143AE-08D1-4B6E-A0EB-200325F42EC4}"/>
+                <a16:creationId xmlns:a16="http://schemas.microsoft.com/office/drawing/2014/main" id="{49980477-90FD-4BAA-8CF9-6363F296D606}"/>
               </a:ext>
             </a:extLst>
           </p:cNvPr>
@@ -7970,7 +7970,7 @@
                   <a:srgbClr val="526174"/>
                 </a:solidFill>
               </a:rPr>
-              <a:t>two llama.cpp servers</a:t>
+              <a:t>one tensor-split server</a:t>
             </a:r>
           </a:p>
         </p:txBody>
@@ -7980,7 +7980,7 @@
           <p:cNvPr id="30" name="">
             <a:extLst xmlns:a="http://schemas.openxmlformats.org/drawingml/2006/main">
               <a:ext uri="{FF2B5EF4-FFF2-40B4-BE49-F238E27FC236}">
-                <a16:creationId xmlns:a16="http://schemas.microsoft.com/office/drawing/2014/main" id="{BE8DD848-3808-41EF-8278-D807FFA8AD15}"/>
+                <a16:creationId xmlns:a16="http://schemas.microsoft.com/office/drawing/2014/main" id="{DAFC78E8-8B93-4CFA-B394-C1EFECCCFE78}"/>
               </a:ext>
             </a:extLst>
           </p:cNvPr>
@@ -8021,7 +8021,7 @@
           <p:cNvPr id="31" name="">
             <a:extLst xmlns:a="http://schemas.openxmlformats.org/drawingml/2006/main">
               <a:ext uri="{FF2B5EF4-FFF2-40B4-BE49-F238E27FC236}">
-                <a16:creationId xmlns:a16="http://schemas.microsoft.com/office/drawing/2014/main" id="{5B174CCF-D887-4477-A1D6-0845E32D326A}"/>
+                <a16:creationId xmlns:a16="http://schemas.microsoft.com/office/drawing/2014/main" id="{ECC142BB-B95E-47C3-8AC5-D719E2CF1714}"/>
               </a:ext>
             </a:extLst>
           </p:cNvPr>
@@ -8071,7 +8071,7 @@
           <p:cNvPr id="32" name="">
             <a:extLst xmlns:a="http://schemas.openxmlformats.org/drawingml/2006/main">
               <a:ext uri="{FF2B5EF4-FFF2-40B4-BE49-F238E27FC236}">
-                <a16:creationId xmlns:a16="http://schemas.microsoft.com/office/drawing/2014/main" id="{3626B0AE-6CAA-49C0-AF86-3E7946E662F2}"/>
+                <a16:creationId xmlns:a16="http://schemas.microsoft.com/office/drawing/2014/main" id="{16BC243C-310A-40F1-A23F-0BF4410891B4}"/>
               </a:ext>
             </a:extLst>
           </p:cNvPr>
@@ -8121,7 +8121,7 @@
           <p:cNvPr id="33" name="">
             <a:extLst xmlns:a="http://schemas.openxmlformats.org/drawingml/2006/main">
               <a:ext uri="{FF2B5EF4-FFF2-40B4-BE49-F238E27FC236}">
-                <a16:creationId xmlns:a16="http://schemas.microsoft.com/office/drawing/2014/main" id="{A816063C-E34A-4C2B-8039-AF1DBBD64BB3}"/>
+                <a16:creationId xmlns:a16="http://schemas.microsoft.com/office/drawing/2014/main" id="{A3AC2E9A-D42A-4A34-9DDA-ABA050314487}"/>
               </a:ext>
             </a:extLst>
           </p:cNvPr>
@@ -8156,7 +8156,7 @@
           <p:cNvPr id="34" name="">
             <a:extLst xmlns:a="http://schemas.openxmlformats.org/drawingml/2006/main">
               <a:ext uri="{FF2B5EF4-FFF2-40B4-BE49-F238E27FC236}">
-                <a16:creationId xmlns:a16="http://schemas.microsoft.com/office/drawing/2014/main" id="{67405F95-BB47-4F88-A722-39DCD8BABD32}"/>
+                <a16:creationId xmlns:a16="http://schemas.microsoft.com/office/drawing/2014/main" id="{889EFA5D-820B-45C1-BF34-43618FD75B69}"/>
               </a:ext>
             </a:extLst>
           </p:cNvPr>
@@ -8206,7 +8206,7 @@
           <p:cNvPr id="35" name="">
             <a:extLst xmlns:a="http://schemas.openxmlformats.org/drawingml/2006/main">
               <a:ext uri="{FF2B5EF4-FFF2-40B4-BE49-F238E27FC236}">
-                <a16:creationId xmlns:a16="http://schemas.microsoft.com/office/drawing/2014/main" id="{3494FE30-7037-497E-AB28-0535FBE436F3}"/>
+                <a16:creationId xmlns:a16="http://schemas.microsoft.com/office/drawing/2014/main" id="{66E131D1-0821-437A-9046-5B6D7076AA49}"/>
               </a:ext>
             </a:extLst>
           </p:cNvPr>
@@ -8237,7 +8237,7 @@
           <p:cNvPr id="36" name="source-12">
             <a:extLst xmlns:a="http://schemas.openxmlformats.org/drawingml/2006/main">
               <a:ext uri="{FF2B5EF4-FFF2-40B4-BE49-F238E27FC236}">
-                <a16:creationId xmlns:a16="http://schemas.microsoft.com/office/drawing/2014/main" id="{75ADA748-1DBB-4C61-95A4-CC283D6CB6BC}"/>
+                <a16:creationId xmlns:a16="http://schemas.microsoft.com/office/drawing/2014/main" id="{0EE445F5-A6B8-4771-8E53-AF9BF4D97631}"/>
               </a:ext>
             </a:extLst>
           </p:cNvPr>
@@ -8287,7 +8287,7 @@
           <p:cNvPr id="37" name="page-12">
             <a:extLst xmlns:a="http://schemas.openxmlformats.org/drawingml/2006/main">
               <a:ext uri="{FF2B5EF4-FFF2-40B4-BE49-F238E27FC236}">
-                <a16:creationId xmlns:a16="http://schemas.microsoft.com/office/drawing/2014/main" id="{140B6EF1-DA5E-49F8-8543-F30A547A1A3D}"/>
+                <a16:creationId xmlns:a16="http://schemas.microsoft.com/office/drawing/2014/main" id="{F85D3633-A603-4AAD-A9E8-B6A038D9750F}"/>
               </a:ext>
             </a:extLst>
           </p:cNvPr>
@@ -8335,7 +8335,7 @@
     </p:spTree>
     <p:extLst>
       <p:ext uri="{BB962C8B-B14F-4D97-AF65-F5344CB8AC3E}">
-        <p14:creationId xmlns:p14="http://schemas.microsoft.com/office/powerpoint/2010/main" val="297978320"/>
+        <p14:creationId xmlns:p14="http://schemas.microsoft.com/office/powerpoint/2010/main" val="1722569808"/>
       </p:ext>
     </p:extLst>
   </p:cSld>
@@ -8366,7 +8366,7 @@
           <p:cNvPr id="36" name="kicker-13">
             <a:extLst xmlns:a="http://schemas.openxmlformats.org/drawingml/2006/main">
               <a:ext uri="{FF2B5EF4-FFF2-40B4-BE49-F238E27FC236}">
-                <a16:creationId xmlns:a16="http://schemas.microsoft.com/office/drawing/2014/main" id="{4F0925FF-D63C-41DF-9C81-8B4C99DD24CC}"/>
+                <a16:creationId xmlns:a16="http://schemas.microsoft.com/office/drawing/2014/main" id="{1515D7EA-7C1E-424C-9365-9E703170CF46}"/>
               </a:ext>
             </a:extLst>
           </p:cNvPr>
@@ -8416,7 +8416,7 @@
           <p:cNvPr id="2" name="title-13">
             <a:extLst xmlns:a="http://schemas.openxmlformats.org/drawingml/2006/main">
               <a:ext uri="{FF2B5EF4-FFF2-40B4-BE49-F238E27FC236}">
-                <a16:creationId xmlns:a16="http://schemas.microsoft.com/office/drawing/2014/main" id="{BAEC52EB-98AD-40E4-9762-50F23A048229}"/>
+                <a16:creationId xmlns:a16="http://schemas.microsoft.com/office/drawing/2014/main" id="{9CBDE1AC-996D-4140-B259-DE951A849DF7}"/>
               </a:ext>
             </a:extLst>
           </p:cNvPr>
@@ -8466,7 +8466,7 @@
           <p:cNvPr id="3" name="">
             <a:extLst xmlns:a="http://schemas.openxmlformats.org/drawingml/2006/main">
               <a:ext uri="{FF2B5EF4-FFF2-40B4-BE49-F238E27FC236}">
-                <a16:creationId xmlns:a16="http://schemas.microsoft.com/office/drawing/2014/main" id="{A87B29CB-9D11-451C-81F0-A29C2B030892}"/>
+                <a16:creationId xmlns:a16="http://schemas.microsoft.com/office/drawing/2014/main" id="{3F85B47B-9034-4171-8DE0-E26C64512BE2}"/>
               </a:ext>
             </a:extLst>
           </p:cNvPr>
@@ -8497,7 +8497,7 @@
           <p:cNvPr id="4" name="">
             <a:extLst xmlns:a="http://schemas.openxmlformats.org/drawingml/2006/main">
               <a:ext uri="{FF2B5EF4-FFF2-40B4-BE49-F238E27FC236}">
-                <a16:creationId xmlns:a16="http://schemas.microsoft.com/office/drawing/2014/main" id="{9556537E-0E13-4D91-B54A-4F9CF86928F1}"/>
+                <a16:creationId xmlns:a16="http://schemas.microsoft.com/office/drawing/2014/main" id="{99A8B2D2-345A-4001-ACFB-90DD8BD36ED4}"/>
               </a:ext>
             </a:extLst>
           </p:cNvPr>
@@ -8547,7 +8547,7 @@
           <p:cNvPr id="5" name="">
             <a:extLst xmlns:a="http://schemas.openxmlformats.org/drawingml/2006/main">
               <a:ext uri="{FF2B5EF4-FFF2-40B4-BE49-F238E27FC236}">
-                <a16:creationId xmlns:a16="http://schemas.microsoft.com/office/drawing/2014/main" id="{FA2DF732-31F2-4913-B0F3-1445065781D1}"/>
+                <a16:creationId xmlns:a16="http://schemas.microsoft.com/office/drawing/2014/main" id="{F4F23D1D-E1EF-47E0-9F17-AA0FF61629CA}"/>
               </a:ext>
             </a:extLst>
           </p:cNvPr>
@@ -8597,7 +8597,7 @@
           <p:cNvPr id="6" name="">
             <a:extLst xmlns:a="http://schemas.openxmlformats.org/drawingml/2006/main">
               <a:ext uri="{FF2B5EF4-FFF2-40B4-BE49-F238E27FC236}">
-                <a16:creationId xmlns:a16="http://schemas.microsoft.com/office/drawing/2014/main" id="{530E7A19-3234-4947-941D-13BC7A305519}"/>
+                <a16:creationId xmlns:a16="http://schemas.microsoft.com/office/drawing/2014/main" id="{DDEC418C-6FEF-49FC-ABD6-5D70DA6E4243}"/>
               </a:ext>
             </a:extLst>
           </p:cNvPr>
@@ -8647,7 +8647,7 @@
           <p:cNvPr id="7" name="">
             <a:extLst xmlns:a="http://schemas.openxmlformats.org/drawingml/2006/main">
               <a:ext uri="{FF2B5EF4-FFF2-40B4-BE49-F238E27FC236}">
-                <a16:creationId xmlns:a16="http://schemas.microsoft.com/office/drawing/2014/main" id="{BD096722-3AEA-4901-B8D7-D7A9D6860794}"/>
+                <a16:creationId xmlns:a16="http://schemas.microsoft.com/office/drawing/2014/main" id="{67F1B708-C6AE-4794-AB6B-C81E80CFAAD7}"/>
               </a:ext>
             </a:extLst>
           </p:cNvPr>
@@ -8697,7 +8697,7 @@
           <p:cNvPr id="8" name="">
             <a:extLst xmlns:a="http://schemas.openxmlformats.org/drawingml/2006/main">
               <a:ext uri="{FF2B5EF4-FFF2-40B4-BE49-F238E27FC236}">
-                <a16:creationId xmlns:a16="http://schemas.microsoft.com/office/drawing/2014/main" id="{F15EC09F-61F1-43A4-9BFB-2342B11F3AEA}"/>
+                <a16:creationId xmlns:a16="http://schemas.microsoft.com/office/drawing/2014/main" id="{361C308C-08C1-423D-A8FF-BDA70BBAB123}"/>
               </a:ext>
             </a:extLst>
           </p:cNvPr>
@@ -8747,7 +8747,7 @@
           <p:cNvPr id="9" name="">
             <a:extLst xmlns:a="http://schemas.openxmlformats.org/drawingml/2006/main">
               <a:ext uri="{FF2B5EF4-FFF2-40B4-BE49-F238E27FC236}">
-                <a16:creationId xmlns:a16="http://schemas.microsoft.com/office/drawing/2014/main" id="{BEEBD44D-FAC8-44AA-A102-F603D4CF55E5}"/>
+                <a16:creationId xmlns:a16="http://schemas.microsoft.com/office/drawing/2014/main" id="{0DE803D9-85D5-4C74-8917-D21B6D2B8322}"/>
               </a:ext>
             </a:extLst>
           </p:cNvPr>
@@ -8797,7 +8797,7 @@
           <p:cNvPr id="10" name="">
             <a:extLst xmlns:a="http://schemas.openxmlformats.org/drawingml/2006/main">
               <a:ext uri="{FF2B5EF4-FFF2-40B4-BE49-F238E27FC236}">
-                <a16:creationId xmlns:a16="http://schemas.microsoft.com/office/drawing/2014/main" id="{52D6E79E-C53A-480C-B423-D5ABF51BBE2A}"/>
+                <a16:creationId xmlns:a16="http://schemas.microsoft.com/office/drawing/2014/main" id="{81A1FF96-D508-482B-B3E1-50C3C04F1BE8}"/>
               </a:ext>
             </a:extLst>
           </p:cNvPr>
@@ -8847,7 +8847,7 @@
           <p:cNvPr id="11" name="">
             <a:extLst xmlns:a="http://schemas.openxmlformats.org/drawingml/2006/main">
               <a:ext uri="{FF2B5EF4-FFF2-40B4-BE49-F238E27FC236}">
-                <a16:creationId xmlns:a16="http://schemas.microsoft.com/office/drawing/2014/main" id="{F82AD70C-080F-4FA2-B802-BEB6F31A4289}"/>
+                <a16:creationId xmlns:a16="http://schemas.microsoft.com/office/drawing/2014/main" id="{80A785F7-F043-46DD-B629-5563143EA3F8}"/>
               </a:ext>
             </a:extLst>
           </p:cNvPr>
@@ -8897,7 +8897,7 @@
           <p:cNvPr id="12" name="">
             <a:extLst xmlns:a="http://schemas.openxmlformats.org/drawingml/2006/main">
               <a:ext uri="{FF2B5EF4-FFF2-40B4-BE49-F238E27FC236}">
-                <a16:creationId xmlns:a16="http://schemas.microsoft.com/office/drawing/2014/main" id="{8F41056D-2639-4ADA-B82C-6C338F7F0D09}"/>
+                <a16:creationId xmlns:a16="http://schemas.microsoft.com/office/drawing/2014/main" id="{9745065D-18A3-49F5-B422-FE791C5815D4}"/>
               </a:ext>
             </a:extLst>
           </p:cNvPr>
@@ -8947,7 +8947,7 @@
           <p:cNvPr id="13" name="">
             <a:extLst xmlns:a="http://schemas.openxmlformats.org/drawingml/2006/main">
               <a:ext uri="{FF2B5EF4-FFF2-40B4-BE49-F238E27FC236}">
-                <a16:creationId xmlns:a16="http://schemas.microsoft.com/office/drawing/2014/main" id="{54580C3C-6906-4322-A423-AD90A562010C}"/>
+                <a16:creationId xmlns:a16="http://schemas.microsoft.com/office/drawing/2014/main" id="{F13DCB45-6328-46C7-9F78-A93788098544}"/>
               </a:ext>
             </a:extLst>
           </p:cNvPr>
@@ -8997,7 +8997,7 @@
           <p:cNvPr id="14" name="">
             <a:extLst xmlns:a="http://schemas.openxmlformats.org/drawingml/2006/main">
               <a:ext uri="{FF2B5EF4-FFF2-40B4-BE49-F238E27FC236}">
-                <a16:creationId xmlns:a16="http://schemas.microsoft.com/office/drawing/2014/main" id="{54411068-7CD7-48BE-B215-362545888E11}"/>
+                <a16:creationId xmlns:a16="http://schemas.microsoft.com/office/drawing/2014/main" id="{B818CCB0-86F6-442F-BFD2-A4A73F082115}"/>
               </a:ext>
             </a:extLst>
           </p:cNvPr>
@@ -9047,7 +9047,7 @@
           <p:cNvPr id="15" name="">
             <a:extLst xmlns:a="http://schemas.openxmlformats.org/drawingml/2006/main">
               <a:ext uri="{FF2B5EF4-FFF2-40B4-BE49-F238E27FC236}">
-                <a16:creationId xmlns:a16="http://schemas.microsoft.com/office/drawing/2014/main" id="{DB6D9406-FB0F-43D8-BFCD-F7C0A7F153C5}"/>
+                <a16:creationId xmlns:a16="http://schemas.microsoft.com/office/drawing/2014/main" id="{AC90211E-356E-4FF0-8C9C-8F3F3A8B5F66}"/>
               </a:ext>
             </a:extLst>
           </p:cNvPr>
@@ -9097,7 +9097,7 @@
           <p:cNvPr id="16" name="">
             <a:extLst xmlns:a="http://schemas.openxmlformats.org/drawingml/2006/main">
               <a:ext uri="{FF2B5EF4-FFF2-40B4-BE49-F238E27FC236}">
-                <a16:creationId xmlns:a16="http://schemas.microsoft.com/office/drawing/2014/main" id="{AA6B7CD9-D6F3-4A2A-AE84-9C7BD4C941C9}"/>
+                <a16:creationId xmlns:a16="http://schemas.microsoft.com/office/drawing/2014/main" id="{6A46EC01-E823-45CA-9BF2-4838B5F9BFC8}"/>
               </a:ext>
             </a:extLst>
           </p:cNvPr>
@@ -9128,7 +9128,7 @@
           <p:cNvPr id="17" name="">
             <a:extLst xmlns:a="http://schemas.openxmlformats.org/drawingml/2006/main">
               <a:ext uri="{FF2B5EF4-FFF2-40B4-BE49-F238E27FC236}">
-                <a16:creationId xmlns:a16="http://schemas.microsoft.com/office/drawing/2014/main" id="{69426C21-44FE-440B-A5C0-EEEEB5ED1921}"/>
+                <a16:creationId xmlns:a16="http://schemas.microsoft.com/office/drawing/2014/main" id="{C29F6B35-5C93-49F3-9D28-CAF25BF70D11}"/>
               </a:ext>
             </a:extLst>
           </p:cNvPr>
@@ -9178,7 +9178,7 @@
           <p:cNvPr id="18" name="">
             <a:extLst xmlns:a="http://schemas.openxmlformats.org/drawingml/2006/main">
               <a:ext uri="{FF2B5EF4-FFF2-40B4-BE49-F238E27FC236}">
-                <a16:creationId xmlns:a16="http://schemas.microsoft.com/office/drawing/2014/main" id="{565BA578-819B-4701-9686-718627C38015}"/>
+                <a16:creationId xmlns:a16="http://schemas.microsoft.com/office/drawing/2014/main" id="{8CC1E3D9-14ED-44EB-97B0-4F749CA76901}"/>
               </a:ext>
             </a:extLst>
           </p:cNvPr>
@@ -9228,7 +9228,7 @@
           <p:cNvPr id="19" name="">
             <a:extLst xmlns:a="http://schemas.openxmlformats.org/drawingml/2006/main">
               <a:ext uri="{FF2B5EF4-FFF2-40B4-BE49-F238E27FC236}">
-                <a16:creationId xmlns:a16="http://schemas.microsoft.com/office/drawing/2014/main" id="{7CA0700B-4FEB-4287-A7EB-F9BC85FE0755}"/>
+                <a16:creationId xmlns:a16="http://schemas.microsoft.com/office/drawing/2014/main" id="{78220494-A5A4-48E8-80F9-A264D5CAF2ED}"/>
               </a:ext>
             </a:extLst>
           </p:cNvPr>
@@ -9278,7 +9278,7 @@
           <p:cNvPr id="20" name="">
             <a:extLst xmlns:a="http://schemas.openxmlformats.org/drawingml/2006/main">
               <a:ext uri="{FF2B5EF4-FFF2-40B4-BE49-F238E27FC236}">
-                <a16:creationId xmlns:a16="http://schemas.microsoft.com/office/drawing/2014/main" id="{25112948-15F1-42BA-8C54-DF7BB4913153}"/>
+                <a16:creationId xmlns:a16="http://schemas.microsoft.com/office/drawing/2014/main" id="{1696F7E3-707D-428A-8F7C-18B3B033B65F}"/>
               </a:ext>
             </a:extLst>
           </p:cNvPr>
@@ -9309,7 +9309,7 @@
           <p:cNvPr id="21" name="">
             <a:extLst xmlns:a="http://schemas.openxmlformats.org/drawingml/2006/main">
               <a:ext uri="{FF2B5EF4-FFF2-40B4-BE49-F238E27FC236}">
-                <a16:creationId xmlns:a16="http://schemas.microsoft.com/office/drawing/2014/main" id="{783E1EA8-9043-44D9-A788-926544F85E47}"/>
+                <a16:creationId xmlns:a16="http://schemas.microsoft.com/office/drawing/2014/main" id="{D92A2359-2E7A-4443-8169-79B97E0C2059}"/>
               </a:ext>
             </a:extLst>
           </p:cNvPr>
@@ -9359,7 +9359,7 @@
           <p:cNvPr id="22" name="">
             <a:extLst xmlns:a="http://schemas.openxmlformats.org/drawingml/2006/main">
               <a:ext uri="{FF2B5EF4-FFF2-40B4-BE49-F238E27FC236}">
-                <a16:creationId xmlns:a16="http://schemas.microsoft.com/office/drawing/2014/main" id="{E795F9C1-84B9-49A5-A638-0E1468F4ECEA}"/>
+                <a16:creationId xmlns:a16="http://schemas.microsoft.com/office/drawing/2014/main" id="{6B385DE0-BA4A-471A-B834-285082D85A1D}"/>
               </a:ext>
             </a:extLst>
           </p:cNvPr>
@@ -9409,7 +9409,7 @@
           <p:cNvPr id="23" name="">
             <a:extLst xmlns:a="http://schemas.openxmlformats.org/drawingml/2006/main">
               <a:ext uri="{FF2B5EF4-FFF2-40B4-BE49-F238E27FC236}">
-                <a16:creationId xmlns:a16="http://schemas.microsoft.com/office/drawing/2014/main" id="{BA4095CB-6B0B-4551-B3F9-5143C78E1A2A}"/>
+                <a16:creationId xmlns:a16="http://schemas.microsoft.com/office/drawing/2014/main" id="{9E799F49-DE36-456A-8043-2345AB2A4E41}"/>
               </a:ext>
             </a:extLst>
           </p:cNvPr>
@@ -9459,7 +9459,7 @@
           <p:cNvPr id="24" name="">
             <a:extLst xmlns:a="http://schemas.openxmlformats.org/drawingml/2006/main">
               <a:ext uri="{FF2B5EF4-FFF2-40B4-BE49-F238E27FC236}">
-                <a16:creationId xmlns:a16="http://schemas.microsoft.com/office/drawing/2014/main" id="{23220E38-34E7-4481-96CF-F9E1FA9F662C}"/>
+                <a16:creationId xmlns:a16="http://schemas.microsoft.com/office/drawing/2014/main" id="{301E4E6E-0361-460F-A7F6-EADE60375C1D}"/>
               </a:ext>
             </a:extLst>
           </p:cNvPr>
@@ -9490,7 +9490,7 @@
           <p:cNvPr id="25" name="">
             <a:extLst xmlns:a="http://schemas.openxmlformats.org/drawingml/2006/main">
               <a:ext uri="{FF2B5EF4-FFF2-40B4-BE49-F238E27FC236}">
-                <a16:creationId xmlns:a16="http://schemas.microsoft.com/office/drawing/2014/main" id="{9F0CE583-2E1A-41B7-AB75-7A42997ECA72}"/>
+                <a16:creationId xmlns:a16="http://schemas.microsoft.com/office/drawing/2014/main" id="{A6E36677-D556-495A-8379-7F9A40FA2D6F}"/>
               </a:ext>
             </a:extLst>
           </p:cNvPr>
@@ -9540,7 +9540,7 @@
           <p:cNvPr id="26" name="">
             <a:extLst xmlns:a="http://schemas.openxmlformats.org/drawingml/2006/main">
               <a:ext uri="{FF2B5EF4-FFF2-40B4-BE49-F238E27FC236}">
-                <a16:creationId xmlns:a16="http://schemas.microsoft.com/office/drawing/2014/main" id="{348DB725-7CC1-4B9D-80B6-1F04951A09C9}"/>
+                <a16:creationId xmlns:a16="http://schemas.microsoft.com/office/drawing/2014/main" id="{EA15D5F2-CF9F-4A69-B1AB-FDCFC0CF9CBE}"/>
               </a:ext>
             </a:extLst>
           </p:cNvPr>
@@ -9590,7 +9590,7 @@
           <p:cNvPr id="27" name="">
             <a:extLst xmlns:a="http://schemas.openxmlformats.org/drawingml/2006/main">
               <a:ext uri="{FF2B5EF4-FFF2-40B4-BE49-F238E27FC236}">
-                <a16:creationId xmlns:a16="http://schemas.microsoft.com/office/drawing/2014/main" id="{8CAB0A78-F14D-4777-8F25-58F74E0EF6C6}"/>
+                <a16:creationId xmlns:a16="http://schemas.microsoft.com/office/drawing/2014/main" id="{77AFDDF9-CB7A-43A3-9D9E-6ED4A10C3A7B}"/>
               </a:ext>
             </a:extLst>
           </p:cNvPr>
@@ -9640,7 +9640,7 @@
           <p:cNvPr id="28" name="">
             <a:extLst xmlns:a="http://schemas.openxmlformats.org/drawingml/2006/main">
               <a:ext uri="{FF2B5EF4-FFF2-40B4-BE49-F238E27FC236}">
-                <a16:creationId xmlns:a16="http://schemas.microsoft.com/office/drawing/2014/main" id="{49CB55D9-3688-4DA9-897F-78BC40BC03CC}"/>
+                <a16:creationId xmlns:a16="http://schemas.microsoft.com/office/drawing/2014/main" id="{C16E0CB5-88DB-4755-B5D3-7D0910A9EB32}"/>
               </a:ext>
             </a:extLst>
           </p:cNvPr>
@@ -9671,7 +9671,7 @@
           <p:cNvPr id="29" name="">
             <a:extLst xmlns:a="http://schemas.openxmlformats.org/drawingml/2006/main">
               <a:ext uri="{FF2B5EF4-FFF2-40B4-BE49-F238E27FC236}">
-                <a16:creationId xmlns:a16="http://schemas.microsoft.com/office/drawing/2014/main" id="{E2C49810-BA8D-49E0-9556-E657945EAECA}"/>
+                <a16:creationId xmlns:a16="http://schemas.microsoft.com/office/drawing/2014/main" id="{C6C40E55-62DE-4F90-A086-92F2D927155B}"/>
               </a:ext>
             </a:extLst>
           </p:cNvPr>
@@ -9706,7 +9706,7 @@
           <p:cNvPr id="30" name="">
             <a:extLst xmlns:a="http://schemas.openxmlformats.org/drawingml/2006/main">
               <a:ext uri="{FF2B5EF4-FFF2-40B4-BE49-F238E27FC236}">
-                <a16:creationId xmlns:a16="http://schemas.microsoft.com/office/drawing/2014/main" id="{AC997BCA-C5FE-4AC9-9FA8-0D44C4394420}"/>
+                <a16:creationId xmlns:a16="http://schemas.microsoft.com/office/drawing/2014/main" id="{18ED38FA-5DAA-4734-A0DC-F859F6756EF2}"/>
               </a:ext>
             </a:extLst>
           </p:cNvPr>
@@ -9741,7 +9741,7 @@
           <p:cNvPr id="31" name="">
             <a:extLst xmlns:a="http://schemas.openxmlformats.org/drawingml/2006/main">
               <a:ext uri="{FF2B5EF4-FFF2-40B4-BE49-F238E27FC236}">
-                <a16:creationId xmlns:a16="http://schemas.microsoft.com/office/drawing/2014/main" id="{590E2693-47C5-4B19-9485-95678716B1E3}"/>
+                <a16:creationId xmlns:a16="http://schemas.microsoft.com/office/drawing/2014/main" id="{63C8B2DA-DDDF-4534-B6FF-EE531BB7D501}"/>
               </a:ext>
             </a:extLst>
           </p:cNvPr>
@@ -9791,7 +9791,7 @@
           <p:cNvPr id="32" name="">
             <a:extLst xmlns:a="http://schemas.openxmlformats.org/drawingml/2006/main">
               <a:ext uri="{FF2B5EF4-FFF2-40B4-BE49-F238E27FC236}">
-                <a16:creationId xmlns:a16="http://schemas.microsoft.com/office/drawing/2014/main" id="{1BFC5038-6355-4020-A30B-686ABCEBFC8C}"/>
+                <a16:creationId xmlns:a16="http://schemas.microsoft.com/office/drawing/2014/main" id="{A36BCA44-7F28-4598-BBA0-4707B77B62A5}"/>
               </a:ext>
             </a:extLst>
           </p:cNvPr>
@@ -9841,7 +9841,7 @@
           <p:cNvPr id="33" name="">
             <a:extLst xmlns:a="http://schemas.openxmlformats.org/drawingml/2006/main">
               <a:ext uri="{FF2B5EF4-FFF2-40B4-BE49-F238E27FC236}">
-                <a16:creationId xmlns:a16="http://schemas.microsoft.com/office/drawing/2014/main" id="{1E19B147-EA64-4E72-BF34-9BE6756AAA91}"/>
+                <a16:creationId xmlns:a16="http://schemas.microsoft.com/office/drawing/2014/main" id="{35FBF6CB-E886-4974-846F-255370A4F363}"/>
               </a:ext>
             </a:extLst>
           </p:cNvPr>
@@ -9872,7 +9872,7 @@
           <p:cNvPr id="34" name="source-13">
             <a:extLst xmlns:a="http://schemas.openxmlformats.org/drawingml/2006/main">
               <a:ext uri="{FF2B5EF4-FFF2-40B4-BE49-F238E27FC236}">
-                <a16:creationId xmlns:a16="http://schemas.microsoft.com/office/drawing/2014/main" id="{77FA829E-912E-4E87-B553-88F0F8EF3719}"/>
+                <a16:creationId xmlns:a16="http://schemas.microsoft.com/office/drawing/2014/main" id="{BFC6A061-DF5B-495E-A48F-0FFD1211856D}"/>
               </a:ext>
             </a:extLst>
           </p:cNvPr>
@@ -9922,7 +9922,7 @@
           <p:cNvPr id="35" name="page-13">
             <a:extLst xmlns:a="http://schemas.openxmlformats.org/drawingml/2006/main">
               <a:ext uri="{FF2B5EF4-FFF2-40B4-BE49-F238E27FC236}">
-                <a16:creationId xmlns:a16="http://schemas.microsoft.com/office/drawing/2014/main" id="{B0CDF350-BAAE-4A27-8BE8-B27377E139BB}"/>
+                <a16:creationId xmlns:a16="http://schemas.microsoft.com/office/drawing/2014/main" id="{54D3B0D4-1D47-428C-9E2B-904D05515CA0}"/>
               </a:ext>
             </a:extLst>
           </p:cNvPr>
@@ -9970,7 +9970,7 @@
     </p:spTree>
     <p:extLst>
       <p:ext uri="{BB962C8B-B14F-4D97-AF65-F5344CB8AC3E}">
-        <p14:creationId xmlns:p14="http://schemas.microsoft.com/office/powerpoint/2010/main" val="214535152"/>
+        <p14:creationId xmlns:p14="http://schemas.microsoft.com/office/powerpoint/2010/main" val="79480487"/>
       </p:ext>
     </p:extLst>
   </p:cSld>
@@ -10001,7 +10001,7 @@
           <p:cNvPr id="31" name="kicker-14">
             <a:extLst xmlns:a="http://schemas.openxmlformats.org/drawingml/2006/main">
               <a:ext uri="{FF2B5EF4-FFF2-40B4-BE49-F238E27FC236}">
-                <a16:creationId xmlns:a16="http://schemas.microsoft.com/office/drawing/2014/main" id="{204E41B4-0AB3-4E62-B86B-B6BF39AAEEA7}"/>
+                <a16:creationId xmlns:a16="http://schemas.microsoft.com/office/drawing/2014/main" id="{7898B36C-2C17-4FA9-BC6A-0D01F26EC5F5}"/>
               </a:ext>
             </a:extLst>
           </p:cNvPr>
@@ -10051,7 +10051,7 @@
           <p:cNvPr id="2" name="title-14">
             <a:extLst xmlns:a="http://schemas.openxmlformats.org/drawingml/2006/main">
               <a:ext uri="{FF2B5EF4-FFF2-40B4-BE49-F238E27FC236}">
-                <a16:creationId xmlns:a16="http://schemas.microsoft.com/office/drawing/2014/main" id="{33D22248-C749-4568-BBAD-4FB002D3BED0}"/>
+                <a16:creationId xmlns:a16="http://schemas.microsoft.com/office/drawing/2014/main" id="{E1FA00B2-9F61-4CD6-8714-670B16042757}"/>
               </a:ext>
             </a:extLst>
           </p:cNvPr>
@@ -10101,7 +10101,7 @@
           <p:cNvPr id="3" name="">
             <a:extLst xmlns:a="http://schemas.openxmlformats.org/drawingml/2006/main">
               <a:ext uri="{FF2B5EF4-FFF2-40B4-BE49-F238E27FC236}">
-                <a16:creationId xmlns:a16="http://schemas.microsoft.com/office/drawing/2014/main" id="{67DC9051-E8DE-4005-A1BA-DE3D8876B524}"/>
+                <a16:creationId xmlns:a16="http://schemas.microsoft.com/office/drawing/2014/main" id="{F1D2DA00-8135-4FC2-8DD1-5ED1F949EC55}"/>
               </a:ext>
             </a:extLst>
           </p:cNvPr>
@@ -10132,7 +10132,7 @@
           <p:cNvPr id="4" name="">
             <a:extLst xmlns:a="http://schemas.openxmlformats.org/drawingml/2006/main">
               <a:ext uri="{FF2B5EF4-FFF2-40B4-BE49-F238E27FC236}">
-                <a16:creationId xmlns:a16="http://schemas.microsoft.com/office/drawing/2014/main" id="{B07D1D22-2985-4BD0-9147-DFD837A3C96C}"/>
+                <a16:creationId xmlns:a16="http://schemas.microsoft.com/office/drawing/2014/main" id="{937652AF-533C-46B0-936E-4DDE5982FAC1}"/>
               </a:ext>
             </a:extLst>
           </p:cNvPr>
@@ -10182,7 +10182,7 @@
           <p:cNvPr id="5" name="">
             <a:extLst xmlns:a="http://schemas.openxmlformats.org/drawingml/2006/main">
               <a:ext uri="{FF2B5EF4-FFF2-40B4-BE49-F238E27FC236}">
-                <a16:creationId xmlns:a16="http://schemas.microsoft.com/office/drawing/2014/main" id="{7058B5BE-8E57-437E-8D00-06743DD78FC1}"/>
+                <a16:creationId xmlns:a16="http://schemas.microsoft.com/office/drawing/2014/main" id="{D86C0F2D-5369-48DE-B292-43C5413DBC76}"/>
               </a:ext>
             </a:extLst>
           </p:cNvPr>
@@ -10232,7 +10232,7 @@
           <p:cNvPr id="6" name="">
             <a:extLst xmlns:a="http://schemas.openxmlformats.org/drawingml/2006/main">
               <a:ext uri="{FF2B5EF4-FFF2-40B4-BE49-F238E27FC236}">
-                <a16:creationId xmlns:a16="http://schemas.microsoft.com/office/drawing/2014/main" id="{346159A5-F43C-47B7-846E-7529ADD37A0B}"/>
+                <a16:creationId xmlns:a16="http://schemas.microsoft.com/office/drawing/2014/main" id="{DBA22544-F6E8-40A1-99A7-97BD1413F865}"/>
               </a:ext>
             </a:extLst>
           </p:cNvPr>
@@ -10282,7 +10282,7 @@
           <p:cNvPr id="7" name="">
             <a:extLst xmlns:a="http://schemas.openxmlformats.org/drawingml/2006/main">
               <a:ext uri="{FF2B5EF4-FFF2-40B4-BE49-F238E27FC236}">
-                <a16:creationId xmlns:a16="http://schemas.microsoft.com/office/drawing/2014/main" id="{0368F1B9-C0D3-4227-9C59-72276C5347EB}"/>
+                <a16:creationId xmlns:a16="http://schemas.microsoft.com/office/drawing/2014/main" id="{66837C75-E250-448F-8CC1-81F0EA41F4BA}"/>
               </a:ext>
             </a:extLst>
           </p:cNvPr>
@@ -10313,7 +10313,7 @@
           <p:cNvPr id="8" name="">
             <a:extLst xmlns:a="http://schemas.openxmlformats.org/drawingml/2006/main">
               <a:ext uri="{FF2B5EF4-FFF2-40B4-BE49-F238E27FC236}">
-                <a16:creationId xmlns:a16="http://schemas.microsoft.com/office/drawing/2014/main" id="{4D5285D0-C897-4DD2-8490-685683500199}"/>
+                <a16:creationId xmlns:a16="http://schemas.microsoft.com/office/drawing/2014/main" id="{F48A290B-F30C-48FA-9CC3-300B0EF9B466}"/>
               </a:ext>
             </a:extLst>
           </p:cNvPr>
@@ -10363,7 +10363,7 @@
           <p:cNvPr id="9" name="">
             <a:extLst xmlns:a="http://schemas.openxmlformats.org/drawingml/2006/main">
               <a:ext uri="{FF2B5EF4-FFF2-40B4-BE49-F238E27FC236}">
-                <a16:creationId xmlns:a16="http://schemas.microsoft.com/office/drawing/2014/main" id="{8432D533-DCAF-48F5-B0F3-BE5A377D6ABB}"/>
+                <a16:creationId xmlns:a16="http://schemas.microsoft.com/office/drawing/2014/main" id="{1A516C28-5D76-4721-BF70-C535191608A1}"/>
               </a:ext>
             </a:extLst>
           </p:cNvPr>
@@ -10413,7 +10413,7 @@
           <p:cNvPr id="10" name="">
             <a:extLst xmlns:a="http://schemas.openxmlformats.org/drawingml/2006/main">
               <a:ext uri="{FF2B5EF4-FFF2-40B4-BE49-F238E27FC236}">
-                <a16:creationId xmlns:a16="http://schemas.microsoft.com/office/drawing/2014/main" id="{726665ED-3FF7-45D8-AD72-27D998026D1E}"/>
+                <a16:creationId xmlns:a16="http://schemas.microsoft.com/office/drawing/2014/main" id="{94941702-B6A1-4DF5-974A-723D57DFF41F}"/>
               </a:ext>
             </a:extLst>
           </p:cNvPr>
@@ -10444,7 +10444,7 @@
           <p:cNvPr id="11" name="">
             <a:extLst xmlns:a="http://schemas.openxmlformats.org/drawingml/2006/main">
               <a:ext uri="{FF2B5EF4-FFF2-40B4-BE49-F238E27FC236}">
-                <a16:creationId xmlns:a16="http://schemas.microsoft.com/office/drawing/2014/main" id="{E0BEE000-23D1-457F-B1AE-DDA9DA10DB5D}"/>
+                <a16:creationId xmlns:a16="http://schemas.microsoft.com/office/drawing/2014/main" id="{4EDA2D85-3F9B-4AA6-B5B6-DBF722A2E122}"/>
               </a:ext>
             </a:extLst>
           </p:cNvPr>
@@ -10494,7 +10494,7 @@
           <p:cNvPr id="12" name="">
             <a:extLst xmlns:a="http://schemas.openxmlformats.org/drawingml/2006/main">
               <a:ext uri="{FF2B5EF4-FFF2-40B4-BE49-F238E27FC236}">
-                <a16:creationId xmlns:a16="http://schemas.microsoft.com/office/drawing/2014/main" id="{324A62C0-224F-4ED2-A645-E05AB1AAB782}"/>
+                <a16:creationId xmlns:a16="http://schemas.microsoft.com/office/drawing/2014/main" id="{AD340C7F-F4D1-402B-B31B-49A49F24DA1F}"/>
               </a:ext>
             </a:extLst>
           </p:cNvPr>
@@ -10544,7 +10544,7 @@
           <p:cNvPr id="13" name="">
             <a:extLst xmlns:a="http://schemas.openxmlformats.org/drawingml/2006/main">
               <a:ext uri="{FF2B5EF4-FFF2-40B4-BE49-F238E27FC236}">
-                <a16:creationId xmlns:a16="http://schemas.microsoft.com/office/drawing/2014/main" id="{2FA7C9FB-B430-4144-97B8-4EBC4E2745EB}"/>
+                <a16:creationId xmlns:a16="http://schemas.microsoft.com/office/drawing/2014/main" id="{1280E1E0-4F88-4641-98FB-BD649F4B9E64}"/>
               </a:ext>
             </a:extLst>
           </p:cNvPr>
@@ -10575,7 +10575,7 @@
           <p:cNvPr id="14" name="">
             <a:extLst xmlns:a="http://schemas.openxmlformats.org/drawingml/2006/main">
               <a:ext uri="{FF2B5EF4-FFF2-40B4-BE49-F238E27FC236}">
-                <a16:creationId xmlns:a16="http://schemas.microsoft.com/office/drawing/2014/main" id="{37B52FB1-754B-4227-8B67-D1AC58072707}"/>
+                <a16:creationId xmlns:a16="http://schemas.microsoft.com/office/drawing/2014/main" id="{927C0264-7C1E-408F-8AF4-BF346F231730}"/>
               </a:ext>
             </a:extLst>
           </p:cNvPr>
@@ -10625,7 +10625,7 @@
           <p:cNvPr id="15" name="">
             <a:extLst xmlns:a="http://schemas.openxmlformats.org/drawingml/2006/main">
               <a:ext uri="{FF2B5EF4-FFF2-40B4-BE49-F238E27FC236}">
-                <a16:creationId xmlns:a16="http://schemas.microsoft.com/office/drawing/2014/main" id="{C733B452-33F9-450C-A357-B74345DB580D}"/>
+                <a16:creationId xmlns:a16="http://schemas.microsoft.com/office/drawing/2014/main" id="{10F51C8C-3815-4750-BB05-4CBBE3068C20}"/>
               </a:ext>
             </a:extLst>
           </p:cNvPr>
@@ -10675,7 +10675,7 @@
           <p:cNvPr id="16" name="">
             <a:extLst xmlns:a="http://schemas.openxmlformats.org/drawingml/2006/main">
               <a:ext uri="{FF2B5EF4-FFF2-40B4-BE49-F238E27FC236}">
-                <a16:creationId xmlns:a16="http://schemas.microsoft.com/office/drawing/2014/main" id="{F879FD96-5D6E-4CDB-BCE7-9A57D9BC3FE2}"/>
+                <a16:creationId xmlns:a16="http://schemas.microsoft.com/office/drawing/2014/main" id="{C9AEC63A-FD5C-453C-8CD6-60CD5E7A6069}"/>
               </a:ext>
             </a:extLst>
           </p:cNvPr>
@@ -10706,7 +10706,7 @@
           <p:cNvPr id="17" name="">
             <a:extLst xmlns:a="http://schemas.openxmlformats.org/drawingml/2006/main">
               <a:ext uri="{FF2B5EF4-FFF2-40B4-BE49-F238E27FC236}">
-                <a16:creationId xmlns:a16="http://schemas.microsoft.com/office/drawing/2014/main" id="{A7E263F6-4CBA-4727-8901-87DD0F3118FA}"/>
+                <a16:creationId xmlns:a16="http://schemas.microsoft.com/office/drawing/2014/main" id="{D1723AA7-B375-477F-AB07-268AE8F2EFE5}"/>
               </a:ext>
             </a:extLst>
           </p:cNvPr>
@@ -10739,7 +10739,7 @@
           <p:cNvPr id="18" name="">
             <a:extLst xmlns:a="http://schemas.openxmlformats.org/drawingml/2006/main">
               <a:ext uri="{FF2B5EF4-FFF2-40B4-BE49-F238E27FC236}">
-                <a16:creationId xmlns:a16="http://schemas.microsoft.com/office/drawing/2014/main" id="{97C324D5-7739-45F1-84CA-5185298969CD}"/>
+                <a16:creationId xmlns:a16="http://schemas.microsoft.com/office/drawing/2014/main" id="{FEF20AA6-0E65-4BA0-8217-AA867FE18D93}"/>
               </a:ext>
             </a:extLst>
           </p:cNvPr>
@@ -10772,7 +10772,7 @@
           <p:cNvPr id="19" name="">
             <a:extLst xmlns:a="http://schemas.openxmlformats.org/drawingml/2006/main">
               <a:ext uri="{FF2B5EF4-FFF2-40B4-BE49-F238E27FC236}">
-                <a16:creationId xmlns:a16="http://schemas.microsoft.com/office/drawing/2014/main" id="{7F2A78E1-7F71-4F96-A824-3A7251817AE7}"/>
+                <a16:creationId xmlns:a16="http://schemas.microsoft.com/office/drawing/2014/main" id="{93B6DF69-081D-4B90-86C6-FD19C42EDCDF}"/>
               </a:ext>
             </a:extLst>
           </p:cNvPr>
@@ -10813,7 +10813,7 @@
           <p:cNvPr id="20" name="">
             <a:extLst xmlns:a="http://schemas.openxmlformats.org/drawingml/2006/main">
               <a:ext uri="{FF2B5EF4-FFF2-40B4-BE49-F238E27FC236}">
-                <a16:creationId xmlns:a16="http://schemas.microsoft.com/office/drawing/2014/main" id="{0EBF6D08-FEF7-4DB0-AD9F-71DDD46B7298}"/>
+                <a16:creationId xmlns:a16="http://schemas.microsoft.com/office/drawing/2014/main" id="{8EED23B5-0773-4A3A-AC6E-6E175D1178C9}"/>
               </a:ext>
             </a:extLst>
           </p:cNvPr>
@@ -10863,7 +10863,7 @@
           <p:cNvPr id="21" name="">
             <a:extLst xmlns:a="http://schemas.openxmlformats.org/drawingml/2006/main">
               <a:ext uri="{FF2B5EF4-FFF2-40B4-BE49-F238E27FC236}">
-                <a16:creationId xmlns:a16="http://schemas.microsoft.com/office/drawing/2014/main" id="{0C24A7B3-3904-4705-B25D-0C27F330D1E4}"/>
+                <a16:creationId xmlns:a16="http://schemas.microsoft.com/office/drawing/2014/main" id="{79E4F740-8365-4B46-A6FA-859377D5F35B}"/>
               </a:ext>
             </a:extLst>
           </p:cNvPr>
@@ -10947,7 +10947,7 @@
           <p:cNvPr id="22" name="">
             <a:extLst xmlns:a="http://schemas.openxmlformats.org/drawingml/2006/main">
               <a:ext uri="{FF2B5EF4-FFF2-40B4-BE49-F238E27FC236}">
-                <a16:creationId xmlns:a16="http://schemas.microsoft.com/office/drawing/2014/main" id="{6931E669-9848-435F-BCB3-F17D30369600}"/>
+                <a16:creationId xmlns:a16="http://schemas.microsoft.com/office/drawing/2014/main" id="{B7FC16EF-370C-4042-B77A-FE7F4B05B1B4}"/>
               </a:ext>
             </a:extLst>
           </p:cNvPr>
@@ -10988,7 +10988,7 @@
           <p:cNvPr id="23" name="">
             <a:extLst xmlns:a="http://schemas.openxmlformats.org/drawingml/2006/main">
               <a:ext uri="{FF2B5EF4-FFF2-40B4-BE49-F238E27FC236}">
-                <a16:creationId xmlns:a16="http://schemas.microsoft.com/office/drawing/2014/main" id="{7BC533BD-EBC3-4178-A1F6-10310F613174}"/>
+                <a16:creationId xmlns:a16="http://schemas.microsoft.com/office/drawing/2014/main" id="{A2543E8D-C76C-4378-8C70-6CB3AD1BED34}"/>
               </a:ext>
             </a:extLst>
           </p:cNvPr>
@@ -11038,7 +11038,7 @@
           <p:cNvPr id="24" name="">
             <a:extLst xmlns:a="http://schemas.openxmlformats.org/drawingml/2006/main">
               <a:ext uri="{FF2B5EF4-FFF2-40B4-BE49-F238E27FC236}">
-                <a16:creationId xmlns:a16="http://schemas.microsoft.com/office/drawing/2014/main" id="{A8FAA560-59E7-4BBB-8153-EEF50EE86CAD}"/>
+                <a16:creationId xmlns:a16="http://schemas.microsoft.com/office/drawing/2014/main" id="{8C5E981E-3684-4EDC-890A-D3FF2122BFF8}"/>
               </a:ext>
             </a:extLst>
           </p:cNvPr>
@@ -11122,7 +11122,7 @@
           <p:cNvPr id="25" name="">
             <a:extLst xmlns:a="http://schemas.openxmlformats.org/drawingml/2006/main">
               <a:ext uri="{FF2B5EF4-FFF2-40B4-BE49-F238E27FC236}">
-                <a16:creationId xmlns:a16="http://schemas.microsoft.com/office/drawing/2014/main" id="{4CDFF960-A402-4AA2-B537-7EB73841F54F}"/>
+                <a16:creationId xmlns:a16="http://schemas.microsoft.com/office/drawing/2014/main" id="{751B1260-DF46-4828-B92D-B2C29E05BEDE}"/>
               </a:ext>
             </a:extLst>
           </p:cNvPr>
@@ -11157,7 +11157,7 @@
           <p:cNvPr id="26" name="">
             <a:extLst xmlns:a="http://schemas.openxmlformats.org/drawingml/2006/main">
               <a:ext uri="{FF2B5EF4-FFF2-40B4-BE49-F238E27FC236}">
-                <a16:creationId xmlns:a16="http://schemas.microsoft.com/office/drawing/2014/main" id="{7738BA59-DA16-4CEC-9BDA-5743D9F5A5E4}"/>
+                <a16:creationId xmlns:a16="http://schemas.microsoft.com/office/drawing/2014/main" id="{B6547CB1-52FC-4436-9DBE-F5FC4BE55915}"/>
               </a:ext>
             </a:extLst>
           </p:cNvPr>
@@ -11207,7 +11207,7 @@
           <p:cNvPr id="27" name="">
             <a:extLst xmlns:a="http://schemas.openxmlformats.org/drawingml/2006/main">
               <a:ext uri="{FF2B5EF4-FFF2-40B4-BE49-F238E27FC236}">
-                <a16:creationId xmlns:a16="http://schemas.microsoft.com/office/drawing/2014/main" id="{389D771E-15EC-446D-8CAB-65FA75BEC395}"/>
+                <a16:creationId xmlns:a16="http://schemas.microsoft.com/office/drawing/2014/main" id="{C4387042-6B0B-4701-B898-EDC0B5A37C7C}"/>
               </a:ext>
             </a:extLst>
           </p:cNvPr>
@@ -11257,7 +11257,7 @@
           <p:cNvPr id="28" name="">
             <a:extLst xmlns:a="http://schemas.openxmlformats.org/drawingml/2006/main">
               <a:ext uri="{FF2B5EF4-FFF2-40B4-BE49-F238E27FC236}">
-                <a16:creationId xmlns:a16="http://schemas.microsoft.com/office/drawing/2014/main" id="{D6D4E34F-C313-493E-BA5C-B33400457DA8}"/>
+                <a16:creationId xmlns:a16="http://schemas.microsoft.com/office/drawing/2014/main" id="{20E05A06-5957-4BD6-A7F7-9AAD3AB3A093}"/>
               </a:ext>
             </a:extLst>
           </p:cNvPr>
@@ -11288,7 +11288,7 @@
           <p:cNvPr id="29" name="source-14">
             <a:extLst xmlns:a="http://schemas.openxmlformats.org/drawingml/2006/main">
               <a:ext uri="{FF2B5EF4-FFF2-40B4-BE49-F238E27FC236}">
-                <a16:creationId xmlns:a16="http://schemas.microsoft.com/office/drawing/2014/main" id="{C38E3676-326B-48AC-9CA8-4BBE30EE9FC1}"/>
+                <a16:creationId xmlns:a16="http://schemas.microsoft.com/office/drawing/2014/main" id="{93F53662-130E-413B-975B-D87C85E9E307}"/>
               </a:ext>
             </a:extLst>
           </p:cNvPr>
@@ -11338,7 +11338,7 @@
           <p:cNvPr id="30" name="page-14">
             <a:extLst xmlns:a="http://schemas.openxmlformats.org/drawingml/2006/main">
               <a:ext uri="{FF2B5EF4-FFF2-40B4-BE49-F238E27FC236}">
-                <a16:creationId xmlns:a16="http://schemas.microsoft.com/office/drawing/2014/main" id="{9DDC9A6A-EEE8-4142-831F-CAEDED524330}"/>
+                <a16:creationId xmlns:a16="http://schemas.microsoft.com/office/drawing/2014/main" id="{68315756-396F-4268-A6A1-DE3FE1C54A55}"/>
               </a:ext>
             </a:extLst>
           </p:cNvPr>
@@ -11386,7 +11386,7 @@
     </p:spTree>
     <p:extLst>
       <p:ext uri="{BB962C8B-B14F-4D97-AF65-F5344CB8AC3E}">
-        <p14:creationId xmlns:p14="http://schemas.microsoft.com/office/powerpoint/2010/main" val="2015375305"/>
+        <p14:creationId xmlns:p14="http://schemas.microsoft.com/office/powerpoint/2010/main" val="624765838"/>
       </p:ext>
     </p:extLst>
   </p:cSld>
@@ -11417,7 +11417,7 @@
           <p:cNvPr id="17" name="">
             <a:extLst xmlns:a="http://schemas.openxmlformats.org/drawingml/2006/main">
               <a:ext uri="{FF2B5EF4-FFF2-40B4-BE49-F238E27FC236}">
-                <a16:creationId xmlns:a16="http://schemas.microsoft.com/office/drawing/2014/main" id="{EAA4EA97-56E2-4887-A72C-C97B3CB592DA}"/>
+                <a16:creationId xmlns:a16="http://schemas.microsoft.com/office/drawing/2014/main" id="{33C6C590-AC8D-4D41-809E-7E46F3144D4D}"/>
               </a:ext>
             </a:extLst>
           </p:cNvPr>
@@ -11467,7 +11467,7 @@
           <p:cNvPr id="2" name="">
             <a:extLst xmlns:a="http://schemas.openxmlformats.org/drawingml/2006/main">
               <a:ext uri="{FF2B5EF4-FFF2-40B4-BE49-F238E27FC236}">
-                <a16:creationId xmlns:a16="http://schemas.microsoft.com/office/drawing/2014/main" id="{0607CF53-F2B2-4D66-ACDA-479A876D0428}"/>
+                <a16:creationId xmlns:a16="http://schemas.microsoft.com/office/drawing/2014/main" id="{7701A439-0284-41A8-82FA-93596169CFD0}"/>
               </a:ext>
             </a:extLst>
           </p:cNvPr>
@@ -11534,7 +11534,7 @@
           <p:cNvPr id="3" name="">
             <a:extLst xmlns:a="http://schemas.openxmlformats.org/drawingml/2006/main">
               <a:ext uri="{FF2B5EF4-FFF2-40B4-BE49-F238E27FC236}">
-                <a16:creationId xmlns:a16="http://schemas.microsoft.com/office/drawing/2014/main" id="{3D1A3775-938A-48EB-949C-3F4CD8D4602A}"/>
+                <a16:creationId xmlns:a16="http://schemas.microsoft.com/office/drawing/2014/main" id="{E39312FA-DAE7-402C-9B1B-72ABD0FA420F}"/>
               </a:ext>
             </a:extLst>
           </p:cNvPr>
@@ -11575,7 +11575,7 @@
           <p:cNvPr id="4" name="">
             <a:extLst xmlns:a="http://schemas.openxmlformats.org/drawingml/2006/main">
               <a:ext uri="{FF2B5EF4-FFF2-40B4-BE49-F238E27FC236}">
-                <a16:creationId xmlns:a16="http://schemas.microsoft.com/office/drawing/2014/main" id="{57F20F22-EA22-4067-BB7A-7E3A30B117CD}"/>
+                <a16:creationId xmlns:a16="http://schemas.microsoft.com/office/drawing/2014/main" id="{9C9F5B7B-F077-4CFB-99B4-3607107AEA6E}"/>
               </a:ext>
             </a:extLst>
           </p:cNvPr>
@@ -11625,7 +11625,7 @@
           <p:cNvPr id="5" name="">
             <a:extLst xmlns:a="http://schemas.openxmlformats.org/drawingml/2006/main">
               <a:ext uri="{FF2B5EF4-FFF2-40B4-BE49-F238E27FC236}">
-                <a16:creationId xmlns:a16="http://schemas.microsoft.com/office/drawing/2014/main" id="{F8DF7111-172B-4E08-9CD0-C88B032FF15C}"/>
+                <a16:creationId xmlns:a16="http://schemas.microsoft.com/office/drawing/2014/main" id="{A34508EC-ADC8-47BD-944D-F8E4B8A94CBA}"/>
               </a:ext>
             </a:extLst>
           </p:cNvPr>
@@ -11709,7 +11709,7 @@
           <p:cNvPr id="6" name="">
             <a:extLst xmlns:a="http://schemas.openxmlformats.org/drawingml/2006/main">
               <a:ext uri="{FF2B5EF4-FFF2-40B4-BE49-F238E27FC236}">
-                <a16:creationId xmlns:a16="http://schemas.microsoft.com/office/drawing/2014/main" id="{61735506-3A2E-45D2-A89C-FE1730FCA7F5}"/>
+                <a16:creationId xmlns:a16="http://schemas.microsoft.com/office/drawing/2014/main" id="{6C419DA7-6A87-4599-97A5-DC8565EA9D06}"/>
               </a:ext>
             </a:extLst>
           </p:cNvPr>
@@ -11750,7 +11750,7 @@
           <p:cNvPr id="7" name="">
             <a:extLst xmlns:a="http://schemas.openxmlformats.org/drawingml/2006/main">
               <a:ext uri="{FF2B5EF4-FFF2-40B4-BE49-F238E27FC236}">
-                <a16:creationId xmlns:a16="http://schemas.microsoft.com/office/drawing/2014/main" id="{531C97A3-70DC-43B2-879B-CC23B61D7EED}"/>
+                <a16:creationId xmlns:a16="http://schemas.microsoft.com/office/drawing/2014/main" id="{6D87793E-5438-4392-A581-FB5DDAEC7C1C}"/>
               </a:ext>
             </a:extLst>
           </p:cNvPr>
@@ -11800,7 +11800,7 @@
           <p:cNvPr id="8" name="">
             <a:extLst xmlns:a="http://schemas.openxmlformats.org/drawingml/2006/main">
               <a:ext uri="{FF2B5EF4-FFF2-40B4-BE49-F238E27FC236}">
-                <a16:creationId xmlns:a16="http://schemas.microsoft.com/office/drawing/2014/main" id="{D24C6AB5-DFFD-44E1-9D2B-1F0336A40685}"/>
+                <a16:creationId xmlns:a16="http://schemas.microsoft.com/office/drawing/2014/main" id="{F9D7D7CC-E901-4166-8780-28A3997F008B}"/>
               </a:ext>
             </a:extLst>
           </p:cNvPr>
@@ -11884,7 +11884,7 @@
           <p:cNvPr id="9" name="">
             <a:extLst xmlns:a="http://schemas.openxmlformats.org/drawingml/2006/main">
               <a:ext uri="{FF2B5EF4-FFF2-40B4-BE49-F238E27FC236}">
-                <a16:creationId xmlns:a16="http://schemas.microsoft.com/office/drawing/2014/main" id="{22AADD0A-27CC-428D-BDAA-EE2BC6F3FC3B}"/>
+                <a16:creationId xmlns:a16="http://schemas.microsoft.com/office/drawing/2014/main" id="{8DE7FAC4-CFA3-447F-9C4E-1476C1FCDEB3}"/>
               </a:ext>
             </a:extLst>
           </p:cNvPr>
@@ -11925,7 +11925,7 @@
           <p:cNvPr id="10" name="">
             <a:extLst xmlns:a="http://schemas.openxmlformats.org/drawingml/2006/main">
               <a:ext uri="{FF2B5EF4-FFF2-40B4-BE49-F238E27FC236}">
-                <a16:creationId xmlns:a16="http://schemas.microsoft.com/office/drawing/2014/main" id="{E2BE4B63-E0A7-4B2B-BB9A-8F9CA32703E0}"/>
+                <a16:creationId xmlns:a16="http://schemas.microsoft.com/office/drawing/2014/main" id="{9E87CC63-2335-46D0-A6C8-2AD8472D2D98}"/>
               </a:ext>
             </a:extLst>
           </p:cNvPr>
@@ -11975,7 +11975,7 @@
           <p:cNvPr id="11" name="">
             <a:extLst xmlns:a="http://schemas.openxmlformats.org/drawingml/2006/main">
               <a:ext uri="{FF2B5EF4-FFF2-40B4-BE49-F238E27FC236}">
-                <a16:creationId xmlns:a16="http://schemas.microsoft.com/office/drawing/2014/main" id="{AD4BEC74-1BA4-434C-91F2-7462CF82D68F}"/>
+                <a16:creationId xmlns:a16="http://schemas.microsoft.com/office/drawing/2014/main" id="{538A2B92-C66B-49B4-9A54-4B7E3F42E171}"/>
               </a:ext>
             </a:extLst>
           </p:cNvPr>
@@ -12059,7 +12059,7 @@
           <p:cNvPr id="12" name="">
             <a:extLst xmlns:a="http://schemas.openxmlformats.org/drawingml/2006/main">
               <a:ext uri="{FF2B5EF4-FFF2-40B4-BE49-F238E27FC236}">
-                <a16:creationId xmlns:a16="http://schemas.microsoft.com/office/drawing/2014/main" id="{786A9C44-CD17-4F83-A08A-C4AB13DB389C}"/>
+                <a16:creationId xmlns:a16="http://schemas.microsoft.com/office/drawing/2014/main" id="{8744B878-38BB-41E7-9CDB-A47574C43C45}"/>
               </a:ext>
             </a:extLst>
           </p:cNvPr>
@@ -12109,7 +12109,7 @@
           <p:cNvPr id="13" name="">
             <a:extLst xmlns:a="http://schemas.openxmlformats.org/drawingml/2006/main">
               <a:ext uri="{FF2B5EF4-FFF2-40B4-BE49-F238E27FC236}">
-                <a16:creationId xmlns:a16="http://schemas.microsoft.com/office/drawing/2014/main" id="{9C5BBF95-AF3A-4FD8-8F83-E1523A5B0A86}"/>
+                <a16:creationId xmlns:a16="http://schemas.microsoft.com/office/drawing/2014/main" id="{B5222930-A972-4E65-8A69-CFE761388F8B}"/>
               </a:ext>
             </a:extLst>
           </p:cNvPr>
@@ -12159,7 +12159,7 @@
           <p:cNvPr id="14" name="">
             <a:extLst xmlns:a="http://schemas.openxmlformats.org/drawingml/2006/main">
               <a:ext uri="{FF2B5EF4-FFF2-40B4-BE49-F238E27FC236}">
-                <a16:creationId xmlns:a16="http://schemas.microsoft.com/office/drawing/2014/main" id="{2A13EE44-AB9C-4728-B205-D88F3A439212}"/>
+                <a16:creationId xmlns:a16="http://schemas.microsoft.com/office/drawing/2014/main" id="{F8781430-71AC-4AC8-AAE8-227D6612A7A4}"/>
               </a:ext>
             </a:extLst>
           </p:cNvPr>
@@ -12190,7 +12190,7 @@
           <p:cNvPr id="15" name="">
             <a:extLst xmlns:a="http://schemas.openxmlformats.org/drawingml/2006/main">
               <a:ext uri="{FF2B5EF4-FFF2-40B4-BE49-F238E27FC236}">
-                <a16:creationId xmlns:a16="http://schemas.microsoft.com/office/drawing/2014/main" id="{C98790EC-F6C2-42E0-A2A2-42F668B90E81}"/>
+                <a16:creationId xmlns:a16="http://schemas.microsoft.com/office/drawing/2014/main" id="{9D17B9C4-5AFB-4BEB-9DA4-65B1E25650A8}"/>
               </a:ext>
             </a:extLst>
           </p:cNvPr>
@@ -12240,7 +12240,7 @@
           <p:cNvPr id="16" name="">
             <a:extLst xmlns:a="http://schemas.openxmlformats.org/drawingml/2006/main">
               <a:ext uri="{FF2B5EF4-FFF2-40B4-BE49-F238E27FC236}">
-                <a16:creationId xmlns:a16="http://schemas.microsoft.com/office/drawing/2014/main" id="{EF66B6C3-9D25-4A10-ADC9-E718D4AEFEF2}"/>
+                <a16:creationId xmlns:a16="http://schemas.microsoft.com/office/drawing/2014/main" id="{37D8D58A-E0D4-4368-A6D1-D7F564E3069C}"/>
               </a:ext>
             </a:extLst>
           </p:cNvPr>
@@ -12288,7 +12288,7 @@
     </p:spTree>
     <p:extLst>
       <p:ext uri="{BB962C8B-B14F-4D97-AF65-F5344CB8AC3E}">
-        <p14:creationId xmlns:p14="http://schemas.microsoft.com/office/powerpoint/2010/main" val="310306253"/>
+        <p14:creationId xmlns:p14="http://schemas.microsoft.com/office/powerpoint/2010/main" val="1877395611"/>
       </p:ext>
     </p:extLst>
   </p:cSld>
@@ -12319,7 +12319,7 @@
           <p:cNvPr id="30" name="kicker-2">
             <a:extLst xmlns:a="http://schemas.openxmlformats.org/drawingml/2006/main">
               <a:ext uri="{FF2B5EF4-FFF2-40B4-BE49-F238E27FC236}">
-                <a16:creationId xmlns:a16="http://schemas.microsoft.com/office/drawing/2014/main" id="{DCADB9DD-228E-4341-9CE3-FC086C5E522B}"/>
+                <a16:creationId xmlns:a16="http://schemas.microsoft.com/office/drawing/2014/main" id="{8A1BB54D-40A7-4131-AA8F-94E7A2D7F3CB}"/>
               </a:ext>
             </a:extLst>
           </p:cNvPr>
@@ -12369,7 +12369,7 @@
           <p:cNvPr id="2" name="title-2">
             <a:extLst xmlns:a="http://schemas.openxmlformats.org/drawingml/2006/main">
               <a:ext uri="{FF2B5EF4-FFF2-40B4-BE49-F238E27FC236}">
-                <a16:creationId xmlns:a16="http://schemas.microsoft.com/office/drawing/2014/main" id="{E4295CBB-A57C-4788-B5B7-77BE147AD321}"/>
+                <a16:creationId xmlns:a16="http://schemas.microsoft.com/office/drawing/2014/main" id="{060DC2FB-6889-42E5-93C7-9FF171D9D7DA}"/>
               </a:ext>
             </a:extLst>
           </p:cNvPr>
@@ -12419,7 +12419,7 @@
           <p:cNvPr id="3" name="">
             <a:extLst xmlns:a="http://schemas.openxmlformats.org/drawingml/2006/main">
               <a:ext uri="{FF2B5EF4-FFF2-40B4-BE49-F238E27FC236}">
-                <a16:creationId xmlns:a16="http://schemas.microsoft.com/office/drawing/2014/main" id="{DA315E02-8E34-48FC-AA7A-AFD38C3410DE}"/>
+                <a16:creationId xmlns:a16="http://schemas.microsoft.com/office/drawing/2014/main" id="{EDB27EDC-74EF-4A95-9558-F53C6B6DE7C0}"/>
               </a:ext>
             </a:extLst>
           </p:cNvPr>
@@ -12450,7 +12450,7 @@
           <p:cNvPr id="4" name="">
             <a:extLst xmlns:a="http://schemas.openxmlformats.org/drawingml/2006/main">
               <a:ext uri="{FF2B5EF4-FFF2-40B4-BE49-F238E27FC236}">
-                <a16:creationId xmlns:a16="http://schemas.microsoft.com/office/drawing/2014/main" id="{622C3178-6D56-4103-A02D-A05BAE295222}"/>
+                <a16:creationId xmlns:a16="http://schemas.microsoft.com/office/drawing/2014/main" id="{09A126D8-0CCA-4EDD-9F5D-B10DE4601137}"/>
               </a:ext>
             </a:extLst>
           </p:cNvPr>
@@ -12500,7 +12500,7 @@
           <p:cNvPr id="5" name="">
             <a:extLst xmlns:a="http://schemas.openxmlformats.org/drawingml/2006/main">
               <a:ext uri="{FF2B5EF4-FFF2-40B4-BE49-F238E27FC236}">
-                <a16:creationId xmlns:a16="http://schemas.microsoft.com/office/drawing/2014/main" id="{36D7D194-2A59-4E0F-947B-AB48D5B3518F}"/>
+                <a16:creationId xmlns:a16="http://schemas.microsoft.com/office/drawing/2014/main" id="{6143A4ED-172B-4B5C-B499-167E92C9E556}"/>
               </a:ext>
             </a:extLst>
           </p:cNvPr>
@@ -12531,7 +12531,7 @@
           <p:cNvPr id="6" name="">
             <a:extLst xmlns:a="http://schemas.openxmlformats.org/drawingml/2006/main">
               <a:ext uri="{FF2B5EF4-FFF2-40B4-BE49-F238E27FC236}">
-                <a16:creationId xmlns:a16="http://schemas.microsoft.com/office/drawing/2014/main" id="{BA4BA442-0DEF-4F38-8614-EB22AFA2BDC2}"/>
+                <a16:creationId xmlns:a16="http://schemas.microsoft.com/office/drawing/2014/main" id="{D41AEE24-4490-427E-A8BF-D65DEEE6DEAA}"/>
               </a:ext>
             </a:extLst>
           </p:cNvPr>
@@ -12564,7 +12564,7 @@
           <p:cNvPr id="7" name="">
             <a:extLst xmlns:a="http://schemas.openxmlformats.org/drawingml/2006/main">
               <a:ext uri="{FF2B5EF4-FFF2-40B4-BE49-F238E27FC236}">
-                <a16:creationId xmlns:a16="http://schemas.microsoft.com/office/drawing/2014/main" id="{5B635084-AF76-4A31-AF3C-B7E431DFD184}"/>
+                <a16:creationId xmlns:a16="http://schemas.microsoft.com/office/drawing/2014/main" id="{AC6F6B49-4715-459D-9FF5-68AD69FACA12}"/>
               </a:ext>
             </a:extLst>
           </p:cNvPr>
@@ -12614,7 +12614,7 @@
           <p:cNvPr id="8" name="">
             <a:extLst xmlns:a="http://schemas.openxmlformats.org/drawingml/2006/main">
               <a:ext uri="{FF2B5EF4-FFF2-40B4-BE49-F238E27FC236}">
-                <a16:creationId xmlns:a16="http://schemas.microsoft.com/office/drawing/2014/main" id="{99BB40BF-B2A8-4617-835D-6FE10E7D2D0E}"/>
+                <a16:creationId xmlns:a16="http://schemas.microsoft.com/office/drawing/2014/main" id="{4992E8A9-6E74-48F0-8DF7-C045EF311DA8}"/>
               </a:ext>
             </a:extLst>
           </p:cNvPr>
@@ -12664,7 +12664,7 @@
           <p:cNvPr id="9" name="">
             <a:extLst xmlns:a="http://schemas.openxmlformats.org/drawingml/2006/main">
               <a:ext uri="{FF2B5EF4-FFF2-40B4-BE49-F238E27FC236}">
-                <a16:creationId xmlns:a16="http://schemas.microsoft.com/office/drawing/2014/main" id="{69D05B20-C0D3-4534-826B-BB7418A2C20E}"/>
+                <a16:creationId xmlns:a16="http://schemas.microsoft.com/office/drawing/2014/main" id="{320B7F74-FF4A-47B0-876E-66FE96C6ED56}"/>
               </a:ext>
             </a:extLst>
           </p:cNvPr>
@@ -12697,7 +12697,7 @@
           <p:cNvPr id="10" name="">
             <a:extLst xmlns:a="http://schemas.openxmlformats.org/drawingml/2006/main">
               <a:ext uri="{FF2B5EF4-FFF2-40B4-BE49-F238E27FC236}">
-                <a16:creationId xmlns:a16="http://schemas.microsoft.com/office/drawing/2014/main" id="{A4F39F8A-CE5C-4DEA-BE05-A6BBC3BC1D79}"/>
+                <a16:creationId xmlns:a16="http://schemas.microsoft.com/office/drawing/2014/main" id="{32FE9981-E1C6-47F2-AE38-42D01F71B9EA}"/>
               </a:ext>
             </a:extLst>
           </p:cNvPr>
@@ -12747,7 +12747,7 @@
           <p:cNvPr id="11" name="">
             <a:extLst xmlns:a="http://schemas.openxmlformats.org/drawingml/2006/main">
               <a:ext uri="{FF2B5EF4-FFF2-40B4-BE49-F238E27FC236}">
-                <a16:creationId xmlns:a16="http://schemas.microsoft.com/office/drawing/2014/main" id="{9256767C-1608-461D-BBD5-02EBDD6A3AFA}"/>
+                <a16:creationId xmlns:a16="http://schemas.microsoft.com/office/drawing/2014/main" id="{4A21850A-91D2-4E7B-893D-C329867B3676}"/>
               </a:ext>
             </a:extLst>
           </p:cNvPr>
@@ -12797,7 +12797,7 @@
           <p:cNvPr id="12" name="">
             <a:extLst xmlns:a="http://schemas.openxmlformats.org/drawingml/2006/main">
               <a:ext uri="{FF2B5EF4-FFF2-40B4-BE49-F238E27FC236}">
-                <a16:creationId xmlns:a16="http://schemas.microsoft.com/office/drawing/2014/main" id="{44F38037-96A5-4931-912A-BFF603BE6AA1}"/>
+                <a16:creationId xmlns:a16="http://schemas.microsoft.com/office/drawing/2014/main" id="{374201EA-216B-4CD8-92B0-E03D008B68F9}"/>
               </a:ext>
             </a:extLst>
           </p:cNvPr>
@@ -12830,7 +12830,7 @@
           <p:cNvPr id="13" name="">
             <a:extLst xmlns:a="http://schemas.openxmlformats.org/drawingml/2006/main">
               <a:ext uri="{FF2B5EF4-FFF2-40B4-BE49-F238E27FC236}">
-                <a16:creationId xmlns:a16="http://schemas.microsoft.com/office/drawing/2014/main" id="{38C7B6CC-819B-4B3B-BB00-6D87040097CF}"/>
+                <a16:creationId xmlns:a16="http://schemas.microsoft.com/office/drawing/2014/main" id="{D6667195-88F4-42D3-9089-212D43C279C1}"/>
               </a:ext>
             </a:extLst>
           </p:cNvPr>
@@ -12880,7 +12880,7 @@
           <p:cNvPr id="14" name="">
             <a:extLst xmlns:a="http://schemas.openxmlformats.org/drawingml/2006/main">
               <a:ext uri="{FF2B5EF4-FFF2-40B4-BE49-F238E27FC236}">
-                <a16:creationId xmlns:a16="http://schemas.microsoft.com/office/drawing/2014/main" id="{49D011EF-2DCE-4D82-8591-DB0072B8FAB8}"/>
+                <a16:creationId xmlns:a16="http://schemas.microsoft.com/office/drawing/2014/main" id="{1587C96D-B992-4EB6-83D5-52416EBF641E}"/>
               </a:ext>
             </a:extLst>
           </p:cNvPr>
@@ -12930,7 +12930,7 @@
           <p:cNvPr id="15" name="">
             <a:extLst xmlns:a="http://schemas.openxmlformats.org/drawingml/2006/main">
               <a:ext uri="{FF2B5EF4-FFF2-40B4-BE49-F238E27FC236}">
-                <a16:creationId xmlns:a16="http://schemas.microsoft.com/office/drawing/2014/main" id="{C1D5B4FE-D003-4D93-B365-A1FB9B39DE26}"/>
+                <a16:creationId xmlns:a16="http://schemas.microsoft.com/office/drawing/2014/main" id="{76FFA939-AB49-47F6-BFDA-ABD5021665C3}"/>
               </a:ext>
             </a:extLst>
           </p:cNvPr>
@@ -12963,7 +12963,7 @@
           <p:cNvPr id="16" name="">
             <a:extLst xmlns:a="http://schemas.openxmlformats.org/drawingml/2006/main">
               <a:ext uri="{FF2B5EF4-FFF2-40B4-BE49-F238E27FC236}">
-                <a16:creationId xmlns:a16="http://schemas.microsoft.com/office/drawing/2014/main" id="{10270F6E-5DDB-44AE-9280-985C5F315B87}"/>
+                <a16:creationId xmlns:a16="http://schemas.microsoft.com/office/drawing/2014/main" id="{E46BDF94-898E-4674-9B9C-DF712B9BA9E0}"/>
               </a:ext>
             </a:extLst>
           </p:cNvPr>
@@ -13013,7 +13013,7 @@
           <p:cNvPr id="17" name="">
             <a:extLst xmlns:a="http://schemas.openxmlformats.org/drawingml/2006/main">
               <a:ext uri="{FF2B5EF4-FFF2-40B4-BE49-F238E27FC236}">
-                <a16:creationId xmlns:a16="http://schemas.microsoft.com/office/drawing/2014/main" id="{4E8D6B65-DDAF-4140-A200-F0C9F870505E}"/>
+                <a16:creationId xmlns:a16="http://schemas.microsoft.com/office/drawing/2014/main" id="{6C84E3DB-508A-4453-9836-8F88E0BA42D0}"/>
               </a:ext>
             </a:extLst>
           </p:cNvPr>
@@ -13063,7 +13063,7 @@
           <p:cNvPr id="18" name="">
             <a:extLst xmlns:a="http://schemas.openxmlformats.org/drawingml/2006/main">
               <a:ext uri="{FF2B5EF4-FFF2-40B4-BE49-F238E27FC236}">
-                <a16:creationId xmlns:a16="http://schemas.microsoft.com/office/drawing/2014/main" id="{13674B16-6E6D-4457-9E05-5C746E4B7ECC}"/>
+                <a16:creationId xmlns:a16="http://schemas.microsoft.com/office/drawing/2014/main" id="{7BEEA1AE-8476-42EF-8289-A342032A6327}"/>
               </a:ext>
             </a:extLst>
           </p:cNvPr>
@@ -13096,7 +13096,7 @@
           <p:cNvPr id="19" name="">
             <a:extLst xmlns:a="http://schemas.openxmlformats.org/drawingml/2006/main">
               <a:ext uri="{FF2B5EF4-FFF2-40B4-BE49-F238E27FC236}">
-                <a16:creationId xmlns:a16="http://schemas.microsoft.com/office/drawing/2014/main" id="{B88AD7FA-1EE6-4A02-9A14-13C6F102FF1C}"/>
+                <a16:creationId xmlns:a16="http://schemas.microsoft.com/office/drawing/2014/main" id="{B6D57B8E-E03A-4013-A238-D6A167A3BF1A}"/>
               </a:ext>
             </a:extLst>
           </p:cNvPr>
@@ -13146,7 +13146,7 @@
           <p:cNvPr id="20" name="">
             <a:extLst xmlns:a="http://schemas.openxmlformats.org/drawingml/2006/main">
               <a:ext uri="{FF2B5EF4-FFF2-40B4-BE49-F238E27FC236}">
-                <a16:creationId xmlns:a16="http://schemas.microsoft.com/office/drawing/2014/main" id="{3F7B34FC-58BA-4606-B3DA-354032CEC1C1}"/>
+                <a16:creationId xmlns:a16="http://schemas.microsoft.com/office/drawing/2014/main" id="{D22F9F81-FB8E-4DF4-9B98-7B8D41E98F78}"/>
               </a:ext>
             </a:extLst>
           </p:cNvPr>
@@ -13196,7 +13196,7 @@
           <p:cNvPr id="21" name="">
             <a:extLst xmlns:a="http://schemas.openxmlformats.org/drawingml/2006/main">
               <a:ext uri="{FF2B5EF4-FFF2-40B4-BE49-F238E27FC236}">
-                <a16:creationId xmlns:a16="http://schemas.microsoft.com/office/drawing/2014/main" id="{CC28B880-2191-4DC6-9D72-57B9ABFB644A}"/>
+                <a16:creationId xmlns:a16="http://schemas.microsoft.com/office/drawing/2014/main" id="{81EC5322-2D30-4D7E-B95B-5C8F6DD955BF}"/>
               </a:ext>
             </a:extLst>
           </p:cNvPr>
@@ -13229,7 +13229,7 @@
           <p:cNvPr id="22" name="">
             <a:extLst xmlns:a="http://schemas.openxmlformats.org/drawingml/2006/main">
               <a:ext uri="{FF2B5EF4-FFF2-40B4-BE49-F238E27FC236}">
-                <a16:creationId xmlns:a16="http://schemas.microsoft.com/office/drawing/2014/main" id="{9326E735-F06D-4AAF-B87E-809AEFA0C1D6}"/>
+                <a16:creationId xmlns:a16="http://schemas.microsoft.com/office/drawing/2014/main" id="{F412CAF1-26A9-40F4-B12A-5C3756E349FB}"/>
               </a:ext>
             </a:extLst>
           </p:cNvPr>
@@ -13279,7 +13279,7 @@
           <p:cNvPr id="23" name="">
             <a:extLst xmlns:a="http://schemas.openxmlformats.org/drawingml/2006/main">
               <a:ext uri="{FF2B5EF4-FFF2-40B4-BE49-F238E27FC236}">
-                <a16:creationId xmlns:a16="http://schemas.microsoft.com/office/drawing/2014/main" id="{4EAF388B-0316-464B-B2D3-3413018B8BFB}"/>
+                <a16:creationId xmlns:a16="http://schemas.microsoft.com/office/drawing/2014/main" id="{CA05B86D-0377-4D0C-9038-E0680F05CF80}"/>
               </a:ext>
             </a:extLst>
           </p:cNvPr>
@@ -13329,7 +13329,7 @@
           <p:cNvPr id="24" name="">
             <a:extLst xmlns:a="http://schemas.openxmlformats.org/drawingml/2006/main">
               <a:ext uri="{FF2B5EF4-FFF2-40B4-BE49-F238E27FC236}">
-                <a16:creationId xmlns:a16="http://schemas.microsoft.com/office/drawing/2014/main" id="{7A1012C6-FF66-4EF6-9AEF-6450055CC780}"/>
+                <a16:creationId xmlns:a16="http://schemas.microsoft.com/office/drawing/2014/main" id="{D56080C3-CF35-4B55-9639-3E2776C3C9C4}"/>
               </a:ext>
             </a:extLst>
           </p:cNvPr>
@@ -13370,7 +13370,7 @@
           <p:cNvPr id="25" name="">
             <a:extLst xmlns:a="http://schemas.openxmlformats.org/drawingml/2006/main">
               <a:ext uri="{FF2B5EF4-FFF2-40B4-BE49-F238E27FC236}">
-                <a16:creationId xmlns:a16="http://schemas.microsoft.com/office/drawing/2014/main" id="{E62533B5-9F40-47C9-9FDB-FC45EB1D8E19}"/>
+                <a16:creationId xmlns:a16="http://schemas.microsoft.com/office/drawing/2014/main" id="{D2A535F5-EB34-4C5B-985D-9B257F9AA4FC}"/>
               </a:ext>
             </a:extLst>
           </p:cNvPr>
@@ -13420,7 +13420,7 @@
           <p:cNvPr id="26" name="">
             <a:extLst xmlns:a="http://schemas.openxmlformats.org/drawingml/2006/main">
               <a:ext uri="{FF2B5EF4-FFF2-40B4-BE49-F238E27FC236}">
-                <a16:creationId xmlns:a16="http://schemas.microsoft.com/office/drawing/2014/main" id="{DADFC95C-3B0B-4FBE-A116-8128AB46F881}"/>
+                <a16:creationId xmlns:a16="http://schemas.microsoft.com/office/drawing/2014/main" id="{BD307A9F-B5EB-417D-8907-D4BAF2600034}"/>
               </a:ext>
             </a:extLst>
           </p:cNvPr>
@@ -13470,7 +13470,7 @@
           <p:cNvPr id="27" name="">
             <a:extLst xmlns:a="http://schemas.openxmlformats.org/drawingml/2006/main">
               <a:ext uri="{FF2B5EF4-FFF2-40B4-BE49-F238E27FC236}">
-                <a16:creationId xmlns:a16="http://schemas.microsoft.com/office/drawing/2014/main" id="{F98560D1-C01C-4D6E-9696-1987AF4CC4B6}"/>
+                <a16:creationId xmlns:a16="http://schemas.microsoft.com/office/drawing/2014/main" id="{7F0C4C40-3F59-44C4-B185-9D0119689C2C}"/>
               </a:ext>
             </a:extLst>
           </p:cNvPr>
@@ -13501,7 +13501,7 @@
           <p:cNvPr id="28" name="source-2">
             <a:extLst xmlns:a="http://schemas.openxmlformats.org/drawingml/2006/main">
               <a:ext uri="{FF2B5EF4-FFF2-40B4-BE49-F238E27FC236}">
-                <a16:creationId xmlns:a16="http://schemas.microsoft.com/office/drawing/2014/main" id="{EF4A0242-4032-4D4A-9EAE-6D1AC47B3E13}"/>
+                <a16:creationId xmlns:a16="http://schemas.microsoft.com/office/drawing/2014/main" id="{0F979E75-7588-4B51-B64C-055E8C570851}"/>
               </a:ext>
             </a:extLst>
           </p:cNvPr>
@@ -13551,7 +13551,7 @@
           <p:cNvPr id="29" name="page-2">
             <a:extLst xmlns:a="http://schemas.openxmlformats.org/drawingml/2006/main">
               <a:ext uri="{FF2B5EF4-FFF2-40B4-BE49-F238E27FC236}">
-                <a16:creationId xmlns:a16="http://schemas.microsoft.com/office/drawing/2014/main" id="{298227C0-EF5E-4FD9-8C72-80A910353FDD}"/>
+                <a16:creationId xmlns:a16="http://schemas.microsoft.com/office/drawing/2014/main" id="{D99FF97B-59FE-470A-86EE-87C88F7A5130}"/>
               </a:ext>
             </a:extLst>
           </p:cNvPr>
@@ -13599,7 +13599,7 @@
     </p:spTree>
     <p:extLst>
       <p:ext uri="{BB962C8B-B14F-4D97-AF65-F5344CB8AC3E}">
-        <p14:creationId xmlns:p14="http://schemas.microsoft.com/office/powerpoint/2010/main" val="1644943122"/>
+        <p14:creationId xmlns:p14="http://schemas.microsoft.com/office/powerpoint/2010/main" val="2118966615"/>
       </p:ext>
     </p:extLst>
   </p:cSld>
@@ -13630,7 +13630,7 @@
           <p:cNvPr id="30" name="kicker-3">
             <a:extLst xmlns:a="http://schemas.openxmlformats.org/drawingml/2006/main">
               <a:ext uri="{FF2B5EF4-FFF2-40B4-BE49-F238E27FC236}">
-                <a16:creationId xmlns:a16="http://schemas.microsoft.com/office/drawing/2014/main" id="{22D880ED-10CC-4BEE-BA91-47A5ED67E3D1}"/>
+                <a16:creationId xmlns:a16="http://schemas.microsoft.com/office/drawing/2014/main" id="{B61467C4-E471-42F4-B02A-78A4F4875D79}"/>
               </a:ext>
             </a:extLst>
           </p:cNvPr>
@@ -13680,7 +13680,7 @@
           <p:cNvPr id="2" name="title-3">
             <a:extLst xmlns:a="http://schemas.openxmlformats.org/drawingml/2006/main">
               <a:ext uri="{FF2B5EF4-FFF2-40B4-BE49-F238E27FC236}">
-                <a16:creationId xmlns:a16="http://schemas.microsoft.com/office/drawing/2014/main" id="{F777AD0E-3BB7-4C9D-88AC-875166229A12}"/>
+                <a16:creationId xmlns:a16="http://schemas.microsoft.com/office/drawing/2014/main" id="{BE17C739-6F38-4040-B03A-1D3284D95192}"/>
               </a:ext>
             </a:extLst>
           </p:cNvPr>
@@ -13730,7 +13730,7 @@
           <p:cNvPr id="3" name="">
             <a:extLst xmlns:a="http://schemas.openxmlformats.org/drawingml/2006/main">
               <a:ext uri="{FF2B5EF4-FFF2-40B4-BE49-F238E27FC236}">
-                <a16:creationId xmlns:a16="http://schemas.microsoft.com/office/drawing/2014/main" id="{0AE714CA-9362-44BC-A990-87F984A26F82}"/>
+                <a16:creationId xmlns:a16="http://schemas.microsoft.com/office/drawing/2014/main" id="{FD940233-DFD4-4E34-8BC1-CF38F0B9C2F8}"/>
               </a:ext>
             </a:extLst>
           </p:cNvPr>
@@ -13761,7 +13761,7 @@
           <p:cNvPr id="4" name="">
             <a:extLst xmlns:a="http://schemas.openxmlformats.org/drawingml/2006/main">
               <a:ext uri="{FF2B5EF4-FFF2-40B4-BE49-F238E27FC236}">
-                <a16:creationId xmlns:a16="http://schemas.microsoft.com/office/drawing/2014/main" id="{72FE9599-983B-43B1-8FB8-1B42A58FBA5D}"/>
+                <a16:creationId xmlns:a16="http://schemas.microsoft.com/office/drawing/2014/main" id="{7BD6C581-8B52-4CC4-8E2D-4C81093CEB70}"/>
               </a:ext>
             </a:extLst>
           </p:cNvPr>
@@ -13811,7 +13811,7 @@
           <p:cNvPr id="5" name="">
             <a:extLst xmlns:a="http://schemas.openxmlformats.org/drawingml/2006/main">
               <a:ext uri="{FF2B5EF4-FFF2-40B4-BE49-F238E27FC236}">
-                <a16:creationId xmlns:a16="http://schemas.microsoft.com/office/drawing/2014/main" id="{067FC395-424A-4586-880A-23E2C6E12225}"/>
+                <a16:creationId xmlns:a16="http://schemas.microsoft.com/office/drawing/2014/main" id="{685AB5A2-68E5-488C-8288-AEDE338C88E1}"/>
               </a:ext>
             </a:extLst>
           </p:cNvPr>
@@ -13844,7 +13844,7 @@
           <p:cNvPr id="6" name="">
             <a:extLst xmlns:a="http://schemas.openxmlformats.org/drawingml/2006/main">
               <a:ext uri="{FF2B5EF4-FFF2-40B4-BE49-F238E27FC236}">
-                <a16:creationId xmlns:a16="http://schemas.microsoft.com/office/drawing/2014/main" id="{1B1F0CE2-B637-4196-9D1D-A9BF7DD05C92}"/>
+                <a16:creationId xmlns:a16="http://schemas.microsoft.com/office/drawing/2014/main" id="{2DDF67A9-B0A2-42BC-8B79-123C49302AFD}"/>
               </a:ext>
             </a:extLst>
           </p:cNvPr>
@@ -13877,7 +13877,7 @@
           <p:cNvPr id="7" name="">
             <a:extLst xmlns:a="http://schemas.openxmlformats.org/drawingml/2006/main">
               <a:ext uri="{FF2B5EF4-FFF2-40B4-BE49-F238E27FC236}">
-                <a16:creationId xmlns:a16="http://schemas.microsoft.com/office/drawing/2014/main" id="{B46E9A39-A209-4D89-B873-3740FE6C8E70}"/>
+                <a16:creationId xmlns:a16="http://schemas.microsoft.com/office/drawing/2014/main" id="{47489E50-1A45-4FCD-A5E4-5571C534C006}"/>
               </a:ext>
             </a:extLst>
           </p:cNvPr>
@@ -13910,7 +13910,7 @@
           <p:cNvPr id="8" name="">
             <a:extLst xmlns:a="http://schemas.openxmlformats.org/drawingml/2006/main">
               <a:ext uri="{FF2B5EF4-FFF2-40B4-BE49-F238E27FC236}">
-                <a16:creationId xmlns:a16="http://schemas.microsoft.com/office/drawing/2014/main" id="{B7380227-7650-4F8F-BA1C-FA6048A2CE86}"/>
+                <a16:creationId xmlns:a16="http://schemas.microsoft.com/office/drawing/2014/main" id="{F2243D48-28D8-45CB-82AF-44634B38DDB8}"/>
               </a:ext>
             </a:extLst>
           </p:cNvPr>
@@ -13943,7 +13943,7 @@
           <p:cNvPr id="9" name="pipeline-0">
             <a:extLst xmlns:a="http://schemas.openxmlformats.org/drawingml/2006/main">
               <a:ext uri="{FF2B5EF4-FFF2-40B4-BE49-F238E27FC236}">
-                <a16:creationId xmlns:a16="http://schemas.microsoft.com/office/drawing/2014/main" id="{3D92346C-E53C-40A6-A57C-CC6810AA8D8A}"/>
+                <a16:creationId xmlns:a16="http://schemas.microsoft.com/office/drawing/2014/main" id="{47FEA968-353B-4191-A3E2-3F4C2EC3E746}"/>
               </a:ext>
             </a:extLst>
           </p:cNvPr>
@@ -13984,7 +13984,7 @@
           <p:cNvPr id="10" name="">
             <a:extLst xmlns:a="http://schemas.openxmlformats.org/drawingml/2006/main">
               <a:ext uri="{FF2B5EF4-FFF2-40B4-BE49-F238E27FC236}">
-                <a16:creationId xmlns:a16="http://schemas.microsoft.com/office/drawing/2014/main" id="{AAA47581-DE03-466E-9DD6-129B879F48A0}"/>
+                <a16:creationId xmlns:a16="http://schemas.microsoft.com/office/drawing/2014/main" id="{3CEE776C-FE6F-4032-BA74-BA7EB81BC73C}"/>
               </a:ext>
             </a:extLst>
           </p:cNvPr>
@@ -14034,7 +14034,7 @@
           <p:cNvPr id="11" name="">
             <a:extLst xmlns:a="http://schemas.openxmlformats.org/drawingml/2006/main">
               <a:ext uri="{FF2B5EF4-FFF2-40B4-BE49-F238E27FC236}">
-                <a16:creationId xmlns:a16="http://schemas.microsoft.com/office/drawing/2014/main" id="{8DCE2CAD-84E8-4CA9-A5AD-AA03E94DA3FC}"/>
+                <a16:creationId xmlns:a16="http://schemas.microsoft.com/office/drawing/2014/main" id="{CD660309-BEF3-470B-97A5-4CC7652B1C04}"/>
               </a:ext>
             </a:extLst>
           </p:cNvPr>
@@ -14101,7 +14101,7 @@
           <p:cNvPr id="12" name="pipeline-1">
             <a:extLst xmlns:a="http://schemas.openxmlformats.org/drawingml/2006/main">
               <a:ext uri="{FF2B5EF4-FFF2-40B4-BE49-F238E27FC236}">
-                <a16:creationId xmlns:a16="http://schemas.microsoft.com/office/drawing/2014/main" id="{EB245E9A-5A97-4770-8F69-53568595D8A4}"/>
+                <a16:creationId xmlns:a16="http://schemas.microsoft.com/office/drawing/2014/main" id="{25A0EDE7-5784-4941-93A2-288CD83DCE5D}"/>
               </a:ext>
             </a:extLst>
           </p:cNvPr>
@@ -14142,7 +14142,7 @@
           <p:cNvPr id="13" name="">
             <a:extLst xmlns:a="http://schemas.openxmlformats.org/drawingml/2006/main">
               <a:ext uri="{FF2B5EF4-FFF2-40B4-BE49-F238E27FC236}">
-                <a16:creationId xmlns:a16="http://schemas.microsoft.com/office/drawing/2014/main" id="{A09858EA-F37A-46D9-8F06-F3B7E0E6E4D1}"/>
+                <a16:creationId xmlns:a16="http://schemas.microsoft.com/office/drawing/2014/main" id="{F66EC480-DE8D-4EFF-8EA0-51DE31B183D2}"/>
               </a:ext>
             </a:extLst>
           </p:cNvPr>
@@ -14192,7 +14192,7 @@
           <p:cNvPr id="14" name="">
             <a:extLst xmlns:a="http://schemas.openxmlformats.org/drawingml/2006/main">
               <a:ext uri="{FF2B5EF4-FFF2-40B4-BE49-F238E27FC236}">
-                <a16:creationId xmlns:a16="http://schemas.microsoft.com/office/drawing/2014/main" id="{762E15F4-6816-4D86-83FB-1A76E1AF4E52}"/>
+                <a16:creationId xmlns:a16="http://schemas.microsoft.com/office/drawing/2014/main" id="{BE3D061D-371C-4228-8399-5EE383A7071F}"/>
               </a:ext>
             </a:extLst>
           </p:cNvPr>
@@ -14259,7 +14259,7 @@
           <p:cNvPr id="15" name="pipeline-2">
             <a:extLst xmlns:a="http://schemas.openxmlformats.org/drawingml/2006/main">
               <a:ext uri="{FF2B5EF4-FFF2-40B4-BE49-F238E27FC236}">
-                <a16:creationId xmlns:a16="http://schemas.microsoft.com/office/drawing/2014/main" id="{38CE50BE-E4B5-45D9-8F7E-F9C9D1FA27F9}"/>
+                <a16:creationId xmlns:a16="http://schemas.microsoft.com/office/drawing/2014/main" id="{4296F9FA-D919-4E2E-8DC5-C36D8AF60870}"/>
               </a:ext>
             </a:extLst>
           </p:cNvPr>
@@ -14300,7 +14300,7 @@
           <p:cNvPr id="16" name="">
             <a:extLst xmlns:a="http://schemas.openxmlformats.org/drawingml/2006/main">
               <a:ext uri="{FF2B5EF4-FFF2-40B4-BE49-F238E27FC236}">
-                <a16:creationId xmlns:a16="http://schemas.microsoft.com/office/drawing/2014/main" id="{DCFCACED-EEB5-465A-B065-D2C71C76665D}"/>
+                <a16:creationId xmlns:a16="http://schemas.microsoft.com/office/drawing/2014/main" id="{6CB89BF5-4C97-42FF-A318-94A19E118EC9}"/>
               </a:ext>
             </a:extLst>
           </p:cNvPr>
@@ -14350,7 +14350,7 @@
           <p:cNvPr id="17" name="">
             <a:extLst xmlns:a="http://schemas.openxmlformats.org/drawingml/2006/main">
               <a:ext uri="{FF2B5EF4-FFF2-40B4-BE49-F238E27FC236}">
-                <a16:creationId xmlns:a16="http://schemas.microsoft.com/office/drawing/2014/main" id="{7FCD0C8A-A6B1-42E2-8BAD-A7FD6D45E448}"/>
+                <a16:creationId xmlns:a16="http://schemas.microsoft.com/office/drawing/2014/main" id="{CFA43481-11BC-415A-8132-02E185B25D0A}"/>
               </a:ext>
             </a:extLst>
           </p:cNvPr>
@@ -14417,7 +14417,7 @@
           <p:cNvPr id="18" name="pipeline-3">
             <a:extLst xmlns:a="http://schemas.openxmlformats.org/drawingml/2006/main">
               <a:ext uri="{FF2B5EF4-FFF2-40B4-BE49-F238E27FC236}">
-                <a16:creationId xmlns:a16="http://schemas.microsoft.com/office/drawing/2014/main" id="{4AF82569-597B-4DAF-9D54-49DAEE0B0470}"/>
+                <a16:creationId xmlns:a16="http://schemas.microsoft.com/office/drawing/2014/main" id="{70B442B2-7888-4C5F-8CEE-C5F5F6A025EF}"/>
               </a:ext>
             </a:extLst>
           </p:cNvPr>
@@ -14458,7 +14458,7 @@
           <p:cNvPr id="19" name="">
             <a:extLst xmlns:a="http://schemas.openxmlformats.org/drawingml/2006/main">
               <a:ext uri="{FF2B5EF4-FFF2-40B4-BE49-F238E27FC236}">
-                <a16:creationId xmlns:a16="http://schemas.microsoft.com/office/drawing/2014/main" id="{61757D5D-E99E-4ECC-BBC4-F22BAA72670C}"/>
+                <a16:creationId xmlns:a16="http://schemas.microsoft.com/office/drawing/2014/main" id="{5E83B1DB-E7E9-4494-819A-8E961AE447BD}"/>
               </a:ext>
             </a:extLst>
           </p:cNvPr>
@@ -14508,7 +14508,7 @@
           <p:cNvPr id="20" name="">
             <a:extLst xmlns:a="http://schemas.openxmlformats.org/drawingml/2006/main">
               <a:ext uri="{FF2B5EF4-FFF2-40B4-BE49-F238E27FC236}">
-                <a16:creationId xmlns:a16="http://schemas.microsoft.com/office/drawing/2014/main" id="{FF0A376C-C844-4B95-B6BF-4F51DC309241}"/>
+                <a16:creationId xmlns:a16="http://schemas.microsoft.com/office/drawing/2014/main" id="{47D17432-AA13-4E40-8E7D-D03F45CEB7A6}"/>
               </a:ext>
             </a:extLst>
           </p:cNvPr>
@@ -14575,7 +14575,7 @@
           <p:cNvPr id="21" name="pipeline-4">
             <a:extLst xmlns:a="http://schemas.openxmlformats.org/drawingml/2006/main">
               <a:ext uri="{FF2B5EF4-FFF2-40B4-BE49-F238E27FC236}">
-                <a16:creationId xmlns:a16="http://schemas.microsoft.com/office/drawing/2014/main" id="{4888943F-9DD1-4308-B28C-A645FD40A8E3}"/>
+                <a16:creationId xmlns:a16="http://schemas.microsoft.com/office/drawing/2014/main" id="{724903D4-28F7-4213-B923-105D9BC4C634}"/>
               </a:ext>
             </a:extLst>
           </p:cNvPr>
@@ -14616,7 +14616,7 @@
           <p:cNvPr id="22" name="">
             <a:extLst xmlns:a="http://schemas.openxmlformats.org/drawingml/2006/main">
               <a:ext uri="{FF2B5EF4-FFF2-40B4-BE49-F238E27FC236}">
-                <a16:creationId xmlns:a16="http://schemas.microsoft.com/office/drawing/2014/main" id="{94852F1E-5684-4867-B2E8-7AD04EF9C6BF}"/>
+                <a16:creationId xmlns:a16="http://schemas.microsoft.com/office/drawing/2014/main" id="{63376F8C-DBCF-4DE1-97D2-94A840AB3C35}"/>
               </a:ext>
             </a:extLst>
           </p:cNvPr>
@@ -14666,7 +14666,7 @@
           <p:cNvPr id="23" name="">
             <a:extLst xmlns:a="http://schemas.openxmlformats.org/drawingml/2006/main">
               <a:ext uri="{FF2B5EF4-FFF2-40B4-BE49-F238E27FC236}">
-                <a16:creationId xmlns:a16="http://schemas.microsoft.com/office/drawing/2014/main" id="{F765FDE4-1387-46A5-BBDC-330C6ED10790}"/>
+                <a16:creationId xmlns:a16="http://schemas.microsoft.com/office/drawing/2014/main" id="{5B56EDAA-ED8B-4836-B539-E6F033CC9798}"/>
               </a:ext>
             </a:extLst>
           </p:cNvPr>
@@ -14733,7 +14733,7 @@
           <p:cNvPr id="24" name="">
             <a:extLst xmlns:a="http://schemas.openxmlformats.org/drawingml/2006/main">
               <a:ext uri="{FF2B5EF4-FFF2-40B4-BE49-F238E27FC236}">
-                <a16:creationId xmlns:a16="http://schemas.microsoft.com/office/drawing/2014/main" id="{1742A217-8236-4DF3-B9C4-DA15037F2C2E}"/>
+                <a16:creationId xmlns:a16="http://schemas.microsoft.com/office/drawing/2014/main" id="{0CCBD389-74E3-4439-953B-B768C89E7775}"/>
               </a:ext>
             </a:extLst>
           </p:cNvPr>
@@ -14783,7 +14783,7 @@
           <p:cNvPr id="25" name="">
             <a:extLst xmlns:a="http://schemas.openxmlformats.org/drawingml/2006/main">
               <a:ext uri="{FF2B5EF4-FFF2-40B4-BE49-F238E27FC236}">
-                <a16:creationId xmlns:a16="http://schemas.microsoft.com/office/drawing/2014/main" id="{B0D40EBB-104C-41C1-96B8-C3A19D8F9987}"/>
+                <a16:creationId xmlns:a16="http://schemas.microsoft.com/office/drawing/2014/main" id="{43568C9F-D533-4920-BD48-4FD3A4A25067}"/>
               </a:ext>
             </a:extLst>
           </p:cNvPr>
@@ -14833,7 +14833,7 @@
           <p:cNvPr id="26" name="">
             <a:extLst xmlns:a="http://schemas.openxmlformats.org/drawingml/2006/main">
               <a:ext uri="{FF2B5EF4-FFF2-40B4-BE49-F238E27FC236}">
-                <a16:creationId xmlns:a16="http://schemas.microsoft.com/office/drawing/2014/main" id="{CF2CAECC-F4AD-43B6-9F05-6B09D7FD86B8}"/>
+                <a16:creationId xmlns:a16="http://schemas.microsoft.com/office/drawing/2014/main" id="{FD30615A-7D2C-4B2B-8107-41F5C8456A4A}"/>
               </a:ext>
             </a:extLst>
           </p:cNvPr>
@@ -14883,7 +14883,7 @@
           <p:cNvPr id="27" name="">
             <a:extLst xmlns:a="http://schemas.openxmlformats.org/drawingml/2006/main">
               <a:ext uri="{FF2B5EF4-FFF2-40B4-BE49-F238E27FC236}">
-                <a16:creationId xmlns:a16="http://schemas.microsoft.com/office/drawing/2014/main" id="{B93F4C7D-1FF0-4CE5-A513-06A14BE090FD}"/>
+                <a16:creationId xmlns:a16="http://schemas.microsoft.com/office/drawing/2014/main" id="{34BA0A81-6071-464E-B633-6B5E1055B518}"/>
               </a:ext>
             </a:extLst>
           </p:cNvPr>
@@ -14914,7 +14914,7 @@
           <p:cNvPr id="28" name="source-3">
             <a:extLst xmlns:a="http://schemas.openxmlformats.org/drawingml/2006/main">
               <a:ext uri="{FF2B5EF4-FFF2-40B4-BE49-F238E27FC236}">
-                <a16:creationId xmlns:a16="http://schemas.microsoft.com/office/drawing/2014/main" id="{ADB9AA83-A714-47B8-9D36-8C6E240E1A61}"/>
+                <a16:creationId xmlns:a16="http://schemas.microsoft.com/office/drawing/2014/main" id="{F93DD858-C72B-41D2-8A67-DD21C12DC3D5}"/>
               </a:ext>
             </a:extLst>
           </p:cNvPr>
@@ -14964,7 +14964,7 @@
           <p:cNvPr id="29" name="page-3">
             <a:extLst xmlns:a="http://schemas.openxmlformats.org/drawingml/2006/main">
               <a:ext uri="{FF2B5EF4-FFF2-40B4-BE49-F238E27FC236}">
-                <a16:creationId xmlns:a16="http://schemas.microsoft.com/office/drawing/2014/main" id="{4B992F04-3CBF-4AA0-87CC-F22FCB12CC2E}"/>
+                <a16:creationId xmlns:a16="http://schemas.microsoft.com/office/drawing/2014/main" id="{8DC4715B-0E33-4CB6-9900-8C70CE3D97E0}"/>
               </a:ext>
             </a:extLst>
           </p:cNvPr>
@@ -15012,7 +15012,7 @@
     </p:spTree>
     <p:extLst>
       <p:ext uri="{BB962C8B-B14F-4D97-AF65-F5344CB8AC3E}">
-        <p14:creationId xmlns:p14="http://schemas.microsoft.com/office/powerpoint/2010/main" val="431526574"/>
+        <p14:creationId xmlns:p14="http://schemas.microsoft.com/office/powerpoint/2010/main" val="731911166"/>
       </p:ext>
     </p:extLst>
   </p:cSld>
@@ -15043,7 +15043,7 @@
           <p:cNvPr id="49" name="kicker-4">
             <a:extLst xmlns:a="http://schemas.openxmlformats.org/drawingml/2006/main">
               <a:ext uri="{FF2B5EF4-FFF2-40B4-BE49-F238E27FC236}">
-                <a16:creationId xmlns:a16="http://schemas.microsoft.com/office/drawing/2014/main" id="{F3770956-D3DF-465C-BD32-B51EEF66C21D}"/>
+                <a16:creationId xmlns:a16="http://schemas.microsoft.com/office/drawing/2014/main" id="{9F3A29E2-1221-4468-9114-7CE5D9E89E55}"/>
               </a:ext>
             </a:extLst>
           </p:cNvPr>
@@ -15093,7 +15093,7 @@
           <p:cNvPr id="2" name="title-4">
             <a:extLst xmlns:a="http://schemas.openxmlformats.org/drawingml/2006/main">
               <a:ext uri="{FF2B5EF4-FFF2-40B4-BE49-F238E27FC236}">
-                <a16:creationId xmlns:a16="http://schemas.microsoft.com/office/drawing/2014/main" id="{C55925CE-21AD-4E90-8E90-8CF0F64B0AD2}"/>
+                <a16:creationId xmlns:a16="http://schemas.microsoft.com/office/drawing/2014/main" id="{2B0C3459-5559-4C4D-A634-289E195EFC5D}"/>
               </a:ext>
             </a:extLst>
           </p:cNvPr>
@@ -15143,7 +15143,7 @@
           <p:cNvPr id="3" name="">
             <a:extLst xmlns:a="http://schemas.openxmlformats.org/drawingml/2006/main">
               <a:ext uri="{FF2B5EF4-FFF2-40B4-BE49-F238E27FC236}">
-                <a16:creationId xmlns:a16="http://schemas.microsoft.com/office/drawing/2014/main" id="{F270F2F1-50EC-42C7-8C9B-C02BFADD878B}"/>
+                <a16:creationId xmlns:a16="http://schemas.microsoft.com/office/drawing/2014/main" id="{7FF0CF03-89CE-4D31-97E5-90C4D5415286}"/>
               </a:ext>
             </a:extLst>
           </p:cNvPr>
@@ -15174,7 +15174,7 @@
           <p:cNvPr id="4" name="">
             <a:extLst xmlns:a="http://schemas.openxmlformats.org/drawingml/2006/main">
               <a:ext uri="{FF2B5EF4-FFF2-40B4-BE49-F238E27FC236}">
-                <a16:creationId xmlns:a16="http://schemas.microsoft.com/office/drawing/2014/main" id="{F1154465-AC73-4FF3-80A9-F222CC4DB665}"/>
+                <a16:creationId xmlns:a16="http://schemas.microsoft.com/office/drawing/2014/main" id="{042CFD87-2786-49E4-9E4F-E650B08F9E42}"/>
               </a:ext>
             </a:extLst>
           </p:cNvPr>
@@ -15224,7 +15224,7 @@
           <p:cNvPr id="5" name="">
             <a:extLst xmlns:a="http://schemas.openxmlformats.org/drawingml/2006/main">
               <a:ext uri="{FF2B5EF4-FFF2-40B4-BE49-F238E27FC236}">
-                <a16:creationId xmlns:a16="http://schemas.microsoft.com/office/drawing/2014/main" id="{F0A5411D-B21A-4571-8BB3-5F2EFDFE8B79}"/>
+                <a16:creationId xmlns:a16="http://schemas.microsoft.com/office/drawing/2014/main" id="{D34C3FE4-5F11-47A0-AA4E-BADE0B3DB655}"/>
               </a:ext>
             </a:extLst>
           </p:cNvPr>
@@ -15257,7 +15257,7 @@
           <p:cNvPr id="6" name="">
             <a:extLst xmlns:a="http://schemas.openxmlformats.org/drawingml/2006/main">
               <a:ext uri="{FF2B5EF4-FFF2-40B4-BE49-F238E27FC236}">
-                <a16:creationId xmlns:a16="http://schemas.microsoft.com/office/drawing/2014/main" id="{1BB0C206-BEF9-4DF4-A419-5FB89813341B}"/>
+                <a16:creationId xmlns:a16="http://schemas.microsoft.com/office/drawing/2014/main" id="{F11245FD-0B7E-4D70-81A9-3DEB252C7FCF}"/>
               </a:ext>
             </a:extLst>
           </p:cNvPr>
@@ -15290,7 +15290,7 @@
           <p:cNvPr id="7" name="">
             <a:extLst xmlns:a="http://schemas.openxmlformats.org/drawingml/2006/main">
               <a:ext uri="{FF2B5EF4-FFF2-40B4-BE49-F238E27FC236}">
-                <a16:creationId xmlns:a16="http://schemas.microsoft.com/office/drawing/2014/main" id="{DC7376AC-CB55-4F88-939D-B65386772127}"/>
+                <a16:creationId xmlns:a16="http://schemas.microsoft.com/office/drawing/2014/main" id="{38B47B91-D37D-46CE-B12E-0FA40E89D44F}"/>
               </a:ext>
             </a:extLst>
           </p:cNvPr>
@@ -15323,7 +15323,7 @@
           <p:cNvPr id="8" name="">
             <a:extLst xmlns:a="http://schemas.openxmlformats.org/drawingml/2006/main">
               <a:ext uri="{FF2B5EF4-FFF2-40B4-BE49-F238E27FC236}">
-                <a16:creationId xmlns:a16="http://schemas.microsoft.com/office/drawing/2014/main" id="{EFCADD07-D045-4334-8985-D7D28168B6F5}"/>
+                <a16:creationId xmlns:a16="http://schemas.microsoft.com/office/drawing/2014/main" id="{527E705D-5DC8-42B1-8C3D-A1790195D05A}"/>
               </a:ext>
             </a:extLst>
           </p:cNvPr>
@@ -15356,7 +15356,7 @@
           <p:cNvPr id="9" name="">
             <a:extLst xmlns:a="http://schemas.openxmlformats.org/drawingml/2006/main">
               <a:ext uri="{FF2B5EF4-FFF2-40B4-BE49-F238E27FC236}">
-                <a16:creationId xmlns:a16="http://schemas.microsoft.com/office/drawing/2014/main" id="{7248CB93-5EC2-4620-A532-8FD32149234D}"/>
+                <a16:creationId xmlns:a16="http://schemas.microsoft.com/office/drawing/2014/main" id="{3615CE5E-20BA-411A-B9F4-8155EB90FEEF}"/>
               </a:ext>
             </a:extLst>
           </p:cNvPr>
@@ -15389,7 +15389,7 @@
           <p:cNvPr id="10" name="">
             <a:extLst xmlns:a="http://schemas.openxmlformats.org/drawingml/2006/main">
               <a:ext uri="{FF2B5EF4-FFF2-40B4-BE49-F238E27FC236}">
-                <a16:creationId xmlns:a16="http://schemas.microsoft.com/office/drawing/2014/main" id="{1686CA34-57FA-4DD4-BA19-9F2388285F29}"/>
+                <a16:creationId xmlns:a16="http://schemas.microsoft.com/office/drawing/2014/main" id="{FF512F77-0CC5-44B8-B192-E4568CB4ABF1}"/>
               </a:ext>
             </a:extLst>
           </p:cNvPr>
@@ -15422,7 +15422,7 @@
           <p:cNvPr id="11" name="">
             <a:extLst xmlns:a="http://schemas.openxmlformats.org/drawingml/2006/main">
               <a:ext uri="{FF2B5EF4-FFF2-40B4-BE49-F238E27FC236}">
-                <a16:creationId xmlns:a16="http://schemas.microsoft.com/office/drawing/2014/main" id="{EEACDBE3-1EA3-4FFD-B8A7-28816010C342}"/>
+                <a16:creationId xmlns:a16="http://schemas.microsoft.com/office/drawing/2014/main" id="{59B66290-E55E-44E6-A36D-A205887DD27D}"/>
               </a:ext>
             </a:extLst>
           </p:cNvPr>
@@ -15455,7 +15455,7 @@
           <p:cNvPr id="12" name="">
             <a:extLst xmlns:a="http://schemas.openxmlformats.org/drawingml/2006/main">
               <a:ext uri="{FF2B5EF4-FFF2-40B4-BE49-F238E27FC236}">
-                <a16:creationId xmlns:a16="http://schemas.microsoft.com/office/drawing/2014/main" id="{FE2E6800-5B74-4761-BABA-575E79D8A0AE}"/>
+                <a16:creationId xmlns:a16="http://schemas.microsoft.com/office/drawing/2014/main" id="{8369D14A-B57F-40D3-AE7B-D10869BBBE2E}"/>
               </a:ext>
             </a:extLst>
           </p:cNvPr>
@@ -15488,7 +15488,7 @@
           <p:cNvPr id="13" name="">
             <a:extLst xmlns:a="http://schemas.openxmlformats.org/drawingml/2006/main">
               <a:ext uri="{FF2B5EF4-FFF2-40B4-BE49-F238E27FC236}">
-                <a16:creationId xmlns:a16="http://schemas.microsoft.com/office/drawing/2014/main" id="{B82D4D4E-3146-40DD-B953-A0D8BABA2E1E}"/>
+                <a16:creationId xmlns:a16="http://schemas.microsoft.com/office/drawing/2014/main" id="{1A0133B5-F642-4C94-9E94-5E1A68C21DA8}"/>
               </a:ext>
             </a:extLst>
           </p:cNvPr>
@@ -15529,7 +15529,7 @@
           <p:cNvPr id="14" name="">
             <a:extLst xmlns:a="http://schemas.openxmlformats.org/drawingml/2006/main">
               <a:ext uri="{FF2B5EF4-FFF2-40B4-BE49-F238E27FC236}">
-                <a16:creationId xmlns:a16="http://schemas.microsoft.com/office/drawing/2014/main" id="{19B7BAE8-5DA5-45FE-A2B4-F800A5F52989}"/>
+                <a16:creationId xmlns:a16="http://schemas.microsoft.com/office/drawing/2014/main" id="{DE880372-1C2D-4CB8-9DCC-7002FD4715DE}"/>
               </a:ext>
             </a:extLst>
           </p:cNvPr>
@@ -15579,7 +15579,7 @@
           <p:cNvPr id="15" name="">
             <a:extLst xmlns:a="http://schemas.openxmlformats.org/drawingml/2006/main">
               <a:ext uri="{FF2B5EF4-FFF2-40B4-BE49-F238E27FC236}">
-                <a16:creationId xmlns:a16="http://schemas.microsoft.com/office/drawing/2014/main" id="{9745BFE1-57F3-443E-8932-6B2F6DBE1F6C}"/>
+                <a16:creationId xmlns:a16="http://schemas.microsoft.com/office/drawing/2014/main" id="{DEB854DF-94FC-49B0-AE7F-5A76B79B7293}"/>
               </a:ext>
             </a:extLst>
           </p:cNvPr>
@@ -15629,7 +15629,7 @@
           <p:cNvPr id="16" name="">
             <a:extLst xmlns:a="http://schemas.openxmlformats.org/drawingml/2006/main">
               <a:ext uri="{FF2B5EF4-FFF2-40B4-BE49-F238E27FC236}">
-                <a16:creationId xmlns:a16="http://schemas.microsoft.com/office/drawing/2014/main" id="{FBD0C670-5F98-436F-9D56-2C304F8C6F56}"/>
+                <a16:creationId xmlns:a16="http://schemas.microsoft.com/office/drawing/2014/main" id="{CE5C03C8-AACB-45E3-9306-D6A9D9CDF95C}"/>
               </a:ext>
             </a:extLst>
           </p:cNvPr>
@@ -15662,7 +15662,7 @@
           <p:cNvPr id="17" name="">
             <a:extLst xmlns:a="http://schemas.openxmlformats.org/drawingml/2006/main">
               <a:ext uri="{FF2B5EF4-FFF2-40B4-BE49-F238E27FC236}">
-                <a16:creationId xmlns:a16="http://schemas.microsoft.com/office/drawing/2014/main" id="{0D1E5AA6-B55A-4142-AEC3-1E3E9188CA28}"/>
+                <a16:creationId xmlns:a16="http://schemas.microsoft.com/office/drawing/2014/main" id="{664F09DA-B9C6-49E4-8464-006A551A00D1}"/>
               </a:ext>
             </a:extLst>
           </p:cNvPr>
@@ -15729,7 +15729,7 @@
           <p:cNvPr id="18" name="">
             <a:extLst xmlns:a="http://schemas.openxmlformats.org/drawingml/2006/main">
               <a:ext uri="{FF2B5EF4-FFF2-40B4-BE49-F238E27FC236}">
-                <a16:creationId xmlns:a16="http://schemas.microsoft.com/office/drawing/2014/main" id="{64C50910-C0F5-4552-8356-2F1E1E1F9A83}"/>
+                <a16:creationId xmlns:a16="http://schemas.microsoft.com/office/drawing/2014/main" id="{36488B1E-5E64-4D66-82A3-0349A8B5FDA3}"/>
               </a:ext>
             </a:extLst>
           </p:cNvPr>
@@ -15762,7 +15762,7 @@
           <p:cNvPr id="19" name="">
             <a:extLst xmlns:a="http://schemas.openxmlformats.org/drawingml/2006/main">
               <a:ext uri="{FF2B5EF4-FFF2-40B4-BE49-F238E27FC236}">
-                <a16:creationId xmlns:a16="http://schemas.microsoft.com/office/drawing/2014/main" id="{6CB007AC-2325-49C3-A460-51892E46F6EB}"/>
+                <a16:creationId xmlns:a16="http://schemas.microsoft.com/office/drawing/2014/main" id="{851D6612-13E6-45A2-9F0D-12BCD8724060}"/>
               </a:ext>
             </a:extLst>
           </p:cNvPr>
@@ -15829,7 +15829,7 @@
           <p:cNvPr id="20" name="">
             <a:extLst xmlns:a="http://schemas.openxmlformats.org/drawingml/2006/main">
               <a:ext uri="{FF2B5EF4-FFF2-40B4-BE49-F238E27FC236}">
-                <a16:creationId xmlns:a16="http://schemas.microsoft.com/office/drawing/2014/main" id="{CE6E395F-12B7-4B4F-B80A-E526B6E09E3B}"/>
+                <a16:creationId xmlns:a16="http://schemas.microsoft.com/office/drawing/2014/main" id="{D04359D0-40A4-4ABA-8957-FFF1B78FD945}"/>
               </a:ext>
             </a:extLst>
           </p:cNvPr>
@@ -15862,7 +15862,7 @@
           <p:cNvPr id="21" name="">
             <a:extLst xmlns:a="http://schemas.openxmlformats.org/drawingml/2006/main">
               <a:ext uri="{FF2B5EF4-FFF2-40B4-BE49-F238E27FC236}">
-                <a16:creationId xmlns:a16="http://schemas.microsoft.com/office/drawing/2014/main" id="{A67898C3-8A1E-4E44-B5E7-3F904A61ECB6}"/>
+                <a16:creationId xmlns:a16="http://schemas.microsoft.com/office/drawing/2014/main" id="{5BA6E8FF-30EB-403D-8BE1-8910960A68E9}"/>
               </a:ext>
             </a:extLst>
           </p:cNvPr>
@@ -15929,7 +15929,7 @@
           <p:cNvPr id="22" name="">
             <a:extLst xmlns:a="http://schemas.openxmlformats.org/drawingml/2006/main">
               <a:ext uri="{FF2B5EF4-FFF2-40B4-BE49-F238E27FC236}">
-                <a16:creationId xmlns:a16="http://schemas.microsoft.com/office/drawing/2014/main" id="{6F74641E-DFD8-4974-AAEF-0DF71B0E5F99}"/>
+                <a16:creationId xmlns:a16="http://schemas.microsoft.com/office/drawing/2014/main" id="{73A21A85-17BE-4FE5-A061-673601D29F31}"/>
               </a:ext>
             </a:extLst>
           </p:cNvPr>
@@ -15979,7 +15979,7 @@
           <p:cNvPr id="23" name="">
             <a:extLst xmlns:a="http://schemas.openxmlformats.org/drawingml/2006/main">
               <a:ext uri="{FF2B5EF4-FFF2-40B4-BE49-F238E27FC236}">
-                <a16:creationId xmlns:a16="http://schemas.microsoft.com/office/drawing/2014/main" id="{6969763D-B551-4F85-84A2-D26430EAB5A2}"/>
+                <a16:creationId xmlns:a16="http://schemas.microsoft.com/office/drawing/2014/main" id="{A1327364-6007-4F9D-87EF-CFDA47E15BC9}"/>
               </a:ext>
             </a:extLst>
           </p:cNvPr>
@@ -16029,7 +16029,7 @@
           <p:cNvPr id="24" name="">
             <a:extLst xmlns:a="http://schemas.openxmlformats.org/drawingml/2006/main">
               <a:ext uri="{FF2B5EF4-FFF2-40B4-BE49-F238E27FC236}">
-                <a16:creationId xmlns:a16="http://schemas.microsoft.com/office/drawing/2014/main" id="{50BC603B-0F84-4819-8559-83097C24AC0E}"/>
+                <a16:creationId xmlns:a16="http://schemas.microsoft.com/office/drawing/2014/main" id="{51263DDE-1994-4FCA-9E86-7B71F11993E5}"/>
               </a:ext>
             </a:extLst>
           </p:cNvPr>
@@ -16079,7 +16079,7 @@
           <p:cNvPr id="25" name="">
             <a:extLst xmlns:a="http://schemas.openxmlformats.org/drawingml/2006/main">
               <a:ext uri="{FF2B5EF4-FFF2-40B4-BE49-F238E27FC236}">
-                <a16:creationId xmlns:a16="http://schemas.microsoft.com/office/drawing/2014/main" id="{CCDBD7DF-5EF4-456C-B994-CB1EF3C5D71F}"/>
+                <a16:creationId xmlns:a16="http://schemas.microsoft.com/office/drawing/2014/main" id="{558718BA-9EC3-453C-A9F2-E35D7945EA27}"/>
               </a:ext>
             </a:extLst>
           </p:cNvPr>
@@ -16129,7 +16129,7 @@
           <p:cNvPr id="26" name="">
             <a:extLst xmlns:a="http://schemas.openxmlformats.org/drawingml/2006/main">
               <a:ext uri="{FF2B5EF4-FFF2-40B4-BE49-F238E27FC236}">
-                <a16:creationId xmlns:a16="http://schemas.microsoft.com/office/drawing/2014/main" id="{19126A0F-7091-4E6D-AC3A-DCFF7A737CDA}"/>
+                <a16:creationId xmlns:a16="http://schemas.microsoft.com/office/drawing/2014/main" id="{1613C312-C23D-4BBD-BC20-539BB89BF4C5}"/>
               </a:ext>
             </a:extLst>
           </p:cNvPr>
@@ -16179,7 +16179,7 @@
           <p:cNvPr id="27" name="">
             <a:extLst xmlns:a="http://schemas.openxmlformats.org/drawingml/2006/main">
               <a:ext uri="{FF2B5EF4-FFF2-40B4-BE49-F238E27FC236}">
-                <a16:creationId xmlns:a16="http://schemas.microsoft.com/office/drawing/2014/main" id="{248CE98F-2C08-44BB-BAEA-FF82F2A86ED5}"/>
+                <a16:creationId xmlns:a16="http://schemas.microsoft.com/office/drawing/2014/main" id="{ED5A6609-CA18-4390-8A74-3B017871116B}"/>
               </a:ext>
             </a:extLst>
           </p:cNvPr>
@@ -16229,7 +16229,7 @@
           <p:cNvPr id="28" name="">
             <a:extLst xmlns:a="http://schemas.openxmlformats.org/drawingml/2006/main">
               <a:ext uri="{FF2B5EF4-FFF2-40B4-BE49-F238E27FC236}">
-                <a16:creationId xmlns:a16="http://schemas.microsoft.com/office/drawing/2014/main" id="{D7FF8619-47A6-4C1F-BAFB-64EBA51FA7FA}"/>
+                <a16:creationId xmlns:a16="http://schemas.microsoft.com/office/drawing/2014/main" id="{EE05702A-0C67-420F-80D9-4479CE0C2442}"/>
               </a:ext>
             </a:extLst>
           </p:cNvPr>
@@ -16264,7 +16264,7 @@
           <p:cNvPr id="29" name="">
             <a:extLst xmlns:a="http://schemas.openxmlformats.org/drawingml/2006/main">
               <a:ext uri="{FF2B5EF4-FFF2-40B4-BE49-F238E27FC236}">
-                <a16:creationId xmlns:a16="http://schemas.microsoft.com/office/drawing/2014/main" id="{182A7141-716B-47F7-AABF-20212444B7D6}"/>
+                <a16:creationId xmlns:a16="http://schemas.microsoft.com/office/drawing/2014/main" id="{288650ED-888C-4EDF-A74A-FB6D22CD71ED}"/>
               </a:ext>
             </a:extLst>
           </p:cNvPr>
@@ -16331,7 +16331,7 @@
           <p:cNvPr id="30" name="">
             <a:extLst xmlns:a="http://schemas.openxmlformats.org/drawingml/2006/main">
               <a:ext uri="{FF2B5EF4-FFF2-40B4-BE49-F238E27FC236}">
-                <a16:creationId xmlns:a16="http://schemas.microsoft.com/office/drawing/2014/main" id="{E7753B00-DC18-4DE6-BCE2-AC61A51F61D2}"/>
+                <a16:creationId xmlns:a16="http://schemas.microsoft.com/office/drawing/2014/main" id="{D6CE71F1-8CB5-4444-950C-8D6B01BB390C}"/>
               </a:ext>
             </a:extLst>
           </p:cNvPr>
@@ -16398,7 +16398,7 @@
           <p:cNvPr id="31" name="">
             <a:extLst xmlns:a="http://schemas.openxmlformats.org/drawingml/2006/main">
               <a:ext uri="{FF2B5EF4-FFF2-40B4-BE49-F238E27FC236}">
-                <a16:creationId xmlns:a16="http://schemas.microsoft.com/office/drawing/2014/main" id="{502F6549-0232-40DD-BB28-CE7B96A6B91A}"/>
+                <a16:creationId xmlns:a16="http://schemas.microsoft.com/office/drawing/2014/main" id="{0F415C97-59F0-476F-B107-0AA5D8405279}"/>
               </a:ext>
             </a:extLst>
           </p:cNvPr>
@@ -16433,7 +16433,7 @@
           <p:cNvPr id="32" name="">
             <a:extLst xmlns:a="http://schemas.openxmlformats.org/drawingml/2006/main">
               <a:ext uri="{FF2B5EF4-FFF2-40B4-BE49-F238E27FC236}">
-                <a16:creationId xmlns:a16="http://schemas.microsoft.com/office/drawing/2014/main" id="{0D868773-FC40-4009-8945-A1864E55071D}"/>
+                <a16:creationId xmlns:a16="http://schemas.microsoft.com/office/drawing/2014/main" id="{73FD6DAE-0D6D-4490-AC83-0B81E2F0F129}"/>
               </a:ext>
             </a:extLst>
           </p:cNvPr>
@@ -16500,7 +16500,7 @@
           <p:cNvPr id="33" name="">
             <a:extLst xmlns:a="http://schemas.openxmlformats.org/drawingml/2006/main">
               <a:ext uri="{FF2B5EF4-FFF2-40B4-BE49-F238E27FC236}">
-                <a16:creationId xmlns:a16="http://schemas.microsoft.com/office/drawing/2014/main" id="{EA7D7DF7-2A0F-491F-822F-BF644AF5FF92}"/>
+                <a16:creationId xmlns:a16="http://schemas.microsoft.com/office/drawing/2014/main" id="{37360508-0719-4A8D-9580-68C0CF5158BA}"/>
               </a:ext>
             </a:extLst>
           </p:cNvPr>
@@ -16567,7 +16567,7 @@
           <p:cNvPr id="34" name="">
             <a:extLst xmlns:a="http://schemas.openxmlformats.org/drawingml/2006/main">
               <a:ext uri="{FF2B5EF4-FFF2-40B4-BE49-F238E27FC236}">
-                <a16:creationId xmlns:a16="http://schemas.microsoft.com/office/drawing/2014/main" id="{A41AA20A-A339-4E70-ACA0-E1B71A3A958F}"/>
+                <a16:creationId xmlns:a16="http://schemas.microsoft.com/office/drawing/2014/main" id="{35727961-A64C-46A8-B5AD-4D3DB00E40E6}"/>
               </a:ext>
             </a:extLst>
           </p:cNvPr>
@@ -16602,7 +16602,7 @@
           <p:cNvPr id="35" name="">
             <a:extLst xmlns:a="http://schemas.openxmlformats.org/drawingml/2006/main">
               <a:ext uri="{FF2B5EF4-FFF2-40B4-BE49-F238E27FC236}">
-                <a16:creationId xmlns:a16="http://schemas.microsoft.com/office/drawing/2014/main" id="{1388BAB1-8B40-4B56-80A2-2A2AA0D29B4E}"/>
+                <a16:creationId xmlns:a16="http://schemas.microsoft.com/office/drawing/2014/main" id="{B6A9D03F-EA33-4C78-B06B-A80E5E9B1CE8}"/>
               </a:ext>
             </a:extLst>
           </p:cNvPr>
@@ -16669,7 +16669,7 @@
           <p:cNvPr id="36" name="">
             <a:extLst xmlns:a="http://schemas.openxmlformats.org/drawingml/2006/main">
               <a:ext uri="{FF2B5EF4-FFF2-40B4-BE49-F238E27FC236}">
-                <a16:creationId xmlns:a16="http://schemas.microsoft.com/office/drawing/2014/main" id="{800ECCD2-3600-4604-8D5D-6E4C5BDE80FB}"/>
+                <a16:creationId xmlns:a16="http://schemas.microsoft.com/office/drawing/2014/main" id="{DD58D856-F908-4FE3-988D-1F310A84837F}"/>
               </a:ext>
             </a:extLst>
           </p:cNvPr>
@@ -16736,7 +16736,7 @@
           <p:cNvPr id="37" name="">
             <a:extLst xmlns:a="http://schemas.openxmlformats.org/drawingml/2006/main">
               <a:ext uri="{FF2B5EF4-FFF2-40B4-BE49-F238E27FC236}">
-                <a16:creationId xmlns:a16="http://schemas.microsoft.com/office/drawing/2014/main" id="{76178EA8-DE3F-4450-A574-C0604E38A53F}"/>
+                <a16:creationId xmlns:a16="http://schemas.microsoft.com/office/drawing/2014/main" id="{54ECC40C-34ED-4F4F-9CAE-A63396500667}"/>
               </a:ext>
             </a:extLst>
           </p:cNvPr>
@@ -16777,7 +16777,7 @@
           <p:cNvPr id="38" name="">
             <a:extLst xmlns:a="http://schemas.openxmlformats.org/drawingml/2006/main">
               <a:ext uri="{FF2B5EF4-FFF2-40B4-BE49-F238E27FC236}">
-                <a16:creationId xmlns:a16="http://schemas.microsoft.com/office/drawing/2014/main" id="{50B07A8A-6BBE-44A8-9FF2-F0986EBA860E}"/>
+                <a16:creationId xmlns:a16="http://schemas.microsoft.com/office/drawing/2014/main" id="{6D63C5D2-571E-4814-BCD7-119021C6703F}"/>
               </a:ext>
             </a:extLst>
           </p:cNvPr>
@@ -16827,7 +16827,7 @@
           <p:cNvPr id="39" name="">
             <a:extLst xmlns:a="http://schemas.openxmlformats.org/drawingml/2006/main">
               <a:ext uri="{FF2B5EF4-FFF2-40B4-BE49-F238E27FC236}">
-                <a16:creationId xmlns:a16="http://schemas.microsoft.com/office/drawing/2014/main" id="{254F35B7-B07B-47C0-8002-6F76D41EFB4E}"/>
+                <a16:creationId xmlns:a16="http://schemas.microsoft.com/office/drawing/2014/main" id="{B0CF0BF7-017A-47DE-9258-A0FA95711CA1}"/>
               </a:ext>
             </a:extLst>
           </p:cNvPr>
@@ -16877,7 +16877,7 @@
           <p:cNvPr id="40" name="">
             <a:extLst xmlns:a="http://schemas.openxmlformats.org/drawingml/2006/main">
               <a:ext uri="{FF2B5EF4-FFF2-40B4-BE49-F238E27FC236}">
-                <a16:creationId xmlns:a16="http://schemas.microsoft.com/office/drawing/2014/main" id="{59F92819-6538-433D-9469-D104C30B90CE}"/>
+                <a16:creationId xmlns:a16="http://schemas.microsoft.com/office/drawing/2014/main" id="{DB69F0D2-2055-4FD8-81D1-473530B16FE0}"/>
               </a:ext>
             </a:extLst>
           </p:cNvPr>
@@ -16918,7 +16918,7 @@
           <p:cNvPr id="41" name="">
             <a:extLst xmlns:a="http://schemas.openxmlformats.org/drawingml/2006/main">
               <a:ext uri="{FF2B5EF4-FFF2-40B4-BE49-F238E27FC236}">
-                <a16:creationId xmlns:a16="http://schemas.microsoft.com/office/drawing/2014/main" id="{6E79ED03-E387-4E12-9D99-02379C83B815}"/>
+                <a16:creationId xmlns:a16="http://schemas.microsoft.com/office/drawing/2014/main" id="{46A7AE90-E3ED-4CBF-A7F6-1F6523577072}"/>
               </a:ext>
             </a:extLst>
           </p:cNvPr>
@@ -16968,7 +16968,7 @@
           <p:cNvPr id="42" name="">
             <a:extLst xmlns:a="http://schemas.openxmlformats.org/drawingml/2006/main">
               <a:ext uri="{FF2B5EF4-FFF2-40B4-BE49-F238E27FC236}">
-                <a16:creationId xmlns:a16="http://schemas.microsoft.com/office/drawing/2014/main" id="{B78A2339-0A5C-4FFC-B761-1886BB006B3C}"/>
+                <a16:creationId xmlns:a16="http://schemas.microsoft.com/office/drawing/2014/main" id="{A42723E5-DD2F-42AC-AEF8-819A612D311A}"/>
               </a:ext>
             </a:extLst>
           </p:cNvPr>
@@ -17035,7 +17035,7 @@
           <p:cNvPr id="43" name="">
             <a:extLst xmlns:a="http://schemas.openxmlformats.org/drawingml/2006/main">
               <a:ext uri="{FF2B5EF4-FFF2-40B4-BE49-F238E27FC236}">
-                <a16:creationId xmlns:a16="http://schemas.microsoft.com/office/drawing/2014/main" id="{0FEA05BC-ED18-47A9-B18E-DE8FABE13DB4}"/>
+                <a16:creationId xmlns:a16="http://schemas.microsoft.com/office/drawing/2014/main" id="{6D222451-F7BC-4BAB-BABB-E10DCB7F95D1}"/>
               </a:ext>
             </a:extLst>
           </p:cNvPr>
@@ -17070,7 +17070,7 @@
           <p:cNvPr id="44" name="">
             <a:extLst xmlns:a="http://schemas.openxmlformats.org/drawingml/2006/main">
               <a:ext uri="{FF2B5EF4-FFF2-40B4-BE49-F238E27FC236}">
-                <a16:creationId xmlns:a16="http://schemas.microsoft.com/office/drawing/2014/main" id="{C22770A2-E22C-4541-87B4-F0C2444937A6}"/>
+                <a16:creationId xmlns:a16="http://schemas.microsoft.com/office/drawing/2014/main" id="{D10C1A1C-5300-4A4E-BF97-B162438F21E0}"/>
               </a:ext>
             </a:extLst>
           </p:cNvPr>
@@ -17120,7 +17120,7 @@
           <p:cNvPr id="45" name="">
             <a:extLst xmlns:a="http://schemas.openxmlformats.org/drawingml/2006/main">
               <a:ext uri="{FF2B5EF4-FFF2-40B4-BE49-F238E27FC236}">
-                <a16:creationId xmlns:a16="http://schemas.microsoft.com/office/drawing/2014/main" id="{DF6C7761-5113-4C80-BD3E-FC0161896692}"/>
+                <a16:creationId xmlns:a16="http://schemas.microsoft.com/office/drawing/2014/main" id="{128EBB01-95D5-4B32-BACF-C6ABE50B4FFD}"/>
               </a:ext>
             </a:extLst>
           </p:cNvPr>
@@ -17170,7 +17170,7 @@
           <p:cNvPr id="46" name="">
             <a:extLst xmlns:a="http://schemas.openxmlformats.org/drawingml/2006/main">
               <a:ext uri="{FF2B5EF4-FFF2-40B4-BE49-F238E27FC236}">
-                <a16:creationId xmlns:a16="http://schemas.microsoft.com/office/drawing/2014/main" id="{45B00BC6-BB8C-4F4F-98BF-B4B11F51835E}"/>
+                <a16:creationId xmlns:a16="http://schemas.microsoft.com/office/drawing/2014/main" id="{D229B867-44D1-47ED-B0A8-16AB8F4EFBF1}"/>
               </a:ext>
             </a:extLst>
           </p:cNvPr>
@@ -17201,7 +17201,7 @@
           <p:cNvPr id="47" name="source-4">
             <a:extLst xmlns:a="http://schemas.openxmlformats.org/drawingml/2006/main">
               <a:ext uri="{FF2B5EF4-FFF2-40B4-BE49-F238E27FC236}">
-                <a16:creationId xmlns:a16="http://schemas.microsoft.com/office/drawing/2014/main" id="{B410C05E-C62B-4A59-A31E-2BB25D6B9187}"/>
+                <a16:creationId xmlns:a16="http://schemas.microsoft.com/office/drawing/2014/main" id="{30A32FBD-7239-42BE-A526-C57BC5392971}"/>
               </a:ext>
             </a:extLst>
           </p:cNvPr>
@@ -17251,7 +17251,7 @@
           <p:cNvPr id="48" name="page-4">
             <a:extLst xmlns:a="http://schemas.openxmlformats.org/drawingml/2006/main">
               <a:ext uri="{FF2B5EF4-FFF2-40B4-BE49-F238E27FC236}">
-                <a16:creationId xmlns:a16="http://schemas.microsoft.com/office/drawing/2014/main" id="{25B52782-070B-454F-A627-E4124D491F88}"/>
+                <a16:creationId xmlns:a16="http://schemas.microsoft.com/office/drawing/2014/main" id="{C2A1892B-BBE5-435E-BBA7-2ECD4120E2B4}"/>
               </a:ext>
             </a:extLst>
           </p:cNvPr>
@@ -17299,7 +17299,7 @@
     </p:spTree>
     <p:extLst>
       <p:ext uri="{BB962C8B-B14F-4D97-AF65-F5344CB8AC3E}">
-        <p14:creationId xmlns:p14="http://schemas.microsoft.com/office/powerpoint/2010/main" val="1581744459"/>
+        <p14:creationId xmlns:p14="http://schemas.microsoft.com/office/powerpoint/2010/main" val="471816339"/>
       </p:ext>
     </p:extLst>
   </p:cSld>
@@ -17330,7 +17330,7 @@
           <p:cNvPr id="43" name="kicker-5">
             <a:extLst xmlns:a="http://schemas.openxmlformats.org/drawingml/2006/main">
               <a:ext uri="{FF2B5EF4-FFF2-40B4-BE49-F238E27FC236}">
-                <a16:creationId xmlns:a16="http://schemas.microsoft.com/office/drawing/2014/main" id="{924F3AB4-76F7-405C-8028-F2CF9A02A809}"/>
+                <a16:creationId xmlns:a16="http://schemas.microsoft.com/office/drawing/2014/main" id="{618A35C3-47C4-48F6-A39A-BF7540858594}"/>
               </a:ext>
             </a:extLst>
           </p:cNvPr>
@@ -17380,7 +17380,7 @@
           <p:cNvPr id="2" name="title-5">
             <a:extLst xmlns:a="http://schemas.openxmlformats.org/drawingml/2006/main">
               <a:ext uri="{FF2B5EF4-FFF2-40B4-BE49-F238E27FC236}">
-                <a16:creationId xmlns:a16="http://schemas.microsoft.com/office/drawing/2014/main" id="{0CAABA8B-50AC-4769-BD14-8034690BB191}"/>
+                <a16:creationId xmlns:a16="http://schemas.microsoft.com/office/drawing/2014/main" id="{929C1CE2-E695-47E4-A694-83011D1A8763}"/>
               </a:ext>
             </a:extLst>
           </p:cNvPr>
@@ -17430,7 +17430,7 @@
           <p:cNvPr id="3" name="">
             <a:extLst xmlns:a="http://schemas.openxmlformats.org/drawingml/2006/main">
               <a:ext uri="{FF2B5EF4-FFF2-40B4-BE49-F238E27FC236}">
-                <a16:creationId xmlns:a16="http://schemas.microsoft.com/office/drawing/2014/main" id="{FE2460B0-00CA-416B-AF0F-89FAFF5531D6}"/>
+                <a16:creationId xmlns:a16="http://schemas.microsoft.com/office/drawing/2014/main" id="{042A1347-FE9D-43D3-893B-5EAD4AA415B1}"/>
               </a:ext>
             </a:extLst>
           </p:cNvPr>
@@ -17461,7 +17461,7 @@
           <p:cNvPr id="4" name="">
             <a:extLst xmlns:a="http://schemas.openxmlformats.org/drawingml/2006/main">
               <a:ext uri="{FF2B5EF4-FFF2-40B4-BE49-F238E27FC236}">
-                <a16:creationId xmlns:a16="http://schemas.microsoft.com/office/drawing/2014/main" id="{662C7CFB-C4FA-4B42-80FE-81A79A17559E}"/>
+                <a16:creationId xmlns:a16="http://schemas.microsoft.com/office/drawing/2014/main" id="{FA5E9D00-EF1F-4D55-9AE4-D81B295C68DB}"/>
               </a:ext>
             </a:extLst>
           </p:cNvPr>
@@ -17511,7 +17511,7 @@
           <p:cNvPr id="5" name="">
             <a:extLst xmlns:a="http://schemas.openxmlformats.org/drawingml/2006/main">
               <a:ext uri="{FF2B5EF4-FFF2-40B4-BE49-F238E27FC236}">
-                <a16:creationId xmlns:a16="http://schemas.microsoft.com/office/drawing/2014/main" id="{181780FD-4834-4686-AB2C-01301FFBE416}"/>
+                <a16:creationId xmlns:a16="http://schemas.microsoft.com/office/drawing/2014/main" id="{EED90EB8-F55C-4460-8A13-A501F78E0060}"/>
               </a:ext>
             </a:extLst>
           </p:cNvPr>
@@ -17552,7 +17552,7 @@
           <p:cNvPr id="6" name="">
             <a:extLst xmlns:a="http://schemas.openxmlformats.org/drawingml/2006/main">
               <a:ext uri="{FF2B5EF4-FFF2-40B4-BE49-F238E27FC236}">
-                <a16:creationId xmlns:a16="http://schemas.microsoft.com/office/drawing/2014/main" id="{347B71AD-7683-4D90-842D-D893D12CC996}"/>
+                <a16:creationId xmlns:a16="http://schemas.microsoft.com/office/drawing/2014/main" id="{610B8C89-8FC4-4790-8C34-84172DB5FE54}"/>
               </a:ext>
             </a:extLst>
           </p:cNvPr>
@@ -17602,7 +17602,7 @@
           <p:cNvPr id="7" name="">
             <a:extLst xmlns:a="http://schemas.openxmlformats.org/drawingml/2006/main">
               <a:ext uri="{FF2B5EF4-FFF2-40B4-BE49-F238E27FC236}">
-                <a16:creationId xmlns:a16="http://schemas.microsoft.com/office/drawing/2014/main" id="{D86B13D3-AC31-4139-9916-20FB47178CE4}"/>
+                <a16:creationId xmlns:a16="http://schemas.microsoft.com/office/drawing/2014/main" id="{1355E712-AC15-4DED-9D35-25A08FF1B3E0}"/>
               </a:ext>
             </a:extLst>
           </p:cNvPr>
@@ -17637,7 +17637,7 @@
           <p:cNvPr id="8" name="">
             <a:extLst xmlns:a="http://schemas.openxmlformats.org/drawingml/2006/main">
               <a:ext uri="{FF2B5EF4-FFF2-40B4-BE49-F238E27FC236}">
-                <a16:creationId xmlns:a16="http://schemas.microsoft.com/office/drawing/2014/main" id="{4DF91B90-EDC3-4D65-BD0C-5E2B4A28BA21}"/>
+                <a16:creationId xmlns:a16="http://schemas.microsoft.com/office/drawing/2014/main" id="{6E507E20-8586-46A7-836E-4C0B73834D68}"/>
               </a:ext>
             </a:extLst>
           </p:cNvPr>
@@ -17687,7 +17687,7 @@
           <p:cNvPr id="9" name="">
             <a:extLst xmlns:a="http://schemas.openxmlformats.org/drawingml/2006/main">
               <a:ext uri="{FF2B5EF4-FFF2-40B4-BE49-F238E27FC236}">
-                <a16:creationId xmlns:a16="http://schemas.microsoft.com/office/drawing/2014/main" id="{18BC1209-E044-4371-96E0-48131727A261}"/>
+                <a16:creationId xmlns:a16="http://schemas.microsoft.com/office/drawing/2014/main" id="{AE467811-FC93-4158-9BA3-3781BFC53D49}"/>
               </a:ext>
             </a:extLst>
           </p:cNvPr>
@@ -17722,7 +17722,7 @@
           <p:cNvPr id="10" name="">
             <a:extLst xmlns:a="http://schemas.openxmlformats.org/drawingml/2006/main">
               <a:ext uri="{FF2B5EF4-FFF2-40B4-BE49-F238E27FC236}">
-                <a16:creationId xmlns:a16="http://schemas.microsoft.com/office/drawing/2014/main" id="{2924391C-324A-4CBE-B1C9-BBCE81CAFB05}"/>
+                <a16:creationId xmlns:a16="http://schemas.microsoft.com/office/drawing/2014/main" id="{A75D73B8-BA07-4BE0-A075-93BB10F7773A}"/>
               </a:ext>
             </a:extLst>
           </p:cNvPr>
@@ -17772,7 +17772,7 @@
           <p:cNvPr id="11" name="">
             <a:extLst xmlns:a="http://schemas.openxmlformats.org/drawingml/2006/main">
               <a:ext uri="{FF2B5EF4-FFF2-40B4-BE49-F238E27FC236}">
-                <a16:creationId xmlns:a16="http://schemas.microsoft.com/office/drawing/2014/main" id="{BD5C5FB0-46B3-4E79-B8B4-3847329F1466}"/>
+                <a16:creationId xmlns:a16="http://schemas.microsoft.com/office/drawing/2014/main" id="{7C524ADE-CD38-4284-AF6B-41DB71A46F1D}"/>
               </a:ext>
             </a:extLst>
           </p:cNvPr>
@@ -17807,7 +17807,7 @@
           <p:cNvPr id="12" name="">
             <a:extLst xmlns:a="http://schemas.openxmlformats.org/drawingml/2006/main">
               <a:ext uri="{FF2B5EF4-FFF2-40B4-BE49-F238E27FC236}">
-                <a16:creationId xmlns:a16="http://schemas.microsoft.com/office/drawing/2014/main" id="{CE1CDAC1-F803-436B-B705-D2BBDE508A82}"/>
+                <a16:creationId xmlns:a16="http://schemas.microsoft.com/office/drawing/2014/main" id="{FC7CCE28-F4AB-4028-A3A5-24A9A3FAC690}"/>
               </a:ext>
             </a:extLst>
           </p:cNvPr>
@@ -17857,7 +17857,7 @@
           <p:cNvPr id="13" name="">
             <a:extLst xmlns:a="http://schemas.openxmlformats.org/drawingml/2006/main">
               <a:ext uri="{FF2B5EF4-FFF2-40B4-BE49-F238E27FC236}">
-                <a16:creationId xmlns:a16="http://schemas.microsoft.com/office/drawing/2014/main" id="{43E49A6A-3C96-46F3-BDFA-F44C31B0CB04}"/>
+                <a16:creationId xmlns:a16="http://schemas.microsoft.com/office/drawing/2014/main" id="{A07B4E95-ACEB-489F-8094-78BE2AD71B1B}"/>
               </a:ext>
             </a:extLst>
           </p:cNvPr>
@@ -17898,7 +17898,7 @@
           <p:cNvPr id="14" name="">
             <a:extLst xmlns:a="http://schemas.openxmlformats.org/drawingml/2006/main">
               <a:ext uri="{FF2B5EF4-FFF2-40B4-BE49-F238E27FC236}">
-                <a16:creationId xmlns:a16="http://schemas.microsoft.com/office/drawing/2014/main" id="{B6C7F01D-898D-49DA-96C7-77823B205BF9}"/>
+                <a16:creationId xmlns:a16="http://schemas.microsoft.com/office/drawing/2014/main" id="{DFD4B71B-9175-4345-ACBB-7B4DA70FBD1C}"/>
               </a:ext>
             </a:extLst>
           </p:cNvPr>
@@ -17948,7 +17948,7 @@
           <p:cNvPr id="15" name="">
             <a:extLst xmlns:a="http://schemas.openxmlformats.org/drawingml/2006/main">
               <a:ext uri="{FF2B5EF4-FFF2-40B4-BE49-F238E27FC236}">
-                <a16:creationId xmlns:a16="http://schemas.microsoft.com/office/drawing/2014/main" id="{6DCF6FE2-E6D8-4DC3-B41F-4450B3309AB4}"/>
+                <a16:creationId xmlns:a16="http://schemas.microsoft.com/office/drawing/2014/main" id="{187FB47C-845B-45E6-84ED-964B06B639B6}"/>
               </a:ext>
             </a:extLst>
           </p:cNvPr>
@@ -17983,7 +17983,7 @@
           <p:cNvPr id="16" name="">
             <a:extLst xmlns:a="http://schemas.openxmlformats.org/drawingml/2006/main">
               <a:ext uri="{FF2B5EF4-FFF2-40B4-BE49-F238E27FC236}">
-                <a16:creationId xmlns:a16="http://schemas.microsoft.com/office/drawing/2014/main" id="{21C1D41C-D8D1-4F43-8C2C-FF81BD7B9300}"/>
+                <a16:creationId xmlns:a16="http://schemas.microsoft.com/office/drawing/2014/main" id="{3DDB91DA-D18D-4292-BB47-E5641A7945F4}"/>
               </a:ext>
             </a:extLst>
           </p:cNvPr>
@@ -18033,7 +18033,7 @@
           <p:cNvPr id="17" name="">
             <a:extLst xmlns:a="http://schemas.openxmlformats.org/drawingml/2006/main">
               <a:ext uri="{FF2B5EF4-FFF2-40B4-BE49-F238E27FC236}">
-                <a16:creationId xmlns:a16="http://schemas.microsoft.com/office/drawing/2014/main" id="{4D1B5BD6-BA18-4973-BAE3-ABB98A2744C0}"/>
+                <a16:creationId xmlns:a16="http://schemas.microsoft.com/office/drawing/2014/main" id="{7E1E3E31-74EC-4429-B379-9B3D415BC0FF}"/>
               </a:ext>
             </a:extLst>
           </p:cNvPr>
@@ -18068,7 +18068,7 @@
           <p:cNvPr id="18" name="">
             <a:extLst xmlns:a="http://schemas.openxmlformats.org/drawingml/2006/main">
               <a:ext uri="{FF2B5EF4-FFF2-40B4-BE49-F238E27FC236}">
-                <a16:creationId xmlns:a16="http://schemas.microsoft.com/office/drawing/2014/main" id="{DBC09783-DC86-4433-937F-3FA4610A964D}"/>
+                <a16:creationId xmlns:a16="http://schemas.microsoft.com/office/drawing/2014/main" id="{F0FC9A51-4584-4AC8-803A-96348FA59FD3}"/>
               </a:ext>
             </a:extLst>
           </p:cNvPr>
@@ -18118,7 +18118,7 @@
           <p:cNvPr id="19" name="">
             <a:extLst xmlns:a="http://schemas.openxmlformats.org/drawingml/2006/main">
               <a:ext uri="{FF2B5EF4-FFF2-40B4-BE49-F238E27FC236}">
-                <a16:creationId xmlns:a16="http://schemas.microsoft.com/office/drawing/2014/main" id="{0E781974-DEB0-4DD7-AE3C-65FFFD4727AF}"/>
+                <a16:creationId xmlns:a16="http://schemas.microsoft.com/office/drawing/2014/main" id="{0E3C90E9-3DBD-4E2F-B683-4AC4F32FED35}"/>
               </a:ext>
             </a:extLst>
           </p:cNvPr>
@@ -18153,7 +18153,7 @@
           <p:cNvPr id="20" name="">
             <a:extLst xmlns:a="http://schemas.openxmlformats.org/drawingml/2006/main">
               <a:ext uri="{FF2B5EF4-FFF2-40B4-BE49-F238E27FC236}">
-                <a16:creationId xmlns:a16="http://schemas.microsoft.com/office/drawing/2014/main" id="{17FAE886-5E27-499B-A6B1-189D66B4FA5B}"/>
+                <a16:creationId xmlns:a16="http://schemas.microsoft.com/office/drawing/2014/main" id="{C2313B14-671F-4421-BE8C-E5C3DDED62DB}"/>
               </a:ext>
             </a:extLst>
           </p:cNvPr>
@@ -18203,7 +18203,7 @@
           <p:cNvPr id="21" name="">
             <a:extLst xmlns:a="http://schemas.openxmlformats.org/drawingml/2006/main">
               <a:ext uri="{FF2B5EF4-FFF2-40B4-BE49-F238E27FC236}">
-                <a16:creationId xmlns:a16="http://schemas.microsoft.com/office/drawing/2014/main" id="{A4F94258-6E64-4BA1-820F-A481821109E4}"/>
+                <a16:creationId xmlns:a16="http://schemas.microsoft.com/office/drawing/2014/main" id="{CECB8BC6-F6BA-4ED8-AD90-EE7CEBCCCB2C}"/>
               </a:ext>
             </a:extLst>
           </p:cNvPr>
@@ -18244,7 +18244,7 @@
           <p:cNvPr id="22" name="">
             <a:extLst xmlns:a="http://schemas.openxmlformats.org/drawingml/2006/main">
               <a:ext uri="{FF2B5EF4-FFF2-40B4-BE49-F238E27FC236}">
-                <a16:creationId xmlns:a16="http://schemas.microsoft.com/office/drawing/2014/main" id="{96A0B664-4D0D-4D3F-802E-4DAD4EDE175D}"/>
+                <a16:creationId xmlns:a16="http://schemas.microsoft.com/office/drawing/2014/main" id="{D598A079-97B4-4730-B30A-6139C0D571ED}"/>
               </a:ext>
             </a:extLst>
           </p:cNvPr>
@@ -18294,7 +18294,7 @@
           <p:cNvPr id="23" name="">
             <a:extLst xmlns:a="http://schemas.openxmlformats.org/drawingml/2006/main">
               <a:ext uri="{FF2B5EF4-FFF2-40B4-BE49-F238E27FC236}">
-                <a16:creationId xmlns:a16="http://schemas.microsoft.com/office/drawing/2014/main" id="{438D50E0-2355-4C43-B6C8-C3C458601098}"/>
+                <a16:creationId xmlns:a16="http://schemas.microsoft.com/office/drawing/2014/main" id="{25B6E4C2-6906-488F-9E0F-41703D94AC62}"/>
               </a:ext>
             </a:extLst>
           </p:cNvPr>
@@ -18329,7 +18329,7 @@
           <p:cNvPr id="24" name="">
             <a:extLst xmlns:a="http://schemas.openxmlformats.org/drawingml/2006/main">
               <a:ext uri="{FF2B5EF4-FFF2-40B4-BE49-F238E27FC236}">
-                <a16:creationId xmlns:a16="http://schemas.microsoft.com/office/drawing/2014/main" id="{209CBDC2-DF61-4C4D-8963-1EB0940E5BF5}"/>
+                <a16:creationId xmlns:a16="http://schemas.microsoft.com/office/drawing/2014/main" id="{75EE1D62-4C42-427E-9798-1AF849425FCC}"/>
               </a:ext>
             </a:extLst>
           </p:cNvPr>
@@ -18379,7 +18379,7 @@
           <p:cNvPr id="25" name="">
             <a:extLst xmlns:a="http://schemas.openxmlformats.org/drawingml/2006/main">
               <a:ext uri="{FF2B5EF4-FFF2-40B4-BE49-F238E27FC236}">
-                <a16:creationId xmlns:a16="http://schemas.microsoft.com/office/drawing/2014/main" id="{13E17B3A-7162-40E6-8DA4-E16F6D0EA1BC}"/>
+                <a16:creationId xmlns:a16="http://schemas.microsoft.com/office/drawing/2014/main" id="{624A71BB-5E7A-42E2-8688-04E42520BF1E}"/>
               </a:ext>
             </a:extLst>
           </p:cNvPr>
@@ -18414,7 +18414,7 @@
           <p:cNvPr id="26" name="">
             <a:extLst xmlns:a="http://schemas.openxmlformats.org/drawingml/2006/main">
               <a:ext uri="{FF2B5EF4-FFF2-40B4-BE49-F238E27FC236}">
-                <a16:creationId xmlns:a16="http://schemas.microsoft.com/office/drawing/2014/main" id="{67A4E429-B7EA-4C2A-B889-7129FAD1BD5C}"/>
+                <a16:creationId xmlns:a16="http://schemas.microsoft.com/office/drawing/2014/main" id="{3263A4C6-AE77-4C2D-9562-A621B395F31D}"/>
               </a:ext>
             </a:extLst>
           </p:cNvPr>
@@ -18464,7 +18464,7 @@
           <p:cNvPr id="27" name="">
             <a:extLst xmlns:a="http://schemas.openxmlformats.org/drawingml/2006/main">
               <a:ext uri="{FF2B5EF4-FFF2-40B4-BE49-F238E27FC236}">
-                <a16:creationId xmlns:a16="http://schemas.microsoft.com/office/drawing/2014/main" id="{9A99F522-152F-4236-941E-6335ADDFA9A4}"/>
+                <a16:creationId xmlns:a16="http://schemas.microsoft.com/office/drawing/2014/main" id="{0C3DE6BF-071E-451A-9FBF-C039E5379692}"/>
               </a:ext>
             </a:extLst>
           </p:cNvPr>
@@ -18499,7 +18499,7 @@
           <p:cNvPr id="28" name="">
             <a:extLst xmlns:a="http://schemas.openxmlformats.org/drawingml/2006/main">
               <a:ext uri="{FF2B5EF4-FFF2-40B4-BE49-F238E27FC236}">
-                <a16:creationId xmlns:a16="http://schemas.microsoft.com/office/drawing/2014/main" id="{E9562022-B311-42F0-B8CA-26B6035995C6}"/>
+                <a16:creationId xmlns:a16="http://schemas.microsoft.com/office/drawing/2014/main" id="{DB4D1CFC-5FBB-4639-B5A2-2C159D2A5864}"/>
               </a:ext>
             </a:extLst>
           </p:cNvPr>
@@ -18549,7 +18549,7 @@
           <p:cNvPr id="29" name="">
             <a:extLst xmlns:a="http://schemas.openxmlformats.org/drawingml/2006/main">
               <a:ext uri="{FF2B5EF4-FFF2-40B4-BE49-F238E27FC236}">
-                <a16:creationId xmlns:a16="http://schemas.microsoft.com/office/drawing/2014/main" id="{808F9D3E-9B2E-4793-B5B3-C238B4B8A472}"/>
+                <a16:creationId xmlns:a16="http://schemas.microsoft.com/office/drawing/2014/main" id="{B2715886-AFE9-4E27-B173-9C55CA1795ED}"/>
               </a:ext>
             </a:extLst>
           </p:cNvPr>
@@ -18590,7 +18590,7 @@
           <p:cNvPr id="30" name="">
             <a:extLst xmlns:a="http://schemas.openxmlformats.org/drawingml/2006/main">
               <a:ext uri="{FF2B5EF4-FFF2-40B4-BE49-F238E27FC236}">
-                <a16:creationId xmlns:a16="http://schemas.microsoft.com/office/drawing/2014/main" id="{C105B6DC-FC85-45B6-A579-32832F966EF0}"/>
+                <a16:creationId xmlns:a16="http://schemas.microsoft.com/office/drawing/2014/main" id="{2B7EB13F-123E-4A63-952C-11D03B164556}"/>
               </a:ext>
             </a:extLst>
           </p:cNvPr>
@@ -18640,7 +18640,7 @@
           <p:cNvPr id="31" name="">
             <a:extLst xmlns:a="http://schemas.openxmlformats.org/drawingml/2006/main">
               <a:ext uri="{FF2B5EF4-FFF2-40B4-BE49-F238E27FC236}">
-                <a16:creationId xmlns:a16="http://schemas.microsoft.com/office/drawing/2014/main" id="{36E2095D-A339-4169-9CA1-30B1292913E6}"/>
+                <a16:creationId xmlns:a16="http://schemas.microsoft.com/office/drawing/2014/main" id="{7388AA65-AB7B-4A90-8617-D29FB6F7F84B}"/>
               </a:ext>
             </a:extLst>
           </p:cNvPr>
@@ -18675,7 +18675,7 @@
           <p:cNvPr id="32" name="">
             <a:extLst xmlns:a="http://schemas.openxmlformats.org/drawingml/2006/main">
               <a:ext uri="{FF2B5EF4-FFF2-40B4-BE49-F238E27FC236}">
-                <a16:creationId xmlns:a16="http://schemas.microsoft.com/office/drawing/2014/main" id="{36AF00FD-889C-4F6C-B131-4D8E13D84E28}"/>
+                <a16:creationId xmlns:a16="http://schemas.microsoft.com/office/drawing/2014/main" id="{4A14B5C4-943A-46B9-8766-6D0187E36836}"/>
               </a:ext>
             </a:extLst>
           </p:cNvPr>
@@ -18725,7 +18725,7 @@
           <p:cNvPr id="33" name="">
             <a:extLst xmlns:a="http://schemas.openxmlformats.org/drawingml/2006/main">
               <a:ext uri="{FF2B5EF4-FFF2-40B4-BE49-F238E27FC236}">
-                <a16:creationId xmlns:a16="http://schemas.microsoft.com/office/drawing/2014/main" id="{E003E87C-4F6C-4AC3-A10A-6EE64FB41981}"/>
+                <a16:creationId xmlns:a16="http://schemas.microsoft.com/office/drawing/2014/main" id="{85493658-E4EF-4AD9-A95F-629AE027FB4F}"/>
               </a:ext>
             </a:extLst>
           </p:cNvPr>
@@ -18760,7 +18760,7 @@
           <p:cNvPr id="34" name="">
             <a:extLst xmlns:a="http://schemas.openxmlformats.org/drawingml/2006/main">
               <a:ext uri="{FF2B5EF4-FFF2-40B4-BE49-F238E27FC236}">
-                <a16:creationId xmlns:a16="http://schemas.microsoft.com/office/drawing/2014/main" id="{24C706F7-C83C-4B05-AAFA-32B2130578D9}"/>
+                <a16:creationId xmlns:a16="http://schemas.microsoft.com/office/drawing/2014/main" id="{98FCB2CF-1EE7-497A-B286-045814546142}"/>
               </a:ext>
             </a:extLst>
           </p:cNvPr>
@@ -18810,7 +18810,7 @@
           <p:cNvPr id="35" name="">
             <a:extLst xmlns:a="http://schemas.openxmlformats.org/drawingml/2006/main">
               <a:ext uri="{FF2B5EF4-FFF2-40B4-BE49-F238E27FC236}">
-                <a16:creationId xmlns:a16="http://schemas.microsoft.com/office/drawing/2014/main" id="{B80227E8-38FE-4FE3-BDC1-C4B2B6791E85}"/>
+                <a16:creationId xmlns:a16="http://schemas.microsoft.com/office/drawing/2014/main" id="{BB1014E1-2CAF-4C22-90C5-68763CD5C692}"/>
               </a:ext>
             </a:extLst>
           </p:cNvPr>
@@ -18845,7 +18845,7 @@
           <p:cNvPr id="36" name="">
             <a:extLst xmlns:a="http://schemas.openxmlformats.org/drawingml/2006/main">
               <a:ext uri="{FF2B5EF4-FFF2-40B4-BE49-F238E27FC236}">
-                <a16:creationId xmlns:a16="http://schemas.microsoft.com/office/drawing/2014/main" id="{CE5E912F-1F2E-46FB-BD2B-7CA26C50A738}"/>
+                <a16:creationId xmlns:a16="http://schemas.microsoft.com/office/drawing/2014/main" id="{7143EFC3-B83B-4C0F-B1F6-2A038B37FE08}"/>
               </a:ext>
             </a:extLst>
           </p:cNvPr>
@@ -18895,7 +18895,7 @@
           <p:cNvPr id="37" name="">
             <a:extLst xmlns:a="http://schemas.openxmlformats.org/drawingml/2006/main">
               <a:ext uri="{FF2B5EF4-FFF2-40B4-BE49-F238E27FC236}">
-                <a16:creationId xmlns:a16="http://schemas.microsoft.com/office/drawing/2014/main" id="{4D877C43-D094-45B8-B0B9-22E9FC9AFFFA}"/>
+                <a16:creationId xmlns:a16="http://schemas.microsoft.com/office/drawing/2014/main" id="{82C9C97A-FA13-44C0-88EA-E7CB3D941CC1}"/>
               </a:ext>
             </a:extLst>
           </p:cNvPr>
@@ -18930,7 +18930,7 @@
           <p:cNvPr id="38" name="">
             <a:extLst xmlns:a="http://schemas.openxmlformats.org/drawingml/2006/main">
               <a:ext uri="{FF2B5EF4-FFF2-40B4-BE49-F238E27FC236}">
-                <a16:creationId xmlns:a16="http://schemas.microsoft.com/office/drawing/2014/main" id="{C94CAAC5-A0BA-4F46-9F26-E2DFADA550A8}"/>
+                <a16:creationId xmlns:a16="http://schemas.microsoft.com/office/drawing/2014/main" id="{8936C3D0-A7A2-4B99-AAED-96BB4E6E1D18}"/>
               </a:ext>
             </a:extLst>
           </p:cNvPr>
@@ -18980,7 +18980,7 @@
           <p:cNvPr id="39" name="">
             <a:extLst xmlns:a="http://schemas.openxmlformats.org/drawingml/2006/main">
               <a:ext uri="{FF2B5EF4-FFF2-40B4-BE49-F238E27FC236}">
-                <a16:creationId xmlns:a16="http://schemas.microsoft.com/office/drawing/2014/main" id="{C00D764F-D160-4D3B-9979-858FEFB1FB20}"/>
+                <a16:creationId xmlns:a16="http://schemas.microsoft.com/office/drawing/2014/main" id="{CD973F10-E094-4278-8BC6-AFABB4541FBC}"/>
               </a:ext>
             </a:extLst>
           </p:cNvPr>
@@ -19030,7 +19030,7 @@
           <p:cNvPr id="40" name="">
             <a:extLst xmlns:a="http://schemas.openxmlformats.org/drawingml/2006/main">
               <a:ext uri="{FF2B5EF4-FFF2-40B4-BE49-F238E27FC236}">
-                <a16:creationId xmlns:a16="http://schemas.microsoft.com/office/drawing/2014/main" id="{F3139F0E-0E1A-4101-A393-D2A27E54D504}"/>
+                <a16:creationId xmlns:a16="http://schemas.microsoft.com/office/drawing/2014/main" id="{CB798A52-0FFA-4905-998A-47D62BA2A5AA}"/>
               </a:ext>
             </a:extLst>
           </p:cNvPr>
@@ -19061,7 +19061,7 @@
           <p:cNvPr id="41" name="source-5">
             <a:extLst xmlns:a="http://schemas.openxmlformats.org/drawingml/2006/main">
               <a:ext uri="{FF2B5EF4-FFF2-40B4-BE49-F238E27FC236}">
-                <a16:creationId xmlns:a16="http://schemas.microsoft.com/office/drawing/2014/main" id="{4DC4D951-EBF2-4355-BA73-3E98DC6EEA7E}"/>
+                <a16:creationId xmlns:a16="http://schemas.microsoft.com/office/drawing/2014/main" id="{58B1EABB-07CA-4A7D-BF3A-158969B1B08F}"/>
               </a:ext>
             </a:extLst>
           </p:cNvPr>
@@ -19111,7 +19111,7 @@
           <p:cNvPr id="42" name="page-5">
             <a:extLst xmlns:a="http://schemas.openxmlformats.org/drawingml/2006/main">
               <a:ext uri="{FF2B5EF4-FFF2-40B4-BE49-F238E27FC236}">
-                <a16:creationId xmlns:a16="http://schemas.microsoft.com/office/drawing/2014/main" id="{2BEBC254-4BF6-4B15-ABCA-6C919D52CD9A}"/>
+                <a16:creationId xmlns:a16="http://schemas.microsoft.com/office/drawing/2014/main" id="{F98A9595-74B4-418D-A2AB-9414F3B855F5}"/>
               </a:ext>
             </a:extLst>
           </p:cNvPr>
@@ -19159,7 +19159,7 @@
     </p:spTree>
     <p:extLst>
       <p:ext uri="{BB962C8B-B14F-4D97-AF65-F5344CB8AC3E}">
-        <p14:creationId xmlns:p14="http://schemas.microsoft.com/office/powerpoint/2010/main" val="784401618"/>
+        <p14:creationId xmlns:p14="http://schemas.microsoft.com/office/powerpoint/2010/main" val="1248703227"/>
       </p:ext>
     </p:extLst>
   </p:cSld>
@@ -19190,7 +19190,7 @@
           <p:cNvPr id="36" name="kicker-6">
             <a:extLst xmlns:a="http://schemas.openxmlformats.org/drawingml/2006/main">
               <a:ext uri="{FF2B5EF4-FFF2-40B4-BE49-F238E27FC236}">
-                <a16:creationId xmlns:a16="http://schemas.microsoft.com/office/drawing/2014/main" id="{2599ABB6-07E4-4971-957F-DF7552D10563}"/>
+                <a16:creationId xmlns:a16="http://schemas.microsoft.com/office/drawing/2014/main" id="{42801365-F285-45DD-8B42-D668DEFF3FA9}"/>
               </a:ext>
             </a:extLst>
           </p:cNvPr>
@@ -19240,7 +19240,7 @@
           <p:cNvPr id="2" name="title-6">
             <a:extLst xmlns:a="http://schemas.openxmlformats.org/drawingml/2006/main">
               <a:ext uri="{FF2B5EF4-FFF2-40B4-BE49-F238E27FC236}">
-                <a16:creationId xmlns:a16="http://schemas.microsoft.com/office/drawing/2014/main" id="{0878B60B-0635-4DF3-AD17-2995707604DA}"/>
+                <a16:creationId xmlns:a16="http://schemas.microsoft.com/office/drawing/2014/main" id="{8F6851D2-DB83-451B-BE05-8F2A496193EF}"/>
               </a:ext>
             </a:extLst>
           </p:cNvPr>
@@ -19290,7 +19290,7 @@
           <p:cNvPr id="3" name="">
             <a:extLst xmlns:a="http://schemas.openxmlformats.org/drawingml/2006/main">
               <a:ext uri="{FF2B5EF4-FFF2-40B4-BE49-F238E27FC236}">
-                <a16:creationId xmlns:a16="http://schemas.microsoft.com/office/drawing/2014/main" id="{DD943A92-3A9A-4033-B95F-B5FEBFB774DB}"/>
+                <a16:creationId xmlns:a16="http://schemas.microsoft.com/office/drawing/2014/main" id="{79AF736C-198F-41D0-84B1-1B79BD7BDE97}"/>
               </a:ext>
             </a:extLst>
           </p:cNvPr>
@@ -19321,7 +19321,7 @@
           <p:cNvPr id="4" name="">
             <a:extLst xmlns:a="http://schemas.openxmlformats.org/drawingml/2006/main">
               <a:ext uri="{FF2B5EF4-FFF2-40B4-BE49-F238E27FC236}">
-                <a16:creationId xmlns:a16="http://schemas.microsoft.com/office/drawing/2014/main" id="{71DC1E76-B20D-405B-8174-483F7040F600}"/>
+                <a16:creationId xmlns:a16="http://schemas.microsoft.com/office/drawing/2014/main" id="{7DB4089A-AC56-4A7F-8546-B04A8294C5C0}"/>
               </a:ext>
             </a:extLst>
           </p:cNvPr>
@@ -19371,7 +19371,7 @@
           <p:cNvPr id="5" name="">
             <a:extLst xmlns:a="http://schemas.openxmlformats.org/drawingml/2006/main">
               <a:ext uri="{FF2B5EF4-FFF2-40B4-BE49-F238E27FC236}">
-                <a16:creationId xmlns:a16="http://schemas.microsoft.com/office/drawing/2014/main" id="{22BC1458-260D-454D-B6E2-3E5E219D336A}"/>
+                <a16:creationId xmlns:a16="http://schemas.microsoft.com/office/drawing/2014/main" id="{FB4470C1-1CEE-4AAA-ABCC-A3AAB88BA8CF}"/>
               </a:ext>
             </a:extLst>
           </p:cNvPr>
@@ -19404,7 +19404,7 @@
           <p:cNvPr id="6" name="">
             <a:extLst xmlns:a="http://schemas.openxmlformats.org/drawingml/2006/main">
               <a:ext uri="{FF2B5EF4-FFF2-40B4-BE49-F238E27FC236}">
-                <a16:creationId xmlns:a16="http://schemas.microsoft.com/office/drawing/2014/main" id="{D0416776-BAA9-4665-B508-CC8A41C40240}"/>
+                <a16:creationId xmlns:a16="http://schemas.microsoft.com/office/drawing/2014/main" id="{36CF15EE-62AC-4DB2-844C-664FA9DE7A47}"/>
               </a:ext>
             </a:extLst>
           </p:cNvPr>
@@ -19445,7 +19445,7 @@
           <p:cNvPr id="7" name="">
             <a:extLst xmlns:a="http://schemas.openxmlformats.org/drawingml/2006/main">
               <a:ext uri="{FF2B5EF4-FFF2-40B4-BE49-F238E27FC236}">
-                <a16:creationId xmlns:a16="http://schemas.microsoft.com/office/drawing/2014/main" id="{07ABC6F5-B8CB-45CC-A7B4-9F421083B2C7}"/>
+                <a16:creationId xmlns:a16="http://schemas.microsoft.com/office/drawing/2014/main" id="{43737E8B-B18B-4387-9BA8-3FADDB4D103B}"/>
               </a:ext>
             </a:extLst>
           </p:cNvPr>
@@ -19495,7 +19495,7 @@
           <p:cNvPr id="8" name="">
             <a:extLst xmlns:a="http://schemas.openxmlformats.org/drawingml/2006/main">
               <a:ext uri="{FF2B5EF4-FFF2-40B4-BE49-F238E27FC236}">
-                <a16:creationId xmlns:a16="http://schemas.microsoft.com/office/drawing/2014/main" id="{D5609CC6-2AC4-42D2-9E3F-0EB995ECB538}"/>
+                <a16:creationId xmlns:a16="http://schemas.microsoft.com/office/drawing/2014/main" id="{7423D10F-44DC-4823-A5CF-77AD5D0C12DF}"/>
               </a:ext>
             </a:extLst>
           </p:cNvPr>
@@ -19545,7 +19545,7 @@
           <p:cNvPr id="9" name="">
             <a:extLst xmlns:a="http://schemas.openxmlformats.org/drawingml/2006/main">
               <a:ext uri="{FF2B5EF4-FFF2-40B4-BE49-F238E27FC236}">
-                <a16:creationId xmlns:a16="http://schemas.microsoft.com/office/drawing/2014/main" id="{D2DC9306-DD9B-4E5B-91BE-CBC2F341791C}"/>
+                <a16:creationId xmlns:a16="http://schemas.microsoft.com/office/drawing/2014/main" id="{8A3C3A45-5959-4F2D-BD1D-4016EB31B563}"/>
               </a:ext>
             </a:extLst>
           </p:cNvPr>
@@ -19595,7 +19595,7 @@
           <p:cNvPr id="10" name="">
             <a:extLst xmlns:a="http://schemas.openxmlformats.org/drawingml/2006/main">
               <a:ext uri="{FF2B5EF4-FFF2-40B4-BE49-F238E27FC236}">
-                <a16:creationId xmlns:a16="http://schemas.microsoft.com/office/drawing/2014/main" id="{2948E435-EFFB-4BBF-B3BD-7FB8C02B7150}"/>
+                <a16:creationId xmlns:a16="http://schemas.microsoft.com/office/drawing/2014/main" id="{960123F4-2BED-4500-8C62-9FE703E5186D}"/>
               </a:ext>
             </a:extLst>
           </p:cNvPr>
@@ -19626,7 +19626,7 @@
           <p:cNvPr id="11" name="">
             <a:extLst xmlns:a="http://schemas.openxmlformats.org/drawingml/2006/main">
               <a:ext uri="{FF2B5EF4-FFF2-40B4-BE49-F238E27FC236}">
-                <a16:creationId xmlns:a16="http://schemas.microsoft.com/office/drawing/2014/main" id="{41144988-E3F1-4248-A36F-74E9906756B7}"/>
+                <a16:creationId xmlns:a16="http://schemas.microsoft.com/office/drawing/2014/main" id="{39270B24-E48A-4AFB-945B-8F14EE8E1816}"/>
               </a:ext>
             </a:extLst>
           </p:cNvPr>
@@ -19676,7 +19676,7 @@
           <p:cNvPr id="12" name="">
             <a:extLst xmlns:a="http://schemas.openxmlformats.org/drawingml/2006/main">
               <a:ext uri="{FF2B5EF4-FFF2-40B4-BE49-F238E27FC236}">
-                <a16:creationId xmlns:a16="http://schemas.microsoft.com/office/drawing/2014/main" id="{E4334294-FBE2-4A84-912B-74478FF46332}"/>
+                <a16:creationId xmlns:a16="http://schemas.microsoft.com/office/drawing/2014/main" id="{D996BB65-A02B-467D-A329-2D889970A8FE}"/>
               </a:ext>
             </a:extLst>
           </p:cNvPr>
@@ -19726,7 +19726,7 @@
           <p:cNvPr id="13" name="">
             <a:extLst xmlns:a="http://schemas.openxmlformats.org/drawingml/2006/main">
               <a:ext uri="{FF2B5EF4-FFF2-40B4-BE49-F238E27FC236}">
-                <a16:creationId xmlns:a16="http://schemas.microsoft.com/office/drawing/2014/main" id="{2450A96E-3181-4859-B80C-A867B7B351F6}"/>
+                <a16:creationId xmlns:a16="http://schemas.microsoft.com/office/drawing/2014/main" id="{1A39E986-BF7C-4DC8-B5F1-6D8958069A21}"/>
               </a:ext>
             </a:extLst>
           </p:cNvPr>
@@ -19776,7 +19776,7 @@
           <p:cNvPr id="14" name="">
             <a:extLst xmlns:a="http://schemas.openxmlformats.org/drawingml/2006/main">
               <a:ext uri="{FF2B5EF4-FFF2-40B4-BE49-F238E27FC236}">
-                <a16:creationId xmlns:a16="http://schemas.microsoft.com/office/drawing/2014/main" id="{21DBCAF3-A2CC-45F4-AB7B-804B5FC8BDFD}"/>
+                <a16:creationId xmlns:a16="http://schemas.microsoft.com/office/drawing/2014/main" id="{8DBCA879-03F9-4FDF-844D-459169FDFA9A}"/>
               </a:ext>
             </a:extLst>
           </p:cNvPr>
@@ -19826,7 +19826,7 @@
           <p:cNvPr id="15" name="">
             <a:extLst xmlns:a="http://schemas.openxmlformats.org/drawingml/2006/main">
               <a:ext uri="{FF2B5EF4-FFF2-40B4-BE49-F238E27FC236}">
-                <a16:creationId xmlns:a16="http://schemas.microsoft.com/office/drawing/2014/main" id="{3E1A53AA-6DFF-4AD0-82E0-25533C70EB2F}"/>
+                <a16:creationId xmlns:a16="http://schemas.microsoft.com/office/drawing/2014/main" id="{43BF0021-9A4A-4A3E-B404-E503066C0004}"/>
               </a:ext>
             </a:extLst>
           </p:cNvPr>
@@ -19876,7 +19876,7 @@
           <p:cNvPr id="16" name="">
             <a:extLst xmlns:a="http://schemas.openxmlformats.org/drawingml/2006/main">
               <a:ext uri="{FF2B5EF4-FFF2-40B4-BE49-F238E27FC236}">
-                <a16:creationId xmlns:a16="http://schemas.microsoft.com/office/drawing/2014/main" id="{FDF9300E-79C7-4CA3-86A5-ADE01DDD5D8C}"/>
+                <a16:creationId xmlns:a16="http://schemas.microsoft.com/office/drawing/2014/main" id="{5052D6A4-E502-4C1C-B2CC-729143491A66}"/>
               </a:ext>
             </a:extLst>
           </p:cNvPr>
@@ -19917,7 +19917,7 @@
           <p:cNvPr id="17" name="">
             <a:extLst xmlns:a="http://schemas.openxmlformats.org/drawingml/2006/main">
               <a:ext uri="{FF2B5EF4-FFF2-40B4-BE49-F238E27FC236}">
-                <a16:creationId xmlns:a16="http://schemas.microsoft.com/office/drawing/2014/main" id="{CD1DC070-8EB0-40E0-AFBF-C317DE5C78EF}"/>
+                <a16:creationId xmlns:a16="http://schemas.microsoft.com/office/drawing/2014/main" id="{161519CA-BB45-49E4-A1D0-1F93147C92DE}"/>
               </a:ext>
             </a:extLst>
           </p:cNvPr>
@@ -19967,7 +19967,7 @@
           <p:cNvPr id="18" name="">
             <a:extLst xmlns:a="http://schemas.openxmlformats.org/drawingml/2006/main">
               <a:ext uri="{FF2B5EF4-FFF2-40B4-BE49-F238E27FC236}">
-                <a16:creationId xmlns:a16="http://schemas.microsoft.com/office/drawing/2014/main" id="{69CBC65B-23EC-4B25-BF03-C52163051F36}"/>
+                <a16:creationId xmlns:a16="http://schemas.microsoft.com/office/drawing/2014/main" id="{25F7D93A-4495-42C5-A1F8-19C1F34CBAAF}"/>
               </a:ext>
             </a:extLst>
           </p:cNvPr>
@@ -20017,7 +20017,7 @@
           <p:cNvPr id="19" name="">
             <a:extLst xmlns:a="http://schemas.openxmlformats.org/drawingml/2006/main">
               <a:ext uri="{FF2B5EF4-FFF2-40B4-BE49-F238E27FC236}">
-                <a16:creationId xmlns:a16="http://schemas.microsoft.com/office/drawing/2014/main" id="{B062C088-9704-4BF9-9593-4ACCA70E1EFC}"/>
+                <a16:creationId xmlns:a16="http://schemas.microsoft.com/office/drawing/2014/main" id="{63E4F18B-9580-4962-825C-BF513DE0A8AD}"/>
               </a:ext>
             </a:extLst>
           </p:cNvPr>
@@ -20067,7 +20067,7 @@
           <p:cNvPr id="20" name="">
             <a:extLst xmlns:a="http://schemas.openxmlformats.org/drawingml/2006/main">
               <a:ext uri="{FF2B5EF4-FFF2-40B4-BE49-F238E27FC236}">
-                <a16:creationId xmlns:a16="http://schemas.microsoft.com/office/drawing/2014/main" id="{57C99803-B970-4705-9321-33321BCBE3DF}"/>
+                <a16:creationId xmlns:a16="http://schemas.microsoft.com/office/drawing/2014/main" id="{704B4357-5E18-4E2A-B885-1239977DFD5F}"/>
               </a:ext>
             </a:extLst>
           </p:cNvPr>
@@ -20117,7 +20117,7 @@
           <p:cNvPr id="21" name="">
             <a:extLst xmlns:a="http://schemas.openxmlformats.org/drawingml/2006/main">
               <a:ext uri="{FF2B5EF4-FFF2-40B4-BE49-F238E27FC236}">
-                <a16:creationId xmlns:a16="http://schemas.microsoft.com/office/drawing/2014/main" id="{C2DD0BBF-8246-497F-B6BA-18833BEB42DE}"/>
+                <a16:creationId xmlns:a16="http://schemas.microsoft.com/office/drawing/2014/main" id="{58D65BA3-BEC0-478E-930D-F55FB5F0CE76}"/>
               </a:ext>
             </a:extLst>
           </p:cNvPr>
@@ -20148,7 +20148,7 @@
           <p:cNvPr id="22" name="">
             <a:extLst xmlns:a="http://schemas.openxmlformats.org/drawingml/2006/main">
               <a:ext uri="{FF2B5EF4-FFF2-40B4-BE49-F238E27FC236}">
-                <a16:creationId xmlns:a16="http://schemas.microsoft.com/office/drawing/2014/main" id="{A2239794-6321-434D-93F9-D2A3690CF55A}"/>
+                <a16:creationId xmlns:a16="http://schemas.microsoft.com/office/drawing/2014/main" id="{35F87DDA-027D-474F-9F94-A890D5B80CD8}"/>
               </a:ext>
             </a:extLst>
           </p:cNvPr>
@@ -20198,7 +20198,7 @@
           <p:cNvPr id="23" name="">
             <a:extLst xmlns:a="http://schemas.openxmlformats.org/drawingml/2006/main">
               <a:ext uri="{FF2B5EF4-FFF2-40B4-BE49-F238E27FC236}">
-                <a16:creationId xmlns:a16="http://schemas.microsoft.com/office/drawing/2014/main" id="{186FE927-5402-4C66-94BD-27B56B2EBC59}"/>
+                <a16:creationId xmlns:a16="http://schemas.microsoft.com/office/drawing/2014/main" id="{BD62F074-F446-481B-BA64-1D7DCF101FAC}"/>
               </a:ext>
             </a:extLst>
           </p:cNvPr>
@@ -20248,7 +20248,7 @@
           <p:cNvPr id="24" name="">
             <a:extLst xmlns:a="http://schemas.openxmlformats.org/drawingml/2006/main">
               <a:ext uri="{FF2B5EF4-FFF2-40B4-BE49-F238E27FC236}">
-                <a16:creationId xmlns:a16="http://schemas.microsoft.com/office/drawing/2014/main" id="{B3189D8D-28BA-43A5-AAE4-DD6A63503137}"/>
+                <a16:creationId xmlns:a16="http://schemas.microsoft.com/office/drawing/2014/main" id="{01468A19-A986-4314-A5C9-E38BC14BEC35}"/>
               </a:ext>
             </a:extLst>
           </p:cNvPr>
@@ -20298,7 +20298,7 @@
           <p:cNvPr id="25" name="">
             <a:extLst xmlns:a="http://schemas.openxmlformats.org/drawingml/2006/main">
               <a:ext uri="{FF2B5EF4-FFF2-40B4-BE49-F238E27FC236}">
-                <a16:creationId xmlns:a16="http://schemas.microsoft.com/office/drawing/2014/main" id="{2C0CFF20-DB12-4A99-95D3-09AEE3606C93}"/>
+                <a16:creationId xmlns:a16="http://schemas.microsoft.com/office/drawing/2014/main" id="{BCDB3E40-EA8B-4CE7-AD52-F46BCF025575}"/>
               </a:ext>
             </a:extLst>
           </p:cNvPr>
@@ -20329,7 +20329,7 @@
           <p:cNvPr id="26" name="">
             <a:extLst xmlns:a="http://schemas.openxmlformats.org/drawingml/2006/main">
               <a:ext uri="{FF2B5EF4-FFF2-40B4-BE49-F238E27FC236}">
-                <a16:creationId xmlns:a16="http://schemas.microsoft.com/office/drawing/2014/main" id="{164C4F09-D40F-44F8-9F34-1A761B6B8391}"/>
+                <a16:creationId xmlns:a16="http://schemas.microsoft.com/office/drawing/2014/main" id="{AF8D649F-2C2E-4D17-A627-134C9078B2A6}"/>
               </a:ext>
             </a:extLst>
           </p:cNvPr>
@@ -20379,7 +20379,7 @@
           <p:cNvPr id="27" name="">
             <a:extLst xmlns:a="http://schemas.openxmlformats.org/drawingml/2006/main">
               <a:ext uri="{FF2B5EF4-FFF2-40B4-BE49-F238E27FC236}">
-                <a16:creationId xmlns:a16="http://schemas.microsoft.com/office/drawing/2014/main" id="{65B729BA-6F23-4385-976D-A937C1CFE982}"/>
+                <a16:creationId xmlns:a16="http://schemas.microsoft.com/office/drawing/2014/main" id="{6A3C62A6-9CBF-474A-BE4A-D9E6B1166B0D}"/>
               </a:ext>
             </a:extLst>
           </p:cNvPr>
@@ -20429,7 +20429,7 @@
           <p:cNvPr id="28" name="">
             <a:extLst xmlns:a="http://schemas.openxmlformats.org/drawingml/2006/main">
               <a:ext uri="{FF2B5EF4-FFF2-40B4-BE49-F238E27FC236}">
-                <a16:creationId xmlns:a16="http://schemas.microsoft.com/office/drawing/2014/main" id="{3EFDAB20-AE24-401E-9421-B4E6A8D2DD02}"/>
+                <a16:creationId xmlns:a16="http://schemas.microsoft.com/office/drawing/2014/main" id="{B6E67E58-3D35-4880-AC67-62EFF8B2D227}"/>
               </a:ext>
             </a:extLst>
           </p:cNvPr>
@@ -20479,7 +20479,7 @@
           <p:cNvPr id="29" name="">
             <a:extLst xmlns:a="http://schemas.openxmlformats.org/drawingml/2006/main">
               <a:ext uri="{FF2B5EF4-FFF2-40B4-BE49-F238E27FC236}">
-                <a16:creationId xmlns:a16="http://schemas.microsoft.com/office/drawing/2014/main" id="{B9A52391-F3AB-486E-97D7-8E2DF6B22A99}"/>
+                <a16:creationId xmlns:a16="http://schemas.microsoft.com/office/drawing/2014/main" id="{857F2D87-E453-4B9D-9213-8AE73D5B264F}"/>
               </a:ext>
             </a:extLst>
           </p:cNvPr>
@@ -20510,7 +20510,7 @@
           <p:cNvPr id="30" name="">
             <a:extLst xmlns:a="http://schemas.openxmlformats.org/drawingml/2006/main">
               <a:ext uri="{FF2B5EF4-FFF2-40B4-BE49-F238E27FC236}">
-                <a16:creationId xmlns:a16="http://schemas.microsoft.com/office/drawing/2014/main" id="{3B915C68-4F75-4BF2-B1C1-90C74FD0A729}"/>
+                <a16:creationId xmlns:a16="http://schemas.microsoft.com/office/drawing/2014/main" id="{3CE59EA0-4A49-4400-AAA3-8EAF95457DFC}"/>
               </a:ext>
             </a:extLst>
           </p:cNvPr>
@@ -20545,7 +20545,7 @@
           <p:cNvPr id="31" name="">
             <a:extLst xmlns:a="http://schemas.openxmlformats.org/drawingml/2006/main">
               <a:ext uri="{FF2B5EF4-FFF2-40B4-BE49-F238E27FC236}">
-                <a16:creationId xmlns:a16="http://schemas.microsoft.com/office/drawing/2014/main" id="{1A8612D9-E80E-49A7-AA34-CA8F1760F9C5}"/>
+                <a16:creationId xmlns:a16="http://schemas.microsoft.com/office/drawing/2014/main" id="{4B16FD4E-6963-42F1-973A-A6429703465F}"/>
               </a:ext>
             </a:extLst>
           </p:cNvPr>
@@ -20595,7 +20595,7 @@
           <p:cNvPr id="32" name="">
             <a:extLst xmlns:a="http://schemas.openxmlformats.org/drawingml/2006/main">
               <a:ext uri="{FF2B5EF4-FFF2-40B4-BE49-F238E27FC236}">
-                <a16:creationId xmlns:a16="http://schemas.microsoft.com/office/drawing/2014/main" id="{C66AB4B4-288D-4AB1-ADC4-793D84B23691}"/>
+                <a16:creationId xmlns:a16="http://schemas.microsoft.com/office/drawing/2014/main" id="{07FCBF51-C3E5-4A84-B769-2AA74ABEC560}"/>
               </a:ext>
             </a:extLst>
           </p:cNvPr>
@@ -20645,7 +20645,7 @@
           <p:cNvPr id="33" name="">
             <a:extLst xmlns:a="http://schemas.openxmlformats.org/drawingml/2006/main">
               <a:ext uri="{FF2B5EF4-FFF2-40B4-BE49-F238E27FC236}">
-                <a16:creationId xmlns:a16="http://schemas.microsoft.com/office/drawing/2014/main" id="{332D968B-6E68-4F50-AAAA-9C20BCE1D283}"/>
+                <a16:creationId xmlns:a16="http://schemas.microsoft.com/office/drawing/2014/main" id="{30000E33-A0DE-4A14-8011-7041E2980313}"/>
               </a:ext>
             </a:extLst>
           </p:cNvPr>
@@ -20676,7 +20676,7 @@
           <p:cNvPr id="34" name="source-6">
             <a:extLst xmlns:a="http://schemas.openxmlformats.org/drawingml/2006/main">
               <a:ext uri="{FF2B5EF4-FFF2-40B4-BE49-F238E27FC236}">
-                <a16:creationId xmlns:a16="http://schemas.microsoft.com/office/drawing/2014/main" id="{257D4432-4688-41E2-9D88-8FB07C0603F5}"/>
+                <a16:creationId xmlns:a16="http://schemas.microsoft.com/office/drawing/2014/main" id="{A4DB96C9-64F6-4880-8856-D71217AA6D3D}"/>
               </a:ext>
             </a:extLst>
           </p:cNvPr>
@@ -20726,7 +20726,7 @@
           <p:cNvPr id="35" name="page-6">
             <a:extLst xmlns:a="http://schemas.openxmlformats.org/drawingml/2006/main">
               <a:ext uri="{FF2B5EF4-FFF2-40B4-BE49-F238E27FC236}">
-                <a16:creationId xmlns:a16="http://schemas.microsoft.com/office/drawing/2014/main" id="{760EE6E6-C66C-4B4B-9EE6-318D633A5F41}"/>
+                <a16:creationId xmlns:a16="http://schemas.microsoft.com/office/drawing/2014/main" id="{E61EBC4D-4E30-4C20-95C3-4FF50712265D}"/>
               </a:ext>
             </a:extLst>
           </p:cNvPr>
@@ -20774,7 +20774,7 @@
     </p:spTree>
     <p:extLst>
       <p:ext uri="{BB962C8B-B14F-4D97-AF65-F5344CB8AC3E}">
-        <p14:creationId xmlns:p14="http://schemas.microsoft.com/office/powerpoint/2010/main" val="25027811"/>
+        <p14:creationId xmlns:p14="http://schemas.microsoft.com/office/powerpoint/2010/main" val="1822816628"/>
       </p:ext>
     </p:extLst>
   </p:cSld>
@@ -20805,7 +20805,7 @@
           <p:cNvPr id="40" name="kicker-7">
             <a:extLst xmlns:a="http://schemas.openxmlformats.org/drawingml/2006/main">
               <a:ext uri="{FF2B5EF4-FFF2-40B4-BE49-F238E27FC236}">
-                <a16:creationId xmlns:a16="http://schemas.microsoft.com/office/drawing/2014/main" id="{9AC84BD7-1F5A-4D00-AB75-6AE79FB7EBF9}"/>
+                <a16:creationId xmlns:a16="http://schemas.microsoft.com/office/drawing/2014/main" id="{7D7A4F50-4021-4493-89C5-44922ADC2290}"/>
               </a:ext>
             </a:extLst>
           </p:cNvPr>
@@ -20855,7 +20855,7 @@
           <p:cNvPr id="2" name="title-7">
             <a:extLst xmlns:a="http://schemas.openxmlformats.org/drawingml/2006/main">
               <a:ext uri="{FF2B5EF4-FFF2-40B4-BE49-F238E27FC236}">
-                <a16:creationId xmlns:a16="http://schemas.microsoft.com/office/drawing/2014/main" id="{EF31A820-6534-42DB-B221-D63BAE48A681}"/>
+                <a16:creationId xmlns:a16="http://schemas.microsoft.com/office/drawing/2014/main" id="{EDED1E81-0260-4C0A-824D-29800D6E6F59}"/>
               </a:ext>
             </a:extLst>
           </p:cNvPr>
@@ -20905,7 +20905,7 @@
           <p:cNvPr id="3" name="">
             <a:extLst xmlns:a="http://schemas.openxmlformats.org/drawingml/2006/main">
               <a:ext uri="{FF2B5EF4-FFF2-40B4-BE49-F238E27FC236}">
-                <a16:creationId xmlns:a16="http://schemas.microsoft.com/office/drawing/2014/main" id="{0BED1D7A-2FAD-42A8-80DD-3BC902166601}"/>
+                <a16:creationId xmlns:a16="http://schemas.microsoft.com/office/drawing/2014/main" id="{00DF7FDC-B97E-4D81-878F-9D718FC60A3C}"/>
               </a:ext>
             </a:extLst>
           </p:cNvPr>
@@ -20936,7 +20936,7 @@
           <p:cNvPr id="4" name="">
             <a:extLst xmlns:a="http://schemas.openxmlformats.org/drawingml/2006/main">
               <a:ext uri="{FF2B5EF4-FFF2-40B4-BE49-F238E27FC236}">
-                <a16:creationId xmlns:a16="http://schemas.microsoft.com/office/drawing/2014/main" id="{9DDAB2AF-43C7-45ED-B1A8-4CC502DA95E8}"/>
+                <a16:creationId xmlns:a16="http://schemas.microsoft.com/office/drawing/2014/main" id="{4DDC0752-2554-4B47-B863-F4F234CF8CA4}"/>
               </a:ext>
             </a:extLst>
           </p:cNvPr>
@@ -20986,7 +20986,7 @@
           <p:cNvPr id="5" name="">
             <a:extLst xmlns:a="http://schemas.openxmlformats.org/drawingml/2006/main">
               <a:ext uri="{FF2B5EF4-FFF2-40B4-BE49-F238E27FC236}">
-                <a16:creationId xmlns:a16="http://schemas.microsoft.com/office/drawing/2014/main" id="{73E1DEFF-9C23-4B3D-808F-0788820B6116}"/>
+                <a16:creationId xmlns:a16="http://schemas.microsoft.com/office/drawing/2014/main" id="{A30FFEAA-D089-46D3-8740-3C5E26236F8B}"/>
               </a:ext>
             </a:extLst>
           </p:cNvPr>
@@ -21019,7 +21019,7 @@
           <p:cNvPr id="6" name="">
             <a:extLst xmlns:a="http://schemas.openxmlformats.org/drawingml/2006/main">
               <a:ext uri="{FF2B5EF4-FFF2-40B4-BE49-F238E27FC236}">
-                <a16:creationId xmlns:a16="http://schemas.microsoft.com/office/drawing/2014/main" id="{7E7785E4-C854-47A3-AF12-9F4E5238B1B0}"/>
+                <a16:creationId xmlns:a16="http://schemas.microsoft.com/office/drawing/2014/main" id="{D10DD7F2-F8C5-4BA9-8C68-7191BFB3870A}"/>
               </a:ext>
             </a:extLst>
           </p:cNvPr>
@@ -21052,7 +21052,7 @@
           <p:cNvPr id="7" name="">
             <a:extLst xmlns:a="http://schemas.openxmlformats.org/drawingml/2006/main">
               <a:ext uri="{FF2B5EF4-FFF2-40B4-BE49-F238E27FC236}">
-                <a16:creationId xmlns:a16="http://schemas.microsoft.com/office/drawing/2014/main" id="{5B495E2B-9192-4448-8A6F-C57696ACE841}"/>
+                <a16:creationId xmlns:a16="http://schemas.microsoft.com/office/drawing/2014/main" id="{291149CA-9347-49D1-9FDB-7A1130944FF1}"/>
               </a:ext>
             </a:extLst>
           </p:cNvPr>
@@ -21085,7 +21085,7 @@
           <p:cNvPr id="8" name="">
             <a:extLst xmlns:a="http://schemas.openxmlformats.org/drawingml/2006/main">
               <a:ext uri="{FF2B5EF4-FFF2-40B4-BE49-F238E27FC236}">
-                <a16:creationId xmlns:a16="http://schemas.microsoft.com/office/drawing/2014/main" id="{52C025D1-9D07-4E79-A264-C5DF5EB9C85B}"/>
+                <a16:creationId xmlns:a16="http://schemas.microsoft.com/office/drawing/2014/main" id="{DA09B373-81A0-41C0-B69D-6BF24E70B7F5}"/>
               </a:ext>
             </a:extLst>
           </p:cNvPr>
@@ -21118,7 +21118,7 @@
           <p:cNvPr id="9" name="">
             <a:extLst xmlns:a="http://schemas.openxmlformats.org/drawingml/2006/main">
               <a:ext uri="{FF2B5EF4-FFF2-40B4-BE49-F238E27FC236}">
-                <a16:creationId xmlns:a16="http://schemas.microsoft.com/office/drawing/2014/main" id="{B6B36102-4F4F-4EDF-BFAD-9B6082687020}"/>
+                <a16:creationId xmlns:a16="http://schemas.microsoft.com/office/drawing/2014/main" id="{51BF6E31-CFF4-4395-B31D-4C671365F92D}"/>
               </a:ext>
             </a:extLst>
           </p:cNvPr>
@@ -21153,7 +21153,7 @@
           <p:cNvPr id="10" name="">
             <a:extLst xmlns:a="http://schemas.openxmlformats.org/drawingml/2006/main">
               <a:ext uri="{FF2B5EF4-FFF2-40B4-BE49-F238E27FC236}">
-                <a16:creationId xmlns:a16="http://schemas.microsoft.com/office/drawing/2014/main" id="{16C22D7D-77B2-481A-BBD2-F1CDD6684F55}"/>
+                <a16:creationId xmlns:a16="http://schemas.microsoft.com/office/drawing/2014/main" id="{BE40A079-ACAE-4FEE-B8B9-83513ADE6F0F}"/>
               </a:ext>
             </a:extLst>
           </p:cNvPr>
@@ -21203,7 +21203,7 @@
           <p:cNvPr id="11" name="">
             <a:extLst xmlns:a="http://schemas.openxmlformats.org/drawingml/2006/main">
               <a:ext uri="{FF2B5EF4-FFF2-40B4-BE49-F238E27FC236}">
-                <a16:creationId xmlns:a16="http://schemas.microsoft.com/office/drawing/2014/main" id="{DA7AFB5D-8862-4D25-8F47-247AE2AB91C1}"/>
+                <a16:creationId xmlns:a16="http://schemas.microsoft.com/office/drawing/2014/main" id="{10E81093-FB89-48CC-B02F-C331F12FB1E4}"/>
               </a:ext>
             </a:extLst>
           </p:cNvPr>
@@ -21270,7 +21270,7 @@
           <p:cNvPr id="12" name="">
             <a:extLst xmlns:a="http://schemas.openxmlformats.org/drawingml/2006/main">
               <a:ext uri="{FF2B5EF4-FFF2-40B4-BE49-F238E27FC236}">
-                <a16:creationId xmlns:a16="http://schemas.microsoft.com/office/drawing/2014/main" id="{4485C75F-2057-452E-8A1D-60D6A9E4256A}"/>
+                <a16:creationId xmlns:a16="http://schemas.microsoft.com/office/drawing/2014/main" id="{4FFD879C-7ECD-4C1B-8BA3-CBE950E84CF2}"/>
               </a:ext>
             </a:extLst>
           </p:cNvPr>
@@ -21305,7 +21305,7 @@
           <p:cNvPr id="13" name="">
             <a:extLst xmlns:a="http://schemas.openxmlformats.org/drawingml/2006/main">
               <a:ext uri="{FF2B5EF4-FFF2-40B4-BE49-F238E27FC236}">
-                <a16:creationId xmlns:a16="http://schemas.microsoft.com/office/drawing/2014/main" id="{B9AFC0B8-F448-4794-AD09-39C201795FB7}"/>
+                <a16:creationId xmlns:a16="http://schemas.microsoft.com/office/drawing/2014/main" id="{7737D56E-467C-4AB0-8668-B7CAD7DFE92F}"/>
               </a:ext>
             </a:extLst>
           </p:cNvPr>
@@ -21355,7 +21355,7 @@
           <p:cNvPr id="14" name="">
             <a:extLst xmlns:a="http://schemas.openxmlformats.org/drawingml/2006/main">
               <a:ext uri="{FF2B5EF4-FFF2-40B4-BE49-F238E27FC236}">
-                <a16:creationId xmlns:a16="http://schemas.microsoft.com/office/drawing/2014/main" id="{95CA1CA2-4327-4621-BE2F-C73E135A5E6B}"/>
+                <a16:creationId xmlns:a16="http://schemas.microsoft.com/office/drawing/2014/main" id="{D01BEED4-34B0-4961-B94F-54016421078E}"/>
               </a:ext>
             </a:extLst>
           </p:cNvPr>
@@ -21422,7 +21422,7 @@
           <p:cNvPr id="15" name="">
             <a:extLst xmlns:a="http://schemas.openxmlformats.org/drawingml/2006/main">
               <a:ext uri="{FF2B5EF4-FFF2-40B4-BE49-F238E27FC236}">
-                <a16:creationId xmlns:a16="http://schemas.microsoft.com/office/drawing/2014/main" id="{6FB0EC72-DF27-404F-8EDF-62F2CE2893E4}"/>
+                <a16:creationId xmlns:a16="http://schemas.microsoft.com/office/drawing/2014/main" id="{4ED1ACAF-C688-4069-991C-E4FFA8B68499}"/>
               </a:ext>
             </a:extLst>
           </p:cNvPr>
@@ -21457,7 +21457,7 @@
           <p:cNvPr id="16" name="">
             <a:extLst xmlns:a="http://schemas.openxmlformats.org/drawingml/2006/main">
               <a:ext uri="{FF2B5EF4-FFF2-40B4-BE49-F238E27FC236}">
-                <a16:creationId xmlns:a16="http://schemas.microsoft.com/office/drawing/2014/main" id="{E08A683F-E571-4996-91B1-6BB003874EDA}"/>
+                <a16:creationId xmlns:a16="http://schemas.microsoft.com/office/drawing/2014/main" id="{E3A2FA5F-D8A2-4233-AEE3-F99C9D68DE86}"/>
               </a:ext>
             </a:extLst>
           </p:cNvPr>
@@ -21507,7 +21507,7 @@
           <p:cNvPr id="17" name="">
             <a:extLst xmlns:a="http://schemas.openxmlformats.org/drawingml/2006/main">
               <a:ext uri="{FF2B5EF4-FFF2-40B4-BE49-F238E27FC236}">
-                <a16:creationId xmlns:a16="http://schemas.microsoft.com/office/drawing/2014/main" id="{DCC83D81-F6A0-4465-BC82-1A3999DDB25B}"/>
+                <a16:creationId xmlns:a16="http://schemas.microsoft.com/office/drawing/2014/main" id="{15A6EDA6-51C8-42BD-97A4-1362D177227A}"/>
               </a:ext>
             </a:extLst>
           </p:cNvPr>
@@ -21574,7 +21574,7 @@
           <p:cNvPr id="18" name="">
             <a:extLst xmlns:a="http://schemas.openxmlformats.org/drawingml/2006/main">
               <a:ext uri="{FF2B5EF4-FFF2-40B4-BE49-F238E27FC236}">
-                <a16:creationId xmlns:a16="http://schemas.microsoft.com/office/drawing/2014/main" id="{4ABB0127-BBC7-4FF1-8F58-75592BCF868D}"/>
+                <a16:creationId xmlns:a16="http://schemas.microsoft.com/office/drawing/2014/main" id="{44EAAF04-8907-4E4F-AD3C-ADBF85942358}"/>
               </a:ext>
             </a:extLst>
           </p:cNvPr>
@@ -21609,7 +21609,7 @@
           <p:cNvPr id="19" name="">
             <a:extLst xmlns:a="http://schemas.openxmlformats.org/drawingml/2006/main">
               <a:ext uri="{FF2B5EF4-FFF2-40B4-BE49-F238E27FC236}">
-                <a16:creationId xmlns:a16="http://schemas.microsoft.com/office/drawing/2014/main" id="{EADBC860-B6BE-45FA-AE40-183E68376C9C}"/>
+                <a16:creationId xmlns:a16="http://schemas.microsoft.com/office/drawing/2014/main" id="{67AC4948-4EAA-41C2-86F7-AE3DE7AFE462}"/>
               </a:ext>
             </a:extLst>
           </p:cNvPr>
@@ -21659,7 +21659,7 @@
           <p:cNvPr id="20" name="">
             <a:extLst xmlns:a="http://schemas.openxmlformats.org/drawingml/2006/main">
               <a:ext uri="{FF2B5EF4-FFF2-40B4-BE49-F238E27FC236}">
-                <a16:creationId xmlns:a16="http://schemas.microsoft.com/office/drawing/2014/main" id="{2D86C306-04A5-4B95-A74B-33C2800006A1}"/>
+                <a16:creationId xmlns:a16="http://schemas.microsoft.com/office/drawing/2014/main" id="{4424736B-165B-4143-B347-FA609ADF0CB1}"/>
               </a:ext>
             </a:extLst>
           </p:cNvPr>
@@ -21726,7 +21726,7 @@
           <p:cNvPr id="21" name="">
             <a:extLst xmlns:a="http://schemas.openxmlformats.org/drawingml/2006/main">
               <a:ext uri="{FF2B5EF4-FFF2-40B4-BE49-F238E27FC236}">
-                <a16:creationId xmlns:a16="http://schemas.microsoft.com/office/drawing/2014/main" id="{FE0EE3C1-7756-4ABD-9D41-92841F11A240}"/>
+                <a16:creationId xmlns:a16="http://schemas.microsoft.com/office/drawing/2014/main" id="{7F7B1DD6-CB80-4C60-B020-B93463C6169A}"/>
               </a:ext>
             </a:extLst>
           </p:cNvPr>
@@ -21767,7 +21767,7 @@
           <p:cNvPr id="22" name="">
             <a:extLst xmlns:a="http://schemas.openxmlformats.org/drawingml/2006/main">
               <a:ext uri="{FF2B5EF4-FFF2-40B4-BE49-F238E27FC236}">
-                <a16:creationId xmlns:a16="http://schemas.microsoft.com/office/drawing/2014/main" id="{D2341CE3-C667-47DE-8AA9-7FCD55B902B1}"/>
+                <a16:creationId xmlns:a16="http://schemas.microsoft.com/office/drawing/2014/main" id="{A73AE4B8-27B0-4458-8481-071DE62236FF}"/>
               </a:ext>
             </a:extLst>
           </p:cNvPr>
@@ -21817,7 +21817,7 @@
           <p:cNvPr id="23" name="">
             <a:extLst xmlns:a="http://schemas.openxmlformats.org/drawingml/2006/main">
               <a:ext uri="{FF2B5EF4-FFF2-40B4-BE49-F238E27FC236}">
-                <a16:creationId xmlns:a16="http://schemas.microsoft.com/office/drawing/2014/main" id="{23E3048C-6F9A-4836-B381-953BEB23659D}"/>
+                <a16:creationId xmlns:a16="http://schemas.microsoft.com/office/drawing/2014/main" id="{9C90B000-FC96-407D-A12F-08DCF1D7E833}"/>
               </a:ext>
             </a:extLst>
           </p:cNvPr>
@@ -21884,7 +21884,7 @@
           <p:cNvPr id="24" name="">
             <a:extLst xmlns:a="http://schemas.openxmlformats.org/drawingml/2006/main">
               <a:ext uri="{FF2B5EF4-FFF2-40B4-BE49-F238E27FC236}">
-                <a16:creationId xmlns:a16="http://schemas.microsoft.com/office/drawing/2014/main" id="{01C3373C-0963-467D-A607-ADB21612C6A8}"/>
+                <a16:creationId xmlns:a16="http://schemas.microsoft.com/office/drawing/2014/main" id="{87EBA29B-EF82-4340-BF4B-3F555F45E900}"/>
               </a:ext>
             </a:extLst>
           </p:cNvPr>
@@ -21934,7 +21934,7 @@
           <p:cNvPr id="25" name="">
             <a:extLst xmlns:a="http://schemas.openxmlformats.org/drawingml/2006/main">
               <a:ext uri="{FF2B5EF4-FFF2-40B4-BE49-F238E27FC236}">
-                <a16:creationId xmlns:a16="http://schemas.microsoft.com/office/drawing/2014/main" id="{1CB135E2-2E50-48D0-9B7D-7544FF53467E}"/>
+                <a16:creationId xmlns:a16="http://schemas.microsoft.com/office/drawing/2014/main" id="{B897D94A-C1B2-4A5D-B222-8081E6E0AA11}"/>
               </a:ext>
             </a:extLst>
           </p:cNvPr>
@@ -21969,7 +21969,7 @@
           <p:cNvPr id="26" name="">
             <a:extLst xmlns:a="http://schemas.openxmlformats.org/drawingml/2006/main">
               <a:ext uri="{FF2B5EF4-FFF2-40B4-BE49-F238E27FC236}">
-                <a16:creationId xmlns:a16="http://schemas.microsoft.com/office/drawing/2014/main" id="{7F72A583-7E6F-4C67-B315-E1A10A40932E}"/>
+                <a16:creationId xmlns:a16="http://schemas.microsoft.com/office/drawing/2014/main" id="{A5843389-38D1-41D4-8CEF-E17C42001002}"/>
               </a:ext>
             </a:extLst>
           </p:cNvPr>
@@ -22019,7 +22019,7 @@
           <p:cNvPr id="27" name="">
             <a:extLst xmlns:a="http://schemas.openxmlformats.org/drawingml/2006/main">
               <a:ext uri="{FF2B5EF4-FFF2-40B4-BE49-F238E27FC236}">
-                <a16:creationId xmlns:a16="http://schemas.microsoft.com/office/drawing/2014/main" id="{6E639F33-AC88-4BD6-AE78-ECBFE46E6432}"/>
+                <a16:creationId xmlns:a16="http://schemas.microsoft.com/office/drawing/2014/main" id="{CFDA2308-FEED-4A16-ADD4-8FAA159FF915}"/>
               </a:ext>
             </a:extLst>
           </p:cNvPr>
@@ -22069,7 +22069,7 @@
           <p:cNvPr id="28" name="">
             <a:extLst xmlns:a="http://schemas.openxmlformats.org/drawingml/2006/main">
               <a:ext uri="{FF2B5EF4-FFF2-40B4-BE49-F238E27FC236}">
-                <a16:creationId xmlns:a16="http://schemas.microsoft.com/office/drawing/2014/main" id="{86EFA4ED-616C-40B3-B94F-5EAC4EAD294A}"/>
+                <a16:creationId xmlns:a16="http://schemas.microsoft.com/office/drawing/2014/main" id="{D98C57F3-6C17-4DE1-95C3-72FB6E1E7B95}"/>
               </a:ext>
             </a:extLst>
           </p:cNvPr>
@@ -22119,7 +22119,7 @@
           <p:cNvPr id="29" name="">
             <a:extLst xmlns:a="http://schemas.openxmlformats.org/drawingml/2006/main">
               <a:ext uri="{FF2B5EF4-FFF2-40B4-BE49-F238E27FC236}">
-                <a16:creationId xmlns:a16="http://schemas.microsoft.com/office/drawing/2014/main" id="{B326B4E5-0014-47F5-94A0-1115B5E65688}"/>
+                <a16:creationId xmlns:a16="http://schemas.microsoft.com/office/drawing/2014/main" id="{F51D6580-B2FF-4920-9F27-F9960A74FBCD}"/>
               </a:ext>
             </a:extLst>
           </p:cNvPr>
@@ -22150,7 +22150,7 @@
           <p:cNvPr id="30" name="">
             <a:extLst xmlns:a="http://schemas.openxmlformats.org/drawingml/2006/main">
               <a:ext uri="{FF2B5EF4-FFF2-40B4-BE49-F238E27FC236}">
-                <a16:creationId xmlns:a16="http://schemas.microsoft.com/office/drawing/2014/main" id="{16C12165-8396-43C7-AC6F-21AE2F8ECD0C}"/>
+                <a16:creationId xmlns:a16="http://schemas.microsoft.com/office/drawing/2014/main" id="{B419A719-B8AC-49F0-8183-3A084F96BC78}"/>
               </a:ext>
             </a:extLst>
           </p:cNvPr>
@@ -22200,7 +22200,7 @@
           <p:cNvPr id="31" name="">
             <a:extLst xmlns:a="http://schemas.openxmlformats.org/drawingml/2006/main">
               <a:ext uri="{FF2B5EF4-FFF2-40B4-BE49-F238E27FC236}">
-                <a16:creationId xmlns:a16="http://schemas.microsoft.com/office/drawing/2014/main" id="{CB897E20-B1E0-4C71-B98E-CA11A1540FCB}"/>
+                <a16:creationId xmlns:a16="http://schemas.microsoft.com/office/drawing/2014/main" id="{898074B9-975B-4E38-8660-F9332CA55179}"/>
               </a:ext>
             </a:extLst>
           </p:cNvPr>
@@ -22250,7 +22250,7 @@
           <p:cNvPr id="32" name="">
             <a:extLst xmlns:a="http://schemas.openxmlformats.org/drawingml/2006/main">
               <a:ext uri="{FF2B5EF4-FFF2-40B4-BE49-F238E27FC236}">
-                <a16:creationId xmlns:a16="http://schemas.microsoft.com/office/drawing/2014/main" id="{09278AC4-2A8E-4A26-B526-F97684891D4D}"/>
+                <a16:creationId xmlns:a16="http://schemas.microsoft.com/office/drawing/2014/main" id="{E3C00D96-6D01-4109-8FC9-0FC2B9213737}"/>
               </a:ext>
             </a:extLst>
           </p:cNvPr>
@@ -22300,7 +22300,7 @@
           <p:cNvPr id="33" name="">
             <a:extLst xmlns:a="http://schemas.openxmlformats.org/drawingml/2006/main">
               <a:ext uri="{FF2B5EF4-FFF2-40B4-BE49-F238E27FC236}">
-                <a16:creationId xmlns:a16="http://schemas.microsoft.com/office/drawing/2014/main" id="{9ABF999F-DA7D-4911-A62F-6C9630661BF3}"/>
+                <a16:creationId xmlns:a16="http://schemas.microsoft.com/office/drawing/2014/main" id="{4F2F9C0C-1DC6-4375-ADAE-D70731BA1587}"/>
               </a:ext>
             </a:extLst>
           </p:cNvPr>
@@ -22331,7 +22331,7 @@
           <p:cNvPr id="34" name="">
             <a:extLst xmlns:a="http://schemas.openxmlformats.org/drawingml/2006/main">
               <a:ext uri="{FF2B5EF4-FFF2-40B4-BE49-F238E27FC236}">
-                <a16:creationId xmlns:a16="http://schemas.microsoft.com/office/drawing/2014/main" id="{58B74789-0887-49BA-AB6C-CEC5C342A502}"/>
+                <a16:creationId xmlns:a16="http://schemas.microsoft.com/office/drawing/2014/main" id="{B7CE9F4D-F433-441C-96A8-34D673675D12}"/>
               </a:ext>
             </a:extLst>
           </p:cNvPr>
@@ -22381,7 +22381,7 @@
           <p:cNvPr id="35" name="">
             <a:extLst xmlns:a="http://schemas.openxmlformats.org/drawingml/2006/main">
               <a:ext uri="{FF2B5EF4-FFF2-40B4-BE49-F238E27FC236}">
-                <a16:creationId xmlns:a16="http://schemas.microsoft.com/office/drawing/2014/main" id="{CF1A9821-46A2-4870-B583-385731B9F7DD}"/>
+                <a16:creationId xmlns:a16="http://schemas.microsoft.com/office/drawing/2014/main" id="{C83E159B-A90E-4919-ACFE-90D8C19FA99F}"/>
               </a:ext>
             </a:extLst>
           </p:cNvPr>
@@ -22431,7 +22431,7 @@
           <p:cNvPr id="36" name="">
             <a:extLst xmlns:a="http://schemas.openxmlformats.org/drawingml/2006/main">
               <a:ext uri="{FF2B5EF4-FFF2-40B4-BE49-F238E27FC236}">
-                <a16:creationId xmlns:a16="http://schemas.microsoft.com/office/drawing/2014/main" id="{76D9C160-EA3B-4F0B-94E0-B15317DE26FB}"/>
+                <a16:creationId xmlns:a16="http://schemas.microsoft.com/office/drawing/2014/main" id="{9183107D-F567-4281-9A76-9557A44C0C5E}"/>
               </a:ext>
             </a:extLst>
           </p:cNvPr>
@@ -22481,7 +22481,7 @@
           <p:cNvPr id="37" name="">
             <a:extLst xmlns:a="http://schemas.openxmlformats.org/drawingml/2006/main">
               <a:ext uri="{FF2B5EF4-FFF2-40B4-BE49-F238E27FC236}">
-                <a16:creationId xmlns:a16="http://schemas.microsoft.com/office/drawing/2014/main" id="{A672F945-26EB-4DD1-B9F1-A78C25005D74}"/>
+                <a16:creationId xmlns:a16="http://schemas.microsoft.com/office/drawing/2014/main" id="{44D3C8B9-5B59-47A1-8318-AE71EA0C9A2C}"/>
               </a:ext>
             </a:extLst>
           </p:cNvPr>
@@ -22512,7 +22512,7 @@
           <p:cNvPr id="38" name="source-7">
             <a:extLst xmlns:a="http://schemas.openxmlformats.org/drawingml/2006/main">
               <a:ext uri="{FF2B5EF4-FFF2-40B4-BE49-F238E27FC236}">
-                <a16:creationId xmlns:a16="http://schemas.microsoft.com/office/drawing/2014/main" id="{DA0D36ED-EB40-4917-A3F0-16715CFF0AA5}"/>
+                <a16:creationId xmlns:a16="http://schemas.microsoft.com/office/drawing/2014/main" id="{E5B9D1A5-D4CC-4F4E-A871-C828120885AF}"/>
               </a:ext>
             </a:extLst>
           </p:cNvPr>
@@ -22562,7 +22562,7 @@
           <p:cNvPr id="39" name="page-7">
             <a:extLst xmlns:a="http://schemas.openxmlformats.org/drawingml/2006/main">
               <a:ext uri="{FF2B5EF4-FFF2-40B4-BE49-F238E27FC236}">
-                <a16:creationId xmlns:a16="http://schemas.microsoft.com/office/drawing/2014/main" id="{F912922F-8628-407E-9830-862DA21465F5}"/>
+                <a16:creationId xmlns:a16="http://schemas.microsoft.com/office/drawing/2014/main" id="{8FFB5AD0-C52C-4DF5-B44D-6877374BC840}"/>
               </a:ext>
             </a:extLst>
           </p:cNvPr>
@@ -22610,7 +22610,7 @@
     </p:spTree>
     <p:extLst>
       <p:ext uri="{BB962C8B-B14F-4D97-AF65-F5344CB8AC3E}">
-        <p14:creationId xmlns:p14="http://schemas.microsoft.com/office/powerpoint/2010/main" val="356367732"/>
+        <p14:creationId xmlns:p14="http://schemas.microsoft.com/office/powerpoint/2010/main" val="1424654819"/>
       </p:ext>
     </p:extLst>
   </p:cSld>
@@ -22641,7 +22641,7 @@
           <p:cNvPr id="20" name="kicker-8">
             <a:extLst xmlns:a="http://schemas.openxmlformats.org/drawingml/2006/main">
               <a:ext uri="{FF2B5EF4-FFF2-40B4-BE49-F238E27FC236}">
-                <a16:creationId xmlns:a16="http://schemas.microsoft.com/office/drawing/2014/main" id="{67A36711-7D88-4290-8F06-63309EB507F7}"/>
+                <a16:creationId xmlns:a16="http://schemas.microsoft.com/office/drawing/2014/main" id="{D85C6EC4-40CF-4EE8-A91B-4914215D9AB8}"/>
               </a:ext>
             </a:extLst>
           </p:cNvPr>
@@ -22691,7 +22691,7 @@
           <p:cNvPr id="2" name="title-8">
             <a:extLst xmlns:a="http://schemas.openxmlformats.org/drawingml/2006/main">
               <a:ext uri="{FF2B5EF4-FFF2-40B4-BE49-F238E27FC236}">
-                <a16:creationId xmlns:a16="http://schemas.microsoft.com/office/drawing/2014/main" id="{18E5175F-8A7B-4CD7-99F0-665082F2EE86}"/>
+                <a16:creationId xmlns:a16="http://schemas.microsoft.com/office/drawing/2014/main" id="{0C72DA74-6FA3-4637-AA13-95E5237E96CE}"/>
               </a:ext>
             </a:extLst>
           </p:cNvPr>
@@ -22741,7 +22741,7 @@
           <p:cNvPr id="3" name="">
             <a:extLst xmlns:a="http://schemas.openxmlformats.org/drawingml/2006/main">
               <a:ext uri="{FF2B5EF4-FFF2-40B4-BE49-F238E27FC236}">
-                <a16:creationId xmlns:a16="http://schemas.microsoft.com/office/drawing/2014/main" id="{EB2675D7-576F-48B0-ABE0-89FB3D75FE26}"/>
+                <a16:creationId xmlns:a16="http://schemas.microsoft.com/office/drawing/2014/main" id="{FABD7773-F378-46D6-A376-D7FE19545DB9}"/>
               </a:ext>
             </a:extLst>
           </p:cNvPr>
@@ -22772,7 +22772,7 @@
           <p:cNvPr id="4" name="">
             <a:extLst xmlns:a="http://schemas.openxmlformats.org/drawingml/2006/main">
               <a:ext uri="{FF2B5EF4-FFF2-40B4-BE49-F238E27FC236}">
-                <a16:creationId xmlns:a16="http://schemas.microsoft.com/office/drawing/2014/main" id="{C90E021B-75F2-479B-A6BA-51634624BA9D}"/>
+                <a16:creationId xmlns:a16="http://schemas.microsoft.com/office/drawing/2014/main" id="{20ED478E-2C8E-4015-97E1-2EB8E8DD4DD5}"/>
               </a:ext>
             </a:extLst>
           </p:cNvPr>
@@ -22822,7 +22822,7 @@
           <p:cNvPr id="5" name="">
             <a:extLst xmlns:a="http://schemas.openxmlformats.org/drawingml/2006/main">
               <a:ext uri="{FF2B5EF4-FFF2-40B4-BE49-F238E27FC236}">
-                <a16:creationId xmlns:a16="http://schemas.microsoft.com/office/drawing/2014/main" id="{10C1363E-B166-41B3-8E9F-BD4D26C07247}"/>
+                <a16:creationId xmlns:a16="http://schemas.microsoft.com/office/drawing/2014/main" id="{ACAA3E6F-7202-402E-9092-49BFE2D4B776}"/>
               </a:ext>
             </a:extLst>
           </p:cNvPr>
@@ -22863,7 +22863,7 @@
           <p:cNvPr id="6" name="">
             <a:extLst xmlns:a="http://schemas.openxmlformats.org/drawingml/2006/main">
               <a:ext uri="{FF2B5EF4-FFF2-40B4-BE49-F238E27FC236}">
-                <a16:creationId xmlns:a16="http://schemas.microsoft.com/office/drawing/2014/main" id="{091FA42F-1B1C-434B-991B-EA7FA8D1C7B9}"/>
+                <a16:creationId xmlns:a16="http://schemas.microsoft.com/office/drawing/2014/main" id="{CA967460-6F3E-48C0-8907-12F9C8A2EBB9}"/>
               </a:ext>
             </a:extLst>
           </p:cNvPr>
@@ -22913,7 +22913,7 @@
           <p:cNvPr id="7" name="">
             <a:extLst xmlns:a="http://schemas.openxmlformats.org/drawingml/2006/main">
               <a:ext uri="{FF2B5EF4-FFF2-40B4-BE49-F238E27FC236}">
-                <a16:creationId xmlns:a16="http://schemas.microsoft.com/office/drawing/2014/main" id="{D31D08AA-CFF1-4623-AB8C-E6D10DF467D3}"/>
+                <a16:creationId xmlns:a16="http://schemas.microsoft.com/office/drawing/2014/main" id="{0D2019EA-A1D7-47B6-9BB7-1D63A227B0D1}"/>
               </a:ext>
             </a:extLst>
           </p:cNvPr>
@@ -22963,7 +22963,7 @@
           <p:cNvPr id="8" name="">
             <a:extLst xmlns:a="http://schemas.openxmlformats.org/drawingml/2006/main">
               <a:ext uri="{FF2B5EF4-FFF2-40B4-BE49-F238E27FC236}">
-                <a16:creationId xmlns:a16="http://schemas.microsoft.com/office/drawing/2014/main" id="{B34C9760-AAAC-4DBF-A1E3-FD39014E09C5}"/>
+                <a16:creationId xmlns:a16="http://schemas.microsoft.com/office/drawing/2014/main" id="{FC59DB85-1346-4518-9C51-D4DD4FCFEEEE}"/>
               </a:ext>
             </a:extLst>
           </p:cNvPr>
@@ -23013,7 +23013,7 @@
           <p:cNvPr id="9" name="">
             <a:extLst xmlns:a="http://schemas.openxmlformats.org/drawingml/2006/main">
               <a:ext uri="{FF2B5EF4-FFF2-40B4-BE49-F238E27FC236}">
-                <a16:creationId xmlns:a16="http://schemas.microsoft.com/office/drawing/2014/main" id="{373217E0-A462-489A-BE3D-B31C24E5AE6A}"/>
+                <a16:creationId xmlns:a16="http://schemas.microsoft.com/office/drawing/2014/main" id="{1D5C912B-36EF-4AE5-899F-B35527818B9F}"/>
               </a:ext>
             </a:extLst>
           </p:cNvPr>
@@ -23063,7 +23063,7 @@
           <p:cNvPr id="10" name="">
             <a:extLst xmlns:a="http://schemas.openxmlformats.org/drawingml/2006/main">
               <a:ext uri="{FF2B5EF4-FFF2-40B4-BE49-F238E27FC236}">
-                <a16:creationId xmlns:a16="http://schemas.microsoft.com/office/drawing/2014/main" id="{8062AAB9-CCA9-4E5F-9127-21B629EA9389}"/>
+                <a16:creationId xmlns:a16="http://schemas.microsoft.com/office/drawing/2014/main" id="{0EE2EEEF-3CE9-427D-84EA-D47A4615AF39}"/>
               </a:ext>
             </a:extLst>
           </p:cNvPr>
@@ -23104,7 +23104,7 @@
           <p:cNvPr id="11" name="">
             <a:extLst xmlns:a="http://schemas.openxmlformats.org/drawingml/2006/main">
               <a:ext uri="{FF2B5EF4-FFF2-40B4-BE49-F238E27FC236}">
-                <a16:creationId xmlns:a16="http://schemas.microsoft.com/office/drawing/2014/main" id="{496CCB4B-DB40-49C1-BE27-8FCC7640AC33}"/>
+                <a16:creationId xmlns:a16="http://schemas.microsoft.com/office/drawing/2014/main" id="{81641F71-C01B-4179-915E-C6ECB777DE6A}"/>
               </a:ext>
             </a:extLst>
           </p:cNvPr>
@@ -23154,7 +23154,7 @@
           <p:cNvPr id="12" name="">
             <a:extLst xmlns:a="http://schemas.openxmlformats.org/drawingml/2006/main">
               <a:ext uri="{FF2B5EF4-FFF2-40B4-BE49-F238E27FC236}">
-                <a16:creationId xmlns:a16="http://schemas.microsoft.com/office/drawing/2014/main" id="{0C7BFB41-945E-4960-AA7A-63E2D9EF34B3}"/>
+                <a16:creationId xmlns:a16="http://schemas.microsoft.com/office/drawing/2014/main" id="{194D14D8-44C3-466D-82A0-8073C7F64941}"/>
               </a:ext>
             </a:extLst>
           </p:cNvPr>
@@ -23204,7 +23204,7 @@
           <p:cNvPr id="13" name="">
             <a:extLst xmlns:a="http://schemas.openxmlformats.org/drawingml/2006/main">
               <a:ext uri="{FF2B5EF4-FFF2-40B4-BE49-F238E27FC236}">
-                <a16:creationId xmlns:a16="http://schemas.microsoft.com/office/drawing/2014/main" id="{0FAF1CAD-F838-484E-99A5-4B92E71447F9}"/>
+                <a16:creationId xmlns:a16="http://schemas.microsoft.com/office/drawing/2014/main" id="{36F4F052-AD63-47FA-AD45-8D015AB47A5E}"/>
               </a:ext>
             </a:extLst>
           </p:cNvPr>
@@ -23254,7 +23254,7 @@
           <p:cNvPr id="14" name="">
             <a:extLst xmlns:a="http://schemas.openxmlformats.org/drawingml/2006/main">
               <a:ext uri="{FF2B5EF4-FFF2-40B4-BE49-F238E27FC236}">
-                <a16:creationId xmlns:a16="http://schemas.microsoft.com/office/drawing/2014/main" id="{A5180923-8B1E-4AC0-A504-553FE502E27F}"/>
+                <a16:creationId xmlns:a16="http://schemas.microsoft.com/office/drawing/2014/main" id="{C0B3EEC1-D034-4C64-92B5-DEE5C554854E}"/>
               </a:ext>
             </a:extLst>
           </p:cNvPr>
@@ -23304,7 +23304,7 @@
           <p:cNvPr id="15" name="">
             <a:extLst xmlns:a="http://schemas.openxmlformats.org/drawingml/2006/main">
               <a:ext uri="{FF2B5EF4-FFF2-40B4-BE49-F238E27FC236}">
-                <a16:creationId xmlns:a16="http://schemas.microsoft.com/office/drawing/2014/main" id="{61D17D5C-376D-411F-9AE3-40A60190B615}"/>
+                <a16:creationId xmlns:a16="http://schemas.microsoft.com/office/drawing/2014/main" id="{D36B03E2-464E-4D7B-BE11-46409B2A8474}"/>
               </a:ext>
             </a:extLst>
           </p:cNvPr>
@@ -23339,7 +23339,7 @@
           <p:cNvPr id="16" name="">
             <a:extLst xmlns:a="http://schemas.openxmlformats.org/drawingml/2006/main">
               <a:ext uri="{FF2B5EF4-FFF2-40B4-BE49-F238E27FC236}">
-                <a16:creationId xmlns:a16="http://schemas.microsoft.com/office/drawing/2014/main" id="{2945483A-B50F-4881-89F0-2394632D1405}"/>
+                <a16:creationId xmlns:a16="http://schemas.microsoft.com/office/drawing/2014/main" id="{2C11FE44-4481-4EB3-AA33-FE3630A910C0}"/>
               </a:ext>
             </a:extLst>
           </p:cNvPr>
@@ -23389,7 +23389,7 @@
           <p:cNvPr id="17" name="">
             <a:extLst xmlns:a="http://schemas.openxmlformats.org/drawingml/2006/main">
               <a:ext uri="{FF2B5EF4-FFF2-40B4-BE49-F238E27FC236}">
-                <a16:creationId xmlns:a16="http://schemas.microsoft.com/office/drawing/2014/main" id="{33AE2A18-6A9F-43B4-B7F5-58F57EF17E8A}"/>
+                <a16:creationId xmlns:a16="http://schemas.microsoft.com/office/drawing/2014/main" id="{4F3E40AC-F69B-483F-873D-8DAFC1A3434C}"/>
               </a:ext>
             </a:extLst>
           </p:cNvPr>
@@ -23420,7 +23420,7 @@
           <p:cNvPr id="18" name="source-8">
             <a:extLst xmlns:a="http://schemas.openxmlformats.org/drawingml/2006/main">
               <a:ext uri="{FF2B5EF4-FFF2-40B4-BE49-F238E27FC236}">
-                <a16:creationId xmlns:a16="http://schemas.microsoft.com/office/drawing/2014/main" id="{60C764D7-087A-46A1-AD63-4C0F99EC7FC9}"/>
+                <a16:creationId xmlns:a16="http://schemas.microsoft.com/office/drawing/2014/main" id="{B7A848B1-D2D3-4947-A71B-9F0728DC1F65}"/>
               </a:ext>
             </a:extLst>
           </p:cNvPr>
@@ -23470,7 +23470,7 @@
           <p:cNvPr id="19" name="page-8">
             <a:extLst xmlns:a="http://schemas.openxmlformats.org/drawingml/2006/main">
               <a:ext uri="{FF2B5EF4-FFF2-40B4-BE49-F238E27FC236}">
-                <a16:creationId xmlns:a16="http://schemas.microsoft.com/office/drawing/2014/main" id="{5F780113-BCFB-4B5A-BE1D-2EF28B9D157B}"/>
+                <a16:creationId xmlns:a16="http://schemas.microsoft.com/office/drawing/2014/main" id="{BB6FBEA7-B029-4374-8F9A-F189E13622BB}"/>
               </a:ext>
             </a:extLst>
           </p:cNvPr>
@@ -23518,7 +23518,7 @@
     </p:spTree>
     <p:extLst>
       <p:ext uri="{BB962C8B-B14F-4D97-AF65-F5344CB8AC3E}">
-        <p14:creationId xmlns:p14="http://schemas.microsoft.com/office/powerpoint/2010/main" val="1016838993"/>
+        <p14:creationId xmlns:p14="http://schemas.microsoft.com/office/powerpoint/2010/main" val="175299940"/>
       </p:ext>
     </p:extLst>
   </p:cSld>
@@ -23549,7 +23549,7 @@
           <p:cNvPr id="53" name="kicker-9">
             <a:extLst xmlns:a="http://schemas.openxmlformats.org/drawingml/2006/main">
               <a:ext uri="{FF2B5EF4-FFF2-40B4-BE49-F238E27FC236}">
-                <a16:creationId xmlns:a16="http://schemas.microsoft.com/office/drawing/2014/main" id="{3BC5C86C-01CE-4F06-AD3B-B79DD3634290}"/>
+                <a16:creationId xmlns:a16="http://schemas.microsoft.com/office/drawing/2014/main" id="{FD4F8904-FDEF-425C-BF0E-468CED389002}"/>
               </a:ext>
             </a:extLst>
           </p:cNvPr>
@@ -23599,7 +23599,7 @@
           <p:cNvPr id="2" name="title-9">
             <a:extLst xmlns:a="http://schemas.openxmlformats.org/drawingml/2006/main">
               <a:ext uri="{FF2B5EF4-FFF2-40B4-BE49-F238E27FC236}">
-                <a16:creationId xmlns:a16="http://schemas.microsoft.com/office/drawing/2014/main" id="{F380AEFB-7786-4CE5-992F-CECBED440441}"/>
+                <a16:creationId xmlns:a16="http://schemas.microsoft.com/office/drawing/2014/main" id="{E7EB26C2-5775-4AB0-B293-137EBE47D67F}"/>
               </a:ext>
             </a:extLst>
           </p:cNvPr>
@@ -23649,7 +23649,7 @@
           <p:cNvPr id="3" name="">
             <a:extLst xmlns:a="http://schemas.openxmlformats.org/drawingml/2006/main">
               <a:ext uri="{FF2B5EF4-FFF2-40B4-BE49-F238E27FC236}">
-                <a16:creationId xmlns:a16="http://schemas.microsoft.com/office/drawing/2014/main" id="{337460D5-A53A-496F-86B0-7BE580604181}"/>
+                <a16:creationId xmlns:a16="http://schemas.microsoft.com/office/drawing/2014/main" id="{A0EB5D59-35D0-4815-A45D-5AAAE1E342F4}"/>
               </a:ext>
             </a:extLst>
           </p:cNvPr>
@@ -23680,7 +23680,7 @@
           <p:cNvPr id="4" name="">
             <a:extLst xmlns:a="http://schemas.openxmlformats.org/drawingml/2006/main">
               <a:ext uri="{FF2B5EF4-FFF2-40B4-BE49-F238E27FC236}">
-                <a16:creationId xmlns:a16="http://schemas.microsoft.com/office/drawing/2014/main" id="{DAEA1017-83A7-42D4-96E2-93123328655D}"/>
+                <a16:creationId xmlns:a16="http://schemas.microsoft.com/office/drawing/2014/main" id="{4B259D92-7CD9-41EC-A78E-9D9F608D8939}"/>
               </a:ext>
             </a:extLst>
           </p:cNvPr>
@@ -23730,7 +23730,7 @@
           <p:cNvPr id="5" name="">
             <a:extLst xmlns:a="http://schemas.openxmlformats.org/drawingml/2006/main">
               <a:ext uri="{FF2B5EF4-FFF2-40B4-BE49-F238E27FC236}">
-                <a16:creationId xmlns:a16="http://schemas.microsoft.com/office/drawing/2014/main" id="{A0A8B68E-592C-4F74-AD45-30B171A293DE}"/>
+                <a16:creationId xmlns:a16="http://schemas.microsoft.com/office/drawing/2014/main" id="{BFFB90A3-84FF-4531-9E8F-5C8823A440B2}"/>
               </a:ext>
             </a:extLst>
           </p:cNvPr>
@@ -23763,7 +23763,7 @@
           <p:cNvPr id="6" name="">
             <a:extLst xmlns:a="http://schemas.openxmlformats.org/drawingml/2006/main">
               <a:ext uri="{FF2B5EF4-FFF2-40B4-BE49-F238E27FC236}">
-                <a16:creationId xmlns:a16="http://schemas.microsoft.com/office/drawing/2014/main" id="{FA18B1B1-CC10-441B-9F74-6FBCB6250F23}"/>
+                <a16:creationId xmlns:a16="http://schemas.microsoft.com/office/drawing/2014/main" id="{9D837823-B34C-463A-AEF5-2C921A493580}"/>
               </a:ext>
             </a:extLst>
           </p:cNvPr>
@@ -23796,7 +23796,7 @@
           <p:cNvPr id="7" name="">
             <a:extLst xmlns:a="http://schemas.openxmlformats.org/drawingml/2006/main">
               <a:ext uri="{FF2B5EF4-FFF2-40B4-BE49-F238E27FC236}">
-                <a16:creationId xmlns:a16="http://schemas.microsoft.com/office/drawing/2014/main" id="{FB2C5FE0-0B3E-4852-8631-30493058145B}"/>
+                <a16:creationId xmlns:a16="http://schemas.microsoft.com/office/drawing/2014/main" id="{3798B6E4-865C-4753-B194-8506BC670E34}"/>
               </a:ext>
             </a:extLst>
           </p:cNvPr>
@@ -23837,7 +23837,7 @@
           <p:cNvPr id="8" name="">
             <a:extLst xmlns:a="http://schemas.openxmlformats.org/drawingml/2006/main">
               <a:ext uri="{FF2B5EF4-FFF2-40B4-BE49-F238E27FC236}">
-                <a16:creationId xmlns:a16="http://schemas.microsoft.com/office/drawing/2014/main" id="{EF32A767-7CC9-4153-A029-88A05DF4109C}"/>
+                <a16:creationId xmlns:a16="http://schemas.microsoft.com/office/drawing/2014/main" id="{4C73B597-FD6E-4FAC-B210-7B5DCF4C5936}"/>
               </a:ext>
             </a:extLst>
           </p:cNvPr>
@@ -23904,7 +23904,7 @@
           <p:cNvPr id="9" name="">
             <a:extLst xmlns:a="http://schemas.openxmlformats.org/drawingml/2006/main">
               <a:ext uri="{FF2B5EF4-FFF2-40B4-BE49-F238E27FC236}">
-                <a16:creationId xmlns:a16="http://schemas.microsoft.com/office/drawing/2014/main" id="{C884DB28-F5EC-4A23-9C11-0DA826561896}"/>
+                <a16:creationId xmlns:a16="http://schemas.microsoft.com/office/drawing/2014/main" id="{8E0C503D-8A45-449A-9505-15B7FDE62E5F}"/>
               </a:ext>
             </a:extLst>
           </p:cNvPr>
@@ -23954,7 +23954,7 @@
           <p:cNvPr id="10" name="">
             <a:extLst xmlns:a="http://schemas.openxmlformats.org/drawingml/2006/main">
               <a:ext uri="{FF2B5EF4-FFF2-40B4-BE49-F238E27FC236}">
-                <a16:creationId xmlns:a16="http://schemas.microsoft.com/office/drawing/2014/main" id="{66719C5E-F4F0-48E6-AAE7-D1961A2B7367}"/>
+                <a16:creationId xmlns:a16="http://schemas.microsoft.com/office/drawing/2014/main" id="{A3CD7114-594C-4C21-B564-93FDD58C0458}"/>
               </a:ext>
             </a:extLst>
           </p:cNvPr>
@@ -24004,7 +24004,7 @@
           <p:cNvPr id="11" name="">
             <a:extLst xmlns:a="http://schemas.openxmlformats.org/drawingml/2006/main">
               <a:ext uri="{FF2B5EF4-FFF2-40B4-BE49-F238E27FC236}">
-                <a16:creationId xmlns:a16="http://schemas.microsoft.com/office/drawing/2014/main" id="{F485C928-9FEC-445B-AAFC-8EE14AF9B619}"/>
+                <a16:creationId xmlns:a16="http://schemas.microsoft.com/office/drawing/2014/main" id="{037399B5-B7E8-4AE0-A434-341B6DF5B1F4}"/>
               </a:ext>
             </a:extLst>
           </p:cNvPr>
@@ -24054,7 +24054,7 @@
           <p:cNvPr id="12" name="">
             <a:extLst xmlns:a="http://schemas.openxmlformats.org/drawingml/2006/main">
               <a:ext uri="{FF2B5EF4-FFF2-40B4-BE49-F238E27FC236}">
-                <a16:creationId xmlns:a16="http://schemas.microsoft.com/office/drawing/2014/main" id="{1D584F27-DEBF-47FD-9625-9987B88F0C2B}"/>
+                <a16:creationId xmlns:a16="http://schemas.microsoft.com/office/drawing/2014/main" id="{539C45A1-5AD9-4752-A7C2-F8C7F5A11A0B}"/>
               </a:ext>
             </a:extLst>
           </p:cNvPr>
@@ -24104,7 +24104,7 @@
           <p:cNvPr id="13" name="">
             <a:extLst xmlns:a="http://schemas.openxmlformats.org/drawingml/2006/main">
               <a:ext uri="{FF2B5EF4-FFF2-40B4-BE49-F238E27FC236}">
-                <a16:creationId xmlns:a16="http://schemas.microsoft.com/office/drawing/2014/main" id="{DC057E7E-B587-41B1-9742-4B325B52D43B}"/>
+                <a16:creationId xmlns:a16="http://schemas.microsoft.com/office/drawing/2014/main" id="{31D9D124-62F9-4D2C-BEBD-08F87079FD45}"/>
               </a:ext>
             </a:extLst>
           </p:cNvPr>
@@ -24154,7 +24154,7 @@
           <p:cNvPr id="14" name="">
             <a:extLst xmlns:a="http://schemas.openxmlformats.org/drawingml/2006/main">
               <a:ext uri="{FF2B5EF4-FFF2-40B4-BE49-F238E27FC236}">
-                <a16:creationId xmlns:a16="http://schemas.microsoft.com/office/drawing/2014/main" id="{547023E5-52D4-4B4D-814E-7B351EF68A9A}"/>
+                <a16:creationId xmlns:a16="http://schemas.microsoft.com/office/drawing/2014/main" id="{26578B0F-E77B-41E4-BCB1-B7966D4397CA}"/>
               </a:ext>
             </a:extLst>
           </p:cNvPr>
@@ -24204,7 +24204,7 @@
           <p:cNvPr id="15" name="">
             <a:extLst xmlns:a="http://schemas.openxmlformats.org/drawingml/2006/main">
               <a:ext uri="{FF2B5EF4-FFF2-40B4-BE49-F238E27FC236}">
-                <a16:creationId xmlns:a16="http://schemas.microsoft.com/office/drawing/2014/main" id="{00997CA3-8F9A-4434-A9B5-25153E4448BD}"/>
+                <a16:creationId xmlns:a16="http://schemas.microsoft.com/office/drawing/2014/main" id="{6110DCF0-0612-42C6-8154-E42FEB27E457}"/>
               </a:ext>
             </a:extLst>
           </p:cNvPr>
@@ -24254,7 +24254,7 @@
           <p:cNvPr id="16" name="">
             <a:extLst xmlns:a="http://schemas.openxmlformats.org/drawingml/2006/main">
               <a:ext uri="{FF2B5EF4-FFF2-40B4-BE49-F238E27FC236}">
-                <a16:creationId xmlns:a16="http://schemas.microsoft.com/office/drawing/2014/main" id="{A98887D4-2D05-4324-B236-63CF83D18087}"/>
+                <a16:creationId xmlns:a16="http://schemas.microsoft.com/office/drawing/2014/main" id="{A712A859-9040-4990-AB35-D8E0D177C8C6}"/>
               </a:ext>
             </a:extLst>
           </p:cNvPr>
@@ -24304,7 +24304,7 @@
           <p:cNvPr id="17" name="">
             <a:extLst xmlns:a="http://schemas.openxmlformats.org/drawingml/2006/main">
               <a:ext uri="{FF2B5EF4-FFF2-40B4-BE49-F238E27FC236}">
-                <a16:creationId xmlns:a16="http://schemas.microsoft.com/office/drawing/2014/main" id="{E5C8266E-E177-4AC4-8681-F809FCD26565}"/>
+                <a16:creationId xmlns:a16="http://schemas.microsoft.com/office/drawing/2014/main" id="{65A3423E-4738-402F-AEDC-C2349387C68A}"/>
               </a:ext>
             </a:extLst>
           </p:cNvPr>
@@ -24354,7 +24354,7 @@
           <p:cNvPr id="18" name="">
             <a:extLst xmlns:a="http://schemas.openxmlformats.org/drawingml/2006/main">
               <a:ext uri="{FF2B5EF4-FFF2-40B4-BE49-F238E27FC236}">
-                <a16:creationId xmlns:a16="http://schemas.microsoft.com/office/drawing/2014/main" id="{E150820B-2419-4ECC-BAED-80A64934D431}"/>
+                <a16:creationId xmlns:a16="http://schemas.microsoft.com/office/drawing/2014/main" id="{2D5A5E45-D642-482A-8DC1-0549C94459D8}"/>
               </a:ext>
             </a:extLst>
           </p:cNvPr>
@@ -24404,7 +24404,7 @@
           <p:cNvPr id="19" name="">
             <a:extLst xmlns:a="http://schemas.openxmlformats.org/drawingml/2006/main">
               <a:ext uri="{FF2B5EF4-FFF2-40B4-BE49-F238E27FC236}">
-                <a16:creationId xmlns:a16="http://schemas.microsoft.com/office/drawing/2014/main" id="{36A801D9-707D-4A7E-B2CB-FCDBA2A95FB3}"/>
+                <a16:creationId xmlns:a16="http://schemas.microsoft.com/office/drawing/2014/main" id="{A90400D4-CD85-42A3-B214-A49FB259DFA1}"/>
               </a:ext>
             </a:extLst>
           </p:cNvPr>
@@ -24454,7 +24454,7 @@
           <p:cNvPr id="20" name="">
             <a:extLst xmlns:a="http://schemas.openxmlformats.org/drawingml/2006/main">
               <a:ext uri="{FF2B5EF4-FFF2-40B4-BE49-F238E27FC236}">
-                <a16:creationId xmlns:a16="http://schemas.microsoft.com/office/drawing/2014/main" id="{8E36B02D-8418-4F80-A80F-6AFC2BBE2BD7}"/>
+                <a16:creationId xmlns:a16="http://schemas.microsoft.com/office/drawing/2014/main" id="{B2D37EA2-B2C7-4956-A8FE-00BC39BF52B5}"/>
               </a:ext>
             </a:extLst>
           </p:cNvPr>
@@ -24504,7 +24504,7 @@
           <p:cNvPr id="21" name="">
             <a:extLst xmlns:a="http://schemas.openxmlformats.org/drawingml/2006/main">
               <a:ext uri="{FF2B5EF4-FFF2-40B4-BE49-F238E27FC236}">
-                <a16:creationId xmlns:a16="http://schemas.microsoft.com/office/drawing/2014/main" id="{7FD832C8-A82A-439C-AFD3-6842CDFF28A3}"/>
+                <a16:creationId xmlns:a16="http://schemas.microsoft.com/office/drawing/2014/main" id="{2A885726-8256-43EC-8312-7EED0137FA10}"/>
               </a:ext>
             </a:extLst>
           </p:cNvPr>
@@ -24554,7 +24554,7 @@
           <p:cNvPr id="22" name="">
             <a:extLst xmlns:a="http://schemas.openxmlformats.org/drawingml/2006/main">
               <a:ext uri="{FF2B5EF4-FFF2-40B4-BE49-F238E27FC236}">
-                <a16:creationId xmlns:a16="http://schemas.microsoft.com/office/drawing/2014/main" id="{028964B9-DF65-4D6F-AD11-2DABDBE471F8}"/>
+                <a16:creationId xmlns:a16="http://schemas.microsoft.com/office/drawing/2014/main" id="{B479C039-487A-4B6D-BBC1-4D55D56A7B4A}"/>
               </a:ext>
             </a:extLst>
           </p:cNvPr>
@@ -24589,7 +24589,7 @@
           <p:cNvPr id="23" name="">
             <a:extLst xmlns:a="http://schemas.openxmlformats.org/drawingml/2006/main">
               <a:ext uri="{FF2B5EF4-FFF2-40B4-BE49-F238E27FC236}">
-                <a16:creationId xmlns:a16="http://schemas.microsoft.com/office/drawing/2014/main" id="{2762DDD1-2086-4901-B0CE-F8DBF03EF2FB}"/>
+                <a16:creationId xmlns:a16="http://schemas.microsoft.com/office/drawing/2014/main" id="{9C3A9493-E36E-4E94-A189-ECF56BA4C7CC}"/>
               </a:ext>
             </a:extLst>
           </p:cNvPr>
@@ -24639,7 +24639,7 @@
           <p:cNvPr id="24" name="">
             <a:extLst xmlns:a="http://schemas.openxmlformats.org/drawingml/2006/main">
               <a:ext uri="{FF2B5EF4-FFF2-40B4-BE49-F238E27FC236}">
-                <a16:creationId xmlns:a16="http://schemas.microsoft.com/office/drawing/2014/main" id="{82778209-24D2-4322-8099-E5AF510B911C}"/>
+                <a16:creationId xmlns:a16="http://schemas.microsoft.com/office/drawing/2014/main" id="{39CECD32-B24A-4DF4-A909-35DA87D37995}"/>
               </a:ext>
             </a:extLst>
           </p:cNvPr>
@@ -24689,7 +24689,7 @@
           <p:cNvPr id="25" name="">
             <a:extLst xmlns:a="http://schemas.openxmlformats.org/drawingml/2006/main">
               <a:ext uri="{FF2B5EF4-FFF2-40B4-BE49-F238E27FC236}">
-                <a16:creationId xmlns:a16="http://schemas.microsoft.com/office/drawing/2014/main" id="{330F11CD-CDC2-4F28-B618-CEA82D989890}"/>
+                <a16:creationId xmlns:a16="http://schemas.microsoft.com/office/drawing/2014/main" id="{0B7EC195-D941-4E15-A6AF-6C80EF179BAB}"/>
               </a:ext>
             </a:extLst>
           </p:cNvPr>
@@ -24739,7 +24739,7 @@
           <p:cNvPr id="26" name="">
             <a:extLst xmlns:a="http://schemas.openxmlformats.org/drawingml/2006/main">
               <a:ext uri="{FF2B5EF4-FFF2-40B4-BE49-F238E27FC236}">
-                <a16:creationId xmlns:a16="http://schemas.microsoft.com/office/drawing/2014/main" id="{310ECF57-AF47-4F79-B087-7308360C6FC9}"/>
+                <a16:creationId xmlns:a16="http://schemas.microsoft.com/office/drawing/2014/main" id="{3FFBB91E-F55A-4964-9480-83AC5BFE1B26}"/>
               </a:ext>
             </a:extLst>
           </p:cNvPr>
@@ -24774,7 +24774,7 @@
           <p:cNvPr id="27" name="">
             <a:extLst xmlns:a="http://schemas.openxmlformats.org/drawingml/2006/main">
               <a:ext uri="{FF2B5EF4-FFF2-40B4-BE49-F238E27FC236}">
-                <a16:creationId xmlns:a16="http://schemas.microsoft.com/office/drawing/2014/main" id="{A585775E-03F6-4D6B-ADFC-D99D0CA62D16}"/>
+                <a16:creationId xmlns:a16="http://schemas.microsoft.com/office/drawing/2014/main" id="{47791DBE-9170-4E0D-8082-95138C83A9A8}"/>
               </a:ext>
             </a:extLst>
           </p:cNvPr>
@@ -24824,7 +24824,7 @@
           <p:cNvPr id="28" name="">
             <a:extLst xmlns:a="http://schemas.openxmlformats.org/drawingml/2006/main">
               <a:ext uri="{FF2B5EF4-FFF2-40B4-BE49-F238E27FC236}">
-                <a16:creationId xmlns:a16="http://schemas.microsoft.com/office/drawing/2014/main" id="{280A77DA-4969-4B5A-AC31-CFD4345AA09B}"/>
+                <a16:creationId xmlns:a16="http://schemas.microsoft.com/office/drawing/2014/main" id="{FE7BCCDA-E71B-4FF5-A836-DFD261B778A9}"/>
               </a:ext>
             </a:extLst>
           </p:cNvPr>
@@ -24874,7 +24874,7 @@
           <p:cNvPr id="29" name="">
             <a:extLst xmlns:a="http://schemas.openxmlformats.org/drawingml/2006/main">
               <a:ext uri="{FF2B5EF4-FFF2-40B4-BE49-F238E27FC236}">
-                <a16:creationId xmlns:a16="http://schemas.microsoft.com/office/drawing/2014/main" id="{4C395AD7-5CF4-4C89-B2B4-AC33D90D0FBD}"/>
+                <a16:creationId xmlns:a16="http://schemas.microsoft.com/office/drawing/2014/main" id="{0F6B292F-19EB-434C-B90B-98EB7607B13D}"/>
               </a:ext>
             </a:extLst>
           </p:cNvPr>
@@ -24924,7 +24924,7 @@
           <p:cNvPr id="30" name="">
             <a:extLst xmlns:a="http://schemas.openxmlformats.org/drawingml/2006/main">
               <a:ext uri="{FF2B5EF4-FFF2-40B4-BE49-F238E27FC236}">
-                <a16:creationId xmlns:a16="http://schemas.microsoft.com/office/drawing/2014/main" id="{B90E1A29-4B0B-4ACE-97FF-3DBB7B6CCAA9}"/>
+                <a16:creationId xmlns:a16="http://schemas.microsoft.com/office/drawing/2014/main" id="{D9215995-2AE3-43C5-A1D6-37CB1CB7ABCF}"/>
               </a:ext>
             </a:extLst>
           </p:cNvPr>
@@ -24959,7 +24959,7 @@
           <p:cNvPr id="31" name="">
             <a:extLst xmlns:a="http://schemas.openxmlformats.org/drawingml/2006/main">
               <a:ext uri="{FF2B5EF4-FFF2-40B4-BE49-F238E27FC236}">
-                <a16:creationId xmlns:a16="http://schemas.microsoft.com/office/drawing/2014/main" id="{B4EF1111-9B56-4681-9FB9-DFDCD4A6C5A7}"/>
+                <a16:creationId xmlns:a16="http://schemas.microsoft.com/office/drawing/2014/main" id="{4224C003-782E-4265-BD94-0998CF314423}"/>
               </a:ext>
             </a:extLst>
           </p:cNvPr>
@@ -25009,7 +25009,7 @@
           <p:cNvPr id="32" name="">
             <a:extLst xmlns:a="http://schemas.openxmlformats.org/drawingml/2006/main">
               <a:ext uri="{FF2B5EF4-FFF2-40B4-BE49-F238E27FC236}">
-                <a16:creationId xmlns:a16="http://schemas.microsoft.com/office/drawing/2014/main" id="{14578A0E-306F-4EC0-B30D-DEBB6CF58A32}"/>
+                <a16:creationId xmlns:a16="http://schemas.microsoft.com/office/drawing/2014/main" id="{3533A3F9-B210-4C8B-9CC8-39C376DDDB0D}"/>
               </a:ext>
             </a:extLst>
           </p:cNvPr>
@@ -25059,7 +25059,7 @@
           <p:cNvPr id="33" name="">
             <a:extLst xmlns:a="http://schemas.openxmlformats.org/drawingml/2006/main">
               <a:ext uri="{FF2B5EF4-FFF2-40B4-BE49-F238E27FC236}">
-                <a16:creationId xmlns:a16="http://schemas.microsoft.com/office/drawing/2014/main" id="{7A76C063-844E-4ABC-88F6-1F2B93367B68}"/>
+                <a16:creationId xmlns:a16="http://schemas.microsoft.com/office/drawing/2014/main" id="{80D4CF0A-7F0B-4D51-A864-63A788D57534}"/>
               </a:ext>
             </a:extLst>
           </p:cNvPr>
@@ -25109,7 +25109,7 @@
           <p:cNvPr id="34" name="">
             <a:extLst xmlns:a="http://schemas.openxmlformats.org/drawingml/2006/main">
               <a:ext uri="{FF2B5EF4-FFF2-40B4-BE49-F238E27FC236}">
-                <a16:creationId xmlns:a16="http://schemas.microsoft.com/office/drawing/2014/main" id="{446B7D57-A7AE-49C5-9556-CB08BAE7634B}"/>
+                <a16:creationId xmlns:a16="http://schemas.microsoft.com/office/drawing/2014/main" id="{F31A5AEB-4924-482C-B0F7-C0A3E10D4AF7}"/>
               </a:ext>
             </a:extLst>
           </p:cNvPr>
@@ -25144,7 +25144,7 @@
           <p:cNvPr id="35" name="">
             <a:extLst xmlns:a="http://schemas.openxmlformats.org/drawingml/2006/main">
               <a:ext uri="{FF2B5EF4-FFF2-40B4-BE49-F238E27FC236}">
-                <a16:creationId xmlns:a16="http://schemas.microsoft.com/office/drawing/2014/main" id="{ED0059BC-9FFC-499A-881F-A9BB2B5A5093}"/>
+                <a16:creationId xmlns:a16="http://schemas.microsoft.com/office/drawing/2014/main" id="{4BA607CD-7F77-4168-9B05-64A1D9CFEDA9}"/>
               </a:ext>
             </a:extLst>
           </p:cNvPr>
@@ -25194,7 +25194,7 @@
           <p:cNvPr id="36" name="">
             <a:extLst xmlns:a="http://schemas.openxmlformats.org/drawingml/2006/main">
               <a:ext uri="{FF2B5EF4-FFF2-40B4-BE49-F238E27FC236}">
-                <a16:creationId xmlns:a16="http://schemas.microsoft.com/office/drawing/2014/main" id="{594BD822-577C-4B2B-BB88-3954EC26AFC1}"/>
+                <a16:creationId xmlns:a16="http://schemas.microsoft.com/office/drawing/2014/main" id="{B014E69B-04A2-4072-8BAA-CE80552DB8BF}"/>
               </a:ext>
             </a:extLst>
           </p:cNvPr>
@@ -25244,7 +25244,7 @@
           <p:cNvPr id="37" name="">
             <a:extLst xmlns:a="http://schemas.openxmlformats.org/drawingml/2006/main">
               <a:ext uri="{FF2B5EF4-FFF2-40B4-BE49-F238E27FC236}">
-                <a16:creationId xmlns:a16="http://schemas.microsoft.com/office/drawing/2014/main" id="{A6ECDE24-C8FD-4E5B-8E23-98B730F253FB}"/>
+                <a16:creationId xmlns:a16="http://schemas.microsoft.com/office/drawing/2014/main" id="{EDDE125B-F49E-435F-9BF6-76B85996B193}"/>
               </a:ext>
             </a:extLst>
           </p:cNvPr>
@@ -25294,7 +25294,7 @@
           <p:cNvPr id="38" name="">
             <a:extLst xmlns:a="http://schemas.openxmlformats.org/drawingml/2006/main">
               <a:ext uri="{FF2B5EF4-FFF2-40B4-BE49-F238E27FC236}">
-                <a16:creationId xmlns:a16="http://schemas.microsoft.com/office/drawing/2014/main" id="{CDE6AC11-9075-4BF8-A0A7-D816E01405A9}"/>
+                <a16:creationId xmlns:a16="http://schemas.microsoft.com/office/drawing/2014/main" id="{90B11AF7-04D8-45F0-8010-678165A0AB62}"/>
               </a:ext>
             </a:extLst>
           </p:cNvPr>
@@ -25344,7 +25344,7 @@
           <p:cNvPr id="39" name="">
             <a:extLst xmlns:a="http://schemas.openxmlformats.org/drawingml/2006/main">
               <a:ext uri="{FF2B5EF4-FFF2-40B4-BE49-F238E27FC236}">
-                <a16:creationId xmlns:a16="http://schemas.microsoft.com/office/drawing/2014/main" id="{083F2F84-1EBD-4E87-BE35-CFAFE4615566}"/>
+                <a16:creationId xmlns:a16="http://schemas.microsoft.com/office/drawing/2014/main" id="{B507EBC2-B869-4B51-86F1-D1A3DAA56D75}"/>
               </a:ext>
             </a:extLst>
           </p:cNvPr>
@@ -25385,7 +25385,7 @@
           <p:cNvPr id="40" name="">
             <a:extLst xmlns:a="http://schemas.openxmlformats.org/drawingml/2006/main">
               <a:ext uri="{FF2B5EF4-FFF2-40B4-BE49-F238E27FC236}">
-                <a16:creationId xmlns:a16="http://schemas.microsoft.com/office/drawing/2014/main" id="{4761D539-521F-4F48-AE5B-7B7198F554FA}"/>
+                <a16:creationId xmlns:a16="http://schemas.microsoft.com/office/drawing/2014/main" id="{6F021255-AA67-465D-8792-FDE63762A1E6}"/>
               </a:ext>
             </a:extLst>
           </p:cNvPr>
@@ -25435,7 +25435,7 @@
           <p:cNvPr id="41" name="">
             <a:extLst xmlns:a="http://schemas.openxmlformats.org/drawingml/2006/main">
               <a:ext uri="{FF2B5EF4-FFF2-40B4-BE49-F238E27FC236}">
-                <a16:creationId xmlns:a16="http://schemas.microsoft.com/office/drawing/2014/main" id="{D5770D95-E125-4A2B-8FE9-FB5B32449DB2}"/>
+                <a16:creationId xmlns:a16="http://schemas.microsoft.com/office/drawing/2014/main" id="{471FC09E-66FF-41AF-B8E5-35D7EC9A5827}"/>
               </a:ext>
             </a:extLst>
           </p:cNvPr>
@@ -25485,7 +25485,7 @@
           <p:cNvPr id="42" name="">
             <a:extLst xmlns:a="http://schemas.openxmlformats.org/drawingml/2006/main">
               <a:ext uri="{FF2B5EF4-FFF2-40B4-BE49-F238E27FC236}">
-                <a16:creationId xmlns:a16="http://schemas.microsoft.com/office/drawing/2014/main" id="{69F4FF3D-95B4-4C89-8EA3-AB4B94118F4C}"/>
+                <a16:creationId xmlns:a16="http://schemas.microsoft.com/office/drawing/2014/main" id="{AA1A7357-AAD5-4C1E-A367-FA1E90AFBB7A}"/>
               </a:ext>
             </a:extLst>
           </p:cNvPr>
@@ -25535,7 +25535,7 @@
           <p:cNvPr id="43" name="">
             <a:extLst xmlns:a="http://schemas.openxmlformats.org/drawingml/2006/main">
               <a:ext uri="{FF2B5EF4-FFF2-40B4-BE49-F238E27FC236}">
-                <a16:creationId xmlns:a16="http://schemas.microsoft.com/office/drawing/2014/main" id="{6C95B36C-41E3-4AF9-A1BE-432BCBD47503}"/>
+                <a16:creationId xmlns:a16="http://schemas.microsoft.com/office/drawing/2014/main" id="{4B29C1E1-4D16-4D12-B6F4-E41042CAE0A7}"/>
               </a:ext>
             </a:extLst>
           </p:cNvPr>
@@ -25585,7 +25585,7 @@
           <p:cNvPr id="44" name="">
             <a:extLst xmlns:a="http://schemas.openxmlformats.org/drawingml/2006/main">
               <a:ext uri="{FF2B5EF4-FFF2-40B4-BE49-F238E27FC236}">
-                <a16:creationId xmlns:a16="http://schemas.microsoft.com/office/drawing/2014/main" id="{75F590CD-D450-4A3D-A1D1-1BEFF57DC03B}"/>
+                <a16:creationId xmlns:a16="http://schemas.microsoft.com/office/drawing/2014/main" id="{BEA81012-4DB7-41DB-ABE6-90915FDF05E3}"/>
               </a:ext>
             </a:extLst>
           </p:cNvPr>
@@ -25635,7 +25635,7 @@
           <p:cNvPr id="45" name="">
             <a:extLst xmlns:a="http://schemas.openxmlformats.org/drawingml/2006/main">
               <a:ext uri="{FF2B5EF4-FFF2-40B4-BE49-F238E27FC236}">
-                <a16:creationId xmlns:a16="http://schemas.microsoft.com/office/drawing/2014/main" id="{D78D40BE-E8C2-41F1-8B0D-BE3ACE2B89A8}"/>
+                <a16:creationId xmlns:a16="http://schemas.microsoft.com/office/drawing/2014/main" id="{D4604A52-3ECC-4B2A-996D-A02F5D678400}"/>
               </a:ext>
             </a:extLst>
           </p:cNvPr>
@@ -25685,7 +25685,7 @@
           <p:cNvPr id="46" name="">
             <a:extLst xmlns:a="http://schemas.openxmlformats.org/drawingml/2006/main">
               <a:ext uri="{FF2B5EF4-FFF2-40B4-BE49-F238E27FC236}">
-                <a16:creationId xmlns:a16="http://schemas.microsoft.com/office/drawing/2014/main" id="{FF995652-32BA-4DF0-BCF9-CC0B1C316ACC}"/>
+                <a16:creationId xmlns:a16="http://schemas.microsoft.com/office/drawing/2014/main" id="{FB2FE8C7-1F9B-4F75-9F60-A2EB22E3582A}"/>
               </a:ext>
             </a:extLst>
           </p:cNvPr>
@@ -25735,7 +25735,7 @@
           <p:cNvPr id="47" name="">
             <a:extLst xmlns:a="http://schemas.openxmlformats.org/drawingml/2006/main">
               <a:ext uri="{FF2B5EF4-FFF2-40B4-BE49-F238E27FC236}">
-                <a16:creationId xmlns:a16="http://schemas.microsoft.com/office/drawing/2014/main" id="{F87C326F-4B13-4290-B19F-13302AB724DB}"/>
+                <a16:creationId xmlns:a16="http://schemas.microsoft.com/office/drawing/2014/main" id="{D24013D8-8175-45F5-AC4D-5F82D3B269C3}"/>
               </a:ext>
             </a:extLst>
           </p:cNvPr>
@@ -25785,7 +25785,7 @@
           <p:cNvPr id="48" name="">
             <a:extLst xmlns:a="http://schemas.openxmlformats.org/drawingml/2006/main">
               <a:ext uri="{FF2B5EF4-FFF2-40B4-BE49-F238E27FC236}">
-                <a16:creationId xmlns:a16="http://schemas.microsoft.com/office/drawing/2014/main" id="{3B54C11C-3B13-41FB-AB03-60352606F8BB}"/>
+                <a16:creationId xmlns:a16="http://schemas.microsoft.com/office/drawing/2014/main" id="{9027CD96-7C4B-4D62-BBA2-5E7C94C384B6}"/>
               </a:ext>
             </a:extLst>
           </p:cNvPr>
@@ -25835,7 +25835,7 @@
           <p:cNvPr id="49" name="">
             <a:extLst xmlns:a="http://schemas.openxmlformats.org/drawingml/2006/main">
               <a:ext uri="{FF2B5EF4-FFF2-40B4-BE49-F238E27FC236}">
-                <a16:creationId xmlns:a16="http://schemas.microsoft.com/office/drawing/2014/main" id="{E238E341-DF5E-41DE-A5EC-7983D06BA07D}"/>
+                <a16:creationId xmlns:a16="http://schemas.microsoft.com/office/drawing/2014/main" id="{54F3827E-5F0C-46F3-A20A-6C80E8825CE6}"/>
               </a:ext>
             </a:extLst>
           </p:cNvPr>
@@ -25885,7 +25885,7 @@
           <p:cNvPr id="50" name="">
             <a:extLst xmlns:a="http://schemas.openxmlformats.org/drawingml/2006/main">
               <a:ext uri="{FF2B5EF4-FFF2-40B4-BE49-F238E27FC236}">
-                <a16:creationId xmlns:a16="http://schemas.microsoft.com/office/drawing/2014/main" id="{3EB0A1F2-4F6C-4ED7-AD53-E134A5C871DC}"/>
+                <a16:creationId xmlns:a16="http://schemas.microsoft.com/office/drawing/2014/main" id="{203DDBB5-0E35-414B-8AAA-F4F2CB33958B}"/>
               </a:ext>
             </a:extLst>
           </p:cNvPr>
@@ -25916,7 +25916,7 @@
           <p:cNvPr id="51" name="source-9">
             <a:extLst xmlns:a="http://schemas.openxmlformats.org/drawingml/2006/main">
               <a:ext uri="{FF2B5EF4-FFF2-40B4-BE49-F238E27FC236}">
-                <a16:creationId xmlns:a16="http://schemas.microsoft.com/office/drawing/2014/main" id="{3AF3CDF5-DFDB-4923-B451-FFE0A0AA6384}"/>
+                <a16:creationId xmlns:a16="http://schemas.microsoft.com/office/drawing/2014/main" id="{A6431AA1-8957-41EB-A43C-F915B8BFB872}"/>
               </a:ext>
             </a:extLst>
           </p:cNvPr>
@@ -25966,7 +25966,7 @@
           <p:cNvPr id="52" name="page-9">
             <a:extLst xmlns:a="http://schemas.openxmlformats.org/drawingml/2006/main">
               <a:ext uri="{FF2B5EF4-FFF2-40B4-BE49-F238E27FC236}">
-                <a16:creationId xmlns:a16="http://schemas.microsoft.com/office/drawing/2014/main" id="{52D82AB4-DD87-4A61-BB33-0F924146164E}"/>
+                <a16:creationId xmlns:a16="http://schemas.microsoft.com/office/drawing/2014/main" id="{E7E35BE0-9965-4622-B65C-4EC702FB9889}"/>
               </a:ext>
             </a:extLst>
           </p:cNvPr>
@@ -26014,7 +26014,7 @@
     </p:spTree>
     <p:extLst>
       <p:ext uri="{BB962C8B-B14F-4D97-AF65-F5344CB8AC3E}">
-        <p14:creationId xmlns:p14="http://schemas.microsoft.com/office/powerpoint/2010/main" val="1341004235"/>
+        <p14:creationId xmlns:p14="http://schemas.microsoft.com/office/powerpoint/2010/main" val="1439275797"/>
       </p:ext>
     </p:extLst>
   </p:cSld>
